--- a/tracepass.pptx
+++ b/tracepass.pptx
@@ -170,7 +170,7 @@
           <p:cNvPr id="2" name="Title 1">
             <a:extLst>
               <a:ext uri="{FF2B5EF4-FFF2-40B4-BE49-F238E27FC236}">
-                <a16:creationId xmlns:a16="http://schemas.microsoft.com/office/drawing/2014/main" xmlns="" id="{2D081F58-7C2D-4280-BB97-0A02CA9618FF}"/>
+                <a16:creationId xmlns="" xmlns:a16="http://schemas.microsoft.com/office/drawing/2014/main" id="{2D081F58-7C2D-4280-BB97-0A02CA9618FF}"/>
               </a:ext>
             </a:extLst>
           </p:cNvPr>
@@ -207,7 +207,7 @@
           <p:cNvPr id="3" name="Subtitle 2">
             <a:extLst>
               <a:ext uri="{FF2B5EF4-FFF2-40B4-BE49-F238E27FC236}">
-                <a16:creationId xmlns:a16="http://schemas.microsoft.com/office/drawing/2014/main" xmlns="" id="{C564D7C6-120B-4306-94AC-AD858E1094DB}"/>
+                <a16:creationId xmlns="" xmlns:a16="http://schemas.microsoft.com/office/drawing/2014/main" id="{C564D7C6-120B-4306-94AC-AD858E1094DB}"/>
               </a:ext>
             </a:extLst>
           </p:cNvPr>
@@ -277,7 +277,7 @@
           <p:cNvPr id="4" name="Date Placeholder 3">
             <a:extLst>
               <a:ext uri="{FF2B5EF4-FFF2-40B4-BE49-F238E27FC236}">
-                <a16:creationId xmlns:a16="http://schemas.microsoft.com/office/drawing/2014/main" xmlns="" id="{A4664D8C-B0E2-49FB-BCE6-5B23FCDC5198}"/>
+                <a16:creationId xmlns="" xmlns:a16="http://schemas.microsoft.com/office/drawing/2014/main" id="{A4664D8C-B0E2-49FB-BCE6-5B23FCDC5198}"/>
               </a:ext>
             </a:extLst>
           </p:cNvPr>
@@ -295,7 +295,7 @@
           <a:p>
             <a:fld id="{18AECACE-579E-4476-86FD-0B80EC2CCB54}" type="datetimeFigureOut">
               <a:rPr lang="en-US" smtClean="0"/>
-              <a:t>8/30/2026</a:t>
+              <a:t>9/2/2026</a:t>
             </a:fld>
             <a:endParaRPr lang="en-US"/>
           </a:p>
@@ -306,7 +306,7 @@
           <p:cNvPr id="5" name="Footer Placeholder 4">
             <a:extLst>
               <a:ext uri="{FF2B5EF4-FFF2-40B4-BE49-F238E27FC236}">
-                <a16:creationId xmlns:a16="http://schemas.microsoft.com/office/drawing/2014/main" xmlns="" id="{84FEC4B8-DD6D-4502-8871-13C6151AF91E}"/>
+                <a16:creationId xmlns="" xmlns:a16="http://schemas.microsoft.com/office/drawing/2014/main" id="{84FEC4B8-DD6D-4502-8871-13C6151AF91E}"/>
               </a:ext>
             </a:extLst>
           </p:cNvPr>
@@ -331,7 +331,7 @@
           <p:cNvPr id="6" name="Slide Number Placeholder 5">
             <a:extLst>
               <a:ext uri="{FF2B5EF4-FFF2-40B4-BE49-F238E27FC236}">
-                <a16:creationId xmlns:a16="http://schemas.microsoft.com/office/drawing/2014/main" xmlns="" id="{54A5062D-BE27-4406-B5B3-1BD098DA1EB0}"/>
+                <a16:creationId xmlns="" xmlns:a16="http://schemas.microsoft.com/office/drawing/2014/main" id="{54A5062D-BE27-4406-B5B3-1BD098DA1EB0}"/>
               </a:ext>
             </a:extLst>
           </p:cNvPr>
@@ -402,7 +402,7 @@
           <p:cNvPr id="2" name="Title 1">
             <a:extLst>
               <a:ext uri="{FF2B5EF4-FFF2-40B4-BE49-F238E27FC236}">
-                <a16:creationId xmlns:a16="http://schemas.microsoft.com/office/drawing/2014/main" xmlns="" id="{EA31E748-EB58-47C7-9A51-CE16A2C5F53F}"/>
+                <a16:creationId xmlns="" xmlns:a16="http://schemas.microsoft.com/office/drawing/2014/main" id="{EA31E748-EB58-47C7-9A51-CE16A2C5F53F}"/>
               </a:ext>
             </a:extLst>
           </p:cNvPr>
@@ -430,7 +430,7 @@
           <p:cNvPr id="3" name="Vertical Text Placeholder 2">
             <a:extLst>
               <a:ext uri="{FF2B5EF4-FFF2-40B4-BE49-F238E27FC236}">
-                <a16:creationId xmlns:a16="http://schemas.microsoft.com/office/drawing/2014/main" xmlns="" id="{772B29E1-57C3-4D45-9070-966306F4F547}"/>
+                <a16:creationId xmlns="" xmlns:a16="http://schemas.microsoft.com/office/drawing/2014/main" id="{772B29E1-57C3-4D45-9070-966306F4F547}"/>
               </a:ext>
             </a:extLst>
           </p:cNvPr>
@@ -487,7 +487,7 @@
           <p:cNvPr id="4" name="Date Placeholder 3">
             <a:extLst>
               <a:ext uri="{FF2B5EF4-FFF2-40B4-BE49-F238E27FC236}">
-                <a16:creationId xmlns:a16="http://schemas.microsoft.com/office/drawing/2014/main" xmlns="" id="{FC5D52DD-38DA-4F5E-AFAB-335D79528D40}"/>
+                <a16:creationId xmlns="" xmlns:a16="http://schemas.microsoft.com/office/drawing/2014/main" id="{FC5D52DD-38DA-4F5E-AFAB-335D79528D40}"/>
               </a:ext>
             </a:extLst>
           </p:cNvPr>
@@ -505,7 +505,7 @@
           <a:p>
             <a:fld id="{18AECACE-579E-4476-86FD-0B80EC2CCB54}" type="datetimeFigureOut">
               <a:rPr lang="en-US" smtClean="0"/>
-              <a:t>8/30/2026</a:t>
+              <a:t>9/2/2026</a:t>
             </a:fld>
             <a:endParaRPr lang="en-US"/>
           </a:p>
@@ -516,7 +516,7 @@
           <p:cNvPr id="5" name="Footer Placeholder 4">
             <a:extLst>
               <a:ext uri="{FF2B5EF4-FFF2-40B4-BE49-F238E27FC236}">
-                <a16:creationId xmlns:a16="http://schemas.microsoft.com/office/drawing/2014/main" xmlns="" id="{3527E62F-766F-4A18-A14B-EA4F47C368AA}"/>
+                <a16:creationId xmlns="" xmlns:a16="http://schemas.microsoft.com/office/drawing/2014/main" id="{3527E62F-766F-4A18-A14B-EA4F47C368AA}"/>
               </a:ext>
             </a:extLst>
           </p:cNvPr>
@@ -541,7 +541,7 @@
           <p:cNvPr id="6" name="Slide Number Placeholder 5">
             <a:extLst>
               <a:ext uri="{FF2B5EF4-FFF2-40B4-BE49-F238E27FC236}">
-                <a16:creationId xmlns:a16="http://schemas.microsoft.com/office/drawing/2014/main" xmlns="" id="{89DE0585-70B0-4567-8ED3-41F9D162474A}"/>
+                <a16:creationId xmlns="" xmlns:a16="http://schemas.microsoft.com/office/drawing/2014/main" id="{89DE0585-70B0-4567-8ED3-41F9D162474A}"/>
               </a:ext>
             </a:extLst>
           </p:cNvPr>
@@ -612,7 +612,7 @@
           <p:cNvPr id="2" name="Vertical Title 1">
             <a:extLst>
               <a:ext uri="{FF2B5EF4-FFF2-40B4-BE49-F238E27FC236}">
-                <a16:creationId xmlns:a16="http://schemas.microsoft.com/office/drawing/2014/main" xmlns="" id="{3FA834C7-0B50-494F-8DC0-9C757C749C77}"/>
+                <a16:creationId xmlns="" xmlns:a16="http://schemas.microsoft.com/office/drawing/2014/main" id="{3FA834C7-0B50-494F-8DC0-9C757C749C77}"/>
               </a:ext>
             </a:extLst>
           </p:cNvPr>
@@ -645,7 +645,7 @@
           <p:cNvPr id="3" name="Vertical Text Placeholder 2">
             <a:extLst>
               <a:ext uri="{FF2B5EF4-FFF2-40B4-BE49-F238E27FC236}">
-                <a16:creationId xmlns:a16="http://schemas.microsoft.com/office/drawing/2014/main" xmlns="" id="{34E5FE2F-E966-4722-B220-C26C9F49C7E2}"/>
+                <a16:creationId xmlns="" xmlns:a16="http://schemas.microsoft.com/office/drawing/2014/main" id="{34E5FE2F-E966-4722-B220-C26C9F49C7E2}"/>
               </a:ext>
             </a:extLst>
           </p:cNvPr>
@@ -707,7 +707,7 @@
           <p:cNvPr id="4" name="Date Placeholder 3">
             <a:extLst>
               <a:ext uri="{FF2B5EF4-FFF2-40B4-BE49-F238E27FC236}">
-                <a16:creationId xmlns:a16="http://schemas.microsoft.com/office/drawing/2014/main" xmlns="" id="{801513CC-D1EB-42D4-967A-C62E586CF2DC}"/>
+                <a16:creationId xmlns="" xmlns:a16="http://schemas.microsoft.com/office/drawing/2014/main" id="{801513CC-D1EB-42D4-967A-C62E586CF2DC}"/>
               </a:ext>
             </a:extLst>
           </p:cNvPr>
@@ -725,7 +725,7 @@
           <a:p>
             <a:fld id="{18AECACE-579E-4476-86FD-0B80EC2CCB54}" type="datetimeFigureOut">
               <a:rPr lang="en-US" smtClean="0"/>
-              <a:t>8/30/2026</a:t>
+              <a:t>9/2/2026</a:t>
             </a:fld>
             <a:endParaRPr lang="en-US"/>
           </a:p>
@@ -736,7 +736,7 @@
           <p:cNvPr id="5" name="Footer Placeholder 4">
             <a:extLst>
               <a:ext uri="{FF2B5EF4-FFF2-40B4-BE49-F238E27FC236}">
-                <a16:creationId xmlns:a16="http://schemas.microsoft.com/office/drawing/2014/main" xmlns="" id="{F0D0B307-19F8-4F4E-932A-E544D2826AAC}"/>
+                <a16:creationId xmlns="" xmlns:a16="http://schemas.microsoft.com/office/drawing/2014/main" id="{F0D0B307-19F8-4F4E-932A-E544D2826AAC}"/>
               </a:ext>
             </a:extLst>
           </p:cNvPr>
@@ -761,7 +761,7 @@
           <p:cNvPr id="6" name="Slide Number Placeholder 5">
             <a:extLst>
               <a:ext uri="{FF2B5EF4-FFF2-40B4-BE49-F238E27FC236}">
-                <a16:creationId xmlns:a16="http://schemas.microsoft.com/office/drawing/2014/main" xmlns="" id="{0286DFD4-67CB-49AE-9912-F332CB0D8992}"/>
+                <a16:creationId xmlns="" xmlns:a16="http://schemas.microsoft.com/office/drawing/2014/main" id="{0286DFD4-67CB-49AE-9912-F332CB0D8992}"/>
               </a:ext>
             </a:extLst>
           </p:cNvPr>
@@ -832,7 +832,7 @@
           <p:cNvPr id="2" name="Title 1">
             <a:extLst>
               <a:ext uri="{FF2B5EF4-FFF2-40B4-BE49-F238E27FC236}">
-                <a16:creationId xmlns:a16="http://schemas.microsoft.com/office/drawing/2014/main" xmlns="" id="{F635C223-15D2-4B2A-AF7A-D5847013EB1A}"/>
+                <a16:creationId xmlns="" xmlns:a16="http://schemas.microsoft.com/office/drawing/2014/main" id="{F635C223-15D2-4B2A-AF7A-D5847013EB1A}"/>
               </a:ext>
             </a:extLst>
           </p:cNvPr>
@@ -860,7 +860,7 @@
           <p:cNvPr id="3" name="Content Placeholder 2">
             <a:extLst>
               <a:ext uri="{FF2B5EF4-FFF2-40B4-BE49-F238E27FC236}">
-                <a16:creationId xmlns:a16="http://schemas.microsoft.com/office/drawing/2014/main" xmlns="" id="{5EA90905-2502-41A2-8FC1-D0597A7F78AE}"/>
+                <a16:creationId xmlns="" xmlns:a16="http://schemas.microsoft.com/office/drawing/2014/main" id="{5EA90905-2502-41A2-8FC1-D0597A7F78AE}"/>
               </a:ext>
             </a:extLst>
           </p:cNvPr>
@@ -917,7 +917,7 @@
           <p:cNvPr id="4" name="Date Placeholder 3">
             <a:extLst>
               <a:ext uri="{FF2B5EF4-FFF2-40B4-BE49-F238E27FC236}">
-                <a16:creationId xmlns:a16="http://schemas.microsoft.com/office/drawing/2014/main" xmlns="" id="{0D9723D2-09F2-4260-8772-54C49AC1B82C}"/>
+                <a16:creationId xmlns="" xmlns:a16="http://schemas.microsoft.com/office/drawing/2014/main" id="{0D9723D2-09F2-4260-8772-54C49AC1B82C}"/>
               </a:ext>
             </a:extLst>
           </p:cNvPr>
@@ -935,7 +935,7 @@
           <a:p>
             <a:fld id="{18AECACE-579E-4476-86FD-0B80EC2CCB54}" type="datetimeFigureOut">
               <a:rPr lang="en-US" smtClean="0"/>
-              <a:t>8/30/2026</a:t>
+              <a:t>9/2/2026</a:t>
             </a:fld>
             <a:endParaRPr lang="en-US"/>
           </a:p>
@@ -946,7 +946,7 @@
           <p:cNvPr id="5" name="Footer Placeholder 4">
             <a:extLst>
               <a:ext uri="{FF2B5EF4-FFF2-40B4-BE49-F238E27FC236}">
-                <a16:creationId xmlns:a16="http://schemas.microsoft.com/office/drawing/2014/main" xmlns="" id="{1995CA89-AA9F-4539-AC2B-45A6F46268AE}"/>
+                <a16:creationId xmlns="" xmlns:a16="http://schemas.microsoft.com/office/drawing/2014/main" id="{1995CA89-AA9F-4539-AC2B-45A6F46268AE}"/>
               </a:ext>
             </a:extLst>
           </p:cNvPr>
@@ -971,7 +971,7 @@
           <p:cNvPr id="6" name="Slide Number Placeholder 5">
             <a:extLst>
               <a:ext uri="{FF2B5EF4-FFF2-40B4-BE49-F238E27FC236}">
-                <a16:creationId xmlns:a16="http://schemas.microsoft.com/office/drawing/2014/main" xmlns="" id="{0CC786EF-D158-4434-8DC7-458FAFF67EF2}"/>
+                <a16:creationId xmlns="" xmlns:a16="http://schemas.microsoft.com/office/drawing/2014/main" id="{0CC786EF-D158-4434-8DC7-458FAFF67EF2}"/>
               </a:ext>
             </a:extLst>
           </p:cNvPr>
@@ -1042,7 +1042,7 @@
           <p:cNvPr id="2" name="Title 1">
             <a:extLst>
               <a:ext uri="{FF2B5EF4-FFF2-40B4-BE49-F238E27FC236}">
-                <a16:creationId xmlns:a16="http://schemas.microsoft.com/office/drawing/2014/main" xmlns="" id="{EA1E1C50-05B9-48B5-9D28-C1066AA14199}"/>
+                <a16:creationId xmlns="" xmlns:a16="http://schemas.microsoft.com/office/drawing/2014/main" id="{EA1E1C50-05B9-48B5-9D28-C1066AA14199}"/>
               </a:ext>
             </a:extLst>
           </p:cNvPr>
@@ -1079,7 +1079,7 @@
           <p:cNvPr id="3" name="Text Placeholder 2">
             <a:extLst>
               <a:ext uri="{FF2B5EF4-FFF2-40B4-BE49-F238E27FC236}">
-                <a16:creationId xmlns:a16="http://schemas.microsoft.com/office/drawing/2014/main" xmlns="" id="{3601A0B6-3387-420B-9F76-4F97FB0965BB}"/>
+                <a16:creationId xmlns="" xmlns:a16="http://schemas.microsoft.com/office/drawing/2014/main" id="{3601A0B6-3387-420B-9F76-4F97FB0965BB}"/>
               </a:ext>
             </a:extLst>
           </p:cNvPr>
@@ -1204,7 +1204,7 @@
           <p:cNvPr id="4" name="Date Placeholder 3">
             <a:extLst>
               <a:ext uri="{FF2B5EF4-FFF2-40B4-BE49-F238E27FC236}">
-                <a16:creationId xmlns:a16="http://schemas.microsoft.com/office/drawing/2014/main" xmlns="" id="{AEBD0868-EFEC-4798-8EBB-C3A6C67231DA}"/>
+                <a16:creationId xmlns="" xmlns:a16="http://schemas.microsoft.com/office/drawing/2014/main" id="{AEBD0868-EFEC-4798-8EBB-C3A6C67231DA}"/>
               </a:ext>
             </a:extLst>
           </p:cNvPr>
@@ -1222,7 +1222,7 @@
           <a:p>
             <a:fld id="{18AECACE-579E-4476-86FD-0B80EC2CCB54}" type="datetimeFigureOut">
               <a:rPr lang="en-US" smtClean="0"/>
-              <a:t>8/30/2026</a:t>
+              <a:t>9/2/2026</a:t>
             </a:fld>
             <a:endParaRPr lang="en-US"/>
           </a:p>
@@ -1233,7 +1233,7 @@
           <p:cNvPr id="5" name="Footer Placeholder 4">
             <a:extLst>
               <a:ext uri="{FF2B5EF4-FFF2-40B4-BE49-F238E27FC236}">
-                <a16:creationId xmlns:a16="http://schemas.microsoft.com/office/drawing/2014/main" xmlns="" id="{C35789F4-8D45-4E0C-82A1-D8556509D5B5}"/>
+                <a16:creationId xmlns="" xmlns:a16="http://schemas.microsoft.com/office/drawing/2014/main" id="{C35789F4-8D45-4E0C-82A1-D8556509D5B5}"/>
               </a:ext>
             </a:extLst>
           </p:cNvPr>
@@ -1258,7 +1258,7 @@
           <p:cNvPr id="6" name="Slide Number Placeholder 5">
             <a:extLst>
               <a:ext uri="{FF2B5EF4-FFF2-40B4-BE49-F238E27FC236}">
-                <a16:creationId xmlns:a16="http://schemas.microsoft.com/office/drawing/2014/main" xmlns="" id="{C3D5BC3E-257A-4365-A360-E565BFDC44C9}"/>
+                <a16:creationId xmlns="" xmlns:a16="http://schemas.microsoft.com/office/drawing/2014/main" id="{C3D5BC3E-257A-4365-A360-E565BFDC44C9}"/>
               </a:ext>
             </a:extLst>
           </p:cNvPr>
@@ -1329,7 +1329,7 @@
           <p:cNvPr id="2" name="Title 1">
             <a:extLst>
               <a:ext uri="{FF2B5EF4-FFF2-40B4-BE49-F238E27FC236}">
-                <a16:creationId xmlns:a16="http://schemas.microsoft.com/office/drawing/2014/main" xmlns="" id="{3FF38DE0-EE9F-4F6F-A52F-791A6949A9C9}"/>
+                <a16:creationId xmlns="" xmlns:a16="http://schemas.microsoft.com/office/drawing/2014/main" id="{3FF38DE0-EE9F-4F6F-A52F-791A6949A9C9}"/>
               </a:ext>
             </a:extLst>
           </p:cNvPr>
@@ -1357,7 +1357,7 @@
           <p:cNvPr id="3" name="Content Placeholder 2">
             <a:extLst>
               <a:ext uri="{FF2B5EF4-FFF2-40B4-BE49-F238E27FC236}">
-                <a16:creationId xmlns:a16="http://schemas.microsoft.com/office/drawing/2014/main" xmlns="" id="{4B44B722-D31A-4884-BCE4-44AD7588D0AA}"/>
+                <a16:creationId xmlns="" xmlns:a16="http://schemas.microsoft.com/office/drawing/2014/main" id="{4B44B722-D31A-4884-BCE4-44AD7588D0AA}"/>
               </a:ext>
             </a:extLst>
           </p:cNvPr>
@@ -1419,7 +1419,7 @@
           <p:cNvPr id="4" name="Content Placeholder 3">
             <a:extLst>
               <a:ext uri="{FF2B5EF4-FFF2-40B4-BE49-F238E27FC236}">
-                <a16:creationId xmlns:a16="http://schemas.microsoft.com/office/drawing/2014/main" xmlns="" id="{F22CB6DE-EE6F-47E1-A633-15C0D81A5869}"/>
+                <a16:creationId xmlns="" xmlns:a16="http://schemas.microsoft.com/office/drawing/2014/main" id="{F22CB6DE-EE6F-47E1-A633-15C0D81A5869}"/>
               </a:ext>
             </a:extLst>
           </p:cNvPr>
@@ -1481,7 +1481,7 @@
           <p:cNvPr id="5" name="Date Placeholder 4">
             <a:extLst>
               <a:ext uri="{FF2B5EF4-FFF2-40B4-BE49-F238E27FC236}">
-                <a16:creationId xmlns:a16="http://schemas.microsoft.com/office/drawing/2014/main" xmlns="" id="{6069AF9E-E8ED-40FF-9133-D94592EFF9BE}"/>
+                <a16:creationId xmlns="" xmlns:a16="http://schemas.microsoft.com/office/drawing/2014/main" id="{6069AF9E-E8ED-40FF-9133-D94592EFF9BE}"/>
               </a:ext>
             </a:extLst>
           </p:cNvPr>
@@ -1499,7 +1499,7 @@
           <a:p>
             <a:fld id="{18AECACE-579E-4476-86FD-0B80EC2CCB54}" type="datetimeFigureOut">
               <a:rPr lang="en-US" smtClean="0"/>
-              <a:t>8/30/2026</a:t>
+              <a:t>9/2/2026</a:t>
             </a:fld>
             <a:endParaRPr lang="en-US"/>
           </a:p>
@@ -1510,7 +1510,7 @@
           <p:cNvPr id="6" name="Footer Placeholder 5">
             <a:extLst>
               <a:ext uri="{FF2B5EF4-FFF2-40B4-BE49-F238E27FC236}">
-                <a16:creationId xmlns:a16="http://schemas.microsoft.com/office/drawing/2014/main" xmlns="" id="{90482086-B7AC-4304-B6A6-5DC35F0D0197}"/>
+                <a16:creationId xmlns="" xmlns:a16="http://schemas.microsoft.com/office/drawing/2014/main" id="{90482086-B7AC-4304-B6A6-5DC35F0D0197}"/>
               </a:ext>
             </a:extLst>
           </p:cNvPr>
@@ -1535,7 +1535,7 @@
           <p:cNvPr id="7" name="Slide Number Placeholder 6">
             <a:extLst>
               <a:ext uri="{FF2B5EF4-FFF2-40B4-BE49-F238E27FC236}">
-                <a16:creationId xmlns:a16="http://schemas.microsoft.com/office/drawing/2014/main" xmlns="" id="{3FE8FA40-F43D-469E-A512-0079EEDAEC9B}"/>
+                <a16:creationId xmlns="" xmlns:a16="http://schemas.microsoft.com/office/drawing/2014/main" id="{3FE8FA40-F43D-469E-A512-0079EEDAEC9B}"/>
               </a:ext>
             </a:extLst>
           </p:cNvPr>
@@ -1606,7 +1606,7 @@
           <p:cNvPr id="2" name="Title 1">
             <a:extLst>
               <a:ext uri="{FF2B5EF4-FFF2-40B4-BE49-F238E27FC236}">
-                <a16:creationId xmlns:a16="http://schemas.microsoft.com/office/drawing/2014/main" xmlns="" id="{D73D0B3B-72E3-4FEF-AC6E-EE89FDAE7D81}"/>
+                <a16:creationId xmlns="" xmlns:a16="http://schemas.microsoft.com/office/drawing/2014/main" id="{D73D0B3B-72E3-4FEF-AC6E-EE89FDAE7D81}"/>
               </a:ext>
             </a:extLst>
           </p:cNvPr>
@@ -1639,7 +1639,7 @@
           <p:cNvPr id="3" name="Text Placeholder 2">
             <a:extLst>
               <a:ext uri="{FF2B5EF4-FFF2-40B4-BE49-F238E27FC236}">
-                <a16:creationId xmlns:a16="http://schemas.microsoft.com/office/drawing/2014/main" xmlns="" id="{6EAFBEAC-0923-4101-8204-CD9FAE1DFE97}"/>
+                <a16:creationId xmlns="" xmlns:a16="http://schemas.microsoft.com/office/drawing/2014/main" id="{6EAFBEAC-0923-4101-8204-CD9FAE1DFE97}"/>
               </a:ext>
             </a:extLst>
           </p:cNvPr>
@@ -1710,7 +1710,7 @@
           <p:cNvPr id="4" name="Content Placeholder 3">
             <a:extLst>
               <a:ext uri="{FF2B5EF4-FFF2-40B4-BE49-F238E27FC236}">
-                <a16:creationId xmlns:a16="http://schemas.microsoft.com/office/drawing/2014/main" xmlns="" id="{BC0A0EDB-665D-4D0E-AF01-1EF1E16EF5C6}"/>
+                <a16:creationId xmlns="" xmlns:a16="http://schemas.microsoft.com/office/drawing/2014/main" id="{BC0A0EDB-665D-4D0E-AF01-1EF1E16EF5C6}"/>
               </a:ext>
             </a:extLst>
           </p:cNvPr>
@@ -1772,7 +1772,7 @@
           <p:cNvPr id="5" name="Text Placeholder 4">
             <a:extLst>
               <a:ext uri="{FF2B5EF4-FFF2-40B4-BE49-F238E27FC236}">
-                <a16:creationId xmlns:a16="http://schemas.microsoft.com/office/drawing/2014/main" xmlns="" id="{1E827D43-A766-4FD8-9670-78193409A6E6}"/>
+                <a16:creationId xmlns="" xmlns:a16="http://schemas.microsoft.com/office/drawing/2014/main" id="{1E827D43-A766-4FD8-9670-78193409A6E6}"/>
               </a:ext>
             </a:extLst>
           </p:cNvPr>
@@ -1843,7 +1843,7 @@
           <p:cNvPr id="6" name="Content Placeholder 5">
             <a:extLst>
               <a:ext uri="{FF2B5EF4-FFF2-40B4-BE49-F238E27FC236}">
-                <a16:creationId xmlns:a16="http://schemas.microsoft.com/office/drawing/2014/main" xmlns="" id="{ABB703E0-A213-4CD6-ADB4-8FD19BC938B5}"/>
+                <a16:creationId xmlns="" xmlns:a16="http://schemas.microsoft.com/office/drawing/2014/main" id="{ABB703E0-A213-4CD6-ADB4-8FD19BC938B5}"/>
               </a:ext>
             </a:extLst>
           </p:cNvPr>
@@ -1905,7 +1905,7 @@
           <p:cNvPr id="7" name="Date Placeholder 6">
             <a:extLst>
               <a:ext uri="{FF2B5EF4-FFF2-40B4-BE49-F238E27FC236}">
-                <a16:creationId xmlns:a16="http://schemas.microsoft.com/office/drawing/2014/main" xmlns="" id="{C056098A-B4A9-419E-8942-6ABBD13B9C0A}"/>
+                <a16:creationId xmlns="" xmlns:a16="http://schemas.microsoft.com/office/drawing/2014/main" id="{C056098A-B4A9-419E-8942-6ABBD13B9C0A}"/>
               </a:ext>
             </a:extLst>
           </p:cNvPr>
@@ -1923,7 +1923,7 @@
           <a:p>
             <a:fld id="{18AECACE-579E-4476-86FD-0B80EC2CCB54}" type="datetimeFigureOut">
               <a:rPr lang="en-US" smtClean="0"/>
-              <a:t>8/30/2026</a:t>
+              <a:t>9/2/2026</a:t>
             </a:fld>
             <a:endParaRPr lang="en-US"/>
           </a:p>
@@ -1934,7 +1934,7 @@
           <p:cNvPr id="8" name="Footer Placeholder 7">
             <a:extLst>
               <a:ext uri="{FF2B5EF4-FFF2-40B4-BE49-F238E27FC236}">
-                <a16:creationId xmlns:a16="http://schemas.microsoft.com/office/drawing/2014/main" xmlns="" id="{E6B938AD-DAD1-4377-A745-62B1F5C21475}"/>
+                <a16:creationId xmlns="" xmlns:a16="http://schemas.microsoft.com/office/drawing/2014/main" id="{E6B938AD-DAD1-4377-A745-62B1F5C21475}"/>
               </a:ext>
             </a:extLst>
           </p:cNvPr>
@@ -1959,7 +1959,7 @@
           <p:cNvPr id="9" name="Slide Number Placeholder 8">
             <a:extLst>
               <a:ext uri="{FF2B5EF4-FFF2-40B4-BE49-F238E27FC236}">
-                <a16:creationId xmlns:a16="http://schemas.microsoft.com/office/drawing/2014/main" xmlns="" id="{8DD94556-DD16-4D60-8C5D-638DB13AFC3B}"/>
+                <a16:creationId xmlns="" xmlns:a16="http://schemas.microsoft.com/office/drawing/2014/main" id="{8DD94556-DD16-4D60-8C5D-638DB13AFC3B}"/>
               </a:ext>
             </a:extLst>
           </p:cNvPr>
@@ -2030,7 +2030,7 @@
           <p:cNvPr id="2" name="Title 1">
             <a:extLst>
               <a:ext uri="{FF2B5EF4-FFF2-40B4-BE49-F238E27FC236}">
-                <a16:creationId xmlns:a16="http://schemas.microsoft.com/office/drawing/2014/main" xmlns="" id="{B94E2B76-1FBE-4926-8439-882D4C504328}"/>
+                <a16:creationId xmlns="" xmlns:a16="http://schemas.microsoft.com/office/drawing/2014/main" id="{B94E2B76-1FBE-4926-8439-882D4C504328}"/>
               </a:ext>
             </a:extLst>
           </p:cNvPr>
@@ -2058,7 +2058,7 @@
           <p:cNvPr id="3" name="Date Placeholder 2">
             <a:extLst>
               <a:ext uri="{FF2B5EF4-FFF2-40B4-BE49-F238E27FC236}">
-                <a16:creationId xmlns:a16="http://schemas.microsoft.com/office/drawing/2014/main" xmlns="" id="{F39ADBAE-EA02-41F3-AEAF-6A1D3DE29E64}"/>
+                <a16:creationId xmlns="" xmlns:a16="http://schemas.microsoft.com/office/drawing/2014/main" id="{F39ADBAE-EA02-41F3-AEAF-6A1D3DE29E64}"/>
               </a:ext>
             </a:extLst>
           </p:cNvPr>
@@ -2076,7 +2076,7 @@
           <a:p>
             <a:fld id="{18AECACE-579E-4476-86FD-0B80EC2CCB54}" type="datetimeFigureOut">
               <a:rPr lang="en-US" smtClean="0"/>
-              <a:t>8/30/2026</a:t>
+              <a:t>9/2/2026</a:t>
             </a:fld>
             <a:endParaRPr lang="en-US"/>
           </a:p>
@@ -2087,7 +2087,7 @@
           <p:cNvPr id="4" name="Footer Placeholder 3">
             <a:extLst>
               <a:ext uri="{FF2B5EF4-FFF2-40B4-BE49-F238E27FC236}">
-                <a16:creationId xmlns:a16="http://schemas.microsoft.com/office/drawing/2014/main" xmlns="" id="{1F236551-251C-4770-8862-42D94C975D67}"/>
+                <a16:creationId xmlns="" xmlns:a16="http://schemas.microsoft.com/office/drawing/2014/main" id="{1F236551-251C-4770-8862-42D94C975D67}"/>
               </a:ext>
             </a:extLst>
           </p:cNvPr>
@@ -2112,7 +2112,7 @@
           <p:cNvPr id="5" name="Slide Number Placeholder 4">
             <a:extLst>
               <a:ext uri="{FF2B5EF4-FFF2-40B4-BE49-F238E27FC236}">
-                <a16:creationId xmlns:a16="http://schemas.microsoft.com/office/drawing/2014/main" xmlns="" id="{3BEBBC59-B761-488F-B8E6-3CF9C192077D}"/>
+                <a16:creationId xmlns="" xmlns:a16="http://schemas.microsoft.com/office/drawing/2014/main" id="{3BEBBC59-B761-488F-B8E6-3CF9C192077D}"/>
               </a:ext>
             </a:extLst>
           </p:cNvPr>
@@ -2183,7 +2183,7 @@
           <p:cNvPr id="2" name="Date Placeholder 1">
             <a:extLst>
               <a:ext uri="{FF2B5EF4-FFF2-40B4-BE49-F238E27FC236}">
-                <a16:creationId xmlns:a16="http://schemas.microsoft.com/office/drawing/2014/main" xmlns="" id="{634FFC06-5215-442A-9C01-C62142119528}"/>
+                <a16:creationId xmlns="" xmlns:a16="http://schemas.microsoft.com/office/drawing/2014/main" id="{634FFC06-5215-442A-9C01-C62142119528}"/>
               </a:ext>
             </a:extLst>
           </p:cNvPr>
@@ -2201,7 +2201,7 @@
           <a:p>
             <a:fld id="{18AECACE-579E-4476-86FD-0B80EC2CCB54}" type="datetimeFigureOut">
               <a:rPr lang="en-US" smtClean="0"/>
-              <a:t>8/30/2026</a:t>
+              <a:t>9/2/2026</a:t>
             </a:fld>
             <a:endParaRPr lang="en-US"/>
           </a:p>
@@ -2212,7 +2212,7 @@
           <p:cNvPr id="3" name="Footer Placeholder 2">
             <a:extLst>
               <a:ext uri="{FF2B5EF4-FFF2-40B4-BE49-F238E27FC236}">
-                <a16:creationId xmlns:a16="http://schemas.microsoft.com/office/drawing/2014/main" xmlns="" id="{D307CCC0-ADF4-4F1B-8F94-A7F940FC5EE1}"/>
+                <a16:creationId xmlns="" xmlns:a16="http://schemas.microsoft.com/office/drawing/2014/main" id="{D307CCC0-ADF4-4F1B-8F94-A7F940FC5EE1}"/>
               </a:ext>
             </a:extLst>
           </p:cNvPr>
@@ -2237,7 +2237,7 @@
           <p:cNvPr id="4" name="Slide Number Placeholder 3">
             <a:extLst>
               <a:ext uri="{FF2B5EF4-FFF2-40B4-BE49-F238E27FC236}">
-                <a16:creationId xmlns:a16="http://schemas.microsoft.com/office/drawing/2014/main" xmlns="" id="{63D9A34F-1E9F-45A7-97AB-EFDF71C77DDA}"/>
+                <a16:creationId xmlns="" xmlns:a16="http://schemas.microsoft.com/office/drawing/2014/main" id="{63D9A34F-1E9F-45A7-97AB-EFDF71C77DDA}"/>
               </a:ext>
             </a:extLst>
           </p:cNvPr>
@@ -2308,7 +2308,7 @@
           <p:cNvPr id="2" name="Title 1">
             <a:extLst>
               <a:ext uri="{FF2B5EF4-FFF2-40B4-BE49-F238E27FC236}">
-                <a16:creationId xmlns:a16="http://schemas.microsoft.com/office/drawing/2014/main" xmlns="" id="{86BAE89F-5D98-487F-B433-6C5FADA50D57}"/>
+                <a16:creationId xmlns="" xmlns:a16="http://schemas.microsoft.com/office/drawing/2014/main" id="{86BAE89F-5D98-487F-B433-6C5FADA50D57}"/>
               </a:ext>
             </a:extLst>
           </p:cNvPr>
@@ -2345,7 +2345,7 @@
           <p:cNvPr id="3" name="Content Placeholder 2">
             <a:extLst>
               <a:ext uri="{FF2B5EF4-FFF2-40B4-BE49-F238E27FC236}">
-                <a16:creationId xmlns:a16="http://schemas.microsoft.com/office/drawing/2014/main" xmlns="" id="{E7136884-7B49-4DED-A411-F14E260584B9}"/>
+                <a16:creationId xmlns="" xmlns:a16="http://schemas.microsoft.com/office/drawing/2014/main" id="{E7136884-7B49-4DED-A411-F14E260584B9}"/>
               </a:ext>
             </a:extLst>
           </p:cNvPr>
@@ -2435,7 +2435,7 @@
           <p:cNvPr id="4" name="Text Placeholder 3">
             <a:extLst>
               <a:ext uri="{FF2B5EF4-FFF2-40B4-BE49-F238E27FC236}">
-                <a16:creationId xmlns:a16="http://schemas.microsoft.com/office/drawing/2014/main" xmlns="" id="{3CB0633A-7D74-499D-9345-26371ED21EFF}"/>
+                <a16:creationId xmlns="" xmlns:a16="http://schemas.microsoft.com/office/drawing/2014/main" id="{3CB0633A-7D74-499D-9345-26371ED21EFF}"/>
               </a:ext>
             </a:extLst>
           </p:cNvPr>
@@ -2506,7 +2506,7 @@
           <p:cNvPr id="5" name="Date Placeholder 4">
             <a:extLst>
               <a:ext uri="{FF2B5EF4-FFF2-40B4-BE49-F238E27FC236}">
-                <a16:creationId xmlns:a16="http://schemas.microsoft.com/office/drawing/2014/main" xmlns="" id="{331AADB5-9996-43E5-BA54-83988153314D}"/>
+                <a16:creationId xmlns="" xmlns:a16="http://schemas.microsoft.com/office/drawing/2014/main" id="{331AADB5-9996-43E5-BA54-83988153314D}"/>
               </a:ext>
             </a:extLst>
           </p:cNvPr>
@@ -2524,7 +2524,7 @@
           <a:p>
             <a:fld id="{18AECACE-579E-4476-86FD-0B80EC2CCB54}" type="datetimeFigureOut">
               <a:rPr lang="en-US" smtClean="0"/>
-              <a:t>8/30/2026</a:t>
+              <a:t>9/2/2026</a:t>
             </a:fld>
             <a:endParaRPr lang="en-US"/>
           </a:p>
@@ -2535,7 +2535,7 @@
           <p:cNvPr id="6" name="Footer Placeholder 5">
             <a:extLst>
               <a:ext uri="{FF2B5EF4-FFF2-40B4-BE49-F238E27FC236}">
-                <a16:creationId xmlns:a16="http://schemas.microsoft.com/office/drawing/2014/main" xmlns="" id="{637A2449-17DF-4A98-83A4-15D4A1D47573}"/>
+                <a16:creationId xmlns="" xmlns:a16="http://schemas.microsoft.com/office/drawing/2014/main" id="{637A2449-17DF-4A98-83A4-15D4A1D47573}"/>
               </a:ext>
             </a:extLst>
           </p:cNvPr>
@@ -2560,7 +2560,7 @@
           <p:cNvPr id="7" name="Slide Number Placeholder 6">
             <a:extLst>
               <a:ext uri="{FF2B5EF4-FFF2-40B4-BE49-F238E27FC236}">
-                <a16:creationId xmlns:a16="http://schemas.microsoft.com/office/drawing/2014/main" xmlns="" id="{22042EF7-BBFA-4017-8373-03429EA50A70}"/>
+                <a16:creationId xmlns="" xmlns:a16="http://schemas.microsoft.com/office/drawing/2014/main" id="{22042EF7-BBFA-4017-8373-03429EA50A70}"/>
               </a:ext>
             </a:extLst>
           </p:cNvPr>
@@ -2631,7 +2631,7 @@
           <p:cNvPr id="2" name="Title 1">
             <a:extLst>
               <a:ext uri="{FF2B5EF4-FFF2-40B4-BE49-F238E27FC236}">
-                <a16:creationId xmlns:a16="http://schemas.microsoft.com/office/drawing/2014/main" xmlns="" id="{B83ADB16-7090-4A4F-9285-983E85892870}"/>
+                <a16:creationId xmlns="" xmlns:a16="http://schemas.microsoft.com/office/drawing/2014/main" id="{B83ADB16-7090-4A4F-9285-983E85892870}"/>
               </a:ext>
             </a:extLst>
           </p:cNvPr>
@@ -2668,7 +2668,7 @@
           <p:cNvPr id="3" name="Picture Placeholder 2">
             <a:extLst>
               <a:ext uri="{FF2B5EF4-FFF2-40B4-BE49-F238E27FC236}">
-                <a16:creationId xmlns:a16="http://schemas.microsoft.com/office/drawing/2014/main" xmlns="" id="{73405E3E-FD7B-466A-A43E-ECAD2D0AF204}"/>
+                <a16:creationId xmlns="" xmlns:a16="http://schemas.microsoft.com/office/drawing/2014/main" id="{73405E3E-FD7B-466A-A43E-ECAD2D0AF204}"/>
               </a:ext>
             </a:extLst>
           </p:cNvPr>
@@ -2735,7 +2735,7 @@
           <p:cNvPr id="4" name="Text Placeholder 3">
             <a:extLst>
               <a:ext uri="{FF2B5EF4-FFF2-40B4-BE49-F238E27FC236}">
-                <a16:creationId xmlns:a16="http://schemas.microsoft.com/office/drawing/2014/main" xmlns="" id="{699FE687-16E1-498C-92B1-66B7AA41BD2C}"/>
+                <a16:creationId xmlns="" xmlns:a16="http://schemas.microsoft.com/office/drawing/2014/main" id="{699FE687-16E1-498C-92B1-66B7AA41BD2C}"/>
               </a:ext>
             </a:extLst>
           </p:cNvPr>
@@ -2806,7 +2806,7 @@
           <p:cNvPr id="5" name="Date Placeholder 4">
             <a:extLst>
               <a:ext uri="{FF2B5EF4-FFF2-40B4-BE49-F238E27FC236}">
-                <a16:creationId xmlns:a16="http://schemas.microsoft.com/office/drawing/2014/main" xmlns="" id="{05FD3835-AF6F-4403-9660-1E9F0D3ACC00}"/>
+                <a16:creationId xmlns="" xmlns:a16="http://schemas.microsoft.com/office/drawing/2014/main" id="{05FD3835-AF6F-4403-9660-1E9F0D3ACC00}"/>
               </a:ext>
             </a:extLst>
           </p:cNvPr>
@@ -2824,7 +2824,7 @@
           <a:p>
             <a:fld id="{18AECACE-579E-4476-86FD-0B80EC2CCB54}" type="datetimeFigureOut">
               <a:rPr lang="en-US" smtClean="0"/>
-              <a:t>8/30/2026</a:t>
+              <a:t>9/2/2026</a:t>
             </a:fld>
             <a:endParaRPr lang="en-US"/>
           </a:p>
@@ -2835,7 +2835,7 @@
           <p:cNvPr id="6" name="Footer Placeholder 5">
             <a:extLst>
               <a:ext uri="{FF2B5EF4-FFF2-40B4-BE49-F238E27FC236}">
-                <a16:creationId xmlns:a16="http://schemas.microsoft.com/office/drawing/2014/main" xmlns="" id="{1378E631-A4C0-4A0A-B23D-769FB7478AE2}"/>
+                <a16:creationId xmlns="" xmlns:a16="http://schemas.microsoft.com/office/drawing/2014/main" id="{1378E631-A4C0-4A0A-B23D-769FB7478AE2}"/>
               </a:ext>
             </a:extLst>
           </p:cNvPr>
@@ -2860,7 +2860,7 @@
           <p:cNvPr id="7" name="Slide Number Placeholder 6">
             <a:extLst>
               <a:ext uri="{FF2B5EF4-FFF2-40B4-BE49-F238E27FC236}">
-                <a16:creationId xmlns:a16="http://schemas.microsoft.com/office/drawing/2014/main" xmlns="" id="{A74ACE54-352F-4668-A5A2-407D0D54B754}"/>
+                <a16:creationId xmlns="" xmlns:a16="http://schemas.microsoft.com/office/drawing/2014/main" id="{A74ACE54-352F-4668-A5A2-407D0D54B754}"/>
               </a:ext>
             </a:extLst>
           </p:cNvPr>
@@ -2936,7 +2936,7 @@
           <p:cNvPr id="2" name="Title Placeholder 1">
             <a:extLst>
               <a:ext uri="{FF2B5EF4-FFF2-40B4-BE49-F238E27FC236}">
-                <a16:creationId xmlns:a16="http://schemas.microsoft.com/office/drawing/2014/main" xmlns="" id="{A90584BB-B85E-405F-9444-CBEB0CD6869E}"/>
+                <a16:creationId xmlns="" xmlns:a16="http://schemas.microsoft.com/office/drawing/2014/main" id="{A90584BB-B85E-405F-9444-CBEB0CD6869E}"/>
               </a:ext>
             </a:extLst>
           </p:cNvPr>
@@ -2974,7 +2974,7 @@
           <p:cNvPr id="3" name="Text Placeholder 2">
             <a:extLst>
               <a:ext uri="{FF2B5EF4-FFF2-40B4-BE49-F238E27FC236}">
-                <a16:creationId xmlns:a16="http://schemas.microsoft.com/office/drawing/2014/main" xmlns="" id="{4498B3B5-C0CD-4B7A-9606-7CB1734AD232}"/>
+                <a16:creationId xmlns="" xmlns:a16="http://schemas.microsoft.com/office/drawing/2014/main" id="{4498B3B5-C0CD-4B7A-9606-7CB1734AD232}"/>
               </a:ext>
             </a:extLst>
           </p:cNvPr>
@@ -3041,7 +3041,7 @@
           <p:cNvPr id="4" name="Date Placeholder 3">
             <a:extLst>
               <a:ext uri="{FF2B5EF4-FFF2-40B4-BE49-F238E27FC236}">
-                <a16:creationId xmlns:a16="http://schemas.microsoft.com/office/drawing/2014/main" xmlns="" id="{90A4E543-A2EF-47D8-B0F4-94C115BE9B03}"/>
+                <a16:creationId xmlns="" xmlns:a16="http://schemas.microsoft.com/office/drawing/2014/main" id="{90A4E543-A2EF-47D8-B0F4-94C115BE9B03}"/>
               </a:ext>
             </a:extLst>
           </p:cNvPr>
@@ -3077,7 +3077,7 @@
           <a:p>
             <a:fld id="{18AECACE-579E-4476-86FD-0B80EC2CCB54}" type="datetimeFigureOut">
               <a:rPr lang="en-US" smtClean="0"/>
-              <a:t>8/30/2026</a:t>
+              <a:t>9/2/2026</a:t>
             </a:fld>
             <a:endParaRPr lang="en-US"/>
           </a:p>
@@ -3088,7 +3088,7 @@
           <p:cNvPr id="5" name="Footer Placeholder 4">
             <a:extLst>
               <a:ext uri="{FF2B5EF4-FFF2-40B4-BE49-F238E27FC236}">
-                <a16:creationId xmlns:a16="http://schemas.microsoft.com/office/drawing/2014/main" xmlns="" id="{DB441F80-E827-4EF4-94DA-982E2516DB50}"/>
+                <a16:creationId xmlns="" xmlns:a16="http://schemas.microsoft.com/office/drawing/2014/main" id="{DB441F80-E827-4EF4-94DA-982E2516DB50}"/>
               </a:ext>
             </a:extLst>
           </p:cNvPr>
@@ -3131,7 +3131,7 @@
           <p:cNvPr id="6" name="Slide Number Placeholder 5">
             <a:extLst>
               <a:ext uri="{FF2B5EF4-FFF2-40B4-BE49-F238E27FC236}">
-                <a16:creationId xmlns:a16="http://schemas.microsoft.com/office/drawing/2014/main" xmlns="" id="{C18AD799-5075-425C-AD8B-685FE18175A3}"/>
+                <a16:creationId xmlns="" xmlns:a16="http://schemas.microsoft.com/office/drawing/2014/main" id="{C18AD799-5075-425C-AD8B-685FE18175A3}"/>
               </a:ext>
             </a:extLst>
           </p:cNvPr>
@@ -3511,7 +3511,7 @@
           <p:cNvPr id="5" name="Rectangle 4">
             <a:extLst>
               <a:ext uri="{FF2B5EF4-FFF2-40B4-BE49-F238E27FC236}">
-                <a16:creationId xmlns:a16="http://schemas.microsoft.com/office/drawing/2014/main" xmlns="" id="{05762603-B584-39F8-05AB-3AE5497AB247}"/>
+                <a16:creationId xmlns="" xmlns:a16="http://schemas.microsoft.com/office/drawing/2014/main" id="{05762603-B584-39F8-05AB-3AE5497AB247}"/>
               </a:ext>
             </a:extLst>
           </p:cNvPr>
@@ -3557,7 +3557,7 @@
           <p:cNvPr id="4" name="Rectangle 3">
             <a:extLst>
               <a:ext uri="{FF2B5EF4-FFF2-40B4-BE49-F238E27FC236}">
-                <a16:creationId xmlns:a16="http://schemas.microsoft.com/office/drawing/2014/main" xmlns="" id="{C21AE904-339E-735F-38EB-2F73F9D90ADD}"/>
+                <a16:creationId xmlns="" xmlns:a16="http://schemas.microsoft.com/office/drawing/2014/main" id="{C21AE904-339E-735F-38EB-2F73F9D90ADD}"/>
               </a:ext>
             </a:extLst>
           </p:cNvPr>
@@ -4043,7 +4043,7 @@
           <p:cNvPr id="6" name="Oval 5">
             <a:extLst>
               <a:ext uri="{FF2B5EF4-FFF2-40B4-BE49-F238E27FC236}">
-                <a16:creationId xmlns:a16="http://schemas.microsoft.com/office/drawing/2014/main" xmlns="" id="{63EA8D2E-A862-1E65-BE5B-1CC849129310}"/>
+                <a16:creationId xmlns="" xmlns:a16="http://schemas.microsoft.com/office/drawing/2014/main" id="{63EA8D2E-A862-1E65-BE5B-1CC849129310}"/>
               </a:ext>
             </a:extLst>
           </p:cNvPr>
@@ -4102,7 +4102,7 @@
           <p:cNvPr id="7" name="Oval 6">
             <a:extLst>
               <a:ext uri="{FF2B5EF4-FFF2-40B4-BE49-F238E27FC236}">
-                <a16:creationId xmlns:a16="http://schemas.microsoft.com/office/drawing/2014/main" xmlns="" id="{87563D42-811B-AB94-68B2-1654AA39FC59}"/>
+                <a16:creationId xmlns="" xmlns:a16="http://schemas.microsoft.com/office/drawing/2014/main" id="{87563D42-811B-AB94-68B2-1654AA39FC59}"/>
               </a:ext>
             </a:extLst>
           </p:cNvPr>
@@ -4161,7 +4161,7 @@
           <p:cNvPr id="8" name="Oval 7">
             <a:extLst>
               <a:ext uri="{FF2B5EF4-FFF2-40B4-BE49-F238E27FC236}">
-                <a16:creationId xmlns:a16="http://schemas.microsoft.com/office/drawing/2014/main" xmlns="" id="{1BED4EDE-854B-3FD8-B0BE-284C37A7E564}"/>
+                <a16:creationId xmlns="" xmlns:a16="http://schemas.microsoft.com/office/drawing/2014/main" id="{1BED4EDE-854B-3FD8-B0BE-284C37A7E564}"/>
               </a:ext>
             </a:extLst>
           </p:cNvPr>
@@ -4220,7 +4220,7 @@
           <p:cNvPr id="9" name="Oval 8">
             <a:extLst>
               <a:ext uri="{FF2B5EF4-FFF2-40B4-BE49-F238E27FC236}">
-                <a16:creationId xmlns:a16="http://schemas.microsoft.com/office/drawing/2014/main" xmlns="" id="{F4C619DF-9601-D17B-9F1B-1AD73FFAEF03}"/>
+                <a16:creationId xmlns="" xmlns:a16="http://schemas.microsoft.com/office/drawing/2014/main" id="{F4C619DF-9601-D17B-9F1B-1AD73FFAEF03}"/>
               </a:ext>
             </a:extLst>
           </p:cNvPr>
@@ -4279,7 +4279,7 @@
           <p:cNvPr id="10" name="Oval 9">
             <a:extLst>
               <a:ext uri="{FF2B5EF4-FFF2-40B4-BE49-F238E27FC236}">
-                <a16:creationId xmlns:a16="http://schemas.microsoft.com/office/drawing/2014/main" xmlns="" id="{DA6E173B-01D5-5C71-795C-E52A41FB3D27}"/>
+                <a16:creationId xmlns="" xmlns:a16="http://schemas.microsoft.com/office/drawing/2014/main" id="{DA6E173B-01D5-5C71-795C-E52A41FB3D27}"/>
               </a:ext>
             </a:extLst>
           </p:cNvPr>
@@ -4338,7 +4338,7 @@
           <p:cNvPr id="11" name="Oval 10">
             <a:extLst>
               <a:ext uri="{FF2B5EF4-FFF2-40B4-BE49-F238E27FC236}">
-                <a16:creationId xmlns:a16="http://schemas.microsoft.com/office/drawing/2014/main" xmlns="" id="{C0E14360-0068-716B-C5D7-61FC97CF53DF}"/>
+                <a16:creationId xmlns="" xmlns:a16="http://schemas.microsoft.com/office/drawing/2014/main" id="{C0E14360-0068-716B-C5D7-61FC97CF53DF}"/>
               </a:ext>
             </a:extLst>
           </p:cNvPr>
@@ -4397,7 +4397,7 @@
           <p:cNvPr id="12" name="Oval 11">
             <a:extLst>
               <a:ext uri="{FF2B5EF4-FFF2-40B4-BE49-F238E27FC236}">
-                <a16:creationId xmlns:a16="http://schemas.microsoft.com/office/drawing/2014/main" xmlns="" id="{53EA44FD-BB48-502C-CEE9-745038CDB078}"/>
+                <a16:creationId xmlns="" xmlns:a16="http://schemas.microsoft.com/office/drawing/2014/main" id="{53EA44FD-BB48-502C-CEE9-745038CDB078}"/>
               </a:ext>
             </a:extLst>
           </p:cNvPr>
@@ -4456,7 +4456,7 @@
           <p:cNvPr id="13" name="Oval 12">
             <a:extLst>
               <a:ext uri="{FF2B5EF4-FFF2-40B4-BE49-F238E27FC236}">
-                <a16:creationId xmlns:a16="http://schemas.microsoft.com/office/drawing/2014/main" xmlns="" id="{A7113529-1533-5B8E-4911-2C77F23B0116}"/>
+                <a16:creationId xmlns="" xmlns:a16="http://schemas.microsoft.com/office/drawing/2014/main" id="{A7113529-1533-5B8E-4911-2C77F23B0116}"/>
               </a:ext>
             </a:extLst>
           </p:cNvPr>
@@ -4515,7 +4515,7 @@
           <p:cNvPr id="14" name="Oval 13">
             <a:extLst>
               <a:ext uri="{FF2B5EF4-FFF2-40B4-BE49-F238E27FC236}">
-                <a16:creationId xmlns:a16="http://schemas.microsoft.com/office/drawing/2014/main" xmlns="" id="{CAF5B65D-7E89-E6E7-7F6A-34108CD78884}"/>
+                <a16:creationId xmlns="" xmlns:a16="http://schemas.microsoft.com/office/drawing/2014/main" id="{CAF5B65D-7E89-E6E7-7F6A-34108CD78884}"/>
               </a:ext>
             </a:extLst>
           </p:cNvPr>
@@ -4574,7 +4574,7 @@
           <p:cNvPr id="15" name="Oval 14">
             <a:extLst>
               <a:ext uri="{FF2B5EF4-FFF2-40B4-BE49-F238E27FC236}">
-                <a16:creationId xmlns:a16="http://schemas.microsoft.com/office/drawing/2014/main" xmlns="" id="{8CA19B4C-8D07-82AA-1F4A-BE963EAADD78}"/>
+                <a16:creationId xmlns="" xmlns:a16="http://schemas.microsoft.com/office/drawing/2014/main" id="{8CA19B4C-8D07-82AA-1F4A-BE963EAADD78}"/>
               </a:ext>
             </a:extLst>
           </p:cNvPr>
@@ -4633,7 +4633,7 @@
           <p:cNvPr id="16" name="Oval 15">
             <a:extLst>
               <a:ext uri="{FF2B5EF4-FFF2-40B4-BE49-F238E27FC236}">
-                <a16:creationId xmlns:a16="http://schemas.microsoft.com/office/drawing/2014/main" xmlns="" id="{BC936A63-2049-E622-B884-DC071A2B8884}"/>
+                <a16:creationId xmlns="" xmlns:a16="http://schemas.microsoft.com/office/drawing/2014/main" id="{BC936A63-2049-E622-B884-DC071A2B8884}"/>
               </a:ext>
             </a:extLst>
           </p:cNvPr>
@@ -4692,7 +4692,7 @@
           <p:cNvPr id="17" name="Oval 16">
             <a:extLst>
               <a:ext uri="{FF2B5EF4-FFF2-40B4-BE49-F238E27FC236}">
-                <a16:creationId xmlns:a16="http://schemas.microsoft.com/office/drawing/2014/main" xmlns="" id="{86876C4B-5A74-BC8C-C122-CD06B79EF306}"/>
+                <a16:creationId xmlns="" xmlns:a16="http://schemas.microsoft.com/office/drawing/2014/main" id="{86876C4B-5A74-BC8C-C122-CD06B79EF306}"/>
               </a:ext>
             </a:extLst>
           </p:cNvPr>
@@ -4751,7 +4751,7 @@
           <p:cNvPr id="18" name="Oval 17">
             <a:extLst>
               <a:ext uri="{FF2B5EF4-FFF2-40B4-BE49-F238E27FC236}">
-                <a16:creationId xmlns:a16="http://schemas.microsoft.com/office/drawing/2014/main" xmlns="" id="{664BDA3D-A703-9C1B-78CD-8A86C01A1406}"/>
+                <a16:creationId xmlns="" xmlns:a16="http://schemas.microsoft.com/office/drawing/2014/main" id="{664BDA3D-A703-9C1B-78CD-8A86C01A1406}"/>
               </a:ext>
             </a:extLst>
           </p:cNvPr>
@@ -4810,7 +4810,7 @@
           <p:cNvPr id="19" name="Oval 18">
             <a:extLst>
               <a:ext uri="{FF2B5EF4-FFF2-40B4-BE49-F238E27FC236}">
-                <a16:creationId xmlns:a16="http://schemas.microsoft.com/office/drawing/2014/main" xmlns="" id="{8F59511C-41C7-9994-1D21-B977BB5A8A5E}"/>
+                <a16:creationId xmlns="" xmlns:a16="http://schemas.microsoft.com/office/drawing/2014/main" id="{8F59511C-41C7-9994-1D21-B977BB5A8A5E}"/>
               </a:ext>
             </a:extLst>
           </p:cNvPr>
@@ -4869,7 +4869,7 @@
           <p:cNvPr id="20" name="Oval 19">
             <a:extLst>
               <a:ext uri="{FF2B5EF4-FFF2-40B4-BE49-F238E27FC236}">
-                <a16:creationId xmlns:a16="http://schemas.microsoft.com/office/drawing/2014/main" xmlns="" id="{694B00A7-091B-FDC4-4378-1BB1AAB6DA7D}"/>
+                <a16:creationId xmlns="" xmlns:a16="http://schemas.microsoft.com/office/drawing/2014/main" id="{694B00A7-091B-FDC4-4378-1BB1AAB6DA7D}"/>
               </a:ext>
             </a:extLst>
           </p:cNvPr>
@@ -4928,7 +4928,7 @@
           <p:cNvPr id="21" name="Oval 20">
             <a:extLst>
               <a:ext uri="{FF2B5EF4-FFF2-40B4-BE49-F238E27FC236}">
-                <a16:creationId xmlns:a16="http://schemas.microsoft.com/office/drawing/2014/main" xmlns="" id="{1BA1FF37-DE01-2432-085B-E4B299C5EB40}"/>
+                <a16:creationId xmlns="" xmlns:a16="http://schemas.microsoft.com/office/drawing/2014/main" id="{1BA1FF37-DE01-2432-085B-E4B299C5EB40}"/>
               </a:ext>
             </a:extLst>
           </p:cNvPr>
@@ -4987,7 +4987,7 @@
           <p:cNvPr id="22" name="Oval 21">
             <a:extLst>
               <a:ext uri="{FF2B5EF4-FFF2-40B4-BE49-F238E27FC236}">
-                <a16:creationId xmlns:a16="http://schemas.microsoft.com/office/drawing/2014/main" xmlns="" id="{52064E6F-6813-D93E-64FF-B9D4C9C1F144}"/>
+                <a16:creationId xmlns="" xmlns:a16="http://schemas.microsoft.com/office/drawing/2014/main" id="{52064E6F-6813-D93E-64FF-B9D4C9C1F144}"/>
               </a:ext>
             </a:extLst>
           </p:cNvPr>
@@ -5046,7 +5046,7 @@
           <p:cNvPr id="23" name="Oval 22">
             <a:extLst>
               <a:ext uri="{FF2B5EF4-FFF2-40B4-BE49-F238E27FC236}">
-                <a16:creationId xmlns:a16="http://schemas.microsoft.com/office/drawing/2014/main" xmlns="" id="{713462B9-B175-4672-6D40-2F7838DC553E}"/>
+                <a16:creationId xmlns="" xmlns:a16="http://schemas.microsoft.com/office/drawing/2014/main" id="{713462B9-B175-4672-6D40-2F7838DC553E}"/>
               </a:ext>
             </a:extLst>
           </p:cNvPr>
@@ -5105,7 +5105,7 @@
           <p:cNvPr id="24" name="Oval 23">
             <a:extLst>
               <a:ext uri="{FF2B5EF4-FFF2-40B4-BE49-F238E27FC236}">
-                <a16:creationId xmlns:a16="http://schemas.microsoft.com/office/drawing/2014/main" xmlns="" id="{82CE041C-8CAA-6CBD-1393-728D1D9DED5D}"/>
+                <a16:creationId xmlns="" xmlns:a16="http://schemas.microsoft.com/office/drawing/2014/main" id="{82CE041C-8CAA-6CBD-1393-728D1D9DED5D}"/>
               </a:ext>
             </a:extLst>
           </p:cNvPr>
@@ -5164,7 +5164,7 @@
           <p:cNvPr id="25" name="Oval 24">
             <a:extLst>
               <a:ext uri="{FF2B5EF4-FFF2-40B4-BE49-F238E27FC236}">
-                <a16:creationId xmlns:a16="http://schemas.microsoft.com/office/drawing/2014/main" xmlns="" id="{97006CEE-C93E-68A9-E29E-D42C3441930F}"/>
+                <a16:creationId xmlns="" xmlns:a16="http://schemas.microsoft.com/office/drawing/2014/main" id="{97006CEE-C93E-68A9-E29E-D42C3441930F}"/>
               </a:ext>
             </a:extLst>
           </p:cNvPr>
@@ -5223,7 +5223,7 @@
           <p:cNvPr id="26" name="Oval 25">
             <a:extLst>
               <a:ext uri="{FF2B5EF4-FFF2-40B4-BE49-F238E27FC236}">
-                <a16:creationId xmlns:a16="http://schemas.microsoft.com/office/drawing/2014/main" xmlns="" id="{0C4A8885-A76F-EDE3-EB36-E79533DDCBF4}"/>
+                <a16:creationId xmlns="" xmlns:a16="http://schemas.microsoft.com/office/drawing/2014/main" id="{0C4A8885-A76F-EDE3-EB36-E79533DDCBF4}"/>
               </a:ext>
             </a:extLst>
           </p:cNvPr>
@@ -5282,7 +5282,7 @@
           <p:cNvPr id="27" name="Oval 26">
             <a:extLst>
               <a:ext uri="{FF2B5EF4-FFF2-40B4-BE49-F238E27FC236}">
-                <a16:creationId xmlns:a16="http://schemas.microsoft.com/office/drawing/2014/main" xmlns="" id="{4D6A244D-C37F-8EA9-D320-66C3F301DAA2}"/>
+                <a16:creationId xmlns="" xmlns:a16="http://schemas.microsoft.com/office/drawing/2014/main" id="{4D6A244D-C37F-8EA9-D320-66C3F301DAA2}"/>
               </a:ext>
             </a:extLst>
           </p:cNvPr>
@@ -5341,7 +5341,7 @@
           <p:cNvPr id="28" name="Oval 27">
             <a:extLst>
               <a:ext uri="{FF2B5EF4-FFF2-40B4-BE49-F238E27FC236}">
-                <a16:creationId xmlns:a16="http://schemas.microsoft.com/office/drawing/2014/main" xmlns="" id="{D3EB1046-0243-7978-6626-819909534D31}"/>
+                <a16:creationId xmlns="" xmlns:a16="http://schemas.microsoft.com/office/drawing/2014/main" id="{D3EB1046-0243-7978-6626-819909534D31}"/>
               </a:ext>
             </a:extLst>
           </p:cNvPr>
@@ -5400,7 +5400,7 @@
           <p:cNvPr id="29" name="Oval 28">
             <a:extLst>
               <a:ext uri="{FF2B5EF4-FFF2-40B4-BE49-F238E27FC236}">
-                <a16:creationId xmlns:a16="http://schemas.microsoft.com/office/drawing/2014/main" xmlns="" id="{2BEE75EF-6BCD-26AF-ACF6-78A3DB789DFF}"/>
+                <a16:creationId xmlns="" xmlns:a16="http://schemas.microsoft.com/office/drawing/2014/main" id="{2BEE75EF-6BCD-26AF-ACF6-78A3DB789DFF}"/>
               </a:ext>
             </a:extLst>
           </p:cNvPr>
@@ -5459,7 +5459,7 @@
           <p:cNvPr id="30" name="Arc 29">
             <a:extLst>
               <a:ext uri="{FF2B5EF4-FFF2-40B4-BE49-F238E27FC236}">
-                <a16:creationId xmlns:a16="http://schemas.microsoft.com/office/drawing/2014/main" xmlns="" id="{2DEE4B5C-F0BE-F5F9-9014-424465A15603}"/>
+                <a16:creationId xmlns="" xmlns:a16="http://schemas.microsoft.com/office/drawing/2014/main" id="{2DEE4B5C-F0BE-F5F9-9014-424465A15603}"/>
               </a:ext>
             </a:extLst>
           </p:cNvPr>
@@ -5511,7 +5511,7 @@
           <p:cNvPr id="31" name="Arc 30">
             <a:extLst>
               <a:ext uri="{FF2B5EF4-FFF2-40B4-BE49-F238E27FC236}">
-                <a16:creationId xmlns:a16="http://schemas.microsoft.com/office/drawing/2014/main" xmlns="" id="{B5D3283F-5669-F54B-E3DB-36BEC0A2FC87}"/>
+                <a16:creationId xmlns="" xmlns:a16="http://schemas.microsoft.com/office/drawing/2014/main" id="{B5D3283F-5669-F54B-E3DB-36BEC0A2FC87}"/>
               </a:ext>
             </a:extLst>
           </p:cNvPr>
@@ -5563,7 +5563,7 @@
           <p:cNvPr id="32" name="Arc 31">
             <a:extLst>
               <a:ext uri="{FF2B5EF4-FFF2-40B4-BE49-F238E27FC236}">
-                <a16:creationId xmlns:a16="http://schemas.microsoft.com/office/drawing/2014/main" xmlns="" id="{F5319C07-D47D-D9B8-5314-CABDE70BD2BE}"/>
+                <a16:creationId xmlns="" xmlns:a16="http://schemas.microsoft.com/office/drawing/2014/main" id="{F5319C07-D47D-D9B8-5314-CABDE70BD2BE}"/>
               </a:ext>
             </a:extLst>
           </p:cNvPr>
@@ -5615,7 +5615,7 @@
           <p:cNvPr id="33" name="Arc 32">
             <a:extLst>
               <a:ext uri="{FF2B5EF4-FFF2-40B4-BE49-F238E27FC236}">
-                <a16:creationId xmlns:a16="http://schemas.microsoft.com/office/drawing/2014/main" xmlns="" id="{9701BAE2-0B11-9B44-A82F-D00093499F94}"/>
+                <a16:creationId xmlns="" xmlns:a16="http://schemas.microsoft.com/office/drawing/2014/main" id="{9701BAE2-0B11-9B44-A82F-D00093499F94}"/>
               </a:ext>
             </a:extLst>
           </p:cNvPr>
@@ -5667,7 +5667,7 @@
           <p:cNvPr id="34" name="Arc 33">
             <a:extLst>
               <a:ext uri="{FF2B5EF4-FFF2-40B4-BE49-F238E27FC236}">
-                <a16:creationId xmlns:a16="http://schemas.microsoft.com/office/drawing/2014/main" xmlns="" id="{EDA5E984-37A1-D71F-0F67-3278A9477939}"/>
+                <a16:creationId xmlns="" xmlns:a16="http://schemas.microsoft.com/office/drawing/2014/main" id="{EDA5E984-37A1-D71F-0F67-3278A9477939}"/>
               </a:ext>
             </a:extLst>
           </p:cNvPr>
@@ -5719,7 +5719,7 @@
           <p:cNvPr id="35" name="Arc 34">
             <a:extLst>
               <a:ext uri="{FF2B5EF4-FFF2-40B4-BE49-F238E27FC236}">
-                <a16:creationId xmlns:a16="http://schemas.microsoft.com/office/drawing/2014/main" xmlns="" id="{23362B0C-C78C-C8C5-A114-D7EBD425FE4E}"/>
+                <a16:creationId xmlns="" xmlns:a16="http://schemas.microsoft.com/office/drawing/2014/main" id="{23362B0C-C78C-C8C5-A114-D7EBD425FE4E}"/>
               </a:ext>
             </a:extLst>
           </p:cNvPr>
@@ -5771,7 +5771,7 @@
           <p:cNvPr id="36" name="Arc 35">
             <a:extLst>
               <a:ext uri="{FF2B5EF4-FFF2-40B4-BE49-F238E27FC236}">
-                <a16:creationId xmlns:a16="http://schemas.microsoft.com/office/drawing/2014/main" xmlns="" id="{B210D309-0CC7-2009-EFBB-E6423380CC22}"/>
+                <a16:creationId xmlns="" xmlns:a16="http://schemas.microsoft.com/office/drawing/2014/main" id="{B210D309-0CC7-2009-EFBB-E6423380CC22}"/>
               </a:ext>
             </a:extLst>
           </p:cNvPr>
@@ -5823,7 +5823,7 @@
           <p:cNvPr id="37" name="Arc 36">
             <a:extLst>
               <a:ext uri="{FF2B5EF4-FFF2-40B4-BE49-F238E27FC236}">
-                <a16:creationId xmlns:a16="http://schemas.microsoft.com/office/drawing/2014/main" xmlns="" id="{CD3E1EEF-8A01-1BA6-8D0C-E4BEC1E2E4C8}"/>
+                <a16:creationId xmlns="" xmlns:a16="http://schemas.microsoft.com/office/drawing/2014/main" id="{CD3E1EEF-8A01-1BA6-8D0C-E4BEC1E2E4C8}"/>
               </a:ext>
             </a:extLst>
           </p:cNvPr>
@@ -5875,7 +5875,7 @@
           <p:cNvPr id="38" name="Arc 37">
             <a:extLst>
               <a:ext uri="{FF2B5EF4-FFF2-40B4-BE49-F238E27FC236}">
-                <a16:creationId xmlns:a16="http://schemas.microsoft.com/office/drawing/2014/main" xmlns="" id="{47AC66C3-170E-03C4-372A-CD051E89D587}"/>
+                <a16:creationId xmlns="" xmlns:a16="http://schemas.microsoft.com/office/drawing/2014/main" id="{47AC66C3-170E-03C4-372A-CD051E89D587}"/>
               </a:ext>
             </a:extLst>
           </p:cNvPr>
@@ -5927,7 +5927,7 @@
           <p:cNvPr id="39" name="Arc 38">
             <a:extLst>
               <a:ext uri="{FF2B5EF4-FFF2-40B4-BE49-F238E27FC236}">
-                <a16:creationId xmlns:a16="http://schemas.microsoft.com/office/drawing/2014/main" xmlns="" id="{CC9A8E9A-04C2-DB87-8FFD-71E68CF1BCBA}"/>
+                <a16:creationId xmlns="" xmlns:a16="http://schemas.microsoft.com/office/drawing/2014/main" id="{CC9A8E9A-04C2-DB87-8FFD-71E68CF1BCBA}"/>
               </a:ext>
             </a:extLst>
           </p:cNvPr>
@@ -5979,7 +5979,7 @@
           <p:cNvPr id="40" name="Arc 39">
             <a:extLst>
               <a:ext uri="{FF2B5EF4-FFF2-40B4-BE49-F238E27FC236}">
-                <a16:creationId xmlns:a16="http://schemas.microsoft.com/office/drawing/2014/main" xmlns="" id="{259AE654-DDA0-91EB-876C-ABD6BECB77A1}"/>
+                <a16:creationId xmlns="" xmlns:a16="http://schemas.microsoft.com/office/drawing/2014/main" id="{259AE654-DDA0-91EB-876C-ABD6BECB77A1}"/>
               </a:ext>
             </a:extLst>
           </p:cNvPr>
@@ -6031,7 +6031,7 @@
           <p:cNvPr id="41" name="Arc 40">
             <a:extLst>
               <a:ext uri="{FF2B5EF4-FFF2-40B4-BE49-F238E27FC236}">
-                <a16:creationId xmlns:a16="http://schemas.microsoft.com/office/drawing/2014/main" xmlns="" id="{9555FDA0-E784-69FB-4825-063E431AF116}"/>
+                <a16:creationId xmlns="" xmlns:a16="http://schemas.microsoft.com/office/drawing/2014/main" id="{9555FDA0-E784-69FB-4825-063E431AF116}"/>
               </a:ext>
             </a:extLst>
           </p:cNvPr>
@@ -6083,7 +6083,7 @@
           <p:cNvPr id="42" name="Arc 41">
             <a:extLst>
               <a:ext uri="{FF2B5EF4-FFF2-40B4-BE49-F238E27FC236}">
-                <a16:creationId xmlns:a16="http://schemas.microsoft.com/office/drawing/2014/main" xmlns="" id="{5F05C170-61C6-CD0D-186C-1457DB059C5A}"/>
+                <a16:creationId xmlns="" xmlns:a16="http://schemas.microsoft.com/office/drawing/2014/main" id="{5F05C170-61C6-CD0D-186C-1457DB059C5A}"/>
               </a:ext>
             </a:extLst>
           </p:cNvPr>
@@ -6135,7 +6135,7 @@
           <p:cNvPr id="43" name="Arc 42">
             <a:extLst>
               <a:ext uri="{FF2B5EF4-FFF2-40B4-BE49-F238E27FC236}">
-                <a16:creationId xmlns:a16="http://schemas.microsoft.com/office/drawing/2014/main" xmlns="" id="{69367794-C189-7BE9-673E-822F3CC11EF0}"/>
+                <a16:creationId xmlns="" xmlns:a16="http://schemas.microsoft.com/office/drawing/2014/main" id="{69367794-C189-7BE9-673E-822F3CC11EF0}"/>
               </a:ext>
             </a:extLst>
           </p:cNvPr>
@@ -6187,7 +6187,7 @@
           <p:cNvPr id="44" name="Arc 43">
             <a:extLst>
               <a:ext uri="{FF2B5EF4-FFF2-40B4-BE49-F238E27FC236}">
-                <a16:creationId xmlns:a16="http://schemas.microsoft.com/office/drawing/2014/main" xmlns="" id="{885CBC3F-5F8B-B5DF-8E37-177EEFC3C788}"/>
+                <a16:creationId xmlns="" xmlns:a16="http://schemas.microsoft.com/office/drawing/2014/main" id="{885CBC3F-5F8B-B5DF-8E37-177EEFC3C788}"/>
               </a:ext>
             </a:extLst>
           </p:cNvPr>
@@ -6239,7 +6239,7 @@
           <p:cNvPr id="45" name="Arc 44">
             <a:extLst>
               <a:ext uri="{FF2B5EF4-FFF2-40B4-BE49-F238E27FC236}">
-                <a16:creationId xmlns:a16="http://schemas.microsoft.com/office/drawing/2014/main" xmlns="" id="{32CADEC0-864B-2494-ED14-C156E311F8FD}"/>
+                <a16:creationId xmlns="" xmlns:a16="http://schemas.microsoft.com/office/drawing/2014/main" id="{32CADEC0-864B-2494-ED14-C156E311F8FD}"/>
               </a:ext>
             </a:extLst>
           </p:cNvPr>
@@ -6291,7 +6291,7 @@
           <p:cNvPr id="46" name="Arc 45">
             <a:extLst>
               <a:ext uri="{FF2B5EF4-FFF2-40B4-BE49-F238E27FC236}">
-                <a16:creationId xmlns:a16="http://schemas.microsoft.com/office/drawing/2014/main" xmlns="" id="{E9C0E728-8CB0-9330-CF3A-71875A0836B6}"/>
+                <a16:creationId xmlns="" xmlns:a16="http://schemas.microsoft.com/office/drawing/2014/main" id="{E9C0E728-8CB0-9330-CF3A-71875A0836B6}"/>
               </a:ext>
             </a:extLst>
           </p:cNvPr>
@@ -6343,7 +6343,7 @@
           <p:cNvPr id="47" name="Arc 46">
             <a:extLst>
               <a:ext uri="{FF2B5EF4-FFF2-40B4-BE49-F238E27FC236}">
-                <a16:creationId xmlns:a16="http://schemas.microsoft.com/office/drawing/2014/main" xmlns="" id="{DB16B015-BAB2-59B6-56D2-478B01006E70}"/>
+                <a16:creationId xmlns="" xmlns:a16="http://schemas.microsoft.com/office/drawing/2014/main" id="{DB16B015-BAB2-59B6-56D2-478B01006E70}"/>
               </a:ext>
             </a:extLst>
           </p:cNvPr>
@@ -6395,7 +6395,7 @@
           <p:cNvPr id="48" name="Arc 47">
             <a:extLst>
               <a:ext uri="{FF2B5EF4-FFF2-40B4-BE49-F238E27FC236}">
-                <a16:creationId xmlns:a16="http://schemas.microsoft.com/office/drawing/2014/main" xmlns="" id="{D1864DBC-417E-AFB1-4AAB-4EB62A8072E1}"/>
+                <a16:creationId xmlns="" xmlns:a16="http://schemas.microsoft.com/office/drawing/2014/main" id="{D1864DBC-417E-AFB1-4AAB-4EB62A8072E1}"/>
               </a:ext>
             </a:extLst>
           </p:cNvPr>
@@ -6447,7 +6447,7 @@
           <p:cNvPr id="49" name="Arc 48">
             <a:extLst>
               <a:ext uri="{FF2B5EF4-FFF2-40B4-BE49-F238E27FC236}">
-                <a16:creationId xmlns:a16="http://schemas.microsoft.com/office/drawing/2014/main" xmlns="" id="{009E08CA-44A1-C1A5-4081-73926B58B71E}"/>
+                <a16:creationId xmlns="" xmlns:a16="http://schemas.microsoft.com/office/drawing/2014/main" id="{009E08CA-44A1-C1A5-4081-73926B58B71E}"/>
               </a:ext>
             </a:extLst>
           </p:cNvPr>
@@ -6499,7 +6499,7 @@
           <p:cNvPr id="50" name="Arc 49">
             <a:extLst>
               <a:ext uri="{FF2B5EF4-FFF2-40B4-BE49-F238E27FC236}">
-                <a16:creationId xmlns:a16="http://schemas.microsoft.com/office/drawing/2014/main" xmlns="" id="{D83AB14B-323B-A7D7-6C6B-0B6B6800D4D0}"/>
+                <a16:creationId xmlns="" xmlns:a16="http://schemas.microsoft.com/office/drawing/2014/main" id="{D83AB14B-323B-A7D7-6C6B-0B6B6800D4D0}"/>
               </a:ext>
             </a:extLst>
           </p:cNvPr>
@@ -6551,7 +6551,7 @@
           <p:cNvPr id="51" name="Arc 50">
             <a:extLst>
               <a:ext uri="{FF2B5EF4-FFF2-40B4-BE49-F238E27FC236}">
-                <a16:creationId xmlns:a16="http://schemas.microsoft.com/office/drawing/2014/main" xmlns="" id="{F471FF37-5178-5D56-4CC5-8ECD83D9DD95}"/>
+                <a16:creationId xmlns="" xmlns:a16="http://schemas.microsoft.com/office/drawing/2014/main" id="{F471FF37-5178-5D56-4CC5-8ECD83D9DD95}"/>
               </a:ext>
             </a:extLst>
           </p:cNvPr>
@@ -6603,7 +6603,7 @@
           <p:cNvPr id="52" name="Arc 51">
             <a:extLst>
               <a:ext uri="{FF2B5EF4-FFF2-40B4-BE49-F238E27FC236}">
-                <a16:creationId xmlns:a16="http://schemas.microsoft.com/office/drawing/2014/main" xmlns="" id="{8BDA9542-F099-F3D7-E3BC-9B8A60E2F009}"/>
+                <a16:creationId xmlns="" xmlns:a16="http://schemas.microsoft.com/office/drawing/2014/main" id="{8BDA9542-F099-F3D7-E3BC-9B8A60E2F009}"/>
               </a:ext>
             </a:extLst>
           </p:cNvPr>
@@ -6655,7 +6655,7 @@
           <p:cNvPr id="53" name="Arc 52">
             <a:extLst>
               <a:ext uri="{FF2B5EF4-FFF2-40B4-BE49-F238E27FC236}">
-                <a16:creationId xmlns:a16="http://schemas.microsoft.com/office/drawing/2014/main" xmlns="" id="{28F48FBE-9033-3E8C-BE15-DF4300368151}"/>
+                <a16:creationId xmlns="" xmlns:a16="http://schemas.microsoft.com/office/drawing/2014/main" id="{28F48FBE-9033-3E8C-BE15-DF4300368151}"/>
               </a:ext>
             </a:extLst>
           </p:cNvPr>
@@ -6707,7 +6707,7 @@
           <p:cNvPr id="3" name="Picture 2">
             <a:extLst>
               <a:ext uri="{FF2B5EF4-FFF2-40B4-BE49-F238E27FC236}">
-                <a16:creationId xmlns:a16="http://schemas.microsoft.com/office/drawing/2014/main" xmlns="" id="{A714208E-7BC2-744B-9B35-01B1E06C24F6}"/>
+                <a16:creationId xmlns="" xmlns:a16="http://schemas.microsoft.com/office/drawing/2014/main" id="{A714208E-7BC2-744B-9B35-01B1E06C24F6}"/>
               </a:ext>
             </a:extLst>
           </p:cNvPr>
@@ -6778,7 +6778,7 @@
         <p:cNvPr id="1" name="">
           <a:extLst>
             <a:ext uri="{FF2B5EF4-FFF2-40B4-BE49-F238E27FC236}">
-              <a16:creationId xmlns:a16="http://schemas.microsoft.com/office/drawing/2014/main" xmlns="" id="{77DD1F81-5917-513A-67AA-480E240E1D15}"/>
+              <a16:creationId xmlns="" xmlns:a16="http://schemas.microsoft.com/office/drawing/2014/main" id="{77DD1F81-5917-513A-67AA-480E240E1D15}"/>
             </a:ext>
           </a:extLst>
         </p:cNvPr>
@@ -6798,7 +6798,7 @@
           <p:cNvPr id="5" name="Rectangle 4">
             <a:extLst>
               <a:ext uri="{FF2B5EF4-FFF2-40B4-BE49-F238E27FC236}">
-                <a16:creationId xmlns:a16="http://schemas.microsoft.com/office/drawing/2014/main" xmlns="" id="{E0C648D6-43DB-24E9-95FB-80E6D2AE4101}"/>
+                <a16:creationId xmlns="" xmlns:a16="http://schemas.microsoft.com/office/drawing/2014/main" id="{E0C648D6-43DB-24E9-95FB-80E6D2AE4101}"/>
               </a:ext>
             </a:extLst>
           </p:cNvPr>
@@ -6854,7 +6854,7 @@
           <p:cNvPr id="4" name="Rectangle 3">
             <a:extLst>
               <a:ext uri="{FF2B5EF4-FFF2-40B4-BE49-F238E27FC236}">
-                <a16:creationId xmlns:a16="http://schemas.microsoft.com/office/drawing/2014/main" xmlns="" id="{B74FDDDD-F77D-E1C7-D97F-D561CBD61C36}"/>
+                <a16:creationId xmlns="" xmlns:a16="http://schemas.microsoft.com/office/drawing/2014/main" id="{B74FDDDD-F77D-E1C7-D97F-D561CBD61C36}"/>
               </a:ext>
             </a:extLst>
           </p:cNvPr>
@@ -7098,7 +7098,7 @@
           <p:cNvPr id="6" name="Oval 5">
             <a:extLst>
               <a:ext uri="{FF2B5EF4-FFF2-40B4-BE49-F238E27FC236}">
-                <a16:creationId xmlns:a16="http://schemas.microsoft.com/office/drawing/2014/main" xmlns="" id="{E2CCDE54-26D7-E71F-A35F-685C45520847}"/>
+                <a16:creationId xmlns="" xmlns:a16="http://schemas.microsoft.com/office/drawing/2014/main" id="{E2CCDE54-26D7-E71F-A35F-685C45520847}"/>
               </a:ext>
             </a:extLst>
           </p:cNvPr>
@@ -7157,7 +7157,7 @@
           <p:cNvPr id="7" name="Oval 6">
             <a:extLst>
               <a:ext uri="{FF2B5EF4-FFF2-40B4-BE49-F238E27FC236}">
-                <a16:creationId xmlns:a16="http://schemas.microsoft.com/office/drawing/2014/main" xmlns="" id="{2B5FB607-130E-A2AE-1F44-FAE1949D14AA}"/>
+                <a16:creationId xmlns="" xmlns:a16="http://schemas.microsoft.com/office/drawing/2014/main" id="{2B5FB607-130E-A2AE-1F44-FAE1949D14AA}"/>
               </a:ext>
             </a:extLst>
           </p:cNvPr>
@@ -7216,7 +7216,7 @@
           <p:cNvPr id="8" name="Oval 7">
             <a:extLst>
               <a:ext uri="{FF2B5EF4-FFF2-40B4-BE49-F238E27FC236}">
-                <a16:creationId xmlns:a16="http://schemas.microsoft.com/office/drawing/2014/main" xmlns="" id="{E153C2D7-F01A-A3F0-8F75-DCAA57FC1367}"/>
+                <a16:creationId xmlns="" xmlns:a16="http://schemas.microsoft.com/office/drawing/2014/main" id="{E153C2D7-F01A-A3F0-8F75-DCAA57FC1367}"/>
               </a:ext>
             </a:extLst>
           </p:cNvPr>
@@ -7275,7 +7275,7 @@
           <p:cNvPr id="9" name="Oval 8">
             <a:extLst>
               <a:ext uri="{FF2B5EF4-FFF2-40B4-BE49-F238E27FC236}">
-                <a16:creationId xmlns:a16="http://schemas.microsoft.com/office/drawing/2014/main" xmlns="" id="{81DB8CB2-5DDE-BF5C-52DC-9A61BEA7B06C}"/>
+                <a16:creationId xmlns="" xmlns:a16="http://schemas.microsoft.com/office/drawing/2014/main" id="{81DB8CB2-5DDE-BF5C-52DC-9A61BEA7B06C}"/>
               </a:ext>
             </a:extLst>
           </p:cNvPr>
@@ -7334,7 +7334,7 @@
           <p:cNvPr id="10" name="Oval 9">
             <a:extLst>
               <a:ext uri="{FF2B5EF4-FFF2-40B4-BE49-F238E27FC236}">
-                <a16:creationId xmlns:a16="http://schemas.microsoft.com/office/drawing/2014/main" xmlns="" id="{30CD698B-80F3-4BB7-C0AE-6FE30849C829}"/>
+                <a16:creationId xmlns="" xmlns:a16="http://schemas.microsoft.com/office/drawing/2014/main" id="{30CD698B-80F3-4BB7-C0AE-6FE30849C829}"/>
               </a:ext>
             </a:extLst>
           </p:cNvPr>
@@ -7393,7 +7393,7 @@
           <p:cNvPr id="11" name="Oval 10">
             <a:extLst>
               <a:ext uri="{FF2B5EF4-FFF2-40B4-BE49-F238E27FC236}">
-                <a16:creationId xmlns:a16="http://schemas.microsoft.com/office/drawing/2014/main" xmlns="" id="{B1938E0E-5407-8077-EF72-ED773B52C413}"/>
+                <a16:creationId xmlns="" xmlns:a16="http://schemas.microsoft.com/office/drawing/2014/main" id="{B1938E0E-5407-8077-EF72-ED773B52C413}"/>
               </a:ext>
             </a:extLst>
           </p:cNvPr>
@@ -7452,7 +7452,7 @@
           <p:cNvPr id="12" name="Oval 11">
             <a:extLst>
               <a:ext uri="{FF2B5EF4-FFF2-40B4-BE49-F238E27FC236}">
-                <a16:creationId xmlns:a16="http://schemas.microsoft.com/office/drawing/2014/main" xmlns="" id="{48B712CB-F3A2-A563-97D6-946AC44BE4E3}"/>
+                <a16:creationId xmlns="" xmlns:a16="http://schemas.microsoft.com/office/drawing/2014/main" id="{48B712CB-F3A2-A563-97D6-946AC44BE4E3}"/>
               </a:ext>
             </a:extLst>
           </p:cNvPr>
@@ -7511,7 +7511,7 @@
           <p:cNvPr id="13" name="Oval 12">
             <a:extLst>
               <a:ext uri="{FF2B5EF4-FFF2-40B4-BE49-F238E27FC236}">
-                <a16:creationId xmlns:a16="http://schemas.microsoft.com/office/drawing/2014/main" xmlns="" id="{B6F7AB43-09EF-BC29-D9A7-46B7A8CB7451}"/>
+                <a16:creationId xmlns="" xmlns:a16="http://schemas.microsoft.com/office/drawing/2014/main" id="{B6F7AB43-09EF-BC29-D9A7-46B7A8CB7451}"/>
               </a:ext>
             </a:extLst>
           </p:cNvPr>
@@ -7570,7 +7570,7 @@
           <p:cNvPr id="14" name="Oval 13">
             <a:extLst>
               <a:ext uri="{FF2B5EF4-FFF2-40B4-BE49-F238E27FC236}">
-                <a16:creationId xmlns:a16="http://schemas.microsoft.com/office/drawing/2014/main" xmlns="" id="{1BA1683D-2DCB-7C89-EB01-F424376DF393}"/>
+                <a16:creationId xmlns="" xmlns:a16="http://schemas.microsoft.com/office/drawing/2014/main" id="{1BA1683D-2DCB-7C89-EB01-F424376DF393}"/>
               </a:ext>
             </a:extLst>
           </p:cNvPr>
@@ -7629,7 +7629,7 @@
           <p:cNvPr id="15" name="Oval 14">
             <a:extLst>
               <a:ext uri="{FF2B5EF4-FFF2-40B4-BE49-F238E27FC236}">
-                <a16:creationId xmlns:a16="http://schemas.microsoft.com/office/drawing/2014/main" xmlns="" id="{AA2C12A7-BF1D-B83E-9F17-B395C162DF78}"/>
+                <a16:creationId xmlns="" xmlns:a16="http://schemas.microsoft.com/office/drawing/2014/main" id="{AA2C12A7-BF1D-B83E-9F17-B395C162DF78}"/>
               </a:ext>
             </a:extLst>
           </p:cNvPr>
@@ -7688,7 +7688,7 @@
           <p:cNvPr id="16" name="Oval 15">
             <a:extLst>
               <a:ext uri="{FF2B5EF4-FFF2-40B4-BE49-F238E27FC236}">
-                <a16:creationId xmlns:a16="http://schemas.microsoft.com/office/drawing/2014/main" xmlns="" id="{44E2FAEA-4220-C747-D2B2-85ADE4AE21E0}"/>
+                <a16:creationId xmlns="" xmlns:a16="http://schemas.microsoft.com/office/drawing/2014/main" id="{44E2FAEA-4220-C747-D2B2-85ADE4AE21E0}"/>
               </a:ext>
             </a:extLst>
           </p:cNvPr>
@@ -7747,7 +7747,7 @@
           <p:cNvPr id="17" name="Oval 16">
             <a:extLst>
               <a:ext uri="{FF2B5EF4-FFF2-40B4-BE49-F238E27FC236}">
-                <a16:creationId xmlns:a16="http://schemas.microsoft.com/office/drawing/2014/main" xmlns="" id="{152E3FF1-FBAF-DF03-2A66-33B5B6E09F80}"/>
+                <a16:creationId xmlns="" xmlns:a16="http://schemas.microsoft.com/office/drawing/2014/main" id="{152E3FF1-FBAF-DF03-2A66-33B5B6E09F80}"/>
               </a:ext>
             </a:extLst>
           </p:cNvPr>
@@ -7806,7 +7806,7 @@
           <p:cNvPr id="18" name="Oval 17">
             <a:extLst>
               <a:ext uri="{FF2B5EF4-FFF2-40B4-BE49-F238E27FC236}">
-                <a16:creationId xmlns:a16="http://schemas.microsoft.com/office/drawing/2014/main" xmlns="" id="{1435F393-D3CE-FB52-B90D-D53D37EB2A9C}"/>
+                <a16:creationId xmlns="" xmlns:a16="http://schemas.microsoft.com/office/drawing/2014/main" id="{1435F393-D3CE-FB52-B90D-D53D37EB2A9C}"/>
               </a:ext>
             </a:extLst>
           </p:cNvPr>
@@ -7865,7 +7865,7 @@
           <p:cNvPr id="19" name="Oval 18">
             <a:extLst>
               <a:ext uri="{FF2B5EF4-FFF2-40B4-BE49-F238E27FC236}">
-                <a16:creationId xmlns:a16="http://schemas.microsoft.com/office/drawing/2014/main" xmlns="" id="{D0356B91-4838-4410-6213-D2F0D4630F62}"/>
+                <a16:creationId xmlns="" xmlns:a16="http://schemas.microsoft.com/office/drawing/2014/main" id="{D0356B91-4838-4410-6213-D2F0D4630F62}"/>
               </a:ext>
             </a:extLst>
           </p:cNvPr>
@@ -7924,7 +7924,7 @@
           <p:cNvPr id="20" name="Oval 19">
             <a:extLst>
               <a:ext uri="{FF2B5EF4-FFF2-40B4-BE49-F238E27FC236}">
-                <a16:creationId xmlns:a16="http://schemas.microsoft.com/office/drawing/2014/main" xmlns="" id="{99278423-57C3-E35B-44EB-497FBB777FFF}"/>
+                <a16:creationId xmlns="" xmlns:a16="http://schemas.microsoft.com/office/drawing/2014/main" id="{99278423-57C3-E35B-44EB-497FBB777FFF}"/>
               </a:ext>
             </a:extLst>
           </p:cNvPr>
@@ -7983,7 +7983,7 @@
           <p:cNvPr id="21" name="Oval 20">
             <a:extLst>
               <a:ext uri="{FF2B5EF4-FFF2-40B4-BE49-F238E27FC236}">
-                <a16:creationId xmlns:a16="http://schemas.microsoft.com/office/drawing/2014/main" xmlns="" id="{32866435-5F44-D62F-6323-E1B0DDB1CF21}"/>
+                <a16:creationId xmlns="" xmlns:a16="http://schemas.microsoft.com/office/drawing/2014/main" id="{32866435-5F44-D62F-6323-E1B0DDB1CF21}"/>
               </a:ext>
             </a:extLst>
           </p:cNvPr>
@@ -8042,7 +8042,7 @@
           <p:cNvPr id="22" name="Oval 21">
             <a:extLst>
               <a:ext uri="{FF2B5EF4-FFF2-40B4-BE49-F238E27FC236}">
-                <a16:creationId xmlns:a16="http://schemas.microsoft.com/office/drawing/2014/main" xmlns="" id="{7FE924C8-E13F-C843-BFBF-1AF4C40923ED}"/>
+                <a16:creationId xmlns="" xmlns:a16="http://schemas.microsoft.com/office/drawing/2014/main" id="{7FE924C8-E13F-C843-BFBF-1AF4C40923ED}"/>
               </a:ext>
             </a:extLst>
           </p:cNvPr>
@@ -8101,7 +8101,7 @@
           <p:cNvPr id="23" name="Oval 22">
             <a:extLst>
               <a:ext uri="{FF2B5EF4-FFF2-40B4-BE49-F238E27FC236}">
-                <a16:creationId xmlns:a16="http://schemas.microsoft.com/office/drawing/2014/main" xmlns="" id="{A26001AF-2022-3482-414E-365A6B7ED7E1}"/>
+                <a16:creationId xmlns="" xmlns:a16="http://schemas.microsoft.com/office/drawing/2014/main" id="{A26001AF-2022-3482-414E-365A6B7ED7E1}"/>
               </a:ext>
             </a:extLst>
           </p:cNvPr>
@@ -8160,7 +8160,7 @@
           <p:cNvPr id="24" name="Oval 23">
             <a:extLst>
               <a:ext uri="{FF2B5EF4-FFF2-40B4-BE49-F238E27FC236}">
-                <a16:creationId xmlns:a16="http://schemas.microsoft.com/office/drawing/2014/main" xmlns="" id="{C1DA9D15-0E3E-F55A-97D5-E7C443444E00}"/>
+                <a16:creationId xmlns="" xmlns:a16="http://schemas.microsoft.com/office/drawing/2014/main" id="{C1DA9D15-0E3E-F55A-97D5-E7C443444E00}"/>
               </a:ext>
             </a:extLst>
           </p:cNvPr>
@@ -8219,7 +8219,7 @@
           <p:cNvPr id="25" name="Oval 24">
             <a:extLst>
               <a:ext uri="{FF2B5EF4-FFF2-40B4-BE49-F238E27FC236}">
-                <a16:creationId xmlns:a16="http://schemas.microsoft.com/office/drawing/2014/main" xmlns="" id="{6C64C353-347D-7512-5087-5BCB3A2CE6E2}"/>
+                <a16:creationId xmlns="" xmlns:a16="http://schemas.microsoft.com/office/drawing/2014/main" id="{6C64C353-347D-7512-5087-5BCB3A2CE6E2}"/>
               </a:ext>
             </a:extLst>
           </p:cNvPr>
@@ -8278,7 +8278,7 @@
           <p:cNvPr id="26" name="Oval 25">
             <a:extLst>
               <a:ext uri="{FF2B5EF4-FFF2-40B4-BE49-F238E27FC236}">
-                <a16:creationId xmlns:a16="http://schemas.microsoft.com/office/drawing/2014/main" xmlns="" id="{EC0B1FAA-B5A3-F63E-BB7D-C48C6A1EF7AB}"/>
+                <a16:creationId xmlns="" xmlns:a16="http://schemas.microsoft.com/office/drawing/2014/main" id="{EC0B1FAA-B5A3-F63E-BB7D-C48C6A1EF7AB}"/>
               </a:ext>
             </a:extLst>
           </p:cNvPr>
@@ -8337,7 +8337,7 @@
           <p:cNvPr id="27" name="Oval 26">
             <a:extLst>
               <a:ext uri="{FF2B5EF4-FFF2-40B4-BE49-F238E27FC236}">
-                <a16:creationId xmlns:a16="http://schemas.microsoft.com/office/drawing/2014/main" xmlns="" id="{50E8E9E8-10F3-F2C4-598C-6DE942D217F9}"/>
+                <a16:creationId xmlns="" xmlns:a16="http://schemas.microsoft.com/office/drawing/2014/main" id="{50E8E9E8-10F3-F2C4-598C-6DE942D217F9}"/>
               </a:ext>
             </a:extLst>
           </p:cNvPr>
@@ -8396,7 +8396,7 @@
           <p:cNvPr id="28" name="Oval 27">
             <a:extLst>
               <a:ext uri="{FF2B5EF4-FFF2-40B4-BE49-F238E27FC236}">
-                <a16:creationId xmlns:a16="http://schemas.microsoft.com/office/drawing/2014/main" xmlns="" id="{24EF7BD8-8073-14F5-1E36-392FA3A64BAD}"/>
+                <a16:creationId xmlns="" xmlns:a16="http://schemas.microsoft.com/office/drawing/2014/main" id="{24EF7BD8-8073-14F5-1E36-392FA3A64BAD}"/>
               </a:ext>
             </a:extLst>
           </p:cNvPr>
@@ -8455,7 +8455,7 @@
           <p:cNvPr id="29" name="Oval 28">
             <a:extLst>
               <a:ext uri="{FF2B5EF4-FFF2-40B4-BE49-F238E27FC236}">
-                <a16:creationId xmlns:a16="http://schemas.microsoft.com/office/drawing/2014/main" xmlns="" id="{2CBB44C7-2A6A-23C2-FACB-BE404705CEC8}"/>
+                <a16:creationId xmlns="" xmlns:a16="http://schemas.microsoft.com/office/drawing/2014/main" id="{2CBB44C7-2A6A-23C2-FACB-BE404705CEC8}"/>
               </a:ext>
             </a:extLst>
           </p:cNvPr>
@@ -8514,7 +8514,7 @@
           <p:cNvPr id="3" name="Group 2">
             <a:extLst>
               <a:ext uri="{FF2B5EF4-FFF2-40B4-BE49-F238E27FC236}">
-                <a16:creationId xmlns:a16="http://schemas.microsoft.com/office/drawing/2014/main" xmlns="" id="{E5A0CA92-39C9-7575-C3DA-93077042A206}"/>
+                <a16:creationId xmlns="" xmlns:a16="http://schemas.microsoft.com/office/drawing/2014/main" id="{E5A0CA92-39C9-7575-C3DA-93077042A206}"/>
               </a:ext>
             </a:extLst>
           </p:cNvPr>
@@ -8534,7 +8534,7 @@
             <p:cNvPr id="2" name="Oval 1">
               <a:extLst>
                 <a:ext uri="{FF2B5EF4-FFF2-40B4-BE49-F238E27FC236}">
-                  <a16:creationId xmlns:a16="http://schemas.microsoft.com/office/drawing/2014/main" xmlns="" id="{EE98DD9A-0CC8-E237-426C-E194BD68842E}"/>
+                  <a16:creationId xmlns="" xmlns:a16="http://schemas.microsoft.com/office/drawing/2014/main" id="{EE98DD9A-0CC8-E237-426C-E194BD68842E}"/>
                 </a:ext>
               </a:extLst>
             </p:cNvPr>
@@ -8593,7 +8593,7 @@
             <p:cNvPr id="30" name="Arc 29">
               <a:extLst>
                 <a:ext uri="{FF2B5EF4-FFF2-40B4-BE49-F238E27FC236}">
-                  <a16:creationId xmlns:a16="http://schemas.microsoft.com/office/drawing/2014/main" xmlns="" id="{440ED8E4-C0B5-31F0-5171-F4BC55B2DBBF}"/>
+                  <a16:creationId xmlns="" xmlns:a16="http://schemas.microsoft.com/office/drawing/2014/main" id="{440ED8E4-C0B5-31F0-5171-F4BC55B2DBBF}"/>
                 </a:ext>
               </a:extLst>
             </p:cNvPr>
@@ -8646,7 +8646,7 @@
           <p:cNvPr id="54" name="Group 53">
             <a:extLst>
               <a:ext uri="{FF2B5EF4-FFF2-40B4-BE49-F238E27FC236}">
-                <a16:creationId xmlns:a16="http://schemas.microsoft.com/office/drawing/2014/main" xmlns="" id="{56AC3AC4-4003-93D4-6554-87545C42967E}"/>
+                <a16:creationId xmlns="" xmlns:a16="http://schemas.microsoft.com/office/drawing/2014/main" id="{56AC3AC4-4003-93D4-6554-87545C42967E}"/>
               </a:ext>
             </a:extLst>
           </p:cNvPr>
@@ -8666,7 +8666,7 @@
             <p:cNvPr id="55" name="Oval 54">
               <a:extLst>
                 <a:ext uri="{FF2B5EF4-FFF2-40B4-BE49-F238E27FC236}">
-                  <a16:creationId xmlns:a16="http://schemas.microsoft.com/office/drawing/2014/main" xmlns="" id="{32E45708-1BEA-E117-DD14-F7334AFC204D}"/>
+                  <a16:creationId xmlns="" xmlns:a16="http://schemas.microsoft.com/office/drawing/2014/main" id="{32E45708-1BEA-E117-DD14-F7334AFC204D}"/>
                 </a:ext>
               </a:extLst>
             </p:cNvPr>
@@ -8725,7 +8725,7 @@
             <p:cNvPr id="56" name="Arc 55">
               <a:extLst>
                 <a:ext uri="{FF2B5EF4-FFF2-40B4-BE49-F238E27FC236}">
-                  <a16:creationId xmlns:a16="http://schemas.microsoft.com/office/drawing/2014/main" xmlns="" id="{587C9C08-013D-E76D-1567-F53DBD148B1C}"/>
+                  <a16:creationId xmlns="" xmlns:a16="http://schemas.microsoft.com/office/drawing/2014/main" id="{587C9C08-013D-E76D-1567-F53DBD148B1C}"/>
                 </a:ext>
               </a:extLst>
             </p:cNvPr>
@@ -8778,7 +8778,7 @@
           <p:cNvPr id="57" name="Group 56">
             <a:extLst>
               <a:ext uri="{FF2B5EF4-FFF2-40B4-BE49-F238E27FC236}">
-                <a16:creationId xmlns:a16="http://schemas.microsoft.com/office/drawing/2014/main" xmlns="" id="{BDFE12BD-C936-321F-DA6D-4D4CD52DB306}"/>
+                <a16:creationId xmlns="" xmlns:a16="http://schemas.microsoft.com/office/drawing/2014/main" id="{BDFE12BD-C936-321F-DA6D-4D4CD52DB306}"/>
               </a:ext>
             </a:extLst>
           </p:cNvPr>
@@ -8798,7 +8798,7 @@
             <p:cNvPr id="58" name="Oval 57">
               <a:extLst>
                 <a:ext uri="{FF2B5EF4-FFF2-40B4-BE49-F238E27FC236}">
-                  <a16:creationId xmlns:a16="http://schemas.microsoft.com/office/drawing/2014/main" xmlns="" id="{6E2DFFE8-BF59-234A-B94D-F7275B90F41E}"/>
+                  <a16:creationId xmlns="" xmlns:a16="http://schemas.microsoft.com/office/drawing/2014/main" id="{6E2DFFE8-BF59-234A-B94D-F7275B90F41E}"/>
                 </a:ext>
               </a:extLst>
             </p:cNvPr>
@@ -8857,7 +8857,7 @@
             <p:cNvPr id="59" name="Arc 58">
               <a:extLst>
                 <a:ext uri="{FF2B5EF4-FFF2-40B4-BE49-F238E27FC236}">
-                  <a16:creationId xmlns:a16="http://schemas.microsoft.com/office/drawing/2014/main" xmlns="" id="{EEC88090-6502-5B06-82D5-5E9192739559}"/>
+                  <a16:creationId xmlns="" xmlns:a16="http://schemas.microsoft.com/office/drawing/2014/main" id="{EEC88090-6502-5B06-82D5-5E9192739559}"/>
                 </a:ext>
               </a:extLst>
             </p:cNvPr>
@@ -8910,7 +8910,7 @@
           <p:cNvPr id="60" name="Group 59">
             <a:extLst>
               <a:ext uri="{FF2B5EF4-FFF2-40B4-BE49-F238E27FC236}">
-                <a16:creationId xmlns:a16="http://schemas.microsoft.com/office/drawing/2014/main" xmlns="" id="{7F60A61B-F502-FC12-63BB-11C035BE48F4}"/>
+                <a16:creationId xmlns="" xmlns:a16="http://schemas.microsoft.com/office/drawing/2014/main" id="{7F60A61B-F502-FC12-63BB-11C035BE48F4}"/>
               </a:ext>
             </a:extLst>
           </p:cNvPr>
@@ -8930,7 +8930,7 @@
             <p:cNvPr id="61" name="Oval 60">
               <a:extLst>
                 <a:ext uri="{FF2B5EF4-FFF2-40B4-BE49-F238E27FC236}">
-                  <a16:creationId xmlns:a16="http://schemas.microsoft.com/office/drawing/2014/main" xmlns="" id="{406DC092-351A-3F70-7250-FD0707AB9BC0}"/>
+                  <a16:creationId xmlns="" xmlns:a16="http://schemas.microsoft.com/office/drawing/2014/main" id="{406DC092-351A-3F70-7250-FD0707AB9BC0}"/>
                 </a:ext>
               </a:extLst>
             </p:cNvPr>
@@ -8989,7 +8989,7 @@
             <p:cNvPr id="62" name="Arc 61">
               <a:extLst>
                 <a:ext uri="{FF2B5EF4-FFF2-40B4-BE49-F238E27FC236}">
-                  <a16:creationId xmlns:a16="http://schemas.microsoft.com/office/drawing/2014/main" xmlns="" id="{5E21C94A-7063-9B4A-5DF4-AAAABB65A7E9}"/>
+                  <a16:creationId xmlns="" xmlns:a16="http://schemas.microsoft.com/office/drawing/2014/main" id="{5E21C94A-7063-9B4A-5DF4-AAAABB65A7E9}"/>
                 </a:ext>
               </a:extLst>
             </p:cNvPr>
@@ -9042,7 +9042,7 @@
           <p:cNvPr id="63" name="Group 62">
             <a:extLst>
               <a:ext uri="{FF2B5EF4-FFF2-40B4-BE49-F238E27FC236}">
-                <a16:creationId xmlns:a16="http://schemas.microsoft.com/office/drawing/2014/main" xmlns="" id="{6EF408B0-0BDB-3D6F-BA04-0FF19F98F64C}"/>
+                <a16:creationId xmlns="" xmlns:a16="http://schemas.microsoft.com/office/drawing/2014/main" id="{6EF408B0-0BDB-3D6F-BA04-0FF19F98F64C}"/>
               </a:ext>
             </a:extLst>
           </p:cNvPr>
@@ -9062,7 +9062,7 @@
             <p:cNvPr id="64" name="Oval 63">
               <a:extLst>
                 <a:ext uri="{FF2B5EF4-FFF2-40B4-BE49-F238E27FC236}">
-                  <a16:creationId xmlns:a16="http://schemas.microsoft.com/office/drawing/2014/main" xmlns="" id="{058DEE75-92F4-D869-0AE6-F722C3448B1C}"/>
+                  <a16:creationId xmlns="" xmlns:a16="http://schemas.microsoft.com/office/drawing/2014/main" id="{058DEE75-92F4-D869-0AE6-F722C3448B1C}"/>
                 </a:ext>
               </a:extLst>
             </p:cNvPr>
@@ -9121,7 +9121,7 @@
             <p:cNvPr id="65" name="Arc 64">
               <a:extLst>
                 <a:ext uri="{FF2B5EF4-FFF2-40B4-BE49-F238E27FC236}">
-                  <a16:creationId xmlns:a16="http://schemas.microsoft.com/office/drawing/2014/main" xmlns="" id="{7E3B28C1-2093-80DA-E0D9-CD72049F9AF2}"/>
+                  <a16:creationId xmlns="" xmlns:a16="http://schemas.microsoft.com/office/drawing/2014/main" id="{7E3B28C1-2093-80DA-E0D9-CD72049F9AF2}"/>
                 </a:ext>
               </a:extLst>
             </p:cNvPr>
@@ -9174,7 +9174,7 @@
           <p:cNvPr id="66" name="Group 65">
             <a:extLst>
               <a:ext uri="{FF2B5EF4-FFF2-40B4-BE49-F238E27FC236}">
-                <a16:creationId xmlns:a16="http://schemas.microsoft.com/office/drawing/2014/main" xmlns="" id="{EBC7586D-B6D6-B6F4-9157-AAE67C51A232}"/>
+                <a16:creationId xmlns="" xmlns:a16="http://schemas.microsoft.com/office/drawing/2014/main" id="{EBC7586D-B6D6-B6F4-9157-AAE67C51A232}"/>
               </a:ext>
             </a:extLst>
           </p:cNvPr>
@@ -9194,7 +9194,7 @@
             <p:cNvPr id="67" name="Oval 66">
               <a:extLst>
                 <a:ext uri="{FF2B5EF4-FFF2-40B4-BE49-F238E27FC236}">
-                  <a16:creationId xmlns:a16="http://schemas.microsoft.com/office/drawing/2014/main" xmlns="" id="{63B4EB66-1C87-3007-FDE0-2911FBAA94ED}"/>
+                  <a16:creationId xmlns="" xmlns:a16="http://schemas.microsoft.com/office/drawing/2014/main" id="{63B4EB66-1C87-3007-FDE0-2911FBAA94ED}"/>
                 </a:ext>
               </a:extLst>
             </p:cNvPr>
@@ -9253,7 +9253,7 @@
             <p:cNvPr id="68" name="Arc 67">
               <a:extLst>
                 <a:ext uri="{FF2B5EF4-FFF2-40B4-BE49-F238E27FC236}">
-                  <a16:creationId xmlns:a16="http://schemas.microsoft.com/office/drawing/2014/main" xmlns="" id="{A57E758B-EE06-E9BD-9BCE-E29F16AEC2C7}"/>
+                  <a16:creationId xmlns="" xmlns:a16="http://schemas.microsoft.com/office/drawing/2014/main" id="{A57E758B-EE06-E9BD-9BCE-E29F16AEC2C7}"/>
                 </a:ext>
               </a:extLst>
             </p:cNvPr>
@@ -9306,7 +9306,7 @@
           <p:cNvPr id="69" name="Group 68">
             <a:extLst>
               <a:ext uri="{FF2B5EF4-FFF2-40B4-BE49-F238E27FC236}">
-                <a16:creationId xmlns:a16="http://schemas.microsoft.com/office/drawing/2014/main" xmlns="" id="{794DA135-28DD-93FB-0982-C53F8BF0126F}"/>
+                <a16:creationId xmlns="" xmlns:a16="http://schemas.microsoft.com/office/drawing/2014/main" id="{794DA135-28DD-93FB-0982-C53F8BF0126F}"/>
               </a:ext>
             </a:extLst>
           </p:cNvPr>
@@ -9326,7 +9326,7 @@
             <p:cNvPr id="70" name="Oval 69">
               <a:extLst>
                 <a:ext uri="{FF2B5EF4-FFF2-40B4-BE49-F238E27FC236}">
-                  <a16:creationId xmlns:a16="http://schemas.microsoft.com/office/drawing/2014/main" xmlns="" id="{EC1F6917-9875-6D59-CDB6-9328CB1EB6E0}"/>
+                  <a16:creationId xmlns="" xmlns:a16="http://schemas.microsoft.com/office/drawing/2014/main" id="{EC1F6917-9875-6D59-CDB6-9328CB1EB6E0}"/>
                 </a:ext>
               </a:extLst>
             </p:cNvPr>
@@ -9385,7 +9385,7 @@
             <p:cNvPr id="71" name="Arc 70">
               <a:extLst>
                 <a:ext uri="{FF2B5EF4-FFF2-40B4-BE49-F238E27FC236}">
-                  <a16:creationId xmlns:a16="http://schemas.microsoft.com/office/drawing/2014/main" xmlns="" id="{842178B8-6D8B-2DB3-4A4F-8B6F251B239D}"/>
+                  <a16:creationId xmlns="" xmlns:a16="http://schemas.microsoft.com/office/drawing/2014/main" id="{842178B8-6D8B-2DB3-4A4F-8B6F251B239D}"/>
                 </a:ext>
               </a:extLst>
             </p:cNvPr>
@@ -9438,7 +9438,7 @@
           <p:cNvPr id="72" name="Group 71">
             <a:extLst>
               <a:ext uri="{FF2B5EF4-FFF2-40B4-BE49-F238E27FC236}">
-                <a16:creationId xmlns:a16="http://schemas.microsoft.com/office/drawing/2014/main" xmlns="" id="{6334D252-8063-7B32-45FD-91E3566C00B1}"/>
+                <a16:creationId xmlns="" xmlns:a16="http://schemas.microsoft.com/office/drawing/2014/main" id="{6334D252-8063-7B32-45FD-91E3566C00B1}"/>
               </a:ext>
             </a:extLst>
           </p:cNvPr>
@@ -9458,7 +9458,7 @@
             <p:cNvPr id="73" name="Oval 72">
               <a:extLst>
                 <a:ext uri="{FF2B5EF4-FFF2-40B4-BE49-F238E27FC236}">
-                  <a16:creationId xmlns:a16="http://schemas.microsoft.com/office/drawing/2014/main" xmlns="" id="{F175E0F1-8A3B-D28B-D692-84C3D5CA94F2}"/>
+                  <a16:creationId xmlns="" xmlns:a16="http://schemas.microsoft.com/office/drawing/2014/main" id="{F175E0F1-8A3B-D28B-D692-84C3D5CA94F2}"/>
                 </a:ext>
               </a:extLst>
             </p:cNvPr>
@@ -9517,7 +9517,7 @@
             <p:cNvPr id="74" name="Arc 73">
               <a:extLst>
                 <a:ext uri="{FF2B5EF4-FFF2-40B4-BE49-F238E27FC236}">
-                  <a16:creationId xmlns:a16="http://schemas.microsoft.com/office/drawing/2014/main" xmlns="" id="{94340669-E9B7-4A15-910F-8569189F2B0E}"/>
+                  <a16:creationId xmlns="" xmlns:a16="http://schemas.microsoft.com/office/drawing/2014/main" id="{94340669-E9B7-4A15-910F-8569189F2B0E}"/>
                 </a:ext>
               </a:extLst>
             </p:cNvPr>
@@ -9570,7 +9570,7 @@
           <p:cNvPr id="75" name="Group 74">
             <a:extLst>
               <a:ext uri="{FF2B5EF4-FFF2-40B4-BE49-F238E27FC236}">
-                <a16:creationId xmlns:a16="http://schemas.microsoft.com/office/drawing/2014/main" xmlns="" id="{B41398A0-5D8C-219B-7CF3-EF3369FD9E4D}"/>
+                <a16:creationId xmlns="" xmlns:a16="http://schemas.microsoft.com/office/drawing/2014/main" id="{B41398A0-5D8C-219B-7CF3-EF3369FD9E4D}"/>
               </a:ext>
             </a:extLst>
           </p:cNvPr>
@@ -9590,7 +9590,7 @@
             <p:cNvPr id="76" name="Oval 75">
               <a:extLst>
                 <a:ext uri="{FF2B5EF4-FFF2-40B4-BE49-F238E27FC236}">
-                  <a16:creationId xmlns:a16="http://schemas.microsoft.com/office/drawing/2014/main" xmlns="" id="{1F95D269-31AF-EE79-42C4-DDC3A2ED8D09}"/>
+                  <a16:creationId xmlns="" xmlns:a16="http://schemas.microsoft.com/office/drawing/2014/main" id="{1F95D269-31AF-EE79-42C4-DDC3A2ED8D09}"/>
                 </a:ext>
               </a:extLst>
             </p:cNvPr>
@@ -9649,7 +9649,7 @@
             <p:cNvPr id="77" name="Arc 76">
               <a:extLst>
                 <a:ext uri="{FF2B5EF4-FFF2-40B4-BE49-F238E27FC236}">
-                  <a16:creationId xmlns:a16="http://schemas.microsoft.com/office/drawing/2014/main" xmlns="" id="{3ACBF1A9-8DFC-D5E0-8C08-8322271D3A77}"/>
+                  <a16:creationId xmlns="" xmlns:a16="http://schemas.microsoft.com/office/drawing/2014/main" id="{3ACBF1A9-8DFC-D5E0-8C08-8322271D3A77}"/>
                 </a:ext>
               </a:extLst>
             </p:cNvPr>
@@ -9702,7 +9702,7 @@
           <p:cNvPr id="78" name="Group 77">
             <a:extLst>
               <a:ext uri="{FF2B5EF4-FFF2-40B4-BE49-F238E27FC236}">
-                <a16:creationId xmlns:a16="http://schemas.microsoft.com/office/drawing/2014/main" xmlns="" id="{8E4DECA8-5BE8-6E15-F9E0-06A97135B17A}"/>
+                <a16:creationId xmlns="" xmlns:a16="http://schemas.microsoft.com/office/drawing/2014/main" id="{8E4DECA8-5BE8-6E15-F9E0-06A97135B17A}"/>
               </a:ext>
             </a:extLst>
           </p:cNvPr>
@@ -9722,7 +9722,7 @@
             <p:cNvPr id="79" name="Oval 78">
               <a:extLst>
                 <a:ext uri="{FF2B5EF4-FFF2-40B4-BE49-F238E27FC236}">
-                  <a16:creationId xmlns:a16="http://schemas.microsoft.com/office/drawing/2014/main" xmlns="" id="{3F33D6DD-BFC2-AC5B-5E25-79F2C77A2498}"/>
+                  <a16:creationId xmlns="" xmlns:a16="http://schemas.microsoft.com/office/drawing/2014/main" id="{3F33D6DD-BFC2-AC5B-5E25-79F2C77A2498}"/>
                 </a:ext>
               </a:extLst>
             </p:cNvPr>
@@ -9781,7 +9781,7 @@
             <p:cNvPr id="80" name="Arc 79">
               <a:extLst>
                 <a:ext uri="{FF2B5EF4-FFF2-40B4-BE49-F238E27FC236}">
-                  <a16:creationId xmlns:a16="http://schemas.microsoft.com/office/drawing/2014/main" xmlns="" id="{14B35254-5989-49DC-72B0-1E3FDCA19A35}"/>
+                  <a16:creationId xmlns="" xmlns:a16="http://schemas.microsoft.com/office/drawing/2014/main" id="{14B35254-5989-49DC-72B0-1E3FDCA19A35}"/>
                 </a:ext>
               </a:extLst>
             </p:cNvPr>
@@ -9834,7 +9834,7 @@
           <p:cNvPr id="81" name="Group 80">
             <a:extLst>
               <a:ext uri="{FF2B5EF4-FFF2-40B4-BE49-F238E27FC236}">
-                <a16:creationId xmlns:a16="http://schemas.microsoft.com/office/drawing/2014/main" xmlns="" id="{6ACD5758-357E-6448-5CD6-34B367C8C8F4}"/>
+                <a16:creationId xmlns="" xmlns:a16="http://schemas.microsoft.com/office/drawing/2014/main" id="{6ACD5758-357E-6448-5CD6-34B367C8C8F4}"/>
               </a:ext>
             </a:extLst>
           </p:cNvPr>
@@ -9854,7 +9854,7 @@
             <p:cNvPr id="82" name="Oval 81">
               <a:extLst>
                 <a:ext uri="{FF2B5EF4-FFF2-40B4-BE49-F238E27FC236}">
-                  <a16:creationId xmlns:a16="http://schemas.microsoft.com/office/drawing/2014/main" xmlns="" id="{90FE7B1E-CC38-A41E-BBBB-0E1E1BB51E0C}"/>
+                  <a16:creationId xmlns="" xmlns:a16="http://schemas.microsoft.com/office/drawing/2014/main" id="{90FE7B1E-CC38-A41E-BBBB-0E1E1BB51E0C}"/>
                 </a:ext>
               </a:extLst>
             </p:cNvPr>
@@ -9913,7 +9913,7 @@
             <p:cNvPr id="83" name="Arc 82">
               <a:extLst>
                 <a:ext uri="{FF2B5EF4-FFF2-40B4-BE49-F238E27FC236}">
-                  <a16:creationId xmlns:a16="http://schemas.microsoft.com/office/drawing/2014/main" xmlns="" id="{064FB018-B832-A6C8-6A18-4C82A055BE4E}"/>
+                  <a16:creationId xmlns="" xmlns:a16="http://schemas.microsoft.com/office/drawing/2014/main" id="{064FB018-B832-A6C8-6A18-4C82A055BE4E}"/>
                 </a:ext>
               </a:extLst>
             </p:cNvPr>
@@ -9966,7 +9966,7 @@
           <p:cNvPr id="84" name="Group 83">
             <a:extLst>
               <a:ext uri="{FF2B5EF4-FFF2-40B4-BE49-F238E27FC236}">
-                <a16:creationId xmlns:a16="http://schemas.microsoft.com/office/drawing/2014/main" xmlns="" id="{BC87D57E-0711-1C8F-E1DC-27BA2E1B0156}"/>
+                <a16:creationId xmlns="" xmlns:a16="http://schemas.microsoft.com/office/drawing/2014/main" id="{BC87D57E-0711-1C8F-E1DC-27BA2E1B0156}"/>
               </a:ext>
             </a:extLst>
           </p:cNvPr>
@@ -9986,7 +9986,7 @@
             <p:cNvPr id="85" name="Oval 84">
               <a:extLst>
                 <a:ext uri="{FF2B5EF4-FFF2-40B4-BE49-F238E27FC236}">
-                  <a16:creationId xmlns:a16="http://schemas.microsoft.com/office/drawing/2014/main" xmlns="" id="{DCBFC7E3-4491-9020-426F-10C3DC5EF404}"/>
+                  <a16:creationId xmlns="" xmlns:a16="http://schemas.microsoft.com/office/drawing/2014/main" id="{DCBFC7E3-4491-9020-426F-10C3DC5EF404}"/>
                 </a:ext>
               </a:extLst>
             </p:cNvPr>
@@ -10045,7 +10045,7 @@
             <p:cNvPr id="86" name="Arc 85">
               <a:extLst>
                 <a:ext uri="{FF2B5EF4-FFF2-40B4-BE49-F238E27FC236}">
-                  <a16:creationId xmlns:a16="http://schemas.microsoft.com/office/drawing/2014/main" xmlns="" id="{51120AF4-76A3-B60C-B17F-5A241AEF25B0}"/>
+                  <a16:creationId xmlns="" xmlns:a16="http://schemas.microsoft.com/office/drawing/2014/main" id="{51120AF4-76A3-B60C-B17F-5A241AEF25B0}"/>
                 </a:ext>
               </a:extLst>
             </p:cNvPr>
@@ -10098,7 +10098,7 @@
           <p:cNvPr id="87" name="Group 86">
             <a:extLst>
               <a:ext uri="{FF2B5EF4-FFF2-40B4-BE49-F238E27FC236}">
-                <a16:creationId xmlns:a16="http://schemas.microsoft.com/office/drawing/2014/main" xmlns="" id="{9C88F040-2AB6-8323-BA50-9D0ED2C398E3}"/>
+                <a16:creationId xmlns="" xmlns:a16="http://schemas.microsoft.com/office/drawing/2014/main" id="{9C88F040-2AB6-8323-BA50-9D0ED2C398E3}"/>
               </a:ext>
             </a:extLst>
           </p:cNvPr>
@@ -10118,7 +10118,7 @@
             <p:cNvPr id="88" name="Oval 87">
               <a:extLst>
                 <a:ext uri="{FF2B5EF4-FFF2-40B4-BE49-F238E27FC236}">
-                  <a16:creationId xmlns:a16="http://schemas.microsoft.com/office/drawing/2014/main" xmlns="" id="{0E902587-FCC3-4109-8354-34A9253BF166}"/>
+                  <a16:creationId xmlns="" xmlns:a16="http://schemas.microsoft.com/office/drawing/2014/main" id="{0E902587-FCC3-4109-8354-34A9253BF166}"/>
                 </a:ext>
               </a:extLst>
             </p:cNvPr>
@@ -10177,7 +10177,7 @@
             <p:cNvPr id="89" name="Arc 88">
               <a:extLst>
                 <a:ext uri="{FF2B5EF4-FFF2-40B4-BE49-F238E27FC236}">
-                  <a16:creationId xmlns:a16="http://schemas.microsoft.com/office/drawing/2014/main" xmlns="" id="{92A17050-8FFD-1D92-5315-F3AE33235D31}"/>
+                  <a16:creationId xmlns="" xmlns:a16="http://schemas.microsoft.com/office/drawing/2014/main" id="{92A17050-8FFD-1D92-5315-F3AE33235D31}"/>
                 </a:ext>
               </a:extLst>
             </p:cNvPr>
@@ -10230,7 +10230,7 @@
           <p:cNvPr id="90" name="Group 89">
             <a:extLst>
               <a:ext uri="{FF2B5EF4-FFF2-40B4-BE49-F238E27FC236}">
-                <a16:creationId xmlns:a16="http://schemas.microsoft.com/office/drawing/2014/main" xmlns="" id="{67C8A194-DD25-351F-6C68-AFAB9192E266}"/>
+                <a16:creationId xmlns="" xmlns:a16="http://schemas.microsoft.com/office/drawing/2014/main" id="{67C8A194-DD25-351F-6C68-AFAB9192E266}"/>
               </a:ext>
             </a:extLst>
           </p:cNvPr>
@@ -10250,7 +10250,7 @@
             <p:cNvPr id="91" name="Oval 90">
               <a:extLst>
                 <a:ext uri="{FF2B5EF4-FFF2-40B4-BE49-F238E27FC236}">
-                  <a16:creationId xmlns:a16="http://schemas.microsoft.com/office/drawing/2014/main" xmlns="" id="{7B10CCCF-8B2B-FADF-7734-F689B3EAF212}"/>
+                  <a16:creationId xmlns="" xmlns:a16="http://schemas.microsoft.com/office/drawing/2014/main" id="{7B10CCCF-8B2B-FADF-7734-F689B3EAF212}"/>
                 </a:ext>
               </a:extLst>
             </p:cNvPr>
@@ -10309,7 +10309,7 @@
             <p:cNvPr id="92" name="Arc 91">
               <a:extLst>
                 <a:ext uri="{FF2B5EF4-FFF2-40B4-BE49-F238E27FC236}">
-                  <a16:creationId xmlns:a16="http://schemas.microsoft.com/office/drawing/2014/main" xmlns="" id="{65D93716-7229-0D2E-185D-EB92654B93BA}"/>
+                  <a16:creationId xmlns="" xmlns:a16="http://schemas.microsoft.com/office/drawing/2014/main" id="{65D93716-7229-0D2E-185D-EB92654B93BA}"/>
                 </a:ext>
               </a:extLst>
             </p:cNvPr>
@@ -10362,7 +10362,7 @@
           <p:cNvPr id="93" name="Group 92">
             <a:extLst>
               <a:ext uri="{FF2B5EF4-FFF2-40B4-BE49-F238E27FC236}">
-                <a16:creationId xmlns:a16="http://schemas.microsoft.com/office/drawing/2014/main" xmlns="" id="{6CC77FAD-F208-1023-C1AD-9B4BD069D952}"/>
+                <a16:creationId xmlns="" xmlns:a16="http://schemas.microsoft.com/office/drawing/2014/main" id="{6CC77FAD-F208-1023-C1AD-9B4BD069D952}"/>
               </a:ext>
             </a:extLst>
           </p:cNvPr>
@@ -10382,7 +10382,7 @@
             <p:cNvPr id="94" name="Oval 93">
               <a:extLst>
                 <a:ext uri="{FF2B5EF4-FFF2-40B4-BE49-F238E27FC236}">
-                  <a16:creationId xmlns:a16="http://schemas.microsoft.com/office/drawing/2014/main" xmlns="" id="{15B7FCCF-8686-9E22-4553-440516BFB63A}"/>
+                  <a16:creationId xmlns="" xmlns:a16="http://schemas.microsoft.com/office/drawing/2014/main" id="{15B7FCCF-8686-9E22-4553-440516BFB63A}"/>
                 </a:ext>
               </a:extLst>
             </p:cNvPr>
@@ -10441,7 +10441,7 @@
             <p:cNvPr id="95" name="Arc 94">
               <a:extLst>
                 <a:ext uri="{FF2B5EF4-FFF2-40B4-BE49-F238E27FC236}">
-                  <a16:creationId xmlns:a16="http://schemas.microsoft.com/office/drawing/2014/main" xmlns="" id="{4B5A37D7-CA9F-6C35-AF1F-91629A71CD20}"/>
+                  <a16:creationId xmlns="" xmlns:a16="http://schemas.microsoft.com/office/drawing/2014/main" id="{4B5A37D7-CA9F-6C35-AF1F-91629A71CD20}"/>
                 </a:ext>
               </a:extLst>
             </p:cNvPr>
@@ -10494,7 +10494,7 @@
           <p:cNvPr id="96" name="Group 95">
             <a:extLst>
               <a:ext uri="{FF2B5EF4-FFF2-40B4-BE49-F238E27FC236}">
-                <a16:creationId xmlns:a16="http://schemas.microsoft.com/office/drawing/2014/main" xmlns="" id="{B38CBF3E-0B1B-CB43-9A6C-1D5F2F8E3BA8}"/>
+                <a16:creationId xmlns="" xmlns:a16="http://schemas.microsoft.com/office/drawing/2014/main" id="{B38CBF3E-0B1B-CB43-9A6C-1D5F2F8E3BA8}"/>
               </a:ext>
             </a:extLst>
           </p:cNvPr>
@@ -10514,7 +10514,7 @@
             <p:cNvPr id="97" name="Oval 96">
               <a:extLst>
                 <a:ext uri="{FF2B5EF4-FFF2-40B4-BE49-F238E27FC236}">
-                  <a16:creationId xmlns:a16="http://schemas.microsoft.com/office/drawing/2014/main" xmlns="" id="{83CCC6FA-D61D-CB0C-D82F-DDEEE4079669}"/>
+                  <a16:creationId xmlns="" xmlns:a16="http://schemas.microsoft.com/office/drawing/2014/main" id="{83CCC6FA-D61D-CB0C-D82F-DDEEE4079669}"/>
                 </a:ext>
               </a:extLst>
             </p:cNvPr>
@@ -10573,7 +10573,7 @@
             <p:cNvPr id="98" name="Arc 97">
               <a:extLst>
                 <a:ext uri="{FF2B5EF4-FFF2-40B4-BE49-F238E27FC236}">
-                  <a16:creationId xmlns:a16="http://schemas.microsoft.com/office/drawing/2014/main" xmlns="" id="{F47D239B-D49C-21BB-4326-DC03A8D0E15E}"/>
+                  <a16:creationId xmlns="" xmlns:a16="http://schemas.microsoft.com/office/drawing/2014/main" id="{F47D239B-D49C-21BB-4326-DC03A8D0E15E}"/>
                 </a:ext>
               </a:extLst>
             </p:cNvPr>
@@ -10626,7 +10626,7 @@
           <p:cNvPr id="99" name="Group 98">
             <a:extLst>
               <a:ext uri="{FF2B5EF4-FFF2-40B4-BE49-F238E27FC236}">
-                <a16:creationId xmlns:a16="http://schemas.microsoft.com/office/drawing/2014/main" xmlns="" id="{FDC24FAC-131D-564C-7B3D-DB1AD34D4230}"/>
+                <a16:creationId xmlns="" xmlns:a16="http://schemas.microsoft.com/office/drawing/2014/main" id="{FDC24FAC-131D-564C-7B3D-DB1AD34D4230}"/>
               </a:ext>
             </a:extLst>
           </p:cNvPr>
@@ -10646,7 +10646,7 @@
             <p:cNvPr id="100" name="Oval 99">
               <a:extLst>
                 <a:ext uri="{FF2B5EF4-FFF2-40B4-BE49-F238E27FC236}">
-                  <a16:creationId xmlns:a16="http://schemas.microsoft.com/office/drawing/2014/main" xmlns="" id="{09891AC2-67E4-C933-04E7-0EBA5D40DAB9}"/>
+                  <a16:creationId xmlns="" xmlns:a16="http://schemas.microsoft.com/office/drawing/2014/main" id="{09891AC2-67E4-C933-04E7-0EBA5D40DAB9}"/>
                 </a:ext>
               </a:extLst>
             </p:cNvPr>
@@ -10705,7 +10705,7 @@
             <p:cNvPr id="101" name="Arc 100">
               <a:extLst>
                 <a:ext uri="{FF2B5EF4-FFF2-40B4-BE49-F238E27FC236}">
-                  <a16:creationId xmlns:a16="http://schemas.microsoft.com/office/drawing/2014/main" xmlns="" id="{29C2D272-0668-BE4F-E7C1-7D8429020EBF}"/>
+                  <a16:creationId xmlns="" xmlns:a16="http://schemas.microsoft.com/office/drawing/2014/main" id="{29C2D272-0668-BE4F-E7C1-7D8429020EBF}"/>
                 </a:ext>
               </a:extLst>
             </p:cNvPr>
@@ -10758,7 +10758,7 @@
           <p:cNvPr id="102" name="Group 101">
             <a:extLst>
               <a:ext uri="{FF2B5EF4-FFF2-40B4-BE49-F238E27FC236}">
-                <a16:creationId xmlns:a16="http://schemas.microsoft.com/office/drawing/2014/main" xmlns="" id="{B4784D22-3549-A07E-8BE3-6FEFDACFB891}"/>
+                <a16:creationId xmlns="" xmlns:a16="http://schemas.microsoft.com/office/drawing/2014/main" id="{B4784D22-3549-A07E-8BE3-6FEFDACFB891}"/>
               </a:ext>
             </a:extLst>
           </p:cNvPr>
@@ -10778,7 +10778,7 @@
             <p:cNvPr id="103" name="Oval 102">
               <a:extLst>
                 <a:ext uri="{FF2B5EF4-FFF2-40B4-BE49-F238E27FC236}">
-                  <a16:creationId xmlns:a16="http://schemas.microsoft.com/office/drawing/2014/main" xmlns="" id="{333A5B8C-FF23-37F4-0636-E6431D967D24}"/>
+                  <a16:creationId xmlns="" xmlns:a16="http://schemas.microsoft.com/office/drawing/2014/main" id="{333A5B8C-FF23-37F4-0636-E6431D967D24}"/>
                 </a:ext>
               </a:extLst>
             </p:cNvPr>
@@ -10837,7 +10837,7 @@
             <p:cNvPr id="104" name="Arc 103">
               <a:extLst>
                 <a:ext uri="{FF2B5EF4-FFF2-40B4-BE49-F238E27FC236}">
-                  <a16:creationId xmlns:a16="http://schemas.microsoft.com/office/drawing/2014/main" xmlns="" id="{9D6BC3B3-12BE-B8FA-18BC-F6B62D1F6F2C}"/>
+                  <a16:creationId xmlns="" xmlns:a16="http://schemas.microsoft.com/office/drawing/2014/main" id="{9D6BC3B3-12BE-B8FA-18BC-F6B62D1F6F2C}"/>
                 </a:ext>
               </a:extLst>
             </p:cNvPr>
@@ -10890,7 +10890,7 @@
           <p:cNvPr id="105" name="Group 104">
             <a:extLst>
               <a:ext uri="{FF2B5EF4-FFF2-40B4-BE49-F238E27FC236}">
-                <a16:creationId xmlns:a16="http://schemas.microsoft.com/office/drawing/2014/main" xmlns="" id="{AC081016-577A-FED1-CB20-C84262484FFE}"/>
+                <a16:creationId xmlns="" xmlns:a16="http://schemas.microsoft.com/office/drawing/2014/main" id="{AC081016-577A-FED1-CB20-C84262484FFE}"/>
               </a:ext>
             </a:extLst>
           </p:cNvPr>
@@ -10910,7 +10910,7 @@
             <p:cNvPr id="106" name="Oval 105">
               <a:extLst>
                 <a:ext uri="{FF2B5EF4-FFF2-40B4-BE49-F238E27FC236}">
-                  <a16:creationId xmlns:a16="http://schemas.microsoft.com/office/drawing/2014/main" xmlns="" id="{5660644D-C09F-668C-6D85-323D385BAD71}"/>
+                  <a16:creationId xmlns="" xmlns:a16="http://schemas.microsoft.com/office/drawing/2014/main" id="{5660644D-C09F-668C-6D85-323D385BAD71}"/>
                 </a:ext>
               </a:extLst>
             </p:cNvPr>
@@ -10969,7 +10969,7 @@
             <p:cNvPr id="107" name="Arc 106">
               <a:extLst>
                 <a:ext uri="{FF2B5EF4-FFF2-40B4-BE49-F238E27FC236}">
-                  <a16:creationId xmlns:a16="http://schemas.microsoft.com/office/drawing/2014/main" xmlns="" id="{A1A82F10-195A-E5EC-431C-D32796272193}"/>
+                  <a16:creationId xmlns="" xmlns:a16="http://schemas.microsoft.com/office/drawing/2014/main" id="{A1A82F10-195A-E5EC-431C-D32796272193}"/>
                 </a:ext>
               </a:extLst>
             </p:cNvPr>
@@ -11022,7 +11022,7 @@
           <p:cNvPr id="108" name="Group 107">
             <a:extLst>
               <a:ext uri="{FF2B5EF4-FFF2-40B4-BE49-F238E27FC236}">
-                <a16:creationId xmlns:a16="http://schemas.microsoft.com/office/drawing/2014/main" xmlns="" id="{F3119011-876C-B97A-DE38-97DE4FF2BC7B}"/>
+                <a16:creationId xmlns="" xmlns:a16="http://schemas.microsoft.com/office/drawing/2014/main" id="{F3119011-876C-B97A-DE38-97DE4FF2BC7B}"/>
               </a:ext>
             </a:extLst>
           </p:cNvPr>
@@ -11042,7 +11042,7 @@
             <p:cNvPr id="109" name="Oval 108">
               <a:extLst>
                 <a:ext uri="{FF2B5EF4-FFF2-40B4-BE49-F238E27FC236}">
-                  <a16:creationId xmlns:a16="http://schemas.microsoft.com/office/drawing/2014/main" xmlns="" id="{B047AB49-160A-EAFB-151E-981CCFC37DCF}"/>
+                  <a16:creationId xmlns="" xmlns:a16="http://schemas.microsoft.com/office/drawing/2014/main" id="{B047AB49-160A-EAFB-151E-981CCFC37DCF}"/>
                 </a:ext>
               </a:extLst>
             </p:cNvPr>
@@ -11101,7 +11101,7 @@
             <p:cNvPr id="110" name="Arc 109">
               <a:extLst>
                 <a:ext uri="{FF2B5EF4-FFF2-40B4-BE49-F238E27FC236}">
-                  <a16:creationId xmlns:a16="http://schemas.microsoft.com/office/drawing/2014/main" xmlns="" id="{57E82760-2743-C4FF-A5C0-C8AC26F18E5F}"/>
+                  <a16:creationId xmlns="" xmlns:a16="http://schemas.microsoft.com/office/drawing/2014/main" id="{57E82760-2743-C4FF-A5C0-C8AC26F18E5F}"/>
                 </a:ext>
               </a:extLst>
             </p:cNvPr>
@@ -11154,7 +11154,7 @@
           <p:cNvPr id="111" name="Group 110">
             <a:extLst>
               <a:ext uri="{FF2B5EF4-FFF2-40B4-BE49-F238E27FC236}">
-                <a16:creationId xmlns:a16="http://schemas.microsoft.com/office/drawing/2014/main" xmlns="" id="{0F115EEA-7C78-3DC1-9252-A29FCE129D36}"/>
+                <a16:creationId xmlns="" xmlns:a16="http://schemas.microsoft.com/office/drawing/2014/main" id="{0F115EEA-7C78-3DC1-9252-A29FCE129D36}"/>
               </a:ext>
             </a:extLst>
           </p:cNvPr>
@@ -11174,7 +11174,7 @@
             <p:cNvPr id="112" name="Oval 111">
               <a:extLst>
                 <a:ext uri="{FF2B5EF4-FFF2-40B4-BE49-F238E27FC236}">
-                  <a16:creationId xmlns:a16="http://schemas.microsoft.com/office/drawing/2014/main" xmlns="" id="{B0F510D5-0396-460C-CA3A-325D9E0AA995}"/>
+                  <a16:creationId xmlns="" xmlns:a16="http://schemas.microsoft.com/office/drawing/2014/main" id="{B0F510D5-0396-460C-CA3A-325D9E0AA995}"/>
                 </a:ext>
               </a:extLst>
             </p:cNvPr>
@@ -11233,7 +11233,7 @@
             <p:cNvPr id="113" name="Arc 112">
               <a:extLst>
                 <a:ext uri="{FF2B5EF4-FFF2-40B4-BE49-F238E27FC236}">
-                  <a16:creationId xmlns:a16="http://schemas.microsoft.com/office/drawing/2014/main" xmlns="" id="{1F90134C-5284-56BE-F6E2-CCBE31E6F056}"/>
+                  <a16:creationId xmlns="" xmlns:a16="http://schemas.microsoft.com/office/drawing/2014/main" id="{1F90134C-5284-56BE-F6E2-CCBE31E6F056}"/>
                 </a:ext>
               </a:extLst>
             </p:cNvPr>
@@ -11286,7 +11286,7 @@
           <p:cNvPr id="114" name="Group 113">
             <a:extLst>
               <a:ext uri="{FF2B5EF4-FFF2-40B4-BE49-F238E27FC236}">
-                <a16:creationId xmlns:a16="http://schemas.microsoft.com/office/drawing/2014/main" xmlns="" id="{DBDD9DAE-4A8B-98DA-B2C6-A04A05C72F81}"/>
+                <a16:creationId xmlns="" xmlns:a16="http://schemas.microsoft.com/office/drawing/2014/main" id="{DBDD9DAE-4A8B-98DA-B2C6-A04A05C72F81}"/>
               </a:ext>
             </a:extLst>
           </p:cNvPr>
@@ -11306,7 +11306,7 @@
             <p:cNvPr id="115" name="Oval 114">
               <a:extLst>
                 <a:ext uri="{FF2B5EF4-FFF2-40B4-BE49-F238E27FC236}">
-                  <a16:creationId xmlns:a16="http://schemas.microsoft.com/office/drawing/2014/main" xmlns="" id="{19DDBB64-A28C-9FFB-15BE-8934F26C2C31}"/>
+                  <a16:creationId xmlns="" xmlns:a16="http://schemas.microsoft.com/office/drawing/2014/main" id="{19DDBB64-A28C-9FFB-15BE-8934F26C2C31}"/>
                 </a:ext>
               </a:extLst>
             </p:cNvPr>
@@ -11365,7 +11365,7 @@
             <p:cNvPr id="116" name="Arc 115">
               <a:extLst>
                 <a:ext uri="{FF2B5EF4-FFF2-40B4-BE49-F238E27FC236}">
-                  <a16:creationId xmlns:a16="http://schemas.microsoft.com/office/drawing/2014/main" xmlns="" id="{0C2CB9C5-CF04-5A3B-A5DF-01951E1B43C3}"/>
+                  <a16:creationId xmlns="" xmlns:a16="http://schemas.microsoft.com/office/drawing/2014/main" id="{0C2CB9C5-CF04-5A3B-A5DF-01951E1B43C3}"/>
                 </a:ext>
               </a:extLst>
             </p:cNvPr>
@@ -11418,7 +11418,7 @@
           <p:cNvPr id="117" name="Group 116">
             <a:extLst>
               <a:ext uri="{FF2B5EF4-FFF2-40B4-BE49-F238E27FC236}">
-                <a16:creationId xmlns:a16="http://schemas.microsoft.com/office/drawing/2014/main" xmlns="" id="{00801F4C-8316-5A72-F42F-9772625E11B7}"/>
+                <a16:creationId xmlns="" xmlns:a16="http://schemas.microsoft.com/office/drawing/2014/main" id="{00801F4C-8316-5A72-F42F-9772625E11B7}"/>
               </a:ext>
             </a:extLst>
           </p:cNvPr>
@@ -11438,7 +11438,7 @@
             <p:cNvPr id="118" name="Oval 117">
               <a:extLst>
                 <a:ext uri="{FF2B5EF4-FFF2-40B4-BE49-F238E27FC236}">
-                  <a16:creationId xmlns:a16="http://schemas.microsoft.com/office/drawing/2014/main" xmlns="" id="{CA33F0B5-12D4-90AF-6393-67364390577E}"/>
+                  <a16:creationId xmlns="" xmlns:a16="http://schemas.microsoft.com/office/drawing/2014/main" id="{CA33F0B5-12D4-90AF-6393-67364390577E}"/>
                 </a:ext>
               </a:extLst>
             </p:cNvPr>
@@ -11497,7 +11497,7 @@
             <p:cNvPr id="119" name="Arc 118">
               <a:extLst>
                 <a:ext uri="{FF2B5EF4-FFF2-40B4-BE49-F238E27FC236}">
-                  <a16:creationId xmlns:a16="http://schemas.microsoft.com/office/drawing/2014/main" xmlns="" id="{3078780A-1850-DCF5-B468-9F7CE8FE01FF}"/>
+                  <a16:creationId xmlns="" xmlns:a16="http://schemas.microsoft.com/office/drawing/2014/main" id="{3078780A-1850-DCF5-B468-9F7CE8FE01FF}"/>
                 </a:ext>
               </a:extLst>
             </p:cNvPr>
@@ -11550,7 +11550,7 @@
           <p:cNvPr id="120" name="Group 119">
             <a:extLst>
               <a:ext uri="{FF2B5EF4-FFF2-40B4-BE49-F238E27FC236}">
-                <a16:creationId xmlns:a16="http://schemas.microsoft.com/office/drawing/2014/main" xmlns="" id="{124980AA-157C-2AFF-BD89-DBE2A5AEF073}"/>
+                <a16:creationId xmlns="" xmlns:a16="http://schemas.microsoft.com/office/drawing/2014/main" id="{124980AA-157C-2AFF-BD89-DBE2A5AEF073}"/>
               </a:ext>
             </a:extLst>
           </p:cNvPr>
@@ -11570,7 +11570,7 @@
             <p:cNvPr id="121" name="Oval 120">
               <a:extLst>
                 <a:ext uri="{FF2B5EF4-FFF2-40B4-BE49-F238E27FC236}">
-                  <a16:creationId xmlns:a16="http://schemas.microsoft.com/office/drawing/2014/main" xmlns="" id="{30D9338D-C487-4C9C-E00C-B4B47DD73A24}"/>
+                  <a16:creationId xmlns="" xmlns:a16="http://schemas.microsoft.com/office/drawing/2014/main" id="{30D9338D-C487-4C9C-E00C-B4B47DD73A24}"/>
                 </a:ext>
               </a:extLst>
             </p:cNvPr>
@@ -11629,7 +11629,7 @@
             <p:cNvPr id="122" name="Arc 121">
               <a:extLst>
                 <a:ext uri="{FF2B5EF4-FFF2-40B4-BE49-F238E27FC236}">
-                  <a16:creationId xmlns:a16="http://schemas.microsoft.com/office/drawing/2014/main" xmlns="" id="{FD010B24-85D4-B5AB-51F0-8C87B98564E3}"/>
+                  <a16:creationId xmlns="" xmlns:a16="http://schemas.microsoft.com/office/drawing/2014/main" id="{FD010B24-85D4-B5AB-51F0-8C87B98564E3}"/>
                 </a:ext>
               </a:extLst>
             </p:cNvPr>
@@ -11682,7 +11682,7 @@
           <p:cNvPr id="123" name="Rectangle 122">
             <a:extLst>
               <a:ext uri="{FF2B5EF4-FFF2-40B4-BE49-F238E27FC236}">
-                <a16:creationId xmlns:a16="http://schemas.microsoft.com/office/drawing/2014/main" xmlns="" id="{8D4C1EDA-9110-0D82-2ABF-69D43374D24D}"/>
+                <a16:creationId xmlns="" xmlns:a16="http://schemas.microsoft.com/office/drawing/2014/main" id="{8D4C1EDA-9110-0D82-2ABF-69D43374D24D}"/>
               </a:ext>
             </a:extLst>
           </p:cNvPr>
@@ -11692,7 +11692,7 @@
         <p:spPr>
           <a:xfrm>
             <a:off x="6561178" y="414992"/>
-            <a:ext cx="4921112" cy="5573834"/>
+            <a:ext cx="4921112" cy="5998565"/>
           </a:xfrm>
           <a:prstGeom prst="rect">
             <a:avLst/>
@@ -11744,29 +11744,22 @@
               <a:buChar char="ü"/>
             </a:pPr>
             <a:r>
-              <a:rPr lang="en-US" sz="2400" dirty="0" smtClean="0">
+              <a:rPr lang="en-US" sz="2000" dirty="0" smtClean="0">
                 <a:latin typeface="Times New Roman" panose="02020603050405020304" pitchFamily="18" charset="0"/>
                 <a:ea typeface="Times New Roman" panose="02020603050405020304" pitchFamily="18" charset="0"/>
                 <a:cs typeface="Arial" panose="020B0604020202020204" pitchFamily="34" charset="0"/>
               </a:rPr>
-              <a:t>EU is the largest importer region of Pakistani goods ($9.82 billion in 2025-2026). More than 30% exports send to EU members.</a:t>
+              <a:t>EU is the largest importer region of Pakistani goods ($9.82 billion in 2025-2026). More than 30% exports send to EU members</a:t>
             </a:r>
-            <a:endParaRPr lang="en-US" sz="2400" dirty="0">
-              <a:latin typeface="Times New Roman" panose="02020603050405020304" pitchFamily="18" charset="0"/>
-              <a:ea typeface="Times New Roman" panose="02020603050405020304" pitchFamily="18" charset="0"/>
-              <a:cs typeface="Arial" panose="020B0604020202020204" pitchFamily="34" charset="0"/>
-            </a:endParaRPr>
-          </a:p>
-          <a:p>
-            <a:pPr>
-              <a:lnSpc>
-                <a:spcPct val="115000"/>
-              </a:lnSpc>
-              <a:spcAft>
-                <a:spcPts val="1000"/>
-              </a:spcAft>
-            </a:pPr>
-            <a:endParaRPr lang="en-US" sz="2400" dirty="0">
+            <a:r>
+              <a:rPr lang="en-US" sz="2000" dirty="0" smtClean="0">
+                <a:latin typeface="Times New Roman" panose="02020603050405020304" pitchFamily="18" charset="0"/>
+                <a:ea typeface="Times New Roman" panose="02020603050405020304" pitchFamily="18" charset="0"/>
+                <a:cs typeface="Arial" panose="020B0604020202020204" pitchFamily="34" charset="0"/>
+              </a:rPr>
+              <a:t>.</a:t>
+            </a:r>
+            <a:endParaRPr lang="en-US" sz="2000" dirty="0">
               <a:latin typeface="Times New Roman" panose="02020603050405020304" pitchFamily="18" charset="0"/>
               <a:ea typeface="Times New Roman" panose="02020603050405020304" pitchFamily="18" charset="0"/>
               <a:cs typeface="Arial" panose="020B0604020202020204" pitchFamily="34" charset="0"/>
@@ -11784,7 +11777,7 @@
               <a:buChar char="ü"/>
             </a:pPr>
             <a:r>
-              <a:rPr lang="en-US" sz="2400" dirty="0" smtClean="0">
+              <a:rPr lang="en-US" sz="2000" dirty="0" smtClean="0">
                 <a:latin typeface="Times New Roman" panose="02020603050405020304" pitchFamily="18" charset="0"/>
                 <a:ea typeface="Calibri" panose="020F0502020204030204" pitchFamily="34" charset="0"/>
                 <a:cs typeface="Arial" panose="020B0604020202020204" pitchFamily="34" charset="0"/>
@@ -11792,7 +11785,7 @@
               <a:t>Pakistan exports Textile, Cotton, Fabric, Leather goods, Sports goods, IT, </a:t>
             </a:r>
             <a:r>
-              <a:rPr lang="en-US" sz="2400" dirty="0" err="1" smtClean="0">
+              <a:rPr lang="en-US" sz="2000" dirty="0" err="1" smtClean="0">
                 <a:latin typeface="Times New Roman" panose="02020603050405020304" pitchFamily="18" charset="0"/>
                 <a:ea typeface="Calibri" panose="020F0502020204030204" pitchFamily="34" charset="0"/>
                 <a:cs typeface="Arial" panose="020B0604020202020204" pitchFamily="34" charset="0"/>
@@ -11800,14 +11793,89 @@
               <a:t>Agri</a:t>
             </a:r>
             <a:r>
-              <a:rPr lang="en-US" sz="2400" dirty="0" smtClean="0">
+              <a:rPr lang="en-US" sz="2000" dirty="0" smtClean="0">
                 <a:latin typeface="Times New Roman" panose="02020603050405020304" pitchFamily="18" charset="0"/>
                 <a:ea typeface="Calibri" panose="020F0502020204030204" pitchFamily="34" charset="0"/>
                 <a:cs typeface="Arial" panose="020B0604020202020204" pitchFamily="34" charset="0"/>
               </a:rPr>
               <a:t>-food and Sea-food to EU. </a:t>
             </a:r>
-            <a:endParaRPr lang="en-US" sz="2000" dirty="0">
+            <a:endParaRPr lang="en-US" sz="2000" dirty="0" smtClean="0">
+              <a:latin typeface="Times New Roman" panose="02020603050405020304" pitchFamily="18" charset="0"/>
+              <a:ea typeface="Calibri" panose="020F0502020204030204" pitchFamily="34" charset="0"/>
+              <a:cs typeface="Arial" panose="020B0604020202020204" pitchFamily="34" charset="0"/>
+            </a:endParaRPr>
+          </a:p>
+          <a:p>
+            <a:pPr marL="457200" indent="-457200">
+              <a:lnSpc>
+                <a:spcPct val="115000"/>
+              </a:lnSpc>
+              <a:spcAft>
+                <a:spcPts val="1000"/>
+              </a:spcAft>
+              <a:buFont typeface="Wingdings" panose="05000000000000000000" pitchFamily="2" charset="2"/>
+              <a:buChar char="ü"/>
+            </a:pPr>
+            <a:r>
+              <a:rPr lang="en-US" sz="2000" dirty="0" smtClean="0">
+                <a:latin typeface="Times New Roman" panose="02020603050405020304" pitchFamily="18" charset="0"/>
+                <a:ea typeface="Calibri" panose="020F0502020204030204" pitchFamily="34" charset="0"/>
+                <a:cs typeface="Arial" panose="020B0604020202020204" pitchFamily="34" charset="0"/>
+              </a:rPr>
+              <a:t>Only one website in </a:t>
+            </a:r>
+            <a:r>
+              <a:rPr lang="en-US" sz="2000" dirty="0">
+                <a:latin typeface="Times New Roman" panose="02020603050405020304" pitchFamily="18" charset="0"/>
+                <a:ea typeface="Calibri" panose="020F0502020204030204" pitchFamily="34" charset="0"/>
+                <a:cs typeface="Arial" panose="020B0604020202020204" pitchFamily="34" charset="0"/>
+              </a:rPr>
+              <a:t>Pakistan </a:t>
+            </a:r>
+            <a:r>
+              <a:rPr lang="en-US" sz="2000" dirty="0">
+                <a:latin typeface="Times New Roman" panose="02020603050405020304" pitchFamily="18" charset="0"/>
+                <a:ea typeface="Calibri" panose="020F0502020204030204" pitchFamily="34" charset="0"/>
+                <a:cs typeface="Arial" panose="020B0604020202020204" pitchFamily="34" charset="0"/>
+                <a:hlinkClick r:id="rId2"/>
+              </a:rPr>
+              <a:t>https://www.pharmatrax.net/digital-product-passport-dpp</a:t>
+            </a:r>
+            <a:r>
+              <a:rPr lang="en-US" sz="2000" dirty="0" smtClean="0">
+                <a:latin typeface="Times New Roman" panose="02020603050405020304" pitchFamily="18" charset="0"/>
+                <a:ea typeface="Calibri" panose="020F0502020204030204" pitchFamily="34" charset="0"/>
+                <a:cs typeface="Arial" panose="020B0604020202020204" pitchFamily="34" charset="0"/>
+                <a:hlinkClick r:id="rId2"/>
+              </a:rPr>
+              <a:t>/</a:t>
+            </a:r>
+            <a:r>
+              <a:rPr lang="en-US" sz="2000" dirty="0" smtClean="0">
+                <a:latin typeface="Times New Roman" panose="02020603050405020304" pitchFamily="18" charset="0"/>
+                <a:ea typeface="Calibri" panose="020F0502020204030204" pitchFamily="34" charset="0"/>
+                <a:cs typeface="Arial" panose="020B0604020202020204" pitchFamily="34" charset="0"/>
+              </a:rPr>
+              <a:t> provides the service to </a:t>
+            </a:r>
+            <a:r>
+              <a:rPr lang="en-US" sz="2000" dirty="0" err="1" smtClean="0">
+                <a:latin typeface="Times New Roman" panose="02020603050405020304" pitchFamily="18" charset="0"/>
+                <a:ea typeface="Calibri" panose="020F0502020204030204" pitchFamily="34" charset="0"/>
+                <a:cs typeface="Arial" panose="020B0604020202020204" pitchFamily="34" charset="0"/>
+              </a:rPr>
+              <a:t>Pharma</a:t>
+            </a:r>
+            <a:r>
+              <a:rPr lang="en-US" sz="2000" dirty="0" smtClean="0">
+                <a:latin typeface="Times New Roman" panose="02020603050405020304" pitchFamily="18" charset="0"/>
+                <a:ea typeface="Calibri" panose="020F0502020204030204" pitchFamily="34" charset="0"/>
+                <a:cs typeface="Arial" panose="020B0604020202020204" pitchFamily="34" charset="0"/>
+              </a:rPr>
+              <a:t>, Cosmetics, Food and Beverage Industries.</a:t>
+            </a:r>
+            <a:endParaRPr lang="en-US" dirty="0">
               <a:latin typeface="Calibri" panose="020F0502020204030204" pitchFamily="34" charset="0"/>
               <a:ea typeface="Calibri" panose="020F0502020204030204" pitchFamily="34" charset="0"/>
               <a:cs typeface="Arial" panose="020B0604020202020204" pitchFamily="34" charset="0"/>
@@ -11855,7 +11923,7 @@
         <p:cNvPr id="1" name="">
           <a:extLst>
             <a:ext uri="{FF2B5EF4-FFF2-40B4-BE49-F238E27FC236}">
-              <a16:creationId xmlns:a16="http://schemas.microsoft.com/office/drawing/2014/main" xmlns="" id="{AB49B653-F82D-52DD-3373-EF7CD343807B}"/>
+              <a16:creationId xmlns="" xmlns:a16="http://schemas.microsoft.com/office/drawing/2014/main" id="{AB49B653-F82D-52DD-3373-EF7CD343807B}"/>
             </a:ext>
           </a:extLst>
         </p:cNvPr>
@@ -11875,7 +11943,7 @@
           <p:cNvPr id="5" name="Rectangle 4">
             <a:extLst>
               <a:ext uri="{FF2B5EF4-FFF2-40B4-BE49-F238E27FC236}">
-                <a16:creationId xmlns:a16="http://schemas.microsoft.com/office/drawing/2014/main" xmlns="" id="{0DBF747C-C898-FAC1-A684-D7D009857C24}"/>
+                <a16:creationId xmlns="" xmlns:a16="http://schemas.microsoft.com/office/drawing/2014/main" id="{0DBF747C-C898-FAC1-A684-D7D009857C24}"/>
               </a:ext>
             </a:extLst>
           </p:cNvPr>
@@ -11931,7 +11999,7 @@
           <p:cNvPr id="4" name="Rectangle 3">
             <a:extLst>
               <a:ext uri="{FF2B5EF4-FFF2-40B4-BE49-F238E27FC236}">
-                <a16:creationId xmlns:a16="http://schemas.microsoft.com/office/drawing/2014/main" xmlns="" id="{7B98B2E6-66EB-FA16-6CAA-7328B9409A56}"/>
+                <a16:creationId xmlns="" xmlns:a16="http://schemas.microsoft.com/office/drawing/2014/main" id="{7B98B2E6-66EB-FA16-6CAA-7328B9409A56}"/>
               </a:ext>
             </a:extLst>
           </p:cNvPr>
@@ -12168,7 +12236,7 @@
           <p:cNvPr id="6" name="Oval 5">
             <a:extLst>
               <a:ext uri="{FF2B5EF4-FFF2-40B4-BE49-F238E27FC236}">
-                <a16:creationId xmlns:a16="http://schemas.microsoft.com/office/drawing/2014/main" xmlns="" id="{18F27E5F-8AB7-C933-B1F5-63F52B4EBC77}"/>
+                <a16:creationId xmlns="" xmlns:a16="http://schemas.microsoft.com/office/drawing/2014/main" id="{18F27E5F-8AB7-C933-B1F5-63F52B4EBC77}"/>
               </a:ext>
             </a:extLst>
           </p:cNvPr>
@@ -12227,7 +12295,7 @@
           <p:cNvPr id="7" name="Oval 6">
             <a:extLst>
               <a:ext uri="{FF2B5EF4-FFF2-40B4-BE49-F238E27FC236}">
-                <a16:creationId xmlns:a16="http://schemas.microsoft.com/office/drawing/2014/main" xmlns="" id="{84EEC563-2DED-4416-2C87-31455035FB0C}"/>
+                <a16:creationId xmlns="" xmlns:a16="http://schemas.microsoft.com/office/drawing/2014/main" id="{84EEC563-2DED-4416-2C87-31455035FB0C}"/>
               </a:ext>
             </a:extLst>
           </p:cNvPr>
@@ -12286,7 +12354,7 @@
           <p:cNvPr id="8" name="Oval 7">
             <a:extLst>
               <a:ext uri="{FF2B5EF4-FFF2-40B4-BE49-F238E27FC236}">
-                <a16:creationId xmlns:a16="http://schemas.microsoft.com/office/drawing/2014/main" xmlns="" id="{E40D0E73-9F08-859E-43E2-25EB19218526}"/>
+                <a16:creationId xmlns="" xmlns:a16="http://schemas.microsoft.com/office/drawing/2014/main" id="{E40D0E73-9F08-859E-43E2-25EB19218526}"/>
               </a:ext>
             </a:extLst>
           </p:cNvPr>
@@ -12345,7 +12413,7 @@
           <p:cNvPr id="9" name="Oval 8">
             <a:extLst>
               <a:ext uri="{FF2B5EF4-FFF2-40B4-BE49-F238E27FC236}">
-                <a16:creationId xmlns:a16="http://schemas.microsoft.com/office/drawing/2014/main" xmlns="" id="{4DB5A593-0CFB-36F3-F8DA-C3F3A2CFB622}"/>
+                <a16:creationId xmlns="" xmlns:a16="http://schemas.microsoft.com/office/drawing/2014/main" id="{4DB5A593-0CFB-36F3-F8DA-C3F3A2CFB622}"/>
               </a:ext>
             </a:extLst>
           </p:cNvPr>
@@ -12404,7 +12472,7 @@
           <p:cNvPr id="10" name="Oval 9">
             <a:extLst>
               <a:ext uri="{FF2B5EF4-FFF2-40B4-BE49-F238E27FC236}">
-                <a16:creationId xmlns:a16="http://schemas.microsoft.com/office/drawing/2014/main" xmlns="" id="{AA568633-31CA-A32D-D861-3B1240EC81B6}"/>
+                <a16:creationId xmlns="" xmlns:a16="http://schemas.microsoft.com/office/drawing/2014/main" id="{AA568633-31CA-A32D-D861-3B1240EC81B6}"/>
               </a:ext>
             </a:extLst>
           </p:cNvPr>
@@ -12463,7 +12531,7 @@
           <p:cNvPr id="11" name="Oval 10">
             <a:extLst>
               <a:ext uri="{FF2B5EF4-FFF2-40B4-BE49-F238E27FC236}">
-                <a16:creationId xmlns:a16="http://schemas.microsoft.com/office/drawing/2014/main" xmlns="" id="{D0946FD7-DEB2-0AEE-D3E7-FAABAC2357AF}"/>
+                <a16:creationId xmlns="" xmlns:a16="http://schemas.microsoft.com/office/drawing/2014/main" id="{D0946FD7-DEB2-0AEE-D3E7-FAABAC2357AF}"/>
               </a:ext>
             </a:extLst>
           </p:cNvPr>
@@ -12522,7 +12590,7 @@
           <p:cNvPr id="12" name="Oval 11">
             <a:extLst>
               <a:ext uri="{FF2B5EF4-FFF2-40B4-BE49-F238E27FC236}">
-                <a16:creationId xmlns:a16="http://schemas.microsoft.com/office/drawing/2014/main" xmlns="" id="{8D9F2A4B-9D87-7FFE-1886-9FC01DA34065}"/>
+                <a16:creationId xmlns="" xmlns:a16="http://schemas.microsoft.com/office/drawing/2014/main" id="{8D9F2A4B-9D87-7FFE-1886-9FC01DA34065}"/>
               </a:ext>
             </a:extLst>
           </p:cNvPr>
@@ -12581,7 +12649,7 @@
           <p:cNvPr id="13" name="Oval 12">
             <a:extLst>
               <a:ext uri="{FF2B5EF4-FFF2-40B4-BE49-F238E27FC236}">
-                <a16:creationId xmlns:a16="http://schemas.microsoft.com/office/drawing/2014/main" xmlns="" id="{2D1C037B-9232-194A-F63E-D1198BD5BECB}"/>
+                <a16:creationId xmlns="" xmlns:a16="http://schemas.microsoft.com/office/drawing/2014/main" id="{2D1C037B-9232-194A-F63E-D1198BD5BECB}"/>
               </a:ext>
             </a:extLst>
           </p:cNvPr>
@@ -12640,7 +12708,7 @@
           <p:cNvPr id="14" name="Oval 13">
             <a:extLst>
               <a:ext uri="{FF2B5EF4-FFF2-40B4-BE49-F238E27FC236}">
-                <a16:creationId xmlns:a16="http://schemas.microsoft.com/office/drawing/2014/main" xmlns="" id="{97981C1E-3857-DF09-0177-8A06F7B8C93F}"/>
+                <a16:creationId xmlns="" xmlns:a16="http://schemas.microsoft.com/office/drawing/2014/main" id="{97981C1E-3857-DF09-0177-8A06F7B8C93F}"/>
               </a:ext>
             </a:extLst>
           </p:cNvPr>
@@ -12699,7 +12767,7 @@
           <p:cNvPr id="15" name="Oval 14">
             <a:extLst>
               <a:ext uri="{FF2B5EF4-FFF2-40B4-BE49-F238E27FC236}">
-                <a16:creationId xmlns:a16="http://schemas.microsoft.com/office/drawing/2014/main" xmlns="" id="{041C004F-2B07-5BE4-E16D-AFA271378B4F}"/>
+                <a16:creationId xmlns="" xmlns:a16="http://schemas.microsoft.com/office/drawing/2014/main" id="{041C004F-2B07-5BE4-E16D-AFA271378B4F}"/>
               </a:ext>
             </a:extLst>
           </p:cNvPr>
@@ -12758,7 +12826,7 @@
           <p:cNvPr id="16" name="Oval 15">
             <a:extLst>
               <a:ext uri="{FF2B5EF4-FFF2-40B4-BE49-F238E27FC236}">
-                <a16:creationId xmlns:a16="http://schemas.microsoft.com/office/drawing/2014/main" xmlns="" id="{1767DF3F-7FF7-2A4C-6211-20A32CA30D60}"/>
+                <a16:creationId xmlns="" xmlns:a16="http://schemas.microsoft.com/office/drawing/2014/main" id="{1767DF3F-7FF7-2A4C-6211-20A32CA30D60}"/>
               </a:ext>
             </a:extLst>
           </p:cNvPr>
@@ -12817,7 +12885,7 @@
           <p:cNvPr id="17" name="Oval 16">
             <a:extLst>
               <a:ext uri="{FF2B5EF4-FFF2-40B4-BE49-F238E27FC236}">
-                <a16:creationId xmlns:a16="http://schemas.microsoft.com/office/drawing/2014/main" xmlns="" id="{0989497C-10B7-BD33-02AC-312809AFEA7E}"/>
+                <a16:creationId xmlns="" xmlns:a16="http://schemas.microsoft.com/office/drawing/2014/main" id="{0989497C-10B7-BD33-02AC-312809AFEA7E}"/>
               </a:ext>
             </a:extLst>
           </p:cNvPr>
@@ -12876,7 +12944,7 @@
           <p:cNvPr id="18" name="Oval 17">
             <a:extLst>
               <a:ext uri="{FF2B5EF4-FFF2-40B4-BE49-F238E27FC236}">
-                <a16:creationId xmlns:a16="http://schemas.microsoft.com/office/drawing/2014/main" xmlns="" id="{EC170CAD-85DD-951C-2E45-44F4B3207F5A}"/>
+                <a16:creationId xmlns="" xmlns:a16="http://schemas.microsoft.com/office/drawing/2014/main" id="{EC170CAD-85DD-951C-2E45-44F4B3207F5A}"/>
               </a:ext>
             </a:extLst>
           </p:cNvPr>
@@ -12935,7 +13003,7 @@
           <p:cNvPr id="19" name="Oval 18">
             <a:extLst>
               <a:ext uri="{FF2B5EF4-FFF2-40B4-BE49-F238E27FC236}">
-                <a16:creationId xmlns:a16="http://schemas.microsoft.com/office/drawing/2014/main" xmlns="" id="{6CBFAEB0-427B-C183-269E-B7F22C532425}"/>
+                <a16:creationId xmlns="" xmlns:a16="http://schemas.microsoft.com/office/drawing/2014/main" id="{6CBFAEB0-427B-C183-269E-B7F22C532425}"/>
               </a:ext>
             </a:extLst>
           </p:cNvPr>
@@ -12994,7 +13062,7 @@
           <p:cNvPr id="20" name="Oval 19">
             <a:extLst>
               <a:ext uri="{FF2B5EF4-FFF2-40B4-BE49-F238E27FC236}">
-                <a16:creationId xmlns:a16="http://schemas.microsoft.com/office/drawing/2014/main" xmlns="" id="{1A865A29-9259-99F5-30D2-7D9D77A07673}"/>
+                <a16:creationId xmlns="" xmlns:a16="http://schemas.microsoft.com/office/drawing/2014/main" id="{1A865A29-9259-99F5-30D2-7D9D77A07673}"/>
               </a:ext>
             </a:extLst>
           </p:cNvPr>
@@ -13053,7 +13121,7 @@
           <p:cNvPr id="21" name="Oval 20">
             <a:extLst>
               <a:ext uri="{FF2B5EF4-FFF2-40B4-BE49-F238E27FC236}">
-                <a16:creationId xmlns:a16="http://schemas.microsoft.com/office/drawing/2014/main" xmlns="" id="{A9BD25F8-8B1D-B8B7-5509-6B3900E77488}"/>
+                <a16:creationId xmlns="" xmlns:a16="http://schemas.microsoft.com/office/drawing/2014/main" id="{A9BD25F8-8B1D-B8B7-5509-6B3900E77488}"/>
               </a:ext>
             </a:extLst>
           </p:cNvPr>
@@ -13112,7 +13180,7 @@
           <p:cNvPr id="22" name="Oval 21">
             <a:extLst>
               <a:ext uri="{FF2B5EF4-FFF2-40B4-BE49-F238E27FC236}">
-                <a16:creationId xmlns:a16="http://schemas.microsoft.com/office/drawing/2014/main" xmlns="" id="{8C325336-0110-64E7-17C1-798D8BA62F8F}"/>
+                <a16:creationId xmlns="" xmlns:a16="http://schemas.microsoft.com/office/drawing/2014/main" id="{8C325336-0110-64E7-17C1-798D8BA62F8F}"/>
               </a:ext>
             </a:extLst>
           </p:cNvPr>
@@ -13171,7 +13239,7 @@
           <p:cNvPr id="23" name="Oval 22">
             <a:extLst>
               <a:ext uri="{FF2B5EF4-FFF2-40B4-BE49-F238E27FC236}">
-                <a16:creationId xmlns:a16="http://schemas.microsoft.com/office/drawing/2014/main" xmlns="" id="{7ED93CA2-6975-2E8B-C7B5-B07148930960}"/>
+                <a16:creationId xmlns="" xmlns:a16="http://schemas.microsoft.com/office/drawing/2014/main" id="{7ED93CA2-6975-2E8B-C7B5-B07148930960}"/>
               </a:ext>
             </a:extLst>
           </p:cNvPr>
@@ -13230,7 +13298,7 @@
           <p:cNvPr id="24" name="Oval 23">
             <a:extLst>
               <a:ext uri="{FF2B5EF4-FFF2-40B4-BE49-F238E27FC236}">
-                <a16:creationId xmlns:a16="http://schemas.microsoft.com/office/drawing/2014/main" xmlns="" id="{6E252A62-4114-2C2C-0938-450CA28947E9}"/>
+                <a16:creationId xmlns="" xmlns:a16="http://schemas.microsoft.com/office/drawing/2014/main" id="{6E252A62-4114-2C2C-0938-450CA28947E9}"/>
               </a:ext>
             </a:extLst>
           </p:cNvPr>
@@ -13289,7 +13357,7 @@
           <p:cNvPr id="25" name="Oval 24">
             <a:extLst>
               <a:ext uri="{FF2B5EF4-FFF2-40B4-BE49-F238E27FC236}">
-                <a16:creationId xmlns:a16="http://schemas.microsoft.com/office/drawing/2014/main" xmlns="" id="{15145535-565B-35B3-4181-D04856B0357E}"/>
+                <a16:creationId xmlns="" xmlns:a16="http://schemas.microsoft.com/office/drawing/2014/main" id="{15145535-565B-35B3-4181-D04856B0357E}"/>
               </a:ext>
             </a:extLst>
           </p:cNvPr>
@@ -13348,7 +13416,7 @@
           <p:cNvPr id="26" name="Oval 25">
             <a:extLst>
               <a:ext uri="{FF2B5EF4-FFF2-40B4-BE49-F238E27FC236}">
-                <a16:creationId xmlns:a16="http://schemas.microsoft.com/office/drawing/2014/main" xmlns="" id="{677DA24D-DD66-AAFE-2F4E-3D71AA3E6AB0}"/>
+                <a16:creationId xmlns="" xmlns:a16="http://schemas.microsoft.com/office/drawing/2014/main" id="{677DA24D-DD66-AAFE-2F4E-3D71AA3E6AB0}"/>
               </a:ext>
             </a:extLst>
           </p:cNvPr>
@@ -13407,7 +13475,7 @@
           <p:cNvPr id="27" name="Oval 26">
             <a:extLst>
               <a:ext uri="{FF2B5EF4-FFF2-40B4-BE49-F238E27FC236}">
-                <a16:creationId xmlns:a16="http://schemas.microsoft.com/office/drawing/2014/main" xmlns="" id="{E415858E-4B5C-CDA9-DE2D-B7CBA68C8556}"/>
+                <a16:creationId xmlns="" xmlns:a16="http://schemas.microsoft.com/office/drawing/2014/main" id="{E415858E-4B5C-CDA9-DE2D-B7CBA68C8556}"/>
               </a:ext>
             </a:extLst>
           </p:cNvPr>
@@ -13466,7 +13534,7 @@
           <p:cNvPr id="28" name="Oval 27">
             <a:extLst>
               <a:ext uri="{FF2B5EF4-FFF2-40B4-BE49-F238E27FC236}">
-                <a16:creationId xmlns:a16="http://schemas.microsoft.com/office/drawing/2014/main" xmlns="" id="{167A0A27-6BA4-DD53-F081-83B7B05F0261}"/>
+                <a16:creationId xmlns="" xmlns:a16="http://schemas.microsoft.com/office/drawing/2014/main" id="{167A0A27-6BA4-DD53-F081-83B7B05F0261}"/>
               </a:ext>
             </a:extLst>
           </p:cNvPr>
@@ -13525,7 +13593,7 @@
           <p:cNvPr id="29" name="Oval 28">
             <a:extLst>
               <a:ext uri="{FF2B5EF4-FFF2-40B4-BE49-F238E27FC236}">
-                <a16:creationId xmlns:a16="http://schemas.microsoft.com/office/drawing/2014/main" xmlns="" id="{6299853B-AA90-3849-11F1-1A4C48F71365}"/>
+                <a16:creationId xmlns="" xmlns:a16="http://schemas.microsoft.com/office/drawing/2014/main" id="{6299853B-AA90-3849-11F1-1A4C48F71365}"/>
               </a:ext>
             </a:extLst>
           </p:cNvPr>
@@ -13584,7 +13652,7 @@
           <p:cNvPr id="3" name="Group 2">
             <a:extLst>
               <a:ext uri="{FF2B5EF4-FFF2-40B4-BE49-F238E27FC236}">
-                <a16:creationId xmlns:a16="http://schemas.microsoft.com/office/drawing/2014/main" xmlns="" id="{26C3F351-D61A-FCB1-7694-AF167DCEE280}"/>
+                <a16:creationId xmlns="" xmlns:a16="http://schemas.microsoft.com/office/drawing/2014/main" id="{26C3F351-D61A-FCB1-7694-AF167DCEE280}"/>
               </a:ext>
             </a:extLst>
           </p:cNvPr>
@@ -13604,7 +13672,7 @@
             <p:cNvPr id="2" name="Oval 1">
               <a:extLst>
                 <a:ext uri="{FF2B5EF4-FFF2-40B4-BE49-F238E27FC236}">
-                  <a16:creationId xmlns:a16="http://schemas.microsoft.com/office/drawing/2014/main" xmlns="" id="{A6E2D6B3-342D-EB5F-5E19-8537633AB28F}"/>
+                  <a16:creationId xmlns="" xmlns:a16="http://schemas.microsoft.com/office/drawing/2014/main" id="{A6E2D6B3-342D-EB5F-5E19-8537633AB28F}"/>
                 </a:ext>
               </a:extLst>
             </p:cNvPr>
@@ -13663,7 +13731,7 @@
             <p:cNvPr id="30" name="Arc 29">
               <a:extLst>
                 <a:ext uri="{FF2B5EF4-FFF2-40B4-BE49-F238E27FC236}">
-                  <a16:creationId xmlns:a16="http://schemas.microsoft.com/office/drawing/2014/main" xmlns="" id="{36056DEA-49DE-7763-422D-4DBF22C9EF60}"/>
+                  <a16:creationId xmlns="" xmlns:a16="http://schemas.microsoft.com/office/drawing/2014/main" id="{36056DEA-49DE-7763-422D-4DBF22C9EF60}"/>
                 </a:ext>
               </a:extLst>
             </p:cNvPr>
@@ -13716,7 +13784,7 @@
           <p:cNvPr id="54" name="Group 53">
             <a:extLst>
               <a:ext uri="{FF2B5EF4-FFF2-40B4-BE49-F238E27FC236}">
-                <a16:creationId xmlns:a16="http://schemas.microsoft.com/office/drawing/2014/main" xmlns="" id="{4E1C400F-26D6-1823-2C78-C7631F622635}"/>
+                <a16:creationId xmlns="" xmlns:a16="http://schemas.microsoft.com/office/drawing/2014/main" id="{4E1C400F-26D6-1823-2C78-C7631F622635}"/>
               </a:ext>
             </a:extLst>
           </p:cNvPr>
@@ -13736,7 +13804,7 @@
             <p:cNvPr id="55" name="Oval 54">
               <a:extLst>
                 <a:ext uri="{FF2B5EF4-FFF2-40B4-BE49-F238E27FC236}">
-                  <a16:creationId xmlns:a16="http://schemas.microsoft.com/office/drawing/2014/main" xmlns="" id="{E1A04797-A8C7-E3D9-7170-3A4959849C1F}"/>
+                  <a16:creationId xmlns="" xmlns:a16="http://schemas.microsoft.com/office/drawing/2014/main" id="{E1A04797-A8C7-E3D9-7170-3A4959849C1F}"/>
                 </a:ext>
               </a:extLst>
             </p:cNvPr>
@@ -13795,7 +13863,7 @@
             <p:cNvPr id="56" name="Arc 55">
               <a:extLst>
                 <a:ext uri="{FF2B5EF4-FFF2-40B4-BE49-F238E27FC236}">
-                  <a16:creationId xmlns:a16="http://schemas.microsoft.com/office/drawing/2014/main" xmlns="" id="{E12EA4D8-8589-F8DD-DE0E-66C2177C97E3}"/>
+                  <a16:creationId xmlns="" xmlns:a16="http://schemas.microsoft.com/office/drawing/2014/main" id="{E12EA4D8-8589-F8DD-DE0E-66C2177C97E3}"/>
                 </a:ext>
               </a:extLst>
             </p:cNvPr>
@@ -13848,7 +13916,7 @@
           <p:cNvPr id="57" name="Group 56">
             <a:extLst>
               <a:ext uri="{FF2B5EF4-FFF2-40B4-BE49-F238E27FC236}">
-                <a16:creationId xmlns:a16="http://schemas.microsoft.com/office/drawing/2014/main" xmlns="" id="{A087BCDE-7005-25A4-1860-46331DFEFBA5}"/>
+                <a16:creationId xmlns="" xmlns:a16="http://schemas.microsoft.com/office/drawing/2014/main" id="{A087BCDE-7005-25A4-1860-46331DFEFBA5}"/>
               </a:ext>
             </a:extLst>
           </p:cNvPr>
@@ -13868,7 +13936,7 @@
             <p:cNvPr id="58" name="Oval 57">
               <a:extLst>
                 <a:ext uri="{FF2B5EF4-FFF2-40B4-BE49-F238E27FC236}">
-                  <a16:creationId xmlns:a16="http://schemas.microsoft.com/office/drawing/2014/main" xmlns="" id="{3581949D-442F-7524-F99D-5A8088D8E142}"/>
+                  <a16:creationId xmlns="" xmlns:a16="http://schemas.microsoft.com/office/drawing/2014/main" id="{3581949D-442F-7524-F99D-5A8088D8E142}"/>
                 </a:ext>
               </a:extLst>
             </p:cNvPr>
@@ -13927,7 +13995,7 @@
             <p:cNvPr id="59" name="Arc 58">
               <a:extLst>
                 <a:ext uri="{FF2B5EF4-FFF2-40B4-BE49-F238E27FC236}">
-                  <a16:creationId xmlns:a16="http://schemas.microsoft.com/office/drawing/2014/main" xmlns="" id="{02D7B595-29A3-11C1-3614-A3198F94592C}"/>
+                  <a16:creationId xmlns="" xmlns:a16="http://schemas.microsoft.com/office/drawing/2014/main" id="{02D7B595-29A3-11C1-3614-A3198F94592C}"/>
                 </a:ext>
               </a:extLst>
             </p:cNvPr>
@@ -13980,7 +14048,7 @@
           <p:cNvPr id="60" name="Group 59">
             <a:extLst>
               <a:ext uri="{FF2B5EF4-FFF2-40B4-BE49-F238E27FC236}">
-                <a16:creationId xmlns:a16="http://schemas.microsoft.com/office/drawing/2014/main" xmlns="" id="{FB290B83-0E01-2860-E35D-2FF552994951}"/>
+                <a16:creationId xmlns="" xmlns:a16="http://schemas.microsoft.com/office/drawing/2014/main" id="{FB290B83-0E01-2860-E35D-2FF552994951}"/>
               </a:ext>
             </a:extLst>
           </p:cNvPr>
@@ -14000,7 +14068,7 @@
             <p:cNvPr id="61" name="Oval 60">
               <a:extLst>
                 <a:ext uri="{FF2B5EF4-FFF2-40B4-BE49-F238E27FC236}">
-                  <a16:creationId xmlns:a16="http://schemas.microsoft.com/office/drawing/2014/main" xmlns="" id="{6F929B18-1882-FDE4-813E-6B0362098925}"/>
+                  <a16:creationId xmlns="" xmlns:a16="http://schemas.microsoft.com/office/drawing/2014/main" id="{6F929B18-1882-FDE4-813E-6B0362098925}"/>
                 </a:ext>
               </a:extLst>
             </p:cNvPr>
@@ -14059,7 +14127,7 @@
             <p:cNvPr id="62" name="Arc 61">
               <a:extLst>
                 <a:ext uri="{FF2B5EF4-FFF2-40B4-BE49-F238E27FC236}">
-                  <a16:creationId xmlns:a16="http://schemas.microsoft.com/office/drawing/2014/main" xmlns="" id="{982FB3D8-FD66-CA49-64EC-27B30CFD234A}"/>
+                  <a16:creationId xmlns="" xmlns:a16="http://schemas.microsoft.com/office/drawing/2014/main" id="{982FB3D8-FD66-CA49-64EC-27B30CFD234A}"/>
                 </a:ext>
               </a:extLst>
             </p:cNvPr>
@@ -14112,7 +14180,7 @@
           <p:cNvPr id="63" name="Group 62">
             <a:extLst>
               <a:ext uri="{FF2B5EF4-FFF2-40B4-BE49-F238E27FC236}">
-                <a16:creationId xmlns:a16="http://schemas.microsoft.com/office/drawing/2014/main" xmlns="" id="{7825E36E-56DC-774E-6E7A-31BA18848AA1}"/>
+                <a16:creationId xmlns="" xmlns:a16="http://schemas.microsoft.com/office/drawing/2014/main" id="{7825E36E-56DC-774E-6E7A-31BA18848AA1}"/>
               </a:ext>
             </a:extLst>
           </p:cNvPr>
@@ -14132,7 +14200,7 @@
             <p:cNvPr id="64" name="Oval 63">
               <a:extLst>
                 <a:ext uri="{FF2B5EF4-FFF2-40B4-BE49-F238E27FC236}">
-                  <a16:creationId xmlns:a16="http://schemas.microsoft.com/office/drawing/2014/main" xmlns="" id="{ED86C4D0-421F-E188-D347-FB75A80318D7}"/>
+                  <a16:creationId xmlns="" xmlns:a16="http://schemas.microsoft.com/office/drawing/2014/main" id="{ED86C4D0-421F-E188-D347-FB75A80318D7}"/>
                 </a:ext>
               </a:extLst>
             </p:cNvPr>
@@ -14191,7 +14259,7 @@
             <p:cNvPr id="65" name="Arc 64">
               <a:extLst>
                 <a:ext uri="{FF2B5EF4-FFF2-40B4-BE49-F238E27FC236}">
-                  <a16:creationId xmlns:a16="http://schemas.microsoft.com/office/drawing/2014/main" xmlns="" id="{7251B93F-50B9-C260-ECEA-5767A3723660}"/>
+                  <a16:creationId xmlns="" xmlns:a16="http://schemas.microsoft.com/office/drawing/2014/main" id="{7251B93F-50B9-C260-ECEA-5767A3723660}"/>
                 </a:ext>
               </a:extLst>
             </p:cNvPr>
@@ -14244,7 +14312,7 @@
           <p:cNvPr id="66" name="Group 65">
             <a:extLst>
               <a:ext uri="{FF2B5EF4-FFF2-40B4-BE49-F238E27FC236}">
-                <a16:creationId xmlns:a16="http://schemas.microsoft.com/office/drawing/2014/main" xmlns="" id="{C3079399-2A21-14E1-E7E4-E94ED810D168}"/>
+                <a16:creationId xmlns="" xmlns:a16="http://schemas.microsoft.com/office/drawing/2014/main" id="{C3079399-2A21-14E1-E7E4-E94ED810D168}"/>
               </a:ext>
             </a:extLst>
           </p:cNvPr>
@@ -14264,7 +14332,7 @@
             <p:cNvPr id="67" name="Oval 66">
               <a:extLst>
                 <a:ext uri="{FF2B5EF4-FFF2-40B4-BE49-F238E27FC236}">
-                  <a16:creationId xmlns:a16="http://schemas.microsoft.com/office/drawing/2014/main" xmlns="" id="{7CD11775-2901-2E40-5490-630DC1623B0F}"/>
+                  <a16:creationId xmlns="" xmlns:a16="http://schemas.microsoft.com/office/drawing/2014/main" id="{7CD11775-2901-2E40-5490-630DC1623B0F}"/>
                 </a:ext>
               </a:extLst>
             </p:cNvPr>
@@ -14323,7 +14391,7 @@
             <p:cNvPr id="68" name="Arc 67">
               <a:extLst>
                 <a:ext uri="{FF2B5EF4-FFF2-40B4-BE49-F238E27FC236}">
-                  <a16:creationId xmlns:a16="http://schemas.microsoft.com/office/drawing/2014/main" xmlns="" id="{5B556831-69E2-8918-5D16-C84DEC612606}"/>
+                  <a16:creationId xmlns="" xmlns:a16="http://schemas.microsoft.com/office/drawing/2014/main" id="{5B556831-69E2-8918-5D16-C84DEC612606}"/>
                 </a:ext>
               </a:extLst>
             </p:cNvPr>
@@ -14376,7 +14444,7 @@
           <p:cNvPr id="69" name="Group 68">
             <a:extLst>
               <a:ext uri="{FF2B5EF4-FFF2-40B4-BE49-F238E27FC236}">
-                <a16:creationId xmlns:a16="http://schemas.microsoft.com/office/drawing/2014/main" xmlns="" id="{5ADEE217-7DF5-3EDB-61BF-AF3C812CBEE6}"/>
+                <a16:creationId xmlns="" xmlns:a16="http://schemas.microsoft.com/office/drawing/2014/main" id="{5ADEE217-7DF5-3EDB-61BF-AF3C812CBEE6}"/>
               </a:ext>
             </a:extLst>
           </p:cNvPr>
@@ -14396,7 +14464,7 @@
             <p:cNvPr id="70" name="Oval 69">
               <a:extLst>
                 <a:ext uri="{FF2B5EF4-FFF2-40B4-BE49-F238E27FC236}">
-                  <a16:creationId xmlns:a16="http://schemas.microsoft.com/office/drawing/2014/main" xmlns="" id="{841DE28C-2D28-1185-E3B4-C2BB3354E52B}"/>
+                  <a16:creationId xmlns="" xmlns:a16="http://schemas.microsoft.com/office/drawing/2014/main" id="{841DE28C-2D28-1185-E3B4-C2BB3354E52B}"/>
                 </a:ext>
               </a:extLst>
             </p:cNvPr>
@@ -14455,7 +14523,7 @@
             <p:cNvPr id="71" name="Arc 70">
               <a:extLst>
                 <a:ext uri="{FF2B5EF4-FFF2-40B4-BE49-F238E27FC236}">
-                  <a16:creationId xmlns:a16="http://schemas.microsoft.com/office/drawing/2014/main" xmlns="" id="{FADBB813-4022-6BF4-4302-D581AB1A6C99}"/>
+                  <a16:creationId xmlns="" xmlns:a16="http://schemas.microsoft.com/office/drawing/2014/main" id="{FADBB813-4022-6BF4-4302-D581AB1A6C99}"/>
                 </a:ext>
               </a:extLst>
             </p:cNvPr>
@@ -14508,7 +14576,7 @@
           <p:cNvPr id="72" name="Group 71">
             <a:extLst>
               <a:ext uri="{FF2B5EF4-FFF2-40B4-BE49-F238E27FC236}">
-                <a16:creationId xmlns:a16="http://schemas.microsoft.com/office/drawing/2014/main" xmlns="" id="{9D9C9153-B8FA-38C4-EB67-86B9459BFFE9}"/>
+                <a16:creationId xmlns="" xmlns:a16="http://schemas.microsoft.com/office/drawing/2014/main" id="{9D9C9153-B8FA-38C4-EB67-86B9459BFFE9}"/>
               </a:ext>
             </a:extLst>
           </p:cNvPr>
@@ -14528,7 +14596,7 @@
             <p:cNvPr id="73" name="Oval 72">
               <a:extLst>
                 <a:ext uri="{FF2B5EF4-FFF2-40B4-BE49-F238E27FC236}">
-                  <a16:creationId xmlns:a16="http://schemas.microsoft.com/office/drawing/2014/main" xmlns="" id="{874762A5-21AC-4851-DF9C-A0D7DBFA5AFA}"/>
+                  <a16:creationId xmlns="" xmlns:a16="http://schemas.microsoft.com/office/drawing/2014/main" id="{874762A5-21AC-4851-DF9C-A0D7DBFA5AFA}"/>
                 </a:ext>
               </a:extLst>
             </p:cNvPr>
@@ -14587,7 +14655,7 @@
             <p:cNvPr id="74" name="Arc 73">
               <a:extLst>
                 <a:ext uri="{FF2B5EF4-FFF2-40B4-BE49-F238E27FC236}">
-                  <a16:creationId xmlns:a16="http://schemas.microsoft.com/office/drawing/2014/main" xmlns="" id="{BDBA534A-9F3C-F651-600E-DD503C672D20}"/>
+                  <a16:creationId xmlns="" xmlns:a16="http://schemas.microsoft.com/office/drawing/2014/main" id="{BDBA534A-9F3C-F651-600E-DD503C672D20}"/>
                 </a:ext>
               </a:extLst>
             </p:cNvPr>
@@ -14640,7 +14708,7 @@
           <p:cNvPr id="75" name="Group 74">
             <a:extLst>
               <a:ext uri="{FF2B5EF4-FFF2-40B4-BE49-F238E27FC236}">
-                <a16:creationId xmlns:a16="http://schemas.microsoft.com/office/drawing/2014/main" xmlns="" id="{79961178-ABE0-C7D2-04FE-9A129BC81ED4}"/>
+                <a16:creationId xmlns="" xmlns:a16="http://schemas.microsoft.com/office/drawing/2014/main" id="{79961178-ABE0-C7D2-04FE-9A129BC81ED4}"/>
               </a:ext>
             </a:extLst>
           </p:cNvPr>
@@ -14660,7 +14728,7 @@
             <p:cNvPr id="76" name="Oval 75">
               <a:extLst>
                 <a:ext uri="{FF2B5EF4-FFF2-40B4-BE49-F238E27FC236}">
-                  <a16:creationId xmlns:a16="http://schemas.microsoft.com/office/drawing/2014/main" xmlns="" id="{D8C47778-3FE4-169B-9D62-9C01A7F95945}"/>
+                  <a16:creationId xmlns="" xmlns:a16="http://schemas.microsoft.com/office/drawing/2014/main" id="{D8C47778-3FE4-169B-9D62-9C01A7F95945}"/>
                 </a:ext>
               </a:extLst>
             </p:cNvPr>
@@ -14719,7 +14787,7 @@
             <p:cNvPr id="77" name="Arc 76">
               <a:extLst>
                 <a:ext uri="{FF2B5EF4-FFF2-40B4-BE49-F238E27FC236}">
-                  <a16:creationId xmlns:a16="http://schemas.microsoft.com/office/drawing/2014/main" xmlns="" id="{FDC23D54-870F-5B8A-AB44-E52FAE0875B5}"/>
+                  <a16:creationId xmlns="" xmlns:a16="http://schemas.microsoft.com/office/drawing/2014/main" id="{FDC23D54-870F-5B8A-AB44-E52FAE0875B5}"/>
                 </a:ext>
               </a:extLst>
             </p:cNvPr>
@@ -14772,7 +14840,7 @@
           <p:cNvPr id="78" name="Group 77">
             <a:extLst>
               <a:ext uri="{FF2B5EF4-FFF2-40B4-BE49-F238E27FC236}">
-                <a16:creationId xmlns:a16="http://schemas.microsoft.com/office/drawing/2014/main" xmlns="" id="{B99FDF76-FB64-197E-90CD-2A6F48DA61F3}"/>
+                <a16:creationId xmlns="" xmlns:a16="http://schemas.microsoft.com/office/drawing/2014/main" id="{B99FDF76-FB64-197E-90CD-2A6F48DA61F3}"/>
               </a:ext>
             </a:extLst>
           </p:cNvPr>
@@ -14792,7 +14860,7 @@
             <p:cNvPr id="79" name="Oval 78">
               <a:extLst>
                 <a:ext uri="{FF2B5EF4-FFF2-40B4-BE49-F238E27FC236}">
-                  <a16:creationId xmlns:a16="http://schemas.microsoft.com/office/drawing/2014/main" xmlns="" id="{C7D39EC7-8798-33A9-DB8C-D12FB95A963C}"/>
+                  <a16:creationId xmlns="" xmlns:a16="http://schemas.microsoft.com/office/drawing/2014/main" id="{C7D39EC7-8798-33A9-DB8C-D12FB95A963C}"/>
                 </a:ext>
               </a:extLst>
             </p:cNvPr>
@@ -14851,7 +14919,7 @@
             <p:cNvPr id="80" name="Arc 79">
               <a:extLst>
                 <a:ext uri="{FF2B5EF4-FFF2-40B4-BE49-F238E27FC236}">
-                  <a16:creationId xmlns:a16="http://schemas.microsoft.com/office/drawing/2014/main" xmlns="" id="{CA276D5B-D344-FC55-AFBA-FB0F2E0A212D}"/>
+                  <a16:creationId xmlns="" xmlns:a16="http://schemas.microsoft.com/office/drawing/2014/main" id="{CA276D5B-D344-FC55-AFBA-FB0F2E0A212D}"/>
                 </a:ext>
               </a:extLst>
             </p:cNvPr>
@@ -14904,7 +14972,7 @@
           <p:cNvPr id="81" name="Group 80">
             <a:extLst>
               <a:ext uri="{FF2B5EF4-FFF2-40B4-BE49-F238E27FC236}">
-                <a16:creationId xmlns:a16="http://schemas.microsoft.com/office/drawing/2014/main" xmlns="" id="{5B4D2A7E-D5B4-408F-5ACC-A43BFE1E3809}"/>
+                <a16:creationId xmlns="" xmlns:a16="http://schemas.microsoft.com/office/drawing/2014/main" id="{5B4D2A7E-D5B4-408F-5ACC-A43BFE1E3809}"/>
               </a:ext>
             </a:extLst>
           </p:cNvPr>
@@ -14924,7 +14992,7 @@
             <p:cNvPr id="82" name="Oval 81">
               <a:extLst>
                 <a:ext uri="{FF2B5EF4-FFF2-40B4-BE49-F238E27FC236}">
-                  <a16:creationId xmlns:a16="http://schemas.microsoft.com/office/drawing/2014/main" xmlns="" id="{FA296D8C-160F-84DE-0432-628B589F211B}"/>
+                  <a16:creationId xmlns="" xmlns:a16="http://schemas.microsoft.com/office/drawing/2014/main" id="{FA296D8C-160F-84DE-0432-628B589F211B}"/>
                 </a:ext>
               </a:extLst>
             </p:cNvPr>
@@ -14983,7 +15051,7 @@
             <p:cNvPr id="83" name="Arc 82">
               <a:extLst>
                 <a:ext uri="{FF2B5EF4-FFF2-40B4-BE49-F238E27FC236}">
-                  <a16:creationId xmlns:a16="http://schemas.microsoft.com/office/drawing/2014/main" xmlns="" id="{7ACD6CCD-3CFB-52A8-E091-FDDB0E796F53}"/>
+                  <a16:creationId xmlns="" xmlns:a16="http://schemas.microsoft.com/office/drawing/2014/main" id="{7ACD6CCD-3CFB-52A8-E091-FDDB0E796F53}"/>
                 </a:ext>
               </a:extLst>
             </p:cNvPr>
@@ -15036,7 +15104,7 @@
           <p:cNvPr id="84" name="Group 83">
             <a:extLst>
               <a:ext uri="{FF2B5EF4-FFF2-40B4-BE49-F238E27FC236}">
-                <a16:creationId xmlns:a16="http://schemas.microsoft.com/office/drawing/2014/main" xmlns="" id="{44FED0D5-3E54-90C0-E3E7-BF526FE9D113}"/>
+                <a16:creationId xmlns="" xmlns:a16="http://schemas.microsoft.com/office/drawing/2014/main" id="{44FED0D5-3E54-90C0-E3E7-BF526FE9D113}"/>
               </a:ext>
             </a:extLst>
           </p:cNvPr>
@@ -15056,7 +15124,7 @@
             <p:cNvPr id="85" name="Oval 84">
               <a:extLst>
                 <a:ext uri="{FF2B5EF4-FFF2-40B4-BE49-F238E27FC236}">
-                  <a16:creationId xmlns:a16="http://schemas.microsoft.com/office/drawing/2014/main" xmlns="" id="{656B078E-FF03-15AE-74D7-C0ED1C34B554}"/>
+                  <a16:creationId xmlns="" xmlns:a16="http://schemas.microsoft.com/office/drawing/2014/main" id="{656B078E-FF03-15AE-74D7-C0ED1C34B554}"/>
                 </a:ext>
               </a:extLst>
             </p:cNvPr>
@@ -15115,7 +15183,7 @@
             <p:cNvPr id="86" name="Arc 85">
               <a:extLst>
                 <a:ext uri="{FF2B5EF4-FFF2-40B4-BE49-F238E27FC236}">
-                  <a16:creationId xmlns:a16="http://schemas.microsoft.com/office/drawing/2014/main" xmlns="" id="{6B33F721-99DC-4BB8-9E9E-DAF43599FE12}"/>
+                  <a16:creationId xmlns="" xmlns:a16="http://schemas.microsoft.com/office/drawing/2014/main" id="{6B33F721-99DC-4BB8-9E9E-DAF43599FE12}"/>
                 </a:ext>
               </a:extLst>
             </p:cNvPr>
@@ -15168,7 +15236,7 @@
           <p:cNvPr id="87" name="Group 86">
             <a:extLst>
               <a:ext uri="{FF2B5EF4-FFF2-40B4-BE49-F238E27FC236}">
-                <a16:creationId xmlns:a16="http://schemas.microsoft.com/office/drawing/2014/main" xmlns="" id="{59827D44-4B51-A191-64E5-C84C0624372E}"/>
+                <a16:creationId xmlns="" xmlns:a16="http://schemas.microsoft.com/office/drawing/2014/main" id="{59827D44-4B51-A191-64E5-C84C0624372E}"/>
               </a:ext>
             </a:extLst>
           </p:cNvPr>
@@ -15188,7 +15256,7 @@
             <p:cNvPr id="88" name="Oval 87">
               <a:extLst>
                 <a:ext uri="{FF2B5EF4-FFF2-40B4-BE49-F238E27FC236}">
-                  <a16:creationId xmlns:a16="http://schemas.microsoft.com/office/drawing/2014/main" xmlns="" id="{402C9496-9C16-3C84-DE2A-8792B0D53BA9}"/>
+                  <a16:creationId xmlns="" xmlns:a16="http://schemas.microsoft.com/office/drawing/2014/main" id="{402C9496-9C16-3C84-DE2A-8792B0D53BA9}"/>
                 </a:ext>
               </a:extLst>
             </p:cNvPr>
@@ -15247,7 +15315,7 @@
             <p:cNvPr id="89" name="Arc 88">
               <a:extLst>
                 <a:ext uri="{FF2B5EF4-FFF2-40B4-BE49-F238E27FC236}">
-                  <a16:creationId xmlns:a16="http://schemas.microsoft.com/office/drawing/2014/main" xmlns="" id="{D4F27B29-B37A-5397-E933-37DF44EFCF3E}"/>
+                  <a16:creationId xmlns="" xmlns:a16="http://schemas.microsoft.com/office/drawing/2014/main" id="{D4F27B29-B37A-5397-E933-37DF44EFCF3E}"/>
                 </a:ext>
               </a:extLst>
             </p:cNvPr>
@@ -15300,7 +15368,7 @@
           <p:cNvPr id="90" name="Group 89">
             <a:extLst>
               <a:ext uri="{FF2B5EF4-FFF2-40B4-BE49-F238E27FC236}">
-                <a16:creationId xmlns:a16="http://schemas.microsoft.com/office/drawing/2014/main" xmlns="" id="{C31CDB83-6843-FF34-4DD1-308EBFE5E615}"/>
+                <a16:creationId xmlns="" xmlns:a16="http://schemas.microsoft.com/office/drawing/2014/main" id="{C31CDB83-6843-FF34-4DD1-308EBFE5E615}"/>
               </a:ext>
             </a:extLst>
           </p:cNvPr>
@@ -15320,7 +15388,7 @@
             <p:cNvPr id="91" name="Oval 90">
               <a:extLst>
                 <a:ext uri="{FF2B5EF4-FFF2-40B4-BE49-F238E27FC236}">
-                  <a16:creationId xmlns:a16="http://schemas.microsoft.com/office/drawing/2014/main" xmlns="" id="{B6601984-7036-87C4-47B4-9F20BE341D87}"/>
+                  <a16:creationId xmlns="" xmlns:a16="http://schemas.microsoft.com/office/drawing/2014/main" id="{B6601984-7036-87C4-47B4-9F20BE341D87}"/>
                 </a:ext>
               </a:extLst>
             </p:cNvPr>
@@ -15379,7 +15447,7 @@
             <p:cNvPr id="92" name="Arc 91">
               <a:extLst>
                 <a:ext uri="{FF2B5EF4-FFF2-40B4-BE49-F238E27FC236}">
-                  <a16:creationId xmlns:a16="http://schemas.microsoft.com/office/drawing/2014/main" xmlns="" id="{985ED055-0FFF-9046-6A6B-2F0B309B0601}"/>
+                  <a16:creationId xmlns="" xmlns:a16="http://schemas.microsoft.com/office/drawing/2014/main" id="{985ED055-0FFF-9046-6A6B-2F0B309B0601}"/>
                 </a:ext>
               </a:extLst>
             </p:cNvPr>
@@ -15432,7 +15500,7 @@
           <p:cNvPr id="93" name="Group 92">
             <a:extLst>
               <a:ext uri="{FF2B5EF4-FFF2-40B4-BE49-F238E27FC236}">
-                <a16:creationId xmlns:a16="http://schemas.microsoft.com/office/drawing/2014/main" xmlns="" id="{2F3C57F8-4743-E9F0-EEB4-1B99AAA02502}"/>
+                <a16:creationId xmlns="" xmlns:a16="http://schemas.microsoft.com/office/drawing/2014/main" id="{2F3C57F8-4743-E9F0-EEB4-1B99AAA02502}"/>
               </a:ext>
             </a:extLst>
           </p:cNvPr>
@@ -15452,7 +15520,7 @@
             <p:cNvPr id="94" name="Oval 93">
               <a:extLst>
                 <a:ext uri="{FF2B5EF4-FFF2-40B4-BE49-F238E27FC236}">
-                  <a16:creationId xmlns:a16="http://schemas.microsoft.com/office/drawing/2014/main" xmlns="" id="{70E875F3-7DD6-842E-3C42-FB7188017892}"/>
+                  <a16:creationId xmlns="" xmlns:a16="http://schemas.microsoft.com/office/drawing/2014/main" id="{70E875F3-7DD6-842E-3C42-FB7188017892}"/>
                 </a:ext>
               </a:extLst>
             </p:cNvPr>
@@ -15511,7 +15579,7 @@
             <p:cNvPr id="95" name="Arc 94">
               <a:extLst>
                 <a:ext uri="{FF2B5EF4-FFF2-40B4-BE49-F238E27FC236}">
-                  <a16:creationId xmlns:a16="http://schemas.microsoft.com/office/drawing/2014/main" xmlns="" id="{B2F6FB24-FC01-4AF4-9A35-DAA5B1A8563F}"/>
+                  <a16:creationId xmlns="" xmlns:a16="http://schemas.microsoft.com/office/drawing/2014/main" id="{B2F6FB24-FC01-4AF4-9A35-DAA5B1A8563F}"/>
                 </a:ext>
               </a:extLst>
             </p:cNvPr>
@@ -15564,7 +15632,7 @@
           <p:cNvPr id="96" name="Group 95">
             <a:extLst>
               <a:ext uri="{FF2B5EF4-FFF2-40B4-BE49-F238E27FC236}">
-                <a16:creationId xmlns:a16="http://schemas.microsoft.com/office/drawing/2014/main" xmlns="" id="{DDDFC3EA-F7A7-3A43-3D7E-FFBE8CE964FD}"/>
+                <a16:creationId xmlns="" xmlns:a16="http://schemas.microsoft.com/office/drawing/2014/main" id="{DDDFC3EA-F7A7-3A43-3D7E-FFBE8CE964FD}"/>
               </a:ext>
             </a:extLst>
           </p:cNvPr>
@@ -15584,7 +15652,7 @@
             <p:cNvPr id="97" name="Oval 96">
               <a:extLst>
                 <a:ext uri="{FF2B5EF4-FFF2-40B4-BE49-F238E27FC236}">
-                  <a16:creationId xmlns:a16="http://schemas.microsoft.com/office/drawing/2014/main" xmlns="" id="{5F25F946-F5CC-34FA-0E42-EA8C2624FCEC}"/>
+                  <a16:creationId xmlns="" xmlns:a16="http://schemas.microsoft.com/office/drawing/2014/main" id="{5F25F946-F5CC-34FA-0E42-EA8C2624FCEC}"/>
                 </a:ext>
               </a:extLst>
             </p:cNvPr>
@@ -15643,7 +15711,7 @@
             <p:cNvPr id="98" name="Arc 97">
               <a:extLst>
                 <a:ext uri="{FF2B5EF4-FFF2-40B4-BE49-F238E27FC236}">
-                  <a16:creationId xmlns:a16="http://schemas.microsoft.com/office/drawing/2014/main" xmlns="" id="{B792FC13-D3FC-7671-B724-A8CF4B9A39B4}"/>
+                  <a16:creationId xmlns="" xmlns:a16="http://schemas.microsoft.com/office/drawing/2014/main" id="{B792FC13-D3FC-7671-B724-A8CF4B9A39B4}"/>
                 </a:ext>
               </a:extLst>
             </p:cNvPr>
@@ -15696,7 +15764,7 @@
           <p:cNvPr id="99" name="Group 98">
             <a:extLst>
               <a:ext uri="{FF2B5EF4-FFF2-40B4-BE49-F238E27FC236}">
-                <a16:creationId xmlns:a16="http://schemas.microsoft.com/office/drawing/2014/main" xmlns="" id="{2DB2C038-DEFE-204E-30FC-790636ED570C}"/>
+                <a16:creationId xmlns="" xmlns:a16="http://schemas.microsoft.com/office/drawing/2014/main" id="{2DB2C038-DEFE-204E-30FC-790636ED570C}"/>
               </a:ext>
             </a:extLst>
           </p:cNvPr>
@@ -15716,7 +15784,7 @@
             <p:cNvPr id="100" name="Oval 99">
               <a:extLst>
                 <a:ext uri="{FF2B5EF4-FFF2-40B4-BE49-F238E27FC236}">
-                  <a16:creationId xmlns:a16="http://schemas.microsoft.com/office/drawing/2014/main" xmlns="" id="{45093590-8764-D5E6-8110-FD1D24889D7B}"/>
+                  <a16:creationId xmlns="" xmlns:a16="http://schemas.microsoft.com/office/drawing/2014/main" id="{45093590-8764-D5E6-8110-FD1D24889D7B}"/>
                 </a:ext>
               </a:extLst>
             </p:cNvPr>
@@ -15775,7 +15843,7 @@
             <p:cNvPr id="101" name="Arc 100">
               <a:extLst>
                 <a:ext uri="{FF2B5EF4-FFF2-40B4-BE49-F238E27FC236}">
-                  <a16:creationId xmlns:a16="http://schemas.microsoft.com/office/drawing/2014/main" xmlns="" id="{770478F6-8E18-6FE2-B3C4-489000AC2563}"/>
+                  <a16:creationId xmlns="" xmlns:a16="http://schemas.microsoft.com/office/drawing/2014/main" id="{770478F6-8E18-6FE2-B3C4-489000AC2563}"/>
                 </a:ext>
               </a:extLst>
             </p:cNvPr>
@@ -15828,7 +15896,7 @@
           <p:cNvPr id="102" name="Group 101">
             <a:extLst>
               <a:ext uri="{FF2B5EF4-FFF2-40B4-BE49-F238E27FC236}">
-                <a16:creationId xmlns:a16="http://schemas.microsoft.com/office/drawing/2014/main" xmlns="" id="{BB5E874B-F6C3-FA86-2883-E06C0B907345}"/>
+                <a16:creationId xmlns="" xmlns:a16="http://schemas.microsoft.com/office/drawing/2014/main" id="{BB5E874B-F6C3-FA86-2883-E06C0B907345}"/>
               </a:ext>
             </a:extLst>
           </p:cNvPr>
@@ -15848,7 +15916,7 @@
             <p:cNvPr id="103" name="Oval 102">
               <a:extLst>
                 <a:ext uri="{FF2B5EF4-FFF2-40B4-BE49-F238E27FC236}">
-                  <a16:creationId xmlns:a16="http://schemas.microsoft.com/office/drawing/2014/main" xmlns="" id="{ADCBCFB9-1DE9-6BCF-CAFB-A3A5E3E3BDC3}"/>
+                  <a16:creationId xmlns="" xmlns:a16="http://schemas.microsoft.com/office/drawing/2014/main" id="{ADCBCFB9-1DE9-6BCF-CAFB-A3A5E3E3BDC3}"/>
                 </a:ext>
               </a:extLst>
             </p:cNvPr>
@@ -15907,7 +15975,7 @@
             <p:cNvPr id="104" name="Arc 103">
               <a:extLst>
                 <a:ext uri="{FF2B5EF4-FFF2-40B4-BE49-F238E27FC236}">
-                  <a16:creationId xmlns:a16="http://schemas.microsoft.com/office/drawing/2014/main" xmlns="" id="{06897284-51F0-34BA-B35F-D0DFBB95FC6A}"/>
+                  <a16:creationId xmlns="" xmlns:a16="http://schemas.microsoft.com/office/drawing/2014/main" id="{06897284-51F0-34BA-B35F-D0DFBB95FC6A}"/>
                 </a:ext>
               </a:extLst>
             </p:cNvPr>
@@ -15960,7 +16028,7 @@
           <p:cNvPr id="105" name="Group 104">
             <a:extLst>
               <a:ext uri="{FF2B5EF4-FFF2-40B4-BE49-F238E27FC236}">
-                <a16:creationId xmlns:a16="http://schemas.microsoft.com/office/drawing/2014/main" xmlns="" id="{C96F0D64-C1BF-B3A8-A519-7E4CF06FFDC7}"/>
+                <a16:creationId xmlns="" xmlns:a16="http://schemas.microsoft.com/office/drawing/2014/main" id="{C96F0D64-C1BF-B3A8-A519-7E4CF06FFDC7}"/>
               </a:ext>
             </a:extLst>
           </p:cNvPr>
@@ -15980,7 +16048,7 @@
             <p:cNvPr id="106" name="Oval 105">
               <a:extLst>
                 <a:ext uri="{FF2B5EF4-FFF2-40B4-BE49-F238E27FC236}">
-                  <a16:creationId xmlns:a16="http://schemas.microsoft.com/office/drawing/2014/main" xmlns="" id="{1346C700-051D-1F0B-ADAE-0132A316A7DB}"/>
+                  <a16:creationId xmlns="" xmlns:a16="http://schemas.microsoft.com/office/drawing/2014/main" id="{1346C700-051D-1F0B-ADAE-0132A316A7DB}"/>
                 </a:ext>
               </a:extLst>
             </p:cNvPr>
@@ -16039,7 +16107,7 @@
             <p:cNvPr id="107" name="Arc 106">
               <a:extLst>
                 <a:ext uri="{FF2B5EF4-FFF2-40B4-BE49-F238E27FC236}">
-                  <a16:creationId xmlns:a16="http://schemas.microsoft.com/office/drawing/2014/main" xmlns="" id="{BA5E0980-7A99-E9E0-4B91-E38555423E5B}"/>
+                  <a16:creationId xmlns="" xmlns:a16="http://schemas.microsoft.com/office/drawing/2014/main" id="{BA5E0980-7A99-E9E0-4B91-E38555423E5B}"/>
                 </a:ext>
               </a:extLst>
             </p:cNvPr>
@@ -16092,7 +16160,7 @@
           <p:cNvPr id="108" name="Group 107">
             <a:extLst>
               <a:ext uri="{FF2B5EF4-FFF2-40B4-BE49-F238E27FC236}">
-                <a16:creationId xmlns:a16="http://schemas.microsoft.com/office/drawing/2014/main" xmlns="" id="{D6790D83-0F90-0346-D1FD-D5C3602DFFF6}"/>
+                <a16:creationId xmlns="" xmlns:a16="http://schemas.microsoft.com/office/drawing/2014/main" id="{D6790D83-0F90-0346-D1FD-D5C3602DFFF6}"/>
               </a:ext>
             </a:extLst>
           </p:cNvPr>
@@ -16112,7 +16180,7 @@
             <p:cNvPr id="109" name="Oval 108">
               <a:extLst>
                 <a:ext uri="{FF2B5EF4-FFF2-40B4-BE49-F238E27FC236}">
-                  <a16:creationId xmlns:a16="http://schemas.microsoft.com/office/drawing/2014/main" xmlns="" id="{CE118234-AB4B-3CE4-8627-D437C8F12935}"/>
+                  <a16:creationId xmlns="" xmlns:a16="http://schemas.microsoft.com/office/drawing/2014/main" id="{CE118234-AB4B-3CE4-8627-D437C8F12935}"/>
                 </a:ext>
               </a:extLst>
             </p:cNvPr>
@@ -16171,7 +16239,7 @@
             <p:cNvPr id="110" name="Arc 109">
               <a:extLst>
                 <a:ext uri="{FF2B5EF4-FFF2-40B4-BE49-F238E27FC236}">
-                  <a16:creationId xmlns:a16="http://schemas.microsoft.com/office/drawing/2014/main" xmlns="" id="{24A6161C-A3EC-CB70-28BF-1AA5907F656E}"/>
+                  <a16:creationId xmlns="" xmlns:a16="http://schemas.microsoft.com/office/drawing/2014/main" id="{24A6161C-A3EC-CB70-28BF-1AA5907F656E}"/>
                 </a:ext>
               </a:extLst>
             </p:cNvPr>
@@ -16224,7 +16292,7 @@
           <p:cNvPr id="111" name="Group 110">
             <a:extLst>
               <a:ext uri="{FF2B5EF4-FFF2-40B4-BE49-F238E27FC236}">
-                <a16:creationId xmlns:a16="http://schemas.microsoft.com/office/drawing/2014/main" xmlns="" id="{F8BE1461-AE7E-40C6-28C5-62341855537E}"/>
+                <a16:creationId xmlns="" xmlns:a16="http://schemas.microsoft.com/office/drawing/2014/main" id="{F8BE1461-AE7E-40C6-28C5-62341855537E}"/>
               </a:ext>
             </a:extLst>
           </p:cNvPr>
@@ -16244,7 +16312,7 @@
             <p:cNvPr id="112" name="Oval 111">
               <a:extLst>
                 <a:ext uri="{FF2B5EF4-FFF2-40B4-BE49-F238E27FC236}">
-                  <a16:creationId xmlns:a16="http://schemas.microsoft.com/office/drawing/2014/main" xmlns="" id="{3D6C0D0C-1737-4ACF-DF05-40AB4B997999}"/>
+                  <a16:creationId xmlns="" xmlns:a16="http://schemas.microsoft.com/office/drawing/2014/main" id="{3D6C0D0C-1737-4ACF-DF05-40AB4B997999}"/>
                 </a:ext>
               </a:extLst>
             </p:cNvPr>
@@ -16303,7 +16371,7 @@
             <p:cNvPr id="113" name="Arc 112">
               <a:extLst>
                 <a:ext uri="{FF2B5EF4-FFF2-40B4-BE49-F238E27FC236}">
-                  <a16:creationId xmlns:a16="http://schemas.microsoft.com/office/drawing/2014/main" xmlns="" id="{C80C098A-9223-34F9-FB12-0ACBBD0C19A6}"/>
+                  <a16:creationId xmlns="" xmlns:a16="http://schemas.microsoft.com/office/drawing/2014/main" id="{C80C098A-9223-34F9-FB12-0ACBBD0C19A6}"/>
                 </a:ext>
               </a:extLst>
             </p:cNvPr>
@@ -16356,7 +16424,7 @@
           <p:cNvPr id="114" name="Group 113">
             <a:extLst>
               <a:ext uri="{FF2B5EF4-FFF2-40B4-BE49-F238E27FC236}">
-                <a16:creationId xmlns:a16="http://schemas.microsoft.com/office/drawing/2014/main" xmlns="" id="{697EE20F-3D0A-E159-F8D9-0EC0D2AF7155}"/>
+                <a16:creationId xmlns="" xmlns:a16="http://schemas.microsoft.com/office/drawing/2014/main" id="{697EE20F-3D0A-E159-F8D9-0EC0D2AF7155}"/>
               </a:ext>
             </a:extLst>
           </p:cNvPr>
@@ -16376,7 +16444,7 @@
             <p:cNvPr id="115" name="Oval 114">
               <a:extLst>
                 <a:ext uri="{FF2B5EF4-FFF2-40B4-BE49-F238E27FC236}">
-                  <a16:creationId xmlns:a16="http://schemas.microsoft.com/office/drawing/2014/main" xmlns="" id="{4E528A35-0A92-6308-0EDC-AA6D20AA61B8}"/>
+                  <a16:creationId xmlns="" xmlns:a16="http://schemas.microsoft.com/office/drawing/2014/main" id="{4E528A35-0A92-6308-0EDC-AA6D20AA61B8}"/>
                 </a:ext>
               </a:extLst>
             </p:cNvPr>
@@ -16435,7 +16503,7 @@
             <p:cNvPr id="116" name="Arc 115">
               <a:extLst>
                 <a:ext uri="{FF2B5EF4-FFF2-40B4-BE49-F238E27FC236}">
-                  <a16:creationId xmlns:a16="http://schemas.microsoft.com/office/drawing/2014/main" xmlns="" id="{39483389-2D87-DE50-A684-495349A8AE67}"/>
+                  <a16:creationId xmlns="" xmlns:a16="http://schemas.microsoft.com/office/drawing/2014/main" id="{39483389-2D87-DE50-A684-495349A8AE67}"/>
                 </a:ext>
               </a:extLst>
             </p:cNvPr>
@@ -16488,7 +16556,7 @@
           <p:cNvPr id="117" name="Group 116">
             <a:extLst>
               <a:ext uri="{FF2B5EF4-FFF2-40B4-BE49-F238E27FC236}">
-                <a16:creationId xmlns:a16="http://schemas.microsoft.com/office/drawing/2014/main" xmlns="" id="{786BE2FE-EF0F-688F-5B2C-6EF38976E83B}"/>
+                <a16:creationId xmlns="" xmlns:a16="http://schemas.microsoft.com/office/drawing/2014/main" id="{786BE2FE-EF0F-688F-5B2C-6EF38976E83B}"/>
               </a:ext>
             </a:extLst>
           </p:cNvPr>
@@ -16508,7 +16576,7 @@
             <p:cNvPr id="118" name="Oval 117">
               <a:extLst>
                 <a:ext uri="{FF2B5EF4-FFF2-40B4-BE49-F238E27FC236}">
-                  <a16:creationId xmlns:a16="http://schemas.microsoft.com/office/drawing/2014/main" xmlns="" id="{A0C35F16-1AB8-1BF9-41DE-1B715E0D36D5}"/>
+                  <a16:creationId xmlns="" xmlns:a16="http://schemas.microsoft.com/office/drawing/2014/main" id="{A0C35F16-1AB8-1BF9-41DE-1B715E0D36D5}"/>
                 </a:ext>
               </a:extLst>
             </p:cNvPr>
@@ -16567,7 +16635,7 @@
             <p:cNvPr id="119" name="Arc 118">
               <a:extLst>
                 <a:ext uri="{FF2B5EF4-FFF2-40B4-BE49-F238E27FC236}">
-                  <a16:creationId xmlns:a16="http://schemas.microsoft.com/office/drawing/2014/main" xmlns="" id="{C0154793-588A-3EFA-F58E-FF511C68E63E}"/>
+                  <a16:creationId xmlns="" xmlns:a16="http://schemas.microsoft.com/office/drawing/2014/main" id="{C0154793-588A-3EFA-F58E-FF511C68E63E}"/>
                 </a:ext>
               </a:extLst>
             </p:cNvPr>
@@ -16620,7 +16688,7 @@
           <p:cNvPr id="120" name="Group 119">
             <a:extLst>
               <a:ext uri="{FF2B5EF4-FFF2-40B4-BE49-F238E27FC236}">
-                <a16:creationId xmlns:a16="http://schemas.microsoft.com/office/drawing/2014/main" xmlns="" id="{511A915E-B563-6A18-4902-C0442601AD96}"/>
+                <a16:creationId xmlns="" xmlns:a16="http://schemas.microsoft.com/office/drawing/2014/main" id="{511A915E-B563-6A18-4902-C0442601AD96}"/>
               </a:ext>
             </a:extLst>
           </p:cNvPr>
@@ -16640,7 +16708,7 @@
             <p:cNvPr id="121" name="Oval 120">
               <a:extLst>
                 <a:ext uri="{FF2B5EF4-FFF2-40B4-BE49-F238E27FC236}">
-                  <a16:creationId xmlns:a16="http://schemas.microsoft.com/office/drawing/2014/main" xmlns="" id="{109142E7-2B8E-19B5-6124-89973384D7E5}"/>
+                  <a16:creationId xmlns="" xmlns:a16="http://schemas.microsoft.com/office/drawing/2014/main" id="{109142E7-2B8E-19B5-6124-89973384D7E5}"/>
                 </a:ext>
               </a:extLst>
             </p:cNvPr>
@@ -16699,7 +16767,7 @@
             <p:cNvPr id="122" name="Arc 121">
               <a:extLst>
                 <a:ext uri="{FF2B5EF4-FFF2-40B4-BE49-F238E27FC236}">
-                  <a16:creationId xmlns:a16="http://schemas.microsoft.com/office/drawing/2014/main" xmlns="" id="{AAE5814C-3B3B-8D93-EE2B-CB751AFBF13A}"/>
+                  <a16:creationId xmlns="" xmlns:a16="http://schemas.microsoft.com/office/drawing/2014/main" id="{AAE5814C-3B3B-8D93-EE2B-CB751AFBF13A}"/>
                 </a:ext>
               </a:extLst>
             </p:cNvPr>
@@ -16752,7 +16820,7 @@
           <p:cNvPr id="123" name="Rectangle 122">
             <a:extLst>
               <a:ext uri="{FF2B5EF4-FFF2-40B4-BE49-F238E27FC236}">
-                <a16:creationId xmlns:a16="http://schemas.microsoft.com/office/drawing/2014/main" xmlns="" id="{CEA14FBD-E081-AE2A-F431-E0CB87DCB16C}"/>
+                <a16:creationId xmlns="" xmlns:a16="http://schemas.microsoft.com/office/drawing/2014/main" id="{CEA14FBD-E081-AE2A-F431-E0CB87DCB16C}"/>
               </a:ext>
             </a:extLst>
           </p:cNvPr>
@@ -16805,11 +16873,7 @@
             </a:r>
             <a:r>
               <a:rPr lang="en-US" sz="2000" dirty="0" smtClean="0"/>
-              <a:t>suppliers added </a:t>
-            </a:r>
-            <a:r>
-              <a:rPr lang="en-US" sz="2000" dirty="0" smtClean="0"/>
-              <a:t>so they make sure authentic raw materials.</a:t>
+              <a:t>suppliers added so they make sure authentic raw materials.</a:t>
             </a:r>
           </a:p>
           <a:p>
@@ -16881,7 +16945,7 @@
         <p:cNvPr id="1" name="">
           <a:extLst>
             <a:ext uri="{FF2B5EF4-FFF2-40B4-BE49-F238E27FC236}">
-              <a16:creationId xmlns:a16="http://schemas.microsoft.com/office/drawing/2014/main" xmlns="" id="{AB49B653-F82D-52DD-3373-EF7CD343807B}"/>
+              <a16:creationId xmlns="" xmlns:a16="http://schemas.microsoft.com/office/drawing/2014/main" id="{AB49B653-F82D-52DD-3373-EF7CD343807B}"/>
             </a:ext>
           </a:extLst>
         </p:cNvPr>
@@ -16901,7 +16965,7 @@
           <p:cNvPr id="5" name="Rectangle 4">
             <a:extLst>
               <a:ext uri="{FF2B5EF4-FFF2-40B4-BE49-F238E27FC236}">
-                <a16:creationId xmlns:a16="http://schemas.microsoft.com/office/drawing/2014/main" xmlns="" id="{0DBF747C-C898-FAC1-A684-D7D009857C24}"/>
+                <a16:creationId xmlns="" xmlns:a16="http://schemas.microsoft.com/office/drawing/2014/main" id="{0DBF747C-C898-FAC1-A684-D7D009857C24}"/>
               </a:ext>
             </a:extLst>
           </p:cNvPr>
@@ -16957,7 +17021,7 @@
           <p:cNvPr id="4" name="Rectangle 3">
             <a:extLst>
               <a:ext uri="{FF2B5EF4-FFF2-40B4-BE49-F238E27FC236}">
-                <a16:creationId xmlns:a16="http://schemas.microsoft.com/office/drawing/2014/main" xmlns="" id="{7B98B2E6-66EB-FA16-6CAA-7328B9409A56}"/>
+                <a16:creationId xmlns="" xmlns:a16="http://schemas.microsoft.com/office/drawing/2014/main" id="{7B98B2E6-66EB-FA16-6CAA-7328B9409A56}"/>
               </a:ext>
             </a:extLst>
           </p:cNvPr>
@@ -17194,7 +17258,7 @@
           <p:cNvPr id="6" name="Oval 5">
             <a:extLst>
               <a:ext uri="{FF2B5EF4-FFF2-40B4-BE49-F238E27FC236}">
-                <a16:creationId xmlns:a16="http://schemas.microsoft.com/office/drawing/2014/main" xmlns="" id="{18F27E5F-8AB7-C933-B1F5-63F52B4EBC77}"/>
+                <a16:creationId xmlns="" xmlns:a16="http://schemas.microsoft.com/office/drawing/2014/main" id="{18F27E5F-8AB7-C933-B1F5-63F52B4EBC77}"/>
               </a:ext>
             </a:extLst>
           </p:cNvPr>
@@ -17253,7 +17317,7 @@
           <p:cNvPr id="7" name="Oval 6">
             <a:extLst>
               <a:ext uri="{FF2B5EF4-FFF2-40B4-BE49-F238E27FC236}">
-                <a16:creationId xmlns:a16="http://schemas.microsoft.com/office/drawing/2014/main" xmlns="" id="{84EEC563-2DED-4416-2C87-31455035FB0C}"/>
+                <a16:creationId xmlns="" xmlns:a16="http://schemas.microsoft.com/office/drawing/2014/main" id="{84EEC563-2DED-4416-2C87-31455035FB0C}"/>
               </a:ext>
             </a:extLst>
           </p:cNvPr>
@@ -17312,7 +17376,7 @@
           <p:cNvPr id="8" name="Oval 7">
             <a:extLst>
               <a:ext uri="{FF2B5EF4-FFF2-40B4-BE49-F238E27FC236}">
-                <a16:creationId xmlns:a16="http://schemas.microsoft.com/office/drawing/2014/main" xmlns="" id="{E40D0E73-9F08-859E-43E2-25EB19218526}"/>
+                <a16:creationId xmlns="" xmlns:a16="http://schemas.microsoft.com/office/drawing/2014/main" id="{E40D0E73-9F08-859E-43E2-25EB19218526}"/>
               </a:ext>
             </a:extLst>
           </p:cNvPr>
@@ -17371,7 +17435,7 @@
           <p:cNvPr id="9" name="Oval 8">
             <a:extLst>
               <a:ext uri="{FF2B5EF4-FFF2-40B4-BE49-F238E27FC236}">
-                <a16:creationId xmlns:a16="http://schemas.microsoft.com/office/drawing/2014/main" xmlns="" id="{4DB5A593-0CFB-36F3-F8DA-C3F3A2CFB622}"/>
+                <a16:creationId xmlns="" xmlns:a16="http://schemas.microsoft.com/office/drawing/2014/main" id="{4DB5A593-0CFB-36F3-F8DA-C3F3A2CFB622}"/>
               </a:ext>
             </a:extLst>
           </p:cNvPr>
@@ -17430,7 +17494,7 @@
           <p:cNvPr id="10" name="Oval 9">
             <a:extLst>
               <a:ext uri="{FF2B5EF4-FFF2-40B4-BE49-F238E27FC236}">
-                <a16:creationId xmlns:a16="http://schemas.microsoft.com/office/drawing/2014/main" xmlns="" id="{AA568633-31CA-A32D-D861-3B1240EC81B6}"/>
+                <a16:creationId xmlns="" xmlns:a16="http://schemas.microsoft.com/office/drawing/2014/main" id="{AA568633-31CA-A32D-D861-3B1240EC81B6}"/>
               </a:ext>
             </a:extLst>
           </p:cNvPr>
@@ -17489,7 +17553,7 @@
           <p:cNvPr id="11" name="Oval 10">
             <a:extLst>
               <a:ext uri="{FF2B5EF4-FFF2-40B4-BE49-F238E27FC236}">
-                <a16:creationId xmlns:a16="http://schemas.microsoft.com/office/drawing/2014/main" xmlns="" id="{D0946FD7-DEB2-0AEE-D3E7-FAABAC2357AF}"/>
+                <a16:creationId xmlns="" xmlns:a16="http://schemas.microsoft.com/office/drawing/2014/main" id="{D0946FD7-DEB2-0AEE-D3E7-FAABAC2357AF}"/>
               </a:ext>
             </a:extLst>
           </p:cNvPr>
@@ -17548,7 +17612,7 @@
           <p:cNvPr id="12" name="Oval 11">
             <a:extLst>
               <a:ext uri="{FF2B5EF4-FFF2-40B4-BE49-F238E27FC236}">
-                <a16:creationId xmlns:a16="http://schemas.microsoft.com/office/drawing/2014/main" xmlns="" id="{8D9F2A4B-9D87-7FFE-1886-9FC01DA34065}"/>
+                <a16:creationId xmlns="" xmlns:a16="http://schemas.microsoft.com/office/drawing/2014/main" id="{8D9F2A4B-9D87-7FFE-1886-9FC01DA34065}"/>
               </a:ext>
             </a:extLst>
           </p:cNvPr>
@@ -17607,7 +17671,7 @@
           <p:cNvPr id="13" name="Oval 12">
             <a:extLst>
               <a:ext uri="{FF2B5EF4-FFF2-40B4-BE49-F238E27FC236}">
-                <a16:creationId xmlns:a16="http://schemas.microsoft.com/office/drawing/2014/main" xmlns="" id="{2D1C037B-9232-194A-F63E-D1198BD5BECB}"/>
+                <a16:creationId xmlns="" xmlns:a16="http://schemas.microsoft.com/office/drawing/2014/main" id="{2D1C037B-9232-194A-F63E-D1198BD5BECB}"/>
               </a:ext>
             </a:extLst>
           </p:cNvPr>
@@ -17666,7 +17730,7 @@
           <p:cNvPr id="14" name="Oval 13">
             <a:extLst>
               <a:ext uri="{FF2B5EF4-FFF2-40B4-BE49-F238E27FC236}">
-                <a16:creationId xmlns:a16="http://schemas.microsoft.com/office/drawing/2014/main" xmlns="" id="{97981C1E-3857-DF09-0177-8A06F7B8C93F}"/>
+                <a16:creationId xmlns="" xmlns:a16="http://schemas.microsoft.com/office/drawing/2014/main" id="{97981C1E-3857-DF09-0177-8A06F7B8C93F}"/>
               </a:ext>
             </a:extLst>
           </p:cNvPr>
@@ -17725,7 +17789,7 @@
           <p:cNvPr id="15" name="Oval 14">
             <a:extLst>
               <a:ext uri="{FF2B5EF4-FFF2-40B4-BE49-F238E27FC236}">
-                <a16:creationId xmlns:a16="http://schemas.microsoft.com/office/drawing/2014/main" xmlns="" id="{041C004F-2B07-5BE4-E16D-AFA271378B4F}"/>
+                <a16:creationId xmlns="" xmlns:a16="http://schemas.microsoft.com/office/drawing/2014/main" id="{041C004F-2B07-5BE4-E16D-AFA271378B4F}"/>
               </a:ext>
             </a:extLst>
           </p:cNvPr>
@@ -17784,7 +17848,7 @@
           <p:cNvPr id="16" name="Oval 15">
             <a:extLst>
               <a:ext uri="{FF2B5EF4-FFF2-40B4-BE49-F238E27FC236}">
-                <a16:creationId xmlns:a16="http://schemas.microsoft.com/office/drawing/2014/main" xmlns="" id="{1767DF3F-7FF7-2A4C-6211-20A32CA30D60}"/>
+                <a16:creationId xmlns="" xmlns:a16="http://schemas.microsoft.com/office/drawing/2014/main" id="{1767DF3F-7FF7-2A4C-6211-20A32CA30D60}"/>
               </a:ext>
             </a:extLst>
           </p:cNvPr>
@@ -17843,7 +17907,7 @@
           <p:cNvPr id="17" name="Oval 16">
             <a:extLst>
               <a:ext uri="{FF2B5EF4-FFF2-40B4-BE49-F238E27FC236}">
-                <a16:creationId xmlns:a16="http://schemas.microsoft.com/office/drawing/2014/main" xmlns="" id="{0989497C-10B7-BD33-02AC-312809AFEA7E}"/>
+                <a16:creationId xmlns="" xmlns:a16="http://schemas.microsoft.com/office/drawing/2014/main" id="{0989497C-10B7-BD33-02AC-312809AFEA7E}"/>
               </a:ext>
             </a:extLst>
           </p:cNvPr>
@@ -17902,7 +17966,7 @@
           <p:cNvPr id="18" name="Oval 17">
             <a:extLst>
               <a:ext uri="{FF2B5EF4-FFF2-40B4-BE49-F238E27FC236}">
-                <a16:creationId xmlns:a16="http://schemas.microsoft.com/office/drawing/2014/main" xmlns="" id="{EC170CAD-85DD-951C-2E45-44F4B3207F5A}"/>
+                <a16:creationId xmlns="" xmlns:a16="http://schemas.microsoft.com/office/drawing/2014/main" id="{EC170CAD-85DD-951C-2E45-44F4B3207F5A}"/>
               </a:ext>
             </a:extLst>
           </p:cNvPr>
@@ -17961,7 +18025,7 @@
           <p:cNvPr id="19" name="Oval 18">
             <a:extLst>
               <a:ext uri="{FF2B5EF4-FFF2-40B4-BE49-F238E27FC236}">
-                <a16:creationId xmlns:a16="http://schemas.microsoft.com/office/drawing/2014/main" xmlns="" id="{6CBFAEB0-427B-C183-269E-B7F22C532425}"/>
+                <a16:creationId xmlns="" xmlns:a16="http://schemas.microsoft.com/office/drawing/2014/main" id="{6CBFAEB0-427B-C183-269E-B7F22C532425}"/>
               </a:ext>
             </a:extLst>
           </p:cNvPr>
@@ -18020,7 +18084,7 @@
           <p:cNvPr id="20" name="Oval 19">
             <a:extLst>
               <a:ext uri="{FF2B5EF4-FFF2-40B4-BE49-F238E27FC236}">
-                <a16:creationId xmlns:a16="http://schemas.microsoft.com/office/drawing/2014/main" xmlns="" id="{1A865A29-9259-99F5-30D2-7D9D77A07673}"/>
+                <a16:creationId xmlns="" xmlns:a16="http://schemas.microsoft.com/office/drawing/2014/main" id="{1A865A29-9259-99F5-30D2-7D9D77A07673}"/>
               </a:ext>
             </a:extLst>
           </p:cNvPr>
@@ -18079,7 +18143,7 @@
           <p:cNvPr id="21" name="Oval 20">
             <a:extLst>
               <a:ext uri="{FF2B5EF4-FFF2-40B4-BE49-F238E27FC236}">
-                <a16:creationId xmlns:a16="http://schemas.microsoft.com/office/drawing/2014/main" xmlns="" id="{A9BD25F8-8B1D-B8B7-5509-6B3900E77488}"/>
+                <a16:creationId xmlns="" xmlns:a16="http://schemas.microsoft.com/office/drawing/2014/main" id="{A9BD25F8-8B1D-B8B7-5509-6B3900E77488}"/>
               </a:ext>
             </a:extLst>
           </p:cNvPr>
@@ -18138,7 +18202,7 @@
           <p:cNvPr id="22" name="Oval 21">
             <a:extLst>
               <a:ext uri="{FF2B5EF4-FFF2-40B4-BE49-F238E27FC236}">
-                <a16:creationId xmlns:a16="http://schemas.microsoft.com/office/drawing/2014/main" xmlns="" id="{8C325336-0110-64E7-17C1-798D8BA62F8F}"/>
+                <a16:creationId xmlns="" xmlns:a16="http://schemas.microsoft.com/office/drawing/2014/main" id="{8C325336-0110-64E7-17C1-798D8BA62F8F}"/>
               </a:ext>
             </a:extLst>
           </p:cNvPr>
@@ -18197,7 +18261,7 @@
           <p:cNvPr id="23" name="Oval 22">
             <a:extLst>
               <a:ext uri="{FF2B5EF4-FFF2-40B4-BE49-F238E27FC236}">
-                <a16:creationId xmlns:a16="http://schemas.microsoft.com/office/drawing/2014/main" xmlns="" id="{7ED93CA2-6975-2E8B-C7B5-B07148930960}"/>
+                <a16:creationId xmlns="" xmlns:a16="http://schemas.microsoft.com/office/drawing/2014/main" id="{7ED93CA2-6975-2E8B-C7B5-B07148930960}"/>
               </a:ext>
             </a:extLst>
           </p:cNvPr>
@@ -18256,7 +18320,7 @@
           <p:cNvPr id="24" name="Oval 23">
             <a:extLst>
               <a:ext uri="{FF2B5EF4-FFF2-40B4-BE49-F238E27FC236}">
-                <a16:creationId xmlns:a16="http://schemas.microsoft.com/office/drawing/2014/main" xmlns="" id="{6E252A62-4114-2C2C-0938-450CA28947E9}"/>
+                <a16:creationId xmlns="" xmlns:a16="http://schemas.microsoft.com/office/drawing/2014/main" id="{6E252A62-4114-2C2C-0938-450CA28947E9}"/>
               </a:ext>
             </a:extLst>
           </p:cNvPr>
@@ -18315,7 +18379,7 @@
           <p:cNvPr id="25" name="Oval 24">
             <a:extLst>
               <a:ext uri="{FF2B5EF4-FFF2-40B4-BE49-F238E27FC236}">
-                <a16:creationId xmlns:a16="http://schemas.microsoft.com/office/drawing/2014/main" xmlns="" id="{15145535-565B-35B3-4181-D04856B0357E}"/>
+                <a16:creationId xmlns="" xmlns:a16="http://schemas.microsoft.com/office/drawing/2014/main" id="{15145535-565B-35B3-4181-D04856B0357E}"/>
               </a:ext>
             </a:extLst>
           </p:cNvPr>
@@ -18374,7 +18438,7 @@
           <p:cNvPr id="26" name="Oval 25">
             <a:extLst>
               <a:ext uri="{FF2B5EF4-FFF2-40B4-BE49-F238E27FC236}">
-                <a16:creationId xmlns:a16="http://schemas.microsoft.com/office/drawing/2014/main" xmlns="" id="{677DA24D-DD66-AAFE-2F4E-3D71AA3E6AB0}"/>
+                <a16:creationId xmlns="" xmlns:a16="http://schemas.microsoft.com/office/drawing/2014/main" id="{677DA24D-DD66-AAFE-2F4E-3D71AA3E6AB0}"/>
               </a:ext>
             </a:extLst>
           </p:cNvPr>
@@ -18433,7 +18497,7 @@
           <p:cNvPr id="27" name="Oval 26">
             <a:extLst>
               <a:ext uri="{FF2B5EF4-FFF2-40B4-BE49-F238E27FC236}">
-                <a16:creationId xmlns:a16="http://schemas.microsoft.com/office/drawing/2014/main" xmlns="" id="{E415858E-4B5C-CDA9-DE2D-B7CBA68C8556}"/>
+                <a16:creationId xmlns="" xmlns:a16="http://schemas.microsoft.com/office/drawing/2014/main" id="{E415858E-4B5C-CDA9-DE2D-B7CBA68C8556}"/>
               </a:ext>
             </a:extLst>
           </p:cNvPr>
@@ -18492,7 +18556,7 @@
           <p:cNvPr id="28" name="Oval 27">
             <a:extLst>
               <a:ext uri="{FF2B5EF4-FFF2-40B4-BE49-F238E27FC236}">
-                <a16:creationId xmlns:a16="http://schemas.microsoft.com/office/drawing/2014/main" xmlns="" id="{167A0A27-6BA4-DD53-F081-83B7B05F0261}"/>
+                <a16:creationId xmlns="" xmlns:a16="http://schemas.microsoft.com/office/drawing/2014/main" id="{167A0A27-6BA4-DD53-F081-83B7B05F0261}"/>
               </a:ext>
             </a:extLst>
           </p:cNvPr>
@@ -18551,7 +18615,7 @@
           <p:cNvPr id="29" name="Oval 28">
             <a:extLst>
               <a:ext uri="{FF2B5EF4-FFF2-40B4-BE49-F238E27FC236}">
-                <a16:creationId xmlns:a16="http://schemas.microsoft.com/office/drawing/2014/main" xmlns="" id="{6299853B-AA90-3849-11F1-1A4C48F71365}"/>
+                <a16:creationId xmlns="" xmlns:a16="http://schemas.microsoft.com/office/drawing/2014/main" id="{6299853B-AA90-3849-11F1-1A4C48F71365}"/>
               </a:ext>
             </a:extLst>
           </p:cNvPr>
@@ -18610,7 +18674,7 @@
           <p:cNvPr id="3" name="Group 2">
             <a:extLst>
               <a:ext uri="{FF2B5EF4-FFF2-40B4-BE49-F238E27FC236}">
-                <a16:creationId xmlns:a16="http://schemas.microsoft.com/office/drawing/2014/main" xmlns="" id="{26C3F351-D61A-FCB1-7694-AF167DCEE280}"/>
+                <a16:creationId xmlns="" xmlns:a16="http://schemas.microsoft.com/office/drawing/2014/main" id="{26C3F351-D61A-FCB1-7694-AF167DCEE280}"/>
               </a:ext>
             </a:extLst>
           </p:cNvPr>
@@ -18630,7 +18694,7 @@
             <p:cNvPr id="2" name="Oval 1">
               <a:extLst>
                 <a:ext uri="{FF2B5EF4-FFF2-40B4-BE49-F238E27FC236}">
-                  <a16:creationId xmlns:a16="http://schemas.microsoft.com/office/drawing/2014/main" xmlns="" id="{A6E2D6B3-342D-EB5F-5E19-8537633AB28F}"/>
+                  <a16:creationId xmlns="" xmlns:a16="http://schemas.microsoft.com/office/drawing/2014/main" id="{A6E2D6B3-342D-EB5F-5E19-8537633AB28F}"/>
                 </a:ext>
               </a:extLst>
             </p:cNvPr>
@@ -18689,7 +18753,7 @@
             <p:cNvPr id="30" name="Arc 29">
               <a:extLst>
                 <a:ext uri="{FF2B5EF4-FFF2-40B4-BE49-F238E27FC236}">
-                  <a16:creationId xmlns:a16="http://schemas.microsoft.com/office/drawing/2014/main" xmlns="" id="{36056DEA-49DE-7763-422D-4DBF22C9EF60}"/>
+                  <a16:creationId xmlns="" xmlns:a16="http://schemas.microsoft.com/office/drawing/2014/main" id="{36056DEA-49DE-7763-422D-4DBF22C9EF60}"/>
                 </a:ext>
               </a:extLst>
             </p:cNvPr>
@@ -18742,7 +18806,7 @@
           <p:cNvPr id="54" name="Group 53">
             <a:extLst>
               <a:ext uri="{FF2B5EF4-FFF2-40B4-BE49-F238E27FC236}">
-                <a16:creationId xmlns:a16="http://schemas.microsoft.com/office/drawing/2014/main" xmlns="" id="{4E1C400F-26D6-1823-2C78-C7631F622635}"/>
+                <a16:creationId xmlns="" xmlns:a16="http://schemas.microsoft.com/office/drawing/2014/main" id="{4E1C400F-26D6-1823-2C78-C7631F622635}"/>
               </a:ext>
             </a:extLst>
           </p:cNvPr>
@@ -18762,7 +18826,7 @@
             <p:cNvPr id="55" name="Oval 54">
               <a:extLst>
                 <a:ext uri="{FF2B5EF4-FFF2-40B4-BE49-F238E27FC236}">
-                  <a16:creationId xmlns:a16="http://schemas.microsoft.com/office/drawing/2014/main" xmlns="" id="{E1A04797-A8C7-E3D9-7170-3A4959849C1F}"/>
+                  <a16:creationId xmlns="" xmlns:a16="http://schemas.microsoft.com/office/drawing/2014/main" id="{E1A04797-A8C7-E3D9-7170-3A4959849C1F}"/>
                 </a:ext>
               </a:extLst>
             </p:cNvPr>
@@ -18821,7 +18885,7 @@
             <p:cNvPr id="56" name="Arc 55">
               <a:extLst>
                 <a:ext uri="{FF2B5EF4-FFF2-40B4-BE49-F238E27FC236}">
-                  <a16:creationId xmlns:a16="http://schemas.microsoft.com/office/drawing/2014/main" xmlns="" id="{E12EA4D8-8589-F8DD-DE0E-66C2177C97E3}"/>
+                  <a16:creationId xmlns="" xmlns:a16="http://schemas.microsoft.com/office/drawing/2014/main" id="{E12EA4D8-8589-F8DD-DE0E-66C2177C97E3}"/>
                 </a:ext>
               </a:extLst>
             </p:cNvPr>
@@ -18874,7 +18938,7 @@
           <p:cNvPr id="57" name="Group 56">
             <a:extLst>
               <a:ext uri="{FF2B5EF4-FFF2-40B4-BE49-F238E27FC236}">
-                <a16:creationId xmlns:a16="http://schemas.microsoft.com/office/drawing/2014/main" xmlns="" id="{A087BCDE-7005-25A4-1860-46331DFEFBA5}"/>
+                <a16:creationId xmlns="" xmlns:a16="http://schemas.microsoft.com/office/drawing/2014/main" id="{A087BCDE-7005-25A4-1860-46331DFEFBA5}"/>
               </a:ext>
             </a:extLst>
           </p:cNvPr>
@@ -18894,7 +18958,7 @@
             <p:cNvPr id="58" name="Oval 57">
               <a:extLst>
                 <a:ext uri="{FF2B5EF4-FFF2-40B4-BE49-F238E27FC236}">
-                  <a16:creationId xmlns:a16="http://schemas.microsoft.com/office/drawing/2014/main" xmlns="" id="{3581949D-442F-7524-F99D-5A8088D8E142}"/>
+                  <a16:creationId xmlns="" xmlns:a16="http://schemas.microsoft.com/office/drawing/2014/main" id="{3581949D-442F-7524-F99D-5A8088D8E142}"/>
                 </a:ext>
               </a:extLst>
             </p:cNvPr>
@@ -18953,7 +19017,7 @@
             <p:cNvPr id="59" name="Arc 58">
               <a:extLst>
                 <a:ext uri="{FF2B5EF4-FFF2-40B4-BE49-F238E27FC236}">
-                  <a16:creationId xmlns:a16="http://schemas.microsoft.com/office/drawing/2014/main" xmlns="" id="{02D7B595-29A3-11C1-3614-A3198F94592C}"/>
+                  <a16:creationId xmlns="" xmlns:a16="http://schemas.microsoft.com/office/drawing/2014/main" id="{02D7B595-29A3-11C1-3614-A3198F94592C}"/>
                 </a:ext>
               </a:extLst>
             </p:cNvPr>
@@ -19006,7 +19070,7 @@
           <p:cNvPr id="60" name="Group 59">
             <a:extLst>
               <a:ext uri="{FF2B5EF4-FFF2-40B4-BE49-F238E27FC236}">
-                <a16:creationId xmlns:a16="http://schemas.microsoft.com/office/drawing/2014/main" xmlns="" id="{FB290B83-0E01-2860-E35D-2FF552994951}"/>
+                <a16:creationId xmlns="" xmlns:a16="http://schemas.microsoft.com/office/drawing/2014/main" id="{FB290B83-0E01-2860-E35D-2FF552994951}"/>
               </a:ext>
             </a:extLst>
           </p:cNvPr>
@@ -19026,7 +19090,7 @@
             <p:cNvPr id="61" name="Oval 60">
               <a:extLst>
                 <a:ext uri="{FF2B5EF4-FFF2-40B4-BE49-F238E27FC236}">
-                  <a16:creationId xmlns:a16="http://schemas.microsoft.com/office/drawing/2014/main" xmlns="" id="{6F929B18-1882-FDE4-813E-6B0362098925}"/>
+                  <a16:creationId xmlns="" xmlns:a16="http://schemas.microsoft.com/office/drawing/2014/main" id="{6F929B18-1882-FDE4-813E-6B0362098925}"/>
                 </a:ext>
               </a:extLst>
             </p:cNvPr>
@@ -19085,7 +19149,7 @@
             <p:cNvPr id="62" name="Arc 61">
               <a:extLst>
                 <a:ext uri="{FF2B5EF4-FFF2-40B4-BE49-F238E27FC236}">
-                  <a16:creationId xmlns:a16="http://schemas.microsoft.com/office/drawing/2014/main" xmlns="" id="{982FB3D8-FD66-CA49-64EC-27B30CFD234A}"/>
+                  <a16:creationId xmlns="" xmlns:a16="http://schemas.microsoft.com/office/drawing/2014/main" id="{982FB3D8-FD66-CA49-64EC-27B30CFD234A}"/>
                 </a:ext>
               </a:extLst>
             </p:cNvPr>
@@ -19138,7 +19202,7 @@
           <p:cNvPr id="63" name="Group 62">
             <a:extLst>
               <a:ext uri="{FF2B5EF4-FFF2-40B4-BE49-F238E27FC236}">
-                <a16:creationId xmlns:a16="http://schemas.microsoft.com/office/drawing/2014/main" xmlns="" id="{7825E36E-56DC-774E-6E7A-31BA18848AA1}"/>
+                <a16:creationId xmlns="" xmlns:a16="http://schemas.microsoft.com/office/drawing/2014/main" id="{7825E36E-56DC-774E-6E7A-31BA18848AA1}"/>
               </a:ext>
             </a:extLst>
           </p:cNvPr>
@@ -19158,7 +19222,7 @@
             <p:cNvPr id="64" name="Oval 63">
               <a:extLst>
                 <a:ext uri="{FF2B5EF4-FFF2-40B4-BE49-F238E27FC236}">
-                  <a16:creationId xmlns:a16="http://schemas.microsoft.com/office/drawing/2014/main" xmlns="" id="{ED86C4D0-421F-E188-D347-FB75A80318D7}"/>
+                  <a16:creationId xmlns="" xmlns:a16="http://schemas.microsoft.com/office/drawing/2014/main" id="{ED86C4D0-421F-E188-D347-FB75A80318D7}"/>
                 </a:ext>
               </a:extLst>
             </p:cNvPr>
@@ -19217,7 +19281,7 @@
             <p:cNvPr id="65" name="Arc 64">
               <a:extLst>
                 <a:ext uri="{FF2B5EF4-FFF2-40B4-BE49-F238E27FC236}">
-                  <a16:creationId xmlns:a16="http://schemas.microsoft.com/office/drawing/2014/main" xmlns="" id="{7251B93F-50B9-C260-ECEA-5767A3723660}"/>
+                  <a16:creationId xmlns="" xmlns:a16="http://schemas.microsoft.com/office/drawing/2014/main" id="{7251B93F-50B9-C260-ECEA-5767A3723660}"/>
                 </a:ext>
               </a:extLst>
             </p:cNvPr>
@@ -19270,7 +19334,7 @@
           <p:cNvPr id="66" name="Group 65">
             <a:extLst>
               <a:ext uri="{FF2B5EF4-FFF2-40B4-BE49-F238E27FC236}">
-                <a16:creationId xmlns:a16="http://schemas.microsoft.com/office/drawing/2014/main" xmlns="" id="{C3079399-2A21-14E1-E7E4-E94ED810D168}"/>
+                <a16:creationId xmlns="" xmlns:a16="http://schemas.microsoft.com/office/drawing/2014/main" id="{C3079399-2A21-14E1-E7E4-E94ED810D168}"/>
               </a:ext>
             </a:extLst>
           </p:cNvPr>
@@ -19290,7 +19354,7 @@
             <p:cNvPr id="67" name="Oval 66">
               <a:extLst>
                 <a:ext uri="{FF2B5EF4-FFF2-40B4-BE49-F238E27FC236}">
-                  <a16:creationId xmlns:a16="http://schemas.microsoft.com/office/drawing/2014/main" xmlns="" id="{7CD11775-2901-2E40-5490-630DC1623B0F}"/>
+                  <a16:creationId xmlns="" xmlns:a16="http://schemas.microsoft.com/office/drawing/2014/main" id="{7CD11775-2901-2E40-5490-630DC1623B0F}"/>
                 </a:ext>
               </a:extLst>
             </p:cNvPr>
@@ -19349,7 +19413,7 @@
             <p:cNvPr id="68" name="Arc 67">
               <a:extLst>
                 <a:ext uri="{FF2B5EF4-FFF2-40B4-BE49-F238E27FC236}">
-                  <a16:creationId xmlns:a16="http://schemas.microsoft.com/office/drawing/2014/main" xmlns="" id="{5B556831-69E2-8918-5D16-C84DEC612606}"/>
+                  <a16:creationId xmlns="" xmlns:a16="http://schemas.microsoft.com/office/drawing/2014/main" id="{5B556831-69E2-8918-5D16-C84DEC612606}"/>
                 </a:ext>
               </a:extLst>
             </p:cNvPr>
@@ -19402,7 +19466,7 @@
           <p:cNvPr id="69" name="Group 68">
             <a:extLst>
               <a:ext uri="{FF2B5EF4-FFF2-40B4-BE49-F238E27FC236}">
-                <a16:creationId xmlns:a16="http://schemas.microsoft.com/office/drawing/2014/main" xmlns="" id="{5ADEE217-7DF5-3EDB-61BF-AF3C812CBEE6}"/>
+                <a16:creationId xmlns="" xmlns:a16="http://schemas.microsoft.com/office/drawing/2014/main" id="{5ADEE217-7DF5-3EDB-61BF-AF3C812CBEE6}"/>
               </a:ext>
             </a:extLst>
           </p:cNvPr>
@@ -19422,7 +19486,7 @@
             <p:cNvPr id="70" name="Oval 69">
               <a:extLst>
                 <a:ext uri="{FF2B5EF4-FFF2-40B4-BE49-F238E27FC236}">
-                  <a16:creationId xmlns:a16="http://schemas.microsoft.com/office/drawing/2014/main" xmlns="" id="{841DE28C-2D28-1185-E3B4-C2BB3354E52B}"/>
+                  <a16:creationId xmlns="" xmlns:a16="http://schemas.microsoft.com/office/drawing/2014/main" id="{841DE28C-2D28-1185-E3B4-C2BB3354E52B}"/>
                 </a:ext>
               </a:extLst>
             </p:cNvPr>
@@ -19481,7 +19545,7 @@
             <p:cNvPr id="71" name="Arc 70">
               <a:extLst>
                 <a:ext uri="{FF2B5EF4-FFF2-40B4-BE49-F238E27FC236}">
-                  <a16:creationId xmlns:a16="http://schemas.microsoft.com/office/drawing/2014/main" xmlns="" id="{FADBB813-4022-6BF4-4302-D581AB1A6C99}"/>
+                  <a16:creationId xmlns="" xmlns:a16="http://schemas.microsoft.com/office/drawing/2014/main" id="{FADBB813-4022-6BF4-4302-D581AB1A6C99}"/>
                 </a:ext>
               </a:extLst>
             </p:cNvPr>
@@ -19534,7 +19598,7 @@
           <p:cNvPr id="72" name="Group 71">
             <a:extLst>
               <a:ext uri="{FF2B5EF4-FFF2-40B4-BE49-F238E27FC236}">
-                <a16:creationId xmlns:a16="http://schemas.microsoft.com/office/drawing/2014/main" xmlns="" id="{9D9C9153-B8FA-38C4-EB67-86B9459BFFE9}"/>
+                <a16:creationId xmlns="" xmlns:a16="http://schemas.microsoft.com/office/drawing/2014/main" id="{9D9C9153-B8FA-38C4-EB67-86B9459BFFE9}"/>
               </a:ext>
             </a:extLst>
           </p:cNvPr>
@@ -19554,7 +19618,7 @@
             <p:cNvPr id="73" name="Oval 72">
               <a:extLst>
                 <a:ext uri="{FF2B5EF4-FFF2-40B4-BE49-F238E27FC236}">
-                  <a16:creationId xmlns:a16="http://schemas.microsoft.com/office/drawing/2014/main" xmlns="" id="{874762A5-21AC-4851-DF9C-A0D7DBFA5AFA}"/>
+                  <a16:creationId xmlns="" xmlns:a16="http://schemas.microsoft.com/office/drawing/2014/main" id="{874762A5-21AC-4851-DF9C-A0D7DBFA5AFA}"/>
                 </a:ext>
               </a:extLst>
             </p:cNvPr>
@@ -19613,7 +19677,7 @@
             <p:cNvPr id="74" name="Arc 73">
               <a:extLst>
                 <a:ext uri="{FF2B5EF4-FFF2-40B4-BE49-F238E27FC236}">
-                  <a16:creationId xmlns:a16="http://schemas.microsoft.com/office/drawing/2014/main" xmlns="" id="{BDBA534A-9F3C-F651-600E-DD503C672D20}"/>
+                  <a16:creationId xmlns="" xmlns:a16="http://schemas.microsoft.com/office/drawing/2014/main" id="{BDBA534A-9F3C-F651-600E-DD503C672D20}"/>
                 </a:ext>
               </a:extLst>
             </p:cNvPr>
@@ -19666,7 +19730,7 @@
           <p:cNvPr id="75" name="Group 74">
             <a:extLst>
               <a:ext uri="{FF2B5EF4-FFF2-40B4-BE49-F238E27FC236}">
-                <a16:creationId xmlns:a16="http://schemas.microsoft.com/office/drawing/2014/main" xmlns="" id="{79961178-ABE0-C7D2-04FE-9A129BC81ED4}"/>
+                <a16:creationId xmlns="" xmlns:a16="http://schemas.microsoft.com/office/drawing/2014/main" id="{79961178-ABE0-C7D2-04FE-9A129BC81ED4}"/>
               </a:ext>
             </a:extLst>
           </p:cNvPr>
@@ -19686,7 +19750,7 @@
             <p:cNvPr id="76" name="Oval 75">
               <a:extLst>
                 <a:ext uri="{FF2B5EF4-FFF2-40B4-BE49-F238E27FC236}">
-                  <a16:creationId xmlns:a16="http://schemas.microsoft.com/office/drawing/2014/main" xmlns="" id="{D8C47778-3FE4-169B-9D62-9C01A7F95945}"/>
+                  <a16:creationId xmlns="" xmlns:a16="http://schemas.microsoft.com/office/drawing/2014/main" id="{D8C47778-3FE4-169B-9D62-9C01A7F95945}"/>
                 </a:ext>
               </a:extLst>
             </p:cNvPr>
@@ -19745,7 +19809,7 @@
             <p:cNvPr id="77" name="Arc 76">
               <a:extLst>
                 <a:ext uri="{FF2B5EF4-FFF2-40B4-BE49-F238E27FC236}">
-                  <a16:creationId xmlns:a16="http://schemas.microsoft.com/office/drawing/2014/main" xmlns="" id="{FDC23D54-870F-5B8A-AB44-E52FAE0875B5}"/>
+                  <a16:creationId xmlns="" xmlns:a16="http://schemas.microsoft.com/office/drawing/2014/main" id="{FDC23D54-870F-5B8A-AB44-E52FAE0875B5}"/>
                 </a:ext>
               </a:extLst>
             </p:cNvPr>
@@ -19798,7 +19862,7 @@
           <p:cNvPr id="78" name="Group 77">
             <a:extLst>
               <a:ext uri="{FF2B5EF4-FFF2-40B4-BE49-F238E27FC236}">
-                <a16:creationId xmlns:a16="http://schemas.microsoft.com/office/drawing/2014/main" xmlns="" id="{B99FDF76-FB64-197E-90CD-2A6F48DA61F3}"/>
+                <a16:creationId xmlns="" xmlns:a16="http://schemas.microsoft.com/office/drawing/2014/main" id="{B99FDF76-FB64-197E-90CD-2A6F48DA61F3}"/>
               </a:ext>
             </a:extLst>
           </p:cNvPr>
@@ -19818,7 +19882,7 @@
             <p:cNvPr id="79" name="Oval 78">
               <a:extLst>
                 <a:ext uri="{FF2B5EF4-FFF2-40B4-BE49-F238E27FC236}">
-                  <a16:creationId xmlns:a16="http://schemas.microsoft.com/office/drawing/2014/main" xmlns="" id="{C7D39EC7-8798-33A9-DB8C-D12FB95A963C}"/>
+                  <a16:creationId xmlns="" xmlns:a16="http://schemas.microsoft.com/office/drawing/2014/main" id="{C7D39EC7-8798-33A9-DB8C-D12FB95A963C}"/>
                 </a:ext>
               </a:extLst>
             </p:cNvPr>
@@ -19877,7 +19941,7 @@
             <p:cNvPr id="80" name="Arc 79">
               <a:extLst>
                 <a:ext uri="{FF2B5EF4-FFF2-40B4-BE49-F238E27FC236}">
-                  <a16:creationId xmlns:a16="http://schemas.microsoft.com/office/drawing/2014/main" xmlns="" id="{CA276D5B-D344-FC55-AFBA-FB0F2E0A212D}"/>
+                  <a16:creationId xmlns="" xmlns:a16="http://schemas.microsoft.com/office/drawing/2014/main" id="{CA276D5B-D344-FC55-AFBA-FB0F2E0A212D}"/>
                 </a:ext>
               </a:extLst>
             </p:cNvPr>
@@ -19930,7 +19994,7 @@
           <p:cNvPr id="81" name="Group 80">
             <a:extLst>
               <a:ext uri="{FF2B5EF4-FFF2-40B4-BE49-F238E27FC236}">
-                <a16:creationId xmlns:a16="http://schemas.microsoft.com/office/drawing/2014/main" xmlns="" id="{5B4D2A7E-D5B4-408F-5ACC-A43BFE1E3809}"/>
+                <a16:creationId xmlns="" xmlns:a16="http://schemas.microsoft.com/office/drawing/2014/main" id="{5B4D2A7E-D5B4-408F-5ACC-A43BFE1E3809}"/>
               </a:ext>
             </a:extLst>
           </p:cNvPr>
@@ -19950,7 +20014,7 @@
             <p:cNvPr id="82" name="Oval 81">
               <a:extLst>
                 <a:ext uri="{FF2B5EF4-FFF2-40B4-BE49-F238E27FC236}">
-                  <a16:creationId xmlns:a16="http://schemas.microsoft.com/office/drawing/2014/main" xmlns="" id="{FA296D8C-160F-84DE-0432-628B589F211B}"/>
+                  <a16:creationId xmlns="" xmlns:a16="http://schemas.microsoft.com/office/drawing/2014/main" id="{FA296D8C-160F-84DE-0432-628B589F211B}"/>
                 </a:ext>
               </a:extLst>
             </p:cNvPr>
@@ -20009,7 +20073,7 @@
             <p:cNvPr id="83" name="Arc 82">
               <a:extLst>
                 <a:ext uri="{FF2B5EF4-FFF2-40B4-BE49-F238E27FC236}">
-                  <a16:creationId xmlns:a16="http://schemas.microsoft.com/office/drawing/2014/main" xmlns="" id="{7ACD6CCD-3CFB-52A8-E091-FDDB0E796F53}"/>
+                  <a16:creationId xmlns="" xmlns:a16="http://schemas.microsoft.com/office/drawing/2014/main" id="{7ACD6CCD-3CFB-52A8-E091-FDDB0E796F53}"/>
                 </a:ext>
               </a:extLst>
             </p:cNvPr>
@@ -20062,7 +20126,7 @@
           <p:cNvPr id="84" name="Group 83">
             <a:extLst>
               <a:ext uri="{FF2B5EF4-FFF2-40B4-BE49-F238E27FC236}">
-                <a16:creationId xmlns:a16="http://schemas.microsoft.com/office/drawing/2014/main" xmlns="" id="{44FED0D5-3E54-90C0-E3E7-BF526FE9D113}"/>
+                <a16:creationId xmlns="" xmlns:a16="http://schemas.microsoft.com/office/drawing/2014/main" id="{44FED0D5-3E54-90C0-E3E7-BF526FE9D113}"/>
               </a:ext>
             </a:extLst>
           </p:cNvPr>
@@ -20082,7 +20146,7 @@
             <p:cNvPr id="85" name="Oval 84">
               <a:extLst>
                 <a:ext uri="{FF2B5EF4-FFF2-40B4-BE49-F238E27FC236}">
-                  <a16:creationId xmlns:a16="http://schemas.microsoft.com/office/drawing/2014/main" xmlns="" id="{656B078E-FF03-15AE-74D7-C0ED1C34B554}"/>
+                  <a16:creationId xmlns="" xmlns:a16="http://schemas.microsoft.com/office/drawing/2014/main" id="{656B078E-FF03-15AE-74D7-C0ED1C34B554}"/>
                 </a:ext>
               </a:extLst>
             </p:cNvPr>
@@ -20141,7 +20205,7 @@
             <p:cNvPr id="86" name="Arc 85">
               <a:extLst>
                 <a:ext uri="{FF2B5EF4-FFF2-40B4-BE49-F238E27FC236}">
-                  <a16:creationId xmlns:a16="http://schemas.microsoft.com/office/drawing/2014/main" xmlns="" id="{6B33F721-99DC-4BB8-9E9E-DAF43599FE12}"/>
+                  <a16:creationId xmlns="" xmlns:a16="http://schemas.microsoft.com/office/drawing/2014/main" id="{6B33F721-99DC-4BB8-9E9E-DAF43599FE12}"/>
                 </a:ext>
               </a:extLst>
             </p:cNvPr>
@@ -20194,7 +20258,7 @@
           <p:cNvPr id="87" name="Group 86">
             <a:extLst>
               <a:ext uri="{FF2B5EF4-FFF2-40B4-BE49-F238E27FC236}">
-                <a16:creationId xmlns:a16="http://schemas.microsoft.com/office/drawing/2014/main" xmlns="" id="{59827D44-4B51-A191-64E5-C84C0624372E}"/>
+                <a16:creationId xmlns="" xmlns:a16="http://schemas.microsoft.com/office/drawing/2014/main" id="{59827D44-4B51-A191-64E5-C84C0624372E}"/>
               </a:ext>
             </a:extLst>
           </p:cNvPr>
@@ -20214,7 +20278,7 @@
             <p:cNvPr id="88" name="Oval 87">
               <a:extLst>
                 <a:ext uri="{FF2B5EF4-FFF2-40B4-BE49-F238E27FC236}">
-                  <a16:creationId xmlns:a16="http://schemas.microsoft.com/office/drawing/2014/main" xmlns="" id="{402C9496-9C16-3C84-DE2A-8792B0D53BA9}"/>
+                  <a16:creationId xmlns="" xmlns:a16="http://schemas.microsoft.com/office/drawing/2014/main" id="{402C9496-9C16-3C84-DE2A-8792B0D53BA9}"/>
                 </a:ext>
               </a:extLst>
             </p:cNvPr>
@@ -20273,7 +20337,7 @@
             <p:cNvPr id="89" name="Arc 88">
               <a:extLst>
                 <a:ext uri="{FF2B5EF4-FFF2-40B4-BE49-F238E27FC236}">
-                  <a16:creationId xmlns:a16="http://schemas.microsoft.com/office/drawing/2014/main" xmlns="" id="{D4F27B29-B37A-5397-E933-37DF44EFCF3E}"/>
+                  <a16:creationId xmlns="" xmlns:a16="http://schemas.microsoft.com/office/drawing/2014/main" id="{D4F27B29-B37A-5397-E933-37DF44EFCF3E}"/>
                 </a:ext>
               </a:extLst>
             </p:cNvPr>
@@ -20326,7 +20390,7 @@
           <p:cNvPr id="90" name="Group 89">
             <a:extLst>
               <a:ext uri="{FF2B5EF4-FFF2-40B4-BE49-F238E27FC236}">
-                <a16:creationId xmlns:a16="http://schemas.microsoft.com/office/drawing/2014/main" xmlns="" id="{C31CDB83-6843-FF34-4DD1-308EBFE5E615}"/>
+                <a16:creationId xmlns="" xmlns:a16="http://schemas.microsoft.com/office/drawing/2014/main" id="{C31CDB83-6843-FF34-4DD1-308EBFE5E615}"/>
               </a:ext>
             </a:extLst>
           </p:cNvPr>
@@ -20346,7 +20410,7 @@
             <p:cNvPr id="91" name="Oval 90">
               <a:extLst>
                 <a:ext uri="{FF2B5EF4-FFF2-40B4-BE49-F238E27FC236}">
-                  <a16:creationId xmlns:a16="http://schemas.microsoft.com/office/drawing/2014/main" xmlns="" id="{B6601984-7036-87C4-47B4-9F20BE341D87}"/>
+                  <a16:creationId xmlns="" xmlns:a16="http://schemas.microsoft.com/office/drawing/2014/main" id="{B6601984-7036-87C4-47B4-9F20BE341D87}"/>
                 </a:ext>
               </a:extLst>
             </p:cNvPr>
@@ -20405,7 +20469,7 @@
             <p:cNvPr id="92" name="Arc 91">
               <a:extLst>
                 <a:ext uri="{FF2B5EF4-FFF2-40B4-BE49-F238E27FC236}">
-                  <a16:creationId xmlns:a16="http://schemas.microsoft.com/office/drawing/2014/main" xmlns="" id="{985ED055-0FFF-9046-6A6B-2F0B309B0601}"/>
+                  <a16:creationId xmlns="" xmlns:a16="http://schemas.microsoft.com/office/drawing/2014/main" id="{985ED055-0FFF-9046-6A6B-2F0B309B0601}"/>
                 </a:ext>
               </a:extLst>
             </p:cNvPr>
@@ -20458,7 +20522,7 @@
           <p:cNvPr id="93" name="Group 92">
             <a:extLst>
               <a:ext uri="{FF2B5EF4-FFF2-40B4-BE49-F238E27FC236}">
-                <a16:creationId xmlns:a16="http://schemas.microsoft.com/office/drawing/2014/main" xmlns="" id="{2F3C57F8-4743-E9F0-EEB4-1B99AAA02502}"/>
+                <a16:creationId xmlns="" xmlns:a16="http://schemas.microsoft.com/office/drawing/2014/main" id="{2F3C57F8-4743-E9F0-EEB4-1B99AAA02502}"/>
               </a:ext>
             </a:extLst>
           </p:cNvPr>
@@ -20478,7 +20542,7 @@
             <p:cNvPr id="94" name="Oval 93">
               <a:extLst>
                 <a:ext uri="{FF2B5EF4-FFF2-40B4-BE49-F238E27FC236}">
-                  <a16:creationId xmlns:a16="http://schemas.microsoft.com/office/drawing/2014/main" xmlns="" id="{70E875F3-7DD6-842E-3C42-FB7188017892}"/>
+                  <a16:creationId xmlns="" xmlns:a16="http://schemas.microsoft.com/office/drawing/2014/main" id="{70E875F3-7DD6-842E-3C42-FB7188017892}"/>
                 </a:ext>
               </a:extLst>
             </p:cNvPr>
@@ -20537,7 +20601,7 @@
             <p:cNvPr id="95" name="Arc 94">
               <a:extLst>
                 <a:ext uri="{FF2B5EF4-FFF2-40B4-BE49-F238E27FC236}">
-                  <a16:creationId xmlns:a16="http://schemas.microsoft.com/office/drawing/2014/main" xmlns="" id="{B2F6FB24-FC01-4AF4-9A35-DAA5B1A8563F}"/>
+                  <a16:creationId xmlns="" xmlns:a16="http://schemas.microsoft.com/office/drawing/2014/main" id="{B2F6FB24-FC01-4AF4-9A35-DAA5B1A8563F}"/>
                 </a:ext>
               </a:extLst>
             </p:cNvPr>
@@ -20590,7 +20654,7 @@
           <p:cNvPr id="96" name="Group 95">
             <a:extLst>
               <a:ext uri="{FF2B5EF4-FFF2-40B4-BE49-F238E27FC236}">
-                <a16:creationId xmlns:a16="http://schemas.microsoft.com/office/drawing/2014/main" xmlns="" id="{DDDFC3EA-F7A7-3A43-3D7E-FFBE8CE964FD}"/>
+                <a16:creationId xmlns="" xmlns:a16="http://schemas.microsoft.com/office/drawing/2014/main" id="{DDDFC3EA-F7A7-3A43-3D7E-FFBE8CE964FD}"/>
               </a:ext>
             </a:extLst>
           </p:cNvPr>
@@ -20610,7 +20674,7 @@
             <p:cNvPr id="97" name="Oval 96">
               <a:extLst>
                 <a:ext uri="{FF2B5EF4-FFF2-40B4-BE49-F238E27FC236}">
-                  <a16:creationId xmlns:a16="http://schemas.microsoft.com/office/drawing/2014/main" xmlns="" id="{5F25F946-F5CC-34FA-0E42-EA8C2624FCEC}"/>
+                  <a16:creationId xmlns="" xmlns:a16="http://schemas.microsoft.com/office/drawing/2014/main" id="{5F25F946-F5CC-34FA-0E42-EA8C2624FCEC}"/>
                 </a:ext>
               </a:extLst>
             </p:cNvPr>
@@ -20669,7 +20733,7 @@
             <p:cNvPr id="98" name="Arc 97">
               <a:extLst>
                 <a:ext uri="{FF2B5EF4-FFF2-40B4-BE49-F238E27FC236}">
-                  <a16:creationId xmlns:a16="http://schemas.microsoft.com/office/drawing/2014/main" xmlns="" id="{B792FC13-D3FC-7671-B724-A8CF4B9A39B4}"/>
+                  <a16:creationId xmlns="" xmlns:a16="http://schemas.microsoft.com/office/drawing/2014/main" id="{B792FC13-D3FC-7671-B724-A8CF4B9A39B4}"/>
                 </a:ext>
               </a:extLst>
             </p:cNvPr>
@@ -20722,7 +20786,7 @@
           <p:cNvPr id="99" name="Group 98">
             <a:extLst>
               <a:ext uri="{FF2B5EF4-FFF2-40B4-BE49-F238E27FC236}">
-                <a16:creationId xmlns:a16="http://schemas.microsoft.com/office/drawing/2014/main" xmlns="" id="{2DB2C038-DEFE-204E-30FC-790636ED570C}"/>
+                <a16:creationId xmlns="" xmlns:a16="http://schemas.microsoft.com/office/drawing/2014/main" id="{2DB2C038-DEFE-204E-30FC-790636ED570C}"/>
               </a:ext>
             </a:extLst>
           </p:cNvPr>
@@ -20742,7 +20806,7 @@
             <p:cNvPr id="100" name="Oval 99">
               <a:extLst>
                 <a:ext uri="{FF2B5EF4-FFF2-40B4-BE49-F238E27FC236}">
-                  <a16:creationId xmlns:a16="http://schemas.microsoft.com/office/drawing/2014/main" xmlns="" id="{45093590-8764-D5E6-8110-FD1D24889D7B}"/>
+                  <a16:creationId xmlns="" xmlns:a16="http://schemas.microsoft.com/office/drawing/2014/main" id="{45093590-8764-D5E6-8110-FD1D24889D7B}"/>
                 </a:ext>
               </a:extLst>
             </p:cNvPr>
@@ -20801,7 +20865,7 @@
             <p:cNvPr id="101" name="Arc 100">
               <a:extLst>
                 <a:ext uri="{FF2B5EF4-FFF2-40B4-BE49-F238E27FC236}">
-                  <a16:creationId xmlns:a16="http://schemas.microsoft.com/office/drawing/2014/main" xmlns="" id="{770478F6-8E18-6FE2-B3C4-489000AC2563}"/>
+                  <a16:creationId xmlns="" xmlns:a16="http://schemas.microsoft.com/office/drawing/2014/main" id="{770478F6-8E18-6FE2-B3C4-489000AC2563}"/>
                 </a:ext>
               </a:extLst>
             </p:cNvPr>
@@ -20854,7 +20918,7 @@
           <p:cNvPr id="102" name="Group 101">
             <a:extLst>
               <a:ext uri="{FF2B5EF4-FFF2-40B4-BE49-F238E27FC236}">
-                <a16:creationId xmlns:a16="http://schemas.microsoft.com/office/drawing/2014/main" xmlns="" id="{BB5E874B-F6C3-FA86-2883-E06C0B907345}"/>
+                <a16:creationId xmlns="" xmlns:a16="http://schemas.microsoft.com/office/drawing/2014/main" id="{BB5E874B-F6C3-FA86-2883-E06C0B907345}"/>
               </a:ext>
             </a:extLst>
           </p:cNvPr>
@@ -20874,7 +20938,7 @@
             <p:cNvPr id="103" name="Oval 102">
               <a:extLst>
                 <a:ext uri="{FF2B5EF4-FFF2-40B4-BE49-F238E27FC236}">
-                  <a16:creationId xmlns:a16="http://schemas.microsoft.com/office/drawing/2014/main" xmlns="" id="{ADCBCFB9-1DE9-6BCF-CAFB-A3A5E3E3BDC3}"/>
+                  <a16:creationId xmlns="" xmlns:a16="http://schemas.microsoft.com/office/drawing/2014/main" id="{ADCBCFB9-1DE9-6BCF-CAFB-A3A5E3E3BDC3}"/>
                 </a:ext>
               </a:extLst>
             </p:cNvPr>
@@ -20933,7 +20997,7 @@
             <p:cNvPr id="104" name="Arc 103">
               <a:extLst>
                 <a:ext uri="{FF2B5EF4-FFF2-40B4-BE49-F238E27FC236}">
-                  <a16:creationId xmlns:a16="http://schemas.microsoft.com/office/drawing/2014/main" xmlns="" id="{06897284-51F0-34BA-B35F-D0DFBB95FC6A}"/>
+                  <a16:creationId xmlns="" xmlns:a16="http://schemas.microsoft.com/office/drawing/2014/main" id="{06897284-51F0-34BA-B35F-D0DFBB95FC6A}"/>
                 </a:ext>
               </a:extLst>
             </p:cNvPr>
@@ -20986,7 +21050,7 @@
           <p:cNvPr id="105" name="Group 104">
             <a:extLst>
               <a:ext uri="{FF2B5EF4-FFF2-40B4-BE49-F238E27FC236}">
-                <a16:creationId xmlns:a16="http://schemas.microsoft.com/office/drawing/2014/main" xmlns="" id="{C96F0D64-C1BF-B3A8-A519-7E4CF06FFDC7}"/>
+                <a16:creationId xmlns="" xmlns:a16="http://schemas.microsoft.com/office/drawing/2014/main" id="{C96F0D64-C1BF-B3A8-A519-7E4CF06FFDC7}"/>
               </a:ext>
             </a:extLst>
           </p:cNvPr>
@@ -21006,7 +21070,7 @@
             <p:cNvPr id="106" name="Oval 105">
               <a:extLst>
                 <a:ext uri="{FF2B5EF4-FFF2-40B4-BE49-F238E27FC236}">
-                  <a16:creationId xmlns:a16="http://schemas.microsoft.com/office/drawing/2014/main" xmlns="" id="{1346C700-051D-1F0B-ADAE-0132A316A7DB}"/>
+                  <a16:creationId xmlns="" xmlns:a16="http://schemas.microsoft.com/office/drawing/2014/main" id="{1346C700-051D-1F0B-ADAE-0132A316A7DB}"/>
                 </a:ext>
               </a:extLst>
             </p:cNvPr>
@@ -21065,7 +21129,7 @@
             <p:cNvPr id="107" name="Arc 106">
               <a:extLst>
                 <a:ext uri="{FF2B5EF4-FFF2-40B4-BE49-F238E27FC236}">
-                  <a16:creationId xmlns:a16="http://schemas.microsoft.com/office/drawing/2014/main" xmlns="" id="{BA5E0980-7A99-E9E0-4B91-E38555423E5B}"/>
+                  <a16:creationId xmlns="" xmlns:a16="http://schemas.microsoft.com/office/drawing/2014/main" id="{BA5E0980-7A99-E9E0-4B91-E38555423E5B}"/>
                 </a:ext>
               </a:extLst>
             </p:cNvPr>
@@ -21118,7 +21182,7 @@
           <p:cNvPr id="108" name="Group 107">
             <a:extLst>
               <a:ext uri="{FF2B5EF4-FFF2-40B4-BE49-F238E27FC236}">
-                <a16:creationId xmlns:a16="http://schemas.microsoft.com/office/drawing/2014/main" xmlns="" id="{D6790D83-0F90-0346-D1FD-D5C3602DFFF6}"/>
+                <a16:creationId xmlns="" xmlns:a16="http://schemas.microsoft.com/office/drawing/2014/main" id="{D6790D83-0F90-0346-D1FD-D5C3602DFFF6}"/>
               </a:ext>
             </a:extLst>
           </p:cNvPr>
@@ -21138,7 +21202,7 @@
             <p:cNvPr id="109" name="Oval 108">
               <a:extLst>
                 <a:ext uri="{FF2B5EF4-FFF2-40B4-BE49-F238E27FC236}">
-                  <a16:creationId xmlns:a16="http://schemas.microsoft.com/office/drawing/2014/main" xmlns="" id="{CE118234-AB4B-3CE4-8627-D437C8F12935}"/>
+                  <a16:creationId xmlns="" xmlns:a16="http://schemas.microsoft.com/office/drawing/2014/main" id="{CE118234-AB4B-3CE4-8627-D437C8F12935}"/>
                 </a:ext>
               </a:extLst>
             </p:cNvPr>
@@ -21197,7 +21261,7 @@
             <p:cNvPr id="110" name="Arc 109">
               <a:extLst>
                 <a:ext uri="{FF2B5EF4-FFF2-40B4-BE49-F238E27FC236}">
-                  <a16:creationId xmlns:a16="http://schemas.microsoft.com/office/drawing/2014/main" xmlns="" id="{24A6161C-A3EC-CB70-28BF-1AA5907F656E}"/>
+                  <a16:creationId xmlns="" xmlns:a16="http://schemas.microsoft.com/office/drawing/2014/main" id="{24A6161C-A3EC-CB70-28BF-1AA5907F656E}"/>
                 </a:ext>
               </a:extLst>
             </p:cNvPr>
@@ -21250,7 +21314,7 @@
           <p:cNvPr id="111" name="Group 110">
             <a:extLst>
               <a:ext uri="{FF2B5EF4-FFF2-40B4-BE49-F238E27FC236}">
-                <a16:creationId xmlns:a16="http://schemas.microsoft.com/office/drawing/2014/main" xmlns="" id="{F8BE1461-AE7E-40C6-28C5-62341855537E}"/>
+                <a16:creationId xmlns="" xmlns:a16="http://schemas.microsoft.com/office/drawing/2014/main" id="{F8BE1461-AE7E-40C6-28C5-62341855537E}"/>
               </a:ext>
             </a:extLst>
           </p:cNvPr>
@@ -21270,7 +21334,7 @@
             <p:cNvPr id="112" name="Oval 111">
               <a:extLst>
                 <a:ext uri="{FF2B5EF4-FFF2-40B4-BE49-F238E27FC236}">
-                  <a16:creationId xmlns:a16="http://schemas.microsoft.com/office/drawing/2014/main" xmlns="" id="{3D6C0D0C-1737-4ACF-DF05-40AB4B997999}"/>
+                  <a16:creationId xmlns="" xmlns:a16="http://schemas.microsoft.com/office/drawing/2014/main" id="{3D6C0D0C-1737-4ACF-DF05-40AB4B997999}"/>
                 </a:ext>
               </a:extLst>
             </p:cNvPr>
@@ -21329,7 +21393,7 @@
             <p:cNvPr id="113" name="Arc 112">
               <a:extLst>
                 <a:ext uri="{FF2B5EF4-FFF2-40B4-BE49-F238E27FC236}">
-                  <a16:creationId xmlns:a16="http://schemas.microsoft.com/office/drawing/2014/main" xmlns="" id="{C80C098A-9223-34F9-FB12-0ACBBD0C19A6}"/>
+                  <a16:creationId xmlns="" xmlns:a16="http://schemas.microsoft.com/office/drawing/2014/main" id="{C80C098A-9223-34F9-FB12-0ACBBD0C19A6}"/>
                 </a:ext>
               </a:extLst>
             </p:cNvPr>
@@ -21382,7 +21446,7 @@
           <p:cNvPr id="114" name="Group 113">
             <a:extLst>
               <a:ext uri="{FF2B5EF4-FFF2-40B4-BE49-F238E27FC236}">
-                <a16:creationId xmlns:a16="http://schemas.microsoft.com/office/drawing/2014/main" xmlns="" id="{697EE20F-3D0A-E159-F8D9-0EC0D2AF7155}"/>
+                <a16:creationId xmlns="" xmlns:a16="http://schemas.microsoft.com/office/drawing/2014/main" id="{697EE20F-3D0A-E159-F8D9-0EC0D2AF7155}"/>
               </a:ext>
             </a:extLst>
           </p:cNvPr>
@@ -21402,7 +21466,7 @@
             <p:cNvPr id="115" name="Oval 114">
               <a:extLst>
                 <a:ext uri="{FF2B5EF4-FFF2-40B4-BE49-F238E27FC236}">
-                  <a16:creationId xmlns:a16="http://schemas.microsoft.com/office/drawing/2014/main" xmlns="" id="{4E528A35-0A92-6308-0EDC-AA6D20AA61B8}"/>
+                  <a16:creationId xmlns="" xmlns:a16="http://schemas.microsoft.com/office/drawing/2014/main" id="{4E528A35-0A92-6308-0EDC-AA6D20AA61B8}"/>
                 </a:ext>
               </a:extLst>
             </p:cNvPr>
@@ -21461,7 +21525,7 @@
             <p:cNvPr id="116" name="Arc 115">
               <a:extLst>
                 <a:ext uri="{FF2B5EF4-FFF2-40B4-BE49-F238E27FC236}">
-                  <a16:creationId xmlns:a16="http://schemas.microsoft.com/office/drawing/2014/main" xmlns="" id="{39483389-2D87-DE50-A684-495349A8AE67}"/>
+                  <a16:creationId xmlns="" xmlns:a16="http://schemas.microsoft.com/office/drawing/2014/main" id="{39483389-2D87-DE50-A684-495349A8AE67}"/>
                 </a:ext>
               </a:extLst>
             </p:cNvPr>
@@ -21514,7 +21578,7 @@
           <p:cNvPr id="117" name="Group 116">
             <a:extLst>
               <a:ext uri="{FF2B5EF4-FFF2-40B4-BE49-F238E27FC236}">
-                <a16:creationId xmlns:a16="http://schemas.microsoft.com/office/drawing/2014/main" xmlns="" id="{786BE2FE-EF0F-688F-5B2C-6EF38976E83B}"/>
+                <a16:creationId xmlns="" xmlns:a16="http://schemas.microsoft.com/office/drawing/2014/main" id="{786BE2FE-EF0F-688F-5B2C-6EF38976E83B}"/>
               </a:ext>
             </a:extLst>
           </p:cNvPr>
@@ -21534,7 +21598,7 @@
             <p:cNvPr id="118" name="Oval 117">
               <a:extLst>
                 <a:ext uri="{FF2B5EF4-FFF2-40B4-BE49-F238E27FC236}">
-                  <a16:creationId xmlns:a16="http://schemas.microsoft.com/office/drawing/2014/main" xmlns="" id="{A0C35F16-1AB8-1BF9-41DE-1B715E0D36D5}"/>
+                  <a16:creationId xmlns="" xmlns:a16="http://schemas.microsoft.com/office/drawing/2014/main" id="{A0C35F16-1AB8-1BF9-41DE-1B715E0D36D5}"/>
                 </a:ext>
               </a:extLst>
             </p:cNvPr>
@@ -21593,7 +21657,7 @@
             <p:cNvPr id="119" name="Arc 118">
               <a:extLst>
                 <a:ext uri="{FF2B5EF4-FFF2-40B4-BE49-F238E27FC236}">
-                  <a16:creationId xmlns:a16="http://schemas.microsoft.com/office/drawing/2014/main" xmlns="" id="{C0154793-588A-3EFA-F58E-FF511C68E63E}"/>
+                  <a16:creationId xmlns="" xmlns:a16="http://schemas.microsoft.com/office/drawing/2014/main" id="{C0154793-588A-3EFA-F58E-FF511C68E63E}"/>
                 </a:ext>
               </a:extLst>
             </p:cNvPr>
@@ -21646,7 +21710,7 @@
           <p:cNvPr id="120" name="Group 119">
             <a:extLst>
               <a:ext uri="{FF2B5EF4-FFF2-40B4-BE49-F238E27FC236}">
-                <a16:creationId xmlns:a16="http://schemas.microsoft.com/office/drawing/2014/main" xmlns="" id="{511A915E-B563-6A18-4902-C0442601AD96}"/>
+                <a16:creationId xmlns="" xmlns:a16="http://schemas.microsoft.com/office/drawing/2014/main" id="{511A915E-B563-6A18-4902-C0442601AD96}"/>
               </a:ext>
             </a:extLst>
           </p:cNvPr>
@@ -21666,7 +21730,7 @@
             <p:cNvPr id="121" name="Oval 120">
               <a:extLst>
                 <a:ext uri="{FF2B5EF4-FFF2-40B4-BE49-F238E27FC236}">
-                  <a16:creationId xmlns:a16="http://schemas.microsoft.com/office/drawing/2014/main" xmlns="" id="{109142E7-2B8E-19B5-6124-89973384D7E5}"/>
+                  <a16:creationId xmlns="" xmlns:a16="http://schemas.microsoft.com/office/drawing/2014/main" id="{109142E7-2B8E-19B5-6124-89973384D7E5}"/>
                 </a:ext>
               </a:extLst>
             </p:cNvPr>
@@ -21725,7 +21789,7 @@
             <p:cNvPr id="122" name="Arc 121">
               <a:extLst>
                 <a:ext uri="{FF2B5EF4-FFF2-40B4-BE49-F238E27FC236}">
-                  <a16:creationId xmlns:a16="http://schemas.microsoft.com/office/drawing/2014/main" xmlns="" id="{AAE5814C-3B3B-8D93-EE2B-CB751AFBF13A}"/>
+                  <a16:creationId xmlns="" xmlns:a16="http://schemas.microsoft.com/office/drawing/2014/main" id="{AAE5814C-3B3B-8D93-EE2B-CB751AFBF13A}"/>
                 </a:ext>
               </a:extLst>
             </p:cNvPr>
@@ -22235,13 +22299,13 @@
   <p:clrMapOvr>
     <a:masterClrMapping/>
   </p:clrMapOvr>
-  <mc:AlternateContent xmlns:mc="http://schemas.openxmlformats.org/markup-compatibility/2006">
-    <mc:Choice xmlns:p15="http://schemas.microsoft.com/office/powerpoint/2012/main" Requires="p15">
+  <mc:AlternateContent xmlns:mc="http://schemas.openxmlformats.org/markup-compatibility/2006" xmlns:p15="http://schemas.microsoft.com/office/powerpoint/2012/main">
+    <mc:Choice Requires="p15">
       <p:transition xmlns:p14="http://schemas.microsoft.com/office/powerpoint/2010/main" spd="slow" p14:dur="1250">
         <p15:prstTrans prst="pageCurlDouble"/>
       </p:transition>
     </mc:Choice>
-    <mc:Fallback>
+    <mc:Fallback xmlns="">
       <p:transition spd="slow">
         <p:fade/>
       </p:transition>
@@ -22265,7 +22329,7 @@
         <p:cNvPr id="1" name="">
           <a:extLst>
             <a:ext uri="{FF2B5EF4-FFF2-40B4-BE49-F238E27FC236}">
-              <a16:creationId xmlns:a16="http://schemas.microsoft.com/office/drawing/2014/main" xmlns="" id="{51C4FD09-55E3-2B1B-897E-1F9BF2720A5C}"/>
+              <a16:creationId xmlns="" xmlns:a16="http://schemas.microsoft.com/office/drawing/2014/main" id="{51C4FD09-55E3-2B1B-897E-1F9BF2720A5C}"/>
             </a:ext>
           </a:extLst>
         </p:cNvPr>
@@ -22285,7 +22349,7 @@
           <p:cNvPr id="5" name="Rectangle 4">
             <a:extLst>
               <a:ext uri="{FF2B5EF4-FFF2-40B4-BE49-F238E27FC236}">
-                <a16:creationId xmlns:a16="http://schemas.microsoft.com/office/drawing/2014/main" xmlns="" id="{B034BA31-4C57-9BDA-04C5-8FC13B21BF04}"/>
+                <a16:creationId xmlns="" xmlns:a16="http://schemas.microsoft.com/office/drawing/2014/main" id="{B034BA31-4C57-9BDA-04C5-8FC13B21BF04}"/>
               </a:ext>
             </a:extLst>
           </p:cNvPr>
@@ -22341,7 +22405,7 @@
           <p:cNvPr id="4" name="Rectangle 3">
             <a:extLst>
               <a:ext uri="{FF2B5EF4-FFF2-40B4-BE49-F238E27FC236}">
-                <a16:creationId xmlns:a16="http://schemas.microsoft.com/office/drawing/2014/main" xmlns="" id="{726F619E-C2F5-A764-7A5A-E740D3764F94}"/>
+                <a16:creationId xmlns="" xmlns:a16="http://schemas.microsoft.com/office/drawing/2014/main" id="{726F619E-C2F5-A764-7A5A-E740D3764F94}"/>
               </a:ext>
             </a:extLst>
           </p:cNvPr>
@@ -22572,7 +22636,7 @@
           <p:cNvPr id="6" name="Oval 5">
             <a:extLst>
               <a:ext uri="{FF2B5EF4-FFF2-40B4-BE49-F238E27FC236}">
-                <a16:creationId xmlns:a16="http://schemas.microsoft.com/office/drawing/2014/main" xmlns="" id="{63652264-4E8B-48A9-C360-C02C3660C32D}"/>
+                <a16:creationId xmlns="" xmlns:a16="http://schemas.microsoft.com/office/drawing/2014/main" id="{63652264-4E8B-48A9-C360-C02C3660C32D}"/>
               </a:ext>
             </a:extLst>
           </p:cNvPr>
@@ -22631,7 +22695,7 @@
           <p:cNvPr id="7" name="Oval 6">
             <a:extLst>
               <a:ext uri="{FF2B5EF4-FFF2-40B4-BE49-F238E27FC236}">
-                <a16:creationId xmlns:a16="http://schemas.microsoft.com/office/drawing/2014/main" xmlns="" id="{94A79690-2C7C-FEC2-2B4B-F5D0C6E2B06B}"/>
+                <a16:creationId xmlns="" xmlns:a16="http://schemas.microsoft.com/office/drawing/2014/main" id="{94A79690-2C7C-FEC2-2B4B-F5D0C6E2B06B}"/>
               </a:ext>
             </a:extLst>
           </p:cNvPr>
@@ -22690,7 +22754,7 @@
           <p:cNvPr id="8" name="Oval 7">
             <a:extLst>
               <a:ext uri="{FF2B5EF4-FFF2-40B4-BE49-F238E27FC236}">
-                <a16:creationId xmlns:a16="http://schemas.microsoft.com/office/drawing/2014/main" xmlns="" id="{F183C3CB-BD1C-4789-0643-1F50E0C687BE}"/>
+                <a16:creationId xmlns="" xmlns:a16="http://schemas.microsoft.com/office/drawing/2014/main" id="{F183C3CB-BD1C-4789-0643-1F50E0C687BE}"/>
               </a:ext>
             </a:extLst>
           </p:cNvPr>
@@ -22749,7 +22813,7 @@
           <p:cNvPr id="9" name="Oval 8">
             <a:extLst>
               <a:ext uri="{FF2B5EF4-FFF2-40B4-BE49-F238E27FC236}">
-                <a16:creationId xmlns:a16="http://schemas.microsoft.com/office/drawing/2014/main" xmlns="" id="{852695AE-B9E1-CA35-383A-5061DECC336D}"/>
+                <a16:creationId xmlns="" xmlns:a16="http://schemas.microsoft.com/office/drawing/2014/main" id="{852695AE-B9E1-CA35-383A-5061DECC336D}"/>
               </a:ext>
             </a:extLst>
           </p:cNvPr>
@@ -22808,7 +22872,7 @@
           <p:cNvPr id="10" name="Oval 9">
             <a:extLst>
               <a:ext uri="{FF2B5EF4-FFF2-40B4-BE49-F238E27FC236}">
-                <a16:creationId xmlns:a16="http://schemas.microsoft.com/office/drawing/2014/main" xmlns="" id="{AC8B7149-0844-B850-391A-8060B3392CC6}"/>
+                <a16:creationId xmlns="" xmlns:a16="http://schemas.microsoft.com/office/drawing/2014/main" id="{AC8B7149-0844-B850-391A-8060B3392CC6}"/>
               </a:ext>
             </a:extLst>
           </p:cNvPr>
@@ -22867,7 +22931,7 @@
           <p:cNvPr id="11" name="Oval 10">
             <a:extLst>
               <a:ext uri="{FF2B5EF4-FFF2-40B4-BE49-F238E27FC236}">
-                <a16:creationId xmlns:a16="http://schemas.microsoft.com/office/drawing/2014/main" xmlns="" id="{0D333270-CC5E-7DF6-1A02-659ABE822FF5}"/>
+                <a16:creationId xmlns="" xmlns:a16="http://schemas.microsoft.com/office/drawing/2014/main" id="{0D333270-CC5E-7DF6-1A02-659ABE822FF5}"/>
               </a:ext>
             </a:extLst>
           </p:cNvPr>
@@ -22926,7 +22990,7 @@
           <p:cNvPr id="12" name="Oval 11">
             <a:extLst>
               <a:ext uri="{FF2B5EF4-FFF2-40B4-BE49-F238E27FC236}">
-                <a16:creationId xmlns:a16="http://schemas.microsoft.com/office/drawing/2014/main" xmlns="" id="{79654E69-BC73-6E52-DC33-651392E0526D}"/>
+                <a16:creationId xmlns="" xmlns:a16="http://schemas.microsoft.com/office/drawing/2014/main" id="{79654E69-BC73-6E52-DC33-651392E0526D}"/>
               </a:ext>
             </a:extLst>
           </p:cNvPr>
@@ -22985,7 +23049,7 @@
           <p:cNvPr id="13" name="Oval 12">
             <a:extLst>
               <a:ext uri="{FF2B5EF4-FFF2-40B4-BE49-F238E27FC236}">
-                <a16:creationId xmlns:a16="http://schemas.microsoft.com/office/drawing/2014/main" xmlns="" id="{E4CFDB43-57A3-3026-29E9-D60F416B0F09}"/>
+                <a16:creationId xmlns="" xmlns:a16="http://schemas.microsoft.com/office/drawing/2014/main" id="{E4CFDB43-57A3-3026-29E9-D60F416B0F09}"/>
               </a:ext>
             </a:extLst>
           </p:cNvPr>
@@ -23044,7 +23108,7 @@
           <p:cNvPr id="14" name="Oval 13">
             <a:extLst>
               <a:ext uri="{FF2B5EF4-FFF2-40B4-BE49-F238E27FC236}">
-                <a16:creationId xmlns:a16="http://schemas.microsoft.com/office/drawing/2014/main" xmlns="" id="{F309C4C6-BB4D-8939-A2FC-02DC29CFCC6D}"/>
+                <a16:creationId xmlns="" xmlns:a16="http://schemas.microsoft.com/office/drawing/2014/main" id="{F309C4C6-BB4D-8939-A2FC-02DC29CFCC6D}"/>
               </a:ext>
             </a:extLst>
           </p:cNvPr>
@@ -23103,7 +23167,7 @@
           <p:cNvPr id="15" name="Oval 14">
             <a:extLst>
               <a:ext uri="{FF2B5EF4-FFF2-40B4-BE49-F238E27FC236}">
-                <a16:creationId xmlns:a16="http://schemas.microsoft.com/office/drawing/2014/main" xmlns="" id="{042F644C-7941-9F1F-CD17-58A102B9F051}"/>
+                <a16:creationId xmlns="" xmlns:a16="http://schemas.microsoft.com/office/drawing/2014/main" id="{042F644C-7941-9F1F-CD17-58A102B9F051}"/>
               </a:ext>
             </a:extLst>
           </p:cNvPr>
@@ -23162,7 +23226,7 @@
           <p:cNvPr id="16" name="Oval 15">
             <a:extLst>
               <a:ext uri="{FF2B5EF4-FFF2-40B4-BE49-F238E27FC236}">
-                <a16:creationId xmlns:a16="http://schemas.microsoft.com/office/drawing/2014/main" xmlns="" id="{9FE90EDA-798E-4116-2E6D-F9F24F96F337}"/>
+                <a16:creationId xmlns="" xmlns:a16="http://schemas.microsoft.com/office/drawing/2014/main" id="{9FE90EDA-798E-4116-2E6D-F9F24F96F337}"/>
               </a:ext>
             </a:extLst>
           </p:cNvPr>
@@ -23221,7 +23285,7 @@
           <p:cNvPr id="17" name="Oval 16">
             <a:extLst>
               <a:ext uri="{FF2B5EF4-FFF2-40B4-BE49-F238E27FC236}">
-                <a16:creationId xmlns:a16="http://schemas.microsoft.com/office/drawing/2014/main" xmlns="" id="{01176BBF-01DD-C6ED-B967-EB1DB7DB2F69}"/>
+                <a16:creationId xmlns="" xmlns:a16="http://schemas.microsoft.com/office/drawing/2014/main" id="{01176BBF-01DD-C6ED-B967-EB1DB7DB2F69}"/>
               </a:ext>
             </a:extLst>
           </p:cNvPr>
@@ -23280,7 +23344,7 @@
           <p:cNvPr id="18" name="Oval 17">
             <a:extLst>
               <a:ext uri="{FF2B5EF4-FFF2-40B4-BE49-F238E27FC236}">
-                <a16:creationId xmlns:a16="http://schemas.microsoft.com/office/drawing/2014/main" xmlns="" id="{9F9C5F9C-2EEA-6014-F551-FCFA8EE56021}"/>
+                <a16:creationId xmlns="" xmlns:a16="http://schemas.microsoft.com/office/drawing/2014/main" id="{9F9C5F9C-2EEA-6014-F551-FCFA8EE56021}"/>
               </a:ext>
             </a:extLst>
           </p:cNvPr>
@@ -23339,7 +23403,7 @@
           <p:cNvPr id="19" name="Oval 18">
             <a:extLst>
               <a:ext uri="{FF2B5EF4-FFF2-40B4-BE49-F238E27FC236}">
-                <a16:creationId xmlns:a16="http://schemas.microsoft.com/office/drawing/2014/main" xmlns="" id="{3C7AD85C-644E-0A9B-6CFE-2B4A8C85E76B}"/>
+                <a16:creationId xmlns="" xmlns:a16="http://schemas.microsoft.com/office/drawing/2014/main" id="{3C7AD85C-644E-0A9B-6CFE-2B4A8C85E76B}"/>
               </a:ext>
             </a:extLst>
           </p:cNvPr>
@@ -23398,7 +23462,7 @@
           <p:cNvPr id="20" name="Oval 19">
             <a:extLst>
               <a:ext uri="{FF2B5EF4-FFF2-40B4-BE49-F238E27FC236}">
-                <a16:creationId xmlns:a16="http://schemas.microsoft.com/office/drawing/2014/main" xmlns="" id="{0380C106-105A-1A96-0199-94FE8B539591}"/>
+                <a16:creationId xmlns="" xmlns:a16="http://schemas.microsoft.com/office/drawing/2014/main" id="{0380C106-105A-1A96-0199-94FE8B539591}"/>
               </a:ext>
             </a:extLst>
           </p:cNvPr>
@@ -23457,7 +23521,7 @@
           <p:cNvPr id="21" name="Oval 20">
             <a:extLst>
               <a:ext uri="{FF2B5EF4-FFF2-40B4-BE49-F238E27FC236}">
-                <a16:creationId xmlns:a16="http://schemas.microsoft.com/office/drawing/2014/main" xmlns="" id="{89A7FBE2-CFD6-1AB1-A77D-4A327850C6BD}"/>
+                <a16:creationId xmlns="" xmlns:a16="http://schemas.microsoft.com/office/drawing/2014/main" id="{89A7FBE2-CFD6-1AB1-A77D-4A327850C6BD}"/>
               </a:ext>
             </a:extLst>
           </p:cNvPr>
@@ -23516,7 +23580,7 @@
           <p:cNvPr id="22" name="Oval 21">
             <a:extLst>
               <a:ext uri="{FF2B5EF4-FFF2-40B4-BE49-F238E27FC236}">
-                <a16:creationId xmlns:a16="http://schemas.microsoft.com/office/drawing/2014/main" xmlns="" id="{3121677A-1631-1324-1E55-D68B3900D565}"/>
+                <a16:creationId xmlns="" xmlns:a16="http://schemas.microsoft.com/office/drawing/2014/main" id="{3121677A-1631-1324-1E55-D68B3900D565}"/>
               </a:ext>
             </a:extLst>
           </p:cNvPr>
@@ -23575,7 +23639,7 @@
           <p:cNvPr id="23" name="Oval 22">
             <a:extLst>
               <a:ext uri="{FF2B5EF4-FFF2-40B4-BE49-F238E27FC236}">
-                <a16:creationId xmlns:a16="http://schemas.microsoft.com/office/drawing/2014/main" xmlns="" id="{64D42A8C-6C17-5515-7C30-72FA44A1C982}"/>
+                <a16:creationId xmlns="" xmlns:a16="http://schemas.microsoft.com/office/drawing/2014/main" id="{64D42A8C-6C17-5515-7C30-72FA44A1C982}"/>
               </a:ext>
             </a:extLst>
           </p:cNvPr>
@@ -23634,7 +23698,7 @@
           <p:cNvPr id="24" name="Oval 23">
             <a:extLst>
               <a:ext uri="{FF2B5EF4-FFF2-40B4-BE49-F238E27FC236}">
-                <a16:creationId xmlns:a16="http://schemas.microsoft.com/office/drawing/2014/main" xmlns="" id="{7475C0C7-3651-5314-3F48-173B78AB0BFB}"/>
+                <a16:creationId xmlns="" xmlns:a16="http://schemas.microsoft.com/office/drawing/2014/main" id="{7475C0C7-3651-5314-3F48-173B78AB0BFB}"/>
               </a:ext>
             </a:extLst>
           </p:cNvPr>
@@ -23693,7 +23757,7 @@
           <p:cNvPr id="25" name="Oval 24">
             <a:extLst>
               <a:ext uri="{FF2B5EF4-FFF2-40B4-BE49-F238E27FC236}">
-                <a16:creationId xmlns:a16="http://schemas.microsoft.com/office/drawing/2014/main" xmlns="" id="{9EC0B432-CB23-DBAF-B917-7ABB9CFA1904}"/>
+                <a16:creationId xmlns="" xmlns:a16="http://schemas.microsoft.com/office/drawing/2014/main" id="{9EC0B432-CB23-DBAF-B917-7ABB9CFA1904}"/>
               </a:ext>
             </a:extLst>
           </p:cNvPr>
@@ -23752,7 +23816,7 @@
           <p:cNvPr id="26" name="Oval 25">
             <a:extLst>
               <a:ext uri="{FF2B5EF4-FFF2-40B4-BE49-F238E27FC236}">
-                <a16:creationId xmlns:a16="http://schemas.microsoft.com/office/drawing/2014/main" xmlns="" id="{CD6371DF-A7E5-1434-5000-FF50454FDD3B}"/>
+                <a16:creationId xmlns="" xmlns:a16="http://schemas.microsoft.com/office/drawing/2014/main" id="{CD6371DF-A7E5-1434-5000-FF50454FDD3B}"/>
               </a:ext>
             </a:extLst>
           </p:cNvPr>
@@ -23811,7 +23875,7 @@
           <p:cNvPr id="27" name="Oval 26">
             <a:extLst>
               <a:ext uri="{FF2B5EF4-FFF2-40B4-BE49-F238E27FC236}">
-                <a16:creationId xmlns:a16="http://schemas.microsoft.com/office/drawing/2014/main" xmlns="" id="{1F08106B-D501-EC7F-FD6E-9F53DD6567B9}"/>
+                <a16:creationId xmlns="" xmlns:a16="http://schemas.microsoft.com/office/drawing/2014/main" id="{1F08106B-D501-EC7F-FD6E-9F53DD6567B9}"/>
               </a:ext>
             </a:extLst>
           </p:cNvPr>
@@ -23870,7 +23934,7 @@
           <p:cNvPr id="28" name="Oval 27">
             <a:extLst>
               <a:ext uri="{FF2B5EF4-FFF2-40B4-BE49-F238E27FC236}">
-                <a16:creationId xmlns:a16="http://schemas.microsoft.com/office/drawing/2014/main" xmlns="" id="{58CD1136-8D51-C029-89F6-934EB793CA76}"/>
+                <a16:creationId xmlns="" xmlns:a16="http://schemas.microsoft.com/office/drawing/2014/main" id="{58CD1136-8D51-C029-89F6-934EB793CA76}"/>
               </a:ext>
             </a:extLst>
           </p:cNvPr>
@@ -23929,7 +23993,7 @@
           <p:cNvPr id="29" name="Oval 28">
             <a:extLst>
               <a:ext uri="{FF2B5EF4-FFF2-40B4-BE49-F238E27FC236}">
-                <a16:creationId xmlns:a16="http://schemas.microsoft.com/office/drawing/2014/main" xmlns="" id="{50E918C1-C147-CDF9-9A0B-C41B1B1BDC16}"/>
+                <a16:creationId xmlns="" xmlns:a16="http://schemas.microsoft.com/office/drawing/2014/main" id="{50E918C1-C147-CDF9-9A0B-C41B1B1BDC16}"/>
               </a:ext>
             </a:extLst>
           </p:cNvPr>
@@ -23988,7 +24052,7 @@
           <p:cNvPr id="3" name="Group 2">
             <a:extLst>
               <a:ext uri="{FF2B5EF4-FFF2-40B4-BE49-F238E27FC236}">
-                <a16:creationId xmlns:a16="http://schemas.microsoft.com/office/drawing/2014/main" xmlns="" id="{928405A0-4A61-8733-B126-4D81DAAC8909}"/>
+                <a16:creationId xmlns="" xmlns:a16="http://schemas.microsoft.com/office/drawing/2014/main" id="{928405A0-4A61-8733-B126-4D81DAAC8909}"/>
               </a:ext>
             </a:extLst>
           </p:cNvPr>
@@ -24008,7 +24072,7 @@
             <p:cNvPr id="2" name="Oval 1">
               <a:extLst>
                 <a:ext uri="{FF2B5EF4-FFF2-40B4-BE49-F238E27FC236}">
-                  <a16:creationId xmlns:a16="http://schemas.microsoft.com/office/drawing/2014/main" xmlns="" id="{13AFC585-BA57-5F31-158D-6005C04FEA8F}"/>
+                  <a16:creationId xmlns="" xmlns:a16="http://schemas.microsoft.com/office/drawing/2014/main" id="{13AFC585-BA57-5F31-158D-6005C04FEA8F}"/>
                 </a:ext>
               </a:extLst>
             </p:cNvPr>
@@ -24067,7 +24131,7 @@
             <p:cNvPr id="30" name="Arc 29">
               <a:extLst>
                 <a:ext uri="{FF2B5EF4-FFF2-40B4-BE49-F238E27FC236}">
-                  <a16:creationId xmlns:a16="http://schemas.microsoft.com/office/drawing/2014/main" xmlns="" id="{6ABDBE3E-C36D-8AB3-7845-745EE50517F1}"/>
+                  <a16:creationId xmlns="" xmlns:a16="http://schemas.microsoft.com/office/drawing/2014/main" id="{6ABDBE3E-C36D-8AB3-7845-745EE50517F1}"/>
                 </a:ext>
               </a:extLst>
             </p:cNvPr>
@@ -24120,7 +24184,7 @@
           <p:cNvPr id="54" name="Group 53">
             <a:extLst>
               <a:ext uri="{FF2B5EF4-FFF2-40B4-BE49-F238E27FC236}">
-                <a16:creationId xmlns:a16="http://schemas.microsoft.com/office/drawing/2014/main" xmlns="" id="{BE4556B3-F34C-FF2C-77C6-6D471C09D64C}"/>
+                <a16:creationId xmlns="" xmlns:a16="http://schemas.microsoft.com/office/drawing/2014/main" id="{BE4556B3-F34C-FF2C-77C6-6D471C09D64C}"/>
               </a:ext>
             </a:extLst>
           </p:cNvPr>
@@ -24140,7 +24204,7 @@
             <p:cNvPr id="55" name="Oval 54">
               <a:extLst>
                 <a:ext uri="{FF2B5EF4-FFF2-40B4-BE49-F238E27FC236}">
-                  <a16:creationId xmlns:a16="http://schemas.microsoft.com/office/drawing/2014/main" xmlns="" id="{328F7FC3-44ED-BDFD-31EC-54198BE5A58F}"/>
+                  <a16:creationId xmlns="" xmlns:a16="http://schemas.microsoft.com/office/drawing/2014/main" id="{328F7FC3-44ED-BDFD-31EC-54198BE5A58F}"/>
                 </a:ext>
               </a:extLst>
             </p:cNvPr>
@@ -24199,7 +24263,7 @@
             <p:cNvPr id="56" name="Arc 55">
               <a:extLst>
                 <a:ext uri="{FF2B5EF4-FFF2-40B4-BE49-F238E27FC236}">
-                  <a16:creationId xmlns:a16="http://schemas.microsoft.com/office/drawing/2014/main" xmlns="" id="{691957E7-B542-3D6C-AA1A-4C3661572B27}"/>
+                  <a16:creationId xmlns="" xmlns:a16="http://schemas.microsoft.com/office/drawing/2014/main" id="{691957E7-B542-3D6C-AA1A-4C3661572B27}"/>
                 </a:ext>
               </a:extLst>
             </p:cNvPr>
@@ -24252,7 +24316,7 @@
           <p:cNvPr id="57" name="Group 56">
             <a:extLst>
               <a:ext uri="{FF2B5EF4-FFF2-40B4-BE49-F238E27FC236}">
-                <a16:creationId xmlns:a16="http://schemas.microsoft.com/office/drawing/2014/main" xmlns="" id="{34942098-76A7-B3A3-5DB3-D8162AD3F68D}"/>
+                <a16:creationId xmlns="" xmlns:a16="http://schemas.microsoft.com/office/drawing/2014/main" id="{34942098-76A7-B3A3-5DB3-D8162AD3F68D}"/>
               </a:ext>
             </a:extLst>
           </p:cNvPr>
@@ -24272,7 +24336,7 @@
             <p:cNvPr id="58" name="Oval 57">
               <a:extLst>
                 <a:ext uri="{FF2B5EF4-FFF2-40B4-BE49-F238E27FC236}">
-                  <a16:creationId xmlns:a16="http://schemas.microsoft.com/office/drawing/2014/main" xmlns="" id="{ADA0F6B4-0FE9-8946-CD31-44C147BDFAA2}"/>
+                  <a16:creationId xmlns="" xmlns:a16="http://schemas.microsoft.com/office/drawing/2014/main" id="{ADA0F6B4-0FE9-8946-CD31-44C147BDFAA2}"/>
                 </a:ext>
               </a:extLst>
             </p:cNvPr>
@@ -24331,7 +24395,7 @@
             <p:cNvPr id="59" name="Arc 58">
               <a:extLst>
                 <a:ext uri="{FF2B5EF4-FFF2-40B4-BE49-F238E27FC236}">
-                  <a16:creationId xmlns:a16="http://schemas.microsoft.com/office/drawing/2014/main" xmlns="" id="{E209963C-964F-F2C3-6448-EDCC319111CF}"/>
+                  <a16:creationId xmlns="" xmlns:a16="http://schemas.microsoft.com/office/drawing/2014/main" id="{E209963C-964F-F2C3-6448-EDCC319111CF}"/>
                 </a:ext>
               </a:extLst>
             </p:cNvPr>
@@ -24384,7 +24448,7 @@
           <p:cNvPr id="60" name="Group 59">
             <a:extLst>
               <a:ext uri="{FF2B5EF4-FFF2-40B4-BE49-F238E27FC236}">
-                <a16:creationId xmlns:a16="http://schemas.microsoft.com/office/drawing/2014/main" xmlns="" id="{92FBB5C7-CE3A-82A2-B96C-D00957855705}"/>
+                <a16:creationId xmlns="" xmlns:a16="http://schemas.microsoft.com/office/drawing/2014/main" id="{92FBB5C7-CE3A-82A2-B96C-D00957855705}"/>
               </a:ext>
             </a:extLst>
           </p:cNvPr>
@@ -24404,7 +24468,7 @@
             <p:cNvPr id="61" name="Oval 60">
               <a:extLst>
                 <a:ext uri="{FF2B5EF4-FFF2-40B4-BE49-F238E27FC236}">
-                  <a16:creationId xmlns:a16="http://schemas.microsoft.com/office/drawing/2014/main" xmlns="" id="{C2090BBD-0FD7-73D4-768D-B3EACE879018}"/>
+                  <a16:creationId xmlns="" xmlns:a16="http://schemas.microsoft.com/office/drawing/2014/main" id="{C2090BBD-0FD7-73D4-768D-B3EACE879018}"/>
                 </a:ext>
               </a:extLst>
             </p:cNvPr>
@@ -24463,7 +24527,7 @@
             <p:cNvPr id="62" name="Arc 61">
               <a:extLst>
                 <a:ext uri="{FF2B5EF4-FFF2-40B4-BE49-F238E27FC236}">
-                  <a16:creationId xmlns:a16="http://schemas.microsoft.com/office/drawing/2014/main" xmlns="" id="{49BBA01A-FD23-189D-7879-A24960489055}"/>
+                  <a16:creationId xmlns="" xmlns:a16="http://schemas.microsoft.com/office/drawing/2014/main" id="{49BBA01A-FD23-189D-7879-A24960489055}"/>
                 </a:ext>
               </a:extLst>
             </p:cNvPr>
@@ -24516,7 +24580,7 @@
           <p:cNvPr id="63" name="Group 62">
             <a:extLst>
               <a:ext uri="{FF2B5EF4-FFF2-40B4-BE49-F238E27FC236}">
-                <a16:creationId xmlns:a16="http://schemas.microsoft.com/office/drawing/2014/main" xmlns="" id="{F1BBA567-B812-1158-B0D9-8585557A065F}"/>
+                <a16:creationId xmlns="" xmlns:a16="http://schemas.microsoft.com/office/drawing/2014/main" id="{F1BBA567-B812-1158-B0D9-8585557A065F}"/>
               </a:ext>
             </a:extLst>
           </p:cNvPr>
@@ -24536,7 +24600,7 @@
             <p:cNvPr id="64" name="Oval 63">
               <a:extLst>
                 <a:ext uri="{FF2B5EF4-FFF2-40B4-BE49-F238E27FC236}">
-                  <a16:creationId xmlns:a16="http://schemas.microsoft.com/office/drawing/2014/main" xmlns="" id="{69954438-FCF4-7EDB-B481-3A5CD3540B92}"/>
+                  <a16:creationId xmlns="" xmlns:a16="http://schemas.microsoft.com/office/drawing/2014/main" id="{69954438-FCF4-7EDB-B481-3A5CD3540B92}"/>
                 </a:ext>
               </a:extLst>
             </p:cNvPr>
@@ -24595,7 +24659,7 @@
             <p:cNvPr id="65" name="Arc 64">
               <a:extLst>
                 <a:ext uri="{FF2B5EF4-FFF2-40B4-BE49-F238E27FC236}">
-                  <a16:creationId xmlns:a16="http://schemas.microsoft.com/office/drawing/2014/main" xmlns="" id="{0539A26F-8931-1226-DADD-F1FA6E3A46CA}"/>
+                  <a16:creationId xmlns="" xmlns:a16="http://schemas.microsoft.com/office/drawing/2014/main" id="{0539A26F-8931-1226-DADD-F1FA6E3A46CA}"/>
                 </a:ext>
               </a:extLst>
             </p:cNvPr>
@@ -24648,7 +24712,7 @@
           <p:cNvPr id="66" name="Group 65">
             <a:extLst>
               <a:ext uri="{FF2B5EF4-FFF2-40B4-BE49-F238E27FC236}">
-                <a16:creationId xmlns:a16="http://schemas.microsoft.com/office/drawing/2014/main" xmlns="" id="{C5CA0963-798D-1A46-720B-8E62281FCB2B}"/>
+                <a16:creationId xmlns="" xmlns:a16="http://schemas.microsoft.com/office/drawing/2014/main" id="{C5CA0963-798D-1A46-720B-8E62281FCB2B}"/>
               </a:ext>
             </a:extLst>
           </p:cNvPr>
@@ -24668,7 +24732,7 @@
             <p:cNvPr id="67" name="Oval 66">
               <a:extLst>
                 <a:ext uri="{FF2B5EF4-FFF2-40B4-BE49-F238E27FC236}">
-                  <a16:creationId xmlns:a16="http://schemas.microsoft.com/office/drawing/2014/main" xmlns="" id="{238F6E5E-CA7D-90C5-F3DE-CEA092075098}"/>
+                  <a16:creationId xmlns="" xmlns:a16="http://schemas.microsoft.com/office/drawing/2014/main" id="{238F6E5E-CA7D-90C5-F3DE-CEA092075098}"/>
                 </a:ext>
               </a:extLst>
             </p:cNvPr>
@@ -24727,7 +24791,7 @@
             <p:cNvPr id="68" name="Arc 67">
               <a:extLst>
                 <a:ext uri="{FF2B5EF4-FFF2-40B4-BE49-F238E27FC236}">
-                  <a16:creationId xmlns:a16="http://schemas.microsoft.com/office/drawing/2014/main" xmlns="" id="{4EDC6FAD-D9B6-F4CE-7409-08C269011CC8}"/>
+                  <a16:creationId xmlns="" xmlns:a16="http://schemas.microsoft.com/office/drawing/2014/main" id="{4EDC6FAD-D9B6-F4CE-7409-08C269011CC8}"/>
                 </a:ext>
               </a:extLst>
             </p:cNvPr>
@@ -24780,7 +24844,7 @@
           <p:cNvPr id="69" name="Group 68">
             <a:extLst>
               <a:ext uri="{FF2B5EF4-FFF2-40B4-BE49-F238E27FC236}">
-                <a16:creationId xmlns:a16="http://schemas.microsoft.com/office/drawing/2014/main" xmlns="" id="{97D732E3-F499-0C3F-BE88-8A3C727562BA}"/>
+                <a16:creationId xmlns="" xmlns:a16="http://schemas.microsoft.com/office/drawing/2014/main" id="{97D732E3-F499-0C3F-BE88-8A3C727562BA}"/>
               </a:ext>
             </a:extLst>
           </p:cNvPr>
@@ -24800,7 +24864,7 @@
             <p:cNvPr id="70" name="Oval 69">
               <a:extLst>
                 <a:ext uri="{FF2B5EF4-FFF2-40B4-BE49-F238E27FC236}">
-                  <a16:creationId xmlns:a16="http://schemas.microsoft.com/office/drawing/2014/main" xmlns="" id="{1BB77D40-207D-28FD-CBB8-13B1251FBCE3}"/>
+                  <a16:creationId xmlns="" xmlns:a16="http://schemas.microsoft.com/office/drawing/2014/main" id="{1BB77D40-207D-28FD-CBB8-13B1251FBCE3}"/>
                 </a:ext>
               </a:extLst>
             </p:cNvPr>
@@ -24859,7 +24923,7 @@
             <p:cNvPr id="71" name="Arc 70">
               <a:extLst>
                 <a:ext uri="{FF2B5EF4-FFF2-40B4-BE49-F238E27FC236}">
-                  <a16:creationId xmlns:a16="http://schemas.microsoft.com/office/drawing/2014/main" xmlns="" id="{98CED01A-8366-93D8-2562-CDF27F4E5646}"/>
+                  <a16:creationId xmlns="" xmlns:a16="http://schemas.microsoft.com/office/drawing/2014/main" id="{98CED01A-8366-93D8-2562-CDF27F4E5646}"/>
                 </a:ext>
               </a:extLst>
             </p:cNvPr>
@@ -24912,7 +24976,7 @@
           <p:cNvPr id="72" name="Group 71">
             <a:extLst>
               <a:ext uri="{FF2B5EF4-FFF2-40B4-BE49-F238E27FC236}">
-                <a16:creationId xmlns:a16="http://schemas.microsoft.com/office/drawing/2014/main" xmlns="" id="{8ACD396F-9CBB-E28A-C3C7-9FFF82E7D986}"/>
+                <a16:creationId xmlns="" xmlns:a16="http://schemas.microsoft.com/office/drawing/2014/main" id="{8ACD396F-9CBB-E28A-C3C7-9FFF82E7D986}"/>
               </a:ext>
             </a:extLst>
           </p:cNvPr>
@@ -24932,7 +24996,7 @@
             <p:cNvPr id="73" name="Oval 72">
               <a:extLst>
                 <a:ext uri="{FF2B5EF4-FFF2-40B4-BE49-F238E27FC236}">
-                  <a16:creationId xmlns:a16="http://schemas.microsoft.com/office/drawing/2014/main" xmlns="" id="{79F5ABF2-6AF6-5851-71FF-385EC3216731}"/>
+                  <a16:creationId xmlns="" xmlns:a16="http://schemas.microsoft.com/office/drawing/2014/main" id="{79F5ABF2-6AF6-5851-71FF-385EC3216731}"/>
                 </a:ext>
               </a:extLst>
             </p:cNvPr>
@@ -24991,7 +25055,7 @@
             <p:cNvPr id="74" name="Arc 73">
               <a:extLst>
                 <a:ext uri="{FF2B5EF4-FFF2-40B4-BE49-F238E27FC236}">
-                  <a16:creationId xmlns:a16="http://schemas.microsoft.com/office/drawing/2014/main" xmlns="" id="{59B2770C-AEBD-5B7B-0CAD-D69C9BFB0200}"/>
+                  <a16:creationId xmlns="" xmlns:a16="http://schemas.microsoft.com/office/drawing/2014/main" id="{59B2770C-AEBD-5B7B-0CAD-D69C9BFB0200}"/>
                 </a:ext>
               </a:extLst>
             </p:cNvPr>
@@ -25044,7 +25108,7 @@
           <p:cNvPr id="75" name="Group 74">
             <a:extLst>
               <a:ext uri="{FF2B5EF4-FFF2-40B4-BE49-F238E27FC236}">
-                <a16:creationId xmlns:a16="http://schemas.microsoft.com/office/drawing/2014/main" xmlns="" id="{8E67EC40-2CEA-15BB-679E-82A155506382}"/>
+                <a16:creationId xmlns="" xmlns:a16="http://schemas.microsoft.com/office/drawing/2014/main" id="{8E67EC40-2CEA-15BB-679E-82A155506382}"/>
               </a:ext>
             </a:extLst>
           </p:cNvPr>
@@ -25064,7 +25128,7 @@
             <p:cNvPr id="76" name="Oval 75">
               <a:extLst>
                 <a:ext uri="{FF2B5EF4-FFF2-40B4-BE49-F238E27FC236}">
-                  <a16:creationId xmlns:a16="http://schemas.microsoft.com/office/drawing/2014/main" xmlns="" id="{BEE67072-39B0-0D8C-3764-DF739D4EF898}"/>
+                  <a16:creationId xmlns="" xmlns:a16="http://schemas.microsoft.com/office/drawing/2014/main" id="{BEE67072-39B0-0D8C-3764-DF739D4EF898}"/>
                 </a:ext>
               </a:extLst>
             </p:cNvPr>
@@ -25123,7 +25187,7 @@
             <p:cNvPr id="77" name="Arc 76">
               <a:extLst>
                 <a:ext uri="{FF2B5EF4-FFF2-40B4-BE49-F238E27FC236}">
-                  <a16:creationId xmlns:a16="http://schemas.microsoft.com/office/drawing/2014/main" xmlns="" id="{1036E0E8-91A2-459D-62BA-7E55B36EA4A3}"/>
+                  <a16:creationId xmlns="" xmlns:a16="http://schemas.microsoft.com/office/drawing/2014/main" id="{1036E0E8-91A2-459D-62BA-7E55B36EA4A3}"/>
                 </a:ext>
               </a:extLst>
             </p:cNvPr>
@@ -25176,7 +25240,7 @@
           <p:cNvPr id="78" name="Group 77">
             <a:extLst>
               <a:ext uri="{FF2B5EF4-FFF2-40B4-BE49-F238E27FC236}">
-                <a16:creationId xmlns:a16="http://schemas.microsoft.com/office/drawing/2014/main" xmlns="" id="{E7A8FC93-89F4-B3FF-B2A0-EB92EE14302F}"/>
+                <a16:creationId xmlns="" xmlns:a16="http://schemas.microsoft.com/office/drawing/2014/main" id="{E7A8FC93-89F4-B3FF-B2A0-EB92EE14302F}"/>
               </a:ext>
             </a:extLst>
           </p:cNvPr>
@@ -25196,7 +25260,7 @@
             <p:cNvPr id="79" name="Oval 78">
               <a:extLst>
                 <a:ext uri="{FF2B5EF4-FFF2-40B4-BE49-F238E27FC236}">
-                  <a16:creationId xmlns:a16="http://schemas.microsoft.com/office/drawing/2014/main" xmlns="" id="{0B288602-214C-9797-F12B-433D63A94C97}"/>
+                  <a16:creationId xmlns="" xmlns:a16="http://schemas.microsoft.com/office/drawing/2014/main" id="{0B288602-214C-9797-F12B-433D63A94C97}"/>
                 </a:ext>
               </a:extLst>
             </p:cNvPr>
@@ -25255,7 +25319,7 @@
             <p:cNvPr id="80" name="Arc 79">
               <a:extLst>
                 <a:ext uri="{FF2B5EF4-FFF2-40B4-BE49-F238E27FC236}">
-                  <a16:creationId xmlns:a16="http://schemas.microsoft.com/office/drawing/2014/main" xmlns="" id="{B2237529-DFC9-A1B7-9CFA-D339940826FC}"/>
+                  <a16:creationId xmlns="" xmlns:a16="http://schemas.microsoft.com/office/drawing/2014/main" id="{B2237529-DFC9-A1B7-9CFA-D339940826FC}"/>
                 </a:ext>
               </a:extLst>
             </p:cNvPr>
@@ -25308,7 +25372,7 @@
           <p:cNvPr id="81" name="Group 80">
             <a:extLst>
               <a:ext uri="{FF2B5EF4-FFF2-40B4-BE49-F238E27FC236}">
-                <a16:creationId xmlns:a16="http://schemas.microsoft.com/office/drawing/2014/main" xmlns="" id="{56E08E4B-3F15-3DA7-6141-7E97655DD396}"/>
+                <a16:creationId xmlns="" xmlns:a16="http://schemas.microsoft.com/office/drawing/2014/main" id="{56E08E4B-3F15-3DA7-6141-7E97655DD396}"/>
               </a:ext>
             </a:extLst>
           </p:cNvPr>
@@ -25328,7 +25392,7 @@
             <p:cNvPr id="82" name="Oval 81">
               <a:extLst>
                 <a:ext uri="{FF2B5EF4-FFF2-40B4-BE49-F238E27FC236}">
-                  <a16:creationId xmlns:a16="http://schemas.microsoft.com/office/drawing/2014/main" xmlns="" id="{BF631934-7110-7F5E-79A0-378CB41A08C9}"/>
+                  <a16:creationId xmlns="" xmlns:a16="http://schemas.microsoft.com/office/drawing/2014/main" id="{BF631934-7110-7F5E-79A0-378CB41A08C9}"/>
                 </a:ext>
               </a:extLst>
             </p:cNvPr>
@@ -25387,7 +25451,7 @@
             <p:cNvPr id="83" name="Arc 82">
               <a:extLst>
                 <a:ext uri="{FF2B5EF4-FFF2-40B4-BE49-F238E27FC236}">
-                  <a16:creationId xmlns:a16="http://schemas.microsoft.com/office/drawing/2014/main" xmlns="" id="{0439DB39-7B53-36D4-BDF5-71DB13657FDC}"/>
+                  <a16:creationId xmlns="" xmlns:a16="http://schemas.microsoft.com/office/drawing/2014/main" id="{0439DB39-7B53-36D4-BDF5-71DB13657FDC}"/>
                 </a:ext>
               </a:extLst>
             </p:cNvPr>
@@ -25440,7 +25504,7 @@
           <p:cNvPr id="84" name="Group 83">
             <a:extLst>
               <a:ext uri="{FF2B5EF4-FFF2-40B4-BE49-F238E27FC236}">
-                <a16:creationId xmlns:a16="http://schemas.microsoft.com/office/drawing/2014/main" xmlns="" id="{BD99BE67-16D7-6B0C-6E7E-F8B4B7BD2317}"/>
+                <a16:creationId xmlns="" xmlns:a16="http://schemas.microsoft.com/office/drawing/2014/main" id="{BD99BE67-16D7-6B0C-6E7E-F8B4B7BD2317}"/>
               </a:ext>
             </a:extLst>
           </p:cNvPr>
@@ -25460,7 +25524,7 @@
             <p:cNvPr id="85" name="Oval 84">
               <a:extLst>
                 <a:ext uri="{FF2B5EF4-FFF2-40B4-BE49-F238E27FC236}">
-                  <a16:creationId xmlns:a16="http://schemas.microsoft.com/office/drawing/2014/main" xmlns="" id="{370A9636-2147-18A8-A452-5C474F2755F9}"/>
+                  <a16:creationId xmlns="" xmlns:a16="http://schemas.microsoft.com/office/drawing/2014/main" id="{370A9636-2147-18A8-A452-5C474F2755F9}"/>
                 </a:ext>
               </a:extLst>
             </p:cNvPr>
@@ -25519,7 +25583,7 @@
             <p:cNvPr id="86" name="Arc 85">
               <a:extLst>
                 <a:ext uri="{FF2B5EF4-FFF2-40B4-BE49-F238E27FC236}">
-                  <a16:creationId xmlns:a16="http://schemas.microsoft.com/office/drawing/2014/main" xmlns="" id="{CF37D023-EFBC-7B83-E01F-14E578B5E41F}"/>
+                  <a16:creationId xmlns="" xmlns:a16="http://schemas.microsoft.com/office/drawing/2014/main" id="{CF37D023-EFBC-7B83-E01F-14E578B5E41F}"/>
                 </a:ext>
               </a:extLst>
             </p:cNvPr>
@@ -25572,7 +25636,7 @@
           <p:cNvPr id="87" name="Group 86">
             <a:extLst>
               <a:ext uri="{FF2B5EF4-FFF2-40B4-BE49-F238E27FC236}">
-                <a16:creationId xmlns:a16="http://schemas.microsoft.com/office/drawing/2014/main" xmlns="" id="{18D76EDD-67EC-1706-7541-E0B361B9EE01}"/>
+                <a16:creationId xmlns="" xmlns:a16="http://schemas.microsoft.com/office/drawing/2014/main" id="{18D76EDD-67EC-1706-7541-E0B361B9EE01}"/>
               </a:ext>
             </a:extLst>
           </p:cNvPr>
@@ -25592,7 +25656,7 @@
             <p:cNvPr id="88" name="Oval 87">
               <a:extLst>
                 <a:ext uri="{FF2B5EF4-FFF2-40B4-BE49-F238E27FC236}">
-                  <a16:creationId xmlns:a16="http://schemas.microsoft.com/office/drawing/2014/main" xmlns="" id="{EBF7F9D4-4385-3396-B1F8-92B45C3EE234}"/>
+                  <a16:creationId xmlns="" xmlns:a16="http://schemas.microsoft.com/office/drawing/2014/main" id="{EBF7F9D4-4385-3396-B1F8-92B45C3EE234}"/>
                 </a:ext>
               </a:extLst>
             </p:cNvPr>
@@ -25651,7 +25715,7 @@
             <p:cNvPr id="89" name="Arc 88">
               <a:extLst>
                 <a:ext uri="{FF2B5EF4-FFF2-40B4-BE49-F238E27FC236}">
-                  <a16:creationId xmlns:a16="http://schemas.microsoft.com/office/drawing/2014/main" xmlns="" id="{344DEE6C-BE03-A502-C8EB-06880E1AFF7F}"/>
+                  <a16:creationId xmlns="" xmlns:a16="http://schemas.microsoft.com/office/drawing/2014/main" id="{344DEE6C-BE03-A502-C8EB-06880E1AFF7F}"/>
                 </a:ext>
               </a:extLst>
             </p:cNvPr>
@@ -25704,7 +25768,7 @@
           <p:cNvPr id="90" name="Group 89">
             <a:extLst>
               <a:ext uri="{FF2B5EF4-FFF2-40B4-BE49-F238E27FC236}">
-                <a16:creationId xmlns:a16="http://schemas.microsoft.com/office/drawing/2014/main" xmlns="" id="{805A620C-3AE2-255F-D0AD-7BCE318B0261}"/>
+                <a16:creationId xmlns="" xmlns:a16="http://schemas.microsoft.com/office/drawing/2014/main" id="{805A620C-3AE2-255F-D0AD-7BCE318B0261}"/>
               </a:ext>
             </a:extLst>
           </p:cNvPr>
@@ -25724,7 +25788,7 @@
             <p:cNvPr id="91" name="Oval 90">
               <a:extLst>
                 <a:ext uri="{FF2B5EF4-FFF2-40B4-BE49-F238E27FC236}">
-                  <a16:creationId xmlns:a16="http://schemas.microsoft.com/office/drawing/2014/main" xmlns="" id="{C8C812B5-07D8-854F-C972-D8CEBC6A35B4}"/>
+                  <a16:creationId xmlns="" xmlns:a16="http://schemas.microsoft.com/office/drawing/2014/main" id="{C8C812B5-07D8-854F-C972-D8CEBC6A35B4}"/>
                 </a:ext>
               </a:extLst>
             </p:cNvPr>
@@ -25783,7 +25847,7 @@
             <p:cNvPr id="92" name="Arc 91">
               <a:extLst>
                 <a:ext uri="{FF2B5EF4-FFF2-40B4-BE49-F238E27FC236}">
-                  <a16:creationId xmlns:a16="http://schemas.microsoft.com/office/drawing/2014/main" xmlns="" id="{79FA0149-4CB8-9929-0B85-1B9620713172}"/>
+                  <a16:creationId xmlns="" xmlns:a16="http://schemas.microsoft.com/office/drawing/2014/main" id="{79FA0149-4CB8-9929-0B85-1B9620713172}"/>
                 </a:ext>
               </a:extLst>
             </p:cNvPr>
@@ -25836,7 +25900,7 @@
           <p:cNvPr id="93" name="Group 92">
             <a:extLst>
               <a:ext uri="{FF2B5EF4-FFF2-40B4-BE49-F238E27FC236}">
-                <a16:creationId xmlns:a16="http://schemas.microsoft.com/office/drawing/2014/main" xmlns="" id="{D34F9994-C5E0-AE09-44C0-C5B87FCCE5CA}"/>
+                <a16:creationId xmlns="" xmlns:a16="http://schemas.microsoft.com/office/drawing/2014/main" id="{D34F9994-C5E0-AE09-44C0-C5B87FCCE5CA}"/>
               </a:ext>
             </a:extLst>
           </p:cNvPr>
@@ -25856,7 +25920,7 @@
             <p:cNvPr id="94" name="Oval 93">
               <a:extLst>
                 <a:ext uri="{FF2B5EF4-FFF2-40B4-BE49-F238E27FC236}">
-                  <a16:creationId xmlns:a16="http://schemas.microsoft.com/office/drawing/2014/main" xmlns="" id="{2AC773AF-0EEA-4375-E025-35F8FC5364E9}"/>
+                  <a16:creationId xmlns="" xmlns:a16="http://schemas.microsoft.com/office/drawing/2014/main" id="{2AC773AF-0EEA-4375-E025-35F8FC5364E9}"/>
                 </a:ext>
               </a:extLst>
             </p:cNvPr>
@@ -25915,7 +25979,7 @@
             <p:cNvPr id="95" name="Arc 94">
               <a:extLst>
                 <a:ext uri="{FF2B5EF4-FFF2-40B4-BE49-F238E27FC236}">
-                  <a16:creationId xmlns:a16="http://schemas.microsoft.com/office/drawing/2014/main" xmlns="" id="{90DDEFBB-F1E4-9858-B6D5-3FDB2B182EF9}"/>
+                  <a16:creationId xmlns="" xmlns:a16="http://schemas.microsoft.com/office/drawing/2014/main" id="{90DDEFBB-F1E4-9858-B6D5-3FDB2B182EF9}"/>
                 </a:ext>
               </a:extLst>
             </p:cNvPr>
@@ -25968,7 +26032,7 @@
           <p:cNvPr id="96" name="Group 95">
             <a:extLst>
               <a:ext uri="{FF2B5EF4-FFF2-40B4-BE49-F238E27FC236}">
-                <a16:creationId xmlns:a16="http://schemas.microsoft.com/office/drawing/2014/main" xmlns="" id="{A7DFD59F-9ACF-DA37-BC73-AADA05F8CD55}"/>
+                <a16:creationId xmlns="" xmlns:a16="http://schemas.microsoft.com/office/drawing/2014/main" id="{A7DFD59F-9ACF-DA37-BC73-AADA05F8CD55}"/>
               </a:ext>
             </a:extLst>
           </p:cNvPr>
@@ -25988,7 +26052,7 @@
             <p:cNvPr id="97" name="Oval 96">
               <a:extLst>
                 <a:ext uri="{FF2B5EF4-FFF2-40B4-BE49-F238E27FC236}">
-                  <a16:creationId xmlns:a16="http://schemas.microsoft.com/office/drawing/2014/main" xmlns="" id="{34E0A8AD-4A63-9662-8252-B6566776A0DB}"/>
+                  <a16:creationId xmlns="" xmlns:a16="http://schemas.microsoft.com/office/drawing/2014/main" id="{34E0A8AD-4A63-9662-8252-B6566776A0DB}"/>
                 </a:ext>
               </a:extLst>
             </p:cNvPr>
@@ -26047,7 +26111,7 @@
             <p:cNvPr id="98" name="Arc 97">
               <a:extLst>
                 <a:ext uri="{FF2B5EF4-FFF2-40B4-BE49-F238E27FC236}">
-                  <a16:creationId xmlns:a16="http://schemas.microsoft.com/office/drawing/2014/main" xmlns="" id="{A5AF0D9F-7BD7-E7BD-EF60-38F8DB6A7173}"/>
+                  <a16:creationId xmlns="" xmlns:a16="http://schemas.microsoft.com/office/drawing/2014/main" id="{A5AF0D9F-7BD7-E7BD-EF60-38F8DB6A7173}"/>
                 </a:ext>
               </a:extLst>
             </p:cNvPr>
@@ -26100,7 +26164,7 @@
           <p:cNvPr id="99" name="Group 98">
             <a:extLst>
               <a:ext uri="{FF2B5EF4-FFF2-40B4-BE49-F238E27FC236}">
-                <a16:creationId xmlns:a16="http://schemas.microsoft.com/office/drawing/2014/main" xmlns="" id="{B86504F5-14F5-005B-98B8-877CBD2DBAEC}"/>
+                <a16:creationId xmlns="" xmlns:a16="http://schemas.microsoft.com/office/drawing/2014/main" id="{B86504F5-14F5-005B-98B8-877CBD2DBAEC}"/>
               </a:ext>
             </a:extLst>
           </p:cNvPr>
@@ -26120,7 +26184,7 @@
             <p:cNvPr id="100" name="Oval 99">
               <a:extLst>
                 <a:ext uri="{FF2B5EF4-FFF2-40B4-BE49-F238E27FC236}">
-                  <a16:creationId xmlns:a16="http://schemas.microsoft.com/office/drawing/2014/main" xmlns="" id="{77BEE814-D0CC-0B71-56A8-38FC233ADBBC}"/>
+                  <a16:creationId xmlns="" xmlns:a16="http://schemas.microsoft.com/office/drawing/2014/main" id="{77BEE814-D0CC-0B71-56A8-38FC233ADBBC}"/>
                 </a:ext>
               </a:extLst>
             </p:cNvPr>
@@ -26179,7 +26243,7 @@
             <p:cNvPr id="101" name="Arc 100">
               <a:extLst>
                 <a:ext uri="{FF2B5EF4-FFF2-40B4-BE49-F238E27FC236}">
-                  <a16:creationId xmlns:a16="http://schemas.microsoft.com/office/drawing/2014/main" xmlns="" id="{E12B4309-6ECF-2A90-BE18-92E7B6D9F45C}"/>
+                  <a16:creationId xmlns="" xmlns:a16="http://schemas.microsoft.com/office/drawing/2014/main" id="{E12B4309-6ECF-2A90-BE18-92E7B6D9F45C}"/>
                 </a:ext>
               </a:extLst>
             </p:cNvPr>
@@ -26232,7 +26296,7 @@
           <p:cNvPr id="102" name="Group 101">
             <a:extLst>
               <a:ext uri="{FF2B5EF4-FFF2-40B4-BE49-F238E27FC236}">
-                <a16:creationId xmlns:a16="http://schemas.microsoft.com/office/drawing/2014/main" xmlns="" id="{B34C10F9-48AB-376A-971B-5E609292667E}"/>
+                <a16:creationId xmlns="" xmlns:a16="http://schemas.microsoft.com/office/drawing/2014/main" id="{B34C10F9-48AB-376A-971B-5E609292667E}"/>
               </a:ext>
             </a:extLst>
           </p:cNvPr>
@@ -26252,7 +26316,7 @@
             <p:cNvPr id="103" name="Oval 102">
               <a:extLst>
                 <a:ext uri="{FF2B5EF4-FFF2-40B4-BE49-F238E27FC236}">
-                  <a16:creationId xmlns:a16="http://schemas.microsoft.com/office/drawing/2014/main" xmlns="" id="{B13C8D1E-9E03-3B03-EB62-C5D86340BF1D}"/>
+                  <a16:creationId xmlns="" xmlns:a16="http://schemas.microsoft.com/office/drawing/2014/main" id="{B13C8D1E-9E03-3B03-EB62-C5D86340BF1D}"/>
                 </a:ext>
               </a:extLst>
             </p:cNvPr>
@@ -26311,7 +26375,7 @@
             <p:cNvPr id="104" name="Arc 103">
               <a:extLst>
                 <a:ext uri="{FF2B5EF4-FFF2-40B4-BE49-F238E27FC236}">
-                  <a16:creationId xmlns:a16="http://schemas.microsoft.com/office/drawing/2014/main" xmlns="" id="{FACF3DF3-03AF-3180-E1E4-55391011F79F}"/>
+                  <a16:creationId xmlns="" xmlns:a16="http://schemas.microsoft.com/office/drawing/2014/main" id="{FACF3DF3-03AF-3180-E1E4-55391011F79F}"/>
                 </a:ext>
               </a:extLst>
             </p:cNvPr>
@@ -26364,7 +26428,7 @@
           <p:cNvPr id="105" name="Group 104">
             <a:extLst>
               <a:ext uri="{FF2B5EF4-FFF2-40B4-BE49-F238E27FC236}">
-                <a16:creationId xmlns:a16="http://schemas.microsoft.com/office/drawing/2014/main" xmlns="" id="{ADC277D0-0547-3E1F-7B17-763C14F2C569}"/>
+                <a16:creationId xmlns="" xmlns:a16="http://schemas.microsoft.com/office/drawing/2014/main" id="{ADC277D0-0547-3E1F-7B17-763C14F2C569}"/>
               </a:ext>
             </a:extLst>
           </p:cNvPr>
@@ -26384,7 +26448,7 @@
             <p:cNvPr id="106" name="Oval 105">
               <a:extLst>
                 <a:ext uri="{FF2B5EF4-FFF2-40B4-BE49-F238E27FC236}">
-                  <a16:creationId xmlns:a16="http://schemas.microsoft.com/office/drawing/2014/main" xmlns="" id="{444E641A-F426-E972-E682-0AD4058F2F5F}"/>
+                  <a16:creationId xmlns="" xmlns:a16="http://schemas.microsoft.com/office/drawing/2014/main" id="{444E641A-F426-E972-E682-0AD4058F2F5F}"/>
                 </a:ext>
               </a:extLst>
             </p:cNvPr>
@@ -26443,7 +26507,7 @@
             <p:cNvPr id="107" name="Arc 106">
               <a:extLst>
                 <a:ext uri="{FF2B5EF4-FFF2-40B4-BE49-F238E27FC236}">
-                  <a16:creationId xmlns:a16="http://schemas.microsoft.com/office/drawing/2014/main" xmlns="" id="{000E6A81-D707-E36C-5DAD-68F6D1F68CE3}"/>
+                  <a16:creationId xmlns="" xmlns:a16="http://schemas.microsoft.com/office/drawing/2014/main" id="{000E6A81-D707-E36C-5DAD-68F6D1F68CE3}"/>
                 </a:ext>
               </a:extLst>
             </p:cNvPr>
@@ -26496,7 +26560,7 @@
           <p:cNvPr id="108" name="Group 107">
             <a:extLst>
               <a:ext uri="{FF2B5EF4-FFF2-40B4-BE49-F238E27FC236}">
-                <a16:creationId xmlns:a16="http://schemas.microsoft.com/office/drawing/2014/main" xmlns="" id="{31EA107D-77C3-196B-39BD-015BCFD6D3C2}"/>
+                <a16:creationId xmlns="" xmlns:a16="http://schemas.microsoft.com/office/drawing/2014/main" id="{31EA107D-77C3-196B-39BD-015BCFD6D3C2}"/>
               </a:ext>
             </a:extLst>
           </p:cNvPr>
@@ -26516,7 +26580,7 @@
             <p:cNvPr id="109" name="Oval 108">
               <a:extLst>
                 <a:ext uri="{FF2B5EF4-FFF2-40B4-BE49-F238E27FC236}">
-                  <a16:creationId xmlns:a16="http://schemas.microsoft.com/office/drawing/2014/main" xmlns="" id="{61FDFC2B-B300-35FB-0617-5D1C7ADF6641}"/>
+                  <a16:creationId xmlns="" xmlns:a16="http://schemas.microsoft.com/office/drawing/2014/main" id="{61FDFC2B-B300-35FB-0617-5D1C7ADF6641}"/>
                 </a:ext>
               </a:extLst>
             </p:cNvPr>
@@ -26575,7 +26639,7 @@
             <p:cNvPr id="110" name="Arc 109">
               <a:extLst>
                 <a:ext uri="{FF2B5EF4-FFF2-40B4-BE49-F238E27FC236}">
-                  <a16:creationId xmlns:a16="http://schemas.microsoft.com/office/drawing/2014/main" xmlns="" id="{CF6B487C-012F-56E5-E8E3-8B137298EDFA}"/>
+                  <a16:creationId xmlns="" xmlns:a16="http://schemas.microsoft.com/office/drawing/2014/main" id="{CF6B487C-012F-56E5-E8E3-8B137298EDFA}"/>
                 </a:ext>
               </a:extLst>
             </p:cNvPr>
@@ -26628,7 +26692,7 @@
           <p:cNvPr id="111" name="Group 110">
             <a:extLst>
               <a:ext uri="{FF2B5EF4-FFF2-40B4-BE49-F238E27FC236}">
-                <a16:creationId xmlns:a16="http://schemas.microsoft.com/office/drawing/2014/main" xmlns="" id="{6232043B-C4C4-BA0A-CF1A-4DBBB75AAC73}"/>
+                <a16:creationId xmlns="" xmlns:a16="http://schemas.microsoft.com/office/drawing/2014/main" id="{6232043B-C4C4-BA0A-CF1A-4DBBB75AAC73}"/>
               </a:ext>
             </a:extLst>
           </p:cNvPr>
@@ -26648,7 +26712,7 @@
             <p:cNvPr id="112" name="Oval 111">
               <a:extLst>
                 <a:ext uri="{FF2B5EF4-FFF2-40B4-BE49-F238E27FC236}">
-                  <a16:creationId xmlns:a16="http://schemas.microsoft.com/office/drawing/2014/main" xmlns="" id="{10FFE23E-6CCE-0432-75E0-E824C7863261}"/>
+                  <a16:creationId xmlns="" xmlns:a16="http://schemas.microsoft.com/office/drawing/2014/main" id="{10FFE23E-6CCE-0432-75E0-E824C7863261}"/>
                 </a:ext>
               </a:extLst>
             </p:cNvPr>
@@ -26707,7 +26771,7 @@
             <p:cNvPr id="113" name="Arc 112">
               <a:extLst>
                 <a:ext uri="{FF2B5EF4-FFF2-40B4-BE49-F238E27FC236}">
-                  <a16:creationId xmlns:a16="http://schemas.microsoft.com/office/drawing/2014/main" xmlns="" id="{98676D6A-3424-61E8-2CCE-756447D5F9C2}"/>
+                  <a16:creationId xmlns="" xmlns:a16="http://schemas.microsoft.com/office/drawing/2014/main" id="{98676D6A-3424-61E8-2CCE-756447D5F9C2}"/>
                 </a:ext>
               </a:extLst>
             </p:cNvPr>
@@ -26760,7 +26824,7 @@
           <p:cNvPr id="114" name="Group 113">
             <a:extLst>
               <a:ext uri="{FF2B5EF4-FFF2-40B4-BE49-F238E27FC236}">
-                <a16:creationId xmlns:a16="http://schemas.microsoft.com/office/drawing/2014/main" xmlns="" id="{88B3BE82-3395-0E01-8219-A5E3310F3959}"/>
+                <a16:creationId xmlns="" xmlns:a16="http://schemas.microsoft.com/office/drawing/2014/main" id="{88B3BE82-3395-0E01-8219-A5E3310F3959}"/>
               </a:ext>
             </a:extLst>
           </p:cNvPr>
@@ -26780,7 +26844,7 @@
             <p:cNvPr id="115" name="Oval 114">
               <a:extLst>
                 <a:ext uri="{FF2B5EF4-FFF2-40B4-BE49-F238E27FC236}">
-                  <a16:creationId xmlns:a16="http://schemas.microsoft.com/office/drawing/2014/main" xmlns="" id="{F83317C8-5B5D-DDF7-15F4-EA2AFB9BC950}"/>
+                  <a16:creationId xmlns="" xmlns:a16="http://schemas.microsoft.com/office/drawing/2014/main" id="{F83317C8-5B5D-DDF7-15F4-EA2AFB9BC950}"/>
                 </a:ext>
               </a:extLst>
             </p:cNvPr>
@@ -26839,7 +26903,7 @@
             <p:cNvPr id="116" name="Arc 115">
               <a:extLst>
                 <a:ext uri="{FF2B5EF4-FFF2-40B4-BE49-F238E27FC236}">
-                  <a16:creationId xmlns:a16="http://schemas.microsoft.com/office/drawing/2014/main" xmlns="" id="{E746B903-C206-EA9A-5FAE-24360FA19AD9}"/>
+                  <a16:creationId xmlns="" xmlns:a16="http://schemas.microsoft.com/office/drawing/2014/main" id="{E746B903-C206-EA9A-5FAE-24360FA19AD9}"/>
                 </a:ext>
               </a:extLst>
             </p:cNvPr>
@@ -26892,7 +26956,7 @@
           <p:cNvPr id="117" name="Group 116">
             <a:extLst>
               <a:ext uri="{FF2B5EF4-FFF2-40B4-BE49-F238E27FC236}">
-                <a16:creationId xmlns:a16="http://schemas.microsoft.com/office/drawing/2014/main" xmlns="" id="{2F2A7235-4D60-4C1C-AC1C-8026C6BB4059}"/>
+                <a16:creationId xmlns="" xmlns:a16="http://schemas.microsoft.com/office/drawing/2014/main" id="{2F2A7235-4D60-4C1C-AC1C-8026C6BB4059}"/>
               </a:ext>
             </a:extLst>
           </p:cNvPr>
@@ -26912,7 +26976,7 @@
             <p:cNvPr id="118" name="Oval 117">
               <a:extLst>
                 <a:ext uri="{FF2B5EF4-FFF2-40B4-BE49-F238E27FC236}">
-                  <a16:creationId xmlns:a16="http://schemas.microsoft.com/office/drawing/2014/main" xmlns="" id="{0F886985-AC53-0516-F85D-DDC1946AD17E}"/>
+                  <a16:creationId xmlns="" xmlns:a16="http://schemas.microsoft.com/office/drawing/2014/main" id="{0F886985-AC53-0516-F85D-DDC1946AD17E}"/>
                 </a:ext>
               </a:extLst>
             </p:cNvPr>
@@ -26971,7 +27035,7 @@
             <p:cNvPr id="119" name="Arc 118">
               <a:extLst>
                 <a:ext uri="{FF2B5EF4-FFF2-40B4-BE49-F238E27FC236}">
-                  <a16:creationId xmlns:a16="http://schemas.microsoft.com/office/drawing/2014/main" xmlns="" id="{AE4C9755-2A3A-5A32-D276-52C0A9B4F8D6}"/>
+                  <a16:creationId xmlns="" xmlns:a16="http://schemas.microsoft.com/office/drawing/2014/main" id="{AE4C9755-2A3A-5A32-D276-52C0A9B4F8D6}"/>
                 </a:ext>
               </a:extLst>
             </p:cNvPr>
@@ -27024,7 +27088,7 @@
           <p:cNvPr id="120" name="Group 119">
             <a:extLst>
               <a:ext uri="{FF2B5EF4-FFF2-40B4-BE49-F238E27FC236}">
-                <a16:creationId xmlns:a16="http://schemas.microsoft.com/office/drawing/2014/main" xmlns="" id="{7877DB57-685B-C785-7692-7E30EB8C61F3}"/>
+                <a16:creationId xmlns="" xmlns:a16="http://schemas.microsoft.com/office/drawing/2014/main" id="{7877DB57-685B-C785-7692-7E30EB8C61F3}"/>
               </a:ext>
             </a:extLst>
           </p:cNvPr>
@@ -27044,7 +27108,7 @@
             <p:cNvPr id="121" name="Oval 120">
               <a:extLst>
                 <a:ext uri="{FF2B5EF4-FFF2-40B4-BE49-F238E27FC236}">
-                  <a16:creationId xmlns:a16="http://schemas.microsoft.com/office/drawing/2014/main" xmlns="" id="{22F39CC0-1318-0DB9-44C8-44ED898DF450}"/>
+                  <a16:creationId xmlns="" xmlns:a16="http://schemas.microsoft.com/office/drawing/2014/main" id="{22F39CC0-1318-0DB9-44C8-44ED898DF450}"/>
                 </a:ext>
               </a:extLst>
             </p:cNvPr>
@@ -27103,7 +27167,7 @@
             <p:cNvPr id="122" name="Arc 121">
               <a:extLst>
                 <a:ext uri="{FF2B5EF4-FFF2-40B4-BE49-F238E27FC236}">
-                  <a16:creationId xmlns:a16="http://schemas.microsoft.com/office/drawing/2014/main" xmlns="" id="{E74E2D2F-36CC-9C47-07C8-1F7BA70CE9FF}"/>
+                  <a16:creationId xmlns="" xmlns:a16="http://schemas.microsoft.com/office/drawing/2014/main" id="{E74E2D2F-36CC-9C47-07C8-1F7BA70CE9FF}"/>
                 </a:ext>
               </a:extLst>
             </p:cNvPr>
@@ -27156,7 +27220,7 @@
           <p:cNvPr id="123" name="Rectangle 122">
             <a:extLst>
               <a:ext uri="{FF2B5EF4-FFF2-40B4-BE49-F238E27FC236}">
-                <a16:creationId xmlns:a16="http://schemas.microsoft.com/office/drawing/2014/main" xmlns="" id="{044E7409-6BE4-82BF-6739-FB981D21C254}"/>
+                <a16:creationId xmlns="" xmlns:a16="http://schemas.microsoft.com/office/drawing/2014/main" id="{044E7409-6BE4-82BF-6739-FB981D21C254}"/>
               </a:ext>
             </a:extLst>
           </p:cNvPr>
@@ -27354,7 +27418,7 @@
         <p:cNvPr id="1" name="">
           <a:extLst>
             <a:ext uri="{FF2B5EF4-FFF2-40B4-BE49-F238E27FC236}">
-              <a16:creationId xmlns:a16="http://schemas.microsoft.com/office/drawing/2014/main" xmlns="" id="{51C4FD09-55E3-2B1B-897E-1F9BF2720A5C}"/>
+              <a16:creationId xmlns="" xmlns:a16="http://schemas.microsoft.com/office/drawing/2014/main" id="{51C4FD09-55E3-2B1B-897E-1F9BF2720A5C}"/>
             </a:ext>
           </a:extLst>
         </p:cNvPr>
@@ -27374,7 +27438,7 @@
           <p:cNvPr id="5" name="Rectangle 4">
             <a:extLst>
               <a:ext uri="{FF2B5EF4-FFF2-40B4-BE49-F238E27FC236}">
-                <a16:creationId xmlns:a16="http://schemas.microsoft.com/office/drawing/2014/main" xmlns="" id="{B034BA31-4C57-9BDA-04C5-8FC13B21BF04}"/>
+                <a16:creationId xmlns="" xmlns:a16="http://schemas.microsoft.com/office/drawing/2014/main" id="{B034BA31-4C57-9BDA-04C5-8FC13B21BF04}"/>
               </a:ext>
             </a:extLst>
           </p:cNvPr>
@@ -27430,7 +27494,7 @@
           <p:cNvPr id="4" name="Rectangle 3">
             <a:extLst>
               <a:ext uri="{FF2B5EF4-FFF2-40B4-BE49-F238E27FC236}">
-                <a16:creationId xmlns:a16="http://schemas.microsoft.com/office/drawing/2014/main" xmlns="" id="{726F619E-C2F5-A764-7A5A-E740D3764F94}"/>
+                <a16:creationId xmlns="" xmlns:a16="http://schemas.microsoft.com/office/drawing/2014/main" id="{726F619E-C2F5-A764-7A5A-E740D3764F94}"/>
               </a:ext>
             </a:extLst>
           </p:cNvPr>
@@ -27661,7 +27725,7 @@
           <p:cNvPr id="6" name="Oval 5">
             <a:extLst>
               <a:ext uri="{FF2B5EF4-FFF2-40B4-BE49-F238E27FC236}">
-                <a16:creationId xmlns:a16="http://schemas.microsoft.com/office/drawing/2014/main" xmlns="" id="{63652264-4E8B-48A9-C360-C02C3660C32D}"/>
+                <a16:creationId xmlns="" xmlns:a16="http://schemas.microsoft.com/office/drawing/2014/main" id="{63652264-4E8B-48A9-C360-C02C3660C32D}"/>
               </a:ext>
             </a:extLst>
           </p:cNvPr>
@@ -27720,7 +27784,7 @@
           <p:cNvPr id="7" name="Oval 6">
             <a:extLst>
               <a:ext uri="{FF2B5EF4-FFF2-40B4-BE49-F238E27FC236}">
-                <a16:creationId xmlns:a16="http://schemas.microsoft.com/office/drawing/2014/main" xmlns="" id="{94A79690-2C7C-FEC2-2B4B-F5D0C6E2B06B}"/>
+                <a16:creationId xmlns="" xmlns:a16="http://schemas.microsoft.com/office/drawing/2014/main" id="{94A79690-2C7C-FEC2-2B4B-F5D0C6E2B06B}"/>
               </a:ext>
             </a:extLst>
           </p:cNvPr>
@@ -27779,7 +27843,7 @@
           <p:cNvPr id="8" name="Oval 7">
             <a:extLst>
               <a:ext uri="{FF2B5EF4-FFF2-40B4-BE49-F238E27FC236}">
-                <a16:creationId xmlns:a16="http://schemas.microsoft.com/office/drawing/2014/main" xmlns="" id="{F183C3CB-BD1C-4789-0643-1F50E0C687BE}"/>
+                <a16:creationId xmlns="" xmlns:a16="http://schemas.microsoft.com/office/drawing/2014/main" id="{F183C3CB-BD1C-4789-0643-1F50E0C687BE}"/>
               </a:ext>
             </a:extLst>
           </p:cNvPr>
@@ -27838,7 +27902,7 @@
           <p:cNvPr id="9" name="Oval 8">
             <a:extLst>
               <a:ext uri="{FF2B5EF4-FFF2-40B4-BE49-F238E27FC236}">
-                <a16:creationId xmlns:a16="http://schemas.microsoft.com/office/drawing/2014/main" xmlns="" id="{852695AE-B9E1-CA35-383A-5061DECC336D}"/>
+                <a16:creationId xmlns="" xmlns:a16="http://schemas.microsoft.com/office/drawing/2014/main" id="{852695AE-B9E1-CA35-383A-5061DECC336D}"/>
               </a:ext>
             </a:extLst>
           </p:cNvPr>
@@ -27897,7 +27961,7 @@
           <p:cNvPr id="10" name="Oval 9">
             <a:extLst>
               <a:ext uri="{FF2B5EF4-FFF2-40B4-BE49-F238E27FC236}">
-                <a16:creationId xmlns:a16="http://schemas.microsoft.com/office/drawing/2014/main" xmlns="" id="{AC8B7149-0844-B850-391A-8060B3392CC6}"/>
+                <a16:creationId xmlns="" xmlns:a16="http://schemas.microsoft.com/office/drawing/2014/main" id="{AC8B7149-0844-B850-391A-8060B3392CC6}"/>
               </a:ext>
             </a:extLst>
           </p:cNvPr>
@@ -27956,7 +28020,7 @@
           <p:cNvPr id="11" name="Oval 10">
             <a:extLst>
               <a:ext uri="{FF2B5EF4-FFF2-40B4-BE49-F238E27FC236}">
-                <a16:creationId xmlns:a16="http://schemas.microsoft.com/office/drawing/2014/main" xmlns="" id="{0D333270-CC5E-7DF6-1A02-659ABE822FF5}"/>
+                <a16:creationId xmlns="" xmlns:a16="http://schemas.microsoft.com/office/drawing/2014/main" id="{0D333270-CC5E-7DF6-1A02-659ABE822FF5}"/>
               </a:ext>
             </a:extLst>
           </p:cNvPr>
@@ -28015,7 +28079,7 @@
           <p:cNvPr id="12" name="Oval 11">
             <a:extLst>
               <a:ext uri="{FF2B5EF4-FFF2-40B4-BE49-F238E27FC236}">
-                <a16:creationId xmlns:a16="http://schemas.microsoft.com/office/drawing/2014/main" xmlns="" id="{79654E69-BC73-6E52-DC33-651392E0526D}"/>
+                <a16:creationId xmlns="" xmlns:a16="http://schemas.microsoft.com/office/drawing/2014/main" id="{79654E69-BC73-6E52-DC33-651392E0526D}"/>
               </a:ext>
             </a:extLst>
           </p:cNvPr>
@@ -28074,7 +28138,7 @@
           <p:cNvPr id="13" name="Oval 12">
             <a:extLst>
               <a:ext uri="{FF2B5EF4-FFF2-40B4-BE49-F238E27FC236}">
-                <a16:creationId xmlns:a16="http://schemas.microsoft.com/office/drawing/2014/main" xmlns="" id="{E4CFDB43-57A3-3026-29E9-D60F416B0F09}"/>
+                <a16:creationId xmlns="" xmlns:a16="http://schemas.microsoft.com/office/drawing/2014/main" id="{E4CFDB43-57A3-3026-29E9-D60F416B0F09}"/>
               </a:ext>
             </a:extLst>
           </p:cNvPr>
@@ -28133,7 +28197,7 @@
           <p:cNvPr id="14" name="Oval 13">
             <a:extLst>
               <a:ext uri="{FF2B5EF4-FFF2-40B4-BE49-F238E27FC236}">
-                <a16:creationId xmlns:a16="http://schemas.microsoft.com/office/drawing/2014/main" xmlns="" id="{F309C4C6-BB4D-8939-A2FC-02DC29CFCC6D}"/>
+                <a16:creationId xmlns="" xmlns:a16="http://schemas.microsoft.com/office/drawing/2014/main" id="{F309C4C6-BB4D-8939-A2FC-02DC29CFCC6D}"/>
               </a:ext>
             </a:extLst>
           </p:cNvPr>
@@ -28192,7 +28256,7 @@
           <p:cNvPr id="15" name="Oval 14">
             <a:extLst>
               <a:ext uri="{FF2B5EF4-FFF2-40B4-BE49-F238E27FC236}">
-                <a16:creationId xmlns:a16="http://schemas.microsoft.com/office/drawing/2014/main" xmlns="" id="{042F644C-7941-9F1F-CD17-58A102B9F051}"/>
+                <a16:creationId xmlns="" xmlns:a16="http://schemas.microsoft.com/office/drawing/2014/main" id="{042F644C-7941-9F1F-CD17-58A102B9F051}"/>
               </a:ext>
             </a:extLst>
           </p:cNvPr>
@@ -28251,7 +28315,7 @@
           <p:cNvPr id="16" name="Oval 15">
             <a:extLst>
               <a:ext uri="{FF2B5EF4-FFF2-40B4-BE49-F238E27FC236}">
-                <a16:creationId xmlns:a16="http://schemas.microsoft.com/office/drawing/2014/main" xmlns="" id="{9FE90EDA-798E-4116-2E6D-F9F24F96F337}"/>
+                <a16:creationId xmlns="" xmlns:a16="http://schemas.microsoft.com/office/drawing/2014/main" id="{9FE90EDA-798E-4116-2E6D-F9F24F96F337}"/>
               </a:ext>
             </a:extLst>
           </p:cNvPr>
@@ -28310,7 +28374,7 @@
           <p:cNvPr id="17" name="Oval 16">
             <a:extLst>
               <a:ext uri="{FF2B5EF4-FFF2-40B4-BE49-F238E27FC236}">
-                <a16:creationId xmlns:a16="http://schemas.microsoft.com/office/drawing/2014/main" xmlns="" id="{01176BBF-01DD-C6ED-B967-EB1DB7DB2F69}"/>
+                <a16:creationId xmlns="" xmlns:a16="http://schemas.microsoft.com/office/drawing/2014/main" id="{01176BBF-01DD-C6ED-B967-EB1DB7DB2F69}"/>
               </a:ext>
             </a:extLst>
           </p:cNvPr>
@@ -28369,7 +28433,7 @@
           <p:cNvPr id="18" name="Oval 17">
             <a:extLst>
               <a:ext uri="{FF2B5EF4-FFF2-40B4-BE49-F238E27FC236}">
-                <a16:creationId xmlns:a16="http://schemas.microsoft.com/office/drawing/2014/main" xmlns="" id="{9F9C5F9C-2EEA-6014-F551-FCFA8EE56021}"/>
+                <a16:creationId xmlns="" xmlns:a16="http://schemas.microsoft.com/office/drawing/2014/main" id="{9F9C5F9C-2EEA-6014-F551-FCFA8EE56021}"/>
               </a:ext>
             </a:extLst>
           </p:cNvPr>
@@ -28428,7 +28492,7 @@
           <p:cNvPr id="19" name="Oval 18">
             <a:extLst>
               <a:ext uri="{FF2B5EF4-FFF2-40B4-BE49-F238E27FC236}">
-                <a16:creationId xmlns:a16="http://schemas.microsoft.com/office/drawing/2014/main" xmlns="" id="{3C7AD85C-644E-0A9B-6CFE-2B4A8C85E76B}"/>
+                <a16:creationId xmlns="" xmlns:a16="http://schemas.microsoft.com/office/drawing/2014/main" id="{3C7AD85C-644E-0A9B-6CFE-2B4A8C85E76B}"/>
               </a:ext>
             </a:extLst>
           </p:cNvPr>
@@ -28487,7 +28551,7 @@
           <p:cNvPr id="20" name="Oval 19">
             <a:extLst>
               <a:ext uri="{FF2B5EF4-FFF2-40B4-BE49-F238E27FC236}">
-                <a16:creationId xmlns:a16="http://schemas.microsoft.com/office/drawing/2014/main" xmlns="" id="{0380C106-105A-1A96-0199-94FE8B539591}"/>
+                <a16:creationId xmlns="" xmlns:a16="http://schemas.microsoft.com/office/drawing/2014/main" id="{0380C106-105A-1A96-0199-94FE8B539591}"/>
               </a:ext>
             </a:extLst>
           </p:cNvPr>
@@ -28546,7 +28610,7 @@
           <p:cNvPr id="21" name="Oval 20">
             <a:extLst>
               <a:ext uri="{FF2B5EF4-FFF2-40B4-BE49-F238E27FC236}">
-                <a16:creationId xmlns:a16="http://schemas.microsoft.com/office/drawing/2014/main" xmlns="" id="{89A7FBE2-CFD6-1AB1-A77D-4A327850C6BD}"/>
+                <a16:creationId xmlns="" xmlns:a16="http://schemas.microsoft.com/office/drawing/2014/main" id="{89A7FBE2-CFD6-1AB1-A77D-4A327850C6BD}"/>
               </a:ext>
             </a:extLst>
           </p:cNvPr>
@@ -28605,7 +28669,7 @@
           <p:cNvPr id="22" name="Oval 21">
             <a:extLst>
               <a:ext uri="{FF2B5EF4-FFF2-40B4-BE49-F238E27FC236}">
-                <a16:creationId xmlns:a16="http://schemas.microsoft.com/office/drawing/2014/main" xmlns="" id="{3121677A-1631-1324-1E55-D68B3900D565}"/>
+                <a16:creationId xmlns="" xmlns:a16="http://schemas.microsoft.com/office/drawing/2014/main" id="{3121677A-1631-1324-1E55-D68B3900D565}"/>
               </a:ext>
             </a:extLst>
           </p:cNvPr>
@@ -28664,7 +28728,7 @@
           <p:cNvPr id="23" name="Oval 22">
             <a:extLst>
               <a:ext uri="{FF2B5EF4-FFF2-40B4-BE49-F238E27FC236}">
-                <a16:creationId xmlns:a16="http://schemas.microsoft.com/office/drawing/2014/main" xmlns="" id="{64D42A8C-6C17-5515-7C30-72FA44A1C982}"/>
+                <a16:creationId xmlns="" xmlns:a16="http://schemas.microsoft.com/office/drawing/2014/main" id="{64D42A8C-6C17-5515-7C30-72FA44A1C982}"/>
               </a:ext>
             </a:extLst>
           </p:cNvPr>
@@ -28723,7 +28787,7 @@
           <p:cNvPr id="24" name="Oval 23">
             <a:extLst>
               <a:ext uri="{FF2B5EF4-FFF2-40B4-BE49-F238E27FC236}">
-                <a16:creationId xmlns:a16="http://schemas.microsoft.com/office/drawing/2014/main" xmlns="" id="{7475C0C7-3651-5314-3F48-173B78AB0BFB}"/>
+                <a16:creationId xmlns="" xmlns:a16="http://schemas.microsoft.com/office/drawing/2014/main" id="{7475C0C7-3651-5314-3F48-173B78AB0BFB}"/>
               </a:ext>
             </a:extLst>
           </p:cNvPr>
@@ -28782,7 +28846,7 @@
           <p:cNvPr id="25" name="Oval 24">
             <a:extLst>
               <a:ext uri="{FF2B5EF4-FFF2-40B4-BE49-F238E27FC236}">
-                <a16:creationId xmlns:a16="http://schemas.microsoft.com/office/drawing/2014/main" xmlns="" id="{9EC0B432-CB23-DBAF-B917-7ABB9CFA1904}"/>
+                <a16:creationId xmlns="" xmlns:a16="http://schemas.microsoft.com/office/drawing/2014/main" id="{9EC0B432-CB23-DBAF-B917-7ABB9CFA1904}"/>
               </a:ext>
             </a:extLst>
           </p:cNvPr>
@@ -28841,7 +28905,7 @@
           <p:cNvPr id="26" name="Oval 25">
             <a:extLst>
               <a:ext uri="{FF2B5EF4-FFF2-40B4-BE49-F238E27FC236}">
-                <a16:creationId xmlns:a16="http://schemas.microsoft.com/office/drawing/2014/main" xmlns="" id="{CD6371DF-A7E5-1434-5000-FF50454FDD3B}"/>
+                <a16:creationId xmlns="" xmlns:a16="http://schemas.microsoft.com/office/drawing/2014/main" id="{CD6371DF-A7E5-1434-5000-FF50454FDD3B}"/>
               </a:ext>
             </a:extLst>
           </p:cNvPr>
@@ -28900,7 +28964,7 @@
           <p:cNvPr id="27" name="Oval 26">
             <a:extLst>
               <a:ext uri="{FF2B5EF4-FFF2-40B4-BE49-F238E27FC236}">
-                <a16:creationId xmlns:a16="http://schemas.microsoft.com/office/drawing/2014/main" xmlns="" id="{1F08106B-D501-EC7F-FD6E-9F53DD6567B9}"/>
+                <a16:creationId xmlns="" xmlns:a16="http://schemas.microsoft.com/office/drawing/2014/main" id="{1F08106B-D501-EC7F-FD6E-9F53DD6567B9}"/>
               </a:ext>
             </a:extLst>
           </p:cNvPr>
@@ -28959,7 +29023,7 @@
           <p:cNvPr id="28" name="Oval 27">
             <a:extLst>
               <a:ext uri="{FF2B5EF4-FFF2-40B4-BE49-F238E27FC236}">
-                <a16:creationId xmlns:a16="http://schemas.microsoft.com/office/drawing/2014/main" xmlns="" id="{58CD1136-8D51-C029-89F6-934EB793CA76}"/>
+                <a16:creationId xmlns="" xmlns:a16="http://schemas.microsoft.com/office/drawing/2014/main" id="{58CD1136-8D51-C029-89F6-934EB793CA76}"/>
               </a:ext>
             </a:extLst>
           </p:cNvPr>
@@ -29018,7 +29082,7 @@
           <p:cNvPr id="29" name="Oval 28">
             <a:extLst>
               <a:ext uri="{FF2B5EF4-FFF2-40B4-BE49-F238E27FC236}">
-                <a16:creationId xmlns:a16="http://schemas.microsoft.com/office/drawing/2014/main" xmlns="" id="{50E918C1-C147-CDF9-9A0B-C41B1B1BDC16}"/>
+                <a16:creationId xmlns="" xmlns:a16="http://schemas.microsoft.com/office/drawing/2014/main" id="{50E918C1-C147-CDF9-9A0B-C41B1B1BDC16}"/>
               </a:ext>
             </a:extLst>
           </p:cNvPr>
@@ -29077,7 +29141,7 @@
           <p:cNvPr id="3" name="Group 2">
             <a:extLst>
               <a:ext uri="{FF2B5EF4-FFF2-40B4-BE49-F238E27FC236}">
-                <a16:creationId xmlns:a16="http://schemas.microsoft.com/office/drawing/2014/main" xmlns="" id="{928405A0-4A61-8733-B126-4D81DAAC8909}"/>
+                <a16:creationId xmlns="" xmlns:a16="http://schemas.microsoft.com/office/drawing/2014/main" id="{928405A0-4A61-8733-B126-4D81DAAC8909}"/>
               </a:ext>
             </a:extLst>
           </p:cNvPr>
@@ -29097,7 +29161,7 @@
             <p:cNvPr id="2" name="Oval 1">
               <a:extLst>
                 <a:ext uri="{FF2B5EF4-FFF2-40B4-BE49-F238E27FC236}">
-                  <a16:creationId xmlns:a16="http://schemas.microsoft.com/office/drawing/2014/main" xmlns="" id="{13AFC585-BA57-5F31-158D-6005C04FEA8F}"/>
+                  <a16:creationId xmlns="" xmlns:a16="http://schemas.microsoft.com/office/drawing/2014/main" id="{13AFC585-BA57-5F31-158D-6005C04FEA8F}"/>
                 </a:ext>
               </a:extLst>
             </p:cNvPr>
@@ -29156,7 +29220,7 @@
             <p:cNvPr id="30" name="Arc 29">
               <a:extLst>
                 <a:ext uri="{FF2B5EF4-FFF2-40B4-BE49-F238E27FC236}">
-                  <a16:creationId xmlns:a16="http://schemas.microsoft.com/office/drawing/2014/main" xmlns="" id="{6ABDBE3E-C36D-8AB3-7845-745EE50517F1}"/>
+                  <a16:creationId xmlns="" xmlns:a16="http://schemas.microsoft.com/office/drawing/2014/main" id="{6ABDBE3E-C36D-8AB3-7845-745EE50517F1}"/>
                 </a:ext>
               </a:extLst>
             </p:cNvPr>
@@ -29209,7 +29273,7 @@
           <p:cNvPr id="54" name="Group 53">
             <a:extLst>
               <a:ext uri="{FF2B5EF4-FFF2-40B4-BE49-F238E27FC236}">
-                <a16:creationId xmlns:a16="http://schemas.microsoft.com/office/drawing/2014/main" xmlns="" id="{BE4556B3-F34C-FF2C-77C6-6D471C09D64C}"/>
+                <a16:creationId xmlns="" xmlns:a16="http://schemas.microsoft.com/office/drawing/2014/main" id="{BE4556B3-F34C-FF2C-77C6-6D471C09D64C}"/>
               </a:ext>
             </a:extLst>
           </p:cNvPr>
@@ -29229,7 +29293,7 @@
             <p:cNvPr id="55" name="Oval 54">
               <a:extLst>
                 <a:ext uri="{FF2B5EF4-FFF2-40B4-BE49-F238E27FC236}">
-                  <a16:creationId xmlns:a16="http://schemas.microsoft.com/office/drawing/2014/main" xmlns="" id="{328F7FC3-44ED-BDFD-31EC-54198BE5A58F}"/>
+                  <a16:creationId xmlns="" xmlns:a16="http://schemas.microsoft.com/office/drawing/2014/main" id="{328F7FC3-44ED-BDFD-31EC-54198BE5A58F}"/>
                 </a:ext>
               </a:extLst>
             </p:cNvPr>
@@ -29288,7 +29352,7 @@
             <p:cNvPr id="56" name="Arc 55">
               <a:extLst>
                 <a:ext uri="{FF2B5EF4-FFF2-40B4-BE49-F238E27FC236}">
-                  <a16:creationId xmlns:a16="http://schemas.microsoft.com/office/drawing/2014/main" xmlns="" id="{691957E7-B542-3D6C-AA1A-4C3661572B27}"/>
+                  <a16:creationId xmlns="" xmlns:a16="http://schemas.microsoft.com/office/drawing/2014/main" id="{691957E7-B542-3D6C-AA1A-4C3661572B27}"/>
                 </a:ext>
               </a:extLst>
             </p:cNvPr>
@@ -29341,7 +29405,7 @@
           <p:cNvPr id="57" name="Group 56">
             <a:extLst>
               <a:ext uri="{FF2B5EF4-FFF2-40B4-BE49-F238E27FC236}">
-                <a16:creationId xmlns:a16="http://schemas.microsoft.com/office/drawing/2014/main" xmlns="" id="{34942098-76A7-B3A3-5DB3-D8162AD3F68D}"/>
+                <a16:creationId xmlns="" xmlns:a16="http://schemas.microsoft.com/office/drawing/2014/main" id="{34942098-76A7-B3A3-5DB3-D8162AD3F68D}"/>
               </a:ext>
             </a:extLst>
           </p:cNvPr>
@@ -29361,7 +29425,7 @@
             <p:cNvPr id="58" name="Oval 57">
               <a:extLst>
                 <a:ext uri="{FF2B5EF4-FFF2-40B4-BE49-F238E27FC236}">
-                  <a16:creationId xmlns:a16="http://schemas.microsoft.com/office/drawing/2014/main" xmlns="" id="{ADA0F6B4-0FE9-8946-CD31-44C147BDFAA2}"/>
+                  <a16:creationId xmlns="" xmlns:a16="http://schemas.microsoft.com/office/drawing/2014/main" id="{ADA0F6B4-0FE9-8946-CD31-44C147BDFAA2}"/>
                 </a:ext>
               </a:extLst>
             </p:cNvPr>
@@ -29420,7 +29484,7 @@
             <p:cNvPr id="59" name="Arc 58">
               <a:extLst>
                 <a:ext uri="{FF2B5EF4-FFF2-40B4-BE49-F238E27FC236}">
-                  <a16:creationId xmlns:a16="http://schemas.microsoft.com/office/drawing/2014/main" xmlns="" id="{E209963C-964F-F2C3-6448-EDCC319111CF}"/>
+                  <a16:creationId xmlns="" xmlns:a16="http://schemas.microsoft.com/office/drawing/2014/main" id="{E209963C-964F-F2C3-6448-EDCC319111CF}"/>
                 </a:ext>
               </a:extLst>
             </p:cNvPr>
@@ -29473,7 +29537,7 @@
           <p:cNvPr id="60" name="Group 59">
             <a:extLst>
               <a:ext uri="{FF2B5EF4-FFF2-40B4-BE49-F238E27FC236}">
-                <a16:creationId xmlns:a16="http://schemas.microsoft.com/office/drawing/2014/main" xmlns="" id="{92FBB5C7-CE3A-82A2-B96C-D00957855705}"/>
+                <a16:creationId xmlns="" xmlns:a16="http://schemas.microsoft.com/office/drawing/2014/main" id="{92FBB5C7-CE3A-82A2-B96C-D00957855705}"/>
               </a:ext>
             </a:extLst>
           </p:cNvPr>
@@ -29493,7 +29557,7 @@
             <p:cNvPr id="61" name="Oval 60">
               <a:extLst>
                 <a:ext uri="{FF2B5EF4-FFF2-40B4-BE49-F238E27FC236}">
-                  <a16:creationId xmlns:a16="http://schemas.microsoft.com/office/drawing/2014/main" xmlns="" id="{C2090BBD-0FD7-73D4-768D-B3EACE879018}"/>
+                  <a16:creationId xmlns="" xmlns:a16="http://schemas.microsoft.com/office/drawing/2014/main" id="{C2090BBD-0FD7-73D4-768D-B3EACE879018}"/>
                 </a:ext>
               </a:extLst>
             </p:cNvPr>
@@ -29552,7 +29616,7 @@
             <p:cNvPr id="62" name="Arc 61">
               <a:extLst>
                 <a:ext uri="{FF2B5EF4-FFF2-40B4-BE49-F238E27FC236}">
-                  <a16:creationId xmlns:a16="http://schemas.microsoft.com/office/drawing/2014/main" xmlns="" id="{49BBA01A-FD23-189D-7879-A24960489055}"/>
+                  <a16:creationId xmlns="" xmlns:a16="http://schemas.microsoft.com/office/drawing/2014/main" id="{49BBA01A-FD23-189D-7879-A24960489055}"/>
                 </a:ext>
               </a:extLst>
             </p:cNvPr>
@@ -29605,7 +29669,7 @@
           <p:cNvPr id="63" name="Group 62">
             <a:extLst>
               <a:ext uri="{FF2B5EF4-FFF2-40B4-BE49-F238E27FC236}">
-                <a16:creationId xmlns:a16="http://schemas.microsoft.com/office/drawing/2014/main" xmlns="" id="{F1BBA567-B812-1158-B0D9-8585557A065F}"/>
+                <a16:creationId xmlns="" xmlns:a16="http://schemas.microsoft.com/office/drawing/2014/main" id="{F1BBA567-B812-1158-B0D9-8585557A065F}"/>
               </a:ext>
             </a:extLst>
           </p:cNvPr>
@@ -29625,7 +29689,7 @@
             <p:cNvPr id="64" name="Oval 63">
               <a:extLst>
                 <a:ext uri="{FF2B5EF4-FFF2-40B4-BE49-F238E27FC236}">
-                  <a16:creationId xmlns:a16="http://schemas.microsoft.com/office/drawing/2014/main" xmlns="" id="{69954438-FCF4-7EDB-B481-3A5CD3540B92}"/>
+                  <a16:creationId xmlns="" xmlns:a16="http://schemas.microsoft.com/office/drawing/2014/main" id="{69954438-FCF4-7EDB-B481-3A5CD3540B92}"/>
                 </a:ext>
               </a:extLst>
             </p:cNvPr>
@@ -29684,7 +29748,7 @@
             <p:cNvPr id="65" name="Arc 64">
               <a:extLst>
                 <a:ext uri="{FF2B5EF4-FFF2-40B4-BE49-F238E27FC236}">
-                  <a16:creationId xmlns:a16="http://schemas.microsoft.com/office/drawing/2014/main" xmlns="" id="{0539A26F-8931-1226-DADD-F1FA6E3A46CA}"/>
+                  <a16:creationId xmlns="" xmlns:a16="http://schemas.microsoft.com/office/drawing/2014/main" id="{0539A26F-8931-1226-DADD-F1FA6E3A46CA}"/>
                 </a:ext>
               </a:extLst>
             </p:cNvPr>
@@ -29737,7 +29801,7 @@
           <p:cNvPr id="66" name="Group 65">
             <a:extLst>
               <a:ext uri="{FF2B5EF4-FFF2-40B4-BE49-F238E27FC236}">
-                <a16:creationId xmlns:a16="http://schemas.microsoft.com/office/drawing/2014/main" xmlns="" id="{C5CA0963-798D-1A46-720B-8E62281FCB2B}"/>
+                <a16:creationId xmlns="" xmlns:a16="http://schemas.microsoft.com/office/drawing/2014/main" id="{C5CA0963-798D-1A46-720B-8E62281FCB2B}"/>
               </a:ext>
             </a:extLst>
           </p:cNvPr>
@@ -29757,7 +29821,7 @@
             <p:cNvPr id="67" name="Oval 66">
               <a:extLst>
                 <a:ext uri="{FF2B5EF4-FFF2-40B4-BE49-F238E27FC236}">
-                  <a16:creationId xmlns:a16="http://schemas.microsoft.com/office/drawing/2014/main" xmlns="" id="{238F6E5E-CA7D-90C5-F3DE-CEA092075098}"/>
+                  <a16:creationId xmlns="" xmlns:a16="http://schemas.microsoft.com/office/drawing/2014/main" id="{238F6E5E-CA7D-90C5-F3DE-CEA092075098}"/>
                 </a:ext>
               </a:extLst>
             </p:cNvPr>
@@ -29816,7 +29880,7 @@
             <p:cNvPr id="68" name="Arc 67">
               <a:extLst>
                 <a:ext uri="{FF2B5EF4-FFF2-40B4-BE49-F238E27FC236}">
-                  <a16:creationId xmlns:a16="http://schemas.microsoft.com/office/drawing/2014/main" xmlns="" id="{4EDC6FAD-D9B6-F4CE-7409-08C269011CC8}"/>
+                  <a16:creationId xmlns="" xmlns:a16="http://schemas.microsoft.com/office/drawing/2014/main" id="{4EDC6FAD-D9B6-F4CE-7409-08C269011CC8}"/>
                 </a:ext>
               </a:extLst>
             </p:cNvPr>
@@ -29869,7 +29933,7 @@
           <p:cNvPr id="69" name="Group 68">
             <a:extLst>
               <a:ext uri="{FF2B5EF4-FFF2-40B4-BE49-F238E27FC236}">
-                <a16:creationId xmlns:a16="http://schemas.microsoft.com/office/drawing/2014/main" xmlns="" id="{97D732E3-F499-0C3F-BE88-8A3C727562BA}"/>
+                <a16:creationId xmlns="" xmlns:a16="http://schemas.microsoft.com/office/drawing/2014/main" id="{97D732E3-F499-0C3F-BE88-8A3C727562BA}"/>
               </a:ext>
             </a:extLst>
           </p:cNvPr>
@@ -29889,7 +29953,7 @@
             <p:cNvPr id="70" name="Oval 69">
               <a:extLst>
                 <a:ext uri="{FF2B5EF4-FFF2-40B4-BE49-F238E27FC236}">
-                  <a16:creationId xmlns:a16="http://schemas.microsoft.com/office/drawing/2014/main" xmlns="" id="{1BB77D40-207D-28FD-CBB8-13B1251FBCE3}"/>
+                  <a16:creationId xmlns="" xmlns:a16="http://schemas.microsoft.com/office/drawing/2014/main" id="{1BB77D40-207D-28FD-CBB8-13B1251FBCE3}"/>
                 </a:ext>
               </a:extLst>
             </p:cNvPr>
@@ -29948,7 +30012,7 @@
             <p:cNvPr id="71" name="Arc 70">
               <a:extLst>
                 <a:ext uri="{FF2B5EF4-FFF2-40B4-BE49-F238E27FC236}">
-                  <a16:creationId xmlns:a16="http://schemas.microsoft.com/office/drawing/2014/main" xmlns="" id="{98CED01A-8366-93D8-2562-CDF27F4E5646}"/>
+                  <a16:creationId xmlns="" xmlns:a16="http://schemas.microsoft.com/office/drawing/2014/main" id="{98CED01A-8366-93D8-2562-CDF27F4E5646}"/>
                 </a:ext>
               </a:extLst>
             </p:cNvPr>
@@ -30001,7 +30065,7 @@
           <p:cNvPr id="72" name="Group 71">
             <a:extLst>
               <a:ext uri="{FF2B5EF4-FFF2-40B4-BE49-F238E27FC236}">
-                <a16:creationId xmlns:a16="http://schemas.microsoft.com/office/drawing/2014/main" xmlns="" id="{8ACD396F-9CBB-E28A-C3C7-9FFF82E7D986}"/>
+                <a16:creationId xmlns="" xmlns:a16="http://schemas.microsoft.com/office/drawing/2014/main" id="{8ACD396F-9CBB-E28A-C3C7-9FFF82E7D986}"/>
               </a:ext>
             </a:extLst>
           </p:cNvPr>
@@ -30021,7 +30085,7 @@
             <p:cNvPr id="73" name="Oval 72">
               <a:extLst>
                 <a:ext uri="{FF2B5EF4-FFF2-40B4-BE49-F238E27FC236}">
-                  <a16:creationId xmlns:a16="http://schemas.microsoft.com/office/drawing/2014/main" xmlns="" id="{79F5ABF2-6AF6-5851-71FF-385EC3216731}"/>
+                  <a16:creationId xmlns="" xmlns:a16="http://schemas.microsoft.com/office/drawing/2014/main" id="{79F5ABF2-6AF6-5851-71FF-385EC3216731}"/>
                 </a:ext>
               </a:extLst>
             </p:cNvPr>
@@ -30080,7 +30144,7 @@
             <p:cNvPr id="74" name="Arc 73">
               <a:extLst>
                 <a:ext uri="{FF2B5EF4-FFF2-40B4-BE49-F238E27FC236}">
-                  <a16:creationId xmlns:a16="http://schemas.microsoft.com/office/drawing/2014/main" xmlns="" id="{59B2770C-AEBD-5B7B-0CAD-D69C9BFB0200}"/>
+                  <a16:creationId xmlns="" xmlns:a16="http://schemas.microsoft.com/office/drawing/2014/main" id="{59B2770C-AEBD-5B7B-0CAD-D69C9BFB0200}"/>
                 </a:ext>
               </a:extLst>
             </p:cNvPr>
@@ -30133,7 +30197,7 @@
           <p:cNvPr id="75" name="Group 74">
             <a:extLst>
               <a:ext uri="{FF2B5EF4-FFF2-40B4-BE49-F238E27FC236}">
-                <a16:creationId xmlns:a16="http://schemas.microsoft.com/office/drawing/2014/main" xmlns="" id="{8E67EC40-2CEA-15BB-679E-82A155506382}"/>
+                <a16:creationId xmlns="" xmlns:a16="http://schemas.microsoft.com/office/drawing/2014/main" id="{8E67EC40-2CEA-15BB-679E-82A155506382}"/>
               </a:ext>
             </a:extLst>
           </p:cNvPr>
@@ -30153,7 +30217,7 @@
             <p:cNvPr id="76" name="Oval 75">
               <a:extLst>
                 <a:ext uri="{FF2B5EF4-FFF2-40B4-BE49-F238E27FC236}">
-                  <a16:creationId xmlns:a16="http://schemas.microsoft.com/office/drawing/2014/main" xmlns="" id="{BEE67072-39B0-0D8C-3764-DF739D4EF898}"/>
+                  <a16:creationId xmlns="" xmlns:a16="http://schemas.microsoft.com/office/drawing/2014/main" id="{BEE67072-39B0-0D8C-3764-DF739D4EF898}"/>
                 </a:ext>
               </a:extLst>
             </p:cNvPr>
@@ -30212,7 +30276,7 @@
             <p:cNvPr id="77" name="Arc 76">
               <a:extLst>
                 <a:ext uri="{FF2B5EF4-FFF2-40B4-BE49-F238E27FC236}">
-                  <a16:creationId xmlns:a16="http://schemas.microsoft.com/office/drawing/2014/main" xmlns="" id="{1036E0E8-91A2-459D-62BA-7E55B36EA4A3}"/>
+                  <a16:creationId xmlns="" xmlns:a16="http://schemas.microsoft.com/office/drawing/2014/main" id="{1036E0E8-91A2-459D-62BA-7E55B36EA4A3}"/>
                 </a:ext>
               </a:extLst>
             </p:cNvPr>
@@ -30265,7 +30329,7 @@
           <p:cNvPr id="78" name="Group 77">
             <a:extLst>
               <a:ext uri="{FF2B5EF4-FFF2-40B4-BE49-F238E27FC236}">
-                <a16:creationId xmlns:a16="http://schemas.microsoft.com/office/drawing/2014/main" xmlns="" id="{E7A8FC93-89F4-B3FF-B2A0-EB92EE14302F}"/>
+                <a16:creationId xmlns="" xmlns:a16="http://schemas.microsoft.com/office/drawing/2014/main" id="{E7A8FC93-89F4-B3FF-B2A0-EB92EE14302F}"/>
               </a:ext>
             </a:extLst>
           </p:cNvPr>
@@ -30285,7 +30349,7 @@
             <p:cNvPr id="79" name="Oval 78">
               <a:extLst>
                 <a:ext uri="{FF2B5EF4-FFF2-40B4-BE49-F238E27FC236}">
-                  <a16:creationId xmlns:a16="http://schemas.microsoft.com/office/drawing/2014/main" xmlns="" id="{0B288602-214C-9797-F12B-433D63A94C97}"/>
+                  <a16:creationId xmlns="" xmlns:a16="http://schemas.microsoft.com/office/drawing/2014/main" id="{0B288602-214C-9797-F12B-433D63A94C97}"/>
                 </a:ext>
               </a:extLst>
             </p:cNvPr>
@@ -30344,7 +30408,7 @@
             <p:cNvPr id="80" name="Arc 79">
               <a:extLst>
                 <a:ext uri="{FF2B5EF4-FFF2-40B4-BE49-F238E27FC236}">
-                  <a16:creationId xmlns:a16="http://schemas.microsoft.com/office/drawing/2014/main" xmlns="" id="{B2237529-DFC9-A1B7-9CFA-D339940826FC}"/>
+                  <a16:creationId xmlns="" xmlns:a16="http://schemas.microsoft.com/office/drawing/2014/main" id="{B2237529-DFC9-A1B7-9CFA-D339940826FC}"/>
                 </a:ext>
               </a:extLst>
             </p:cNvPr>
@@ -30397,7 +30461,7 @@
           <p:cNvPr id="81" name="Group 80">
             <a:extLst>
               <a:ext uri="{FF2B5EF4-FFF2-40B4-BE49-F238E27FC236}">
-                <a16:creationId xmlns:a16="http://schemas.microsoft.com/office/drawing/2014/main" xmlns="" id="{56E08E4B-3F15-3DA7-6141-7E97655DD396}"/>
+                <a16:creationId xmlns="" xmlns:a16="http://schemas.microsoft.com/office/drawing/2014/main" id="{56E08E4B-3F15-3DA7-6141-7E97655DD396}"/>
               </a:ext>
             </a:extLst>
           </p:cNvPr>
@@ -30417,7 +30481,7 @@
             <p:cNvPr id="82" name="Oval 81">
               <a:extLst>
                 <a:ext uri="{FF2B5EF4-FFF2-40B4-BE49-F238E27FC236}">
-                  <a16:creationId xmlns:a16="http://schemas.microsoft.com/office/drawing/2014/main" xmlns="" id="{BF631934-7110-7F5E-79A0-378CB41A08C9}"/>
+                  <a16:creationId xmlns="" xmlns:a16="http://schemas.microsoft.com/office/drawing/2014/main" id="{BF631934-7110-7F5E-79A0-378CB41A08C9}"/>
                 </a:ext>
               </a:extLst>
             </p:cNvPr>
@@ -30476,7 +30540,7 @@
             <p:cNvPr id="83" name="Arc 82">
               <a:extLst>
                 <a:ext uri="{FF2B5EF4-FFF2-40B4-BE49-F238E27FC236}">
-                  <a16:creationId xmlns:a16="http://schemas.microsoft.com/office/drawing/2014/main" xmlns="" id="{0439DB39-7B53-36D4-BDF5-71DB13657FDC}"/>
+                  <a16:creationId xmlns="" xmlns:a16="http://schemas.microsoft.com/office/drawing/2014/main" id="{0439DB39-7B53-36D4-BDF5-71DB13657FDC}"/>
                 </a:ext>
               </a:extLst>
             </p:cNvPr>
@@ -30529,7 +30593,7 @@
           <p:cNvPr id="84" name="Group 83">
             <a:extLst>
               <a:ext uri="{FF2B5EF4-FFF2-40B4-BE49-F238E27FC236}">
-                <a16:creationId xmlns:a16="http://schemas.microsoft.com/office/drawing/2014/main" xmlns="" id="{BD99BE67-16D7-6B0C-6E7E-F8B4B7BD2317}"/>
+                <a16:creationId xmlns="" xmlns:a16="http://schemas.microsoft.com/office/drawing/2014/main" id="{BD99BE67-16D7-6B0C-6E7E-F8B4B7BD2317}"/>
               </a:ext>
             </a:extLst>
           </p:cNvPr>
@@ -30549,7 +30613,7 @@
             <p:cNvPr id="85" name="Oval 84">
               <a:extLst>
                 <a:ext uri="{FF2B5EF4-FFF2-40B4-BE49-F238E27FC236}">
-                  <a16:creationId xmlns:a16="http://schemas.microsoft.com/office/drawing/2014/main" xmlns="" id="{370A9636-2147-18A8-A452-5C474F2755F9}"/>
+                  <a16:creationId xmlns="" xmlns:a16="http://schemas.microsoft.com/office/drawing/2014/main" id="{370A9636-2147-18A8-A452-5C474F2755F9}"/>
                 </a:ext>
               </a:extLst>
             </p:cNvPr>
@@ -30608,7 +30672,7 @@
             <p:cNvPr id="86" name="Arc 85">
               <a:extLst>
                 <a:ext uri="{FF2B5EF4-FFF2-40B4-BE49-F238E27FC236}">
-                  <a16:creationId xmlns:a16="http://schemas.microsoft.com/office/drawing/2014/main" xmlns="" id="{CF37D023-EFBC-7B83-E01F-14E578B5E41F}"/>
+                  <a16:creationId xmlns="" xmlns:a16="http://schemas.microsoft.com/office/drawing/2014/main" id="{CF37D023-EFBC-7B83-E01F-14E578B5E41F}"/>
                 </a:ext>
               </a:extLst>
             </p:cNvPr>
@@ -30661,7 +30725,7 @@
           <p:cNvPr id="87" name="Group 86">
             <a:extLst>
               <a:ext uri="{FF2B5EF4-FFF2-40B4-BE49-F238E27FC236}">
-                <a16:creationId xmlns:a16="http://schemas.microsoft.com/office/drawing/2014/main" xmlns="" id="{18D76EDD-67EC-1706-7541-E0B361B9EE01}"/>
+                <a16:creationId xmlns="" xmlns:a16="http://schemas.microsoft.com/office/drawing/2014/main" id="{18D76EDD-67EC-1706-7541-E0B361B9EE01}"/>
               </a:ext>
             </a:extLst>
           </p:cNvPr>
@@ -30681,7 +30745,7 @@
             <p:cNvPr id="88" name="Oval 87">
               <a:extLst>
                 <a:ext uri="{FF2B5EF4-FFF2-40B4-BE49-F238E27FC236}">
-                  <a16:creationId xmlns:a16="http://schemas.microsoft.com/office/drawing/2014/main" xmlns="" id="{EBF7F9D4-4385-3396-B1F8-92B45C3EE234}"/>
+                  <a16:creationId xmlns="" xmlns:a16="http://schemas.microsoft.com/office/drawing/2014/main" id="{EBF7F9D4-4385-3396-B1F8-92B45C3EE234}"/>
                 </a:ext>
               </a:extLst>
             </p:cNvPr>
@@ -30740,7 +30804,7 @@
             <p:cNvPr id="89" name="Arc 88">
               <a:extLst>
                 <a:ext uri="{FF2B5EF4-FFF2-40B4-BE49-F238E27FC236}">
-                  <a16:creationId xmlns:a16="http://schemas.microsoft.com/office/drawing/2014/main" xmlns="" id="{344DEE6C-BE03-A502-C8EB-06880E1AFF7F}"/>
+                  <a16:creationId xmlns="" xmlns:a16="http://schemas.microsoft.com/office/drawing/2014/main" id="{344DEE6C-BE03-A502-C8EB-06880E1AFF7F}"/>
                 </a:ext>
               </a:extLst>
             </p:cNvPr>
@@ -30793,7 +30857,7 @@
           <p:cNvPr id="90" name="Group 89">
             <a:extLst>
               <a:ext uri="{FF2B5EF4-FFF2-40B4-BE49-F238E27FC236}">
-                <a16:creationId xmlns:a16="http://schemas.microsoft.com/office/drawing/2014/main" xmlns="" id="{805A620C-3AE2-255F-D0AD-7BCE318B0261}"/>
+                <a16:creationId xmlns="" xmlns:a16="http://schemas.microsoft.com/office/drawing/2014/main" id="{805A620C-3AE2-255F-D0AD-7BCE318B0261}"/>
               </a:ext>
             </a:extLst>
           </p:cNvPr>
@@ -30813,7 +30877,7 @@
             <p:cNvPr id="91" name="Oval 90">
               <a:extLst>
                 <a:ext uri="{FF2B5EF4-FFF2-40B4-BE49-F238E27FC236}">
-                  <a16:creationId xmlns:a16="http://schemas.microsoft.com/office/drawing/2014/main" xmlns="" id="{C8C812B5-07D8-854F-C972-D8CEBC6A35B4}"/>
+                  <a16:creationId xmlns="" xmlns:a16="http://schemas.microsoft.com/office/drawing/2014/main" id="{C8C812B5-07D8-854F-C972-D8CEBC6A35B4}"/>
                 </a:ext>
               </a:extLst>
             </p:cNvPr>
@@ -30872,7 +30936,7 @@
             <p:cNvPr id="92" name="Arc 91">
               <a:extLst>
                 <a:ext uri="{FF2B5EF4-FFF2-40B4-BE49-F238E27FC236}">
-                  <a16:creationId xmlns:a16="http://schemas.microsoft.com/office/drawing/2014/main" xmlns="" id="{79FA0149-4CB8-9929-0B85-1B9620713172}"/>
+                  <a16:creationId xmlns="" xmlns:a16="http://schemas.microsoft.com/office/drawing/2014/main" id="{79FA0149-4CB8-9929-0B85-1B9620713172}"/>
                 </a:ext>
               </a:extLst>
             </p:cNvPr>
@@ -30925,7 +30989,7 @@
           <p:cNvPr id="93" name="Group 92">
             <a:extLst>
               <a:ext uri="{FF2B5EF4-FFF2-40B4-BE49-F238E27FC236}">
-                <a16:creationId xmlns:a16="http://schemas.microsoft.com/office/drawing/2014/main" xmlns="" id="{D34F9994-C5E0-AE09-44C0-C5B87FCCE5CA}"/>
+                <a16:creationId xmlns="" xmlns:a16="http://schemas.microsoft.com/office/drawing/2014/main" id="{D34F9994-C5E0-AE09-44C0-C5B87FCCE5CA}"/>
               </a:ext>
             </a:extLst>
           </p:cNvPr>
@@ -30945,7 +31009,7 @@
             <p:cNvPr id="94" name="Oval 93">
               <a:extLst>
                 <a:ext uri="{FF2B5EF4-FFF2-40B4-BE49-F238E27FC236}">
-                  <a16:creationId xmlns:a16="http://schemas.microsoft.com/office/drawing/2014/main" xmlns="" id="{2AC773AF-0EEA-4375-E025-35F8FC5364E9}"/>
+                  <a16:creationId xmlns="" xmlns:a16="http://schemas.microsoft.com/office/drawing/2014/main" id="{2AC773AF-0EEA-4375-E025-35F8FC5364E9}"/>
                 </a:ext>
               </a:extLst>
             </p:cNvPr>
@@ -31004,7 +31068,7 @@
             <p:cNvPr id="95" name="Arc 94">
               <a:extLst>
                 <a:ext uri="{FF2B5EF4-FFF2-40B4-BE49-F238E27FC236}">
-                  <a16:creationId xmlns:a16="http://schemas.microsoft.com/office/drawing/2014/main" xmlns="" id="{90DDEFBB-F1E4-9858-B6D5-3FDB2B182EF9}"/>
+                  <a16:creationId xmlns="" xmlns:a16="http://schemas.microsoft.com/office/drawing/2014/main" id="{90DDEFBB-F1E4-9858-B6D5-3FDB2B182EF9}"/>
                 </a:ext>
               </a:extLst>
             </p:cNvPr>
@@ -31057,7 +31121,7 @@
           <p:cNvPr id="96" name="Group 95">
             <a:extLst>
               <a:ext uri="{FF2B5EF4-FFF2-40B4-BE49-F238E27FC236}">
-                <a16:creationId xmlns:a16="http://schemas.microsoft.com/office/drawing/2014/main" xmlns="" id="{A7DFD59F-9ACF-DA37-BC73-AADA05F8CD55}"/>
+                <a16:creationId xmlns="" xmlns:a16="http://schemas.microsoft.com/office/drawing/2014/main" id="{A7DFD59F-9ACF-DA37-BC73-AADA05F8CD55}"/>
               </a:ext>
             </a:extLst>
           </p:cNvPr>
@@ -31077,7 +31141,7 @@
             <p:cNvPr id="97" name="Oval 96">
               <a:extLst>
                 <a:ext uri="{FF2B5EF4-FFF2-40B4-BE49-F238E27FC236}">
-                  <a16:creationId xmlns:a16="http://schemas.microsoft.com/office/drawing/2014/main" xmlns="" id="{34E0A8AD-4A63-9662-8252-B6566776A0DB}"/>
+                  <a16:creationId xmlns="" xmlns:a16="http://schemas.microsoft.com/office/drawing/2014/main" id="{34E0A8AD-4A63-9662-8252-B6566776A0DB}"/>
                 </a:ext>
               </a:extLst>
             </p:cNvPr>
@@ -31136,7 +31200,7 @@
             <p:cNvPr id="98" name="Arc 97">
               <a:extLst>
                 <a:ext uri="{FF2B5EF4-FFF2-40B4-BE49-F238E27FC236}">
-                  <a16:creationId xmlns:a16="http://schemas.microsoft.com/office/drawing/2014/main" xmlns="" id="{A5AF0D9F-7BD7-E7BD-EF60-38F8DB6A7173}"/>
+                  <a16:creationId xmlns="" xmlns:a16="http://schemas.microsoft.com/office/drawing/2014/main" id="{A5AF0D9F-7BD7-E7BD-EF60-38F8DB6A7173}"/>
                 </a:ext>
               </a:extLst>
             </p:cNvPr>
@@ -31189,7 +31253,7 @@
           <p:cNvPr id="99" name="Group 98">
             <a:extLst>
               <a:ext uri="{FF2B5EF4-FFF2-40B4-BE49-F238E27FC236}">
-                <a16:creationId xmlns:a16="http://schemas.microsoft.com/office/drawing/2014/main" xmlns="" id="{B86504F5-14F5-005B-98B8-877CBD2DBAEC}"/>
+                <a16:creationId xmlns="" xmlns:a16="http://schemas.microsoft.com/office/drawing/2014/main" id="{B86504F5-14F5-005B-98B8-877CBD2DBAEC}"/>
               </a:ext>
             </a:extLst>
           </p:cNvPr>
@@ -31209,7 +31273,7 @@
             <p:cNvPr id="100" name="Oval 99">
               <a:extLst>
                 <a:ext uri="{FF2B5EF4-FFF2-40B4-BE49-F238E27FC236}">
-                  <a16:creationId xmlns:a16="http://schemas.microsoft.com/office/drawing/2014/main" xmlns="" id="{77BEE814-D0CC-0B71-56A8-38FC233ADBBC}"/>
+                  <a16:creationId xmlns="" xmlns:a16="http://schemas.microsoft.com/office/drawing/2014/main" id="{77BEE814-D0CC-0B71-56A8-38FC233ADBBC}"/>
                 </a:ext>
               </a:extLst>
             </p:cNvPr>
@@ -31268,7 +31332,7 @@
             <p:cNvPr id="101" name="Arc 100">
               <a:extLst>
                 <a:ext uri="{FF2B5EF4-FFF2-40B4-BE49-F238E27FC236}">
-                  <a16:creationId xmlns:a16="http://schemas.microsoft.com/office/drawing/2014/main" xmlns="" id="{E12B4309-6ECF-2A90-BE18-92E7B6D9F45C}"/>
+                  <a16:creationId xmlns="" xmlns:a16="http://schemas.microsoft.com/office/drawing/2014/main" id="{E12B4309-6ECF-2A90-BE18-92E7B6D9F45C}"/>
                 </a:ext>
               </a:extLst>
             </p:cNvPr>
@@ -31321,7 +31385,7 @@
           <p:cNvPr id="102" name="Group 101">
             <a:extLst>
               <a:ext uri="{FF2B5EF4-FFF2-40B4-BE49-F238E27FC236}">
-                <a16:creationId xmlns:a16="http://schemas.microsoft.com/office/drawing/2014/main" xmlns="" id="{B34C10F9-48AB-376A-971B-5E609292667E}"/>
+                <a16:creationId xmlns="" xmlns:a16="http://schemas.microsoft.com/office/drawing/2014/main" id="{B34C10F9-48AB-376A-971B-5E609292667E}"/>
               </a:ext>
             </a:extLst>
           </p:cNvPr>
@@ -31341,7 +31405,7 @@
             <p:cNvPr id="103" name="Oval 102">
               <a:extLst>
                 <a:ext uri="{FF2B5EF4-FFF2-40B4-BE49-F238E27FC236}">
-                  <a16:creationId xmlns:a16="http://schemas.microsoft.com/office/drawing/2014/main" xmlns="" id="{B13C8D1E-9E03-3B03-EB62-C5D86340BF1D}"/>
+                  <a16:creationId xmlns="" xmlns:a16="http://schemas.microsoft.com/office/drawing/2014/main" id="{B13C8D1E-9E03-3B03-EB62-C5D86340BF1D}"/>
                 </a:ext>
               </a:extLst>
             </p:cNvPr>
@@ -31400,7 +31464,7 @@
             <p:cNvPr id="104" name="Arc 103">
               <a:extLst>
                 <a:ext uri="{FF2B5EF4-FFF2-40B4-BE49-F238E27FC236}">
-                  <a16:creationId xmlns:a16="http://schemas.microsoft.com/office/drawing/2014/main" xmlns="" id="{FACF3DF3-03AF-3180-E1E4-55391011F79F}"/>
+                  <a16:creationId xmlns="" xmlns:a16="http://schemas.microsoft.com/office/drawing/2014/main" id="{FACF3DF3-03AF-3180-E1E4-55391011F79F}"/>
                 </a:ext>
               </a:extLst>
             </p:cNvPr>
@@ -31453,7 +31517,7 @@
           <p:cNvPr id="105" name="Group 104">
             <a:extLst>
               <a:ext uri="{FF2B5EF4-FFF2-40B4-BE49-F238E27FC236}">
-                <a16:creationId xmlns:a16="http://schemas.microsoft.com/office/drawing/2014/main" xmlns="" id="{ADC277D0-0547-3E1F-7B17-763C14F2C569}"/>
+                <a16:creationId xmlns="" xmlns:a16="http://schemas.microsoft.com/office/drawing/2014/main" id="{ADC277D0-0547-3E1F-7B17-763C14F2C569}"/>
               </a:ext>
             </a:extLst>
           </p:cNvPr>
@@ -31473,7 +31537,7 @@
             <p:cNvPr id="106" name="Oval 105">
               <a:extLst>
                 <a:ext uri="{FF2B5EF4-FFF2-40B4-BE49-F238E27FC236}">
-                  <a16:creationId xmlns:a16="http://schemas.microsoft.com/office/drawing/2014/main" xmlns="" id="{444E641A-F426-E972-E682-0AD4058F2F5F}"/>
+                  <a16:creationId xmlns="" xmlns:a16="http://schemas.microsoft.com/office/drawing/2014/main" id="{444E641A-F426-E972-E682-0AD4058F2F5F}"/>
                 </a:ext>
               </a:extLst>
             </p:cNvPr>
@@ -31532,7 +31596,7 @@
             <p:cNvPr id="107" name="Arc 106">
               <a:extLst>
                 <a:ext uri="{FF2B5EF4-FFF2-40B4-BE49-F238E27FC236}">
-                  <a16:creationId xmlns:a16="http://schemas.microsoft.com/office/drawing/2014/main" xmlns="" id="{000E6A81-D707-E36C-5DAD-68F6D1F68CE3}"/>
+                  <a16:creationId xmlns="" xmlns:a16="http://schemas.microsoft.com/office/drawing/2014/main" id="{000E6A81-D707-E36C-5DAD-68F6D1F68CE3}"/>
                 </a:ext>
               </a:extLst>
             </p:cNvPr>
@@ -31585,7 +31649,7 @@
           <p:cNvPr id="108" name="Group 107">
             <a:extLst>
               <a:ext uri="{FF2B5EF4-FFF2-40B4-BE49-F238E27FC236}">
-                <a16:creationId xmlns:a16="http://schemas.microsoft.com/office/drawing/2014/main" xmlns="" id="{31EA107D-77C3-196B-39BD-015BCFD6D3C2}"/>
+                <a16:creationId xmlns="" xmlns:a16="http://schemas.microsoft.com/office/drawing/2014/main" id="{31EA107D-77C3-196B-39BD-015BCFD6D3C2}"/>
               </a:ext>
             </a:extLst>
           </p:cNvPr>
@@ -31605,7 +31669,7 @@
             <p:cNvPr id="109" name="Oval 108">
               <a:extLst>
                 <a:ext uri="{FF2B5EF4-FFF2-40B4-BE49-F238E27FC236}">
-                  <a16:creationId xmlns:a16="http://schemas.microsoft.com/office/drawing/2014/main" xmlns="" id="{61FDFC2B-B300-35FB-0617-5D1C7ADF6641}"/>
+                  <a16:creationId xmlns="" xmlns:a16="http://schemas.microsoft.com/office/drawing/2014/main" id="{61FDFC2B-B300-35FB-0617-5D1C7ADF6641}"/>
                 </a:ext>
               </a:extLst>
             </p:cNvPr>
@@ -31664,7 +31728,7 @@
             <p:cNvPr id="110" name="Arc 109">
               <a:extLst>
                 <a:ext uri="{FF2B5EF4-FFF2-40B4-BE49-F238E27FC236}">
-                  <a16:creationId xmlns:a16="http://schemas.microsoft.com/office/drawing/2014/main" xmlns="" id="{CF6B487C-012F-56E5-E8E3-8B137298EDFA}"/>
+                  <a16:creationId xmlns="" xmlns:a16="http://schemas.microsoft.com/office/drawing/2014/main" id="{CF6B487C-012F-56E5-E8E3-8B137298EDFA}"/>
                 </a:ext>
               </a:extLst>
             </p:cNvPr>
@@ -31717,7 +31781,7 @@
           <p:cNvPr id="111" name="Group 110">
             <a:extLst>
               <a:ext uri="{FF2B5EF4-FFF2-40B4-BE49-F238E27FC236}">
-                <a16:creationId xmlns:a16="http://schemas.microsoft.com/office/drawing/2014/main" xmlns="" id="{6232043B-C4C4-BA0A-CF1A-4DBBB75AAC73}"/>
+                <a16:creationId xmlns="" xmlns:a16="http://schemas.microsoft.com/office/drawing/2014/main" id="{6232043B-C4C4-BA0A-CF1A-4DBBB75AAC73}"/>
               </a:ext>
             </a:extLst>
           </p:cNvPr>
@@ -31737,7 +31801,7 @@
             <p:cNvPr id="112" name="Oval 111">
               <a:extLst>
                 <a:ext uri="{FF2B5EF4-FFF2-40B4-BE49-F238E27FC236}">
-                  <a16:creationId xmlns:a16="http://schemas.microsoft.com/office/drawing/2014/main" xmlns="" id="{10FFE23E-6CCE-0432-75E0-E824C7863261}"/>
+                  <a16:creationId xmlns="" xmlns:a16="http://schemas.microsoft.com/office/drawing/2014/main" id="{10FFE23E-6CCE-0432-75E0-E824C7863261}"/>
                 </a:ext>
               </a:extLst>
             </p:cNvPr>
@@ -31796,7 +31860,7 @@
             <p:cNvPr id="113" name="Arc 112">
               <a:extLst>
                 <a:ext uri="{FF2B5EF4-FFF2-40B4-BE49-F238E27FC236}">
-                  <a16:creationId xmlns:a16="http://schemas.microsoft.com/office/drawing/2014/main" xmlns="" id="{98676D6A-3424-61E8-2CCE-756447D5F9C2}"/>
+                  <a16:creationId xmlns="" xmlns:a16="http://schemas.microsoft.com/office/drawing/2014/main" id="{98676D6A-3424-61E8-2CCE-756447D5F9C2}"/>
                 </a:ext>
               </a:extLst>
             </p:cNvPr>
@@ -31849,7 +31913,7 @@
           <p:cNvPr id="114" name="Group 113">
             <a:extLst>
               <a:ext uri="{FF2B5EF4-FFF2-40B4-BE49-F238E27FC236}">
-                <a16:creationId xmlns:a16="http://schemas.microsoft.com/office/drawing/2014/main" xmlns="" id="{88B3BE82-3395-0E01-8219-A5E3310F3959}"/>
+                <a16:creationId xmlns="" xmlns:a16="http://schemas.microsoft.com/office/drawing/2014/main" id="{88B3BE82-3395-0E01-8219-A5E3310F3959}"/>
               </a:ext>
             </a:extLst>
           </p:cNvPr>
@@ -31869,7 +31933,7 @@
             <p:cNvPr id="115" name="Oval 114">
               <a:extLst>
                 <a:ext uri="{FF2B5EF4-FFF2-40B4-BE49-F238E27FC236}">
-                  <a16:creationId xmlns:a16="http://schemas.microsoft.com/office/drawing/2014/main" xmlns="" id="{F83317C8-5B5D-DDF7-15F4-EA2AFB9BC950}"/>
+                  <a16:creationId xmlns="" xmlns:a16="http://schemas.microsoft.com/office/drawing/2014/main" id="{F83317C8-5B5D-DDF7-15F4-EA2AFB9BC950}"/>
                 </a:ext>
               </a:extLst>
             </p:cNvPr>
@@ -31928,7 +31992,7 @@
             <p:cNvPr id="116" name="Arc 115">
               <a:extLst>
                 <a:ext uri="{FF2B5EF4-FFF2-40B4-BE49-F238E27FC236}">
-                  <a16:creationId xmlns:a16="http://schemas.microsoft.com/office/drawing/2014/main" xmlns="" id="{E746B903-C206-EA9A-5FAE-24360FA19AD9}"/>
+                  <a16:creationId xmlns="" xmlns:a16="http://schemas.microsoft.com/office/drawing/2014/main" id="{E746B903-C206-EA9A-5FAE-24360FA19AD9}"/>
                 </a:ext>
               </a:extLst>
             </p:cNvPr>
@@ -31981,7 +32045,7 @@
           <p:cNvPr id="117" name="Group 116">
             <a:extLst>
               <a:ext uri="{FF2B5EF4-FFF2-40B4-BE49-F238E27FC236}">
-                <a16:creationId xmlns:a16="http://schemas.microsoft.com/office/drawing/2014/main" xmlns="" id="{2F2A7235-4D60-4C1C-AC1C-8026C6BB4059}"/>
+                <a16:creationId xmlns="" xmlns:a16="http://schemas.microsoft.com/office/drawing/2014/main" id="{2F2A7235-4D60-4C1C-AC1C-8026C6BB4059}"/>
               </a:ext>
             </a:extLst>
           </p:cNvPr>
@@ -32001,7 +32065,7 @@
             <p:cNvPr id="118" name="Oval 117">
               <a:extLst>
                 <a:ext uri="{FF2B5EF4-FFF2-40B4-BE49-F238E27FC236}">
-                  <a16:creationId xmlns:a16="http://schemas.microsoft.com/office/drawing/2014/main" xmlns="" id="{0F886985-AC53-0516-F85D-DDC1946AD17E}"/>
+                  <a16:creationId xmlns="" xmlns:a16="http://schemas.microsoft.com/office/drawing/2014/main" id="{0F886985-AC53-0516-F85D-DDC1946AD17E}"/>
                 </a:ext>
               </a:extLst>
             </p:cNvPr>
@@ -32060,7 +32124,7 @@
             <p:cNvPr id="119" name="Arc 118">
               <a:extLst>
                 <a:ext uri="{FF2B5EF4-FFF2-40B4-BE49-F238E27FC236}">
-                  <a16:creationId xmlns:a16="http://schemas.microsoft.com/office/drawing/2014/main" xmlns="" id="{AE4C9755-2A3A-5A32-D276-52C0A9B4F8D6}"/>
+                  <a16:creationId xmlns="" xmlns:a16="http://schemas.microsoft.com/office/drawing/2014/main" id="{AE4C9755-2A3A-5A32-D276-52C0A9B4F8D6}"/>
                 </a:ext>
               </a:extLst>
             </p:cNvPr>
@@ -32113,7 +32177,7 @@
           <p:cNvPr id="120" name="Group 119">
             <a:extLst>
               <a:ext uri="{FF2B5EF4-FFF2-40B4-BE49-F238E27FC236}">
-                <a16:creationId xmlns:a16="http://schemas.microsoft.com/office/drawing/2014/main" xmlns="" id="{7877DB57-685B-C785-7692-7E30EB8C61F3}"/>
+                <a16:creationId xmlns="" xmlns:a16="http://schemas.microsoft.com/office/drawing/2014/main" id="{7877DB57-685B-C785-7692-7E30EB8C61F3}"/>
               </a:ext>
             </a:extLst>
           </p:cNvPr>
@@ -32133,7 +32197,7 @@
             <p:cNvPr id="121" name="Oval 120">
               <a:extLst>
                 <a:ext uri="{FF2B5EF4-FFF2-40B4-BE49-F238E27FC236}">
-                  <a16:creationId xmlns:a16="http://schemas.microsoft.com/office/drawing/2014/main" xmlns="" id="{22F39CC0-1318-0DB9-44C8-44ED898DF450}"/>
+                  <a16:creationId xmlns="" xmlns:a16="http://schemas.microsoft.com/office/drawing/2014/main" id="{22F39CC0-1318-0DB9-44C8-44ED898DF450}"/>
                 </a:ext>
               </a:extLst>
             </p:cNvPr>
@@ -32192,7 +32256,7 @@
             <p:cNvPr id="122" name="Arc 121">
               <a:extLst>
                 <a:ext uri="{FF2B5EF4-FFF2-40B4-BE49-F238E27FC236}">
-                  <a16:creationId xmlns:a16="http://schemas.microsoft.com/office/drawing/2014/main" xmlns="" id="{E74E2D2F-36CC-9C47-07C8-1F7BA70CE9FF}"/>
+                  <a16:creationId xmlns="" xmlns:a16="http://schemas.microsoft.com/office/drawing/2014/main" id="{E74E2D2F-36CC-9C47-07C8-1F7BA70CE9FF}"/>
                 </a:ext>
               </a:extLst>
             </p:cNvPr>
@@ -32245,7 +32309,7 @@
           <p:cNvPr id="123" name="Rectangle 122">
             <a:extLst>
               <a:ext uri="{FF2B5EF4-FFF2-40B4-BE49-F238E27FC236}">
-                <a16:creationId xmlns:a16="http://schemas.microsoft.com/office/drawing/2014/main" xmlns="" id="{044E7409-6BE4-82BF-6739-FB981D21C254}"/>
+                <a16:creationId xmlns="" xmlns:a16="http://schemas.microsoft.com/office/drawing/2014/main" id="{044E7409-6BE4-82BF-6739-FB981D21C254}"/>
               </a:ext>
             </a:extLst>
           </p:cNvPr>
@@ -32420,7 +32484,7 @@
         <p:cNvPr id="1" name="">
           <a:extLst>
             <a:ext uri="{FF2B5EF4-FFF2-40B4-BE49-F238E27FC236}">
-              <a16:creationId xmlns:a16="http://schemas.microsoft.com/office/drawing/2014/main" xmlns="" id="{51C4FD09-55E3-2B1B-897E-1F9BF2720A5C}"/>
+              <a16:creationId xmlns="" xmlns:a16="http://schemas.microsoft.com/office/drawing/2014/main" id="{51C4FD09-55E3-2B1B-897E-1F9BF2720A5C}"/>
             </a:ext>
           </a:extLst>
         </p:cNvPr>
@@ -32440,7 +32504,7 @@
           <p:cNvPr id="5" name="Rectangle 4">
             <a:extLst>
               <a:ext uri="{FF2B5EF4-FFF2-40B4-BE49-F238E27FC236}">
-                <a16:creationId xmlns:a16="http://schemas.microsoft.com/office/drawing/2014/main" xmlns="" id="{B034BA31-4C57-9BDA-04C5-8FC13B21BF04}"/>
+                <a16:creationId xmlns="" xmlns:a16="http://schemas.microsoft.com/office/drawing/2014/main" id="{B034BA31-4C57-9BDA-04C5-8FC13B21BF04}"/>
               </a:ext>
             </a:extLst>
           </p:cNvPr>
@@ -32496,7 +32560,7 @@
           <p:cNvPr id="4" name="Rectangle 3">
             <a:extLst>
               <a:ext uri="{FF2B5EF4-FFF2-40B4-BE49-F238E27FC236}">
-                <a16:creationId xmlns:a16="http://schemas.microsoft.com/office/drawing/2014/main" xmlns="" id="{726F619E-C2F5-A764-7A5A-E740D3764F94}"/>
+                <a16:creationId xmlns="" xmlns:a16="http://schemas.microsoft.com/office/drawing/2014/main" id="{726F619E-C2F5-A764-7A5A-E740D3764F94}"/>
               </a:ext>
             </a:extLst>
           </p:cNvPr>
@@ -32727,7 +32791,7 @@
           <p:cNvPr id="6" name="Oval 5">
             <a:extLst>
               <a:ext uri="{FF2B5EF4-FFF2-40B4-BE49-F238E27FC236}">
-                <a16:creationId xmlns:a16="http://schemas.microsoft.com/office/drawing/2014/main" xmlns="" id="{63652264-4E8B-48A9-C360-C02C3660C32D}"/>
+                <a16:creationId xmlns="" xmlns:a16="http://schemas.microsoft.com/office/drawing/2014/main" id="{63652264-4E8B-48A9-C360-C02C3660C32D}"/>
               </a:ext>
             </a:extLst>
           </p:cNvPr>
@@ -32786,7 +32850,7 @@
           <p:cNvPr id="7" name="Oval 6">
             <a:extLst>
               <a:ext uri="{FF2B5EF4-FFF2-40B4-BE49-F238E27FC236}">
-                <a16:creationId xmlns:a16="http://schemas.microsoft.com/office/drawing/2014/main" xmlns="" id="{94A79690-2C7C-FEC2-2B4B-F5D0C6E2B06B}"/>
+                <a16:creationId xmlns="" xmlns:a16="http://schemas.microsoft.com/office/drawing/2014/main" id="{94A79690-2C7C-FEC2-2B4B-F5D0C6E2B06B}"/>
               </a:ext>
             </a:extLst>
           </p:cNvPr>
@@ -32845,7 +32909,7 @@
           <p:cNvPr id="8" name="Oval 7">
             <a:extLst>
               <a:ext uri="{FF2B5EF4-FFF2-40B4-BE49-F238E27FC236}">
-                <a16:creationId xmlns:a16="http://schemas.microsoft.com/office/drawing/2014/main" xmlns="" id="{F183C3CB-BD1C-4789-0643-1F50E0C687BE}"/>
+                <a16:creationId xmlns="" xmlns:a16="http://schemas.microsoft.com/office/drawing/2014/main" id="{F183C3CB-BD1C-4789-0643-1F50E0C687BE}"/>
               </a:ext>
             </a:extLst>
           </p:cNvPr>
@@ -32904,7 +32968,7 @@
           <p:cNvPr id="9" name="Oval 8">
             <a:extLst>
               <a:ext uri="{FF2B5EF4-FFF2-40B4-BE49-F238E27FC236}">
-                <a16:creationId xmlns:a16="http://schemas.microsoft.com/office/drawing/2014/main" xmlns="" id="{852695AE-B9E1-CA35-383A-5061DECC336D}"/>
+                <a16:creationId xmlns="" xmlns:a16="http://schemas.microsoft.com/office/drawing/2014/main" id="{852695AE-B9E1-CA35-383A-5061DECC336D}"/>
               </a:ext>
             </a:extLst>
           </p:cNvPr>
@@ -32963,7 +33027,7 @@
           <p:cNvPr id="10" name="Oval 9">
             <a:extLst>
               <a:ext uri="{FF2B5EF4-FFF2-40B4-BE49-F238E27FC236}">
-                <a16:creationId xmlns:a16="http://schemas.microsoft.com/office/drawing/2014/main" xmlns="" id="{AC8B7149-0844-B850-391A-8060B3392CC6}"/>
+                <a16:creationId xmlns="" xmlns:a16="http://schemas.microsoft.com/office/drawing/2014/main" id="{AC8B7149-0844-B850-391A-8060B3392CC6}"/>
               </a:ext>
             </a:extLst>
           </p:cNvPr>
@@ -33022,7 +33086,7 @@
           <p:cNvPr id="11" name="Oval 10">
             <a:extLst>
               <a:ext uri="{FF2B5EF4-FFF2-40B4-BE49-F238E27FC236}">
-                <a16:creationId xmlns:a16="http://schemas.microsoft.com/office/drawing/2014/main" xmlns="" id="{0D333270-CC5E-7DF6-1A02-659ABE822FF5}"/>
+                <a16:creationId xmlns="" xmlns:a16="http://schemas.microsoft.com/office/drawing/2014/main" id="{0D333270-CC5E-7DF6-1A02-659ABE822FF5}"/>
               </a:ext>
             </a:extLst>
           </p:cNvPr>
@@ -33081,7 +33145,7 @@
           <p:cNvPr id="12" name="Oval 11">
             <a:extLst>
               <a:ext uri="{FF2B5EF4-FFF2-40B4-BE49-F238E27FC236}">
-                <a16:creationId xmlns:a16="http://schemas.microsoft.com/office/drawing/2014/main" xmlns="" id="{79654E69-BC73-6E52-DC33-651392E0526D}"/>
+                <a16:creationId xmlns="" xmlns:a16="http://schemas.microsoft.com/office/drawing/2014/main" id="{79654E69-BC73-6E52-DC33-651392E0526D}"/>
               </a:ext>
             </a:extLst>
           </p:cNvPr>
@@ -33140,7 +33204,7 @@
           <p:cNvPr id="13" name="Oval 12">
             <a:extLst>
               <a:ext uri="{FF2B5EF4-FFF2-40B4-BE49-F238E27FC236}">
-                <a16:creationId xmlns:a16="http://schemas.microsoft.com/office/drawing/2014/main" xmlns="" id="{E4CFDB43-57A3-3026-29E9-D60F416B0F09}"/>
+                <a16:creationId xmlns="" xmlns:a16="http://schemas.microsoft.com/office/drawing/2014/main" id="{E4CFDB43-57A3-3026-29E9-D60F416B0F09}"/>
               </a:ext>
             </a:extLst>
           </p:cNvPr>
@@ -33199,7 +33263,7 @@
           <p:cNvPr id="14" name="Oval 13">
             <a:extLst>
               <a:ext uri="{FF2B5EF4-FFF2-40B4-BE49-F238E27FC236}">
-                <a16:creationId xmlns:a16="http://schemas.microsoft.com/office/drawing/2014/main" xmlns="" id="{F309C4C6-BB4D-8939-A2FC-02DC29CFCC6D}"/>
+                <a16:creationId xmlns="" xmlns:a16="http://schemas.microsoft.com/office/drawing/2014/main" id="{F309C4C6-BB4D-8939-A2FC-02DC29CFCC6D}"/>
               </a:ext>
             </a:extLst>
           </p:cNvPr>
@@ -33258,7 +33322,7 @@
           <p:cNvPr id="15" name="Oval 14">
             <a:extLst>
               <a:ext uri="{FF2B5EF4-FFF2-40B4-BE49-F238E27FC236}">
-                <a16:creationId xmlns:a16="http://schemas.microsoft.com/office/drawing/2014/main" xmlns="" id="{042F644C-7941-9F1F-CD17-58A102B9F051}"/>
+                <a16:creationId xmlns="" xmlns:a16="http://schemas.microsoft.com/office/drawing/2014/main" id="{042F644C-7941-9F1F-CD17-58A102B9F051}"/>
               </a:ext>
             </a:extLst>
           </p:cNvPr>
@@ -33317,7 +33381,7 @@
           <p:cNvPr id="16" name="Oval 15">
             <a:extLst>
               <a:ext uri="{FF2B5EF4-FFF2-40B4-BE49-F238E27FC236}">
-                <a16:creationId xmlns:a16="http://schemas.microsoft.com/office/drawing/2014/main" xmlns="" id="{9FE90EDA-798E-4116-2E6D-F9F24F96F337}"/>
+                <a16:creationId xmlns="" xmlns:a16="http://schemas.microsoft.com/office/drawing/2014/main" id="{9FE90EDA-798E-4116-2E6D-F9F24F96F337}"/>
               </a:ext>
             </a:extLst>
           </p:cNvPr>
@@ -33376,7 +33440,7 @@
           <p:cNvPr id="17" name="Oval 16">
             <a:extLst>
               <a:ext uri="{FF2B5EF4-FFF2-40B4-BE49-F238E27FC236}">
-                <a16:creationId xmlns:a16="http://schemas.microsoft.com/office/drawing/2014/main" xmlns="" id="{01176BBF-01DD-C6ED-B967-EB1DB7DB2F69}"/>
+                <a16:creationId xmlns="" xmlns:a16="http://schemas.microsoft.com/office/drawing/2014/main" id="{01176BBF-01DD-C6ED-B967-EB1DB7DB2F69}"/>
               </a:ext>
             </a:extLst>
           </p:cNvPr>
@@ -33435,7 +33499,7 @@
           <p:cNvPr id="18" name="Oval 17">
             <a:extLst>
               <a:ext uri="{FF2B5EF4-FFF2-40B4-BE49-F238E27FC236}">
-                <a16:creationId xmlns:a16="http://schemas.microsoft.com/office/drawing/2014/main" xmlns="" id="{9F9C5F9C-2EEA-6014-F551-FCFA8EE56021}"/>
+                <a16:creationId xmlns="" xmlns:a16="http://schemas.microsoft.com/office/drawing/2014/main" id="{9F9C5F9C-2EEA-6014-F551-FCFA8EE56021}"/>
               </a:ext>
             </a:extLst>
           </p:cNvPr>
@@ -33494,7 +33558,7 @@
           <p:cNvPr id="19" name="Oval 18">
             <a:extLst>
               <a:ext uri="{FF2B5EF4-FFF2-40B4-BE49-F238E27FC236}">
-                <a16:creationId xmlns:a16="http://schemas.microsoft.com/office/drawing/2014/main" xmlns="" id="{3C7AD85C-644E-0A9B-6CFE-2B4A8C85E76B}"/>
+                <a16:creationId xmlns="" xmlns:a16="http://schemas.microsoft.com/office/drawing/2014/main" id="{3C7AD85C-644E-0A9B-6CFE-2B4A8C85E76B}"/>
               </a:ext>
             </a:extLst>
           </p:cNvPr>
@@ -33553,7 +33617,7 @@
           <p:cNvPr id="20" name="Oval 19">
             <a:extLst>
               <a:ext uri="{FF2B5EF4-FFF2-40B4-BE49-F238E27FC236}">
-                <a16:creationId xmlns:a16="http://schemas.microsoft.com/office/drawing/2014/main" xmlns="" id="{0380C106-105A-1A96-0199-94FE8B539591}"/>
+                <a16:creationId xmlns="" xmlns:a16="http://schemas.microsoft.com/office/drawing/2014/main" id="{0380C106-105A-1A96-0199-94FE8B539591}"/>
               </a:ext>
             </a:extLst>
           </p:cNvPr>
@@ -33612,7 +33676,7 @@
           <p:cNvPr id="21" name="Oval 20">
             <a:extLst>
               <a:ext uri="{FF2B5EF4-FFF2-40B4-BE49-F238E27FC236}">
-                <a16:creationId xmlns:a16="http://schemas.microsoft.com/office/drawing/2014/main" xmlns="" id="{89A7FBE2-CFD6-1AB1-A77D-4A327850C6BD}"/>
+                <a16:creationId xmlns="" xmlns:a16="http://schemas.microsoft.com/office/drawing/2014/main" id="{89A7FBE2-CFD6-1AB1-A77D-4A327850C6BD}"/>
               </a:ext>
             </a:extLst>
           </p:cNvPr>
@@ -33671,7 +33735,7 @@
           <p:cNvPr id="22" name="Oval 21">
             <a:extLst>
               <a:ext uri="{FF2B5EF4-FFF2-40B4-BE49-F238E27FC236}">
-                <a16:creationId xmlns:a16="http://schemas.microsoft.com/office/drawing/2014/main" xmlns="" id="{3121677A-1631-1324-1E55-D68B3900D565}"/>
+                <a16:creationId xmlns="" xmlns:a16="http://schemas.microsoft.com/office/drawing/2014/main" id="{3121677A-1631-1324-1E55-D68B3900D565}"/>
               </a:ext>
             </a:extLst>
           </p:cNvPr>
@@ -33730,7 +33794,7 @@
           <p:cNvPr id="23" name="Oval 22">
             <a:extLst>
               <a:ext uri="{FF2B5EF4-FFF2-40B4-BE49-F238E27FC236}">
-                <a16:creationId xmlns:a16="http://schemas.microsoft.com/office/drawing/2014/main" xmlns="" id="{64D42A8C-6C17-5515-7C30-72FA44A1C982}"/>
+                <a16:creationId xmlns="" xmlns:a16="http://schemas.microsoft.com/office/drawing/2014/main" id="{64D42A8C-6C17-5515-7C30-72FA44A1C982}"/>
               </a:ext>
             </a:extLst>
           </p:cNvPr>
@@ -33789,7 +33853,7 @@
           <p:cNvPr id="24" name="Oval 23">
             <a:extLst>
               <a:ext uri="{FF2B5EF4-FFF2-40B4-BE49-F238E27FC236}">
-                <a16:creationId xmlns:a16="http://schemas.microsoft.com/office/drawing/2014/main" xmlns="" id="{7475C0C7-3651-5314-3F48-173B78AB0BFB}"/>
+                <a16:creationId xmlns="" xmlns:a16="http://schemas.microsoft.com/office/drawing/2014/main" id="{7475C0C7-3651-5314-3F48-173B78AB0BFB}"/>
               </a:ext>
             </a:extLst>
           </p:cNvPr>
@@ -33848,7 +33912,7 @@
           <p:cNvPr id="25" name="Oval 24">
             <a:extLst>
               <a:ext uri="{FF2B5EF4-FFF2-40B4-BE49-F238E27FC236}">
-                <a16:creationId xmlns:a16="http://schemas.microsoft.com/office/drawing/2014/main" xmlns="" id="{9EC0B432-CB23-DBAF-B917-7ABB9CFA1904}"/>
+                <a16:creationId xmlns="" xmlns:a16="http://schemas.microsoft.com/office/drawing/2014/main" id="{9EC0B432-CB23-DBAF-B917-7ABB9CFA1904}"/>
               </a:ext>
             </a:extLst>
           </p:cNvPr>
@@ -33907,7 +33971,7 @@
           <p:cNvPr id="26" name="Oval 25">
             <a:extLst>
               <a:ext uri="{FF2B5EF4-FFF2-40B4-BE49-F238E27FC236}">
-                <a16:creationId xmlns:a16="http://schemas.microsoft.com/office/drawing/2014/main" xmlns="" id="{CD6371DF-A7E5-1434-5000-FF50454FDD3B}"/>
+                <a16:creationId xmlns="" xmlns:a16="http://schemas.microsoft.com/office/drawing/2014/main" id="{CD6371DF-A7E5-1434-5000-FF50454FDD3B}"/>
               </a:ext>
             </a:extLst>
           </p:cNvPr>
@@ -33966,7 +34030,7 @@
           <p:cNvPr id="27" name="Oval 26">
             <a:extLst>
               <a:ext uri="{FF2B5EF4-FFF2-40B4-BE49-F238E27FC236}">
-                <a16:creationId xmlns:a16="http://schemas.microsoft.com/office/drawing/2014/main" xmlns="" id="{1F08106B-D501-EC7F-FD6E-9F53DD6567B9}"/>
+                <a16:creationId xmlns="" xmlns:a16="http://schemas.microsoft.com/office/drawing/2014/main" id="{1F08106B-D501-EC7F-FD6E-9F53DD6567B9}"/>
               </a:ext>
             </a:extLst>
           </p:cNvPr>
@@ -34025,7 +34089,7 @@
           <p:cNvPr id="28" name="Oval 27">
             <a:extLst>
               <a:ext uri="{FF2B5EF4-FFF2-40B4-BE49-F238E27FC236}">
-                <a16:creationId xmlns:a16="http://schemas.microsoft.com/office/drawing/2014/main" xmlns="" id="{58CD1136-8D51-C029-89F6-934EB793CA76}"/>
+                <a16:creationId xmlns="" xmlns:a16="http://schemas.microsoft.com/office/drawing/2014/main" id="{58CD1136-8D51-C029-89F6-934EB793CA76}"/>
               </a:ext>
             </a:extLst>
           </p:cNvPr>
@@ -34084,7 +34148,7 @@
           <p:cNvPr id="29" name="Oval 28">
             <a:extLst>
               <a:ext uri="{FF2B5EF4-FFF2-40B4-BE49-F238E27FC236}">
-                <a16:creationId xmlns:a16="http://schemas.microsoft.com/office/drawing/2014/main" xmlns="" id="{50E918C1-C147-CDF9-9A0B-C41B1B1BDC16}"/>
+                <a16:creationId xmlns="" xmlns:a16="http://schemas.microsoft.com/office/drawing/2014/main" id="{50E918C1-C147-CDF9-9A0B-C41B1B1BDC16}"/>
               </a:ext>
             </a:extLst>
           </p:cNvPr>
@@ -34143,7 +34207,7 @@
           <p:cNvPr id="3" name="Group 2">
             <a:extLst>
               <a:ext uri="{FF2B5EF4-FFF2-40B4-BE49-F238E27FC236}">
-                <a16:creationId xmlns:a16="http://schemas.microsoft.com/office/drawing/2014/main" xmlns="" id="{928405A0-4A61-8733-B126-4D81DAAC8909}"/>
+                <a16:creationId xmlns="" xmlns:a16="http://schemas.microsoft.com/office/drawing/2014/main" id="{928405A0-4A61-8733-B126-4D81DAAC8909}"/>
               </a:ext>
             </a:extLst>
           </p:cNvPr>
@@ -34163,7 +34227,7 @@
             <p:cNvPr id="2" name="Oval 1">
               <a:extLst>
                 <a:ext uri="{FF2B5EF4-FFF2-40B4-BE49-F238E27FC236}">
-                  <a16:creationId xmlns:a16="http://schemas.microsoft.com/office/drawing/2014/main" xmlns="" id="{13AFC585-BA57-5F31-158D-6005C04FEA8F}"/>
+                  <a16:creationId xmlns="" xmlns:a16="http://schemas.microsoft.com/office/drawing/2014/main" id="{13AFC585-BA57-5F31-158D-6005C04FEA8F}"/>
                 </a:ext>
               </a:extLst>
             </p:cNvPr>
@@ -34222,7 +34286,7 @@
             <p:cNvPr id="30" name="Arc 29">
               <a:extLst>
                 <a:ext uri="{FF2B5EF4-FFF2-40B4-BE49-F238E27FC236}">
-                  <a16:creationId xmlns:a16="http://schemas.microsoft.com/office/drawing/2014/main" xmlns="" id="{6ABDBE3E-C36D-8AB3-7845-745EE50517F1}"/>
+                  <a16:creationId xmlns="" xmlns:a16="http://schemas.microsoft.com/office/drawing/2014/main" id="{6ABDBE3E-C36D-8AB3-7845-745EE50517F1}"/>
                 </a:ext>
               </a:extLst>
             </p:cNvPr>
@@ -34275,7 +34339,7 @@
           <p:cNvPr id="54" name="Group 53">
             <a:extLst>
               <a:ext uri="{FF2B5EF4-FFF2-40B4-BE49-F238E27FC236}">
-                <a16:creationId xmlns:a16="http://schemas.microsoft.com/office/drawing/2014/main" xmlns="" id="{BE4556B3-F34C-FF2C-77C6-6D471C09D64C}"/>
+                <a16:creationId xmlns="" xmlns:a16="http://schemas.microsoft.com/office/drawing/2014/main" id="{BE4556B3-F34C-FF2C-77C6-6D471C09D64C}"/>
               </a:ext>
             </a:extLst>
           </p:cNvPr>
@@ -34295,7 +34359,7 @@
             <p:cNvPr id="55" name="Oval 54">
               <a:extLst>
                 <a:ext uri="{FF2B5EF4-FFF2-40B4-BE49-F238E27FC236}">
-                  <a16:creationId xmlns:a16="http://schemas.microsoft.com/office/drawing/2014/main" xmlns="" id="{328F7FC3-44ED-BDFD-31EC-54198BE5A58F}"/>
+                  <a16:creationId xmlns="" xmlns:a16="http://schemas.microsoft.com/office/drawing/2014/main" id="{328F7FC3-44ED-BDFD-31EC-54198BE5A58F}"/>
                 </a:ext>
               </a:extLst>
             </p:cNvPr>
@@ -34354,7 +34418,7 @@
             <p:cNvPr id="56" name="Arc 55">
               <a:extLst>
                 <a:ext uri="{FF2B5EF4-FFF2-40B4-BE49-F238E27FC236}">
-                  <a16:creationId xmlns:a16="http://schemas.microsoft.com/office/drawing/2014/main" xmlns="" id="{691957E7-B542-3D6C-AA1A-4C3661572B27}"/>
+                  <a16:creationId xmlns="" xmlns:a16="http://schemas.microsoft.com/office/drawing/2014/main" id="{691957E7-B542-3D6C-AA1A-4C3661572B27}"/>
                 </a:ext>
               </a:extLst>
             </p:cNvPr>
@@ -34407,7 +34471,7 @@
           <p:cNvPr id="57" name="Group 56">
             <a:extLst>
               <a:ext uri="{FF2B5EF4-FFF2-40B4-BE49-F238E27FC236}">
-                <a16:creationId xmlns:a16="http://schemas.microsoft.com/office/drawing/2014/main" xmlns="" id="{34942098-76A7-B3A3-5DB3-D8162AD3F68D}"/>
+                <a16:creationId xmlns="" xmlns:a16="http://schemas.microsoft.com/office/drawing/2014/main" id="{34942098-76A7-B3A3-5DB3-D8162AD3F68D}"/>
               </a:ext>
             </a:extLst>
           </p:cNvPr>
@@ -34427,7 +34491,7 @@
             <p:cNvPr id="58" name="Oval 57">
               <a:extLst>
                 <a:ext uri="{FF2B5EF4-FFF2-40B4-BE49-F238E27FC236}">
-                  <a16:creationId xmlns:a16="http://schemas.microsoft.com/office/drawing/2014/main" xmlns="" id="{ADA0F6B4-0FE9-8946-CD31-44C147BDFAA2}"/>
+                  <a16:creationId xmlns="" xmlns:a16="http://schemas.microsoft.com/office/drawing/2014/main" id="{ADA0F6B4-0FE9-8946-CD31-44C147BDFAA2}"/>
                 </a:ext>
               </a:extLst>
             </p:cNvPr>
@@ -34486,7 +34550,7 @@
             <p:cNvPr id="59" name="Arc 58">
               <a:extLst>
                 <a:ext uri="{FF2B5EF4-FFF2-40B4-BE49-F238E27FC236}">
-                  <a16:creationId xmlns:a16="http://schemas.microsoft.com/office/drawing/2014/main" xmlns="" id="{E209963C-964F-F2C3-6448-EDCC319111CF}"/>
+                  <a16:creationId xmlns="" xmlns:a16="http://schemas.microsoft.com/office/drawing/2014/main" id="{E209963C-964F-F2C3-6448-EDCC319111CF}"/>
                 </a:ext>
               </a:extLst>
             </p:cNvPr>
@@ -34539,7 +34603,7 @@
           <p:cNvPr id="60" name="Group 59">
             <a:extLst>
               <a:ext uri="{FF2B5EF4-FFF2-40B4-BE49-F238E27FC236}">
-                <a16:creationId xmlns:a16="http://schemas.microsoft.com/office/drawing/2014/main" xmlns="" id="{92FBB5C7-CE3A-82A2-B96C-D00957855705}"/>
+                <a16:creationId xmlns="" xmlns:a16="http://schemas.microsoft.com/office/drawing/2014/main" id="{92FBB5C7-CE3A-82A2-B96C-D00957855705}"/>
               </a:ext>
             </a:extLst>
           </p:cNvPr>
@@ -34559,7 +34623,7 @@
             <p:cNvPr id="61" name="Oval 60">
               <a:extLst>
                 <a:ext uri="{FF2B5EF4-FFF2-40B4-BE49-F238E27FC236}">
-                  <a16:creationId xmlns:a16="http://schemas.microsoft.com/office/drawing/2014/main" xmlns="" id="{C2090BBD-0FD7-73D4-768D-B3EACE879018}"/>
+                  <a16:creationId xmlns="" xmlns:a16="http://schemas.microsoft.com/office/drawing/2014/main" id="{C2090BBD-0FD7-73D4-768D-B3EACE879018}"/>
                 </a:ext>
               </a:extLst>
             </p:cNvPr>
@@ -34618,7 +34682,7 @@
             <p:cNvPr id="62" name="Arc 61">
               <a:extLst>
                 <a:ext uri="{FF2B5EF4-FFF2-40B4-BE49-F238E27FC236}">
-                  <a16:creationId xmlns:a16="http://schemas.microsoft.com/office/drawing/2014/main" xmlns="" id="{49BBA01A-FD23-189D-7879-A24960489055}"/>
+                  <a16:creationId xmlns="" xmlns:a16="http://schemas.microsoft.com/office/drawing/2014/main" id="{49BBA01A-FD23-189D-7879-A24960489055}"/>
                 </a:ext>
               </a:extLst>
             </p:cNvPr>
@@ -34671,7 +34735,7 @@
           <p:cNvPr id="63" name="Group 62">
             <a:extLst>
               <a:ext uri="{FF2B5EF4-FFF2-40B4-BE49-F238E27FC236}">
-                <a16:creationId xmlns:a16="http://schemas.microsoft.com/office/drawing/2014/main" xmlns="" id="{F1BBA567-B812-1158-B0D9-8585557A065F}"/>
+                <a16:creationId xmlns="" xmlns:a16="http://schemas.microsoft.com/office/drawing/2014/main" id="{F1BBA567-B812-1158-B0D9-8585557A065F}"/>
               </a:ext>
             </a:extLst>
           </p:cNvPr>
@@ -34691,7 +34755,7 @@
             <p:cNvPr id="64" name="Oval 63">
               <a:extLst>
                 <a:ext uri="{FF2B5EF4-FFF2-40B4-BE49-F238E27FC236}">
-                  <a16:creationId xmlns:a16="http://schemas.microsoft.com/office/drawing/2014/main" xmlns="" id="{69954438-FCF4-7EDB-B481-3A5CD3540B92}"/>
+                  <a16:creationId xmlns="" xmlns:a16="http://schemas.microsoft.com/office/drawing/2014/main" id="{69954438-FCF4-7EDB-B481-3A5CD3540B92}"/>
                 </a:ext>
               </a:extLst>
             </p:cNvPr>
@@ -34750,7 +34814,7 @@
             <p:cNvPr id="65" name="Arc 64">
               <a:extLst>
                 <a:ext uri="{FF2B5EF4-FFF2-40B4-BE49-F238E27FC236}">
-                  <a16:creationId xmlns:a16="http://schemas.microsoft.com/office/drawing/2014/main" xmlns="" id="{0539A26F-8931-1226-DADD-F1FA6E3A46CA}"/>
+                  <a16:creationId xmlns="" xmlns:a16="http://schemas.microsoft.com/office/drawing/2014/main" id="{0539A26F-8931-1226-DADD-F1FA6E3A46CA}"/>
                 </a:ext>
               </a:extLst>
             </p:cNvPr>
@@ -34803,7 +34867,7 @@
           <p:cNvPr id="66" name="Group 65">
             <a:extLst>
               <a:ext uri="{FF2B5EF4-FFF2-40B4-BE49-F238E27FC236}">
-                <a16:creationId xmlns:a16="http://schemas.microsoft.com/office/drawing/2014/main" xmlns="" id="{C5CA0963-798D-1A46-720B-8E62281FCB2B}"/>
+                <a16:creationId xmlns="" xmlns:a16="http://schemas.microsoft.com/office/drawing/2014/main" id="{C5CA0963-798D-1A46-720B-8E62281FCB2B}"/>
               </a:ext>
             </a:extLst>
           </p:cNvPr>
@@ -34823,7 +34887,7 @@
             <p:cNvPr id="67" name="Oval 66">
               <a:extLst>
                 <a:ext uri="{FF2B5EF4-FFF2-40B4-BE49-F238E27FC236}">
-                  <a16:creationId xmlns:a16="http://schemas.microsoft.com/office/drawing/2014/main" xmlns="" id="{238F6E5E-CA7D-90C5-F3DE-CEA092075098}"/>
+                  <a16:creationId xmlns="" xmlns:a16="http://schemas.microsoft.com/office/drawing/2014/main" id="{238F6E5E-CA7D-90C5-F3DE-CEA092075098}"/>
                 </a:ext>
               </a:extLst>
             </p:cNvPr>
@@ -34882,7 +34946,7 @@
             <p:cNvPr id="68" name="Arc 67">
               <a:extLst>
                 <a:ext uri="{FF2B5EF4-FFF2-40B4-BE49-F238E27FC236}">
-                  <a16:creationId xmlns:a16="http://schemas.microsoft.com/office/drawing/2014/main" xmlns="" id="{4EDC6FAD-D9B6-F4CE-7409-08C269011CC8}"/>
+                  <a16:creationId xmlns="" xmlns:a16="http://schemas.microsoft.com/office/drawing/2014/main" id="{4EDC6FAD-D9B6-F4CE-7409-08C269011CC8}"/>
                 </a:ext>
               </a:extLst>
             </p:cNvPr>
@@ -34935,7 +34999,7 @@
           <p:cNvPr id="69" name="Group 68">
             <a:extLst>
               <a:ext uri="{FF2B5EF4-FFF2-40B4-BE49-F238E27FC236}">
-                <a16:creationId xmlns:a16="http://schemas.microsoft.com/office/drawing/2014/main" xmlns="" id="{97D732E3-F499-0C3F-BE88-8A3C727562BA}"/>
+                <a16:creationId xmlns="" xmlns:a16="http://schemas.microsoft.com/office/drawing/2014/main" id="{97D732E3-F499-0C3F-BE88-8A3C727562BA}"/>
               </a:ext>
             </a:extLst>
           </p:cNvPr>
@@ -34955,7 +35019,7 @@
             <p:cNvPr id="70" name="Oval 69">
               <a:extLst>
                 <a:ext uri="{FF2B5EF4-FFF2-40B4-BE49-F238E27FC236}">
-                  <a16:creationId xmlns:a16="http://schemas.microsoft.com/office/drawing/2014/main" xmlns="" id="{1BB77D40-207D-28FD-CBB8-13B1251FBCE3}"/>
+                  <a16:creationId xmlns="" xmlns:a16="http://schemas.microsoft.com/office/drawing/2014/main" id="{1BB77D40-207D-28FD-CBB8-13B1251FBCE3}"/>
                 </a:ext>
               </a:extLst>
             </p:cNvPr>
@@ -35014,7 +35078,7 @@
             <p:cNvPr id="71" name="Arc 70">
               <a:extLst>
                 <a:ext uri="{FF2B5EF4-FFF2-40B4-BE49-F238E27FC236}">
-                  <a16:creationId xmlns:a16="http://schemas.microsoft.com/office/drawing/2014/main" xmlns="" id="{98CED01A-8366-93D8-2562-CDF27F4E5646}"/>
+                  <a16:creationId xmlns="" xmlns:a16="http://schemas.microsoft.com/office/drawing/2014/main" id="{98CED01A-8366-93D8-2562-CDF27F4E5646}"/>
                 </a:ext>
               </a:extLst>
             </p:cNvPr>
@@ -35067,7 +35131,7 @@
           <p:cNvPr id="72" name="Group 71">
             <a:extLst>
               <a:ext uri="{FF2B5EF4-FFF2-40B4-BE49-F238E27FC236}">
-                <a16:creationId xmlns:a16="http://schemas.microsoft.com/office/drawing/2014/main" xmlns="" id="{8ACD396F-9CBB-E28A-C3C7-9FFF82E7D986}"/>
+                <a16:creationId xmlns="" xmlns:a16="http://schemas.microsoft.com/office/drawing/2014/main" id="{8ACD396F-9CBB-E28A-C3C7-9FFF82E7D986}"/>
               </a:ext>
             </a:extLst>
           </p:cNvPr>
@@ -35087,7 +35151,7 @@
             <p:cNvPr id="73" name="Oval 72">
               <a:extLst>
                 <a:ext uri="{FF2B5EF4-FFF2-40B4-BE49-F238E27FC236}">
-                  <a16:creationId xmlns:a16="http://schemas.microsoft.com/office/drawing/2014/main" xmlns="" id="{79F5ABF2-6AF6-5851-71FF-385EC3216731}"/>
+                  <a16:creationId xmlns="" xmlns:a16="http://schemas.microsoft.com/office/drawing/2014/main" id="{79F5ABF2-6AF6-5851-71FF-385EC3216731}"/>
                 </a:ext>
               </a:extLst>
             </p:cNvPr>
@@ -35146,7 +35210,7 @@
             <p:cNvPr id="74" name="Arc 73">
               <a:extLst>
                 <a:ext uri="{FF2B5EF4-FFF2-40B4-BE49-F238E27FC236}">
-                  <a16:creationId xmlns:a16="http://schemas.microsoft.com/office/drawing/2014/main" xmlns="" id="{59B2770C-AEBD-5B7B-0CAD-D69C9BFB0200}"/>
+                  <a16:creationId xmlns="" xmlns:a16="http://schemas.microsoft.com/office/drawing/2014/main" id="{59B2770C-AEBD-5B7B-0CAD-D69C9BFB0200}"/>
                 </a:ext>
               </a:extLst>
             </p:cNvPr>
@@ -35199,7 +35263,7 @@
           <p:cNvPr id="75" name="Group 74">
             <a:extLst>
               <a:ext uri="{FF2B5EF4-FFF2-40B4-BE49-F238E27FC236}">
-                <a16:creationId xmlns:a16="http://schemas.microsoft.com/office/drawing/2014/main" xmlns="" id="{8E67EC40-2CEA-15BB-679E-82A155506382}"/>
+                <a16:creationId xmlns="" xmlns:a16="http://schemas.microsoft.com/office/drawing/2014/main" id="{8E67EC40-2CEA-15BB-679E-82A155506382}"/>
               </a:ext>
             </a:extLst>
           </p:cNvPr>
@@ -35219,7 +35283,7 @@
             <p:cNvPr id="76" name="Oval 75">
               <a:extLst>
                 <a:ext uri="{FF2B5EF4-FFF2-40B4-BE49-F238E27FC236}">
-                  <a16:creationId xmlns:a16="http://schemas.microsoft.com/office/drawing/2014/main" xmlns="" id="{BEE67072-39B0-0D8C-3764-DF739D4EF898}"/>
+                  <a16:creationId xmlns="" xmlns:a16="http://schemas.microsoft.com/office/drawing/2014/main" id="{BEE67072-39B0-0D8C-3764-DF739D4EF898}"/>
                 </a:ext>
               </a:extLst>
             </p:cNvPr>
@@ -35278,7 +35342,7 @@
             <p:cNvPr id="77" name="Arc 76">
               <a:extLst>
                 <a:ext uri="{FF2B5EF4-FFF2-40B4-BE49-F238E27FC236}">
-                  <a16:creationId xmlns:a16="http://schemas.microsoft.com/office/drawing/2014/main" xmlns="" id="{1036E0E8-91A2-459D-62BA-7E55B36EA4A3}"/>
+                  <a16:creationId xmlns="" xmlns:a16="http://schemas.microsoft.com/office/drawing/2014/main" id="{1036E0E8-91A2-459D-62BA-7E55B36EA4A3}"/>
                 </a:ext>
               </a:extLst>
             </p:cNvPr>
@@ -35331,7 +35395,7 @@
           <p:cNvPr id="78" name="Group 77">
             <a:extLst>
               <a:ext uri="{FF2B5EF4-FFF2-40B4-BE49-F238E27FC236}">
-                <a16:creationId xmlns:a16="http://schemas.microsoft.com/office/drawing/2014/main" xmlns="" id="{E7A8FC93-89F4-B3FF-B2A0-EB92EE14302F}"/>
+                <a16:creationId xmlns="" xmlns:a16="http://schemas.microsoft.com/office/drawing/2014/main" id="{E7A8FC93-89F4-B3FF-B2A0-EB92EE14302F}"/>
               </a:ext>
             </a:extLst>
           </p:cNvPr>
@@ -35351,7 +35415,7 @@
             <p:cNvPr id="79" name="Oval 78">
               <a:extLst>
                 <a:ext uri="{FF2B5EF4-FFF2-40B4-BE49-F238E27FC236}">
-                  <a16:creationId xmlns:a16="http://schemas.microsoft.com/office/drawing/2014/main" xmlns="" id="{0B288602-214C-9797-F12B-433D63A94C97}"/>
+                  <a16:creationId xmlns="" xmlns:a16="http://schemas.microsoft.com/office/drawing/2014/main" id="{0B288602-214C-9797-F12B-433D63A94C97}"/>
                 </a:ext>
               </a:extLst>
             </p:cNvPr>
@@ -35410,7 +35474,7 @@
             <p:cNvPr id="80" name="Arc 79">
               <a:extLst>
                 <a:ext uri="{FF2B5EF4-FFF2-40B4-BE49-F238E27FC236}">
-                  <a16:creationId xmlns:a16="http://schemas.microsoft.com/office/drawing/2014/main" xmlns="" id="{B2237529-DFC9-A1B7-9CFA-D339940826FC}"/>
+                  <a16:creationId xmlns="" xmlns:a16="http://schemas.microsoft.com/office/drawing/2014/main" id="{B2237529-DFC9-A1B7-9CFA-D339940826FC}"/>
                 </a:ext>
               </a:extLst>
             </p:cNvPr>
@@ -35463,7 +35527,7 @@
           <p:cNvPr id="81" name="Group 80">
             <a:extLst>
               <a:ext uri="{FF2B5EF4-FFF2-40B4-BE49-F238E27FC236}">
-                <a16:creationId xmlns:a16="http://schemas.microsoft.com/office/drawing/2014/main" xmlns="" id="{56E08E4B-3F15-3DA7-6141-7E97655DD396}"/>
+                <a16:creationId xmlns="" xmlns:a16="http://schemas.microsoft.com/office/drawing/2014/main" id="{56E08E4B-3F15-3DA7-6141-7E97655DD396}"/>
               </a:ext>
             </a:extLst>
           </p:cNvPr>
@@ -35483,7 +35547,7 @@
             <p:cNvPr id="82" name="Oval 81">
               <a:extLst>
                 <a:ext uri="{FF2B5EF4-FFF2-40B4-BE49-F238E27FC236}">
-                  <a16:creationId xmlns:a16="http://schemas.microsoft.com/office/drawing/2014/main" xmlns="" id="{BF631934-7110-7F5E-79A0-378CB41A08C9}"/>
+                  <a16:creationId xmlns="" xmlns:a16="http://schemas.microsoft.com/office/drawing/2014/main" id="{BF631934-7110-7F5E-79A0-378CB41A08C9}"/>
                 </a:ext>
               </a:extLst>
             </p:cNvPr>
@@ -35542,7 +35606,7 @@
             <p:cNvPr id="83" name="Arc 82">
               <a:extLst>
                 <a:ext uri="{FF2B5EF4-FFF2-40B4-BE49-F238E27FC236}">
-                  <a16:creationId xmlns:a16="http://schemas.microsoft.com/office/drawing/2014/main" xmlns="" id="{0439DB39-7B53-36D4-BDF5-71DB13657FDC}"/>
+                  <a16:creationId xmlns="" xmlns:a16="http://schemas.microsoft.com/office/drawing/2014/main" id="{0439DB39-7B53-36D4-BDF5-71DB13657FDC}"/>
                 </a:ext>
               </a:extLst>
             </p:cNvPr>
@@ -35595,7 +35659,7 @@
           <p:cNvPr id="84" name="Group 83">
             <a:extLst>
               <a:ext uri="{FF2B5EF4-FFF2-40B4-BE49-F238E27FC236}">
-                <a16:creationId xmlns:a16="http://schemas.microsoft.com/office/drawing/2014/main" xmlns="" id="{BD99BE67-16D7-6B0C-6E7E-F8B4B7BD2317}"/>
+                <a16:creationId xmlns="" xmlns:a16="http://schemas.microsoft.com/office/drawing/2014/main" id="{BD99BE67-16D7-6B0C-6E7E-F8B4B7BD2317}"/>
               </a:ext>
             </a:extLst>
           </p:cNvPr>
@@ -35615,7 +35679,7 @@
             <p:cNvPr id="85" name="Oval 84">
               <a:extLst>
                 <a:ext uri="{FF2B5EF4-FFF2-40B4-BE49-F238E27FC236}">
-                  <a16:creationId xmlns:a16="http://schemas.microsoft.com/office/drawing/2014/main" xmlns="" id="{370A9636-2147-18A8-A452-5C474F2755F9}"/>
+                  <a16:creationId xmlns="" xmlns:a16="http://schemas.microsoft.com/office/drawing/2014/main" id="{370A9636-2147-18A8-A452-5C474F2755F9}"/>
                 </a:ext>
               </a:extLst>
             </p:cNvPr>
@@ -35674,7 +35738,7 @@
             <p:cNvPr id="86" name="Arc 85">
               <a:extLst>
                 <a:ext uri="{FF2B5EF4-FFF2-40B4-BE49-F238E27FC236}">
-                  <a16:creationId xmlns:a16="http://schemas.microsoft.com/office/drawing/2014/main" xmlns="" id="{CF37D023-EFBC-7B83-E01F-14E578B5E41F}"/>
+                  <a16:creationId xmlns="" xmlns:a16="http://schemas.microsoft.com/office/drawing/2014/main" id="{CF37D023-EFBC-7B83-E01F-14E578B5E41F}"/>
                 </a:ext>
               </a:extLst>
             </p:cNvPr>
@@ -35727,7 +35791,7 @@
           <p:cNvPr id="87" name="Group 86">
             <a:extLst>
               <a:ext uri="{FF2B5EF4-FFF2-40B4-BE49-F238E27FC236}">
-                <a16:creationId xmlns:a16="http://schemas.microsoft.com/office/drawing/2014/main" xmlns="" id="{18D76EDD-67EC-1706-7541-E0B361B9EE01}"/>
+                <a16:creationId xmlns="" xmlns:a16="http://schemas.microsoft.com/office/drawing/2014/main" id="{18D76EDD-67EC-1706-7541-E0B361B9EE01}"/>
               </a:ext>
             </a:extLst>
           </p:cNvPr>
@@ -35747,7 +35811,7 @@
             <p:cNvPr id="88" name="Oval 87">
               <a:extLst>
                 <a:ext uri="{FF2B5EF4-FFF2-40B4-BE49-F238E27FC236}">
-                  <a16:creationId xmlns:a16="http://schemas.microsoft.com/office/drawing/2014/main" xmlns="" id="{EBF7F9D4-4385-3396-B1F8-92B45C3EE234}"/>
+                  <a16:creationId xmlns="" xmlns:a16="http://schemas.microsoft.com/office/drawing/2014/main" id="{EBF7F9D4-4385-3396-B1F8-92B45C3EE234}"/>
                 </a:ext>
               </a:extLst>
             </p:cNvPr>
@@ -35806,7 +35870,7 @@
             <p:cNvPr id="89" name="Arc 88">
               <a:extLst>
                 <a:ext uri="{FF2B5EF4-FFF2-40B4-BE49-F238E27FC236}">
-                  <a16:creationId xmlns:a16="http://schemas.microsoft.com/office/drawing/2014/main" xmlns="" id="{344DEE6C-BE03-A502-C8EB-06880E1AFF7F}"/>
+                  <a16:creationId xmlns="" xmlns:a16="http://schemas.microsoft.com/office/drawing/2014/main" id="{344DEE6C-BE03-A502-C8EB-06880E1AFF7F}"/>
                 </a:ext>
               </a:extLst>
             </p:cNvPr>
@@ -35859,7 +35923,7 @@
           <p:cNvPr id="90" name="Group 89">
             <a:extLst>
               <a:ext uri="{FF2B5EF4-FFF2-40B4-BE49-F238E27FC236}">
-                <a16:creationId xmlns:a16="http://schemas.microsoft.com/office/drawing/2014/main" xmlns="" id="{805A620C-3AE2-255F-D0AD-7BCE318B0261}"/>
+                <a16:creationId xmlns="" xmlns:a16="http://schemas.microsoft.com/office/drawing/2014/main" id="{805A620C-3AE2-255F-D0AD-7BCE318B0261}"/>
               </a:ext>
             </a:extLst>
           </p:cNvPr>
@@ -35879,7 +35943,7 @@
             <p:cNvPr id="91" name="Oval 90">
               <a:extLst>
                 <a:ext uri="{FF2B5EF4-FFF2-40B4-BE49-F238E27FC236}">
-                  <a16:creationId xmlns:a16="http://schemas.microsoft.com/office/drawing/2014/main" xmlns="" id="{C8C812B5-07D8-854F-C972-D8CEBC6A35B4}"/>
+                  <a16:creationId xmlns="" xmlns:a16="http://schemas.microsoft.com/office/drawing/2014/main" id="{C8C812B5-07D8-854F-C972-D8CEBC6A35B4}"/>
                 </a:ext>
               </a:extLst>
             </p:cNvPr>
@@ -35938,7 +36002,7 @@
             <p:cNvPr id="92" name="Arc 91">
               <a:extLst>
                 <a:ext uri="{FF2B5EF4-FFF2-40B4-BE49-F238E27FC236}">
-                  <a16:creationId xmlns:a16="http://schemas.microsoft.com/office/drawing/2014/main" xmlns="" id="{79FA0149-4CB8-9929-0B85-1B9620713172}"/>
+                  <a16:creationId xmlns="" xmlns:a16="http://schemas.microsoft.com/office/drawing/2014/main" id="{79FA0149-4CB8-9929-0B85-1B9620713172}"/>
                 </a:ext>
               </a:extLst>
             </p:cNvPr>
@@ -35991,7 +36055,7 @@
           <p:cNvPr id="93" name="Group 92">
             <a:extLst>
               <a:ext uri="{FF2B5EF4-FFF2-40B4-BE49-F238E27FC236}">
-                <a16:creationId xmlns:a16="http://schemas.microsoft.com/office/drawing/2014/main" xmlns="" id="{D34F9994-C5E0-AE09-44C0-C5B87FCCE5CA}"/>
+                <a16:creationId xmlns="" xmlns:a16="http://schemas.microsoft.com/office/drawing/2014/main" id="{D34F9994-C5E0-AE09-44C0-C5B87FCCE5CA}"/>
               </a:ext>
             </a:extLst>
           </p:cNvPr>
@@ -36011,7 +36075,7 @@
             <p:cNvPr id="94" name="Oval 93">
               <a:extLst>
                 <a:ext uri="{FF2B5EF4-FFF2-40B4-BE49-F238E27FC236}">
-                  <a16:creationId xmlns:a16="http://schemas.microsoft.com/office/drawing/2014/main" xmlns="" id="{2AC773AF-0EEA-4375-E025-35F8FC5364E9}"/>
+                  <a16:creationId xmlns="" xmlns:a16="http://schemas.microsoft.com/office/drawing/2014/main" id="{2AC773AF-0EEA-4375-E025-35F8FC5364E9}"/>
                 </a:ext>
               </a:extLst>
             </p:cNvPr>
@@ -36070,7 +36134,7 @@
             <p:cNvPr id="95" name="Arc 94">
               <a:extLst>
                 <a:ext uri="{FF2B5EF4-FFF2-40B4-BE49-F238E27FC236}">
-                  <a16:creationId xmlns:a16="http://schemas.microsoft.com/office/drawing/2014/main" xmlns="" id="{90DDEFBB-F1E4-9858-B6D5-3FDB2B182EF9}"/>
+                  <a16:creationId xmlns="" xmlns:a16="http://schemas.microsoft.com/office/drawing/2014/main" id="{90DDEFBB-F1E4-9858-B6D5-3FDB2B182EF9}"/>
                 </a:ext>
               </a:extLst>
             </p:cNvPr>
@@ -36123,7 +36187,7 @@
           <p:cNvPr id="96" name="Group 95">
             <a:extLst>
               <a:ext uri="{FF2B5EF4-FFF2-40B4-BE49-F238E27FC236}">
-                <a16:creationId xmlns:a16="http://schemas.microsoft.com/office/drawing/2014/main" xmlns="" id="{A7DFD59F-9ACF-DA37-BC73-AADA05F8CD55}"/>
+                <a16:creationId xmlns="" xmlns:a16="http://schemas.microsoft.com/office/drawing/2014/main" id="{A7DFD59F-9ACF-DA37-BC73-AADA05F8CD55}"/>
               </a:ext>
             </a:extLst>
           </p:cNvPr>
@@ -36143,7 +36207,7 @@
             <p:cNvPr id="97" name="Oval 96">
               <a:extLst>
                 <a:ext uri="{FF2B5EF4-FFF2-40B4-BE49-F238E27FC236}">
-                  <a16:creationId xmlns:a16="http://schemas.microsoft.com/office/drawing/2014/main" xmlns="" id="{34E0A8AD-4A63-9662-8252-B6566776A0DB}"/>
+                  <a16:creationId xmlns="" xmlns:a16="http://schemas.microsoft.com/office/drawing/2014/main" id="{34E0A8AD-4A63-9662-8252-B6566776A0DB}"/>
                 </a:ext>
               </a:extLst>
             </p:cNvPr>
@@ -36202,7 +36266,7 @@
             <p:cNvPr id="98" name="Arc 97">
               <a:extLst>
                 <a:ext uri="{FF2B5EF4-FFF2-40B4-BE49-F238E27FC236}">
-                  <a16:creationId xmlns:a16="http://schemas.microsoft.com/office/drawing/2014/main" xmlns="" id="{A5AF0D9F-7BD7-E7BD-EF60-38F8DB6A7173}"/>
+                  <a16:creationId xmlns="" xmlns:a16="http://schemas.microsoft.com/office/drawing/2014/main" id="{A5AF0D9F-7BD7-E7BD-EF60-38F8DB6A7173}"/>
                 </a:ext>
               </a:extLst>
             </p:cNvPr>
@@ -36255,7 +36319,7 @@
           <p:cNvPr id="99" name="Group 98">
             <a:extLst>
               <a:ext uri="{FF2B5EF4-FFF2-40B4-BE49-F238E27FC236}">
-                <a16:creationId xmlns:a16="http://schemas.microsoft.com/office/drawing/2014/main" xmlns="" id="{B86504F5-14F5-005B-98B8-877CBD2DBAEC}"/>
+                <a16:creationId xmlns="" xmlns:a16="http://schemas.microsoft.com/office/drawing/2014/main" id="{B86504F5-14F5-005B-98B8-877CBD2DBAEC}"/>
               </a:ext>
             </a:extLst>
           </p:cNvPr>
@@ -36275,7 +36339,7 @@
             <p:cNvPr id="100" name="Oval 99">
               <a:extLst>
                 <a:ext uri="{FF2B5EF4-FFF2-40B4-BE49-F238E27FC236}">
-                  <a16:creationId xmlns:a16="http://schemas.microsoft.com/office/drawing/2014/main" xmlns="" id="{77BEE814-D0CC-0B71-56A8-38FC233ADBBC}"/>
+                  <a16:creationId xmlns="" xmlns:a16="http://schemas.microsoft.com/office/drawing/2014/main" id="{77BEE814-D0CC-0B71-56A8-38FC233ADBBC}"/>
                 </a:ext>
               </a:extLst>
             </p:cNvPr>
@@ -36334,7 +36398,7 @@
             <p:cNvPr id="101" name="Arc 100">
               <a:extLst>
                 <a:ext uri="{FF2B5EF4-FFF2-40B4-BE49-F238E27FC236}">
-                  <a16:creationId xmlns:a16="http://schemas.microsoft.com/office/drawing/2014/main" xmlns="" id="{E12B4309-6ECF-2A90-BE18-92E7B6D9F45C}"/>
+                  <a16:creationId xmlns="" xmlns:a16="http://schemas.microsoft.com/office/drawing/2014/main" id="{E12B4309-6ECF-2A90-BE18-92E7B6D9F45C}"/>
                 </a:ext>
               </a:extLst>
             </p:cNvPr>
@@ -36387,7 +36451,7 @@
           <p:cNvPr id="102" name="Group 101">
             <a:extLst>
               <a:ext uri="{FF2B5EF4-FFF2-40B4-BE49-F238E27FC236}">
-                <a16:creationId xmlns:a16="http://schemas.microsoft.com/office/drawing/2014/main" xmlns="" id="{B34C10F9-48AB-376A-971B-5E609292667E}"/>
+                <a16:creationId xmlns="" xmlns:a16="http://schemas.microsoft.com/office/drawing/2014/main" id="{B34C10F9-48AB-376A-971B-5E609292667E}"/>
               </a:ext>
             </a:extLst>
           </p:cNvPr>
@@ -36407,7 +36471,7 @@
             <p:cNvPr id="103" name="Oval 102">
               <a:extLst>
                 <a:ext uri="{FF2B5EF4-FFF2-40B4-BE49-F238E27FC236}">
-                  <a16:creationId xmlns:a16="http://schemas.microsoft.com/office/drawing/2014/main" xmlns="" id="{B13C8D1E-9E03-3B03-EB62-C5D86340BF1D}"/>
+                  <a16:creationId xmlns="" xmlns:a16="http://schemas.microsoft.com/office/drawing/2014/main" id="{B13C8D1E-9E03-3B03-EB62-C5D86340BF1D}"/>
                 </a:ext>
               </a:extLst>
             </p:cNvPr>
@@ -36466,7 +36530,7 @@
             <p:cNvPr id="104" name="Arc 103">
               <a:extLst>
                 <a:ext uri="{FF2B5EF4-FFF2-40B4-BE49-F238E27FC236}">
-                  <a16:creationId xmlns:a16="http://schemas.microsoft.com/office/drawing/2014/main" xmlns="" id="{FACF3DF3-03AF-3180-E1E4-55391011F79F}"/>
+                  <a16:creationId xmlns="" xmlns:a16="http://schemas.microsoft.com/office/drawing/2014/main" id="{FACF3DF3-03AF-3180-E1E4-55391011F79F}"/>
                 </a:ext>
               </a:extLst>
             </p:cNvPr>
@@ -36519,7 +36583,7 @@
           <p:cNvPr id="105" name="Group 104">
             <a:extLst>
               <a:ext uri="{FF2B5EF4-FFF2-40B4-BE49-F238E27FC236}">
-                <a16:creationId xmlns:a16="http://schemas.microsoft.com/office/drawing/2014/main" xmlns="" id="{ADC277D0-0547-3E1F-7B17-763C14F2C569}"/>
+                <a16:creationId xmlns="" xmlns:a16="http://schemas.microsoft.com/office/drawing/2014/main" id="{ADC277D0-0547-3E1F-7B17-763C14F2C569}"/>
               </a:ext>
             </a:extLst>
           </p:cNvPr>
@@ -36539,7 +36603,7 @@
             <p:cNvPr id="106" name="Oval 105">
               <a:extLst>
                 <a:ext uri="{FF2B5EF4-FFF2-40B4-BE49-F238E27FC236}">
-                  <a16:creationId xmlns:a16="http://schemas.microsoft.com/office/drawing/2014/main" xmlns="" id="{444E641A-F426-E972-E682-0AD4058F2F5F}"/>
+                  <a16:creationId xmlns="" xmlns:a16="http://schemas.microsoft.com/office/drawing/2014/main" id="{444E641A-F426-E972-E682-0AD4058F2F5F}"/>
                 </a:ext>
               </a:extLst>
             </p:cNvPr>
@@ -36598,7 +36662,7 @@
             <p:cNvPr id="107" name="Arc 106">
               <a:extLst>
                 <a:ext uri="{FF2B5EF4-FFF2-40B4-BE49-F238E27FC236}">
-                  <a16:creationId xmlns:a16="http://schemas.microsoft.com/office/drawing/2014/main" xmlns="" id="{000E6A81-D707-E36C-5DAD-68F6D1F68CE3}"/>
+                  <a16:creationId xmlns="" xmlns:a16="http://schemas.microsoft.com/office/drawing/2014/main" id="{000E6A81-D707-E36C-5DAD-68F6D1F68CE3}"/>
                 </a:ext>
               </a:extLst>
             </p:cNvPr>
@@ -36651,7 +36715,7 @@
           <p:cNvPr id="108" name="Group 107">
             <a:extLst>
               <a:ext uri="{FF2B5EF4-FFF2-40B4-BE49-F238E27FC236}">
-                <a16:creationId xmlns:a16="http://schemas.microsoft.com/office/drawing/2014/main" xmlns="" id="{31EA107D-77C3-196B-39BD-015BCFD6D3C2}"/>
+                <a16:creationId xmlns="" xmlns:a16="http://schemas.microsoft.com/office/drawing/2014/main" id="{31EA107D-77C3-196B-39BD-015BCFD6D3C2}"/>
               </a:ext>
             </a:extLst>
           </p:cNvPr>
@@ -36671,7 +36735,7 @@
             <p:cNvPr id="109" name="Oval 108">
               <a:extLst>
                 <a:ext uri="{FF2B5EF4-FFF2-40B4-BE49-F238E27FC236}">
-                  <a16:creationId xmlns:a16="http://schemas.microsoft.com/office/drawing/2014/main" xmlns="" id="{61FDFC2B-B300-35FB-0617-5D1C7ADF6641}"/>
+                  <a16:creationId xmlns="" xmlns:a16="http://schemas.microsoft.com/office/drawing/2014/main" id="{61FDFC2B-B300-35FB-0617-5D1C7ADF6641}"/>
                 </a:ext>
               </a:extLst>
             </p:cNvPr>
@@ -36730,7 +36794,7 @@
             <p:cNvPr id="110" name="Arc 109">
               <a:extLst>
                 <a:ext uri="{FF2B5EF4-FFF2-40B4-BE49-F238E27FC236}">
-                  <a16:creationId xmlns:a16="http://schemas.microsoft.com/office/drawing/2014/main" xmlns="" id="{CF6B487C-012F-56E5-E8E3-8B137298EDFA}"/>
+                  <a16:creationId xmlns="" xmlns:a16="http://schemas.microsoft.com/office/drawing/2014/main" id="{CF6B487C-012F-56E5-E8E3-8B137298EDFA}"/>
                 </a:ext>
               </a:extLst>
             </p:cNvPr>
@@ -36783,7 +36847,7 @@
           <p:cNvPr id="111" name="Group 110">
             <a:extLst>
               <a:ext uri="{FF2B5EF4-FFF2-40B4-BE49-F238E27FC236}">
-                <a16:creationId xmlns:a16="http://schemas.microsoft.com/office/drawing/2014/main" xmlns="" id="{6232043B-C4C4-BA0A-CF1A-4DBBB75AAC73}"/>
+                <a16:creationId xmlns="" xmlns:a16="http://schemas.microsoft.com/office/drawing/2014/main" id="{6232043B-C4C4-BA0A-CF1A-4DBBB75AAC73}"/>
               </a:ext>
             </a:extLst>
           </p:cNvPr>
@@ -36803,7 +36867,7 @@
             <p:cNvPr id="112" name="Oval 111">
               <a:extLst>
                 <a:ext uri="{FF2B5EF4-FFF2-40B4-BE49-F238E27FC236}">
-                  <a16:creationId xmlns:a16="http://schemas.microsoft.com/office/drawing/2014/main" xmlns="" id="{10FFE23E-6CCE-0432-75E0-E824C7863261}"/>
+                  <a16:creationId xmlns="" xmlns:a16="http://schemas.microsoft.com/office/drawing/2014/main" id="{10FFE23E-6CCE-0432-75E0-E824C7863261}"/>
                 </a:ext>
               </a:extLst>
             </p:cNvPr>
@@ -36862,7 +36926,7 @@
             <p:cNvPr id="113" name="Arc 112">
               <a:extLst>
                 <a:ext uri="{FF2B5EF4-FFF2-40B4-BE49-F238E27FC236}">
-                  <a16:creationId xmlns:a16="http://schemas.microsoft.com/office/drawing/2014/main" xmlns="" id="{98676D6A-3424-61E8-2CCE-756447D5F9C2}"/>
+                  <a16:creationId xmlns="" xmlns:a16="http://schemas.microsoft.com/office/drawing/2014/main" id="{98676D6A-3424-61E8-2CCE-756447D5F9C2}"/>
                 </a:ext>
               </a:extLst>
             </p:cNvPr>
@@ -36915,7 +36979,7 @@
           <p:cNvPr id="114" name="Group 113">
             <a:extLst>
               <a:ext uri="{FF2B5EF4-FFF2-40B4-BE49-F238E27FC236}">
-                <a16:creationId xmlns:a16="http://schemas.microsoft.com/office/drawing/2014/main" xmlns="" id="{88B3BE82-3395-0E01-8219-A5E3310F3959}"/>
+                <a16:creationId xmlns="" xmlns:a16="http://schemas.microsoft.com/office/drawing/2014/main" id="{88B3BE82-3395-0E01-8219-A5E3310F3959}"/>
               </a:ext>
             </a:extLst>
           </p:cNvPr>
@@ -36935,7 +36999,7 @@
             <p:cNvPr id="115" name="Oval 114">
               <a:extLst>
                 <a:ext uri="{FF2B5EF4-FFF2-40B4-BE49-F238E27FC236}">
-                  <a16:creationId xmlns:a16="http://schemas.microsoft.com/office/drawing/2014/main" xmlns="" id="{F83317C8-5B5D-DDF7-15F4-EA2AFB9BC950}"/>
+                  <a16:creationId xmlns="" xmlns:a16="http://schemas.microsoft.com/office/drawing/2014/main" id="{F83317C8-5B5D-DDF7-15F4-EA2AFB9BC950}"/>
                 </a:ext>
               </a:extLst>
             </p:cNvPr>
@@ -36994,7 +37058,7 @@
             <p:cNvPr id="116" name="Arc 115">
               <a:extLst>
                 <a:ext uri="{FF2B5EF4-FFF2-40B4-BE49-F238E27FC236}">
-                  <a16:creationId xmlns:a16="http://schemas.microsoft.com/office/drawing/2014/main" xmlns="" id="{E746B903-C206-EA9A-5FAE-24360FA19AD9}"/>
+                  <a16:creationId xmlns="" xmlns:a16="http://schemas.microsoft.com/office/drawing/2014/main" id="{E746B903-C206-EA9A-5FAE-24360FA19AD9}"/>
                 </a:ext>
               </a:extLst>
             </p:cNvPr>
@@ -37047,7 +37111,7 @@
           <p:cNvPr id="117" name="Group 116">
             <a:extLst>
               <a:ext uri="{FF2B5EF4-FFF2-40B4-BE49-F238E27FC236}">
-                <a16:creationId xmlns:a16="http://schemas.microsoft.com/office/drawing/2014/main" xmlns="" id="{2F2A7235-4D60-4C1C-AC1C-8026C6BB4059}"/>
+                <a16:creationId xmlns="" xmlns:a16="http://schemas.microsoft.com/office/drawing/2014/main" id="{2F2A7235-4D60-4C1C-AC1C-8026C6BB4059}"/>
               </a:ext>
             </a:extLst>
           </p:cNvPr>
@@ -37067,7 +37131,7 @@
             <p:cNvPr id="118" name="Oval 117">
               <a:extLst>
                 <a:ext uri="{FF2B5EF4-FFF2-40B4-BE49-F238E27FC236}">
-                  <a16:creationId xmlns:a16="http://schemas.microsoft.com/office/drawing/2014/main" xmlns="" id="{0F886985-AC53-0516-F85D-DDC1946AD17E}"/>
+                  <a16:creationId xmlns="" xmlns:a16="http://schemas.microsoft.com/office/drawing/2014/main" id="{0F886985-AC53-0516-F85D-DDC1946AD17E}"/>
                 </a:ext>
               </a:extLst>
             </p:cNvPr>
@@ -37126,7 +37190,7 @@
             <p:cNvPr id="119" name="Arc 118">
               <a:extLst>
                 <a:ext uri="{FF2B5EF4-FFF2-40B4-BE49-F238E27FC236}">
-                  <a16:creationId xmlns:a16="http://schemas.microsoft.com/office/drawing/2014/main" xmlns="" id="{AE4C9755-2A3A-5A32-D276-52C0A9B4F8D6}"/>
+                  <a16:creationId xmlns="" xmlns:a16="http://schemas.microsoft.com/office/drawing/2014/main" id="{AE4C9755-2A3A-5A32-D276-52C0A9B4F8D6}"/>
                 </a:ext>
               </a:extLst>
             </p:cNvPr>
@@ -37179,7 +37243,7 @@
           <p:cNvPr id="120" name="Group 119">
             <a:extLst>
               <a:ext uri="{FF2B5EF4-FFF2-40B4-BE49-F238E27FC236}">
-                <a16:creationId xmlns:a16="http://schemas.microsoft.com/office/drawing/2014/main" xmlns="" id="{7877DB57-685B-C785-7692-7E30EB8C61F3}"/>
+                <a16:creationId xmlns="" xmlns:a16="http://schemas.microsoft.com/office/drawing/2014/main" id="{7877DB57-685B-C785-7692-7E30EB8C61F3}"/>
               </a:ext>
             </a:extLst>
           </p:cNvPr>
@@ -37199,7 +37263,7 @@
             <p:cNvPr id="121" name="Oval 120">
               <a:extLst>
                 <a:ext uri="{FF2B5EF4-FFF2-40B4-BE49-F238E27FC236}">
-                  <a16:creationId xmlns:a16="http://schemas.microsoft.com/office/drawing/2014/main" xmlns="" id="{22F39CC0-1318-0DB9-44C8-44ED898DF450}"/>
+                  <a16:creationId xmlns="" xmlns:a16="http://schemas.microsoft.com/office/drawing/2014/main" id="{22F39CC0-1318-0DB9-44C8-44ED898DF450}"/>
                 </a:ext>
               </a:extLst>
             </p:cNvPr>
@@ -37258,7 +37322,7 @@
             <p:cNvPr id="122" name="Arc 121">
               <a:extLst>
                 <a:ext uri="{FF2B5EF4-FFF2-40B4-BE49-F238E27FC236}">
-                  <a16:creationId xmlns:a16="http://schemas.microsoft.com/office/drawing/2014/main" xmlns="" id="{E74E2D2F-36CC-9C47-07C8-1F7BA70CE9FF}"/>
+                  <a16:creationId xmlns="" xmlns:a16="http://schemas.microsoft.com/office/drawing/2014/main" id="{E74E2D2F-36CC-9C47-07C8-1F7BA70CE9FF}"/>
                 </a:ext>
               </a:extLst>
             </p:cNvPr>
@@ -37311,7 +37375,7 @@
           <p:cNvPr id="123" name="Rectangle 122">
             <a:extLst>
               <a:ext uri="{FF2B5EF4-FFF2-40B4-BE49-F238E27FC236}">
-                <a16:creationId xmlns:a16="http://schemas.microsoft.com/office/drawing/2014/main" xmlns="" id="{044E7409-6BE4-82BF-6739-FB981D21C254}"/>
+                <a16:creationId xmlns="" xmlns:a16="http://schemas.microsoft.com/office/drawing/2014/main" id="{044E7409-6BE4-82BF-6739-FB981D21C254}"/>
               </a:ext>
             </a:extLst>
           </p:cNvPr>
@@ -37587,7 +37651,7 @@
         <p:cNvPr id="1" name="">
           <a:extLst>
             <a:ext uri="{FF2B5EF4-FFF2-40B4-BE49-F238E27FC236}">
-              <a16:creationId xmlns:a16="http://schemas.microsoft.com/office/drawing/2014/main" xmlns="" id="{290D15F8-E0C1-A9FC-561D-1134701B922D}"/>
+              <a16:creationId xmlns="" xmlns:a16="http://schemas.microsoft.com/office/drawing/2014/main" id="{290D15F8-E0C1-A9FC-561D-1134701B922D}"/>
             </a:ext>
           </a:extLst>
         </p:cNvPr>
@@ -37607,7 +37671,7 @@
           <p:cNvPr id="5" name="Rectangle 4">
             <a:extLst>
               <a:ext uri="{FF2B5EF4-FFF2-40B4-BE49-F238E27FC236}">
-                <a16:creationId xmlns:a16="http://schemas.microsoft.com/office/drawing/2014/main" xmlns="" id="{D6ED7662-31D2-B220-5B48-999751314250}"/>
+                <a16:creationId xmlns="" xmlns:a16="http://schemas.microsoft.com/office/drawing/2014/main" id="{D6ED7662-31D2-B220-5B48-999751314250}"/>
               </a:ext>
             </a:extLst>
           </p:cNvPr>
@@ -37653,7 +37717,7 @@
           <p:cNvPr id="2" name="Group 1">
             <a:extLst>
               <a:ext uri="{FF2B5EF4-FFF2-40B4-BE49-F238E27FC236}">
-                <a16:creationId xmlns:a16="http://schemas.microsoft.com/office/drawing/2014/main" xmlns="" id="{4E18E2CC-0F07-DEF3-A92C-D7E66BD60D31}"/>
+                <a16:creationId xmlns="" xmlns:a16="http://schemas.microsoft.com/office/drawing/2014/main" id="{4E18E2CC-0F07-DEF3-A92C-D7E66BD60D31}"/>
               </a:ext>
             </a:extLst>
           </p:cNvPr>
@@ -37673,7 +37737,7 @@
             <p:cNvPr id="6" name="Oval 5">
               <a:extLst>
                 <a:ext uri="{FF2B5EF4-FFF2-40B4-BE49-F238E27FC236}">
-                  <a16:creationId xmlns:a16="http://schemas.microsoft.com/office/drawing/2014/main" xmlns="" id="{A3105853-A7A0-D1B0-E804-E16F8719EB22}"/>
+                  <a16:creationId xmlns="" xmlns:a16="http://schemas.microsoft.com/office/drawing/2014/main" id="{A3105853-A7A0-D1B0-E804-E16F8719EB22}"/>
                 </a:ext>
               </a:extLst>
             </p:cNvPr>
@@ -37732,7 +37796,7 @@
             <p:cNvPr id="7" name="Oval 6">
               <a:extLst>
                 <a:ext uri="{FF2B5EF4-FFF2-40B4-BE49-F238E27FC236}">
-                  <a16:creationId xmlns:a16="http://schemas.microsoft.com/office/drawing/2014/main" xmlns="" id="{C85BCD91-BEA1-D315-1AFF-C4D462340658}"/>
+                  <a16:creationId xmlns="" xmlns:a16="http://schemas.microsoft.com/office/drawing/2014/main" id="{C85BCD91-BEA1-D315-1AFF-C4D462340658}"/>
                 </a:ext>
               </a:extLst>
             </p:cNvPr>
@@ -37791,7 +37855,7 @@
             <p:cNvPr id="8" name="Oval 7">
               <a:extLst>
                 <a:ext uri="{FF2B5EF4-FFF2-40B4-BE49-F238E27FC236}">
-                  <a16:creationId xmlns:a16="http://schemas.microsoft.com/office/drawing/2014/main" xmlns="" id="{3C78C853-57D8-361B-38D9-275171E255A7}"/>
+                  <a16:creationId xmlns="" xmlns:a16="http://schemas.microsoft.com/office/drawing/2014/main" id="{3C78C853-57D8-361B-38D9-275171E255A7}"/>
                 </a:ext>
               </a:extLst>
             </p:cNvPr>
@@ -37850,7 +37914,7 @@
             <p:cNvPr id="9" name="Oval 8">
               <a:extLst>
                 <a:ext uri="{FF2B5EF4-FFF2-40B4-BE49-F238E27FC236}">
-                  <a16:creationId xmlns:a16="http://schemas.microsoft.com/office/drawing/2014/main" xmlns="" id="{A7006BEF-5985-2947-A8DB-080FCA0DB0AE}"/>
+                  <a16:creationId xmlns="" xmlns:a16="http://schemas.microsoft.com/office/drawing/2014/main" id="{A7006BEF-5985-2947-A8DB-080FCA0DB0AE}"/>
                 </a:ext>
               </a:extLst>
             </p:cNvPr>
@@ -37909,7 +37973,7 @@
             <p:cNvPr id="10" name="Oval 9">
               <a:extLst>
                 <a:ext uri="{FF2B5EF4-FFF2-40B4-BE49-F238E27FC236}">
-                  <a16:creationId xmlns:a16="http://schemas.microsoft.com/office/drawing/2014/main" xmlns="" id="{A9D7F9AC-6700-182B-5739-F8E9C7F81CC4}"/>
+                  <a16:creationId xmlns="" xmlns:a16="http://schemas.microsoft.com/office/drawing/2014/main" id="{A9D7F9AC-6700-182B-5739-F8E9C7F81CC4}"/>
                 </a:ext>
               </a:extLst>
             </p:cNvPr>
@@ -37968,7 +38032,7 @@
             <p:cNvPr id="11" name="Oval 10">
               <a:extLst>
                 <a:ext uri="{FF2B5EF4-FFF2-40B4-BE49-F238E27FC236}">
-                  <a16:creationId xmlns:a16="http://schemas.microsoft.com/office/drawing/2014/main" xmlns="" id="{756DB894-78D6-5F8A-E04B-F5EF82585336}"/>
+                  <a16:creationId xmlns="" xmlns:a16="http://schemas.microsoft.com/office/drawing/2014/main" id="{756DB894-78D6-5F8A-E04B-F5EF82585336}"/>
                 </a:ext>
               </a:extLst>
             </p:cNvPr>
@@ -38027,7 +38091,7 @@
             <p:cNvPr id="12" name="Oval 11">
               <a:extLst>
                 <a:ext uri="{FF2B5EF4-FFF2-40B4-BE49-F238E27FC236}">
-                  <a16:creationId xmlns:a16="http://schemas.microsoft.com/office/drawing/2014/main" xmlns="" id="{7078A844-2503-2387-47F4-3ABDC822E4BE}"/>
+                  <a16:creationId xmlns="" xmlns:a16="http://schemas.microsoft.com/office/drawing/2014/main" id="{7078A844-2503-2387-47F4-3ABDC822E4BE}"/>
                 </a:ext>
               </a:extLst>
             </p:cNvPr>
@@ -38086,7 +38150,7 @@
             <p:cNvPr id="13" name="Oval 12">
               <a:extLst>
                 <a:ext uri="{FF2B5EF4-FFF2-40B4-BE49-F238E27FC236}">
-                  <a16:creationId xmlns:a16="http://schemas.microsoft.com/office/drawing/2014/main" xmlns="" id="{01BA2AF2-E499-7667-6D1F-F78683E54B67}"/>
+                  <a16:creationId xmlns="" xmlns:a16="http://schemas.microsoft.com/office/drawing/2014/main" id="{01BA2AF2-E499-7667-6D1F-F78683E54B67}"/>
                 </a:ext>
               </a:extLst>
             </p:cNvPr>
@@ -38145,7 +38209,7 @@
             <p:cNvPr id="14" name="Oval 13">
               <a:extLst>
                 <a:ext uri="{FF2B5EF4-FFF2-40B4-BE49-F238E27FC236}">
-                  <a16:creationId xmlns:a16="http://schemas.microsoft.com/office/drawing/2014/main" xmlns="" id="{2FBB071C-C6AD-063C-8885-C5D44BA0770C}"/>
+                  <a16:creationId xmlns="" xmlns:a16="http://schemas.microsoft.com/office/drawing/2014/main" id="{2FBB071C-C6AD-063C-8885-C5D44BA0770C}"/>
                 </a:ext>
               </a:extLst>
             </p:cNvPr>
@@ -38204,7 +38268,7 @@
             <p:cNvPr id="15" name="Oval 14">
               <a:extLst>
                 <a:ext uri="{FF2B5EF4-FFF2-40B4-BE49-F238E27FC236}">
-                  <a16:creationId xmlns:a16="http://schemas.microsoft.com/office/drawing/2014/main" xmlns="" id="{56BC981B-25F1-97FD-5B02-F34A079C043F}"/>
+                  <a16:creationId xmlns="" xmlns:a16="http://schemas.microsoft.com/office/drawing/2014/main" id="{56BC981B-25F1-97FD-5B02-F34A079C043F}"/>
                 </a:ext>
               </a:extLst>
             </p:cNvPr>
@@ -38263,7 +38327,7 @@
             <p:cNvPr id="16" name="Oval 15">
               <a:extLst>
                 <a:ext uri="{FF2B5EF4-FFF2-40B4-BE49-F238E27FC236}">
-                  <a16:creationId xmlns:a16="http://schemas.microsoft.com/office/drawing/2014/main" xmlns="" id="{3E6612EF-8361-2771-846F-0C7FAD70E44A}"/>
+                  <a16:creationId xmlns="" xmlns:a16="http://schemas.microsoft.com/office/drawing/2014/main" id="{3E6612EF-8361-2771-846F-0C7FAD70E44A}"/>
                 </a:ext>
               </a:extLst>
             </p:cNvPr>
@@ -38322,7 +38386,7 @@
             <p:cNvPr id="17" name="Oval 16">
               <a:extLst>
                 <a:ext uri="{FF2B5EF4-FFF2-40B4-BE49-F238E27FC236}">
-                  <a16:creationId xmlns:a16="http://schemas.microsoft.com/office/drawing/2014/main" xmlns="" id="{A9C403DC-8592-C8C7-18E9-C66B5ABFE571}"/>
+                  <a16:creationId xmlns="" xmlns:a16="http://schemas.microsoft.com/office/drawing/2014/main" id="{A9C403DC-8592-C8C7-18E9-C66B5ABFE571}"/>
                 </a:ext>
               </a:extLst>
             </p:cNvPr>
@@ -38381,7 +38445,7 @@
             <p:cNvPr id="18" name="Oval 17">
               <a:extLst>
                 <a:ext uri="{FF2B5EF4-FFF2-40B4-BE49-F238E27FC236}">
-                  <a16:creationId xmlns:a16="http://schemas.microsoft.com/office/drawing/2014/main" xmlns="" id="{D9C5ADF1-1839-8686-C4D8-5AB2D63997B1}"/>
+                  <a16:creationId xmlns="" xmlns:a16="http://schemas.microsoft.com/office/drawing/2014/main" id="{D9C5ADF1-1839-8686-C4D8-5AB2D63997B1}"/>
                 </a:ext>
               </a:extLst>
             </p:cNvPr>
@@ -38440,7 +38504,7 @@
             <p:cNvPr id="19" name="Oval 18">
               <a:extLst>
                 <a:ext uri="{FF2B5EF4-FFF2-40B4-BE49-F238E27FC236}">
-                  <a16:creationId xmlns:a16="http://schemas.microsoft.com/office/drawing/2014/main" xmlns="" id="{09801E70-EE29-216B-576A-53F7D3FC63B0}"/>
+                  <a16:creationId xmlns="" xmlns:a16="http://schemas.microsoft.com/office/drawing/2014/main" id="{09801E70-EE29-216B-576A-53F7D3FC63B0}"/>
                 </a:ext>
               </a:extLst>
             </p:cNvPr>
@@ -38499,7 +38563,7 @@
             <p:cNvPr id="20" name="Oval 19">
               <a:extLst>
                 <a:ext uri="{FF2B5EF4-FFF2-40B4-BE49-F238E27FC236}">
-                  <a16:creationId xmlns:a16="http://schemas.microsoft.com/office/drawing/2014/main" xmlns="" id="{94F6199F-FA28-EB1B-E382-874057A159DE}"/>
+                  <a16:creationId xmlns="" xmlns:a16="http://schemas.microsoft.com/office/drawing/2014/main" id="{94F6199F-FA28-EB1B-E382-874057A159DE}"/>
                 </a:ext>
               </a:extLst>
             </p:cNvPr>
@@ -38558,7 +38622,7 @@
             <p:cNvPr id="21" name="Oval 20">
               <a:extLst>
                 <a:ext uri="{FF2B5EF4-FFF2-40B4-BE49-F238E27FC236}">
-                  <a16:creationId xmlns:a16="http://schemas.microsoft.com/office/drawing/2014/main" xmlns="" id="{BAFFEE12-F7A8-D2C2-85AF-7B2739B85367}"/>
+                  <a16:creationId xmlns="" xmlns:a16="http://schemas.microsoft.com/office/drawing/2014/main" id="{BAFFEE12-F7A8-D2C2-85AF-7B2739B85367}"/>
                 </a:ext>
               </a:extLst>
             </p:cNvPr>
@@ -38617,7 +38681,7 @@
             <p:cNvPr id="22" name="Oval 21">
               <a:extLst>
                 <a:ext uri="{FF2B5EF4-FFF2-40B4-BE49-F238E27FC236}">
-                  <a16:creationId xmlns:a16="http://schemas.microsoft.com/office/drawing/2014/main" xmlns="" id="{C7E8D64B-98DA-CC30-DD2E-6787D99885FA}"/>
+                  <a16:creationId xmlns="" xmlns:a16="http://schemas.microsoft.com/office/drawing/2014/main" id="{C7E8D64B-98DA-CC30-DD2E-6787D99885FA}"/>
                 </a:ext>
               </a:extLst>
             </p:cNvPr>
@@ -38676,7 +38740,7 @@
             <p:cNvPr id="23" name="Oval 22">
               <a:extLst>
                 <a:ext uri="{FF2B5EF4-FFF2-40B4-BE49-F238E27FC236}">
-                  <a16:creationId xmlns:a16="http://schemas.microsoft.com/office/drawing/2014/main" xmlns="" id="{D34C8711-929B-29BF-23CC-6D755EFE2AFD}"/>
+                  <a16:creationId xmlns="" xmlns:a16="http://schemas.microsoft.com/office/drawing/2014/main" id="{D34C8711-929B-29BF-23CC-6D755EFE2AFD}"/>
                 </a:ext>
               </a:extLst>
             </p:cNvPr>
@@ -38735,7 +38799,7 @@
             <p:cNvPr id="24" name="Oval 23">
               <a:extLst>
                 <a:ext uri="{FF2B5EF4-FFF2-40B4-BE49-F238E27FC236}">
-                  <a16:creationId xmlns:a16="http://schemas.microsoft.com/office/drawing/2014/main" xmlns="" id="{566E8BB7-DB45-8379-D052-A1D73E4AC287}"/>
+                  <a16:creationId xmlns="" xmlns:a16="http://schemas.microsoft.com/office/drawing/2014/main" id="{566E8BB7-DB45-8379-D052-A1D73E4AC287}"/>
                 </a:ext>
               </a:extLst>
             </p:cNvPr>
@@ -38794,7 +38858,7 @@
             <p:cNvPr id="25" name="Oval 24">
               <a:extLst>
                 <a:ext uri="{FF2B5EF4-FFF2-40B4-BE49-F238E27FC236}">
-                  <a16:creationId xmlns:a16="http://schemas.microsoft.com/office/drawing/2014/main" xmlns="" id="{895F11AF-FD1D-66D6-E360-4F5BB2D5F76C}"/>
+                  <a16:creationId xmlns="" xmlns:a16="http://schemas.microsoft.com/office/drawing/2014/main" id="{895F11AF-FD1D-66D6-E360-4F5BB2D5F76C}"/>
                 </a:ext>
               </a:extLst>
             </p:cNvPr>
@@ -38853,7 +38917,7 @@
             <p:cNvPr id="26" name="Oval 25">
               <a:extLst>
                 <a:ext uri="{FF2B5EF4-FFF2-40B4-BE49-F238E27FC236}">
-                  <a16:creationId xmlns:a16="http://schemas.microsoft.com/office/drawing/2014/main" xmlns="" id="{5F26DBF0-A21B-C476-70B1-5055594023B4}"/>
+                  <a16:creationId xmlns="" xmlns:a16="http://schemas.microsoft.com/office/drawing/2014/main" id="{5F26DBF0-A21B-C476-70B1-5055594023B4}"/>
                 </a:ext>
               </a:extLst>
             </p:cNvPr>
@@ -38912,7 +38976,7 @@
             <p:cNvPr id="27" name="Oval 26">
               <a:extLst>
                 <a:ext uri="{FF2B5EF4-FFF2-40B4-BE49-F238E27FC236}">
-                  <a16:creationId xmlns:a16="http://schemas.microsoft.com/office/drawing/2014/main" xmlns="" id="{6AA146A5-4396-52D4-3701-1D4F499B7916}"/>
+                  <a16:creationId xmlns="" xmlns:a16="http://schemas.microsoft.com/office/drawing/2014/main" id="{6AA146A5-4396-52D4-3701-1D4F499B7916}"/>
                 </a:ext>
               </a:extLst>
             </p:cNvPr>
@@ -38971,7 +39035,7 @@
             <p:cNvPr id="28" name="Oval 27">
               <a:extLst>
                 <a:ext uri="{FF2B5EF4-FFF2-40B4-BE49-F238E27FC236}">
-                  <a16:creationId xmlns:a16="http://schemas.microsoft.com/office/drawing/2014/main" xmlns="" id="{55BDF6F5-CC01-4786-7FDD-D37775375C2C}"/>
+                  <a16:creationId xmlns="" xmlns:a16="http://schemas.microsoft.com/office/drawing/2014/main" id="{55BDF6F5-CC01-4786-7FDD-D37775375C2C}"/>
                 </a:ext>
               </a:extLst>
             </p:cNvPr>
@@ -39030,7 +39094,7 @@
             <p:cNvPr id="29" name="Oval 28">
               <a:extLst>
                 <a:ext uri="{FF2B5EF4-FFF2-40B4-BE49-F238E27FC236}">
-                  <a16:creationId xmlns:a16="http://schemas.microsoft.com/office/drawing/2014/main" xmlns="" id="{82342B15-C314-6A76-53A3-31168D242757}"/>
+                  <a16:creationId xmlns="" xmlns:a16="http://schemas.microsoft.com/office/drawing/2014/main" id="{82342B15-C314-6A76-53A3-31168D242757}"/>
                 </a:ext>
               </a:extLst>
             </p:cNvPr>
@@ -39089,7 +39153,7 @@
             <p:cNvPr id="30" name="Arc 29">
               <a:extLst>
                 <a:ext uri="{FF2B5EF4-FFF2-40B4-BE49-F238E27FC236}">
-                  <a16:creationId xmlns:a16="http://schemas.microsoft.com/office/drawing/2014/main" xmlns="" id="{9C568D2A-A596-CC24-496F-4A66C8262D31}"/>
+                  <a16:creationId xmlns="" xmlns:a16="http://schemas.microsoft.com/office/drawing/2014/main" id="{9C568D2A-A596-CC24-496F-4A66C8262D31}"/>
                 </a:ext>
               </a:extLst>
             </p:cNvPr>
@@ -39141,7 +39205,7 @@
             <p:cNvPr id="31" name="Arc 30">
               <a:extLst>
                 <a:ext uri="{FF2B5EF4-FFF2-40B4-BE49-F238E27FC236}">
-                  <a16:creationId xmlns:a16="http://schemas.microsoft.com/office/drawing/2014/main" xmlns="" id="{5C88D0D8-45C4-B401-23E2-EF2210F10573}"/>
+                  <a16:creationId xmlns="" xmlns:a16="http://schemas.microsoft.com/office/drawing/2014/main" id="{5C88D0D8-45C4-B401-23E2-EF2210F10573}"/>
                 </a:ext>
               </a:extLst>
             </p:cNvPr>
@@ -39193,7 +39257,7 @@
             <p:cNvPr id="32" name="Arc 31">
               <a:extLst>
                 <a:ext uri="{FF2B5EF4-FFF2-40B4-BE49-F238E27FC236}">
-                  <a16:creationId xmlns:a16="http://schemas.microsoft.com/office/drawing/2014/main" xmlns="" id="{864FC80B-C2D4-ABC3-BF5F-9E62C6D20F68}"/>
+                  <a16:creationId xmlns="" xmlns:a16="http://schemas.microsoft.com/office/drawing/2014/main" id="{864FC80B-C2D4-ABC3-BF5F-9E62C6D20F68}"/>
                 </a:ext>
               </a:extLst>
             </p:cNvPr>
@@ -39245,7 +39309,7 @@
             <p:cNvPr id="33" name="Arc 32">
               <a:extLst>
                 <a:ext uri="{FF2B5EF4-FFF2-40B4-BE49-F238E27FC236}">
-                  <a16:creationId xmlns:a16="http://schemas.microsoft.com/office/drawing/2014/main" xmlns="" id="{1914AAE3-A686-E4D4-CDDF-1D98969ACAAA}"/>
+                  <a16:creationId xmlns="" xmlns:a16="http://schemas.microsoft.com/office/drawing/2014/main" id="{1914AAE3-A686-E4D4-CDDF-1D98969ACAAA}"/>
                 </a:ext>
               </a:extLst>
             </p:cNvPr>
@@ -39297,7 +39361,7 @@
             <p:cNvPr id="34" name="Arc 33">
               <a:extLst>
                 <a:ext uri="{FF2B5EF4-FFF2-40B4-BE49-F238E27FC236}">
-                  <a16:creationId xmlns:a16="http://schemas.microsoft.com/office/drawing/2014/main" xmlns="" id="{D9DBFC40-9D17-7A92-4D81-40778C988A6C}"/>
+                  <a16:creationId xmlns="" xmlns:a16="http://schemas.microsoft.com/office/drawing/2014/main" id="{D9DBFC40-9D17-7A92-4D81-40778C988A6C}"/>
                 </a:ext>
               </a:extLst>
             </p:cNvPr>
@@ -39349,7 +39413,7 @@
             <p:cNvPr id="35" name="Arc 34">
               <a:extLst>
                 <a:ext uri="{FF2B5EF4-FFF2-40B4-BE49-F238E27FC236}">
-                  <a16:creationId xmlns:a16="http://schemas.microsoft.com/office/drawing/2014/main" xmlns="" id="{BC549333-843D-6579-C8FD-740B2BD4FB54}"/>
+                  <a16:creationId xmlns="" xmlns:a16="http://schemas.microsoft.com/office/drawing/2014/main" id="{BC549333-843D-6579-C8FD-740B2BD4FB54}"/>
                 </a:ext>
               </a:extLst>
             </p:cNvPr>
@@ -39401,7 +39465,7 @@
             <p:cNvPr id="36" name="Arc 35">
               <a:extLst>
                 <a:ext uri="{FF2B5EF4-FFF2-40B4-BE49-F238E27FC236}">
-                  <a16:creationId xmlns:a16="http://schemas.microsoft.com/office/drawing/2014/main" xmlns="" id="{71974448-2876-D9EC-1E63-37B1C8F13A84}"/>
+                  <a16:creationId xmlns="" xmlns:a16="http://schemas.microsoft.com/office/drawing/2014/main" id="{71974448-2876-D9EC-1E63-37B1C8F13A84}"/>
                 </a:ext>
               </a:extLst>
             </p:cNvPr>
@@ -39453,7 +39517,7 @@
             <p:cNvPr id="37" name="Arc 36">
               <a:extLst>
                 <a:ext uri="{FF2B5EF4-FFF2-40B4-BE49-F238E27FC236}">
-                  <a16:creationId xmlns:a16="http://schemas.microsoft.com/office/drawing/2014/main" xmlns="" id="{12C0B9A3-C41B-A65E-B90A-3DE1AE851F4B}"/>
+                  <a16:creationId xmlns="" xmlns:a16="http://schemas.microsoft.com/office/drawing/2014/main" id="{12C0B9A3-C41B-A65E-B90A-3DE1AE851F4B}"/>
                 </a:ext>
               </a:extLst>
             </p:cNvPr>
@@ -39505,7 +39569,7 @@
             <p:cNvPr id="38" name="Arc 37">
               <a:extLst>
                 <a:ext uri="{FF2B5EF4-FFF2-40B4-BE49-F238E27FC236}">
-                  <a16:creationId xmlns:a16="http://schemas.microsoft.com/office/drawing/2014/main" xmlns="" id="{F8D516B0-E272-52CC-E83D-F9D301FBD0D7}"/>
+                  <a16:creationId xmlns="" xmlns:a16="http://schemas.microsoft.com/office/drawing/2014/main" id="{F8D516B0-E272-52CC-E83D-F9D301FBD0D7}"/>
                 </a:ext>
               </a:extLst>
             </p:cNvPr>
@@ -39557,7 +39621,7 @@
             <p:cNvPr id="39" name="Arc 38">
               <a:extLst>
                 <a:ext uri="{FF2B5EF4-FFF2-40B4-BE49-F238E27FC236}">
-                  <a16:creationId xmlns:a16="http://schemas.microsoft.com/office/drawing/2014/main" xmlns="" id="{8BBA4DBE-F78F-D804-278F-611DE55A528F}"/>
+                  <a16:creationId xmlns="" xmlns:a16="http://schemas.microsoft.com/office/drawing/2014/main" id="{8BBA4DBE-F78F-D804-278F-611DE55A528F}"/>
                 </a:ext>
               </a:extLst>
             </p:cNvPr>
@@ -39609,7 +39673,7 @@
             <p:cNvPr id="40" name="Arc 39">
               <a:extLst>
                 <a:ext uri="{FF2B5EF4-FFF2-40B4-BE49-F238E27FC236}">
-                  <a16:creationId xmlns:a16="http://schemas.microsoft.com/office/drawing/2014/main" xmlns="" id="{900146BF-7F3B-F5F9-0AC4-B6547DFA418E}"/>
+                  <a16:creationId xmlns="" xmlns:a16="http://schemas.microsoft.com/office/drawing/2014/main" id="{900146BF-7F3B-F5F9-0AC4-B6547DFA418E}"/>
                 </a:ext>
               </a:extLst>
             </p:cNvPr>
@@ -39661,7 +39725,7 @@
             <p:cNvPr id="41" name="Arc 40">
               <a:extLst>
                 <a:ext uri="{FF2B5EF4-FFF2-40B4-BE49-F238E27FC236}">
-                  <a16:creationId xmlns:a16="http://schemas.microsoft.com/office/drawing/2014/main" xmlns="" id="{95D7AD24-E3F8-564B-E3AF-6ED99BD7EE4E}"/>
+                  <a16:creationId xmlns="" xmlns:a16="http://schemas.microsoft.com/office/drawing/2014/main" id="{95D7AD24-E3F8-564B-E3AF-6ED99BD7EE4E}"/>
                 </a:ext>
               </a:extLst>
             </p:cNvPr>
@@ -39713,7 +39777,7 @@
             <p:cNvPr id="42" name="Arc 41">
               <a:extLst>
                 <a:ext uri="{FF2B5EF4-FFF2-40B4-BE49-F238E27FC236}">
-                  <a16:creationId xmlns:a16="http://schemas.microsoft.com/office/drawing/2014/main" xmlns="" id="{7EFAD2B0-51AB-1AD0-A7DA-DDE4B9410EDD}"/>
+                  <a16:creationId xmlns="" xmlns:a16="http://schemas.microsoft.com/office/drawing/2014/main" id="{7EFAD2B0-51AB-1AD0-A7DA-DDE4B9410EDD}"/>
                 </a:ext>
               </a:extLst>
             </p:cNvPr>
@@ -39765,7 +39829,7 @@
             <p:cNvPr id="43" name="Arc 42">
               <a:extLst>
                 <a:ext uri="{FF2B5EF4-FFF2-40B4-BE49-F238E27FC236}">
-                  <a16:creationId xmlns:a16="http://schemas.microsoft.com/office/drawing/2014/main" xmlns="" id="{24AF0F6F-70BC-A08C-02D4-7E7ED3BEA15B}"/>
+                  <a16:creationId xmlns="" xmlns:a16="http://schemas.microsoft.com/office/drawing/2014/main" id="{24AF0F6F-70BC-A08C-02D4-7E7ED3BEA15B}"/>
                 </a:ext>
               </a:extLst>
             </p:cNvPr>
@@ -39817,7 +39881,7 @@
             <p:cNvPr id="44" name="Arc 43">
               <a:extLst>
                 <a:ext uri="{FF2B5EF4-FFF2-40B4-BE49-F238E27FC236}">
-                  <a16:creationId xmlns:a16="http://schemas.microsoft.com/office/drawing/2014/main" xmlns="" id="{73A2F895-4FA7-DCCA-40B1-3EBC072A4F60}"/>
+                  <a16:creationId xmlns="" xmlns:a16="http://schemas.microsoft.com/office/drawing/2014/main" id="{73A2F895-4FA7-DCCA-40B1-3EBC072A4F60}"/>
                 </a:ext>
               </a:extLst>
             </p:cNvPr>
@@ -39869,7 +39933,7 @@
             <p:cNvPr id="45" name="Arc 44">
               <a:extLst>
                 <a:ext uri="{FF2B5EF4-FFF2-40B4-BE49-F238E27FC236}">
-                  <a16:creationId xmlns:a16="http://schemas.microsoft.com/office/drawing/2014/main" xmlns="" id="{E64F6B66-CE96-C528-DEFF-4DBF3EC29FE6}"/>
+                  <a16:creationId xmlns="" xmlns:a16="http://schemas.microsoft.com/office/drawing/2014/main" id="{E64F6B66-CE96-C528-DEFF-4DBF3EC29FE6}"/>
                 </a:ext>
               </a:extLst>
             </p:cNvPr>
@@ -39921,7 +39985,7 @@
             <p:cNvPr id="46" name="Arc 45">
               <a:extLst>
                 <a:ext uri="{FF2B5EF4-FFF2-40B4-BE49-F238E27FC236}">
-                  <a16:creationId xmlns:a16="http://schemas.microsoft.com/office/drawing/2014/main" xmlns="" id="{E67E0D98-F211-EE8C-CFCF-1A1A4624FEB9}"/>
+                  <a16:creationId xmlns="" xmlns:a16="http://schemas.microsoft.com/office/drawing/2014/main" id="{E67E0D98-F211-EE8C-CFCF-1A1A4624FEB9}"/>
                 </a:ext>
               </a:extLst>
             </p:cNvPr>
@@ -39973,7 +40037,7 @@
             <p:cNvPr id="47" name="Arc 46">
               <a:extLst>
                 <a:ext uri="{FF2B5EF4-FFF2-40B4-BE49-F238E27FC236}">
-                  <a16:creationId xmlns:a16="http://schemas.microsoft.com/office/drawing/2014/main" xmlns="" id="{E6789031-055B-9885-2997-DB229ED3EE3A}"/>
+                  <a16:creationId xmlns="" xmlns:a16="http://schemas.microsoft.com/office/drawing/2014/main" id="{E6789031-055B-9885-2997-DB229ED3EE3A}"/>
                 </a:ext>
               </a:extLst>
             </p:cNvPr>
@@ -40025,7 +40089,7 @@
             <p:cNvPr id="48" name="Arc 47">
               <a:extLst>
                 <a:ext uri="{FF2B5EF4-FFF2-40B4-BE49-F238E27FC236}">
-                  <a16:creationId xmlns:a16="http://schemas.microsoft.com/office/drawing/2014/main" xmlns="" id="{7FF42BDD-8EB7-68D0-1105-18F05D79910D}"/>
+                  <a16:creationId xmlns="" xmlns:a16="http://schemas.microsoft.com/office/drawing/2014/main" id="{7FF42BDD-8EB7-68D0-1105-18F05D79910D}"/>
                 </a:ext>
               </a:extLst>
             </p:cNvPr>
@@ -40077,7 +40141,7 @@
             <p:cNvPr id="49" name="Arc 48">
               <a:extLst>
                 <a:ext uri="{FF2B5EF4-FFF2-40B4-BE49-F238E27FC236}">
-                  <a16:creationId xmlns:a16="http://schemas.microsoft.com/office/drawing/2014/main" xmlns="" id="{A870A998-EDFA-03FD-E005-46B6DF1C6C18}"/>
+                  <a16:creationId xmlns="" xmlns:a16="http://schemas.microsoft.com/office/drawing/2014/main" id="{A870A998-EDFA-03FD-E005-46B6DF1C6C18}"/>
                 </a:ext>
               </a:extLst>
             </p:cNvPr>
@@ -40129,7 +40193,7 @@
             <p:cNvPr id="50" name="Arc 49">
               <a:extLst>
                 <a:ext uri="{FF2B5EF4-FFF2-40B4-BE49-F238E27FC236}">
-                  <a16:creationId xmlns:a16="http://schemas.microsoft.com/office/drawing/2014/main" xmlns="" id="{EAC34CF5-97B7-9F9A-9898-D367C449AFFD}"/>
+                  <a16:creationId xmlns="" xmlns:a16="http://schemas.microsoft.com/office/drawing/2014/main" id="{EAC34CF5-97B7-9F9A-9898-D367C449AFFD}"/>
                 </a:ext>
               </a:extLst>
             </p:cNvPr>
@@ -40181,7 +40245,7 @@
             <p:cNvPr id="51" name="Arc 50">
               <a:extLst>
                 <a:ext uri="{FF2B5EF4-FFF2-40B4-BE49-F238E27FC236}">
-                  <a16:creationId xmlns:a16="http://schemas.microsoft.com/office/drawing/2014/main" xmlns="" id="{1D600C30-2188-BA12-6B22-19946D2B0FFB}"/>
+                  <a16:creationId xmlns="" xmlns:a16="http://schemas.microsoft.com/office/drawing/2014/main" id="{1D600C30-2188-BA12-6B22-19946D2B0FFB}"/>
                 </a:ext>
               </a:extLst>
             </p:cNvPr>
@@ -40233,7 +40297,7 @@
             <p:cNvPr id="52" name="Arc 51">
               <a:extLst>
                 <a:ext uri="{FF2B5EF4-FFF2-40B4-BE49-F238E27FC236}">
-                  <a16:creationId xmlns:a16="http://schemas.microsoft.com/office/drawing/2014/main" xmlns="" id="{5E1DFF45-BE03-DE58-06E7-F844E2DB3133}"/>
+                  <a16:creationId xmlns="" xmlns:a16="http://schemas.microsoft.com/office/drawing/2014/main" id="{5E1DFF45-BE03-DE58-06E7-F844E2DB3133}"/>
                 </a:ext>
               </a:extLst>
             </p:cNvPr>
@@ -40285,7 +40349,7 @@
             <p:cNvPr id="53" name="Arc 52">
               <a:extLst>
                 <a:ext uri="{FF2B5EF4-FFF2-40B4-BE49-F238E27FC236}">
-                  <a16:creationId xmlns:a16="http://schemas.microsoft.com/office/drawing/2014/main" xmlns="" id="{31169CEB-4133-A73E-3C11-4B42932B2FDB}"/>
+                  <a16:creationId xmlns="" xmlns:a16="http://schemas.microsoft.com/office/drawing/2014/main" id="{31169CEB-4133-A73E-3C11-4B42932B2FDB}"/>
                 </a:ext>
               </a:extLst>
             </p:cNvPr>
@@ -40338,7 +40402,7 @@
           <p:cNvPr id="54" name="Rectangle 53">
             <a:extLst>
               <a:ext uri="{FF2B5EF4-FFF2-40B4-BE49-F238E27FC236}">
-                <a16:creationId xmlns:a16="http://schemas.microsoft.com/office/drawing/2014/main" xmlns="" id="{DC3C869A-D899-4CA2-01A6-49EFC3BFD634}"/>
+                <a16:creationId xmlns="" xmlns:a16="http://schemas.microsoft.com/office/drawing/2014/main" id="{DC3C869A-D899-4CA2-01A6-49EFC3BFD634}"/>
               </a:ext>
             </a:extLst>
           </p:cNvPr>

--- a/tracepass.pptx
+++ b/tracepass.pptx
@@ -170,7 +170,7 @@
           <p:cNvPr id="2" name="Title 1">
             <a:extLst>
               <a:ext uri="{FF2B5EF4-FFF2-40B4-BE49-F238E27FC236}">
-                <a16:creationId xmlns="" xmlns:a16="http://schemas.microsoft.com/office/drawing/2014/main" id="{2D081F58-7C2D-4280-BB97-0A02CA9618FF}"/>
+                <a16:creationId xmlns:a16="http://schemas.microsoft.com/office/drawing/2014/main" xmlns="" id="{2D081F58-7C2D-4280-BB97-0A02CA9618FF}"/>
               </a:ext>
             </a:extLst>
           </p:cNvPr>
@@ -207,7 +207,7 @@
           <p:cNvPr id="3" name="Subtitle 2">
             <a:extLst>
               <a:ext uri="{FF2B5EF4-FFF2-40B4-BE49-F238E27FC236}">
-                <a16:creationId xmlns="" xmlns:a16="http://schemas.microsoft.com/office/drawing/2014/main" id="{C564D7C6-120B-4306-94AC-AD858E1094DB}"/>
+                <a16:creationId xmlns:a16="http://schemas.microsoft.com/office/drawing/2014/main" xmlns="" id="{C564D7C6-120B-4306-94AC-AD858E1094DB}"/>
               </a:ext>
             </a:extLst>
           </p:cNvPr>
@@ -277,7 +277,7 @@
           <p:cNvPr id="4" name="Date Placeholder 3">
             <a:extLst>
               <a:ext uri="{FF2B5EF4-FFF2-40B4-BE49-F238E27FC236}">
-                <a16:creationId xmlns="" xmlns:a16="http://schemas.microsoft.com/office/drawing/2014/main" id="{A4664D8C-B0E2-49FB-BCE6-5B23FCDC5198}"/>
+                <a16:creationId xmlns:a16="http://schemas.microsoft.com/office/drawing/2014/main" xmlns="" id="{A4664D8C-B0E2-49FB-BCE6-5B23FCDC5198}"/>
               </a:ext>
             </a:extLst>
           </p:cNvPr>
@@ -295,7 +295,7 @@
           <a:p>
             <a:fld id="{18AECACE-579E-4476-86FD-0B80EC2CCB54}" type="datetimeFigureOut">
               <a:rPr lang="en-US" smtClean="0"/>
-              <a:t>9/2/2026</a:t>
+              <a:t>8/30/2026</a:t>
             </a:fld>
             <a:endParaRPr lang="en-US"/>
           </a:p>
@@ -306,7 +306,7 @@
           <p:cNvPr id="5" name="Footer Placeholder 4">
             <a:extLst>
               <a:ext uri="{FF2B5EF4-FFF2-40B4-BE49-F238E27FC236}">
-                <a16:creationId xmlns="" xmlns:a16="http://schemas.microsoft.com/office/drawing/2014/main" id="{84FEC4B8-DD6D-4502-8871-13C6151AF91E}"/>
+                <a16:creationId xmlns:a16="http://schemas.microsoft.com/office/drawing/2014/main" xmlns="" id="{84FEC4B8-DD6D-4502-8871-13C6151AF91E}"/>
               </a:ext>
             </a:extLst>
           </p:cNvPr>
@@ -331,7 +331,7 @@
           <p:cNvPr id="6" name="Slide Number Placeholder 5">
             <a:extLst>
               <a:ext uri="{FF2B5EF4-FFF2-40B4-BE49-F238E27FC236}">
-                <a16:creationId xmlns="" xmlns:a16="http://schemas.microsoft.com/office/drawing/2014/main" id="{54A5062D-BE27-4406-B5B3-1BD098DA1EB0}"/>
+                <a16:creationId xmlns:a16="http://schemas.microsoft.com/office/drawing/2014/main" xmlns="" id="{54A5062D-BE27-4406-B5B3-1BD098DA1EB0}"/>
               </a:ext>
             </a:extLst>
           </p:cNvPr>
@@ -402,7 +402,7 @@
           <p:cNvPr id="2" name="Title 1">
             <a:extLst>
               <a:ext uri="{FF2B5EF4-FFF2-40B4-BE49-F238E27FC236}">
-                <a16:creationId xmlns="" xmlns:a16="http://schemas.microsoft.com/office/drawing/2014/main" id="{EA31E748-EB58-47C7-9A51-CE16A2C5F53F}"/>
+                <a16:creationId xmlns:a16="http://schemas.microsoft.com/office/drawing/2014/main" xmlns="" id="{EA31E748-EB58-47C7-9A51-CE16A2C5F53F}"/>
               </a:ext>
             </a:extLst>
           </p:cNvPr>
@@ -430,7 +430,7 @@
           <p:cNvPr id="3" name="Vertical Text Placeholder 2">
             <a:extLst>
               <a:ext uri="{FF2B5EF4-FFF2-40B4-BE49-F238E27FC236}">
-                <a16:creationId xmlns="" xmlns:a16="http://schemas.microsoft.com/office/drawing/2014/main" id="{772B29E1-57C3-4D45-9070-966306F4F547}"/>
+                <a16:creationId xmlns:a16="http://schemas.microsoft.com/office/drawing/2014/main" xmlns="" id="{772B29E1-57C3-4D45-9070-966306F4F547}"/>
               </a:ext>
             </a:extLst>
           </p:cNvPr>
@@ -487,7 +487,7 @@
           <p:cNvPr id="4" name="Date Placeholder 3">
             <a:extLst>
               <a:ext uri="{FF2B5EF4-FFF2-40B4-BE49-F238E27FC236}">
-                <a16:creationId xmlns="" xmlns:a16="http://schemas.microsoft.com/office/drawing/2014/main" id="{FC5D52DD-38DA-4F5E-AFAB-335D79528D40}"/>
+                <a16:creationId xmlns:a16="http://schemas.microsoft.com/office/drawing/2014/main" xmlns="" id="{FC5D52DD-38DA-4F5E-AFAB-335D79528D40}"/>
               </a:ext>
             </a:extLst>
           </p:cNvPr>
@@ -505,7 +505,7 @@
           <a:p>
             <a:fld id="{18AECACE-579E-4476-86FD-0B80EC2CCB54}" type="datetimeFigureOut">
               <a:rPr lang="en-US" smtClean="0"/>
-              <a:t>9/2/2026</a:t>
+              <a:t>8/30/2026</a:t>
             </a:fld>
             <a:endParaRPr lang="en-US"/>
           </a:p>
@@ -516,7 +516,7 @@
           <p:cNvPr id="5" name="Footer Placeholder 4">
             <a:extLst>
               <a:ext uri="{FF2B5EF4-FFF2-40B4-BE49-F238E27FC236}">
-                <a16:creationId xmlns="" xmlns:a16="http://schemas.microsoft.com/office/drawing/2014/main" id="{3527E62F-766F-4A18-A14B-EA4F47C368AA}"/>
+                <a16:creationId xmlns:a16="http://schemas.microsoft.com/office/drawing/2014/main" xmlns="" id="{3527E62F-766F-4A18-A14B-EA4F47C368AA}"/>
               </a:ext>
             </a:extLst>
           </p:cNvPr>
@@ -541,7 +541,7 @@
           <p:cNvPr id="6" name="Slide Number Placeholder 5">
             <a:extLst>
               <a:ext uri="{FF2B5EF4-FFF2-40B4-BE49-F238E27FC236}">
-                <a16:creationId xmlns="" xmlns:a16="http://schemas.microsoft.com/office/drawing/2014/main" id="{89DE0585-70B0-4567-8ED3-41F9D162474A}"/>
+                <a16:creationId xmlns:a16="http://schemas.microsoft.com/office/drawing/2014/main" xmlns="" id="{89DE0585-70B0-4567-8ED3-41F9D162474A}"/>
               </a:ext>
             </a:extLst>
           </p:cNvPr>
@@ -612,7 +612,7 @@
           <p:cNvPr id="2" name="Vertical Title 1">
             <a:extLst>
               <a:ext uri="{FF2B5EF4-FFF2-40B4-BE49-F238E27FC236}">
-                <a16:creationId xmlns="" xmlns:a16="http://schemas.microsoft.com/office/drawing/2014/main" id="{3FA834C7-0B50-494F-8DC0-9C757C749C77}"/>
+                <a16:creationId xmlns:a16="http://schemas.microsoft.com/office/drawing/2014/main" xmlns="" id="{3FA834C7-0B50-494F-8DC0-9C757C749C77}"/>
               </a:ext>
             </a:extLst>
           </p:cNvPr>
@@ -645,7 +645,7 @@
           <p:cNvPr id="3" name="Vertical Text Placeholder 2">
             <a:extLst>
               <a:ext uri="{FF2B5EF4-FFF2-40B4-BE49-F238E27FC236}">
-                <a16:creationId xmlns="" xmlns:a16="http://schemas.microsoft.com/office/drawing/2014/main" id="{34E5FE2F-E966-4722-B220-C26C9F49C7E2}"/>
+                <a16:creationId xmlns:a16="http://schemas.microsoft.com/office/drawing/2014/main" xmlns="" id="{34E5FE2F-E966-4722-B220-C26C9F49C7E2}"/>
               </a:ext>
             </a:extLst>
           </p:cNvPr>
@@ -707,7 +707,7 @@
           <p:cNvPr id="4" name="Date Placeholder 3">
             <a:extLst>
               <a:ext uri="{FF2B5EF4-FFF2-40B4-BE49-F238E27FC236}">
-                <a16:creationId xmlns="" xmlns:a16="http://schemas.microsoft.com/office/drawing/2014/main" id="{801513CC-D1EB-42D4-967A-C62E586CF2DC}"/>
+                <a16:creationId xmlns:a16="http://schemas.microsoft.com/office/drawing/2014/main" xmlns="" id="{801513CC-D1EB-42D4-967A-C62E586CF2DC}"/>
               </a:ext>
             </a:extLst>
           </p:cNvPr>
@@ -725,7 +725,7 @@
           <a:p>
             <a:fld id="{18AECACE-579E-4476-86FD-0B80EC2CCB54}" type="datetimeFigureOut">
               <a:rPr lang="en-US" smtClean="0"/>
-              <a:t>9/2/2026</a:t>
+              <a:t>8/30/2026</a:t>
             </a:fld>
             <a:endParaRPr lang="en-US"/>
           </a:p>
@@ -736,7 +736,7 @@
           <p:cNvPr id="5" name="Footer Placeholder 4">
             <a:extLst>
               <a:ext uri="{FF2B5EF4-FFF2-40B4-BE49-F238E27FC236}">
-                <a16:creationId xmlns="" xmlns:a16="http://schemas.microsoft.com/office/drawing/2014/main" id="{F0D0B307-19F8-4F4E-932A-E544D2826AAC}"/>
+                <a16:creationId xmlns:a16="http://schemas.microsoft.com/office/drawing/2014/main" xmlns="" id="{F0D0B307-19F8-4F4E-932A-E544D2826AAC}"/>
               </a:ext>
             </a:extLst>
           </p:cNvPr>
@@ -761,7 +761,7 @@
           <p:cNvPr id="6" name="Slide Number Placeholder 5">
             <a:extLst>
               <a:ext uri="{FF2B5EF4-FFF2-40B4-BE49-F238E27FC236}">
-                <a16:creationId xmlns="" xmlns:a16="http://schemas.microsoft.com/office/drawing/2014/main" id="{0286DFD4-67CB-49AE-9912-F332CB0D8992}"/>
+                <a16:creationId xmlns:a16="http://schemas.microsoft.com/office/drawing/2014/main" xmlns="" id="{0286DFD4-67CB-49AE-9912-F332CB0D8992}"/>
               </a:ext>
             </a:extLst>
           </p:cNvPr>
@@ -832,7 +832,7 @@
           <p:cNvPr id="2" name="Title 1">
             <a:extLst>
               <a:ext uri="{FF2B5EF4-FFF2-40B4-BE49-F238E27FC236}">
-                <a16:creationId xmlns="" xmlns:a16="http://schemas.microsoft.com/office/drawing/2014/main" id="{F635C223-15D2-4B2A-AF7A-D5847013EB1A}"/>
+                <a16:creationId xmlns:a16="http://schemas.microsoft.com/office/drawing/2014/main" xmlns="" id="{F635C223-15D2-4B2A-AF7A-D5847013EB1A}"/>
               </a:ext>
             </a:extLst>
           </p:cNvPr>
@@ -860,7 +860,7 @@
           <p:cNvPr id="3" name="Content Placeholder 2">
             <a:extLst>
               <a:ext uri="{FF2B5EF4-FFF2-40B4-BE49-F238E27FC236}">
-                <a16:creationId xmlns="" xmlns:a16="http://schemas.microsoft.com/office/drawing/2014/main" id="{5EA90905-2502-41A2-8FC1-D0597A7F78AE}"/>
+                <a16:creationId xmlns:a16="http://schemas.microsoft.com/office/drawing/2014/main" xmlns="" id="{5EA90905-2502-41A2-8FC1-D0597A7F78AE}"/>
               </a:ext>
             </a:extLst>
           </p:cNvPr>
@@ -917,7 +917,7 @@
           <p:cNvPr id="4" name="Date Placeholder 3">
             <a:extLst>
               <a:ext uri="{FF2B5EF4-FFF2-40B4-BE49-F238E27FC236}">
-                <a16:creationId xmlns="" xmlns:a16="http://schemas.microsoft.com/office/drawing/2014/main" id="{0D9723D2-09F2-4260-8772-54C49AC1B82C}"/>
+                <a16:creationId xmlns:a16="http://schemas.microsoft.com/office/drawing/2014/main" xmlns="" id="{0D9723D2-09F2-4260-8772-54C49AC1B82C}"/>
               </a:ext>
             </a:extLst>
           </p:cNvPr>
@@ -935,7 +935,7 @@
           <a:p>
             <a:fld id="{18AECACE-579E-4476-86FD-0B80EC2CCB54}" type="datetimeFigureOut">
               <a:rPr lang="en-US" smtClean="0"/>
-              <a:t>9/2/2026</a:t>
+              <a:t>8/30/2026</a:t>
             </a:fld>
             <a:endParaRPr lang="en-US"/>
           </a:p>
@@ -946,7 +946,7 @@
           <p:cNvPr id="5" name="Footer Placeholder 4">
             <a:extLst>
               <a:ext uri="{FF2B5EF4-FFF2-40B4-BE49-F238E27FC236}">
-                <a16:creationId xmlns="" xmlns:a16="http://schemas.microsoft.com/office/drawing/2014/main" id="{1995CA89-AA9F-4539-AC2B-45A6F46268AE}"/>
+                <a16:creationId xmlns:a16="http://schemas.microsoft.com/office/drawing/2014/main" xmlns="" id="{1995CA89-AA9F-4539-AC2B-45A6F46268AE}"/>
               </a:ext>
             </a:extLst>
           </p:cNvPr>
@@ -971,7 +971,7 @@
           <p:cNvPr id="6" name="Slide Number Placeholder 5">
             <a:extLst>
               <a:ext uri="{FF2B5EF4-FFF2-40B4-BE49-F238E27FC236}">
-                <a16:creationId xmlns="" xmlns:a16="http://schemas.microsoft.com/office/drawing/2014/main" id="{0CC786EF-D158-4434-8DC7-458FAFF67EF2}"/>
+                <a16:creationId xmlns:a16="http://schemas.microsoft.com/office/drawing/2014/main" xmlns="" id="{0CC786EF-D158-4434-8DC7-458FAFF67EF2}"/>
               </a:ext>
             </a:extLst>
           </p:cNvPr>
@@ -1042,7 +1042,7 @@
           <p:cNvPr id="2" name="Title 1">
             <a:extLst>
               <a:ext uri="{FF2B5EF4-FFF2-40B4-BE49-F238E27FC236}">
-                <a16:creationId xmlns="" xmlns:a16="http://schemas.microsoft.com/office/drawing/2014/main" id="{EA1E1C50-05B9-48B5-9D28-C1066AA14199}"/>
+                <a16:creationId xmlns:a16="http://schemas.microsoft.com/office/drawing/2014/main" xmlns="" id="{EA1E1C50-05B9-48B5-9D28-C1066AA14199}"/>
               </a:ext>
             </a:extLst>
           </p:cNvPr>
@@ -1079,7 +1079,7 @@
           <p:cNvPr id="3" name="Text Placeholder 2">
             <a:extLst>
               <a:ext uri="{FF2B5EF4-FFF2-40B4-BE49-F238E27FC236}">
-                <a16:creationId xmlns="" xmlns:a16="http://schemas.microsoft.com/office/drawing/2014/main" id="{3601A0B6-3387-420B-9F76-4F97FB0965BB}"/>
+                <a16:creationId xmlns:a16="http://schemas.microsoft.com/office/drawing/2014/main" xmlns="" id="{3601A0B6-3387-420B-9F76-4F97FB0965BB}"/>
               </a:ext>
             </a:extLst>
           </p:cNvPr>
@@ -1204,7 +1204,7 @@
           <p:cNvPr id="4" name="Date Placeholder 3">
             <a:extLst>
               <a:ext uri="{FF2B5EF4-FFF2-40B4-BE49-F238E27FC236}">
-                <a16:creationId xmlns="" xmlns:a16="http://schemas.microsoft.com/office/drawing/2014/main" id="{AEBD0868-EFEC-4798-8EBB-C3A6C67231DA}"/>
+                <a16:creationId xmlns:a16="http://schemas.microsoft.com/office/drawing/2014/main" xmlns="" id="{AEBD0868-EFEC-4798-8EBB-C3A6C67231DA}"/>
               </a:ext>
             </a:extLst>
           </p:cNvPr>
@@ -1222,7 +1222,7 @@
           <a:p>
             <a:fld id="{18AECACE-579E-4476-86FD-0B80EC2CCB54}" type="datetimeFigureOut">
               <a:rPr lang="en-US" smtClean="0"/>
-              <a:t>9/2/2026</a:t>
+              <a:t>8/30/2026</a:t>
             </a:fld>
             <a:endParaRPr lang="en-US"/>
           </a:p>
@@ -1233,7 +1233,7 @@
           <p:cNvPr id="5" name="Footer Placeholder 4">
             <a:extLst>
               <a:ext uri="{FF2B5EF4-FFF2-40B4-BE49-F238E27FC236}">
-                <a16:creationId xmlns="" xmlns:a16="http://schemas.microsoft.com/office/drawing/2014/main" id="{C35789F4-8D45-4E0C-82A1-D8556509D5B5}"/>
+                <a16:creationId xmlns:a16="http://schemas.microsoft.com/office/drawing/2014/main" xmlns="" id="{C35789F4-8D45-4E0C-82A1-D8556509D5B5}"/>
               </a:ext>
             </a:extLst>
           </p:cNvPr>
@@ -1258,7 +1258,7 @@
           <p:cNvPr id="6" name="Slide Number Placeholder 5">
             <a:extLst>
               <a:ext uri="{FF2B5EF4-FFF2-40B4-BE49-F238E27FC236}">
-                <a16:creationId xmlns="" xmlns:a16="http://schemas.microsoft.com/office/drawing/2014/main" id="{C3D5BC3E-257A-4365-A360-E565BFDC44C9}"/>
+                <a16:creationId xmlns:a16="http://schemas.microsoft.com/office/drawing/2014/main" xmlns="" id="{C3D5BC3E-257A-4365-A360-E565BFDC44C9}"/>
               </a:ext>
             </a:extLst>
           </p:cNvPr>
@@ -1329,7 +1329,7 @@
           <p:cNvPr id="2" name="Title 1">
             <a:extLst>
               <a:ext uri="{FF2B5EF4-FFF2-40B4-BE49-F238E27FC236}">
-                <a16:creationId xmlns="" xmlns:a16="http://schemas.microsoft.com/office/drawing/2014/main" id="{3FF38DE0-EE9F-4F6F-A52F-791A6949A9C9}"/>
+                <a16:creationId xmlns:a16="http://schemas.microsoft.com/office/drawing/2014/main" xmlns="" id="{3FF38DE0-EE9F-4F6F-A52F-791A6949A9C9}"/>
               </a:ext>
             </a:extLst>
           </p:cNvPr>
@@ -1357,7 +1357,7 @@
           <p:cNvPr id="3" name="Content Placeholder 2">
             <a:extLst>
               <a:ext uri="{FF2B5EF4-FFF2-40B4-BE49-F238E27FC236}">
-                <a16:creationId xmlns="" xmlns:a16="http://schemas.microsoft.com/office/drawing/2014/main" id="{4B44B722-D31A-4884-BCE4-44AD7588D0AA}"/>
+                <a16:creationId xmlns:a16="http://schemas.microsoft.com/office/drawing/2014/main" xmlns="" id="{4B44B722-D31A-4884-BCE4-44AD7588D0AA}"/>
               </a:ext>
             </a:extLst>
           </p:cNvPr>
@@ -1419,7 +1419,7 @@
           <p:cNvPr id="4" name="Content Placeholder 3">
             <a:extLst>
               <a:ext uri="{FF2B5EF4-FFF2-40B4-BE49-F238E27FC236}">
-                <a16:creationId xmlns="" xmlns:a16="http://schemas.microsoft.com/office/drawing/2014/main" id="{F22CB6DE-EE6F-47E1-A633-15C0D81A5869}"/>
+                <a16:creationId xmlns:a16="http://schemas.microsoft.com/office/drawing/2014/main" xmlns="" id="{F22CB6DE-EE6F-47E1-A633-15C0D81A5869}"/>
               </a:ext>
             </a:extLst>
           </p:cNvPr>
@@ -1481,7 +1481,7 @@
           <p:cNvPr id="5" name="Date Placeholder 4">
             <a:extLst>
               <a:ext uri="{FF2B5EF4-FFF2-40B4-BE49-F238E27FC236}">
-                <a16:creationId xmlns="" xmlns:a16="http://schemas.microsoft.com/office/drawing/2014/main" id="{6069AF9E-E8ED-40FF-9133-D94592EFF9BE}"/>
+                <a16:creationId xmlns:a16="http://schemas.microsoft.com/office/drawing/2014/main" xmlns="" id="{6069AF9E-E8ED-40FF-9133-D94592EFF9BE}"/>
               </a:ext>
             </a:extLst>
           </p:cNvPr>
@@ -1499,7 +1499,7 @@
           <a:p>
             <a:fld id="{18AECACE-579E-4476-86FD-0B80EC2CCB54}" type="datetimeFigureOut">
               <a:rPr lang="en-US" smtClean="0"/>
-              <a:t>9/2/2026</a:t>
+              <a:t>8/30/2026</a:t>
             </a:fld>
             <a:endParaRPr lang="en-US"/>
           </a:p>
@@ -1510,7 +1510,7 @@
           <p:cNvPr id="6" name="Footer Placeholder 5">
             <a:extLst>
               <a:ext uri="{FF2B5EF4-FFF2-40B4-BE49-F238E27FC236}">
-                <a16:creationId xmlns="" xmlns:a16="http://schemas.microsoft.com/office/drawing/2014/main" id="{90482086-B7AC-4304-B6A6-5DC35F0D0197}"/>
+                <a16:creationId xmlns:a16="http://schemas.microsoft.com/office/drawing/2014/main" xmlns="" id="{90482086-B7AC-4304-B6A6-5DC35F0D0197}"/>
               </a:ext>
             </a:extLst>
           </p:cNvPr>
@@ -1535,7 +1535,7 @@
           <p:cNvPr id="7" name="Slide Number Placeholder 6">
             <a:extLst>
               <a:ext uri="{FF2B5EF4-FFF2-40B4-BE49-F238E27FC236}">
-                <a16:creationId xmlns="" xmlns:a16="http://schemas.microsoft.com/office/drawing/2014/main" id="{3FE8FA40-F43D-469E-A512-0079EEDAEC9B}"/>
+                <a16:creationId xmlns:a16="http://schemas.microsoft.com/office/drawing/2014/main" xmlns="" id="{3FE8FA40-F43D-469E-A512-0079EEDAEC9B}"/>
               </a:ext>
             </a:extLst>
           </p:cNvPr>
@@ -1606,7 +1606,7 @@
           <p:cNvPr id="2" name="Title 1">
             <a:extLst>
               <a:ext uri="{FF2B5EF4-FFF2-40B4-BE49-F238E27FC236}">
-                <a16:creationId xmlns="" xmlns:a16="http://schemas.microsoft.com/office/drawing/2014/main" id="{D73D0B3B-72E3-4FEF-AC6E-EE89FDAE7D81}"/>
+                <a16:creationId xmlns:a16="http://schemas.microsoft.com/office/drawing/2014/main" xmlns="" id="{D73D0B3B-72E3-4FEF-AC6E-EE89FDAE7D81}"/>
               </a:ext>
             </a:extLst>
           </p:cNvPr>
@@ -1639,7 +1639,7 @@
           <p:cNvPr id="3" name="Text Placeholder 2">
             <a:extLst>
               <a:ext uri="{FF2B5EF4-FFF2-40B4-BE49-F238E27FC236}">
-                <a16:creationId xmlns="" xmlns:a16="http://schemas.microsoft.com/office/drawing/2014/main" id="{6EAFBEAC-0923-4101-8204-CD9FAE1DFE97}"/>
+                <a16:creationId xmlns:a16="http://schemas.microsoft.com/office/drawing/2014/main" xmlns="" id="{6EAFBEAC-0923-4101-8204-CD9FAE1DFE97}"/>
               </a:ext>
             </a:extLst>
           </p:cNvPr>
@@ -1710,7 +1710,7 @@
           <p:cNvPr id="4" name="Content Placeholder 3">
             <a:extLst>
               <a:ext uri="{FF2B5EF4-FFF2-40B4-BE49-F238E27FC236}">
-                <a16:creationId xmlns="" xmlns:a16="http://schemas.microsoft.com/office/drawing/2014/main" id="{BC0A0EDB-665D-4D0E-AF01-1EF1E16EF5C6}"/>
+                <a16:creationId xmlns:a16="http://schemas.microsoft.com/office/drawing/2014/main" xmlns="" id="{BC0A0EDB-665D-4D0E-AF01-1EF1E16EF5C6}"/>
               </a:ext>
             </a:extLst>
           </p:cNvPr>
@@ -1772,7 +1772,7 @@
           <p:cNvPr id="5" name="Text Placeholder 4">
             <a:extLst>
               <a:ext uri="{FF2B5EF4-FFF2-40B4-BE49-F238E27FC236}">
-                <a16:creationId xmlns="" xmlns:a16="http://schemas.microsoft.com/office/drawing/2014/main" id="{1E827D43-A766-4FD8-9670-78193409A6E6}"/>
+                <a16:creationId xmlns:a16="http://schemas.microsoft.com/office/drawing/2014/main" xmlns="" id="{1E827D43-A766-4FD8-9670-78193409A6E6}"/>
               </a:ext>
             </a:extLst>
           </p:cNvPr>
@@ -1843,7 +1843,7 @@
           <p:cNvPr id="6" name="Content Placeholder 5">
             <a:extLst>
               <a:ext uri="{FF2B5EF4-FFF2-40B4-BE49-F238E27FC236}">
-                <a16:creationId xmlns="" xmlns:a16="http://schemas.microsoft.com/office/drawing/2014/main" id="{ABB703E0-A213-4CD6-ADB4-8FD19BC938B5}"/>
+                <a16:creationId xmlns:a16="http://schemas.microsoft.com/office/drawing/2014/main" xmlns="" id="{ABB703E0-A213-4CD6-ADB4-8FD19BC938B5}"/>
               </a:ext>
             </a:extLst>
           </p:cNvPr>
@@ -1905,7 +1905,7 @@
           <p:cNvPr id="7" name="Date Placeholder 6">
             <a:extLst>
               <a:ext uri="{FF2B5EF4-FFF2-40B4-BE49-F238E27FC236}">
-                <a16:creationId xmlns="" xmlns:a16="http://schemas.microsoft.com/office/drawing/2014/main" id="{C056098A-B4A9-419E-8942-6ABBD13B9C0A}"/>
+                <a16:creationId xmlns:a16="http://schemas.microsoft.com/office/drawing/2014/main" xmlns="" id="{C056098A-B4A9-419E-8942-6ABBD13B9C0A}"/>
               </a:ext>
             </a:extLst>
           </p:cNvPr>
@@ -1923,7 +1923,7 @@
           <a:p>
             <a:fld id="{18AECACE-579E-4476-86FD-0B80EC2CCB54}" type="datetimeFigureOut">
               <a:rPr lang="en-US" smtClean="0"/>
-              <a:t>9/2/2026</a:t>
+              <a:t>8/30/2026</a:t>
             </a:fld>
             <a:endParaRPr lang="en-US"/>
           </a:p>
@@ -1934,7 +1934,7 @@
           <p:cNvPr id="8" name="Footer Placeholder 7">
             <a:extLst>
               <a:ext uri="{FF2B5EF4-FFF2-40B4-BE49-F238E27FC236}">
-                <a16:creationId xmlns="" xmlns:a16="http://schemas.microsoft.com/office/drawing/2014/main" id="{E6B938AD-DAD1-4377-A745-62B1F5C21475}"/>
+                <a16:creationId xmlns:a16="http://schemas.microsoft.com/office/drawing/2014/main" xmlns="" id="{E6B938AD-DAD1-4377-A745-62B1F5C21475}"/>
               </a:ext>
             </a:extLst>
           </p:cNvPr>
@@ -1959,7 +1959,7 @@
           <p:cNvPr id="9" name="Slide Number Placeholder 8">
             <a:extLst>
               <a:ext uri="{FF2B5EF4-FFF2-40B4-BE49-F238E27FC236}">
-                <a16:creationId xmlns="" xmlns:a16="http://schemas.microsoft.com/office/drawing/2014/main" id="{8DD94556-DD16-4D60-8C5D-638DB13AFC3B}"/>
+                <a16:creationId xmlns:a16="http://schemas.microsoft.com/office/drawing/2014/main" xmlns="" id="{8DD94556-DD16-4D60-8C5D-638DB13AFC3B}"/>
               </a:ext>
             </a:extLst>
           </p:cNvPr>
@@ -2030,7 +2030,7 @@
           <p:cNvPr id="2" name="Title 1">
             <a:extLst>
               <a:ext uri="{FF2B5EF4-FFF2-40B4-BE49-F238E27FC236}">
-                <a16:creationId xmlns="" xmlns:a16="http://schemas.microsoft.com/office/drawing/2014/main" id="{B94E2B76-1FBE-4926-8439-882D4C504328}"/>
+                <a16:creationId xmlns:a16="http://schemas.microsoft.com/office/drawing/2014/main" xmlns="" id="{B94E2B76-1FBE-4926-8439-882D4C504328}"/>
               </a:ext>
             </a:extLst>
           </p:cNvPr>
@@ -2058,7 +2058,7 @@
           <p:cNvPr id="3" name="Date Placeholder 2">
             <a:extLst>
               <a:ext uri="{FF2B5EF4-FFF2-40B4-BE49-F238E27FC236}">
-                <a16:creationId xmlns="" xmlns:a16="http://schemas.microsoft.com/office/drawing/2014/main" id="{F39ADBAE-EA02-41F3-AEAF-6A1D3DE29E64}"/>
+                <a16:creationId xmlns:a16="http://schemas.microsoft.com/office/drawing/2014/main" xmlns="" id="{F39ADBAE-EA02-41F3-AEAF-6A1D3DE29E64}"/>
               </a:ext>
             </a:extLst>
           </p:cNvPr>
@@ -2076,7 +2076,7 @@
           <a:p>
             <a:fld id="{18AECACE-579E-4476-86FD-0B80EC2CCB54}" type="datetimeFigureOut">
               <a:rPr lang="en-US" smtClean="0"/>
-              <a:t>9/2/2026</a:t>
+              <a:t>8/30/2026</a:t>
             </a:fld>
             <a:endParaRPr lang="en-US"/>
           </a:p>
@@ -2087,7 +2087,7 @@
           <p:cNvPr id="4" name="Footer Placeholder 3">
             <a:extLst>
               <a:ext uri="{FF2B5EF4-FFF2-40B4-BE49-F238E27FC236}">
-                <a16:creationId xmlns="" xmlns:a16="http://schemas.microsoft.com/office/drawing/2014/main" id="{1F236551-251C-4770-8862-42D94C975D67}"/>
+                <a16:creationId xmlns:a16="http://schemas.microsoft.com/office/drawing/2014/main" xmlns="" id="{1F236551-251C-4770-8862-42D94C975D67}"/>
               </a:ext>
             </a:extLst>
           </p:cNvPr>
@@ -2112,7 +2112,7 @@
           <p:cNvPr id="5" name="Slide Number Placeholder 4">
             <a:extLst>
               <a:ext uri="{FF2B5EF4-FFF2-40B4-BE49-F238E27FC236}">
-                <a16:creationId xmlns="" xmlns:a16="http://schemas.microsoft.com/office/drawing/2014/main" id="{3BEBBC59-B761-488F-B8E6-3CF9C192077D}"/>
+                <a16:creationId xmlns:a16="http://schemas.microsoft.com/office/drawing/2014/main" xmlns="" id="{3BEBBC59-B761-488F-B8E6-3CF9C192077D}"/>
               </a:ext>
             </a:extLst>
           </p:cNvPr>
@@ -2183,7 +2183,7 @@
           <p:cNvPr id="2" name="Date Placeholder 1">
             <a:extLst>
               <a:ext uri="{FF2B5EF4-FFF2-40B4-BE49-F238E27FC236}">
-                <a16:creationId xmlns="" xmlns:a16="http://schemas.microsoft.com/office/drawing/2014/main" id="{634FFC06-5215-442A-9C01-C62142119528}"/>
+                <a16:creationId xmlns:a16="http://schemas.microsoft.com/office/drawing/2014/main" xmlns="" id="{634FFC06-5215-442A-9C01-C62142119528}"/>
               </a:ext>
             </a:extLst>
           </p:cNvPr>
@@ -2201,7 +2201,7 @@
           <a:p>
             <a:fld id="{18AECACE-579E-4476-86FD-0B80EC2CCB54}" type="datetimeFigureOut">
               <a:rPr lang="en-US" smtClean="0"/>
-              <a:t>9/2/2026</a:t>
+              <a:t>8/30/2026</a:t>
             </a:fld>
             <a:endParaRPr lang="en-US"/>
           </a:p>
@@ -2212,7 +2212,7 @@
           <p:cNvPr id="3" name="Footer Placeholder 2">
             <a:extLst>
               <a:ext uri="{FF2B5EF4-FFF2-40B4-BE49-F238E27FC236}">
-                <a16:creationId xmlns="" xmlns:a16="http://schemas.microsoft.com/office/drawing/2014/main" id="{D307CCC0-ADF4-4F1B-8F94-A7F940FC5EE1}"/>
+                <a16:creationId xmlns:a16="http://schemas.microsoft.com/office/drawing/2014/main" xmlns="" id="{D307CCC0-ADF4-4F1B-8F94-A7F940FC5EE1}"/>
               </a:ext>
             </a:extLst>
           </p:cNvPr>
@@ -2237,7 +2237,7 @@
           <p:cNvPr id="4" name="Slide Number Placeholder 3">
             <a:extLst>
               <a:ext uri="{FF2B5EF4-FFF2-40B4-BE49-F238E27FC236}">
-                <a16:creationId xmlns="" xmlns:a16="http://schemas.microsoft.com/office/drawing/2014/main" id="{63D9A34F-1E9F-45A7-97AB-EFDF71C77DDA}"/>
+                <a16:creationId xmlns:a16="http://schemas.microsoft.com/office/drawing/2014/main" xmlns="" id="{63D9A34F-1E9F-45A7-97AB-EFDF71C77DDA}"/>
               </a:ext>
             </a:extLst>
           </p:cNvPr>
@@ -2308,7 +2308,7 @@
           <p:cNvPr id="2" name="Title 1">
             <a:extLst>
               <a:ext uri="{FF2B5EF4-FFF2-40B4-BE49-F238E27FC236}">
-                <a16:creationId xmlns="" xmlns:a16="http://schemas.microsoft.com/office/drawing/2014/main" id="{86BAE89F-5D98-487F-B433-6C5FADA50D57}"/>
+                <a16:creationId xmlns:a16="http://schemas.microsoft.com/office/drawing/2014/main" xmlns="" id="{86BAE89F-5D98-487F-B433-6C5FADA50D57}"/>
               </a:ext>
             </a:extLst>
           </p:cNvPr>
@@ -2345,7 +2345,7 @@
           <p:cNvPr id="3" name="Content Placeholder 2">
             <a:extLst>
               <a:ext uri="{FF2B5EF4-FFF2-40B4-BE49-F238E27FC236}">
-                <a16:creationId xmlns="" xmlns:a16="http://schemas.microsoft.com/office/drawing/2014/main" id="{E7136884-7B49-4DED-A411-F14E260584B9}"/>
+                <a16:creationId xmlns:a16="http://schemas.microsoft.com/office/drawing/2014/main" xmlns="" id="{E7136884-7B49-4DED-A411-F14E260584B9}"/>
               </a:ext>
             </a:extLst>
           </p:cNvPr>
@@ -2435,7 +2435,7 @@
           <p:cNvPr id="4" name="Text Placeholder 3">
             <a:extLst>
               <a:ext uri="{FF2B5EF4-FFF2-40B4-BE49-F238E27FC236}">
-                <a16:creationId xmlns="" xmlns:a16="http://schemas.microsoft.com/office/drawing/2014/main" id="{3CB0633A-7D74-499D-9345-26371ED21EFF}"/>
+                <a16:creationId xmlns:a16="http://schemas.microsoft.com/office/drawing/2014/main" xmlns="" id="{3CB0633A-7D74-499D-9345-26371ED21EFF}"/>
               </a:ext>
             </a:extLst>
           </p:cNvPr>
@@ -2506,7 +2506,7 @@
           <p:cNvPr id="5" name="Date Placeholder 4">
             <a:extLst>
               <a:ext uri="{FF2B5EF4-FFF2-40B4-BE49-F238E27FC236}">
-                <a16:creationId xmlns="" xmlns:a16="http://schemas.microsoft.com/office/drawing/2014/main" id="{331AADB5-9996-43E5-BA54-83988153314D}"/>
+                <a16:creationId xmlns:a16="http://schemas.microsoft.com/office/drawing/2014/main" xmlns="" id="{331AADB5-9996-43E5-BA54-83988153314D}"/>
               </a:ext>
             </a:extLst>
           </p:cNvPr>
@@ -2524,7 +2524,7 @@
           <a:p>
             <a:fld id="{18AECACE-579E-4476-86FD-0B80EC2CCB54}" type="datetimeFigureOut">
               <a:rPr lang="en-US" smtClean="0"/>
-              <a:t>9/2/2026</a:t>
+              <a:t>8/30/2026</a:t>
             </a:fld>
             <a:endParaRPr lang="en-US"/>
           </a:p>
@@ -2535,7 +2535,7 @@
           <p:cNvPr id="6" name="Footer Placeholder 5">
             <a:extLst>
               <a:ext uri="{FF2B5EF4-FFF2-40B4-BE49-F238E27FC236}">
-                <a16:creationId xmlns="" xmlns:a16="http://schemas.microsoft.com/office/drawing/2014/main" id="{637A2449-17DF-4A98-83A4-15D4A1D47573}"/>
+                <a16:creationId xmlns:a16="http://schemas.microsoft.com/office/drawing/2014/main" xmlns="" id="{637A2449-17DF-4A98-83A4-15D4A1D47573}"/>
               </a:ext>
             </a:extLst>
           </p:cNvPr>
@@ -2560,7 +2560,7 @@
           <p:cNvPr id="7" name="Slide Number Placeholder 6">
             <a:extLst>
               <a:ext uri="{FF2B5EF4-FFF2-40B4-BE49-F238E27FC236}">
-                <a16:creationId xmlns="" xmlns:a16="http://schemas.microsoft.com/office/drawing/2014/main" id="{22042EF7-BBFA-4017-8373-03429EA50A70}"/>
+                <a16:creationId xmlns:a16="http://schemas.microsoft.com/office/drawing/2014/main" xmlns="" id="{22042EF7-BBFA-4017-8373-03429EA50A70}"/>
               </a:ext>
             </a:extLst>
           </p:cNvPr>
@@ -2631,7 +2631,7 @@
           <p:cNvPr id="2" name="Title 1">
             <a:extLst>
               <a:ext uri="{FF2B5EF4-FFF2-40B4-BE49-F238E27FC236}">
-                <a16:creationId xmlns="" xmlns:a16="http://schemas.microsoft.com/office/drawing/2014/main" id="{B83ADB16-7090-4A4F-9285-983E85892870}"/>
+                <a16:creationId xmlns:a16="http://schemas.microsoft.com/office/drawing/2014/main" xmlns="" id="{B83ADB16-7090-4A4F-9285-983E85892870}"/>
               </a:ext>
             </a:extLst>
           </p:cNvPr>
@@ -2668,7 +2668,7 @@
           <p:cNvPr id="3" name="Picture Placeholder 2">
             <a:extLst>
               <a:ext uri="{FF2B5EF4-FFF2-40B4-BE49-F238E27FC236}">
-                <a16:creationId xmlns="" xmlns:a16="http://schemas.microsoft.com/office/drawing/2014/main" id="{73405E3E-FD7B-466A-A43E-ECAD2D0AF204}"/>
+                <a16:creationId xmlns:a16="http://schemas.microsoft.com/office/drawing/2014/main" xmlns="" id="{73405E3E-FD7B-466A-A43E-ECAD2D0AF204}"/>
               </a:ext>
             </a:extLst>
           </p:cNvPr>
@@ -2735,7 +2735,7 @@
           <p:cNvPr id="4" name="Text Placeholder 3">
             <a:extLst>
               <a:ext uri="{FF2B5EF4-FFF2-40B4-BE49-F238E27FC236}">
-                <a16:creationId xmlns="" xmlns:a16="http://schemas.microsoft.com/office/drawing/2014/main" id="{699FE687-16E1-498C-92B1-66B7AA41BD2C}"/>
+                <a16:creationId xmlns:a16="http://schemas.microsoft.com/office/drawing/2014/main" xmlns="" id="{699FE687-16E1-498C-92B1-66B7AA41BD2C}"/>
               </a:ext>
             </a:extLst>
           </p:cNvPr>
@@ -2806,7 +2806,7 @@
           <p:cNvPr id="5" name="Date Placeholder 4">
             <a:extLst>
               <a:ext uri="{FF2B5EF4-FFF2-40B4-BE49-F238E27FC236}">
-                <a16:creationId xmlns="" xmlns:a16="http://schemas.microsoft.com/office/drawing/2014/main" id="{05FD3835-AF6F-4403-9660-1E9F0D3ACC00}"/>
+                <a16:creationId xmlns:a16="http://schemas.microsoft.com/office/drawing/2014/main" xmlns="" id="{05FD3835-AF6F-4403-9660-1E9F0D3ACC00}"/>
               </a:ext>
             </a:extLst>
           </p:cNvPr>
@@ -2824,7 +2824,7 @@
           <a:p>
             <a:fld id="{18AECACE-579E-4476-86FD-0B80EC2CCB54}" type="datetimeFigureOut">
               <a:rPr lang="en-US" smtClean="0"/>
-              <a:t>9/2/2026</a:t>
+              <a:t>8/30/2026</a:t>
             </a:fld>
             <a:endParaRPr lang="en-US"/>
           </a:p>
@@ -2835,7 +2835,7 @@
           <p:cNvPr id="6" name="Footer Placeholder 5">
             <a:extLst>
               <a:ext uri="{FF2B5EF4-FFF2-40B4-BE49-F238E27FC236}">
-                <a16:creationId xmlns="" xmlns:a16="http://schemas.microsoft.com/office/drawing/2014/main" id="{1378E631-A4C0-4A0A-B23D-769FB7478AE2}"/>
+                <a16:creationId xmlns:a16="http://schemas.microsoft.com/office/drawing/2014/main" xmlns="" id="{1378E631-A4C0-4A0A-B23D-769FB7478AE2}"/>
               </a:ext>
             </a:extLst>
           </p:cNvPr>
@@ -2860,7 +2860,7 @@
           <p:cNvPr id="7" name="Slide Number Placeholder 6">
             <a:extLst>
               <a:ext uri="{FF2B5EF4-FFF2-40B4-BE49-F238E27FC236}">
-                <a16:creationId xmlns="" xmlns:a16="http://schemas.microsoft.com/office/drawing/2014/main" id="{A74ACE54-352F-4668-A5A2-407D0D54B754}"/>
+                <a16:creationId xmlns:a16="http://schemas.microsoft.com/office/drawing/2014/main" xmlns="" id="{A74ACE54-352F-4668-A5A2-407D0D54B754}"/>
               </a:ext>
             </a:extLst>
           </p:cNvPr>
@@ -2936,7 +2936,7 @@
           <p:cNvPr id="2" name="Title Placeholder 1">
             <a:extLst>
               <a:ext uri="{FF2B5EF4-FFF2-40B4-BE49-F238E27FC236}">
-                <a16:creationId xmlns="" xmlns:a16="http://schemas.microsoft.com/office/drawing/2014/main" id="{A90584BB-B85E-405F-9444-CBEB0CD6869E}"/>
+                <a16:creationId xmlns:a16="http://schemas.microsoft.com/office/drawing/2014/main" xmlns="" id="{A90584BB-B85E-405F-9444-CBEB0CD6869E}"/>
               </a:ext>
             </a:extLst>
           </p:cNvPr>
@@ -2974,7 +2974,7 @@
           <p:cNvPr id="3" name="Text Placeholder 2">
             <a:extLst>
               <a:ext uri="{FF2B5EF4-FFF2-40B4-BE49-F238E27FC236}">
-                <a16:creationId xmlns="" xmlns:a16="http://schemas.microsoft.com/office/drawing/2014/main" id="{4498B3B5-C0CD-4B7A-9606-7CB1734AD232}"/>
+                <a16:creationId xmlns:a16="http://schemas.microsoft.com/office/drawing/2014/main" xmlns="" id="{4498B3B5-C0CD-4B7A-9606-7CB1734AD232}"/>
               </a:ext>
             </a:extLst>
           </p:cNvPr>
@@ -3041,7 +3041,7 @@
           <p:cNvPr id="4" name="Date Placeholder 3">
             <a:extLst>
               <a:ext uri="{FF2B5EF4-FFF2-40B4-BE49-F238E27FC236}">
-                <a16:creationId xmlns="" xmlns:a16="http://schemas.microsoft.com/office/drawing/2014/main" id="{90A4E543-A2EF-47D8-B0F4-94C115BE9B03}"/>
+                <a16:creationId xmlns:a16="http://schemas.microsoft.com/office/drawing/2014/main" xmlns="" id="{90A4E543-A2EF-47D8-B0F4-94C115BE9B03}"/>
               </a:ext>
             </a:extLst>
           </p:cNvPr>
@@ -3077,7 +3077,7 @@
           <a:p>
             <a:fld id="{18AECACE-579E-4476-86FD-0B80EC2CCB54}" type="datetimeFigureOut">
               <a:rPr lang="en-US" smtClean="0"/>
-              <a:t>9/2/2026</a:t>
+              <a:t>8/30/2026</a:t>
             </a:fld>
             <a:endParaRPr lang="en-US"/>
           </a:p>
@@ -3088,7 +3088,7 @@
           <p:cNvPr id="5" name="Footer Placeholder 4">
             <a:extLst>
               <a:ext uri="{FF2B5EF4-FFF2-40B4-BE49-F238E27FC236}">
-                <a16:creationId xmlns="" xmlns:a16="http://schemas.microsoft.com/office/drawing/2014/main" id="{DB441F80-E827-4EF4-94DA-982E2516DB50}"/>
+                <a16:creationId xmlns:a16="http://schemas.microsoft.com/office/drawing/2014/main" xmlns="" id="{DB441F80-E827-4EF4-94DA-982E2516DB50}"/>
               </a:ext>
             </a:extLst>
           </p:cNvPr>
@@ -3131,7 +3131,7 @@
           <p:cNvPr id="6" name="Slide Number Placeholder 5">
             <a:extLst>
               <a:ext uri="{FF2B5EF4-FFF2-40B4-BE49-F238E27FC236}">
-                <a16:creationId xmlns="" xmlns:a16="http://schemas.microsoft.com/office/drawing/2014/main" id="{C18AD799-5075-425C-AD8B-685FE18175A3}"/>
+                <a16:creationId xmlns:a16="http://schemas.microsoft.com/office/drawing/2014/main" xmlns="" id="{C18AD799-5075-425C-AD8B-685FE18175A3}"/>
               </a:ext>
             </a:extLst>
           </p:cNvPr>
@@ -3511,7 +3511,7 @@
           <p:cNvPr id="5" name="Rectangle 4">
             <a:extLst>
               <a:ext uri="{FF2B5EF4-FFF2-40B4-BE49-F238E27FC236}">
-                <a16:creationId xmlns="" xmlns:a16="http://schemas.microsoft.com/office/drawing/2014/main" id="{05762603-B584-39F8-05AB-3AE5497AB247}"/>
+                <a16:creationId xmlns:a16="http://schemas.microsoft.com/office/drawing/2014/main" xmlns="" id="{05762603-B584-39F8-05AB-3AE5497AB247}"/>
               </a:ext>
             </a:extLst>
           </p:cNvPr>
@@ -3557,7 +3557,7 @@
           <p:cNvPr id="4" name="Rectangle 3">
             <a:extLst>
               <a:ext uri="{FF2B5EF4-FFF2-40B4-BE49-F238E27FC236}">
-                <a16:creationId xmlns="" xmlns:a16="http://schemas.microsoft.com/office/drawing/2014/main" id="{C21AE904-339E-735F-38EB-2F73F9D90ADD}"/>
+                <a16:creationId xmlns:a16="http://schemas.microsoft.com/office/drawing/2014/main" xmlns="" id="{C21AE904-339E-735F-38EB-2F73F9D90ADD}"/>
               </a:ext>
             </a:extLst>
           </p:cNvPr>
@@ -4043,7 +4043,7 @@
           <p:cNvPr id="6" name="Oval 5">
             <a:extLst>
               <a:ext uri="{FF2B5EF4-FFF2-40B4-BE49-F238E27FC236}">
-                <a16:creationId xmlns="" xmlns:a16="http://schemas.microsoft.com/office/drawing/2014/main" id="{63EA8D2E-A862-1E65-BE5B-1CC849129310}"/>
+                <a16:creationId xmlns:a16="http://schemas.microsoft.com/office/drawing/2014/main" xmlns="" id="{63EA8D2E-A862-1E65-BE5B-1CC849129310}"/>
               </a:ext>
             </a:extLst>
           </p:cNvPr>
@@ -4102,7 +4102,7 @@
           <p:cNvPr id="7" name="Oval 6">
             <a:extLst>
               <a:ext uri="{FF2B5EF4-FFF2-40B4-BE49-F238E27FC236}">
-                <a16:creationId xmlns="" xmlns:a16="http://schemas.microsoft.com/office/drawing/2014/main" id="{87563D42-811B-AB94-68B2-1654AA39FC59}"/>
+                <a16:creationId xmlns:a16="http://schemas.microsoft.com/office/drawing/2014/main" xmlns="" id="{87563D42-811B-AB94-68B2-1654AA39FC59}"/>
               </a:ext>
             </a:extLst>
           </p:cNvPr>
@@ -4161,7 +4161,7 @@
           <p:cNvPr id="8" name="Oval 7">
             <a:extLst>
               <a:ext uri="{FF2B5EF4-FFF2-40B4-BE49-F238E27FC236}">
-                <a16:creationId xmlns="" xmlns:a16="http://schemas.microsoft.com/office/drawing/2014/main" id="{1BED4EDE-854B-3FD8-B0BE-284C37A7E564}"/>
+                <a16:creationId xmlns:a16="http://schemas.microsoft.com/office/drawing/2014/main" xmlns="" id="{1BED4EDE-854B-3FD8-B0BE-284C37A7E564}"/>
               </a:ext>
             </a:extLst>
           </p:cNvPr>
@@ -4220,7 +4220,7 @@
           <p:cNvPr id="9" name="Oval 8">
             <a:extLst>
               <a:ext uri="{FF2B5EF4-FFF2-40B4-BE49-F238E27FC236}">
-                <a16:creationId xmlns="" xmlns:a16="http://schemas.microsoft.com/office/drawing/2014/main" id="{F4C619DF-9601-D17B-9F1B-1AD73FFAEF03}"/>
+                <a16:creationId xmlns:a16="http://schemas.microsoft.com/office/drawing/2014/main" xmlns="" id="{F4C619DF-9601-D17B-9F1B-1AD73FFAEF03}"/>
               </a:ext>
             </a:extLst>
           </p:cNvPr>
@@ -4279,7 +4279,7 @@
           <p:cNvPr id="10" name="Oval 9">
             <a:extLst>
               <a:ext uri="{FF2B5EF4-FFF2-40B4-BE49-F238E27FC236}">
-                <a16:creationId xmlns="" xmlns:a16="http://schemas.microsoft.com/office/drawing/2014/main" id="{DA6E173B-01D5-5C71-795C-E52A41FB3D27}"/>
+                <a16:creationId xmlns:a16="http://schemas.microsoft.com/office/drawing/2014/main" xmlns="" id="{DA6E173B-01D5-5C71-795C-E52A41FB3D27}"/>
               </a:ext>
             </a:extLst>
           </p:cNvPr>
@@ -4338,7 +4338,7 @@
           <p:cNvPr id="11" name="Oval 10">
             <a:extLst>
               <a:ext uri="{FF2B5EF4-FFF2-40B4-BE49-F238E27FC236}">
-                <a16:creationId xmlns="" xmlns:a16="http://schemas.microsoft.com/office/drawing/2014/main" id="{C0E14360-0068-716B-C5D7-61FC97CF53DF}"/>
+                <a16:creationId xmlns:a16="http://schemas.microsoft.com/office/drawing/2014/main" xmlns="" id="{C0E14360-0068-716B-C5D7-61FC97CF53DF}"/>
               </a:ext>
             </a:extLst>
           </p:cNvPr>
@@ -4397,7 +4397,7 @@
           <p:cNvPr id="12" name="Oval 11">
             <a:extLst>
               <a:ext uri="{FF2B5EF4-FFF2-40B4-BE49-F238E27FC236}">
-                <a16:creationId xmlns="" xmlns:a16="http://schemas.microsoft.com/office/drawing/2014/main" id="{53EA44FD-BB48-502C-CEE9-745038CDB078}"/>
+                <a16:creationId xmlns:a16="http://schemas.microsoft.com/office/drawing/2014/main" xmlns="" id="{53EA44FD-BB48-502C-CEE9-745038CDB078}"/>
               </a:ext>
             </a:extLst>
           </p:cNvPr>
@@ -4456,7 +4456,7 @@
           <p:cNvPr id="13" name="Oval 12">
             <a:extLst>
               <a:ext uri="{FF2B5EF4-FFF2-40B4-BE49-F238E27FC236}">
-                <a16:creationId xmlns="" xmlns:a16="http://schemas.microsoft.com/office/drawing/2014/main" id="{A7113529-1533-5B8E-4911-2C77F23B0116}"/>
+                <a16:creationId xmlns:a16="http://schemas.microsoft.com/office/drawing/2014/main" xmlns="" id="{A7113529-1533-5B8E-4911-2C77F23B0116}"/>
               </a:ext>
             </a:extLst>
           </p:cNvPr>
@@ -4515,7 +4515,7 @@
           <p:cNvPr id="14" name="Oval 13">
             <a:extLst>
               <a:ext uri="{FF2B5EF4-FFF2-40B4-BE49-F238E27FC236}">
-                <a16:creationId xmlns="" xmlns:a16="http://schemas.microsoft.com/office/drawing/2014/main" id="{CAF5B65D-7E89-E6E7-7F6A-34108CD78884}"/>
+                <a16:creationId xmlns:a16="http://schemas.microsoft.com/office/drawing/2014/main" xmlns="" id="{CAF5B65D-7E89-E6E7-7F6A-34108CD78884}"/>
               </a:ext>
             </a:extLst>
           </p:cNvPr>
@@ -4574,7 +4574,7 @@
           <p:cNvPr id="15" name="Oval 14">
             <a:extLst>
               <a:ext uri="{FF2B5EF4-FFF2-40B4-BE49-F238E27FC236}">
-                <a16:creationId xmlns="" xmlns:a16="http://schemas.microsoft.com/office/drawing/2014/main" id="{8CA19B4C-8D07-82AA-1F4A-BE963EAADD78}"/>
+                <a16:creationId xmlns:a16="http://schemas.microsoft.com/office/drawing/2014/main" xmlns="" id="{8CA19B4C-8D07-82AA-1F4A-BE963EAADD78}"/>
               </a:ext>
             </a:extLst>
           </p:cNvPr>
@@ -4633,7 +4633,7 @@
           <p:cNvPr id="16" name="Oval 15">
             <a:extLst>
               <a:ext uri="{FF2B5EF4-FFF2-40B4-BE49-F238E27FC236}">
-                <a16:creationId xmlns="" xmlns:a16="http://schemas.microsoft.com/office/drawing/2014/main" id="{BC936A63-2049-E622-B884-DC071A2B8884}"/>
+                <a16:creationId xmlns:a16="http://schemas.microsoft.com/office/drawing/2014/main" xmlns="" id="{BC936A63-2049-E622-B884-DC071A2B8884}"/>
               </a:ext>
             </a:extLst>
           </p:cNvPr>
@@ -4692,7 +4692,7 @@
           <p:cNvPr id="17" name="Oval 16">
             <a:extLst>
               <a:ext uri="{FF2B5EF4-FFF2-40B4-BE49-F238E27FC236}">
-                <a16:creationId xmlns="" xmlns:a16="http://schemas.microsoft.com/office/drawing/2014/main" id="{86876C4B-5A74-BC8C-C122-CD06B79EF306}"/>
+                <a16:creationId xmlns:a16="http://schemas.microsoft.com/office/drawing/2014/main" xmlns="" id="{86876C4B-5A74-BC8C-C122-CD06B79EF306}"/>
               </a:ext>
             </a:extLst>
           </p:cNvPr>
@@ -4751,7 +4751,7 @@
           <p:cNvPr id="18" name="Oval 17">
             <a:extLst>
               <a:ext uri="{FF2B5EF4-FFF2-40B4-BE49-F238E27FC236}">
-                <a16:creationId xmlns="" xmlns:a16="http://schemas.microsoft.com/office/drawing/2014/main" id="{664BDA3D-A703-9C1B-78CD-8A86C01A1406}"/>
+                <a16:creationId xmlns:a16="http://schemas.microsoft.com/office/drawing/2014/main" xmlns="" id="{664BDA3D-A703-9C1B-78CD-8A86C01A1406}"/>
               </a:ext>
             </a:extLst>
           </p:cNvPr>
@@ -4810,7 +4810,7 @@
           <p:cNvPr id="19" name="Oval 18">
             <a:extLst>
               <a:ext uri="{FF2B5EF4-FFF2-40B4-BE49-F238E27FC236}">
-                <a16:creationId xmlns="" xmlns:a16="http://schemas.microsoft.com/office/drawing/2014/main" id="{8F59511C-41C7-9994-1D21-B977BB5A8A5E}"/>
+                <a16:creationId xmlns:a16="http://schemas.microsoft.com/office/drawing/2014/main" xmlns="" id="{8F59511C-41C7-9994-1D21-B977BB5A8A5E}"/>
               </a:ext>
             </a:extLst>
           </p:cNvPr>
@@ -4869,7 +4869,7 @@
           <p:cNvPr id="20" name="Oval 19">
             <a:extLst>
               <a:ext uri="{FF2B5EF4-FFF2-40B4-BE49-F238E27FC236}">
-                <a16:creationId xmlns="" xmlns:a16="http://schemas.microsoft.com/office/drawing/2014/main" id="{694B00A7-091B-FDC4-4378-1BB1AAB6DA7D}"/>
+                <a16:creationId xmlns:a16="http://schemas.microsoft.com/office/drawing/2014/main" xmlns="" id="{694B00A7-091B-FDC4-4378-1BB1AAB6DA7D}"/>
               </a:ext>
             </a:extLst>
           </p:cNvPr>
@@ -4928,7 +4928,7 @@
           <p:cNvPr id="21" name="Oval 20">
             <a:extLst>
               <a:ext uri="{FF2B5EF4-FFF2-40B4-BE49-F238E27FC236}">
-                <a16:creationId xmlns="" xmlns:a16="http://schemas.microsoft.com/office/drawing/2014/main" id="{1BA1FF37-DE01-2432-085B-E4B299C5EB40}"/>
+                <a16:creationId xmlns:a16="http://schemas.microsoft.com/office/drawing/2014/main" xmlns="" id="{1BA1FF37-DE01-2432-085B-E4B299C5EB40}"/>
               </a:ext>
             </a:extLst>
           </p:cNvPr>
@@ -4987,7 +4987,7 @@
           <p:cNvPr id="22" name="Oval 21">
             <a:extLst>
               <a:ext uri="{FF2B5EF4-FFF2-40B4-BE49-F238E27FC236}">
-                <a16:creationId xmlns="" xmlns:a16="http://schemas.microsoft.com/office/drawing/2014/main" id="{52064E6F-6813-D93E-64FF-B9D4C9C1F144}"/>
+                <a16:creationId xmlns:a16="http://schemas.microsoft.com/office/drawing/2014/main" xmlns="" id="{52064E6F-6813-D93E-64FF-B9D4C9C1F144}"/>
               </a:ext>
             </a:extLst>
           </p:cNvPr>
@@ -5046,7 +5046,7 @@
           <p:cNvPr id="23" name="Oval 22">
             <a:extLst>
               <a:ext uri="{FF2B5EF4-FFF2-40B4-BE49-F238E27FC236}">
-                <a16:creationId xmlns="" xmlns:a16="http://schemas.microsoft.com/office/drawing/2014/main" id="{713462B9-B175-4672-6D40-2F7838DC553E}"/>
+                <a16:creationId xmlns:a16="http://schemas.microsoft.com/office/drawing/2014/main" xmlns="" id="{713462B9-B175-4672-6D40-2F7838DC553E}"/>
               </a:ext>
             </a:extLst>
           </p:cNvPr>
@@ -5105,7 +5105,7 @@
           <p:cNvPr id="24" name="Oval 23">
             <a:extLst>
               <a:ext uri="{FF2B5EF4-FFF2-40B4-BE49-F238E27FC236}">
-                <a16:creationId xmlns="" xmlns:a16="http://schemas.microsoft.com/office/drawing/2014/main" id="{82CE041C-8CAA-6CBD-1393-728D1D9DED5D}"/>
+                <a16:creationId xmlns:a16="http://schemas.microsoft.com/office/drawing/2014/main" xmlns="" id="{82CE041C-8CAA-6CBD-1393-728D1D9DED5D}"/>
               </a:ext>
             </a:extLst>
           </p:cNvPr>
@@ -5164,7 +5164,7 @@
           <p:cNvPr id="25" name="Oval 24">
             <a:extLst>
               <a:ext uri="{FF2B5EF4-FFF2-40B4-BE49-F238E27FC236}">
-                <a16:creationId xmlns="" xmlns:a16="http://schemas.microsoft.com/office/drawing/2014/main" id="{97006CEE-C93E-68A9-E29E-D42C3441930F}"/>
+                <a16:creationId xmlns:a16="http://schemas.microsoft.com/office/drawing/2014/main" xmlns="" id="{97006CEE-C93E-68A9-E29E-D42C3441930F}"/>
               </a:ext>
             </a:extLst>
           </p:cNvPr>
@@ -5223,7 +5223,7 @@
           <p:cNvPr id="26" name="Oval 25">
             <a:extLst>
               <a:ext uri="{FF2B5EF4-FFF2-40B4-BE49-F238E27FC236}">
-                <a16:creationId xmlns="" xmlns:a16="http://schemas.microsoft.com/office/drawing/2014/main" id="{0C4A8885-A76F-EDE3-EB36-E79533DDCBF4}"/>
+                <a16:creationId xmlns:a16="http://schemas.microsoft.com/office/drawing/2014/main" xmlns="" id="{0C4A8885-A76F-EDE3-EB36-E79533DDCBF4}"/>
               </a:ext>
             </a:extLst>
           </p:cNvPr>
@@ -5282,7 +5282,7 @@
           <p:cNvPr id="27" name="Oval 26">
             <a:extLst>
               <a:ext uri="{FF2B5EF4-FFF2-40B4-BE49-F238E27FC236}">
-                <a16:creationId xmlns="" xmlns:a16="http://schemas.microsoft.com/office/drawing/2014/main" id="{4D6A244D-C37F-8EA9-D320-66C3F301DAA2}"/>
+                <a16:creationId xmlns:a16="http://schemas.microsoft.com/office/drawing/2014/main" xmlns="" id="{4D6A244D-C37F-8EA9-D320-66C3F301DAA2}"/>
               </a:ext>
             </a:extLst>
           </p:cNvPr>
@@ -5341,7 +5341,7 @@
           <p:cNvPr id="28" name="Oval 27">
             <a:extLst>
               <a:ext uri="{FF2B5EF4-FFF2-40B4-BE49-F238E27FC236}">
-                <a16:creationId xmlns="" xmlns:a16="http://schemas.microsoft.com/office/drawing/2014/main" id="{D3EB1046-0243-7978-6626-819909534D31}"/>
+                <a16:creationId xmlns:a16="http://schemas.microsoft.com/office/drawing/2014/main" xmlns="" id="{D3EB1046-0243-7978-6626-819909534D31}"/>
               </a:ext>
             </a:extLst>
           </p:cNvPr>
@@ -5400,7 +5400,7 @@
           <p:cNvPr id="29" name="Oval 28">
             <a:extLst>
               <a:ext uri="{FF2B5EF4-FFF2-40B4-BE49-F238E27FC236}">
-                <a16:creationId xmlns="" xmlns:a16="http://schemas.microsoft.com/office/drawing/2014/main" id="{2BEE75EF-6BCD-26AF-ACF6-78A3DB789DFF}"/>
+                <a16:creationId xmlns:a16="http://schemas.microsoft.com/office/drawing/2014/main" xmlns="" id="{2BEE75EF-6BCD-26AF-ACF6-78A3DB789DFF}"/>
               </a:ext>
             </a:extLst>
           </p:cNvPr>
@@ -5459,7 +5459,7 @@
           <p:cNvPr id="30" name="Arc 29">
             <a:extLst>
               <a:ext uri="{FF2B5EF4-FFF2-40B4-BE49-F238E27FC236}">
-                <a16:creationId xmlns="" xmlns:a16="http://schemas.microsoft.com/office/drawing/2014/main" id="{2DEE4B5C-F0BE-F5F9-9014-424465A15603}"/>
+                <a16:creationId xmlns:a16="http://schemas.microsoft.com/office/drawing/2014/main" xmlns="" id="{2DEE4B5C-F0BE-F5F9-9014-424465A15603}"/>
               </a:ext>
             </a:extLst>
           </p:cNvPr>
@@ -5511,7 +5511,7 @@
           <p:cNvPr id="31" name="Arc 30">
             <a:extLst>
               <a:ext uri="{FF2B5EF4-FFF2-40B4-BE49-F238E27FC236}">
-                <a16:creationId xmlns="" xmlns:a16="http://schemas.microsoft.com/office/drawing/2014/main" id="{B5D3283F-5669-F54B-E3DB-36BEC0A2FC87}"/>
+                <a16:creationId xmlns:a16="http://schemas.microsoft.com/office/drawing/2014/main" xmlns="" id="{B5D3283F-5669-F54B-E3DB-36BEC0A2FC87}"/>
               </a:ext>
             </a:extLst>
           </p:cNvPr>
@@ -5563,7 +5563,7 @@
           <p:cNvPr id="32" name="Arc 31">
             <a:extLst>
               <a:ext uri="{FF2B5EF4-FFF2-40B4-BE49-F238E27FC236}">
-                <a16:creationId xmlns="" xmlns:a16="http://schemas.microsoft.com/office/drawing/2014/main" id="{F5319C07-D47D-D9B8-5314-CABDE70BD2BE}"/>
+                <a16:creationId xmlns:a16="http://schemas.microsoft.com/office/drawing/2014/main" xmlns="" id="{F5319C07-D47D-D9B8-5314-CABDE70BD2BE}"/>
               </a:ext>
             </a:extLst>
           </p:cNvPr>
@@ -5615,7 +5615,7 @@
           <p:cNvPr id="33" name="Arc 32">
             <a:extLst>
               <a:ext uri="{FF2B5EF4-FFF2-40B4-BE49-F238E27FC236}">
-                <a16:creationId xmlns="" xmlns:a16="http://schemas.microsoft.com/office/drawing/2014/main" id="{9701BAE2-0B11-9B44-A82F-D00093499F94}"/>
+                <a16:creationId xmlns:a16="http://schemas.microsoft.com/office/drawing/2014/main" xmlns="" id="{9701BAE2-0B11-9B44-A82F-D00093499F94}"/>
               </a:ext>
             </a:extLst>
           </p:cNvPr>
@@ -5667,7 +5667,7 @@
           <p:cNvPr id="34" name="Arc 33">
             <a:extLst>
               <a:ext uri="{FF2B5EF4-FFF2-40B4-BE49-F238E27FC236}">
-                <a16:creationId xmlns="" xmlns:a16="http://schemas.microsoft.com/office/drawing/2014/main" id="{EDA5E984-37A1-D71F-0F67-3278A9477939}"/>
+                <a16:creationId xmlns:a16="http://schemas.microsoft.com/office/drawing/2014/main" xmlns="" id="{EDA5E984-37A1-D71F-0F67-3278A9477939}"/>
               </a:ext>
             </a:extLst>
           </p:cNvPr>
@@ -5719,7 +5719,7 @@
           <p:cNvPr id="35" name="Arc 34">
             <a:extLst>
               <a:ext uri="{FF2B5EF4-FFF2-40B4-BE49-F238E27FC236}">
-                <a16:creationId xmlns="" xmlns:a16="http://schemas.microsoft.com/office/drawing/2014/main" id="{23362B0C-C78C-C8C5-A114-D7EBD425FE4E}"/>
+                <a16:creationId xmlns:a16="http://schemas.microsoft.com/office/drawing/2014/main" xmlns="" id="{23362B0C-C78C-C8C5-A114-D7EBD425FE4E}"/>
               </a:ext>
             </a:extLst>
           </p:cNvPr>
@@ -5771,7 +5771,7 @@
           <p:cNvPr id="36" name="Arc 35">
             <a:extLst>
               <a:ext uri="{FF2B5EF4-FFF2-40B4-BE49-F238E27FC236}">
-                <a16:creationId xmlns="" xmlns:a16="http://schemas.microsoft.com/office/drawing/2014/main" id="{B210D309-0CC7-2009-EFBB-E6423380CC22}"/>
+                <a16:creationId xmlns:a16="http://schemas.microsoft.com/office/drawing/2014/main" xmlns="" id="{B210D309-0CC7-2009-EFBB-E6423380CC22}"/>
               </a:ext>
             </a:extLst>
           </p:cNvPr>
@@ -5823,7 +5823,7 @@
           <p:cNvPr id="37" name="Arc 36">
             <a:extLst>
               <a:ext uri="{FF2B5EF4-FFF2-40B4-BE49-F238E27FC236}">
-                <a16:creationId xmlns="" xmlns:a16="http://schemas.microsoft.com/office/drawing/2014/main" id="{CD3E1EEF-8A01-1BA6-8D0C-E4BEC1E2E4C8}"/>
+                <a16:creationId xmlns:a16="http://schemas.microsoft.com/office/drawing/2014/main" xmlns="" id="{CD3E1EEF-8A01-1BA6-8D0C-E4BEC1E2E4C8}"/>
               </a:ext>
             </a:extLst>
           </p:cNvPr>
@@ -5875,7 +5875,7 @@
           <p:cNvPr id="38" name="Arc 37">
             <a:extLst>
               <a:ext uri="{FF2B5EF4-FFF2-40B4-BE49-F238E27FC236}">
-                <a16:creationId xmlns="" xmlns:a16="http://schemas.microsoft.com/office/drawing/2014/main" id="{47AC66C3-170E-03C4-372A-CD051E89D587}"/>
+                <a16:creationId xmlns:a16="http://schemas.microsoft.com/office/drawing/2014/main" xmlns="" id="{47AC66C3-170E-03C4-372A-CD051E89D587}"/>
               </a:ext>
             </a:extLst>
           </p:cNvPr>
@@ -5927,7 +5927,7 @@
           <p:cNvPr id="39" name="Arc 38">
             <a:extLst>
               <a:ext uri="{FF2B5EF4-FFF2-40B4-BE49-F238E27FC236}">
-                <a16:creationId xmlns="" xmlns:a16="http://schemas.microsoft.com/office/drawing/2014/main" id="{CC9A8E9A-04C2-DB87-8FFD-71E68CF1BCBA}"/>
+                <a16:creationId xmlns:a16="http://schemas.microsoft.com/office/drawing/2014/main" xmlns="" id="{CC9A8E9A-04C2-DB87-8FFD-71E68CF1BCBA}"/>
               </a:ext>
             </a:extLst>
           </p:cNvPr>
@@ -5979,7 +5979,7 @@
           <p:cNvPr id="40" name="Arc 39">
             <a:extLst>
               <a:ext uri="{FF2B5EF4-FFF2-40B4-BE49-F238E27FC236}">
-                <a16:creationId xmlns="" xmlns:a16="http://schemas.microsoft.com/office/drawing/2014/main" id="{259AE654-DDA0-91EB-876C-ABD6BECB77A1}"/>
+                <a16:creationId xmlns:a16="http://schemas.microsoft.com/office/drawing/2014/main" xmlns="" id="{259AE654-DDA0-91EB-876C-ABD6BECB77A1}"/>
               </a:ext>
             </a:extLst>
           </p:cNvPr>
@@ -6031,7 +6031,7 @@
           <p:cNvPr id="41" name="Arc 40">
             <a:extLst>
               <a:ext uri="{FF2B5EF4-FFF2-40B4-BE49-F238E27FC236}">
-                <a16:creationId xmlns="" xmlns:a16="http://schemas.microsoft.com/office/drawing/2014/main" id="{9555FDA0-E784-69FB-4825-063E431AF116}"/>
+                <a16:creationId xmlns:a16="http://schemas.microsoft.com/office/drawing/2014/main" xmlns="" id="{9555FDA0-E784-69FB-4825-063E431AF116}"/>
               </a:ext>
             </a:extLst>
           </p:cNvPr>
@@ -6083,7 +6083,7 @@
           <p:cNvPr id="42" name="Arc 41">
             <a:extLst>
               <a:ext uri="{FF2B5EF4-FFF2-40B4-BE49-F238E27FC236}">
-                <a16:creationId xmlns="" xmlns:a16="http://schemas.microsoft.com/office/drawing/2014/main" id="{5F05C170-61C6-CD0D-186C-1457DB059C5A}"/>
+                <a16:creationId xmlns:a16="http://schemas.microsoft.com/office/drawing/2014/main" xmlns="" id="{5F05C170-61C6-CD0D-186C-1457DB059C5A}"/>
               </a:ext>
             </a:extLst>
           </p:cNvPr>
@@ -6135,7 +6135,7 @@
           <p:cNvPr id="43" name="Arc 42">
             <a:extLst>
               <a:ext uri="{FF2B5EF4-FFF2-40B4-BE49-F238E27FC236}">
-                <a16:creationId xmlns="" xmlns:a16="http://schemas.microsoft.com/office/drawing/2014/main" id="{69367794-C189-7BE9-673E-822F3CC11EF0}"/>
+                <a16:creationId xmlns:a16="http://schemas.microsoft.com/office/drawing/2014/main" xmlns="" id="{69367794-C189-7BE9-673E-822F3CC11EF0}"/>
               </a:ext>
             </a:extLst>
           </p:cNvPr>
@@ -6187,7 +6187,7 @@
           <p:cNvPr id="44" name="Arc 43">
             <a:extLst>
               <a:ext uri="{FF2B5EF4-FFF2-40B4-BE49-F238E27FC236}">
-                <a16:creationId xmlns="" xmlns:a16="http://schemas.microsoft.com/office/drawing/2014/main" id="{885CBC3F-5F8B-B5DF-8E37-177EEFC3C788}"/>
+                <a16:creationId xmlns:a16="http://schemas.microsoft.com/office/drawing/2014/main" xmlns="" id="{885CBC3F-5F8B-B5DF-8E37-177EEFC3C788}"/>
               </a:ext>
             </a:extLst>
           </p:cNvPr>
@@ -6239,7 +6239,7 @@
           <p:cNvPr id="45" name="Arc 44">
             <a:extLst>
               <a:ext uri="{FF2B5EF4-FFF2-40B4-BE49-F238E27FC236}">
-                <a16:creationId xmlns="" xmlns:a16="http://schemas.microsoft.com/office/drawing/2014/main" id="{32CADEC0-864B-2494-ED14-C156E311F8FD}"/>
+                <a16:creationId xmlns:a16="http://schemas.microsoft.com/office/drawing/2014/main" xmlns="" id="{32CADEC0-864B-2494-ED14-C156E311F8FD}"/>
               </a:ext>
             </a:extLst>
           </p:cNvPr>
@@ -6291,7 +6291,7 @@
           <p:cNvPr id="46" name="Arc 45">
             <a:extLst>
               <a:ext uri="{FF2B5EF4-FFF2-40B4-BE49-F238E27FC236}">
-                <a16:creationId xmlns="" xmlns:a16="http://schemas.microsoft.com/office/drawing/2014/main" id="{E9C0E728-8CB0-9330-CF3A-71875A0836B6}"/>
+                <a16:creationId xmlns:a16="http://schemas.microsoft.com/office/drawing/2014/main" xmlns="" id="{E9C0E728-8CB0-9330-CF3A-71875A0836B6}"/>
               </a:ext>
             </a:extLst>
           </p:cNvPr>
@@ -6343,7 +6343,7 @@
           <p:cNvPr id="47" name="Arc 46">
             <a:extLst>
               <a:ext uri="{FF2B5EF4-FFF2-40B4-BE49-F238E27FC236}">
-                <a16:creationId xmlns="" xmlns:a16="http://schemas.microsoft.com/office/drawing/2014/main" id="{DB16B015-BAB2-59B6-56D2-478B01006E70}"/>
+                <a16:creationId xmlns:a16="http://schemas.microsoft.com/office/drawing/2014/main" xmlns="" id="{DB16B015-BAB2-59B6-56D2-478B01006E70}"/>
               </a:ext>
             </a:extLst>
           </p:cNvPr>
@@ -6395,7 +6395,7 @@
           <p:cNvPr id="48" name="Arc 47">
             <a:extLst>
               <a:ext uri="{FF2B5EF4-FFF2-40B4-BE49-F238E27FC236}">
-                <a16:creationId xmlns="" xmlns:a16="http://schemas.microsoft.com/office/drawing/2014/main" id="{D1864DBC-417E-AFB1-4AAB-4EB62A8072E1}"/>
+                <a16:creationId xmlns:a16="http://schemas.microsoft.com/office/drawing/2014/main" xmlns="" id="{D1864DBC-417E-AFB1-4AAB-4EB62A8072E1}"/>
               </a:ext>
             </a:extLst>
           </p:cNvPr>
@@ -6447,7 +6447,7 @@
           <p:cNvPr id="49" name="Arc 48">
             <a:extLst>
               <a:ext uri="{FF2B5EF4-FFF2-40B4-BE49-F238E27FC236}">
-                <a16:creationId xmlns="" xmlns:a16="http://schemas.microsoft.com/office/drawing/2014/main" id="{009E08CA-44A1-C1A5-4081-73926B58B71E}"/>
+                <a16:creationId xmlns:a16="http://schemas.microsoft.com/office/drawing/2014/main" xmlns="" id="{009E08CA-44A1-C1A5-4081-73926B58B71E}"/>
               </a:ext>
             </a:extLst>
           </p:cNvPr>
@@ -6499,7 +6499,7 @@
           <p:cNvPr id="50" name="Arc 49">
             <a:extLst>
               <a:ext uri="{FF2B5EF4-FFF2-40B4-BE49-F238E27FC236}">
-                <a16:creationId xmlns="" xmlns:a16="http://schemas.microsoft.com/office/drawing/2014/main" id="{D83AB14B-323B-A7D7-6C6B-0B6B6800D4D0}"/>
+                <a16:creationId xmlns:a16="http://schemas.microsoft.com/office/drawing/2014/main" xmlns="" id="{D83AB14B-323B-A7D7-6C6B-0B6B6800D4D0}"/>
               </a:ext>
             </a:extLst>
           </p:cNvPr>
@@ -6551,7 +6551,7 @@
           <p:cNvPr id="51" name="Arc 50">
             <a:extLst>
               <a:ext uri="{FF2B5EF4-FFF2-40B4-BE49-F238E27FC236}">
-                <a16:creationId xmlns="" xmlns:a16="http://schemas.microsoft.com/office/drawing/2014/main" id="{F471FF37-5178-5D56-4CC5-8ECD83D9DD95}"/>
+                <a16:creationId xmlns:a16="http://schemas.microsoft.com/office/drawing/2014/main" xmlns="" id="{F471FF37-5178-5D56-4CC5-8ECD83D9DD95}"/>
               </a:ext>
             </a:extLst>
           </p:cNvPr>
@@ -6603,7 +6603,7 @@
           <p:cNvPr id="52" name="Arc 51">
             <a:extLst>
               <a:ext uri="{FF2B5EF4-FFF2-40B4-BE49-F238E27FC236}">
-                <a16:creationId xmlns="" xmlns:a16="http://schemas.microsoft.com/office/drawing/2014/main" id="{8BDA9542-F099-F3D7-E3BC-9B8A60E2F009}"/>
+                <a16:creationId xmlns:a16="http://schemas.microsoft.com/office/drawing/2014/main" xmlns="" id="{8BDA9542-F099-F3D7-E3BC-9B8A60E2F009}"/>
               </a:ext>
             </a:extLst>
           </p:cNvPr>
@@ -6655,7 +6655,7 @@
           <p:cNvPr id="53" name="Arc 52">
             <a:extLst>
               <a:ext uri="{FF2B5EF4-FFF2-40B4-BE49-F238E27FC236}">
-                <a16:creationId xmlns="" xmlns:a16="http://schemas.microsoft.com/office/drawing/2014/main" id="{28F48FBE-9033-3E8C-BE15-DF4300368151}"/>
+                <a16:creationId xmlns:a16="http://schemas.microsoft.com/office/drawing/2014/main" xmlns="" id="{28F48FBE-9033-3E8C-BE15-DF4300368151}"/>
               </a:ext>
             </a:extLst>
           </p:cNvPr>
@@ -6707,7 +6707,7 @@
           <p:cNvPr id="3" name="Picture 2">
             <a:extLst>
               <a:ext uri="{FF2B5EF4-FFF2-40B4-BE49-F238E27FC236}">
-                <a16:creationId xmlns="" xmlns:a16="http://schemas.microsoft.com/office/drawing/2014/main" id="{A714208E-7BC2-744B-9B35-01B1E06C24F6}"/>
+                <a16:creationId xmlns:a16="http://schemas.microsoft.com/office/drawing/2014/main" xmlns="" id="{A714208E-7BC2-744B-9B35-01B1E06C24F6}"/>
               </a:ext>
             </a:extLst>
           </p:cNvPr>
@@ -6778,7 +6778,7 @@
         <p:cNvPr id="1" name="">
           <a:extLst>
             <a:ext uri="{FF2B5EF4-FFF2-40B4-BE49-F238E27FC236}">
-              <a16:creationId xmlns="" xmlns:a16="http://schemas.microsoft.com/office/drawing/2014/main" id="{77DD1F81-5917-513A-67AA-480E240E1D15}"/>
+              <a16:creationId xmlns:a16="http://schemas.microsoft.com/office/drawing/2014/main" xmlns="" id="{77DD1F81-5917-513A-67AA-480E240E1D15}"/>
             </a:ext>
           </a:extLst>
         </p:cNvPr>
@@ -6798,7 +6798,7 @@
           <p:cNvPr id="5" name="Rectangle 4">
             <a:extLst>
               <a:ext uri="{FF2B5EF4-FFF2-40B4-BE49-F238E27FC236}">
-                <a16:creationId xmlns="" xmlns:a16="http://schemas.microsoft.com/office/drawing/2014/main" id="{E0C648D6-43DB-24E9-95FB-80E6D2AE4101}"/>
+                <a16:creationId xmlns:a16="http://schemas.microsoft.com/office/drawing/2014/main" xmlns="" id="{E0C648D6-43DB-24E9-95FB-80E6D2AE4101}"/>
               </a:ext>
             </a:extLst>
           </p:cNvPr>
@@ -6854,7 +6854,7 @@
           <p:cNvPr id="4" name="Rectangle 3">
             <a:extLst>
               <a:ext uri="{FF2B5EF4-FFF2-40B4-BE49-F238E27FC236}">
-                <a16:creationId xmlns="" xmlns:a16="http://schemas.microsoft.com/office/drawing/2014/main" id="{B74FDDDD-F77D-E1C7-D97F-D561CBD61C36}"/>
+                <a16:creationId xmlns:a16="http://schemas.microsoft.com/office/drawing/2014/main" xmlns="" id="{B74FDDDD-F77D-E1C7-D97F-D561CBD61C36}"/>
               </a:ext>
             </a:extLst>
           </p:cNvPr>
@@ -7098,7 +7098,7 @@
           <p:cNvPr id="6" name="Oval 5">
             <a:extLst>
               <a:ext uri="{FF2B5EF4-FFF2-40B4-BE49-F238E27FC236}">
-                <a16:creationId xmlns="" xmlns:a16="http://schemas.microsoft.com/office/drawing/2014/main" id="{E2CCDE54-26D7-E71F-A35F-685C45520847}"/>
+                <a16:creationId xmlns:a16="http://schemas.microsoft.com/office/drawing/2014/main" xmlns="" id="{E2CCDE54-26D7-E71F-A35F-685C45520847}"/>
               </a:ext>
             </a:extLst>
           </p:cNvPr>
@@ -7157,7 +7157,7 @@
           <p:cNvPr id="7" name="Oval 6">
             <a:extLst>
               <a:ext uri="{FF2B5EF4-FFF2-40B4-BE49-F238E27FC236}">
-                <a16:creationId xmlns="" xmlns:a16="http://schemas.microsoft.com/office/drawing/2014/main" id="{2B5FB607-130E-A2AE-1F44-FAE1949D14AA}"/>
+                <a16:creationId xmlns:a16="http://schemas.microsoft.com/office/drawing/2014/main" xmlns="" id="{2B5FB607-130E-A2AE-1F44-FAE1949D14AA}"/>
               </a:ext>
             </a:extLst>
           </p:cNvPr>
@@ -7216,7 +7216,7 @@
           <p:cNvPr id="8" name="Oval 7">
             <a:extLst>
               <a:ext uri="{FF2B5EF4-FFF2-40B4-BE49-F238E27FC236}">
-                <a16:creationId xmlns="" xmlns:a16="http://schemas.microsoft.com/office/drawing/2014/main" id="{E153C2D7-F01A-A3F0-8F75-DCAA57FC1367}"/>
+                <a16:creationId xmlns:a16="http://schemas.microsoft.com/office/drawing/2014/main" xmlns="" id="{E153C2D7-F01A-A3F0-8F75-DCAA57FC1367}"/>
               </a:ext>
             </a:extLst>
           </p:cNvPr>
@@ -7275,7 +7275,7 @@
           <p:cNvPr id="9" name="Oval 8">
             <a:extLst>
               <a:ext uri="{FF2B5EF4-FFF2-40B4-BE49-F238E27FC236}">
-                <a16:creationId xmlns="" xmlns:a16="http://schemas.microsoft.com/office/drawing/2014/main" id="{81DB8CB2-5DDE-BF5C-52DC-9A61BEA7B06C}"/>
+                <a16:creationId xmlns:a16="http://schemas.microsoft.com/office/drawing/2014/main" xmlns="" id="{81DB8CB2-5DDE-BF5C-52DC-9A61BEA7B06C}"/>
               </a:ext>
             </a:extLst>
           </p:cNvPr>
@@ -7334,7 +7334,7 @@
           <p:cNvPr id="10" name="Oval 9">
             <a:extLst>
               <a:ext uri="{FF2B5EF4-FFF2-40B4-BE49-F238E27FC236}">
-                <a16:creationId xmlns="" xmlns:a16="http://schemas.microsoft.com/office/drawing/2014/main" id="{30CD698B-80F3-4BB7-C0AE-6FE30849C829}"/>
+                <a16:creationId xmlns:a16="http://schemas.microsoft.com/office/drawing/2014/main" xmlns="" id="{30CD698B-80F3-4BB7-C0AE-6FE30849C829}"/>
               </a:ext>
             </a:extLst>
           </p:cNvPr>
@@ -7393,7 +7393,7 @@
           <p:cNvPr id="11" name="Oval 10">
             <a:extLst>
               <a:ext uri="{FF2B5EF4-FFF2-40B4-BE49-F238E27FC236}">
-                <a16:creationId xmlns="" xmlns:a16="http://schemas.microsoft.com/office/drawing/2014/main" id="{B1938E0E-5407-8077-EF72-ED773B52C413}"/>
+                <a16:creationId xmlns:a16="http://schemas.microsoft.com/office/drawing/2014/main" xmlns="" id="{B1938E0E-5407-8077-EF72-ED773B52C413}"/>
               </a:ext>
             </a:extLst>
           </p:cNvPr>
@@ -7452,7 +7452,7 @@
           <p:cNvPr id="12" name="Oval 11">
             <a:extLst>
               <a:ext uri="{FF2B5EF4-FFF2-40B4-BE49-F238E27FC236}">
-                <a16:creationId xmlns="" xmlns:a16="http://schemas.microsoft.com/office/drawing/2014/main" id="{48B712CB-F3A2-A563-97D6-946AC44BE4E3}"/>
+                <a16:creationId xmlns:a16="http://schemas.microsoft.com/office/drawing/2014/main" xmlns="" id="{48B712CB-F3A2-A563-97D6-946AC44BE4E3}"/>
               </a:ext>
             </a:extLst>
           </p:cNvPr>
@@ -7511,7 +7511,7 @@
           <p:cNvPr id="13" name="Oval 12">
             <a:extLst>
               <a:ext uri="{FF2B5EF4-FFF2-40B4-BE49-F238E27FC236}">
-                <a16:creationId xmlns="" xmlns:a16="http://schemas.microsoft.com/office/drawing/2014/main" id="{B6F7AB43-09EF-BC29-D9A7-46B7A8CB7451}"/>
+                <a16:creationId xmlns:a16="http://schemas.microsoft.com/office/drawing/2014/main" xmlns="" id="{B6F7AB43-09EF-BC29-D9A7-46B7A8CB7451}"/>
               </a:ext>
             </a:extLst>
           </p:cNvPr>
@@ -7570,7 +7570,7 @@
           <p:cNvPr id="14" name="Oval 13">
             <a:extLst>
               <a:ext uri="{FF2B5EF4-FFF2-40B4-BE49-F238E27FC236}">
-                <a16:creationId xmlns="" xmlns:a16="http://schemas.microsoft.com/office/drawing/2014/main" id="{1BA1683D-2DCB-7C89-EB01-F424376DF393}"/>
+                <a16:creationId xmlns:a16="http://schemas.microsoft.com/office/drawing/2014/main" xmlns="" id="{1BA1683D-2DCB-7C89-EB01-F424376DF393}"/>
               </a:ext>
             </a:extLst>
           </p:cNvPr>
@@ -7629,7 +7629,7 @@
           <p:cNvPr id="15" name="Oval 14">
             <a:extLst>
               <a:ext uri="{FF2B5EF4-FFF2-40B4-BE49-F238E27FC236}">
-                <a16:creationId xmlns="" xmlns:a16="http://schemas.microsoft.com/office/drawing/2014/main" id="{AA2C12A7-BF1D-B83E-9F17-B395C162DF78}"/>
+                <a16:creationId xmlns:a16="http://schemas.microsoft.com/office/drawing/2014/main" xmlns="" id="{AA2C12A7-BF1D-B83E-9F17-B395C162DF78}"/>
               </a:ext>
             </a:extLst>
           </p:cNvPr>
@@ -7688,7 +7688,7 @@
           <p:cNvPr id="16" name="Oval 15">
             <a:extLst>
               <a:ext uri="{FF2B5EF4-FFF2-40B4-BE49-F238E27FC236}">
-                <a16:creationId xmlns="" xmlns:a16="http://schemas.microsoft.com/office/drawing/2014/main" id="{44E2FAEA-4220-C747-D2B2-85ADE4AE21E0}"/>
+                <a16:creationId xmlns:a16="http://schemas.microsoft.com/office/drawing/2014/main" xmlns="" id="{44E2FAEA-4220-C747-D2B2-85ADE4AE21E0}"/>
               </a:ext>
             </a:extLst>
           </p:cNvPr>
@@ -7747,7 +7747,7 @@
           <p:cNvPr id="17" name="Oval 16">
             <a:extLst>
               <a:ext uri="{FF2B5EF4-FFF2-40B4-BE49-F238E27FC236}">
-                <a16:creationId xmlns="" xmlns:a16="http://schemas.microsoft.com/office/drawing/2014/main" id="{152E3FF1-FBAF-DF03-2A66-33B5B6E09F80}"/>
+                <a16:creationId xmlns:a16="http://schemas.microsoft.com/office/drawing/2014/main" xmlns="" id="{152E3FF1-FBAF-DF03-2A66-33B5B6E09F80}"/>
               </a:ext>
             </a:extLst>
           </p:cNvPr>
@@ -7806,7 +7806,7 @@
           <p:cNvPr id="18" name="Oval 17">
             <a:extLst>
               <a:ext uri="{FF2B5EF4-FFF2-40B4-BE49-F238E27FC236}">
-                <a16:creationId xmlns="" xmlns:a16="http://schemas.microsoft.com/office/drawing/2014/main" id="{1435F393-D3CE-FB52-B90D-D53D37EB2A9C}"/>
+                <a16:creationId xmlns:a16="http://schemas.microsoft.com/office/drawing/2014/main" xmlns="" id="{1435F393-D3CE-FB52-B90D-D53D37EB2A9C}"/>
               </a:ext>
             </a:extLst>
           </p:cNvPr>
@@ -7865,7 +7865,7 @@
           <p:cNvPr id="19" name="Oval 18">
             <a:extLst>
               <a:ext uri="{FF2B5EF4-FFF2-40B4-BE49-F238E27FC236}">
-                <a16:creationId xmlns="" xmlns:a16="http://schemas.microsoft.com/office/drawing/2014/main" id="{D0356B91-4838-4410-6213-D2F0D4630F62}"/>
+                <a16:creationId xmlns:a16="http://schemas.microsoft.com/office/drawing/2014/main" xmlns="" id="{D0356B91-4838-4410-6213-D2F0D4630F62}"/>
               </a:ext>
             </a:extLst>
           </p:cNvPr>
@@ -7924,7 +7924,7 @@
           <p:cNvPr id="20" name="Oval 19">
             <a:extLst>
               <a:ext uri="{FF2B5EF4-FFF2-40B4-BE49-F238E27FC236}">
-                <a16:creationId xmlns="" xmlns:a16="http://schemas.microsoft.com/office/drawing/2014/main" id="{99278423-57C3-E35B-44EB-497FBB777FFF}"/>
+                <a16:creationId xmlns:a16="http://schemas.microsoft.com/office/drawing/2014/main" xmlns="" id="{99278423-57C3-E35B-44EB-497FBB777FFF}"/>
               </a:ext>
             </a:extLst>
           </p:cNvPr>
@@ -7983,7 +7983,7 @@
           <p:cNvPr id="21" name="Oval 20">
             <a:extLst>
               <a:ext uri="{FF2B5EF4-FFF2-40B4-BE49-F238E27FC236}">
-                <a16:creationId xmlns="" xmlns:a16="http://schemas.microsoft.com/office/drawing/2014/main" id="{32866435-5F44-D62F-6323-E1B0DDB1CF21}"/>
+                <a16:creationId xmlns:a16="http://schemas.microsoft.com/office/drawing/2014/main" xmlns="" id="{32866435-5F44-D62F-6323-E1B0DDB1CF21}"/>
               </a:ext>
             </a:extLst>
           </p:cNvPr>
@@ -8042,7 +8042,7 @@
           <p:cNvPr id="22" name="Oval 21">
             <a:extLst>
               <a:ext uri="{FF2B5EF4-FFF2-40B4-BE49-F238E27FC236}">
-                <a16:creationId xmlns="" xmlns:a16="http://schemas.microsoft.com/office/drawing/2014/main" id="{7FE924C8-E13F-C843-BFBF-1AF4C40923ED}"/>
+                <a16:creationId xmlns:a16="http://schemas.microsoft.com/office/drawing/2014/main" xmlns="" id="{7FE924C8-E13F-C843-BFBF-1AF4C40923ED}"/>
               </a:ext>
             </a:extLst>
           </p:cNvPr>
@@ -8101,7 +8101,7 @@
           <p:cNvPr id="23" name="Oval 22">
             <a:extLst>
               <a:ext uri="{FF2B5EF4-FFF2-40B4-BE49-F238E27FC236}">
-                <a16:creationId xmlns="" xmlns:a16="http://schemas.microsoft.com/office/drawing/2014/main" id="{A26001AF-2022-3482-414E-365A6B7ED7E1}"/>
+                <a16:creationId xmlns:a16="http://schemas.microsoft.com/office/drawing/2014/main" xmlns="" id="{A26001AF-2022-3482-414E-365A6B7ED7E1}"/>
               </a:ext>
             </a:extLst>
           </p:cNvPr>
@@ -8160,7 +8160,7 @@
           <p:cNvPr id="24" name="Oval 23">
             <a:extLst>
               <a:ext uri="{FF2B5EF4-FFF2-40B4-BE49-F238E27FC236}">
-                <a16:creationId xmlns="" xmlns:a16="http://schemas.microsoft.com/office/drawing/2014/main" id="{C1DA9D15-0E3E-F55A-97D5-E7C443444E00}"/>
+                <a16:creationId xmlns:a16="http://schemas.microsoft.com/office/drawing/2014/main" xmlns="" id="{C1DA9D15-0E3E-F55A-97D5-E7C443444E00}"/>
               </a:ext>
             </a:extLst>
           </p:cNvPr>
@@ -8219,7 +8219,7 @@
           <p:cNvPr id="25" name="Oval 24">
             <a:extLst>
               <a:ext uri="{FF2B5EF4-FFF2-40B4-BE49-F238E27FC236}">
-                <a16:creationId xmlns="" xmlns:a16="http://schemas.microsoft.com/office/drawing/2014/main" id="{6C64C353-347D-7512-5087-5BCB3A2CE6E2}"/>
+                <a16:creationId xmlns:a16="http://schemas.microsoft.com/office/drawing/2014/main" xmlns="" id="{6C64C353-347D-7512-5087-5BCB3A2CE6E2}"/>
               </a:ext>
             </a:extLst>
           </p:cNvPr>
@@ -8278,7 +8278,7 @@
           <p:cNvPr id="26" name="Oval 25">
             <a:extLst>
               <a:ext uri="{FF2B5EF4-FFF2-40B4-BE49-F238E27FC236}">
-                <a16:creationId xmlns="" xmlns:a16="http://schemas.microsoft.com/office/drawing/2014/main" id="{EC0B1FAA-B5A3-F63E-BB7D-C48C6A1EF7AB}"/>
+                <a16:creationId xmlns:a16="http://schemas.microsoft.com/office/drawing/2014/main" xmlns="" id="{EC0B1FAA-B5A3-F63E-BB7D-C48C6A1EF7AB}"/>
               </a:ext>
             </a:extLst>
           </p:cNvPr>
@@ -8337,7 +8337,7 @@
           <p:cNvPr id="27" name="Oval 26">
             <a:extLst>
               <a:ext uri="{FF2B5EF4-FFF2-40B4-BE49-F238E27FC236}">
-                <a16:creationId xmlns="" xmlns:a16="http://schemas.microsoft.com/office/drawing/2014/main" id="{50E8E9E8-10F3-F2C4-598C-6DE942D217F9}"/>
+                <a16:creationId xmlns:a16="http://schemas.microsoft.com/office/drawing/2014/main" xmlns="" id="{50E8E9E8-10F3-F2C4-598C-6DE942D217F9}"/>
               </a:ext>
             </a:extLst>
           </p:cNvPr>
@@ -8396,7 +8396,7 @@
           <p:cNvPr id="28" name="Oval 27">
             <a:extLst>
               <a:ext uri="{FF2B5EF4-FFF2-40B4-BE49-F238E27FC236}">
-                <a16:creationId xmlns="" xmlns:a16="http://schemas.microsoft.com/office/drawing/2014/main" id="{24EF7BD8-8073-14F5-1E36-392FA3A64BAD}"/>
+                <a16:creationId xmlns:a16="http://schemas.microsoft.com/office/drawing/2014/main" xmlns="" id="{24EF7BD8-8073-14F5-1E36-392FA3A64BAD}"/>
               </a:ext>
             </a:extLst>
           </p:cNvPr>
@@ -8455,7 +8455,7 @@
           <p:cNvPr id="29" name="Oval 28">
             <a:extLst>
               <a:ext uri="{FF2B5EF4-FFF2-40B4-BE49-F238E27FC236}">
-                <a16:creationId xmlns="" xmlns:a16="http://schemas.microsoft.com/office/drawing/2014/main" id="{2CBB44C7-2A6A-23C2-FACB-BE404705CEC8}"/>
+                <a16:creationId xmlns:a16="http://schemas.microsoft.com/office/drawing/2014/main" xmlns="" id="{2CBB44C7-2A6A-23C2-FACB-BE404705CEC8}"/>
               </a:ext>
             </a:extLst>
           </p:cNvPr>
@@ -8514,7 +8514,7 @@
           <p:cNvPr id="3" name="Group 2">
             <a:extLst>
               <a:ext uri="{FF2B5EF4-FFF2-40B4-BE49-F238E27FC236}">
-                <a16:creationId xmlns="" xmlns:a16="http://schemas.microsoft.com/office/drawing/2014/main" id="{E5A0CA92-39C9-7575-C3DA-93077042A206}"/>
+                <a16:creationId xmlns:a16="http://schemas.microsoft.com/office/drawing/2014/main" xmlns="" id="{E5A0CA92-39C9-7575-C3DA-93077042A206}"/>
               </a:ext>
             </a:extLst>
           </p:cNvPr>
@@ -8534,7 +8534,7 @@
             <p:cNvPr id="2" name="Oval 1">
               <a:extLst>
                 <a:ext uri="{FF2B5EF4-FFF2-40B4-BE49-F238E27FC236}">
-                  <a16:creationId xmlns="" xmlns:a16="http://schemas.microsoft.com/office/drawing/2014/main" id="{EE98DD9A-0CC8-E237-426C-E194BD68842E}"/>
+                  <a16:creationId xmlns:a16="http://schemas.microsoft.com/office/drawing/2014/main" xmlns="" id="{EE98DD9A-0CC8-E237-426C-E194BD68842E}"/>
                 </a:ext>
               </a:extLst>
             </p:cNvPr>
@@ -8593,7 +8593,7 @@
             <p:cNvPr id="30" name="Arc 29">
               <a:extLst>
                 <a:ext uri="{FF2B5EF4-FFF2-40B4-BE49-F238E27FC236}">
-                  <a16:creationId xmlns="" xmlns:a16="http://schemas.microsoft.com/office/drawing/2014/main" id="{440ED8E4-C0B5-31F0-5171-F4BC55B2DBBF}"/>
+                  <a16:creationId xmlns:a16="http://schemas.microsoft.com/office/drawing/2014/main" xmlns="" id="{440ED8E4-C0B5-31F0-5171-F4BC55B2DBBF}"/>
                 </a:ext>
               </a:extLst>
             </p:cNvPr>
@@ -8646,7 +8646,7 @@
           <p:cNvPr id="54" name="Group 53">
             <a:extLst>
               <a:ext uri="{FF2B5EF4-FFF2-40B4-BE49-F238E27FC236}">
-                <a16:creationId xmlns="" xmlns:a16="http://schemas.microsoft.com/office/drawing/2014/main" id="{56AC3AC4-4003-93D4-6554-87545C42967E}"/>
+                <a16:creationId xmlns:a16="http://schemas.microsoft.com/office/drawing/2014/main" xmlns="" id="{56AC3AC4-4003-93D4-6554-87545C42967E}"/>
               </a:ext>
             </a:extLst>
           </p:cNvPr>
@@ -8666,7 +8666,7 @@
             <p:cNvPr id="55" name="Oval 54">
               <a:extLst>
                 <a:ext uri="{FF2B5EF4-FFF2-40B4-BE49-F238E27FC236}">
-                  <a16:creationId xmlns="" xmlns:a16="http://schemas.microsoft.com/office/drawing/2014/main" id="{32E45708-1BEA-E117-DD14-F7334AFC204D}"/>
+                  <a16:creationId xmlns:a16="http://schemas.microsoft.com/office/drawing/2014/main" xmlns="" id="{32E45708-1BEA-E117-DD14-F7334AFC204D}"/>
                 </a:ext>
               </a:extLst>
             </p:cNvPr>
@@ -8725,7 +8725,7 @@
             <p:cNvPr id="56" name="Arc 55">
               <a:extLst>
                 <a:ext uri="{FF2B5EF4-FFF2-40B4-BE49-F238E27FC236}">
-                  <a16:creationId xmlns="" xmlns:a16="http://schemas.microsoft.com/office/drawing/2014/main" id="{587C9C08-013D-E76D-1567-F53DBD148B1C}"/>
+                  <a16:creationId xmlns:a16="http://schemas.microsoft.com/office/drawing/2014/main" xmlns="" id="{587C9C08-013D-E76D-1567-F53DBD148B1C}"/>
                 </a:ext>
               </a:extLst>
             </p:cNvPr>
@@ -8778,7 +8778,7 @@
           <p:cNvPr id="57" name="Group 56">
             <a:extLst>
               <a:ext uri="{FF2B5EF4-FFF2-40B4-BE49-F238E27FC236}">
-                <a16:creationId xmlns="" xmlns:a16="http://schemas.microsoft.com/office/drawing/2014/main" id="{BDFE12BD-C936-321F-DA6D-4D4CD52DB306}"/>
+                <a16:creationId xmlns:a16="http://schemas.microsoft.com/office/drawing/2014/main" xmlns="" id="{BDFE12BD-C936-321F-DA6D-4D4CD52DB306}"/>
               </a:ext>
             </a:extLst>
           </p:cNvPr>
@@ -8798,7 +8798,7 @@
             <p:cNvPr id="58" name="Oval 57">
               <a:extLst>
                 <a:ext uri="{FF2B5EF4-FFF2-40B4-BE49-F238E27FC236}">
-                  <a16:creationId xmlns="" xmlns:a16="http://schemas.microsoft.com/office/drawing/2014/main" id="{6E2DFFE8-BF59-234A-B94D-F7275B90F41E}"/>
+                  <a16:creationId xmlns:a16="http://schemas.microsoft.com/office/drawing/2014/main" xmlns="" id="{6E2DFFE8-BF59-234A-B94D-F7275B90F41E}"/>
                 </a:ext>
               </a:extLst>
             </p:cNvPr>
@@ -8857,7 +8857,7 @@
             <p:cNvPr id="59" name="Arc 58">
               <a:extLst>
                 <a:ext uri="{FF2B5EF4-FFF2-40B4-BE49-F238E27FC236}">
-                  <a16:creationId xmlns="" xmlns:a16="http://schemas.microsoft.com/office/drawing/2014/main" id="{EEC88090-6502-5B06-82D5-5E9192739559}"/>
+                  <a16:creationId xmlns:a16="http://schemas.microsoft.com/office/drawing/2014/main" xmlns="" id="{EEC88090-6502-5B06-82D5-5E9192739559}"/>
                 </a:ext>
               </a:extLst>
             </p:cNvPr>
@@ -8910,7 +8910,7 @@
           <p:cNvPr id="60" name="Group 59">
             <a:extLst>
               <a:ext uri="{FF2B5EF4-FFF2-40B4-BE49-F238E27FC236}">
-                <a16:creationId xmlns="" xmlns:a16="http://schemas.microsoft.com/office/drawing/2014/main" id="{7F60A61B-F502-FC12-63BB-11C035BE48F4}"/>
+                <a16:creationId xmlns:a16="http://schemas.microsoft.com/office/drawing/2014/main" xmlns="" id="{7F60A61B-F502-FC12-63BB-11C035BE48F4}"/>
               </a:ext>
             </a:extLst>
           </p:cNvPr>
@@ -8930,7 +8930,7 @@
             <p:cNvPr id="61" name="Oval 60">
               <a:extLst>
                 <a:ext uri="{FF2B5EF4-FFF2-40B4-BE49-F238E27FC236}">
-                  <a16:creationId xmlns="" xmlns:a16="http://schemas.microsoft.com/office/drawing/2014/main" id="{406DC092-351A-3F70-7250-FD0707AB9BC0}"/>
+                  <a16:creationId xmlns:a16="http://schemas.microsoft.com/office/drawing/2014/main" xmlns="" id="{406DC092-351A-3F70-7250-FD0707AB9BC0}"/>
                 </a:ext>
               </a:extLst>
             </p:cNvPr>
@@ -8989,7 +8989,7 @@
             <p:cNvPr id="62" name="Arc 61">
               <a:extLst>
                 <a:ext uri="{FF2B5EF4-FFF2-40B4-BE49-F238E27FC236}">
-                  <a16:creationId xmlns="" xmlns:a16="http://schemas.microsoft.com/office/drawing/2014/main" id="{5E21C94A-7063-9B4A-5DF4-AAAABB65A7E9}"/>
+                  <a16:creationId xmlns:a16="http://schemas.microsoft.com/office/drawing/2014/main" xmlns="" id="{5E21C94A-7063-9B4A-5DF4-AAAABB65A7E9}"/>
                 </a:ext>
               </a:extLst>
             </p:cNvPr>
@@ -9042,7 +9042,7 @@
           <p:cNvPr id="63" name="Group 62">
             <a:extLst>
               <a:ext uri="{FF2B5EF4-FFF2-40B4-BE49-F238E27FC236}">
-                <a16:creationId xmlns="" xmlns:a16="http://schemas.microsoft.com/office/drawing/2014/main" id="{6EF408B0-0BDB-3D6F-BA04-0FF19F98F64C}"/>
+                <a16:creationId xmlns:a16="http://schemas.microsoft.com/office/drawing/2014/main" xmlns="" id="{6EF408B0-0BDB-3D6F-BA04-0FF19F98F64C}"/>
               </a:ext>
             </a:extLst>
           </p:cNvPr>
@@ -9062,7 +9062,7 @@
             <p:cNvPr id="64" name="Oval 63">
               <a:extLst>
                 <a:ext uri="{FF2B5EF4-FFF2-40B4-BE49-F238E27FC236}">
-                  <a16:creationId xmlns="" xmlns:a16="http://schemas.microsoft.com/office/drawing/2014/main" id="{058DEE75-92F4-D869-0AE6-F722C3448B1C}"/>
+                  <a16:creationId xmlns:a16="http://schemas.microsoft.com/office/drawing/2014/main" xmlns="" id="{058DEE75-92F4-D869-0AE6-F722C3448B1C}"/>
                 </a:ext>
               </a:extLst>
             </p:cNvPr>
@@ -9121,7 +9121,7 @@
             <p:cNvPr id="65" name="Arc 64">
               <a:extLst>
                 <a:ext uri="{FF2B5EF4-FFF2-40B4-BE49-F238E27FC236}">
-                  <a16:creationId xmlns="" xmlns:a16="http://schemas.microsoft.com/office/drawing/2014/main" id="{7E3B28C1-2093-80DA-E0D9-CD72049F9AF2}"/>
+                  <a16:creationId xmlns:a16="http://schemas.microsoft.com/office/drawing/2014/main" xmlns="" id="{7E3B28C1-2093-80DA-E0D9-CD72049F9AF2}"/>
                 </a:ext>
               </a:extLst>
             </p:cNvPr>
@@ -9174,7 +9174,7 @@
           <p:cNvPr id="66" name="Group 65">
             <a:extLst>
               <a:ext uri="{FF2B5EF4-FFF2-40B4-BE49-F238E27FC236}">
-                <a16:creationId xmlns="" xmlns:a16="http://schemas.microsoft.com/office/drawing/2014/main" id="{EBC7586D-B6D6-B6F4-9157-AAE67C51A232}"/>
+                <a16:creationId xmlns:a16="http://schemas.microsoft.com/office/drawing/2014/main" xmlns="" id="{EBC7586D-B6D6-B6F4-9157-AAE67C51A232}"/>
               </a:ext>
             </a:extLst>
           </p:cNvPr>
@@ -9194,7 +9194,7 @@
             <p:cNvPr id="67" name="Oval 66">
               <a:extLst>
                 <a:ext uri="{FF2B5EF4-FFF2-40B4-BE49-F238E27FC236}">
-                  <a16:creationId xmlns="" xmlns:a16="http://schemas.microsoft.com/office/drawing/2014/main" id="{63B4EB66-1C87-3007-FDE0-2911FBAA94ED}"/>
+                  <a16:creationId xmlns:a16="http://schemas.microsoft.com/office/drawing/2014/main" xmlns="" id="{63B4EB66-1C87-3007-FDE0-2911FBAA94ED}"/>
                 </a:ext>
               </a:extLst>
             </p:cNvPr>
@@ -9253,7 +9253,7 @@
             <p:cNvPr id="68" name="Arc 67">
               <a:extLst>
                 <a:ext uri="{FF2B5EF4-FFF2-40B4-BE49-F238E27FC236}">
-                  <a16:creationId xmlns="" xmlns:a16="http://schemas.microsoft.com/office/drawing/2014/main" id="{A57E758B-EE06-E9BD-9BCE-E29F16AEC2C7}"/>
+                  <a16:creationId xmlns:a16="http://schemas.microsoft.com/office/drawing/2014/main" xmlns="" id="{A57E758B-EE06-E9BD-9BCE-E29F16AEC2C7}"/>
                 </a:ext>
               </a:extLst>
             </p:cNvPr>
@@ -9306,7 +9306,7 @@
           <p:cNvPr id="69" name="Group 68">
             <a:extLst>
               <a:ext uri="{FF2B5EF4-FFF2-40B4-BE49-F238E27FC236}">
-                <a16:creationId xmlns="" xmlns:a16="http://schemas.microsoft.com/office/drawing/2014/main" id="{794DA135-28DD-93FB-0982-C53F8BF0126F}"/>
+                <a16:creationId xmlns:a16="http://schemas.microsoft.com/office/drawing/2014/main" xmlns="" id="{794DA135-28DD-93FB-0982-C53F8BF0126F}"/>
               </a:ext>
             </a:extLst>
           </p:cNvPr>
@@ -9326,7 +9326,7 @@
             <p:cNvPr id="70" name="Oval 69">
               <a:extLst>
                 <a:ext uri="{FF2B5EF4-FFF2-40B4-BE49-F238E27FC236}">
-                  <a16:creationId xmlns="" xmlns:a16="http://schemas.microsoft.com/office/drawing/2014/main" id="{EC1F6917-9875-6D59-CDB6-9328CB1EB6E0}"/>
+                  <a16:creationId xmlns:a16="http://schemas.microsoft.com/office/drawing/2014/main" xmlns="" id="{EC1F6917-9875-6D59-CDB6-9328CB1EB6E0}"/>
                 </a:ext>
               </a:extLst>
             </p:cNvPr>
@@ -9385,7 +9385,7 @@
             <p:cNvPr id="71" name="Arc 70">
               <a:extLst>
                 <a:ext uri="{FF2B5EF4-FFF2-40B4-BE49-F238E27FC236}">
-                  <a16:creationId xmlns="" xmlns:a16="http://schemas.microsoft.com/office/drawing/2014/main" id="{842178B8-6D8B-2DB3-4A4F-8B6F251B239D}"/>
+                  <a16:creationId xmlns:a16="http://schemas.microsoft.com/office/drawing/2014/main" xmlns="" id="{842178B8-6D8B-2DB3-4A4F-8B6F251B239D}"/>
                 </a:ext>
               </a:extLst>
             </p:cNvPr>
@@ -9438,7 +9438,7 @@
           <p:cNvPr id="72" name="Group 71">
             <a:extLst>
               <a:ext uri="{FF2B5EF4-FFF2-40B4-BE49-F238E27FC236}">
-                <a16:creationId xmlns="" xmlns:a16="http://schemas.microsoft.com/office/drawing/2014/main" id="{6334D252-8063-7B32-45FD-91E3566C00B1}"/>
+                <a16:creationId xmlns:a16="http://schemas.microsoft.com/office/drawing/2014/main" xmlns="" id="{6334D252-8063-7B32-45FD-91E3566C00B1}"/>
               </a:ext>
             </a:extLst>
           </p:cNvPr>
@@ -9458,7 +9458,7 @@
             <p:cNvPr id="73" name="Oval 72">
               <a:extLst>
                 <a:ext uri="{FF2B5EF4-FFF2-40B4-BE49-F238E27FC236}">
-                  <a16:creationId xmlns="" xmlns:a16="http://schemas.microsoft.com/office/drawing/2014/main" id="{F175E0F1-8A3B-D28B-D692-84C3D5CA94F2}"/>
+                  <a16:creationId xmlns:a16="http://schemas.microsoft.com/office/drawing/2014/main" xmlns="" id="{F175E0F1-8A3B-D28B-D692-84C3D5CA94F2}"/>
                 </a:ext>
               </a:extLst>
             </p:cNvPr>
@@ -9517,7 +9517,7 @@
             <p:cNvPr id="74" name="Arc 73">
               <a:extLst>
                 <a:ext uri="{FF2B5EF4-FFF2-40B4-BE49-F238E27FC236}">
-                  <a16:creationId xmlns="" xmlns:a16="http://schemas.microsoft.com/office/drawing/2014/main" id="{94340669-E9B7-4A15-910F-8569189F2B0E}"/>
+                  <a16:creationId xmlns:a16="http://schemas.microsoft.com/office/drawing/2014/main" xmlns="" id="{94340669-E9B7-4A15-910F-8569189F2B0E}"/>
                 </a:ext>
               </a:extLst>
             </p:cNvPr>
@@ -9570,7 +9570,7 @@
           <p:cNvPr id="75" name="Group 74">
             <a:extLst>
               <a:ext uri="{FF2B5EF4-FFF2-40B4-BE49-F238E27FC236}">
-                <a16:creationId xmlns="" xmlns:a16="http://schemas.microsoft.com/office/drawing/2014/main" id="{B41398A0-5D8C-219B-7CF3-EF3369FD9E4D}"/>
+                <a16:creationId xmlns:a16="http://schemas.microsoft.com/office/drawing/2014/main" xmlns="" id="{B41398A0-5D8C-219B-7CF3-EF3369FD9E4D}"/>
               </a:ext>
             </a:extLst>
           </p:cNvPr>
@@ -9590,7 +9590,7 @@
             <p:cNvPr id="76" name="Oval 75">
               <a:extLst>
                 <a:ext uri="{FF2B5EF4-FFF2-40B4-BE49-F238E27FC236}">
-                  <a16:creationId xmlns="" xmlns:a16="http://schemas.microsoft.com/office/drawing/2014/main" id="{1F95D269-31AF-EE79-42C4-DDC3A2ED8D09}"/>
+                  <a16:creationId xmlns:a16="http://schemas.microsoft.com/office/drawing/2014/main" xmlns="" id="{1F95D269-31AF-EE79-42C4-DDC3A2ED8D09}"/>
                 </a:ext>
               </a:extLst>
             </p:cNvPr>
@@ -9649,7 +9649,7 @@
             <p:cNvPr id="77" name="Arc 76">
               <a:extLst>
                 <a:ext uri="{FF2B5EF4-FFF2-40B4-BE49-F238E27FC236}">
-                  <a16:creationId xmlns="" xmlns:a16="http://schemas.microsoft.com/office/drawing/2014/main" id="{3ACBF1A9-8DFC-D5E0-8C08-8322271D3A77}"/>
+                  <a16:creationId xmlns:a16="http://schemas.microsoft.com/office/drawing/2014/main" xmlns="" id="{3ACBF1A9-8DFC-D5E0-8C08-8322271D3A77}"/>
                 </a:ext>
               </a:extLst>
             </p:cNvPr>
@@ -9702,7 +9702,7 @@
           <p:cNvPr id="78" name="Group 77">
             <a:extLst>
               <a:ext uri="{FF2B5EF4-FFF2-40B4-BE49-F238E27FC236}">
-                <a16:creationId xmlns="" xmlns:a16="http://schemas.microsoft.com/office/drawing/2014/main" id="{8E4DECA8-5BE8-6E15-F9E0-06A97135B17A}"/>
+                <a16:creationId xmlns:a16="http://schemas.microsoft.com/office/drawing/2014/main" xmlns="" id="{8E4DECA8-5BE8-6E15-F9E0-06A97135B17A}"/>
               </a:ext>
             </a:extLst>
           </p:cNvPr>
@@ -9722,7 +9722,7 @@
             <p:cNvPr id="79" name="Oval 78">
               <a:extLst>
                 <a:ext uri="{FF2B5EF4-FFF2-40B4-BE49-F238E27FC236}">
-                  <a16:creationId xmlns="" xmlns:a16="http://schemas.microsoft.com/office/drawing/2014/main" id="{3F33D6DD-BFC2-AC5B-5E25-79F2C77A2498}"/>
+                  <a16:creationId xmlns:a16="http://schemas.microsoft.com/office/drawing/2014/main" xmlns="" id="{3F33D6DD-BFC2-AC5B-5E25-79F2C77A2498}"/>
                 </a:ext>
               </a:extLst>
             </p:cNvPr>
@@ -9781,7 +9781,7 @@
             <p:cNvPr id="80" name="Arc 79">
               <a:extLst>
                 <a:ext uri="{FF2B5EF4-FFF2-40B4-BE49-F238E27FC236}">
-                  <a16:creationId xmlns="" xmlns:a16="http://schemas.microsoft.com/office/drawing/2014/main" id="{14B35254-5989-49DC-72B0-1E3FDCA19A35}"/>
+                  <a16:creationId xmlns:a16="http://schemas.microsoft.com/office/drawing/2014/main" xmlns="" id="{14B35254-5989-49DC-72B0-1E3FDCA19A35}"/>
                 </a:ext>
               </a:extLst>
             </p:cNvPr>
@@ -9834,7 +9834,7 @@
           <p:cNvPr id="81" name="Group 80">
             <a:extLst>
               <a:ext uri="{FF2B5EF4-FFF2-40B4-BE49-F238E27FC236}">
-                <a16:creationId xmlns="" xmlns:a16="http://schemas.microsoft.com/office/drawing/2014/main" id="{6ACD5758-357E-6448-5CD6-34B367C8C8F4}"/>
+                <a16:creationId xmlns:a16="http://schemas.microsoft.com/office/drawing/2014/main" xmlns="" id="{6ACD5758-357E-6448-5CD6-34B367C8C8F4}"/>
               </a:ext>
             </a:extLst>
           </p:cNvPr>
@@ -9854,7 +9854,7 @@
             <p:cNvPr id="82" name="Oval 81">
               <a:extLst>
                 <a:ext uri="{FF2B5EF4-FFF2-40B4-BE49-F238E27FC236}">
-                  <a16:creationId xmlns="" xmlns:a16="http://schemas.microsoft.com/office/drawing/2014/main" id="{90FE7B1E-CC38-A41E-BBBB-0E1E1BB51E0C}"/>
+                  <a16:creationId xmlns:a16="http://schemas.microsoft.com/office/drawing/2014/main" xmlns="" id="{90FE7B1E-CC38-A41E-BBBB-0E1E1BB51E0C}"/>
                 </a:ext>
               </a:extLst>
             </p:cNvPr>
@@ -9913,7 +9913,7 @@
             <p:cNvPr id="83" name="Arc 82">
               <a:extLst>
                 <a:ext uri="{FF2B5EF4-FFF2-40B4-BE49-F238E27FC236}">
-                  <a16:creationId xmlns="" xmlns:a16="http://schemas.microsoft.com/office/drawing/2014/main" id="{064FB018-B832-A6C8-6A18-4C82A055BE4E}"/>
+                  <a16:creationId xmlns:a16="http://schemas.microsoft.com/office/drawing/2014/main" xmlns="" id="{064FB018-B832-A6C8-6A18-4C82A055BE4E}"/>
                 </a:ext>
               </a:extLst>
             </p:cNvPr>
@@ -9966,7 +9966,7 @@
           <p:cNvPr id="84" name="Group 83">
             <a:extLst>
               <a:ext uri="{FF2B5EF4-FFF2-40B4-BE49-F238E27FC236}">
-                <a16:creationId xmlns="" xmlns:a16="http://schemas.microsoft.com/office/drawing/2014/main" id="{BC87D57E-0711-1C8F-E1DC-27BA2E1B0156}"/>
+                <a16:creationId xmlns:a16="http://schemas.microsoft.com/office/drawing/2014/main" xmlns="" id="{BC87D57E-0711-1C8F-E1DC-27BA2E1B0156}"/>
               </a:ext>
             </a:extLst>
           </p:cNvPr>
@@ -9986,7 +9986,7 @@
             <p:cNvPr id="85" name="Oval 84">
               <a:extLst>
                 <a:ext uri="{FF2B5EF4-FFF2-40B4-BE49-F238E27FC236}">
-                  <a16:creationId xmlns="" xmlns:a16="http://schemas.microsoft.com/office/drawing/2014/main" id="{DCBFC7E3-4491-9020-426F-10C3DC5EF404}"/>
+                  <a16:creationId xmlns:a16="http://schemas.microsoft.com/office/drawing/2014/main" xmlns="" id="{DCBFC7E3-4491-9020-426F-10C3DC5EF404}"/>
                 </a:ext>
               </a:extLst>
             </p:cNvPr>
@@ -10045,7 +10045,7 @@
             <p:cNvPr id="86" name="Arc 85">
               <a:extLst>
                 <a:ext uri="{FF2B5EF4-FFF2-40B4-BE49-F238E27FC236}">
-                  <a16:creationId xmlns="" xmlns:a16="http://schemas.microsoft.com/office/drawing/2014/main" id="{51120AF4-76A3-B60C-B17F-5A241AEF25B0}"/>
+                  <a16:creationId xmlns:a16="http://schemas.microsoft.com/office/drawing/2014/main" xmlns="" id="{51120AF4-76A3-B60C-B17F-5A241AEF25B0}"/>
                 </a:ext>
               </a:extLst>
             </p:cNvPr>
@@ -10098,7 +10098,7 @@
           <p:cNvPr id="87" name="Group 86">
             <a:extLst>
               <a:ext uri="{FF2B5EF4-FFF2-40B4-BE49-F238E27FC236}">
-                <a16:creationId xmlns="" xmlns:a16="http://schemas.microsoft.com/office/drawing/2014/main" id="{9C88F040-2AB6-8323-BA50-9D0ED2C398E3}"/>
+                <a16:creationId xmlns:a16="http://schemas.microsoft.com/office/drawing/2014/main" xmlns="" id="{9C88F040-2AB6-8323-BA50-9D0ED2C398E3}"/>
               </a:ext>
             </a:extLst>
           </p:cNvPr>
@@ -10118,7 +10118,7 @@
             <p:cNvPr id="88" name="Oval 87">
               <a:extLst>
                 <a:ext uri="{FF2B5EF4-FFF2-40B4-BE49-F238E27FC236}">
-                  <a16:creationId xmlns="" xmlns:a16="http://schemas.microsoft.com/office/drawing/2014/main" id="{0E902587-FCC3-4109-8354-34A9253BF166}"/>
+                  <a16:creationId xmlns:a16="http://schemas.microsoft.com/office/drawing/2014/main" xmlns="" id="{0E902587-FCC3-4109-8354-34A9253BF166}"/>
                 </a:ext>
               </a:extLst>
             </p:cNvPr>
@@ -10177,7 +10177,7 @@
             <p:cNvPr id="89" name="Arc 88">
               <a:extLst>
                 <a:ext uri="{FF2B5EF4-FFF2-40B4-BE49-F238E27FC236}">
-                  <a16:creationId xmlns="" xmlns:a16="http://schemas.microsoft.com/office/drawing/2014/main" id="{92A17050-8FFD-1D92-5315-F3AE33235D31}"/>
+                  <a16:creationId xmlns:a16="http://schemas.microsoft.com/office/drawing/2014/main" xmlns="" id="{92A17050-8FFD-1D92-5315-F3AE33235D31}"/>
                 </a:ext>
               </a:extLst>
             </p:cNvPr>
@@ -10230,7 +10230,7 @@
           <p:cNvPr id="90" name="Group 89">
             <a:extLst>
               <a:ext uri="{FF2B5EF4-FFF2-40B4-BE49-F238E27FC236}">
-                <a16:creationId xmlns="" xmlns:a16="http://schemas.microsoft.com/office/drawing/2014/main" id="{67C8A194-DD25-351F-6C68-AFAB9192E266}"/>
+                <a16:creationId xmlns:a16="http://schemas.microsoft.com/office/drawing/2014/main" xmlns="" id="{67C8A194-DD25-351F-6C68-AFAB9192E266}"/>
               </a:ext>
             </a:extLst>
           </p:cNvPr>
@@ -10250,7 +10250,7 @@
             <p:cNvPr id="91" name="Oval 90">
               <a:extLst>
                 <a:ext uri="{FF2B5EF4-FFF2-40B4-BE49-F238E27FC236}">
-                  <a16:creationId xmlns="" xmlns:a16="http://schemas.microsoft.com/office/drawing/2014/main" id="{7B10CCCF-8B2B-FADF-7734-F689B3EAF212}"/>
+                  <a16:creationId xmlns:a16="http://schemas.microsoft.com/office/drawing/2014/main" xmlns="" id="{7B10CCCF-8B2B-FADF-7734-F689B3EAF212}"/>
                 </a:ext>
               </a:extLst>
             </p:cNvPr>
@@ -10309,7 +10309,7 @@
             <p:cNvPr id="92" name="Arc 91">
               <a:extLst>
                 <a:ext uri="{FF2B5EF4-FFF2-40B4-BE49-F238E27FC236}">
-                  <a16:creationId xmlns="" xmlns:a16="http://schemas.microsoft.com/office/drawing/2014/main" id="{65D93716-7229-0D2E-185D-EB92654B93BA}"/>
+                  <a16:creationId xmlns:a16="http://schemas.microsoft.com/office/drawing/2014/main" xmlns="" id="{65D93716-7229-0D2E-185D-EB92654B93BA}"/>
                 </a:ext>
               </a:extLst>
             </p:cNvPr>
@@ -10362,7 +10362,7 @@
           <p:cNvPr id="93" name="Group 92">
             <a:extLst>
               <a:ext uri="{FF2B5EF4-FFF2-40B4-BE49-F238E27FC236}">
-                <a16:creationId xmlns="" xmlns:a16="http://schemas.microsoft.com/office/drawing/2014/main" id="{6CC77FAD-F208-1023-C1AD-9B4BD069D952}"/>
+                <a16:creationId xmlns:a16="http://schemas.microsoft.com/office/drawing/2014/main" xmlns="" id="{6CC77FAD-F208-1023-C1AD-9B4BD069D952}"/>
               </a:ext>
             </a:extLst>
           </p:cNvPr>
@@ -10382,7 +10382,7 @@
             <p:cNvPr id="94" name="Oval 93">
               <a:extLst>
                 <a:ext uri="{FF2B5EF4-FFF2-40B4-BE49-F238E27FC236}">
-                  <a16:creationId xmlns="" xmlns:a16="http://schemas.microsoft.com/office/drawing/2014/main" id="{15B7FCCF-8686-9E22-4553-440516BFB63A}"/>
+                  <a16:creationId xmlns:a16="http://schemas.microsoft.com/office/drawing/2014/main" xmlns="" id="{15B7FCCF-8686-9E22-4553-440516BFB63A}"/>
                 </a:ext>
               </a:extLst>
             </p:cNvPr>
@@ -10441,7 +10441,7 @@
             <p:cNvPr id="95" name="Arc 94">
               <a:extLst>
                 <a:ext uri="{FF2B5EF4-FFF2-40B4-BE49-F238E27FC236}">
-                  <a16:creationId xmlns="" xmlns:a16="http://schemas.microsoft.com/office/drawing/2014/main" id="{4B5A37D7-CA9F-6C35-AF1F-91629A71CD20}"/>
+                  <a16:creationId xmlns:a16="http://schemas.microsoft.com/office/drawing/2014/main" xmlns="" id="{4B5A37D7-CA9F-6C35-AF1F-91629A71CD20}"/>
                 </a:ext>
               </a:extLst>
             </p:cNvPr>
@@ -10494,7 +10494,7 @@
           <p:cNvPr id="96" name="Group 95">
             <a:extLst>
               <a:ext uri="{FF2B5EF4-FFF2-40B4-BE49-F238E27FC236}">
-                <a16:creationId xmlns="" xmlns:a16="http://schemas.microsoft.com/office/drawing/2014/main" id="{B38CBF3E-0B1B-CB43-9A6C-1D5F2F8E3BA8}"/>
+                <a16:creationId xmlns:a16="http://schemas.microsoft.com/office/drawing/2014/main" xmlns="" id="{B38CBF3E-0B1B-CB43-9A6C-1D5F2F8E3BA8}"/>
               </a:ext>
             </a:extLst>
           </p:cNvPr>
@@ -10514,7 +10514,7 @@
             <p:cNvPr id="97" name="Oval 96">
               <a:extLst>
                 <a:ext uri="{FF2B5EF4-FFF2-40B4-BE49-F238E27FC236}">
-                  <a16:creationId xmlns="" xmlns:a16="http://schemas.microsoft.com/office/drawing/2014/main" id="{83CCC6FA-D61D-CB0C-D82F-DDEEE4079669}"/>
+                  <a16:creationId xmlns:a16="http://schemas.microsoft.com/office/drawing/2014/main" xmlns="" id="{83CCC6FA-D61D-CB0C-D82F-DDEEE4079669}"/>
                 </a:ext>
               </a:extLst>
             </p:cNvPr>
@@ -10573,7 +10573,7 @@
             <p:cNvPr id="98" name="Arc 97">
               <a:extLst>
                 <a:ext uri="{FF2B5EF4-FFF2-40B4-BE49-F238E27FC236}">
-                  <a16:creationId xmlns="" xmlns:a16="http://schemas.microsoft.com/office/drawing/2014/main" id="{F47D239B-D49C-21BB-4326-DC03A8D0E15E}"/>
+                  <a16:creationId xmlns:a16="http://schemas.microsoft.com/office/drawing/2014/main" xmlns="" id="{F47D239B-D49C-21BB-4326-DC03A8D0E15E}"/>
                 </a:ext>
               </a:extLst>
             </p:cNvPr>
@@ -10626,7 +10626,7 @@
           <p:cNvPr id="99" name="Group 98">
             <a:extLst>
               <a:ext uri="{FF2B5EF4-FFF2-40B4-BE49-F238E27FC236}">
-                <a16:creationId xmlns="" xmlns:a16="http://schemas.microsoft.com/office/drawing/2014/main" id="{FDC24FAC-131D-564C-7B3D-DB1AD34D4230}"/>
+                <a16:creationId xmlns:a16="http://schemas.microsoft.com/office/drawing/2014/main" xmlns="" id="{FDC24FAC-131D-564C-7B3D-DB1AD34D4230}"/>
               </a:ext>
             </a:extLst>
           </p:cNvPr>
@@ -10646,7 +10646,7 @@
             <p:cNvPr id="100" name="Oval 99">
               <a:extLst>
                 <a:ext uri="{FF2B5EF4-FFF2-40B4-BE49-F238E27FC236}">
-                  <a16:creationId xmlns="" xmlns:a16="http://schemas.microsoft.com/office/drawing/2014/main" id="{09891AC2-67E4-C933-04E7-0EBA5D40DAB9}"/>
+                  <a16:creationId xmlns:a16="http://schemas.microsoft.com/office/drawing/2014/main" xmlns="" id="{09891AC2-67E4-C933-04E7-0EBA5D40DAB9}"/>
                 </a:ext>
               </a:extLst>
             </p:cNvPr>
@@ -10705,7 +10705,7 @@
             <p:cNvPr id="101" name="Arc 100">
               <a:extLst>
                 <a:ext uri="{FF2B5EF4-FFF2-40B4-BE49-F238E27FC236}">
-                  <a16:creationId xmlns="" xmlns:a16="http://schemas.microsoft.com/office/drawing/2014/main" id="{29C2D272-0668-BE4F-E7C1-7D8429020EBF}"/>
+                  <a16:creationId xmlns:a16="http://schemas.microsoft.com/office/drawing/2014/main" xmlns="" id="{29C2D272-0668-BE4F-E7C1-7D8429020EBF}"/>
                 </a:ext>
               </a:extLst>
             </p:cNvPr>
@@ -10758,7 +10758,7 @@
           <p:cNvPr id="102" name="Group 101">
             <a:extLst>
               <a:ext uri="{FF2B5EF4-FFF2-40B4-BE49-F238E27FC236}">
-                <a16:creationId xmlns="" xmlns:a16="http://schemas.microsoft.com/office/drawing/2014/main" id="{B4784D22-3549-A07E-8BE3-6FEFDACFB891}"/>
+                <a16:creationId xmlns:a16="http://schemas.microsoft.com/office/drawing/2014/main" xmlns="" id="{B4784D22-3549-A07E-8BE3-6FEFDACFB891}"/>
               </a:ext>
             </a:extLst>
           </p:cNvPr>
@@ -10778,7 +10778,7 @@
             <p:cNvPr id="103" name="Oval 102">
               <a:extLst>
                 <a:ext uri="{FF2B5EF4-FFF2-40B4-BE49-F238E27FC236}">
-                  <a16:creationId xmlns="" xmlns:a16="http://schemas.microsoft.com/office/drawing/2014/main" id="{333A5B8C-FF23-37F4-0636-E6431D967D24}"/>
+                  <a16:creationId xmlns:a16="http://schemas.microsoft.com/office/drawing/2014/main" xmlns="" id="{333A5B8C-FF23-37F4-0636-E6431D967D24}"/>
                 </a:ext>
               </a:extLst>
             </p:cNvPr>
@@ -10837,7 +10837,7 @@
             <p:cNvPr id="104" name="Arc 103">
               <a:extLst>
                 <a:ext uri="{FF2B5EF4-FFF2-40B4-BE49-F238E27FC236}">
-                  <a16:creationId xmlns="" xmlns:a16="http://schemas.microsoft.com/office/drawing/2014/main" id="{9D6BC3B3-12BE-B8FA-18BC-F6B62D1F6F2C}"/>
+                  <a16:creationId xmlns:a16="http://schemas.microsoft.com/office/drawing/2014/main" xmlns="" id="{9D6BC3B3-12BE-B8FA-18BC-F6B62D1F6F2C}"/>
                 </a:ext>
               </a:extLst>
             </p:cNvPr>
@@ -10890,7 +10890,7 @@
           <p:cNvPr id="105" name="Group 104">
             <a:extLst>
               <a:ext uri="{FF2B5EF4-FFF2-40B4-BE49-F238E27FC236}">
-                <a16:creationId xmlns="" xmlns:a16="http://schemas.microsoft.com/office/drawing/2014/main" id="{AC081016-577A-FED1-CB20-C84262484FFE}"/>
+                <a16:creationId xmlns:a16="http://schemas.microsoft.com/office/drawing/2014/main" xmlns="" id="{AC081016-577A-FED1-CB20-C84262484FFE}"/>
               </a:ext>
             </a:extLst>
           </p:cNvPr>
@@ -10910,7 +10910,7 @@
             <p:cNvPr id="106" name="Oval 105">
               <a:extLst>
                 <a:ext uri="{FF2B5EF4-FFF2-40B4-BE49-F238E27FC236}">
-                  <a16:creationId xmlns="" xmlns:a16="http://schemas.microsoft.com/office/drawing/2014/main" id="{5660644D-C09F-668C-6D85-323D385BAD71}"/>
+                  <a16:creationId xmlns:a16="http://schemas.microsoft.com/office/drawing/2014/main" xmlns="" id="{5660644D-C09F-668C-6D85-323D385BAD71}"/>
                 </a:ext>
               </a:extLst>
             </p:cNvPr>
@@ -10969,7 +10969,7 @@
             <p:cNvPr id="107" name="Arc 106">
               <a:extLst>
                 <a:ext uri="{FF2B5EF4-FFF2-40B4-BE49-F238E27FC236}">
-                  <a16:creationId xmlns="" xmlns:a16="http://schemas.microsoft.com/office/drawing/2014/main" id="{A1A82F10-195A-E5EC-431C-D32796272193}"/>
+                  <a16:creationId xmlns:a16="http://schemas.microsoft.com/office/drawing/2014/main" xmlns="" id="{A1A82F10-195A-E5EC-431C-D32796272193}"/>
                 </a:ext>
               </a:extLst>
             </p:cNvPr>
@@ -11022,7 +11022,7 @@
           <p:cNvPr id="108" name="Group 107">
             <a:extLst>
               <a:ext uri="{FF2B5EF4-FFF2-40B4-BE49-F238E27FC236}">
-                <a16:creationId xmlns="" xmlns:a16="http://schemas.microsoft.com/office/drawing/2014/main" id="{F3119011-876C-B97A-DE38-97DE4FF2BC7B}"/>
+                <a16:creationId xmlns:a16="http://schemas.microsoft.com/office/drawing/2014/main" xmlns="" id="{F3119011-876C-B97A-DE38-97DE4FF2BC7B}"/>
               </a:ext>
             </a:extLst>
           </p:cNvPr>
@@ -11042,7 +11042,7 @@
             <p:cNvPr id="109" name="Oval 108">
               <a:extLst>
                 <a:ext uri="{FF2B5EF4-FFF2-40B4-BE49-F238E27FC236}">
-                  <a16:creationId xmlns="" xmlns:a16="http://schemas.microsoft.com/office/drawing/2014/main" id="{B047AB49-160A-EAFB-151E-981CCFC37DCF}"/>
+                  <a16:creationId xmlns:a16="http://schemas.microsoft.com/office/drawing/2014/main" xmlns="" id="{B047AB49-160A-EAFB-151E-981CCFC37DCF}"/>
                 </a:ext>
               </a:extLst>
             </p:cNvPr>
@@ -11101,7 +11101,7 @@
             <p:cNvPr id="110" name="Arc 109">
               <a:extLst>
                 <a:ext uri="{FF2B5EF4-FFF2-40B4-BE49-F238E27FC236}">
-                  <a16:creationId xmlns="" xmlns:a16="http://schemas.microsoft.com/office/drawing/2014/main" id="{57E82760-2743-C4FF-A5C0-C8AC26F18E5F}"/>
+                  <a16:creationId xmlns:a16="http://schemas.microsoft.com/office/drawing/2014/main" xmlns="" id="{57E82760-2743-C4FF-A5C0-C8AC26F18E5F}"/>
                 </a:ext>
               </a:extLst>
             </p:cNvPr>
@@ -11154,7 +11154,7 @@
           <p:cNvPr id="111" name="Group 110">
             <a:extLst>
               <a:ext uri="{FF2B5EF4-FFF2-40B4-BE49-F238E27FC236}">
-                <a16:creationId xmlns="" xmlns:a16="http://schemas.microsoft.com/office/drawing/2014/main" id="{0F115EEA-7C78-3DC1-9252-A29FCE129D36}"/>
+                <a16:creationId xmlns:a16="http://schemas.microsoft.com/office/drawing/2014/main" xmlns="" id="{0F115EEA-7C78-3DC1-9252-A29FCE129D36}"/>
               </a:ext>
             </a:extLst>
           </p:cNvPr>
@@ -11174,7 +11174,7 @@
             <p:cNvPr id="112" name="Oval 111">
               <a:extLst>
                 <a:ext uri="{FF2B5EF4-FFF2-40B4-BE49-F238E27FC236}">
-                  <a16:creationId xmlns="" xmlns:a16="http://schemas.microsoft.com/office/drawing/2014/main" id="{B0F510D5-0396-460C-CA3A-325D9E0AA995}"/>
+                  <a16:creationId xmlns:a16="http://schemas.microsoft.com/office/drawing/2014/main" xmlns="" id="{B0F510D5-0396-460C-CA3A-325D9E0AA995}"/>
                 </a:ext>
               </a:extLst>
             </p:cNvPr>
@@ -11233,7 +11233,7 @@
             <p:cNvPr id="113" name="Arc 112">
               <a:extLst>
                 <a:ext uri="{FF2B5EF4-FFF2-40B4-BE49-F238E27FC236}">
-                  <a16:creationId xmlns="" xmlns:a16="http://schemas.microsoft.com/office/drawing/2014/main" id="{1F90134C-5284-56BE-F6E2-CCBE31E6F056}"/>
+                  <a16:creationId xmlns:a16="http://schemas.microsoft.com/office/drawing/2014/main" xmlns="" id="{1F90134C-5284-56BE-F6E2-CCBE31E6F056}"/>
                 </a:ext>
               </a:extLst>
             </p:cNvPr>
@@ -11286,7 +11286,7 @@
           <p:cNvPr id="114" name="Group 113">
             <a:extLst>
               <a:ext uri="{FF2B5EF4-FFF2-40B4-BE49-F238E27FC236}">
-                <a16:creationId xmlns="" xmlns:a16="http://schemas.microsoft.com/office/drawing/2014/main" id="{DBDD9DAE-4A8B-98DA-B2C6-A04A05C72F81}"/>
+                <a16:creationId xmlns:a16="http://schemas.microsoft.com/office/drawing/2014/main" xmlns="" id="{DBDD9DAE-4A8B-98DA-B2C6-A04A05C72F81}"/>
               </a:ext>
             </a:extLst>
           </p:cNvPr>
@@ -11306,7 +11306,7 @@
             <p:cNvPr id="115" name="Oval 114">
               <a:extLst>
                 <a:ext uri="{FF2B5EF4-FFF2-40B4-BE49-F238E27FC236}">
-                  <a16:creationId xmlns="" xmlns:a16="http://schemas.microsoft.com/office/drawing/2014/main" id="{19DDBB64-A28C-9FFB-15BE-8934F26C2C31}"/>
+                  <a16:creationId xmlns:a16="http://schemas.microsoft.com/office/drawing/2014/main" xmlns="" id="{19DDBB64-A28C-9FFB-15BE-8934F26C2C31}"/>
                 </a:ext>
               </a:extLst>
             </p:cNvPr>
@@ -11365,7 +11365,7 @@
             <p:cNvPr id="116" name="Arc 115">
               <a:extLst>
                 <a:ext uri="{FF2B5EF4-FFF2-40B4-BE49-F238E27FC236}">
-                  <a16:creationId xmlns="" xmlns:a16="http://schemas.microsoft.com/office/drawing/2014/main" id="{0C2CB9C5-CF04-5A3B-A5DF-01951E1B43C3}"/>
+                  <a16:creationId xmlns:a16="http://schemas.microsoft.com/office/drawing/2014/main" xmlns="" id="{0C2CB9C5-CF04-5A3B-A5DF-01951E1B43C3}"/>
                 </a:ext>
               </a:extLst>
             </p:cNvPr>
@@ -11418,7 +11418,7 @@
           <p:cNvPr id="117" name="Group 116">
             <a:extLst>
               <a:ext uri="{FF2B5EF4-FFF2-40B4-BE49-F238E27FC236}">
-                <a16:creationId xmlns="" xmlns:a16="http://schemas.microsoft.com/office/drawing/2014/main" id="{00801F4C-8316-5A72-F42F-9772625E11B7}"/>
+                <a16:creationId xmlns:a16="http://schemas.microsoft.com/office/drawing/2014/main" xmlns="" id="{00801F4C-8316-5A72-F42F-9772625E11B7}"/>
               </a:ext>
             </a:extLst>
           </p:cNvPr>
@@ -11438,7 +11438,7 @@
             <p:cNvPr id="118" name="Oval 117">
               <a:extLst>
                 <a:ext uri="{FF2B5EF4-FFF2-40B4-BE49-F238E27FC236}">
-                  <a16:creationId xmlns="" xmlns:a16="http://schemas.microsoft.com/office/drawing/2014/main" id="{CA33F0B5-12D4-90AF-6393-67364390577E}"/>
+                  <a16:creationId xmlns:a16="http://schemas.microsoft.com/office/drawing/2014/main" xmlns="" id="{CA33F0B5-12D4-90AF-6393-67364390577E}"/>
                 </a:ext>
               </a:extLst>
             </p:cNvPr>
@@ -11497,7 +11497,7 @@
             <p:cNvPr id="119" name="Arc 118">
               <a:extLst>
                 <a:ext uri="{FF2B5EF4-FFF2-40B4-BE49-F238E27FC236}">
-                  <a16:creationId xmlns="" xmlns:a16="http://schemas.microsoft.com/office/drawing/2014/main" id="{3078780A-1850-DCF5-B468-9F7CE8FE01FF}"/>
+                  <a16:creationId xmlns:a16="http://schemas.microsoft.com/office/drawing/2014/main" xmlns="" id="{3078780A-1850-DCF5-B468-9F7CE8FE01FF}"/>
                 </a:ext>
               </a:extLst>
             </p:cNvPr>
@@ -11550,7 +11550,7 @@
           <p:cNvPr id="120" name="Group 119">
             <a:extLst>
               <a:ext uri="{FF2B5EF4-FFF2-40B4-BE49-F238E27FC236}">
-                <a16:creationId xmlns="" xmlns:a16="http://schemas.microsoft.com/office/drawing/2014/main" id="{124980AA-157C-2AFF-BD89-DBE2A5AEF073}"/>
+                <a16:creationId xmlns:a16="http://schemas.microsoft.com/office/drawing/2014/main" xmlns="" id="{124980AA-157C-2AFF-BD89-DBE2A5AEF073}"/>
               </a:ext>
             </a:extLst>
           </p:cNvPr>
@@ -11570,7 +11570,7 @@
             <p:cNvPr id="121" name="Oval 120">
               <a:extLst>
                 <a:ext uri="{FF2B5EF4-FFF2-40B4-BE49-F238E27FC236}">
-                  <a16:creationId xmlns="" xmlns:a16="http://schemas.microsoft.com/office/drawing/2014/main" id="{30D9338D-C487-4C9C-E00C-B4B47DD73A24}"/>
+                  <a16:creationId xmlns:a16="http://schemas.microsoft.com/office/drawing/2014/main" xmlns="" id="{30D9338D-C487-4C9C-E00C-B4B47DD73A24}"/>
                 </a:ext>
               </a:extLst>
             </p:cNvPr>
@@ -11629,7 +11629,7 @@
             <p:cNvPr id="122" name="Arc 121">
               <a:extLst>
                 <a:ext uri="{FF2B5EF4-FFF2-40B4-BE49-F238E27FC236}">
-                  <a16:creationId xmlns="" xmlns:a16="http://schemas.microsoft.com/office/drawing/2014/main" id="{FD010B24-85D4-B5AB-51F0-8C87B98564E3}"/>
+                  <a16:creationId xmlns:a16="http://schemas.microsoft.com/office/drawing/2014/main" xmlns="" id="{FD010B24-85D4-B5AB-51F0-8C87B98564E3}"/>
                 </a:ext>
               </a:extLst>
             </p:cNvPr>
@@ -11682,7 +11682,7 @@
           <p:cNvPr id="123" name="Rectangle 122">
             <a:extLst>
               <a:ext uri="{FF2B5EF4-FFF2-40B4-BE49-F238E27FC236}">
-                <a16:creationId xmlns="" xmlns:a16="http://schemas.microsoft.com/office/drawing/2014/main" id="{8D4C1EDA-9110-0D82-2ABF-69D43374D24D}"/>
+                <a16:creationId xmlns:a16="http://schemas.microsoft.com/office/drawing/2014/main" xmlns="" id="{8D4C1EDA-9110-0D82-2ABF-69D43374D24D}"/>
               </a:ext>
             </a:extLst>
           </p:cNvPr>
@@ -11692,7 +11692,7 @@
         <p:spPr>
           <a:xfrm>
             <a:off x="6561178" y="414992"/>
-            <a:ext cx="4921112" cy="5998565"/>
+            <a:ext cx="4921112" cy="5573834"/>
           </a:xfrm>
           <a:prstGeom prst="rect">
             <a:avLst/>
@@ -11744,22 +11744,29 @@
               <a:buChar char="ü"/>
             </a:pPr>
             <a:r>
-              <a:rPr lang="en-US" sz="2000" dirty="0" smtClean="0">
+              <a:rPr lang="en-US" sz="2400" dirty="0" smtClean="0">
                 <a:latin typeface="Times New Roman" panose="02020603050405020304" pitchFamily="18" charset="0"/>
                 <a:ea typeface="Times New Roman" panose="02020603050405020304" pitchFamily="18" charset="0"/>
                 <a:cs typeface="Arial" panose="020B0604020202020204" pitchFamily="34" charset="0"/>
               </a:rPr>
-              <a:t>EU is the largest importer region of Pakistani goods ($9.82 billion in 2025-2026). More than 30% exports send to EU members</a:t>
+              <a:t>EU is the largest importer region of Pakistani goods ($9.82 billion in 2025-2026). More than 30% exports send to EU members.</a:t>
             </a:r>
-            <a:r>
-              <a:rPr lang="en-US" sz="2000" dirty="0" smtClean="0">
-                <a:latin typeface="Times New Roman" panose="02020603050405020304" pitchFamily="18" charset="0"/>
-                <a:ea typeface="Times New Roman" panose="02020603050405020304" pitchFamily="18" charset="0"/>
-                <a:cs typeface="Arial" panose="020B0604020202020204" pitchFamily="34" charset="0"/>
-              </a:rPr>
-              <a:t>.</a:t>
-            </a:r>
-            <a:endParaRPr lang="en-US" sz="2000" dirty="0">
+            <a:endParaRPr lang="en-US" sz="2400" dirty="0">
+              <a:latin typeface="Times New Roman" panose="02020603050405020304" pitchFamily="18" charset="0"/>
+              <a:ea typeface="Times New Roman" panose="02020603050405020304" pitchFamily="18" charset="0"/>
+              <a:cs typeface="Arial" panose="020B0604020202020204" pitchFamily="34" charset="0"/>
+            </a:endParaRPr>
+          </a:p>
+          <a:p>
+            <a:pPr>
+              <a:lnSpc>
+                <a:spcPct val="115000"/>
+              </a:lnSpc>
+              <a:spcAft>
+                <a:spcPts val="1000"/>
+              </a:spcAft>
+            </a:pPr>
+            <a:endParaRPr lang="en-US" sz="2400" dirty="0">
               <a:latin typeface="Times New Roman" panose="02020603050405020304" pitchFamily="18" charset="0"/>
               <a:ea typeface="Times New Roman" panose="02020603050405020304" pitchFamily="18" charset="0"/>
               <a:cs typeface="Arial" panose="020B0604020202020204" pitchFamily="34" charset="0"/>
@@ -11777,7 +11784,7 @@
               <a:buChar char="ü"/>
             </a:pPr>
             <a:r>
-              <a:rPr lang="en-US" sz="2000" dirty="0" smtClean="0">
+              <a:rPr lang="en-US" sz="2400" dirty="0" smtClean="0">
                 <a:latin typeface="Times New Roman" panose="02020603050405020304" pitchFamily="18" charset="0"/>
                 <a:ea typeface="Calibri" panose="020F0502020204030204" pitchFamily="34" charset="0"/>
                 <a:cs typeface="Arial" panose="020B0604020202020204" pitchFamily="34" charset="0"/>
@@ -11785,7 +11792,7 @@
               <a:t>Pakistan exports Textile, Cotton, Fabric, Leather goods, Sports goods, IT, </a:t>
             </a:r>
             <a:r>
-              <a:rPr lang="en-US" sz="2000" dirty="0" err="1" smtClean="0">
+              <a:rPr lang="en-US" sz="2400" dirty="0" err="1" smtClean="0">
                 <a:latin typeface="Times New Roman" panose="02020603050405020304" pitchFamily="18" charset="0"/>
                 <a:ea typeface="Calibri" panose="020F0502020204030204" pitchFamily="34" charset="0"/>
                 <a:cs typeface="Arial" panose="020B0604020202020204" pitchFamily="34" charset="0"/>
@@ -11793,89 +11800,14 @@
               <a:t>Agri</a:t>
             </a:r>
             <a:r>
-              <a:rPr lang="en-US" sz="2000" dirty="0" smtClean="0">
+              <a:rPr lang="en-US" sz="2400" dirty="0" smtClean="0">
                 <a:latin typeface="Times New Roman" panose="02020603050405020304" pitchFamily="18" charset="0"/>
                 <a:ea typeface="Calibri" panose="020F0502020204030204" pitchFamily="34" charset="0"/>
                 <a:cs typeface="Arial" panose="020B0604020202020204" pitchFamily="34" charset="0"/>
               </a:rPr>
               <a:t>-food and Sea-food to EU. </a:t>
             </a:r>
-            <a:endParaRPr lang="en-US" sz="2000" dirty="0" smtClean="0">
-              <a:latin typeface="Times New Roman" panose="02020603050405020304" pitchFamily="18" charset="0"/>
-              <a:ea typeface="Calibri" panose="020F0502020204030204" pitchFamily="34" charset="0"/>
-              <a:cs typeface="Arial" panose="020B0604020202020204" pitchFamily="34" charset="0"/>
-            </a:endParaRPr>
-          </a:p>
-          <a:p>
-            <a:pPr marL="457200" indent="-457200">
-              <a:lnSpc>
-                <a:spcPct val="115000"/>
-              </a:lnSpc>
-              <a:spcAft>
-                <a:spcPts val="1000"/>
-              </a:spcAft>
-              <a:buFont typeface="Wingdings" panose="05000000000000000000" pitchFamily="2" charset="2"/>
-              <a:buChar char="ü"/>
-            </a:pPr>
-            <a:r>
-              <a:rPr lang="en-US" sz="2000" dirty="0" smtClean="0">
-                <a:latin typeface="Times New Roman" panose="02020603050405020304" pitchFamily="18" charset="0"/>
-                <a:ea typeface="Calibri" panose="020F0502020204030204" pitchFamily="34" charset="0"/>
-                <a:cs typeface="Arial" panose="020B0604020202020204" pitchFamily="34" charset="0"/>
-              </a:rPr>
-              <a:t>Only one website in </a:t>
-            </a:r>
-            <a:r>
-              <a:rPr lang="en-US" sz="2000" dirty="0">
-                <a:latin typeface="Times New Roman" panose="02020603050405020304" pitchFamily="18" charset="0"/>
-                <a:ea typeface="Calibri" panose="020F0502020204030204" pitchFamily="34" charset="0"/>
-                <a:cs typeface="Arial" panose="020B0604020202020204" pitchFamily="34" charset="0"/>
-              </a:rPr>
-              <a:t>Pakistan </a:t>
-            </a:r>
-            <a:r>
-              <a:rPr lang="en-US" sz="2000" dirty="0">
-                <a:latin typeface="Times New Roman" panose="02020603050405020304" pitchFamily="18" charset="0"/>
-                <a:ea typeface="Calibri" panose="020F0502020204030204" pitchFamily="34" charset="0"/>
-                <a:cs typeface="Arial" panose="020B0604020202020204" pitchFamily="34" charset="0"/>
-                <a:hlinkClick r:id="rId2"/>
-              </a:rPr>
-              <a:t>https://www.pharmatrax.net/digital-product-passport-dpp</a:t>
-            </a:r>
-            <a:r>
-              <a:rPr lang="en-US" sz="2000" dirty="0" smtClean="0">
-                <a:latin typeface="Times New Roman" panose="02020603050405020304" pitchFamily="18" charset="0"/>
-                <a:ea typeface="Calibri" panose="020F0502020204030204" pitchFamily="34" charset="0"/>
-                <a:cs typeface="Arial" panose="020B0604020202020204" pitchFamily="34" charset="0"/>
-                <a:hlinkClick r:id="rId2"/>
-              </a:rPr>
-              <a:t>/</a:t>
-            </a:r>
-            <a:r>
-              <a:rPr lang="en-US" sz="2000" dirty="0" smtClean="0">
-                <a:latin typeface="Times New Roman" panose="02020603050405020304" pitchFamily="18" charset="0"/>
-                <a:ea typeface="Calibri" panose="020F0502020204030204" pitchFamily="34" charset="0"/>
-                <a:cs typeface="Arial" panose="020B0604020202020204" pitchFamily="34" charset="0"/>
-              </a:rPr>
-              <a:t> provides the service to </a:t>
-            </a:r>
-            <a:r>
-              <a:rPr lang="en-US" sz="2000" dirty="0" err="1" smtClean="0">
-                <a:latin typeface="Times New Roman" panose="02020603050405020304" pitchFamily="18" charset="0"/>
-                <a:ea typeface="Calibri" panose="020F0502020204030204" pitchFamily="34" charset="0"/>
-                <a:cs typeface="Arial" panose="020B0604020202020204" pitchFamily="34" charset="0"/>
-              </a:rPr>
-              <a:t>Pharma</a:t>
-            </a:r>
-            <a:r>
-              <a:rPr lang="en-US" sz="2000" dirty="0" smtClean="0">
-                <a:latin typeface="Times New Roman" panose="02020603050405020304" pitchFamily="18" charset="0"/>
-                <a:ea typeface="Calibri" panose="020F0502020204030204" pitchFamily="34" charset="0"/>
-                <a:cs typeface="Arial" panose="020B0604020202020204" pitchFamily="34" charset="0"/>
-              </a:rPr>
-              <a:t>, Cosmetics, Food and Beverage Industries.</a:t>
-            </a:r>
-            <a:endParaRPr lang="en-US" dirty="0">
+            <a:endParaRPr lang="en-US" sz="2000" dirty="0">
               <a:latin typeface="Calibri" panose="020F0502020204030204" pitchFamily="34" charset="0"/>
               <a:ea typeface="Calibri" panose="020F0502020204030204" pitchFamily="34" charset="0"/>
               <a:cs typeface="Arial" panose="020B0604020202020204" pitchFamily="34" charset="0"/>
@@ -11923,7 +11855,7 @@
         <p:cNvPr id="1" name="">
           <a:extLst>
             <a:ext uri="{FF2B5EF4-FFF2-40B4-BE49-F238E27FC236}">
-              <a16:creationId xmlns="" xmlns:a16="http://schemas.microsoft.com/office/drawing/2014/main" id="{AB49B653-F82D-52DD-3373-EF7CD343807B}"/>
+              <a16:creationId xmlns:a16="http://schemas.microsoft.com/office/drawing/2014/main" xmlns="" id="{AB49B653-F82D-52DD-3373-EF7CD343807B}"/>
             </a:ext>
           </a:extLst>
         </p:cNvPr>
@@ -11943,7 +11875,7 @@
           <p:cNvPr id="5" name="Rectangle 4">
             <a:extLst>
               <a:ext uri="{FF2B5EF4-FFF2-40B4-BE49-F238E27FC236}">
-                <a16:creationId xmlns="" xmlns:a16="http://schemas.microsoft.com/office/drawing/2014/main" id="{0DBF747C-C898-FAC1-A684-D7D009857C24}"/>
+                <a16:creationId xmlns:a16="http://schemas.microsoft.com/office/drawing/2014/main" xmlns="" id="{0DBF747C-C898-FAC1-A684-D7D009857C24}"/>
               </a:ext>
             </a:extLst>
           </p:cNvPr>
@@ -11999,7 +11931,7 @@
           <p:cNvPr id="4" name="Rectangle 3">
             <a:extLst>
               <a:ext uri="{FF2B5EF4-FFF2-40B4-BE49-F238E27FC236}">
-                <a16:creationId xmlns="" xmlns:a16="http://schemas.microsoft.com/office/drawing/2014/main" id="{7B98B2E6-66EB-FA16-6CAA-7328B9409A56}"/>
+                <a16:creationId xmlns:a16="http://schemas.microsoft.com/office/drawing/2014/main" xmlns="" id="{7B98B2E6-66EB-FA16-6CAA-7328B9409A56}"/>
               </a:ext>
             </a:extLst>
           </p:cNvPr>
@@ -12236,7 +12168,7 @@
           <p:cNvPr id="6" name="Oval 5">
             <a:extLst>
               <a:ext uri="{FF2B5EF4-FFF2-40B4-BE49-F238E27FC236}">
-                <a16:creationId xmlns="" xmlns:a16="http://schemas.microsoft.com/office/drawing/2014/main" id="{18F27E5F-8AB7-C933-B1F5-63F52B4EBC77}"/>
+                <a16:creationId xmlns:a16="http://schemas.microsoft.com/office/drawing/2014/main" xmlns="" id="{18F27E5F-8AB7-C933-B1F5-63F52B4EBC77}"/>
               </a:ext>
             </a:extLst>
           </p:cNvPr>
@@ -12295,7 +12227,7 @@
           <p:cNvPr id="7" name="Oval 6">
             <a:extLst>
               <a:ext uri="{FF2B5EF4-FFF2-40B4-BE49-F238E27FC236}">
-                <a16:creationId xmlns="" xmlns:a16="http://schemas.microsoft.com/office/drawing/2014/main" id="{84EEC563-2DED-4416-2C87-31455035FB0C}"/>
+                <a16:creationId xmlns:a16="http://schemas.microsoft.com/office/drawing/2014/main" xmlns="" id="{84EEC563-2DED-4416-2C87-31455035FB0C}"/>
               </a:ext>
             </a:extLst>
           </p:cNvPr>
@@ -12354,7 +12286,7 @@
           <p:cNvPr id="8" name="Oval 7">
             <a:extLst>
               <a:ext uri="{FF2B5EF4-FFF2-40B4-BE49-F238E27FC236}">
-                <a16:creationId xmlns="" xmlns:a16="http://schemas.microsoft.com/office/drawing/2014/main" id="{E40D0E73-9F08-859E-43E2-25EB19218526}"/>
+                <a16:creationId xmlns:a16="http://schemas.microsoft.com/office/drawing/2014/main" xmlns="" id="{E40D0E73-9F08-859E-43E2-25EB19218526}"/>
               </a:ext>
             </a:extLst>
           </p:cNvPr>
@@ -12413,7 +12345,7 @@
           <p:cNvPr id="9" name="Oval 8">
             <a:extLst>
               <a:ext uri="{FF2B5EF4-FFF2-40B4-BE49-F238E27FC236}">
-                <a16:creationId xmlns="" xmlns:a16="http://schemas.microsoft.com/office/drawing/2014/main" id="{4DB5A593-0CFB-36F3-F8DA-C3F3A2CFB622}"/>
+                <a16:creationId xmlns:a16="http://schemas.microsoft.com/office/drawing/2014/main" xmlns="" id="{4DB5A593-0CFB-36F3-F8DA-C3F3A2CFB622}"/>
               </a:ext>
             </a:extLst>
           </p:cNvPr>
@@ -12472,7 +12404,7 @@
           <p:cNvPr id="10" name="Oval 9">
             <a:extLst>
               <a:ext uri="{FF2B5EF4-FFF2-40B4-BE49-F238E27FC236}">
-                <a16:creationId xmlns="" xmlns:a16="http://schemas.microsoft.com/office/drawing/2014/main" id="{AA568633-31CA-A32D-D861-3B1240EC81B6}"/>
+                <a16:creationId xmlns:a16="http://schemas.microsoft.com/office/drawing/2014/main" xmlns="" id="{AA568633-31CA-A32D-D861-3B1240EC81B6}"/>
               </a:ext>
             </a:extLst>
           </p:cNvPr>
@@ -12531,7 +12463,7 @@
           <p:cNvPr id="11" name="Oval 10">
             <a:extLst>
               <a:ext uri="{FF2B5EF4-FFF2-40B4-BE49-F238E27FC236}">
-                <a16:creationId xmlns="" xmlns:a16="http://schemas.microsoft.com/office/drawing/2014/main" id="{D0946FD7-DEB2-0AEE-D3E7-FAABAC2357AF}"/>
+                <a16:creationId xmlns:a16="http://schemas.microsoft.com/office/drawing/2014/main" xmlns="" id="{D0946FD7-DEB2-0AEE-D3E7-FAABAC2357AF}"/>
               </a:ext>
             </a:extLst>
           </p:cNvPr>
@@ -12590,7 +12522,7 @@
           <p:cNvPr id="12" name="Oval 11">
             <a:extLst>
               <a:ext uri="{FF2B5EF4-FFF2-40B4-BE49-F238E27FC236}">
-                <a16:creationId xmlns="" xmlns:a16="http://schemas.microsoft.com/office/drawing/2014/main" id="{8D9F2A4B-9D87-7FFE-1886-9FC01DA34065}"/>
+                <a16:creationId xmlns:a16="http://schemas.microsoft.com/office/drawing/2014/main" xmlns="" id="{8D9F2A4B-9D87-7FFE-1886-9FC01DA34065}"/>
               </a:ext>
             </a:extLst>
           </p:cNvPr>
@@ -12649,7 +12581,7 @@
           <p:cNvPr id="13" name="Oval 12">
             <a:extLst>
               <a:ext uri="{FF2B5EF4-FFF2-40B4-BE49-F238E27FC236}">
-                <a16:creationId xmlns="" xmlns:a16="http://schemas.microsoft.com/office/drawing/2014/main" id="{2D1C037B-9232-194A-F63E-D1198BD5BECB}"/>
+                <a16:creationId xmlns:a16="http://schemas.microsoft.com/office/drawing/2014/main" xmlns="" id="{2D1C037B-9232-194A-F63E-D1198BD5BECB}"/>
               </a:ext>
             </a:extLst>
           </p:cNvPr>
@@ -12708,7 +12640,7 @@
           <p:cNvPr id="14" name="Oval 13">
             <a:extLst>
               <a:ext uri="{FF2B5EF4-FFF2-40B4-BE49-F238E27FC236}">
-                <a16:creationId xmlns="" xmlns:a16="http://schemas.microsoft.com/office/drawing/2014/main" id="{97981C1E-3857-DF09-0177-8A06F7B8C93F}"/>
+                <a16:creationId xmlns:a16="http://schemas.microsoft.com/office/drawing/2014/main" xmlns="" id="{97981C1E-3857-DF09-0177-8A06F7B8C93F}"/>
               </a:ext>
             </a:extLst>
           </p:cNvPr>
@@ -12767,7 +12699,7 @@
           <p:cNvPr id="15" name="Oval 14">
             <a:extLst>
               <a:ext uri="{FF2B5EF4-FFF2-40B4-BE49-F238E27FC236}">
-                <a16:creationId xmlns="" xmlns:a16="http://schemas.microsoft.com/office/drawing/2014/main" id="{041C004F-2B07-5BE4-E16D-AFA271378B4F}"/>
+                <a16:creationId xmlns:a16="http://schemas.microsoft.com/office/drawing/2014/main" xmlns="" id="{041C004F-2B07-5BE4-E16D-AFA271378B4F}"/>
               </a:ext>
             </a:extLst>
           </p:cNvPr>
@@ -12826,7 +12758,7 @@
           <p:cNvPr id="16" name="Oval 15">
             <a:extLst>
               <a:ext uri="{FF2B5EF4-FFF2-40B4-BE49-F238E27FC236}">
-                <a16:creationId xmlns="" xmlns:a16="http://schemas.microsoft.com/office/drawing/2014/main" id="{1767DF3F-7FF7-2A4C-6211-20A32CA30D60}"/>
+                <a16:creationId xmlns:a16="http://schemas.microsoft.com/office/drawing/2014/main" xmlns="" id="{1767DF3F-7FF7-2A4C-6211-20A32CA30D60}"/>
               </a:ext>
             </a:extLst>
           </p:cNvPr>
@@ -12885,7 +12817,7 @@
           <p:cNvPr id="17" name="Oval 16">
             <a:extLst>
               <a:ext uri="{FF2B5EF4-FFF2-40B4-BE49-F238E27FC236}">
-                <a16:creationId xmlns="" xmlns:a16="http://schemas.microsoft.com/office/drawing/2014/main" id="{0989497C-10B7-BD33-02AC-312809AFEA7E}"/>
+                <a16:creationId xmlns:a16="http://schemas.microsoft.com/office/drawing/2014/main" xmlns="" id="{0989497C-10B7-BD33-02AC-312809AFEA7E}"/>
               </a:ext>
             </a:extLst>
           </p:cNvPr>
@@ -12944,7 +12876,7 @@
           <p:cNvPr id="18" name="Oval 17">
             <a:extLst>
               <a:ext uri="{FF2B5EF4-FFF2-40B4-BE49-F238E27FC236}">
-                <a16:creationId xmlns="" xmlns:a16="http://schemas.microsoft.com/office/drawing/2014/main" id="{EC170CAD-85DD-951C-2E45-44F4B3207F5A}"/>
+                <a16:creationId xmlns:a16="http://schemas.microsoft.com/office/drawing/2014/main" xmlns="" id="{EC170CAD-85DD-951C-2E45-44F4B3207F5A}"/>
               </a:ext>
             </a:extLst>
           </p:cNvPr>
@@ -13003,7 +12935,7 @@
           <p:cNvPr id="19" name="Oval 18">
             <a:extLst>
               <a:ext uri="{FF2B5EF4-FFF2-40B4-BE49-F238E27FC236}">
-                <a16:creationId xmlns="" xmlns:a16="http://schemas.microsoft.com/office/drawing/2014/main" id="{6CBFAEB0-427B-C183-269E-B7F22C532425}"/>
+                <a16:creationId xmlns:a16="http://schemas.microsoft.com/office/drawing/2014/main" xmlns="" id="{6CBFAEB0-427B-C183-269E-B7F22C532425}"/>
               </a:ext>
             </a:extLst>
           </p:cNvPr>
@@ -13062,7 +12994,7 @@
           <p:cNvPr id="20" name="Oval 19">
             <a:extLst>
               <a:ext uri="{FF2B5EF4-FFF2-40B4-BE49-F238E27FC236}">
-                <a16:creationId xmlns="" xmlns:a16="http://schemas.microsoft.com/office/drawing/2014/main" id="{1A865A29-9259-99F5-30D2-7D9D77A07673}"/>
+                <a16:creationId xmlns:a16="http://schemas.microsoft.com/office/drawing/2014/main" xmlns="" id="{1A865A29-9259-99F5-30D2-7D9D77A07673}"/>
               </a:ext>
             </a:extLst>
           </p:cNvPr>
@@ -13121,7 +13053,7 @@
           <p:cNvPr id="21" name="Oval 20">
             <a:extLst>
               <a:ext uri="{FF2B5EF4-FFF2-40B4-BE49-F238E27FC236}">
-                <a16:creationId xmlns="" xmlns:a16="http://schemas.microsoft.com/office/drawing/2014/main" id="{A9BD25F8-8B1D-B8B7-5509-6B3900E77488}"/>
+                <a16:creationId xmlns:a16="http://schemas.microsoft.com/office/drawing/2014/main" xmlns="" id="{A9BD25F8-8B1D-B8B7-5509-6B3900E77488}"/>
               </a:ext>
             </a:extLst>
           </p:cNvPr>
@@ -13180,7 +13112,7 @@
           <p:cNvPr id="22" name="Oval 21">
             <a:extLst>
               <a:ext uri="{FF2B5EF4-FFF2-40B4-BE49-F238E27FC236}">
-                <a16:creationId xmlns="" xmlns:a16="http://schemas.microsoft.com/office/drawing/2014/main" id="{8C325336-0110-64E7-17C1-798D8BA62F8F}"/>
+                <a16:creationId xmlns:a16="http://schemas.microsoft.com/office/drawing/2014/main" xmlns="" id="{8C325336-0110-64E7-17C1-798D8BA62F8F}"/>
               </a:ext>
             </a:extLst>
           </p:cNvPr>
@@ -13239,7 +13171,7 @@
           <p:cNvPr id="23" name="Oval 22">
             <a:extLst>
               <a:ext uri="{FF2B5EF4-FFF2-40B4-BE49-F238E27FC236}">
-                <a16:creationId xmlns="" xmlns:a16="http://schemas.microsoft.com/office/drawing/2014/main" id="{7ED93CA2-6975-2E8B-C7B5-B07148930960}"/>
+                <a16:creationId xmlns:a16="http://schemas.microsoft.com/office/drawing/2014/main" xmlns="" id="{7ED93CA2-6975-2E8B-C7B5-B07148930960}"/>
               </a:ext>
             </a:extLst>
           </p:cNvPr>
@@ -13298,7 +13230,7 @@
           <p:cNvPr id="24" name="Oval 23">
             <a:extLst>
               <a:ext uri="{FF2B5EF4-FFF2-40B4-BE49-F238E27FC236}">
-                <a16:creationId xmlns="" xmlns:a16="http://schemas.microsoft.com/office/drawing/2014/main" id="{6E252A62-4114-2C2C-0938-450CA28947E9}"/>
+                <a16:creationId xmlns:a16="http://schemas.microsoft.com/office/drawing/2014/main" xmlns="" id="{6E252A62-4114-2C2C-0938-450CA28947E9}"/>
               </a:ext>
             </a:extLst>
           </p:cNvPr>
@@ -13357,7 +13289,7 @@
           <p:cNvPr id="25" name="Oval 24">
             <a:extLst>
               <a:ext uri="{FF2B5EF4-FFF2-40B4-BE49-F238E27FC236}">
-                <a16:creationId xmlns="" xmlns:a16="http://schemas.microsoft.com/office/drawing/2014/main" id="{15145535-565B-35B3-4181-D04856B0357E}"/>
+                <a16:creationId xmlns:a16="http://schemas.microsoft.com/office/drawing/2014/main" xmlns="" id="{15145535-565B-35B3-4181-D04856B0357E}"/>
               </a:ext>
             </a:extLst>
           </p:cNvPr>
@@ -13416,7 +13348,7 @@
           <p:cNvPr id="26" name="Oval 25">
             <a:extLst>
               <a:ext uri="{FF2B5EF4-FFF2-40B4-BE49-F238E27FC236}">
-                <a16:creationId xmlns="" xmlns:a16="http://schemas.microsoft.com/office/drawing/2014/main" id="{677DA24D-DD66-AAFE-2F4E-3D71AA3E6AB0}"/>
+                <a16:creationId xmlns:a16="http://schemas.microsoft.com/office/drawing/2014/main" xmlns="" id="{677DA24D-DD66-AAFE-2F4E-3D71AA3E6AB0}"/>
               </a:ext>
             </a:extLst>
           </p:cNvPr>
@@ -13475,7 +13407,7 @@
           <p:cNvPr id="27" name="Oval 26">
             <a:extLst>
               <a:ext uri="{FF2B5EF4-FFF2-40B4-BE49-F238E27FC236}">
-                <a16:creationId xmlns="" xmlns:a16="http://schemas.microsoft.com/office/drawing/2014/main" id="{E415858E-4B5C-CDA9-DE2D-B7CBA68C8556}"/>
+                <a16:creationId xmlns:a16="http://schemas.microsoft.com/office/drawing/2014/main" xmlns="" id="{E415858E-4B5C-CDA9-DE2D-B7CBA68C8556}"/>
               </a:ext>
             </a:extLst>
           </p:cNvPr>
@@ -13534,7 +13466,7 @@
           <p:cNvPr id="28" name="Oval 27">
             <a:extLst>
               <a:ext uri="{FF2B5EF4-FFF2-40B4-BE49-F238E27FC236}">
-                <a16:creationId xmlns="" xmlns:a16="http://schemas.microsoft.com/office/drawing/2014/main" id="{167A0A27-6BA4-DD53-F081-83B7B05F0261}"/>
+                <a16:creationId xmlns:a16="http://schemas.microsoft.com/office/drawing/2014/main" xmlns="" id="{167A0A27-6BA4-DD53-F081-83B7B05F0261}"/>
               </a:ext>
             </a:extLst>
           </p:cNvPr>
@@ -13593,7 +13525,7 @@
           <p:cNvPr id="29" name="Oval 28">
             <a:extLst>
               <a:ext uri="{FF2B5EF4-FFF2-40B4-BE49-F238E27FC236}">
-                <a16:creationId xmlns="" xmlns:a16="http://schemas.microsoft.com/office/drawing/2014/main" id="{6299853B-AA90-3849-11F1-1A4C48F71365}"/>
+                <a16:creationId xmlns:a16="http://schemas.microsoft.com/office/drawing/2014/main" xmlns="" id="{6299853B-AA90-3849-11F1-1A4C48F71365}"/>
               </a:ext>
             </a:extLst>
           </p:cNvPr>
@@ -13652,7 +13584,7 @@
           <p:cNvPr id="3" name="Group 2">
             <a:extLst>
               <a:ext uri="{FF2B5EF4-FFF2-40B4-BE49-F238E27FC236}">
-                <a16:creationId xmlns="" xmlns:a16="http://schemas.microsoft.com/office/drawing/2014/main" id="{26C3F351-D61A-FCB1-7694-AF167DCEE280}"/>
+                <a16:creationId xmlns:a16="http://schemas.microsoft.com/office/drawing/2014/main" xmlns="" id="{26C3F351-D61A-FCB1-7694-AF167DCEE280}"/>
               </a:ext>
             </a:extLst>
           </p:cNvPr>
@@ -13672,7 +13604,7 @@
             <p:cNvPr id="2" name="Oval 1">
               <a:extLst>
                 <a:ext uri="{FF2B5EF4-FFF2-40B4-BE49-F238E27FC236}">
-                  <a16:creationId xmlns="" xmlns:a16="http://schemas.microsoft.com/office/drawing/2014/main" id="{A6E2D6B3-342D-EB5F-5E19-8537633AB28F}"/>
+                  <a16:creationId xmlns:a16="http://schemas.microsoft.com/office/drawing/2014/main" xmlns="" id="{A6E2D6B3-342D-EB5F-5E19-8537633AB28F}"/>
                 </a:ext>
               </a:extLst>
             </p:cNvPr>
@@ -13731,7 +13663,7 @@
             <p:cNvPr id="30" name="Arc 29">
               <a:extLst>
                 <a:ext uri="{FF2B5EF4-FFF2-40B4-BE49-F238E27FC236}">
-                  <a16:creationId xmlns="" xmlns:a16="http://schemas.microsoft.com/office/drawing/2014/main" id="{36056DEA-49DE-7763-422D-4DBF22C9EF60}"/>
+                  <a16:creationId xmlns:a16="http://schemas.microsoft.com/office/drawing/2014/main" xmlns="" id="{36056DEA-49DE-7763-422D-4DBF22C9EF60}"/>
                 </a:ext>
               </a:extLst>
             </p:cNvPr>
@@ -13784,7 +13716,7 @@
           <p:cNvPr id="54" name="Group 53">
             <a:extLst>
               <a:ext uri="{FF2B5EF4-FFF2-40B4-BE49-F238E27FC236}">
-                <a16:creationId xmlns="" xmlns:a16="http://schemas.microsoft.com/office/drawing/2014/main" id="{4E1C400F-26D6-1823-2C78-C7631F622635}"/>
+                <a16:creationId xmlns:a16="http://schemas.microsoft.com/office/drawing/2014/main" xmlns="" id="{4E1C400F-26D6-1823-2C78-C7631F622635}"/>
               </a:ext>
             </a:extLst>
           </p:cNvPr>
@@ -13804,7 +13736,7 @@
             <p:cNvPr id="55" name="Oval 54">
               <a:extLst>
                 <a:ext uri="{FF2B5EF4-FFF2-40B4-BE49-F238E27FC236}">
-                  <a16:creationId xmlns="" xmlns:a16="http://schemas.microsoft.com/office/drawing/2014/main" id="{E1A04797-A8C7-E3D9-7170-3A4959849C1F}"/>
+                  <a16:creationId xmlns:a16="http://schemas.microsoft.com/office/drawing/2014/main" xmlns="" id="{E1A04797-A8C7-E3D9-7170-3A4959849C1F}"/>
                 </a:ext>
               </a:extLst>
             </p:cNvPr>
@@ -13863,7 +13795,7 @@
             <p:cNvPr id="56" name="Arc 55">
               <a:extLst>
                 <a:ext uri="{FF2B5EF4-FFF2-40B4-BE49-F238E27FC236}">
-                  <a16:creationId xmlns="" xmlns:a16="http://schemas.microsoft.com/office/drawing/2014/main" id="{E12EA4D8-8589-F8DD-DE0E-66C2177C97E3}"/>
+                  <a16:creationId xmlns:a16="http://schemas.microsoft.com/office/drawing/2014/main" xmlns="" id="{E12EA4D8-8589-F8DD-DE0E-66C2177C97E3}"/>
                 </a:ext>
               </a:extLst>
             </p:cNvPr>
@@ -13916,7 +13848,7 @@
           <p:cNvPr id="57" name="Group 56">
             <a:extLst>
               <a:ext uri="{FF2B5EF4-FFF2-40B4-BE49-F238E27FC236}">
-                <a16:creationId xmlns="" xmlns:a16="http://schemas.microsoft.com/office/drawing/2014/main" id="{A087BCDE-7005-25A4-1860-46331DFEFBA5}"/>
+                <a16:creationId xmlns:a16="http://schemas.microsoft.com/office/drawing/2014/main" xmlns="" id="{A087BCDE-7005-25A4-1860-46331DFEFBA5}"/>
               </a:ext>
             </a:extLst>
           </p:cNvPr>
@@ -13936,7 +13868,7 @@
             <p:cNvPr id="58" name="Oval 57">
               <a:extLst>
                 <a:ext uri="{FF2B5EF4-FFF2-40B4-BE49-F238E27FC236}">
-                  <a16:creationId xmlns="" xmlns:a16="http://schemas.microsoft.com/office/drawing/2014/main" id="{3581949D-442F-7524-F99D-5A8088D8E142}"/>
+                  <a16:creationId xmlns:a16="http://schemas.microsoft.com/office/drawing/2014/main" xmlns="" id="{3581949D-442F-7524-F99D-5A8088D8E142}"/>
                 </a:ext>
               </a:extLst>
             </p:cNvPr>
@@ -13995,7 +13927,7 @@
             <p:cNvPr id="59" name="Arc 58">
               <a:extLst>
                 <a:ext uri="{FF2B5EF4-FFF2-40B4-BE49-F238E27FC236}">
-                  <a16:creationId xmlns="" xmlns:a16="http://schemas.microsoft.com/office/drawing/2014/main" id="{02D7B595-29A3-11C1-3614-A3198F94592C}"/>
+                  <a16:creationId xmlns:a16="http://schemas.microsoft.com/office/drawing/2014/main" xmlns="" id="{02D7B595-29A3-11C1-3614-A3198F94592C}"/>
                 </a:ext>
               </a:extLst>
             </p:cNvPr>
@@ -14048,7 +13980,7 @@
           <p:cNvPr id="60" name="Group 59">
             <a:extLst>
               <a:ext uri="{FF2B5EF4-FFF2-40B4-BE49-F238E27FC236}">
-                <a16:creationId xmlns="" xmlns:a16="http://schemas.microsoft.com/office/drawing/2014/main" id="{FB290B83-0E01-2860-E35D-2FF552994951}"/>
+                <a16:creationId xmlns:a16="http://schemas.microsoft.com/office/drawing/2014/main" xmlns="" id="{FB290B83-0E01-2860-E35D-2FF552994951}"/>
               </a:ext>
             </a:extLst>
           </p:cNvPr>
@@ -14068,7 +14000,7 @@
             <p:cNvPr id="61" name="Oval 60">
               <a:extLst>
                 <a:ext uri="{FF2B5EF4-FFF2-40B4-BE49-F238E27FC236}">
-                  <a16:creationId xmlns="" xmlns:a16="http://schemas.microsoft.com/office/drawing/2014/main" id="{6F929B18-1882-FDE4-813E-6B0362098925}"/>
+                  <a16:creationId xmlns:a16="http://schemas.microsoft.com/office/drawing/2014/main" xmlns="" id="{6F929B18-1882-FDE4-813E-6B0362098925}"/>
                 </a:ext>
               </a:extLst>
             </p:cNvPr>
@@ -14127,7 +14059,7 @@
             <p:cNvPr id="62" name="Arc 61">
               <a:extLst>
                 <a:ext uri="{FF2B5EF4-FFF2-40B4-BE49-F238E27FC236}">
-                  <a16:creationId xmlns="" xmlns:a16="http://schemas.microsoft.com/office/drawing/2014/main" id="{982FB3D8-FD66-CA49-64EC-27B30CFD234A}"/>
+                  <a16:creationId xmlns:a16="http://schemas.microsoft.com/office/drawing/2014/main" xmlns="" id="{982FB3D8-FD66-CA49-64EC-27B30CFD234A}"/>
                 </a:ext>
               </a:extLst>
             </p:cNvPr>
@@ -14180,7 +14112,7 @@
           <p:cNvPr id="63" name="Group 62">
             <a:extLst>
               <a:ext uri="{FF2B5EF4-FFF2-40B4-BE49-F238E27FC236}">
-                <a16:creationId xmlns="" xmlns:a16="http://schemas.microsoft.com/office/drawing/2014/main" id="{7825E36E-56DC-774E-6E7A-31BA18848AA1}"/>
+                <a16:creationId xmlns:a16="http://schemas.microsoft.com/office/drawing/2014/main" xmlns="" id="{7825E36E-56DC-774E-6E7A-31BA18848AA1}"/>
               </a:ext>
             </a:extLst>
           </p:cNvPr>
@@ -14200,7 +14132,7 @@
             <p:cNvPr id="64" name="Oval 63">
               <a:extLst>
                 <a:ext uri="{FF2B5EF4-FFF2-40B4-BE49-F238E27FC236}">
-                  <a16:creationId xmlns="" xmlns:a16="http://schemas.microsoft.com/office/drawing/2014/main" id="{ED86C4D0-421F-E188-D347-FB75A80318D7}"/>
+                  <a16:creationId xmlns:a16="http://schemas.microsoft.com/office/drawing/2014/main" xmlns="" id="{ED86C4D0-421F-E188-D347-FB75A80318D7}"/>
                 </a:ext>
               </a:extLst>
             </p:cNvPr>
@@ -14259,7 +14191,7 @@
             <p:cNvPr id="65" name="Arc 64">
               <a:extLst>
                 <a:ext uri="{FF2B5EF4-FFF2-40B4-BE49-F238E27FC236}">
-                  <a16:creationId xmlns="" xmlns:a16="http://schemas.microsoft.com/office/drawing/2014/main" id="{7251B93F-50B9-C260-ECEA-5767A3723660}"/>
+                  <a16:creationId xmlns:a16="http://schemas.microsoft.com/office/drawing/2014/main" xmlns="" id="{7251B93F-50B9-C260-ECEA-5767A3723660}"/>
                 </a:ext>
               </a:extLst>
             </p:cNvPr>
@@ -14312,7 +14244,7 @@
           <p:cNvPr id="66" name="Group 65">
             <a:extLst>
               <a:ext uri="{FF2B5EF4-FFF2-40B4-BE49-F238E27FC236}">
-                <a16:creationId xmlns="" xmlns:a16="http://schemas.microsoft.com/office/drawing/2014/main" id="{C3079399-2A21-14E1-E7E4-E94ED810D168}"/>
+                <a16:creationId xmlns:a16="http://schemas.microsoft.com/office/drawing/2014/main" xmlns="" id="{C3079399-2A21-14E1-E7E4-E94ED810D168}"/>
               </a:ext>
             </a:extLst>
           </p:cNvPr>
@@ -14332,7 +14264,7 @@
             <p:cNvPr id="67" name="Oval 66">
               <a:extLst>
                 <a:ext uri="{FF2B5EF4-FFF2-40B4-BE49-F238E27FC236}">
-                  <a16:creationId xmlns="" xmlns:a16="http://schemas.microsoft.com/office/drawing/2014/main" id="{7CD11775-2901-2E40-5490-630DC1623B0F}"/>
+                  <a16:creationId xmlns:a16="http://schemas.microsoft.com/office/drawing/2014/main" xmlns="" id="{7CD11775-2901-2E40-5490-630DC1623B0F}"/>
                 </a:ext>
               </a:extLst>
             </p:cNvPr>
@@ -14391,7 +14323,7 @@
             <p:cNvPr id="68" name="Arc 67">
               <a:extLst>
                 <a:ext uri="{FF2B5EF4-FFF2-40B4-BE49-F238E27FC236}">
-                  <a16:creationId xmlns="" xmlns:a16="http://schemas.microsoft.com/office/drawing/2014/main" id="{5B556831-69E2-8918-5D16-C84DEC612606}"/>
+                  <a16:creationId xmlns:a16="http://schemas.microsoft.com/office/drawing/2014/main" xmlns="" id="{5B556831-69E2-8918-5D16-C84DEC612606}"/>
                 </a:ext>
               </a:extLst>
             </p:cNvPr>
@@ -14444,7 +14376,7 @@
           <p:cNvPr id="69" name="Group 68">
             <a:extLst>
               <a:ext uri="{FF2B5EF4-FFF2-40B4-BE49-F238E27FC236}">
-                <a16:creationId xmlns="" xmlns:a16="http://schemas.microsoft.com/office/drawing/2014/main" id="{5ADEE217-7DF5-3EDB-61BF-AF3C812CBEE6}"/>
+                <a16:creationId xmlns:a16="http://schemas.microsoft.com/office/drawing/2014/main" xmlns="" id="{5ADEE217-7DF5-3EDB-61BF-AF3C812CBEE6}"/>
               </a:ext>
             </a:extLst>
           </p:cNvPr>
@@ -14464,7 +14396,7 @@
             <p:cNvPr id="70" name="Oval 69">
               <a:extLst>
                 <a:ext uri="{FF2B5EF4-FFF2-40B4-BE49-F238E27FC236}">
-                  <a16:creationId xmlns="" xmlns:a16="http://schemas.microsoft.com/office/drawing/2014/main" id="{841DE28C-2D28-1185-E3B4-C2BB3354E52B}"/>
+                  <a16:creationId xmlns:a16="http://schemas.microsoft.com/office/drawing/2014/main" xmlns="" id="{841DE28C-2D28-1185-E3B4-C2BB3354E52B}"/>
                 </a:ext>
               </a:extLst>
             </p:cNvPr>
@@ -14523,7 +14455,7 @@
             <p:cNvPr id="71" name="Arc 70">
               <a:extLst>
                 <a:ext uri="{FF2B5EF4-FFF2-40B4-BE49-F238E27FC236}">
-                  <a16:creationId xmlns="" xmlns:a16="http://schemas.microsoft.com/office/drawing/2014/main" id="{FADBB813-4022-6BF4-4302-D581AB1A6C99}"/>
+                  <a16:creationId xmlns:a16="http://schemas.microsoft.com/office/drawing/2014/main" xmlns="" id="{FADBB813-4022-6BF4-4302-D581AB1A6C99}"/>
                 </a:ext>
               </a:extLst>
             </p:cNvPr>
@@ -14576,7 +14508,7 @@
           <p:cNvPr id="72" name="Group 71">
             <a:extLst>
               <a:ext uri="{FF2B5EF4-FFF2-40B4-BE49-F238E27FC236}">
-                <a16:creationId xmlns="" xmlns:a16="http://schemas.microsoft.com/office/drawing/2014/main" id="{9D9C9153-B8FA-38C4-EB67-86B9459BFFE9}"/>
+                <a16:creationId xmlns:a16="http://schemas.microsoft.com/office/drawing/2014/main" xmlns="" id="{9D9C9153-B8FA-38C4-EB67-86B9459BFFE9}"/>
               </a:ext>
             </a:extLst>
           </p:cNvPr>
@@ -14596,7 +14528,7 @@
             <p:cNvPr id="73" name="Oval 72">
               <a:extLst>
                 <a:ext uri="{FF2B5EF4-FFF2-40B4-BE49-F238E27FC236}">
-                  <a16:creationId xmlns="" xmlns:a16="http://schemas.microsoft.com/office/drawing/2014/main" id="{874762A5-21AC-4851-DF9C-A0D7DBFA5AFA}"/>
+                  <a16:creationId xmlns:a16="http://schemas.microsoft.com/office/drawing/2014/main" xmlns="" id="{874762A5-21AC-4851-DF9C-A0D7DBFA5AFA}"/>
                 </a:ext>
               </a:extLst>
             </p:cNvPr>
@@ -14655,7 +14587,7 @@
             <p:cNvPr id="74" name="Arc 73">
               <a:extLst>
                 <a:ext uri="{FF2B5EF4-FFF2-40B4-BE49-F238E27FC236}">
-                  <a16:creationId xmlns="" xmlns:a16="http://schemas.microsoft.com/office/drawing/2014/main" id="{BDBA534A-9F3C-F651-600E-DD503C672D20}"/>
+                  <a16:creationId xmlns:a16="http://schemas.microsoft.com/office/drawing/2014/main" xmlns="" id="{BDBA534A-9F3C-F651-600E-DD503C672D20}"/>
                 </a:ext>
               </a:extLst>
             </p:cNvPr>
@@ -14708,7 +14640,7 @@
           <p:cNvPr id="75" name="Group 74">
             <a:extLst>
               <a:ext uri="{FF2B5EF4-FFF2-40B4-BE49-F238E27FC236}">
-                <a16:creationId xmlns="" xmlns:a16="http://schemas.microsoft.com/office/drawing/2014/main" id="{79961178-ABE0-C7D2-04FE-9A129BC81ED4}"/>
+                <a16:creationId xmlns:a16="http://schemas.microsoft.com/office/drawing/2014/main" xmlns="" id="{79961178-ABE0-C7D2-04FE-9A129BC81ED4}"/>
               </a:ext>
             </a:extLst>
           </p:cNvPr>
@@ -14728,7 +14660,7 @@
             <p:cNvPr id="76" name="Oval 75">
               <a:extLst>
                 <a:ext uri="{FF2B5EF4-FFF2-40B4-BE49-F238E27FC236}">
-                  <a16:creationId xmlns="" xmlns:a16="http://schemas.microsoft.com/office/drawing/2014/main" id="{D8C47778-3FE4-169B-9D62-9C01A7F95945}"/>
+                  <a16:creationId xmlns:a16="http://schemas.microsoft.com/office/drawing/2014/main" xmlns="" id="{D8C47778-3FE4-169B-9D62-9C01A7F95945}"/>
                 </a:ext>
               </a:extLst>
             </p:cNvPr>
@@ -14787,7 +14719,7 @@
             <p:cNvPr id="77" name="Arc 76">
               <a:extLst>
                 <a:ext uri="{FF2B5EF4-FFF2-40B4-BE49-F238E27FC236}">
-                  <a16:creationId xmlns="" xmlns:a16="http://schemas.microsoft.com/office/drawing/2014/main" id="{FDC23D54-870F-5B8A-AB44-E52FAE0875B5}"/>
+                  <a16:creationId xmlns:a16="http://schemas.microsoft.com/office/drawing/2014/main" xmlns="" id="{FDC23D54-870F-5B8A-AB44-E52FAE0875B5}"/>
                 </a:ext>
               </a:extLst>
             </p:cNvPr>
@@ -14840,7 +14772,7 @@
           <p:cNvPr id="78" name="Group 77">
             <a:extLst>
               <a:ext uri="{FF2B5EF4-FFF2-40B4-BE49-F238E27FC236}">
-                <a16:creationId xmlns="" xmlns:a16="http://schemas.microsoft.com/office/drawing/2014/main" id="{B99FDF76-FB64-197E-90CD-2A6F48DA61F3}"/>
+                <a16:creationId xmlns:a16="http://schemas.microsoft.com/office/drawing/2014/main" xmlns="" id="{B99FDF76-FB64-197E-90CD-2A6F48DA61F3}"/>
               </a:ext>
             </a:extLst>
           </p:cNvPr>
@@ -14860,7 +14792,7 @@
             <p:cNvPr id="79" name="Oval 78">
               <a:extLst>
                 <a:ext uri="{FF2B5EF4-FFF2-40B4-BE49-F238E27FC236}">
-                  <a16:creationId xmlns="" xmlns:a16="http://schemas.microsoft.com/office/drawing/2014/main" id="{C7D39EC7-8798-33A9-DB8C-D12FB95A963C}"/>
+                  <a16:creationId xmlns:a16="http://schemas.microsoft.com/office/drawing/2014/main" xmlns="" id="{C7D39EC7-8798-33A9-DB8C-D12FB95A963C}"/>
                 </a:ext>
               </a:extLst>
             </p:cNvPr>
@@ -14919,7 +14851,7 @@
             <p:cNvPr id="80" name="Arc 79">
               <a:extLst>
                 <a:ext uri="{FF2B5EF4-FFF2-40B4-BE49-F238E27FC236}">
-                  <a16:creationId xmlns="" xmlns:a16="http://schemas.microsoft.com/office/drawing/2014/main" id="{CA276D5B-D344-FC55-AFBA-FB0F2E0A212D}"/>
+                  <a16:creationId xmlns:a16="http://schemas.microsoft.com/office/drawing/2014/main" xmlns="" id="{CA276D5B-D344-FC55-AFBA-FB0F2E0A212D}"/>
                 </a:ext>
               </a:extLst>
             </p:cNvPr>
@@ -14972,7 +14904,7 @@
           <p:cNvPr id="81" name="Group 80">
             <a:extLst>
               <a:ext uri="{FF2B5EF4-FFF2-40B4-BE49-F238E27FC236}">
-                <a16:creationId xmlns="" xmlns:a16="http://schemas.microsoft.com/office/drawing/2014/main" id="{5B4D2A7E-D5B4-408F-5ACC-A43BFE1E3809}"/>
+                <a16:creationId xmlns:a16="http://schemas.microsoft.com/office/drawing/2014/main" xmlns="" id="{5B4D2A7E-D5B4-408F-5ACC-A43BFE1E3809}"/>
               </a:ext>
             </a:extLst>
           </p:cNvPr>
@@ -14992,7 +14924,7 @@
             <p:cNvPr id="82" name="Oval 81">
               <a:extLst>
                 <a:ext uri="{FF2B5EF4-FFF2-40B4-BE49-F238E27FC236}">
-                  <a16:creationId xmlns="" xmlns:a16="http://schemas.microsoft.com/office/drawing/2014/main" id="{FA296D8C-160F-84DE-0432-628B589F211B}"/>
+                  <a16:creationId xmlns:a16="http://schemas.microsoft.com/office/drawing/2014/main" xmlns="" id="{FA296D8C-160F-84DE-0432-628B589F211B}"/>
                 </a:ext>
               </a:extLst>
             </p:cNvPr>
@@ -15051,7 +14983,7 @@
             <p:cNvPr id="83" name="Arc 82">
               <a:extLst>
                 <a:ext uri="{FF2B5EF4-FFF2-40B4-BE49-F238E27FC236}">
-                  <a16:creationId xmlns="" xmlns:a16="http://schemas.microsoft.com/office/drawing/2014/main" id="{7ACD6CCD-3CFB-52A8-E091-FDDB0E796F53}"/>
+                  <a16:creationId xmlns:a16="http://schemas.microsoft.com/office/drawing/2014/main" xmlns="" id="{7ACD6CCD-3CFB-52A8-E091-FDDB0E796F53}"/>
                 </a:ext>
               </a:extLst>
             </p:cNvPr>
@@ -15104,7 +15036,7 @@
           <p:cNvPr id="84" name="Group 83">
             <a:extLst>
               <a:ext uri="{FF2B5EF4-FFF2-40B4-BE49-F238E27FC236}">
-                <a16:creationId xmlns="" xmlns:a16="http://schemas.microsoft.com/office/drawing/2014/main" id="{44FED0D5-3E54-90C0-E3E7-BF526FE9D113}"/>
+                <a16:creationId xmlns:a16="http://schemas.microsoft.com/office/drawing/2014/main" xmlns="" id="{44FED0D5-3E54-90C0-E3E7-BF526FE9D113}"/>
               </a:ext>
             </a:extLst>
           </p:cNvPr>
@@ -15124,7 +15056,7 @@
             <p:cNvPr id="85" name="Oval 84">
               <a:extLst>
                 <a:ext uri="{FF2B5EF4-FFF2-40B4-BE49-F238E27FC236}">
-                  <a16:creationId xmlns="" xmlns:a16="http://schemas.microsoft.com/office/drawing/2014/main" id="{656B078E-FF03-15AE-74D7-C0ED1C34B554}"/>
+                  <a16:creationId xmlns:a16="http://schemas.microsoft.com/office/drawing/2014/main" xmlns="" id="{656B078E-FF03-15AE-74D7-C0ED1C34B554}"/>
                 </a:ext>
               </a:extLst>
             </p:cNvPr>
@@ -15183,7 +15115,7 @@
             <p:cNvPr id="86" name="Arc 85">
               <a:extLst>
                 <a:ext uri="{FF2B5EF4-FFF2-40B4-BE49-F238E27FC236}">
-                  <a16:creationId xmlns="" xmlns:a16="http://schemas.microsoft.com/office/drawing/2014/main" id="{6B33F721-99DC-4BB8-9E9E-DAF43599FE12}"/>
+                  <a16:creationId xmlns:a16="http://schemas.microsoft.com/office/drawing/2014/main" xmlns="" id="{6B33F721-99DC-4BB8-9E9E-DAF43599FE12}"/>
                 </a:ext>
               </a:extLst>
             </p:cNvPr>
@@ -15236,7 +15168,7 @@
           <p:cNvPr id="87" name="Group 86">
             <a:extLst>
               <a:ext uri="{FF2B5EF4-FFF2-40B4-BE49-F238E27FC236}">
-                <a16:creationId xmlns="" xmlns:a16="http://schemas.microsoft.com/office/drawing/2014/main" id="{59827D44-4B51-A191-64E5-C84C0624372E}"/>
+                <a16:creationId xmlns:a16="http://schemas.microsoft.com/office/drawing/2014/main" xmlns="" id="{59827D44-4B51-A191-64E5-C84C0624372E}"/>
               </a:ext>
             </a:extLst>
           </p:cNvPr>
@@ -15256,7 +15188,7 @@
             <p:cNvPr id="88" name="Oval 87">
               <a:extLst>
                 <a:ext uri="{FF2B5EF4-FFF2-40B4-BE49-F238E27FC236}">
-                  <a16:creationId xmlns="" xmlns:a16="http://schemas.microsoft.com/office/drawing/2014/main" id="{402C9496-9C16-3C84-DE2A-8792B0D53BA9}"/>
+                  <a16:creationId xmlns:a16="http://schemas.microsoft.com/office/drawing/2014/main" xmlns="" id="{402C9496-9C16-3C84-DE2A-8792B0D53BA9}"/>
                 </a:ext>
               </a:extLst>
             </p:cNvPr>
@@ -15315,7 +15247,7 @@
             <p:cNvPr id="89" name="Arc 88">
               <a:extLst>
                 <a:ext uri="{FF2B5EF4-FFF2-40B4-BE49-F238E27FC236}">
-                  <a16:creationId xmlns="" xmlns:a16="http://schemas.microsoft.com/office/drawing/2014/main" id="{D4F27B29-B37A-5397-E933-37DF44EFCF3E}"/>
+                  <a16:creationId xmlns:a16="http://schemas.microsoft.com/office/drawing/2014/main" xmlns="" id="{D4F27B29-B37A-5397-E933-37DF44EFCF3E}"/>
                 </a:ext>
               </a:extLst>
             </p:cNvPr>
@@ -15368,7 +15300,7 @@
           <p:cNvPr id="90" name="Group 89">
             <a:extLst>
               <a:ext uri="{FF2B5EF4-FFF2-40B4-BE49-F238E27FC236}">
-                <a16:creationId xmlns="" xmlns:a16="http://schemas.microsoft.com/office/drawing/2014/main" id="{C31CDB83-6843-FF34-4DD1-308EBFE5E615}"/>
+                <a16:creationId xmlns:a16="http://schemas.microsoft.com/office/drawing/2014/main" xmlns="" id="{C31CDB83-6843-FF34-4DD1-308EBFE5E615}"/>
               </a:ext>
             </a:extLst>
           </p:cNvPr>
@@ -15388,7 +15320,7 @@
             <p:cNvPr id="91" name="Oval 90">
               <a:extLst>
                 <a:ext uri="{FF2B5EF4-FFF2-40B4-BE49-F238E27FC236}">
-                  <a16:creationId xmlns="" xmlns:a16="http://schemas.microsoft.com/office/drawing/2014/main" id="{B6601984-7036-87C4-47B4-9F20BE341D87}"/>
+                  <a16:creationId xmlns:a16="http://schemas.microsoft.com/office/drawing/2014/main" xmlns="" id="{B6601984-7036-87C4-47B4-9F20BE341D87}"/>
                 </a:ext>
               </a:extLst>
             </p:cNvPr>
@@ -15447,7 +15379,7 @@
             <p:cNvPr id="92" name="Arc 91">
               <a:extLst>
                 <a:ext uri="{FF2B5EF4-FFF2-40B4-BE49-F238E27FC236}">
-                  <a16:creationId xmlns="" xmlns:a16="http://schemas.microsoft.com/office/drawing/2014/main" id="{985ED055-0FFF-9046-6A6B-2F0B309B0601}"/>
+                  <a16:creationId xmlns:a16="http://schemas.microsoft.com/office/drawing/2014/main" xmlns="" id="{985ED055-0FFF-9046-6A6B-2F0B309B0601}"/>
                 </a:ext>
               </a:extLst>
             </p:cNvPr>
@@ -15500,7 +15432,7 @@
           <p:cNvPr id="93" name="Group 92">
             <a:extLst>
               <a:ext uri="{FF2B5EF4-FFF2-40B4-BE49-F238E27FC236}">
-                <a16:creationId xmlns="" xmlns:a16="http://schemas.microsoft.com/office/drawing/2014/main" id="{2F3C57F8-4743-E9F0-EEB4-1B99AAA02502}"/>
+                <a16:creationId xmlns:a16="http://schemas.microsoft.com/office/drawing/2014/main" xmlns="" id="{2F3C57F8-4743-E9F0-EEB4-1B99AAA02502}"/>
               </a:ext>
             </a:extLst>
           </p:cNvPr>
@@ -15520,7 +15452,7 @@
             <p:cNvPr id="94" name="Oval 93">
               <a:extLst>
                 <a:ext uri="{FF2B5EF4-FFF2-40B4-BE49-F238E27FC236}">
-                  <a16:creationId xmlns="" xmlns:a16="http://schemas.microsoft.com/office/drawing/2014/main" id="{70E875F3-7DD6-842E-3C42-FB7188017892}"/>
+                  <a16:creationId xmlns:a16="http://schemas.microsoft.com/office/drawing/2014/main" xmlns="" id="{70E875F3-7DD6-842E-3C42-FB7188017892}"/>
                 </a:ext>
               </a:extLst>
             </p:cNvPr>
@@ -15579,7 +15511,7 @@
             <p:cNvPr id="95" name="Arc 94">
               <a:extLst>
                 <a:ext uri="{FF2B5EF4-FFF2-40B4-BE49-F238E27FC236}">
-                  <a16:creationId xmlns="" xmlns:a16="http://schemas.microsoft.com/office/drawing/2014/main" id="{B2F6FB24-FC01-4AF4-9A35-DAA5B1A8563F}"/>
+                  <a16:creationId xmlns:a16="http://schemas.microsoft.com/office/drawing/2014/main" xmlns="" id="{B2F6FB24-FC01-4AF4-9A35-DAA5B1A8563F}"/>
                 </a:ext>
               </a:extLst>
             </p:cNvPr>
@@ -15632,7 +15564,7 @@
           <p:cNvPr id="96" name="Group 95">
             <a:extLst>
               <a:ext uri="{FF2B5EF4-FFF2-40B4-BE49-F238E27FC236}">
-                <a16:creationId xmlns="" xmlns:a16="http://schemas.microsoft.com/office/drawing/2014/main" id="{DDDFC3EA-F7A7-3A43-3D7E-FFBE8CE964FD}"/>
+                <a16:creationId xmlns:a16="http://schemas.microsoft.com/office/drawing/2014/main" xmlns="" id="{DDDFC3EA-F7A7-3A43-3D7E-FFBE8CE964FD}"/>
               </a:ext>
             </a:extLst>
           </p:cNvPr>
@@ -15652,7 +15584,7 @@
             <p:cNvPr id="97" name="Oval 96">
               <a:extLst>
                 <a:ext uri="{FF2B5EF4-FFF2-40B4-BE49-F238E27FC236}">
-                  <a16:creationId xmlns="" xmlns:a16="http://schemas.microsoft.com/office/drawing/2014/main" id="{5F25F946-F5CC-34FA-0E42-EA8C2624FCEC}"/>
+                  <a16:creationId xmlns:a16="http://schemas.microsoft.com/office/drawing/2014/main" xmlns="" id="{5F25F946-F5CC-34FA-0E42-EA8C2624FCEC}"/>
                 </a:ext>
               </a:extLst>
             </p:cNvPr>
@@ -15711,7 +15643,7 @@
             <p:cNvPr id="98" name="Arc 97">
               <a:extLst>
                 <a:ext uri="{FF2B5EF4-FFF2-40B4-BE49-F238E27FC236}">
-                  <a16:creationId xmlns="" xmlns:a16="http://schemas.microsoft.com/office/drawing/2014/main" id="{B792FC13-D3FC-7671-B724-A8CF4B9A39B4}"/>
+                  <a16:creationId xmlns:a16="http://schemas.microsoft.com/office/drawing/2014/main" xmlns="" id="{B792FC13-D3FC-7671-B724-A8CF4B9A39B4}"/>
                 </a:ext>
               </a:extLst>
             </p:cNvPr>
@@ -15764,7 +15696,7 @@
           <p:cNvPr id="99" name="Group 98">
             <a:extLst>
               <a:ext uri="{FF2B5EF4-FFF2-40B4-BE49-F238E27FC236}">
-                <a16:creationId xmlns="" xmlns:a16="http://schemas.microsoft.com/office/drawing/2014/main" id="{2DB2C038-DEFE-204E-30FC-790636ED570C}"/>
+                <a16:creationId xmlns:a16="http://schemas.microsoft.com/office/drawing/2014/main" xmlns="" id="{2DB2C038-DEFE-204E-30FC-790636ED570C}"/>
               </a:ext>
             </a:extLst>
           </p:cNvPr>
@@ -15784,7 +15716,7 @@
             <p:cNvPr id="100" name="Oval 99">
               <a:extLst>
                 <a:ext uri="{FF2B5EF4-FFF2-40B4-BE49-F238E27FC236}">
-                  <a16:creationId xmlns="" xmlns:a16="http://schemas.microsoft.com/office/drawing/2014/main" id="{45093590-8764-D5E6-8110-FD1D24889D7B}"/>
+                  <a16:creationId xmlns:a16="http://schemas.microsoft.com/office/drawing/2014/main" xmlns="" id="{45093590-8764-D5E6-8110-FD1D24889D7B}"/>
                 </a:ext>
               </a:extLst>
             </p:cNvPr>
@@ -15843,7 +15775,7 @@
             <p:cNvPr id="101" name="Arc 100">
               <a:extLst>
                 <a:ext uri="{FF2B5EF4-FFF2-40B4-BE49-F238E27FC236}">
-                  <a16:creationId xmlns="" xmlns:a16="http://schemas.microsoft.com/office/drawing/2014/main" id="{770478F6-8E18-6FE2-B3C4-489000AC2563}"/>
+                  <a16:creationId xmlns:a16="http://schemas.microsoft.com/office/drawing/2014/main" xmlns="" id="{770478F6-8E18-6FE2-B3C4-489000AC2563}"/>
                 </a:ext>
               </a:extLst>
             </p:cNvPr>
@@ -15896,7 +15828,7 @@
           <p:cNvPr id="102" name="Group 101">
             <a:extLst>
               <a:ext uri="{FF2B5EF4-FFF2-40B4-BE49-F238E27FC236}">
-                <a16:creationId xmlns="" xmlns:a16="http://schemas.microsoft.com/office/drawing/2014/main" id="{BB5E874B-F6C3-FA86-2883-E06C0B907345}"/>
+                <a16:creationId xmlns:a16="http://schemas.microsoft.com/office/drawing/2014/main" xmlns="" id="{BB5E874B-F6C3-FA86-2883-E06C0B907345}"/>
               </a:ext>
             </a:extLst>
           </p:cNvPr>
@@ -15916,7 +15848,7 @@
             <p:cNvPr id="103" name="Oval 102">
               <a:extLst>
                 <a:ext uri="{FF2B5EF4-FFF2-40B4-BE49-F238E27FC236}">
-                  <a16:creationId xmlns="" xmlns:a16="http://schemas.microsoft.com/office/drawing/2014/main" id="{ADCBCFB9-1DE9-6BCF-CAFB-A3A5E3E3BDC3}"/>
+                  <a16:creationId xmlns:a16="http://schemas.microsoft.com/office/drawing/2014/main" xmlns="" id="{ADCBCFB9-1DE9-6BCF-CAFB-A3A5E3E3BDC3}"/>
                 </a:ext>
               </a:extLst>
             </p:cNvPr>
@@ -15975,7 +15907,7 @@
             <p:cNvPr id="104" name="Arc 103">
               <a:extLst>
                 <a:ext uri="{FF2B5EF4-FFF2-40B4-BE49-F238E27FC236}">
-                  <a16:creationId xmlns="" xmlns:a16="http://schemas.microsoft.com/office/drawing/2014/main" id="{06897284-51F0-34BA-B35F-D0DFBB95FC6A}"/>
+                  <a16:creationId xmlns:a16="http://schemas.microsoft.com/office/drawing/2014/main" xmlns="" id="{06897284-51F0-34BA-B35F-D0DFBB95FC6A}"/>
                 </a:ext>
               </a:extLst>
             </p:cNvPr>
@@ -16028,7 +15960,7 @@
           <p:cNvPr id="105" name="Group 104">
             <a:extLst>
               <a:ext uri="{FF2B5EF4-FFF2-40B4-BE49-F238E27FC236}">
-                <a16:creationId xmlns="" xmlns:a16="http://schemas.microsoft.com/office/drawing/2014/main" id="{C96F0D64-C1BF-B3A8-A519-7E4CF06FFDC7}"/>
+                <a16:creationId xmlns:a16="http://schemas.microsoft.com/office/drawing/2014/main" xmlns="" id="{C96F0D64-C1BF-B3A8-A519-7E4CF06FFDC7}"/>
               </a:ext>
             </a:extLst>
           </p:cNvPr>
@@ -16048,7 +15980,7 @@
             <p:cNvPr id="106" name="Oval 105">
               <a:extLst>
                 <a:ext uri="{FF2B5EF4-FFF2-40B4-BE49-F238E27FC236}">
-                  <a16:creationId xmlns="" xmlns:a16="http://schemas.microsoft.com/office/drawing/2014/main" id="{1346C700-051D-1F0B-ADAE-0132A316A7DB}"/>
+                  <a16:creationId xmlns:a16="http://schemas.microsoft.com/office/drawing/2014/main" xmlns="" id="{1346C700-051D-1F0B-ADAE-0132A316A7DB}"/>
                 </a:ext>
               </a:extLst>
             </p:cNvPr>
@@ -16107,7 +16039,7 @@
             <p:cNvPr id="107" name="Arc 106">
               <a:extLst>
                 <a:ext uri="{FF2B5EF4-FFF2-40B4-BE49-F238E27FC236}">
-                  <a16:creationId xmlns="" xmlns:a16="http://schemas.microsoft.com/office/drawing/2014/main" id="{BA5E0980-7A99-E9E0-4B91-E38555423E5B}"/>
+                  <a16:creationId xmlns:a16="http://schemas.microsoft.com/office/drawing/2014/main" xmlns="" id="{BA5E0980-7A99-E9E0-4B91-E38555423E5B}"/>
                 </a:ext>
               </a:extLst>
             </p:cNvPr>
@@ -16160,7 +16092,7 @@
           <p:cNvPr id="108" name="Group 107">
             <a:extLst>
               <a:ext uri="{FF2B5EF4-FFF2-40B4-BE49-F238E27FC236}">
-                <a16:creationId xmlns="" xmlns:a16="http://schemas.microsoft.com/office/drawing/2014/main" id="{D6790D83-0F90-0346-D1FD-D5C3602DFFF6}"/>
+                <a16:creationId xmlns:a16="http://schemas.microsoft.com/office/drawing/2014/main" xmlns="" id="{D6790D83-0F90-0346-D1FD-D5C3602DFFF6}"/>
               </a:ext>
             </a:extLst>
           </p:cNvPr>
@@ -16180,7 +16112,7 @@
             <p:cNvPr id="109" name="Oval 108">
               <a:extLst>
                 <a:ext uri="{FF2B5EF4-FFF2-40B4-BE49-F238E27FC236}">
-                  <a16:creationId xmlns="" xmlns:a16="http://schemas.microsoft.com/office/drawing/2014/main" id="{CE118234-AB4B-3CE4-8627-D437C8F12935}"/>
+                  <a16:creationId xmlns:a16="http://schemas.microsoft.com/office/drawing/2014/main" xmlns="" id="{CE118234-AB4B-3CE4-8627-D437C8F12935}"/>
                 </a:ext>
               </a:extLst>
             </p:cNvPr>
@@ -16239,7 +16171,7 @@
             <p:cNvPr id="110" name="Arc 109">
               <a:extLst>
                 <a:ext uri="{FF2B5EF4-FFF2-40B4-BE49-F238E27FC236}">
-                  <a16:creationId xmlns="" xmlns:a16="http://schemas.microsoft.com/office/drawing/2014/main" id="{24A6161C-A3EC-CB70-28BF-1AA5907F656E}"/>
+                  <a16:creationId xmlns:a16="http://schemas.microsoft.com/office/drawing/2014/main" xmlns="" id="{24A6161C-A3EC-CB70-28BF-1AA5907F656E}"/>
                 </a:ext>
               </a:extLst>
             </p:cNvPr>
@@ -16292,7 +16224,7 @@
           <p:cNvPr id="111" name="Group 110">
             <a:extLst>
               <a:ext uri="{FF2B5EF4-FFF2-40B4-BE49-F238E27FC236}">
-                <a16:creationId xmlns="" xmlns:a16="http://schemas.microsoft.com/office/drawing/2014/main" id="{F8BE1461-AE7E-40C6-28C5-62341855537E}"/>
+                <a16:creationId xmlns:a16="http://schemas.microsoft.com/office/drawing/2014/main" xmlns="" id="{F8BE1461-AE7E-40C6-28C5-62341855537E}"/>
               </a:ext>
             </a:extLst>
           </p:cNvPr>
@@ -16312,7 +16244,7 @@
             <p:cNvPr id="112" name="Oval 111">
               <a:extLst>
                 <a:ext uri="{FF2B5EF4-FFF2-40B4-BE49-F238E27FC236}">
-                  <a16:creationId xmlns="" xmlns:a16="http://schemas.microsoft.com/office/drawing/2014/main" id="{3D6C0D0C-1737-4ACF-DF05-40AB4B997999}"/>
+                  <a16:creationId xmlns:a16="http://schemas.microsoft.com/office/drawing/2014/main" xmlns="" id="{3D6C0D0C-1737-4ACF-DF05-40AB4B997999}"/>
                 </a:ext>
               </a:extLst>
             </p:cNvPr>
@@ -16371,7 +16303,7 @@
             <p:cNvPr id="113" name="Arc 112">
               <a:extLst>
                 <a:ext uri="{FF2B5EF4-FFF2-40B4-BE49-F238E27FC236}">
-                  <a16:creationId xmlns="" xmlns:a16="http://schemas.microsoft.com/office/drawing/2014/main" id="{C80C098A-9223-34F9-FB12-0ACBBD0C19A6}"/>
+                  <a16:creationId xmlns:a16="http://schemas.microsoft.com/office/drawing/2014/main" xmlns="" id="{C80C098A-9223-34F9-FB12-0ACBBD0C19A6}"/>
                 </a:ext>
               </a:extLst>
             </p:cNvPr>
@@ -16424,7 +16356,7 @@
           <p:cNvPr id="114" name="Group 113">
             <a:extLst>
               <a:ext uri="{FF2B5EF4-FFF2-40B4-BE49-F238E27FC236}">
-                <a16:creationId xmlns="" xmlns:a16="http://schemas.microsoft.com/office/drawing/2014/main" id="{697EE20F-3D0A-E159-F8D9-0EC0D2AF7155}"/>
+                <a16:creationId xmlns:a16="http://schemas.microsoft.com/office/drawing/2014/main" xmlns="" id="{697EE20F-3D0A-E159-F8D9-0EC0D2AF7155}"/>
               </a:ext>
             </a:extLst>
           </p:cNvPr>
@@ -16444,7 +16376,7 @@
             <p:cNvPr id="115" name="Oval 114">
               <a:extLst>
                 <a:ext uri="{FF2B5EF4-FFF2-40B4-BE49-F238E27FC236}">
-                  <a16:creationId xmlns="" xmlns:a16="http://schemas.microsoft.com/office/drawing/2014/main" id="{4E528A35-0A92-6308-0EDC-AA6D20AA61B8}"/>
+                  <a16:creationId xmlns:a16="http://schemas.microsoft.com/office/drawing/2014/main" xmlns="" id="{4E528A35-0A92-6308-0EDC-AA6D20AA61B8}"/>
                 </a:ext>
               </a:extLst>
             </p:cNvPr>
@@ -16503,7 +16435,7 @@
             <p:cNvPr id="116" name="Arc 115">
               <a:extLst>
                 <a:ext uri="{FF2B5EF4-FFF2-40B4-BE49-F238E27FC236}">
-                  <a16:creationId xmlns="" xmlns:a16="http://schemas.microsoft.com/office/drawing/2014/main" id="{39483389-2D87-DE50-A684-495349A8AE67}"/>
+                  <a16:creationId xmlns:a16="http://schemas.microsoft.com/office/drawing/2014/main" xmlns="" id="{39483389-2D87-DE50-A684-495349A8AE67}"/>
                 </a:ext>
               </a:extLst>
             </p:cNvPr>
@@ -16556,7 +16488,7 @@
           <p:cNvPr id="117" name="Group 116">
             <a:extLst>
               <a:ext uri="{FF2B5EF4-FFF2-40B4-BE49-F238E27FC236}">
-                <a16:creationId xmlns="" xmlns:a16="http://schemas.microsoft.com/office/drawing/2014/main" id="{786BE2FE-EF0F-688F-5B2C-6EF38976E83B}"/>
+                <a16:creationId xmlns:a16="http://schemas.microsoft.com/office/drawing/2014/main" xmlns="" id="{786BE2FE-EF0F-688F-5B2C-6EF38976E83B}"/>
               </a:ext>
             </a:extLst>
           </p:cNvPr>
@@ -16576,7 +16508,7 @@
             <p:cNvPr id="118" name="Oval 117">
               <a:extLst>
                 <a:ext uri="{FF2B5EF4-FFF2-40B4-BE49-F238E27FC236}">
-                  <a16:creationId xmlns="" xmlns:a16="http://schemas.microsoft.com/office/drawing/2014/main" id="{A0C35F16-1AB8-1BF9-41DE-1B715E0D36D5}"/>
+                  <a16:creationId xmlns:a16="http://schemas.microsoft.com/office/drawing/2014/main" xmlns="" id="{A0C35F16-1AB8-1BF9-41DE-1B715E0D36D5}"/>
                 </a:ext>
               </a:extLst>
             </p:cNvPr>
@@ -16635,7 +16567,7 @@
             <p:cNvPr id="119" name="Arc 118">
               <a:extLst>
                 <a:ext uri="{FF2B5EF4-FFF2-40B4-BE49-F238E27FC236}">
-                  <a16:creationId xmlns="" xmlns:a16="http://schemas.microsoft.com/office/drawing/2014/main" id="{C0154793-588A-3EFA-F58E-FF511C68E63E}"/>
+                  <a16:creationId xmlns:a16="http://schemas.microsoft.com/office/drawing/2014/main" xmlns="" id="{C0154793-588A-3EFA-F58E-FF511C68E63E}"/>
                 </a:ext>
               </a:extLst>
             </p:cNvPr>
@@ -16688,7 +16620,7 @@
           <p:cNvPr id="120" name="Group 119">
             <a:extLst>
               <a:ext uri="{FF2B5EF4-FFF2-40B4-BE49-F238E27FC236}">
-                <a16:creationId xmlns="" xmlns:a16="http://schemas.microsoft.com/office/drawing/2014/main" id="{511A915E-B563-6A18-4902-C0442601AD96}"/>
+                <a16:creationId xmlns:a16="http://schemas.microsoft.com/office/drawing/2014/main" xmlns="" id="{511A915E-B563-6A18-4902-C0442601AD96}"/>
               </a:ext>
             </a:extLst>
           </p:cNvPr>
@@ -16708,7 +16640,7 @@
             <p:cNvPr id="121" name="Oval 120">
               <a:extLst>
                 <a:ext uri="{FF2B5EF4-FFF2-40B4-BE49-F238E27FC236}">
-                  <a16:creationId xmlns="" xmlns:a16="http://schemas.microsoft.com/office/drawing/2014/main" id="{109142E7-2B8E-19B5-6124-89973384D7E5}"/>
+                  <a16:creationId xmlns:a16="http://schemas.microsoft.com/office/drawing/2014/main" xmlns="" id="{109142E7-2B8E-19B5-6124-89973384D7E5}"/>
                 </a:ext>
               </a:extLst>
             </p:cNvPr>
@@ -16767,7 +16699,7 @@
             <p:cNvPr id="122" name="Arc 121">
               <a:extLst>
                 <a:ext uri="{FF2B5EF4-FFF2-40B4-BE49-F238E27FC236}">
-                  <a16:creationId xmlns="" xmlns:a16="http://schemas.microsoft.com/office/drawing/2014/main" id="{AAE5814C-3B3B-8D93-EE2B-CB751AFBF13A}"/>
+                  <a16:creationId xmlns:a16="http://schemas.microsoft.com/office/drawing/2014/main" xmlns="" id="{AAE5814C-3B3B-8D93-EE2B-CB751AFBF13A}"/>
                 </a:ext>
               </a:extLst>
             </p:cNvPr>
@@ -16820,7 +16752,7 @@
           <p:cNvPr id="123" name="Rectangle 122">
             <a:extLst>
               <a:ext uri="{FF2B5EF4-FFF2-40B4-BE49-F238E27FC236}">
-                <a16:creationId xmlns="" xmlns:a16="http://schemas.microsoft.com/office/drawing/2014/main" id="{CEA14FBD-E081-AE2A-F431-E0CB87DCB16C}"/>
+                <a16:creationId xmlns:a16="http://schemas.microsoft.com/office/drawing/2014/main" xmlns="" id="{CEA14FBD-E081-AE2A-F431-E0CB87DCB16C}"/>
               </a:ext>
             </a:extLst>
           </p:cNvPr>
@@ -16873,7 +16805,11 @@
             </a:r>
             <a:r>
               <a:rPr lang="en-US" sz="2000" dirty="0" smtClean="0"/>
-              <a:t>suppliers added so they make sure authentic raw materials.</a:t>
+              <a:t>suppliers added </a:t>
+            </a:r>
+            <a:r>
+              <a:rPr lang="en-US" sz="2000" dirty="0" smtClean="0"/>
+              <a:t>so they make sure authentic raw materials.</a:t>
             </a:r>
           </a:p>
           <a:p>
@@ -16945,7 +16881,7 @@
         <p:cNvPr id="1" name="">
           <a:extLst>
             <a:ext uri="{FF2B5EF4-FFF2-40B4-BE49-F238E27FC236}">
-              <a16:creationId xmlns="" xmlns:a16="http://schemas.microsoft.com/office/drawing/2014/main" id="{AB49B653-F82D-52DD-3373-EF7CD343807B}"/>
+              <a16:creationId xmlns:a16="http://schemas.microsoft.com/office/drawing/2014/main" xmlns="" id="{AB49B653-F82D-52DD-3373-EF7CD343807B}"/>
             </a:ext>
           </a:extLst>
         </p:cNvPr>
@@ -16965,7 +16901,7 @@
           <p:cNvPr id="5" name="Rectangle 4">
             <a:extLst>
               <a:ext uri="{FF2B5EF4-FFF2-40B4-BE49-F238E27FC236}">
-                <a16:creationId xmlns="" xmlns:a16="http://schemas.microsoft.com/office/drawing/2014/main" id="{0DBF747C-C898-FAC1-A684-D7D009857C24}"/>
+                <a16:creationId xmlns:a16="http://schemas.microsoft.com/office/drawing/2014/main" xmlns="" id="{0DBF747C-C898-FAC1-A684-D7D009857C24}"/>
               </a:ext>
             </a:extLst>
           </p:cNvPr>
@@ -17021,7 +16957,7 @@
           <p:cNvPr id="4" name="Rectangle 3">
             <a:extLst>
               <a:ext uri="{FF2B5EF4-FFF2-40B4-BE49-F238E27FC236}">
-                <a16:creationId xmlns="" xmlns:a16="http://schemas.microsoft.com/office/drawing/2014/main" id="{7B98B2E6-66EB-FA16-6CAA-7328B9409A56}"/>
+                <a16:creationId xmlns:a16="http://schemas.microsoft.com/office/drawing/2014/main" xmlns="" id="{7B98B2E6-66EB-FA16-6CAA-7328B9409A56}"/>
               </a:ext>
             </a:extLst>
           </p:cNvPr>
@@ -17258,7 +17194,7 @@
           <p:cNvPr id="6" name="Oval 5">
             <a:extLst>
               <a:ext uri="{FF2B5EF4-FFF2-40B4-BE49-F238E27FC236}">
-                <a16:creationId xmlns="" xmlns:a16="http://schemas.microsoft.com/office/drawing/2014/main" id="{18F27E5F-8AB7-C933-B1F5-63F52B4EBC77}"/>
+                <a16:creationId xmlns:a16="http://schemas.microsoft.com/office/drawing/2014/main" xmlns="" id="{18F27E5F-8AB7-C933-B1F5-63F52B4EBC77}"/>
               </a:ext>
             </a:extLst>
           </p:cNvPr>
@@ -17317,7 +17253,7 @@
           <p:cNvPr id="7" name="Oval 6">
             <a:extLst>
               <a:ext uri="{FF2B5EF4-FFF2-40B4-BE49-F238E27FC236}">
-                <a16:creationId xmlns="" xmlns:a16="http://schemas.microsoft.com/office/drawing/2014/main" id="{84EEC563-2DED-4416-2C87-31455035FB0C}"/>
+                <a16:creationId xmlns:a16="http://schemas.microsoft.com/office/drawing/2014/main" xmlns="" id="{84EEC563-2DED-4416-2C87-31455035FB0C}"/>
               </a:ext>
             </a:extLst>
           </p:cNvPr>
@@ -17376,7 +17312,7 @@
           <p:cNvPr id="8" name="Oval 7">
             <a:extLst>
               <a:ext uri="{FF2B5EF4-FFF2-40B4-BE49-F238E27FC236}">
-                <a16:creationId xmlns="" xmlns:a16="http://schemas.microsoft.com/office/drawing/2014/main" id="{E40D0E73-9F08-859E-43E2-25EB19218526}"/>
+                <a16:creationId xmlns:a16="http://schemas.microsoft.com/office/drawing/2014/main" xmlns="" id="{E40D0E73-9F08-859E-43E2-25EB19218526}"/>
               </a:ext>
             </a:extLst>
           </p:cNvPr>
@@ -17435,7 +17371,7 @@
           <p:cNvPr id="9" name="Oval 8">
             <a:extLst>
               <a:ext uri="{FF2B5EF4-FFF2-40B4-BE49-F238E27FC236}">
-                <a16:creationId xmlns="" xmlns:a16="http://schemas.microsoft.com/office/drawing/2014/main" id="{4DB5A593-0CFB-36F3-F8DA-C3F3A2CFB622}"/>
+                <a16:creationId xmlns:a16="http://schemas.microsoft.com/office/drawing/2014/main" xmlns="" id="{4DB5A593-0CFB-36F3-F8DA-C3F3A2CFB622}"/>
               </a:ext>
             </a:extLst>
           </p:cNvPr>
@@ -17494,7 +17430,7 @@
           <p:cNvPr id="10" name="Oval 9">
             <a:extLst>
               <a:ext uri="{FF2B5EF4-FFF2-40B4-BE49-F238E27FC236}">
-                <a16:creationId xmlns="" xmlns:a16="http://schemas.microsoft.com/office/drawing/2014/main" id="{AA568633-31CA-A32D-D861-3B1240EC81B6}"/>
+                <a16:creationId xmlns:a16="http://schemas.microsoft.com/office/drawing/2014/main" xmlns="" id="{AA568633-31CA-A32D-D861-3B1240EC81B6}"/>
               </a:ext>
             </a:extLst>
           </p:cNvPr>
@@ -17553,7 +17489,7 @@
           <p:cNvPr id="11" name="Oval 10">
             <a:extLst>
               <a:ext uri="{FF2B5EF4-FFF2-40B4-BE49-F238E27FC236}">
-                <a16:creationId xmlns="" xmlns:a16="http://schemas.microsoft.com/office/drawing/2014/main" id="{D0946FD7-DEB2-0AEE-D3E7-FAABAC2357AF}"/>
+                <a16:creationId xmlns:a16="http://schemas.microsoft.com/office/drawing/2014/main" xmlns="" id="{D0946FD7-DEB2-0AEE-D3E7-FAABAC2357AF}"/>
               </a:ext>
             </a:extLst>
           </p:cNvPr>
@@ -17612,7 +17548,7 @@
           <p:cNvPr id="12" name="Oval 11">
             <a:extLst>
               <a:ext uri="{FF2B5EF4-FFF2-40B4-BE49-F238E27FC236}">
-                <a16:creationId xmlns="" xmlns:a16="http://schemas.microsoft.com/office/drawing/2014/main" id="{8D9F2A4B-9D87-7FFE-1886-9FC01DA34065}"/>
+                <a16:creationId xmlns:a16="http://schemas.microsoft.com/office/drawing/2014/main" xmlns="" id="{8D9F2A4B-9D87-7FFE-1886-9FC01DA34065}"/>
               </a:ext>
             </a:extLst>
           </p:cNvPr>
@@ -17671,7 +17607,7 @@
           <p:cNvPr id="13" name="Oval 12">
             <a:extLst>
               <a:ext uri="{FF2B5EF4-FFF2-40B4-BE49-F238E27FC236}">
-                <a16:creationId xmlns="" xmlns:a16="http://schemas.microsoft.com/office/drawing/2014/main" id="{2D1C037B-9232-194A-F63E-D1198BD5BECB}"/>
+                <a16:creationId xmlns:a16="http://schemas.microsoft.com/office/drawing/2014/main" xmlns="" id="{2D1C037B-9232-194A-F63E-D1198BD5BECB}"/>
               </a:ext>
             </a:extLst>
           </p:cNvPr>
@@ -17730,7 +17666,7 @@
           <p:cNvPr id="14" name="Oval 13">
             <a:extLst>
               <a:ext uri="{FF2B5EF4-FFF2-40B4-BE49-F238E27FC236}">
-                <a16:creationId xmlns="" xmlns:a16="http://schemas.microsoft.com/office/drawing/2014/main" id="{97981C1E-3857-DF09-0177-8A06F7B8C93F}"/>
+                <a16:creationId xmlns:a16="http://schemas.microsoft.com/office/drawing/2014/main" xmlns="" id="{97981C1E-3857-DF09-0177-8A06F7B8C93F}"/>
               </a:ext>
             </a:extLst>
           </p:cNvPr>
@@ -17789,7 +17725,7 @@
           <p:cNvPr id="15" name="Oval 14">
             <a:extLst>
               <a:ext uri="{FF2B5EF4-FFF2-40B4-BE49-F238E27FC236}">
-                <a16:creationId xmlns="" xmlns:a16="http://schemas.microsoft.com/office/drawing/2014/main" id="{041C004F-2B07-5BE4-E16D-AFA271378B4F}"/>
+                <a16:creationId xmlns:a16="http://schemas.microsoft.com/office/drawing/2014/main" xmlns="" id="{041C004F-2B07-5BE4-E16D-AFA271378B4F}"/>
               </a:ext>
             </a:extLst>
           </p:cNvPr>
@@ -17848,7 +17784,7 @@
           <p:cNvPr id="16" name="Oval 15">
             <a:extLst>
               <a:ext uri="{FF2B5EF4-FFF2-40B4-BE49-F238E27FC236}">
-                <a16:creationId xmlns="" xmlns:a16="http://schemas.microsoft.com/office/drawing/2014/main" id="{1767DF3F-7FF7-2A4C-6211-20A32CA30D60}"/>
+                <a16:creationId xmlns:a16="http://schemas.microsoft.com/office/drawing/2014/main" xmlns="" id="{1767DF3F-7FF7-2A4C-6211-20A32CA30D60}"/>
               </a:ext>
             </a:extLst>
           </p:cNvPr>
@@ -17907,7 +17843,7 @@
           <p:cNvPr id="17" name="Oval 16">
             <a:extLst>
               <a:ext uri="{FF2B5EF4-FFF2-40B4-BE49-F238E27FC236}">
-                <a16:creationId xmlns="" xmlns:a16="http://schemas.microsoft.com/office/drawing/2014/main" id="{0989497C-10B7-BD33-02AC-312809AFEA7E}"/>
+                <a16:creationId xmlns:a16="http://schemas.microsoft.com/office/drawing/2014/main" xmlns="" id="{0989497C-10B7-BD33-02AC-312809AFEA7E}"/>
               </a:ext>
             </a:extLst>
           </p:cNvPr>
@@ -17966,7 +17902,7 @@
           <p:cNvPr id="18" name="Oval 17">
             <a:extLst>
               <a:ext uri="{FF2B5EF4-FFF2-40B4-BE49-F238E27FC236}">
-                <a16:creationId xmlns="" xmlns:a16="http://schemas.microsoft.com/office/drawing/2014/main" id="{EC170CAD-85DD-951C-2E45-44F4B3207F5A}"/>
+                <a16:creationId xmlns:a16="http://schemas.microsoft.com/office/drawing/2014/main" xmlns="" id="{EC170CAD-85DD-951C-2E45-44F4B3207F5A}"/>
               </a:ext>
             </a:extLst>
           </p:cNvPr>
@@ -18025,7 +17961,7 @@
           <p:cNvPr id="19" name="Oval 18">
             <a:extLst>
               <a:ext uri="{FF2B5EF4-FFF2-40B4-BE49-F238E27FC236}">
-                <a16:creationId xmlns="" xmlns:a16="http://schemas.microsoft.com/office/drawing/2014/main" id="{6CBFAEB0-427B-C183-269E-B7F22C532425}"/>
+                <a16:creationId xmlns:a16="http://schemas.microsoft.com/office/drawing/2014/main" xmlns="" id="{6CBFAEB0-427B-C183-269E-B7F22C532425}"/>
               </a:ext>
             </a:extLst>
           </p:cNvPr>
@@ -18084,7 +18020,7 @@
           <p:cNvPr id="20" name="Oval 19">
             <a:extLst>
               <a:ext uri="{FF2B5EF4-FFF2-40B4-BE49-F238E27FC236}">
-                <a16:creationId xmlns="" xmlns:a16="http://schemas.microsoft.com/office/drawing/2014/main" id="{1A865A29-9259-99F5-30D2-7D9D77A07673}"/>
+                <a16:creationId xmlns:a16="http://schemas.microsoft.com/office/drawing/2014/main" xmlns="" id="{1A865A29-9259-99F5-30D2-7D9D77A07673}"/>
               </a:ext>
             </a:extLst>
           </p:cNvPr>
@@ -18143,7 +18079,7 @@
           <p:cNvPr id="21" name="Oval 20">
             <a:extLst>
               <a:ext uri="{FF2B5EF4-FFF2-40B4-BE49-F238E27FC236}">
-                <a16:creationId xmlns="" xmlns:a16="http://schemas.microsoft.com/office/drawing/2014/main" id="{A9BD25F8-8B1D-B8B7-5509-6B3900E77488}"/>
+                <a16:creationId xmlns:a16="http://schemas.microsoft.com/office/drawing/2014/main" xmlns="" id="{A9BD25F8-8B1D-B8B7-5509-6B3900E77488}"/>
               </a:ext>
             </a:extLst>
           </p:cNvPr>
@@ -18202,7 +18138,7 @@
           <p:cNvPr id="22" name="Oval 21">
             <a:extLst>
               <a:ext uri="{FF2B5EF4-FFF2-40B4-BE49-F238E27FC236}">
-                <a16:creationId xmlns="" xmlns:a16="http://schemas.microsoft.com/office/drawing/2014/main" id="{8C325336-0110-64E7-17C1-798D8BA62F8F}"/>
+                <a16:creationId xmlns:a16="http://schemas.microsoft.com/office/drawing/2014/main" xmlns="" id="{8C325336-0110-64E7-17C1-798D8BA62F8F}"/>
               </a:ext>
             </a:extLst>
           </p:cNvPr>
@@ -18261,7 +18197,7 @@
           <p:cNvPr id="23" name="Oval 22">
             <a:extLst>
               <a:ext uri="{FF2B5EF4-FFF2-40B4-BE49-F238E27FC236}">
-                <a16:creationId xmlns="" xmlns:a16="http://schemas.microsoft.com/office/drawing/2014/main" id="{7ED93CA2-6975-2E8B-C7B5-B07148930960}"/>
+                <a16:creationId xmlns:a16="http://schemas.microsoft.com/office/drawing/2014/main" xmlns="" id="{7ED93CA2-6975-2E8B-C7B5-B07148930960}"/>
               </a:ext>
             </a:extLst>
           </p:cNvPr>
@@ -18320,7 +18256,7 @@
           <p:cNvPr id="24" name="Oval 23">
             <a:extLst>
               <a:ext uri="{FF2B5EF4-FFF2-40B4-BE49-F238E27FC236}">
-                <a16:creationId xmlns="" xmlns:a16="http://schemas.microsoft.com/office/drawing/2014/main" id="{6E252A62-4114-2C2C-0938-450CA28947E9}"/>
+                <a16:creationId xmlns:a16="http://schemas.microsoft.com/office/drawing/2014/main" xmlns="" id="{6E252A62-4114-2C2C-0938-450CA28947E9}"/>
               </a:ext>
             </a:extLst>
           </p:cNvPr>
@@ -18379,7 +18315,7 @@
           <p:cNvPr id="25" name="Oval 24">
             <a:extLst>
               <a:ext uri="{FF2B5EF4-FFF2-40B4-BE49-F238E27FC236}">
-                <a16:creationId xmlns="" xmlns:a16="http://schemas.microsoft.com/office/drawing/2014/main" id="{15145535-565B-35B3-4181-D04856B0357E}"/>
+                <a16:creationId xmlns:a16="http://schemas.microsoft.com/office/drawing/2014/main" xmlns="" id="{15145535-565B-35B3-4181-D04856B0357E}"/>
               </a:ext>
             </a:extLst>
           </p:cNvPr>
@@ -18438,7 +18374,7 @@
           <p:cNvPr id="26" name="Oval 25">
             <a:extLst>
               <a:ext uri="{FF2B5EF4-FFF2-40B4-BE49-F238E27FC236}">
-                <a16:creationId xmlns="" xmlns:a16="http://schemas.microsoft.com/office/drawing/2014/main" id="{677DA24D-DD66-AAFE-2F4E-3D71AA3E6AB0}"/>
+                <a16:creationId xmlns:a16="http://schemas.microsoft.com/office/drawing/2014/main" xmlns="" id="{677DA24D-DD66-AAFE-2F4E-3D71AA3E6AB0}"/>
               </a:ext>
             </a:extLst>
           </p:cNvPr>
@@ -18497,7 +18433,7 @@
           <p:cNvPr id="27" name="Oval 26">
             <a:extLst>
               <a:ext uri="{FF2B5EF4-FFF2-40B4-BE49-F238E27FC236}">
-                <a16:creationId xmlns="" xmlns:a16="http://schemas.microsoft.com/office/drawing/2014/main" id="{E415858E-4B5C-CDA9-DE2D-B7CBA68C8556}"/>
+                <a16:creationId xmlns:a16="http://schemas.microsoft.com/office/drawing/2014/main" xmlns="" id="{E415858E-4B5C-CDA9-DE2D-B7CBA68C8556}"/>
               </a:ext>
             </a:extLst>
           </p:cNvPr>
@@ -18556,7 +18492,7 @@
           <p:cNvPr id="28" name="Oval 27">
             <a:extLst>
               <a:ext uri="{FF2B5EF4-FFF2-40B4-BE49-F238E27FC236}">
-                <a16:creationId xmlns="" xmlns:a16="http://schemas.microsoft.com/office/drawing/2014/main" id="{167A0A27-6BA4-DD53-F081-83B7B05F0261}"/>
+                <a16:creationId xmlns:a16="http://schemas.microsoft.com/office/drawing/2014/main" xmlns="" id="{167A0A27-6BA4-DD53-F081-83B7B05F0261}"/>
               </a:ext>
             </a:extLst>
           </p:cNvPr>
@@ -18615,7 +18551,7 @@
           <p:cNvPr id="29" name="Oval 28">
             <a:extLst>
               <a:ext uri="{FF2B5EF4-FFF2-40B4-BE49-F238E27FC236}">
-                <a16:creationId xmlns="" xmlns:a16="http://schemas.microsoft.com/office/drawing/2014/main" id="{6299853B-AA90-3849-11F1-1A4C48F71365}"/>
+                <a16:creationId xmlns:a16="http://schemas.microsoft.com/office/drawing/2014/main" xmlns="" id="{6299853B-AA90-3849-11F1-1A4C48F71365}"/>
               </a:ext>
             </a:extLst>
           </p:cNvPr>
@@ -18674,7 +18610,7 @@
           <p:cNvPr id="3" name="Group 2">
             <a:extLst>
               <a:ext uri="{FF2B5EF4-FFF2-40B4-BE49-F238E27FC236}">
-                <a16:creationId xmlns="" xmlns:a16="http://schemas.microsoft.com/office/drawing/2014/main" id="{26C3F351-D61A-FCB1-7694-AF167DCEE280}"/>
+                <a16:creationId xmlns:a16="http://schemas.microsoft.com/office/drawing/2014/main" xmlns="" id="{26C3F351-D61A-FCB1-7694-AF167DCEE280}"/>
               </a:ext>
             </a:extLst>
           </p:cNvPr>
@@ -18694,7 +18630,7 @@
             <p:cNvPr id="2" name="Oval 1">
               <a:extLst>
                 <a:ext uri="{FF2B5EF4-FFF2-40B4-BE49-F238E27FC236}">
-                  <a16:creationId xmlns="" xmlns:a16="http://schemas.microsoft.com/office/drawing/2014/main" id="{A6E2D6B3-342D-EB5F-5E19-8537633AB28F}"/>
+                  <a16:creationId xmlns:a16="http://schemas.microsoft.com/office/drawing/2014/main" xmlns="" id="{A6E2D6B3-342D-EB5F-5E19-8537633AB28F}"/>
                 </a:ext>
               </a:extLst>
             </p:cNvPr>
@@ -18753,7 +18689,7 @@
             <p:cNvPr id="30" name="Arc 29">
               <a:extLst>
                 <a:ext uri="{FF2B5EF4-FFF2-40B4-BE49-F238E27FC236}">
-                  <a16:creationId xmlns="" xmlns:a16="http://schemas.microsoft.com/office/drawing/2014/main" id="{36056DEA-49DE-7763-422D-4DBF22C9EF60}"/>
+                  <a16:creationId xmlns:a16="http://schemas.microsoft.com/office/drawing/2014/main" xmlns="" id="{36056DEA-49DE-7763-422D-4DBF22C9EF60}"/>
                 </a:ext>
               </a:extLst>
             </p:cNvPr>
@@ -18806,7 +18742,7 @@
           <p:cNvPr id="54" name="Group 53">
             <a:extLst>
               <a:ext uri="{FF2B5EF4-FFF2-40B4-BE49-F238E27FC236}">
-                <a16:creationId xmlns="" xmlns:a16="http://schemas.microsoft.com/office/drawing/2014/main" id="{4E1C400F-26D6-1823-2C78-C7631F622635}"/>
+                <a16:creationId xmlns:a16="http://schemas.microsoft.com/office/drawing/2014/main" xmlns="" id="{4E1C400F-26D6-1823-2C78-C7631F622635}"/>
               </a:ext>
             </a:extLst>
           </p:cNvPr>
@@ -18826,7 +18762,7 @@
             <p:cNvPr id="55" name="Oval 54">
               <a:extLst>
                 <a:ext uri="{FF2B5EF4-FFF2-40B4-BE49-F238E27FC236}">
-                  <a16:creationId xmlns="" xmlns:a16="http://schemas.microsoft.com/office/drawing/2014/main" id="{E1A04797-A8C7-E3D9-7170-3A4959849C1F}"/>
+                  <a16:creationId xmlns:a16="http://schemas.microsoft.com/office/drawing/2014/main" xmlns="" id="{E1A04797-A8C7-E3D9-7170-3A4959849C1F}"/>
                 </a:ext>
               </a:extLst>
             </p:cNvPr>
@@ -18885,7 +18821,7 @@
             <p:cNvPr id="56" name="Arc 55">
               <a:extLst>
                 <a:ext uri="{FF2B5EF4-FFF2-40B4-BE49-F238E27FC236}">
-                  <a16:creationId xmlns="" xmlns:a16="http://schemas.microsoft.com/office/drawing/2014/main" id="{E12EA4D8-8589-F8DD-DE0E-66C2177C97E3}"/>
+                  <a16:creationId xmlns:a16="http://schemas.microsoft.com/office/drawing/2014/main" xmlns="" id="{E12EA4D8-8589-F8DD-DE0E-66C2177C97E3}"/>
                 </a:ext>
               </a:extLst>
             </p:cNvPr>
@@ -18938,7 +18874,7 @@
           <p:cNvPr id="57" name="Group 56">
             <a:extLst>
               <a:ext uri="{FF2B5EF4-FFF2-40B4-BE49-F238E27FC236}">
-                <a16:creationId xmlns="" xmlns:a16="http://schemas.microsoft.com/office/drawing/2014/main" id="{A087BCDE-7005-25A4-1860-46331DFEFBA5}"/>
+                <a16:creationId xmlns:a16="http://schemas.microsoft.com/office/drawing/2014/main" xmlns="" id="{A087BCDE-7005-25A4-1860-46331DFEFBA5}"/>
               </a:ext>
             </a:extLst>
           </p:cNvPr>
@@ -18958,7 +18894,7 @@
             <p:cNvPr id="58" name="Oval 57">
               <a:extLst>
                 <a:ext uri="{FF2B5EF4-FFF2-40B4-BE49-F238E27FC236}">
-                  <a16:creationId xmlns="" xmlns:a16="http://schemas.microsoft.com/office/drawing/2014/main" id="{3581949D-442F-7524-F99D-5A8088D8E142}"/>
+                  <a16:creationId xmlns:a16="http://schemas.microsoft.com/office/drawing/2014/main" xmlns="" id="{3581949D-442F-7524-F99D-5A8088D8E142}"/>
                 </a:ext>
               </a:extLst>
             </p:cNvPr>
@@ -19017,7 +18953,7 @@
             <p:cNvPr id="59" name="Arc 58">
               <a:extLst>
                 <a:ext uri="{FF2B5EF4-FFF2-40B4-BE49-F238E27FC236}">
-                  <a16:creationId xmlns="" xmlns:a16="http://schemas.microsoft.com/office/drawing/2014/main" id="{02D7B595-29A3-11C1-3614-A3198F94592C}"/>
+                  <a16:creationId xmlns:a16="http://schemas.microsoft.com/office/drawing/2014/main" xmlns="" id="{02D7B595-29A3-11C1-3614-A3198F94592C}"/>
                 </a:ext>
               </a:extLst>
             </p:cNvPr>
@@ -19070,7 +19006,7 @@
           <p:cNvPr id="60" name="Group 59">
             <a:extLst>
               <a:ext uri="{FF2B5EF4-FFF2-40B4-BE49-F238E27FC236}">
-                <a16:creationId xmlns="" xmlns:a16="http://schemas.microsoft.com/office/drawing/2014/main" id="{FB290B83-0E01-2860-E35D-2FF552994951}"/>
+                <a16:creationId xmlns:a16="http://schemas.microsoft.com/office/drawing/2014/main" xmlns="" id="{FB290B83-0E01-2860-E35D-2FF552994951}"/>
               </a:ext>
             </a:extLst>
           </p:cNvPr>
@@ -19090,7 +19026,7 @@
             <p:cNvPr id="61" name="Oval 60">
               <a:extLst>
                 <a:ext uri="{FF2B5EF4-FFF2-40B4-BE49-F238E27FC236}">
-                  <a16:creationId xmlns="" xmlns:a16="http://schemas.microsoft.com/office/drawing/2014/main" id="{6F929B18-1882-FDE4-813E-6B0362098925}"/>
+                  <a16:creationId xmlns:a16="http://schemas.microsoft.com/office/drawing/2014/main" xmlns="" id="{6F929B18-1882-FDE4-813E-6B0362098925}"/>
                 </a:ext>
               </a:extLst>
             </p:cNvPr>
@@ -19149,7 +19085,7 @@
             <p:cNvPr id="62" name="Arc 61">
               <a:extLst>
                 <a:ext uri="{FF2B5EF4-FFF2-40B4-BE49-F238E27FC236}">
-                  <a16:creationId xmlns="" xmlns:a16="http://schemas.microsoft.com/office/drawing/2014/main" id="{982FB3D8-FD66-CA49-64EC-27B30CFD234A}"/>
+                  <a16:creationId xmlns:a16="http://schemas.microsoft.com/office/drawing/2014/main" xmlns="" id="{982FB3D8-FD66-CA49-64EC-27B30CFD234A}"/>
                 </a:ext>
               </a:extLst>
             </p:cNvPr>
@@ -19202,7 +19138,7 @@
           <p:cNvPr id="63" name="Group 62">
             <a:extLst>
               <a:ext uri="{FF2B5EF4-FFF2-40B4-BE49-F238E27FC236}">
-                <a16:creationId xmlns="" xmlns:a16="http://schemas.microsoft.com/office/drawing/2014/main" id="{7825E36E-56DC-774E-6E7A-31BA18848AA1}"/>
+                <a16:creationId xmlns:a16="http://schemas.microsoft.com/office/drawing/2014/main" xmlns="" id="{7825E36E-56DC-774E-6E7A-31BA18848AA1}"/>
               </a:ext>
             </a:extLst>
           </p:cNvPr>
@@ -19222,7 +19158,7 @@
             <p:cNvPr id="64" name="Oval 63">
               <a:extLst>
                 <a:ext uri="{FF2B5EF4-FFF2-40B4-BE49-F238E27FC236}">
-                  <a16:creationId xmlns="" xmlns:a16="http://schemas.microsoft.com/office/drawing/2014/main" id="{ED86C4D0-421F-E188-D347-FB75A80318D7}"/>
+                  <a16:creationId xmlns:a16="http://schemas.microsoft.com/office/drawing/2014/main" xmlns="" id="{ED86C4D0-421F-E188-D347-FB75A80318D7}"/>
                 </a:ext>
               </a:extLst>
             </p:cNvPr>
@@ -19281,7 +19217,7 @@
             <p:cNvPr id="65" name="Arc 64">
               <a:extLst>
                 <a:ext uri="{FF2B5EF4-FFF2-40B4-BE49-F238E27FC236}">
-                  <a16:creationId xmlns="" xmlns:a16="http://schemas.microsoft.com/office/drawing/2014/main" id="{7251B93F-50B9-C260-ECEA-5767A3723660}"/>
+                  <a16:creationId xmlns:a16="http://schemas.microsoft.com/office/drawing/2014/main" xmlns="" id="{7251B93F-50B9-C260-ECEA-5767A3723660}"/>
                 </a:ext>
               </a:extLst>
             </p:cNvPr>
@@ -19334,7 +19270,7 @@
           <p:cNvPr id="66" name="Group 65">
             <a:extLst>
               <a:ext uri="{FF2B5EF4-FFF2-40B4-BE49-F238E27FC236}">
-                <a16:creationId xmlns="" xmlns:a16="http://schemas.microsoft.com/office/drawing/2014/main" id="{C3079399-2A21-14E1-E7E4-E94ED810D168}"/>
+                <a16:creationId xmlns:a16="http://schemas.microsoft.com/office/drawing/2014/main" xmlns="" id="{C3079399-2A21-14E1-E7E4-E94ED810D168}"/>
               </a:ext>
             </a:extLst>
           </p:cNvPr>
@@ -19354,7 +19290,7 @@
             <p:cNvPr id="67" name="Oval 66">
               <a:extLst>
                 <a:ext uri="{FF2B5EF4-FFF2-40B4-BE49-F238E27FC236}">
-                  <a16:creationId xmlns="" xmlns:a16="http://schemas.microsoft.com/office/drawing/2014/main" id="{7CD11775-2901-2E40-5490-630DC1623B0F}"/>
+                  <a16:creationId xmlns:a16="http://schemas.microsoft.com/office/drawing/2014/main" xmlns="" id="{7CD11775-2901-2E40-5490-630DC1623B0F}"/>
                 </a:ext>
               </a:extLst>
             </p:cNvPr>
@@ -19413,7 +19349,7 @@
             <p:cNvPr id="68" name="Arc 67">
               <a:extLst>
                 <a:ext uri="{FF2B5EF4-FFF2-40B4-BE49-F238E27FC236}">
-                  <a16:creationId xmlns="" xmlns:a16="http://schemas.microsoft.com/office/drawing/2014/main" id="{5B556831-69E2-8918-5D16-C84DEC612606}"/>
+                  <a16:creationId xmlns:a16="http://schemas.microsoft.com/office/drawing/2014/main" xmlns="" id="{5B556831-69E2-8918-5D16-C84DEC612606}"/>
                 </a:ext>
               </a:extLst>
             </p:cNvPr>
@@ -19466,7 +19402,7 @@
           <p:cNvPr id="69" name="Group 68">
             <a:extLst>
               <a:ext uri="{FF2B5EF4-FFF2-40B4-BE49-F238E27FC236}">
-                <a16:creationId xmlns="" xmlns:a16="http://schemas.microsoft.com/office/drawing/2014/main" id="{5ADEE217-7DF5-3EDB-61BF-AF3C812CBEE6}"/>
+                <a16:creationId xmlns:a16="http://schemas.microsoft.com/office/drawing/2014/main" xmlns="" id="{5ADEE217-7DF5-3EDB-61BF-AF3C812CBEE6}"/>
               </a:ext>
             </a:extLst>
           </p:cNvPr>
@@ -19486,7 +19422,7 @@
             <p:cNvPr id="70" name="Oval 69">
               <a:extLst>
                 <a:ext uri="{FF2B5EF4-FFF2-40B4-BE49-F238E27FC236}">
-                  <a16:creationId xmlns="" xmlns:a16="http://schemas.microsoft.com/office/drawing/2014/main" id="{841DE28C-2D28-1185-E3B4-C2BB3354E52B}"/>
+                  <a16:creationId xmlns:a16="http://schemas.microsoft.com/office/drawing/2014/main" xmlns="" id="{841DE28C-2D28-1185-E3B4-C2BB3354E52B}"/>
                 </a:ext>
               </a:extLst>
             </p:cNvPr>
@@ -19545,7 +19481,7 @@
             <p:cNvPr id="71" name="Arc 70">
               <a:extLst>
                 <a:ext uri="{FF2B5EF4-FFF2-40B4-BE49-F238E27FC236}">
-                  <a16:creationId xmlns="" xmlns:a16="http://schemas.microsoft.com/office/drawing/2014/main" id="{FADBB813-4022-6BF4-4302-D581AB1A6C99}"/>
+                  <a16:creationId xmlns:a16="http://schemas.microsoft.com/office/drawing/2014/main" xmlns="" id="{FADBB813-4022-6BF4-4302-D581AB1A6C99}"/>
                 </a:ext>
               </a:extLst>
             </p:cNvPr>
@@ -19598,7 +19534,7 @@
           <p:cNvPr id="72" name="Group 71">
             <a:extLst>
               <a:ext uri="{FF2B5EF4-FFF2-40B4-BE49-F238E27FC236}">
-                <a16:creationId xmlns="" xmlns:a16="http://schemas.microsoft.com/office/drawing/2014/main" id="{9D9C9153-B8FA-38C4-EB67-86B9459BFFE9}"/>
+                <a16:creationId xmlns:a16="http://schemas.microsoft.com/office/drawing/2014/main" xmlns="" id="{9D9C9153-B8FA-38C4-EB67-86B9459BFFE9}"/>
               </a:ext>
             </a:extLst>
           </p:cNvPr>
@@ -19618,7 +19554,7 @@
             <p:cNvPr id="73" name="Oval 72">
               <a:extLst>
                 <a:ext uri="{FF2B5EF4-FFF2-40B4-BE49-F238E27FC236}">
-                  <a16:creationId xmlns="" xmlns:a16="http://schemas.microsoft.com/office/drawing/2014/main" id="{874762A5-21AC-4851-DF9C-A0D7DBFA5AFA}"/>
+                  <a16:creationId xmlns:a16="http://schemas.microsoft.com/office/drawing/2014/main" xmlns="" id="{874762A5-21AC-4851-DF9C-A0D7DBFA5AFA}"/>
                 </a:ext>
               </a:extLst>
             </p:cNvPr>
@@ -19677,7 +19613,7 @@
             <p:cNvPr id="74" name="Arc 73">
               <a:extLst>
                 <a:ext uri="{FF2B5EF4-FFF2-40B4-BE49-F238E27FC236}">
-                  <a16:creationId xmlns="" xmlns:a16="http://schemas.microsoft.com/office/drawing/2014/main" id="{BDBA534A-9F3C-F651-600E-DD503C672D20}"/>
+                  <a16:creationId xmlns:a16="http://schemas.microsoft.com/office/drawing/2014/main" xmlns="" id="{BDBA534A-9F3C-F651-600E-DD503C672D20}"/>
                 </a:ext>
               </a:extLst>
             </p:cNvPr>
@@ -19730,7 +19666,7 @@
           <p:cNvPr id="75" name="Group 74">
             <a:extLst>
               <a:ext uri="{FF2B5EF4-FFF2-40B4-BE49-F238E27FC236}">
-                <a16:creationId xmlns="" xmlns:a16="http://schemas.microsoft.com/office/drawing/2014/main" id="{79961178-ABE0-C7D2-04FE-9A129BC81ED4}"/>
+                <a16:creationId xmlns:a16="http://schemas.microsoft.com/office/drawing/2014/main" xmlns="" id="{79961178-ABE0-C7D2-04FE-9A129BC81ED4}"/>
               </a:ext>
             </a:extLst>
           </p:cNvPr>
@@ -19750,7 +19686,7 @@
             <p:cNvPr id="76" name="Oval 75">
               <a:extLst>
                 <a:ext uri="{FF2B5EF4-FFF2-40B4-BE49-F238E27FC236}">
-                  <a16:creationId xmlns="" xmlns:a16="http://schemas.microsoft.com/office/drawing/2014/main" id="{D8C47778-3FE4-169B-9D62-9C01A7F95945}"/>
+                  <a16:creationId xmlns:a16="http://schemas.microsoft.com/office/drawing/2014/main" xmlns="" id="{D8C47778-3FE4-169B-9D62-9C01A7F95945}"/>
                 </a:ext>
               </a:extLst>
             </p:cNvPr>
@@ -19809,7 +19745,7 @@
             <p:cNvPr id="77" name="Arc 76">
               <a:extLst>
                 <a:ext uri="{FF2B5EF4-FFF2-40B4-BE49-F238E27FC236}">
-                  <a16:creationId xmlns="" xmlns:a16="http://schemas.microsoft.com/office/drawing/2014/main" id="{FDC23D54-870F-5B8A-AB44-E52FAE0875B5}"/>
+                  <a16:creationId xmlns:a16="http://schemas.microsoft.com/office/drawing/2014/main" xmlns="" id="{FDC23D54-870F-5B8A-AB44-E52FAE0875B5}"/>
                 </a:ext>
               </a:extLst>
             </p:cNvPr>
@@ -19862,7 +19798,7 @@
           <p:cNvPr id="78" name="Group 77">
             <a:extLst>
               <a:ext uri="{FF2B5EF4-FFF2-40B4-BE49-F238E27FC236}">
-                <a16:creationId xmlns="" xmlns:a16="http://schemas.microsoft.com/office/drawing/2014/main" id="{B99FDF76-FB64-197E-90CD-2A6F48DA61F3}"/>
+                <a16:creationId xmlns:a16="http://schemas.microsoft.com/office/drawing/2014/main" xmlns="" id="{B99FDF76-FB64-197E-90CD-2A6F48DA61F3}"/>
               </a:ext>
             </a:extLst>
           </p:cNvPr>
@@ -19882,7 +19818,7 @@
             <p:cNvPr id="79" name="Oval 78">
               <a:extLst>
                 <a:ext uri="{FF2B5EF4-FFF2-40B4-BE49-F238E27FC236}">
-                  <a16:creationId xmlns="" xmlns:a16="http://schemas.microsoft.com/office/drawing/2014/main" id="{C7D39EC7-8798-33A9-DB8C-D12FB95A963C}"/>
+                  <a16:creationId xmlns:a16="http://schemas.microsoft.com/office/drawing/2014/main" xmlns="" id="{C7D39EC7-8798-33A9-DB8C-D12FB95A963C}"/>
                 </a:ext>
               </a:extLst>
             </p:cNvPr>
@@ -19941,7 +19877,7 @@
             <p:cNvPr id="80" name="Arc 79">
               <a:extLst>
                 <a:ext uri="{FF2B5EF4-FFF2-40B4-BE49-F238E27FC236}">
-                  <a16:creationId xmlns="" xmlns:a16="http://schemas.microsoft.com/office/drawing/2014/main" id="{CA276D5B-D344-FC55-AFBA-FB0F2E0A212D}"/>
+                  <a16:creationId xmlns:a16="http://schemas.microsoft.com/office/drawing/2014/main" xmlns="" id="{CA276D5B-D344-FC55-AFBA-FB0F2E0A212D}"/>
                 </a:ext>
               </a:extLst>
             </p:cNvPr>
@@ -19994,7 +19930,7 @@
           <p:cNvPr id="81" name="Group 80">
             <a:extLst>
               <a:ext uri="{FF2B5EF4-FFF2-40B4-BE49-F238E27FC236}">
-                <a16:creationId xmlns="" xmlns:a16="http://schemas.microsoft.com/office/drawing/2014/main" id="{5B4D2A7E-D5B4-408F-5ACC-A43BFE1E3809}"/>
+                <a16:creationId xmlns:a16="http://schemas.microsoft.com/office/drawing/2014/main" xmlns="" id="{5B4D2A7E-D5B4-408F-5ACC-A43BFE1E3809}"/>
               </a:ext>
             </a:extLst>
           </p:cNvPr>
@@ -20014,7 +19950,7 @@
             <p:cNvPr id="82" name="Oval 81">
               <a:extLst>
                 <a:ext uri="{FF2B5EF4-FFF2-40B4-BE49-F238E27FC236}">
-                  <a16:creationId xmlns="" xmlns:a16="http://schemas.microsoft.com/office/drawing/2014/main" id="{FA296D8C-160F-84DE-0432-628B589F211B}"/>
+                  <a16:creationId xmlns:a16="http://schemas.microsoft.com/office/drawing/2014/main" xmlns="" id="{FA296D8C-160F-84DE-0432-628B589F211B}"/>
                 </a:ext>
               </a:extLst>
             </p:cNvPr>
@@ -20073,7 +20009,7 @@
             <p:cNvPr id="83" name="Arc 82">
               <a:extLst>
                 <a:ext uri="{FF2B5EF4-FFF2-40B4-BE49-F238E27FC236}">
-                  <a16:creationId xmlns="" xmlns:a16="http://schemas.microsoft.com/office/drawing/2014/main" id="{7ACD6CCD-3CFB-52A8-E091-FDDB0E796F53}"/>
+                  <a16:creationId xmlns:a16="http://schemas.microsoft.com/office/drawing/2014/main" xmlns="" id="{7ACD6CCD-3CFB-52A8-E091-FDDB0E796F53}"/>
                 </a:ext>
               </a:extLst>
             </p:cNvPr>
@@ -20126,7 +20062,7 @@
           <p:cNvPr id="84" name="Group 83">
             <a:extLst>
               <a:ext uri="{FF2B5EF4-FFF2-40B4-BE49-F238E27FC236}">
-                <a16:creationId xmlns="" xmlns:a16="http://schemas.microsoft.com/office/drawing/2014/main" id="{44FED0D5-3E54-90C0-E3E7-BF526FE9D113}"/>
+                <a16:creationId xmlns:a16="http://schemas.microsoft.com/office/drawing/2014/main" xmlns="" id="{44FED0D5-3E54-90C0-E3E7-BF526FE9D113}"/>
               </a:ext>
             </a:extLst>
           </p:cNvPr>
@@ -20146,7 +20082,7 @@
             <p:cNvPr id="85" name="Oval 84">
               <a:extLst>
                 <a:ext uri="{FF2B5EF4-FFF2-40B4-BE49-F238E27FC236}">
-                  <a16:creationId xmlns="" xmlns:a16="http://schemas.microsoft.com/office/drawing/2014/main" id="{656B078E-FF03-15AE-74D7-C0ED1C34B554}"/>
+                  <a16:creationId xmlns:a16="http://schemas.microsoft.com/office/drawing/2014/main" xmlns="" id="{656B078E-FF03-15AE-74D7-C0ED1C34B554}"/>
                 </a:ext>
               </a:extLst>
             </p:cNvPr>
@@ -20205,7 +20141,7 @@
             <p:cNvPr id="86" name="Arc 85">
               <a:extLst>
                 <a:ext uri="{FF2B5EF4-FFF2-40B4-BE49-F238E27FC236}">
-                  <a16:creationId xmlns="" xmlns:a16="http://schemas.microsoft.com/office/drawing/2014/main" id="{6B33F721-99DC-4BB8-9E9E-DAF43599FE12}"/>
+                  <a16:creationId xmlns:a16="http://schemas.microsoft.com/office/drawing/2014/main" xmlns="" id="{6B33F721-99DC-4BB8-9E9E-DAF43599FE12}"/>
                 </a:ext>
               </a:extLst>
             </p:cNvPr>
@@ -20258,7 +20194,7 @@
           <p:cNvPr id="87" name="Group 86">
             <a:extLst>
               <a:ext uri="{FF2B5EF4-FFF2-40B4-BE49-F238E27FC236}">
-                <a16:creationId xmlns="" xmlns:a16="http://schemas.microsoft.com/office/drawing/2014/main" id="{59827D44-4B51-A191-64E5-C84C0624372E}"/>
+                <a16:creationId xmlns:a16="http://schemas.microsoft.com/office/drawing/2014/main" xmlns="" id="{59827D44-4B51-A191-64E5-C84C0624372E}"/>
               </a:ext>
             </a:extLst>
           </p:cNvPr>
@@ -20278,7 +20214,7 @@
             <p:cNvPr id="88" name="Oval 87">
               <a:extLst>
                 <a:ext uri="{FF2B5EF4-FFF2-40B4-BE49-F238E27FC236}">
-                  <a16:creationId xmlns="" xmlns:a16="http://schemas.microsoft.com/office/drawing/2014/main" id="{402C9496-9C16-3C84-DE2A-8792B0D53BA9}"/>
+                  <a16:creationId xmlns:a16="http://schemas.microsoft.com/office/drawing/2014/main" xmlns="" id="{402C9496-9C16-3C84-DE2A-8792B0D53BA9}"/>
                 </a:ext>
               </a:extLst>
             </p:cNvPr>
@@ -20337,7 +20273,7 @@
             <p:cNvPr id="89" name="Arc 88">
               <a:extLst>
                 <a:ext uri="{FF2B5EF4-FFF2-40B4-BE49-F238E27FC236}">
-                  <a16:creationId xmlns="" xmlns:a16="http://schemas.microsoft.com/office/drawing/2014/main" id="{D4F27B29-B37A-5397-E933-37DF44EFCF3E}"/>
+                  <a16:creationId xmlns:a16="http://schemas.microsoft.com/office/drawing/2014/main" xmlns="" id="{D4F27B29-B37A-5397-E933-37DF44EFCF3E}"/>
                 </a:ext>
               </a:extLst>
             </p:cNvPr>
@@ -20390,7 +20326,7 @@
           <p:cNvPr id="90" name="Group 89">
             <a:extLst>
               <a:ext uri="{FF2B5EF4-FFF2-40B4-BE49-F238E27FC236}">
-                <a16:creationId xmlns="" xmlns:a16="http://schemas.microsoft.com/office/drawing/2014/main" id="{C31CDB83-6843-FF34-4DD1-308EBFE5E615}"/>
+                <a16:creationId xmlns:a16="http://schemas.microsoft.com/office/drawing/2014/main" xmlns="" id="{C31CDB83-6843-FF34-4DD1-308EBFE5E615}"/>
               </a:ext>
             </a:extLst>
           </p:cNvPr>
@@ -20410,7 +20346,7 @@
             <p:cNvPr id="91" name="Oval 90">
               <a:extLst>
                 <a:ext uri="{FF2B5EF4-FFF2-40B4-BE49-F238E27FC236}">
-                  <a16:creationId xmlns="" xmlns:a16="http://schemas.microsoft.com/office/drawing/2014/main" id="{B6601984-7036-87C4-47B4-9F20BE341D87}"/>
+                  <a16:creationId xmlns:a16="http://schemas.microsoft.com/office/drawing/2014/main" xmlns="" id="{B6601984-7036-87C4-47B4-9F20BE341D87}"/>
                 </a:ext>
               </a:extLst>
             </p:cNvPr>
@@ -20469,7 +20405,7 @@
             <p:cNvPr id="92" name="Arc 91">
               <a:extLst>
                 <a:ext uri="{FF2B5EF4-FFF2-40B4-BE49-F238E27FC236}">
-                  <a16:creationId xmlns="" xmlns:a16="http://schemas.microsoft.com/office/drawing/2014/main" id="{985ED055-0FFF-9046-6A6B-2F0B309B0601}"/>
+                  <a16:creationId xmlns:a16="http://schemas.microsoft.com/office/drawing/2014/main" xmlns="" id="{985ED055-0FFF-9046-6A6B-2F0B309B0601}"/>
                 </a:ext>
               </a:extLst>
             </p:cNvPr>
@@ -20522,7 +20458,7 @@
           <p:cNvPr id="93" name="Group 92">
             <a:extLst>
               <a:ext uri="{FF2B5EF4-FFF2-40B4-BE49-F238E27FC236}">
-                <a16:creationId xmlns="" xmlns:a16="http://schemas.microsoft.com/office/drawing/2014/main" id="{2F3C57F8-4743-E9F0-EEB4-1B99AAA02502}"/>
+                <a16:creationId xmlns:a16="http://schemas.microsoft.com/office/drawing/2014/main" xmlns="" id="{2F3C57F8-4743-E9F0-EEB4-1B99AAA02502}"/>
               </a:ext>
             </a:extLst>
           </p:cNvPr>
@@ -20542,7 +20478,7 @@
             <p:cNvPr id="94" name="Oval 93">
               <a:extLst>
                 <a:ext uri="{FF2B5EF4-FFF2-40B4-BE49-F238E27FC236}">
-                  <a16:creationId xmlns="" xmlns:a16="http://schemas.microsoft.com/office/drawing/2014/main" id="{70E875F3-7DD6-842E-3C42-FB7188017892}"/>
+                  <a16:creationId xmlns:a16="http://schemas.microsoft.com/office/drawing/2014/main" xmlns="" id="{70E875F3-7DD6-842E-3C42-FB7188017892}"/>
                 </a:ext>
               </a:extLst>
             </p:cNvPr>
@@ -20601,7 +20537,7 @@
             <p:cNvPr id="95" name="Arc 94">
               <a:extLst>
                 <a:ext uri="{FF2B5EF4-FFF2-40B4-BE49-F238E27FC236}">
-                  <a16:creationId xmlns="" xmlns:a16="http://schemas.microsoft.com/office/drawing/2014/main" id="{B2F6FB24-FC01-4AF4-9A35-DAA5B1A8563F}"/>
+                  <a16:creationId xmlns:a16="http://schemas.microsoft.com/office/drawing/2014/main" xmlns="" id="{B2F6FB24-FC01-4AF4-9A35-DAA5B1A8563F}"/>
                 </a:ext>
               </a:extLst>
             </p:cNvPr>
@@ -20654,7 +20590,7 @@
           <p:cNvPr id="96" name="Group 95">
             <a:extLst>
               <a:ext uri="{FF2B5EF4-FFF2-40B4-BE49-F238E27FC236}">
-                <a16:creationId xmlns="" xmlns:a16="http://schemas.microsoft.com/office/drawing/2014/main" id="{DDDFC3EA-F7A7-3A43-3D7E-FFBE8CE964FD}"/>
+                <a16:creationId xmlns:a16="http://schemas.microsoft.com/office/drawing/2014/main" xmlns="" id="{DDDFC3EA-F7A7-3A43-3D7E-FFBE8CE964FD}"/>
               </a:ext>
             </a:extLst>
           </p:cNvPr>
@@ -20674,7 +20610,7 @@
             <p:cNvPr id="97" name="Oval 96">
               <a:extLst>
                 <a:ext uri="{FF2B5EF4-FFF2-40B4-BE49-F238E27FC236}">
-                  <a16:creationId xmlns="" xmlns:a16="http://schemas.microsoft.com/office/drawing/2014/main" id="{5F25F946-F5CC-34FA-0E42-EA8C2624FCEC}"/>
+                  <a16:creationId xmlns:a16="http://schemas.microsoft.com/office/drawing/2014/main" xmlns="" id="{5F25F946-F5CC-34FA-0E42-EA8C2624FCEC}"/>
                 </a:ext>
               </a:extLst>
             </p:cNvPr>
@@ -20733,7 +20669,7 @@
             <p:cNvPr id="98" name="Arc 97">
               <a:extLst>
                 <a:ext uri="{FF2B5EF4-FFF2-40B4-BE49-F238E27FC236}">
-                  <a16:creationId xmlns="" xmlns:a16="http://schemas.microsoft.com/office/drawing/2014/main" id="{B792FC13-D3FC-7671-B724-A8CF4B9A39B4}"/>
+                  <a16:creationId xmlns:a16="http://schemas.microsoft.com/office/drawing/2014/main" xmlns="" id="{B792FC13-D3FC-7671-B724-A8CF4B9A39B4}"/>
                 </a:ext>
               </a:extLst>
             </p:cNvPr>
@@ -20786,7 +20722,7 @@
           <p:cNvPr id="99" name="Group 98">
             <a:extLst>
               <a:ext uri="{FF2B5EF4-FFF2-40B4-BE49-F238E27FC236}">
-                <a16:creationId xmlns="" xmlns:a16="http://schemas.microsoft.com/office/drawing/2014/main" id="{2DB2C038-DEFE-204E-30FC-790636ED570C}"/>
+                <a16:creationId xmlns:a16="http://schemas.microsoft.com/office/drawing/2014/main" xmlns="" id="{2DB2C038-DEFE-204E-30FC-790636ED570C}"/>
               </a:ext>
             </a:extLst>
           </p:cNvPr>
@@ -20806,7 +20742,7 @@
             <p:cNvPr id="100" name="Oval 99">
               <a:extLst>
                 <a:ext uri="{FF2B5EF4-FFF2-40B4-BE49-F238E27FC236}">
-                  <a16:creationId xmlns="" xmlns:a16="http://schemas.microsoft.com/office/drawing/2014/main" id="{45093590-8764-D5E6-8110-FD1D24889D7B}"/>
+                  <a16:creationId xmlns:a16="http://schemas.microsoft.com/office/drawing/2014/main" xmlns="" id="{45093590-8764-D5E6-8110-FD1D24889D7B}"/>
                 </a:ext>
               </a:extLst>
             </p:cNvPr>
@@ -20865,7 +20801,7 @@
             <p:cNvPr id="101" name="Arc 100">
               <a:extLst>
                 <a:ext uri="{FF2B5EF4-FFF2-40B4-BE49-F238E27FC236}">
-                  <a16:creationId xmlns="" xmlns:a16="http://schemas.microsoft.com/office/drawing/2014/main" id="{770478F6-8E18-6FE2-B3C4-489000AC2563}"/>
+                  <a16:creationId xmlns:a16="http://schemas.microsoft.com/office/drawing/2014/main" xmlns="" id="{770478F6-8E18-6FE2-B3C4-489000AC2563}"/>
                 </a:ext>
               </a:extLst>
             </p:cNvPr>
@@ -20918,7 +20854,7 @@
           <p:cNvPr id="102" name="Group 101">
             <a:extLst>
               <a:ext uri="{FF2B5EF4-FFF2-40B4-BE49-F238E27FC236}">
-                <a16:creationId xmlns="" xmlns:a16="http://schemas.microsoft.com/office/drawing/2014/main" id="{BB5E874B-F6C3-FA86-2883-E06C0B907345}"/>
+                <a16:creationId xmlns:a16="http://schemas.microsoft.com/office/drawing/2014/main" xmlns="" id="{BB5E874B-F6C3-FA86-2883-E06C0B907345}"/>
               </a:ext>
             </a:extLst>
           </p:cNvPr>
@@ -20938,7 +20874,7 @@
             <p:cNvPr id="103" name="Oval 102">
               <a:extLst>
                 <a:ext uri="{FF2B5EF4-FFF2-40B4-BE49-F238E27FC236}">
-                  <a16:creationId xmlns="" xmlns:a16="http://schemas.microsoft.com/office/drawing/2014/main" id="{ADCBCFB9-1DE9-6BCF-CAFB-A3A5E3E3BDC3}"/>
+                  <a16:creationId xmlns:a16="http://schemas.microsoft.com/office/drawing/2014/main" xmlns="" id="{ADCBCFB9-1DE9-6BCF-CAFB-A3A5E3E3BDC3}"/>
                 </a:ext>
               </a:extLst>
             </p:cNvPr>
@@ -20997,7 +20933,7 @@
             <p:cNvPr id="104" name="Arc 103">
               <a:extLst>
                 <a:ext uri="{FF2B5EF4-FFF2-40B4-BE49-F238E27FC236}">
-                  <a16:creationId xmlns="" xmlns:a16="http://schemas.microsoft.com/office/drawing/2014/main" id="{06897284-51F0-34BA-B35F-D0DFBB95FC6A}"/>
+                  <a16:creationId xmlns:a16="http://schemas.microsoft.com/office/drawing/2014/main" xmlns="" id="{06897284-51F0-34BA-B35F-D0DFBB95FC6A}"/>
                 </a:ext>
               </a:extLst>
             </p:cNvPr>
@@ -21050,7 +20986,7 @@
           <p:cNvPr id="105" name="Group 104">
             <a:extLst>
               <a:ext uri="{FF2B5EF4-FFF2-40B4-BE49-F238E27FC236}">
-                <a16:creationId xmlns="" xmlns:a16="http://schemas.microsoft.com/office/drawing/2014/main" id="{C96F0D64-C1BF-B3A8-A519-7E4CF06FFDC7}"/>
+                <a16:creationId xmlns:a16="http://schemas.microsoft.com/office/drawing/2014/main" xmlns="" id="{C96F0D64-C1BF-B3A8-A519-7E4CF06FFDC7}"/>
               </a:ext>
             </a:extLst>
           </p:cNvPr>
@@ -21070,7 +21006,7 @@
             <p:cNvPr id="106" name="Oval 105">
               <a:extLst>
                 <a:ext uri="{FF2B5EF4-FFF2-40B4-BE49-F238E27FC236}">
-                  <a16:creationId xmlns="" xmlns:a16="http://schemas.microsoft.com/office/drawing/2014/main" id="{1346C700-051D-1F0B-ADAE-0132A316A7DB}"/>
+                  <a16:creationId xmlns:a16="http://schemas.microsoft.com/office/drawing/2014/main" xmlns="" id="{1346C700-051D-1F0B-ADAE-0132A316A7DB}"/>
                 </a:ext>
               </a:extLst>
             </p:cNvPr>
@@ -21129,7 +21065,7 @@
             <p:cNvPr id="107" name="Arc 106">
               <a:extLst>
                 <a:ext uri="{FF2B5EF4-FFF2-40B4-BE49-F238E27FC236}">
-                  <a16:creationId xmlns="" xmlns:a16="http://schemas.microsoft.com/office/drawing/2014/main" id="{BA5E0980-7A99-E9E0-4B91-E38555423E5B}"/>
+                  <a16:creationId xmlns:a16="http://schemas.microsoft.com/office/drawing/2014/main" xmlns="" id="{BA5E0980-7A99-E9E0-4B91-E38555423E5B}"/>
                 </a:ext>
               </a:extLst>
             </p:cNvPr>
@@ -21182,7 +21118,7 @@
           <p:cNvPr id="108" name="Group 107">
             <a:extLst>
               <a:ext uri="{FF2B5EF4-FFF2-40B4-BE49-F238E27FC236}">
-                <a16:creationId xmlns="" xmlns:a16="http://schemas.microsoft.com/office/drawing/2014/main" id="{D6790D83-0F90-0346-D1FD-D5C3602DFFF6}"/>
+                <a16:creationId xmlns:a16="http://schemas.microsoft.com/office/drawing/2014/main" xmlns="" id="{D6790D83-0F90-0346-D1FD-D5C3602DFFF6}"/>
               </a:ext>
             </a:extLst>
           </p:cNvPr>
@@ -21202,7 +21138,7 @@
             <p:cNvPr id="109" name="Oval 108">
               <a:extLst>
                 <a:ext uri="{FF2B5EF4-FFF2-40B4-BE49-F238E27FC236}">
-                  <a16:creationId xmlns="" xmlns:a16="http://schemas.microsoft.com/office/drawing/2014/main" id="{CE118234-AB4B-3CE4-8627-D437C8F12935}"/>
+                  <a16:creationId xmlns:a16="http://schemas.microsoft.com/office/drawing/2014/main" xmlns="" id="{CE118234-AB4B-3CE4-8627-D437C8F12935}"/>
                 </a:ext>
               </a:extLst>
             </p:cNvPr>
@@ -21261,7 +21197,7 @@
             <p:cNvPr id="110" name="Arc 109">
               <a:extLst>
                 <a:ext uri="{FF2B5EF4-FFF2-40B4-BE49-F238E27FC236}">
-                  <a16:creationId xmlns="" xmlns:a16="http://schemas.microsoft.com/office/drawing/2014/main" id="{24A6161C-A3EC-CB70-28BF-1AA5907F656E}"/>
+                  <a16:creationId xmlns:a16="http://schemas.microsoft.com/office/drawing/2014/main" xmlns="" id="{24A6161C-A3EC-CB70-28BF-1AA5907F656E}"/>
                 </a:ext>
               </a:extLst>
             </p:cNvPr>
@@ -21314,7 +21250,7 @@
           <p:cNvPr id="111" name="Group 110">
             <a:extLst>
               <a:ext uri="{FF2B5EF4-FFF2-40B4-BE49-F238E27FC236}">
-                <a16:creationId xmlns="" xmlns:a16="http://schemas.microsoft.com/office/drawing/2014/main" id="{F8BE1461-AE7E-40C6-28C5-62341855537E}"/>
+                <a16:creationId xmlns:a16="http://schemas.microsoft.com/office/drawing/2014/main" xmlns="" id="{F8BE1461-AE7E-40C6-28C5-62341855537E}"/>
               </a:ext>
             </a:extLst>
           </p:cNvPr>
@@ -21334,7 +21270,7 @@
             <p:cNvPr id="112" name="Oval 111">
               <a:extLst>
                 <a:ext uri="{FF2B5EF4-FFF2-40B4-BE49-F238E27FC236}">
-                  <a16:creationId xmlns="" xmlns:a16="http://schemas.microsoft.com/office/drawing/2014/main" id="{3D6C0D0C-1737-4ACF-DF05-40AB4B997999}"/>
+                  <a16:creationId xmlns:a16="http://schemas.microsoft.com/office/drawing/2014/main" xmlns="" id="{3D6C0D0C-1737-4ACF-DF05-40AB4B997999}"/>
                 </a:ext>
               </a:extLst>
             </p:cNvPr>
@@ -21393,7 +21329,7 @@
             <p:cNvPr id="113" name="Arc 112">
               <a:extLst>
                 <a:ext uri="{FF2B5EF4-FFF2-40B4-BE49-F238E27FC236}">
-                  <a16:creationId xmlns="" xmlns:a16="http://schemas.microsoft.com/office/drawing/2014/main" id="{C80C098A-9223-34F9-FB12-0ACBBD0C19A6}"/>
+                  <a16:creationId xmlns:a16="http://schemas.microsoft.com/office/drawing/2014/main" xmlns="" id="{C80C098A-9223-34F9-FB12-0ACBBD0C19A6}"/>
                 </a:ext>
               </a:extLst>
             </p:cNvPr>
@@ -21446,7 +21382,7 @@
           <p:cNvPr id="114" name="Group 113">
             <a:extLst>
               <a:ext uri="{FF2B5EF4-FFF2-40B4-BE49-F238E27FC236}">
-                <a16:creationId xmlns="" xmlns:a16="http://schemas.microsoft.com/office/drawing/2014/main" id="{697EE20F-3D0A-E159-F8D9-0EC0D2AF7155}"/>
+                <a16:creationId xmlns:a16="http://schemas.microsoft.com/office/drawing/2014/main" xmlns="" id="{697EE20F-3D0A-E159-F8D9-0EC0D2AF7155}"/>
               </a:ext>
             </a:extLst>
           </p:cNvPr>
@@ -21466,7 +21402,7 @@
             <p:cNvPr id="115" name="Oval 114">
               <a:extLst>
                 <a:ext uri="{FF2B5EF4-FFF2-40B4-BE49-F238E27FC236}">
-                  <a16:creationId xmlns="" xmlns:a16="http://schemas.microsoft.com/office/drawing/2014/main" id="{4E528A35-0A92-6308-0EDC-AA6D20AA61B8}"/>
+                  <a16:creationId xmlns:a16="http://schemas.microsoft.com/office/drawing/2014/main" xmlns="" id="{4E528A35-0A92-6308-0EDC-AA6D20AA61B8}"/>
                 </a:ext>
               </a:extLst>
             </p:cNvPr>
@@ -21525,7 +21461,7 @@
             <p:cNvPr id="116" name="Arc 115">
               <a:extLst>
                 <a:ext uri="{FF2B5EF4-FFF2-40B4-BE49-F238E27FC236}">
-                  <a16:creationId xmlns="" xmlns:a16="http://schemas.microsoft.com/office/drawing/2014/main" id="{39483389-2D87-DE50-A684-495349A8AE67}"/>
+                  <a16:creationId xmlns:a16="http://schemas.microsoft.com/office/drawing/2014/main" xmlns="" id="{39483389-2D87-DE50-A684-495349A8AE67}"/>
                 </a:ext>
               </a:extLst>
             </p:cNvPr>
@@ -21578,7 +21514,7 @@
           <p:cNvPr id="117" name="Group 116">
             <a:extLst>
               <a:ext uri="{FF2B5EF4-FFF2-40B4-BE49-F238E27FC236}">
-                <a16:creationId xmlns="" xmlns:a16="http://schemas.microsoft.com/office/drawing/2014/main" id="{786BE2FE-EF0F-688F-5B2C-6EF38976E83B}"/>
+                <a16:creationId xmlns:a16="http://schemas.microsoft.com/office/drawing/2014/main" xmlns="" id="{786BE2FE-EF0F-688F-5B2C-6EF38976E83B}"/>
               </a:ext>
             </a:extLst>
           </p:cNvPr>
@@ -21598,7 +21534,7 @@
             <p:cNvPr id="118" name="Oval 117">
               <a:extLst>
                 <a:ext uri="{FF2B5EF4-FFF2-40B4-BE49-F238E27FC236}">
-                  <a16:creationId xmlns="" xmlns:a16="http://schemas.microsoft.com/office/drawing/2014/main" id="{A0C35F16-1AB8-1BF9-41DE-1B715E0D36D5}"/>
+                  <a16:creationId xmlns:a16="http://schemas.microsoft.com/office/drawing/2014/main" xmlns="" id="{A0C35F16-1AB8-1BF9-41DE-1B715E0D36D5}"/>
                 </a:ext>
               </a:extLst>
             </p:cNvPr>
@@ -21657,7 +21593,7 @@
             <p:cNvPr id="119" name="Arc 118">
               <a:extLst>
                 <a:ext uri="{FF2B5EF4-FFF2-40B4-BE49-F238E27FC236}">
-                  <a16:creationId xmlns="" xmlns:a16="http://schemas.microsoft.com/office/drawing/2014/main" id="{C0154793-588A-3EFA-F58E-FF511C68E63E}"/>
+                  <a16:creationId xmlns:a16="http://schemas.microsoft.com/office/drawing/2014/main" xmlns="" id="{C0154793-588A-3EFA-F58E-FF511C68E63E}"/>
                 </a:ext>
               </a:extLst>
             </p:cNvPr>
@@ -21710,7 +21646,7 @@
           <p:cNvPr id="120" name="Group 119">
             <a:extLst>
               <a:ext uri="{FF2B5EF4-FFF2-40B4-BE49-F238E27FC236}">
-                <a16:creationId xmlns="" xmlns:a16="http://schemas.microsoft.com/office/drawing/2014/main" id="{511A915E-B563-6A18-4902-C0442601AD96}"/>
+                <a16:creationId xmlns:a16="http://schemas.microsoft.com/office/drawing/2014/main" xmlns="" id="{511A915E-B563-6A18-4902-C0442601AD96}"/>
               </a:ext>
             </a:extLst>
           </p:cNvPr>
@@ -21730,7 +21666,7 @@
             <p:cNvPr id="121" name="Oval 120">
               <a:extLst>
                 <a:ext uri="{FF2B5EF4-FFF2-40B4-BE49-F238E27FC236}">
-                  <a16:creationId xmlns="" xmlns:a16="http://schemas.microsoft.com/office/drawing/2014/main" id="{109142E7-2B8E-19B5-6124-89973384D7E5}"/>
+                  <a16:creationId xmlns:a16="http://schemas.microsoft.com/office/drawing/2014/main" xmlns="" id="{109142E7-2B8E-19B5-6124-89973384D7E5}"/>
                 </a:ext>
               </a:extLst>
             </p:cNvPr>
@@ -21789,7 +21725,7 @@
             <p:cNvPr id="122" name="Arc 121">
               <a:extLst>
                 <a:ext uri="{FF2B5EF4-FFF2-40B4-BE49-F238E27FC236}">
-                  <a16:creationId xmlns="" xmlns:a16="http://schemas.microsoft.com/office/drawing/2014/main" id="{AAE5814C-3B3B-8D93-EE2B-CB751AFBF13A}"/>
+                  <a16:creationId xmlns:a16="http://schemas.microsoft.com/office/drawing/2014/main" xmlns="" id="{AAE5814C-3B3B-8D93-EE2B-CB751AFBF13A}"/>
                 </a:ext>
               </a:extLst>
             </p:cNvPr>
@@ -22299,13 +22235,13 @@
   <p:clrMapOvr>
     <a:masterClrMapping/>
   </p:clrMapOvr>
-  <mc:AlternateContent xmlns:mc="http://schemas.openxmlformats.org/markup-compatibility/2006" xmlns:p15="http://schemas.microsoft.com/office/powerpoint/2012/main">
-    <mc:Choice Requires="p15">
+  <mc:AlternateContent xmlns:mc="http://schemas.openxmlformats.org/markup-compatibility/2006">
+    <mc:Choice xmlns:p15="http://schemas.microsoft.com/office/powerpoint/2012/main" Requires="p15">
       <p:transition xmlns:p14="http://schemas.microsoft.com/office/powerpoint/2010/main" spd="slow" p14:dur="1250">
         <p15:prstTrans prst="pageCurlDouble"/>
       </p:transition>
     </mc:Choice>
-    <mc:Fallback xmlns="">
+    <mc:Fallback>
       <p:transition spd="slow">
         <p:fade/>
       </p:transition>
@@ -22329,7 +22265,7 @@
         <p:cNvPr id="1" name="">
           <a:extLst>
             <a:ext uri="{FF2B5EF4-FFF2-40B4-BE49-F238E27FC236}">
-              <a16:creationId xmlns="" xmlns:a16="http://schemas.microsoft.com/office/drawing/2014/main" id="{51C4FD09-55E3-2B1B-897E-1F9BF2720A5C}"/>
+              <a16:creationId xmlns:a16="http://schemas.microsoft.com/office/drawing/2014/main" xmlns="" id="{51C4FD09-55E3-2B1B-897E-1F9BF2720A5C}"/>
             </a:ext>
           </a:extLst>
         </p:cNvPr>
@@ -22349,7 +22285,7 @@
           <p:cNvPr id="5" name="Rectangle 4">
             <a:extLst>
               <a:ext uri="{FF2B5EF4-FFF2-40B4-BE49-F238E27FC236}">
-                <a16:creationId xmlns="" xmlns:a16="http://schemas.microsoft.com/office/drawing/2014/main" id="{B034BA31-4C57-9BDA-04C5-8FC13B21BF04}"/>
+                <a16:creationId xmlns:a16="http://schemas.microsoft.com/office/drawing/2014/main" xmlns="" id="{B034BA31-4C57-9BDA-04C5-8FC13B21BF04}"/>
               </a:ext>
             </a:extLst>
           </p:cNvPr>
@@ -22405,7 +22341,7 @@
           <p:cNvPr id="4" name="Rectangle 3">
             <a:extLst>
               <a:ext uri="{FF2B5EF4-FFF2-40B4-BE49-F238E27FC236}">
-                <a16:creationId xmlns="" xmlns:a16="http://schemas.microsoft.com/office/drawing/2014/main" id="{726F619E-C2F5-A764-7A5A-E740D3764F94}"/>
+                <a16:creationId xmlns:a16="http://schemas.microsoft.com/office/drawing/2014/main" xmlns="" id="{726F619E-C2F5-A764-7A5A-E740D3764F94}"/>
               </a:ext>
             </a:extLst>
           </p:cNvPr>
@@ -22636,7 +22572,7 @@
           <p:cNvPr id="6" name="Oval 5">
             <a:extLst>
               <a:ext uri="{FF2B5EF4-FFF2-40B4-BE49-F238E27FC236}">
-                <a16:creationId xmlns="" xmlns:a16="http://schemas.microsoft.com/office/drawing/2014/main" id="{63652264-4E8B-48A9-C360-C02C3660C32D}"/>
+                <a16:creationId xmlns:a16="http://schemas.microsoft.com/office/drawing/2014/main" xmlns="" id="{63652264-4E8B-48A9-C360-C02C3660C32D}"/>
               </a:ext>
             </a:extLst>
           </p:cNvPr>
@@ -22695,7 +22631,7 @@
           <p:cNvPr id="7" name="Oval 6">
             <a:extLst>
               <a:ext uri="{FF2B5EF4-FFF2-40B4-BE49-F238E27FC236}">
-                <a16:creationId xmlns="" xmlns:a16="http://schemas.microsoft.com/office/drawing/2014/main" id="{94A79690-2C7C-FEC2-2B4B-F5D0C6E2B06B}"/>
+                <a16:creationId xmlns:a16="http://schemas.microsoft.com/office/drawing/2014/main" xmlns="" id="{94A79690-2C7C-FEC2-2B4B-F5D0C6E2B06B}"/>
               </a:ext>
             </a:extLst>
           </p:cNvPr>
@@ -22754,7 +22690,7 @@
           <p:cNvPr id="8" name="Oval 7">
             <a:extLst>
               <a:ext uri="{FF2B5EF4-FFF2-40B4-BE49-F238E27FC236}">
-                <a16:creationId xmlns="" xmlns:a16="http://schemas.microsoft.com/office/drawing/2014/main" id="{F183C3CB-BD1C-4789-0643-1F50E0C687BE}"/>
+                <a16:creationId xmlns:a16="http://schemas.microsoft.com/office/drawing/2014/main" xmlns="" id="{F183C3CB-BD1C-4789-0643-1F50E0C687BE}"/>
               </a:ext>
             </a:extLst>
           </p:cNvPr>
@@ -22813,7 +22749,7 @@
           <p:cNvPr id="9" name="Oval 8">
             <a:extLst>
               <a:ext uri="{FF2B5EF4-FFF2-40B4-BE49-F238E27FC236}">
-                <a16:creationId xmlns="" xmlns:a16="http://schemas.microsoft.com/office/drawing/2014/main" id="{852695AE-B9E1-CA35-383A-5061DECC336D}"/>
+                <a16:creationId xmlns:a16="http://schemas.microsoft.com/office/drawing/2014/main" xmlns="" id="{852695AE-B9E1-CA35-383A-5061DECC336D}"/>
               </a:ext>
             </a:extLst>
           </p:cNvPr>
@@ -22872,7 +22808,7 @@
           <p:cNvPr id="10" name="Oval 9">
             <a:extLst>
               <a:ext uri="{FF2B5EF4-FFF2-40B4-BE49-F238E27FC236}">
-                <a16:creationId xmlns="" xmlns:a16="http://schemas.microsoft.com/office/drawing/2014/main" id="{AC8B7149-0844-B850-391A-8060B3392CC6}"/>
+                <a16:creationId xmlns:a16="http://schemas.microsoft.com/office/drawing/2014/main" xmlns="" id="{AC8B7149-0844-B850-391A-8060B3392CC6}"/>
               </a:ext>
             </a:extLst>
           </p:cNvPr>
@@ -22931,7 +22867,7 @@
           <p:cNvPr id="11" name="Oval 10">
             <a:extLst>
               <a:ext uri="{FF2B5EF4-FFF2-40B4-BE49-F238E27FC236}">
-                <a16:creationId xmlns="" xmlns:a16="http://schemas.microsoft.com/office/drawing/2014/main" id="{0D333270-CC5E-7DF6-1A02-659ABE822FF5}"/>
+                <a16:creationId xmlns:a16="http://schemas.microsoft.com/office/drawing/2014/main" xmlns="" id="{0D333270-CC5E-7DF6-1A02-659ABE822FF5}"/>
               </a:ext>
             </a:extLst>
           </p:cNvPr>
@@ -22990,7 +22926,7 @@
           <p:cNvPr id="12" name="Oval 11">
             <a:extLst>
               <a:ext uri="{FF2B5EF4-FFF2-40B4-BE49-F238E27FC236}">
-                <a16:creationId xmlns="" xmlns:a16="http://schemas.microsoft.com/office/drawing/2014/main" id="{79654E69-BC73-6E52-DC33-651392E0526D}"/>
+                <a16:creationId xmlns:a16="http://schemas.microsoft.com/office/drawing/2014/main" xmlns="" id="{79654E69-BC73-6E52-DC33-651392E0526D}"/>
               </a:ext>
             </a:extLst>
           </p:cNvPr>
@@ -23049,7 +22985,7 @@
           <p:cNvPr id="13" name="Oval 12">
             <a:extLst>
               <a:ext uri="{FF2B5EF4-FFF2-40B4-BE49-F238E27FC236}">
-                <a16:creationId xmlns="" xmlns:a16="http://schemas.microsoft.com/office/drawing/2014/main" id="{E4CFDB43-57A3-3026-29E9-D60F416B0F09}"/>
+                <a16:creationId xmlns:a16="http://schemas.microsoft.com/office/drawing/2014/main" xmlns="" id="{E4CFDB43-57A3-3026-29E9-D60F416B0F09}"/>
               </a:ext>
             </a:extLst>
           </p:cNvPr>
@@ -23108,7 +23044,7 @@
           <p:cNvPr id="14" name="Oval 13">
             <a:extLst>
               <a:ext uri="{FF2B5EF4-FFF2-40B4-BE49-F238E27FC236}">
-                <a16:creationId xmlns="" xmlns:a16="http://schemas.microsoft.com/office/drawing/2014/main" id="{F309C4C6-BB4D-8939-A2FC-02DC29CFCC6D}"/>
+                <a16:creationId xmlns:a16="http://schemas.microsoft.com/office/drawing/2014/main" xmlns="" id="{F309C4C6-BB4D-8939-A2FC-02DC29CFCC6D}"/>
               </a:ext>
             </a:extLst>
           </p:cNvPr>
@@ -23167,7 +23103,7 @@
           <p:cNvPr id="15" name="Oval 14">
             <a:extLst>
               <a:ext uri="{FF2B5EF4-FFF2-40B4-BE49-F238E27FC236}">
-                <a16:creationId xmlns="" xmlns:a16="http://schemas.microsoft.com/office/drawing/2014/main" id="{042F644C-7941-9F1F-CD17-58A102B9F051}"/>
+                <a16:creationId xmlns:a16="http://schemas.microsoft.com/office/drawing/2014/main" xmlns="" id="{042F644C-7941-9F1F-CD17-58A102B9F051}"/>
               </a:ext>
             </a:extLst>
           </p:cNvPr>
@@ -23226,7 +23162,7 @@
           <p:cNvPr id="16" name="Oval 15">
             <a:extLst>
               <a:ext uri="{FF2B5EF4-FFF2-40B4-BE49-F238E27FC236}">
-                <a16:creationId xmlns="" xmlns:a16="http://schemas.microsoft.com/office/drawing/2014/main" id="{9FE90EDA-798E-4116-2E6D-F9F24F96F337}"/>
+                <a16:creationId xmlns:a16="http://schemas.microsoft.com/office/drawing/2014/main" xmlns="" id="{9FE90EDA-798E-4116-2E6D-F9F24F96F337}"/>
               </a:ext>
             </a:extLst>
           </p:cNvPr>
@@ -23285,7 +23221,7 @@
           <p:cNvPr id="17" name="Oval 16">
             <a:extLst>
               <a:ext uri="{FF2B5EF4-FFF2-40B4-BE49-F238E27FC236}">
-                <a16:creationId xmlns="" xmlns:a16="http://schemas.microsoft.com/office/drawing/2014/main" id="{01176BBF-01DD-C6ED-B967-EB1DB7DB2F69}"/>
+                <a16:creationId xmlns:a16="http://schemas.microsoft.com/office/drawing/2014/main" xmlns="" id="{01176BBF-01DD-C6ED-B967-EB1DB7DB2F69}"/>
               </a:ext>
             </a:extLst>
           </p:cNvPr>
@@ -23344,7 +23280,7 @@
           <p:cNvPr id="18" name="Oval 17">
             <a:extLst>
               <a:ext uri="{FF2B5EF4-FFF2-40B4-BE49-F238E27FC236}">
-                <a16:creationId xmlns="" xmlns:a16="http://schemas.microsoft.com/office/drawing/2014/main" id="{9F9C5F9C-2EEA-6014-F551-FCFA8EE56021}"/>
+                <a16:creationId xmlns:a16="http://schemas.microsoft.com/office/drawing/2014/main" xmlns="" id="{9F9C5F9C-2EEA-6014-F551-FCFA8EE56021}"/>
               </a:ext>
             </a:extLst>
           </p:cNvPr>
@@ -23403,7 +23339,7 @@
           <p:cNvPr id="19" name="Oval 18">
             <a:extLst>
               <a:ext uri="{FF2B5EF4-FFF2-40B4-BE49-F238E27FC236}">
-                <a16:creationId xmlns="" xmlns:a16="http://schemas.microsoft.com/office/drawing/2014/main" id="{3C7AD85C-644E-0A9B-6CFE-2B4A8C85E76B}"/>
+                <a16:creationId xmlns:a16="http://schemas.microsoft.com/office/drawing/2014/main" xmlns="" id="{3C7AD85C-644E-0A9B-6CFE-2B4A8C85E76B}"/>
               </a:ext>
             </a:extLst>
           </p:cNvPr>
@@ -23462,7 +23398,7 @@
           <p:cNvPr id="20" name="Oval 19">
             <a:extLst>
               <a:ext uri="{FF2B5EF4-FFF2-40B4-BE49-F238E27FC236}">
-                <a16:creationId xmlns="" xmlns:a16="http://schemas.microsoft.com/office/drawing/2014/main" id="{0380C106-105A-1A96-0199-94FE8B539591}"/>
+                <a16:creationId xmlns:a16="http://schemas.microsoft.com/office/drawing/2014/main" xmlns="" id="{0380C106-105A-1A96-0199-94FE8B539591}"/>
               </a:ext>
             </a:extLst>
           </p:cNvPr>
@@ -23521,7 +23457,7 @@
           <p:cNvPr id="21" name="Oval 20">
             <a:extLst>
               <a:ext uri="{FF2B5EF4-FFF2-40B4-BE49-F238E27FC236}">
-                <a16:creationId xmlns="" xmlns:a16="http://schemas.microsoft.com/office/drawing/2014/main" id="{89A7FBE2-CFD6-1AB1-A77D-4A327850C6BD}"/>
+                <a16:creationId xmlns:a16="http://schemas.microsoft.com/office/drawing/2014/main" xmlns="" id="{89A7FBE2-CFD6-1AB1-A77D-4A327850C6BD}"/>
               </a:ext>
             </a:extLst>
           </p:cNvPr>
@@ -23580,7 +23516,7 @@
           <p:cNvPr id="22" name="Oval 21">
             <a:extLst>
               <a:ext uri="{FF2B5EF4-FFF2-40B4-BE49-F238E27FC236}">
-                <a16:creationId xmlns="" xmlns:a16="http://schemas.microsoft.com/office/drawing/2014/main" id="{3121677A-1631-1324-1E55-D68B3900D565}"/>
+                <a16:creationId xmlns:a16="http://schemas.microsoft.com/office/drawing/2014/main" xmlns="" id="{3121677A-1631-1324-1E55-D68B3900D565}"/>
               </a:ext>
             </a:extLst>
           </p:cNvPr>
@@ -23639,7 +23575,7 @@
           <p:cNvPr id="23" name="Oval 22">
             <a:extLst>
               <a:ext uri="{FF2B5EF4-FFF2-40B4-BE49-F238E27FC236}">
-                <a16:creationId xmlns="" xmlns:a16="http://schemas.microsoft.com/office/drawing/2014/main" id="{64D42A8C-6C17-5515-7C30-72FA44A1C982}"/>
+                <a16:creationId xmlns:a16="http://schemas.microsoft.com/office/drawing/2014/main" xmlns="" id="{64D42A8C-6C17-5515-7C30-72FA44A1C982}"/>
               </a:ext>
             </a:extLst>
           </p:cNvPr>
@@ -23698,7 +23634,7 @@
           <p:cNvPr id="24" name="Oval 23">
             <a:extLst>
               <a:ext uri="{FF2B5EF4-FFF2-40B4-BE49-F238E27FC236}">
-                <a16:creationId xmlns="" xmlns:a16="http://schemas.microsoft.com/office/drawing/2014/main" id="{7475C0C7-3651-5314-3F48-173B78AB0BFB}"/>
+                <a16:creationId xmlns:a16="http://schemas.microsoft.com/office/drawing/2014/main" xmlns="" id="{7475C0C7-3651-5314-3F48-173B78AB0BFB}"/>
               </a:ext>
             </a:extLst>
           </p:cNvPr>
@@ -23757,7 +23693,7 @@
           <p:cNvPr id="25" name="Oval 24">
             <a:extLst>
               <a:ext uri="{FF2B5EF4-FFF2-40B4-BE49-F238E27FC236}">
-                <a16:creationId xmlns="" xmlns:a16="http://schemas.microsoft.com/office/drawing/2014/main" id="{9EC0B432-CB23-DBAF-B917-7ABB9CFA1904}"/>
+                <a16:creationId xmlns:a16="http://schemas.microsoft.com/office/drawing/2014/main" xmlns="" id="{9EC0B432-CB23-DBAF-B917-7ABB9CFA1904}"/>
               </a:ext>
             </a:extLst>
           </p:cNvPr>
@@ -23816,7 +23752,7 @@
           <p:cNvPr id="26" name="Oval 25">
             <a:extLst>
               <a:ext uri="{FF2B5EF4-FFF2-40B4-BE49-F238E27FC236}">
-                <a16:creationId xmlns="" xmlns:a16="http://schemas.microsoft.com/office/drawing/2014/main" id="{CD6371DF-A7E5-1434-5000-FF50454FDD3B}"/>
+                <a16:creationId xmlns:a16="http://schemas.microsoft.com/office/drawing/2014/main" xmlns="" id="{CD6371DF-A7E5-1434-5000-FF50454FDD3B}"/>
               </a:ext>
             </a:extLst>
           </p:cNvPr>
@@ -23875,7 +23811,7 @@
           <p:cNvPr id="27" name="Oval 26">
             <a:extLst>
               <a:ext uri="{FF2B5EF4-FFF2-40B4-BE49-F238E27FC236}">
-                <a16:creationId xmlns="" xmlns:a16="http://schemas.microsoft.com/office/drawing/2014/main" id="{1F08106B-D501-EC7F-FD6E-9F53DD6567B9}"/>
+                <a16:creationId xmlns:a16="http://schemas.microsoft.com/office/drawing/2014/main" xmlns="" id="{1F08106B-D501-EC7F-FD6E-9F53DD6567B9}"/>
               </a:ext>
             </a:extLst>
           </p:cNvPr>
@@ -23934,7 +23870,7 @@
           <p:cNvPr id="28" name="Oval 27">
             <a:extLst>
               <a:ext uri="{FF2B5EF4-FFF2-40B4-BE49-F238E27FC236}">
-                <a16:creationId xmlns="" xmlns:a16="http://schemas.microsoft.com/office/drawing/2014/main" id="{58CD1136-8D51-C029-89F6-934EB793CA76}"/>
+                <a16:creationId xmlns:a16="http://schemas.microsoft.com/office/drawing/2014/main" xmlns="" id="{58CD1136-8D51-C029-89F6-934EB793CA76}"/>
               </a:ext>
             </a:extLst>
           </p:cNvPr>
@@ -23993,7 +23929,7 @@
           <p:cNvPr id="29" name="Oval 28">
             <a:extLst>
               <a:ext uri="{FF2B5EF4-FFF2-40B4-BE49-F238E27FC236}">
-                <a16:creationId xmlns="" xmlns:a16="http://schemas.microsoft.com/office/drawing/2014/main" id="{50E918C1-C147-CDF9-9A0B-C41B1B1BDC16}"/>
+                <a16:creationId xmlns:a16="http://schemas.microsoft.com/office/drawing/2014/main" xmlns="" id="{50E918C1-C147-CDF9-9A0B-C41B1B1BDC16}"/>
               </a:ext>
             </a:extLst>
           </p:cNvPr>
@@ -24052,7 +23988,7 @@
           <p:cNvPr id="3" name="Group 2">
             <a:extLst>
               <a:ext uri="{FF2B5EF4-FFF2-40B4-BE49-F238E27FC236}">
-                <a16:creationId xmlns="" xmlns:a16="http://schemas.microsoft.com/office/drawing/2014/main" id="{928405A0-4A61-8733-B126-4D81DAAC8909}"/>
+                <a16:creationId xmlns:a16="http://schemas.microsoft.com/office/drawing/2014/main" xmlns="" id="{928405A0-4A61-8733-B126-4D81DAAC8909}"/>
               </a:ext>
             </a:extLst>
           </p:cNvPr>
@@ -24072,7 +24008,7 @@
             <p:cNvPr id="2" name="Oval 1">
               <a:extLst>
                 <a:ext uri="{FF2B5EF4-FFF2-40B4-BE49-F238E27FC236}">
-                  <a16:creationId xmlns="" xmlns:a16="http://schemas.microsoft.com/office/drawing/2014/main" id="{13AFC585-BA57-5F31-158D-6005C04FEA8F}"/>
+                  <a16:creationId xmlns:a16="http://schemas.microsoft.com/office/drawing/2014/main" xmlns="" id="{13AFC585-BA57-5F31-158D-6005C04FEA8F}"/>
                 </a:ext>
               </a:extLst>
             </p:cNvPr>
@@ -24131,7 +24067,7 @@
             <p:cNvPr id="30" name="Arc 29">
               <a:extLst>
                 <a:ext uri="{FF2B5EF4-FFF2-40B4-BE49-F238E27FC236}">
-                  <a16:creationId xmlns="" xmlns:a16="http://schemas.microsoft.com/office/drawing/2014/main" id="{6ABDBE3E-C36D-8AB3-7845-745EE50517F1}"/>
+                  <a16:creationId xmlns:a16="http://schemas.microsoft.com/office/drawing/2014/main" xmlns="" id="{6ABDBE3E-C36D-8AB3-7845-745EE50517F1}"/>
                 </a:ext>
               </a:extLst>
             </p:cNvPr>
@@ -24184,7 +24120,7 @@
           <p:cNvPr id="54" name="Group 53">
             <a:extLst>
               <a:ext uri="{FF2B5EF4-FFF2-40B4-BE49-F238E27FC236}">
-                <a16:creationId xmlns="" xmlns:a16="http://schemas.microsoft.com/office/drawing/2014/main" id="{BE4556B3-F34C-FF2C-77C6-6D471C09D64C}"/>
+                <a16:creationId xmlns:a16="http://schemas.microsoft.com/office/drawing/2014/main" xmlns="" id="{BE4556B3-F34C-FF2C-77C6-6D471C09D64C}"/>
               </a:ext>
             </a:extLst>
           </p:cNvPr>
@@ -24204,7 +24140,7 @@
             <p:cNvPr id="55" name="Oval 54">
               <a:extLst>
                 <a:ext uri="{FF2B5EF4-FFF2-40B4-BE49-F238E27FC236}">
-                  <a16:creationId xmlns="" xmlns:a16="http://schemas.microsoft.com/office/drawing/2014/main" id="{328F7FC3-44ED-BDFD-31EC-54198BE5A58F}"/>
+                  <a16:creationId xmlns:a16="http://schemas.microsoft.com/office/drawing/2014/main" xmlns="" id="{328F7FC3-44ED-BDFD-31EC-54198BE5A58F}"/>
                 </a:ext>
               </a:extLst>
             </p:cNvPr>
@@ -24263,7 +24199,7 @@
             <p:cNvPr id="56" name="Arc 55">
               <a:extLst>
                 <a:ext uri="{FF2B5EF4-FFF2-40B4-BE49-F238E27FC236}">
-                  <a16:creationId xmlns="" xmlns:a16="http://schemas.microsoft.com/office/drawing/2014/main" id="{691957E7-B542-3D6C-AA1A-4C3661572B27}"/>
+                  <a16:creationId xmlns:a16="http://schemas.microsoft.com/office/drawing/2014/main" xmlns="" id="{691957E7-B542-3D6C-AA1A-4C3661572B27}"/>
                 </a:ext>
               </a:extLst>
             </p:cNvPr>
@@ -24316,7 +24252,7 @@
           <p:cNvPr id="57" name="Group 56">
             <a:extLst>
               <a:ext uri="{FF2B5EF4-FFF2-40B4-BE49-F238E27FC236}">
-                <a16:creationId xmlns="" xmlns:a16="http://schemas.microsoft.com/office/drawing/2014/main" id="{34942098-76A7-B3A3-5DB3-D8162AD3F68D}"/>
+                <a16:creationId xmlns:a16="http://schemas.microsoft.com/office/drawing/2014/main" xmlns="" id="{34942098-76A7-B3A3-5DB3-D8162AD3F68D}"/>
               </a:ext>
             </a:extLst>
           </p:cNvPr>
@@ -24336,7 +24272,7 @@
             <p:cNvPr id="58" name="Oval 57">
               <a:extLst>
                 <a:ext uri="{FF2B5EF4-FFF2-40B4-BE49-F238E27FC236}">
-                  <a16:creationId xmlns="" xmlns:a16="http://schemas.microsoft.com/office/drawing/2014/main" id="{ADA0F6B4-0FE9-8946-CD31-44C147BDFAA2}"/>
+                  <a16:creationId xmlns:a16="http://schemas.microsoft.com/office/drawing/2014/main" xmlns="" id="{ADA0F6B4-0FE9-8946-CD31-44C147BDFAA2}"/>
                 </a:ext>
               </a:extLst>
             </p:cNvPr>
@@ -24395,7 +24331,7 @@
             <p:cNvPr id="59" name="Arc 58">
               <a:extLst>
                 <a:ext uri="{FF2B5EF4-FFF2-40B4-BE49-F238E27FC236}">
-                  <a16:creationId xmlns="" xmlns:a16="http://schemas.microsoft.com/office/drawing/2014/main" id="{E209963C-964F-F2C3-6448-EDCC319111CF}"/>
+                  <a16:creationId xmlns:a16="http://schemas.microsoft.com/office/drawing/2014/main" xmlns="" id="{E209963C-964F-F2C3-6448-EDCC319111CF}"/>
                 </a:ext>
               </a:extLst>
             </p:cNvPr>
@@ -24448,7 +24384,7 @@
           <p:cNvPr id="60" name="Group 59">
             <a:extLst>
               <a:ext uri="{FF2B5EF4-FFF2-40B4-BE49-F238E27FC236}">
-                <a16:creationId xmlns="" xmlns:a16="http://schemas.microsoft.com/office/drawing/2014/main" id="{92FBB5C7-CE3A-82A2-B96C-D00957855705}"/>
+                <a16:creationId xmlns:a16="http://schemas.microsoft.com/office/drawing/2014/main" xmlns="" id="{92FBB5C7-CE3A-82A2-B96C-D00957855705}"/>
               </a:ext>
             </a:extLst>
           </p:cNvPr>
@@ -24468,7 +24404,7 @@
             <p:cNvPr id="61" name="Oval 60">
               <a:extLst>
                 <a:ext uri="{FF2B5EF4-FFF2-40B4-BE49-F238E27FC236}">
-                  <a16:creationId xmlns="" xmlns:a16="http://schemas.microsoft.com/office/drawing/2014/main" id="{C2090BBD-0FD7-73D4-768D-B3EACE879018}"/>
+                  <a16:creationId xmlns:a16="http://schemas.microsoft.com/office/drawing/2014/main" xmlns="" id="{C2090BBD-0FD7-73D4-768D-B3EACE879018}"/>
                 </a:ext>
               </a:extLst>
             </p:cNvPr>
@@ -24527,7 +24463,7 @@
             <p:cNvPr id="62" name="Arc 61">
               <a:extLst>
                 <a:ext uri="{FF2B5EF4-FFF2-40B4-BE49-F238E27FC236}">
-                  <a16:creationId xmlns="" xmlns:a16="http://schemas.microsoft.com/office/drawing/2014/main" id="{49BBA01A-FD23-189D-7879-A24960489055}"/>
+                  <a16:creationId xmlns:a16="http://schemas.microsoft.com/office/drawing/2014/main" xmlns="" id="{49BBA01A-FD23-189D-7879-A24960489055}"/>
                 </a:ext>
               </a:extLst>
             </p:cNvPr>
@@ -24580,7 +24516,7 @@
           <p:cNvPr id="63" name="Group 62">
             <a:extLst>
               <a:ext uri="{FF2B5EF4-FFF2-40B4-BE49-F238E27FC236}">
-                <a16:creationId xmlns="" xmlns:a16="http://schemas.microsoft.com/office/drawing/2014/main" id="{F1BBA567-B812-1158-B0D9-8585557A065F}"/>
+                <a16:creationId xmlns:a16="http://schemas.microsoft.com/office/drawing/2014/main" xmlns="" id="{F1BBA567-B812-1158-B0D9-8585557A065F}"/>
               </a:ext>
             </a:extLst>
           </p:cNvPr>
@@ -24600,7 +24536,7 @@
             <p:cNvPr id="64" name="Oval 63">
               <a:extLst>
                 <a:ext uri="{FF2B5EF4-FFF2-40B4-BE49-F238E27FC236}">
-                  <a16:creationId xmlns="" xmlns:a16="http://schemas.microsoft.com/office/drawing/2014/main" id="{69954438-FCF4-7EDB-B481-3A5CD3540B92}"/>
+                  <a16:creationId xmlns:a16="http://schemas.microsoft.com/office/drawing/2014/main" xmlns="" id="{69954438-FCF4-7EDB-B481-3A5CD3540B92}"/>
                 </a:ext>
               </a:extLst>
             </p:cNvPr>
@@ -24659,7 +24595,7 @@
             <p:cNvPr id="65" name="Arc 64">
               <a:extLst>
                 <a:ext uri="{FF2B5EF4-FFF2-40B4-BE49-F238E27FC236}">
-                  <a16:creationId xmlns="" xmlns:a16="http://schemas.microsoft.com/office/drawing/2014/main" id="{0539A26F-8931-1226-DADD-F1FA6E3A46CA}"/>
+                  <a16:creationId xmlns:a16="http://schemas.microsoft.com/office/drawing/2014/main" xmlns="" id="{0539A26F-8931-1226-DADD-F1FA6E3A46CA}"/>
                 </a:ext>
               </a:extLst>
             </p:cNvPr>
@@ -24712,7 +24648,7 @@
           <p:cNvPr id="66" name="Group 65">
             <a:extLst>
               <a:ext uri="{FF2B5EF4-FFF2-40B4-BE49-F238E27FC236}">
-                <a16:creationId xmlns="" xmlns:a16="http://schemas.microsoft.com/office/drawing/2014/main" id="{C5CA0963-798D-1A46-720B-8E62281FCB2B}"/>
+                <a16:creationId xmlns:a16="http://schemas.microsoft.com/office/drawing/2014/main" xmlns="" id="{C5CA0963-798D-1A46-720B-8E62281FCB2B}"/>
               </a:ext>
             </a:extLst>
           </p:cNvPr>
@@ -24732,7 +24668,7 @@
             <p:cNvPr id="67" name="Oval 66">
               <a:extLst>
                 <a:ext uri="{FF2B5EF4-FFF2-40B4-BE49-F238E27FC236}">
-                  <a16:creationId xmlns="" xmlns:a16="http://schemas.microsoft.com/office/drawing/2014/main" id="{238F6E5E-CA7D-90C5-F3DE-CEA092075098}"/>
+                  <a16:creationId xmlns:a16="http://schemas.microsoft.com/office/drawing/2014/main" xmlns="" id="{238F6E5E-CA7D-90C5-F3DE-CEA092075098}"/>
                 </a:ext>
               </a:extLst>
             </p:cNvPr>
@@ -24791,7 +24727,7 @@
             <p:cNvPr id="68" name="Arc 67">
               <a:extLst>
                 <a:ext uri="{FF2B5EF4-FFF2-40B4-BE49-F238E27FC236}">
-                  <a16:creationId xmlns="" xmlns:a16="http://schemas.microsoft.com/office/drawing/2014/main" id="{4EDC6FAD-D9B6-F4CE-7409-08C269011CC8}"/>
+                  <a16:creationId xmlns:a16="http://schemas.microsoft.com/office/drawing/2014/main" xmlns="" id="{4EDC6FAD-D9B6-F4CE-7409-08C269011CC8}"/>
                 </a:ext>
               </a:extLst>
             </p:cNvPr>
@@ -24844,7 +24780,7 @@
           <p:cNvPr id="69" name="Group 68">
             <a:extLst>
               <a:ext uri="{FF2B5EF4-FFF2-40B4-BE49-F238E27FC236}">
-                <a16:creationId xmlns="" xmlns:a16="http://schemas.microsoft.com/office/drawing/2014/main" id="{97D732E3-F499-0C3F-BE88-8A3C727562BA}"/>
+                <a16:creationId xmlns:a16="http://schemas.microsoft.com/office/drawing/2014/main" xmlns="" id="{97D732E3-F499-0C3F-BE88-8A3C727562BA}"/>
               </a:ext>
             </a:extLst>
           </p:cNvPr>
@@ -24864,7 +24800,7 @@
             <p:cNvPr id="70" name="Oval 69">
               <a:extLst>
                 <a:ext uri="{FF2B5EF4-FFF2-40B4-BE49-F238E27FC236}">
-                  <a16:creationId xmlns="" xmlns:a16="http://schemas.microsoft.com/office/drawing/2014/main" id="{1BB77D40-207D-28FD-CBB8-13B1251FBCE3}"/>
+                  <a16:creationId xmlns:a16="http://schemas.microsoft.com/office/drawing/2014/main" xmlns="" id="{1BB77D40-207D-28FD-CBB8-13B1251FBCE3}"/>
                 </a:ext>
               </a:extLst>
             </p:cNvPr>
@@ -24923,7 +24859,7 @@
             <p:cNvPr id="71" name="Arc 70">
               <a:extLst>
                 <a:ext uri="{FF2B5EF4-FFF2-40B4-BE49-F238E27FC236}">
-                  <a16:creationId xmlns="" xmlns:a16="http://schemas.microsoft.com/office/drawing/2014/main" id="{98CED01A-8366-93D8-2562-CDF27F4E5646}"/>
+                  <a16:creationId xmlns:a16="http://schemas.microsoft.com/office/drawing/2014/main" xmlns="" id="{98CED01A-8366-93D8-2562-CDF27F4E5646}"/>
                 </a:ext>
               </a:extLst>
             </p:cNvPr>
@@ -24976,7 +24912,7 @@
           <p:cNvPr id="72" name="Group 71">
             <a:extLst>
               <a:ext uri="{FF2B5EF4-FFF2-40B4-BE49-F238E27FC236}">
-                <a16:creationId xmlns="" xmlns:a16="http://schemas.microsoft.com/office/drawing/2014/main" id="{8ACD396F-9CBB-E28A-C3C7-9FFF82E7D986}"/>
+                <a16:creationId xmlns:a16="http://schemas.microsoft.com/office/drawing/2014/main" xmlns="" id="{8ACD396F-9CBB-E28A-C3C7-9FFF82E7D986}"/>
               </a:ext>
             </a:extLst>
           </p:cNvPr>
@@ -24996,7 +24932,7 @@
             <p:cNvPr id="73" name="Oval 72">
               <a:extLst>
                 <a:ext uri="{FF2B5EF4-FFF2-40B4-BE49-F238E27FC236}">
-                  <a16:creationId xmlns="" xmlns:a16="http://schemas.microsoft.com/office/drawing/2014/main" id="{79F5ABF2-6AF6-5851-71FF-385EC3216731}"/>
+                  <a16:creationId xmlns:a16="http://schemas.microsoft.com/office/drawing/2014/main" xmlns="" id="{79F5ABF2-6AF6-5851-71FF-385EC3216731}"/>
                 </a:ext>
               </a:extLst>
             </p:cNvPr>
@@ -25055,7 +24991,7 @@
             <p:cNvPr id="74" name="Arc 73">
               <a:extLst>
                 <a:ext uri="{FF2B5EF4-FFF2-40B4-BE49-F238E27FC236}">
-                  <a16:creationId xmlns="" xmlns:a16="http://schemas.microsoft.com/office/drawing/2014/main" id="{59B2770C-AEBD-5B7B-0CAD-D69C9BFB0200}"/>
+                  <a16:creationId xmlns:a16="http://schemas.microsoft.com/office/drawing/2014/main" xmlns="" id="{59B2770C-AEBD-5B7B-0CAD-D69C9BFB0200}"/>
                 </a:ext>
               </a:extLst>
             </p:cNvPr>
@@ -25108,7 +25044,7 @@
           <p:cNvPr id="75" name="Group 74">
             <a:extLst>
               <a:ext uri="{FF2B5EF4-FFF2-40B4-BE49-F238E27FC236}">
-                <a16:creationId xmlns="" xmlns:a16="http://schemas.microsoft.com/office/drawing/2014/main" id="{8E67EC40-2CEA-15BB-679E-82A155506382}"/>
+                <a16:creationId xmlns:a16="http://schemas.microsoft.com/office/drawing/2014/main" xmlns="" id="{8E67EC40-2CEA-15BB-679E-82A155506382}"/>
               </a:ext>
             </a:extLst>
           </p:cNvPr>
@@ -25128,7 +25064,7 @@
             <p:cNvPr id="76" name="Oval 75">
               <a:extLst>
                 <a:ext uri="{FF2B5EF4-FFF2-40B4-BE49-F238E27FC236}">
-                  <a16:creationId xmlns="" xmlns:a16="http://schemas.microsoft.com/office/drawing/2014/main" id="{BEE67072-39B0-0D8C-3764-DF739D4EF898}"/>
+                  <a16:creationId xmlns:a16="http://schemas.microsoft.com/office/drawing/2014/main" xmlns="" id="{BEE67072-39B0-0D8C-3764-DF739D4EF898}"/>
                 </a:ext>
               </a:extLst>
             </p:cNvPr>
@@ -25187,7 +25123,7 @@
             <p:cNvPr id="77" name="Arc 76">
               <a:extLst>
                 <a:ext uri="{FF2B5EF4-FFF2-40B4-BE49-F238E27FC236}">
-                  <a16:creationId xmlns="" xmlns:a16="http://schemas.microsoft.com/office/drawing/2014/main" id="{1036E0E8-91A2-459D-62BA-7E55B36EA4A3}"/>
+                  <a16:creationId xmlns:a16="http://schemas.microsoft.com/office/drawing/2014/main" xmlns="" id="{1036E0E8-91A2-459D-62BA-7E55B36EA4A3}"/>
                 </a:ext>
               </a:extLst>
             </p:cNvPr>
@@ -25240,7 +25176,7 @@
           <p:cNvPr id="78" name="Group 77">
             <a:extLst>
               <a:ext uri="{FF2B5EF4-FFF2-40B4-BE49-F238E27FC236}">
-                <a16:creationId xmlns="" xmlns:a16="http://schemas.microsoft.com/office/drawing/2014/main" id="{E7A8FC93-89F4-B3FF-B2A0-EB92EE14302F}"/>
+                <a16:creationId xmlns:a16="http://schemas.microsoft.com/office/drawing/2014/main" xmlns="" id="{E7A8FC93-89F4-B3FF-B2A0-EB92EE14302F}"/>
               </a:ext>
             </a:extLst>
           </p:cNvPr>
@@ -25260,7 +25196,7 @@
             <p:cNvPr id="79" name="Oval 78">
               <a:extLst>
                 <a:ext uri="{FF2B5EF4-FFF2-40B4-BE49-F238E27FC236}">
-                  <a16:creationId xmlns="" xmlns:a16="http://schemas.microsoft.com/office/drawing/2014/main" id="{0B288602-214C-9797-F12B-433D63A94C97}"/>
+                  <a16:creationId xmlns:a16="http://schemas.microsoft.com/office/drawing/2014/main" xmlns="" id="{0B288602-214C-9797-F12B-433D63A94C97}"/>
                 </a:ext>
               </a:extLst>
             </p:cNvPr>
@@ -25319,7 +25255,7 @@
             <p:cNvPr id="80" name="Arc 79">
               <a:extLst>
                 <a:ext uri="{FF2B5EF4-FFF2-40B4-BE49-F238E27FC236}">
-                  <a16:creationId xmlns="" xmlns:a16="http://schemas.microsoft.com/office/drawing/2014/main" id="{B2237529-DFC9-A1B7-9CFA-D339940826FC}"/>
+                  <a16:creationId xmlns:a16="http://schemas.microsoft.com/office/drawing/2014/main" xmlns="" id="{B2237529-DFC9-A1B7-9CFA-D339940826FC}"/>
                 </a:ext>
               </a:extLst>
             </p:cNvPr>
@@ -25372,7 +25308,7 @@
           <p:cNvPr id="81" name="Group 80">
             <a:extLst>
               <a:ext uri="{FF2B5EF4-FFF2-40B4-BE49-F238E27FC236}">
-                <a16:creationId xmlns="" xmlns:a16="http://schemas.microsoft.com/office/drawing/2014/main" id="{56E08E4B-3F15-3DA7-6141-7E97655DD396}"/>
+                <a16:creationId xmlns:a16="http://schemas.microsoft.com/office/drawing/2014/main" xmlns="" id="{56E08E4B-3F15-3DA7-6141-7E97655DD396}"/>
               </a:ext>
             </a:extLst>
           </p:cNvPr>
@@ -25392,7 +25328,7 @@
             <p:cNvPr id="82" name="Oval 81">
               <a:extLst>
                 <a:ext uri="{FF2B5EF4-FFF2-40B4-BE49-F238E27FC236}">
-                  <a16:creationId xmlns="" xmlns:a16="http://schemas.microsoft.com/office/drawing/2014/main" id="{BF631934-7110-7F5E-79A0-378CB41A08C9}"/>
+                  <a16:creationId xmlns:a16="http://schemas.microsoft.com/office/drawing/2014/main" xmlns="" id="{BF631934-7110-7F5E-79A0-378CB41A08C9}"/>
                 </a:ext>
               </a:extLst>
             </p:cNvPr>
@@ -25451,7 +25387,7 @@
             <p:cNvPr id="83" name="Arc 82">
               <a:extLst>
                 <a:ext uri="{FF2B5EF4-FFF2-40B4-BE49-F238E27FC236}">
-                  <a16:creationId xmlns="" xmlns:a16="http://schemas.microsoft.com/office/drawing/2014/main" id="{0439DB39-7B53-36D4-BDF5-71DB13657FDC}"/>
+                  <a16:creationId xmlns:a16="http://schemas.microsoft.com/office/drawing/2014/main" xmlns="" id="{0439DB39-7B53-36D4-BDF5-71DB13657FDC}"/>
                 </a:ext>
               </a:extLst>
             </p:cNvPr>
@@ -25504,7 +25440,7 @@
           <p:cNvPr id="84" name="Group 83">
             <a:extLst>
               <a:ext uri="{FF2B5EF4-FFF2-40B4-BE49-F238E27FC236}">
-                <a16:creationId xmlns="" xmlns:a16="http://schemas.microsoft.com/office/drawing/2014/main" id="{BD99BE67-16D7-6B0C-6E7E-F8B4B7BD2317}"/>
+                <a16:creationId xmlns:a16="http://schemas.microsoft.com/office/drawing/2014/main" xmlns="" id="{BD99BE67-16D7-6B0C-6E7E-F8B4B7BD2317}"/>
               </a:ext>
             </a:extLst>
           </p:cNvPr>
@@ -25524,7 +25460,7 @@
             <p:cNvPr id="85" name="Oval 84">
               <a:extLst>
                 <a:ext uri="{FF2B5EF4-FFF2-40B4-BE49-F238E27FC236}">
-                  <a16:creationId xmlns="" xmlns:a16="http://schemas.microsoft.com/office/drawing/2014/main" id="{370A9636-2147-18A8-A452-5C474F2755F9}"/>
+                  <a16:creationId xmlns:a16="http://schemas.microsoft.com/office/drawing/2014/main" xmlns="" id="{370A9636-2147-18A8-A452-5C474F2755F9}"/>
                 </a:ext>
               </a:extLst>
             </p:cNvPr>
@@ -25583,7 +25519,7 @@
             <p:cNvPr id="86" name="Arc 85">
               <a:extLst>
                 <a:ext uri="{FF2B5EF4-FFF2-40B4-BE49-F238E27FC236}">
-                  <a16:creationId xmlns="" xmlns:a16="http://schemas.microsoft.com/office/drawing/2014/main" id="{CF37D023-EFBC-7B83-E01F-14E578B5E41F}"/>
+                  <a16:creationId xmlns:a16="http://schemas.microsoft.com/office/drawing/2014/main" xmlns="" id="{CF37D023-EFBC-7B83-E01F-14E578B5E41F}"/>
                 </a:ext>
               </a:extLst>
             </p:cNvPr>
@@ -25636,7 +25572,7 @@
           <p:cNvPr id="87" name="Group 86">
             <a:extLst>
               <a:ext uri="{FF2B5EF4-FFF2-40B4-BE49-F238E27FC236}">
-                <a16:creationId xmlns="" xmlns:a16="http://schemas.microsoft.com/office/drawing/2014/main" id="{18D76EDD-67EC-1706-7541-E0B361B9EE01}"/>
+                <a16:creationId xmlns:a16="http://schemas.microsoft.com/office/drawing/2014/main" xmlns="" id="{18D76EDD-67EC-1706-7541-E0B361B9EE01}"/>
               </a:ext>
             </a:extLst>
           </p:cNvPr>
@@ -25656,7 +25592,7 @@
             <p:cNvPr id="88" name="Oval 87">
               <a:extLst>
                 <a:ext uri="{FF2B5EF4-FFF2-40B4-BE49-F238E27FC236}">
-                  <a16:creationId xmlns="" xmlns:a16="http://schemas.microsoft.com/office/drawing/2014/main" id="{EBF7F9D4-4385-3396-B1F8-92B45C3EE234}"/>
+                  <a16:creationId xmlns:a16="http://schemas.microsoft.com/office/drawing/2014/main" xmlns="" id="{EBF7F9D4-4385-3396-B1F8-92B45C3EE234}"/>
                 </a:ext>
               </a:extLst>
             </p:cNvPr>
@@ -25715,7 +25651,7 @@
             <p:cNvPr id="89" name="Arc 88">
               <a:extLst>
                 <a:ext uri="{FF2B5EF4-FFF2-40B4-BE49-F238E27FC236}">
-                  <a16:creationId xmlns="" xmlns:a16="http://schemas.microsoft.com/office/drawing/2014/main" id="{344DEE6C-BE03-A502-C8EB-06880E1AFF7F}"/>
+                  <a16:creationId xmlns:a16="http://schemas.microsoft.com/office/drawing/2014/main" xmlns="" id="{344DEE6C-BE03-A502-C8EB-06880E1AFF7F}"/>
                 </a:ext>
               </a:extLst>
             </p:cNvPr>
@@ -25768,7 +25704,7 @@
           <p:cNvPr id="90" name="Group 89">
             <a:extLst>
               <a:ext uri="{FF2B5EF4-FFF2-40B4-BE49-F238E27FC236}">
-                <a16:creationId xmlns="" xmlns:a16="http://schemas.microsoft.com/office/drawing/2014/main" id="{805A620C-3AE2-255F-D0AD-7BCE318B0261}"/>
+                <a16:creationId xmlns:a16="http://schemas.microsoft.com/office/drawing/2014/main" xmlns="" id="{805A620C-3AE2-255F-D0AD-7BCE318B0261}"/>
               </a:ext>
             </a:extLst>
           </p:cNvPr>
@@ -25788,7 +25724,7 @@
             <p:cNvPr id="91" name="Oval 90">
               <a:extLst>
                 <a:ext uri="{FF2B5EF4-FFF2-40B4-BE49-F238E27FC236}">
-                  <a16:creationId xmlns="" xmlns:a16="http://schemas.microsoft.com/office/drawing/2014/main" id="{C8C812B5-07D8-854F-C972-D8CEBC6A35B4}"/>
+                  <a16:creationId xmlns:a16="http://schemas.microsoft.com/office/drawing/2014/main" xmlns="" id="{C8C812B5-07D8-854F-C972-D8CEBC6A35B4}"/>
                 </a:ext>
               </a:extLst>
             </p:cNvPr>
@@ -25847,7 +25783,7 @@
             <p:cNvPr id="92" name="Arc 91">
               <a:extLst>
                 <a:ext uri="{FF2B5EF4-FFF2-40B4-BE49-F238E27FC236}">
-                  <a16:creationId xmlns="" xmlns:a16="http://schemas.microsoft.com/office/drawing/2014/main" id="{79FA0149-4CB8-9929-0B85-1B9620713172}"/>
+                  <a16:creationId xmlns:a16="http://schemas.microsoft.com/office/drawing/2014/main" xmlns="" id="{79FA0149-4CB8-9929-0B85-1B9620713172}"/>
                 </a:ext>
               </a:extLst>
             </p:cNvPr>
@@ -25900,7 +25836,7 @@
           <p:cNvPr id="93" name="Group 92">
             <a:extLst>
               <a:ext uri="{FF2B5EF4-FFF2-40B4-BE49-F238E27FC236}">
-                <a16:creationId xmlns="" xmlns:a16="http://schemas.microsoft.com/office/drawing/2014/main" id="{D34F9994-C5E0-AE09-44C0-C5B87FCCE5CA}"/>
+                <a16:creationId xmlns:a16="http://schemas.microsoft.com/office/drawing/2014/main" xmlns="" id="{D34F9994-C5E0-AE09-44C0-C5B87FCCE5CA}"/>
               </a:ext>
             </a:extLst>
           </p:cNvPr>
@@ -25920,7 +25856,7 @@
             <p:cNvPr id="94" name="Oval 93">
               <a:extLst>
                 <a:ext uri="{FF2B5EF4-FFF2-40B4-BE49-F238E27FC236}">
-                  <a16:creationId xmlns="" xmlns:a16="http://schemas.microsoft.com/office/drawing/2014/main" id="{2AC773AF-0EEA-4375-E025-35F8FC5364E9}"/>
+                  <a16:creationId xmlns:a16="http://schemas.microsoft.com/office/drawing/2014/main" xmlns="" id="{2AC773AF-0EEA-4375-E025-35F8FC5364E9}"/>
                 </a:ext>
               </a:extLst>
             </p:cNvPr>
@@ -25979,7 +25915,7 @@
             <p:cNvPr id="95" name="Arc 94">
               <a:extLst>
                 <a:ext uri="{FF2B5EF4-FFF2-40B4-BE49-F238E27FC236}">
-                  <a16:creationId xmlns="" xmlns:a16="http://schemas.microsoft.com/office/drawing/2014/main" id="{90DDEFBB-F1E4-9858-B6D5-3FDB2B182EF9}"/>
+                  <a16:creationId xmlns:a16="http://schemas.microsoft.com/office/drawing/2014/main" xmlns="" id="{90DDEFBB-F1E4-9858-B6D5-3FDB2B182EF9}"/>
                 </a:ext>
               </a:extLst>
             </p:cNvPr>
@@ -26032,7 +25968,7 @@
           <p:cNvPr id="96" name="Group 95">
             <a:extLst>
               <a:ext uri="{FF2B5EF4-FFF2-40B4-BE49-F238E27FC236}">
-                <a16:creationId xmlns="" xmlns:a16="http://schemas.microsoft.com/office/drawing/2014/main" id="{A7DFD59F-9ACF-DA37-BC73-AADA05F8CD55}"/>
+                <a16:creationId xmlns:a16="http://schemas.microsoft.com/office/drawing/2014/main" xmlns="" id="{A7DFD59F-9ACF-DA37-BC73-AADA05F8CD55}"/>
               </a:ext>
             </a:extLst>
           </p:cNvPr>
@@ -26052,7 +25988,7 @@
             <p:cNvPr id="97" name="Oval 96">
               <a:extLst>
                 <a:ext uri="{FF2B5EF4-FFF2-40B4-BE49-F238E27FC236}">
-                  <a16:creationId xmlns="" xmlns:a16="http://schemas.microsoft.com/office/drawing/2014/main" id="{34E0A8AD-4A63-9662-8252-B6566776A0DB}"/>
+                  <a16:creationId xmlns:a16="http://schemas.microsoft.com/office/drawing/2014/main" xmlns="" id="{34E0A8AD-4A63-9662-8252-B6566776A0DB}"/>
                 </a:ext>
               </a:extLst>
             </p:cNvPr>
@@ -26111,7 +26047,7 @@
             <p:cNvPr id="98" name="Arc 97">
               <a:extLst>
                 <a:ext uri="{FF2B5EF4-FFF2-40B4-BE49-F238E27FC236}">
-                  <a16:creationId xmlns="" xmlns:a16="http://schemas.microsoft.com/office/drawing/2014/main" id="{A5AF0D9F-7BD7-E7BD-EF60-38F8DB6A7173}"/>
+                  <a16:creationId xmlns:a16="http://schemas.microsoft.com/office/drawing/2014/main" xmlns="" id="{A5AF0D9F-7BD7-E7BD-EF60-38F8DB6A7173}"/>
                 </a:ext>
               </a:extLst>
             </p:cNvPr>
@@ -26164,7 +26100,7 @@
           <p:cNvPr id="99" name="Group 98">
             <a:extLst>
               <a:ext uri="{FF2B5EF4-FFF2-40B4-BE49-F238E27FC236}">
-                <a16:creationId xmlns="" xmlns:a16="http://schemas.microsoft.com/office/drawing/2014/main" id="{B86504F5-14F5-005B-98B8-877CBD2DBAEC}"/>
+                <a16:creationId xmlns:a16="http://schemas.microsoft.com/office/drawing/2014/main" xmlns="" id="{B86504F5-14F5-005B-98B8-877CBD2DBAEC}"/>
               </a:ext>
             </a:extLst>
           </p:cNvPr>
@@ -26184,7 +26120,7 @@
             <p:cNvPr id="100" name="Oval 99">
               <a:extLst>
                 <a:ext uri="{FF2B5EF4-FFF2-40B4-BE49-F238E27FC236}">
-                  <a16:creationId xmlns="" xmlns:a16="http://schemas.microsoft.com/office/drawing/2014/main" id="{77BEE814-D0CC-0B71-56A8-38FC233ADBBC}"/>
+                  <a16:creationId xmlns:a16="http://schemas.microsoft.com/office/drawing/2014/main" xmlns="" id="{77BEE814-D0CC-0B71-56A8-38FC233ADBBC}"/>
                 </a:ext>
               </a:extLst>
             </p:cNvPr>
@@ -26243,7 +26179,7 @@
             <p:cNvPr id="101" name="Arc 100">
               <a:extLst>
                 <a:ext uri="{FF2B5EF4-FFF2-40B4-BE49-F238E27FC236}">
-                  <a16:creationId xmlns="" xmlns:a16="http://schemas.microsoft.com/office/drawing/2014/main" id="{E12B4309-6ECF-2A90-BE18-92E7B6D9F45C}"/>
+                  <a16:creationId xmlns:a16="http://schemas.microsoft.com/office/drawing/2014/main" xmlns="" id="{E12B4309-6ECF-2A90-BE18-92E7B6D9F45C}"/>
                 </a:ext>
               </a:extLst>
             </p:cNvPr>
@@ -26296,7 +26232,7 @@
           <p:cNvPr id="102" name="Group 101">
             <a:extLst>
               <a:ext uri="{FF2B5EF4-FFF2-40B4-BE49-F238E27FC236}">
-                <a16:creationId xmlns="" xmlns:a16="http://schemas.microsoft.com/office/drawing/2014/main" id="{B34C10F9-48AB-376A-971B-5E609292667E}"/>
+                <a16:creationId xmlns:a16="http://schemas.microsoft.com/office/drawing/2014/main" xmlns="" id="{B34C10F9-48AB-376A-971B-5E609292667E}"/>
               </a:ext>
             </a:extLst>
           </p:cNvPr>
@@ -26316,7 +26252,7 @@
             <p:cNvPr id="103" name="Oval 102">
               <a:extLst>
                 <a:ext uri="{FF2B5EF4-FFF2-40B4-BE49-F238E27FC236}">
-                  <a16:creationId xmlns="" xmlns:a16="http://schemas.microsoft.com/office/drawing/2014/main" id="{B13C8D1E-9E03-3B03-EB62-C5D86340BF1D}"/>
+                  <a16:creationId xmlns:a16="http://schemas.microsoft.com/office/drawing/2014/main" xmlns="" id="{B13C8D1E-9E03-3B03-EB62-C5D86340BF1D}"/>
                 </a:ext>
               </a:extLst>
             </p:cNvPr>
@@ -26375,7 +26311,7 @@
             <p:cNvPr id="104" name="Arc 103">
               <a:extLst>
                 <a:ext uri="{FF2B5EF4-FFF2-40B4-BE49-F238E27FC236}">
-                  <a16:creationId xmlns="" xmlns:a16="http://schemas.microsoft.com/office/drawing/2014/main" id="{FACF3DF3-03AF-3180-E1E4-55391011F79F}"/>
+                  <a16:creationId xmlns:a16="http://schemas.microsoft.com/office/drawing/2014/main" xmlns="" id="{FACF3DF3-03AF-3180-E1E4-55391011F79F}"/>
                 </a:ext>
               </a:extLst>
             </p:cNvPr>
@@ -26428,7 +26364,7 @@
           <p:cNvPr id="105" name="Group 104">
             <a:extLst>
               <a:ext uri="{FF2B5EF4-FFF2-40B4-BE49-F238E27FC236}">
-                <a16:creationId xmlns="" xmlns:a16="http://schemas.microsoft.com/office/drawing/2014/main" id="{ADC277D0-0547-3E1F-7B17-763C14F2C569}"/>
+                <a16:creationId xmlns:a16="http://schemas.microsoft.com/office/drawing/2014/main" xmlns="" id="{ADC277D0-0547-3E1F-7B17-763C14F2C569}"/>
               </a:ext>
             </a:extLst>
           </p:cNvPr>
@@ -26448,7 +26384,7 @@
             <p:cNvPr id="106" name="Oval 105">
               <a:extLst>
                 <a:ext uri="{FF2B5EF4-FFF2-40B4-BE49-F238E27FC236}">
-                  <a16:creationId xmlns="" xmlns:a16="http://schemas.microsoft.com/office/drawing/2014/main" id="{444E641A-F426-E972-E682-0AD4058F2F5F}"/>
+                  <a16:creationId xmlns:a16="http://schemas.microsoft.com/office/drawing/2014/main" xmlns="" id="{444E641A-F426-E972-E682-0AD4058F2F5F}"/>
                 </a:ext>
               </a:extLst>
             </p:cNvPr>
@@ -26507,7 +26443,7 @@
             <p:cNvPr id="107" name="Arc 106">
               <a:extLst>
                 <a:ext uri="{FF2B5EF4-FFF2-40B4-BE49-F238E27FC236}">
-                  <a16:creationId xmlns="" xmlns:a16="http://schemas.microsoft.com/office/drawing/2014/main" id="{000E6A81-D707-E36C-5DAD-68F6D1F68CE3}"/>
+                  <a16:creationId xmlns:a16="http://schemas.microsoft.com/office/drawing/2014/main" xmlns="" id="{000E6A81-D707-E36C-5DAD-68F6D1F68CE3}"/>
                 </a:ext>
               </a:extLst>
             </p:cNvPr>
@@ -26560,7 +26496,7 @@
           <p:cNvPr id="108" name="Group 107">
             <a:extLst>
               <a:ext uri="{FF2B5EF4-FFF2-40B4-BE49-F238E27FC236}">
-                <a16:creationId xmlns="" xmlns:a16="http://schemas.microsoft.com/office/drawing/2014/main" id="{31EA107D-77C3-196B-39BD-015BCFD6D3C2}"/>
+                <a16:creationId xmlns:a16="http://schemas.microsoft.com/office/drawing/2014/main" xmlns="" id="{31EA107D-77C3-196B-39BD-015BCFD6D3C2}"/>
               </a:ext>
             </a:extLst>
           </p:cNvPr>
@@ -26580,7 +26516,7 @@
             <p:cNvPr id="109" name="Oval 108">
               <a:extLst>
                 <a:ext uri="{FF2B5EF4-FFF2-40B4-BE49-F238E27FC236}">
-                  <a16:creationId xmlns="" xmlns:a16="http://schemas.microsoft.com/office/drawing/2014/main" id="{61FDFC2B-B300-35FB-0617-5D1C7ADF6641}"/>
+                  <a16:creationId xmlns:a16="http://schemas.microsoft.com/office/drawing/2014/main" xmlns="" id="{61FDFC2B-B300-35FB-0617-5D1C7ADF6641}"/>
                 </a:ext>
               </a:extLst>
             </p:cNvPr>
@@ -26639,7 +26575,7 @@
             <p:cNvPr id="110" name="Arc 109">
               <a:extLst>
                 <a:ext uri="{FF2B5EF4-FFF2-40B4-BE49-F238E27FC236}">
-                  <a16:creationId xmlns="" xmlns:a16="http://schemas.microsoft.com/office/drawing/2014/main" id="{CF6B487C-012F-56E5-E8E3-8B137298EDFA}"/>
+                  <a16:creationId xmlns:a16="http://schemas.microsoft.com/office/drawing/2014/main" xmlns="" id="{CF6B487C-012F-56E5-E8E3-8B137298EDFA}"/>
                 </a:ext>
               </a:extLst>
             </p:cNvPr>
@@ -26692,7 +26628,7 @@
           <p:cNvPr id="111" name="Group 110">
             <a:extLst>
               <a:ext uri="{FF2B5EF4-FFF2-40B4-BE49-F238E27FC236}">
-                <a16:creationId xmlns="" xmlns:a16="http://schemas.microsoft.com/office/drawing/2014/main" id="{6232043B-C4C4-BA0A-CF1A-4DBBB75AAC73}"/>
+                <a16:creationId xmlns:a16="http://schemas.microsoft.com/office/drawing/2014/main" xmlns="" id="{6232043B-C4C4-BA0A-CF1A-4DBBB75AAC73}"/>
               </a:ext>
             </a:extLst>
           </p:cNvPr>
@@ -26712,7 +26648,7 @@
             <p:cNvPr id="112" name="Oval 111">
               <a:extLst>
                 <a:ext uri="{FF2B5EF4-FFF2-40B4-BE49-F238E27FC236}">
-                  <a16:creationId xmlns="" xmlns:a16="http://schemas.microsoft.com/office/drawing/2014/main" id="{10FFE23E-6CCE-0432-75E0-E824C7863261}"/>
+                  <a16:creationId xmlns:a16="http://schemas.microsoft.com/office/drawing/2014/main" xmlns="" id="{10FFE23E-6CCE-0432-75E0-E824C7863261}"/>
                 </a:ext>
               </a:extLst>
             </p:cNvPr>
@@ -26771,7 +26707,7 @@
             <p:cNvPr id="113" name="Arc 112">
               <a:extLst>
                 <a:ext uri="{FF2B5EF4-FFF2-40B4-BE49-F238E27FC236}">
-                  <a16:creationId xmlns="" xmlns:a16="http://schemas.microsoft.com/office/drawing/2014/main" id="{98676D6A-3424-61E8-2CCE-756447D5F9C2}"/>
+                  <a16:creationId xmlns:a16="http://schemas.microsoft.com/office/drawing/2014/main" xmlns="" id="{98676D6A-3424-61E8-2CCE-756447D5F9C2}"/>
                 </a:ext>
               </a:extLst>
             </p:cNvPr>
@@ -26824,7 +26760,7 @@
           <p:cNvPr id="114" name="Group 113">
             <a:extLst>
               <a:ext uri="{FF2B5EF4-FFF2-40B4-BE49-F238E27FC236}">
-                <a16:creationId xmlns="" xmlns:a16="http://schemas.microsoft.com/office/drawing/2014/main" id="{88B3BE82-3395-0E01-8219-A5E3310F3959}"/>
+                <a16:creationId xmlns:a16="http://schemas.microsoft.com/office/drawing/2014/main" xmlns="" id="{88B3BE82-3395-0E01-8219-A5E3310F3959}"/>
               </a:ext>
             </a:extLst>
           </p:cNvPr>
@@ -26844,7 +26780,7 @@
             <p:cNvPr id="115" name="Oval 114">
               <a:extLst>
                 <a:ext uri="{FF2B5EF4-FFF2-40B4-BE49-F238E27FC236}">
-                  <a16:creationId xmlns="" xmlns:a16="http://schemas.microsoft.com/office/drawing/2014/main" id="{F83317C8-5B5D-DDF7-15F4-EA2AFB9BC950}"/>
+                  <a16:creationId xmlns:a16="http://schemas.microsoft.com/office/drawing/2014/main" xmlns="" id="{F83317C8-5B5D-DDF7-15F4-EA2AFB9BC950}"/>
                 </a:ext>
               </a:extLst>
             </p:cNvPr>
@@ -26903,7 +26839,7 @@
             <p:cNvPr id="116" name="Arc 115">
               <a:extLst>
                 <a:ext uri="{FF2B5EF4-FFF2-40B4-BE49-F238E27FC236}">
-                  <a16:creationId xmlns="" xmlns:a16="http://schemas.microsoft.com/office/drawing/2014/main" id="{E746B903-C206-EA9A-5FAE-24360FA19AD9}"/>
+                  <a16:creationId xmlns:a16="http://schemas.microsoft.com/office/drawing/2014/main" xmlns="" id="{E746B903-C206-EA9A-5FAE-24360FA19AD9}"/>
                 </a:ext>
               </a:extLst>
             </p:cNvPr>
@@ -26956,7 +26892,7 @@
           <p:cNvPr id="117" name="Group 116">
             <a:extLst>
               <a:ext uri="{FF2B5EF4-FFF2-40B4-BE49-F238E27FC236}">
-                <a16:creationId xmlns="" xmlns:a16="http://schemas.microsoft.com/office/drawing/2014/main" id="{2F2A7235-4D60-4C1C-AC1C-8026C6BB4059}"/>
+                <a16:creationId xmlns:a16="http://schemas.microsoft.com/office/drawing/2014/main" xmlns="" id="{2F2A7235-4D60-4C1C-AC1C-8026C6BB4059}"/>
               </a:ext>
             </a:extLst>
           </p:cNvPr>
@@ -26976,7 +26912,7 @@
             <p:cNvPr id="118" name="Oval 117">
               <a:extLst>
                 <a:ext uri="{FF2B5EF4-FFF2-40B4-BE49-F238E27FC236}">
-                  <a16:creationId xmlns="" xmlns:a16="http://schemas.microsoft.com/office/drawing/2014/main" id="{0F886985-AC53-0516-F85D-DDC1946AD17E}"/>
+                  <a16:creationId xmlns:a16="http://schemas.microsoft.com/office/drawing/2014/main" xmlns="" id="{0F886985-AC53-0516-F85D-DDC1946AD17E}"/>
                 </a:ext>
               </a:extLst>
             </p:cNvPr>
@@ -27035,7 +26971,7 @@
             <p:cNvPr id="119" name="Arc 118">
               <a:extLst>
                 <a:ext uri="{FF2B5EF4-FFF2-40B4-BE49-F238E27FC236}">
-                  <a16:creationId xmlns="" xmlns:a16="http://schemas.microsoft.com/office/drawing/2014/main" id="{AE4C9755-2A3A-5A32-D276-52C0A9B4F8D6}"/>
+                  <a16:creationId xmlns:a16="http://schemas.microsoft.com/office/drawing/2014/main" xmlns="" id="{AE4C9755-2A3A-5A32-D276-52C0A9B4F8D6}"/>
                 </a:ext>
               </a:extLst>
             </p:cNvPr>
@@ -27088,7 +27024,7 @@
           <p:cNvPr id="120" name="Group 119">
             <a:extLst>
               <a:ext uri="{FF2B5EF4-FFF2-40B4-BE49-F238E27FC236}">
-                <a16:creationId xmlns="" xmlns:a16="http://schemas.microsoft.com/office/drawing/2014/main" id="{7877DB57-685B-C785-7692-7E30EB8C61F3}"/>
+                <a16:creationId xmlns:a16="http://schemas.microsoft.com/office/drawing/2014/main" xmlns="" id="{7877DB57-685B-C785-7692-7E30EB8C61F3}"/>
               </a:ext>
             </a:extLst>
           </p:cNvPr>
@@ -27108,7 +27044,7 @@
             <p:cNvPr id="121" name="Oval 120">
               <a:extLst>
                 <a:ext uri="{FF2B5EF4-FFF2-40B4-BE49-F238E27FC236}">
-                  <a16:creationId xmlns="" xmlns:a16="http://schemas.microsoft.com/office/drawing/2014/main" id="{22F39CC0-1318-0DB9-44C8-44ED898DF450}"/>
+                  <a16:creationId xmlns:a16="http://schemas.microsoft.com/office/drawing/2014/main" xmlns="" id="{22F39CC0-1318-0DB9-44C8-44ED898DF450}"/>
                 </a:ext>
               </a:extLst>
             </p:cNvPr>
@@ -27167,7 +27103,7 @@
             <p:cNvPr id="122" name="Arc 121">
               <a:extLst>
                 <a:ext uri="{FF2B5EF4-FFF2-40B4-BE49-F238E27FC236}">
-                  <a16:creationId xmlns="" xmlns:a16="http://schemas.microsoft.com/office/drawing/2014/main" id="{E74E2D2F-36CC-9C47-07C8-1F7BA70CE9FF}"/>
+                  <a16:creationId xmlns:a16="http://schemas.microsoft.com/office/drawing/2014/main" xmlns="" id="{E74E2D2F-36CC-9C47-07C8-1F7BA70CE9FF}"/>
                 </a:ext>
               </a:extLst>
             </p:cNvPr>
@@ -27220,7 +27156,7 @@
           <p:cNvPr id="123" name="Rectangle 122">
             <a:extLst>
               <a:ext uri="{FF2B5EF4-FFF2-40B4-BE49-F238E27FC236}">
-                <a16:creationId xmlns="" xmlns:a16="http://schemas.microsoft.com/office/drawing/2014/main" id="{044E7409-6BE4-82BF-6739-FB981D21C254}"/>
+                <a16:creationId xmlns:a16="http://schemas.microsoft.com/office/drawing/2014/main" xmlns="" id="{044E7409-6BE4-82BF-6739-FB981D21C254}"/>
               </a:ext>
             </a:extLst>
           </p:cNvPr>
@@ -27418,7 +27354,7 @@
         <p:cNvPr id="1" name="">
           <a:extLst>
             <a:ext uri="{FF2B5EF4-FFF2-40B4-BE49-F238E27FC236}">
-              <a16:creationId xmlns="" xmlns:a16="http://schemas.microsoft.com/office/drawing/2014/main" id="{51C4FD09-55E3-2B1B-897E-1F9BF2720A5C}"/>
+              <a16:creationId xmlns:a16="http://schemas.microsoft.com/office/drawing/2014/main" xmlns="" id="{51C4FD09-55E3-2B1B-897E-1F9BF2720A5C}"/>
             </a:ext>
           </a:extLst>
         </p:cNvPr>
@@ -27438,7 +27374,7 @@
           <p:cNvPr id="5" name="Rectangle 4">
             <a:extLst>
               <a:ext uri="{FF2B5EF4-FFF2-40B4-BE49-F238E27FC236}">
-                <a16:creationId xmlns="" xmlns:a16="http://schemas.microsoft.com/office/drawing/2014/main" id="{B034BA31-4C57-9BDA-04C5-8FC13B21BF04}"/>
+                <a16:creationId xmlns:a16="http://schemas.microsoft.com/office/drawing/2014/main" xmlns="" id="{B034BA31-4C57-9BDA-04C5-8FC13B21BF04}"/>
               </a:ext>
             </a:extLst>
           </p:cNvPr>
@@ -27494,7 +27430,7 @@
           <p:cNvPr id="4" name="Rectangle 3">
             <a:extLst>
               <a:ext uri="{FF2B5EF4-FFF2-40B4-BE49-F238E27FC236}">
-                <a16:creationId xmlns="" xmlns:a16="http://schemas.microsoft.com/office/drawing/2014/main" id="{726F619E-C2F5-A764-7A5A-E740D3764F94}"/>
+                <a16:creationId xmlns:a16="http://schemas.microsoft.com/office/drawing/2014/main" xmlns="" id="{726F619E-C2F5-A764-7A5A-E740D3764F94}"/>
               </a:ext>
             </a:extLst>
           </p:cNvPr>
@@ -27725,7 +27661,7 @@
           <p:cNvPr id="6" name="Oval 5">
             <a:extLst>
               <a:ext uri="{FF2B5EF4-FFF2-40B4-BE49-F238E27FC236}">
-                <a16:creationId xmlns="" xmlns:a16="http://schemas.microsoft.com/office/drawing/2014/main" id="{63652264-4E8B-48A9-C360-C02C3660C32D}"/>
+                <a16:creationId xmlns:a16="http://schemas.microsoft.com/office/drawing/2014/main" xmlns="" id="{63652264-4E8B-48A9-C360-C02C3660C32D}"/>
               </a:ext>
             </a:extLst>
           </p:cNvPr>
@@ -27784,7 +27720,7 @@
           <p:cNvPr id="7" name="Oval 6">
             <a:extLst>
               <a:ext uri="{FF2B5EF4-FFF2-40B4-BE49-F238E27FC236}">
-                <a16:creationId xmlns="" xmlns:a16="http://schemas.microsoft.com/office/drawing/2014/main" id="{94A79690-2C7C-FEC2-2B4B-F5D0C6E2B06B}"/>
+                <a16:creationId xmlns:a16="http://schemas.microsoft.com/office/drawing/2014/main" xmlns="" id="{94A79690-2C7C-FEC2-2B4B-F5D0C6E2B06B}"/>
               </a:ext>
             </a:extLst>
           </p:cNvPr>
@@ -27843,7 +27779,7 @@
           <p:cNvPr id="8" name="Oval 7">
             <a:extLst>
               <a:ext uri="{FF2B5EF4-FFF2-40B4-BE49-F238E27FC236}">
-                <a16:creationId xmlns="" xmlns:a16="http://schemas.microsoft.com/office/drawing/2014/main" id="{F183C3CB-BD1C-4789-0643-1F50E0C687BE}"/>
+                <a16:creationId xmlns:a16="http://schemas.microsoft.com/office/drawing/2014/main" xmlns="" id="{F183C3CB-BD1C-4789-0643-1F50E0C687BE}"/>
               </a:ext>
             </a:extLst>
           </p:cNvPr>
@@ -27902,7 +27838,7 @@
           <p:cNvPr id="9" name="Oval 8">
             <a:extLst>
               <a:ext uri="{FF2B5EF4-FFF2-40B4-BE49-F238E27FC236}">
-                <a16:creationId xmlns="" xmlns:a16="http://schemas.microsoft.com/office/drawing/2014/main" id="{852695AE-B9E1-CA35-383A-5061DECC336D}"/>
+                <a16:creationId xmlns:a16="http://schemas.microsoft.com/office/drawing/2014/main" xmlns="" id="{852695AE-B9E1-CA35-383A-5061DECC336D}"/>
               </a:ext>
             </a:extLst>
           </p:cNvPr>
@@ -27961,7 +27897,7 @@
           <p:cNvPr id="10" name="Oval 9">
             <a:extLst>
               <a:ext uri="{FF2B5EF4-FFF2-40B4-BE49-F238E27FC236}">
-                <a16:creationId xmlns="" xmlns:a16="http://schemas.microsoft.com/office/drawing/2014/main" id="{AC8B7149-0844-B850-391A-8060B3392CC6}"/>
+                <a16:creationId xmlns:a16="http://schemas.microsoft.com/office/drawing/2014/main" xmlns="" id="{AC8B7149-0844-B850-391A-8060B3392CC6}"/>
               </a:ext>
             </a:extLst>
           </p:cNvPr>
@@ -28020,7 +27956,7 @@
           <p:cNvPr id="11" name="Oval 10">
             <a:extLst>
               <a:ext uri="{FF2B5EF4-FFF2-40B4-BE49-F238E27FC236}">
-                <a16:creationId xmlns="" xmlns:a16="http://schemas.microsoft.com/office/drawing/2014/main" id="{0D333270-CC5E-7DF6-1A02-659ABE822FF5}"/>
+                <a16:creationId xmlns:a16="http://schemas.microsoft.com/office/drawing/2014/main" xmlns="" id="{0D333270-CC5E-7DF6-1A02-659ABE822FF5}"/>
               </a:ext>
             </a:extLst>
           </p:cNvPr>
@@ -28079,7 +28015,7 @@
           <p:cNvPr id="12" name="Oval 11">
             <a:extLst>
               <a:ext uri="{FF2B5EF4-FFF2-40B4-BE49-F238E27FC236}">
-                <a16:creationId xmlns="" xmlns:a16="http://schemas.microsoft.com/office/drawing/2014/main" id="{79654E69-BC73-6E52-DC33-651392E0526D}"/>
+                <a16:creationId xmlns:a16="http://schemas.microsoft.com/office/drawing/2014/main" xmlns="" id="{79654E69-BC73-6E52-DC33-651392E0526D}"/>
               </a:ext>
             </a:extLst>
           </p:cNvPr>
@@ -28138,7 +28074,7 @@
           <p:cNvPr id="13" name="Oval 12">
             <a:extLst>
               <a:ext uri="{FF2B5EF4-FFF2-40B4-BE49-F238E27FC236}">
-                <a16:creationId xmlns="" xmlns:a16="http://schemas.microsoft.com/office/drawing/2014/main" id="{E4CFDB43-57A3-3026-29E9-D60F416B0F09}"/>
+                <a16:creationId xmlns:a16="http://schemas.microsoft.com/office/drawing/2014/main" xmlns="" id="{E4CFDB43-57A3-3026-29E9-D60F416B0F09}"/>
               </a:ext>
             </a:extLst>
           </p:cNvPr>
@@ -28197,7 +28133,7 @@
           <p:cNvPr id="14" name="Oval 13">
             <a:extLst>
               <a:ext uri="{FF2B5EF4-FFF2-40B4-BE49-F238E27FC236}">
-                <a16:creationId xmlns="" xmlns:a16="http://schemas.microsoft.com/office/drawing/2014/main" id="{F309C4C6-BB4D-8939-A2FC-02DC29CFCC6D}"/>
+                <a16:creationId xmlns:a16="http://schemas.microsoft.com/office/drawing/2014/main" xmlns="" id="{F309C4C6-BB4D-8939-A2FC-02DC29CFCC6D}"/>
               </a:ext>
             </a:extLst>
           </p:cNvPr>
@@ -28256,7 +28192,7 @@
           <p:cNvPr id="15" name="Oval 14">
             <a:extLst>
               <a:ext uri="{FF2B5EF4-FFF2-40B4-BE49-F238E27FC236}">
-                <a16:creationId xmlns="" xmlns:a16="http://schemas.microsoft.com/office/drawing/2014/main" id="{042F644C-7941-9F1F-CD17-58A102B9F051}"/>
+                <a16:creationId xmlns:a16="http://schemas.microsoft.com/office/drawing/2014/main" xmlns="" id="{042F644C-7941-9F1F-CD17-58A102B9F051}"/>
               </a:ext>
             </a:extLst>
           </p:cNvPr>
@@ -28315,7 +28251,7 @@
           <p:cNvPr id="16" name="Oval 15">
             <a:extLst>
               <a:ext uri="{FF2B5EF4-FFF2-40B4-BE49-F238E27FC236}">
-                <a16:creationId xmlns="" xmlns:a16="http://schemas.microsoft.com/office/drawing/2014/main" id="{9FE90EDA-798E-4116-2E6D-F9F24F96F337}"/>
+                <a16:creationId xmlns:a16="http://schemas.microsoft.com/office/drawing/2014/main" xmlns="" id="{9FE90EDA-798E-4116-2E6D-F9F24F96F337}"/>
               </a:ext>
             </a:extLst>
           </p:cNvPr>
@@ -28374,7 +28310,7 @@
           <p:cNvPr id="17" name="Oval 16">
             <a:extLst>
               <a:ext uri="{FF2B5EF4-FFF2-40B4-BE49-F238E27FC236}">
-                <a16:creationId xmlns="" xmlns:a16="http://schemas.microsoft.com/office/drawing/2014/main" id="{01176BBF-01DD-C6ED-B967-EB1DB7DB2F69}"/>
+                <a16:creationId xmlns:a16="http://schemas.microsoft.com/office/drawing/2014/main" xmlns="" id="{01176BBF-01DD-C6ED-B967-EB1DB7DB2F69}"/>
               </a:ext>
             </a:extLst>
           </p:cNvPr>
@@ -28433,7 +28369,7 @@
           <p:cNvPr id="18" name="Oval 17">
             <a:extLst>
               <a:ext uri="{FF2B5EF4-FFF2-40B4-BE49-F238E27FC236}">
-                <a16:creationId xmlns="" xmlns:a16="http://schemas.microsoft.com/office/drawing/2014/main" id="{9F9C5F9C-2EEA-6014-F551-FCFA8EE56021}"/>
+                <a16:creationId xmlns:a16="http://schemas.microsoft.com/office/drawing/2014/main" xmlns="" id="{9F9C5F9C-2EEA-6014-F551-FCFA8EE56021}"/>
               </a:ext>
             </a:extLst>
           </p:cNvPr>
@@ -28492,7 +28428,7 @@
           <p:cNvPr id="19" name="Oval 18">
             <a:extLst>
               <a:ext uri="{FF2B5EF4-FFF2-40B4-BE49-F238E27FC236}">
-                <a16:creationId xmlns="" xmlns:a16="http://schemas.microsoft.com/office/drawing/2014/main" id="{3C7AD85C-644E-0A9B-6CFE-2B4A8C85E76B}"/>
+                <a16:creationId xmlns:a16="http://schemas.microsoft.com/office/drawing/2014/main" xmlns="" id="{3C7AD85C-644E-0A9B-6CFE-2B4A8C85E76B}"/>
               </a:ext>
             </a:extLst>
           </p:cNvPr>
@@ -28551,7 +28487,7 @@
           <p:cNvPr id="20" name="Oval 19">
             <a:extLst>
               <a:ext uri="{FF2B5EF4-FFF2-40B4-BE49-F238E27FC236}">
-                <a16:creationId xmlns="" xmlns:a16="http://schemas.microsoft.com/office/drawing/2014/main" id="{0380C106-105A-1A96-0199-94FE8B539591}"/>
+                <a16:creationId xmlns:a16="http://schemas.microsoft.com/office/drawing/2014/main" xmlns="" id="{0380C106-105A-1A96-0199-94FE8B539591}"/>
               </a:ext>
             </a:extLst>
           </p:cNvPr>
@@ -28610,7 +28546,7 @@
           <p:cNvPr id="21" name="Oval 20">
             <a:extLst>
               <a:ext uri="{FF2B5EF4-FFF2-40B4-BE49-F238E27FC236}">
-                <a16:creationId xmlns="" xmlns:a16="http://schemas.microsoft.com/office/drawing/2014/main" id="{89A7FBE2-CFD6-1AB1-A77D-4A327850C6BD}"/>
+                <a16:creationId xmlns:a16="http://schemas.microsoft.com/office/drawing/2014/main" xmlns="" id="{89A7FBE2-CFD6-1AB1-A77D-4A327850C6BD}"/>
               </a:ext>
             </a:extLst>
           </p:cNvPr>
@@ -28669,7 +28605,7 @@
           <p:cNvPr id="22" name="Oval 21">
             <a:extLst>
               <a:ext uri="{FF2B5EF4-FFF2-40B4-BE49-F238E27FC236}">
-                <a16:creationId xmlns="" xmlns:a16="http://schemas.microsoft.com/office/drawing/2014/main" id="{3121677A-1631-1324-1E55-D68B3900D565}"/>
+                <a16:creationId xmlns:a16="http://schemas.microsoft.com/office/drawing/2014/main" xmlns="" id="{3121677A-1631-1324-1E55-D68B3900D565}"/>
               </a:ext>
             </a:extLst>
           </p:cNvPr>
@@ -28728,7 +28664,7 @@
           <p:cNvPr id="23" name="Oval 22">
             <a:extLst>
               <a:ext uri="{FF2B5EF4-FFF2-40B4-BE49-F238E27FC236}">
-                <a16:creationId xmlns="" xmlns:a16="http://schemas.microsoft.com/office/drawing/2014/main" id="{64D42A8C-6C17-5515-7C30-72FA44A1C982}"/>
+                <a16:creationId xmlns:a16="http://schemas.microsoft.com/office/drawing/2014/main" xmlns="" id="{64D42A8C-6C17-5515-7C30-72FA44A1C982}"/>
               </a:ext>
             </a:extLst>
           </p:cNvPr>
@@ -28787,7 +28723,7 @@
           <p:cNvPr id="24" name="Oval 23">
             <a:extLst>
               <a:ext uri="{FF2B5EF4-FFF2-40B4-BE49-F238E27FC236}">
-                <a16:creationId xmlns="" xmlns:a16="http://schemas.microsoft.com/office/drawing/2014/main" id="{7475C0C7-3651-5314-3F48-173B78AB0BFB}"/>
+                <a16:creationId xmlns:a16="http://schemas.microsoft.com/office/drawing/2014/main" xmlns="" id="{7475C0C7-3651-5314-3F48-173B78AB0BFB}"/>
               </a:ext>
             </a:extLst>
           </p:cNvPr>
@@ -28846,7 +28782,7 @@
           <p:cNvPr id="25" name="Oval 24">
             <a:extLst>
               <a:ext uri="{FF2B5EF4-FFF2-40B4-BE49-F238E27FC236}">
-                <a16:creationId xmlns="" xmlns:a16="http://schemas.microsoft.com/office/drawing/2014/main" id="{9EC0B432-CB23-DBAF-B917-7ABB9CFA1904}"/>
+                <a16:creationId xmlns:a16="http://schemas.microsoft.com/office/drawing/2014/main" xmlns="" id="{9EC0B432-CB23-DBAF-B917-7ABB9CFA1904}"/>
               </a:ext>
             </a:extLst>
           </p:cNvPr>
@@ -28905,7 +28841,7 @@
           <p:cNvPr id="26" name="Oval 25">
             <a:extLst>
               <a:ext uri="{FF2B5EF4-FFF2-40B4-BE49-F238E27FC236}">
-                <a16:creationId xmlns="" xmlns:a16="http://schemas.microsoft.com/office/drawing/2014/main" id="{CD6371DF-A7E5-1434-5000-FF50454FDD3B}"/>
+                <a16:creationId xmlns:a16="http://schemas.microsoft.com/office/drawing/2014/main" xmlns="" id="{CD6371DF-A7E5-1434-5000-FF50454FDD3B}"/>
               </a:ext>
             </a:extLst>
           </p:cNvPr>
@@ -28964,7 +28900,7 @@
           <p:cNvPr id="27" name="Oval 26">
             <a:extLst>
               <a:ext uri="{FF2B5EF4-FFF2-40B4-BE49-F238E27FC236}">
-                <a16:creationId xmlns="" xmlns:a16="http://schemas.microsoft.com/office/drawing/2014/main" id="{1F08106B-D501-EC7F-FD6E-9F53DD6567B9}"/>
+                <a16:creationId xmlns:a16="http://schemas.microsoft.com/office/drawing/2014/main" xmlns="" id="{1F08106B-D501-EC7F-FD6E-9F53DD6567B9}"/>
               </a:ext>
             </a:extLst>
           </p:cNvPr>
@@ -29023,7 +28959,7 @@
           <p:cNvPr id="28" name="Oval 27">
             <a:extLst>
               <a:ext uri="{FF2B5EF4-FFF2-40B4-BE49-F238E27FC236}">
-                <a16:creationId xmlns="" xmlns:a16="http://schemas.microsoft.com/office/drawing/2014/main" id="{58CD1136-8D51-C029-89F6-934EB793CA76}"/>
+                <a16:creationId xmlns:a16="http://schemas.microsoft.com/office/drawing/2014/main" xmlns="" id="{58CD1136-8D51-C029-89F6-934EB793CA76}"/>
               </a:ext>
             </a:extLst>
           </p:cNvPr>
@@ -29082,7 +29018,7 @@
           <p:cNvPr id="29" name="Oval 28">
             <a:extLst>
               <a:ext uri="{FF2B5EF4-FFF2-40B4-BE49-F238E27FC236}">
-                <a16:creationId xmlns="" xmlns:a16="http://schemas.microsoft.com/office/drawing/2014/main" id="{50E918C1-C147-CDF9-9A0B-C41B1B1BDC16}"/>
+                <a16:creationId xmlns:a16="http://schemas.microsoft.com/office/drawing/2014/main" xmlns="" id="{50E918C1-C147-CDF9-9A0B-C41B1B1BDC16}"/>
               </a:ext>
             </a:extLst>
           </p:cNvPr>
@@ -29141,7 +29077,7 @@
           <p:cNvPr id="3" name="Group 2">
             <a:extLst>
               <a:ext uri="{FF2B5EF4-FFF2-40B4-BE49-F238E27FC236}">
-                <a16:creationId xmlns="" xmlns:a16="http://schemas.microsoft.com/office/drawing/2014/main" id="{928405A0-4A61-8733-B126-4D81DAAC8909}"/>
+                <a16:creationId xmlns:a16="http://schemas.microsoft.com/office/drawing/2014/main" xmlns="" id="{928405A0-4A61-8733-B126-4D81DAAC8909}"/>
               </a:ext>
             </a:extLst>
           </p:cNvPr>
@@ -29161,7 +29097,7 @@
             <p:cNvPr id="2" name="Oval 1">
               <a:extLst>
                 <a:ext uri="{FF2B5EF4-FFF2-40B4-BE49-F238E27FC236}">
-                  <a16:creationId xmlns="" xmlns:a16="http://schemas.microsoft.com/office/drawing/2014/main" id="{13AFC585-BA57-5F31-158D-6005C04FEA8F}"/>
+                  <a16:creationId xmlns:a16="http://schemas.microsoft.com/office/drawing/2014/main" xmlns="" id="{13AFC585-BA57-5F31-158D-6005C04FEA8F}"/>
                 </a:ext>
               </a:extLst>
             </p:cNvPr>
@@ -29220,7 +29156,7 @@
             <p:cNvPr id="30" name="Arc 29">
               <a:extLst>
                 <a:ext uri="{FF2B5EF4-FFF2-40B4-BE49-F238E27FC236}">
-                  <a16:creationId xmlns="" xmlns:a16="http://schemas.microsoft.com/office/drawing/2014/main" id="{6ABDBE3E-C36D-8AB3-7845-745EE50517F1}"/>
+                  <a16:creationId xmlns:a16="http://schemas.microsoft.com/office/drawing/2014/main" xmlns="" id="{6ABDBE3E-C36D-8AB3-7845-745EE50517F1}"/>
                 </a:ext>
               </a:extLst>
             </p:cNvPr>
@@ -29273,7 +29209,7 @@
           <p:cNvPr id="54" name="Group 53">
             <a:extLst>
               <a:ext uri="{FF2B5EF4-FFF2-40B4-BE49-F238E27FC236}">
-                <a16:creationId xmlns="" xmlns:a16="http://schemas.microsoft.com/office/drawing/2014/main" id="{BE4556B3-F34C-FF2C-77C6-6D471C09D64C}"/>
+                <a16:creationId xmlns:a16="http://schemas.microsoft.com/office/drawing/2014/main" xmlns="" id="{BE4556B3-F34C-FF2C-77C6-6D471C09D64C}"/>
               </a:ext>
             </a:extLst>
           </p:cNvPr>
@@ -29293,7 +29229,7 @@
             <p:cNvPr id="55" name="Oval 54">
               <a:extLst>
                 <a:ext uri="{FF2B5EF4-FFF2-40B4-BE49-F238E27FC236}">
-                  <a16:creationId xmlns="" xmlns:a16="http://schemas.microsoft.com/office/drawing/2014/main" id="{328F7FC3-44ED-BDFD-31EC-54198BE5A58F}"/>
+                  <a16:creationId xmlns:a16="http://schemas.microsoft.com/office/drawing/2014/main" xmlns="" id="{328F7FC3-44ED-BDFD-31EC-54198BE5A58F}"/>
                 </a:ext>
               </a:extLst>
             </p:cNvPr>
@@ -29352,7 +29288,7 @@
             <p:cNvPr id="56" name="Arc 55">
               <a:extLst>
                 <a:ext uri="{FF2B5EF4-FFF2-40B4-BE49-F238E27FC236}">
-                  <a16:creationId xmlns="" xmlns:a16="http://schemas.microsoft.com/office/drawing/2014/main" id="{691957E7-B542-3D6C-AA1A-4C3661572B27}"/>
+                  <a16:creationId xmlns:a16="http://schemas.microsoft.com/office/drawing/2014/main" xmlns="" id="{691957E7-B542-3D6C-AA1A-4C3661572B27}"/>
                 </a:ext>
               </a:extLst>
             </p:cNvPr>
@@ -29405,7 +29341,7 @@
           <p:cNvPr id="57" name="Group 56">
             <a:extLst>
               <a:ext uri="{FF2B5EF4-FFF2-40B4-BE49-F238E27FC236}">
-                <a16:creationId xmlns="" xmlns:a16="http://schemas.microsoft.com/office/drawing/2014/main" id="{34942098-76A7-B3A3-5DB3-D8162AD3F68D}"/>
+                <a16:creationId xmlns:a16="http://schemas.microsoft.com/office/drawing/2014/main" xmlns="" id="{34942098-76A7-B3A3-5DB3-D8162AD3F68D}"/>
               </a:ext>
             </a:extLst>
           </p:cNvPr>
@@ -29425,7 +29361,7 @@
             <p:cNvPr id="58" name="Oval 57">
               <a:extLst>
                 <a:ext uri="{FF2B5EF4-FFF2-40B4-BE49-F238E27FC236}">
-                  <a16:creationId xmlns="" xmlns:a16="http://schemas.microsoft.com/office/drawing/2014/main" id="{ADA0F6B4-0FE9-8946-CD31-44C147BDFAA2}"/>
+                  <a16:creationId xmlns:a16="http://schemas.microsoft.com/office/drawing/2014/main" xmlns="" id="{ADA0F6B4-0FE9-8946-CD31-44C147BDFAA2}"/>
                 </a:ext>
               </a:extLst>
             </p:cNvPr>
@@ -29484,7 +29420,7 @@
             <p:cNvPr id="59" name="Arc 58">
               <a:extLst>
                 <a:ext uri="{FF2B5EF4-FFF2-40B4-BE49-F238E27FC236}">
-                  <a16:creationId xmlns="" xmlns:a16="http://schemas.microsoft.com/office/drawing/2014/main" id="{E209963C-964F-F2C3-6448-EDCC319111CF}"/>
+                  <a16:creationId xmlns:a16="http://schemas.microsoft.com/office/drawing/2014/main" xmlns="" id="{E209963C-964F-F2C3-6448-EDCC319111CF}"/>
                 </a:ext>
               </a:extLst>
             </p:cNvPr>
@@ -29537,7 +29473,7 @@
           <p:cNvPr id="60" name="Group 59">
             <a:extLst>
               <a:ext uri="{FF2B5EF4-FFF2-40B4-BE49-F238E27FC236}">
-                <a16:creationId xmlns="" xmlns:a16="http://schemas.microsoft.com/office/drawing/2014/main" id="{92FBB5C7-CE3A-82A2-B96C-D00957855705}"/>
+                <a16:creationId xmlns:a16="http://schemas.microsoft.com/office/drawing/2014/main" xmlns="" id="{92FBB5C7-CE3A-82A2-B96C-D00957855705}"/>
               </a:ext>
             </a:extLst>
           </p:cNvPr>
@@ -29557,7 +29493,7 @@
             <p:cNvPr id="61" name="Oval 60">
               <a:extLst>
                 <a:ext uri="{FF2B5EF4-FFF2-40B4-BE49-F238E27FC236}">
-                  <a16:creationId xmlns="" xmlns:a16="http://schemas.microsoft.com/office/drawing/2014/main" id="{C2090BBD-0FD7-73D4-768D-B3EACE879018}"/>
+                  <a16:creationId xmlns:a16="http://schemas.microsoft.com/office/drawing/2014/main" xmlns="" id="{C2090BBD-0FD7-73D4-768D-B3EACE879018}"/>
                 </a:ext>
               </a:extLst>
             </p:cNvPr>
@@ -29616,7 +29552,7 @@
             <p:cNvPr id="62" name="Arc 61">
               <a:extLst>
                 <a:ext uri="{FF2B5EF4-FFF2-40B4-BE49-F238E27FC236}">
-                  <a16:creationId xmlns="" xmlns:a16="http://schemas.microsoft.com/office/drawing/2014/main" id="{49BBA01A-FD23-189D-7879-A24960489055}"/>
+                  <a16:creationId xmlns:a16="http://schemas.microsoft.com/office/drawing/2014/main" xmlns="" id="{49BBA01A-FD23-189D-7879-A24960489055}"/>
                 </a:ext>
               </a:extLst>
             </p:cNvPr>
@@ -29669,7 +29605,7 @@
           <p:cNvPr id="63" name="Group 62">
             <a:extLst>
               <a:ext uri="{FF2B5EF4-FFF2-40B4-BE49-F238E27FC236}">
-                <a16:creationId xmlns="" xmlns:a16="http://schemas.microsoft.com/office/drawing/2014/main" id="{F1BBA567-B812-1158-B0D9-8585557A065F}"/>
+                <a16:creationId xmlns:a16="http://schemas.microsoft.com/office/drawing/2014/main" xmlns="" id="{F1BBA567-B812-1158-B0D9-8585557A065F}"/>
               </a:ext>
             </a:extLst>
           </p:cNvPr>
@@ -29689,7 +29625,7 @@
             <p:cNvPr id="64" name="Oval 63">
               <a:extLst>
                 <a:ext uri="{FF2B5EF4-FFF2-40B4-BE49-F238E27FC236}">
-                  <a16:creationId xmlns="" xmlns:a16="http://schemas.microsoft.com/office/drawing/2014/main" id="{69954438-FCF4-7EDB-B481-3A5CD3540B92}"/>
+                  <a16:creationId xmlns:a16="http://schemas.microsoft.com/office/drawing/2014/main" xmlns="" id="{69954438-FCF4-7EDB-B481-3A5CD3540B92}"/>
                 </a:ext>
               </a:extLst>
             </p:cNvPr>
@@ -29748,7 +29684,7 @@
             <p:cNvPr id="65" name="Arc 64">
               <a:extLst>
                 <a:ext uri="{FF2B5EF4-FFF2-40B4-BE49-F238E27FC236}">
-                  <a16:creationId xmlns="" xmlns:a16="http://schemas.microsoft.com/office/drawing/2014/main" id="{0539A26F-8931-1226-DADD-F1FA6E3A46CA}"/>
+                  <a16:creationId xmlns:a16="http://schemas.microsoft.com/office/drawing/2014/main" xmlns="" id="{0539A26F-8931-1226-DADD-F1FA6E3A46CA}"/>
                 </a:ext>
               </a:extLst>
             </p:cNvPr>
@@ -29801,7 +29737,7 @@
           <p:cNvPr id="66" name="Group 65">
             <a:extLst>
               <a:ext uri="{FF2B5EF4-FFF2-40B4-BE49-F238E27FC236}">
-                <a16:creationId xmlns="" xmlns:a16="http://schemas.microsoft.com/office/drawing/2014/main" id="{C5CA0963-798D-1A46-720B-8E62281FCB2B}"/>
+                <a16:creationId xmlns:a16="http://schemas.microsoft.com/office/drawing/2014/main" xmlns="" id="{C5CA0963-798D-1A46-720B-8E62281FCB2B}"/>
               </a:ext>
             </a:extLst>
           </p:cNvPr>
@@ -29821,7 +29757,7 @@
             <p:cNvPr id="67" name="Oval 66">
               <a:extLst>
                 <a:ext uri="{FF2B5EF4-FFF2-40B4-BE49-F238E27FC236}">
-                  <a16:creationId xmlns="" xmlns:a16="http://schemas.microsoft.com/office/drawing/2014/main" id="{238F6E5E-CA7D-90C5-F3DE-CEA092075098}"/>
+                  <a16:creationId xmlns:a16="http://schemas.microsoft.com/office/drawing/2014/main" xmlns="" id="{238F6E5E-CA7D-90C5-F3DE-CEA092075098}"/>
                 </a:ext>
               </a:extLst>
             </p:cNvPr>
@@ -29880,7 +29816,7 @@
             <p:cNvPr id="68" name="Arc 67">
               <a:extLst>
                 <a:ext uri="{FF2B5EF4-FFF2-40B4-BE49-F238E27FC236}">
-                  <a16:creationId xmlns="" xmlns:a16="http://schemas.microsoft.com/office/drawing/2014/main" id="{4EDC6FAD-D9B6-F4CE-7409-08C269011CC8}"/>
+                  <a16:creationId xmlns:a16="http://schemas.microsoft.com/office/drawing/2014/main" xmlns="" id="{4EDC6FAD-D9B6-F4CE-7409-08C269011CC8}"/>
                 </a:ext>
               </a:extLst>
             </p:cNvPr>
@@ -29933,7 +29869,7 @@
           <p:cNvPr id="69" name="Group 68">
             <a:extLst>
               <a:ext uri="{FF2B5EF4-FFF2-40B4-BE49-F238E27FC236}">
-                <a16:creationId xmlns="" xmlns:a16="http://schemas.microsoft.com/office/drawing/2014/main" id="{97D732E3-F499-0C3F-BE88-8A3C727562BA}"/>
+                <a16:creationId xmlns:a16="http://schemas.microsoft.com/office/drawing/2014/main" xmlns="" id="{97D732E3-F499-0C3F-BE88-8A3C727562BA}"/>
               </a:ext>
             </a:extLst>
           </p:cNvPr>
@@ -29953,7 +29889,7 @@
             <p:cNvPr id="70" name="Oval 69">
               <a:extLst>
                 <a:ext uri="{FF2B5EF4-FFF2-40B4-BE49-F238E27FC236}">
-                  <a16:creationId xmlns="" xmlns:a16="http://schemas.microsoft.com/office/drawing/2014/main" id="{1BB77D40-207D-28FD-CBB8-13B1251FBCE3}"/>
+                  <a16:creationId xmlns:a16="http://schemas.microsoft.com/office/drawing/2014/main" xmlns="" id="{1BB77D40-207D-28FD-CBB8-13B1251FBCE3}"/>
                 </a:ext>
               </a:extLst>
             </p:cNvPr>
@@ -30012,7 +29948,7 @@
             <p:cNvPr id="71" name="Arc 70">
               <a:extLst>
                 <a:ext uri="{FF2B5EF4-FFF2-40B4-BE49-F238E27FC236}">
-                  <a16:creationId xmlns="" xmlns:a16="http://schemas.microsoft.com/office/drawing/2014/main" id="{98CED01A-8366-93D8-2562-CDF27F4E5646}"/>
+                  <a16:creationId xmlns:a16="http://schemas.microsoft.com/office/drawing/2014/main" xmlns="" id="{98CED01A-8366-93D8-2562-CDF27F4E5646}"/>
                 </a:ext>
               </a:extLst>
             </p:cNvPr>
@@ -30065,7 +30001,7 @@
           <p:cNvPr id="72" name="Group 71">
             <a:extLst>
               <a:ext uri="{FF2B5EF4-FFF2-40B4-BE49-F238E27FC236}">
-                <a16:creationId xmlns="" xmlns:a16="http://schemas.microsoft.com/office/drawing/2014/main" id="{8ACD396F-9CBB-E28A-C3C7-9FFF82E7D986}"/>
+                <a16:creationId xmlns:a16="http://schemas.microsoft.com/office/drawing/2014/main" xmlns="" id="{8ACD396F-9CBB-E28A-C3C7-9FFF82E7D986}"/>
               </a:ext>
             </a:extLst>
           </p:cNvPr>
@@ -30085,7 +30021,7 @@
             <p:cNvPr id="73" name="Oval 72">
               <a:extLst>
                 <a:ext uri="{FF2B5EF4-FFF2-40B4-BE49-F238E27FC236}">
-                  <a16:creationId xmlns="" xmlns:a16="http://schemas.microsoft.com/office/drawing/2014/main" id="{79F5ABF2-6AF6-5851-71FF-385EC3216731}"/>
+                  <a16:creationId xmlns:a16="http://schemas.microsoft.com/office/drawing/2014/main" xmlns="" id="{79F5ABF2-6AF6-5851-71FF-385EC3216731}"/>
                 </a:ext>
               </a:extLst>
             </p:cNvPr>
@@ -30144,7 +30080,7 @@
             <p:cNvPr id="74" name="Arc 73">
               <a:extLst>
                 <a:ext uri="{FF2B5EF4-FFF2-40B4-BE49-F238E27FC236}">
-                  <a16:creationId xmlns="" xmlns:a16="http://schemas.microsoft.com/office/drawing/2014/main" id="{59B2770C-AEBD-5B7B-0CAD-D69C9BFB0200}"/>
+                  <a16:creationId xmlns:a16="http://schemas.microsoft.com/office/drawing/2014/main" xmlns="" id="{59B2770C-AEBD-5B7B-0CAD-D69C9BFB0200}"/>
                 </a:ext>
               </a:extLst>
             </p:cNvPr>
@@ -30197,7 +30133,7 @@
           <p:cNvPr id="75" name="Group 74">
             <a:extLst>
               <a:ext uri="{FF2B5EF4-FFF2-40B4-BE49-F238E27FC236}">
-                <a16:creationId xmlns="" xmlns:a16="http://schemas.microsoft.com/office/drawing/2014/main" id="{8E67EC40-2CEA-15BB-679E-82A155506382}"/>
+                <a16:creationId xmlns:a16="http://schemas.microsoft.com/office/drawing/2014/main" xmlns="" id="{8E67EC40-2CEA-15BB-679E-82A155506382}"/>
               </a:ext>
             </a:extLst>
           </p:cNvPr>
@@ -30217,7 +30153,7 @@
             <p:cNvPr id="76" name="Oval 75">
               <a:extLst>
                 <a:ext uri="{FF2B5EF4-FFF2-40B4-BE49-F238E27FC236}">
-                  <a16:creationId xmlns="" xmlns:a16="http://schemas.microsoft.com/office/drawing/2014/main" id="{BEE67072-39B0-0D8C-3764-DF739D4EF898}"/>
+                  <a16:creationId xmlns:a16="http://schemas.microsoft.com/office/drawing/2014/main" xmlns="" id="{BEE67072-39B0-0D8C-3764-DF739D4EF898}"/>
                 </a:ext>
               </a:extLst>
             </p:cNvPr>
@@ -30276,7 +30212,7 @@
             <p:cNvPr id="77" name="Arc 76">
               <a:extLst>
                 <a:ext uri="{FF2B5EF4-FFF2-40B4-BE49-F238E27FC236}">
-                  <a16:creationId xmlns="" xmlns:a16="http://schemas.microsoft.com/office/drawing/2014/main" id="{1036E0E8-91A2-459D-62BA-7E55B36EA4A3}"/>
+                  <a16:creationId xmlns:a16="http://schemas.microsoft.com/office/drawing/2014/main" xmlns="" id="{1036E0E8-91A2-459D-62BA-7E55B36EA4A3}"/>
                 </a:ext>
               </a:extLst>
             </p:cNvPr>
@@ -30329,7 +30265,7 @@
           <p:cNvPr id="78" name="Group 77">
             <a:extLst>
               <a:ext uri="{FF2B5EF4-FFF2-40B4-BE49-F238E27FC236}">
-                <a16:creationId xmlns="" xmlns:a16="http://schemas.microsoft.com/office/drawing/2014/main" id="{E7A8FC93-89F4-B3FF-B2A0-EB92EE14302F}"/>
+                <a16:creationId xmlns:a16="http://schemas.microsoft.com/office/drawing/2014/main" xmlns="" id="{E7A8FC93-89F4-B3FF-B2A0-EB92EE14302F}"/>
               </a:ext>
             </a:extLst>
           </p:cNvPr>
@@ -30349,7 +30285,7 @@
             <p:cNvPr id="79" name="Oval 78">
               <a:extLst>
                 <a:ext uri="{FF2B5EF4-FFF2-40B4-BE49-F238E27FC236}">
-                  <a16:creationId xmlns="" xmlns:a16="http://schemas.microsoft.com/office/drawing/2014/main" id="{0B288602-214C-9797-F12B-433D63A94C97}"/>
+                  <a16:creationId xmlns:a16="http://schemas.microsoft.com/office/drawing/2014/main" xmlns="" id="{0B288602-214C-9797-F12B-433D63A94C97}"/>
                 </a:ext>
               </a:extLst>
             </p:cNvPr>
@@ -30408,7 +30344,7 @@
             <p:cNvPr id="80" name="Arc 79">
               <a:extLst>
                 <a:ext uri="{FF2B5EF4-FFF2-40B4-BE49-F238E27FC236}">
-                  <a16:creationId xmlns="" xmlns:a16="http://schemas.microsoft.com/office/drawing/2014/main" id="{B2237529-DFC9-A1B7-9CFA-D339940826FC}"/>
+                  <a16:creationId xmlns:a16="http://schemas.microsoft.com/office/drawing/2014/main" xmlns="" id="{B2237529-DFC9-A1B7-9CFA-D339940826FC}"/>
                 </a:ext>
               </a:extLst>
             </p:cNvPr>
@@ -30461,7 +30397,7 @@
           <p:cNvPr id="81" name="Group 80">
             <a:extLst>
               <a:ext uri="{FF2B5EF4-FFF2-40B4-BE49-F238E27FC236}">
-                <a16:creationId xmlns="" xmlns:a16="http://schemas.microsoft.com/office/drawing/2014/main" id="{56E08E4B-3F15-3DA7-6141-7E97655DD396}"/>
+                <a16:creationId xmlns:a16="http://schemas.microsoft.com/office/drawing/2014/main" xmlns="" id="{56E08E4B-3F15-3DA7-6141-7E97655DD396}"/>
               </a:ext>
             </a:extLst>
           </p:cNvPr>
@@ -30481,7 +30417,7 @@
             <p:cNvPr id="82" name="Oval 81">
               <a:extLst>
                 <a:ext uri="{FF2B5EF4-FFF2-40B4-BE49-F238E27FC236}">
-                  <a16:creationId xmlns="" xmlns:a16="http://schemas.microsoft.com/office/drawing/2014/main" id="{BF631934-7110-7F5E-79A0-378CB41A08C9}"/>
+                  <a16:creationId xmlns:a16="http://schemas.microsoft.com/office/drawing/2014/main" xmlns="" id="{BF631934-7110-7F5E-79A0-378CB41A08C9}"/>
                 </a:ext>
               </a:extLst>
             </p:cNvPr>
@@ -30540,7 +30476,7 @@
             <p:cNvPr id="83" name="Arc 82">
               <a:extLst>
                 <a:ext uri="{FF2B5EF4-FFF2-40B4-BE49-F238E27FC236}">
-                  <a16:creationId xmlns="" xmlns:a16="http://schemas.microsoft.com/office/drawing/2014/main" id="{0439DB39-7B53-36D4-BDF5-71DB13657FDC}"/>
+                  <a16:creationId xmlns:a16="http://schemas.microsoft.com/office/drawing/2014/main" xmlns="" id="{0439DB39-7B53-36D4-BDF5-71DB13657FDC}"/>
                 </a:ext>
               </a:extLst>
             </p:cNvPr>
@@ -30593,7 +30529,7 @@
           <p:cNvPr id="84" name="Group 83">
             <a:extLst>
               <a:ext uri="{FF2B5EF4-FFF2-40B4-BE49-F238E27FC236}">
-                <a16:creationId xmlns="" xmlns:a16="http://schemas.microsoft.com/office/drawing/2014/main" id="{BD99BE67-16D7-6B0C-6E7E-F8B4B7BD2317}"/>
+                <a16:creationId xmlns:a16="http://schemas.microsoft.com/office/drawing/2014/main" xmlns="" id="{BD99BE67-16D7-6B0C-6E7E-F8B4B7BD2317}"/>
               </a:ext>
             </a:extLst>
           </p:cNvPr>
@@ -30613,7 +30549,7 @@
             <p:cNvPr id="85" name="Oval 84">
               <a:extLst>
                 <a:ext uri="{FF2B5EF4-FFF2-40B4-BE49-F238E27FC236}">
-                  <a16:creationId xmlns="" xmlns:a16="http://schemas.microsoft.com/office/drawing/2014/main" id="{370A9636-2147-18A8-A452-5C474F2755F9}"/>
+                  <a16:creationId xmlns:a16="http://schemas.microsoft.com/office/drawing/2014/main" xmlns="" id="{370A9636-2147-18A8-A452-5C474F2755F9}"/>
                 </a:ext>
               </a:extLst>
             </p:cNvPr>
@@ -30672,7 +30608,7 @@
             <p:cNvPr id="86" name="Arc 85">
               <a:extLst>
                 <a:ext uri="{FF2B5EF4-FFF2-40B4-BE49-F238E27FC236}">
-                  <a16:creationId xmlns="" xmlns:a16="http://schemas.microsoft.com/office/drawing/2014/main" id="{CF37D023-EFBC-7B83-E01F-14E578B5E41F}"/>
+                  <a16:creationId xmlns:a16="http://schemas.microsoft.com/office/drawing/2014/main" xmlns="" id="{CF37D023-EFBC-7B83-E01F-14E578B5E41F}"/>
                 </a:ext>
               </a:extLst>
             </p:cNvPr>
@@ -30725,7 +30661,7 @@
           <p:cNvPr id="87" name="Group 86">
             <a:extLst>
               <a:ext uri="{FF2B5EF4-FFF2-40B4-BE49-F238E27FC236}">
-                <a16:creationId xmlns="" xmlns:a16="http://schemas.microsoft.com/office/drawing/2014/main" id="{18D76EDD-67EC-1706-7541-E0B361B9EE01}"/>
+                <a16:creationId xmlns:a16="http://schemas.microsoft.com/office/drawing/2014/main" xmlns="" id="{18D76EDD-67EC-1706-7541-E0B361B9EE01}"/>
               </a:ext>
             </a:extLst>
           </p:cNvPr>
@@ -30745,7 +30681,7 @@
             <p:cNvPr id="88" name="Oval 87">
               <a:extLst>
                 <a:ext uri="{FF2B5EF4-FFF2-40B4-BE49-F238E27FC236}">
-                  <a16:creationId xmlns="" xmlns:a16="http://schemas.microsoft.com/office/drawing/2014/main" id="{EBF7F9D4-4385-3396-B1F8-92B45C3EE234}"/>
+                  <a16:creationId xmlns:a16="http://schemas.microsoft.com/office/drawing/2014/main" xmlns="" id="{EBF7F9D4-4385-3396-B1F8-92B45C3EE234}"/>
                 </a:ext>
               </a:extLst>
             </p:cNvPr>
@@ -30804,7 +30740,7 @@
             <p:cNvPr id="89" name="Arc 88">
               <a:extLst>
                 <a:ext uri="{FF2B5EF4-FFF2-40B4-BE49-F238E27FC236}">
-                  <a16:creationId xmlns="" xmlns:a16="http://schemas.microsoft.com/office/drawing/2014/main" id="{344DEE6C-BE03-A502-C8EB-06880E1AFF7F}"/>
+                  <a16:creationId xmlns:a16="http://schemas.microsoft.com/office/drawing/2014/main" xmlns="" id="{344DEE6C-BE03-A502-C8EB-06880E1AFF7F}"/>
                 </a:ext>
               </a:extLst>
             </p:cNvPr>
@@ -30857,7 +30793,7 @@
           <p:cNvPr id="90" name="Group 89">
             <a:extLst>
               <a:ext uri="{FF2B5EF4-FFF2-40B4-BE49-F238E27FC236}">
-                <a16:creationId xmlns="" xmlns:a16="http://schemas.microsoft.com/office/drawing/2014/main" id="{805A620C-3AE2-255F-D0AD-7BCE318B0261}"/>
+                <a16:creationId xmlns:a16="http://schemas.microsoft.com/office/drawing/2014/main" xmlns="" id="{805A620C-3AE2-255F-D0AD-7BCE318B0261}"/>
               </a:ext>
             </a:extLst>
           </p:cNvPr>
@@ -30877,7 +30813,7 @@
             <p:cNvPr id="91" name="Oval 90">
               <a:extLst>
                 <a:ext uri="{FF2B5EF4-FFF2-40B4-BE49-F238E27FC236}">
-                  <a16:creationId xmlns="" xmlns:a16="http://schemas.microsoft.com/office/drawing/2014/main" id="{C8C812B5-07D8-854F-C972-D8CEBC6A35B4}"/>
+                  <a16:creationId xmlns:a16="http://schemas.microsoft.com/office/drawing/2014/main" xmlns="" id="{C8C812B5-07D8-854F-C972-D8CEBC6A35B4}"/>
                 </a:ext>
               </a:extLst>
             </p:cNvPr>
@@ -30936,7 +30872,7 @@
             <p:cNvPr id="92" name="Arc 91">
               <a:extLst>
                 <a:ext uri="{FF2B5EF4-FFF2-40B4-BE49-F238E27FC236}">
-                  <a16:creationId xmlns="" xmlns:a16="http://schemas.microsoft.com/office/drawing/2014/main" id="{79FA0149-4CB8-9929-0B85-1B9620713172}"/>
+                  <a16:creationId xmlns:a16="http://schemas.microsoft.com/office/drawing/2014/main" xmlns="" id="{79FA0149-4CB8-9929-0B85-1B9620713172}"/>
                 </a:ext>
               </a:extLst>
             </p:cNvPr>
@@ -30989,7 +30925,7 @@
           <p:cNvPr id="93" name="Group 92">
             <a:extLst>
               <a:ext uri="{FF2B5EF4-FFF2-40B4-BE49-F238E27FC236}">
-                <a16:creationId xmlns="" xmlns:a16="http://schemas.microsoft.com/office/drawing/2014/main" id="{D34F9994-C5E0-AE09-44C0-C5B87FCCE5CA}"/>
+                <a16:creationId xmlns:a16="http://schemas.microsoft.com/office/drawing/2014/main" xmlns="" id="{D34F9994-C5E0-AE09-44C0-C5B87FCCE5CA}"/>
               </a:ext>
             </a:extLst>
           </p:cNvPr>
@@ -31009,7 +30945,7 @@
             <p:cNvPr id="94" name="Oval 93">
               <a:extLst>
                 <a:ext uri="{FF2B5EF4-FFF2-40B4-BE49-F238E27FC236}">
-                  <a16:creationId xmlns="" xmlns:a16="http://schemas.microsoft.com/office/drawing/2014/main" id="{2AC773AF-0EEA-4375-E025-35F8FC5364E9}"/>
+                  <a16:creationId xmlns:a16="http://schemas.microsoft.com/office/drawing/2014/main" xmlns="" id="{2AC773AF-0EEA-4375-E025-35F8FC5364E9}"/>
                 </a:ext>
               </a:extLst>
             </p:cNvPr>
@@ -31068,7 +31004,7 @@
             <p:cNvPr id="95" name="Arc 94">
               <a:extLst>
                 <a:ext uri="{FF2B5EF4-FFF2-40B4-BE49-F238E27FC236}">
-                  <a16:creationId xmlns="" xmlns:a16="http://schemas.microsoft.com/office/drawing/2014/main" id="{90DDEFBB-F1E4-9858-B6D5-3FDB2B182EF9}"/>
+                  <a16:creationId xmlns:a16="http://schemas.microsoft.com/office/drawing/2014/main" xmlns="" id="{90DDEFBB-F1E4-9858-B6D5-3FDB2B182EF9}"/>
                 </a:ext>
               </a:extLst>
             </p:cNvPr>
@@ -31121,7 +31057,7 @@
           <p:cNvPr id="96" name="Group 95">
             <a:extLst>
               <a:ext uri="{FF2B5EF4-FFF2-40B4-BE49-F238E27FC236}">
-                <a16:creationId xmlns="" xmlns:a16="http://schemas.microsoft.com/office/drawing/2014/main" id="{A7DFD59F-9ACF-DA37-BC73-AADA05F8CD55}"/>
+                <a16:creationId xmlns:a16="http://schemas.microsoft.com/office/drawing/2014/main" xmlns="" id="{A7DFD59F-9ACF-DA37-BC73-AADA05F8CD55}"/>
               </a:ext>
             </a:extLst>
           </p:cNvPr>
@@ -31141,7 +31077,7 @@
             <p:cNvPr id="97" name="Oval 96">
               <a:extLst>
                 <a:ext uri="{FF2B5EF4-FFF2-40B4-BE49-F238E27FC236}">
-                  <a16:creationId xmlns="" xmlns:a16="http://schemas.microsoft.com/office/drawing/2014/main" id="{34E0A8AD-4A63-9662-8252-B6566776A0DB}"/>
+                  <a16:creationId xmlns:a16="http://schemas.microsoft.com/office/drawing/2014/main" xmlns="" id="{34E0A8AD-4A63-9662-8252-B6566776A0DB}"/>
                 </a:ext>
               </a:extLst>
             </p:cNvPr>
@@ -31200,7 +31136,7 @@
             <p:cNvPr id="98" name="Arc 97">
               <a:extLst>
                 <a:ext uri="{FF2B5EF4-FFF2-40B4-BE49-F238E27FC236}">
-                  <a16:creationId xmlns="" xmlns:a16="http://schemas.microsoft.com/office/drawing/2014/main" id="{A5AF0D9F-7BD7-E7BD-EF60-38F8DB6A7173}"/>
+                  <a16:creationId xmlns:a16="http://schemas.microsoft.com/office/drawing/2014/main" xmlns="" id="{A5AF0D9F-7BD7-E7BD-EF60-38F8DB6A7173}"/>
                 </a:ext>
               </a:extLst>
             </p:cNvPr>
@@ -31253,7 +31189,7 @@
           <p:cNvPr id="99" name="Group 98">
             <a:extLst>
               <a:ext uri="{FF2B5EF4-FFF2-40B4-BE49-F238E27FC236}">
-                <a16:creationId xmlns="" xmlns:a16="http://schemas.microsoft.com/office/drawing/2014/main" id="{B86504F5-14F5-005B-98B8-877CBD2DBAEC}"/>
+                <a16:creationId xmlns:a16="http://schemas.microsoft.com/office/drawing/2014/main" xmlns="" id="{B86504F5-14F5-005B-98B8-877CBD2DBAEC}"/>
               </a:ext>
             </a:extLst>
           </p:cNvPr>
@@ -31273,7 +31209,7 @@
             <p:cNvPr id="100" name="Oval 99">
               <a:extLst>
                 <a:ext uri="{FF2B5EF4-FFF2-40B4-BE49-F238E27FC236}">
-                  <a16:creationId xmlns="" xmlns:a16="http://schemas.microsoft.com/office/drawing/2014/main" id="{77BEE814-D0CC-0B71-56A8-38FC233ADBBC}"/>
+                  <a16:creationId xmlns:a16="http://schemas.microsoft.com/office/drawing/2014/main" xmlns="" id="{77BEE814-D0CC-0B71-56A8-38FC233ADBBC}"/>
                 </a:ext>
               </a:extLst>
             </p:cNvPr>
@@ -31332,7 +31268,7 @@
             <p:cNvPr id="101" name="Arc 100">
               <a:extLst>
                 <a:ext uri="{FF2B5EF4-FFF2-40B4-BE49-F238E27FC236}">
-                  <a16:creationId xmlns="" xmlns:a16="http://schemas.microsoft.com/office/drawing/2014/main" id="{E12B4309-6ECF-2A90-BE18-92E7B6D9F45C}"/>
+                  <a16:creationId xmlns:a16="http://schemas.microsoft.com/office/drawing/2014/main" xmlns="" id="{E12B4309-6ECF-2A90-BE18-92E7B6D9F45C}"/>
                 </a:ext>
               </a:extLst>
             </p:cNvPr>
@@ -31385,7 +31321,7 @@
           <p:cNvPr id="102" name="Group 101">
             <a:extLst>
               <a:ext uri="{FF2B5EF4-FFF2-40B4-BE49-F238E27FC236}">
-                <a16:creationId xmlns="" xmlns:a16="http://schemas.microsoft.com/office/drawing/2014/main" id="{B34C10F9-48AB-376A-971B-5E609292667E}"/>
+                <a16:creationId xmlns:a16="http://schemas.microsoft.com/office/drawing/2014/main" xmlns="" id="{B34C10F9-48AB-376A-971B-5E609292667E}"/>
               </a:ext>
             </a:extLst>
           </p:cNvPr>
@@ -31405,7 +31341,7 @@
             <p:cNvPr id="103" name="Oval 102">
               <a:extLst>
                 <a:ext uri="{FF2B5EF4-FFF2-40B4-BE49-F238E27FC236}">
-                  <a16:creationId xmlns="" xmlns:a16="http://schemas.microsoft.com/office/drawing/2014/main" id="{B13C8D1E-9E03-3B03-EB62-C5D86340BF1D}"/>
+                  <a16:creationId xmlns:a16="http://schemas.microsoft.com/office/drawing/2014/main" xmlns="" id="{B13C8D1E-9E03-3B03-EB62-C5D86340BF1D}"/>
                 </a:ext>
               </a:extLst>
             </p:cNvPr>
@@ -31464,7 +31400,7 @@
             <p:cNvPr id="104" name="Arc 103">
               <a:extLst>
                 <a:ext uri="{FF2B5EF4-FFF2-40B4-BE49-F238E27FC236}">
-                  <a16:creationId xmlns="" xmlns:a16="http://schemas.microsoft.com/office/drawing/2014/main" id="{FACF3DF3-03AF-3180-E1E4-55391011F79F}"/>
+                  <a16:creationId xmlns:a16="http://schemas.microsoft.com/office/drawing/2014/main" xmlns="" id="{FACF3DF3-03AF-3180-E1E4-55391011F79F}"/>
                 </a:ext>
               </a:extLst>
             </p:cNvPr>
@@ -31517,7 +31453,7 @@
           <p:cNvPr id="105" name="Group 104">
             <a:extLst>
               <a:ext uri="{FF2B5EF4-FFF2-40B4-BE49-F238E27FC236}">
-                <a16:creationId xmlns="" xmlns:a16="http://schemas.microsoft.com/office/drawing/2014/main" id="{ADC277D0-0547-3E1F-7B17-763C14F2C569}"/>
+                <a16:creationId xmlns:a16="http://schemas.microsoft.com/office/drawing/2014/main" xmlns="" id="{ADC277D0-0547-3E1F-7B17-763C14F2C569}"/>
               </a:ext>
             </a:extLst>
           </p:cNvPr>
@@ -31537,7 +31473,7 @@
             <p:cNvPr id="106" name="Oval 105">
               <a:extLst>
                 <a:ext uri="{FF2B5EF4-FFF2-40B4-BE49-F238E27FC236}">
-                  <a16:creationId xmlns="" xmlns:a16="http://schemas.microsoft.com/office/drawing/2014/main" id="{444E641A-F426-E972-E682-0AD4058F2F5F}"/>
+                  <a16:creationId xmlns:a16="http://schemas.microsoft.com/office/drawing/2014/main" xmlns="" id="{444E641A-F426-E972-E682-0AD4058F2F5F}"/>
                 </a:ext>
               </a:extLst>
             </p:cNvPr>
@@ -31596,7 +31532,7 @@
             <p:cNvPr id="107" name="Arc 106">
               <a:extLst>
                 <a:ext uri="{FF2B5EF4-FFF2-40B4-BE49-F238E27FC236}">
-                  <a16:creationId xmlns="" xmlns:a16="http://schemas.microsoft.com/office/drawing/2014/main" id="{000E6A81-D707-E36C-5DAD-68F6D1F68CE3}"/>
+                  <a16:creationId xmlns:a16="http://schemas.microsoft.com/office/drawing/2014/main" xmlns="" id="{000E6A81-D707-E36C-5DAD-68F6D1F68CE3}"/>
                 </a:ext>
               </a:extLst>
             </p:cNvPr>
@@ -31649,7 +31585,7 @@
           <p:cNvPr id="108" name="Group 107">
             <a:extLst>
               <a:ext uri="{FF2B5EF4-FFF2-40B4-BE49-F238E27FC236}">
-                <a16:creationId xmlns="" xmlns:a16="http://schemas.microsoft.com/office/drawing/2014/main" id="{31EA107D-77C3-196B-39BD-015BCFD6D3C2}"/>
+                <a16:creationId xmlns:a16="http://schemas.microsoft.com/office/drawing/2014/main" xmlns="" id="{31EA107D-77C3-196B-39BD-015BCFD6D3C2}"/>
               </a:ext>
             </a:extLst>
           </p:cNvPr>
@@ -31669,7 +31605,7 @@
             <p:cNvPr id="109" name="Oval 108">
               <a:extLst>
                 <a:ext uri="{FF2B5EF4-FFF2-40B4-BE49-F238E27FC236}">
-                  <a16:creationId xmlns="" xmlns:a16="http://schemas.microsoft.com/office/drawing/2014/main" id="{61FDFC2B-B300-35FB-0617-5D1C7ADF6641}"/>
+                  <a16:creationId xmlns:a16="http://schemas.microsoft.com/office/drawing/2014/main" xmlns="" id="{61FDFC2B-B300-35FB-0617-5D1C7ADF6641}"/>
                 </a:ext>
               </a:extLst>
             </p:cNvPr>
@@ -31728,7 +31664,7 @@
             <p:cNvPr id="110" name="Arc 109">
               <a:extLst>
                 <a:ext uri="{FF2B5EF4-FFF2-40B4-BE49-F238E27FC236}">
-                  <a16:creationId xmlns="" xmlns:a16="http://schemas.microsoft.com/office/drawing/2014/main" id="{CF6B487C-012F-56E5-E8E3-8B137298EDFA}"/>
+                  <a16:creationId xmlns:a16="http://schemas.microsoft.com/office/drawing/2014/main" xmlns="" id="{CF6B487C-012F-56E5-E8E3-8B137298EDFA}"/>
                 </a:ext>
               </a:extLst>
             </p:cNvPr>
@@ -31781,7 +31717,7 @@
           <p:cNvPr id="111" name="Group 110">
             <a:extLst>
               <a:ext uri="{FF2B5EF4-FFF2-40B4-BE49-F238E27FC236}">
-                <a16:creationId xmlns="" xmlns:a16="http://schemas.microsoft.com/office/drawing/2014/main" id="{6232043B-C4C4-BA0A-CF1A-4DBBB75AAC73}"/>
+                <a16:creationId xmlns:a16="http://schemas.microsoft.com/office/drawing/2014/main" xmlns="" id="{6232043B-C4C4-BA0A-CF1A-4DBBB75AAC73}"/>
               </a:ext>
             </a:extLst>
           </p:cNvPr>
@@ -31801,7 +31737,7 @@
             <p:cNvPr id="112" name="Oval 111">
               <a:extLst>
                 <a:ext uri="{FF2B5EF4-FFF2-40B4-BE49-F238E27FC236}">
-                  <a16:creationId xmlns="" xmlns:a16="http://schemas.microsoft.com/office/drawing/2014/main" id="{10FFE23E-6CCE-0432-75E0-E824C7863261}"/>
+                  <a16:creationId xmlns:a16="http://schemas.microsoft.com/office/drawing/2014/main" xmlns="" id="{10FFE23E-6CCE-0432-75E0-E824C7863261}"/>
                 </a:ext>
               </a:extLst>
             </p:cNvPr>
@@ -31860,7 +31796,7 @@
             <p:cNvPr id="113" name="Arc 112">
               <a:extLst>
                 <a:ext uri="{FF2B5EF4-FFF2-40B4-BE49-F238E27FC236}">
-                  <a16:creationId xmlns="" xmlns:a16="http://schemas.microsoft.com/office/drawing/2014/main" id="{98676D6A-3424-61E8-2CCE-756447D5F9C2}"/>
+                  <a16:creationId xmlns:a16="http://schemas.microsoft.com/office/drawing/2014/main" xmlns="" id="{98676D6A-3424-61E8-2CCE-756447D5F9C2}"/>
                 </a:ext>
               </a:extLst>
             </p:cNvPr>
@@ -31913,7 +31849,7 @@
           <p:cNvPr id="114" name="Group 113">
             <a:extLst>
               <a:ext uri="{FF2B5EF4-FFF2-40B4-BE49-F238E27FC236}">
-                <a16:creationId xmlns="" xmlns:a16="http://schemas.microsoft.com/office/drawing/2014/main" id="{88B3BE82-3395-0E01-8219-A5E3310F3959}"/>
+                <a16:creationId xmlns:a16="http://schemas.microsoft.com/office/drawing/2014/main" xmlns="" id="{88B3BE82-3395-0E01-8219-A5E3310F3959}"/>
               </a:ext>
             </a:extLst>
           </p:cNvPr>
@@ -31933,7 +31869,7 @@
             <p:cNvPr id="115" name="Oval 114">
               <a:extLst>
                 <a:ext uri="{FF2B5EF4-FFF2-40B4-BE49-F238E27FC236}">
-                  <a16:creationId xmlns="" xmlns:a16="http://schemas.microsoft.com/office/drawing/2014/main" id="{F83317C8-5B5D-DDF7-15F4-EA2AFB9BC950}"/>
+                  <a16:creationId xmlns:a16="http://schemas.microsoft.com/office/drawing/2014/main" xmlns="" id="{F83317C8-5B5D-DDF7-15F4-EA2AFB9BC950}"/>
                 </a:ext>
               </a:extLst>
             </p:cNvPr>
@@ -31992,7 +31928,7 @@
             <p:cNvPr id="116" name="Arc 115">
               <a:extLst>
                 <a:ext uri="{FF2B5EF4-FFF2-40B4-BE49-F238E27FC236}">
-                  <a16:creationId xmlns="" xmlns:a16="http://schemas.microsoft.com/office/drawing/2014/main" id="{E746B903-C206-EA9A-5FAE-24360FA19AD9}"/>
+                  <a16:creationId xmlns:a16="http://schemas.microsoft.com/office/drawing/2014/main" xmlns="" id="{E746B903-C206-EA9A-5FAE-24360FA19AD9}"/>
                 </a:ext>
               </a:extLst>
             </p:cNvPr>
@@ -32045,7 +31981,7 @@
           <p:cNvPr id="117" name="Group 116">
             <a:extLst>
               <a:ext uri="{FF2B5EF4-FFF2-40B4-BE49-F238E27FC236}">
-                <a16:creationId xmlns="" xmlns:a16="http://schemas.microsoft.com/office/drawing/2014/main" id="{2F2A7235-4D60-4C1C-AC1C-8026C6BB4059}"/>
+                <a16:creationId xmlns:a16="http://schemas.microsoft.com/office/drawing/2014/main" xmlns="" id="{2F2A7235-4D60-4C1C-AC1C-8026C6BB4059}"/>
               </a:ext>
             </a:extLst>
           </p:cNvPr>
@@ -32065,7 +32001,7 @@
             <p:cNvPr id="118" name="Oval 117">
               <a:extLst>
                 <a:ext uri="{FF2B5EF4-FFF2-40B4-BE49-F238E27FC236}">
-                  <a16:creationId xmlns="" xmlns:a16="http://schemas.microsoft.com/office/drawing/2014/main" id="{0F886985-AC53-0516-F85D-DDC1946AD17E}"/>
+                  <a16:creationId xmlns:a16="http://schemas.microsoft.com/office/drawing/2014/main" xmlns="" id="{0F886985-AC53-0516-F85D-DDC1946AD17E}"/>
                 </a:ext>
               </a:extLst>
             </p:cNvPr>
@@ -32124,7 +32060,7 @@
             <p:cNvPr id="119" name="Arc 118">
               <a:extLst>
                 <a:ext uri="{FF2B5EF4-FFF2-40B4-BE49-F238E27FC236}">
-                  <a16:creationId xmlns="" xmlns:a16="http://schemas.microsoft.com/office/drawing/2014/main" id="{AE4C9755-2A3A-5A32-D276-52C0A9B4F8D6}"/>
+                  <a16:creationId xmlns:a16="http://schemas.microsoft.com/office/drawing/2014/main" xmlns="" id="{AE4C9755-2A3A-5A32-D276-52C0A9B4F8D6}"/>
                 </a:ext>
               </a:extLst>
             </p:cNvPr>
@@ -32177,7 +32113,7 @@
           <p:cNvPr id="120" name="Group 119">
             <a:extLst>
               <a:ext uri="{FF2B5EF4-FFF2-40B4-BE49-F238E27FC236}">
-                <a16:creationId xmlns="" xmlns:a16="http://schemas.microsoft.com/office/drawing/2014/main" id="{7877DB57-685B-C785-7692-7E30EB8C61F3}"/>
+                <a16:creationId xmlns:a16="http://schemas.microsoft.com/office/drawing/2014/main" xmlns="" id="{7877DB57-685B-C785-7692-7E30EB8C61F3}"/>
               </a:ext>
             </a:extLst>
           </p:cNvPr>
@@ -32197,7 +32133,7 @@
             <p:cNvPr id="121" name="Oval 120">
               <a:extLst>
                 <a:ext uri="{FF2B5EF4-FFF2-40B4-BE49-F238E27FC236}">
-                  <a16:creationId xmlns="" xmlns:a16="http://schemas.microsoft.com/office/drawing/2014/main" id="{22F39CC0-1318-0DB9-44C8-44ED898DF450}"/>
+                  <a16:creationId xmlns:a16="http://schemas.microsoft.com/office/drawing/2014/main" xmlns="" id="{22F39CC0-1318-0DB9-44C8-44ED898DF450}"/>
                 </a:ext>
               </a:extLst>
             </p:cNvPr>
@@ -32256,7 +32192,7 @@
             <p:cNvPr id="122" name="Arc 121">
               <a:extLst>
                 <a:ext uri="{FF2B5EF4-FFF2-40B4-BE49-F238E27FC236}">
-                  <a16:creationId xmlns="" xmlns:a16="http://schemas.microsoft.com/office/drawing/2014/main" id="{E74E2D2F-36CC-9C47-07C8-1F7BA70CE9FF}"/>
+                  <a16:creationId xmlns:a16="http://schemas.microsoft.com/office/drawing/2014/main" xmlns="" id="{E74E2D2F-36CC-9C47-07C8-1F7BA70CE9FF}"/>
                 </a:ext>
               </a:extLst>
             </p:cNvPr>
@@ -32309,7 +32245,7 @@
           <p:cNvPr id="123" name="Rectangle 122">
             <a:extLst>
               <a:ext uri="{FF2B5EF4-FFF2-40B4-BE49-F238E27FC236}">
-                <a16:creationId xmlns="" xmlns:a16="http://schemas.microsoft.com/office/drawing/2014/main" id="{044E7409-6BE4-82BF-6739-FB981D21C254}"/>
+                <a16:creationId xmlns:a16="http://schemas.microsoft.com/office/drawing/2014/main" xmlns="" id="{044E7409-6BE4-82BF-6739-FB981D21C254}"/>
               </a:ext>
             </a:extLst>
           </p:cNvPr>
@@ -32484,7 +32420,7 @@
         <p:cNvPr id="1" name="">
           <a:extLst>
             <a:ext uri="{FF2B5EF4-FFF2-40B4-BE49-F238E27FC236}">
-              <a16:creationId xmlns="" xmlns:a16="http://schemas.microsoft.com/office/drawing/2014/main" id="{51C4FD09-55E3-2B1B-897E-1F9BF2720A5C}"/>
+              <a16:creationId xmlns:a16="http://schemas.microsoft.com/office/drawing/2014/main" xmlns="" id="{51C4FD09-55E3-2B1B-897E-1F9BF2720A5C}"/>
             </a:ext>
           </a:extLst>
         </p:cNvPr>
@@ -32504,7 +32440,7 @@
           <p:cNvPr id="5" name="Rectangle 4">
             <a:extLst>
               <a:ext uri="{FF2B5EF4-FFF2-40B4-BE49-F238E27FC236}">
-                <a16:creationId xmlns="" xmlns:a16="http://schemas.microsoft.com/office/drawing/2014/main" id="{B034BA31-4C57-9BDA-04C5-8FC13B21BF04}"/>
+                <a16:creationId xmlns:a16="http://schemas.microsoft.com/office/drawing/2014/main" xmlns="" id="{B034BA31-4C57-9BDA-04C5-8FC13B21BF04}"/>
               </a:ext>
             </a:extLst>
           </p:cNvPr>
@@ -32560,7 +32496,7 @@
           <p:cNvPr id="4" name="Rectangle 3">
             <a:extLst>
               <a:ext uri="{FF2B5EF4-FFF2-40B4-BE49-F238E27FC236}">
-                <a16:creationId xmlns="" xmlns:a16="http://schemas.microsoft.com/office/drawing/2014/main" id="{726F619E-C2F5-A764-7A5A-E740D3764F94}"/>
+                <a16:creationId xmlns:a16="http://schemas.microsoft.com/office/drawing/2014/main" xmlns="" id="{726F619E-C2F5-A764-7A5A-E740D3764F94}"/>
               </a:ext>
             </a:extLst>
           </p:cNvPr>
@@ -32791,7 +32727,7 @@
           <p:cNvPr id="6" name="Oval 5">
             <a:extLst>
               <a:ext uri="{FF2B5EF4-FFF2-40B4-BE49-F238E27FC236}">
-                <a16:creationId xmlns="" xmlns:a16="http://schemas.microsoft.com/office/drawing/2014/main" id="{63652264-4E8B-48A9-C360-C02C3660C32D}"/>
+                <a16:creationId xmlns:a16="http://schemas.microsoft.com/office/drawing/2014/main" xmlns="" id="{63652264-4E8B-48A9-C360-C02C3660C32D}"/>
               </a:ext>
             </a:extLst>
           </p:cNvPr>
@@ -32850,7 +32786,7 @@
           <p:cNvPr id="7" name="Oval 6">
             <a:extLst>
               <a:ext uri="{FF2B5EF4-FFF2-40B4-BE49-F238E27FC236}">
-                <a16:creationId xmlns="" xmlns:a16="http://schemas.microsoft.com/office/drawing/2014/main" id="{94A79690-2C7C-FEC2-2B4B-F5D0C6E2B06B}"/>
+                <a16:creationId xmlns:a16="http://schemas.microsoft.com/office/drawing/2014/main" xmlns="" id="{94A79690-2C7C-FEC2-2B4B-F5D0C6E2B06B}"/>
               </a:ext>
             </a:extLst>
           </p:cNvPr>
@@ -32909,7 +32845,7 @@
           <p:cNvPr id="8" name="Oval 7">
             <a:extLst>
               <a:ext uri="{FF2B5EF4-FFF2-40B4-BE49-F238E27FC236}">
-                <a16:creationId xmlns="" xmlns:a16="http://schemas.microsoft.com/office/drawing/2014/main" id="{F183C3CB-BD1C-4789-0643-1F50E0C687BE}"/>
+                <a16:creationId xmlns:a16="http://schemas.microsoft.com/office/drawing/2014/main" xmlns="" id="{F183C3CB-BD1C-4789-0643-1F50E0C687BE}"/>
               </a:ext>
             </a:extLst>
           </p:cNvPr>
@@ -32968,7 +32904,7 @@
           <p:cNvPr id="9" name="Oval 8">
             <a:extLst>
               <a:ext uri="{FF2B5EF4-FFF2-40B4-BE49-F238E27FC236}">
-                <a16:creationId xmlns="" xmlns:a16="http://schemas.microsoft.com/office/drawing/2014/main" id="{852695AE-B9E1-CA35-383A-5061DECC336D}"/>
+                <a16:creationId xmlns:a16="http://schemas.microsoft.com/office/drawing/2014/main" xmlns="" id="{852695AE-B9E1-CA35-383A-5061DECC336D}"/>
               </a:ext>
             </a:extLst>
           </p:cNvPr>
@@ -33027,7 +32963,7 @@
           <p:cNvPr id="10" name="Oval 9">
             <a:extLst>
               <a:ext uri="{FF2B5EF4-FFF2-40B4-BE49-F238E27FC236}">
-                <a16:creationId xmlns="" xmlns:a16="http://schemas.microsoft.com/office/drawing/2014/main" id="{AC8B7149-0844-B850-391A-8060B3392CC6}"/>
+                <a16:creationId xmlns:a16="http://schemas.microsoft.com/office/drawing/2014/main" xmlns="" id="{AC8B7149-0844-B850-391A-8060B3392CC6}"/>
               </a:ext>
             </a:extLst>
           </p:cNvPr>
@@ -33086,7 +33022,7 @@
           <p:cNvPr id="11" name="Oval 10">
             <a:extLst>
               <a:ext uri="{FF2B5EF4-FFF2-40B4-BE49-F238E27FC236}">
-                <a16:creationId xmlns="" xmlns:a16="http://schemas.microsoft.com/office/drawing/2014/main" id="{0D333270-CC5E-7DF6-1A02-659ABE822FF5}"/>
+                <a16:creationId xmlns:a16="http://schemas.microsoft.com/office/drawing/2014/main" xmlns="" id="{0D333270-CC5E-7DF6-1A02-659ABE822FF5}"/>
               </a:ext>
             </a:extLst>
           </p:cNvPr>
@@ -33145,7 +33081,7 @@
           <p:cNvPr id="12" name="Oval 11">
             <a:extLst>
               <a:ext uri="{FF2B5EF4-FFF2-40B4-BE49-F238E27FC236}">
-                <a16:creationId xmlns="" xmlns:a16="http://schemas.microsoft.com/office/drawing/2014/main" id="{79654E69-BC73-6E52-DC33-651392E0526D}"/>
+                <a16:creationId xmlns:a16="http://schemas.microsoft.com/office/drawing/2014/main" xmlns="" id="{79654E69-BC73-6E52-DC33-651392E0526D}"/>
               </a:ext>
             </a:extLst>
           </p:cNvPr>
@@ -33204,7 +33140,7 @@
           <p:cNvPr id="13" name="Oval 12">
             <a:extLst>
               <a:ext uri="{FF2B5EF4-FFF2-40B4-BE49-F238E27FC236}">
-                <a16:creationId xmlns="" xmlns:a16="http://schemas.microsoft.com/office/drawing/2014/main" id="{E4CFDB43-57A3-3026-29E9-D60F416B0F09}"/>
+                <a16:creationId xmlns:a16="http://schemas.microsoft.com/office/drawing/2014/main" xmlns="" id="{E4CFDB43-57A3-3026-29E9-D60F416B0F09}"/>
               </a:ext>
             </a:extLst>
           </p:cNvPr>
@@ -33263,7 +33199,7 @@
           <p:cNvPr id="14" name="Oval 13">
             <a:extLst>
               <a:ext uri="{FF2B5EF4-FFF2-40B4-BE49-F238E27FC236}">
-                <a16:creationId xmlns="" xmlns:a16="http://schemas.microsoft.com/office/drawing/2014/main" id="{F309C4C6-BB4D-8939-A2FC-02DC29CFCC6D}"/>
+                <a16:creationId xmlns:a16="http://schemas.microsoft.com/office/drawing/2014/main" xmlns="" id="{F309C4C6-BB4D-8939-A2FC-02DC29CFCC6D}"/>
               </a:ext>
             </a:extLst>
           </p:cNvPr>
@@ -33322,7 +33258,7 @@
           <p:cNvPr id="15" name="Oval 14">
             <a:extLst>
               <a:ext uri="{FF2B5EF4-FFF2-40B4-BE49-F238E27FC236}">
-                <a16:creationId xmlns="" xmlns:a16="http://schemas.microsoft.com/office/drawing/2014/main" id="{042F644C-7941-9F1F-CD17-58A102B9F051}"/>
+                <a16:creationId xmlns:a16="http://schemas.microsoft.com/office/drawing/2014/main" xmlns="" id="{042F644C-7941-9F1F-CD17-58A102B9F051}"/>
               </a:ext>
             </a:extLst>
           </p:cNvPr>
@@ -33381,7 +33317,7 @@
           <p:cNvPr id="16" name="Oval 15">
             <a:extLst>
               <a:ext uri="{FF2B5EF4-FFF2-40B4-BE49-F238E27FC236}">
-                <a16:creationId xmlns="" xmlns:a16="http://schemas.microsoft.com/office/drawing/2014/main" id="{9FE90EDA-798E-4116-2E6D-F9F24F96F337}"/>
+                <a16:creationId xmlns:a16="http://schemas.microsoft.com/office/drawing/2014/main" xmlns="" id="{9FE90EDA-798E-4116-2E6D-F9F24F96F337}"/>
               </a:ext>
             </a:extLst>
           </p:cNvPr>
@@ -33440,7 +33376,7 @@
           <p:cNvPr id="17" name="Oval 16">
             <a:extLst>
               <a:ext uri="{FF2B5EF4-FFF2-40B4-BE49-F238E27FC236}">
-                <a16:creationId xmlns="" xmlns:a16="http://schemas.microsoft.com/office/drawing/2014/main" id="{01176BBF-01DD-C6ED-B967-EB1DB7DB2F69}"/>
+                <a16:creationId xmlns:a16="http://schemas.microsoft.com/office/drawing/2014/main" xmlns="" id="{01176BBF-01DD-C6ED-B967-EB1DB7DB2F69}"/>
               </a:ext>
             </a:extLst>
           </p:cNvPr>
@@ -33499,7 +33435,7 @@
           <p:cNvPr id="18" name="Oval 17">
             <a:extLst>
               <a:ext uri="{FF2B5EF4-FFF2-40B4-BE49-F238E27FC236}">
-                <a16:creationId xmlns="" xmlns:a16="http://schemas.microsoft.com/office/drawing/2014/main" id="{9F9C5F9C-2EEA-6014-F551-FCFA8EE56021}"/>
+                <a16:creationId xmlns:a16="http://schemas.microsoft.com/office/drawing/2014/main" xmlns="" id="{9F9C5F9C-2EEA-6014-F551-FCFA8EE56021}"/>
               </a:ext>
             </a:extLst>
           </p:cNvPr>
@@ -33558,7 +33494,7 @@
           <p:cNvPr id="19" name="Oval 18">
             <a:extLst>
               <a:ext uri="{FF2B5EF4-FFF2-40B4-BE49-F238E27FC236}">
-                <a16:creationId xmlns="" xmlns:a16="http://schemas.microsoft.com/office/drawing/2014/main" id="{3C7AD85C-644E-0A9B-6CFE-2B4A8C85E76B}"/>
+                <a16:creationId xmlns:a16="http://schemas.microsoft.com/office/drawing/2014/main" xmlns="" id="{3C7AD85C-644E-0A9B-6CFE-2B4A8C85E76B}"/>
               </a:ext>
             </a:extLst>
           </p:cNvPr>
@@ -33617,7 +33553,7 @@
           <p:cNvPr id="20" name="Oval 19">
             <a:extLst>
               <a:ext uri="{FF2B5EF4-FFF2-40B4-BE49-F238E27FC236}">
-                <a16:creationId xmlns="" xmlns:a16="http://schemas.microsoft.com/office/drawing/2014/main" id="{0380C106-105A-1A96-0199-94FE8B539591}"/>
+                <a16:creationId xmlns:a16="http://schemas.microsoft.com/office/drawing/2014/main" xmlns="" id="{0380C106-105A-1A96-0199-94FE8B539591}"/>
               </a:ext>
             </a:extLst>
           </p:cNvPr>
@@ -33676,7 +33612,7 @@
           <p:cNvPr id="21" name="Oval 20">
             <a:extLst>
               <a:ext uri="{FF2B5EF4-FFF2-40B4-BE49-F238E27FC236}">
-                <a16:creationId xmlns="" xmlns:a16="http://schemas.microsoft.com/office/drawing/2014/main" id="{89A7FBE2-CFD6-1AB1-A77D-4A327850C6BD}"/>
+                <a16:creationId xmlns:a16="http://schemas.microsoft.com/office/drawing/2014/main" xmlns="" id="{89A7FBE2-CFD6-1AB1-A77D-4A327850C6BD}"/>
               </a:ext>
             </a:extLst>
           </p:cNvPr>
@@ -33735,7 +33671,7 @@
           <p:cNvPr id="22" name="Oval 21">
             <a:extLst>
               <a:ext uri="{FF2B5EF4-FFF2-40B4-BE49-F238E27FC236}">
-                <a16:creationId xmlns="" xmlns:a16="http://schemas.microsoft.com/office/drawing/2014/main" id="{3121677A-1631-1324-1E55-D68B3900D565}"/>
+                <a16:creationId xmlns:a16="http://schemas.microsoft.com/office/drawing/2014/main" xmlns="" id="{3121677A-1631-1324-1E55-D68B3900D565}"/>
               </a:ext>
             </a:extLst>
           </p:cNvPr>
@@ -33794,7 +33730,7 @@
           <p:cNvPr id="23" name="Oval 22">
             <a:extLst>
               <a:ext uri="{FF2B5EF4-FFF2-40B4-BE49-F238E27FC236}">
-                <a16:creationId xmlns="" xmlns:a16="http://schemas.microsoft.com/office/drawing/2014/main" id="{64D42A8C-6C17-5515-7C30-72FA44A1C982}"/>
+                <a16:creationId xmlns:a16="http://schemas.microsoft.com/office/drawing/2014/main" xmlns="" id="{64D42A8C-6C17-5515-7C30-72FA44A1C982}"/>
               </a:ext>
             </a:extLst>
           </p:cNvPr>
@@ -33853,7 +33789,7 @@
           <p:cNvPr id="24" name="Oval 23">
             <a:extLst>
               <a:ext uri="{FF2B5EF4-FFF2-40B4-BE49-F238E27FC236}">
-                <a16:creationId xmlns="" xmlns:a16="http://schemas.microsoft.com/office/drawing/2014/main" id="{7475C0C7-3651-5314-3F48-173B78AB0BFB}"/>
+                <a16:creationId xmlns:a16="http://schemas.microsoft.com/office/drawing/2014/main" xmlns="" id="{7475C0C7-3651-5314-3F48-173B78AB0BFB}"/>
               </a:ext>
             </a:extLst>
           </p:cNvPr>
@@ -33912,7 +33848,7 @@
           <p:cNvPr id="25" name="Oval 24">
             <a:extLst>
               <a:ext uri="{FF2B5EF4-FFF2-40B4-BE49-F238E27FC236}">
-                <a16:creationId xmlns="" xmlns:a16="http://schemas.microsoft.com/office/drawing/2014/main" id="{9EC0B432-CB23-DBAF-B917-7ABB9CFA1904}"/>
+                <a16:creationId xmlns:a16="http://schemas.microsoft.com/office/drawing/2014/main" xmlns="" id="{9EC0B432-CB23-DBAF-B917-7ABB9CFA1904}"/>
               </a:ext>
             </a:extLst>
           </p:cNvPr>
@@ -33971,7 +33907,7 @@
           <p:cNvPr id="26" name="Oval 25">
             <a:extLst>
               <a:ext uri="{FF2B5EF4-FFF2-40B4-BE49-F238E27FC236}">
-                <a16:creationId xmlns="" xmlns:a16="http://schemas.microsoft.com/office/drawing/2014/main" id="{CD6371DF-A7E5-1434-5000-FF50454FDD3B}"/>
+                <a16:creationId xmlns:a16="http://schemas.microsoft.com/office/drawing/2014/main" xmlns="" id="{CD6371DF-A7E5-1434-5000-FF50454FDD3B}"/>
               </a:ext>
             </a:extLst>
           </p:cNvPr>
@@ -34030,7 +33966,7 @@
           <p:cNvPr id="27" name="Oval 26">
             <a:extLst>
               <a:ext uri="{FF2B5EF4-FFF2-40B4-BE49-F238E27FC236}">
-                <a16:creationId xmlns="" xmlns:a16="http://schemas.microsoft.com/office/drawing/2014/main" id="{1F08106B-D501-EC7F-FD6E-9F53DD6567B9}"/>
+                <a16:creationId xmlns:a16="http://schemas.microsoft.com/office/drawing/2014/main" xmlns="" id="{1F08106B-D501-EC7F-FD6E-9F53DD6567B9}"/>
               </a:ext>
             </a:extLst>
           </p:cNvPr>
@@ -34089,7 +34025,7 @@
           <p:cNvPr id="28" name="Oval 27">
             <a:extLst>
               <a:ext uri="{FF2B5EF4-FFF2-40B4-BE49-F238E27FC236}">
-                <a16:creationId xmlns="" xmlns:a16="http://schemas.microsoft.com/office/drawing/2014/main" id="{58CD1136-8D51-C029-89F6-934EB793CA76}"/>
+                <a16:creationId xmlns:a16="http://schemas.microsoft.com/office/drawing/2014/main" xmlns="" id="{58CD1136-8D51-C029-89F6-934EB793CA76}"/>
               </a:ext>
             </a:extLst>
           </p:cNvPr>
@@ -34148,7 +34084,7 @@
           <p:cNvPr id="29" name="Oval 28">
             <a:extLst>
               <a:ext uri="{FF2B5EF4-FFF2-40B4-BE49-F238E27FC236}">
-                <a16:creationId xmlns="" xmlns:a16="http://schemas.microsoft.com/office/drawing/2014/main" id="{50E918C1-C147-CDF9-9A0B-C41B1B1BDC16}"/>
+                <a16:creationId xmlns:a16="http://schemas.microsoft.com/office/drawing/2014/main" xmlns="" id="{50E918C1-C147-CDF9-9A0B-C41B1B1BDC16}"/>
               </a:ext>
             </a:extLst>
           </p:cNvPr>
@@ -34207,7 +34143,7 @@
           <p:cNvPr id="3" name="Group 2">
             <a:extLst>
               <a:ext uri="{FF2B5EF4-FFF2-40B4-BE49-F238E27FC236}">
-                <a16:creationId xmlns="" xmlns:a16="http://schemas.microsoft.com/office/drawing/2014/main" id="{928405A0-4A61-8733-B126-4D81DAAC8909}"/>
+                <a16:creationId xmlns:a16="http://schemas.microsoft.com/office/drawing/2014/main" xmlns="" id="{928405A0-4A61-8733-B126-4D81DAAC8909}"/>
               </a:ext>
             </a:extLst>
           </p:cNvPr>
@@ -34227,7 +34163,7 @@
             <p:cNvPr id="2" name="Oval 1">
               <a:extLst>
                 <a:ext uri="{FF2B5EF4-FFF2-40B4-BE49-F238E27FC236}">
-                  <a16:creationId xmlns="" xmlns:a16="http://schemas.microsoft.com/office/drawing/2014/main" id="{13AFC585-BA57-5F31-158D-6005C04FEA8F}"/>
+                  <a16:creationId xmlns:a16="http://schemas.microsoft.com/office/drawing/2014/main" xmlns="" id="{13AFC585-BA57-5F31-158D-6005C04FEA8F}"/>
                 </a:ext>
               </a:extLst>
             </p:cNvPr>
@@ -34286,7 +34222,7 @@
             <p:cNvPr id="30" name="Arc 29">
               <a:extLst>
                 <a:ext uri="{FF2B5EF4-FFF2-40B4-BE49-F238E27FC236}">
-                  <a16:creationId xmlns="" xmlns:a16="http://schemas.microsoft.com/office/drawing/2014/main" id="{6ABDBE3E-C36D-8AB3-7845-745EE50517F1}"/>
+                  <a16:creationId xmlns:a16="http://schemas.microsoft.com/office/drawing/2014/main" xmlns="" id="{6ABDBE3E-C36D-8AB3-7845-745EE50517F1}"/>
                 </a:ext>
               </a:extLst>
             </p:cNvPr>
@@ -34339,7 +34275,7 @@
           <p:cNvPr id="54" name="Group 53">
             <a:extLst>
               <a:ext uri="{FF2B5EF4-FFF2-40B4-BE49-F238E27FC236}">
-                <a16:creationId xmlns="" xmlns:a16="http://schemas.microsoft.com/office/drawing/2014/main" id="{BE4556B3-F34C-FF2C-77C6-6D471C09D64C}"/>
+                <a16:creationId xmlns:a16="http://schemas.microsoft.com/office/drawing/2014/main" xmlns="" id="{BE4556B3-F34C-FF2C-77C6-6D471C09D64C}"/>
               </a:ext>
             </a:extLst>
           </p:cNvPr>
@@ -34359,7 +34295,7 @@
             <p:cNvPr id="55" name="Oval 54">
               <a:extLst>
                 <a:ext uri="{FF2B5EF4-FFF2-40B4-BE49-F238E27FC236}">
-                  <a16:creationId xmlns="" xmlns:a16="http://schemas.microsoft.com/office/drawing/2014/main" id="{328F7FC3-44ED-BDFD-31EC-54198BE5A58F}"/>
+                  <a16:creationId xmlns:a16="http://schemas.microsoft.com/office/drawing/2014/main" xmlns="" id="{328F7FC3-44ED-BDFD-31EC-54198BE5A58F}"/>
                 </a:ext>
               </a:extLst>
             </p:cNvPr>
@@ -34418,7 +34354,7 @@
             <p:cNvPr id="56" name="Arc 55">
               <a:extLst>
                 <a:ext uri="{FF2B5EF4-FFF2-40B4-BE49-F238E27FC236}">
-                  <a16:creationId xmlns="" xmlns:a16="http://schemas.microsoft.com/office/drawing/2014/main" id="{691957E7-B542-3D6C-AA1A-4C3661572B27}"/>
+                  <a16:creationId xmlns:a16="http://schemas.microsoft.com/office/drawing/2014/main" xmlns="" id="{691957E7-B542-3D6C-AA1A-4C3661572B27}"/>
                 </a:ext>
               </a:extLst>
             </p:cNvPr>
@@ -34471,7 +34407,7 @@
           <p:cNvPr id="57" name="Group 56">
             <a:extLst>
               <a:ext uri="{FF2B5EF4-FFF2-40B4-BE49-F238E27FC236}">
-                <a16:creationId xmlns="" xmlns:a16="http://schemas.microsoft.com/office/drawing/2014/main" id="{34942098-76A7-B3A3-5DB3-D8162AD3F68D}"/>
+                <a16:creationId xmlns:a16="http://schemas.microsoft.com/office/drawing/2014/main" xmlns="" id="{34942098-76A7-B3A3-5DB3-D8162AD3F68D}"/>
               </a:ext>
             </a:extLst>
           </p:cNvPr>
@@ -34491,7 +34427,7 @@
             <p:cNvPr id="58" name="Oval 57">
               <a:extLst>
                 <a:ext uri="{FF2B5EF4-FFF2-40B4-BE49-F238E27FC236}">
-                  <a16:creationId xmlns="" xmlns:a16="http://schemas.microsoft.com/office/drawing/2014/main" id="{ADA0F6B4-0FE9-8946-CD31-44C147BDFAA2}"/>
+                  <a16:creationId xmlns:a16="http://schemas.microsoft.com/office/drawing/2014/main" xmlns="" id="{ADA0F6B4-0FE9-8946-CD31-44C147BDFAA2}"/>
                 </a:ext>
               </a:extLst>
             </p:cNvPr>
@@ -34550,7 +34486,7 @@
             <p:cNvPr id="59" name="Arc 58">
               <a:extLst>
                 <a:ext uri="{FF2B5EF4-FFF2-40B4-BE49-F238E27FC236}">
-                  <a16:creationId xmlns="" xmlns:a16="http://schemas.microsoft.com/office/drawing/2014/main" id="{E209963C-964F-F2C3-6448-EDCC319111CF}"/>
+                  <a16:creationId xmlns:a16="http://schemas.microsoft.com/office/drawing/2014/main" xmlns="" id="{E209963C-964F-F2C3-6448-EDCC319111CF}"/>
                 </a:ext>
               </a:extLst>
             </p:cNvPr>
@@ -34603,7 +34539,7 @@
           <p:cNvPr id="60" name="Group 59">
             <a:extLst>
               <a:ext uri="{FF2B5EF4-FFF2-40B4-BE49-F238E27FC236}">
-                <a16:creationId xmlns="" xmlns:a16="http://schemas.microsoft.com/office/drawing/2014/main" id="{92FBB5C7-CE3A-82A2-B96C-D00957855705}"/>
+                <a16:creationId xmlns:a16="http://schemas.microsoft.com/office/drawing/2014/main" xmlns="" id="{92FBB5C7-CE3A-82A2-B96C-D00957855705}"/>
               </a:ext>
             </a:extLst>
           </p:cNvPr>
@@ -34623,7 +34559,7 @@
             <p:cNvPr id="61" name="Oval 60">
               <a:extLst>
                 <a:ext uri="{FF2B5EF4-FFF2-40B4-BE49-F238E27FC236}">
-                  <a16:creationId xmlns="" xmlns:a16="http://schemas.microsoft.com/office/drawing/2014/main" id="{C2090BBD-0FD7-73D4-768D-B3EACE879018}"/>
+                  <a16:creationId xmlns:a16="http://schemas.microsoft.com/office/drawing/2014/main" xmlns="" id="{C2090BBD-0FD7-73D4-768D-B3EACE879018}"/>
                 </a:ext>
               </a:extLst>
             </p:cNvPr>
@@ -34682,7 +34618,7 @@
             <p:cNvPr id="62" name="Arc 61">
               <a:extLst>
                 <a:ext uri="{FF2B5EF4-FFF2-40B4-BE49-F238E27FC236}">
-                  <a16:creationId xmlns="" xmlns:a16="http://schemas.microsoft.com/office/drawing/2014/main" id="{49BBA01A-FD23-189D-7879-A24960489055}"/>
+                  <a16:creationId xmlns:a16="http://schemas.microsoft.com/office/drawing/2014/main" xmlns="" id="{49BBA01A-FD23-189D-7879-A24960489055}"/>
                 </a:ext>
               </a:extLst>
             </p:cNvPr>
@@ -34735,7 +34671,7 @@
           <p:cNvPr id="63" name="Group 62">
             <a:extLst>
               <a:ext uri="{FF2B5EF4-FFF2-40B4-BE49-F238E27FC236}">
-                <a16:creationId xmlns="" xmlns:a16="http://schemas.microsoft.com/office/drawing/2014/main" id="{F1BBA567-B812-1158-B0D9-8585557A065F}"/>
+                <a16:creationId xmlns:a16="http://schemas.microsoft.com/office/drawing/2014/main" xmlns="" id="{F1BBA567-B812-1158-B0D9-8585557A065F}"/>
               </a:ext>
             </a:extLst>
           </p:cNvPr>
@@ -34755,7 +34691,7 @@
             <p:cNvPr id="64" name="Oval 63">
               <a:extLst>
                 <a:ext uri="{FF2B5EF4-FFF2-40B4-BE49-F238E27FC236}">
-                  <a16:creationId xmlns="" xmlns:a16="http://schemas.microsoft.com/office/drawing/2014/main" id="{69954438-FCF4-7EDB-B481-3A5CD3540B92}"/>
+                  <a16:creationId xmlns:a16="http://schemas.microsoft.com/office/drawing/2014/main" xmlns="" id="{69954438-FCF4-7EDB-B481-3A5CD3540B92}"/>
                 </a:ext>
               </a:extLst>
             </p:cNvPr>
@@ -34814,7 +34750,7 @@
             <p:cNvPr id="65" name="Arc 64">
               <a:extLst>
                 <a:ext uri="{FF2B5EF4-FFF2-40B4-BE49-F238E27FC236}">
-                  <a16:creationId xmlns="" xmlns:a16="http://schemas.microsoft.com/office/drawing/2014/main" id="{0539A26F-8931-1226-DADD-F1FA6E3A46CA}"/>
+                  <a16:creationId xmlns:a16="http://schemas.microsoft.com/office/drawing/2014/main" xmlns="" id="{0539A26F-8931-1226-DADD-F1FA6E3A46CA}"/>
                 </a:ext>
               </a:extLst>
             </p:cNvPr>
@@ -34867,7 +34803,7 @@
           <p:cNvPr id="66" name="Group 65">
             <a:extLst>
               <a:ext uri="{FF2B5EF4-FFF2-40B4-BE49-F238E27FC236}">
-                <a16:creationId xmlns="" xmlns:a16="http://schemas.microsoft.com/office/drawing/2014/main" id="{C5CA0963-798D-1A46-720B-8E62281FCB2B}"/>
+                <a16:creationId xmlns:a16="http://schemas.microsoft.com/office/drawing/2014/main" xmlns="" id="{C5CA0963-798D-1A46-720B-8E62281FCB2B}"/>
               </a:ext>
             </a:extLst>
           </p:cNvPr>
@@ -34887,7 +34823,7 @@
             <p:cNvPr id="67" name="Oval 66">
               <a:extLst>
                 <a:ext uri="{FF2B5EF4-FFF2-40B4-BE49-F238E27FC236}">
-                  <a16:creationId xmlns="" xmlns:a16="http://schemas.microsoft.com/office/drawing/2014/main" id="{238F6E5E-CA7D-90C5-F3DE-CEA092075098}"/>
+                  <a16:creationId xmlns:a16="http://schemas.microsoft.com/office/drawing/2014/main" xmlns="" id="{238F6E5E-CA7D-90C5-F3DE-CEA092075098}"/>
                 </a:ext>
               </a:extLst>
             </p:cNvPr>
@@ -34946,7 +34882,7 @@
             <p:cNvPr id="68" name="Arc 67">
               <a:extLst>
                 <a:ext uri="{FF2B5EF4-FFF2-40B4-BE49-F238E27FC236}">
-                  <a16:creationId xmlns="" xmlns:a16="http://schemas.microsoft.com/office/drawing/2014/main" id="{4EDC6FAD-D9B6-F4CE-7409-08C269011CC8}"/>
+                  <a16:creationId xmlns:a16="http://schemas.microsoft.com/office/drawing/2014/main" xmlns="" id="{4EDC6FAD-D9B6-F4CE-7409-08C269011CC8}"/>
                 </a:ext>
               </a:extLst>
             </p:cNvPr>
@@ -34999,7 +34935,7 @@
           <p:cNvPr id="69" name="Group 68">
             <a:extLst>
               <a:ext uri="{FF2B5EF4-FFF2-40B4-BE49-F238E27FC236}">
-                <a16:creationId xmlns="" xmlns:a16="http://schemas.microsoft.com/office/drawing/2014/main" id="{97D732E3-F499-0C3F-BE88-8A3C727562BA}"/>
+                <a16:creationId xmlns:a16="http://schemas.microsoft.com/office/drawing/2014/main" xmlns="" id="{97D732E3-F499-0C3F-BE88-8A3C727562BA}"/>
               </a:ext>
             </a:extLst>
           </p:cNvPr>
@@ -35019,7 +34955,7 @@
             <p:cNvPr id="70" name="Oval 69">
               <a:extLst>
                 <a:ext uri="{FF2B5EF4-FFF2-40B4-BE49-F238E27FC236}">
-                  <a16:creationId xmlns="" xmlns:a16="http://schemas.microsoft.com/office/drawing/2014/main" id="{1BB77D40-207D-28FD-CBB8-13B1251FBCE3}"/>
+                  <a16:creationId xmlns:a16="http://schemas.microsoft.com/office/drawing/2014/main" xmlns="" id="{1BB77D40-207D-28FD-CBB8-13B1251FBCE3}"/>
                 </a:ext>
               </a:extLst>
             </p:cNvPr>
@@ -35078,7 +35014,7 @@
             <p:cNvPr id="71" name="Arc 70">
               <a:extLst>
                 <a:ext uri="{FF2B5EF4-FFF2-40B4-BE49-F238E27FC236}">
-                  <a16:creationId xmlns="" xmlns:a16="http://schemas.microsoft.com/office/drawing/2014/main" id="{98CED01A-8366-93D8-2562-CDF27F4E5646}"/>
+                  <a16:creationId xmlns:a16="http://schemas.microsoft.com/office/drawing/2014/main" xmlns="" id="{98CED01A-8366-93D8-2562-CDF27F4E5646}"/>
                 </a:ext>
               </a:extLst>
             </p:cNvPr>
@@ -35131,7 +35067,7 @@
           <p:cNvPr id="72" name="Group 71">
             <a:extLst>
               <a:ext uri="{FF2B5EF4-FFF2-40B4-BE49-F238E27FC236}">
-                <a16:creationId xmlns="" xmlns:a16="http://schemas.microsoft.com/office/drawing/2014/main" id="{8ACD396F-9CBB-E28A-C3C7-9FFF82E7D986}"/>
+                <a16:creationId xmlns:a16="http://schemas.microsoft.com/office/drawing/2014/main" xmlns="" id="{8ACD396F-9CBB-E28A-C3C7-9FFF82E7D986}"/>
               </a:ext>
             </a:extLst>
           </p:cNvPr>
@@ -35151,7 +35087,7 @@
             <p:cNvPr id="73" name="Oval 72">
               <a:extLst>
                 <a:ext uri="{FF2B5EF4-FFF2-40B4-BE49-F238E27FC236}">
-                  <a16:creationId xmlns="" xmlns:a16="http://schemas.microsoft.com/office/drawing/2014/main" id="{79F5ABF2-6AF6-5851-71FF-385EC3216731}"/>
+                  <a16:creationId xmlns:a16="http://schemas.microsoft.com/office/drawing/2014/main" xmlns="" id="{79F5ABF2-6AF6-5851-71FF-385EC3216731}"/>
                 </a:ext>
               </a:extLst>
             </p:cNvPr>
@@ -35210,7 +35146,7 @@
             <p:cNvPr id="74" name="Arc 73">
               <a:extLst>
                 <a:ext uri="{FF2B5EF4-FFF2-40B4-BE49-F238E27FC236}">
-                  <a16:creationId xmlns="" xmlns:a16="http://schemas.microsoft.com/office/drawing/2014/main" id="{59B2770C-AEBD-5B7B-0CAD-D69C9BFB0200}"/>
+                  <a16:creationId xmlns:a16="http://schemas.microsoft.com/office/drawing/2014/main" xmlns="" id="{59B2770C-AEBD-5B7B-0CAD-D69C9BFB0200}"/>
                 </a:ext>
               </a:extLst>
             </p:cNvPr>
@@ -35263,7 +35199,7 @@
           <p:cNvPr id="75" name="Group 74">
             <a:extLst>
               <a:ext uri="{FF2B5EF4-FFF2-40B4-BE49-F238E27FC236}">
-                <a16:creationId xmlns="" xmlns:a16="http://schemas.microsoft.com/office/drawing/2014/main" id="{8E67EC40-2CEA-15BB-679E-82A155506382}"/>
+                <a16:creationId xmlns:a16="http://schemas.microsoft.com/office/drawing/2014/main" xmlns="" id="{8E67EC40-2CEA-15BB-679E-82A155506382}"/>
               </a:ext>
             </a:extLst>
           </p:cNvPr>
@@ -35283,7 +35219,7 @@
             <p:cNvPr id="76" name="Oval 75">
               <a:extLst>
                 <a:ext uri="{FF2B5EF4-FFF2-40B4-BE49-F238E27FC236}">
-                  <a16:creationId xmlns="" xmlns:a16="http://schemas.microsoft.com/office/drawing/2014/main" id="{BEE67072-39B0-0D8C-3764-DF739D4EF898}"/>
+                  <a16:creationId xmlns:a16="http://schemas.microsoft.com/office/drawing/2014/main" xmlns="" id="{BEE67072-39B0-0D8C-3764-DF739D4EF898}"/>
                 </a:ext>
               </a:extLst>
             </p:cNvPr>
@@ -35342,7 +35278,7 @@
             <p:cNvPr id="77" name="Arc 76">
               <a:extLst>
                 <a:ext uri="{FF2B5EF4-FFF2-40B4-BE49-F238E27FC236}">
-                  <a16:creationId xmlns="" xmlns:a16="http://schemas.microsoft.com/office/drawing/2014/main" id="{1036E0E8-91A2-459D-62BA-7E55B36EA4A3}"/>
+                  <a16:creationId xmlns:a16="http://schemas.microsoft.com/office/drawing/2014/main" xmlns="" id="{1036E0E8-91A2-459D-62BA-7E55B36EA4A3}"/>
                 </a:ext>
               </a:extLst>
             </p:cNvPr>
@@ -35395,7 +35331,7 @@
           <p:cNvPr id="78" name="Group 77">
             <a:extLst>
               <a:ext uri="{FF2B5EF4-FFF2-40B4-BE49-F238E27FC236}">
-                <a16:creationId xmlns="" xmlns:a16="http://schemas.microsoft.com/office/drawing/2014/main" id="{E7A8FC93-89F4-B3FF-B2A0-EB92EE14302F}"/>
+                <a16:creationId xmlns:a16="http://schemas.microsoft.com/office/drawing/2014/main" xmlns="" id="{E7A8FC93-89F4-B3FF-B2A0-EB92EE14302F}"/>
               </a:ext>
             </a:extLst>
           </p:cNvPr>
@@ -35415,7 +35351,7 @@
             <p:cNvPr id="79" name="Oval 78">
               <a:extLst>
                 <a:ext uri="{FF2B5EF4-FFF2-40B4-BE49-F238E27FC236}">
-                  <a16:creationId xmlns="" xmlns:a16="http://schemas.microsoft.com/office/drawing/2014/main" id="{0B288602-214C-9797-F12B-433D63A94C97}"/>
+                  <a16:creationId xmlns:a16="http://schemas.microsoft.com/office/drawing/2014/main" xmlns="" id="{0B288602-214C-9797-F12B-433D63A94C97}"/>
                 </a:ext>
               </a:extLst>
             </p:cNvPr>
@@ -35474,7 +35410,7 @@
             <p:cNvPr id="80" name="Arc 79">
               <a:extLst>
                 <a:ext uri="{FF2B5EF4-FFF2-40B4-BE49-F238E27FC236}">
-                  <a16:creationId xmlns="" xmlns:a16="http://schemas.microsoft.com/office/drawing/2014/main" id="{B2237529-DFC9-A1B7-9CFA-D339940826FC}"/>
+                  <a16:creationId xmlns:a16="http://schemas.microsoft.com/office/drawing/2014/main" xmlns="" id="{B2237529-DFC9-A1B7-9CFA-D339940826FC}"/>
                 </a:ext>
               </a:extLst>
             </p:cNvPr>
@@ -35527,7 +35463,7 @@
           <p:cNvPr id="81" name="Group 80">
             <a:extLst>
               <a:ext uri="{FF2B5EF4-FFF2-40B4-BE49-F238E27FC236}">
-                <a16:creationId xmlns="" xmlns:a16="http://schemas.microsoft.com/office/drawing/2014/main" id="{56E08E4B-3F15-3DA7-6141-7E97655DD396}"/>
+                <a16:creationId xmlns:a16="http://schemas.microsoft.com/office/drawing/2014/main" xmlns="" id="{56E08E4B-3F15-3DA7-6141-7E97655DD396}"/>
               </a:ext>
             </a:extLst>
           </p:cNvPr>
@@ -35547,7 +35483,7 @@
             <p:cNvPr id="82" name="Oval 81">
               <a:extLst>
                 <a:ext uri="{FF2B5EF4-FFF2-40B4-BE49-F238E27FC236}">
-                  <a16:creationId xmlns="" xmlns:a16="http://schemas.microsoft.com/office/drawing/2014/main" id="{BF631934-7110-7F5E-79A0-378CB41A08C9}"/>
+                  <a16:creationId xmlns:a16="http://schemas.microsoft.com/office/drawing/2014/main" xmlns="" id="{BF631934-7110-7F5E-79A0-378CB41A08C9}"/>
                 </a:ext>
               </a:extLst>
             </p:cNvPr>
@@ -35606,7 +35542,7 @@
             <p:cNvPr id="83" name="Arc 82">
               <a:extLst>
                 <a:ext uri="{FF2B5EF4-FFF2-40B4-BE49-F238E27FC236}">
-                  <a16:creationId xmlns="" xmlns:a16="http://schemas.microsoft.com/office/drawing/2014/main" id="{0439DB39-7B53-36D4-BDF5-71DB13657FDC}"/>
+                  <a16:creationId xmlns:a16="http://schemas.microsoft.com/office/drawing/2014/main" xmlns="" id="{0439DB39-7B53-36D4-BDF5-71DB13657FDC}"/>
                 </a:ext>
               </a:extLst>
             </p:cNvPr>
@@ -35659,7 +35595,7 @@
           <p:cNvPr id="84" name="Group 83">
             <a:extLst>
               <a:ext uri="{FF2B5EF4-FFF2-40B4-BE49-F238E27FC236}">
-                <a16:creationId xmlns="" xmlns:a16="http://schemas.microsoft.com/office/drawing/2014/main" id="{BD99BE67-16D7-6B0C-6E7E-F8B4B7BD2317}"/>
+                <a16:creationId xmlns:a16="http://schemas.microsoft.com/office/drawing/2014/main" xmlns="" id="{BD99BE67-16D7-6B0C-6E7E-F8B4B7BD2317}"/>
               </a:ext>
             </a:extLst>
           </p:cNvPr>
@@ -35679,7 +35615,7 @@
             <p:cNvPr id="85" name="Oval 84">
               <a:extLst>
                 <a:ext uri="{FF2B5EF4-FFF2-40B4-BE49-F238E27FC236}">
-                  <a16:creationId xmlns="" xmlns:a16="http://schemas.microsoft.com/office/drawing/2014/main" id="{370A9636-2147-18A8-A452-5C474F2755F9}"/>
+                  <a16:creationId xmlns:a16="http://schemas.microsoft.com/office/drawing/2014/main" xmlns="" id="{370A9636-2147-18A8-A452-5C474F2755F9}"/>
                 </a:ext>
               </a:extLst>
             </p:cNvPr>
@@ -35738,7 +35674,7 @@
             <p:cNvPr id="86" name="Arc 85">
               <a:extLst>
                 <a:ext uri="{FF2B5EF4-FFF2-40B4-BE49-F238E27FC236}">
-                  <a16:creationId xmlns="" xmlns:a16="http://schemas.microsoft.com/office/drawing/2014/main" id="{CF37D023-EFBC-7B83-E01F-14E578B5E41F}"/>
+                  <a16:creationId xmlns:a16="http://schemas.microsoft.com/office/drawing/2014/main" xmlns="" id="{CF37D023-EFBC-7B83-E01F-14E578B5E41F}"/>
                 </a:ext>
               </a:extLst>
             </p:cNvPr>
@@ -35791,7 +35727,7 @@
           <p:cNvPr id="87" name="Group 86">
             <a:extLst>
               <a:ext uri="{FF2B5EF4-FFF2-40B4-BE49-F238E27FC236}">
-                <a16:creationId xmlns="" xmlns:a16="http://schemas.microsoft.com/office/drawing/2014/main" id="{18D76EDD-67EC-1706-7541-E0B361B9EE01}"/>
+                <a16:creationId xmlns:a16="http://schemas.microsoft.com/office/drawing/2014/main" xmlns="" id="{18D76EDD-67EC-1706-7541-E0B361B9EE01}"/>
               </a:ext>
             </a:extLst>
           </p:cNvPr>
@@ -35811,7 +35747,7 @@
             <p:cNvPr id="88" name="Oval 87">
               <a:extLst>
                 <a:ext uri="{FF2B5EF4-FFF2-40B4-BE49-F238E27FC236}">
-                  <a16:creationId xmlns="" xmlns:a16="http://schemas.microsoft.com/office/drawing/2014/main" id="{EBF7F9D4-4385-3396-B1F8-92B45C3EE234}"/>
+                  <a16:creationId xmlns:a16="http://schemas.microsoft.com/office/drawing/2014/main" xmlns="" id="{EBF7F9D4-4385-3396-B1F8-92B45C3EE234}"/>
                 </a:ext>
               </a:extLst>
             </p:cNvPr>
@@ -35870,7 +35806,7 @@
             <p:cNvPr id="89" name="Arc 88">
               <a:extLst>
                 <a:ext uri="{FF2B5EF4-FFF2-40B4-BE49-F238E27FC236}">
-                  <a16:creationId xmlns="" xmlns:a16="http://schemas.microsoft.com/office/drawing/2014/main" id="{344DEE6C-BE03-A502-C8EB-06880E1AFF7F}"/>
+                  <a16:creationId xmlns:a16="http://schemas.microsoft.com/office/drawing/2014/main" xmlns="" id="{344DEE6C-BE03-A502-C8EB-06880E1AFF7F}"/>
                 </a:ext>
               </a:extLst>
             </p:cNvPr>
@@ -35923,7 +35859,7 @@
           <p:cNvPr id="90" name="Group 89">
             <a:extLst>
               <a:ext uri="{FF2B5EF4-FFF2-40B4-BE49-F238E27FC236}">
-                <a16:creationId xmlns="" xmlns:a16="http://schemas.microsoft.com/office/drawing/2014/main" id="{805A620C-3AE2-255F-D0AD-7BCE318B0261}"/>
+                <a16:creationId xmlns:a16="http://schemas.microsoft.com/office/drawing/2014/main" xmlns="" id="{805A620C-3AE2-255F-D0AD-7BCE318B0261}"/>
               </a:ext>
             </a:extLst>
           </p:cNvPr>
@@ -35943,7 +35879,7 @@
             <p:cNvPr id="91" name="Oval 90">
               <a:extLst>
                 <a:ext uri="{FF2B5EF4-FFF2-40B4-BE49-F238E27FC236}">
-                  <a16:creationId xmlns="" xmlns:a16="http://schemas.microsoft.com/office/drawing/2014/main" id="{C8C812B5-07D8-854F-C972-D8CEBC6A35B4}"/>
+                  <a16:creationId xmlns:a16="http://schemas.microsoft.com/office/drawing/2014/main" xmlns="" id="{C8C812B5-07D8-854F-C972-D8CEBC6A35B4}"/>
                 </a:ext>
               </a:extLst>
             </p:cNvPr>
@@ -36002,7 +35938,7 @@
             <p:cNvPr id="92" name="Arc 91">
               <a:extLst>
                 <a:ext uri="{FF2B5EF4-FFF2-40B4-BE49-F238E27FC236}">
-                  <a16:creationId xmlns="" xmlns:a16="http://schemas.microsoft.com/office/drawing/2014/main" id="{79FA0149-4CB8-9929-0B85-1B9620713172}"/>
+                  <a16:creationId xmlns:a16="http://schemas.microsoft.com/office/drawing/2014/main" xmlns="" id="{79FA0149-4CB8-9929-0B85-1B9620713172}"/>
                 </a:ext>
               </a:extLst>
             </p:cNvPr>
@@ -36055,7 +35991,7 @@
           <p:cNvPr id="93" name="Group 92">
             <a:extLst>
               <a:ext uri="{FF2B5EF4-FFF2-40B4-BE49-F238E27FC236}">
-                <a16:creationId xmlns="" xmlns:a16="http://schemas.microsoft.com/office/drawing/2014/main" id="{D34F9994-C5E0-AE09-44C0-C5B87FCCE5CA}"/>
+                <a16:creationId xmlns:a16="http://schemas.microsoft.com/office/drawing/2014/main" xmlns="" id="{D34F9994-C5E0-AE09-44C0-C5B87FCCE5CA}"/>
               </a:ext>
             </a:extLst>
           </p:cNvPr>
@@ -36075,7 +36011,7 @@
             <p:cNvPr id="94" name="Oval 93">
               <a:extLst>
                 <a:ext uri="{FF2B5EF4-FFF2-40B4-BE49-F238E27FC236}">
-                  <a16:creationId xmlns="" xmlns:a16="http://schemas.microsoft.com/office/drawing/2014/main" id="{2AC773AF-0EEA-4375-E025-35F8FC5364E9}"/>
+                  <a16:creationId xmlns:a16="http://schemas.microsoft.com/office/drawing/2014/main" xmlns="" id="{2AC773AF-0EEA-4375-E025-35F8FC5364E9}"/>
                 </a:ext>
               </a:extLst>
             </p:cNvPr>
@@ -36134,7 +36070,7 @@
             <p:cNvPr id="95" name="Arc 94">
               <a:extLst>
                 <a:ext uri="{FF2B5EF4-FFF2-40B4-BE49-F238E27FC236}">
-                  <a16:creationId xmlns="" xmlns:a16="http://schemas.microsoft.com/office/drawing/2014/main" id="{90DDEFBB-F1E4-9858-B6D5-3FDB2B182EF9}"/>
+                  <a16:creationId xmlns:a16="http://schemas.microsoft.com/office/drawing/2014/main" xmlns="" id="{90DDEFBB-F1E4-9858-B6D5-3FDB2B182EF9}"/>
                 </a:ext>
               </a:extLst>
             </p:cNvPr>
@@ -36187,7 +36123,7 @@
           <p:cNvPr id="96" name="Group 95">
             <a:extLst>
               <a:ext uri="{FF2B5EF4-FFF2-40B4-BE49-F238E27FC236}">
-                <a16:creationId xmlns="" xmlns:a16="http://schemas.microsoft.com/office/drawing/2014/main" id="{A7DFD59F-9ACF-DA37-BC73-AADA05F8CD55}"/>
+                <a16:creationId xmlns:a16="http://schemas.microsoft.com/office/drawing/2014/main" xmlns="" id="{A7DFD59F-9ACF-DA37-BC73-AADA05F8CD55}"/>
               </a:ext>
             </a:extLst>
           </p:cNvPr>
@@ -36207,7 +36143,7 @@
             <p:cNvPr id="97" name="Oval 96">
               <a:extLst>
                 <a:ext uri="{FF2B5EF4-FFF2-40B4-BE49-F238E27FC236}">
-                  <a16:creationId xmlns="" xmlns:a16="http://schemas.microsoft.com/office/drawing/2014/main" id="{34E0A8AD-4A63-9662-8252-B6566776A0DB}"/>
+                  <a16:creationId xmlns:a16="http://schemas.microsoft.com/office/drawing/2014/main" xmlns="" id="{34E0A8AD-4A63-9662-8252-B6566776A0DB}"/>
                 </a:ext>
               </a:extLst>
             </p:cNvPr>
@@ -36266,7 +36202,7 @@
             <p:cNvPr id="98" name="Arc 97">
               <a:extLst>
                 <a:ext uri="{FF2B5EF4-FFF2-40B4-BE49-F238E27FC236}">
-                  <a16:creationId xmlns="" xmlns:a16="http://schemas.microsoft.com/office/drawing/2014/main" id="{A5AF0D9F-7BD7-E7BD-EF60-38F8DB6A7173}"/>
+                  <a16:creationId xmlns:a16="http://schemas.microsoft.com/office/drawing/2014/main" xmlns="" id="{A5AF0D9F-7BD7-E7BD-EF60-38F8DB6A7173}"/>
                 </a:ext>
               </a:extLst>
             </p:cNvPr>
@@ -36319,7 +36255,7 @@
           <p:cNvPr id="99" name="Group 98">
             <a:extLst>
               <a:ext uri="{FF2B5EF4-FFF2-40B4-BE49-F238E27FC236}">
-                <a16:creationId xmlns="" xmlns:a16="http://schemas.microsoft.com/office/drawing/2014/main" id="{B86504F5-14F5-005B-98B8-877CBD2DBAEC}"/>
+                <a16:creationId xmlns:a16="http://schemas.microsoft.com/office/drawing/2014/main" xmlns="" id="{B86504F5-14F5-005B-98B8-877CBD2DBAEC}"/>
               </a:ext>
             </a:extLst>
           </p:cNvPr>
@@ -36339,7 +36275,7 @@
             <p:cNvPr id="100" name="Oval 99">
               <a:extLst>
                 <a:ext uri="{FF2B5EF4-FFF2-40B4-BE49-F238E27FC236}">
-                  <a16:creationId xmlns="" xmlns:a16="http://schemas.microsoft.com/office/drawing/2014/main" id="{77BEE814-D0CC-0B71-56A8-38FC233ADBBC}"/>
+                  <a16:creationId xmlns:a16="http://schemas.microsoft.com/office/drawing/2014/main" xmlns="" id="{77BEE814-D0CC-0B71-56A8-38FC233ADBBC}"/>
                 </a:ext>
               </a:extLst>
             </p:cNvPr>
@@ -36398,7 +36334,7 @@
             <p:cNvPr id="101" name="Arc 100">
               <a:extLst>
                 <a:ext uri="{FF2B5EF4-FFF2-40B4-BE49-F238E27FC236}">
-                  <a16:creationId xmlns="" xmlns:a16="http://schemas.microsoft.com/office/drawing/2014/main" id="{E12B4309-6ECF-2A90-BE18-92E7B6D9F45C}"/>
+                  <a16:creationId xmlns:a16="http://schemas.microsoft.com/office/drawing/2014/main" xmlns="" id="{E12B4309-6ECF-2A90-BE18-92E7B6D9F45C}"/>
                 </a:ext>
               </a:extLst>
             </p:cNvPr>
@@ -36451,7 +36387,7 @@
           <p:cNvPr id="102" name="Group 101">
             <a:extLst>
               <a:ext uri="{FF2B5EF4-FFF2-40B4-BE49-F238E27FC236}">
-                <a16:creationId xmlns="" xmlns:a16="http://schemas.microsoft.com/office/drawing/2014/main" id="{B34C10F9-48AB-376A-971B-5E609292667E}"/>
+                <a16:creationId xmlns:a16="http://schemas.microsoft.com/office/drawing/2014/main" xmlns="" id="{B34C10F9-48AB-376A-971B-5E609292667E}"/>
               </a:ext>
             </a:extLst>
           </p:cNvPr>
@@ -36471,7 +36407,7 @@
             <p:cNvPr id="103" name="Oval 102">
               <a:extLst>
                 <a:ext uri="{FF2B5EF4-FFF2-40B4-BE49-F238E27FC236}">
-                  <a16:creationId xmlns="" xmlns:a16="http://schemas.microsoft.com/office/drawing/2014/main" id="{B13C8D1E-9E03-3B03-EB62-C5D86340BF1D}"/>
+                  <a16:creationId xmlns:a16="http://schemas.microsoft.com/office/drawing/2014/main" xmlns="" id="{B13C8D1E-9E03-3B03-EB62-C5D86340BF1D}"/>
                 </a:ext>
               </a:extLst>
             </p:cNvPr>
@@ -36530,7 +36466,7 @@
             <p:cNvPr id="104" name="Arc 103">
               <a:extLst>
                 <a:ext uri="{FF2B5EF4-FFF2-40B4-BE49-F238E27FC236}">
-                  <a16:creationId xmlns="" xmlns:a16="http://schemas.microsoft.com/office/drawing/2014/main" id="{FACF3DF3-03AF-3180-E1E4-55391011F79F}"/>
+                  <a16:creationId xmlns:a16="http://schemas.microsoft.com/office/drawing/2014/main" xmlns="" id="{FACF3DF3-03AF-3180-E1E4-55391011F79F}"/>
                 </a:ext>
               </a:extLst>
             </p:cNvPr>
@@ -36583,7 +36519,7 @@
           <p:cNvPr id="105" name="Group 104">
             <a:extLst>
               <a:ext uri="{FF2B5EF4-FFF2-40B4-BE49-F238E27FC236}">
-                <a16:creationId xmlns="" xmlns:a16="http://schemas.microsoft.com/office/drawing/2014/main" id="{ADC277D0-0547-3E1F-7B17-763C14F2C569}"/>
+                <a16:creationId xmlns:a16="http://schemas.microsoft.com/office/drawing/2014/main" xmlns="" id="{ADC277D0-0547-3E1F-7B17-763C14F2C569}"/>
               </a:ext>
             </a:extLst>
           </p:cNvPr>
@@ -36603,7 +36539,7 @@
             <p:cNvPr id="106" name="Oval 105">
               <a:extLst>
                 <a:ext uri="{FF2B5EF4-FFF2-40B4-BE49-F238E27FC236}">
-                  <a16:creationId xmlns="" xmlns:a16="http://schemas.microsoft.com/office/drawing/2014/main" id="{444E641A-F426-E972-E682-0AD4058F2F5F}"/>
+                  <a16:creationId xmlns:a16="http://schemas.microsoft.com/office/drawing/2014/main" xmlns="" id="{444E641A-F426-E972-E682-0AD4058F2F5F}"/>
                 </a:ext>
               </a:extLst>
             </p:cNvPr>
@@ -36662,7 +36598,7 @@
             <p:cNvPr id="107" name="Arc 106">
               <a:extLst>
                 <a:ext uri="{FF2B5EF4-FFF2-40B4-BE49-F238E27FC236}">
-                  <a16:creationId xmlns="" xmlns:a16="http://schemas.microsoft.com/office/drawing/2014/main" id="{000E6A81-D707-E36C-5DAD-68F6D1F68CE3}"/>
+                  <a16:creationId xmlns:a16="http://schemas.microsoft.com/office/drawing/2014/main" xmlns="" id="{000E6A81-D707-E36C-5DAD-68F6D1F68CE3}"/>
                 </a:ext>
               </a:extLst>
             </p:cNvPr>
@@ -36715,7 +36651,7 @@
           <p:cNvPr id="108" name="Group 107">
             <a:extLst>
               <a:ext uri="{FF2B5EF4-FFF2-40B4-BE49-F238E27FC236}">
-                <a16:creationId xmlns="" xmlns:a16="http://schemas.microsoft.com/office/drawing/2014/main" id="{31EA107D-77C3-196B-39BD-015BCFD6D3C2}"/>
+                <a16:creationId xmlns:a16="http://schemas.microsoft.com/office/drawing/2014/main" xmlns="" id="{31EA107D-77C3-196B-39BD-015BCFD6D3C2}"/>
               </a:ext>
             </a:extLst>
           </p:cNvPr>
@@ -36735,7 +36671,7 @@
             <p:cNvPr id="109" name="Oval 108">
               <a:extLst>
                 <a:ext uri="{FF2B5EF4-FFF2-40B4-BE49-F238E27FC236}">
-                  <a16:creationId xmlns="" xmlns:a16="http://schemas.microsoft.com/office/drawing/2014/main" id="{61FDFC2B-B300-35FB-0617-5D1C7ADF6641}"/>
+                  <a16:creationId xmlns:a16="http://schemas.microsoft.com/office/drawing/2014/main" xmlns="" id="{61FDFC2B-B300-35FB-0617-5D1C7ADF6641}"/>
                 </a:ext>
               </a:extLst>
             </p:cNvPr>
@@ -36794,7 +36730,7 @@
             <p:cNvPr id="110" name="Arc 109">
               <a:extLst>
                 <a:ext uri="{FF2B5EF4-FFF2-40B4-BE49-F238E27FC236}">
-                  <a16:creationId xmlns="" xmlns:a16="http://schemas.microsoft.com/office/drawing/2014/main" id="{CF6B487C-012F-56E5-E8E3-8B137298EDFA}"/>
+                  <a16:creationId xmlns:a16="http://schemas.microsoft.com/office/drawing/2014/main" xmlns="" id="{CF6B487C-012F-56E5-E8E3-8B137298EDFA}"/>
                 </a:ext>
               </a:extLst>
             </p:cNvPr>
@@ -36847,7 +36783,7 @@
           <p:cNvPr id="111" name="Group 110">
             <a:extLst>
               <a:ext uri="{FF2B5EF4-FFF2-40B4-BE49-F238E27FC236}">
-                <a16:creationId xmlns="" xmlns:a16="http://schemas.microsoft.com/office/drawing/2014/main" id="{6232043B-C4C4-BA0A-CF1A-4DBBB75AAC73}"/>
+                <a16:creationId xmlns:a16="http://schemas.microsoft.com/office/drawing/2014/main" xmlns="" id="{6232043B-C4C4-BA0A-CF1A-4DBBB75AAC73}"/>
               </a:ext>
             </a:extLst>
           </p:cNvPr>
@@ -36867,7 +36803,7 @@
             <p:cNvPr id="112" name="Oval 111">
               <a:extLst>
                 <a:ext uri="{FF2B5EF4-FFF2-40B4-BE49-F238E27FC236}">
-                  <a16:creationId xmlns="" xmlns:a16="http://schemas.microsoft.com/office/drawing/2014/main" id="{10FFE23E-6CCE-0432-75E0-E824C7863261}"/>
+                  <a16:creationId xmlns:a16="http://schemas.microsoft.com/office/drawing/2014/main" xmlns="" id="{10FFE23E-6CCE-0432-75E0-E824C7863261}"/>
                 </a:ext>
               </a:extLst>
             </p:cNvPr>
@@ -36926,7 +36862,7 @@
             <p:cNvPr id="113" name="Arc 112">
               <a:extLst>
                 <a:ext uri="{FF2B5EF4-FFF2-40B4-BE49-F238E27FC236}">
-                  <a16:creationId xmlns="" xmlns:a16="http://schemas.microsoft.com/office/drawing/2014/main" id="{98676D6A-3424-61E8-2CCE-756447D5F9C2}"/>
+                  <a16:creationId xmlns:a16="http://schemas.microsoft.com/office/drawing/2014/main" xmlns="" id="{98676D6A-3424-61E8-2CCE-756447D5F9C2}"/>
                 </a:ext>
               </a:extLst>
             </p:cNvPr>
@@ -36979,7 +36915,7 @@
           <p:cNvPr id="114" name="Group 113">
             <a:extLst>
               <a:ext uri="{FF2B5EF4-FFF2-40B4-BE49-F238E27FC236}">
-                <a16:creationId xmlns="" xmlns:a16="http://schemas.microsoft.com/office/drawing/2014/main" id="{88B3BE82-3395-0E01-8219-A5E3310F3959}"/>
+                <a16:creationId xmlns:a16="http://schemas.microsoft.com/office/drawing/2014/main" xmlns="" id="{88B3BE82-3395-0E01-8219-A5E3310F3959}"/>
               </a:ext>
             </a:extLst>
           </p:cNvPr>
@@ -36999,7 +36935,7 @@
             <p:cNvPr id="115" name="Oval 114">
               <a:extLst>
                 <a:ext uri="{FF2B5EF4-FFF2-40B4-BE49-F238E27FC236}">
-                  <a16:creationId xmlns="" xmlns:a16="http://schemas.microsoft.com/office/drawing/2014/main" id="{F83317C8-5B5D-DDF7-15F4-EA2AFB9BC950}"/>
+                  <a16:creationId xmlns:a16="http://schemas.microsoft.com/office/drawing/2014/main" xmlns="" id="{F83317C8-5B5D-DDF7-15F4-EA2AFB9BC950}"/>
                 </a:ext>
               </a:extLst>
             </p:cNvPr>
@@ -37058,7 +36994,7 @@
             <p:cNvPr id="116" name="Arc 115">
               <a:extLst>
                 <a:ext uri="{FF2B5EF4-FFF2-40B4-BE49-F238E27FC236}">
-                  <a16:creationId xmlns="" xmlns:a16="http://schemas.microsoft.com/office/drawing/2014/main" id="{E746B903-C206-EA9A-5FAE-24360FA19AD9}"/>
+                  <a16:creationId xmlns:a16="http://schemas.microsoft.com/office/drawing/2014/main" xmlns="" id="{E746B903-C206-EA9A-5FAE-24360FA19AD9}"/>
                 </a:ext>
               </a:extLst>
             </p:cNvPr>
@@ -37111,7 +37047,7 @@
           <p:cNvPr id="117" name="Group 116">
             <a:extLst>
               <a:ext uri="{FF2B5EF4-FFF2-40B4-BE49-F238E27FC236}">
-                <a16:creationId xmlns="" xmlns:a16="http://schemas.microsoft.com/office/drawing/2014/main" id="{2F2A7235-4D60-4C1C-AC1C-8026C6BB4059}"/>
+                <a16:creationId xmlns:a16="http://schemas.microsoft.com/office/drawing/2014/main" xmlns="" id="{2F2A7235-4D60-4C1C-AC1C-8026C6BB4059}"/>
               </a:ext>
             </a:extLst>
           </p:cNvPr>
@@ -37131,7 +37067,7 @@
             <p:cNvPr id="118" name="Oval 117">
               <a:extLst>
                 <a:ext uri="{FF2B5EF4-FFF2-40B4-BE49-F238E27FC236}">
-                  <a16:creationId xmlns="" xmlns:a16="http://schemas.microsoft.com/office/drawing/2014/main" id="{0F886985-AC53-0516-F85D-DDC1946AD17E}"/>
+                  <a16:creationId xmlns:a16="http://schemas.microsoft.com/office/drawing/2014/main" xmlns="" id="{0F886985-AC53-0516-F85D-DDC1946AD17E}"/>
                 </a:ext>
               </a:extLst>
             </p:cNvPr>
@@ -37190,7 +37126,7 @@
             <p:cNvPr id="119" name="Arc 118">
               <a:extLst>
                 <a:ext uri="{FF2B5EF4-FFF2-40B4-BE49-F238E27FC236}">
-                  <a16:creationId xmlns="" xmlns:a16="http://schemas.microsoft.com/office/drawing/2014/main" id="{AE4C9755-2A3A-5A32-D276-52C0A9B4F8D6}"/>
+                  <a16:creationId xmlns:a16="http://schemas.microsoft.com/office/drawing/2014/main" xmlns="" id="{AE4C9755-2A3A-5A32-D276-52C0A9B4F8D6}"/>
                 </a:ext>
               </a:extLst>
             </p:cNvPr>
@@ -37243,7 +37179,7 @@
           <p:cNvPr id="120" name="Group 119">
             <a:extLst>
               <a:ext uri="{FF2B5EF4-FFF2-40B4-BE49-F238E27FC236}">
-                <a16:creationId xmlns="" xmlns:a16="http://schemas.microsoft.com/office/drawing/2014/main" id="{7877DB57-685B-C785-7692-7E30EB8C61F3}"/>
+                <a16:creationId xmlns:a16="http://schemas.microsoft.com/office/drawing/2014/main" xmlns="" id="{7877DB57-685B-C785-7692-7E30EB8C61F3}"/>
               </a:ext>
             </a:extLst>
           </p:cNvPr>
@@ -37263,7 +37199,7 @@
             <p:cNvPr id="121" name="Oval 120">
               <a:extLst>
                 <a:ext uri="{FF2B5EF4-FFF2-40B4-BE49-F238E27FC236}">
-                  <a16:creationId xmlns="" xmlns:a16="http://schemas.microsoft.com/office/drawing/2014/main" id="{22F39CC0-1318-0DB9-44C8-44ED898DF450}"/>
+                  <a16:creationId xmlns:a16="http://schemas.microsoft.com/office/drawing/2014/main" xmlns="" id="{22F39CC0-1318-0DB9-44C8-44ED898DF450}"/>
                 </a:ext>
               </a:extLst>
             </p:cNvPr>
@@ -37322,7 +37258,7 @@
             <p:cNvPr id="122" name="Arc 121">
               <a:extLst>
                 <a:ext uri="{FF2B5EF4-FFF2-40B4-BE49-F238E27FC236}">
-                  <a16:creationId xmlns="" xmlns:a16="http://schemas.microsoft.com/office/drawing/2014/main" id="{E74E2D2F-36CC-9C47-07C8-1F7BA70CE9FF}"/>
+                  <a16:creationId xmlns:a16="http://schemas.microsoft.com/office/drawing/2014/main" xmlns="" id="{E74E2D2F-36CC-9C47-07C8-1F7BA70CE9FF}"/>
                 </a:ext>
               </a:extLst>
             </p:cNvPr>
@@ -37375,7 +37311,7 @@
           <p:cNvPr id="123" name="Rectangle 122">
             <a:extLst>
               <a:ext uri="{FF2B5EF4-FFF2-40B4-BE49-F238E27FC236}">
-                <a16:creationId xmlns="" xmlns:a16="http://schemas.microsoft.com/office/drawing/2014/main" id="{044E7409-6BE4-82BF-6739-FB981D21C254}"/>
+                <a16:creationId xmlns:a16="http://schemas.microsoft.com/office/drawing/2014/main" xmlns="" id="{044E7409-6BE4-82BF-6739-FB981D21C254}"/>
               </a:ext>
             </a:extLst>
           </p:cNvPr>
@@ -37651,7 +37587,7 @@
         <p:cNvPr id="1" name="">
           <a:extLst>
             <a:ext uri="{FF2B5EF4-FFF2-40B4-BE49-F238E27FC236}">
-              <a16:creationId xmlns="" xmlns:a16="http://schemas.microsoft.com/office/drawing/2014/main" id="{290D15F8-E0C1-A9FC-561D-1134701B922D}"/>
+              <a16:creationId xmlns:a16="http://schemas.microsoft.com/office/drawing/2014/main" xmlns="" id="{290D15F8-E0C1-A9FC-561D-1134701B922D}"/>
             </a:ext>
           </a:extLst>
         </p:cNvPr>
@@ -37671,7 +37607,7 @@
           <p:cNvPr id="5" name="Rectangle 4">
             <a:extLst>
               <a:ext uri="{FF2B5EF4-FFF2-40B4-BE49-F238E27FC236}">
-                <a16:creationId xmlns="" xmlns:a16="http://schemas.microsoft.com/office/drawing/2014/main" id="{D6ED7662-31D2-B220-5B48-999751314250}"/>
+                <a16:creationId xmlns:a16="http://schemas.microsoft.com/office/drawing/2014/main" xmlns="" id="{D6ED7662-31D2-B220-5B48-999751314250}"/>
               </a:ext>
             </a:extLst>
           </p:cNvPr>
@@ -37717,7 +37653,7 @@
           <p:cNvPr id="2" name="Group 1">
             <a:extLst>
               <a:ext uri="{FF2B5EF4-FFF2-40B4-BE49-F238E27FC236}">
-                <a16:creationId xmlns="" xmlns:a16="http://schemas.microsoft.com/office/drawing/2014/main" id="{4E18E2CC-0F07-DEF3-A92C-D7E66BD60D31}"/>
+                <a16:creationId xmlns:a16="http://schemas.microsoft.com/office/drawing/2014/main" xmlns="" id="{4E18E2CC-0F07-DEF3-A92C-D7E66BD60D31}"/>
               </a:ext>
             </a:extLst>
           </p:cNvPr>
@@ -37737,7 +37673,7 @@
             <p:cNvPr id="6" name="Oval 5">
               <a:extLst>
                 <a:ext uri="{FF2B5EF4-FFF2-40B4-BE49-F238E27FC236}">
-                  <a16:creationId xmlns="" xmlns:a16="http://schemas.microsoft.com/office/drawing/2014/main" id="{A3105853-A7A0-D1B0-E804-E16F8719EB22}"/>
+                  <a16:creationId xmlns:a16="http://schemas.microsoft.com/office/drawing/2014/main" xmlns="" id="{A3105853-A7A0-D1B0-E804-E16F8719EB22}"/>
                 </a:ext>
               </a:extLst>
             </p:cNvPr>
@@ -37796,7 +37732,7 @@
             <p:cNvPr id="7" name="Oval 6">
               <a:extLst>
                 <a:ext uri="{FF2B5EF4-FFF2-40B4-BE49-F238E27FC236}">
-                  <a16:creationId xmlns="" xmlns:a16="http://schemas.microsoft.com/office/drawing/2014/main" id="{C85BCD91-BEA1-D315-1AFF-C4D462340658}"/>
+                  <a16:creationId xmlns:a16="http://schemas.microsoft.com/office/drawing/2014/main" xmlns="" id="{C85BCD91-BEA1-D315-1AFF-C4D462340658}"/>
                 </a:ext>
               </a:extLst>
             </p:cNvPr>
@@ -37855,7 +37791,7 @@
             <p:cNvPr id="8" name="Oval 7">
               <a:extLst>
                 <a:ext uri="{FF2B5EF4-FFF2-40B4-BE49-F238E27FC236}">
-                  <a16:creationId xmlns="" xmlns:a16="http://schemas.microsoft.com/office/drawing/2014/main" id="{3C78C853-57D8-361B-38D9-275171E255A7}"/>
+                  <a16:creationId xmlns:a16="http://schemas.microsoft.com/office/drawing/2014/main" xmlns="" id="{3C78C853-57D8-361B-38D9-275171E255A7}"/>
                 </a:ext>
               </a:extLst>
             </p:cNvPr>
@@ -37914,7 +37850,7 @@
             <p:cNvPr id="9" name="Oval 8">
               <a:extLst>
                 <a:ext uri="{FF2B5EF4-FFF2-40B4-BE49-F238E27FC236}">
-                  <a16:creationId xmlns="" xmlns:a16="http://schemas.microsoft.com/office/drawing/2014/main" id="{A7006BEF-5985-2947-A8DB-080FCA0DB0AE}"/>
+                  <a16:creationId xmlns:a16="http://schemas.microsoft.com/office/drawing/2014/main" xmlns="" id="{A7006BEF-5985-2947-A8DB-080FCA0DB0AE}"/>
                 </a:ext>
               </a:extLst>
             </p:cNvPr>
@@ -37973,7 +37909,7 @@
             <p:cNvPr id="10" name="Oval 9">
               <a:extLst>
                 <a:ext uri="{FF2B5EF4-FFF2-40B4-BE49-F238E27FC236}">
-                  <a16:creationId xmlns="" xmlns:a16="http://schemas.microsoft.com/office/drawing/2014/main" id="{A9D7F9AC-6700-182B-5739-F8E9C7F81CC4}"/>
+                  <a16:creationId xmlns:a16="http://schemas.microsoft.com/office/drawing/2014/main" xmlns="" id="{A9D7F9AC-6700-182B-5739-F8E9C7F81CC4}"/>
                 </a:ext>
               </a:extLst>
             </p:cNvPr>
@@ -38032,7 +37968,7 @@
             <p:cNvPr id="11" name="Oval 10">
               <a:extLst>
                 <a:ext uri="{FF2B5EF4-FFF2-40B4-BE49-F238E27FC236}">
-                  <a16:creationId xmlns="" xmlns:a16="http://schemas.microsoft.com/office/drawing/2014/main" id="{756DB894-78D6-5F8A-E04B-F5EF82585336}"/>
+                  <a16:creationId xmlns:a16="http://schemas.microsoft.com/office/drawing/2014/main" xmlns="" id="{756DB894-78D6-5F8A-E04B-F5EF82585336}"/>
                 </a:ext>
               </a:extLst>
             </p:cNvPr>
@@ -38091,7 +38027,7 @@
             <p:cNvPr id="12" name="Oval 11">
               <a:extLst>
                 <a:ext uri="{FF2B5EF4-FFF2-40B4-BE49-F238E27FC236}">
-                  <a16:creationId xmlns="" xmlns:a16="http://schemas.microsoft.com/office/drawing/2014/main" id="{7078A844-2503-2387-47F4-3ABDC822E4BE}"/>
+                  <a16:creationId xmlns:a16="http://schemas.microsoft.com/office/drawing/2014/main" xmlns="" id="{7078A844-2503-2387-47F4-3ABDC822E4BE}"/>
                 </a:ext>
               </a:extLst>
             </p:cNvPr>
@@ -38150,7 +38086,7 @@
             <p:cNvPr id="13" name="Oval 12">
               <a:extLst>
                 <a:ext uri="{FF2B5EF4-FFF2-40B4-BE49-F238E27FC236}">
-                  <a16:creationId xmlns="" xmlns:a16="http://schemas.microsoft.com/office/drawing/2014/main" id="{01BA2AF2-E499-7667-6D1F-F78683E54B67}"/>
+                  <a16:creationId xmlns:a16="http://schemas.microsoft.com/office/drawing/2014/main" xmlns="" id="{01BA2AF2-E499-7667-6D1F-F78683E54B67}"/>
                 </a:ext>
               </a:extLst>
             </p:cNvPr>
@@ -38209,7 +38145,7 @@
             <p:cNvPr id="14" name="Oval 13">
               <a:extLst>
                 <a:ext uri="{FF2B5EF4-FFF2-40B4-BE49-F238E27FC236}">
-                  <a16:creationId xmlns="" xmlns:a16="http://schemas.microsoft.com/office/drawing/2014/main" id="{2FBB071C-C6AD-063C-8885-C5D44BA0770C}"/>
+                  <a16:creationId xmlns:a16="http://schemas.microsoft.com/office/drawing/2014/main" xmlns="" id="{2FBB071C-C6AD-063C-8885-C5D44BA0770C}"/>
                 </a:ext>
               </a:extLst>
             </p:cNvPr>
@@ -38268,7 +38204,7 @@
             <p:cNvPr id="15" name="Oval 14">
               <a:extLst>
                 <a:ext uri="{FF2B5EF4-FFF2-40B4-BE49-F238E27FC236}">
-                  <a16:creationId xmlns="" xmlns:a16="http://schemas.microsoft.com/office/drawing/2014/main" id="{56BC981B-25F1-97FD-5B02-F34A079C043F}"/>
+                  <a16:creationId xmlns:a16="http://schemas.microsoft.com/office/drawing/2014/main" xmlns="" id="{56BC981B-25F1-97FD-5B02-F34A079C043F}"/>
                 </a:ext>
               </a:extLst>
             </p:cNvPr>
@@ -38327,7 +38263,7 @@
             <p:cNvPr id="16" name="Oval 15">
               <a:extLst>
                 <a:ext uri="{FF2B5EF4-FFF2-40B4-BE49-F238E27FC236}">
-                  <a16:creationId xmlns="" xmlns:a16="http://schemas.microsoft.com/office/drawing/2014/main" id="{3E6612EF-8361-2771-846F-0C7FAD70E44A}"/>
+                  <a16:creationId xmlns:a16="http://schemas.microsoft.com/office/drawing/2014/main" xmlns="" id="{3E6612EF-8361-2771-846F-0C7FAD70E44A}"/>
                 </a:ext>
               </a:extLst>
             </p:cNvPr>
@@ -38386,7 +38322,7 @@
             <p:cNvPr id="17" name="Oval 16">
               <a:extLst>
                 <a:ext uri="{FF2B5EF4-FFF2-40B4-BE49-F238E27FC236}">
-                  <a16:creationId xmlns="" xmlns:a16="http://schemas.microsoft.com/office/drawing/2014/main" id="{A9C403DC-8592-C8C7-18E9-C66B5ABFE571}"/>
+                  <a16:creationId xmlns:a16="http://schemas.microsoft.com/office/drawing/2014/main" xmlns="" id="{A9C403DC-8592-C8C7-18E9-C66B5ABFE571}"/>
                 </a:ext>
               </a:extLst>
             </p:cNvPr>
@@ -38445,7 +38381,7 @@
             <p:cNvPr id="18" name="Oval 17">
               <a:extLst>
                 <a:ext uri="{FF2B5EF4-FFF2-40B4-BE49-F238E27FC236}">
-                  <a16:creationId xmlns="" xmlns:a16="http://schemas.microsoft.com/office/drawing/2014/main" id="{D9C5ADF1-1839-8686-C4D8-5AB2D63997B1}"/>
+                  <a16:creationId xmlns:a16="http://schemas.microsoft.com/office/drawing/2014/main" xmlns="" id="{D9C5ADF1-1839-8686-C4D8-5AB2D63997B1}"/>
                 </a:ext>
               </a:extLst>
             </p:cNvPr>
@@ -38504,7 +38440,7 @@
             <p:cNvPr id="19" name="Oval 18">
               <a:extLst>
                 <a:ext uri="{FF2B5EF4-FFF2-40B4-BE49-F238E27FC236}">
-                  <a16:creationId xmlns="" xmlns:a16="http://schemas.microsoft.com/office/drawing/2014/main" id="{09801E70-EE29-216B-576A-53F7D3FC63B0}"/>
+                  <a16:creationId xmlns:a16="http://schemas.microsoft.com/office/drawing/2014/main" xmlns="" id="{09801E70-EE29-216B-576A-53F7D3FC63B0}"/>
                 </a:ext>
               </a:extLst>
             </p:cNvPr>
@@ -38563,7 +38499,7 @@
             <p:cNvPr id="20" name="Oval 19">
               <a:extLst>
                 <a:ext uri="{FF2B5EF4-FFF2-40B4-BE49-F238E27FC236}">
-                  <a16:creationId xmlns="" xmlns:a16="http://schemas.microsoft.com/office/drawing/2014/main" id="{94F6199F-FA28-EB1B-E382-874057A159DE}"/>
+                  <a16:creationId xmlns:a16="http://schemas.microsoft.com/office/drawing/2014/main" xmlns="" id="{94F6199F-FA28-EB1B-E382-874057A159DE}"/>
                 </a:ext>
               </a:extLst>
             </p:cNvPr>
@@ -38622,7 +38558,7 @@
             <p:cNvPr id="21" name="Oval 20">
               <a:extLst>
                 <a:ext uri="{FF2B5EF4-FFF2-40B4-BE49-F238E27FC236}">
-                  <a16:creationId xmlns="" xmlns:a16="http://schemas.microsoft.com/office/drawing/2014/main" id="{BAFFEE12-F7A8-D2C2-85AF-7B2739B85367}"/>
+                  <a16:creationId xmlns:a16="http://schemas.microsoft.com/office/drawing/2014/main" xmlns="" id="{BAFFEE12-F7A8-D2C2-85AF-7B2739B85367}"/>
                 </a:ext>
               </a:extLst>
             </p:cNvPr>
@@ -38681,7 +38617,7 @@
             <p:cNvPr id="22" name="Oval 21">
               <a:extLst>
                 <a:ext uri="{FF2B5EF4-FFF2-40B4-BE49-F238E27FC236}">
-                  <a16:creationId xmlns="" xmlns:a16="http://schemas.microsoft.com/office/drawing/2014/main" id="{C7E8D64B-98DA-CC30-DD2E-6787D99885FA}"/>
+                  <a16:creationId xmlns:a16="http://schemas.microsoft.com/office/drawing/2014/main" xmlns="" id="{C7E8D64B-98DA-CC30-DD2E-6787D99885FA}"/>
                 </a:ext>
               </a:extLst>
             </p:cNvPr>
@@ -38740,7 +38676,7 @@
             <p:cNvPr id="23" name="Oval 22">
               <a:extLst>
                 <a:ext uri="{FF2B5EF4-FFF2-40B4-BE49-F238E27FC236}">
-                  <a16:creationId xmlns="" xmlns:a16="http://schemas.microsoft.com/office/drawing/2014/main" id="{D34C8711-929B-29BF-23CC-6D755EFE2AFD}"/>
+                  <a16:creationId xmlns:a16="http://schemas.microsoft.com/office/drawing/2014/main" xmlns="" id="{D34C8711-929B-29BF-23CC-6D755EFE2AFD}"/>
                 </a:ext>
               </a:extLst>
             </p:cNvPr>
@@ -38799,7 +38735,7 @@
             <p:cNvPr id="24" name="Oval 23">
               <a:extLst>
                 <a:ext uri="{FF2B5EF4-FFF2-40B4-BE49-F238E27FC236}">
-                  <a16:creationId xmlns="" xmlns:a16="http://schemas.microsoft.com/office/drawing/2014/main" id="{566E8BB7-DB45-8379-D052-A1D73E4AC287}"/>
+                  <a16:creationId xmlns:a16="http://schemas.microsoft.com/office/drawing/2014/main" xmlns="" id="{566E8BB7-DB45-8379-D052-A1D73E4AC287}"/>
                 </a:ext>
               </a:extLst>
             </p:cNvPr>
@@ -38858,7 +38794,7 @@
             <p:cNvPr id="25" name="Oval 24">
               <a:extLst>
                 <a:ext uri="{FF2B5EF4-FFF2-40B4-BE49-F238E27FC236}">
-                  <a16:creationId xmlns="" xmlns:a16="http://schemas.microsoft.com/office/drawing/2014/main" id="{895F11AF-FD1D-66D6-E360-4F5BB2D5F76C}"/>
+                  <a16:creationId xmlns:a16="http://schemas.microsoft.com/office/drawing/2014/main" xmlns="" id="{895F11AF-FD1D-66D6-E360-4F5BB2D5F76C}"/>
                 </a:ext>
               </a:extLst>
             </p:cNvPr>
@@ -38917,7 +38853,7 @@
             <p:cNvPr id="26" name="Oval 25">
               <a:extLst>
                 <a:ext uri="{FF2B5EF4-FFF2-40B4-BE49-F238E27FC236}">
-                  <a16:creationId xmlns="" xmlns:a16="http://schemas.microsoft.com/office/drawing/2014/main" id="{5F26DBF0-A21B-C476-70B1-5055594023B4}"/>
+                  <a16:creationId xmlns:a16="http://schemas.microsoft.com/office/drawing/2014/main" xmlns="" id="{5F26DBF0-A21B-C476-70B1-5055594023B4}"/>
                 </a:ext>
               </a:extLst>
             </p:cNvPr>
@@ -38976,7 +38912,7 @@
             <p:cNvPr id="27" name="Oval 26">
               <a:extLst>
                 <a:ext uri="{FF2B5EF4-FFF2-40B4-BE49-F238E27FC236}">
-                  <a16:creationId xmlns="" xmlns:a16="http://schemas.microsoft.com/office/drawing/2014/main" id="{6AA146A5-4396-52D4-3701-1D4F499B7916}"/>
+                  <a16:creationId xmlns:a16="http://schemas.microsoft.com/office/drawing/2014/main" xmlns="" id="{6AA146A5-4396-52D4-3701-1D4F499B7916}"/>
                 </a:ext>
               </a:extLst>
             </p:cNvPr>
@@ -39035,7 +38971,7 @@
             <p:cNvPr id="28" name="Oval 27">
               <a:extLst>
                 <a:ext uri="{FF2B5EF4-FFF2-40B4-BE49-F238E27FC236}">
-                  <a16:creationId xmlns="" xmlns:a16="http://schemas.microsoft.com/office/drawing/2014/main" id="{55BDF6F5-CC01-4786-7FDD-D37775375C2C}"/>
+                  <a16:creationId xmlns:a16="http://schemas.microsoft.com/office/drawing/2014/main" xmlns="" id="{55BDF6F5-CC01-4786-7FDD-D37775375C2C}"/>
                 </a:ext>
               </a:extLst>
             </p:cNvPr>
@@ -39094,7 +39030,7 @@
             <p:cNvPr id="29" name="Oval 28">
               <a:extLst>
                 <a:ext uri="{FF2B5EF4-FFF2-40B4-BE49-F238E27FC236}">
-                  <a16:creationId xmlns="" xmlns:a16="http://schemas.microsoft.com/office/drawing/2014/main" id="{82342B15-C314-6A76-53A3-31168D242757}"/>
+                  <a16:creationId xmlns:a16="http://schemas.microsoft.com/office/drawing/2014/main" xmlns="" id="{82342B15-C314-6A76-53A3-31168D242757}"/>
                 </a:ext>
               </a:extLst>
             </p:cNvPr>
@@ -39153,7 +39089,7 @@
             <p:cNvPr id="30" name="Arc 29">
               <a:extLst>
                 <a:ext uri="{FF2B5EF4-FFF2-40B4-BE49-F238E27FC236}">
-                  <a16:creationId xmlns="" xmlns:a16="http://schemas.microsoft.com/office/drawing/2014/main" id="{9C568D2A-A596-CC24-496F-4A66C8262D31}"/>
+                  <a16:creationId xmlns:a16="http://schemas.microsoft.com/office/drawing/2014/main" xmlns="" id="{9C568D2A-A596-CC24-496F-4A66C8262D31}"/>
                 </a:ext>
               </a:extLst>
             </p:cNvPr>
@@ -39205,7 +39141,7 @@
             <p:cNvPr id="31" name="Arc 30">
               <a:extLst>
                 <a:ext uri="{FF2B5EF4-FFF2-40B4-BE49-F238E27FC236}">
-                  <a16:creationId xmlns="" xmlns:a16="http://schemas.microsoft.com/office/drawing/2014/main" id="{5C88D0D8-45C4-B401-23E2-EF2210F10573}"/>
+                  <a16:creationId xmlns:a16="http://schemas.microsoft.com/office/drawing/2014/main" xmlns="" id="{5C88D0D8-45C4-B401-23E2-EF2210F10573}"/>
                 </a:ext>
               </a:extLst>
             </p:cNvPr>
@@ -39257,7 +39193,7 @@
             <p:cNvPr id="32" name="Arc 31">
               <a:extLst>
                 <a:ext uri="{FF2B5EF4-FFF2-40B4-BE49-F238E27FC236}">
-                  <a16:creationId xmlns="" xmlns:a16="http://schemas.microsoft.com/office/drawing/2014/main" id="{864FC80B-C2D4-ABC3-BF5F-9E62C6D20F68}"/>
+                  <a16:creationId xmlns:a16="http://schemas.microsoft.com/office/drawing/2014/main" xmlns="" id="{864FC80B-C2D4-ABC3-BF5F-9E62C6D20F68}"/>
                 </a:ext>
               </a:extLst>
             </p:cNvPr>
@@ -39309,7 +39245,7 @@
             <p:cNvPr id="33" name="Arc 32">
               <a:extLst>
                 <a:ext uri="{FF2B5EF4-FFF2-40B4-BE49-F238E27FC236}">
-                  <a16:creationId xmlns="" xmlns:a16="http://schemas.microsoft.com/office/drawing/2014/main" id="{1914AAE3-A686-E4D4-CDDF-1D98969ACAAA}"/>
+                  <a16:creationId xmlns:a16="http://schemas.microsoft.com/office/drawing/2014/main" xmlns="" id="{1914AAE3-A686-E4D4-CDDF-1D98969ACAAA}"/>
                 </a:ext>
               </a:extLst>
             </p:cNvPr>
@@ -39361,7 +39297,7 @@
             <p:cNvPr id="34" name="Arc 33">
               <a:extLst>
                 <a:ext uri="{FF2B5EF4-FFF2-40B4-BE49-F238E27FC236}">
-                  <a16:creationId xmlns="" xmlns:a16="http://schemas.microsoft.com/office/drawing/2014/main" id="{D9DBFC40-9D17-7A92-4D81-40778C988A6C}"/>
+                  <a16:creationId xmlns:a16="http://schemas.microsoft.com/office/drawing/2014/main" xmlns="" id="{D9DBFC40-9D17-7A92-4D81-40778C988A6C}"/>
                 </a:ext>
               </a:extLst>
             </p:cNvPr>
@@ -39413,7 +39349,7 @@
             <p:cNvPr id="35" name="Arc 34">
               <a:extLst>
                 <a:ext uri="{FF2B5EF4-FFF2-40B4-BE49-F238E27FC236}">
-                  <a16:creationId xmlns="" xmlns:a16="http://schemas.microsoft.com/office/drawing/2014/main" id="{BC549333-843D-6579-C8FD-740B2BD4FB54}"/>
+                  <a16:creationId xmlns:a16="http://schemas.microsoft.com/office/drawing/2014/main" xmlns="" id="{BC549333-843D-6579-C8FD-740B2BD4FB54}"/>
                 </a:ext>
               </a:extLst>
             </p:cNvPr>
@@ -39465,7 +39401,7 @@
             <p:cNvPr id="36" name="Arc 35">
               <a:extLst>
                 <a:ext uri="{FF2B5EF4-FFF2-40B4-BE49-F238E27FC236}">
-                  <a16:creationId xmlns="" xmlns:a16="http://schemas.microsoft.com/office/drawing/2014/main" id="{71974448-2876-D9EC-1E63-37B1C8F13A84}"/>
+                  <a16:creationId xmlns:a16="http://schemas.microsoft.com/office/drawing/2014/main" xmlns="" id="{71974448-2876-D9EC-1E63-37B1C8F13A84}"/>
                 </a:ext>
               </a:extLst>
             </p:cNvPr>
@@ -39517,7 +39453,7 @@
             <p:cNvPr id="37" name="Arc 36">
               <a:extLst>
                 <a:ext uri="{FF2B5EF4-FFF2-40B4-BE49-F238E27FC236}">
-                  <a16:creationId xmlns="" xmlns:a16="http://schemas.microsoft.com/office/drawing/2014/main" id="{12C0B9A3-C41B-A65E-B90A-3DE1AE851F4B}"/>
+                  <a16:creationId xmlns:a16="http://schemas.microsoft.com/office/drawing/2014/main" xmlns="" id="{12C0B9A3-C41B-A65E-B90A-3DE1AE851F4B}"/>
                 </a:ext>
               </a:extLst>
             </p:cNvPr>
@@ -39569,7 +39505,7 @@
             <p:cNvPr id="38" name="Arc 37">
               <a:extLst>
                 <a:ext uri="{FF2B5EF4-FFF2-40B4-BE49-F238E27FC236}">
-                  <a16:creationId xmlns="" xmlns:a16="http://schemas.microsoft.com/office/drawing/2014/main" id="{F8D516B0-E272-52CC-E83D-F9D301FBD0D7}"/>
+                  <a16:creationId xmlns:a16="http://schemas.microsoft.com/office/drawing/2014/main" xmlns="" id="{F8D516B0-E272-52CC-E83D-F9D301FBD0D7}"/>
                 </a:ext>
               </a:extLst>
             </p:cNvPr>
@@ -39621,7 +39557,7 @@
             <p:cNvPr id="39" name="Arc 38">
               <a:extLst>
                 <a:ext uri="{FF2B5EF4-FFF2-40B4-BE49-F238E27FC236}">
-                  <a16:creationId xmlns="" xmlns:a16="http://schemas.microsoft.com/office/drawing/2014/main" id="{8BBA4DBE-F78F-D804-278F-611DE55A528F}"/>
+                  <a16:creationId xmlns:a16="http://schemas.microsoft.com/office/drawing/2014/main" xmlns="" id="{8BBA4DBE-F78F-D804-278F-611DE55A528F}"/>
                 </a:ext>
               </a:extLst>
             </p:cNvPr>
@@ -39673,7 +39609,7 @@
             <p:cNvPr id="40" name="Arc 39">
               <a:extLst>
                 <a:ext uri="{FF2B5EF4-FFF2-40B4-BE49-F238E27FC236}">
-                  <a16:creationId xmlns="" xmlns:a16="http://schemas.microsoft.com/office/drawing/2014/main" id="{900146BF-7F3B-F5F9-0AC4-B6547DFA418E}"/>
+                  <a16:creationId xmlns:a16="http://schemas.microsoft.com/office/drawing/2014/main" xmlns="" id="{900146BF-7F3B-F5F9-0AC4-B6547DFA418E}"/>
                 </a:ext>
               </a:extLst>
             </p:cNvPr>
@@ -39725,7 +39661,7 @@
             <p:cNvPr id="41" name="Arc 40">
               <a:extLst>
                 <a:ext uri="{FF2B5EF4-FFF2-40B4-BE49-F238E27FC236}">
-                  <a16:creationId xmlns="" xmlns:a16="http://schemas.microsoft.com/office/drawing/2014/main" id="{95D7AD24-E3F8-564B-E3AF-6ED99BD7EE4E}"/>
+                  <a16:creationId xmlns:a16="http://schemas.microsoft.com/office/drawing/2014/main" xmlns="" id="{95D7AD24-E3F8-564B-E3AF-6ED99BD7EE4E}"/>
                 </a:ext>
               </a:extLst>
             </p:cNvPr>
@@ -39777,7 +39713,7 @@
             <p:cNvPr id="42" name="Arc 41">
               <a:extLst>
                 <a:ext uri="{FF2B5EF4-FFF2-40B4-BE49-F238E27FC236}">
-                  <a16:creationId xmlns="" xmlns:a16="http://schemas.microsoft.com/office/drawing/2014/main" id="{7EFAD2B0-51AB-1AD0-A7DA-DDE4B9410EDD}"/>
+                  <a16:creationId xmlns:a16="http://schemas.microsoft.com/office/drawing/2014/main" xmlns="" id="{7EFAD2B0-51AB-1AD0-A7DA-DDE4B9410EDD}"/>
                 </a:ext>
               </a:extLst>
             </p:cNvPr>
@@ -39829,7 +39765,7 @@
             <p:cNvPr id="43" name="Arc 42">
               <a:extLst>
                 <a:ext uri="{FF2B5EF4-FFF2-40B4-BE49-F238E27FC236}">
-                  <a16:creationId xmlns="" xmlns:a16="http://schemas.microsoft.com/office/drawing/2014/main" id="{24AF0F6F-70BC-A08C-02D4-7E7ED3BEA15B}"/>
+                  <a16:creationId xmlns:a16="http://schemas.microsoft.com/office/drawing/2014/main" xmlns="" id="{24AF0F6F-70BC-A08C-02D4-7E7ED3BEA15B}"/>
                 </a:ext>
               </a:extLst>
             </p:cNvPr>
@@ -39881,7 +39817,7 @@
             <p:cNvPr id="44" name="Arc 43">
               <a:extLst>
                 <a:ext uri="{FF2B5EF4-FFF2-40B4-BE49-F238E27FC236}">
-                  <a16:creationId xmlns="" xmlns:a16="http://schemas.microsoft.com/office/drawing/2014/main" id="{73A2F895-4FA7-DCCA-40B1-3EBC072A4F60}"/>
+                  <a16:creationId xmlns:a16="http://schemas.microsoft.com/office/drawing/2014/main" xmlns="" id="{73A2F895-4FA7-DCCA-40B1-3EBC072A4F60}"/>
                 </a:ext>
               </a:extLst>
             </p:cNvPr>
@@ -39933,7 +39869,7 @@
             <p:cNvPr id="45" name="Arc 44">
               <a:extLst>
                 <a:ext uri="{FF2B5EF4-FFF2-40B4-BE49-F238E27FC236}">
-                  <a16:creationId xmlns="" xmlns:a16="http://schemas.microsoft.com/office/drawing/2014/main" id="{E64F6B66-CE96-C528-DEFF-4DBF3EC29FE6}"/>
+                  <a16:creationId xmlns:a16="http://schemas.microsoft.com/office/drawing/2014/main" xmlns="" id="{E64F6B66-CE96-C528-DEFF-4DBF3EC29FE6}"/>
                 </a:ext>
               </a:extLst>
             </p:cNvPr>
@@ -39985,7 +39921,7 @@
             <p:cNvPr id="46" name="Arc 45">
               <a:extLst>
                 <a:ext uri="{FF2B5EF4-FFF2-40B4-BE49-F238E27FC236}">
-                  <a16:creationId xmlns="" xmlns:a16="http://schemas.microsoft.com/office/drawing/2014/main" id="{E67E0D98-F211-EE8C-CFCF-1A1A4624FEB9}"/>
+                  <a16:creationId xmlns:a16="http://schemas.microsoft.com/office/drawing/2014/main" xmlns="" id="{E67E0D98-F211-EE8C-CFCF-1A1A4624FEB9}"/>
                 </a:ext>
               </a:extLst>
             </p:cNvPr>
@@ -40037,7 +39973,7 @@
             <p:cNvPr id="47" name="Arc 46">
               <a:extLst>
                 <a:ext uri="{FF2B5EF4-FFF2-40B4-BE49-F238E27FC236}">
-                  <a16:creationId xmlns="" xmlns:a16="http://schemas.microsoft.com/office/drawing/2014/main" id="{E6789031-055B-9885-2997-DB229ED3EE3A}"/>
+                  <a16:creationId xmlns:a16="http://schemas.microsoft.com/office/drawing/2014/main" xmlns="" id="{E6789031-055B-9885-2997-DB229ED3EE3A}"/>
                 </a:ext>
               </a:extLst>
             </p:cNvPr>
@@ -40089,7 +40025,7 @@
             <p:cNvPr id="48" name="Arc 47">
               <a:extLst>
                 <a:ext uri="{FF2B5EF4-FFF2-40B4-BE49-F238E27FC236}">
-                  <a16:creationId xmlns="" xmlns:a16="http://schemas.microsoft.com/office/drawing/2014/main" id="{7FF42BDD-8EB7-68D0-1105-18F05D79910D}"/>
+                  <a16:creationId xmlns:a16="http://schemas.microsoft.com/office/drawing/2014/main" xmlns="" id="{7FF42BDD-8EB7-68D0-1105-18F05D79910D}"/>
                 </a:ext>
               </a:extLst>
             </p:cNvPr>
@@ -40141,7 +40077,7 @@
             <p:cNvPr id="49" name="Arc 48">
               <a:extLst>
                 <a:ext uri="{FF2B5EF4-FFF2-40B4-BE49-F238E27FC236}">
-                  <a16:creationId xmlns="" xmlns:a16="http://schemas.microsoft.com/office/drawing/2014/main" id="{A870A998-EDFA-03FD-E005-46B6DF1C6C18}"/>
+                  <a16:creationId xmlns:a16="http://schemas.microsoft.com/office/drawing/2014/main" xmlns="" id="{A870A998-EDFA-03FD-E005-46B6DF1C6C18}"/>
                 </a:ext>
               </a:extLst>
             </p:cNvPr>
@@ -40193,7 +40129,7 @@
             <p:cNvPr id="50" name="Arc 49">
               <a:extLst>
                 <a:ext uri="{FF2B5EF4-FFF2-40B4-BE49-F238E27FC236}">
-                  <a16:creationId xmlns="" xmlns:a16="http://schemas.microsoft.com/office/drawing/2014/main" id="{EAC34CF5-97B7-9F9A-9898-D367C449AFFD}"/>
+                  <a16:creationId xmlns:a16="http://schemas.microsoft.com/office/drawing/2014/main" xmlns="" id="{EAC34CF5-97B7-9F9A-9898-D367C449AFFD}"/>
                 </a:ext>
               </a:extLst>
             </p:cNvPr>
@@ -40245,7 +40181,7 @@
             <p:cNvPr id="51" name="Arc 50">
               <a:extLst>
                 <a:ext uri="{FF2B5EF4-FFF2-40B4-BE49-F238E27FC236}">
-                  <a16:creationId xmlns="" xmlns:a16="http://schemas.microsoft.com/office/drawing/2014/main" id="{1D600C30-2188-BA12-6B22-19946D2B0FFB}"/>
+                  <a16:creationId xmlns:a16="http://schemas.microsoft.com/office/drawing/2014/main" xmlns="" id="{1D600C30-2188-BA12-6B22-19946D2B0FFB}"/>
                 </a:ext>
               </a:extLst>
             </p:cNvPr>
@@ -40297,7 +40233,7 @@
             <p:cNvPr id="52" name="Arc 51">
               <a:extLst>
                 <a:ext uri="{FF2B5EF4-FFF2-40B4-BE49-F238E27FC236}">
-                  <a16:creationId xmlns="" xmlns:a16="http://schemas.microsoft.com/office/drawing/2014/main" id="{5E1DFF45-BE03-DE58-06E7-F844E2DB3133}"/>
+                  <a16:creationId xmlns:a16="http://schemas.microsoft.com/office/drawing/2014/main" xmlns="" id="{5E1DFF45-BE03-DE58-06E7-F844E2DB3133}"/>
                 </a:ext>
               </a:extLst>
             </p:cNvPr>
@@ -40349,7 +40285,7 @@
             <p:cNvPr id="53" name="Arc 52">
               <a:extLst>
                 <a:ext uri="{FF2B5EF4-FFF2-40B4-BE49-F238E27FC236}">
-                  <a16:creationId xmlns="" xmlns:a16="http://schemas.microsoft.com/office/drawing/2014/main" id="{31169CEB-4133-A73E-3C11-4B42932B2FDB}"/>
+                  <a16:creationId xmlns:a16="http://schemas.microsoft.com/office/drawing/2014/main" xmlns="" id="{31169CEB-4133-A73E-3C11-4B42932B2FDB}"/>
                 </a:ext>
               </a:extLst>
             </p:cNvPr>
@@ -40402,7 +40338,7 @@
           <p:cNvPr id="54" name="Rectangle 53">
             <a:extLst>
               <a:ext uri="{FF2B5EF4-FFF2-40B4-BE49-F238E27FC236}">
-                <a16:creationId xmlns="" xmlns:a16="http://schemas.microsoft.com/office/drawing/2014/main" id="{DC3C869A-D899-4CA2-01A6-49EFC3BFD634}"/>
+                <a16:creationId xmlns:a16="http://schemas.microsoft.com/office/drawing/2014/main" xmlns="" id="{DC3C869A-D899-4CA2-01A6-49EFC3BFD634}"/>
               </a:ext>
             </a:extLst>
           </p:cNvPr>

--- a/tracepass.pptx
+++ b/tracepass.pptx
@@ -4,6 +4,9 @@
   <p:sldMasterIdLst>
     <p:sldMasterId id="2147483648" r:id="rId1"/>
   </p:sldMasterIdLst>
+  <p:notesMasterIdLst>
+    <p:notesMasterId r:id="rId10"/>
+  </p:notesMasterIdLst>
   <p:sldIdLst>
     <p:sldId id="330" r:id="rId2"/>
     <p:sldId id="331" r:id="rId3"/>
@@ -148,6 +151,440 @@
 </pc:chgInfo>
 </file>
 
+<file path=ppt/notesMasters/notesMaster1.xml><?xml version="1.0" encoding="utf-8"?>
+<p:notesMaster xmlns:a="http://schemas.openxmlformats.org/drawingml/2006/main" xmlns:r="http://schemas.openxmlformats.org/officeDocument/2006/relationships" xmlns:p="http://schemas.openxmlformats.org/presentationml/2006/main">
+  <p:cSld>
+    <p:bg>
+      <p:bgRef idx="1001">
+        <a:schemeClr val="bg1"/>
+      </p:bgRef>
+    </p:bg>
+    <p:spTree>
+      <p:nvGrpSpPr>
+        <p:cNvPr id="1" name=""/>
+        <p:cNvGrpSpPr/>
+        <p:nvPr/>
+      </p:nvGrpSpPr>
+      <p:grpSpPr>
+        <a:xfrm>
+          <a:off x="0" y="0"/>
+          <a:ext cx="0" cy="0"/>
+          <a:chOff x="0" y="0"/>
+          <a:chExt cx="0" cy="0"/>
+        </a:xfrm>
+      </p:grpSpPr>
+      <p:sp>
+        <p:nvSpPr>
+          <p:cNvPr id="2" name="Header Placeholder 1"/>
+          <p:cNvSpPr>
+            <a:spLocks noGrp="1"/>
+          </p:cNvSpPr>
+          <p:nvPr>
+            <p:ph type="hdr" sz="quarter"/>
+          </p:nvPr>
+        </p:nvSpPr>
+        <p:spPr>
+          <a:xfrm>
+            <a:off x="0" y="0"/>
+            <a:ext cx="2971800" cy="458788"/>
+          </a:xfrm>
+          <a:prstGeom prst="rect">
+            <a:avLst/>
+          </a:prstGeom>
+        </p:spPr>
+        <p:txBody>
+          <a:bodyPr vert="horz" lIns="91440" tIns="45720" rIns="91440" bIns="45720" rtlCol="0"/>
+          <a:lstStyle>
+            <a:lvl1pPr algn="l">
+              <a:defRPr sz="1200"/>
+            </a:lvl1pPr>
+          </a:lstStyle>
+          <a:p>
+            <a:endParaRPr lang="en-US"/>
+          </a:p>
+        </p:txBody>
+      </p:sp>
+      <p:sp>
+        <p:nvSpPr>
+          <p:cNvPr id="3" name="Date Placeholder 2"/>
+          <p:cNvSpPr>
+            <a:spLocks noGrp="1"/>
+          </p:cNvSpPr>
+          <p:nvPr>
+            <p:ph type="dt" idx="1"/>
+          </p:nvPr>
+        </p:nvSpPr>
+        <p:spPr>
+          <a:xfrm>
+            <a:off x="3884613" y="0"/>
+            <a:ext cx="2971800" cy="458788"/>
+          </a:xfrm>
+          <a:prstGeom prst="rect">
+            <a:avLst/>
+          </a:prstGeom>
+        </p:spPr>
+        <p:txBody>
+          <a:bodyPr vert="horz" lIns="91440" tIns="45720" rIns="91440" bIns="45720" rtlCol="0"/>
+          <a:lstStyle>
+            <a:lvl1pPr algn="r">
+              <a:defRPr sz="1200"/>
+            </a:lvl1pPr>
+          </a:lstStyle>
+          <a:p>
+            <a:fld id="{8E69999A-93CB-43F7-BDC4-6E65EC8986E1}" type="datetimeFigureOut">
+              <a:rPr lang="en-US" smtClean="0"/>
+              <a:t>9/5/2026</a:t>
+            </a:fld>
+            <a:endParaRPr lang="en-US"/>
+          </a:p>
+        </p:txBody>
+      </p:sp>
+      <p:sp>
+        <p:nvSpPr>
+          <p:cNvPr id="4" name="Slide Image Placeholder 3"/>
+          <p:cNvSpPr>
+            <a:spLocks noGrp="1" noRot="1" noChangeAspect="1"/>
+          </p:cNvSpPr>
+          <p:nvPr>
+            <p:ph type="sldImg" idx="2"/>
+          </p:nvPr>
+        </p:nvSpPr>
+        <p:spPr>
+          <a:xfrm>
+            <a:off x="685800" y="1143000"/>
+            <a:ext cx="5486400" cy="3086100"/>
+          </a:xfrm>
+          <a:prstGeom prst="rect">
+            <a:avLst/>
+          </a:prstGeom>
+          <a:noFill/>
+          <a:ln w="12700">
+            <a:solidFill>
+              <a:prstClr val="black"/>
+            </a:solidFill>
+          </a:ln>
+        </p:spPr>
+        <p:txBody>
+          <a:bodyPr vert="horz" lIns="91440" tIns="45720" rIns="91440" bIns="45720" rtlCol="0" anchor="ctr"/>
+          <a:lstStyle/>
+          <a:p>
+            <a:endParaRPr lang="en-US"/>
+          </a:p>
+        </p:txBody>
+      </p:sp>
+      <p:sp>
+        <p:nvSpPr>
+          <p:cNvPr id="5" name="Notes Placeholder 4"/>
+          <p:cNvSpPr>
+            <a:spLocks noGrp="1"/>
+          </p:cNvSpPr>
+          <p:nvPr>
+            <p:ph type="body" sz="quarter" idx="3"/>
+          </p:nvPr>
+        </p:nvSpPr>
+        <p:spPr>
+          <a:xfrm>
+            <a:off x="685800" y="4400550"/>
+            <a:ext cx="5486400" cy="3600450"/>
+          </a:xfrm>
+          <a:prstGeom prst="rect">
+            <a:avLst/>
+          </a:prstGeom>
+        </p:spPr>
+        <p:txBody>
+          <a:bodyPr vert="horz" lIns="91440" tIns="45720" rIns="91440" bIns="45720" rtlCol="0"/>
+          <a:lstStyle/>
+          <a:p>
+            <a:pPr lvl="0"/>
+            <a:r>
+              <a:rPr lang="en-US" smtClean="0"/>
+              <a:t>Click to edit Master text styles</a:t>
+            </a:r>
+          </a:p>
+          <a:p>
+            <a:pPr lvl="1"/>
+            <a:r>
+              <a:rPr lang="en-US" smtClean="0"/>
+              <a:t>Second level</a:t>
+            </a:r>
+          </a:p>
+          <a:p>
+            <a:pPr lvl="2"/>
+            <a:r>
+              <a:rPr lang="en-US" smtClean="0"/>
+              <a:t>Third level</a:t>
+            </a:r>
+          </a:p>
+          <a:p>
+            <a:pPr lvl="3"/>
+            <a:r>
+              <a:rPr lang="en-US" smtClean="0"/>
+              <a:t>Fourth level</a:t>
+            </a:r>
+          </a:p>
+          <a:p>
+            <a:pPr lvl="4"/>
+            <a:r>
+              <a:rPr lang="en-US" smtClean="0"/>
+              <a:t>Fifth level</a:t>
+            </a:r>
+            <a:endParaRPr lang="en-US"/>
+          </a:p>
+        </p:txBody>
+      </p:sp>
+      <p:sp>
+        <p:nvSpPr>
+          <p:cNvPr id="6" name="Footer Placeholder 5"/>
+          <p:cNvSpPr>
+            <a:spLocks noGrp="1"/>
+          </p:cNvSpPr>
+          <p:nvPr>
+            <p:ph type="ftr" sz="quarter" idx="4"/>
+          </p:nvPr>
+        </p:nvSpPr>
+        <p:spPr>
+          <a:xfrm>
+            <a:off x="0" y="8685213"/>
+            <a:ext cx="2971800" cy="458787"/>
+          </a:xfrm>
+          <a:prstGeom prst="rect">
+            <a:avLst/>
+          </a:prstGeom>
+        </p:spPr>
+        <p:txBody>
+          <a:bodyPr vert="horz" lIns="91440" tIns="45720" rIns="91440" bIns="45720" rtlCol="0" anchor="b"/>
+          <a:lstStyle>
+            <a:lvl1pPr algn="l">
+              <a:defRPr sz="1200"/>
+            </a:lvl1pPr>
+          </a:lstStyle>
+          <a:p>
+            <a:endParaRPr lang="en-US"/>
+          </a:p>
+        </p:txBody>
+      </p:sp>
+      <p:sp>
+        <p:nvSpPr>
+          <p:cNvPr id="7" name="Slide Number Placeholder 6"/>
+          <p:cNvSpPr>
+            <a:spLocks noGrp="1"/>
+          </p:cNvSpPr>
+          <p:nvPr>
+            <p:ph type="sldNum" sz="quarter" idx="5"/>
+          </p:nvPr>
+        </p:nvSpPr>
+        <p:spPr>
+          <a:xfrm>
+            <a:off x="3884613" y="8685213"/>
+            <a:ext cx="2971800" cy="458787"/>
+          </a:xfrm>
+          <a:prstGeom prst="rect">
+            <a:avLst/>
+          </a:prstGeom>
+        </p:spPr>
+        <p:txBody>
+          <a:bodyPr vert="horz" lIns="91440" tIns="45720" rIns="91440" bIns="45720" rtlCol="0" anchor="b"/>
+          <a:lstStyle>
+            <a:lvl1pPr algn="r">
+              <a:defRPr sz="1200"/>
+            </a:lvl1pPr>
+          </a:lstStyle>
+          <a:p>
+            <a:fld id="{853FC8A2-45A0-4DB7-9A9B-2050DB4F56D3}" type="slidenum">
+              <a:rPr lang="en-US" smtClean="0"/>
+              <a:t>‹#›</a:t>
+            </a:fld>
+            <a:endParaRPr lang="en-US"/>
+          </a:p>
+        </p:txBody>
+      </p:sp>
+    </p:spTree>
+    <p:extLst>
+      <p:ext uri="{BB962C8B-B14F-4D97-AF65-F5344CB8AC3E}">
+        <p14:creationId xmlns:p14="http://schemas.microsoft.com/office/powerpoint/2010/main" val="3200828754"/>
+      </p:ext>
+    </p:extLst>
+  </p:cSld>
+  <p:clrMap bg1="lt1" tx1="dk1" bg2="lt2" tx2="dk2" accent1="accent1" accent2="accent2" accent3="accent3" accent4="accent4" accent5="accent5" accent6="accent6" hlink="hlink" folHlink="folHlink"/>
+  <p:notesStyle>
+    <a:lvl1pPr marL="0" algn="l" defTabSz="914400" rtl="0" eaLnBrk="1" latinLnBrk="0" hangingPunct="1">
+      <a:defRPr sz="1200" kern="1200">
+        <a:solidFill>
+          <a:schemeClr val="tx1"/>
+        </a:solidFill>
+        <a:latin typeface="+mn-lt"/>
+        <a:ea typeface="+mn-ea"/>
+        <a:cs typeface="+mn-cs"/>
+      </a:defRPr>
+    </a:lvl1pPr>
+    <a:lvl2pPr marL="457200" algn="l" defTabSz="914400" rtl="0" eaLnBrk="1" latinLnBrk="0" hangingPunct="1">
+      <a:defRPr sz="1200" kern="1200">
+        <a:solidFill>
+          <a:schemeClr val="tx1"/>
+        </a:solidFill>
+        <a:latin typeface="+mn-lt"/>
+        <a:ea typeface="+mn-ea"/>
+        <a:cs typeface="+mn-cs"/>
+      </a:defRPr>
+    </a:lvl2pPr>
+    <a:lvl3pPr marL="914400" algn="l" defTabSz="914400" rtl="0" eaLnBrk="1" latinLnBrk="0" hangingPunct="1">
+      <a:defRPr sz="1200" kern="1200">
+        <a:solidFill>
+          <a:schemeClr val="tx1"/>
+        </a:solidFill>
+        <a:latin typeface="+mn-lt"/>
+        <a:ea typeface="+mn-ea"/>
+        <a:cs typeface="+mn-cs"/>
+      </a:defRPr>
+    </a:lvl3pPr>
+    <a:lvl4pPr marL="1371600" algn="l" defTabSz="914400" rtl="0" eaLnBrk="1" latinLnBrk="0" hangingPunct="1">
+      <a:defRPr sz="1200" kern="1200">
+        <a:solidFill>
+          <a:schemeClr val="tx1"/>
+        </a:solidFill>
+        <a:latin typeface="+mn-lt"/>
+        <a:ea typeface="+mn-ea"/>
+        <a:cs typeface="+mn-cs"/>
+      </a:defRPr>
+    </a:lvl4pPr>
+    <a:lvl5pPr marL="1828800" algn="l" defTabSz="914400" rtl="0" eaLnBrk="1" latinLnBrk="0" hangingPunct="1">
+      <a:defRPr sz="1200" kern="1200">
+        <a:solidFill>
+          <a:schemeClr val="tx1"/>
+        </a:solidFill>
+        <a:latin typeface="+mn-lt"/>
+        <a:ea typeface="+mn-ea"/>
+        <a:cs typeface="+mn-cs"/>
+      </a:defRPr>
+    </a:lvl5pPr>
+    <a:lvl6pPr marL="2286000" algn="l" defTabSz="914400" rtl="0" eaLnBrk="1" latinLnBrk="0" hangingPunct="1">
+      <a:defRPr sz="1200" kern="1200">
+        <a:solidFill>
+          <a:schemeClr val="tx1"/>
+        </a:solidFill>
+        <a:latin typeface="+mn-lt"/>
+        <a:ea typeface="+mn-ea"/>
+        <a:cs typeface="+mn-cs"/>
+      </a:defRPr>
+    </a:lvl6pPr>
+    <a:lvl7pPr marL="2743200" algn="l" defTabSz="914400" rtl="0" eaLnBrk="1" latinLnBrk="0" hangingPunct="1">
+      <a:defRPr sz="1200" kern="1200">
+        <a:solidFill>
+          <a:schemeClr val="tx1"/>
+        </a:solidFill>
+        <a:latin typeface="+mn-lt"/>
+        <a:ea typeface="+mn-ea"/>
+        <a:cs typeface="+mn-cs"/>
+      </a:defRPr>
+    </a:lvl7pPr>
+    <a:lvl8pPr marL="3200400" algn="l" defTabSz="914400" rtl="0" eaLnBrk="1" latinLnBrk="0" hangingPunct="1">
+      <a:defRPr sz="1200" kern="1200">
+        <a:solidFill>
+          <a:schemeClr val="tx1"/>
+        </a:solidFill>
+        <a:latin typeface="+mn-lt"/>
+        <a:ea typeface="+mn-ea"/>
+        <a:cs typeface="+mn-cs"/>
+      </a:defRPr>
+    </a:lvl8pPr>
+    <a:lvl9pPr marL="3657600" algn="l" defTabSz="914400" rtl="0" eaLnBrk="1" latinLnBrk="0" hangingPunct="1">
+      <a:defRPr sz="1200" kern="1200">
+        <a:solidFill>
+          <a:schemeClr val="tx1"/>
+        </a:solidFill>
+        <a:latin typeface="+mn-lt"/>
+        <a:ea typeface="+mn-ea"/>
+        <a:cs typeface="+mn-cs"/>
+      </a:defRPr>
+    </a:lvl9pPr>
+  </p:notesStyle>
+</p:notesMaster>
+</file>
+
+<file path=ppt/notesSlides/notesSlide1.xml><?xml version="1.0" encoding="utf-8"?>
+<p:notes xmlns:a="http://schemas.openxmlformats.org/drawingml/2006/main" xmlns:r="http://schemas.openxmlformats.org/officeDocument/2006/relationships" xmlns:p="http://schemas.openxmlformats.org/presentationml/2006/main">
+  <p:cSld>
+    <p:spTree>
+      <p:nvGrpSpPr>
+        <p:cNvPr id="1" name=""/>
+        <p:cNvGrpSpPr/>
+        <p:nvPr/>
+      </p:nvGrpSpPr>
+      <p:grpSpPr>
+        <a:xfrm>
+          <a:off x="0" y="0"/>
+          <a:ext cx="0" cy="0"/>
+          <a:chOff x="0" y="0"/>
+          <a:chExt cx="0" cy="0"/>
+        </a:xfrm>
+      </p:grpSpPr>
+      <p:sp>
+        <p:nvSpPr>
+          <p:cNvPr id="2" name="Slide Image Placeholder 1"/>
+          <p:cNvSpPr>
+            <a:spLocks noGrp="1" noRot="1" noChangeAspect="1"/>
+          </p:cNvSpPr>
+          <p:nvPr>
+            <p:ph type="sldImg"/>
+          </p:nvPr>
+        </p:nvSpPr>
+        <p:spPr/>
+      </p:sp>
+      <p:sp>
+        <p:nvSpPr>
+          <p:cNvPr id="3" name="Notes Placeholder 2"/>
+          <p:cNvSpPr>
+            <a:spLocks noGrp="1"/>
+          </p:cNvSpPr>
+          <p:nvPr>
+            <p:ph type="body" idx="1"/>
+          </p:nvPr>
+        </p:nvSpPr>
+        <p:spPr/>
+        <p:txBody>
+          <a:bodyPr/>
+          <a:lstStyle/>
+          <a:p>
+            <a:endParaRPr lang="en-US" dirty="0"/>
+          </a:p>
+        </p:txBody>
+      </p:sp>
+      <p:sp>
+        <p:nvSpPr>
+          <p:cNvPr id="4" name="Slide Number Placeholder 3"/>
+          <p:cNvSpPr>
+            <a:spLocks noGrp="1"/>
+          </p:cNvSpPr>
+          <p:nvPr>
+            <p:ph type="sldNum" sz="quarter" idx="10"/>
+          </p:nvPr>
+        </p:nvSpPr>
+        <p:spPr/>
+        <p:txBody>
+          <a:bodyPr/>
+          <a:lstStyle/>
+          <a:p>
+            <a:fld id="{853FC8A2-45A0-4DB7-9A9B-2050DB4F56D3}" type="slidenum">
+              <a:rPr lang="en-US" smtClean="0"/>
+              <a:t>2</a:t>
+            </a:fld>
+            <a:endParaRPr lang="en-US"/>
+          </a:p>
+        </p:txBody>
+      </p:sp>
+    </p:spTree>
+    <p:extLst>
+      <p:ext uri="{BB962C8B-B14F-4D97-AF65-F5344CB8AC3E}">
+        <p14:creationId xmlns:p14="http://schemas.microsoft.com/office/powerpoint/2010/main" val="4260738880"/>
+      </p:ext>
+    </p:extLst>
+  </p:cSld>
+  <p:clrMapOvr>
+    <a:masterClrMapping/>
+  </p:clrMapOvr>
+</p:notes>
+</file>
+
 <file path=ppt/slideLayouts/slideLayout1.xml><?xml version="1.0" encoding="utf-8"?>
 <p:sldLayout xmlns:a="http://schemas.openxmlformats.org/drawingml/2006/main" xmlns:r="http://schemas.openxmlformats.org/officeDocument/2006/relationships" xmlns:p="http://schemas.openxmlformats.org/presentationml/2006/main" type="title" preserve="1">
   <p:cSld name="Title Slide">
@@ -170,7 +607,7 @@
           <p:cNvPr id="2" name="Title 1">
             <a:extLst>
               <a:ext uri="{FF2B5EF4-FFF2-40B4-BE49-F238E27FC236}">
-                <a16:creationId xmlns:a16="http://schemas.microsoft.com/office/drawing/2014/main" xmlns="" id="{2D081F58-7C2D-4280-BB97-0A02CA9618FF}"/>
+                <a16:creationId xmlns="" xmlns:a16="http://schemas.microsoft.com/office/drawing/2014/main" id="{2D081F58-7C2D-4280-BB97-0A02CA9618FF}"/>
               </a:ext>
             </a:extLst>
           </p:cNvPr>
@@ -207,7 +644,7 @@
           <p:cNvPr id="3" name="Subtitle 2">
             <a:extLst>
               <a:ext uri="{FF2B5EF4-FFF2-40B4-BE49-F238E27FC236}">
-                <a16:creationId xmlns:a16="http://schemas.microsoft.com/office/drawing/2014/main" xmlns="" id="{C564D7C6-120B-4306-94AC-AD858E1094DB}"/>
+                <a16:creationId xmlns="" xmlns:a16="http://schemas.microsoft.com/office/drawing/2014/main" id="{C564D7C6-120B-4306-94AC-AD858E1094DB}"/>
               </a:ext>
             </a:extLst>
           </p:cNvPr>
@@ -277,7 +714,7 @@
           <p:cNvPr id="4" name="Date Placeholder 3">
             <a:extLst>
               <a:ext uri="{FF2B5EF4-FFF2-40B4-BE49-F238E27FC236}">
-                <a16:creationId xmlns:a16="http://schemas.microsoft.com/office/drawing/2014/main" xmlns="" id="{A4664D8C-B0E2-49FB-BCE6-5B23FCDC5198}"/>
+                <a16:creationId xmlns="" xmlns:a16="http://schemas.microsoft.com/office/drawing/2014/main" id="{A4664D8C-B0E2-49FB-BCE6-5B23FCDC5198}"/>
               </a:ext>
             </a:extLst>
           </p:cNvPr>
@@ -295,7 +732,7 @@
           <a:p>
             <a:fld id="{18AECACE-579E-4476-86FD-0B80EC2CCB54}" type="datetimeFigureOut">
               <a:rPr lang="en-US" smtClean="0"/>
-              <a:t>8/30/2026</a:t>
+              <a:t>9/5/2026</a:t>
             </a:fld>
             <a:endParaRPr lang="en-US"/>
           </a:p>
@@ -306,7 +743,7 @@
           <p:cNvPr id="5" name="Footer Placeholder 4">
             <a:extLst>
               <a:ext uri="{FF2B5EF4-FFF2-40B4-BE49-F238E27FC236}">
-                <a16:creationId xmlns:a16="http://schemas.microsoft.com/office/drawing/2014/main" xmlns="" id="{84FEC4B8-DD6D-4502-8871-13C6151AF91E}"/>
+                <a16:creationId xmlns="" xmlns:a16="http://schemas.microsoft.com/office/drawing/2014/main" id="{84FEC4B8-DD6D-4502-8871-13C6151AF91E}"/>
               </a:ext>
             </a:extLst>
           </p:cNvPr>
@@ -331,7 +768,7 @@
           <p:cNvPr id="6" name="Slide Number Placeholder 5">
             <a:extLst>
               <a:ext uri="{FF2B5EF4-FFF2-40B4-BE49-F238E27FC236}">
-                <a16:creationId xmlns:a16="http://schemas.microsoft.com/office/drawing/2014/main" xmlns="" id="{54A5062D-BE27-4406-B5B3-1BD098DA1EB0}"/>
+                <a16:creationId xmlns="" xmlns:a16="http://schemas.microsoft.com/office/drawing/2014/main" id="{54A5062D-BE27-4406-B5B3-1BD098DA1EB0}"/>
               </a:ext>
             </a:extLst>
           </p:cNvPr>
@@ -402,7 +839,7 @@
           <p:cNvPr id="2" name="Title 1">
             <a:extLst>
               <a:ext uri="{FF2B5EF4-FFF2-40B4-BE49-F238E27FC236}">
-                <a16:creationId xmlns:a16="http://schemas.microsoft.com/office/drawing/2014/main" xmlns="" id="{EA31E748-EB58-47C7-9A51-CE16A2C5F53F}"/>
+                <a16:creationId xmlns="" xmlns:a16="http://schemas.microsoft.com/office/drawing/2014/main" id="{EA31E748-EB58-47C7-9A51-CE16A2C5F53F}"/>
               </a:ext>
             </a:extLst>
           </p:cNvPr>
@@ -430,7 +867,7 @@
           <p:cNvPr id="3" name="Vertical Text Placeholder 2">
             <a:extLst>
               <a:ext uri="{FF2B5EF4-FFF2-40B4-BE49-F238E27FC236}">
-                <a16:creationId xmlns:a16="http://schemas.microsoft.com/office/drawing/2014/main" xmlns="" id="{772B29E1-57C3-4D45-9070-966306F4F547}"/>
+                <a16:creationId xmlns="" xmlns:a16="http://schemas.microsoft.com/office/drawing/2014/main" id="{772B29E1-57C3-4D45-9070-966306F4F547}"/>
               </a:ext>
             </a:extLst>
           </p:cNvPr>
@@ -487,7 +924,7 @@
           <p:cNvPr id="4" name="Date Placeholder 3">
             <a:extLst>
               <a:ext uri="{FF2B5EF4-FFF2-40B4-BE49-F238E27FC236}">
-                <a16:creationId xmlns:a16="http://schemas.microsoft.com/office/drawing/2014/main" xmlns="" id="{FC5D52DD-38DA-4F5E-AFAB-335D79528D40}"/>
+                <a16:creationId xmlns="" xmlns:a16="http://schemas.microsoft.com/office/drawing/2014/main" id="{FC5D52DD-38DA-4F5E-AFAB-335D79528D40}"/>
               </a:ext>
             </a:extLst>
           </p:cNvPr>
@@ -505,7 +942,7 @@
           <a:p>
             <a:fld id="{18AECACE-579E-4476-86FD-0B80EC2CCB54}" type="datetimeFigureOut">
               <a:rPr lang="en-US" smtClean="0"/>
-              <a:t>8/30/2026</a:t>
+              <a:t>9/5/2026</a:t>
             </a:fld>
             <a:endParaRPr lang="en-US"/>
           </a:p>
@@ -516,7 +953,7 @@
           <p:cNvPr id="5" name="Footer Placeholder 4">
             <a:extLst>
               <a:ext uri="{FF2B5EF4-FFF2-40B4-BE49-F238E27FC236}">
-                <a16:creationId xmlns:a16="http://schemas.microsoft.com/office/drawing/2014/main" xmlns="" id="{3527E62F-766F-4A18-A14B-EA4F47C368AA}"/>
+                <a16:creationId xmlns="" xmlns:a16="http://schemas.microsoft.com/office/drawing/2014/main" id="{3527E62F-766F-4A18-A14B-EA4F47C368AA}"/>
               </a:ext>
             </a:extLst>
           </p:cNvPr>
@@ -541,7 +978,7 @@
           <p:cNvPr id="6" name="Slide Number Placeholder 5">
             <a:extLst>
               <a:ext uri="{FF2B5EF4-FFF2-40B4-BE49-F238E27FC236}">
-                <a16:creationId xmlns:a16="http://schemas.microsoft.com/office/drawing/2014/main" xmlns="" id="{89DE0585-70B0-4567-8ED3-41F9D162474A}"/>
+                <a16:creationId xmlns="" xmlns:a16="http://schemas.microsoft.com/office/drawing/2014/main" id="{89DE0585-70B0-4567-8ED3-41F9D162474A}"/>
               </a:ext>
             </a:extLst>
           </p:cNvPr>
@@ -612,7 +1049,7 @@
           <p:cNvPr id="2" name="Vertical Title 1">
             <a:extLst>
               <a:ext uri="{FF2B5EF4-FFF2-40B4-BE49-F238E27FC236}">
-                <a16:creationId xmlns:a16="http://schemas.microsoft.com/office/drawing/2014/main" xmlns="" id="{3FA834C7-0B50-494F-8DC0-9C757C749C77}"/>
+                <a16:creationId xmlns="" xmlns:a16="http://schemas.microsoft.com/office/drawing/2014/main" id="{3FA834C7-0B50-494F-8DC0-9C757C749C77}"/>
               </a:ext>
             </a:extLst>
           </p:cNvPr>
@@ -645,7 +1082,7 @@
           <p:cNvPr id="3" name="Vertical Text Placeholder 2">
             <a:extLst>
               <a:ext uri="{FF2B5EF4-FFF2-40B4-BE49-F238E27FC236}">
-                <a16:creationId xmlns:a16="http://schemas.microsoft.com/office/drawing/2014/main" xmlns="" id="{34E5FE2F-E966-4722-B220-C26C9F49C7E2}"/>
+                <a16:creationId xmlns="" xmlns:a16="http://schemas.microsoft.com/office/drawing/2014/main" id="{34E5FE2F-E966-4722-B220-C26C9F49C7E2}"/>
               </a:ext>
             </a:extLst>
           </p:cNvPr>
@@ -707,7 +1144,7 @@
           <p:cNvPr id="4" name="Date Placeholder 3">
             <a:extLst>
               <a:ext uri="{FF2B5EF4-FFF2-40B4-BE49-F238E27FC236}">
-                <a16:creationId xmlns:a16="http://schemas.microsoft.com/office/drawing/2014/main" xmlns="" id="{801513CC-D1EB-42D4-967A-C62E586CF2DC}"/>
+                <a16:creationId xmlns="" xmlns:a16="http://schemas.microsoft.com/office/drawing/2014/main" id="{801513CC-D1EB-42D4-967A-C62E586CF2DC}"/>
               </a:ext>
             </a:extLst>
           </p:cNvPr>
@@ -725,7 +1162,7 @@
           <a:p>
             <a:fld id="{18AECACE-579E-4476-86FD-0B80EC2CCB54}" type="datetimeFigureOut">
               <a:rPr lang="en-US" smtClean="0"/>
-              <a:t>8/30/2026</a:t>
+              <a:t>9/5/2026</a:t>
             </a:fld>
             <a:endParaRPr lang="en-US"/>
           </a:p>
@@ -736,7 +1173,7 @@
           <p:cNvPr id="5" name="Footer Placeholder 4">
             <a:extLst>
               <a:ext uri="{FF2B5EF4-FFF2-40B4-BE49-F238E27FC236}">
-                <a16:creationId xmlns:a16="http://schemas.microsoft.com/office/drawing/2014/main" xmlns="" id="{F0D0B307-19F8-4F4E-932A-E544D2826AAC}"/>
+                <a16:creationId xmlns="" xmlns:a16="http://schemas.microsoft.com/office/drawing/2014/main" id="{F0D0B307-19F8-4F4E-932A-E544D2826AAC}"/>
               </a:ext>
             </a:extLst>
           </p:cNvPr>
@@ -761,7 +1198,7 @@
           <p:cNvPr id="6" name="Slide Number Placeholder 5">
             <a:extLst>
               <a:ext uri="{FF2B5EF4-FFF2-40B4-BE49-F238E27FC236}">
-                <a16:creationId xmlns:a16="http://schemas.microsoft.com/office/drawing/2014/main" xmlns="" id="{0286DFD4-67CB-49AE-9912-F332CB0D8992}"/>
+                <a16:creationId xmlns="" xmlns:a16="http://schemas.microsoft.com/office/drawing/2014/main" id="{0286DFD4-67CB-49AE-9912-F332CB0D8992}"/>
               </a:ext>
             </a:extLst>
           </p:cNvPr>
@@ -832,7 +1269,7 @@
           <p:cNvPr id="2" name="Title 1">
             <a:extLst>
               <a:ext uri="{FF2B5EF4-FFF2-40B4-BE49-F238E27FC236}">
-                <a16:creationId xmlns:a16="http://schemas.microsoft.com/office/drawing/2014/main" xmlns="" id="{F635C223-15D2-4B2A-AF7A-D5847013EB1A}"/>
+                <a16:creationId xmlns="" xmlns:a16="http://schemas.microsoft.com/office/drawing/2014/main" id="{F635C223-15D2-4B2A-AF7A-D5847013EB1A}"/>
               </a:ext>
             </a:extLst>
           </p:cNvPr>
@@ -860,7 +1297,7 @@
           <p:cNvPr id="3" name="Content Placeholder 2">
             <a:extLst>
               <a:ext uri="{FF2B5EF4-FFF2-40B4-BE49-F238E27FC236}">
-                <a16:creationId xmlns:a16="http://schemas.microsoft.com/office/drawing/2014/main" xmlns="" id="{5EA90905-2502-41A2-8FC1-D0597A7F78AE}"/>
+                <a16:creationId xmlns="" xmlns:a16="http://schemas.microsoft.com/office/drawing/2014/main" id="{5EA90905-2502-41A2-8FC1-D0597A7F78AE}"/>
               </a:ext>
             </a:extLst>
           </p:cNvPr>
@@ -917,7 +1354,7 @@
           <p:cNvPr id="4" name="Date Placeholder 3">
             <a:extLst>
               <a:ext uri="{FF2B5EF4-FFF2-40B4-BE49-F238E27FC236}">
-                <a16:creationId xmlns:a16="http://schemas.microsoft.com/office/drawing/2014/main" xmlns="" id="{0D9723D2-09F2-4260-8772-54C49AC1B82C}"/>
+                <a16:creationId xmlns="" xmlns:a16="http://schemas.microsoft.com/office/drawing/2014/main" id="{0D9723D2-09F2-4260-8772-54C49AC1B82C}"/>
               </a:ext>
             </a:extLst>
           </p:cNvPr>
@@ -935,7 +1372,7 @@
           <a:p>
             <a:fld id="{18AECACE-579E-4476-86FD-0B80EC2CCB54}" type="datetimeFigureOut">
               <a:rPr lang="en-US" smtClean="0"/>
-              <a:t>8/30/2026</a:t>
+              <a:t>9/5/2026</a:t>
             </a:fld>
             <a:endParaRPr lang="en-US"/>
           </a:p>
@@ -946,7 +1383,7 @@
           <p:cNvPr id="5" name="Footer Placeholder 4">
             <a:extLst>
               <a:ext uri="{FF2B5EF4-FFF2-40B4-BE49-F238E27FC236}">
-                <a16:creationId xmlns:a16="http://schemas.microsoft.com/office/drawing/2014/main" xmlns="" id="{1995CA89-AA9F-4539-AC2B-45A6F46268AE}"/>
+                <a16:creationId xmlns="" xmlns:a16="http://schemas.microsoft.com/office/drawing/2014/main" id="{1995CA89-AA9F-4539-AC2B-45A6F46268AE}"/>
               </a:ext>
             </a:extLst>
           </p:cNvPr>
@@ -971,7 +1408,7 @@
           <p:cNvPr id="6" name="Slide Number Placeholder 5">
             <a:extLst>
               <a:ext uri="{FF2B5EF4-FFF2-40B4-BE49-F238E27FC236}">
-                <a16:creationId xmlns:a16="http://schemas.microsoft.com/office/drawing/2014/main" xmlns="" id="{0CC786EF-D158-4434-8DC7-458FAFF67EF2}"/>
+                <a16:creationId xmlns="" xmlns:a16="http://schemas.microsoft.com/office/drawing/2014/main" id="{0CC786EF-D158-4434-8DC7-458FAFF67EF2}"/>
               </a:ext>
             </a:extLst>
           </p:cNvPr>
@@ -1042,7 +1479,7 @@
           <p:cNvPr id="2" name="Title 1">
             <a:extLst>
               <a:ext uri="{FF2B5EF4-FFF2-40B4-BE49-F238E27FC236}">
-                <a16:creationId xmlns:a16="http://schemas.microsoft.com/office/drawing/2014/main" xmlns="" id="{EA1E1C50-05B9-48B5-9D28-C1066AA14199}"/>
+                <a16:creationId xmlns="" xmlns:a16="http://schemas.microsoft.com/office/drawing/2014/main" id="{EA1E1C50-05B9-48B5-9D28-C1066AA14199}"/>
               </a:ext>
             </a:extLst>
           </p:cNvPr>
@@ -1079,7 +1516,7 @@
           <p:cNvPr id="3" name="Text Placeholder 2">
             <a:extLst>
               <a:ext uri="{FF2B5EF4-FFF2-40B4-BE49-F238E27FC236}">
-                <a16:creationId xmlns:a16="http://schemas.microsoft.com/office/drawing/2014/main" xmlns="" id="{3601A0B6-3387-420B-9F76-4F97FB0965BB}"/>
+                <a16:creationId xmlns="" xmlns:a16="http://schemas.microsoft.com/office/drawing/2014/main" id="{3601A0B6-3387-420B-9F76-4F97FB0965BB}"/>
               </a:ext>
             </a:extLst>
           </p:cNvPr>
@@ -1204,7 +1641,7 @@
           <p:cNvPr id="4" name="Date Placeholder 3">
             <a:extLst>
               <a:ext uri="{FF2B5EF4-FFF2-40B4-BE49-F238E27FC236}">
-                <a16:creationId xmlns:a16="http://schemas.microsoft.com/office/drawing/2014/main" xmlns="" id="{AEBD0868-EFEC-4798-8EBB-C3A6C67231DA}"/>
+                <a16:creationId xmlns="" xmlns:a16="http://schemas.microsoft.com/office/drawing/2014/main" id="{AEBD0868-EFEC-4798-8EBB-C3A6C67231DA}"/>
               </a:ext>
             </a:extLst>
           </p:cNvPr>
@@ -1222,7 +1659,7 @@
           <a:p>
             <a:fld id="{18AECACE-579E-4476-86FD-0B80EC2CCB54}" type="datetimeFigureOut">
               <a:rPr lang="en-US" smtClean="0"/>
-              <a:t>8/30/2026</a:t>
+              <a:t>9/5/2026</a:t>
             </a:fld>
             <a:endParaRPr lang="en-US"/>
           </a:p>
@@ -1233,7 +1670,7 @@
           <p:cNvPr id="5" name="Footer Placeholder 4">
             <a:extLst>
               <a:ext uri="{FF2B5EF4-FFF2-40B4-BE49-F238E27FC236}">
-                <a16:creationId xmlns:a16="http://schemas.microsoft.com/office/drawing/2014/main" xmlns="" id="{C35789F4-8D45-4E0C-82A1-D8556509D5B5}"/>
+                <a16:creationId xmlns="" xmlns:a16="http://schemas.microsoft.com/office/drawing/2014/main" id="{C35789F4-8D45-4E0C-82A1-D8556509D5B5}"/>
               </a:ext>
             </a:extLst>
           </p:cNvPr>
@@ -1258,7 +1695,7 @@
           <p:cNvPr id="6" name="Slide Number Placeholder 5">
             <a:extLst>
               <a:ext uri="{FF2B5EF4-FFF2-40B4-BE49-F238E27FC236}">
-                <a16:creationId xmlns:a16="http://schemas.microsoft.com/office/drawing/2014/main" xmlns="" id="{C3D5BC3E-257A-4365-A360-E565BFDC44C9}"/>
+                <a16:creationId xmlns="" xmlns:a16="http://schemas.microsoft.com/office/drawing/2014/main" id="{C3D5BC3E-257A-4365-A360-E565BFDC44C9}"/>
               </a:ext>
             </a:extLst>
           </p:cNvPr>
@@ -1329,7 +1766,7 @@
           <p:cNvPr id="2" name="Title 1">
             <a:extLst>
               <a:ext uri="{FF2B5EF4-FFF2-40B4-BE49-F238E27FC236}">
-                <a16:creationId xmlns:a16="http://schemas.microsoft.com/office/drawing/2014/main" xmlns="" id="{3FF38DE0-EE9F-4F6F-A52F-791A6949A9C9}"/>
+                <a16:creationId xmlns="" xmlns:a16="http://schemas.microsoft.com/office/drawing/2014/main" id="{3FF38DE0-EE9F-4F6F-A52F-791A6949A9C9}"/>
               </a:ext>
             </a:extLst>
           </p:cNvPr>
@@ -1357,7 +1794,7 @@
           <p:cNvPr id="3" name="Content Placeholder 2">
             <a:extLst>
               <a:ext uri="{FF2B5EF4-FFF2-40B4-BE49-F238E27FC236}">
-                <a16:creationId xmlns:a16="http://schemas.microsoft.com/office/drawing/2014/main" xmlns="" id="{4B44B722-D31A-4884-BCE4-44AD7588D0AA}"/>
+                <a16:creationId xmlns="" xmlns:a16="http://schemas.microsoft.com/office/drawing/2014/main" id="{4B44B722-D31A-4884-BCE4-44AD7588D0AA}"/>
               </a:ext>
             </a:extLst>
           </p:cNvPr>
@@ -1419,7 +1856,7 @@
           <p:cNvPr id="4" name="Content Placeholder 3">
             <a:extLst>
               <a:ext uri="{FF2B5EF4-FFF2-40B4-BE49-F238E27FC236}">
-                <a16:creationId xmlns:a16="http://schemas.microsoft.com/office/drawing/2014/main" xmlns="" id="{F22CB6DE-EE6F-47E1-A633-15C0D81A5869}"/>
+                <a16:creationId xmlns="" xmlns:a16="http://schemas.microsoft.com/office/drawing/2014/main" id="{F22CB6DE-EE6F-47E1-A633-15C0D81A5869}"/>
               </a:ext>
             </a:extLst>
           </p:cNvPr>
@@ -1481,7 +1918,7 @@
           <p:cNvPr id="5" name="Date Placeholder 4">
             <a:extLst>
               <a:ext uri="{FF2B5EF4-FFF2-40B4-BE49-F238E27FC236}">
-                <a16:creationId xmlns:a16="http://schemas.microsoft.com/office/drawing/2014/main" xmlns="" id="{6069AF9E-E8ED-40FF-9133-D94592EFF9BE}"/>
+                <a16:creationId xmlns="" xmlns:a16="http://schemas.microsoft.com/office/drawing/2014/main" id="{6069AF9E-E8ED-40FF-9133-D94592EFF9BE}"/>
               </a:ext>
             </a:extLst>
           </p:cNvPr>
@@ -1499,7 +1936,7 @@
           <a:p>
             <a:fld id="{18AECACE-579E-4476-86FD-0B80EC2CCB54}" type="datetimeFigureOut">
               <a:rPr lang="en-US" smtClean="0"/>
-              <a:t>8/30/2026</a:t>
+              <a:t>9/5/2026</a:t>
             </a:fld>
             <a:endParaRPr lang="en-US"/>
           </a:p>
@@ -1510,7 +1947,7 @@
           <p:cNvPr id="6" name="Footer Placeholder 5">
             <a:extLst>
               <a:ext uri="{FF2B5EF4-FFF2-40B4-BE49-F238E27FC236}">
-                <a16:creationId xmlns:a16="http://schemas.microsoft.com/office/drawing/2014/main" xmlns="" id="{90482086-B7AC-4304-B6A6-5DC35F0D0197}"/>
+                <a16:creationId xmlns="" xmlns:a16="http://schemas.microsoft.com/office/drawing/2014/main" id="{90482086-B7AC-4304-B6A6-5DC35F0D0197}"/>
               </a:ext>
             </a:extLst>
           </p:cNvPr>
@@ -1535,7 +1972,7 @@
           <p:cNvPr id="7" name="Slide Number Placeholder 6">
             <a:extLst>
               <a:ext uri="{FF2B5EF4-FFF2-40B4-BE49-F238E27FC236}">
-                <a16:creationId xmlns:a16="http://schemas.microsoft.com/office/drawing/2014/main" xmlns="" id="{3FE8FA40-F43D-469E-A512-0079EEDAEC9B}"/>
+                <a16:creationId xmlns="" xmlns:a16="http://schemas.microsoft.com/office/drawing/2014/main" id="{3FE8FA40-F43D-469E-A512-0079EEDAEC9B}"/>
               </a:ext>
             </a:extLst>
           </p:cNvPr>
@@ -1606,7 +2043,7 @@
           <p:cNvPr id="2" name="Title 1">
             <a:extLst>
               <a:ext uri="{FF2B5EF4-FFF2-40B4-BE49-F238E27FC236}">
-                <a16:creationId xmlns:a16="http://schemas.microsoft.com/office/drawing/2014/main" xmlns="" id="{D73D0B3B-72E3-4FEF-AC6E-EE89FDAE7D81}"/>
+                <a16:creationId xmlns="" xmlns:a16="http://schemas.microsoft.com/office/drawing/2014/main" id="{D73D0B3B-72E3-4FEF-AC6E-EE89FDAE7D81}"/>
               </a:ext>
             </a:extLst>
           </p:cNvPr>
@@ -1639,7 +2076,7 @@
           <p:cNvPr id="3" name="Text Placeholder 2">
             <a:extLst>
               <a:ext uri="{FF2B5EF4-FFF2-40B4-BE49-F238E27FC236}">
-                <a16:creationId xmlns:a16="http://schemas.microsoft.com/office/drawing/2014/main" xmlns="" id="{6EAFBEAC-0923-4101-8204-CD9FAE1DFE97}"/>
+                <a16:creationId xmlns="" xmlns:a16="http://schemas.microsoft.com/office/drawing/2014/main" id="{6EAFBEAC-0923-4101-8204-CD9FAE1DFE97}"/>
               </a:ext>
             </a:extLst>
           </p:cNvPr>
@@ -1710,7 +2147,7 @@
           <p:cNvPr id="4" name="Content Placeholder 3">
             <a:extLst>
               <a:ext uri="{FF2B5EF4-FFF2-40B4-BE49-F238E27FC236}">
-                <a16:creationId xmlns:a16="http://schemas.microsoft.com/office/drawing/2014/main" xmlns="" id="{BC0A0EDB-665D-4D0E-AF01-1EF1E16EF5C6}"/>
+                <a16:creationId xmlns="" xmlns:a16="http://schemas.microsoft.com/office/drawing/2014/main" id="{BC0A0EDB-665D-4D0E-AF01-1EF1E16EF5C6}"/>
               </a:ext>
             </a:extLst>
           </p:cNvPr>
@@ -1772,7 +2209,7 @@
           <p:cNvPr id="5" name="Text Placeholder 4">
             <a:extLst>
               <a:ext uri="{FF2B5EF4-FFF2-40B4-BE49-F238E27FC236}">
-                <a16:creationId xmlns:a16="http://schemas.microsoft.com/office/drawing/2014/main" xmlns="" id="{1E827D43-A766-4FD8-9670-78193409A6E6}"/>
+                <a16:creationId xmlns="" xmlns:a16="http://schemas.microsoft.com/office/drawing/2014/main" id="{1E827D43-A766-4FD8-9670-78193409A6E6}"/>
               </a:ext>
             </a:extLst>
           </p:cNvPr>
@@ -1843,7 +2280,7 @@
           <p:cNvPr id="6" name="Content Placeholder 5">
             <a:extLst>
               <a:ext uri="{FF2B5EF4-FFF2-40B4-BE49-F238E27FC236}">
-                <a16:creationId xmlns:a16="http://schemas.microsoft.com/office/drawing/2014/main" xmlns="" id="{ABB703E0-A213-4CD6-ADB4-8FD19BC938B5}"/>
+                <a16:creationId xmlns="" xmlns:a16="http://schemas.microsoft.com/office/drawing/2014/main" id="{ABB703E0-A213-4CD6-ADB4-8FD19BC938B5}"/>
               </a:ext>
             </a:extLst>
           </p:cNvPr>
@@ -1905,7 +2342,7 @@
           <p:cNvPr id="7" name="Date Placeholder 6">
             <a:extLst>
               <a:ext uri="{FF2B5EF4-FFF2-40B4-BE49-F238E27FC236}">
-                <a16:creationId xmlns:a16="http://schemas.microsoft.com/office/drawing/2014/main" xmlns="" id="{C056098A-B4A9-419E-8942-6ABBD13B9C0A}"/>
+                <a16:creationId xmlns="" xmlns:a16="http://schemas.microsoft.com/office/drawing/2014/main" id="{C056098A-B4A9-419E-8942-6ABBD13B9C0A}"/>
               </a:ext>
             </a:extLst>
           </p:cNvPr>
@@ -1923,7 +2360,7 @@
           <a:p>
             <a:fld id="{18AECACE-579E-4476-86FD-0B80EC2CCB54}" type="datetimeFigureOut">
               <a:rPr lang="en-US" smtClean="0"/>
-              <a:t>8/30/2026</a:t>
+              <a:t>9/5/2026</a:t>
             </a:fld>
             <a:endParaRPr lang="en-US"/>
           </a:p>
@@ -1934,7 +2371,7 @@
           <p:cNvPr id="8" name="Footer Placeholder 7">
             <a:extLst>
               <a:ext uri="{FF2B5EF4-FFF2-40B4-BE49-F238E27FC236}">
-                <a16:creationId xmlns:a16="http://schemas.microsoft.com/office/drawing/2014/main" xmlns="" id="{E6B938AD-DAD1-4377-A745-62B1F5C21475}"/>
+                <a16:creationId xmlns="" xmlns:a16="http://schemas.microsoft.com/office/drawing/2014/main" id="{E6B938AD-DAD1-4377-A745-62B1F5C21475}"/>
               </a:ext>
             </a:extLst>
           </p:cNvPr>
@@ -1959,7 +2396,7 @@
           <p:cNvPr id="9" name="Slide Number Placeholder 8">
             <a:extLst>
               <a:ext uri="{FF2B5EF4-FFF2-40B4-BE49-F238E27FC236}">
-                <a16:creationId xmlns:a16="http://schemas.microsoft.com/office/drawing/2014/main" xmlns="" id="{8DD94556-DD16-4D60-8C5D-638DB13AFC3B}"/>
+                <a16:creationId xmlns="" xmlns:a16="http://schemas.microsoft.com/office/drawing/2014/main" id="{8DD94556-DD16-4D60-8C5D-638DB13AFC3B}"/>
               </a:ext>
             </a:extLst>
           </p:cNvPr>
@@ -2030,7 +2467,7 @@
           <p:cNvPr id="2" name="Title 1">
             <a:extLst>
               <a:ext uri="{FF2B5EF4-FFF2-40B4-BE49-F238E27FC236}">
-                <a16:creationId xmlns:a16="http://schemas.microsoft.com/office/drawing/2014/main" xmlns="" id="{B94E2B76-1FBE-4926-8439-882D4C504328}"/>
+                <a16:creationId xmlns="" xmlns:a16="http://schemas.microsoft.com/office/drawing/2014/main" id="{B94E2B76-1FBE-4926-8439-882D4C504328}"/>
               </a:ext>
             </a:extLst>
           </p:cNvPr>
@@ -2058,7 +2495,7 @@
           <p:cNvPr id="3" name="Date Placeholder 2">
             <a:extLst>
               <a:ext uri="{FF2B5EF4-FFF2-40B4-BE49-F238E27FC236}">
-                <a16:creationId xmlns:a16="http://schemas.microsoft.com/office/drawing/2014/main" xmlns="" id="{F39ADBAE-EA02-41F3-AEAF-6A1D3DE29E64}"/>
+                <a16:creationId xmlns="" xmlns:a16="http://schemas.microsoft.com/office/drawing/2014/main" id="{F39ADBAE-EA02-41F3-AEAF-6A1D3DE29E64}"/>
               </a:ext>
             </a:extLst>
           </p:cNvPr>
@@ -2076,7 +2513,7 @@
           <a:p>
             <a:fld id="{18AECACE-579E-4476-86FD-0B80EC2CCB54}" type="datetimeFigureOut">
               <a:rPr lang="en-US" smtClean="0"/>
-              <a:t>8/30/2026</a:t>
+              <a:t>9/5/2026</a:t>
             </a:fld>
             <a:endParaRPr lang="en-US"/>
           </a:p>
@@ -2087,7 +2524,7 @@
           <p:cNvPr id="4" name="Footer Placeholder 3">
             <a:extLst>
               <a:ext uri="{FF2B5EF4-FFF2-40B4-BE49-F238E27FC236}">
-                <a16:creationId xmlns:a16="http://schemas.microsoft.com/office/drawing/2014/main" xmlns="" id="{1F236551-251C-4770-8862-42D94C975D67}"/>
+                <a16:creationId xmlns="" xmlns:a16="http://schemas.microsoft.com/office/drawing/2014/main" id="{1F236551-251C-4770-8862-42D94C975D67}"/>
               </a:ext>
             </a:extLst>
           </p:cNvPr>
@@ -2112,7 +2549,7 @@
           <p:cNvPr id="5" name="Slide Number Placeholder 4">
             <a:extLst>
               <a:ext uri="{FF2B5EF4-FFF2-40B4-BE49-F238E27FC236}">
-                <a16:creationId xmlns:a16="http://schemas.microsoft.com/office/drawing/2014/main" xmlns="" id="{3BEBBC59-B761-488F-B8E6-3CF9C192077D}"/>
+                <a16:creationId xmlns="" xmlns:a16="http://schemas.microsoft.com/office/drawing/2014/main" id="{3BEBBC59-B761-488F-B8E6-3CF9C192077D}"/>
               </a:ext>
             </a:extLst>
           </p:cNvPr>
@@ -2183,7 +2620,7 @@
           <p:cNvPr id="2" name="Date Placeholder 1">
             <a:extLst>
               <a:ext uri="{FF2B5EF4-FFF2-40B4-BE49-F238E27FC236}">
-                <a16:creationId xmlns:a16="http://schemas.microsoft.com/office/drawing/2014/main" xmlns="" id="{634FFC06-5215-442A-9C01-C62142119528}"/>
+                <a16:creationId xmlns="" xmlns:a16="http://schemas.microsoft.com/office/drawing/2014/main" id="{634FFC06-5215-442A-9C01-C62142119528}"/>
               </a:ext>
             </a:extLst>
           </p:cNvPr>
@@ -2201,7 +2638,7 @@
           <a:p>
             <a:fld id="{18AECACE-579E-4476-86FD-0B80EC2CCB54}" type="datetimeFigureOut">
               <a:rPr lang="en-US" smtClean="0"/>
-              <a:t>8/30/2026</a:t>
+              <a:t>9/5/2026</a:t>
             </a:fld>
             <a:endParaRPr lang="en-US"/>
           </a:p>
@@ -2212,7 +2649,7 @@
           <p:cNvPr id="3" name="Footer Placeholder 2">
             <a:extLst>
               <a:ext uri="{FF2B5EF4-FFF2-40B4-BE49-F238E27FC236}">
-                <a16:creationId xmlns:a16="http://schemas.microsoft.com/office/drawing/2014/main" xmlns="" id="{D307CCC0-ADF4-4F1B-8F94-A7F940FC5EE1}"/>
+                <a16:creationId xmlns="" xmlns:a16="http://schemas.microsoft.com/office/drawing/2014/main" id="{D307CCC0-ADF4-4F1B-8F94-A7F940FC5EE1}"/>
               </a:ext>
             </a:extLst>
           </p:cNvPr>
@@ -2237,7 +2674,7 @@
           <p:cNvPr id="4" name="Slide Number Placeholder 3">
             <a:extLst>
               <a:ext uri="{FF2B5EF4-FFF2-40B4-BE49-F238E27FC236}">
-                <a16:creationId xmlns:a16="http://schemas.microsoft.com/office/drawing/2014/main" xmlns="" id="{63D9A34F-1E9F-45A7-97AB-EFDF71C77DDA}"/>
+                <a16:creationId xmlns="" xmlns:a16="http://schemas.microsoft.com/office/drawing/2014/main" id="{63D9A34F-1E9F-45A7-97AB-EFDF71C77DDA}"/>
               </a:ext>
             </a:extLst>
           </p:cNvPr>
@@ -2308,7 +2745,7 @@
           <p:cNvPr id="2" name="Title 1">
             <a:extLst>
               <a:ext uri="{FF2B5EF4-FFF2-40B4-BE49-F238E27FC236}">
-                <a16:creationId xmlns:a16="http://schemas.microsoft.com/office/drawing/2014/main" xmlns="" id="{86BAE89F-5D98-487F-B433-6C5FADA50D57}"/>
+                <a16:creationId xmlns="" xmlns:a16="http://schemas.microsoft.com/office/drawing/2014/main" id="{86BAE89F-5D98-487F-B433-6C5FADA50D57}"/>
               </a:ext>
             </a:extLst>
           </p:cNvPr>
@@ -2345,7 +2782,7 @@
           <p:cNvPr id="3" name="Content Placeholder 2">
             <a:extLst>
               <a:ext uri="{FF2B5EF4-FFF2-40B4-BE49-F238E27FC236}">
-                <a16:creationId xmlns:a16="http://schemas.microsoft.com/office/drawing/2014/main" xmlns="" id="{E7136884-7B49-4DED-A411-F14E260584B9}"/>
+                <a16:creationId xmlns="" xmlns:a16="http://schemas.microsoft.com/office/drawing/2014/main" id="{E7136884-7B49-4DED-A411-F14E260584B9}"/>
               </a:ext>
             </a:extLst>
           </p:cNvPr>
@@ -2435,7 +2872,7 @@
           <p:cNvPr id="4" name="Text Placeholder 3">
             <a:extLst>
               <a:ext uri="{FF2B5EF4-FFF2-40B4-BE49-F238E27FC236}">
-                <a16:creationId xmlns:a16="http://schemas.microsoft.com/office/drawing/2014/main" xmlns="" id="{3CB0633A-7D74-499D-9345-26371ED21EFF}"/>
+                <a16:creationId xmlns="" xmlns:a16="http://schemas.microsoft.com/office/drawing/2014/main" id="{3CB0633A-7D74-499D-9345-26371ED21EFF}"/>
               </a:ext>
             </a:extLst>
           </p:cNvPr>
@@ -2506,7 +2943,7 @@
           <p:cNvPr id="5" name="Date Placeholder 4">
             <a:extLst>
               <a:ext uri="{FF2B5EF4-FFF2-40B4-BE49-F238E27FC236}">
-                <a16:creationId xmlns:a16="http://schemas.microsoft.com/office/drawing/2014/main" xmlns="" id="{331AADB5-9996-43E5-BA54-83988153314D}"/>
+                <a16:creationId xmlns="" xmlns:a16="http://schemas.microsoft.com/office/drawing/2014/main" id="{331AADB5-9996-43E5-BA54-83988153314D}"/>
               </a:ext>
             </a:extLst>
           </p:cNvPr>
@@ -2524,7 +2961,7 @@
           <a:p>
             <a:fld id="{18AECACE-579E-4476-86FD-0B80EC2CCB54}" type="datetimeFigureOut">
               <a:rPr lang="en-US" smtClean="0"/>
-              <a:t>8/30/2026</a:t>
+              <a:t>9/5/2026</a:t>
             </a:fld>
             <a:endParaRPr lang="en-US"/>
           </a:p>
@@ -2535,7 +2972,7 @@
           <p:cNvPr id="6" name="Footer Placeholder 5">
             <a:extLst>
               <a:ext uri="{FF2B5EF4-FFF2-40B4-BE49-F238E27FC236}">
-                <a16:creationId xmlns:a16="http://schemas.microsoft.com/office/drawing/2014/main" xmlns="" id="{637A2449-17DF-4A98-83A4-15D4A1D47573}"/>
+                <a16:creationId xmlns="" xmlns:a16="http://schemas.microsoft.com/office/drawing/2014/main" id="{637A2449-17DF-4A98-83A4-15D4A1D47573}"/>
               </a:ext>
             </a:extLst>
           </p:cNvPr>
@@ -2560,7 +2997,7 @@
           <p:cNvPr id="7" name="Slide Number Placeholder 6">
             <a:extLst>
               <a:ext uri="{FF2B5EF4-FFF2-40B4-BE49-F238E27FC236}">
-                <a16:creationId xmlns:a16="http://schemas.microsoft.com/office/drawing/2014/main" xmlns="" id="{22042EF7-BBFA-4017-8373-03429EA50A70}"/>
+                <a16:creationId xmlns="" xmlns:a16="http://schemas.microsoft.com/office/drawing/2014/main" id="{22042EF7-BBFA-4017-8373-03429EA50A70}"/>
               </a:ext>
             </a:extLst>
           </p:cNvPr>
@@ -2631,7 +3068,7 @@
           <p:cNvPr id="2" name="Title 1">
             <a:extLst>
               <a:ext uri="{FF2B5EF4-FFF2-40B4-BE49-F238E27FC236}">
-                <a16:creationId xmlns:a16="http://schemas.microsoft.com/office/drawing/2014/main" xmlns="" id="{B83ADB16-7090-4A4F-9285-983E85892870}"/>
+                <a16:creationId xmlns="" xmlns:a16="http://schemas.microsoft.com/office/drawing/2014/main" id="{B83ADB16-7090-4A4F-9285-983E85892870}"/>
               </a:ext>
             </a:extLst>
           </p:cNvPr>
@@ -2668,7 +3105,7 @@
           <p:cNvPr id="3" name="Picture Placeholder 2">
             <a:extLst>
               <a:ext uri="{FF2B5EF4-FFF2-40B4-BE49-F238E27FC236}">
-                <a16:creationId xmlns:a16="http://schemas.microsoft.com/office/drawing/2014/main" xmlns="" id="{73405E3E-FD7B-466A-A43E-ECAD2D0AF204}"/>
+                <a16:creationId xmlns="" xmlns:a16="http://schemas.microsoft.com/office/drawing/2014/main" id="{73405E3E-FD7B-466A-A43E-ECAD2D0AF204}"/>
               </a:ext>
             </a:extLst>
           </p:cNvPr>
@@ -2735,7 +3172,7 @@
           <p:cNvPr id="4" name="Text Placeholder 3">
             <a:extLst>
               <a:ext uri="{FF2B5EF4-FFF2-40B4-BE49-F238E27FC236}">
-                <a16:creationId xmlns:a16="http://schemas.microsoft.com/office/drawing/2014/main" xmlns="" id="{699FE687-16E1-498C-92B1-66B7AA41BD2C}"/>
+                <a16:creationId xmlns="" xmlns:a16="http://schemas.microsoft.com/office/drawing/2014/main" id="{699FE687-16E1-498C-92B1-66B7AA41BD2C}"/>
               </a:ext>
             </a:extLst>
           </p:cNvPr>
@@ -2806,7 +3243,7 @@
           <p:cNvPr id="5" name="Date Placeholder 4">
             <a:extLst>
               <a:ext uri="{FF2B5EF4-FFF2-40B4-BE49-F238E27FC236}">
-                <a16:creationId xmlns:a16="http://schemas.microsoft.com/office/drawing/2014/main" xmlns="" id="{05FD3835-AF6F-4403-9660-1E9F0D3ACC00}"/>
+                <a16:creationId xmlns="" xmlns:a16="http://schemas.microsoft.com/office/drawing/2014/main" id="{05FD3835-AF6F-4403-9660-1E9F0D3ACC00}"/>
               </a:ext>
             </a:extLst>
           </p:cNvPr>
@@ -2824,7 +3261,7 @@
           <a:p>
             <a:fld id="{18AECACE-579E-4476-86FD-0B80EC2CCB54}" type="datetimeFigureOut">
               <a:rPr lang="en-US" smtClean="0"/>
-              <a:t>8/30/2026</a:t>
+              <a:t>9/5/2026</a:t>
             </a:fld>
             <a:endParaRPr lang="en-US"/>
           </a:p>
@@ -2835,7 +3272,7 @@
           <p:cNvPr id="6" name="Footer Placeholder 5">
             <a:extLst>
               <a:ext uri="{FF2B5EF4-FFF2-40B4-BE49-F238E27FC236}">
-                <a16:creationId xmlns:a16="http://schemas.microsoft.com/office/drawing/2014/main" xmlns="" id="{1378E631-A4C0-4A0A-B23D-769FB7478AE2}"/>
+                <a16:creationId xmlns="" xmlns:a16="http://schemas.microsoft.com/office/drawing/2014/main" id="{1378E631-A4C0-4A0A-B23D-769FB7478AE2}"/>
               </a:ext>
             </a:extLst>
           </p:cNvPr>
@@ -2860,7 +3297,7 @@
           <p:cNvPr id="7" name="Slide Number Placeholder 6">
             <a:extLst>
               <a:ext uri="{FF2B5EF4-FFF2-40B4-BE49-F238E27FC236}">
-                <a16:creationId xmlns:a16="http://schemas.microsoft.com/office/drawing/2014/main" xmlns="" id="{A74ACE54-352F-4668-A5A2-407D0D54B754}"/>
+                <a16:creationId xmlns="" xmlns:a16="http://schemas.microsoft.com/office/drawing/2014/main" id="{A74ACE54-352F-4668-A5A2-407D0D54B754}"/>
               </a:ext>
             </a:extLst>
           </p:cNvPr>
@@ -2936,7 +3373,7 @@
           <p:cNvPr id="2" name="Title Placeholder 1">
             <a:extLst>
               <a:ext uri="{FF2B5EF4-FFF2-40B4-BE49-F238E27FC236}">
-                <a16:creationId xmlns:a16="http://schemas.microsoft.com/office/drawing/2014/main" xmlns="" id="{A90584BB-B85E-405F-9444-CBEB0CD6869E}"/>
+                <a16:creationId xmlns="" xmlns:a16="http://schemas.microsoft.com/office/drawing/2014/main" id="{A90584BB-B85E-405F-9444-CBEB0CD6869E}"/>
               </a:ext>
             </a:extLst>
           </p:cNvPr>
@@ -2974,7 +3411,7 @@
           <p:cNvPr id="3" name="Text Placeholder 2">
             <a:extLst>
               <a:ext uri="{FF2B5EF4-FFF2-40B4-BE49-F238E27FC236}">
-                <a16:creationId xmlns:a16="http://schemas.microsoft.com/office/drawing/2014/main" xmlns="" id="{4498B3B5-C0CD-4B7A-9606-7CB1734AD232}"/>
+                <a16:creationId xmlns="" xmlns:a16="http://schemas.microsoft.com/office/drawing/2014/main" id="{4498B3B5-C0CD-4B7A-9606-7CB1734AD232}"/>
               </a:ext>
             </a:extLst>
           </p:cNvPr>
@@ -3041,7 +3478,7 @@
           <p:cNvPr id="4" name="Date Placeholder 3">
             <a:extLst>
               <a:ext uri="{FF2B5EF4-FFF2-40B4-BE49-F238E27FC236}">
-                <a16:creationId xmlns:a16="http://schemas.microsoft.com/office/drawing/2014/main" xmlns="" id="{90A4E543-A2EF-47D8-B0F4-94C115BE9B03}"/>
+                <a16:creationId xmlns="" xmlns:a16="http://schemas.microsoft.com/office/drawing/2014/main" id="{90A4E543-A2EF-47D8-B0F4-94C115BE9B03}"/>
               </a:ext>
             </a:extLst>
           </p:cNvPr>
@@ -3077,7 +3514,7 @@
           <a:p>
             <a:fld id="{18AECACE-579E-4476-86FD-0B80EC2CCB54}" type="datetimeFigureOut">
               <a:rPr lang="en-US" smtClean="0"/>
-              <a:t>8/30/2026</a:t>
+              <a:t>9/5/2026</a:t>
             </a:fld>
             <a:endParaRPr lang="en-US"/>
           </a:p>
@@ -3088,7 +3525,7 @@
           <p:cNvPr id="5" name="Footer Placeholder 4">
             <a:extLst>
               <a:ext uri="{FF2B5EF4-FFF2-40B4-BE49-F238E27FC236}">
-                <a16:creationId xmlns:a16="http://schemas.microsoft.com/office/drawing/2014/main" xmlns="" id="{DB441F80-E827-4EF4-94DA-982E2516DB50}"/>
+                <a16:creationId xmlns="" xmlns:a16="http://schemas.microsoft.com/office/drawing/2014/main" id="{DB441F80-E827-4EF4-94DA-982E2516DB50}"/>
               </a:ext>
             </a:extLst>
           </p:cNvPr>
@@ -3131,7 +3568,7 @@
           <p:cNvPr id="6" name="Slide Number Placeholder 5">
             <a:extLst>
               <a:ext uri="{FF2B5EF4-FFF2-40B4-BE49-F238E27FC236}">
-                <a16:creationId xmlns:a16="http://schemas.microsoft.com/office/drawing/2014/main" xmlns="" id="{C18AD799-5075-425C-AD8B-685FE18175A3}"/>
+                <a16:creationId xmlns="" xmlns:a16="http://schemas.microsoft.com/office/drawing/2014/main" id="{C18AD799-5075-425C-AD8B-685FE18175A3}"/>
               </a:ext>
             </a:extLst>
           </p:cNvPr>
@@ -3511,7 +3948,7 @@
           <p:cNvPr id="5" name="Rectangle 4">
             <a:extLst>
               <a:ext uri="{FF2B5EF4-FFF2-40B4-BE49-F238E27FC236}">
-                <a16:creationId xmlns:a16="http://schemas.microsoft.com/office/drawing/2014/main" xmlns="" id="{05762603-B584-39F8-05AB-3AE5497AB247}"/>
+                <a16:creationId xmlns="" xmlns:a16="http://schemas.microsoft.com/office/drawing/2014/main" id="{05762603-B584-39F8-05AB-3AE5497AB247}"/>
               </a:ext>
             </a:extLst>
           </p:cNvPr>
@@ -3557,7 +3994,7 @@
           <p:cNvPr id="4" name="Rectangle 3">
             <a:extLst>
               <a:ext uri="{FF2B5EF4-FFF2-40B4-BE49-F238E27FC236}">
-                <a16:creationId xmlns:a16="http://schemas.microsoft.com/office/drawing/2014/main" xmlns="" id="{C21AE904-339E-735F-38EB-2F73F9D90ADD}"/>
+                <a16:creationId xmlns="" xmlns:a16="http://schemas.microsoft.com/office/drawing/2014/main" id="{C21AE904-339E-735F-38EB-2F73F9D90ADD}"/>
               </a:ext>
             </a:extLst>
           </p:cNvPr>
@@ -4043,7 +4480,7 @@
           <p:cNvPr id="6" name="Oval 5">
             <a:extLst>
               <a:ext uri="{FF2B5EF4-FFF2-40B4-BE49-F238E27FC236}">
-                <a16:creationId xmlns:a16="http://schemas.microsoft.com/office/drawing/2014/main" xmlns="" id="{63EA8D2E-A862-1E65-BE5B-1CC849129310}"/>
+                <a16:creationId xmlns="" xmlns:a16="http://schemas.microsoft.com/office/drawing/2014/main" id="{63EA8D2E-A862-1E65-BE5B-1CC849129310}"/>
               </a:ext>
             </a:extLst>
           </p:cNvPr>
@@ -4102,7 +4539,7 @@
           <p:cNvPr id="7" name="Oval 6">
             <a:extLst>
               <a:ext uri="{FF2B5EF4-FFF2-40B4-BE49-F238E27FC236}">
-                <a16:creationId xmlns:a16="http://schemas.microsoft.com/office/drawing/2014/main" xmlns="" id="{87563D42-811B-AB94-68B2-1654AA39FC59}"/>
+                <a16:creationId xmlns="" xmlns:a16="http://schemas.microsoft.com/office/drawing/2014/main" id="{87563D42-811B-AB94-68B2-1654AA39FC59}"/>
               </a:ext>
             </a:extLst>
           </p:cNvPr>
@@ -4161,7 +4598,7 @@
           <p:cNvPr id="8" name="Oval 7">
             <a:extLst>
               <a:ext uri="{FF2B5EF4-FFF2-40B4-BE49-F238E27FC236}">
-                <a16:creationId xmlns:a16="http://schemas.microsoft.com/office/drawing/2014/main" xmlns="" id="{1BED4EDE-854B-3FD8-B0BE-284C37A7E564}"/>
+                <a16:creationId xmlns="" xmlns:a16="http://schemas.microsoft.com/office/drawing/2014/main" id="{1BED4EDE-854B-3FD8-B0BE-284C37A7E564}"/>
               </a:ext>
             </a:extLst>
           </p:cNvPr>
@@ -4220,7 +4657,7 @@
           <p:cNvPr id="9" name="Oval 8">
             <a:extLst>
               <a:ext uri="{FF2B5EF4-FFF2-40B4-BE49-F238E27FC236}">
-                <a16:creationId xmlns:a16="http://schemas.microsoft.com/office/drawing/2014/main" xmlns="" id="{F4C619DF-9601-D17B-9F1B-1AD73FFAEF03}"/>
+                <a16:creationId xmlns="" xmlns:a16="http://schemas.microsoft.com/office/drawing/2014/main" id="{F4C619DF-9601-D17B-9F1B-1AD73FFAEF03}"/>
               </a:ext>
             </a:extLst>
           </p:cNvPr>
@@ -4279,7 +4716,7 @@
           <p:cNvPr id="10" name="Oval 9">
             <a:extLst>
               <a:ext uri="{FF2B5EF4-FFF2-40B4-BE49-F238E27FC236}">
-                <a16:creationId xmlns:a16="http://schemas.microsoft.com/office/drawing/2014/main" xmlns="" id="{DA6E173B-01D5-5C71-795C-E52A41FB3D27}"/>
+                <a16:creationId xmlns="" xmlns:a16="http://schemas.microsoft.com/office/drawing/2014/main" id="{DA6E173B-01D5-5C71-795C-E52A41FB3D27}"/>
               </a:ext>
             </a:extLst>
           </p:cNvPr>
@@ -4338,7 +4775,7 @@
           <p:cNvPr id="11" name="Oval 10">
             <a:extLst>
               <a:ext uri="{FF2B5EF4-FFF2-40B4-BE49-F238E27FC236}">
-                <a16:creationId xmlns:a16="http://schemas.microsoft.com/office/drawing/2014/main" xmlns="" id="{C0E14360-0068-716B-C5D7-61FC97CF53DF}"/>
+                <a16:creationId xmlns="" xmlns:a16="http://schemas.microsoft.com/office/drawing/2014/main" id="{C0E14360-0068-716B-C5D7-61FC97CF53DF}"/>
               </a:ext>
             </a:extLst>
           </p:cNvPr>
@@ -4397,7 +4834,7 @@
           <p:cNvPr id="12" name="Oval 11">
             <a:extLst>
               <a:ext uri="{FF2B5EF4-FFF2-40B4-BE49-F238E27FC236}">
-                <a16:creationId xmlns:a16="http://schemas.microsoft.com/office/drawing/2014/main" xmlns="" id="{53EA44FD-BB48-502C-CEE9-745038CDB078}"/>
+                <a16:creationId xmlns="" xmlns:a16="http://schemas.microsoft.com/office/drawing/2014/main" id="{53EA44FD-BB48-502C-CEE9-745038CDB078}"/>
               </a:ext>
             </a:extLst>
           </p:cNvPr>
@@ -4456,7 +4893,7 @@
           <p:cNvPr id="13" name="Oval 12">
             <a:extLst>
               <a:ext uri="{FF2B5EF4-FFF2-40B4-BE49-F238E27FC236}">
-                <a16:creationId xmlns:a16="http://schemas.microsoft.com/office/drawing/2014/main" xmlns="" id="{A7113529-1533-5B8E-4911-2C77F23B0116}"/>
+                <a16:creationId xmlns="" xmlns:a16="http://schemas.microsoft.com/office/drawing/2014/main" id="{A7113529-1533-5B8E-4911-2C77F23B0116}"/>
               </a:ext>
             </a:extLst>
           </p:cNvPr>
@@ -4515,7 +4952,7 @@
           <p:cNvPr id="14" name="Oval 13">
             <a:extLst>
               <a:ext uri="{FF2B5EF4-FFF2-40B4-BE49-F238E27FC236}">
-                <a16:creationId xmlns:a16="http://schemas.microsoft.com/office/drawing/2014/main" xmlns="" id="{CAF5B65D-7E89-E6E7-7F6A-34108CD78884}"/>
+                <a16:creationId xmlns="" xmlns:a16="http://schemas.microsoft.com/office/drawing/2014/main" id="{CAF5B65D-7E89-E6E7-7F6A-34108CD78884}"/>
               </a:ext>
             </a:extLst>
           </p:cNvPr>
@@ -4574,7 +5011,7 @@
           <p:cNvPr id="15" name="Oval 14">
             <a:extLst>
               <a:ext uri="{FF2B5EF4-FFF2-40B4-BE49-F238E27FC236}">
-                <a16:creationId xmlns:a16="http://schemas.microsoft.com/office/drawing/2014/main" xmlns="" id="{8CA19B4C-8D07-82AA-1F4A-BE963EAADD78}"/>
+                <a16:creationId xmlns="" xmlns:a16="http://schemas.microsoft.com/office/drawing/2014/main" id="{8CA19B4C-8D07-82AA-1F4A-BE963EAADD78}"/>
               </a:ext>
             </a:extLst>
           </p:cNvPr>
@@ -4633,7 +5070,7 @@
           <p:cNvPr id="16" name="Oval 15">
             <a:extLst>
               <a:ext uri="{FF2B5EF4-FFF2-40B4-BE49-F238E27FC236}">
-                <a16:creationId xmlns:a16="http://schemas.microsoft.com/office/drawing/2014/main" xmlns="" id="{BC936A63-2049-E622-B884-DC071A2B8884}"/>
+                <a16:creationId xmlns="" xmlns:a16="http://schemas.microsoft.com/office/drawing/2014/main" id="{BC936A63-2049-E622-B884-DC071A2B8884}"/>
               </a:ext>
             </a:extLst>
           </p:cNvPr>
@@ -4692,7 +5129,7 @@
           <p:cNvPr id="17" name="Oval 16">
             <a:extLst>
               <a:ext uri="{FF2B5EF4-FFF2-40B4-BE49-F238E27FC236}">
-                <a16:creationId xmlns:a16="http://schemas.microsoft.com/office/drawing/2014/main" xmlns="" id="{86876C4B-5A74-BC8C-C122-CD06B79EF306}"/>
+                <a16:creationId xmlns="" xmlns:a16="http://schemas.microsoft.com/office/drawing/2014/main" id="{86876C4B-5A74-BC8C-C122-CD06B79EF306}"/>
               </a:ext>
             </a:extLst>
           </p:cNvPr>
@@ -4751,7 +5188,7 @@
           <p:cNvPr id="18" name="Oval 17">
             <a:extLst>
               <a:ext uri="{FF2B5EF4-FFF2-40B4-BE49-F238E27FC236}">
-                <a16:creationId xmlns:a16="http://schemas.microsoft.com/office/drawing/2014/main" xmlns="" id="{664BDA3D-A703-9C1B-78CD-8A86C01A1406}"/>
+                <a16:creationId xmlns="" xmlns:a16="http://schemas.microsoft.com/office/drawing/2014/main" id="{664BDA3D-A703-9C1B-78CD-8A86C01A1406}"/>
               </a:ext>
             </a:extLst>
           </p:cNvPr>
@@ -4810,7 +5247,7 @@
           <p:cNvPr id="19" name="Oval 18">
             <a:extLst>
               <a:ext uri="{FF2B5EF4-FFF2-40B4-BE49-F238E27FC236}">
-                <a16:creationId xmlns:a16="http://schemas.microsoft.com/office/drawing/2014/main" xmlns="" id="{8F59511C-41C7-9994-1D21-B977BB5A8A5E}"/>
+                <a16:creationId xmlns="" xmlns:a16="http://schemas.microsoft.com/office/drawing/2014/main" id="{8F59511C-41C7-9994-1D21-B977BB5A8A5E}"/>
               </a:ext>
             </a:extLst>
           </p:cNvPr>
@@ -4869,7 +5306,7 @@
           <p:cNvPr id="20" name="Oval 19">
             <a:extLst>
               <a:ext uri="{FF2B5EF4-FFF2-40B4-BE49-F238E27FC236}">
-                <a16:creationId xmlns:a16="http://schemas.microsoft.com/office/drawing/2014/main" xmlns="" id="{694B00A7-091B-FDC4-4378-1BB1AAB6DA7D}"/>
+                <a16:creationId xmlns="" xmlns:a16="http://schemas.microsoft.com/office/drawing/2014/main" id="{694B00A7-091B-FDC4-4378-1BB1AAB6DA7D}"/>
               </a:ext>
             </a:extLst>
           </p:cNvPr>
@@ -4928,7 +5365,7 @@
           <p:cNvPr id="21" name="Oval 20">
             <a:extLst>
               <a:ext uri="{FF2B5EF4-FFF2-40B4-BE49-F238E27FC236}">
-                <a16:creationId xmlns:a16="http://schemas.microsoft.com/office/drawing/2014/main" xmlns="" id="{1BA1FF37-DE01-2432-085B-E4B299C5EB40}"/>
+                <a16:creationId xmlns="" xmlns:a16="http://schemas.microsoft.com/office/drawing/2014/main" id="{1BA1FF37-DE01-2432-085B-E4B299C5EB40}"/>
               </a:ext>
             </a:extLst>
           </p:cNvPr>
@@ -4987,7 +5424,7 @@
           <p:cNvPr id="22" name="Oval 21">
             <a:extLst>
               <a:ext uri="{FF2B5EF4-FFF2-40B4-BE49-F238E27FC236}">
-                <a16:creationId xmlns:a16="http://schemas.microsoft.com/office/drawing/2014/main" xmlns="" id="{52064E6F-6813-D93E-64FF-B9D4C9C1F144}"/>
+                <a16:creationId xmlns="" xmlns:a16="http://schemas.microsoft.com/office/drawing/2014/main" id="{52064E6F-6813-D93E-64FF-B9D4C9C1F144}"/>
               </a:ext>
             </a:extLst>
           </p:cNvPr>
@@ -5046,7 +5483,7 @@
           <p:cNvPr id="23" name="Oval 22">
             <a:extLst>
               <a:ext uri="{FF2B5EF4-FFF2-40B4-BE49-F238E27FC236}">
-                <a16:creationId xmlns:a16="http://schemas.microsoft.com/office/drawing/2014/main" xmlns="" id="{713462B9-B175-4672-6D40-2F7838DC553E}"/>
+                <a16:creationId xmlns="" xmlns:a16="http://schemas.microsoft.com/office/drawing/2014/main" id="{713462B9-B175-4672-6D40-2F7838DC553E}"/>
               </a:ext>
             </a:extLst>
           </p:cNvPr>
@@ -5105,7 +5542,7 @@
           <p:cNvPr id="24" name="Oval 23">
             <a:extLst>
               <a:ext uri="{FF2B5EF4-FFF2-40B4-BE49-F238E27FC236}">
-                <a16:creationId xmlns:a16="http://schemas.microsoft.com/office/drawing/2014/main" xmlns="" id="{82CE041C-8CAA-6CBD-1393-728D1D9DED5D}"/>
+                <a16:creationId xmlns="" xmlns:a16="http://schemas.microsoft.com/office/drawing/2014/main" id="{82CE041C-8CAA-6CBD-1393-728D1D9DED5D}"/>
               </a:ext>
             </a:extLst>
           </p:cNvPr>
@@ -5164,7 +5601,7 @@
           <p:cNvPr id="25" name="Oval 24">
             <a:extLst>
               <a:ext uri="{FF2B5EF4-FFF2-40B4-BE49-F238E27FC236}">
-                <a16:creationId xmlns:a16="http://schemas.microsoft.com/office/drawing/2014/main" xmlns="" id="{97006CEE-C93E-68A9-E29E-D42C3441930F}"/>
+                <a16:creationId xmlns="" xmlns:a16="http://schemas.microsoft.com/office/drawing/2014/main" id="{97006CEE-C93E-68A9-E29E-D42C3441930F}"/>
               </a:ext>
             </a:extLst>
           </p:cNvPr>
@@ -5223,7 +5660,7 @@
           <p:cNvPr id="26" name="Oval 25">
             <a:extLst>
               <a:ext uri="{FF2B5EF4-FFF2-40B4-BE49-F238E27FC236}">
-                <a16:creationId xmlns:a16="http://schemas.microsoft.com/office/drawing/2014/main" xmlns="" id="{0C4A8885-A76F-EDE3-EB36-E79533DDCBF4}"/>
+                <a16:creationId xmlns="" xmlns:a16="http://schemas.microsoft.com/office/drawing/2014/main" id="{0C4A8885-A76F-EDE3-EB36-E79533DDCBF4}"/>
               </a:ext>
             </a:extLst>
           </p:cNvPr>
@@ -5282,7 +5719,7 @@
           <p:cNvPr id="27" name="Oval 26">
             <a:extLst>
               <a:ext uri="{FF2B5EF4-FFF2-40B4-BE49-F238E27FC236}">
-                <a16:creationId xmlns:a16="http://schemas.microsoft.com/office/drawing/2014/main" xmlns="" id="{4D6A244D-C37F-8EA9-D320-66C3F301DAA2}"/>
+                <a16:creationId xmlns="" xmlns:a16="http://schemas.microsoft.com/office/drawing/2014/main" id="{4D6A244D-C37F-8EA9-D320-66C3F301DAA2}"/>
               </a:ext>
             </a:extLst>
           </p:cNvPr>
@@ -5341,7 +5778,7 @@
           <p:cNvPr id="28" name="Oval 27">
             <a:extLst>
               <a:ext uri="{FF2B5EF4-FFF2-40B4-BE49-F238E27FC236}">
-                <a16:creationId xmlns:a16="http://schemas.microsoft.com/office/drawing/2014/main" xmlns="" id="{D3EB1046-0243-7978-6626-819909534D31}"/>
+                <a16:creationId xmlns="" xmlns:a16="http://schemas.microsoft.com/office/drawing/2014/main" id="{D3EB1046-0243-7978-6626-819909534D31}"/>
               </a:ext>
             </a:extLst>
           </p:cNvPr>
@@ -5400,7 +5837,7 @@
           <p:cNvPr id="29" name="Oval 28">
             <a:extLst>
               <a:ext uri="{FF2B5EF4-FFF2-40B4-BE49-F238E27FC236}">
-                <a16:creationId xmlns:a16="http://schemas.microsoft.com/office/drawing/2014/main" xmlns="" id="{2BEE75EF-6BCD-26AF-ACF6-78A3DB789DFF}"/>
+                <a16:creationId xmlns="" xmlns:a16="http://schemas.microsoft.com/office/drawing/2014/main" id="{2BEE75EF-6BCD-26AF-ACF6-78A3DB789DFF}"/>
               </a:ext>
             </a:extLst>
           </p:cNvPr>
@@ -5459,7 +5896,7 @@
           <p:cNvPr id="30" name="Arc 29">
             <a:extLst>
               <a:ext uri="{FF2B5EF4-FFF2-40B4-BE49-F238E27FC236}">
-                <a16:creationId xmlns:a16="http://schemas.microsoft.com/office/drawing/2014/main" xmlns="" id="{2DEE4B5C-F0BE-F5F9-9014-424465A15603}"/>
+                <a16:creationId xmlns="" xmlns:a16="http://schemas.microsoft.com/office/drawing/2014/main" id="{2DEE4B5C-F0BE-F5F9-9014-424465A15603}"/>
               </a:ext>
             </a:extLst>
           </p:cNvPr>
@@ -5511,7 +5948,7 @@
           <p:cNvPr id="31" name="Arc 30">
             <a:extLst>
               <a:ext uri="{FF2B5EF4-FFF2-40B4-BE49-F238E27FC236}">
-                <a16:creationId xmlns:a16="http://schemas.microsoft.com/office/drawing/2014/main" xmlns="" id="{B5D3283F-5669-F54B-E3DB-36BEC0A2FC87}"/>
+                <a16:creationId xmlns="" xmlns:a16="http://schemas.microsoft.com/office/drawing/2014/main" id="{B5D3283F-5669-F54B-E3DB-36BEC0A2FC87}"/>
               </a:ext>
             </a:extLst>
           </p:cNvPr>
@@ -5563,7 +6000,7 @@
           <p:cNvPr id="32" name="Arc 31">
             <a:extLst>
               <a:ext uri="{FF2B5EF4-FFF2-40B4-BE49-F238E27FC236}">
-                <a16:creationId xmlns:a16="http://schemas.microsoft.com/office/drawing/2014/main" xmlns="" id="{F5319C07-D47D-D9B8-5314-CABDE70BD2BE}"/>
+                <a16:creationId xmlns="" xmlns:a16="http://schemas.microsoft.com/office/drawing/2014/main" id="{F5319C07-D47D-D9B8-5314-CABDE70BD2BE}"/>
               </a:ext>
             </a:extLst>
           </p:cNvPr>
@@ -5615,7 +6052,7 @@
           <p:cNvPr id="33" name="Arc 32">
             <a:extLst>
               <a:ext uri="{FF2B5EF4-FFF2-40B4-BE49-F238E27FC236}">
-                <a16:creationId xmlns:a16="http://schemas.microsoft.com/office/drawing/2014/main" xmlns="" id="{9701BAE2-0B11-9B44-A82F-D00093499F94}"/>
+                <a16:creationId xmlns="" xmlns:a16="http://schemas.microsoft.com/office/drawing/2014/main" id="{9701BAE2-0B11-9B44-A82F-D00093499F94}"/>
               </a:ext>
             </a:extLst>
           </p:cNvPr>
@@ -5667,7 +6104,7 @@
           <p:cNvPr id="34" name="Arc 33">
             <a:extLst>
               <a:ext uri="{FF2B5EF4-FFF2-40B4-BE49-F238E27FC236}">
-                <a16:creationId xmlns:a16="http://schemas.microsoft.com/office/drawing/2014/main" xmlns="" id="{EDA5E984-37A1-D71F-0F67-3278A9477939}"/>
+                <a16:creationId xmlns="" xmlns:a16="http://schemas.microsoft.com/office/drawing/2014/main" id="{EDA5E984-37A1-D71F-0F67-3278A9477939}"/>
               </a:ext>
             </a:extLst>
           </p:cNvPr>
@@ -5719,7 +6156,7 @@
           <p:cNvPr id="35" name="Arc 34">
             <a:extLst>
               <a:ext uri="{FF2B5EF4-FFF2-40B4-BE49-F238E27FC236}">
-                <a16:creationId xmlns:a16="http://schemas.microsoft.com/office/drawing/2014/main" xmlns="" id="{23362B0C-C78C-C8C5-A114-D7EBD425FE4E}"/>
+                <a16:creationId xmlns="" xmlns:a16="http://schemas.microsoft.com/office/drawing/2014/main" id="{23362B0C-C78C-C8C5-A114-D7EBD425FE4E}"/>
               </a:ext>
             </a:extLst>
           </p:cNvPr>
@@ -5771,7 +6208,7 @@
           <p:cNvPr id="36" name="Arc 35">
             <a:extLst>
               <a:ext uri="{FF2B5EF4-FFF2-40B4-BE49-F238E27FC236}">
-                <a16:creationId xmlns:a16="http://schemas.microsoft.com/office/drawing/2014/main" xmlns="" id="{B210D309-0CC7-2009-EFBB-E6423380CC22}"/>
+                <a16:creationId xmlns="" xmlns:a16="http://schemas.microsoft.com/office/drawing/2014/main" id="{B210D309-0CC7-2009-EFBB-E6423380CC22}"/>
               </a:ext>
             </a:extLst>
           </p:cNvPr>
@@ -5823,7 +6260,7 @@
           <p:cNvPr id="37" name="Arc 36">
             <a:extLst>
               <a:ext uri="{FF2B5EF4-FFF2-40B4-BE49-F238E27FC236}">
-                <a16:creationId xmlns:a16="http://schemas.microsoft.com/office/drawing/2014/main" xmlns="" id="{CD3E1EEF-8A01-1BA6-8D0C-E4BEC1E2E4C8}"/>
+                <a16:creationId xmlns="" xmlns:a16="http://schemas.microsoft.com/office/drawing/2014/main" id="{CD3E1EEF-8A01-1BA6-8D0C-E4BEC1E2E4C8}"/>
               </a:ext>
             </a:extLst>
           </p:cNvPr>
@@ -5875,7 +6312,7 @@
           <p:cNvPr id="38" name="Arc 37">
             <a:extLst>
               <a:ext uri="{FF2B5EF4-FFF2-40B4-BE49-F238E27FC236}">
-                <a16:creationId xmlns:a16="http://schemas.microsoft.com/office/drawing/2014/main" xmlns="" id="{47AC66C3-170E-03C4-372A-CD051E89D587}"/>
+                <a16:creationId xmlns="" xmlns:a16="http://schemas.microsoft.com/office/drawing/2014/main" id="{47AC66C3-170E-03C4-372A-CD051E89D587}"/>
               </a:ext>
             </a:extLst>
           </p:cNvPr>
@@ -5927,7 +6364,7 @@
           <p:cNvPr id="39" name="Arc 38">
             <a:extLst>
               <a:ext uri="{FF2B5EF4-FFF2-40B4-BE49-F238E27FC236}">
-                <a16:creationId xmlns:a16="http://schemas.microsoft.com/office/drawing/2014/main" xmlns="" id="{CC9A8E9A-04C2-DB87-8FFD-71E68CF1BCBA}"/>
+                <a16:creationId xmlns="" xmlns:a16="http://schemas.microsoft.com/office/drawing/2014/main" id="{CC9A8E9A-04C2-DB87-8FFD-71E68CF1BCBA}"/>
               </a:ext>
             </a:extLst>
           </p:cNvPr>
@@ -5979,7 +6416,7 @@
           <p:cNvPr id="40" name="Arc 39">
             <a:extLst>
               <a:ext uri="{FF2B5EF4-FFF2-40B4-BE49-F238E27FC236}">
-                <a16:creationId xmlns:a16="http://schemas.microsoft.com/office/drawing/2014/main" xmlns="" id="{259AE654-DDA0-91EB-876C-ABD6BECB77A1}"/>
+                <a16:creationId xmlns="" xmlns:a16="http://schemas.microsoft.com/office/drawing/2014/main" id="{259AE654-DDA0-91EB-876C-ABD6BECB77A1}"/>
               </a:ext>
             </a:extLst>
           </p:cNvPr>
@@ -6031,7 +6468,7 @@
           <p:cNvPr id="41" name="Arc 40">
             <a:extLst>
               <a:ext uri="{FF2B5EF4-FFF2-40B4-BE49-F238E27FC236}">
-                <a16:creationId xmlns:a16="http://schemas.microsoft.com/office/drawing/2014/main" xmlns="" id="{9555FDA0-E784-69FB-4825-063E431AF116}"/>
+                <a16:creationId xmlns="" xmlns:a16="http://schemas.microsoft.com/office/drawing/2014/main" id="{9555FDA0-E784-69FB-4825-063E431AF116}"/>
               </a:ext>
             </a:extLst>
           </p:cNvPr>
@@ -6083,7 +6520,7 @@
           <p:cNvPr id="42" name="Arc 41">
             <a:extLst>
               <a:ext uri="{FF2B5EF4-FFF2-40B4-BE49-F238E27FC236}">
-                <a16:creationId xmlns:a16="http://schemas.microsoft.com/office/drawing/2014/main" xmlns="" id="{5F05C170-61C6-CD0D-186C-1457DB059C5A}"/>
+                <a16:creationId xmlns="" xmlns:a16="http://schemas.microsoft.com/office/drawing/2014/main" id="{5F05C170-61C6-CD0D-186C-1457DB059C5A}"/>
               </a:ext>
             </a:extLst>
           </p:cNvPr>
@@ -6135,7 +6572,7 @@
           <p:cNvPr id="43" name="Arc 42">
             <a:extLst>
               <a:ext uri="{FF2B5EF4-FFF2-40B4-BE49-F238E27FC236}">
-                <a16:creationId xmlns:a16="http://schemas.microsoft.com/office/drawing/2014/main" xmlns="" id="{69367794-C189-7BE9-673E-822F3CC11EF0}"/>
+                <a16:creationId xmlns="" xmlns:a16="http://schemas.microsoft.com/office/drawing/2014/main" id="{69367794-C189-7BE9-673E-822F3CC11EF0}"/>
               </a:ext>
             </a:extLst>
           </p:cNvPr>
@@ -6187,7 +6624,7 @@
           <p:cNvPr id="44" name="Arc 43">
             <a:extLst>
               <a:ext uri="{FF2B5EF4-FFF2-40B4-BE49-F238E27FC236}">
-                <a16:creationId xmlns:a16="http://schemas.microsoft.com/office/drawing/2014/main" xmlns="" id="{885CBC3F-5F8B-B5DF-8E37-177EEFC3C788}"/>
+                <a16:creationId xmlns="" xmlns:a16="http://schemas.microsoft.com/office/drawing/2014/main" id="{885CBC3F-5F8B-B5DF-8E37-177EEFC3C788}"/>
               </a:ext>
             </a:extLst>
           </p:cNvPr>
@@ -6239,7 +6676,7 @@
           <p:cNvPr id="45" name="Arc 44">
             <a:extLst>
               <a:ext uri="{FF2B5EF4-FFF2-40B4-BE49-F238E27FC236}">
-                <a16:creationId xmlns:a16="http://schemas.microsoft.com/office/drawing/2014/main" xmlns="" id="{32CADEC0-864B-2494-ED14-C156E311F8FD}"/>
+                <a16:creationId xmlns="" xmlns:a16="http://schemas.microsoft.com/office/drawing/2014/main" id="{32CADEC0-864B-2494-ED14-C156E311F8FD}"/>
               </a:ext>
             </a:extLst>
           </p:cNvPr>
@@ -6291,7 +6728,7 @@
           <p:cNvPr id="46" name="Arc 45">
             <a:extLst>
               <a:ext uri="{FF2B5EF4-FFF2-40B4-BE49-F238E27FC236}">
-                <a16:creationId xmlns:a16="http://schemas.microsoft.com/office/drawing/2014/main" xmlns="" id="{E9C0E728-8CB0-9330-CF3A-71875A0836B6}"/>
+                <a16:creationId xmlns="" xmlns:a16="http://schemas.microsoft.com/office/drawing/2014/main" id="{E9C0E728-8CB0-9330-CF3A-71875A0836B6}"/>
               </a:ext>
             </a:extLst>
           </p:cNvPr>
@@ -6343,7 +6780,7 @@
           <p:cNvPr id="47" name="Arc 46">
             <a:extLst>
               <a:ext uri="{FF2B5EF4-FFF2-40B4-BE49-F238E27FC236}">
-                <a16:creationId xmlns:a16="http://schemas.microsoft.com/office/drawing/2014/main" xmlns="" id="{DB16B015-BAB2-59B6-56D2-478B01006E70}"/>
+                <a16:creationId xmlns="" xmlns:a16="http://schemas.microsoft.com/office/drawing/2014/main" id="{DB16B015-BAB2-59B6-56D2-478B01006E70}"/>
               </a:ext>
             </a:extLst>
           </p:cNvPr>
@@ -6395,7 +6832,7 @@
           <p:cNvPr id="48" name="Arc 47">
             <a:extLst>
               <a:ext uri="{FF2B5EF4-FFF2-40B4-BE49-F238E27FC236}">
-                <a16:creationId xmlns:a16="http://schemas.microsoft.com/office/drawing/2014/main" xmlns="" id="{D1864DBC-417E-AFB1-4AAB-4EB62A8072E1}"/>
+                <a16:creationId xmlns="" xmlns:a16="http://schemas.microsoft.com/office/drawing/2014/main" id="{D1864DBC-417E-AFB1-4AAB-4EB62A8072E1}"/>
               </a:ext>
             </a:extLst>
           </p:cNvPr>
@@ -6447,7 +6884,7 @@
           <p:cNvPr id="49" name="Arc 48">
             <a:extLst>
               <a:ext uri="{FF2B5EF4-FFF2-40B4-BE49-F238E27FC236}">
-                <a16:creationId xmlns:a16="http://schemas.microsoft.com/office/drawing/2014/main" xmlns="" id="{009E08CA-44A1-C1A5-4081-73926B58B71E}"/>
+                <a16:creationId xmlns="" xmlns:a16="http://schemas.microsoft.com/office/drawing/2014/main" id="{009E08CA-44A1-C1A5-4081-73926B58B71E}"/>
               </a:ext>
             </a:extLst>
           </p:cNvPr>
@@ -6499,7 +6936,7 @@
           <p:cNvPr id="50" name="Arc 49">
             <a:extLst>
               <a:ext uri="{FF2B5EF4-FFF2-40B4-BE49-F238E27FC236}">
-                <a16:creationId xmlns:a16="http://schemas.microsoft.com/office/drawing/2014/main" xmlns="" id="{D83AB14B-323B-A7D7-6C6B-0B6B6800D4D0}"/>
+                <a16:creationId xmlns="" xmlns:a16="http://schemas.microsoft.com/office/drawing/2014/main" id="{D83AB14B-323B-A7D7-6C6B-0B6B6800D4D0}"/>
               </a:ext>
             </a:extLst>
           </p:cNvPr>
@@ -6551,7 +6988,7 @@
           <p:cNvPr id="51" name="Arc 50">
             <a:extLst>
               <a:ext uri="{FF2B5EF4-FFF2-40B4-BE49-F238E27FC236}">
-                <a16:creationId xmlns:a16="http://schemas.microsoft.com/office/drawing/2014/main" xmlns="" id="{F471FF37-5178-5D56-4CC5-8ECD83D9DD95}"/>
+                <a16:creationId xmlns="" xmlns:a16="http://schemas.microsoft.com/office/drawing/2014/main" id="{F471FF37-5178-5D56-4CC5-8ECD83D9DD95}"/>
               </a:ext>
             </a:extLst>
           </p:cNvPr>
@@ -6603,7 +7040,7 @@
           <p:cNvPr id="52" name="Arc 51">
             <a:extLst>
               <a:ext uri="{FF2B5EF4-FFF2-40B4-BE49-F238E27FC236}">
-                <a16:creationId xmlns:a16="http://schemas.microsoft.com/office/drawing/2014/main" xmlns="" id="{8BDA9542-F099-F3D7-E3BC-9B8A60E2F009}"/>
+                <a16:creationId xmlns="" xmlns:a16="http://schemas.microsoft.com/office/drawing/2014/main" id="{8BDA9542-F099-F3D7-E3BC-9B8A60E2F009}"/>
               </a:ext>
             </a:extLst>
           </p:cNvPr>
@@ -6655,7 +7092,7 @@
           <p:cNvPr id="53" name="Arc 52">
             <a:extLst>
               <a:ext uri="{FF2B5EF4-FFF2-40B4-BE49-F238E27FC236}">
-                <a16:creationId xmlns:a16="http://schemas.microsoft.com/office/drawing/2014/main" xmlns="" id="{28F48FBE-9033-3E8C-BE15-DF4300368151}"/>
+                <a16:creationId xmlns="" xmlns:a16="http://schemas.microsoft.com/office/drawing/2014/main" id="{28F48FBE-9033-3E8C-BE15-DF4300368151}"/>
               </a:ext>
             </a:extLst>
           </p:cNvPr>
@@ -6707,7 +7144,7 @@
           <p:cNvPr id="3" name="Picture 2">
             <a:extLst>
               <a:ext uri="{FF2B5EF4-FFF2-40B4-BE49-F238E27FC236}">
-                <a16:creationId xmlns:a16="http://schemas.microsoft.com/office/drawing/2014/main" xmlns="" id="{A714208E-7BC2-744B-9B35-01B1E06C24F6}"/>
+                <a16:creationId xmlns="" xmlns:a16="http://schemas.microsoft.com/office/drawing/2014/main" id="{A714208E-7BC2-744B-9B35-01B1E06C24F6}"/>
               </a:ext>
             </a:extLst>
           </p:cNvPr>
@@ -6778,7 +7215,7 @@
         <p:cNvPr id="1" name="">
           <a:extLst>
             <a:ext uri="{FF2B5EF4-FFF2-40B4-BE49-F238E27FC236}">
-              <a16:creationId xmlns:a16="http://schemas.microsoft.com/office/drawing/2014/main" xmlns="" id="{77DD1F81-5917-513A-67AA-480E240E1D15}"/>
+              <a16:creationId xmlns="" xmlns:a16="http://schemas.microsoft.com/office/drawing/2014/main" id="{77DD1F81-5917-513A-67AA-480E240E1D15}"/>
             </a:ext>
           </a:extLst>
         </p:cNvPr>
@@ -6798,7 +7235,7 @@
           <p:cNvPr id="5" name="Rectangle 4">
             <a:extLst>
               <a:ext uri="{FF2B5EF4-FFF2-40B4-BE49-F238E27FC236}">
-                <a16:creationId xmlns:a16="http://schemas.microsoft.com/office/drawing/2014/main" xmlns="" id="{E0C648D6-43DB-24E9-95FB-80E6D2AE4101}"/>
+                <a16:creationId xmlns="" xmlns:a16="http://schemas.microsoft.com/office/drawing/2014/main" id="{E0C648D6-43DB-24E9-95FB-80E6D2AE4101}"/>
               </a:ext>
             </a:extLst>
           </p:cNvPr>
@@ -6854,7 +7291,7 @@
           <p:cNvPr id="4" name="Rectangle 3">
             <a:extLst>
               <a:ext uri="{FF2B5EF4-FFF2-40B4-BE49-F238E27FC236}">
-                <a16:creationId xmlns:a16="http://schemas.microsoft.com/office/drawing/2014/main" xmlns="" id="{B74FDDDD-F77D-E1C7-D97F-D561CBD61C36}"/>
+                <a16:creationId xmlns="" xmlns:a16="http://schemas.microsoft.com/office/drawing/2014/main" id="{B74FDDDD-F77D-E1C7-D97F-D561CBD61C36}"/>
               </a:ext>
             </a:extLst>
           </p:cNvPr>
@@ -7098,7 +7535,7 @@
           <p:cNvPr id="6" name="Oval 5">
             <a:extLst>
               <a:ext uri="{FF2B5EF4-FFF2-40B4-BE49-F238E27FC236}">
-                <a16:creationId xmlns:a16="http://schemas.microsoft.com/office/drawing/2014/main" xmlns="" id="{E2CCDE54-26D7-E71F-A35F-685C45520847}"/>
+                <a16:creationId xmlns="" xmlns:a16="http://schemas.microsoft.com/office/drawing/2014/main" id="{E2CCDE54-26D7-E71F-A35F-685C45520847}"/>
               </a:ext>
             </a:extLst>
           </p:cNvPr>
@@ -7157,7 +7594,7 @@
           <p:cNvPr id="7" name="Oval 6">
             <a:extLst>
               <a:ext uri="{FF2B5EF4-FFF2-40B4-BE49-F238E27FC236}">
-                <a16:creationId xmlns:a16="http://schemas.microsoft.com/office/drawing/2014/main" xmlns="" id="{2B5FB607-130E-A2AE-1F44-FAE1949D14AA}"/>
+                <a16:creationId xmlns="" xmlns:a16="http://schemas.microsoft.com/office/drawing/2014/main" id="{2B5FB607-130E-A2AE-1F44-FAE1949D14AA}"/>
               </a:ext>
             </a:extLst>
           </p:cNvPr>
@@ -7216,7 +7653,7 @@
           <p:cNvPr id="8" name="Oval 7">
             <a:extLst>
               <a:ext uri="{FF2B5EF4-FFF2-40B4-BE49-F238E27FC236}">
-                <a16:creationId xmlns:a16="http://schemas.microsoft.com/office/drawing/2014/main" xmlns="" id="{E153C2D7-F01A-A3F0-8F75-DCAA57FC1367}"/>
+                <a16:creationId xmlns="" xmlns:a16="http://schemas.microsoft.com/office/drawing/2014/main" id="{E153C2D7-F01A-A3F0-8F75-DCAA57FC1367}"/>
               </a:ext>
             </a:extLst>
           </p:cNvPr>
@@ -7275,7 +7712,7 @@
           <p:cNvPr id="9" name="Oval 8">
             <a:extLst>
               <a:ext uri="{FF2B5EF4-FFF2-40B4-BE49-F238E27FC236}">
-                <a16:creationId xmlns:a16="http://schemas.microsoft.com/office/drawing/2014/main" xmlns="" id="{81DB8CB2-5DDE-BF5C-52DC-9A61BEA7B06C}"/>
+                <a16:creationId xmlns="" xmlns:a16="http://schemas.microsoft.com/office/drawing/2014/main" id="{81DB8CB2-5DDE-BF5C-52DC-9A61BEA7B06C}"/>
               </a:ext>
             </a:extLst>
           </p:cNvPr>
@@ -7334,7 +7771,7 @@
           <p:cNvPr id="10" name="Oval 9">
             <a:extLst>
               <a:ext uri="{FF2B5EF4-FFF2-40B4-BE49-F238E27FC236}">
-                <a16:creationId xmlns:a16="http://schemas.microsoft.com/office/drawing/2014/main" xmlns="" id="{30CD698B-80F3-4BB7-C0AE-6FE30849C829}"/>
+                <a16:creationId xmlns="" xmlns:a16="http://schemas.microsoft.com/office/drawing/2014/main" id="{30CD698B-80F3-4BB7-C0AE-6FE30849C829}"/>
               </a:ext>
             </a:extLst>
           </p:cNvPr>
@@ -7393,7 +7830,7 @@
           <p:cNvPr id="11" name="Oval 10">
             <a:extLst>
               <a:ext uri="{FF2B5EF4-FFF2-40B4-BE49-F238E27FC236}">
-                <a16:creationId xmlns:a16="http://schemas.microsoft.com/office/drawing/2014/main" xmlns="" id="{B1938E0E-5407-8077-EF72-ED773B52C413}"/>
+                <a16:creationId xmlns="" xmlns:a16="http://schemas.microsoft.com/office/drawing/2014/main" id="{B1938E0E-5407-8077-EF72-ED773B52C413}"/>
               </a:ext>
             </a:extLst>
           </p:cNvPr>
@@ -7452,7 +7889,7 @@
           <p:cNvPr id="12" name="Oval 11">
             <a:extLst>
               <a:ext uri="{FF2B5EF4-FFF2-40B4-BE49-F238E27FC236}">
-                <a16:creationId xmlns:a16="http://schemas.microsoft.com/office/drawing/2014/main" xmlns="" id="{48B712CB-F3A2-A563-97D6-946AC44BE4E3}"/>
+                <a16:creationId xmlns="" xmlns:a16="http://schemas.microsoft.com/office/drawing/2014/main" id="{48B712CB-F3A2-A563-97D6-946AC44BE4E3}"/>
               </a:ext>
             </a:extLst>
           </p:cNvPr>
@@ -7511,7 +7948,7 @@
           <p:cNvPr id="13" name="Oval 12">
             <a:extLst>
               <a:ext uri="{FF2B5EF4-FFF2-40B4-BE49-F238E27FC236}">
-                <a16:creationId xmlns:a16="http://schemas.microsoft.com/office/drawing/2014/main" xmlns="" id="{B6F7AB43-09EF-BC29-D9A7-46B7A8CB7451}"/>
+                <a16:creationId xmlns="" xmlns:a16="http://schemas.microsoft.com/office/drawing/2014/main" id="{B6F7AB43-09EF-BC29-D9A7-46B7A8CB7451}"/>
               </a:ext>
             </a:extLst>
           </p:cNvPr>
@@ -7570,7 +8007,7 @@
           <p:cNvPr id="14" name="Oval 13">
             <a:extLst>
               <a:ext uri="{FF2B5EF4-FFF2-40B4-BE49-F238E27FC236}">
-                <a16:creationId xmlns:a16="http://schemas.microsoft.com/office/drawing/2014/main" xmlns="" id="{1BA1683D-2DCB-7C89-EB01-F424376DF393}"/>
+                <a16:creationId xmlns="" xmlns:a16="http://schemas.microsoft.com/office/drawing/2014/main" id="{1BA1683D-2DCB-7C89-EB01-F424376DF393}"/>
               </a:ext>
             </a:extLst>
           </p:cNvPr>
@@ -7629,7 +8066,7 @@
           <p:cNvPr id="15" name="Oval 14">
             <a:extLst>
               <a:ext uri="{FF2B5EF4-FFF2-40B4-BE49-F238E27FC236}">
-                <a16:creationId xmlns:a16="http://schemas.microsoft.com/office/drawing/2014/main" xmlns="" id="{AA2C12A7-BF1D-B83E-9F17-B395C162DF78}"/>
+                <a16:creationId xmlns="" xmlns:a16="http://schemas.microsoft.com/office/drawing/2014/main" id="{AA2C12A7-BF1D-B83E-9F17-B395C162DF78}"/>
               </a:ext>
             </a:extLst>
           </p:cNvPr>
@@ -7688,7 +8125,7 @@
           <p:cNvPr id="16" name="Oval 15">
             <a:extLst>
               <a:ext uri="{FF2B5EF4-FFF2-40B4-BE49-F238E27FC236}">
-                <a16:creationId xmlns:a16="http://schemas.microsoft.com/office/drawing/2014/main" xmlns="" id="{44E2FAEA-4220-C747-D2B2-85ADE4AE21E0}"/>
+                <a16:creationId xmlns="" xmlns:a16="http://schemas.microsoft.com/office/drawing/2014/main" id="{44E2FAEA-4220-C747-D2B2-85ADE4AE21E0}"/>
               </a:ext>
             </a:extLst>
           </p:cNvPr>
@@ -7747,7 +8184,7 @@
           <p:cNvPr id="17" name="Oval 16">
             <a:extLst>
               <a:ext uri="{FF2B5EF4-FFF2-40B4-BE49-F238E27FC236}">
-                <a16:creationId xmlns:a16="http://schemas.microsoft.com/office/drawing/2014/main" xmlns="" id="{152E3FF1-FBAF-DF03-2A66-33B5B6E09F80}"/>
+                <a16:creationId xmlns="" xmlns:a16="http://schemas.microsoft.com/office/drawing/2014/main" id="{152E3FF1-FBAF-DF03-2A66-33B5B6E09F80}"/>
               </a:ext>
             </a:extLst>
           </p:cNvPr>
@@ -7806,7 +8243,7 @@
           <p:cNvPr id="18" name="Oval 17">
             <a:extLst>
               <a:ext uri="{FF2B5EF4-FFF2-40B4-BE49-F238E27FC236}">
-                <a16:creationId xmlns:a16="http://schemas.microsoft.com/office/drawing/2014/main" xmlns="" id="{1435F393-D3CE-FB52-B90D-D53D37EB2A9C}"/>
+                <a16:creationId xmlns="" xmlns:a16="http://schemas.microsoft.com/office/drawing/2014/main" id="{1435F393-D3CE-FB52-B90D-D53D37EB2A9C}"/>
               </a:ext>
             </a:extLst>
           </p:cNvPr>
@@ -7865,7 +8302,7 @@
           <p:cNvPr id="19" name="Oval 18">
             <a:extLst>
               <a:ext uri="{FF2B5EF4-FFF2-40B4-BE49-F238E27FC236}">
-                <a16:creationId xmlns:a16="http://schemas.microsoft.com/office/drawing/2014/main" xmlns="" id="{D0356B91-4838-4410-6213-D2F0D4630F62}"/>
+                <a16:creationId xmlns="" xmlns:a16="http://schemas.microsoft.com/office/drawing/2014/main" id="{D0356B91-4838-4410-6213-D2F0D4630F62}"/>
               </a:ext>
             </a:extLst>
           </p:cNvPr>
@@ -7924,7 +8361,7 @@
           <p:cNvPr id="20" name="Oval 19">
             <a:extLst>
               <a:ext uri="{FF2B5EF4-FFF2-40B4-BE49-F238E27FC236}">
-                <a16:creationId xmlns:a16="http://schemas.microsoft.com/office/drawing/2014/main" xmlns="" id="{99278423-57C3-E35B-44EB-497FBB777FFF}"/>
+                <a16:creationId xmlns="" xmlns:a16="http://schemas.microsoft.com/office/drawing/2014/main" id="{99278423-57C3-E35B-44EB-497FBB777FFF}"/>
               </a:ext>
             </a:extLst>
           </p:cNvPr>
@@ -7983,7 +8420,7 @@
           <p:cNvPr id="21" name="Oval 20">
             <a:extLst>
               <a:ext uri="{FF2B5EF4-FFF2-40B4-BE49-F238E27FC236}">
-                <a16:creationId xmlns:a16="http://schemas.microsoft.com/office/drawing/2014/main" xmlns="" id="{32866435-5F44-D62F-6323-E1B0DDB1CF21}"/>
+                <a16:creationId xmlns="" xmlns:a16="http://schemas.microsoft.com/office/drawing/2014/main" id="{32866435-5F44-D62F-6323-E1B0DDB1CF21}"/>
               </a:ext>
             </a:extLst>
           </p:cNvPr>
@@ -8042,7 +8479,7 @@
           <p:cNvPr id="22" name="Oval 21">
             <a:extLst>
               <a:ext uri="{FF2B5EF4-FFF2-40B4-BE49-F238E27FC236}">
-                <a16:creationId xmlns:a16="http://schemas.microsoft.com/office/drawing/2014/main" xmlns="" id="{7FE924C8-E13F-C843-BFBF-1AF4C40923ED}"/>
+                <a16:creationId xmlns="" xmlns:a16="http://schemas.microsoft.com/office/drawing/2014/main" id="{7FE924C8-E13F-C843-BFBF-1AF4C40923ED}"/>
               </a:ext>
             </a:extLst>
           </p:cNvPr>
@@ -8101,7 +8538,7 @@
           <p:cNvPr id="23" name="Oval 22">
             <a:extLst>
               <a:ext uri="{FF2B5EF4-FFF2-40B4-BE49-F238E27FC236}">
-                <a16:creationId xmlns:a16="http://schemas.microsoft.com/office/drawing/2014/main" xmlns="" id="{A26001AF-2022-3482-414E-365A6B7ED7E1}"/>
+                <a16:creationId xmlns="" xmlns:a16="http://schemas.microsoft.com/office/drawing/2014/main" id="{A26001AF-2022-3482-414E-365A6B7ED7E1}"/>
               </a:ext>
             </a:extLst>
           </p:cNvPr>
@@ -8160,7 +8597,7 @@
           <p:cNvPr id="24" name="Oval 23">
             <a:extLst>
               <a:ext uri="{FF2B5EF4-FFF2-40B4-BE49-F238E27FC236}">
-                <a16:creationId xmlns:a16="http://schemas.microsoft.com/office/drawing/2014/main" xmlns="" id="{C1DA9D15-0E3E-F55A-97D5-E7C443444E00}"/>
+                <a16:creationId xmlns="" xmlns:a16="http://schemas.microsoft.com/office/drawing/2014/main" id="{C1DA9D15-0E3E-F55A-97D5-E7C443444E00}"/>
               </a:ext>
             </a:extLst>
           </p:cNvPr>
@@ -8219,7 +8656,7 @@
           <p:cNvPr id="25" name="Oval 24">
             <a:extLst>
               <a:ext uri="{FF2B5EF4-FFF2-40B4-BE49-F238E27FC236}">
-                <a16:creationId xmlns:a16="http://schemas.microsoft.com/office/drawing/2014/main" xmlns="" id="{6C64C353-347D-7512-5087-5BCB3A2CE6E2}"/>
+                <a16:creationId xmlns="" xmlns:a16="http://schemas.microsoft.com/office/drawing/2014/main" id="{6C64C353-347D-7512-5087-5BCB3A2CE6E2}"/>
               </a:ext>
             </a:extLst>
           </p:cNvPr>
@@ -8278,7 +8715,7 @@
           <p:cNvPr id="26" name="Oval 25">
             <a:extLst>
               <a:ext uri="{FF2B5EF4-FFF2-40B4-BE49-F238E27FC236}">
-                <a16:creationId xmlns:a16="http://schemas.microsoft.com/office/drawing/2014/main" xmlns="" id="{EC0B1FAA-B5A3-F63E-BB7D-C48C6A1EF7AB}"/>
+                <a16:creationId xmlns="" xmlns:a16="http://schemas.microsoft.com/office/drawing/2014/main" id="{EC0B1FAA-B5A3-F63E-BB7D-C48C6A1EF7AB}"/>
               </a:ext>
             </a:extLst>
           </p:cNvPr>
@@ -8337,7 +8774,7 @@
           <p:cNvPr id="27" name="Oval 26">
             <a:extLst>
               <a:ext uri="{FF2B5EF4-FFF2-40B4-BE49-F238E27FC236}">
-                <a16:creationId xmlns:a16="http://schemas.microsoft.com/office/drawing/2014/main" xmlns="" id="{50E8E9E8-10F3-F2C4-598C-6DE942D217F9}"/>
+                <a16:creationId xmlns="" xmlns:a16="http://schemas.microsoft.com/office/drawing/2014/main" id="{50E8E9E8-10F3-F2C4-598C-6DE942D217F9}"/>
               </a:ext>
             </a:extLst>
           </p:cNvPr>
@@ -8396,7 +8833,7 @@
           <p:cNvPr id="28" name="Oval 27">
             <a:extLst>
               <a:ext uri="{FF2B5EF4-FFF2-40B4-BE49-F238E27FC236}">
-                <a16:creationId xmlns:a16="http://schemas.microsoft.com/office/drawing/2014/main" xmlns="" id="{24EF7BD8-8073-14F5-1E36-392FA3A64BAD}"/>
+                <a16:creationId xmlns="" xmlns:a16="http://schemas.microsoft.com/office/drawing/2014/main" id="{24EF7BD8-8073-14F5-1E36-392FA3A64BAD}"/>
               </a:ext>
             </a:extLst>
           </p:cNvPr>
@@ -8455,7 +8892,7 @@
           <p:cNvPr id="29" name="Oval 28">
             <a:extLst>
               <a:ext uri="{FF2B5EF4-FFF2-40B4-BE49-F238E27FC236}">
-                <a16:creationId xmlns:a16="http://schemas.microsoft.com/office/drawing/2014/main" xmlns="" id="{2CBB44C7-2A6A-23C2-FACB-BE404705CEC8}"/>
+                <a16:creationId xmlns="" xmlns:a16="http://schemas.microsoft.com/office/drawing/2014/main" id="{2CBB44C7-2A6A-23C2-FACB-BE404705CEC8}"/>
               </a:ext>
             </a:extLst>
           </p:cNvPr>
@@ -8514,7 +8951,7 @@
           <p:cNvPr id="3" name="Group 2">
             <a:extLst>
               <a:ext uri="{FF2B5EF4-FFF2-40B4-BE49-F238E27FC236}">
-                <a16:creationId xmlns:a16="http://schemas.microsoft.com/office/drawing/2014/main" xmlns="" id="{E5A0CA92-39C9-7575-C3DA-93077042A206}"/>
+                <a16:creationId xmlns="" xmlns:a16="http://schemas.microsoft.com/office/drawing/2014/main" id="{E5A0CA92-39C9-7575-C3DA-93077042A206}"/>
               </a:ext>
             </a:extLst>
           </p:cNvPr>
@@ -8534,7 +8971,7 @@
             <p:cNvPr id="2" name="Oval 1">
               <a:extLst>
                 <a:ext uri="{FF2B5EF4-FFF2-40B4-BE49-F238E27FC236}">
-                  <a16:creationId xmlns:a16="http://schemas.microsoft.com/office/drawing/2014/main" xmlns="" id="{EE98DD9A-0CC8-E237-426C-E194BD68842E}"/>
+                  <a16:creationId xmlns="" xmlns:a16="http://schemas.microsoft.com/office/drawing/2014/main" id="{EE98DD9A-0CC8-E237-426C-E194BD68842E}"/>
                 </a:ext>
               </a:extLst>
             </p:cNvPr>
@@ -8593,7 +9030,7 @@
             <p:cNvPr id="30" name="Arc 29">
               <a:extLst>
                 <a:ext uri="{FF2B5EF4-FFF2-40B4-BE49-F238E27FC236}">
-                  <a16:creationId xmlns:a16="http://schemas.microsoft.com/office/drawing/2014/main" xmlns="" id="{440ED8E4-C0B5-31F0-5171-F4BC55B2DBBF}"/>
+                  <a16:creationId xmlns="" xmlns:a16="http://schemas.microsoft.com/office/drawing/2014/main" id="{440ED8E4-C0B5-31F0-5171-F4BC55B2DBBF}"/>
                 </a:ext>
               </a:extLst>
             </p:cNvPr>
@@ -8646,7 +9083,7 @@
           <p:cNvPr id="54" name="Group 53">
             <a:extLst>
               <a:ext uri="{FF2B5EF4-FFF2-40B4-BE49-F238E27FC236}">
-                <a16:creationId xmlns:a16="http://schemas.microsoft.com/office/drawing/2014/main" xmlns="" id="{56AC3AC4-4003-93D4-6554-87545C42967E}"/>
+                <a16:creationId xmlns="" xmlns:a16="http://schemas.microsoft.com/office/drawing/2014/main" id="{56AC3AC4-4003-93D4-6554-87545C42967E}"/>
               </a:ext>
             </a:extLst>
           </p:cNvPr>
@@ -8666,7 +9103,7 @@
             <p:cNvPr id="55" name="Oval 54">
               <a:extLst>
                 <a:ext uri="{FF2B5EF4-FFF2-40B4-BE49-F238E27FC236}">
-                  <a16:creationId xmlns:a16="http://schemas.microsoft.com/office/drawing/2014/main" xmlns="" id="{32E45708-1BEA-E117-DD14-F7334AFC204D}"/>
+                  <a16:creationId xmlns="" xmlns:a16="http://schemas.microsoft.com/office/drawing/2014/main" id="{32E45708-1BEA-E117-DD14-F7334AFC204D}"/>
                 </a:ext>
               </a:extLst>
             </p:cNvPr>
@@ -8725,7 +9162,7 @@
             <p:cNvPr id="56" name="Arc 55">
               <a:extLst>
                 <a:ext uri="{FF2B5EF4-FFF2-40B4-BE49-F238E27FC236}">
-                  <a16:creationId xmlns:a16="http://schemas.microsoft.com/office/drawing/2014/main" xmlns="" id="{587C9C08-013D-E76D-1567-F53DBD148B1C}"/>
+                  <a16:creationId xmlns="" xmlns:a16="http://schemas.microsoft.com/office/drawing/2014/main" id="{587C9C08-013D-E76D-1567-F53DBD148B1C}"/>
                 </a:ext>
               </a:extLst>
             </p:cNvPr>
@@ -8778,7 +9215,7 @@
           <p:cNvPr id="57" name="Group 56">
             <a:extLst>
               <a:ext uri="{FF2B5EF4-FFF2-40B4-BE49-F238E27FC236}">
-                <a16:creationId xmlns:a16="http://schemas.microsoft.com/office/drawing/2014/main" xmlns="" id="{BDFE12BD-C936-321F-DA6D-4D4CD52DB306}"/>
+                <a16:creationId xmlns="" xmlns:a16="http://schemas.microsoft.com/office/drawing/2014/main" id="{BDFE12BD-C936-321F-DA6D-4D4CD52DB306}"/>
               </a:ext>
             </a:extLst>
           </p:cNvPr>
@@ -8798,7 +9235,7 @@
             <p:cNvPr id="58" name="Oval 57">
               <a:extLst>
                 <a:ext uri="{FF2B5EF4-FFF2-40B4-BE49-F238E27FC236}">
-                  <a16:creationId xmlns:a16="http://schemas.microsoft.com/office/drawing/2014/main" xmlns="" id="{6E2DFFE8-BF59-234A-B94D-F7275B90F41E}"/>
+                  <a16:creationId xmlns="" xmlns:a16="http://schemas.microsoft.com/office/drawing/2014/main" id="{6E2DFFE8-BF59-234A-B94D-F7275B90F41E}"/>
                 </a:ext>
               </a:extLst>
             </p:cNvPr>
@@ -8857,7 +9294,7 @@
             <p:cNvPr id="59" name="Arc 58">
               <a:extLst>
                 <a:ext uri="{FF2B5EF4-FFF2-40B4-BE49-F238E27FC236}">
-                  <a16:creationId xmlns:a16="http://schemas.microsoft.com/office/drawing/2014/main" xmlns="" id="{EEC88090-6502-5B06-82D5-5E9192739559}"/>
+                  <a16:creationId xmlns="" xmlns:a16="http://schemas.microsoft.com/office/drawing/2014/main" id="{EEC88090-6502-5B06-82D5-5E9192739559}"/>
                 </a:ext>
               </a:extLst>
             </p:cNvPr>
@@ -8910,7 +9347,7 @@
           <p:cNvPr id="60" name="Group 59">
             <a:extLst>
               <a:ext uri="{FF2B5EF4-FFF2-40B4-BE49-F238E27FC236}">
-                <a16:creationId xmlns:a16="http://schemas.microsoft.com/office/drawing/2014/main" xmlns="" id="{7F60A61B-F502-FC12-63BB-11C035BE48F4}"/>
+                <a16:creationId xmlns="" xmlns:a16="http://schemas.microsoft.com/office/drawing/2014/main" id="{7F60A61B-F502-FC12-63BB-11C035BE48F4}"/>
               </a:ext>
             </a:extLst>
           </p:cNvPr>
@@ -8930,7 +9367,7 @@
             <p:cNvPr id="61" name="Oval 60">
               <a:extLst>
                 <a:ext uri="{FF2B5EF4-FFF2-40B4-BE49-F238E27FC236}">
-                  <a16:creationId xmlns:a16="http://schemas.microsoft.com/office/drawing/2014/main" xmlns="" id="{406DC092-351A-3F70-7250-FD0707AB9BC0}"/>
+                  <a16:creationId xmlns="" xmlns:a16="http://schemas.microsoft.com/office/drawing/2014/main" id="{406DC092-351A-3F70-7250-FD0707AB9BC0}"/>
                 </a:ext>
               </a:extLst>
             </p:cNvPr>
@@ -8989,7 +9426,7 @@
             <p:cNvPr id="62" name="Arc 61">
               <a:extLst>
                 <a:ext uri="{FF2B5EF4-FFF2-40B4-BE49-F238E27FC236}">
-                  <a16:creationId xmlns:a16="http://schemas.microsoft.com/office/drawing/2014/main" xmlns="" id="{5E21C94A-7063-9B4A-5DF4-AAAABB65A7E9}"/>
+                  <a16:creationId xmlns="" xmlns:a16="http://schemas.microsoft.com/office/drawing/2014/main" id="{5E21C94A-7063-9B4A-5DF4-AAAABB65A7E9}"/>
                 </a:ext>
               </a:extLst>
             </p:cNvPr>
@@ -9042,7 +9479,7 @@
           <p:cNvPr id="63" name="Group 62">
             <a:extLst>
               <a:ext uri="{FF2B5EF4-FFF2-40B4-BE49-F238E27FC236}">
-                <a16:creationId xmlns:a16="http://schemas.microsoft.com/office/drawing/2014/main" xmlns="" id="{6EF408B0-0BDB-3D6F-BA04-0FF19F98F64C}"/>
+                <a16:creationId xmlns="" xmlns:a16="http://schemas.microsoft.com/office/drawing/2014/main" id="{6EF408B0-0BDB-3D6F-BA04-0FF19F98F64C}"/>
               </a:ext>
             </a:extLst>
           </p:cNvPr>
@@ -9062,7 +9499,7 @@
             <p:cNvPr id="64" name="Oval 63">
               <a:extLst>
                 <a:ext uri="{FF2B5EF4-FFF2-40B4-BE49-F238E27FC236}">
-                  <a16:creationId xmlns:a16="http://schemas.microsoft.com/office/drawing/2014/main" xmlns="" id="{058DEE75-92F4-D869-0AE6-F722C3448B1C}"/>
+                  <a16:creationId xmlns="" xmlns:a16="http://schemas.microsoft.com/office/drawing/2014/main" id="{058DEE75-92F4-D869-0AE6-F722C3448B1C}"/>
                 </a:ext>
               </a:extLst>
             </p:cNvPr>
@@ -9121,7 +9558,7 @@
             <p:cNvPr id="65" name="Arc 64">
               <a:extLst>
                 <a:ext uri="{FF2B5EF4-FFF2-40B4-BE49-F238E27FC236}">
-                  <a16:creationId xmlns:a16="http://schemas.microsoft.com/office/drawing/2014/main" xmlns="" id="{7E3B28C1-2093-80DA-E0D9-CD72049F9AF2}"/>
+                  <a16:creationId xmlns="" xmlns:a16="http://schemas.microsoft.com/office/drawing/2014/main" id="{7E3B28C1-2093-80DA-E0D9-CD72049F9AF2}"/>
                 </a:ext>
               </a:extLst>
             </p:cNvPr>
@@ -9174,7 +9611,7 @@
           <p:cNvPr id="66" name="Group 65">
             <a:extLst>
               <a:ext uri="{FF2B5EF4-FFF2-40B4-BE49-F238E27FC236}">
-                <a16:creationId xmlns:a16="http://schemas.microsoft.com/office/drawing/2014/main" xmlns="" id="{EBC7586D-B6D6-B6F4-9157-AAE67C51A232}"/>
+                <a16:creationId xmlns="" xmlns:a16="http://schemas.microsoft.com/office/drawing/2014/main" id="{EBC7586D-B6D6-B6F4-9157-AAE67C51A232}"/>
               </a:ext>
             </a:extLst>
           </p:cNvPr>
@@ -9194,7 +9631,7 @@
             <p:cNvPr id="67" name="Oval 66">
               <a:extLst>
                 <a:ext uri="{FF2B5EF4-FFF2-40B4-BE49-F238E27FC236}">
-                  <a16:creationId xmlns:a16="http://schemas.microsoft.com/office/drawing/2014/main" xmlns="" id="{63B4EB66-1C87-3007-FDE0-2911FBAA94ED}"/>
+                  <a16:creationId xmlns="" xmlns:a16="http://schemas.microsoft.com/office/drawing/2014/main" id="{63B4EB66-1C87-3007-FDE0-2911FBAA94ED}"/>
                 </a:ext>
               </a:extLst>
             </p:cNvPr>
@@ -9253,7 +9690,7 @@
             <p:cNvPr id="68" name="Arc 67">
               <a:extLst>
                 <a:ext uri="{FF2B5EF4-FFF2-40B4-BE49-F238E27FC236}">
-                  <a16:creationId xmlns:a16="http://schemas.microsoft.com/office/drawing/2014/main" xmlns="" id="{A57E758B-EE06-E9BD-9BCE-E29F16AEC2C7}"/>
+                  <a16:creationId xmlns="" xmlns:a16="http://schemas.microsoft.com/office/drawing/2014/main" id="{A57E758B-EE06-E9BD-9BCE-E29F16AEC2C7}"/>
                 </a:ext>
               </a:extLst>
             </p:cNvPr>
@@ -9306,7 +9743,7 @@
           <p:cNvPr id="69" name="Group 68">
             <a:extLst>
               <a:ext uri="{FF2B5EF4-FFF2-40B4-BE49-F238E27FC236}">
-                <a16:creationId xmlns:a16="http://schemas.microsoft.com/office/drawing/2014/main" xmlns="" id="{794DA135-28DD-93FB-0982-C53F8BF0126F}"/>
+                <a16:creationId xmlns="" xmlns:a16="http://schemas.microsoft.com/office/drawing/2014/main" id="{794DA135-28DD-93FB-0982-C53F8BF0126F}"/>
               </a:ext>
             </a:extLst>
           </p:cNvPr>
@@ -9326,7 +9763,7 @@
             <p:cNvPr id="70" name="Oval 69">
               <a:extLst>
                 <a:ext uri="{FF2B5EF4-FFF2-40B4-BE49-F238E27FC236}">
-                  <a16:creationId xmlns:a16="http://schemas.microsoft.com/office/drawing/2014/main" xmlns="" id="{EC1F6917-9875-6D59-CDB6-9328CB1EB6E0}"/>
+                  <a16:creationId xmlns="" xmlns:a16="http://schemas.microsoft.com/office/drawing/2014/main" id="{EC1F6917-9875-6D59-CDB6-9328CB1EB6E0}"/>
                 </a:ext>
               </a:extLst>
             </p:cNvPr>
@@ -9385,7 +9822,7 @@
             <p:cNvPr id="71" name="Arc 70">
               <a:extLst>
                 <a:ext uri="{FF2B5EF4-FFF2-40B4-BE49-F238E27FC236}">
-                  <a16:creationId xmlns:a16="http://schemas.microsoft.com/office/drawing/2014/main" xmlns="" id="{842178B8-6D8B-2DB3-4A4F-8B6F251B239D}"/>
+                  <a16:creationId xmlns="" xmlns:a16="http://schemas.microsoft.com/office/drawing/2014/main" id="{842178B8-6D8B-2DB3-4A4F-8B6F251B239D}"/>
                 </a:ext>
               </a:extLst>
             </p:cNvPr>
@@ -9438,7 +9875,7 @@
           <p:cNvPr id="72" name="Group 71">
             <a:extLst>
               <a:ext uri="{FF2B5EF4-FFF2-40B4-BE49-F238E27FC236}">
-                <a16:creationId xmlns:a16="http://schemas.microsoft.com/office/drawing/2014/main" xmlns="" id="{6334D252-8063-7B32-45FD-91E3566C00B1}"/>
+                <a16:creationId xmlns="" xmlns:a16="http://schemas.microsoft.com/office/drawing/2014/main" id="{6334D252-8063-7B32-45FD-91E3566C00B1}"/>
               </a:ext>
             </a:extLst>
           </p:cNvPr>
@@ -9458,7 +9895,7 @@
             <p:cNvPr id="73" name="Oval 72">
               <a:extLst>
                 <a:ext uri="{FF2B5EF4-FFF2-40B4-BE49-F238E27FC236}">
-                  <a16:creationId xmlns:a16="http://schemas.microsoft.com/office/drawing/2014/main" xmlns="" id="{F175E0F1-8A3B-D28B-D692-84C3D5CA94F2}"/>
+                  <a16:creationId xmlns="" xmlns:a16="http://schemas.microsoft.com/office/drawing/2014/main" id="{F175E0F1-8A3B-D28B-D692-84C3D5CA94F2}"/>
                 </a:ext>
               </a:extLst>
             </p:cNvPr>
@@ -9517,7 +9954,7 @@
             <p:cNvPr id="74" name="Arc 73">
               <a:extLst>
                 <a:ext uri="{FF2B5EF4-FFF2-40B4-BE49-F238E27FC236}">
-                  <a16:creationId xmlns:a16="http://schemas.microsoft.com/office/drawing/2014/main" xmlns="" id="{94340669-E9B7-4A15-910F-8569189F2B0E}"/>
+                  <a16:creationId xmlns="" xmlns:a16="http://schemas.microsoft.com/office/drawing/2014/main" id="{94340669-E9B7-4A15-910F-8569189F2B0E}"/>
                 </a:ext>
               </a:extLst>
             </p:cNvPr>
@@ -9570,7 +10007,7 @@
           <p:cNvPr id="75" name="Group 74">
             <a:extLst>
               <a:ext uri="{FF2B5EF4-FFF2-40B4-BE49-F238E27FC236}">
-                <a16:creationId xmlns:a16="http://schemas.microsoft.com/office/drawing/2014/main" xmlns="" id="{B41398A0-5D8C-219B-7CF3-EF3369FD9E4D}"/>
+                <a16:creationId xmlns="" xmlns:a16="http://schemas.microsoft.com/office/drawing/2014/main" id="{B41398A0-5D8C-219B-7CF3-EF3369FD9E4D}"/>
               </a:ext>
             </a:extLst>
           </p:cNvPr>
@@ -9590,7 +10027,7 @@
             <p:cNvPr id="76" name="Oval 75">
               <a:extLst>
                 <a:ext uri="{FF2B5EF4-FFF2-40B4-BE49-F238E27FC236}">
-                  <a16:creationId xmlns:a16="http://schemas.microsoft.com/office/drawing/2014/main" xmlns="" id="{1F95D269-31AF-EE79-42C4-DDC3A2ED8D09}"/>
+                  <a16:creationId xmlns="" xmlns:a16="http://schemas.microsoft.com/office/drawing/2014/main" id="{1F95D269-31AF-EE79-42C4-DDC3A2ED8D09}"/>
                 </a:ext>
               </a:extLst>
             </p:cNvPr>
@@ -9649,7 +10086,7 @@
             <p:cNvPr id="77" name="Arc 76">
               <a:extLst>
                 <a:ext uri="{FF2B5EF4-FFF2-40B4-BE49-F238E27FC236}">
-                  <a16:creationId xmlns:a16="http://schemas.microsoft.com/office/drawing/2014/main" xmlns="" id="{3ACBF1A9-8DFC-D5E0-8C08-8322271D3A77}"/>
+                  <a16:creationId xmlns="" xmlns:a16="http://schemas.microsoft.com/office/drawing/2014/main" id="{3ACBF1A9-8DFC-D5E0-8C08-8322271D3A77}"/>
                 </a:ext>
               </a:extLst>
             </p:cNvPr>
@@ -9702,7 +10139,7 @@
           <p:cNvPr id="78" name="Group 77">
             <a:extLst>
               <a:ext uri="{FF2B5EF4-FFF2-40B4-BE49-F238E27FC236}">
-                <a16:creationId xmlns:a16="http://schemas.microsoft.com/office/drawing/2014/main" xmlns="" id="{8E4DECA8-5BE8-6E15-F9E0-06A97135B17A}"/>
+                <a16:creationId xmlns="" xmlns:a16="http://schemas.microsoft.com/office/drawing/2014/main" id="{8E4DECA8-5BE8-6E15-F9E0-06A97135B17A}"/>
               </a:ext>
             </a:extLst>
           </p:cNvPr>
@@ -9722,7 +10159,7 @@
             <p:cNvPr id="79" name="Oval 78">
               <a:extLst>
                 <a:ext uri="{FF2B5EF4-FFF2-40B4-BE49-F238E27FC236}">
-                  <a16:creationId xmlns:a16="http://schemas.microsoft.com/office/drawing/2014/main" xmlns="" id="{3F33D6DD-BFC2-AC5B-5E25-79F2C77A2498}"/>
+                  <a16:creationId xmlns="" xmlns:a16="http://schemas.microsoft.com/office/drawing/2014/main" id="{3F33D6DD-BFC2-AC5B-5E25-79F2C77A2498}"/>
                 </a:ext>
               </a:extLst>
             </p:cNvPr>
@@ -9781,7 +10218,7 @@
             <p:cNvPr id="80" name="Arc 79">
               <a:extLst>
                 <a:ext uri="{FF2B5EF4-FFF2-40B4-BE49-F238E27FC236}">
-                  <a16:creationId xmlns:a16="http://schemas.microsoft.com/office/drawing/2014/main" xmlns="" id="{14B35254-5989-49DC-72B0-1E3FDCA19A35}"/>
+                  <a16:creationId xmlns="" xmlns:a16="http://schemas.microsoft.com/office/drawing/2014/main" id="{14B35254-5989-49DC-72B0-1E3FDCA19A35}"/>
                 </a:ext>
               </a:extLst>
             </p:cNvPr>
@@ -9834,7 +10271,7 @@
           <p:cNvPr id="81" name="Group 80">
             <a:extLst>
               <a:ext uri="{FF2B5EF4-FFF2-40B4-BE49-F238E27FC236}">
-                <a16:creationId xmlns:a16="http://schemas.microsoft.com/office/drawing/2014/main" xmlns="" id="{6ACD5758-357E-6448-5CD6-34B367C8C8F4}"/>
+                <a16:creationId xmlns="" xmlns:a16="http://schemas.microsoft.com/office/drawing/2014/main" id="{6ACD5758-357E-6448-5CD6-34B367C8C8F4}"/>
               </a:ext>
             </a:extLst>
           </p:cNvPr>
@@ -9854,7 +10291,7 @@
             <p:cNvPr id="82" name="Oval 81">
               <a:extLst>
                 <a:ext uri="{FF2B5EF4-FFF2-40B4-BE49-F238E27FC236}">
-                  <a16:creationId xmlns:a16="http://schemas.microsoft.com/office/drawing/2014/main" xmlns="" id="{90FE7B1E-CC38-A41E-BBBB-0E1E1BB51E0C}"/>
+                  <a16:creationId xmlns="" xmlns:a16="http://schemas.microsoft.com/office/drawing/2014/main" id="{90FE7B1E-CC38-A41E-BBBB-0E1E1BB51E0C}"/>
                 </a:ext>
               </a:extLst>
             </p:cNvPr>
@@ -9913,7 +10350,7 @@
             <p:cNvPr id="83" name="Arc 82">
               <a:extLst>
                 <a:ext uri="{FF2B5EF4-FFF2-40B4-BE49-F238E27FC236}">
-                  <a16:creationId xmlns:a16="http://schemas.microsoft.com/office/drawing/2014/main" xmlns="" id="{064FB018-B832-A6C8-6A18-4C82A055BE4E}"/>
+                  <a16:creationId xmlns="" xmlns:a16="http://schemas.microsoft.com/office/drawing/2014/main" id="{064FB018-B832-A6C8-6A18-4C82A055BE4E}"/>
                 </a:ext>
               </a:extLst>
             </p:cNvPr>
@@ -9966,7 +10403,7 @@
           <p:cNvPr id="84" name="Group 83">
             <a:extLst>
               <a:ext uri="{FF2B5EF4-FFF2-40B4-BE49-F238E27FC236}">
-                <a16:creationId xmlns:a16="http://schemas.microsoft.com/office/drawing/2014/main" xmlns="" id="{BC87D57E-0711-1C8F-E1DC-27BA2E1B0156}"/>
+                <a16:creationId xmlns="" xmlns:a16="http://schemas.microsoft.com/office/drawing/2014/main" id="{BC87D57E-0711-1C8F-E1DC-27BA2E1B0156}"/>
               </a:ext>
             </a:extLst>
           </p:cNvPr>
@@ -9986,7 +10423,7 @@
             <p:cNvPr id="85" name="Oval 84">
               <a:extLst>
                 <a:ext uri="{FF2B5EF4-FFF2-40B4-BE49-F238E27FC236}">
-                  <a16:creationId xmlns:a16="http://schemas.microsoft.com/office/drawing/2014/main" xmlns="" id="{DCBFC7E3-4491-9020-426F-10C3DC5EF404}"/>
+                  <a16:creationId xmlns="" xmlns:a16="http://schemas.microsoft.com/office/drawing/2014/main" id="{DCBFC7E3-4491-9020-426F-10C3DC5EF404}"/>
                 </a:ext>
               </a:extLst>
             </p:cNvPr>
@@ -10045,7 +10482,7 @@
             <p:cNvPr id="86" name="Arc 85">
               <a:extLst>
                 <a:ext uri="{FF2B5EF4-FFF2-40B4-BE49-F238E27FC236}">
-                  <a16:creationId xmlns:a16="http://schemas.microsoft.com/office/drawing/2014/main" xmlns="" id="{51120AF4-76A3-B60C-B17F-5A241AEF25B0}"/>
+                  <a16:creationId xmlns="" xmlns:a16="http://schemas.microsoft.com/office/drawing/2014/main" id="{51120AF4-76A3-B60C-B17F-5A241AEF25B0}"/>
                 </a:ext>
               </a:extLst>
             </p:cNvPr>
@@ -10098,7 +10535,7 @@
           <p:cNvPr id="87" name="Group 86">
             <a:extLst>
               <a:ext uri="{FF2B5EF4-FFF2-40B4-BE49-F238E27FC236}">
-                <a16:creationId xmlns:a16="http://schemas.microsoft.com/office/drawing/2014/main" xmlns="" id="{9C88F040-2AB6-8323-BA50-9D0ED2C398E3}"/>
+                <a16:creationId xmlns="" xmlns:a16="http://schemas.microsoft.com/office/drawing/2014/main" id="{9C88F040-2AB6-8323-BA50-9D0ED2C398E3}"/>
               </a:ext>
             </a:extLst>
           </p:cNvPr>
@@ -10118,7 +10555,7 @@
             <p:cNvPr id="88" name="Oval 87">
               <a:extLst>
                 <a:ext uri="{FF2B5EF4-FFF2-40B4-BE49-F238E27FC236}">
-                  <a16:creationId xmlns:a16="http://schemas.microsoft.com/office/drawing/2014/main" xmlns="" id="{0E902587-FCC3-4109-8354-34A9253BF166}"/>
+                  <a16:creationId xmlns="" xmlns:a16="http://schemas.microsoft.com/office/drawing/2014/main" id="{0E902587-FCC3-4109-8354-34A9253BF166}"/>
                 </a:ext>
               </a:extLst>
             </p:cNvPr>
@@ -10177,7 +10614,7 @@
             <p:cNvPr id="89" name="Arc 88">
               <a:extLst>
                 <a:ext uri="{FF2B5EF4-FFF2-40B4-BE49-F238E27FC236}">
-                  <a16:creationId xmlns:a16="http://schemas.microsoft.com/office/drawing/2014/main" xmlns="" id="{92A17050-8FFD-1D92-5315-F3AE33235D31}"/>
+                  <a16:creationId xmlns="" xmlns:a16="http://schemas.microsoft.com/office/drawing/2014/main" id="{92A17050-8FFD-1D92-5315-F3AE33235D31}"/>
                 </a:ext>
               </a:extLst>
             </p:cNvPr>
@@ -10230,7 +10667,7 @@
           <p:cNvPr id="90" name="Group 89">
             <a:extLst>
               <a:ext uri="{FF2B5EF4-FFF2-40B4-BE49-F238E27FC236}">
-                <a16:creationId xmlns:a16="http://schemas.microsoft.com/office/drawing/2014/main" xmlns="" id="{67C8A194-DD25-351F-6C68-AFAB9192E266}"/>
+                <a16:creationId xmlns="" xmlns:a16="http://schemas.microsoft.com/office/drawing/2014/main" id="{67C8A194-DD25-351F-6C68-AFAB9192E266}"/>
               </a:ext>
             </a:extLst>
           </p:cNvPr>
@@ -10250,7 +10687,7 @@
             <p:cNvPr id="91" name="Oval 90">
               <a:extLst>
                 <a:ext uri="{FF2B5EF4-FFF2-40B4-BE49-F238E27FC236}">
-                  <a16:creationId xmlns:a16="http://schemas.microsoft.com/office/drawing/2014/main" xmlns="" id="{7B10CCCF-8B2B-FADF-7734-F689B3EAF212}"/>
+                  <a16:creationId xmlns="" xmlns:a16="http://schemas.microsoft.com/office/drawing/2014/main" id="{7B10CCCF-8B2B-FADF-7734-F689B3EAF212}"/>
                 </a:ext>
               </a:extLst>
             </p:cNvPr>
@@ -10309,7 +10746,7 @@
             <p:cNvPr id="92" name="Arc 91">
               <a:extLst>
                 <a:ext uri="{FF2B5EF4-FFF2-40B4-BE49-F238E27FC236}">
-                  <a16:creationId xmlns:a16="http://schemas.microsoft.com/office/drawing/2014/main" xmlns="" id="{65D93716-7229-0D2E-185D-EB92654B93BA}"/>
+                  <a16:creationId xmlns="" xmlns:a16="http://schemas.microsoft.com/office/drawing/2014/main" id="{65D93716-7229-0D2E-185D-EB92654B93BA}"/>
                 </a:ext>
               </a:extLst>
             </p:cNvPr>
@@ -10362,7 +10799,7 @@
           <p:cNvPr id="93" name="Group 92">
             <a:extLst>
               <a:ext uri="{FF2B5EF4-FFF2-40B4-BE49-F238E27FC236}">
-                <a16:creationId xmlns:a16="http://schemas.microsoft.com/office/drawing/2014/main" xmlns="" id="{6CC77FAD-F208-1023-C1AD-9B4BD069D952}"/>
+                <a16:creationId xmlns="" xmlns:a16="http://schemas.microsoft.com/office/drawing/2014/main" id="{6CC77FAD-F208-1023-C1AD-9B4BD069D952}"/>
               </a:ext>
             </a:extLst>
           </p:cNvPr>
@@ -10382,7 +10819,7 @@
             <p:cNvPr id="94" name="Oval 93">
               <a:extLst>
                 <a:ext uri="{FF2B5EF4-FFF2-40B4-BE49-F238E27FC236}">
-                  <a16:creationId xmlns:a16="http://schemas.microsoft.com/office/drawing/2014/main" xmlns="" id="{15B7FCCF-8686-9E22-4553-440516BFB63A}"/>
+                  <a16:creationId xmlns="" xmlns:a16="http://schemas.microsoft.com/office/drawing/2014/main" id="{15B7FCCF-8686-9E22-4553-440516BFB63A}"/>
                 </a:ext>
               </a:extLst>
             </p:cNvPr>
@@ -10441,7 +10878,7 @@
             <p:cNvPr id="95" name="Arc 94">
               <a:extLst>
                 <a:ext uri="{FF2B5EF4-FFF2-40B4-BE49-F238E27FC236}">
-                  <a16:creationId xmlns:a16="http://schemas.microsoft.com/office/drawing/2014/main" xmlns="" id="{4B5A37D7-CA9F-6C35-AF1F-91629A71CD20}"/>
+                  <a16:creationId xmlns="" xmlns:a16="http://schemas.microsoft.com/office/drawing/2014/main" id="{4B5A37D7-CA9F-6C35-AF1F-91629A71CD20}"/>
                 </a:ext>
               </a:extLst>
             </p:cNvPr>
@@ -10494,7 +10931,7 @@
           <p:cNvPr id="96" name="Group 95">
             <a:extLst>
               <a:ext uri="{FF2B5EF4-FFF2-40B4-BE49-F238E27FC236}">
-                <a16:creationId xmlns:a16="http://schemas.microsoft.com/office/drawing/2014/main" xmlns="" id="{B38CBF3E-0B1B-CB43-9A6C-1D5F2F8E3BA8}"/>
+                <a16:creationId xmlns="" xmlns:a16="http://schemas.microsoft.com/office/drawing/2014/main" id="{B38CBF3E-0B1B-CB43-9A6C-1D5F2F8E3BA8}"/>
               </a:ext>
             </a:extLst>
           </p:cNvPr>
@@ -10514,7 +10951,7 @@
             <p:cNvPr id="97" name="Oval 96">
               <a:extLst>
                 <a:ext uri="{FF2B5EF4-FFF2-40B4-BE49-F238E27FC236}">
-                  <a16:creationId xmlns:a16="http://schemas.microsoft.com/office/drawing/2014/main" xmlns="" id="{83CCC6FA-D61D-CB0C-D82F-DDEEE4079669}"/>
+                  <a16:creationId xmlns="" xmlns:a16="http://schemas.microsoft.com/office/drawing/2014/main" id="{83CCC6FA-D61D-CB0C-D82F-DDEEE4079669}"/>
                 </a:ext>
               </a:extLst>
             </p:cNvPr>
@@ -10573,7 +11010,7 @@
             <p:cNvPr id="98" name="Arc 97">
               <a:extLst>
                 <a:ext uri="{FF2B5EF4-FFF2-40B4-BE49-F238E27FC236}">
-                  <a16:creationId xmlns:a16="http://schemas.microsoft.com/office/drawing/2014/main" xmlns="" id="{F47D239B-D49C-21BB-4326-DC03A8D0E15E}"/>
+                  <a16:creationId xmlns="" xmlns:a16="http://schemas.microsoft.com/office/drawing/2014/main" id="{F47D239B-D49C-21BB-4326-DC03A8D0E15E}"/>
                 </a:ext>
               </a:extLst>
             </p:cNvPr>
@@ -10626,7 +11063,7 @@
           <p:cNvPr id="99" name="Group 98">
             <a:extLst>
               <a:ext uri="{FF2B5EF4-FFF2-40B4-BE49-F238E27FC236}">
-                <a16:creationId xmlns:a16="http://schemas.microsoft.com/office/drawing/2014/main" xmlns="" id="{FDC24FAC-131D-564C-7B3D-DB1AD34D4230}"/>
+                <a16:creationId xmlns="" xmlns:a16="http://schemas.microsoft.com/office/drawing/2014/main" id="{FDC24FAC-131D-564C-7B3D-DB1AD34D4230}"/>
               </a:ext>
             </a:extLst>
           </p:cNvPr>
@@ -10646,7 +11083,7 @@
             <p:cNvPr id="100" name="Oval 99">
               <a:extLst>
                 <a:ext uri="{FF2B5EF4-FFF2-40B4-BE49-F238E27FC236}">
-                  <a16:creationId xmlns:a16="http://schemas.microsoft.com/office/drawing/2014/main" xmlns="" id="{09891AC2-67E4-C933-04E7-0EBA5D40DAB9}"/>
+                  <a16:creationId xmlns="" xmlns:a16="http://schemas.microsoft.com/office/drawing/2014/main" id="{09891AC2-67E4-C933-04E7-0EBA5D40DAB9}"/>
                 </a:ext>
               </a:extLst>
             </p:cNvPr>
@@ -10705,7 +11142,7 @@
             <p:cNvPr id="101" name="Arc 100">
               <a:extLst>
                 <a:ext uri="{FF2B5EF4-FFF2-40B4-BE49-F238E27FC236}">
-                  <a16:creationId xmlns:a16="http://schemas.microsoft.com/office/drawing/2014/main" xmlns="" id="{29C2D272-0668-BE4F-E7C1-7D8429020EBF}"/>
+                  <a16:creationId xmlns="" xmlns:a16="http://schemas.microsoft.com/office/drawing/2014/main" id="{29C2D272-0668-BE4F-E7C1-7D8429020EBF}"/>
                 </a:ext>
               </a:extLst>
             </p:cNvPr>
@@ -10758,7 +11195,7 @@
           <p:cNvPr id="102" name="Group 101">
             <a:extLst>
               <a:ext uri="{FF2B5EF4-FFF2-40B4-BE49-F238E27FC236}">
-                <a16:creationId xmlns:a16="http://schemas.microsoft.com/office/drawing/2014/main" xmlns="" id="{B4784D22-3549-A07E-8BE3-6FEFDACFB891}"/>
+                <a16:creationId xmlns="" xmlns:a16="http://schemas.microsoft.com/office/drawing/2014/main" id="{B4784D22-3549-A07E-8BE3-6FEFDACFB891}"/>
               </a:ext>
             </a:extLst>
           </p:cNvPr>
@@ -10778,7 +11215,7 @@
             <p:cNvPr id="103" name="Oval 102">
               <a:extLst>
                 <a:ext uri="{FF2B5EF4-FFF2-40B4-BE49-F238E27FC236}">
-                  <a16:creationId xmlns:a16="http://schemas.microsoft.com/office/drawing/2014/main" xmlns="" id="{333A5B8C-FF23-37F4-0636-E6431D967D24}"/>
+                  <a16:creationId xmlns="" xmlns:a16="http://schemas.microsoft.com/office/drawing/2014/main" id="{333A5B8C-FF23-37F4-0636-E6431D967D24}"/>
                 </a:ext>
               </a:extLst>
             </p:cNvPr>
@@ -10837,7 +11274,7 @@
             <p:cNvPr id="104" name="Arc 103">
               <a:extLst>
                 <a:ext uri="{FF2B5EF4-FFF2-40B4-BE49-F238E27FC236}">
-                  <a16:creationId xmlns:a16="http://schemas.microsoft.com/office/drawing/2014/main" xmlns="" id="{9D6BC3B3-12BE-B8FA-18BC-F6B62D1F6F2C}"/>
+                  <a16:creationId xmlns="" xmlns:a16="http://schemas.microsoft.com/office/drawing/2014/main" id="{9D6BC3B3-12BE-B8FA-18BC-F6B62D1F6F2C}"/>
                 </a:ext>
               </a:extLst>
             </p:cNvPr>
@@ -10890,7 +11327,7 @@
           <p:cNvPr id="105" name="Group 104">
             <a:extLst>
               <a:ext uri="{FF2B5EF4-FFF2-40B4-BE49-F238E27FC236}">
-                <a16:creationId xmlns:a16="http://schemas.microsoft.com/office/drawing/2014/main" xmlns="" id="{AC081016-577A-FED1-CB20-C84262484FFE}"/>
+                <a16:creationId xmlns="" xmlns:a16="http://schemas.microsoft.com/office/drawing/2014/main" id="{AC081016-577A-FED1-CB20-C84262484FFE}"/>
               </a:ext>
             </a:extLst>
           </p:cNvPr>
@@ -10910,7 +11347,7 @@
             <p:cNvPr id="106" name="Oval 105">
               <a:extLst>
                 <a:ext uri="{FF2B5EF4-FFF2-40B4-BE49-F238E27FC236}">
-                  <a16:creationId xmlns:a16="http://schemas.microsoft.com/office/drawing/2014/main" xmlns="" id="{5660644D-C09F-668C-6D85-323D385BAD71}"/>
+                  <a16:creationId xmlns="" xmlns:a16="http://schemas.microsoft.com/office/drawing/2014/main" id="{5660644D-C09F-668C-6D85-323D385BAD71}"/>
                 </a:ext>
               </a:extLst>
             </p:cNvPr>
@@ -10969,7 +11406,7 @@
             <p:cNvPr id="107" name="Arc 106">
               <a:extLst>
                 <a:ext uri="{FF2B5EF4-FFF2-40B4-BE49-F238E27FC236}">
-                  <a16:creationId xmlns:a16="http://schemas.microsoft.com/office/drawing/2014/main" xmlns="" id="{A1A82F10-195A-E5EC-431C-D32796272193}"/>
+                  <a16:creationId xmlns="" xmlns:a16="http://schemas.microsoft.com/office/drawing/2014/main" id="{A1A82F10-195A-E5EC-431C-D32796272193}"/>
                 </a:ext>
               </a:extLst>
             </p:cNvPr>
@@ -11022,7 +11459,7 @@
           <p:cNvPr id="108" name="Group 107">
             <a:extLst>
               <a:ext uri="{FF2B5EF4-FFF2-40B4-BE49-F238E27FC236}">
-                <a16:creationId xmlns:a16="http://schemas.microsoft.com/office/drawing/2014/main" xmlns="" id="{F3119011-876C-B97A-DE38-97DE4FF2BC7B}"/>
+                <a16:creationId xmlns="" xmlns:a16="http://schemas.microsoft.com/office/drawing/2014/main" id="{F3119011-876C-B97A-DE38-97DE4FF2BC7B}"/>
               </a:ext>
             </a:extLst>
           </p:cNvPr>
@@ -11042,7 +11479,7 @@
             <p:cNvPr id="109" name="Oval 108">
               <a:extLst>
                 <a:ext uri="{FF2B5EF4-FFF2-40B4-BE49-F238E27FC236}">
-                  <a16:creationId xmlns:a16="http://schemas.microsoft.com/office/drawing/2014/main" xmlns="" id="{B047AB49-160A-EAFB-151E-981CCFC37DCF}"/>
+                  <a16:creationId xmlns="" xmlns:a16="http://schemas.microsoft.com/office/drawing/2014/main" id="{B047AB49-160A-EAFB-151E-981CCFC37DCF}"/>
                 </a:ext>
               </a:extLst>
             </p:cNvPr>
@@ -11101,7 +11538,7 @@
             <p:cNvPr id="110" name="Arc 109">
               <a:extLst>
                 <a:ext uri="{FF2B5EF4-FFF2-40B4-BE49-F238E27FC236}">
-                  <a16:creationId xmlns:a16="http://schemas.microsoft.com/office/drawing/2014/main" xmlns="" id="{57E82760-2743-C4FF-A5C0-C8AC26F18E5F}"/>
+                  <a16:creationId xmlns="" xmlns:a16="http://schemas.microsoft.com/office/drawing/2014/main" id="{57E82760-2743-C4FF-A5C0-C8AC26F18E5F}"/>
                 </a:ext>
               </a:extLst>
             </p:cNvPr>
@@ -11154,7 +11591,7 @@
           <p:cNvPr id="111" name="Group 110">
             <a:extLst>
               <a:ext uri="{FF2B5EF4-FFF2-40B4-BE49-F238E27FC236}">
-                <a16:creationId xmlns:a16="http://schemas.microsoft.com/office/drawing/2014/main" xmlns="" id="{0F115EEA-7C78-3DC1-9252-A29FCE129D36}"/>
+                <a16:creationId xmlns="" xmlns:a16="http://schemas.microsoft.com/office/drawing/2014/main" id="{0F115EEA-7C78-3DC1-9252-A29FCE129D36}"/>
               </a:ext>
             </a:extLst>
           </p:cNvPr>
@@ -11174,7 +11611,7 @@
             <p:cNvPr id="112" name="Oval 111">
               <a:extLst>
                 <a:ext uri="{FF2B5EF4-FFF2-40B4-BE49-F238E27FC236}">
-                  <a16:creationId xmlns:a16="http://schemas.microsoft.com/office/drawing/2014/main" xmlns="" id="{B0F510D5-0396-460C-CA3A-325D9E0AA995}"/>
+                  <a16:creationId xmlns="" xmlns:a16="http://schemas.microsoft.com/office/drawing/2014/main" id="{B0F510D5-0396-460C-CA3A-325D9E0AA995}"/>
                 </a:ext>
               </a:extLst>
             </p:cNvPr>
@@ -11233,7 +11670,7 @@
             <p:cNvPr id="113" name="Arc 112">
               <a:extLst>
                 <a:ext uri="{FF2B5EF4-FFF2-40B4-BE49-F238E27FC236}">
-                  <a16:creationId xmlns:a16="http://schemas.microsoft.com/office/drawing/2014/main" xmlns="" id="{1F90134C-5284-56BE-F6E2-CCBE31E6F056}"/>
+                  <a16:creationId xmlns="" xmlns:a16="http://schemas.microsoft.com/office/drawing/2014/main" id="{1F90134C-5284-56BE-F6E2-CCBE31E6F056}"/>
                 </a:ext>
               </a:extLst>
             </p:cNvPr>
@@ -11286,7 +11723,7 @@
           <p:cNvPr id="114" name="Group 113">
             <a:extLst>
               <a:ext uri="{FF2B5EF4-FFF2-40B4-BE49-F238E27FC236}">
-                <a16:creationId xmlns:a16="http://schemas.microsoft.com/office/drawing/2014/main" xmlns="" id="{DBDD9DAE-4A8B-98DA-B2C6-A04A05C72F81}"/>
+                <a16:creationId xmlns="" xmlns:a16="http://schemas.microsoft.com/office/drawing/2014/main" id="{DBDD9DAE-4A8B-98DA-B2C6-A04A05C72F81}"/>
               </a:ext>
             </a:extLst>
           </p:cNvPr>
@@ -11306,7 +11743,7 @@
             <p:cNvPr id="115" name="Oval 114">
               <a:extLst>
                 <a:ext uri="{FF2B5EF4-FFF2-40B4-BE49-F238E27FC236}">
-                  <a16:creationId xmlns:a16="http://schemas.microsoft.com/office/drawing/2014/main" xmlns="" id="{19DDBB64-A28C-9FFB-15BE-8934F26C2C31}"/>
+                  <a16:creationId xmlns="" xmlns:a16="http://schemas.microsoft.com/office/drawing/2014/main" id="{19DDBB64-A28C-9FFB-15BE-8934F26C2C31}"/>
                 </a:ext>
               </a:extLst>
             </p:cNvPr>
@@ -11365,7 +11802,7 @@
             <p:cNvPr id="116" name="Arc 115">
               <a:extLst>
                 <a:ext uri="{FF2B5EF4-FFF2-40B4-BE49-F238E27FC236}">
-                  <a16:creationId xmlns:a16="http://schemas.microsoft.com/office/drawing/2014/main" xmlns="" id="{0C2CB9C5-CF04-5A3B-A5DF-01951E1B43C3}"/>
+                  <a16:creationId xmlns="" xmlns:a16="http://schemas.microsoft.com/office/drawing/2014/main" id="{0C2CB9C5-CF04-5A3B-A5DF-01951E1B43C3}"/>
                 </a:ext>
               </a:extLst>
             </p:cNvPr>
@@ -11418,7 +11855,7 @@
           <p:cNvPr id="117" name="Group 116">
             <a:extLst>
               <a:ext uri="{FF2B5EF4-FFF2-40B4-BE49-F238E27FC236}">
-                <a16:creationId xmlns:a16="http://schemas.microsoft.com/office/drawing/2014/main" xmlns="" id="{00801F4C-8316-5A72-F42F-9772625E11B7}"/>
+                <a16:creationId xmlns="" xmlns:a16="http://schemas.microsoft.com/office/drawing/2014/main" id="{00801F4C-8316-5A72-F42F-9772625E11B7}"/>
               </a:ext>
             </a:extLst>
           </p:cNvPr>
@@ -11438,7 +11875,7 @@
             <p:cNvPr id="118" name="Oval 117">
               <a:extLst>
                 <a:ext uri="{FF2B5EF4-FFF2-40B4-BE49-F238E27FC236}">
-                  <a16:creationId xmlns:a16="http://schemas.microsoft.com/office/drawing/2014/main" xmlns="" id="{CA33F0B5-12D4-90AF-6393-67364390577E}"/>
+                  <a16:creationId xmlns="" xmlns:a16="http://schemas.microsoft.com/office/drawing/2014/main" id="{CA33F0B5-12D4-90AF-6393-67364390577E}"/>
                 </a:ext>
               </a:extLst>
             </p:cNvPr>
@@ -11497,7 +11934,7 @@
             <p:cNvPr id="119" name="Arc 118">
               <a:extLst>
                 <a:ext uri="{FF2B5EF4-FFF2-40B4-BE49-F238E27FC236}">
-                  <a16:creationId xmlns:a16="http://schemas.microsoft.com/office/drawing/2014/main" xmlns="" id="{3078780A-1850-DCF5-B468-9F7CE8FE01FF}"/>
+                  <a16:creationId xmlns="" xmlns:a16="http://schemas.microsoft.com/office/drawing/2014/main" id="{3078780A-1850-DCF5-B468-9F7CE8FE01FF}"/>
                 </a:ext>
               </a:extLst>
             </p:cNvPr>
@@ -11550,7 +11987,7 @@
           <p:cNvPr id="120" name="Group 119">
             <a:extLst>
               <a:ext uri="{FF2B5EF4-FFF2-40B4-BE49-F238E27FC236}">
-                <a16:creationId xmlns:a16="http://schemas.microsoft.com/office/drawing/2014/main" xmlns="" id="{124980AA-157C-2AFF-BD89-DBE2A5AEF073}"/>
+                <a16:creationId xmlns="" xmlns:a16="http://schemas.microsoft.com/office/drawing/2014/main" id="{124980AA-157C-2AFF-BD89-DBE2A5AEF073}"/>
               </a:ext>
             </a:extLst>
           </p:cNvPr>
@@ -11570,7 +12007,7 @@
             <p:cNvPr id="121" name="Oval 120">
               <a:extLst>
                 <a:ext uri="{FF2B5EF4-FFF2-40B4-BE49-F238E27FC236}">
-                  <a16:creationId xmlns:a16="http://schemas.microsoft.com/office/drawing/2014/main" xmlns="" id="{30D9338D-C487-4C9C-E00C-B4B47DD73A24}"/>
+                  <a16:creationId xmlns="" xmlns:a16="http://schemas.microsoft.com/office/drawing/2014/main" id="{30D9338D-C487-4C9C-E00C-B4B47DD73A24}"/>
                 </a:ext>
               </a:extLst>
             </p:cNvPr>
@@ -11629,7 +12066,7 @@
             <p:cNvPr id="122" name="Arc 121">
               <a:extLst>
                 <a:ext uri="{FF2B5EF4-FFF2-40B4-BE49-F238E27FC236}">
-                  <a16:creationId xmlns:a16="http://schemas.microsoft.com/office/drawing/2014/main" xmlns="" id="{FD010B24-85D4-B5AB-51F0-8C87B98564E3}"/>
+                  <a16:creationId xmlns="" xmlns:a16="http://schemas.microsoft.com/office/drawing/2014/main" id="{FD010B24-85D4-B5AB-51F0-8C87B98564E3}"/>
                 </a:ext>
               </a:extLst>
             </p:cNvPr>
@@ -11682,7 +12119,7 @@
           <p:cNvPr id="123" name="Rectangle 122">
             <a:extLst>
               <a:ext uri="{FF2B5EF4-FFF2-40B4-BE49-F238E27FC236}">
-                <a16:creationId xmlns:a16="http://schemas.microsoft.com/office/drawing/2014/main" xmlns="" id="{8D4C1EDA-9110-0D82-2ABF-69D43374D24D}"/>
+                <a16:creationId xmlns="" xmlns:a16="http://schemas.microsoft.com/office/drawing/2014/main" id="{8D4C1EDA-9110-0D82-2ABF-69D43374D24D}"/>
               </a:ext>
             </a:extLst>
           </p:cNvPr>
@@ -11692,7 +12129,7 @@
         <p:spPr>
           <a:xfrm>
             <a:off x="6561178" y="414992"/>
-            <a:ext cx="4921112" cy="5573834"/>
+            <a:ext cx="4921112" cy="5998565"/>
           </a:xfrm>
           <a:prstGeom prst="rect">
             <a:avLst/>
@@ -11744,29 +12181,22 @@
               <a:buChar char="ü"/>
             </a:pPr>
             <a:r>
-              <a:rPr lang="en-US" sz="2400" dirty="0" smtClean="0">
+              <a:rPr lang="en-US" sz="2000" dirty="0" smtClean="0">
                 <a:latin typeface="Times New Roman" panose="02020603050405020304" pitchFamily="18" charset="0"/>
                 <a:ea typeface="Times New Roman" panose="02020603050405020304" pitchFamily="18" charset="0"/>
                 <a:cs typeface="Arial" panose="020B0604020202020204" pitchFamily="34" charset="0"/>
               </a:rPr>
-              <a:t>EU is the largest importer region of Pakistani goods ($9.82 billion in 2025-2026). More than 30% exports send to EU members.</a:t>
+              <a:t>EU is the largest importer region of Pakistani goods ($9.82 billion in 2025-2026). More than 30% exports send to EU members</a:t>
             </a:r>
-            <a:endParaRPr lang="en-US" sz="2400" dirty="0">
-              <a:latin typeface="Times New Roman" panose="02020603050405020304" pitchFamily="18" charset="0"/>
-              <a:ea typeface="Times New Roman" panose="02020603050405020304" pitchFamily="18" charset="0"/>
-              <a:cs typeface="Arial" panose="020B0604020202020204" pitchFamily="34" charset="0"/>
-            </a:endParaRPr>
-          </a:p>
-          <a:p>
-            <a:pPr>
-              <a:lnSpc>
-                <a:spcPct val="115000"/>
-              </a:lnSpc>
-              <a:spcAft>
-                <a:spcPts val="1000"/>
-              </a:spcAft>
-            </a:pPr>
-            <a:endParaRPr lang="en-US" sz="2400" dirty="0">
+            <a:r>
+              <a:rPr lang="en-US" sz="2000" dirty="0" smtClean="0">
+                <a:latin typeface="Times New Roman" panose="02020603050405020304" pitchFamily="18" charset="0"/>
+                <a:ea typeface="Times New Roman" panose="02020603050405020304" pitchFamily="18" charset="0"/>
+                <a:cs typeface="Arial" panose="020B0604020202020204" pitchFamily="34" charset="0"/>
+              </a:rPr>
+              <a:t>.</a:t>
+            </a:r>
+            <a:endParaRPr lang="en-US" sz="2000" dirty="0">
               <a:latin typeface="Times New Roman" panose="02020603050405020304" pitchFamily="18" charset="0"/>
               <a:ea typeface="Times New Roman" panose="02020603050405020304" pitchFamily="18" charset="0"/>
               <a:cs typeface="Arial" panose="020B0604020202020204" pitchFamily="34" charset="0"/>
@@ -11784,7 +12214,7 @@
               <a:buChar char="ü"/>
             </a:pPr>
             <a:r>
-              <a:rPr lang="en-US" sz="2400" dirty="0" smtClean="0">
+              <a:rPr lang="en-US" sz="2000" dirty="0" smtClean="0">
                 <a:latin typeface="Times New Roman" panose="02020603050405020304" pitchFamily="18" charset="0"/>
                 <a:ea typeface="Calibri" panose="020F0502020204030204" pitchFamily="34" charset="0"/>
                 <a:cs typeface="Arial" panose="020B0604020202020204" pitchFamily="34" charset="0"/>
@@ -11792,7 +12222,7 @@
               <a:t>Pakistan exports Textile, Cotton, Fabric, Leather goods, Sports goods, IT, </a:t>
             </a:r>
             <a:r>
-              <a:rPr lang="en-US" sz="2400" dirty="0" err="1" smtClean="0">
+              <a:rPr lang="en-US" sz="2000" dirty="0" err="1" smtClean="0">
                 <a:latin typeface="Times New Roman" panose="02020603050405020304" pitchFamily="18" charset="0"/>
                 <a:ea typeface="Calibri" panose="020F0502020204030204" pitchFamily="34" charset="0"/>
                 <a:cs typeface="Arial" panose="020B0604020202020204" pitchFamily="34" charset="0"/>
@@ -11800,14 +12230,89 @@
               <a:t>Agri</a:t>
             </a:r>
             <a:r>
-              <a:rPr lang="en-US" sz="2400" dirty="0" smtClean="0">
+              <a:rPr lang="en-US" sz="2000" dirty="0" smtClean="0">
                 <a:latin typeface="Times New Roman" panose="02020603050405020304" pitchFamily="18" charset="0"/>
                 <a:ea typeface="Calibri" panose="020F0502020204030204" pitchFamily="34" charset="0"/>
                 <a:cs typeface="Arial" panose="020B0604020202020204" pitchFamily="34" charset="0"/>
               </a:rPr>
               <a:t>-food and Sea-food to EU. </a:t>
             </a:r>
-            <a:endParaRPr lang="en-US" sz="2000" dirty="0">
+            <a:endParaRPr lang="en-US" sz="2000" dirty="0" smtClean="0">
+              <a:latin typeface="Times New Roman" panose="02020603050405020304" pitchFamily="18" charset="0"/>
+              <a:ea typeface="Calibri" panose="020F0502020204030204" pitchFamily="34" charset="0"/>
+              <a:cs typeface="Arial" panose="020B0604020202020204" pitchFamily="34" charset="0"/>
+            </a:endParaRPr>
+          </a:p>
+          <a:p>
+            <a:pPr marL="457200" indent="-457200">
+              <a:lnSpc>
+                <a:spcPct val="115000"/>
+              </a:lnSpc>
+              <a:spcAft>
+                <a:spcPts val="1000"/>
+              </a:spcAft>
+              <a:buFont typeface="Wingdings" panose="05000000000000000000" pitchFamily="2" charset="2"/>
+              <a:buChar char="ü"/>
+            </a:pPr>
+            <a:r>
+              <a:rPr lang="en-US" sz="2000" dirty="0" smtClean="0">
+                <a:latin typeface="Times New Roman" panose="02020603050405020304" pitchFamily="18" charset="0"/>
+                <a:ea typeface="Calibri" panose="020F0502020204030204" pitchFamily="34" charset="0"/>
+                <a:cs typeface="Arial" panose="020B0604020202020204" pitchFamily="34" charset="0"/>
+              </a:rPr>
+              <a:t>There is only one Pakistani </a:t>
+            </a:r>
+            <a:r>
+              <a:rPr lang="en-US" sz="2000" dirty="0">
+                <a:latin typeface="Times New Roman" panose="02020603050405020304" pitchFamily="18" charset="0"/>
+                <a:ea typeface="Calibri" panose="020F0502020204030204" pitchFamily="34" charset="0"/>
+                <a:cs typeface="Arial" panose="020B0604020202020204" pitchFamily="34" charset="0"/>
+              </a:rPr>
+              <a:t>website </a:t>
+            </a:r>
+            <a:r>
+              <a:rPr lang="en-US" sz="2000" dirty="0">
+                <a:latin typeface="Times New Roman" panose="02020603050405020304" pitchFamily="18" charset="0"/>
+                <a:ea typeface="Calibri" panose="020F0502020204030204" pitchFamily="34" charset="0"/>
+                <a:cs typeface="Arial" panose="020B0604020202020204" pitchFamily="34" charset="0"/>
+                <a:hlinkClick r:id="rId3"/>
+              </a:rPr>
+              <a:t>https://www.pharmatrax.net/digital-product-passport-dpp</a:t>
+            </a:r>
+            <a:r>
+              <a:rPr lang="en-US" sz="2000" dirty="0" smtClean="0">
+                <a:latin typeface="Times New Roman" panose="02020603050405020304" pitchFamily="18" charset="0"/>
+                <a:ea typeface="Calibri" panose="020F0502020204030204" pitchFamily="34" charset="0"/>
+                <a:cs typeface="Arial" panose="020B0604020202020204" pitchFamily="34" charset="0"/>
+                <a:hlinkClick r:id="rId3"/>
+              </a:rPr>
+              <a:t>/</a:t>
+            </a:r>
+            <a:r>
+              <a:rPr lang="en-US" sz="2000" dirty="0" smtClean="0">
+                <a:latin typeface="Times New Roman" panose="02020603050405020304" pitchFamily="18" charset="0"/>
+                <a:ea typeface="Calibri" panose="020F0502020204030204" pitchFamily="34" charset="0"/>
+                <a:cs typeface="Arial" panose="020B0604020202020204" pitchFamily="34" charset="0"/>
+              </a:rPr>
+              <a:t> that facilitates </a:t>
+            </a:r>
+            <a:r>
+              <a:rPr lang="en-US" sz="2000" dirty="0" err="1" smtClean="0">
+                <a:latin typeface="Times New Roman" panose="02020603050405020304" pitchFamily="18" charset="0"/>
+                <a:ea typeface="Calibri" panose="020F0502020204030204" pitchFamily="34" charset="0"/>
+                <a:cs typeface="Arial" panose="020B0604020202020204" pitchFamily="34" charset="0"/>
+              </a:rPr>
+              <a:t>Pharma</a:t>
+            </a:r>
+            <a:r>
+              <a:rPr lang="en-US" sz="2000" dirty="0" smtClean="0">
+                <a:latin typeface="Times New Roman" panose="02020603050405020304" pitchFamily="18" charset="0"/>
+                <a:ea typeface="Calibri" panose="020F0502020204030204" pitchFamily="34" charset="0"/>
+                <a:cs typeface="Arial" panose="020B0604020202020204" pitchFamily="34" charset="0"/>
+              </a:rPr>
+              <a:t>, Food, Beverages and Cosmetics Industries for DPP</a:t>
+            </a:r>
+            <a:endParaRPr lang="en-US" dirty="0">
               <a:latin typeface="Calibri" panose="020F0502020204030204" pitchFamily="34" charset="0"/>
               <a:ea typeface="Calibri" panose="020F0502020204030204" pitchFamily="34" charset="0"/>
               <a:cs typeface="Arial" panose="020B0604020202020204" pitchFamily="34" charset="0"/>
@@ -11855,7 +12360,7 @@
         <p:cNvPr id="1" name="">
           <a:extLst>
             <a:ext uri="{FF2B5EF4-FFF2-40B4-BE49-F238E27FC236}">
-              <a16:creationId xmlns:a16="http://schemas.microsoft.com/office/drawing/2014/main" xmlns="" id="{AB49B653-F82D-52DD-3373-EF7CD343807B}"/>
+              <a16:creationId xmlns="" xmlns:a16="http://schemas.microsoft.com/office/drawing/2014/main" id="{AB49B653-F82D-52DD-3373-EF7CD343807B}"/>
             </a:ext>
           </a:extLst>
         </p:cNvPr>
@@ -11875,7 +12380,7 @@
           <p:cNvPr id="5" name="Rectangle 4">
             <a:extLst>
               <a:ext uri="{FF2B5EF4-FFF2-40B4-BE49-F238E27FC236}">
-                <a16:creationId xmlns:a16="http://schemas.microsoft.com/office/drawing/2014/main" xmlns="" id="{0DBF747C-C898-FAC1-A684-D7D009857C24}"/>
+                <a16:creationId xmlns="" xmlns:a16="http://schemas.microsoft.com/office/drawing/2014/main" id="{0DBF747C-C898-FAC1-A684-D7D009857C24}"/>
               </a:ext>
             </a:extLst>
           </p:cNvPr>
@@ -11931,7 +12436,7 @@
           <p:cNvPr id="4" name="Rectangle 3">
             <a:extLst>
               <a:ext uri="{FF2B5EF4-FFF2-40B4-BE49-F238E27FC236}">
-                <a16:creationId xmlns:a16="http://schemas.microsoft.com/office/drawing/2014/main" xmlns="" id="{7B98B2E6-66EB-FA16-6CAA-7328B9409A56}"/>
+                <a16:creationId xmlns="" xmlns:a16="http://schemas.microsoft.com/office/drawing/2014/main" id="{7B98B2E6-66EB-FA16-6CAA-7328B9409A56}"/>
               </a:ext>
             </a:extLst>
           </p:cNvPr>
@@ -12168,7 +12673,7 @@
           <p:cNvPr id="6" name="Oval 5">
             <a:extLst>
               <a:ext uri="{FF2B5EF4-FFF2-40B4-BE49-F238E27FC236}">
-                <a16:creationId xmlns:a16="http://schemas.microsoft.com/office/drawing/2014/main" xmlns="" id="{18F27E5F-8AB7-C933-B1F5-63F52B4EBC77}"/>
+                <a16:creationId xmlns="" xmlns:a16="http://schemas.microsoft.com/office/drawing/2014/main" id="{18F27E5F-8AB7-C933-B1F5-63F52B4EBC77}"/>
               </a:ext>
             </a:extLst>
           </p:cNvPr>
@@ -12227,7 +12732,7 @@
           <p:cNvPr id="7" name="Oval 6">
             <a:extLst>
               <a:ext uri="{FF2B5EF4-FFF2-40B4-BE49-F238E27FC236}">
-                <a16:creationId xmlns:a16="http://schemas.microsoft.com/office/drawing/2014/main" xmlns="" id="{84EEC563-2DED-4416-2C87-31455035FB0C}"/>
+                <a16:creationId xmlns="" xmlns:a16="http://schemas.microsoft.com/office/drawing/2014/main" id="{84EEC563-2DED-4416-2C87-31455035FB0C}"/>
               </a:ext>
             </a:extLst>
           </p:cNvPr>
@@ -12286,7 +12791,7 @@
           <p:cNvPr id="8" name="Oval 7">
             <a:extLst>
               <a:ext uri="{FF2B5EF4-FFF2-40B4-BE49-F238E27FC236}">
-                <a16:creationId xmlns:a16="http://schemas.microsoft.com/office/drawing/2014/main" xmlns="" id="{E40D0E73-9F08-859E-43E2-25EB19218526}"/>
+                <a16:creationId xmlns="" xmlns:a16="http://schemas.microsoft.com/office/drawing/2014/main" id="{E40D0E73-9F08-859E-43E2-25EB19218526}"/>
               </a:ext>
             </a:extLst>
           </p:cNvPr>
@@ -12345,7 +12850,7 @@
           <p:cNvPr id="9" name="Oval 8">
             <a:extLst>
               <a:ext uri="{FF2B5EF4-FFF2-40B4-BE49-F238E27FC236}">
-                <a16:creationId xmlns:a16="http://schemas.microsoft.com/office/drawing/2014/main" xmlns="" id="{4DB5A593-0CFB-36F3-F8DA-C3F3A2CFB622}"/>
+                <a16:creationId xmlns="" xmlns:a16="http://schemas.microsoft.com/office/drawing/2014/main" id="{4DB5A593-0CFB-36F3-F8DA-C3F3A2CFB622}"/>
               </a:ext>
             </a:extLst>
           </p:cNvPr>
@@ -12404,7 +12909,7 @@
           <p:cNvPr id="10" name="Oval 9">
             <a:extLst>
               <a:ext uri="{FF2B5EF4-FFF2-40B4-BE49-F238E27FC236}">
-                <a16:creationId xmlns:a16="http://schemas.microsoft.com/office/drawing/2014/main" xmlns="" id="{AA568633-31CA-A32D-D861-3B1240EC81B6}"/>
+                <a16:creationId xmlns="" xmlns:a16="http://schemas.microsoft.com/office/drawing/2014/main" id="{AA568633-31CA-A32D-D861-3B1240EC81B6}"/>
               </a:ext>
             </a:extLst>
           </p:cNvPr>
@@ -12463,7 +12968,7 @@
           <p:cNvPr id="11" name="Oval 10">
             <a:extLst>
               <a:ext uri="{FF2B5EF4-FFF2-40B4-BE49-F238E27FC236}">
-                <a16:creationId xmlns:a16="http://schemas.microsoft.com/office/drawing/2014/main" xmlns="" id="{D0946FD7-DEB2-0AEE-D3E7-FAABAC2357AF}"/>
+                <a16:creationId xmlns="" xmlns:a16="http://schemas.microsoft.com/office/drawing/2014/main" id="{D0946FD7-DEB2-0AEE-D3E7-FAABAC2357AF}"/>
               </a:ext>
             </a:extLst>
           </p:cNvPr>
@@ -12522,7 +13027,7 @@
           <p:cNvPr id="12" name="Oval 11">
             <a:extLst>
               <a:ext uri="{FF2B5EF4-FFF2-40B4-BE49-F238E27FC236}">
-                <a16:creationId xmlns:a16="http://schemas.microsoft.com/office/drawing/2014/main" xmlns="" id="{8D9F2A4B-9D87-7FFE-1886-9FC01DA34065}"/>
+                <a16:creationId xmlns="" xmlns:a16="http://schemas.microsoft.com/office/drawing/2014/main" id="{8D9F2A4B-9D87-7FFE-1886-9FC01DA34065}"/>
               </a:ext>
             </a:extLst>
           </p:cNvPr>
@@ -12581,7 +13086,7 @@
           <p:cNvPr id="13" name="Oval 12">
             <a:extLst>
               <a:ext uri="{FF2B5EF4-FFF2-40B4-BE49-F238E27FC236}">
-                <a16:creationId xmlns:a16="http://schemas.microsoft.com/office/drawing/2014/main" xmlns="" id="{2D1C037B-9232-194A-F63E-D1198BD5BECB}"/>
+                <a16:creationId xmlns="" xmlns:a16="http://schemas.microsoft.com/office/drawing/2014/main" id="{2D1C037B-9232-194A-F63E-D1198BD5BECB}"/>
               </a:ext>
             </a:extLst>
           </p:cNvPr>
@@ -12640,7 +13145,7 @@
           <p:cNvPr id="14" name="Oval 13">
             <a:extLst>
               <a:ext uri="{FF2B5EF4-FFF2-40B4-BE49-F238E27FC236}">
-                <a16:creationId xmlns:a16="http://schemas.microsoft.com/office/drawing/2014/main" xmlns="" id="{97981C1E-3857-DF09-0177-8A06F7B8C93F}"/>
+                <a16:creationId xmlns="" xmlns:a16="http://schemas.microsoft.com/office/drawing/2014/main" id="{97981C1E-3857-DF09-0177-8A06F7B8C93F}"/>
               </a:ext>
             </a:extLst>
           </p:cNvPr>
@@ -12699,7 +13204,7 @@
           <p:cNvPr id="15" name="Oval 14">
             <a:extLst>
               <a:ext uri="{FF2B5EF4-FFF2-40B4-BE49-F238E27FC236}">
-                <a16:creationId xmlns:a16="http://schemas.microsoft.com/office/drawing/2014/main" xmlns="" id="{041C004F-2B07-5BE4-E16D-AFA271378B4F}"/>
+                <a16:creationId xmlns="" xmlns:a16="http://schemas.microsoft.com/office/drawing/2014/main" id="{041C004F-2B07-5BE4-E16D-AFA271378B4F}"/>
               </a:ext>
             </a:extLst>
           </p:cNvPr>
@@ -12758,7 +13263,7 @@
           <p:cNvPr id="16" name="Oval 15">
             <a:extLst>
               <a:ext uri="{FF2B5EF4-FFF2-40B4-BE49-F238E27FC236}">
-                <a16:creationId xmlns:a16="http://schemas.microsoft.com/office/drawing/2014/main" xmlns="" id="{1767DF3F-7FF7-2A4C-6211-20A32CA30D60}"/>
+                <a16:creationId xmlns="" xmlns:a16="http://schemas.microsoft.com/office/drawing/2014/main" id="{1767DF3F-7FF7-2A4C-6211-20A32CA30D60}"/>
               </a:ext>
             </a:extLst>
           </p:cNvPr>
@@ -12817,7 +13322,7 @@
           <p:cNvPr id="17" name="Oval 16">
             <a:extLst>
               <a:ext uri="{FF2B5EF4-FFF2-40B4-BE49-F238E27FC236}">
-                <a16:creationId xmlns:a16="http://schemas.microsoft.com/office/drawing/2014/main" xmlns="" id="{0989497C-10B7-BD33-02AC-312809AFEA7E}"/>
+                <a16:creationId xmlns="" xmlns:a16="http://schemas.microsoft.com/office/drawing/2014/main" id="{0989497C-10B7-BD33-02AC-312809AFEA7E}"/>
               </a:ext>
             </a:extLst>
           </p:cNvPr>
@@ -12876,7 +13381,7 @@
           <p:cNvPr id="18" name="Oval 17">
             <a:extLst>
               <a:ext uri="{FF2B5EF4-FFF2-40B4-BE49-F238E27FC236}">
-                <a16:creationId xmlns:a16="http://schemas.microsoft.com/office/drawing/2014/main" xmlns="" id="{EC170CAD-85DD-951C-2E45-44F4B3207F5A}"/>
+                <a16:creationId xmlns="" xmlns:a16="http://schemas.microsoft.com/office/drawing/2014/main" id="{EC170CAD-85DD-951C-2E45-44F4B3207F5A}"/>
               </a:ext>
             </a:extLst>
           </p:cNvPr>
@@ -12935,7 +13440,7 @@
           <p:cNvPr id="19" name="Oval 18">
             <a:extLst>
               <a:ext uri="{FF2B5EF4-FFF2-40B4-BE49-F238E27FC236}">
-                <a16:creationId xmlns:a16="http://schemas.microsoft.com/office/drawing/2014/main" xmlns="" id="{6CBFAEB0-427B-C183-269E-B7F22C532425}"/>
+                <a16:creationId xmlns="" xmlns:a16="http://schemas.microsoft.com/office/drawing/2014/main" id="{6CBFAEB0-427B-C183-269E-B7F22C532425}"/>
               </a:ext>
             </a:extLst>
           </p:cNvPr>
@@ -12994,7 +13499,7 @@
           <p:cNvPr id="20" name="Oval 19">
             <a:extLst>
               <a:ext uri="{FF2B5EF4-FFF2-40B4-BE49-F238E27FC236}">
-                <a16:creationId xmlns:a16="http://schemas.microsoft.com/office/drawing/2014/main" xmlns="" id="{1A865A29-9259-99F5-30D2-7D9D77A07673}"/>
+                <a16:creationId xmlns="" xmlns:a16="http://schemas.microsoft.com/office/drawing/2014/main" id="{1A865A29-9259-99F5-30D2-7D9D77A07673}"/>
               </a:ext>
             </a:extLst>
           </p:cNvPr>
@@ -13053,7 +13558,7 @@
           <p:cNvPr id="21" name="Oval 20">
             <a:extLst>
               <a:ext uri="{FF2B5EF4-FFF2-40B4-BE49-F238E27FC236}">
-                <a16:creationId xmlns:a16="http://schemas.microsoft.com/office/drawing/2014/main" xmlns="" id="{A9BD25F8-8B1D-B8B7-5509-6B3900E77488}"/>
+                <a16:creationId xmlns="" xmlns:a16="http://schemas.microsoft.com/office/drawing/2014/main" id="{A9BD25F8-8B1D-B8B7-5509-6B3900E77488}"/>
               </a:ext>
             </a:extLst>
           </p:cNvPr>
@@ -13112,7 +13617,7 @@
           <p:cNvPr id="22" name="Oval 21">
             <a:extLst>
               <a:ext uri="{FF2B5EF4-FFF2-40B4-BE49-F238E27FC236}">
-                <a16:creationId xmlns:a16="http://schemas.microsoft.com/office/drawing/2014/main" xmlns="" id="{8C325336-0110-64E7-17C1-798D8BA62F8F}"/>
+                <a16:creationId xmlns="" xmlns:a16="http://schemas.microsoft.com/office/drawing/2014/main" id="{8C325336-0110-64E7-17C1-798D8BA62F8F}"/>
               </a:ext>
             </a:extLst>
           </p:cNvPr>
@@ -13171,7 +13676,7 @@
           <p:cNvPr id="23" name="Oval 22">
             <a:extLst>
               <a:ext uri="{FF2B5EF4-FFF2-40B4-BE49-F238E27FC236}">
-                <a16:creationId xmlns:a16="http://schemas.microsoft.com/office/drawing/2014/main" xmlns="" id="{7ED93CA2-6975-2E8B-C7B5-B07148930960}"/>
+                <a16:creationId xmlns="" xmlns:a16="http://schemas.microsoft.com/office/drawing/2014/main" id="{7ED93CA2-6975-2E8B-C7B5-B07148930960}"/>
               </a:ext>
             </a:extLst>
           </p:cNvPr>
@@ -13230,7 +13735,7 @@
           <p:cNvPr id="24" name="Oval 23">
             <a:extLst>
               <a:ext uri="{FF2B5EF4-FFF2-40B4-BE49-F238E27FC236}">
-                <a16:creationId xmlns:a16="http://schemas.microsoft.com/office/drawing/2014/main" xmlns="" id="{6E252A62-4114-2C2C-0938-450CA28947E9}"/>
+                <a16:creationId xmlns="" xmlns:a16="http://schemas.microsoft.com/office/drawing/2014/main" id="{6E252A62-4114-2C2C-0938-450CA28947E9}"/>
               </a:ext>
             </a:extLst>
           </p:cNvPr>
@@ -13289,7 +13794,7 @@
           <p:cNvPr id="25" name="Oval 24">
             <a:extLst>
               <a:ext uri="{FF2B5EF4-FFF2-40B4-BE49-F238E27FC236}">
-                <a16:creationId xmlns:a16="http://schemas.microsoft.com/office/drawing/2014/main" xmlns="" id="{15145535-565B-35B3-4181-D04856B0357E}"/>
+                <a16:creationId xmlns="" xmlns:a16="http://schemas.microsoft.com/office/drawing/2014/main" id="{15145535-565B-35B3-4181-D04856B0357E}"/>
               </a:ext>
             </a:extLst>
           </p:cNvPr>
@@ -13348,7 +13853,7 @@
           <p:cNvPr id="26" name="Oval 25">
             <a:extLst>
               <a:ext uri="{FF2B5EF4-FFF2-40B4-BE49-F238E27FC236}">
-                <a16:creationId xmlns:a16="http://schemas.microsoft.com/office/drawing/2014/main" xmlns="" id="{677DA24D-DD66-AAFE-2F4E-3D71AA3E6AB0}"/>
+                <a16:creationId xmlns="" xmlns:a16="http://schemas.microsoft.com/office/drawing/2014/main" id="{677DA24D-DD66-AAFE-2F4E-3D71AA3E6AB0}"/>
               </a:ext>
             </a:extLst>
           </p:cNvPr>
@@ -13407,7 +13912,7 @@
           <p:cNvPr id="27" name="Oval 26">
             <a:extLst>
               <a:ext uri="{FF2B5EF4-FFF2-40B4-BE49-F238E27FC236}">
-                <a16:creationId xmlns:a16="http://schemas.microsoft.com/office/drawing/2014/main" xmlns="" id="{E415858E-4B5C-CDA9-DE2D-B7CBA68C8556}"/>
+                <a16:creationId xmlns="" xmlns:a16="http://schemas.microsoft.com/office/drawing/2014/main" id="{E415858E-4B5C-CDA9-DE2D-B7CBA68C8556}"/>
               </a:ext>
             </a:extLst>
           </p:cNvPr>
@@ -13466,7 +13971,7 @@
           <p:cNvPr id="28" name="Oval 27">
             <a:extLst>
               <a:ext uri="{FF2B5EF4-FFF2-40B4-BE49-F238E27FC236}">
-                <a16:creationId xmlns:a16="http://schemas.microsoft.com/office/drawing/2014/main" xmlns="" id="{167A0A27-6BA4-DD53-F081-83B7B05F0261}"/>
+                <a16:creationId xmlns="" xmlns:a16="http://schemas.microsoft.com/office/drawing/2014/main" id="{167A0A27-6BA4-DD53-F081-83B7B05F0261}"/>
               </a:ext>
             </a:extLst>
           </p:cNvPr>
@@ -13525,7 +14030,7 @@
           <p:cNvPr id="29" name="Oval 28">
             <a:extLst>
               <a:ext uri="{FF2B5EF4-FFF2-40B4-BE49-F238E27FC236}">
-                <a16:creationId xmlns:a16="http://schemas.microsoft.com/office/drawing/2014/main" xmlns="" id="{6299853B-AA90-3849-11F1-1A4C48F71365}"/>
+                <a16:creationId xmlns="" xmlns:a16="http://schemas.microsoft.com/office/drawing/2014/main" id="{6299853B-AA90-3849-11F1-1A4C48F71365}"/>
               </a:ext>
             </a:extLst>
           </p:cNvPr>
@@ -13584,7 +14089,7 @@
           <p:cNvPr id="3" name="Group 2">
             <a:extLst>
               <a:ext uri="{FF2B5EF4-FFF2-40B4-BE49-F238E27FC236}">
-                <a16:creationId xmlns:a16="http://schemas.microsoft.com/office/drawing/2014/main" xmlns="" id="{26C3F351-D61A-FCB1-7694-AF167DCEE280}"/>
+                <a16:creationId xmlns="" xmlns:a16="http://schemas.microsoft.com/office/drawing/2014/main" id="{26C3F351-D61A-FCB1-7694-AF167DCEE280}"/>
               </a:ext>
             </a:extLst>
           </p:cNvPr>
@@ -13604,7 +14109,7 @@
             <p:cNvPr id="2" name="Oval 1">
               <a:extLst>
                 <a:ext uri="{FF2B5EF4-FFF2-40B4-BE49-F238E27FC236}">
-                  <a16:creationId xmlns:a16="http://schemas.microsoft.com/office/drawing/2014/main" xmlns="" id="{A6E2D6B3-342D-EB5F-5E19-8537633AB28F}"/>
+                  <a16:creationId xmlns="" xmlns:a16="http://schemas.microsoft.com/office/drawing/2014/main" id="{A6E2D6B3-342D-EB5F-5E19-8537633AB28F}"/>
                 </a:ext>
               </a:extLst>
             </p:cNvPr>
@@ -13663,7 +14168,7 @@
             <p:cNvPr id="30" name="Arc 29">
               <a:extLst>
                 <a:ext uri="{FF2B5EF4-FFF2-40B4-BE49-F238E27FC236}">
-                  <a16:creationId xmlns:a16="http://schemas.microsoft.com/office/drawing/2014/main" xmlns="" id="{36056DEA-49DE-7763-422D-4DBF22C9EF60}"/>
+                  <a16:creationId xmlns="" xmlns:a16="http://schemas.microsoft.com/office/drawing/2014/main" id="{36056DEA-49DE-7763-422D-4DBF22C9EF60}"/>
                 </a:ext>
               </a:extLst>
             </p:cNvPr>
@@ -13716,7 +14221,7 @@
           <p:cNvPr id="54" name="Group 53">
             <a:extLst>
               <a:ext uri="{FF2B5EF4-FFF2-40B4-BE49-F238E27FC236}">
-                <a16:creationId xmlns:a16="http://schemas.microsoft.com/office/drawing/2014/main" xmlns="" id="{4E1C400F-26D6-1823-2C78-C7631F622635}"/>
+                <a16:creationId xmlns="" xmlns:a16="http://schemas.microsoft.com/office/drawing/2014/main" id="{4E1C400F-26D6-1823-2C78-C7631F622635}"/>
               </a:ext>
             </a:extLst>
           </p:cNvPr>
@@ -13736,7 +14241,7 @@
             <p:cNvPr id="55" name="Oval 54">
               <a:extLst>
                 <a:ext uri="{FF2B5EF4-FFF2-40B4-BE49-F238E27FC236}">
-                  <a16:creationId xmlns:a16="http://schemas.microsoft.com/office/drawing/2014/main" xmlns="" id="{E1A04797-A8C7-E3D9-7170-3A4959849C1F}"/>
+                  <a16:creationId xmlns="" xmlns:a16="http://schemas.microsoft.com/office/drawing/2014/main" id="{E1A04797-A8C7-E3D9-7170-3A4959849C1F}"/>
                 </a:ext>
               </a:extLst>
             </p:cNvPr>
@@ -13795,7 +14300,7 @@
             <p:cNvPr id="56" name="Arc 55">
               <a:extLst>
                 <a:ext uri="{FF2B5EF4-FFF2-40B4-BE49-F238E27FC236}">
-                  <a16:creationId xmlns:a16="http://schemas.microsoft.com/office/drawing/2014/main" xmlns="" id="{E12EA4D8-8589-F8DD-DE0E-66C2177C97E3}"/>
+                  <a16:creationId xmlns="" xmlns:a16="http://schemas.microsoft.com/office/drawing/2014/main" id="{E12EA4D8-8589-F8DD-DE0E-66C2177C97E3}"/>
                 </a:ext>
               </a:extLst>
             </p:cNvPr>
@@ -13848,7 +14353,7 @@
           <p:cNvPr id="57" name="Group 56">
             <a:extLst>
               <a:ext uri="{FF2B5EF4-FFF2-40B4-BE49-F238E27FC236}">
-                <a16:creationId xmlns:a16="http://schemas.microsoft.com/office/drawing/2014/main" xmlns="" id="{A087BCDE-7005-25A4-1860-46331DFEFBA5}"/>
+                <a16:creationId xmlns="" xmlns:a16="http://schemas.microsoft.com/office/drawing/2014/main" id="{A087BCDE-7005-25A4-1860-46331DFEFBA5}"/>
               </a:ext>
             </a:extLst>
           </p:cNvPr>
@@ -13868,7 +14373,7 @@
             <p:cNvPr id="58" name="Oval 57">
               <a:extLst>
                 <a:ext uri="{FF2B5EF4-FFF2-40B4-BE49-F238E27FC236}">
-                  <a16:creationId xmlns:a16="http://schemas.microsoft.com/office/drawing/2014/main" xmlns="" id="{3581949D-442F-7524-F99D-5A8088D8E142}"/>
+                  <a16:creationId xmlns="" xmlns:a16="http://schemas.microsoft.com/office/drawing/2014/main" id="{3581949D-442F-7524-F99D-5A8088D8E142}"/>
                 </a:ext>
               </a:extLst>
             </p:cNvPr>
@@ -13927,7 +14432,7 @@
             <p:cNvPr id="59" name="Arc 58">
               <a:extLst>
                 <a:ext uri="{FF2B5EF4-FFF2-40B4-BE49-F238E27FC236}">
-                  <a16:creationId xmlns:a16="http://schemas.microsoft.com/office/drawing/2014/main" xmlns="" id="{02D7B595-29A3-11C1-3614-A3198F94592C}"/>
+                  <a16:creationId xmlns="" xmlns:a16="http://schemas.microsoft.com/office/drawing/2014/main" id="{02D7B595-29A3-11C1-3614-A3198F94592C}"/>
                 </a:ext>
               </a:extLst>
             </p:cNvPr>
@@ -13980,7 +14485,7 @@
           <p:cNvPr id="60" name="Group 59">
             <a:extLst>
               <a:ext uri="{FF2B5EF4-FFF2-40B4-BE49-F238E27FC236}">
-                <a16:creationId xmlns:a16="http://schemas.microsoft.com/office/drawing/2014/main" xmlns="" id="{FB290B83-0E01-2860-E35D-2FF552994951}"/>
+                <a16:creationId xmlns="" xmlns:a16="http://schemas.microsoft.com/office/drawing/2014/main" id="{FB290B83-0E01-2860-E35D-2FF552994951}"/>
               </a:ext>
             </a:extLst>
           </p:cNvPr>
@@ -14000,7 +14505,7 @@
             <p:cNvPr id="61" name="Oval 60">
               <a:extLst>
                 <a:ext uri="{FF2B5EF4-FFF2-40B4-BE49-F238E27FC236}">
-                  <a16:creationId xmlns:a16="http://schemas.microsoft.com/office/drawing/2014/main" xmlns="" id="{6F929B18-1882-FDE4-813E-6B0362098925}"/>
+                  <a16:creationId xmlns="" xmlns:a16="http://schemas.microsoft.com/office/drawing/2014/main" id="{6F929B18-1882-FDE4-813E-6B0362098925}"/>
                 </a:ext>
               </a:extLst>
             </p:cNvPr>
@@ -14059,7 +14564,7 @@
             <p:cNvPr id="62" name="Arc 61">
               <a:extLst>
                 <a:ext uri="{FF2B5EF4-FFF2-40B4-BE49-F238E27FC236}">
-                  <a16:creationId xmlns:a16="http://schemas.microsoft.com/office/drawing/2014/main" xmlns="" id="{982FB3D8-FD66-CA49-64EC-27B30CFD234A}"/>
+                  <a16:creationId xmlns="" xmlns:a16="http://schemas.microsoft.com/office/drawing/2014/main" id="{982FB3D8-FD66-CA49-64EC-27B30CFD234A}"/>
                 </a:ext>
               </a:extLst>
             </p:cNvPr>
@@ -14112,7 +14617,7 @@
           <p:cNvPr id="63" name="Group 62">
             <a:extLst>
               <a:ext uri="{FF2B5EF4-FFF2-40B4-BE49-F238E27FC236}">
-                <a16:creationId xmlns:a16="http://schemas.microsoft.com/office/drawing/2014/main" xmlns="" id="{7825E36E-56DC-774E-6E7A-31BA18848AA1}"/>
+                <a16:creationId xmlns="" xmlns:a16="http://schemas.microsoft.com/office/drawing/2014/main" id="{7825E36E-56DC-774E-6E7A-31BA18848AA1}"/>
               </a:ext>
             </a:extLst>
           </p:cNvPr>
@@ -14132,7 +14637,7 @@
             <p:cNvPr id="64" name="Oval 63">
               <a:extLst>
                 <a:ext uri="{FF2B5EF4-FFF2-40B4-BE49-F238E27FC236}">
-                  <a16:creationId xmlns:a16="http://schemas.microsoft.com/office/drawing/2014/main" xmlns="" id="{ED86C4D0-421F-E188-D347-FB75A80318D7}"/>
+                  <a16:creationId xmlns="" xmlns:a16="http://schemas.microsoft.com/office/drawing/2014/main" id="{ED86C4D0-421F-E188-D347-FB75A80318D7}"/>
                 </a:ext>
               </a:extLst>
             </p:cNvPr>
@@ -14191,7 +14696,7 @@
             <p:cNvPr id="65" name="Arc 64">
               <a:extLst>
                 <a:ext uri="{FF2B5EF4-FFF2-40B4-BE49-F238E27FC236}">
-                  <a16:creationId xmlns:a16="http://schemas.microsoft.com/office/drawing/2014/main" xmlns="" id="{7251B93F-50B9-C260-ECEA-5767A3723660}"/>
+                  <a16:creationId xmlns="" xmlns:a16="http://schemas.microsoft.com/office/drawing/2014/main" id="{7251B93F-50B9-C260-ECEA-5767A3723660}"/>
                 </a:ext>
               </a:extLst>
             </p:cNvPr>
@@ -14244,7 +14749,7 @@
           <p:cNvPr id="66" name="Group 65">
             <a:extLst>
               <a:ext uri="{FF2B5EF4-FFF2-40B4-BE49-F238E27FC236}">
-                <a16:creationId xmlns:a16="http://schemas.microsoft.com/office/drawing/2014/main" xmlns="" id="{C3079399-2A21-14E1-E7E4-E94ED810D168}"/>
+                <a16:creationId xmlns="" xmlns:a16="http://schemas.microsoft.com/office/drawing/2014/main" id="{C3079399-2A21-14E1-E7E4-E94ED810D168}"/>
               </a:ext>
             </a:extLst>
           </p:cNvPr>
@@ -14264,7 +14769,7 @@
             <p:cNvPr id="67" name="Oval 66">
               <a:extLst>
                 <a:ext uri="{FF2B5EF4-FFF2-40B4-BE49-F238E27FC236}">
-                  <a16:creationId xmlns:a16="http://schemas.microsoft.com/office/drawing/2014/main" xmlns="" id="{7CD11775-2901-2E40-5490-630DC1623B0F}"/>
+                  <a16:creationId xmlns="" xmlns:a16="http://schemas.microsoft.com/office/drawing/2014/main" id="{7CD11775-2901-2E40-5490-630DC1623B0F}"/>
                 </a:ext>
               </a:extLst>
             </p:cNvPr>
@@ -14323,7 +14828,7 @@
             <p:cNvPr id="68" name="Arc 67">
               <a:extLst>
                 <a:ext uri="{FF2B5EF4-FFF2-40B4-BE49-F238E27FC236}">
-                  <a16:creationId xmlns:a16="http://schemas.microsoft.com/office/drawing/2014/main" xmlns="" id="{5B556831-69E2-8918-5D16-C84DEC612606}"/>
+                  <a16:creationId xmlns="" xmlns:a16="http://schemas.microsoft.com/office/drawing/2014/main" id="{5B556831-69E2-8918-5D16-C84DEC612606}"/>
                 </a:ext>
               </a:extLst>
             </p:cNvPr>
@@ -14376,7 +14881,7 @@
           <p:cNvPr id="69" name="Group 68">
             <a:extLst>
               <a:ext uri="{FF2B5EF4-FFF2-40B4-BE49-F238E27FC236}">
-                <a16:creationId xmlns:a16="http://schemas.microsoft.com/office/drawing/2014/main" xmlns="" id="{5ADEE217-7DF5-3EDB-61BF-AF3C812CBEE6}"/>
+                <a16:creationId xmlns="" xmlns:a16="http://schemas.microsoft.com/office/drawing/2014/main" id="{5ADEE217-7DF5-3EDB-61BF-AF3C812CBEE6}"/>
               </a:ext>
             </a:extLst>
           </p:cNvPr>
@@ -14396,7 +14901,7 @@
             <p:cNvPr id="70" name="Oval 69">
               <a:extLst>
                 <a:ext uri="{FF2B5EF4-FFF2-40B4-BE49-F238E27FC236}">
-                  <a16:creationId xmlns:a16="http://schemas.microsoft.com/office/drawing/2014/main" xmlns="" id="{841DE28C-2D28-1185-E3B4-C2BB3354E52B}"/>
+                  <a16:creationId xmlns="" xmlns:a16="http://schemas.microsoft.com/office/drawing/2014/main" id="{841DE28C-2D28-1185-E3B4-C2BB3354E52B}"/>
                 </a:ext>
               </a:extLst>
             </p:cNvPr>
@@ -14455,7 +14960,7 @@
             <p:cNvPr id="71" name="Arc 70">
               <a:extLst>
                 <a:ext uri="{FF2B5EF4-FFF2-40B4-BE49-F238E27FC236}">
-                  <a16:creationId xmlns:a16="http://schemas.microsoft.com/office/drawing/2014/main" xmlns="" id="{FADBB813-4022-6BF4-4302-D581AB1A6C99}"/>
+                  <a16:creationId xmlns="" xmlns:a16="http://schemas.microsoft.com/office/drawing/2014/main" id="{FADBB813-4022-6BF4-4302-D581AB1A6C99}"/>
                 </a:ext>
               </a:extLst>
             </p:cNvPr>
@@ -14508,7 +15013,7 @@
           <p:cNvPr id="72" name="Group 71">
             <a:extLst>
               <a:ext uri="{FF2B5EF4-FFF2-40B4-BE49-F238E27FC236}">
-                <a16:creationId xmlns:a16="http://schemas.microsoft.com/office/drawing/2014/main" xmlns="" id="{9D9C9153-B8FA-38C4-EB67-86B9459BFFE9}"/>
+                <a16:creationId xmlns="" xmlns:a16="http://schemas.microsoft.com/office/drawing/2014/main" id="{9D9C9153-B8FA-38C4-EB67-86B9459BFFE9}"/>
               </a:ext>
             </a:extLst>
           </p:cNvPr>
@@ -14528,7 +15033,7 @@
             <p:cNvPr id="73" name="Oval 72">
               <a:extLst>
                 <a:ext uri="{FF2B5EF4-FFF2-40B4-BE49-F238E27FC236}">
-                  <a16:creationId xmlns:a16="http://schemas.microsoft.com/office/drawing/2014/main" xmlns="" id="{874762A5-21AC-4851-DF9C-A0D7DBFA5AFA}"/>
+                  <a16:creationId xmlns="" xmlns:a16="http://schemas.microsoft.com/office/drawing/2014/main" id="{874762A5-21AC-4851-DF9C-A0D7DBFA5AFA}"/>
                 </a:ext>
               </a:extLst>
             </p:cNvPr>
@@ -14587,7 +15092,7 @@
             <p:cNvPr id="74" name="Arc 73">
               <a:extLst>
                 <a:ext uri="{FF2B5EF4-FFF2-40B4-BE49-F238E27FC236}">
-                  <a16:creationId xmlns:a16="http://schemas.microsoft.com/office/drawing/2014/main" xmlns="" id="{BDBA534A-9F3C-F651-600E-DD503C672D20}"/>
+                  <a16:creationId xmlns="" xmlns:a16="http://schemas.microsoft.com/office/drawing/2014/main" id="{BDBA534A-9F3C-F651-600E-DD503C672D20}"/>
                 </a:ext>
               </a:extLst>
             </p:cNvPr>
@@ -14640,7 +15145,7 @@
           <p:cNvPr id="75" name="Group 74">
             <a:extLst>
               <a:ext uri="{FF2B5EF4-FFF2-40B4-BE49-F238E27FC236}">
-                <a16:creationId xmlns:a16="http://schemas.microsoft.com/office/drawing/2014/main" xmlns="" id="{79961178-ABE0-C7D2-04FE-9A129BC81ED4}"/>
+                <a16:creationId xmlns="" xmlns:a16="http://schemas.microsoft.com/office/drawing/2014/main" id="{79961178-ABE0-C7D2-04FE-9A129BC81ED4}"/>
               </a:ext>
             </a:extLst>
           </p:cNvPr>
@@ -14660,7 +15165,7 @@
             <p:cNvPr id="76" name="Oval 75">
               <a:extLst>
                 <a:ext uri="{FF2B5EF4-FFF2-40B4-BE49-F238E27FC236}">
-                  <a16:creationId xmlns:a16="http://schemas.microsoft.com/office/drawing/2014/main" xmlns="" id="{D8C47778-3FE4-169B-9D62-9C01A7F95945}"/>
+                  <a16:creationId xmlns="" xmlns:a16="http://schemas.microsoft.com/office/drawing/2014/main" id="{D8C47778-3FE4-169B-9D62-9C01A7F95945}"/>
                 </a:ext>
               </a:extLst>
             </p:cNvPr>
@@ -14719,7 +15224,7 @@
             <p:cNvPr id="77" name="Arc 76">
               <a:extLst>
                 <a:ext uri="{FF2B5EF4-FFF2-40B4-BE49-F238E27FC236}">
-                  <a16:creationId xmlns:a16="http://schemas.microsoft.com/office/drawing/2014/main" xmlns="" id="{FDC23D54-870F-5B8A-AB44-E52FAE0875B5}"/>
+                  <a16:creationId xmlns="" xmlns:a16="http://schemas.microsoft.com/office/drawing/2014/main" id="{FDC23D54-870F-5B8A-AB44-E52FAE0875B5}"/>
                 </a:ext>
               </a:extLst>
             </p:cNvPr>
@@ -14772,7 +15277,7 @@
           <p:cNvPr id="78" name="Group 77">
             <a:extLst>
               <a:ext uri="{FF2B5EF4-FFF2-40B4-BE49-F238E27FC236}">
-                <a16:creationId xmlns:a16="http://schemas.microsoft.com/office/drawing/2014/main" xmlns="" id="{B99FDF76-FB64-197E-90CD-2A6F48DA61F3}"/>
+                <a16:creationId xmlns="" xmlns:a16="http://schemas.microsoft.com/office/drawing/2014/main" id="{B99FDF76-FB64-197E-90CD-2A6F48DA61F3}"/>
               </a:ext>
             </a:extLst>
           </p:cNvPr>
@@ -14792,7 +15297,7 @@
             <p:cNvPr id="79" name="Oval 78">
               <a:extLst>
                 <a:ext uri="{FF2B5EF4-FFF2-40B4-BE49-F238E27FC236}">
-                  <a16:creationId xmlns:a16="http://schemas.microsoft.com/office/drawing/2014/main" xmlns="" id="{C7D39EC7-8798-33A9-DB8C-D12FB95A963C}"/>
+                  <a16:creationId xmlns="" xmlns:a16="http://schemas.microsoft.com/office/drawing/2014/main" id="{C7D39EC7-8798-33A9-DB8C-D12FB95A963C}"/>
                 </a:ext>
               </a:extLst>
             </p:cNvPr>
@@ -14851,7 +15356,7 @@
             <p:cNvPr id="80" name="Arc 79">
               <a:extLst>
                 <a:ext uri="{FF2B5EF4-FFF2-40B4-BE49-F238E27FC236}">
-                  <a16:creationId xmlns:a16="http://schemas.microsoft.com/office/drawing/2014/main" xmlns="" id="{CA276D5B-D344-FC55-AFBA-FB0F2E0A212D}"/>
+                  <a16:creationId xmlns="" xmlns:a16="http://schemas.microsoft.com/office/drawing/2014/main" id="{CA276D5B-D344-FC55-AFBA-FB0F2E0A212D}"/>
                 </a:ext>
               </a:extLst>
             </p:cNvPr>
@@ -14904,7 +15409,7 @@
           <p:cNvPr id="81" name="Group 80">
             <a:extLst>
               <a:ext uri="{FF2B5EF4-FFF2-40B4-BE49-F238E27FC236}">
-                <a16:creationId xmlns:a16="http://schemas.microsoft.com/office/drawing/2014/main" xmlns="" id="{5B4D2A7E-D5B4-408F-5ACC-A43BFE1E3809}"/>
+                <a16:creationId xmlns="" xmlns:a16="http://schemas.microsoft.com/office/drawing/2014/main" id="{5B4D2A7E-D5B4-408F-5ACC-A43BFE1E3809}"/>
               </a:ext>
             </a:extLst>
           </p:cNvPr>
@@ -14924,7 +15429,7 @@
             <p:cNvPr id="82" name="Oval 81">
               <a:extLst>
                 <a:ext uri="{FF2B5EF4-FFF2-40B4-BE49-F238E27FC236}">
-                  <a16:creationId xmlns:a16="http://schemas.microsoft.com/office/drawing/2014/main" xmlns="" id="{FA296D8C-160F-84DE-0432-628B589F211B}"/>
+                  <a16:creationId xmlns="" xmlns:a16="http://schemas.microsoft.com/office/drawing/2014/main" id="{FA296D8C-160F-84DE-0432-628B589F211B}"/>
                 </a:ext>
               </a:extLst>
             </p:cNvPr>
@@ -14983,7 +15488,7 @@
             <p:cNvPr id="83" name="Arc 82">
               <a:extLst>
                 <a:ext uri="{FF2B5EF4-FFF2-40B4-BE49-F238E27FC236}">
-                  <a16:creationId xmlns:a16="http://schemas.microsoft.com/office/drawing/2014/main" xmlns="" id="{7ACD6CCD-3CFB-52A8-E091-FDDB0E796F53}"/>
+                  <a16:creationId xmlns="" xmlns:a16="http://schemas.microsoft.com/office/drawing/2014/main" id="{7ACD6CCD-3CFB-52A8-E091-FDDB0E796F53}"/>
                 </a:ext>
               </a:extLst>
             </p:cNvPr>
@@ -15036,7 +15541,7 @@
           <p:cNvPr id="84" name="Group 83">
             <a:extLst>
               <a:ext uri="{FF2B5EF4-FFF2-40B4-BE49-F238E27FC236}">
-                <a16:creationId xmlns:a16="http://schemas.microsoft.com/office/drawing/2014/main" xmlns="" id="{44FED0D5-3E54-90C0-E3E7-BF526FE9D113}"/>
+                <a16:creationId xmlns="" xmlns:a16="http://schemas.microsoft.com/office/drawing/2014/main" id="{44FED0D5-3E54-90C0-E3E7-BF526FE9D113}"/>
               </a:ext>
             </a:extLst>
           </p:cNvPr>
@@ -15056,7 +15561,7 @@
             <p:cNvPr id="85" name="Oval 84">
               <a:extLst>
                 <a:ext uri="{FF2B5EF4-FFF2-40B4-BE49-F238E27FC236}">
-                  <a16:creationId xmlns:a16="http://schemas.microsoft.com/office/drawing/2014/main" xmlns="" id="{656B078E-FF03-15AE-74D7-C0ED1C34B554}"/>
+                  <a16:creationId xmlns="" xmlns:a16="http://schemas.microsoft.com/office/drawing/2014/main" id="{656B078E-FF03-15AE-74D7-C0ED1C34B554}"/>
                 </a:ext>
               </a:extLst>
             </p:cNvPr>
@@ -15115,7 +15620,7 @@
             <p:cNvPr id="86" name="Arc 85">
               <a:extLst>
                 <a:ext uri="{FF2B5EF4-FFF2-40B4-BE49-F238E27FC236}">
-                  <a16:creationId xmlns:a16="http://schemas.microsoft.com/office/drawing/2014/main" xmlns="" id="{6B33F721-99DC-4BB8-9E9E-DAF43599FE12}"/>
+                  <a16:creationId xmlns="" xmlns:a16="http://schemas.microsoft.com/office/drawing/2014/main" id="{6B33F721-99DC-4BB8-9E9E-DAF43599FE12}"/>
                 </a:ext>
               </a:extLst>
             </p:cNvPr>
@@ -15168,7 +15673,7 @@
           <p:cNvPr id="87" name="Group 86">
             <a:extLst>
               <a:ext uri="{FF2B5EF4-FFF2-40B4-BE49-F238E27FC236}">
-                <a16:creationId xmlns:a16="http://schemas.microsoft.com/office/drawing/2014/main" xmlns="" id="{59827D44-4B51-A191-64E5-C84C0624372E}"/>
+                <a16:creationId xmlns="" xmlns:a16="http://schemas.microsoft.com/office/drawing/2014/main" id="{59827D44-4B51-A191-64E5-C84C0624372E}"/>
               </a:ext>
             </a:extLst>
           </p:cNvPr>
@@ -15188,7 +15693,7 @@
             <p:cNvPr id="88" name="Oval 87">
               <a:extLst>
                 <a:ext uri="{FF2B5EF4-FFF2-40B4-BE49-F238E27FC236}">
-                  <a16:creationId xmlns:a16="http://schemas.microsoft.com/office/drawing/2014/main" xmlns="" id="{402C9496-9C16-3C84-DE2A-8792B0D53BA9}"/>
+                  <a16:creationId xmlns="" xmlns:a16="http://schemas.microsoft.com/office/drawing/2014/main" id="{402C9496-9C16-3C84-DE2A-8792B0D53BA9}"/>
                 </a:ext>
               </a:extLst>
             </p:cNvPr>
@@ -15247,7 +15752,7 @@
             <p:cNvPr id="89" name="Arc 88">
               <a:extLst>
                 <a:ext uri="{FF2B5EF4-FFF2-40B4-BE49-F238E27FC236}">
-                  <a16:creationId xmlns:a16="http://schemas.microsoft.com/office/drawing/2014/main" xmlns="" id="{D4F27B29-B37A-5397-E933-37DF44EFCF3E}"/>
+                  <a16:creationId xmlns="" xmlns:a16="http://schemas.microsoft.com/office/drawing/2014/main" id="{D4F27B29-B37A-5397-E933-37DF44EFCF3E}"/>
                 </a:ext>
               </a:extLst>
             </p:cNvPr>
@@ -15300,7 +15805,7 @@
           <p:cNvPr id="90" name="Group 89">
             <a:extLst>
               <a:ext uri="{FF2B5EF4-FFF2-40B4-BE49-F238E27FC236}">
-                <a16:creationId xmlns:a16="http://schemas.microsoft.com/office/drawing/2014/main" xmlns="" id="{C31CDB83-6843-FF34-4DD1-308EBFE5E615}"/>
+                <a16:creationId xmlns="" xmlns:a16="http://schemas.microsoft.com/office/drawing/2014/main" id="{C31CDB83-6843-FF34-4DD1-308EBFE5E615}"/>
               </a:ext>
             </a:extLst>
           </p:cNvPr>
@@ -15320,7 +15825,7 @@
             <p:cNvPr id="91" name="Oval 90">
               <a:extLst>
                 <a:ext uri="{FF2B5EF4-FFF2-40B4-BE49-F238E27FC236}">
-                  <a16:creationId xmlns:a16="http://schemas.microsoft.com/office/drawing/2014/main" xmlns="" id="{B6601984-7036-87C4-47B4-9F20BE341D87}"/>
+                  <a16:creationId xmlns="" xmlns:a16="http://schemas.microsoft.com/office/drawing/2014/main" id="{B6601984-7036-87C4-47B4-9F20BE341D87}"/>
                 </a:ext>
               </a:extLst>
             </p:cNvPr>
@@ -15379,7 +15884,7 @@
             <p:cNvPr id="92" name="Arc 91">
               <a:extLst>
                 <a:ext uri="{FF2B5EF4-FFF2-40B4-BE49-F238E27FC236}">
-                  <a16:creationId xmlns:a16="http://schemas.microsoft.com/office/drawing/2014/main" xmlns="" id="{985ED055-0FFF-9046-6A6B-2F0B309B0601}"/>
+                  <a16:creationId xmlns="" xmlns:a16="http://schemas.microsoft.com/office/drawing/2014/main" id="{985ED055-0FFF-9046-6A6B-2F0B309B0601}"/>
                 </a:ext>
               </a:extLst>
             </p:cNvPr>
@@ -15432,7 +15937,7 @@
           <p:cNvPr id="93" name="Group 92">
             <a:extLst>
               <a:ext uri="{FF2B5EF4-FFF2-40B4-BE49-F238E27FC236}">
-                <a16:creationId xmlns:a16="http://schemas.microsoft.com/office/drawing/2014/main" xmlns="" id="{2F3C57F8-4743-E9F0-EEB4-1B99AAA02502}"/>
+                <a16:creationId xmlns="" xmlns:a16="http://schemas.microsoft.com/office/drawing/2014/main" id="{2F3C57F8-4743-E9F0-EEB4-1B99AAA02502}"/>
               </a:ext>
             </a:extLst>
           </p:cNvPr>
@@ -15452,7 +15957,7 @@
             <p:cNvPr id="94" name="Oval 93">
               <a:extLst>
                 <a:ext uri="{FF2B5EF4-FFF2-40B4-BE49-F238E27FC236}">
-                  <a16:creationId xmlns:a16="http://schemas.microsoft.com/office/drawing/2014/main" xmlns="" id="{70E875F3-7DD6-842E-3C42-FB7188017892}"/>
+                  <a16:creationId xmlns="" xmlns:a16="http://schemas.microsoft.com/office/drawing/2014/main" id="{70E875F3-7DD6-842E-3C42-FB7188017892}"/>
                 </a:ext>
               </a:extLst>
             </p:cNvPr>
@@ -15511,7 +16016,7 @@
             <p:cNvPr id="95" name="Arc 94">
               <a:extLst>
                 <a:ext uri="{FF2B5EF4-FFF2-40B4-BE49-F238E27FC236}">
-                  <a16:creationId xmlns:a16="http://schemas.microsoft.com/office/drawing/2014/main" xmlns="" id="{B2F6FB24-FC01-4AF4-9A35-DAA5B1A8563F}"/>
+                  <a16:creationId xmlns="" xmlns:a16="http://schemas.microsoft.com/office/drawing/2014/main" id="{B2F6FB24-FC01-4AF4-9A35-DAA5B1A8563F}"/>
                 </a:ext>
               </a:extLst>
             </p:cNvPr>
@@ -15564,7 +16069,7 @@
           <p:cNvPr id="96" name="Group 95">
             <a:extLst>
               <a:ext uri="{FF2B5EF4-FFF2-40B4-BE49-F238E27FC236}">
-                <a16:creationId xmlns:a16="http://schemas.microsoft.com/office/drawing/2014/main" xmlns="" id="{DDDFC3EA-F7A7-3A43-3D7E-FFBE8CE964FD}"/>
+                <a16:creationId xmlns="" xmlns:a16="http://schemas.microsoft.com/office/drawing/2014/main" id="{DDDFC3EA-F7A7-3A43-3D7E-FFBE8CE964FD}"/>
               </a:ext>
             </a:extLst>
           </p:cNvPr>
@@ -15584,7 +16089,7 @@
             <p:cNvPr id="97" name="Oval 96">
               <a:extLst>
                 <a:ext uri="{FF2B5EF4-FFF2-40B4-BE49-F238E27FC236}">
-                  <a16:creationId xmlns:a16="http://schemas.microsoft.com/office/drawing/2014/main" xmlns="" id="{5F25F946-F5CC-34FA-0E42-EA8C2624FCEC}"/>
+                  <a16:creationId xmlns="" xmlns:a16="http://schemas.microsoft.com/office/drawing/2014/main" id="{5F25F946-F5CC-34FA-0E42-EA8C2624FCEC}"/>
                 </a:ext>
               </a:extLst>
             </p:cNvPr>
@@ -15643,7 +16148,7 @@
             <p:cNvPr id="98" name="Arc 97">
               <a:extLst>
                 <a:ext uri="{FF2B5EF4-FFF2-40B4-BE49-F238E27FC236}">
-                  <a16:creationId xmlns:a16="http://schemas.microsoft.com/office/drawing/2014/main" xmlns="" id="{B792FC13-D3FC-7671-B724-A8CF4B9A39B4}"/>
+                  <a16:creationId xmlns="" xmlns:a16="http://schemas.microsoft.com/office/drawing/2014/main" id="{B792FC13-D3FC-7671-B724-A8CF4B9A39B4}"/>
                 </a:ext>
               </a:extLst>
             </p:cNvPr>
@@ -15696,7 +16201,7 @@
           <p:cNvPr id="99" name="Group 98">
             <a:extLst>
               <a:ext uri="{FF2B5EF4-FFF2-40B4-BE49-F238E27FC236}">
-                <a16:creationId xmlns:a16="http://schemas.microsoft.com/office/drawing/2014/main" xmlns="" id="{2DB2C038-DEFE-204E-30FC-790636ED570C}"/>
+                <a16:creationId xmlns="" xmlns:a16="http://schemas.microsoft.com/office/drawing/2014/main" id="{2DB2C038-DEFE-204E-30FC-790636ED570C}"/>
               </a:ext>
             </a:extLst>
           </p:cNvPr>
@@ -15716,7 +16221,7 @@
             <p:cNvPr id="100" name="Oval 99">
               <a:extLst>
                 <a:ext uri="{FF2B5EF4-FFF2-40B4-BE49-F238E27FC236}">
-                  <a16:creationId xmlns:a16="http://schemas.microsoft.com/office/drawing/2014/main" xmlns="" id="{45093590-8764-D5E6-8110-FD1D24889D7B}"/>
+                  <a16:creationId xmlns="" xmlns:a16="http://schemas.microsoft.com/office/drawing/2014/main" id="{45093590-8764-D5E6-8110-FD1D24889D7B}"/>
                 </a:ext>
               </a:extLst>
             </p:cNvPr>
@@ -15775,7 +16280,7 @@
             <p:cNvPr id="101" name="Arc 100">
               <a:extLst>
                 <a:ext uri="{FF2B5EF4-FFF2-40B4-BE49-F238E27FC236}">
-                  <a16:creationId xmlns:a16="http://schemas.microsoft.com/office/drawing/2014/main" xmlns="" id="{770478F6-8E18-6FE2-B3C4-489000AC2563}"/>
+                  <a16:creationId xmlns="" xmlns:a16="http://schemas.microsoft.com/office/drawing/2014/main" id="{770478F6-8E18-6FE2-B3C4-489000AC2563}"/>
                 </a:ext>
               </a:extLst>
             </p:cNvPr>
@@ -15828,7 +16333,7 @@
           <p:cNvPr id="102" name="Group 101">
             <a:extLst>
               <a:ext uri="{FF2B5EF4-FFF2-40B4-BE49-F238E27FC236}">
-                <a16:creationId xmlns:a16="http://schemas.microsoft.com/office/drawing/2014/main" xmlns="" id="{BB5E874B-F6C3-FA86-2883-E06C0B907345}"/>
+                <a16:creationId xmlns="" xmlns:a16="http://schemas.microsoft.com/office/drawing/2014/main" id="{BB5E874B-F6C3-FA86-2883-E06C0B907345}"/>
               </a:ext>
             </a:extLst>
           </p:cNvPr>
@@ -15848,7 +16353,7 @@
             <p:cNvPr id="103" name="Oval 102">
               <a:extLst>
                 <a:ext uri="{FF2B5EF4-FFF2-40B4-BE49-F238E27FC236}">
-                  <a16:creationId xmlns:a16="http://schemas.microsoft.com/office/drawing/2014/main" xmlns="" id="{ADCBCFB9-1DE9-6BCF-CAFB-A3A5E3E3BDC3}"/>
+                  <a16:creationId xmlns="" xmlns:a16="http://schemas.microsoft.com/office/drawing/2014/main" id="{ADCBCFB9-1DE9-6BCF-CAFB-A3A5E3E3BDC3}"/>
                 </a:ext>
               </a:extLst>
             </p:cNvPr>
@@ -15907,7 +16412,7 @@
             <p:cNvPr id="104" name="Arc 103">
               <a:extLst>
                 <a:ext uri="{FF2B5EF4-FFF2-40B4-BE49-F238E27FC236}">
-                  <a16:creationId xmlns:a16="http://schemas.microsoft.com/office/drawing/2014/main" xmlns="" id="{06897284-51F0-34BA-B35F-D0DFBB95FC6A}"/>
+                  <a16:creationId xmlns="" xmlns:a16="http://schemas.microsoft.com/office/drawing/2014/main" id="{06897284-51F0-34BA-B35F-D0DFBB95FC6A}"/>
                 </a:ext>
               </a:extLst>
             </p:cNvPr>
@@ -15960,7 +16465,7 @@
           <p:cNvPr id="105" name="Group 104">
             <a:extLst>
               <a:ext uri="{FF2B5EF4-FFF2-40B4-BE49-F238E27FC236}">
-                <a16:creationId xmlns:a16="http://schemas.microsoft.com/office/drawing/2014/main" xmlns="" id="{C96F0D64-C1BF-B3A8-A519-7E4CF06FFDC7}"/>
+                <a16:creationId xmlns="" xmlns:a16="http://schemas.microsoft.com/office/drawing/2014/main" id="{C96F0D64-C1BF-B3A8-A519-7E4CF06FFDC7}"/>
               </a:ext>
             </a:extLst>
           </p:cNvPr>
@@ -15980,7 +16485,7 @@
             <p:cNvPr id="106" name="Oval 105">
               <a:extLst>
                 <a:ext uri="{FF2B5EF4-FFF2-40B4-BE49-F238E27FC236}">
-                  <a16:creationId xmlns:a16="http://schemas.microsoft.com/office/drawing/2014/main" xmlns="" id="{1346C700-051D-1F0B-ADAE-0132A316A7DB}"/>
+                  <a16:creationId xmlns="" xmlns:a16="http://schemas.microsoft.com/office/drawing/2014/main" id="{1346C700-051D-1F0B-ADAE-0132A316A7DB}"/>
                 </a:ext>
               </a:extLst>
             </p:cNvPr>
@@ -16039,7 +16544,7 @@
             <p:cNvPr id="107" name="Arc 106">
               <a:extLst>
                 <a:ext uri="{FF2B5EF4-FFF2-40B4-BE49-F238E27FC236}">
-                  <a16:creationId xmlns:a16="http://schemas.microsoft.com/office/drawing/2014/main" xmlns="" id="{BA5E0980-7A99-E9E0-4B91-E38555423E5B}"/>
+                  <a16:creationId xmlns="" xmlns:a16="http://schemas.microsoft.com/office/drawing/2014/main" id="{BA5E0980-7A99-E9E0-4B91-E38555423E5B}"/>
                 </a:ext>
               </a:extLst>
             </p:cNvPr>
@@ -16092,7 +16597,7 @@
           <p:cNvPr id="108" name="Group 107">
             <a:extLst>
               <a:ext uri="{FF2B5EF4-FFF2-40B4-BE49-F238E27FC236}">
-                <a16:creationId xmlns:a16="http://schemas.microsoft.com/office/drawing/2014/main" xmlns="" id="{D6790D83-0F90-0346-D1FD-D5C3602DFFF6}"/>
+                <a16:creationId xmlns="" xmlns:a16="http://schemas.microsoft.com/office/drawing/2014/main" id="{D6790D83-0F90-0346-D1FD-D5C3602DFFF6}"/>
               </a:ext>
             </a:extLst>
           </p:cNvPr>
@@ -16112,7 +16617,7 @@
             <p:cNvPr id="109" name="Oval 108">
               <a:extLst>
                 <a:ext uri="{FF2B5EF4-FFF2-40B4-BE49-F238E27FC236}">
-                  <a16:creationId xmlns:a16="http://schemas.microsoft.com/office/drawing/2014/main" xmlns="" id="{CE118234-AB4B-3CE4-8627-D437C8F12935}"/>
+                  <a16:creationId xmlns="" xmlns:a16="http://schemas.microsoft.com/office/drawing/2014/main" id="{CE118234-AB4B-3CE4-8627-D437C8F12935}"/>
                 </a:ext>
               </a:extLst>
             </p:cNvPr>
@@ -16171,7 +16676,7 @@
             <p:cNvPr id="110" name="Arc 109">
               <a:extLst>
                 <a:ext uri="{FF2B5EF4-FFF2-40B4-BE49-F238E27FC236}">
-                  <a16:creationId xmlns:a16="http://schemas.microsoft.com/office/drawing/2014/main" xmlns="" id="{24A6161C-A3EC-CB70-28BF-1AA5907F656E}"/>
+                  <a16:creationId xmlns="" xmlns:a16="http://schemas.microsoft.com/office/drawing/2014/main" id="{24A6161C-A3EC-CB70-28BF-1AA5907F656E}"/>
                 </a:ext>
               </a:extLst>
             </p:cNvPr>
@@ -16224,7 +16729,7 @@
           <p:cNvPr id="111" name="Group 110">
             <a:extLst>
               <a:ext uri="{FF2B5EF4-FFF2-40B4-BE49-F238E27FC236}">
-                <a16:creationId xmlns:a16="http://schemas.microsoft.com/office/drawing/2014/main" xmlns="" id="{F8BE1461-AE7E-40C6-28C5-62341855537E}"/>
+                <a16:creationId xmlns="" xmlns:a16="http://schemas.microsoft.com/office/drawing/2014/main" id="{F8BE1461-AE7E-40C6-28C5-62341855537E}"/>
               </a:ext>
             </a:extLst>
           </p:cNvPr>
@@ -16244,7 +16749,7 @@
             <p:cNvPr id="112" name="Oval 111">
               <a:extLst>
                 <a:ext uri="{FF2B5EF4-FFF2-40B4-BE49-F238E27FC236}">
-                  <a16:creationId xmlns:a16="http://schemas.microsoft.com/office/drawing/2014/main" xmlns="" id="{3D6C0D0C-1737-4ACF-DF05-40AB4B997999}"/>
+                  <a16:creationId xmlns="" xmlns:a16="http://schemas.microsoft.com/office/drawing/2014/main" id="{3D6C0D0C-1737-4ACF-DF05-40AB4B997999}"/>
                 </a:ext>
               </a:extLst>
             </p:cNvPr>
@@ -16303,7 +16808,7 @@
             <p:cNvPr id="113" name="Arc 112">
               <a:extLst>
                 <a:ext uri="{FF2B5EF4-FFF2-40B4-BE49-F238E27FC236}">
-                  <a16:creationId xmlns:a16="http://schemas.microsoft.com/office/drawing/2014/main" xmlns="" id="{C80C098A-9223-34F9-FB12-0ACBBD0C19A6}"/>
+                  <a16:creationId xmlns="" xmlns:a16="http://schemas.microsoft.com/office/drawing/2014/main" id="{C80C098A-9223-34F9-FB12-0ACBBD0C19A6}"/>
                 </a:ext>
               </a:extLst>
             </p:cNvPr>
@@ -16356,7 +16861,7 @@
           <p:cNvPr id="114" name="Group 113">
             <a:extLst>
               <a:ext uri="{FF2B5EF4-FFF2-40B4-BE49-F238E27FC236}">
-                <a16:creationId xmlns:a16="http://schemas.microsoft.com/office/drawing/2014/main" xmlns="" id="{697EE20F-3D0A-E159-F8D9-0EC0D2AF7155}"/>
+                <a16:creationId xmlns="" xmlns:a16="http://schemas.microsoft.com/office/drawing/2014/main" id="{697EE20F-3D0A-E159-F8D9-0EC0D2AF7155}"/>
               </a:ext>
             </a:extLst>
           </p:cNvPr>
@@ -16376,7 +16881,7 @@
             <p:cNvPr id="115" name="Oval 114">
               <a:extLst>
                 <a:ext uri="{FF2B5EF4-FFF2-40B4-BE49-F238E27FC236}">
-                  <a16:creationId xmlns:a16="http://schemas.microsoft.com/office/drawing/2014/main" xmlns="" id="{4E528A35-0A92-6308-0EDC-AA6D20AA61B8}"/>
+                  <a16:creationId xmlns="" xmlns:a16="http://schemas.microsoft.com/office/drawing/2014/main" id="{4E528A35-0A92-6308-0EDC-AA6D20AA61B8}"/>
                 </a:ext>
               </a:extLst>
             </p:cNvPr>
@@ -16435,7 +16940,7 @@
             <p:cNvPr id="116" name="Arc 115">
               <a:extLst>
                 <a:ext uri="{FF2B5EF4-FFF2-40B4-BE49-F238E27FC236}">
-                  <a16:creationId xmlns:a16="http://schemas.microsoft.com/office/drawing/2014/main" xmlns="" id="{39483389-2D87-DE50-A684-495349A8AE67}"/>
+                  <a16:creationId xmlns="" xmlns:a16="http://schemas.microsoft.com/office/drawing/2014/main" id="{39483389-2D87-DE50-A684-495349A8AE67}"/>
                 </a:ext>
               </a:extLst>
             </p:cNvPr>
@@ -16488,7 +16993,7 @@
           <p:cNvPr id="117" name="Group 116">
             <a:extLst>
               <a:ext uri="{FF2B5EF4-FFF2-40B4-BE49-F238E27FC236}">
-                <a16:creationId xmlns:a16="http://schemas.microsoft.com/office/drawing/2014/main" xmlns="" id="{786BE2FE-EF0F-688F-5B2C-6EF38976E83B}"/>
+                <a16:creationId xmlns="" xmlns:a16="http://schemas.microsoft.com/office/drawing/2014/main" id="{786BE2FE-EF0F-688F-5B2C-6EF38976E83B}"/>
               </a:ext>
             </a:extLst>
           </p:cNvPr>
@@ -16508,7 +17013,7 @@
             <p:cNvPr id="118" name="Oval 117">
               <a:extLst>
                 <a:ext uri="{FF2B5EF4-FFF2-40B4-BE49-F238E27FC236}">
-                  <a16:creationId xmlns:a16="http://schemas.microsoft.com/office/drawing/2014/main" xmlns="" id="{A0C35F16-1AB8-1BF9-41DE-1B715E0D36D5}"/>
+                  <a16:creationId xmlns="" xmlns:a16="http://schemas.microsoft.com/office/drawing/2014/main" id="{A0C35F16-1AB8-1BF9-41DE-1B715E0D36D5}"/>
                 </a:ext>
               </a:extLst>
             </p:cNvPr>
@@ -16567,7 +17072,7 @@
             <p:cNvPr id="119" name="Arc 118">
               <a:extLst>
                 <a:ext uri="{FF2B5EF4-FFF2-40B4-BE49-F238E27FC236}">
-                  <a16:creationId xmlns:a16="http://schemas.microsoft.com/office/drawing/2014/main" xmlns="" id="{C0154793-588A-3EFA-F58E-FF511C68E63E}"/>
+                  <a16:creationId xmlns="" xmlns:a16="http://schemas.microsoft.com/office/drawing/2014/main" id="{C0154793-588A-3EFA-F58E-FF511C68E63E}"/>
                 </a:ext>
               </a:extLst>
             </p:cNvPr>
@@ -16620,7 +17125,7 @@
           <p:cNvPr id="120" name="Group 119">
             <a:extLst>
               <a:ext uri="{FF2B5EF4-FFF2-40B4-BE49-F238E27FC236}">
-                <a16:creationId xmlns:a16="http://schemas.microsoft.com/office/drawing/2014/main" xmlns="" id="{511A915E-B563-6A18-4902-C0442601AD96}"/>
+                <a16:creationId xmlns="" xmlns:a16="http://schemas.microsoft.com/office/drawing/2014/main" id="{511A915E-B563-6A18-4902-C0442601AD96}"/>
               </a:ext>
             </a:extLst>
           </p:cNvPr>
@@ -16640,7 +17145,7 @@
             <p:cNvPr id="121" name="Oval 120">
               <a:extLst>
                 <a:ext uri="{FF2B5EF4-FFF2-40B4-BE49-F238E27FC236}">
-                  <a16:creationId xmlns:a16="http://schemas.microsoft.com/office/drawing/2014/main" xmlns="" id="{109142E7-2B8E-19B5-6124-89973384D7E5}"/>
+                  <a16:creationId xmlns="" xmlns:a16="http://schemas.microsoft.com/office/drawing/2014/main" id="{109142E7-2B8E-19B5-6124-89973384D7E5}"/>
                 </a:ext>
               </a:extLst>
             </p:cNvPr>
@@ -16699,7 +17204,7 @@
             <p:cNvPr id="122" name="Arc 121">
               <a:extLst>
                 <a:ext uri="{FF2B5EF4-FFF2-40B4-BE49-F238E27FC236}">
-                  <a16:creationId xmlns:a16="http://schemas.microsoft.com/office/drawing/2014/main" xmlns="" id="{AAE5814C-3B3B-8D93-EE2B-CB751AFBF13A}"/>
+                  <a16:creationId xmlns="" xmlns:a16="http://schemas.microsoft.com/office/drawing/2014/main" id="{AAE5814C-3B3B-8D93-EE2B-CB751AFBF13A}"/>
                 </a:ext>
               </a:extLst>
             </p:cNvPr>
@@ -16752,7 +17257,7 @@
           <p:cNvPr id="123" name="Rectangle 122">
             <a:extLst>
               <a:ext uri="{FF2B5EF4-FFF2-40B4-BE49-F238E27FC236}">
-                <a16:creationId xmlns:a16="http://schemas.microsoft.com/office/drawing/2014/main" xmlns="" id="{CEA14FBD-E081-AE2A-F431-E0CB87DCB16C}"/>
+                <a16:creationId xmlns="" xmlns:a16="http://schemas.microsoft.com/office/drawing/2014/main" id="{CEA14FBD-E081-AE2A-F431-E0CB87DCB16C}"/>
               </a:ext>
             </a:extLst>
           </p:cNvPr>
@@ -16805,11 +17310,7 @@
             </a:r>
             <a:r>
               <a:rPr lang="en-US" sz="2000" dirty="0" smtClean="0"/>
-              <a:t>suppliers added </a:t>
-            </a:r>
-            <a:r>
-              <a:rPr lang="en-US" sz="2000" dirty="0" smtClean="0"/>
-              <a:t>so they make sure authentic raw materials.</a:t>
+              <a:t>suppliers added so they make sure authentic raw materials.</a:t>
             </a:r>
           </a:p>
           <a:p>
@@ -16881,7 +17382,7 @@
         <p:cNvPr id="1" name="">
           <a:extLst>
             <a:ext uri="{FF2B5EF4-FFF2-40B4-BE49-F238E27FC236}">
-              <a16:creationId xmlns:a16="http://schemas.microsoft.com/office/drawing/2014/main" xmlns="" id="{AB49B653-F82D-52DD-3373-EF7CD343807B}"/>
+              <a16:creationId xmlns="" xmlns:a16="http://schemas.microsoft.com/office/drawing/2014/main" id="{AB49B653-F82D-52DD-3373-EF7CD343807B}"/>
             </a:ext>
           </a:extLst>
         </p:cNvPr>
@@ -16901,7 +17402,7 @@
           <p:cNvPr id="5" name="Rectangle 4">
             <a:extLst>
               <a:ext uri="{FF2B5EF4-FFF2-40B4-BE49-F238E27FC236}">
-                <a16:creationId xmlns:a16="http://schemas.microsoft.com/office/drawing/2014/main" xmlns="" id="{0DBF747C-C898-FAC1-A684-D7D009857C24}"/>
+                <a16:creationId xmlns="" xmlns:a16="http://schemas.microsoft.com/office/drawing/2014/main" id="{0DBF747C-C898-FAC1-A684-D7D009857C24}"/>
               </a:ext>
             </a:extLst>
           </p:cNvPr>
@@ -16957,7 +17458,7 @@
           <p:cNvPr id="4" name="Rectangle 3">
             <a:extLst>
               <a:ext uri="{FF2B5EF4-FFF2-40B4-BE49-F238E27FC236}">
-                <a16:creationId xmlns:a16="http://schemas.microsoft.com/office/drawing/2014/main" xmlns="" id="{7B98B2E6-66EB-FA16-6CAA-7328B9409A56}"/>
+                <a16:creationId xmlns="" xmlns:a16="http://schemas.microsoft.com/office/drawing/2014/main" id="{7B98B2E6-66EB-FA16-6CAA-7328B9409A56}"/>
               </a:ext>
             </a:extLst>
           </p:cNvPr>
@@ -17194,7 +17695,7 @@
           <p:cNvPr id="6" name="Oval 5">
             <a:extLst>
               <a:ext uri="{FF2B5EF4-FFF2-40B4-BE49-F238E27FC236}">
-                <a16:creationId xmlns:a16="http://schemas.microsoft.com/office/drawing/2014/main" xmlns="" id="{18F27E5F-8AB7-C933-B1F5-63F52B4EBC77}"/>
+                <a16:creationId xmlns="" xmlns:a16="http://schemas.microsoft.com/office/drawing/2014/main" id="{18F27E5F-8AB7-C933-B1F5-63F52B4EBC77}"/>
               </a:ext>
             </a:extLst>
           </p:cNvPr>
@@ -17253,7 +17754,7 @@
           <p:cNvPr id="7" name="Oval 6">
             <a:extLst>
               <a:ext uri="{FF2B5EF4-FFF2-40B4-BE49-F238E27FC236}">
-                <a16:creationId xmlns:a16="http://schemas.microsoft.com/office/drawing/2014/main" xmlns="" id="{84EEC563-2DED-4416-2C87-31455035FB0C}"/>
+                <a16:creationId xmlns="" xmlns:a16="http://schemas.microsoft.com/office/drawing/2014/main" id="{84EEC563-2DED-4416-2C87-31455035FB0C}"/>
               </a:ext>
             </a:extLst>
           </p:cNvPr>
@@ -17312,7 +17813,7 @@
           <p:cNvPr id="8" name="Oval 7">
             <a:extLst>
               <a:ext uri="{FF2B5EF4-FFF2-40B4-BE49-F238E27FC236}">
-                <a16:creationId xmlns:a16="http://schemas.microsoft.com/office/drawing/2014/main" xmlns="" id="{E40D0E73-9F08-859E-43E2-25EB19218526}"/>
+                <a16:creationId xmlns="" xmlns:a16="http://schemas.microsoft.com/office/drawing/2014/main" id="{E40D0E73-9F08-859E-43E2-25EB19218526}"/>
               </a:ext>
             </a:extLst>
           </p:cNvPr>
@@ -17371,7 +17872,7 @@
           <p:cNvPr id="9" name="Oval 8">
             <a:extLst>
               <a:ext uri="{FF2B5EF4-FFF2-40B4-BE49-F238E27FC236}">
-                <a16:creationId xmlns:a16="http://schemas.microsoft.com/office/drawing/2014/main" xmlns="" id="{4DB5A593-0CFB-36F3-F8DA-C3F3A2CFB622}"/>
+                <a16:creationId xmlns="" xmlns:a16="http://schemas.microsoft.com/office/drawing/2014/main" id="{4DB5A593-0CFB-36F3-F8DA-C3F3A2CFB622}"/>
               </a:ext>
             </a:extLst>
           </p:cNvPr>
@@ -17430,7 +17931,7 @@
           <p:cNvPr id="10" name="Oval 9">
             <a:extLst>
               <a:ext uri="{FF2B5EF4-FFF2-40B4-BE49-F238E27FC236}">
-                <a16:creationId xmlns:a16="http://schemas.microsoft.com/office/drawing/2014/main" xmlns="" id="{AA568633-31CA-A32D-D861-3B1240EC81B6}"/>
+                <a16:creationId xmlns="" xmlns:a16="http://schemas.microsoft.com/office/drawing/2014/main" id="{AA568633-31CA-A32D-D861-3B1240EC81B6}"/>
               </a:ext>
             </a:extLst>
           </p:cNvPr>
@@ -17489,7 +17990,7 @@
           <p:cNvPr id="11" name="Oval 10">
             <a:extLst>
               <a:ext uri="{FF2B5EF4-FFF2-40B4-BE49-F238E27FC236}">
-                <a16:creationId xmlns:a16="http://schemas.microsoft.com/office/drawing/2014/main" xmlns="" id="{D0946FD7-DEB2-0AEE-D3E7-FAABAC2357AF}"/>
+                <a16:creationId xmlns="" xmlns:a16="http://schemas.microsoft.com/office/drawing/2014/main" id="{D0946FD7-DEB2-0AEE-D3E7-FAABAC2357AF}"/>
               </a:ext>
             </a:extLst>
           </p:cNvPr>
@@ -17548,7 +18049,7 @@
           <p:cNvPr id="12" name="Oval 11">
             <a:extLst>
               <a:ext uri="{FF2B5EF4-FFF2-40B4-BE49-F238E27FC236}">
-                <a16:creationId xmlns:a16="http://schemas.microsoft.com/office/drawing/2014/main" xmlns="" id="{8D9F2A4B-9D87-7FFE-1886-9FC01DA34065}"/>
+                <a16:creationId xmlns="" xmlns:a16="http://schemas.microsoft.com/office/drawing/2014/main" id="{8D9F2A4B-9D87-7FFE-1886-9FC01DA34065}"/>
               </a:ext>
             </a:extLst>
           </p:cNvPr>
@@ -17607,7 +18108,7 @@
           <p:cNvPr id="13" name="Oval 12">
             <a:extLst>
               <a:ext uri="{FF2B5EF4-FFF2-40B4-BE49-F238E27FC236}">
-                <a16:creationId xmlns:a16="http://schemas.microsoft.com/office/drawing/2014/main" xmlns="" id="{2D1C037B-9232-194A-F63E-D1198BD5BECB}"/>
+                <a16:creationId xmlns="" xmlns:a16="http://schemas.microsoft.com/office/drawing/2014/main" id="{2D1C037B-9232-194A-F63E-D1198BD5BECB}"/>
               </a:ext>
             </a:extLst>
           </p:cNvPr>
@@ -17666,7 +18167,7 @@
           <p:cNvPr id="14" name="Oval 13">
             <a:extLst>
               <a:ext uri="{FF2B5EF4-FFF2-40B4-BE49-F238E27FC236}">
-                <a16:creationId xmlns:a16="http://schemas.microsoft.com/office/drawing/2014/main" xmlns="" id="{97981C1E-3857-DF09-0177-8A06F7B8C93F}"/>
+                <a16:creationId xmlns="" xmlns:a16="http://schemas.microsoft.com/office/drawing/2014/main" id="{97981C1E-3857-DF09-0177-8A06F7B8C93F}"/>
               </a:ext>
             </a:extLst>
           </p:cNvPr>
@@ -17725,7 +18226,7 @@
           <p:cNvPr id="15" name="Oval 14">
             <a:extLst>
               <a:ext uri="{FF2B5EF4-FFF2-40B4-BE49-F238E27FC236}">
-                <a16:creationId xmlns:a16="http://schemas.microsoft.com/office/drawing/2014/main" xmlns="" id="{041C004F-2B07-5BE4-E16D-AFA271378B4F}"/>
+                <a16:creationId xmlns="" xmlns:a16="http://schemas.microsoft.com/office/drawing/2014/main" id="{041C004F-2B07-5BE4-E16D-AFA271378B4F}"/>
               </a:ext>
             </a:extLst>
           </p:cNvPr>
@@ -17784,7 +18285,7 @@
           <p:cNvPr id="16" name="Oval 15">
             <a:extLst>
               <a:ext uri="{FF2B5EF4-FFF2-40B4-BE49-F238E27FC236}">
-                <a16:creationId xmlns:a16="http://schemas.microsoft.com/office/drawing/2014/main" xmlns="" id="{1767DF3F-7FF7-2A4C-6211-20A32CA30D60}"/>
+                <a16:creationId xmlns="" xmlns:a16="http://schemas.microsoft.com/office/drawing/2014/main" id="{1767DF3F-7FF7-2A4C-6211-20A32CA30D60}"/>
               </a:ext>
             </a:extLst>
           </p:cNvPr>
@@ -17843,7 +18344,7 @@
           <p:cNvPr id="17" name="Oval 16">
             <a:extLst>
               <a:ext uri="{FF2B5EF4-FFF2-40B4-BE49-F238E27FC236}">
-                <a16:creationId xmlns:a16="http://schemas.microsoft.com/office/drawing/2014/main" xmlns="" id="{0989497C-10B7-BD33-02AC-312809AFEA7E}"/>
+                <a16:creationId xmlns="" xmlns:a16="http://schemas.microsoft.com/office/drawing/2014/main" id="{0989497C-10B7-BD33-02AC-312809AFEA7E}"/>
               </a:ext>
             </a:extLst>
           </p:cNvPr>
@@ -17902,7 +18403,7 @@
           <p:cNvPr id="18" name="Oval 17">
             <a:extLst>
               <a:ext uri="{FF2B5EF4-FFF2-40B4-BE49-F238E27FC236}">
-                <a16:creationId xmlns:a16="http://schemas.microsoft.com/office/drawing/2014/main" xmlns="" id="{EC170CAD-85DD-951C-2E45-44F4B3207F5A}"/>
+                <a16:creationId xmlns="" xmlns:a16="http://schemas.microsoft.com/office/drawing/2014/main" id="{EC170CAD-85DD-951C-2E45-44F4B3207F5A}"/>
               </a:ext>
             </a:extLst>
           </p:cNvPr>
@@ -17961,7 +18462,7 @@
           <p:cNvPr id="19" name="Oval 18">
             <a:extLst>
               <a:ext uri="{FF2B5EF4-FFF2-40B4-BE49-F238E27FC236}">
-                <a16:creationId xmlns:a16="http://schemas.microsoft.com/office/drawing/2014/main" xmlns="" id="{6CBFAEB0-427B-C183-269E-B7F22C532425}"/>
+                <a16:creationId xmlns="" xmlns:a16="http://schemas.microsoft.com/office/drawing/2014/main" id="{6CBFAEB0-427B-C183-269E-B7F22C532425}"/>
               </a:ext>
             </a:extLst>
           </p:cNvPr>
@@ -18020,7 +18521,7 @@
           <p:cNvPr id="20" name="Oval 19">
             <a:extLst>
               <a:ext uri="{FF2B5EF4-FFF2-40B4-BE49-F238E27FC236}">
-                <a16:creationId xmlns:a16="http://schemas.microsoft.com/office/drawing/2014/main" xmlns="" id="{1A865A29-9259-99F5-30D2-7D9D77A07673}"/>
+                <a16:creationId xmlns="" xmlns:a16="http://schemas.microsoft.com/office/drawing/2014/main" id="{1A865A29-9259-99F5-30D2-7D9D77A07673}"/>
               </a:ext>
             </a:extLst>
           </p:cNvPr>
@@ -18079,7 +18580,7 @@
           <p:cNvPr id="21" name="Oval 20">
             <a:extLst>
               <a:ext uri="{FF2B5EF4-FFF2-40B4-BE49-F238E27FC236}">
-                <a16:creationId xmlns:a16="http://schemas.microsoft.com/office/drawing/2014/main" xmlns="" id="{A9BD25F8-8B1D-B8B7-5509-6B3900E77488}"/>
+                <a16:creationId xmlns="" xmlns:a16="http://schemas.microsoft.com/office/drawing/2014/main" id="{A9BD25F8-8B1D-B8B7-5509-6B3900E77488}"/>
               </a:ext>
             </a:extLst>
           </p:cNvPr>
@@ -18138,7 +18639,7 @@
           <p:cNvPr id="22" name="Oval 21">
             <a:extLst>
               <a:ext uri="{FF2B5EF4-FFF2-40B4-BE49-F238E27FC236}">
-                <a16:creationId xmlns:a16="http://schemas.microsoft.com/office/drawing/2014/main" xmlns="" id="{8C325336-0110-64E7-17C1-798D8BA62F8F}"/>
+                <a16:creationId xmlns="" xmlns:a16="http://schemas.microsoft.com/office/drawing/2014/main" id="{8C325336-0110-64E7-17C1-798D8BA62F8F}"/>
               </a:ext>
             </a:extLst>
           </p:cNvPr>
@@ -18197,7 +18698,7 @@
           <p:cNvPr id="23" name="Oval 22">
             <a:extLst>
               <a:ext uri="{FF2B5EF4-FFF2-40B4-BE49-F238E27FC236}">
-                <a16:creationId xmlns:a16="http://schemas.microsoft.com/office/drawing/2014/main" xmlns="" id="{7ED93CA2-6975-2E8B-C7B5-B07148930960}"/>
+                <a16:creationId xmlns="" xmlns:a16="http://schemas.microsoft.com/office/drawing/2014/main" id="{7ED93CA2-6975-2E8B-C7B5-B07148930960}"/>
               </a:ext>
             </a:extLst>
           </p:cNvPr>
@@ -18256,7 +18757,7 @@
           <p:cNvPr id="24" name="Oval 23">
             <a:extLst>
               <a:ext uri="{FF2B5EF4-FFF2-40B4-BE49-F238E27FC236}">
-                <a16:creationId xmlns:a16="http://schemas.microsoft.com/office/drawing/2014/main" xmlns="" id="{6E252A62-4114-2C2C-0938-450CA28947E9}"/>
+                <a16:creationId xmlns="" xmlns:a16="http://schemas.microsoft.com/office/drawing/2014/main" id="{6E252A62-4114-2C2C-0938-450CA28947E9}"/>
               </a:ext>
             </a:extLst>
           </p:cNvPr>
@@ -18315,7 +18816,7 @@
           <p:cNvPr id="25" name="Oval 24">
             <a:extLst>
               <a:ext uri="{FF2B5EF4-FFF2-40B4-BE49-F238E27FC236}">
-                <a16:creationId xmlns:a16="http://schemas.microsoft.com/office/drawing/2014/main" xmlns="" id="{15145535-565B-35B3-4181-D04856B0357E}"/>
+                <a16:creationId xmlns="" xmlns:a16="http://schemas.microsoft.com/office/drawing/2014/main" id="{15145535-565B-35B3-4181-D04856B0357E}"/>
               </a:ext>
             </a:extLst>
           </p:cNvPr>
@@ -18374,7 +18875,7 @@
           <p:cNvPr id="26" name="Oval 25">
             <a:extLst>
               <a:ext uri="{FF2B5EF4-FFF2-40B4-BE49-F238E27FC236}">
-                <a16:creationId xmlns:a16="http://schemas.microsoft.com/office/drawing/2014/main" xmlns="" id="{677DA24D-DD66-AAFE-2F4E-3D71AA3E6AB0}"/>
+                <a16:creationId xmlns="" xmlns:a16="http://schemas.microsoft.com/office/drawing/2014/main" id="{677DA24D-DD66-AAFE-2F4E-3D71AA3E6AB0}"/>
               </a:ext>
             </a:extLst>
           </p:cNvPr>
@@ -18433,7 +18934,7 @@
           <p:cNvPr id="27" name="Oval 26">
             <a:extLst>
               <a:ext uri="{FF2B5EF4-FFF2-40B4-BE49-F238E27FC236}">
-                <a16:creationId xmlns:a16="http://schemas.microsoft.com/office/drawing/2014/main" xmlns="" id="{E415858E-4B5C-CDA9-DE2D-B7CBA68C8556}"/>
+                <a16:creationId xmlns="" xmlns:a16="http://schemas.microsoft.com/office/drawing/2014/main" id="{E415858E-4B5C-CDA9-DE2D-B7CBA68C8556}"/>
               </a:ext>
             </a:extLst>
           </p:cNvPr>
@@ -18492,7 +18993,7 @@
           <p:cNvPr id="28" name="Oval 27">
             <a:extLst>
               <a:ext uri="{FF2B5EF4-FFF2-40B4-BE49-F238E27FC236}">
-                <a16:creationId xmlns:a16="http://schemas.microsoft.com/office/drawing/2014/main" xmlns="" id="{167A0A27-6BA4-DD53-F081-83B7B05F0261}"/>
+                <a16:creationId xmlns="" xmlns:a16="http://schemas.microsoft.com/office/drawing/2014/main" id="{167A0A27-6BA4-DD53-F081-83B7B05F0261}"/>
               </a:ext>
             </a:extLst>
           </p:cNvPr>
@@ -18551,7 +19052,7 @@
           <p:cNvPr id="29" name="Oval 28">
             <a:extLst>
               <a:ext uri="{FF2B5EF4-FFF2-40B4-BE49-F238E27FC236}">
-                <a16:creationId xmlns:a16="http://schemas.microsoft.com/office/drawing/2014/main" xmlns="" id="{6299853B-AA90-3849-11F1-1A4C48F71365}"/>
+                <a16:creationId xmlns="" xmlns:a16="http://schemas.microsoft.com/office/drawing/2014/main" id="{6299853B-AA90-3849-11F1-1A4C48F71365}"/>
               </a:ext>
             </a:extLst>
           </p:cNvPr>
@@ -18610,7 +19111,7 @@
           <p:cNvPr id="3" name="Group 2">
             <a:extLst>
               <a:ext uri="{FF2B5EF4-FFF2-40B4-BE49-F238E27FC236}">
-                <a16:creationId xmlns:a16="http://schemas.microsoft.com/office/drawing/2014/main" xmlns="" id="{26C3F351-D61A-FCB1-7694-AF167DCEE280}"/>
+                <a16:creationId xmlns="" xmlns:a16="http://schemas.microsoft.com/office/drawing/2014/main" id="{26C3F351-D61A-FCB1-7694-AF167DCEE280}"/>
               </a:ext>
             </a:extLst>
           </p:cNvPr>
@@ -18630,7 +19131,7 @@
             <p:cNvPr id="2" name="Oval 1">
               <a:extLst>
                 <a:ext uri="{FF2B5EF4-FFF2-40B4-BE49-F238E27FC236}">
-                  <a16:creationId xmlns:a16="http://schemas.microsoft.com/office/drawing/2014/main" xmlns="" id="{A6E2D6B3-342D-EB5F-5E19-8537633AB28F}"/>
+                  <a16:creationId xmlns="" xmlns:a16="http://schemas.microsoft.com/office/drawing/2014/main" id="{A6E2D6B3-342D-EB5F-5E19-8537633AB28F}"/>
                 </a:ext>
               </a:extLst>
             </p:cNvPr>
@@ -18689,7 +19190,7 @@
             <p:cNvPr id="30" name="Arc 29">
               <a:extLst>
                 <a:ext uri="{FF2B5EF4-FFF2-40B4-BE49-F238E27FC236}">
-                  <a16:creationId xmlns:a16="http://schemas.microsoft.com/office/drawing/2014/main" xmlns="" id="{36056DEA-49DE-7763-422D-4DBF22C9EF60}"/>
+                  <a16:creationId xmlns="" xmlns:a16="http://schemas.microsoft.com/office/drawing/2014/main" id="{36056DEA-49DE-7763-422D-4DBF22C9EF60}"/>
                 </a:ext>
               </a:extLst>
             </p:cNvPr>
@@ -18742,7 +19243,7 @@
           <p:cNvPr id="54" name="Group 53">
             <a:extLst>
               <a:ext uri="{FF2B5EF4-FFF2-40B4-BE49-F238E27FC236}">
-                <a16:creationId xmlns:a16="http://schemas.microsoft.com/office/drawing/2014/main" xmlns="" id="{4E1C400F-26D6-1823-2C78-C7631F622635}"/>
+                <a16:creationId xmlns="" xmlns:a16="http://schemas.microsoft.com/office/drawing/2014/main" id="{4E1C400F-26D6-1823-2C78-C7631F622635}"/>
               </a:ext>
             </a:extLst>
           </p:cNvPr>
@@ -18762,7 +19263,7 @@
             <p:cNvPr id="55" name="Oval 54">
               <a:extLst>
                 <a:ext uri="{FF2B5EF4-FFF2-40B4-BE49-F238E27FC236}">
-                  <a16:creationId xmlns:a16="http://schemas.microsoft.com/office/drawing/2014/main" xmlns="" id="{E1A04797-A8C7-E3D9-7170-3A4959849C1F}"/>
+                  <a16:creationId xmlns="" xmlns:a16="http://schemas.microsoft.com/office/drawing/2014/main" id="{E1A04797-A8C7-E3D9-7170-3A4959849C1F}"/>
                 </a:ext>
               </a:extLst>
             </p:cNvPr>
@@ -18821,7 +19322,7 @@
             <p:cNvPr id="56" name="Arc 55">
               <a:extLst>
                 <a:ext uri="{FF2B5EF4-FFF2-40B4-BE49-F238E27FC236}">
-                  <a16:creationId xmlns:a16="http://schemas.microsoft.com/office/drawing/2014/main" xmlns="" id="{E12EA4D8-8589-F8DD-DE0E-66C2177C97E3}"/>
+                  <a16:creationId xmlns="" xmlns:a16="http://schemas.microsoft.com/office/drawing/2014/main" id="{E12EA4D8-8589-F8DD-DE0E-66C2177C97E3}"/>
                 </a:ext>
               </a:extLst>
             </p:cNvPr>
@@ -18874,7 +19375,7 @@
           <p:cNvPr id="57" name="Group 56">
             <a:extLst>
               <a:ext uri="{FF2B5EF4-FFF2-40B4-BE49-F238E27FC236}">
-                <a16:creationId xmlns:a16="http://schemas.microsoft.com/office/drawing/2014/main" xmlns="" id="{A087BCDE-7005-25A4-1860-46331DFEFBA5}"/>
+                <a16:creationId xmlns="" xmlns:a16="http://schemas.microsoft.com/office/drawing/2014/main" id="{A087BCDE-7005-25A4-1860-46331DFEFBA5}"/>
               </a:ext>
             </a:extLst>
           </p:cNvPr>
@@ -18894,7 +19395,7 @@
             <p:cNvPr id="58" name="Oval 57">
               <a:extLst>
                 <a:ext uri="{FF2B5EF4-FFF2-40B4-BE49-F238E27FC236}">
-                  <a16:creationId xmlns:a16="http://schemas.microsoft.com/office/drawing/2014/main" xmlns="" id="{3581949D-442F-7524-F99D-5A8088D8E142}"/>
+                  <a16:creationId xmlns="" xmlns:a16="http://schemas.microsoft.com/office/drawing/2014/main" id="{3581949D-442F-7524-F99D-5A8088D8E142}"/>
                 </a:ext>
               </a:extLst>
             </p:cNvPr>
@@ -18953,7 +19454,7 @@
             <p:cNvPr id="59" name="Arc 58">
               <a:extLst>
                 <a:ext uri="{FF2B5EF4-FFF2-40B4-BE49-F238E27FC236}">
-                  <a16:creationId xmlns:a16="http://schemas.microsoft.com/office/drawing/2014/main" xmlns="" id="{02D7B595-29A3-11C1-3614-A3198F94592C}"/>
+                  <a16:creationId xmlns="" xmlns:a16="http://schemas.microsoft.com/office/drawing/2014/main" id="{02D7B595-29A3-11C1-3614-A3198F94592C}"/>
                 </a:ext>
               </a:extLst>
             </p:cNvPr>
@@ -19006,7 +19507,7 @@
           <p:cNvPr id="60" name="Group 59">
             <a:extLst>
               <a:ext uri="{FF2B5EF4-FFF2-40B4-BE49-F238E27FC236}">
-                <a16:creationId xmlns:a16="http://schemas.microsoft.com/office/drawing/2014/main" xmlns="" id="{FB290B83-0E01-2860-E35D-2FF552994951}"/>
+                <a16:creationId xmlns="" xmlns:a16="http://schemas.microsoft.com/office/drawing/2014/main" id="{FB290B83-0E01-2860-E35D-2FF552994951}"/>
               </a:ext>
             </a:extLst>
           </p:cNvPr>
@@ -19026,7 +19527,7 @@
             <p:cNvPr id="61" name="Oval 60">
               <a:extLst>
                 <a:ext uri="{FF2B5EF4-FFF2-40B4-BE49-F238E27FC236}">
-                  <a16:creationId xmlns:a16="http://schemas.microsoft.com/office/drawing/2014/main" xmlns="" id="{6F929B18-1882-FDE4-813E-6B0362098925}"/>
+                  <a16:creationId xmlns="" xmlns:a16="http://schemas.microsoft.com/office/drawing/2014/main" id="{6F929B18-1882-FDE4-813E-6B0362098925}"/>
                 </a:ext>
               </a:extLst>
             </p:cNvPr>
@@ -19085,7 +19586,7 @@
             <p:cNvPr id="62" name="Arc 61">
               <a:extLst>
                 <a:ext uri="{FF2B5EF4-FFF2-40B4-BE49-F238E27FC236}">
-                  <a16:creationId xmlns:a16="http://schemas.microsoft.com/office/drawing/2014/main" xmlns="" id="{982FB3D8-FD66-CA49-64EC-27B30CFD234A}"/>
+                  <a16:creationId xmlns="" xmlns:a16="http://schemas.microsoft.com/office/drawing/2014/main" id="{982FB3D8-FD66-CA49-64EC-27B30CFD234A}"/>
                 </a:ext>
               </a:extLst>
             </p:cNvPr>
@@ -19138,7 +19639,7 @@
           <p:cNvPr id="63" name="Group 62">
             <a:extLst>
               <a:ext uri="{FF2B5EF4-FFF2-40B4-BE49-F238E27FC236}">
-                <a16:creationId xmlns:a16="http://schemas.microsoft.com/office/drawing/2014/main" xmlns="" id="{7825E36E-56DC-774E-6E7A-31BA18848AA1}"/>
+                <a16:creationId xmlns="" xmlns:a16="http://schemas.microsoft.com/office/drawing/2014/main" id="{7825E36E-56DC-774E-6E7A-31BA18848AA1}"/>
               </a:ext>
             </a:extLst>
           </p:cNvPr>
@@ -19158,7 +19659,7 @@
             <p:cNvPr id="64" name="Oval 63">
               <a:extLst>
                 <a:ext uri="{FF2B5EF4-FFF2-40B4-BE49-F238E27FC236}">
-                  <a16:creationId xmlns:a16="http://schemas.microsoft.com/office/drawing/2014/main" xmlns="" id="{ED86C4D0-421F-E188-D347-FB75A80318D7}"/>
+                  <a16:creationId xmlns="" xmlns:a16="http://schemas.microsoft.com/office/drawing/2014/main" id="{ED86C4D0-421F-E188-D347-FB75A80318D7}"/>
                 </a:ext>
               </a:extLst>
             </p:cNvPr>
@@ -19217,7 +19718,7 @@
             <p:cNvPr id="65" name="Arc 64">
               <a:extLst>
                 <a:ext uri="{FF2B5EF4-FFF2-40B4-BE49-F238E27FC236}">
-                  <a16:creationId xmlns:a16="http://schemas.microsoft.com/office/drawing/2014/main" xmlns="" id="{7251B93F-50B9-C260-ECEA-5767A3723660}"/>
+                  <a16:creationId xmlns="" xmlns:a16="http://schemas.microsoft.com/office/drawing/2014/main" id="{7251B93F-50B9-C260-ECEA-5767A3723660}"/>
                 </a:ext>
               </a:extLst>
             </p:cNvPr>
@@ -19270,7 +19771,7 @@
           <p:cNvPr id="66" name="Group 65">
             <a:extLst>
               <a:ext uri="{FF2B5EF4-FFF2-40B4-BE49-F238E27FC236}">
-                <a16:creationId xmlns:a16="http://schemas.microsoft.com/office/drawing/2014/main" xmlns="" id="{C3079399-2A21-14E1-E7E4-E94ED810D168}"/>
+                <a16:creationId xmlns="" xmlns:a16="http://schemas.microsoft.com/office/drawing/2014/main" id="{C3079399-2A21-14E1-E7E4-E94ED810D168}"/>
               </a:ext>
             </a:extLst>
           </p:cNvPr>
@@ -19290,7 +19791,7 @@
             <p:cNvPr id="67" name="Oval 66">
               <a:extLst>
                 <a:ext uri="{FF2B5EF4-FFF2-40B4-BE49-F238E27FC236}">
-                  <a16:creationId xmlns:a16="http://schemas.microsoft.com/office/drawing/2014/main" xmlns="" id="{7CD11775-2901-2E40-5490-630DC1623B0F}"/>
+                  <a16:creationId xmlns="" xmlns:a16="http://schemas.microsoft.com/office/drawing/2014/main" id="{7CD11775-2901-2E40-5490-630DC1623B0F}"/>
                 </a:ext>
               </a:extLst>
             </p:cNvPr>
@@ -19349,7 +19850,7 @@
             <p:cNvPr id="68" name="Arc 67">
               <a:extLst>
                 <a:ext uri="{FF2B5EF4-FFF2-40B4-BE49-F238E27FC236}">
-                  <a16:creationId xmlns:a16="http://schemas.microsoft.com/office/drawing/2014/main" xmlns="" id="{5B556831-69E2-8918-5D16-C84DEC612606}"/>
+                  <a16:creationId xmlns="" xmlns:a16="http://schemas.microsoft.com/office/drawing/2014/main" id="{5B556831-69E2-8918-5D16-C84DEC612606}"/>
                 </a:ext>
               </a:extLst>
             </p:cNvPr>
@@ -19402,7 +19903,7 @@
           <p:cNvPr id="69" name="Group 68">
             <a:extLst>
               <a:ext uri="{FF2B5EF4-FFF2-40B4-BE49-F238E27FC236}">
-                <a16:creationId xmlns:a16="http://schemas.microsoft.com/office/drawing/2014/main" xmlns="" id="{5ADEE217-7DF5-3EDB-61BF-AF3C812CBEE6}"/>
+                <a16:creationId xmlns="" xmlns:a16="http://schemas.microsoft.com/office/drawing/2014/main" id="{5ADEE217-7DF5-3EDB-61BF-AF3C812CBEE6}"/>
               </a:ext>
             </a:extLst>
           </p:cNvPr>
@@ -19422,7 +19923,7 @@
             <p:cNvPr id="70" name="Oval 69">
               <a:extLst>
                 <a:ext uri="{FF2B5EF4-FFF2-40B4-BE49-F238E27FC236}">
-                  <a16:creationId xmlns:a16="http://schemas.microsoft.com/office/drawing/2014/main" xmlns="" id="{841DE28C-2D28-1185-E3B4-C2BB3354E52B}"/>
+                  <a16:creationId xmlns="" xmlns:a16="http://schemas.microsoft.com/office/drawing/2014/main" id="{841DE28C-2D28-1185-E3B4-C2BB3354E52B}"/>
                 </a:ext>
               </a:extLst>
             </p:cNvPr>
@@ -19481,7 +19982,7 @@
             <p:cNvPr id="71" name="Arc 70">
               <a:extLst>
                 <a:ext uri="{FF2B5EF4-FFF2-40B4-BE49-F238E27FC236}">
-                  <a16:creationId xmlns:a16="http://schemas.microsoft.com/office/drawing/2014/main" xmlns="" id="{FADBB813-4022-6BF4-4302-D581AB1A6C99}"/>
+                  <a16:creationId xmlns="" xmlns:a16="http://schemas.microsoft.com/office/drawing/2014/main" id="{FADBB813-4022-6BF4-4302-D581AB1A6C99}"/>
                 </a:ext>
               </a:extLst>
             </p:cNvPr>
@@ -19534,7 +20035,7 @@
           <p:cNvPr id="72" name="Group 71">
             <a:extLst>
               <a:ext uri="{FF2B5EF4-FFF2-40B4-BE49-F238E27FC236}">
-                <a16:creationId xmlns:a16="http://schemas.microsoft.com/office/drawing/2014/main" xmlns="" id="{9D9C9153-B8FA-38C4-EB67-86B9459BFFE9}"/>
+                <a16:creationId xmlns="" xmlns:a16="http://schemas.microsoft.com/office/drawing/2014/main" id="{9D9C9153-B8FA-38C4-EB67-86B9459BFFE9}"/>
               </a:ext>
             </a:extLst>
           </p:cNvPr>
@@ -19554,7 +20055,7 @@
             <p:cNvPr id="73" name="Oval 72">
               <a:extLst>
                 <a:ext uri="{FF2B5EF4-FFF2-40B4-BE49-F238E27FC236}">
-                  <a16:creationId xmlns:a16="http://schemas.microsoft.com/office/drawing/2014/main" xmlns="" id="{874762A5-21AC-4851-DF9C-A0D7DBFA5AFA}"/>
+                  <a16:creationId xmlns="" xmlns:a16="http://schemas.microsoft.com/office/drawing/2014/main" id="{874762A5-21AC-4851-DF9C-A0D7DBFA5AFA}"/>
                 </a:ext>
               </a:extLst>
             </p:cNvPr>
@@ -19613,7 +20114,7 @@
             <p:cNvPr id="74" name="Arc 73">
               <a:extLst>
                 <a:ext uri="{FF2B5EF4-FFF2-40B4-BE49-F238E27FC236}">
-                  <a16:creationId xmlns:a16="http://schemas.microsoft.com/office/drawing/2014/main" xmlns="" id="{BDBA534A-9F3C-F651-600E-DD503C672D20}"/>
+                  <a16:creationId xmlns="" xmlns:a16="http://schemas.microsoft.com/office/drawing/2014/main" id="{BDBA534A-9F3C-F651-600E-DD503C672D20}"/>
                 </a:ext>
               </a:extLst>
             </p:cNvPr>
@@ -19666,7 +20167,7 @@
           <p:cNvPr id="75" name="Group 74">
             <a:extLst>
               <a:ext uri="{FF2B5EF4-FFF2-40B4-BE49-F238E27FC236}">
-                <a16:creationId xmlns:a16="http://schemas.microsoft.com/office/drawing/2014/main" xmlns="" id="{79961178-ABE0-C7D2-04FE-9A129BC81ED4}"/>
+                <a16:creationId xmlns="" xmlns:a16="http://schemas.microsoft.com/office/drawing/2014/main" id="{79961178-ABE0-C7D2-04FE-9A129BC81ED4}"/>
               </a:ext>
             </a:extLst>
           </p:cNvPr>
@@ -19686,7 +20187,7 @@
             <p:cNvPr id="76" name="Oval 75">
               <a:extLst>
                 <a:ext uri="{FF2B5EF4-FFF2-40B4-BE49-F238E27FC236}">
-                  <a16:creationId xmlns:a16="http://schemas.microsoft.com/office/drawing/2014/main" xmlns="" id="{D8C47778-3FE4-169B-9D62-9C01A7F95945}"/>
+                  <a16:creationId xmlns="" xmlns:a16="http://schemas.microsoft.com/office/drawing/2014/main" id="{D8C47778-3FE4-169B-9D62-9C01A7F95945}"/>
                 </a:ext>
               </a:extLst>
             </p:cNvPr>
@@ -19745,7 +20246,7 @@
             <p:cNvPr id="77" name="Arc 76">
               <a:extLst>
                 <a:ext uri="{FF2B5EF4-FFF2-40B4-BE49-F238E27FC236}">
-                  <a16:creationId xmlns:a16="http://schemas.microsoft.com/office/drawing/2014/main" xmlns="" id="{FDC23D54-870F-5B8A-AB44-E52FAE0875B5}"/>
+                  <a16:creationId xmlns="" xmlns:a16="http://schemas.microsoft.com/office/drawing/2014/main" id="{FDC23D54-870F-5B8A-AB44-E52FAE0875B5}"/>
                 </a:ext>
               </a:extLst>
             </p:cNvPr>
@@ -19798,7 +20299,7 @@
           <p:cNvPr id="78" name="Group 77">
             <a:extLst>
               <a:ext uri="{FF2B5EF4-FFF2-40B4-BE49-F238E27FC236}">
-                <a16:creationId xmlns:a16="http://schemas.microsoft.com/office/drawing/2014/main" xmlns="" id="{B99FDF76-FB64-197E-90CD-2A6F48DA61F3}"/>
+                <a16:creationId xmlns="" xmlns:a16="http://schemas.microsoft.com/office/drawing/2014/main" id="{B99FDF76-FB64-197E-90CD-2A6F48DA61F3}"/>
               </a:ext>
             </a:extLst>
           </p:cNvPr>
@@ -19818,7 +20319,7 @@
             <p:cNvPr id="79" name="Oval 78">
               <a:extLst>
                 <a:ext uri="{FF2B5EF4-FFF2-40B4-BE49-F238E27FC236}">
-                  <a16:creationId xmlns:a16="http://schemas.microsoft.com/office/drawing/2014/main" xmlns="" id="{C7D39EC7-8798-33A9-DB8C-D12FB95A963C}"/>
+                  <a16:creationId xmlns="" xmlns:a16="http://schemas.microsoft.com/office/drawing/2014/main" id="{C7D39EC7-8798-33A9-DB8C-D12FB95A963C}"/>
                 </a:ext>
               </a:extLst>
             </p:cNvPr>
@@ -19877,7 +20378,7 @@
             <p:cNvPr id="80" name="Arc 79">
               <a:extLst>
                 <a:ext uri="{FF2B5EF4-FFF2-40B4-BE49-F238E27FC236}">
-                  <a16:creationId xmlns:a16="http://schemas.microsoft.com/office/drawing/2014/main" xmlns="" id="{CA276D5B-D344-FC55-AFBA-FB0F2E0A212D}"/>
+                  <a16:creationId xmlns="" xmlns:a16="http://schemas.microsoft.com/office/drawing/2014/main" id="{CA276D5B-D344-FC55-AFBA-FB0F2E0A212D}"/>
                 </a:ext>
               </a:extLst>
             </p:cNvPr>
@@ -19930,7 +20431,7 @@
           <p:cNvPr id="81" name="Group 80">
             <a:extLst>
               <a:ext uri="{FF2B5EF4-FFF2-40B4-BE49-F238E27FC236}">
-                <a16:creationId xmlns:a16="http://schemas.microsoft.com/office/drawing/2014/main" xmlns="" id="{5B4D2A7E-D5B4-408F-5ACC-A43BFE1E3809}"/>
+                <a16:creationId xmlns="" xmlns:a16="http://schemas.microsoft.com/office/drawing/2014/main" id="{5B4D2A7E-D5B4-408F-5ACC-A43BFE1E3809}"/>
               </a:ext>
             </a:extLst>
           </p:cNvPr>
@@ -19950,7 +20451,7 @@
             <p:cNvPr id="82" name="Oval 81">
               <a:extLst>
                 <a:ext uri="{FF2B5EF4-FFF2-40B4-BE49-F238E27FC236}">
-                  <a16:creationId xmlns:a16="http://schemas.microsoft.com/office/drawing/2014/main" xmlns="" id="{FA296D8C-160F-84DE-0432-628B589F211B}"/>
+                  <a16:creationId xmlns="" xmlns:a16="http://schemas.microsoft.com/office/drawing/2014/main" id="{FA296D8C-160F-84DE-0432-628B589F211B}"/>
                 </a:ext>
               </a:extLst>
             </p:cNvPr>
@@ -20009,7 +20510,7 @@
             <p:cNvPr id="83" name="Arc 82">
               <a:extLst>
                 <a:ext uri="{FF2B5EF4-FFF2-40B4-BE49-F238E27FC236}">
-                  <a16:creationId xmlns:a16="http://schemas.microsoft.com/office/drawing/2014/main" xmlns="" id="{7ACD6CCD-3CFB-52A8-E091-FDDB0E796F53}"/>
+                  <a16:creationId xmlns="" xmlns:a16="http://schemas.microsoft.com/office/drawing/2014/main" id="{7ACD6CCD-3CFB-52A8-E091-FDDB0E796F53}"/>
                 </a:ext>
               </a:extLst>
             </p:cNvPr>
@@ -20062,7 +20563,7 @@
           <p:cNvPr id="84" name="Group 83">
             <a:extLst>
               <a:ext uri="{FF2B5EF4-FFF2-40B4-BE49-F238E27FC236}">
-                <a16:creationId xmlns:a16="http://schemas.microsoft.com/office/drawing/2014/main" xmlns="" id="{44FED0D5-3E54-90C0-E3E7-BF526FE9D113}"/>
+                <a16:creationId xmlns="" xmlns:a16="http://schemas.microsoft.com/office/drawing/2014/main" id="{44FED0D5-3E54-90C0-E3E7-BF526FE9D113}"/>
               </a:ext>
             </a:extLst>
           </p:cNvPr>
@@ -20082,7 +20583,7 @@
             <p:cNvPr id="85" name="Oval 84">
               <a:extLst>
                 <a:ext uri="{FF2B5EF4-FFF2-40B4-BE49-F238E27FC236}">
-                  <a16:creationId xmlns:a16="http://schemas.microsoft.com/office/drawing/2014/main" xmlns="" id="{656B078E-FF03-15AE-74D7-C0ED1C34B554}"/>
+                  <a16:creationId xmlns="" xmlns:a16="http://schemas.microsoft.com/office/drawing/2014/main" id="{656B078E-FF03-15AE-74D7-C0ED1C34B554}"/>
                 </a:ext>
               </a:extLst>
             </p:cNvPr>
@@ -20141,7 +20642,7 @@
             <p:cNvPr id="86" name="Arc 85">
               <a:extLst>
                 <a:ext uri="{FF2B5EF4-FFF2-40B4-BE49-F238E27FC236}">
-                  <a16:creationId xmlns:a16="http://schemas.microsoft.com/office/drawing/2014/main" xmlns="" id="{6B33F721-99DC-4BB8-9E9E-DAF43599FE12}"/>
+                  <a16:creationId xmlns="" xmlns:a16="http://schemas.microsoft.com/office/drawing/2014/main" id="{6B33F721-99DC-4BB8-9E9E-DAF43599FE12}"/>
                 </a:ext>
               </a:extLst>
             </p:cNvPr>
@@ -20194,7 +20695,7 @@
           <p:cNvPr id="87" name="Group 86">
             <a:extLst>
               <a:ext uri="{FF2B5EF4-FFF2-40B4-BE49-F238E27FC236}">
-                <a16:creationId xmlns:a16="http://schemas.microsoft.com/office/drawing/2014/main" xmlns="" id="{59827D44-4B51-A191-64E5-C84C0624372E}"/>
+                <a16:creationId xmlns="" xmlns:a16="http://schemas.microsoft.com/office/drawing/2014/main" id="{59827D44-4B51-A191-64E5-C84C0624372E}"/>
               </a:ext>
             </a:extLst>
           </p:cNvPr>
@@ -20214,7 +20715,7 @@
             <p:cNvPr id="88" name="Oval 87">
               <a:extLst>
                 <a:ext uri="{FF2B5EF4-FFF2-40B4-BE49-F238E27FC236}">
-                  <a16:creationId xmlns:a16="http://schemas.microsoft.com/office/drawing/2014/main" xmlns="" id="{402C9496-9C16-3C84-DE2A-8792B0D53BA9}"/>
+                  <a16:creationId xmlns="" xmlns:a16="http://schemas.microsoft.com/office/drawing/2014/main" id="{402C9496-9C16-3C84-DE2A-8792B0D53BA9}"/>
                 </a:ext>
               </a:extLst>
             </p:cNvPr>
@@ -20273,7 +20774,7 @@
             <p:cNvPr id="89" name="Arc 88">
               <a:extLst>
                 <a:ext uri="{FF2B5EF4-FFF2-40B4-BE49-F238E27FC236}">
-                  <a16:creationId xmlns:a16="http://schemas.microsoft.com/office/drawing/2014/main" xmlns="" id="{D4F27B29-B37A-5397-E933-37DF44EFCF3E}"/>
+                  <a16:creationId xmlns="" xmlns:a16="http://schemas.microsoft.com/office/drawing/2014/main" id="{D4F27B29-B37A-5397-E933-37DF44EFCF3E}"/>
                 </a:ext>
               </a:extLst>
             </p:cNvPr>
@@ -20326,7 +20827,7 @@
           <p:cNvPr id="90" name="Group 89">
             <a:extLst>
               <a:ext uri="{FF2B5EF4-FFF2-40B4-BE49-F238E27FC236}">
-                <a16:creationId xmlns:a16="http://schemas.microsoft.com/office/drawing/2014/main" xmlns="" id="{C31CDB83-6843-FF34-4DD1-308EBFE5E615}"/>
+                <a16:creationId xmlns="" xmlns:a16="http://schemas.microsoft.com/office/drawing/2014/main" id="{C31CDB83-6843-FF34-4DD1-308EBFE5E615}"/>
               </a:ext>
             </a:extLst>
           </p:cNvPr>
@@ -20346,7 +20847,7 @@
             <p:cNvPr id="91" name="Oval 90">
               <a:extLst>
                 <a:ext uri="{FF2B5EF4-FFF2-40B4-BE49-F238E27FC236}">
-                  <a16:creationId xmlns:a16="http://schemas.microsoft.com/office/drawing/2014/main" xmlns="" id="{B6601984-7036-87C4-47B4-9F20BE341D87}"/>
+                  <a16:creationId xmlns="" xmlns:a16="http://schemas.microsoft.com/office/drawing/2014/main" id="{B6601984-7036-87C4-47B4-9F20BE341D87}"/>
                 </a:ext>
               </a:extLst>
             </p:cNvPr>
@@ -20405,7 +20906,7 @@
             <p:cNvPr id="92" name="Arc 91">
               <a:extLst>
                 <a:ext uri="{FF2B5EF4-FFF2-40B4-BE49-F238E27FC236}">
-                  <a16:creationId xmlns:a16="http://schemas.microsoft.com/office/drawing/2014/main" xmlns="" id="{985ED055-0FFF-9046-6A6B-2F0B309B0601}"/>
+                  <a16:creationId xmlns="" xmlns:a16="http://schemas.microsoft.com/office/drawing/2014/main" id="{985ED055-0FFF-9046-6A6B-2F0B309B0601}"/>
                 </a:ext>
               </a:extLst>
             </p:cNvPr>
@@ -20458,7 +20959,7 @@
           <p:cNvPr id="93" name="Group 92">
             <a:extLst>
               <a:ext uri="{FF2B5EF4-FFF2-40B4-BE49-F238E27FC236}">
-                <a16:creationId xmlns:a16="http://schemas.microsoft.com/office/drawing/2014/main" xmlns="" id="{2F3C57F8-4743-E9F0-EEB4-1B99AAA02502}"/>
+                <a16:creationId xmlns="" xmlns:a16="http://schemas.microsoft.com/office/drawing/2014/main" id="{2F3C57F8-4743-E9F0-EEB4-1B99AAA02502}"/>
               </a:ext>
             </a:extLst>
           </p:cNvPr>
@@ -20478,7 +20979,7 @@
             <p:cNvPr id="94" name="Oval 93">
               <a:extLst>
                 <a:ext uri="{FF2B5EF4-FFF2-40B4-BE49-F238E27FC236}">
-                  <a16:creationId xmlns:a16="http://schemas.microsoft.com/office/drawing/2014/main" xmlns="" id="{70E875F3-7DD6-842E-3C42-FB7188017892}"/>
+                  <a16:creationId xmlns="" xmlns:a16="http://schemas.microsoft.com/office/drawing/2014/main" id="{70E875F3-7DD6-842E-3C42-FB7188017892}"/>
                 </a:ext>
               </a:extLst>
             </p:cNvPr>
@@ -20537,7 +21038,7 @@
             <p:cNvPr id="95" name="Arc 94">
               <a:extLst>
                 <a:ext uri="{FF2B5EF4-FFF2-40B4-BE49-F238E27FC236}">
-                  <a16:creationId xmlns:a16="http://schemas.microsoft.com/office/drawing/2014/main" xmlns="" id="{B2F6FB24-FC01-4AF4-9A35-DAA5B1A8563F}"/>
+                  <a16:creationId xmlns="" xmlns:a16="http://schemas.microsoft.com/office/drawing/2014/main" id="{B2F6FB24-FC01-4AF4-9A35-DAA5B1A8563F}"/>
                 </a:ext>
               </a:extLst>
             </p:cNvPr>
@@ -20590,7 +21091,7 @@
           <p:cNvPr id="96" name="Group 95">
             <a:extLst>
               <a:ext uri="{FF2B5EF4-FFF2-40B4-BE49-F238E27FC236}">
-                <a16:creationId xmlns:a16="http://schemas.microsoft.com/office/drawing/2014/main" xmlns="" id="{DDDFC3EA-F7A7-3A43-3D7E-FFBE8CE964FD}"/>
+                <a16:creationId xmlns="" xmlns:a16="http://schemas.microsoft.com/office/drawing/2014/main" id="{DDDFC3EA-F7A7-3A43-3D7E-FFBE8CE964FD}"/>
               </a:ext>
             </a:extLst>
           </p:cNvPr>
@@ -20610,7 +21111,7 @@
             <p:cNvPr id="97" name="Oval 96">
               <a:extLst>
                 <a:ext uri="{FF2B5EF4-FFF2-40B4-BE49-F238E27FC236}">
-                  <a16:creationId xmlns:a16="http://schemas.microsoft.com/office/drawing/2014/main" xmlns="" id="{5F25F946-F5CC-34FA-0E42-EA8C2624FCEC}"/>
+                  <a16:creationId xmlns="" xmlns:a16="http://schemas.microsoft.com/office/drawing/2014/main" id="{5F25F946-F5CC-34FA-0E42-EA8C2624FCEC}"/>
                 </a:ext>
               </a:extLst>
             </p:cNvPr>
@@ -20669,7 +21170,7 @@
             <p:cNvPr id="98" name="Arc 97">
               <a:extLst>
                 <a:ext uri="{FF2B5EF4-FFF2-40B4-BE49-F238E27FC236}">
-                  <a16:creationId xmlns:a16="http://schemas.microsoft.com/office/drawing/2014/main" xmlns="" id="{B792FC13-D3FC-7671-B724-A8CF4B9A39B4}"/>
+                  <a16:creationId xmlns="" xmlns:a16="http://schemas.microsoft.com/office/drawing/2014/main" id="{B792FC13-D3FC-7671-B724-A8CF4B9A39B4}"/>
                 </a:ext>
               </a:extLst>
             </p:cNvPr>
@@ -20722,7 +21223,7 @@
           <p:cNvPr id="99" name="Group 98">
             <a:extLst>
               <a:ext uri="{FF2B5EF4-FFF2-40B4-BE49-F238E27FC236}">
-                <a16:creationId xmlns:a16="http://schemas.microsoft.com/office/drawing/2014/main" xmlns="" id="{2DB2C038-DEFE-204E-30FC-790636ED570C}"/>
+                <a16:creationId xmlns="" xmlns:a16="http://schemas.microsoft.com/office/drawing/2014/main" id="{2DB2C038-DEFE-204E-30FC-790636ED570C}"/>
               </a:ext>
             </a:extLst>
           </p:cNvPr>
@@ -20742,7 +21243,7 @@
             <p:cNvPr id="100" name="Oval 99">
               <a:extLst>
                 <a:ext uri="{FF2B5EF4-FFF2-40B4-BE49-F238E27FC236}">
-                  <a16:creationId xmlns:a16="http://schemas.microsoft.com/office/drawing/2014/main" xmlns="" id="{45093590-8764-D5E6-8110-FD1D24889D7B}"/>
+                  <a16:creationId xmlns="" xmlns:a16="http://schemas.microsoft.com/office/drawing/2014/main" id="{45093590-8764-D5E6-8110-FD1D24889D7B}"/>
                 </a:ext>
               </a:extLst>
             </p:cNvPr>
@@ -20801,7 +21302,7 @@
             <p:cNvPr id="101" name="Arc 100">
               <a:extLst>
                 <a:ext uri="{FF2B5EF4-FFF2-40B4-BE49-F238E27FC236}">
-                  <a16:creationId xmlns:a16="http://schemas.microsoft.com/office/drawing/2014/main" xmlns="" id="{770478F6-8E18-6FE2-B3C4-489000AC2563}"/>
+                  <a16:creationId xmlns="" xmlns:a16="http://schemas.microsoft.com/office/drawing/2014/main" id="{770478F6-8E18-6FE2-B3C4-489000AC2563}"/>
                 </a:ext>
               </a:extLst>
             </p:cNvPr>
@@ -20854,7 +21355,7 @@
           <p:cNvPr id="102" name="Group 101">
             <a:extLst>
               <a:ext uri="{FF2B5EF4-FFF2-40B4-BE49-F238E27FC236}">
-                <a16:creationId xmlns:a16="http://schemas.microsoft.com/office/drawing/2014/main" xmlns="" id="{BB5E874B-F6C3-FA86-2883-E06C0B907345}"/>
+                <a16:creationId xmlns="" xmlns:a16="http://schemas.microsoft.com/office/drawing/2014/main" id="{BB5E874B-F6C3-FA86-2883-E06C0B907345}"/>
               </a:ext>
             </a:extLst>
           </p:cNvPr>
@@ -20874,7 +21375,7 @@
             <p:cNvPr id="103" name="Oval 102">
               <a:extLst>
                 <a:ext uri="{FF2B5EF4-FFF2-40B4-BE49-F238E27FC236}">
-                  <a16:creationId xmlns:a16="http://schemas.microsoft.com/office/drawing/2014/main" xmlns="" id="{ADCBCFB9-1DE9-6BCF-CAFB-A3A5E3E3BDC3}"/>
+                  <a16:creationId xmlns="" xmlns:a16="http://schemas.microsoft.com/office/drawing/2014/main" id="{ADCBCFB9-1DE9-6BCF-CAFB-A3A5E3E3BDC3}"/>
                 </a:ext>
               </a:extLst>
             </p:cNvPr>
@@ -20933,7 +21434,7 @@
             <p:cNvPr id="104" name="Arc 103">
               <a:extLst>
                 <a:ext uri="{FF2B5EF4-FFF2-40B4-BE49-F238E27FC236}">
-                  <a16:creationId xmlns:a16="http://schemas.microsoft.com/office/drawing/2014/main" xmlns="" id="{06897284-51F0-34BA-B35F-D0DFBB95FC6A}"/>
+                  <a16:creationId xmlns="" xmlns:a16="http://schemas.microsoft.com/office/drawing/2014/main" id="{06897284-51F0-34BA-B35F-D0DFBB95FC6A}"/>
                 </a:ext>
               </a:extLst>
             </p:cNvPr>
@@ -20986,7 +21487,7 @@
           <p:cNvPr id="105" name="Group 104">
             <a:extLst>
               <a:ext uri="{FF2B5EF4-FFF2-40B4-BE49-F238E27FC236}">
-                <a16:creationId xmlns:a16="http://schemas.microsoft.com/office/drawing/2014/main" xmlns="" id="{C96F0D64-C1BF-B3A8-A519-7E4CF06FFDC7}"/>
+                <a16:creationId xmlns="" xmlns:a16="http://schemas.microsoft.com/office/drawing/2014/main" id="{C96F0D64-C1BF-B3A8-A519-7E4CF06FFDC7}"/>
               </a:ext>
             </a:extLst>
           </p:cNvPr>
@@ -21006,7 +21507,7 @@
             <p:cNvPr id="106" name="Oval 105">
               <a:extLst>
                 <a:ext uri="{FF2B5EF4-FFF2-40B4-BE49-F238E27FC236}">
-                  <a16:creationId xmlns:a16="http://schemas.microsoft.com/office/drawing/2014/main" xmlns="" id="{1346C700-051D-1F0B-ADAE-0132A316A7DB}"/>
+                  <a16:creationId xmlns="" xmlns:a16="http://schemas.microsoft.com/office/drawing/2014/main" id="{1346C700-051D-1F0B-ADAE-0132A316A7DB}"/>
                 </a:ext>
               </a:extLst>
             </p:cNvPr>
@@ -21065,7 +21566,7 @@
             <p:cNvPr id="107" name="Arc 106">
               <a:extLst>
                 <a:ext uri="{FF2B5EF4-FFF2-40B4-BE49-F238E27FC236}">
-                  <a16:creationId xmlns:a16="http://schemas.microsoft.com/office/drawing/2014/main" xmlns="" id="{BA5E0980-7A99-E9E0-4B91-E38555423E5B}"/>
+                  <a16:creationId xmlns="" xmlns:a16="http://schemas.microsoft.com/office/drawing/2014/main" id="{BA5E0980-7A99-E9E0-4B91-E38555423E5B}"/>
                 </a:ext>
               </a:extLst>
             </p:cNvPr>
@@ -21118,7 +21619,7 @@
           <p:cNvPr id="108" name="Group 107">
             <a:extLst>
               <a:ext uri="{FF2B5EF4-FFF2-40B4-BE49-F238E27FC236}">
-                <a16:creationId xmlns:a16="http://schemas.microsoft.com/office/drawing/2014/main" xmlns="" id="{D6790D83-0F90-0346-D1FD-D5C3602DFFF6}"/>
+                <a16:creationId xmlns="" xmlns:a16="http://schemas.microsoft.com/office/drawing/2014/main" id="{D6790D83-0F90-0346-D1FD-D5C3602DFFF6}"/>
               </a:ext>
             </a:extLst>
           </p:cNvPr>
@@ -21138,7 +21639,7 @@
             <p:cNvPr id="109" name="Oval 108">
               <a:extLst>
                 <a:ext uri="{FF2B5EF4-FFF2-40B4-BE49-F238E27FC236}">
-                  <a16:creationId xmlns:a16="http://schemas.microsoft.com/office/drawing/2014/main" xmlns="" id="{CE118234-AB4B-3CE4-8627-D437C8F12935}"/>
+                  <a16:creationId xmlns="" xmlns:a16="http://schemas.microsoft.com/office/drawing/2014/main" id="{CE118234-AB4B-3CE4-8627-D437C8F12935}"/>
                 </a:ext>
               </a:extLst>
             </p:cNvPr>
@@ -21197,7 +21698,7 @@
             <p:cNvPr id="110" name="Arc 109">
               <a:extLst>
                 <a:ext uri="{FF2B5EF4-FFF2-40B4-BE49-F238E27FC236}">
-                  <a16:creationId xmlns:a16="http://schemas.microsoft.com/office/drawing/2014/main" xmlns="" id="{24A6161C-A3EC-CB70-28BF-1AA5907F656E}"/>
+                  <a16:creationId xmlns="" xmlns:a16="http://schemas.microsoft.com/office/drawing/2014/main" id="{24A6161C-A3EC-CB70-28BF-1AA5907F656E}"/>
                 </a:ext>
               </a:extLst>
             </p:cNvPr>
@@ -21250,7 +21751,7 @@
           <p:cNvPr id="111" name="Group 110">
             <a:extLst>
               <a:ext uri="{FF2B5EF4-FFF2-40B4-BE49-F238E27FC236}">
-                <a16:creationId xmlns:a16="http://schemas.microsoft.com/office/drawing/2014/main" xmlns="" id="{F8BE1461-AE7E-40C6-28C5-62341855537E}"/>
+                <a16:creationId xmlns="" xmlns:a16="http://schemas.microsoft.com/office/drawing/2014/main" id="{F8BE1461-AE7E-40C6-28C5-62341855537E}"/>
               </a:ext>
             </a:extLst>
           </p:cNvPr>
@@ -21270,7 +21771,7 @@
             <p:cNvPr id="112" name="Oval 111">
               <a:extLst>
                 <a:ext uri="{FF2B5EF4-FFF2-40B4-BE49-F238E27FC236}">
-                  <a16:creationId xmlns:a16="http://schemas.microsoft.com/office/drawing/2014/main" xmlns="" id="{3D6C0D0C-1737-4ACF-DF05-40AB4B997999}"/>
+                  <a16:creationId xmlns="" xmlns:a16="http://schemas.microsoft.com/office/drawing/2014/main" id="{3D6C0D0C-1737-4ACF-DF05-40AB4B997999}"/>
                 </a:ext>
               </a:extLst>
             </p:cNvPr>
@@ -21329,7 +21830,7 @@
             <p:cNvPr id="113" name="Arc 112">
               <a:extLst>
                 <a:ext uri="{FF2B5EF4-FFF2-40B4-BE49-F238E27FC236}">
-                  <a16:creationId xmlns:a16="http://schemas.microsoft.com/office/drawing/2014/main" xmlns="" id="{C80C098A-9223-34F9-FB12-0ACBBD0C19A6}"/>
+                  <a16:creationId xmlns="" xmlns:a16="http://schemas.microsoft.com/office/drawing/2014/main" id="{C80C098A-9223-34F9-FB12-0ACBBD0C19A6}"/>
                 </a:ext>
               </a:extLst>
             </p:cNvPr>
@@ -21382,7 +21883,7 @@
           <p:cNvPr id="114" name="Group 113">
             <a:extLst>
               <a:ext uri="{FF2B5EF4-FFF2-40B4-BE49-F238E27FC236}">
-                <a16:creationId xmlns:a16="http://schemas.microsoft.com/office/drawing/2014/main" xmlns="" id="{697EE20F-3D0A-E159-F8D9-0EC0D2AF7155}"/>
+                <a16:creationId xmlns="" xmlns:a16="http://schemas.microsoft.com/office/drawing/2014/main" id="{697EE20F-3D0A-E159-F8D9-0EC0D2AF7155}"/>
               </a:ext>
             </a:extLst>
           </p:cNvPr>
@@ -21402,7 +21903,7 @@
             <p:cNvPr id="115" name="Oval 114">
               <a:extLst>
                 <a:ext uri="{FF2B5EF4-FFF2-40B4-BE49-F238E27FC236}">
-                  <a16:creationId xmlns:a16="http://schemas.microsoft.com/office/drawing/2014/main" xmlns="" id="{4E528A35-0A92-6308-0EDC-AA6D20AA61B8}"/>
+                  <a16:creationId xmlns="" xmlns:a16="http://schemas.microsoft.com/office/drawing/2014/main" id="{4E528A35-0A92-6308-0EDC-AA6D20AA61B8}"/>
                 </a:ext>
               </a:extLst>
             </p:cNvPr>
@@ -21461,7 +21962,7 @@
             <p:cNvPr id="116" name="Arc 115">
               <a:extLst>
                 <a:ext uri="{FF2B5EF4-FFF2-40B4-BE49-F238E27FC236}">
-                  <a16:creationId xmlns:a16="http://schemas.microsoft.com/office/drawing/2014/main" xmlns="" id="{39483389-2D87-DE50-A684-495349A8AE67}"/>
+                  <a16:creationId xmlns="" xmlns:a16="http://schemas.microsoft.com/office/drawing/2014/main" id="{39483389-2D87-DE50-A684-495349A8AE67}"/>
                 </a:ext>
               </a:extLst>
             </p:cNvPr>
@@ -21514,7 +22015,7 @@
           <p:cNvPr id="117" name="Group 116">
             <a:extLst>
               <a:ext uri="{FF2B5EF4-FFF2-40B4-BE49-F238E27FC236}">
-                <a16:creationId xmlns:a16="http://schemas.microsoft.com/office/drawing/2014/main" xmlns="" id="{786BE2FE-EF0F-688F-5B2C-6EF38976E83B}"/>
+                <a16:creationId xmlns="" xmlns:a16="http://schemas.microsoft.com/office/drawing/2014/main" id="{786BE2FE-EF0F-688F-5B2C-6EF38976E83B}"/>
               </a:ext>
             </a:extLst>
           </p:cNvPr>
@@ -21534,7 +22035,7 @@
             <p:cNvPr id="118" name="Oval 117">
               <a:extLst>
                 <a:ext uri="{FF2B5EF4-FFF2-40B4-BE49-F238E27FC236}">
-                  <a16:creationId xmlns:a16="http://schemas.microsoft.com/office/drawing/2014/main" xmlns="" id="{A0C35F16-1AB8-1BF9-41DE-1B715E0D36D5}"/>
+                  <a16:creationId xmlns="" xmlns:a16="http://schemas.microsoft.com/office/drawing/2014/main" id="{A0C35F16-1AB8-1BF9-41DE-1B715E0D36D5}"/>
                 </a:ext>
               </a:extLst>
             </p:cNvPr>
@@ -21593,7 +22094,7 @@
             <p:cNvPr id="119" name="Arc 118">
               <a:extLst>
                 <a:ext uri="{FF2B5EF4-FFF2-40B4-BE49-F238E27FC236}">
-                  <a16:creationId xmlns:a16="http://schemas.microsoft.com/office/drawing/2014/main" xmlns="" id="{C0154793-588A-3EFA-F58E-FF511C68E63E}"/>
+                  <a16:creationId xmlns="" xmlns:a16="http://schemas.microsoft.com/office/drawing/2014/main" id="{C0154793-588A-3EFA-F58E-FF511C68E63E}"/>
                 </a:ext>
               </a:extLst>
             </p:cNvPr>
@@ -21646,7 +22147,7 @@
           <p:cNvPr id="120" name="Group 119">
             <a:extLst>
               <a:ext uri="{FF2B5EF4-FFF2-40B4-BE49-F238E27FC236}">
-                <a16:creationId xmlns:a16="http://schemas.microsoft.com/office/drawing/2014/main" xmlns="" id="{511A915E-B563-6A18-4902-C0442601AD96}"/>
+                <a16:creationId xmlns="" xmlns:a16="http://schemas.microsoft.com/office/drawing/2014/main" id="{511A915E-B563-6A18-4902-C0442601AD96}"/>
               </a:ext>
             </a:extLst>
           </p:cNvPr>
@@ -21666,7 +22167,7 @@
             <p:cNvPr id="121" name="Oval 120">
               <a:extLst>
                 <a:ext uri="{FF2B5EF4-FFF2-40B4-BE49-F238E27FC236}">
-                  <a16:creationId xmlns:a16="http://schemas.microsoft.com/office/drawing/2014/main" xmlns="" id="{109142E7-2B8E-19B5-6124-89973384D7E5}"/>
+                  <a16:creationId xmlns="" xmlns:a16="http://schemas.microsoft.com/office/drawing/2014/main" id="{109142E7-2B8E-19B5-6124-89973384D7E5}"/>
                 </a:ext>
               </a:extLst>
             </p:cNvPr>
@@ -21725,7 +22226,7 @@
             <p:cNvPr id="122" name="Arc 121">
               <a:extLst>
                 <a:ext uri="{FF2B5EF4-FFF2-40B4-BE49-F238E27FC236}">
-                  <a16:creationId xmlns:a16="http://schemas.microsoft.com/office/drawing/2014/main" xmlns="" id="{AAE5814C-3B3B-8D93-EE2B-CB751AFBF13A}"/>
+                  <a16:creationId xmlns="" xmlns:a16="http://schemas.microsoft.com/office/drawing/2014/main" id="{AAE5814C-3B3B-8D93-EE2B-CB751AFBF13A}"/>
                 </a:ext>
               </a:extLst>
             </p:cNvPr>
@@ -22235,13 +22736,13 @@
   <p:clrMapOvr>
     <a:masterClrMapping/>
   </p:clrMapOvr>
-  <mc:AlternateContent xmlns:mc="http://schemas.openxmlformats.org/markup-compatibility/2006">
-    <mc:Choice xmlns:p15="http://schemas.microsoft.com/office/powerpoint/2012/main" Requires="p15">
+  <mc:AlternateContent xmlns:mc="http://schemas.openxmlformats.org/markup-compatibility/2006" xmlns:p15="http://schemas.microsoft.com/office/powerpoint/2012/main">
+    <mc:Choice Requires="p15">
       <p:transition xmlns:p14="http://schemas.microsoft.com/office/powerpoint/2010/main" spd="slow" p14:dur="1250">
         <p15:prstTrans prst="pageCurlDouble"/>
       </p:transition>
     </mc:Choice>
-    <mc:Fallback>
+    <mc:Fallback xmlns="">
       <p:transition spd="slow">
         <p:fade/>
       </p:transition>
@@ -22265,7 +22766,7 @@
         <p:cNvPr id="1" name="">
           <a:extLst>
             <a:ext uri="{FF2B5EF4-FFF2-40B4-BE49-F238E27FC236}">
-              <a16:creationId xmlns:a16="http://schemas.microsoft.com/office/drawing/2014/main" xmlns="" id="{51C4FD09-55E3-2B1B-897E-1F9BF2720A5C}"/>
+              <a16:creationId xmlns="" xmlns:a16="http://schemas.microsoft.com/office/drawing/2014/main" id="{51C4FD09-55E3-2B1B-897E-1F9BF2720A5C}"/>
             </a:ext>
           </a:extLst>
         </p:cNvPr>
@@ -22285,7 +22786,7 @@
           <p:cNvPr id="5" name="Rectangle 4">
             <a:extLst>
               <a:ext uri="{FF2B5EF4-FFF2-40B4-BE49-F238E27FC236}">
-                <a16:creationId xmlns:a16="http://schemas.microsoft.com/office/drawing/2014/main" xmlns="" id="{B034BA31-4C57-9BDA-04C5-8FC13B21BF04}"/>
+                <a16:creationId xmlns="" xmlns:a16="http://schemas.microsoft.com/office/drawing/2014/main" id="{B034BA31-4C57-9BDA-04C5-8FC13B21BF04}"/>
               </a:ext>
             </a:extLst>
           </p:cNvPr>
@@ -22341,7 +22842,7 @@
           <p:cNvPr id="4" name="Rectangle 3">
             <a:extLst>
               <a:ext uri="{FF2B5EF4-FFF2-40B4-BE49-F238E27FC236}">
-                <a16:creationId xmlns:a16="http://schemas.microsoft.com/office/drawing/2014/main" xmlns="" id="{726F619E-C2F5-A764-7A5A-E740D3764F94}"/>
+                <a16:creationId xmlns="" xmlns:a16="http://schemas.microsoft.com/office/drawing/2014/main" id="{726F619E-C2F5-A764-7A5A-E740D3764F94}"/>
               </a:ext>
             </a:extLst>
           </p:cNvPr>
@@ -22572,7 +23073,7 @@
           <p:cNvPr id="6" name="Oval 5">
             <a:extLst>
               <a:ext uri="{FF2B5EF4-FFF2-40B4-BE49-F238E27FC236}">
-                <a16:creationId xmlns:a16="http://schemas.microsoft.com/office/drawing/2014/main" xmlns="" id="{63652264-4E8B-48A9-C360-C02C3660C32D}"/>
+                <a16:creationId xmlns="" xmlns:a16="http://schemas.microsoft.com/office/drawing/2014/main" id="{63652264-4E8B-48A9-C360-C02C3660C32D}"/>
               </a:ext>
             </a:extLst>
           </p:cNvPr>
@@ -22631,7 +23132,7 @@
           <p:cNvPr id="7" name="Oval 6">
             <a:extLst>
               <a:ext uri="{FF2B5EF4-FFF2-40B4-BE49-F238E27FC236}">
-                <a16:creationId xmlns:a16="http://schemas.microsoft.com/office/drawing/2014/main" xmlns="" id="{94A79690-2C7C-FEC2-2B4B-F5D0C6E2B06B}"/>
+                <a16:creationId xmlns="" xmlns:a16="http://schemas.microsoft.com/office/drawing/2014/main" id="{94A79690-2C7C-FEC2-2B4B-F5D0C6E2B06B}"/>
               </a:ext>
             </a:extLst>
           </p:cNvPr>
@@ -22690,7 +23191,7 @@
           <p:cNvPr id="8" name="Oval 7">
             <a:extLst>
               <a:ext uri="{FF2B5EF4-FFF2-40B4-BE49-F238E27FC236}">
-                <a16:creationId xmlns:a16="http://schemas.microsoft.com/office/drawing/2014/main" xmlns="" id="{F183C3CB-BD1C-4789-0643-1F50E0C687BE}"/>
+                <a16:creationId xmlns="" xmlns:a16="http://schemas.microsoft.com/office/drawing/2014/main" id="{F183C3CB-BD1C-4789-0643-1F50E0C687BE}"/>
               </a:ext>
             </a:extLst>
           </p:cNvPr>
@@ -22749,7 +23250,7 @@
           <p:cNvPr id="9" name="Oval 8">
             <a:extLst>
               <a:ext uri="{FF2B5EF4-FFF2-40B4-BE49-F238E27FC236}">
-                <a16:creationId xmlns:a16="http://schemas.microsoft.com/office/drawing/2014/main" xmlns="" id="{852695AE-B9E1-CA35-383A-5061DECC336D}"/>
+                <a16:creationId xmlns="" xmlns:a16="http://schemas.microsoft.com/office/drawing/2014/main" id="{852695AE-B9E1-CA35-383A-5061DECC336D}"/>
               </a:ext>
             </a:extLst>
           </p:cNvPr>
@@ -22808,7 +23309,7 @@
           <p:cNvPr id="10" name="Oval 9">
             <a:extLst>
               <a:ext uri="{FF2B5EF4-FFF2-40B4-BE49-F238E27FC236}">
-                <a16:creationId xmlns:a16="http://schemas.microsoft.com/office/drawing/2014/main" xmlns="" id="{AC8B7149-0844-B850-391A-8060B3392CC6}"/>
+                <a16:creationId xmlns="" xmlns:a16="http://schemas.microsoft.com/office/drawing/2014/main" id="{AC8B7149-0844-B850-391A-8060B3392CC6}"/>
               </a:ext>
             </a:extLst>
           </p:cNvPr>
@@ -22867,7 +23368,7 @@
           <p:cNvPr id="11" name="Oval 10">
             <a:extLst>
               <a:ext uri="{FF2B5EF4-FFF2-40B4-BE49-F238E27FC236}">
-                <a16:creationId xmlns:a16="http://schemas.microsoft.com/office/drawing/2014/main" xmlns="" id="{0D333270-CC5E-7DF6-1A02-659ABE822FF5}"/>
+                <a16:creationId xmlns="" xmlns:a16="http://schemas.microsoft.com/office/drawing/2014/main" id="{0D333270-CC5E-7DF6-1A02-659ABE822FF5}"/>
               </a:ext>
             </a:extLst>
           </p:cNvPr>
@@ -22926,7 +23427,7 @@
           <p:cNvPr id="12" name="Oval 11">
             <a:extLst>
               <a:ext uri="{FF2B5EF4-FFF2-40B4-BE49-F238E27FC236}">
-                <a16:creationId xmlns:a16="http://schemas.microsoft.com/office/drawing/2014/main" xmlns="" id="{79654E69-BC73-6E52-DC33-651392E0526D}"/>
+                <a16:creationId xmlns="" xmlns:a16="http://schemas.microsoft.com/office/drawing/2014/main" id="{79654E69-BC73-6E52-DC33-651392E0526D}"/>
               </a:ext>
             </a:extLst>
           </p:cNvPr>
@@ -22985,7 +23486,7 @@
           <p:cNvPr id="13" name="Oval 12">
             <a:extLst>
               <a:ext uri="{FF2B5EF4-FFF2-40B4-BE49-F238E27FC236}">
-                <a16:creationId xmlns:a16="http://schemas.microsoft.com/office/drawing/2014/main" xmlns="" id="{E4CFDB43-57A3-3026-29E9-D60F416B0F09}"/>
+                <a16:creationId xmlns="" xmlns:a16="http://schemas.microsoft.com/office/drawing/2014/main" id="{E4CFDB43-57A3-3026-29E9-D60F416B0F09}"/>
               </a:ext>
             </a:extLst>
           </p:cNvPr>
@@ -23044,7 +23545,7 @@
           <p:cNvPr id="14" name="Oval 13">
             <a:extLst>
               <a:ext uri="{FF2B5EF4-FFF2-40B4-BE49-F238E27FC236}">
-                <a16:creationId xmlns:a16="http://schemas.microsoft.com/office/drawing/2014/main" xmlns="" id="{F309C4C6-BB4D-8939-A2FC-02DC29CFCC6D}"/>
+                <a16:creationId xmlns="" xmlns:a16="http://schemas.microsoft.com/office/drawing/2014/main" id="{F309C4C6-BB4D-8939-A2FC-02DC29CFCC6D}"/>
               </a:ext>
             </a:extLst>
           </p:cNvPr>
@@ -23103,7 +23604,7 @@
           <p:cNvPr id="15" name="Oval 14">
             <a:extLst>
               <a:ext uri="{FF2B5EF4-FFF2-40B4-BE49-F238E27FC236}">
-                <a16:creationId xmlns:a16="http://schemas.microsoft.com/office/drawing/2014/main" xmlns="" id="{042F644C-7941-9F1F-CD17-58A102B9F051}"/>
+                <a16:creationId xmlns="" xmlns:a16="http://schemas.microsoft.com/office/drawing/2014/main" id="{042F644C-7941-9F1F-CD17-58A102B9F051}"/>
               </a:ext>
             </a:extLst>
           </p:cNvPr>
@@ -23162,7 +23663,7 @@
           <p:cNvPr id="16" name="Oval 15">
             <a:extLst>
               <a:ext uri="{FF2B5EF4-FFF2-40B4-BE49-F238E27FC236}">
-                <a16:creationId xmlns:a16="http://schemas.microsoft.com/office/drawing/2014/main" xmlns="" id="{9FE90EDA-798E-4116-2E6D-F9F24F96F337}"/>
+                <a16:creationId xmlns="" xmlns:a16="http://schemas.microsoft.com/office/drawing/2014/main" id="{9FE90EDA-798E-4116-2E6D-F9F24F96F337}"/>
               </a:ext>
             </a:extLst>
           </p:cNvPr>
@@ -23221,7 +23722,7 @@
           <p:cNvPr id="17" name="Oval 16">
             <a:extLst>
               <a:ext uri="{FF2B5EF4-FFF2-40B4-BE49-F238E27FC236}">
-                <a16:creationId xmlns:a16="http://schemas.microsoft.com/office/drawing/2014/main" xmlns="" id="{01176BBF-01DD-C6ED-B967-EB1DB7DB2F69}"/>
+                <a16:creationId xmlns="" xmlns:a16="http://schemas.microsoft.com/office/drawing/2014/main" id="{01176BBF-01DD-C6ED-B967-EB1DB7DB2F69}"/>
               </a:ext>
             </a:extLst>
           </p:cNvPr>
@@ -23280,7 +23781,7 @@
           <p:cNvPr id="18" name="Oval 17">
             <a:extLst>
               <a:ext uri="{FF2B5EF4-FFF2-40B4-BE49-F238E27FC236}">
-                <a16:creationId xmlns:a16="http://schemas.microsoft.com/office/drawing/2014/main" xmlns="" id="{9F9C5F9C-2EEA-6014-F551-FCFA8EE56021}"/>
+                <a16:creationId xmlns="" xmlns:a16="http://schemas.microsoft.com/office/drawing/2014/main" id="{9F9C5F9C-2EEA-6014-F551-FCFA8EE56021}"/>
               </a:ext>
             </a:extLst>
           </p:cNvPr>
@@ -23339,7 +23840,7 @@
           <p:cNvPr id="19" name="Oval 18">
             <a:extLst>
               <a:ext uri="{FF2B5EF4-FFF2-40B4-BE49-F238E27FC236}">
-                <a16:creationId xmlns:a16="http://schemas.microsoft.com/office/drawing/2014/main" xmlns="" id="{3C7AD85C-644E-0A9B-6CFE-2B4A8C85E76B}"/>
+                <a16:creationId xmlns="" xmlns:a16="http://schemas.microsoft.com/office/drawing/2014/main" id="{3C7AD85C-644E-0A9B-6CFE-2B4A8C85E76B}"/>
               </a:ext>
             </a:extLst>
           </p:cNvPr>
@@ -23398,7 +23899,7 @@
           <p:cNvPr id="20" name="Oval 19">
             <a:extLst>
               <a:ext uri="{FF2B5EF4-FFF2-40B4-BE49-F238E27FC236}">
-                <a16:creationId xmlns:a16="http://schemas.microsoft.com/office/drawing/2014/main" xmlns="" id="{0380C106-105A-1A96-0199-94FE8B539591}"/>
+                <a16:creationId xmlns="" xmlns:a16="http://schemas.microsoft.com/office/drawing/2014/main" id="{0380C106-105A-1A96-0199-94FE8B539591}"/>
               </a:ext>
             </a:extLst>
           </p:cNvPr>
@@ -23457,7 +23958,7 @@
           <p:cNvPr id="21" name="Oval 20">
             <a:extLst>
               <a:ext uri="{FF2B5EF4-FFF2-40B4-BE49-F238E27FC236}">
-                <a16:creationId xmlns:a16="http://schemas.microsoft.com/office/drawing/2014/main" xmlns="" id="{89A7FBE2-CFD6-1AB1-A77D-4A327850C6BD}"/>
+                <a16:creationId xmlns="" xmlns:a16="http://schemas.microsoft.com/office/drawing/2014/main" id="{89A7FBE2-CFD6-1AB1-A77D-4A327850C6BD}"/>
               </a:ext>
             </a:extLst>
           </p:cNvPr>
@@ -23516,7 +24017,7 @@
           <p:cNvPr id="22" name="Oval 21">
             <a:extLst>
               <a:ext uri="{FF2B5EF4-FFF2-40B4-BE49-F238E27FC236}">
-                <a16:creationId xmlns:a16="http://schemas.microsoft.com/office/drawing/2014/main" xmlns="" id="{3121677A-1631-1324-1E55-D68B3900D565}"/>
+                <a16:creationId xmlns="" xmlns:a16="http://schemas.microsoft.com/office/drawing/2014/main" id="{3121677A-1631-1324-1E55-D68B3900D565}"/>
               </a:ext>
             </a:extLst>
           </p:cNvPr>
@@ -23575,7 +24076,7 @@
           <p:cNvPr id="23" name="Oval 22">
             <a:extLst>
               <a:ext uri="{FF2B5EF4-FFF2-40B4-BE49-F238E27FC236}">
-                <a16:creationId xmlns:a16="http://schemas.microsoft.com/office/drawing/2014/main" xmlns="" id="{64D42A8C-6C17-5515-7C30-72FA44A1C982}"/>
+                <a16:creationId xmlns="" xmlns:a16="http://schemas.microsoft.com/office/drawing/2014/main" id="{64D42A8C-6C17-5515-7C30-72FA44A1C982}"/>
               </a:ext>
             </a:extLst>
           </p:cNvPr>
@@ -23634,7 +24135,7 @@
           <p:cNvPr id="24" name="Oval 23">
             <a:extLst>
               <a:ext uri="{FF2B5EF4-FFF2-40B4-BE49-F238E27FC236}">
-                <a16:creationId xmlns:a16="http://schemas.microsoft.com/office/drawing/2014/main" xmlns="" id="{7475C0C7-3651-5314-3F48-173B78AB0BFB}"/>
+                <a16:creationId xmlns="" xmlns:a16="http://schemas.microsoft.com/office/drawing/2014/main" id="{7475C0C7-3651-5314-3F48-173B78AB0BFB}"/>
               </a:ext>
             </a:extLst>
           </p:cNvPr>
@@ -23693,7 +24194,7 @@
           <p:cNvPr id="25" name="Oval 24">
             <a:extLst>
               <a:ext uri="{FF2B5EF4-FFF2-40B4-BE49-F238E27FC236}">
-                <a16:creationId xmlns:a16="http://schemas.microsoft.com/office/drawing/2014/main" xmlns="" id="{9EC0B432-CB23-DBAF-B917-7ABB9CFA1904}"/>
+                <a16:creationId xmlns="" xmlns:a16="http://schemas.microsoft.com/office/drawing/2014/main" id="{9EC0B432-CB23-DBAF-B917-7ABB9CFA1904}"/>
               </a:ext>
             </a:extLst>
           </p:cNvPr>
@@ -23752,7 +24253,7 @@
           <p:cNvPr id="26" name="Oval 25">
             <a:extLst>
               <a:ext uri="{FF2B5EF4-FFF2-40B4-BE49-F238E27FC236}">
-                <a16:creationId xmlns:a16="http://schemas.microsoft.com/office/drawing/2014/main" xmlns="" id="{CD6371DF-A7E5-1434-5000-FF50454FDD3B}"/>
+                <a16:creationId xmlns="" xmlns:a16="http://schemas.microsoft.com/office/drawing/2014/main" id="{CD6371DF-A7E5-1434-5000-FF50454FDD3B}"/>
               </a:ext>
             </a:extLst>
           </p:cNvPr>
@@ -23811,7 +24312,7 @@
           <p:cNvPr id="27" name="Oval 26">
             <a:extLst>
               <a:ext uri="{FF2B5EF4-FFF2-40B4-BE49-F238E27FC236}">
-                <a16:creationId xmlns:a16="http://schemas.microsoft.com/office/drawing/2014/main" xmlns="" id="{1F08106B-D501-EC7F-FD6E-9F53DD6567B9}"/>
+                <a16:creationId xmlns="" xmlns:a16="http://schemas.microsoft.com/office/drawing/2014/main" id="{1F08106B-D501-EC7F-FD6E-9F53DD6567B9}"/>
               </a:ext>
             </a:extLst>
           </p:cNvPr>
@@ -23870,7 +24371,7 @@
           <p:cNvPr id="28" name="Oval 27">
             <a:extLst>
               <a:ext uri="{FF2B5EF4-FFF2-40B4-BE49-F238E27FC236}">
-                <a16:creationId xmlns:a16="http://schemas.microsoft.com/office/drawing/2014/main" xmlns="" id="{58CD1136-8D51-C029-89F6-934EB793CA76}"/>
+                <a16:creationId xmlns="" xmlns:a16="http://schemas.microsoft.com/office/drawing/2014/main" id="{58CD1136-8D51-C029-89F6-934EB793CA76}"/>
               </a:ext>
             </a:extLst>
           </p:cNvPr>
@@ -23929,7 +24430,7 @@
           <p:cNvPr id="29" name="Oval 28">
             <a:extLst>
               <a:ext uri="{FF2B5EF4-FFF2-40B4-BE49-F238E27FC236}">
-                <a16:creationId xmlns:a16="http://schemas.microsoft.com/office/drawing/2014/main" xmlns="" id="{50E918C1-C147-CDF9-9A0B-C41B1B1BDC16}"/>
+                <a16:creationId xmlns="" xmlns:a16="http://schemas.microsoft.com/office/drawing/2014/main" id="{50E918C1-C147-CDF9-9A0B-C41B1B1BDC16}"/>
               </a:ext>
             </a:extLst>
           </p:cNvPr>
@@ -23988,7 +24489,7 @@
           <p:cNvPr id="3" name="Group 2">
             <a:extLst>
               <a:ext uri="{FF2B5EF4-FFF2-40B4-BE49-F238E27FC236}">
-                <a16:creationId xmlns:a16="http://schemas.microsoft.com/office/drawing/2014/main" xmlns="" id="{928405A0-4A61-8733-B126-4D81DAAC8909}"/>
+                <a16:creationId xmlns="" xmlns:a16="http://schemas.microsoft.com/office/drawing/2014/main" id="{928405A0-4A61-8733-B126-4D81DAAC8909}"/>
               </a:ext>
             </a:extLst>
           </p:cNvPr>
@@ -24008,7 +24509,7 @@
             <p:cNvPr id="2" name="Oval 1">
               <a:extLst>
                 <a:ext uri="{FF2B5EF4-FFF2-40B4-BE49-F238E27FC236}">
-                  <a16:creationId xmlns:a16="http://schemas.microsoft.com/office/drawing/2014/main" xmlns="" id="{13AFC585-BA57-5F31-158D-6005C04FEA8F}"/>
+                  <a16:creationId xmlns="" xmlns:a16="http://schemas.microsoft.com/office/drawing/2014/main" id="{13AFC585-BA57-5F31-158D-6005C04FEA8F}"/>
                 </a:ext>
               </a:extLst>
             </p:cNvPr>
@@ -24067,7 +24568,7 @@
             <p:cNvPr id="30" name="Arc 29">
               <a:extLst>
                 <a:ext uri="{FF2B5EF4-FFF2-40B4-BE49-F238E27FC236}">
-                  <a16:creationId xmlns:a16="http://schemas.microsoft.com/office/drawing/2014/main" xmlns="" id="{6ABDBE3E-C36D-8AB3-7845-745EE50517F1}"/>
+                  <a16:creationId xmlns="" xmlns:a16="http://schemas.microsoft.com/office/drawing/2014/main" id="{6ABDBE3E-C36D-8AB3-7845-745EE50517F1}"/>
                 </a:ext>
               </a:extLst>
             </p:cNvPr>
@@ -24120,7 +24621,7 @@
           <p:cNvPr id="54" name="Group 53">
             <a:extLst>
               <a:ext uri="{FF2B5EF4-FFF2-40B4-BE49-F238E27FC236}">
-                <a16:creationId xmlns:a16="http://schemas.microsoft.com/office/drawing/2014/main" xmlns="" id="{BE4556B3-F34C-FF2C-77C6-6D471C09D64C}"/>
+                <a16:creationId xmlns="" xmlns:a16="http://schemas.microsoft.com/office/drawing/2014/main" id="{BE4556B3-F34C-FF2C-77C6-6D471C09D64C}"/>
               </a:ext>
             </a:extLst>
           </p:cNvPr>
@@ -24140,7 +24641,7 @@
             <p:cNvPr id="55" name="Oval 54">
               <a:extLst>
                 <a:ext uri="{FF2B5EF4-FFF2-40B4-BE49-F238E27FC236}">
-                  <a16:creationId xmlns:a16="http://schemas.microsoft.com/office/drawing/2014/main" xmlns="" id="{328F7FC3-44ED-BDFD-31EC-54198BE5A58F}"/>
+                  <a16:creationId xmlns="" xmlns:a16="http://schemas.microsoft.com/office/drawing/2014/main" id="{328F7FC3-44ED-BDFD-31EC-54198BE5A58F}"/>
                 </a:ext>
               </a:extLst>
             </p:cNvPr>
@@ -24199,7 +24700,7 @@
             <p:cNvPr id="56" name="Arc 55">
               <a:extLst>
                 <a:ext uri="{FF2B5EF4-FFF2-40B4-BE49-F238E27FC236}">
-                  <a16:creationId xmlns:a16="http://schemas.microsoft.com/office/drawing/2014/main" xmlns="" id="{691957E7-B542-3D6C-AA1A-4C3661572B27}"/>
+                  <a16:creationId xmlns="" xmlns:a16="http://schemas.microsoft.com/office/drawing/2014/main" id="{691957E7-B542-3D6C-AA1A-4C3661572B27}"/>
                 </a:ext>
               </a:extLst>
             </p:cNvPr>
@@ -24252,7 +24753,7 @@
           <p:cNvPr id="57" name="Group 56">
             <a:extLst>
               <a:ext uri="{FF2B5EF4-FFF2-40B4-BE49-F238E27FC236}">
-                <a16:creationId xmlns:a16="http://schemas.microsoft.com/office/drawing/2014/main" xmlns="" id="{34942098-76A7-B3A3-5DB3-D8162AD3F68D}"/>
+                <a16:creationId xmlns="" xmlns:a16="http://schemas.microsoft.com/office/drawing/2014/main" id="{34942098-76A7-B3A3-5DB3-D8162AD3F68D}"/>
               </a:ext>
             </a:extLst>
           </p:cNvPr>
@@ -24272,7 +24773,7 @@
             <p:cNvPr id="58" name="Oval 57">
               <a:extLst>
                 <a:ext uri="{FF2B5EF4-FFF2-40B4-BE49-F238E27FC236}">
-                  <a16:creationId xmlns:a16="http://schemas.microsoft.com/office/drawing/2014/main" xmlns="" id="{ADA0F6B4-0FE9-8946-CD31-44C147BDFAA2}"/>
+                  <a16:creationId xmlns="" xmlns:a16="http://schemas.microsoft.com/office/drawing/2014/main" id="{ADA0F6B4-0FE9-8946-CD31-44C147BDFAA2}"/>
                 </a:ext>
               </a:extLst>
             </p:cNvPr>
@@ -24331,7 +24832,7 @@
             <p:cNvPr id="59" name="Arc 58">
               <a:extLst>
                 <a:ext uri="{FF2B5EF4-FFF2-40B4-BE49-F238E27FC236}">
-                  <a16:creationId xmlns:a16="http://schemas.microsoft.com/office/drawing/2014/main" xmlns="" id="{E209963C-964F-F2C3-6448-EDCC319111CF}"/>
+                  <a16:creationId xmlns="" xmlns:a16="http://schemas.microsoft.com/office/drawing/2014/main" id="{E209963C-964F-F2C3-6448-EDCC319111CF}"/>
                 </a:ext>
               </a:extLst>
             </p:cNvPr>
@@ -24384,7 +24885,7 @@
           <p:cNvPr id="60" name="Group 59">
             <a:extLst>
               <a:ext uri="{FF2B5EF4-FFF2-40B4-BE49-F238E27FC236}">
-                <a16:creationId xmlns:a16="http://schemas.microsoft.com/office/drawing/2014/main" xmlns="" id="{92FBB5C7-CE3A-82A2-B96C-D00957855705}"/>
+                <a16:creationId xmlns="" xmlns:a16="http://schemas.microsoft.com/office/drawing/2014/main" id="{92FBB5C7-CE3A-82A2-B96C-D00957855705}"/>
               </a:ext>
             </a:extLst>
           </p:cNvPr>
@@ -24404,7 +24905,7 @@
             <p:cNvPr id="61" name="Oval 60">
               <a:extLst>
                 <a:ext uri="{FF2B5EF4-FFF2-40B4-BE49-F238E27FC236}">
-                  <a16:creationId xmlns:a16="http://schemas.microsoft.com/office/drawing/2014/main" xmlns="" id="{C2090BBD-0FD7-73D4-768D-B3EACE879018}"/>
+                  <a16:creationId xmlns="" xmlns:a16="http://schemas.microsoft.com/office/drawing/2014/main" id="{C2090BBD-0FD7-73D4-768D-B3EACE879018}"/>
                 </a:ext>
               </a:extLst>
             </p:cNvPr>
@@ -24463,7 +24964,7 @@
             <p:cNvPr id="62" name="Arc 61">
               <a:extLst>
                 <a:ext uri="{FF2B5EF4-FFF2-40B4-BE49-F238E27FC236}">
-                  <a16:creationId xmlns:a16="http://schemas.microsoft.com/office/drawing/2014/main" xmlns="" id="{49BBA01A-FD23-189D-7879-A24960489055}"/>
+                  <a16:creationId xmlns="" xmlns:a16="http://schemas.microsoft.com/office/drawing/2014/main" id="{49BBA01A-FD23-189D-7879-A24960489055}"/>
                 </a:ext>
               </a:extLst>
             </p:cNvPr>
@@ -24516,7 +25017,7 @@
           <p:cNvPr id="63" name="Group 62">
             <a:extLst>
               <a:ext uri="{FF2B5EF4-FFF2-40B4-BE49-F238E27FC236}">
-                <a16:creationId xmlns:a16="http://schemas.microsoft.com/office/drawing/2014/main" xmlns="" id="{F1BBA567-B812-1158-B0D9-8585557A065F}"/>
+                <a16:creationId xmlns="" xmlns:a16="http://schemas.microsoft.com/office/drawing/2014/main" id="{F1BBA567-B812-1158-B0D9-8585557A065F}"/>
               </a:ext>
             </a:extLst>
           </p:cNvPr>
@@ -24536,7 +25037,7 @@
             <p:cNvPr id="64" name="Oval 63">
               <a:extLst>
                 <a:ext uri="{FF2B5EF4-FFF2-40B4-BE49-F238E27FC236}">
-                  <a16:creationId xmlns:a16="http://schemas.microsoft.com/office/drawing/2014/main" xmlns="" id="{69954438-FCF4-7EDB-B481-3A5CD3540B92}"/>
+                  <a16:creationId xmlns="" xmlns:a16="http://schemas.microsoft.com/office/drawing/2014/main" id="{69954438-FCF4-7EDB-B481-3A5CD3540B92}"/>
                 </a:ext>
               </a:extLst>
             </p:cNvPr>
@@ -24595,7 +25096,7 @@
             <p:cNvPr id="65" name="Arc 64">
               <a:extLst>
                 <a:ext uri="{FF2B5EF4-FFF2-40B4-BE49-F238E27FC236}">
-                  <a16:creationId xmlns:a16="http://schemas.microsoft.com/office/drawing/2014/main" xmlns="" id="{0539A26F-8931-1226-DADD-F1FA6E3A46CA}"/>
+                  <a16:creationId xmlns="" xmlns:a16="http://schemas.microsoft.com/office/drawing/2014/main" id="{0539A26F-8931-1226-DADD-F1FA6E3A46CA}"/>
                 </a:ext>
               </a:extLst>
             </p:cNvPr>
@@ -24648,7 +25149,7 @@
           <p:cNvPr id="66" name="Group 65">
             <a:extLst>
               <a:ext uri="{FF2B5EF4-FFF2-40B4-BE49-F238E27FC236}">
-                <a16:creationId xmlns:a16="http://schemas.microsoft.com/office/drawing/2014/main" xmlns="" id="{C5CA0963-798D-1A46-720B-8E62281FCB2B}"/>
+                <a16:creationId xmlns="" xmlns:a16="http://schemas.microsoft.com/office/drawing/2014/main" id="{C5CA0963-798D-1A46-720B-8E62281FCB2B}"/>
               </a:ext>
             </a:extLst>
           </p:cNvPr>
@@ -24668,7 +25169,7 @@
             <p:cNvPr id="67" name="Oval 66">
               <a:extLst>
                 <a:ext uri="{FF2B5EF4-FFF2-40B4-BE49-F238E27FC236}">
-                  <a16:creationId xmlns:a16="http://schemas.microsoft.com/office/drawing/2014/main" xmlns="" id="{238F6E5E-CA7D-90C5-F3DE-CEA092075098}"/>
+                  <a16:creationId xmlns="" xmlns:a16="http://schemas.microsoft.com/office/drawing/2014/main" id="{238F6E5E-CA7D-90C5-F3DE-CEA092075098}"/>
                 </a:ext>
               </a:extLst>
             </p:cNvPr>
@@ -24727,7 +25228,7 @@
             <p:cNvPr id="68" name="Arc 67">
               <a:extLst>
                 <a:ext uri="{FF2B5EF4-FFF2-40B4-BE49-F238E27FC236}">
-                  <a16:creationId xmlns:a16="http://schemas.microsoft.com/office/drawing/2014/main" xmlns="" id="{4EDC6FAD-D9B6-F4CE-7409-08C269011CC8}"/>
+                  <a16:creationId xmlns="" xmlns:a16="http://schemas.microsoft.com/office/drawing/2014/main" id="{4EDC6FAD-D9B6-F4CE-7409-08C269011CC8}"/>
                 </a:ext>
               </a:extLst>
             </p:cNvPr>
@@ -24780,7 +25281,7 @@
           <p:cNvPr id="69" name="Group 68">
             <a:extLst>
               <a:ext uri="{FF2B5EF4-FFF2-40B4-BE49-F238E27FC236}">
-                <a16:creationId xmlns:a16="http://schemas.microsoft.com/office/drawing/2014/main" xmlns="" id="{97D732E3-F499-0C3F-BE88-8A3C727562BA}"/>
+                <a16:creationId xmlns="" xmlns:a16="http://schemas.microsoft.com/office/drawing/2014/main" id="{97D732E3-F499-0C3F-BE88-8A3C727562BA}"/>
               </a:ext>
             </a:extLst>
           </p:cNvPr>
@@ -24800,7 +25301,7 @@
             <p:cNvPr id="70" name="Oval 69">
               <a:extLst>
                 <a:ext uri="{FF2B5EF4-FFF2-40B4-BE49-F238E27FC236}">
-                  <a16:creationId xmlns:a16="http://schemas.microsoft.com/office/drawing/2014/main" xmlns="" id="{1BB77D40-207D-28FD-CBB8-13B1251FBCE3}"/>
+                  <a16:creationId xmlns="" xmlns:a16="http://schemas.microsoft.com/office/drawing/2014/main" id="{1BB77D40-207D-28FD-CBB8-13B1251FBCE3}"/>
                 </a:ext>
               </a:extLst>
             </p:cNvPr>
@@ -24859,7 +25360,7 @@
             <p:cNvPr id="71" name="Arc 70">
               <a:extLst>
                 <a:ext uri="{FF2B5EF4-FFF2-40B4-BE49-F238E27FC236}">
-                  <a16:creationId xmlns:a16="http://schemas.microsoft.com/office/drawing/2014/main" xmlns="" id="{98CED01A-8366-93D8-2562-CDF27F4E5646}"/>
+                  <a16:creationId xmlns="" xmlns:a16="http://schemas.microsoft.com/office/drawing/2014/main" id="{98CED01A-8366-93D8-2562-CDF27F4E5646}"/>
                 </a:ext>
               </a:extLst>
             </p:cNvPr>
@@ -24912,7 +25413,7 @@
           <p:cNvPr id="72" name="Group 71">
             <a:extLst>
               <a:ext uri="{FF2B5EF4-FFF2-40B4-BE49-F238E27FC236}">
-                <a16:creationId xmlns:a16="http://schemas.microsoft.com/office/drawing/2014/main" xmlns="" id="{8ACD396F-9CBB-E28A-C3C7-9FFF82E7D986}"/>
+                <a16:creationId xmlns="" xmlns:a16="http://schemas.microsoft.com/office/drawing/2014/main" id="{8ACD396F-9CBB-E28A-C3C7-9FFF82E7D986}"/>
               </a:ext>
             </a:extLst>
           </p:cNvPr>
@@ -24932,7 +25433,7 @@
             <p:cNvPr id="73" name="Oval 72">
               <a:extLst>
                 <a:ext uri="{FF2B5EF4-FFF2-40B4-BE49-F238E27FC236}">
-                  <a16:creationId xmlns:a16="http://schemas.microsoft.com/office/drawing/2014/main" xmlns="" id="{79F5ABF2-6AF6-5851-71FF-385EC3216731}"/>
+                  <a16:creationId xmlns="" xmlns:a16="http://schemas.microsoft.com/office/drawing/2014/main" id="{79F5ABF2-6AF6-5851-71FF-385EC3216731}"/>
                 </a:ext>
               </a:extLst>
             </p:cNvPr>
@@ -24991,7 +25492,7 @@
             <p:cNvPr id="74" name="Arc 73">
               <a:extLst>
                 <a:ext uri="{FF2B5EF4-FFF2-40B4-BE49-F238E27FC236}">
-                  <a16:creationId xmlns:a16="http://schemas.microsoft.com/office/drawing/2014/main" xmlns="" id="{59B2770C-AEBD-5B7B-0CAD-D69C9BFB0200}"/>
+                  <a16:creationId xmlns="" xmlns:a16="http://schemas.microsoft.com/office/drawing/2014/main" id="{59B2770C-AEBD-5B7B-0CAD-D69C9BFB0200}"/>
                 </a:ext>
               </a:extLst>
             </p:cNvPr>
@@ -25044,7 +25545,7 @@
           <p:cNvPr id="75" name="Group 74">
             <a:extLst>
               <a:ext uri="{FF2B5EF4-FFF2-40B4-BE49-F238E27FC236}">
-                <a16:creationId xmlns:a16="http://schemas.microsoft.com/office/drawing/2014/main" xmlns="" id="{8E67EC40-2CEA-15BB-679E-82A155506382}"/>
+                <a16:creationId xmlns="" xmlns:a16="http://schemas.microsoft.com/office/drawing/2014/main" id="{8E67EC40-2CEA-15BB-679E-82A155506382}"/>
               </a:ext>
             </a:extLst>
           </p:cNvPr>
@@ -25064,7 +25565,7 @@
             <p:cNvPr id="76" name="Oval 75">
               <a:extLst>
                 <a:ext uri="{FF2B5EF4-FFF2-40B4-BE49-F238E27FC236}">
-                  <a16:creationId xmlns:a16="http://schemas.microsoft.com/office/drawing/2014/main" xmlns="" id="{BEE67072-39B0-0D8C-3764-DF739D4EF898}"/>
+                  <a16:creationId xmlns="" xmlns:a16="http://schemas.microsoft.com/office/drawing/2014/main" id="{BEE67072-39B0-0D8C-3764-DF739D4EF898}"/>
                 </a:ext>
               </a:extLst>
             </p:cNvPr>
@@ -25123,7 +25624,7 @@
             <p:cNvPr id="77" name="Arc 76">
               <a:extLst>
                 <a:ext uri="{FF2B5EF4-FFF2-40B4-BE49-F238E27FC236}">
-                  <a16:creationId xmlns:a16="http://schemas.microsoft.com/office/drawing/2014/main" xmlns="" id="{1036E0E8-91A2-459D-62BA-7E55B36EA4A3}"/>
+                  <a16:creationId xmlns="" xmlns:a16="http://schemas.microsoft.com/office/drawing/2014/main" id="{1036E0E8-91A2-459D-62BA-7E55B36EA4A3}"/>
                 </a:ext>
               </a:extLst>
             </p:cNvPr>
@@ -25176,7 +25677,7 @@
           <p:cNvPr id="78" name="Group 77">
             <a:extLst>
               <a:ext uri="{FF2B5EF4-FFF2-40B4-BE49-F238E27FC236}">
-                <a16:creationId xmlns:a16="http://schemas.microsoft.com/office/drawing/2014/main" xmlns="" id="{E7A8FC93-89F4-B3FF-B2A0-EB92EE14302F}"/>
+                <a16:creationId xmlns="" xmlns:a16="http://schemas.microsoft.com/office/drawing/2014/main" id="{E7A8FC93-89F4-B3FF-B2A0-EB92EE14302F}"/>
               </a:ext>
             </a:extLst>
           </p:cNvPr>
@@ -25196,7 +25697,7 @@
             <p:cNvPr id="79" name="Oval 78">
               <a:extLst>
                 <a:ext uri="{FF2B5EF4-FFF2-40B4-BE49-F238E27FC236}">
-                  <a16:creationId xmlns:a16="http://schemas.microsoft.com/office/drawing/2014/main" xmlns="" id="{0B288602-214C-9797-F12B-433D63A94C97}"/>
+                  <a16:creationId xmlns="" xmlns:a16="http://schemas.microsoft.com/office/drawing/2014/main" id="{0B288602-214C-9797-F12B-433D63A94C97}"/>
                 </a:ext>
               </a:extLst>
             </p:cNvPr>
@@ -25255,7 +25756,7 @@
             <p:cNvPr id="80" name="Arc 79">
               <a:extLst>
                 <a:ext uri="{FF2B5EF4-FFF2-40B4-BE49-F238E27FC236}">
-                  <a16:creationId xmlns:a16="http://schemas.microsoft.com/office/drawing/2014/main" xmlns="" id="{B2237529-DFC9-A1B7-9CFA-D339940826FC}"/>
+                  <a16:creationId xmlns="" xmlns:a16="http://schemas.microsoft.com/office/drawing/2014/main" id="{B2237529-DFC9-A1B7-9CFA-D339940826FC}"/>
                 </a:ext>
               </a:extLst>
             </p:cNvPr>
@@ -25308,7 +25809,7 @@
           <p:cNvPr id="81" name="Group 80">
             <a:extLst>
               <a:ext uri="{FF2B5EF4-FFF2-40B4-BE49-F238E27FC236}">
-                <a16:creationId xmlns:a16="http://schemas.microsoft.com/office/drawing/2014/main" xmlns="" id="{56E08E4B-3F15-3DA7-6141-7E97655DD396}"/>
+                <a16:creationId xmlns="" xmlns:a16="http://schemas.microsoft.com/office/drawing/2014/main" id="{56E08E4B-3F15-3DA7-6141-7E97655DD396}"/>
               </a:ext>
             </a:extLst>
           </p:cNvPr>
@@ -25328,7 +25829,7 @@
             <p:cNvPr id="82" name="Oval 81">
               <a:extLst>
                 <a:ext uri="{FF2B5EF4-FFF2-40B4-BE49-F238E27FC236}">
-                  <a16:creationId xmlns:a16="http://schemas.microsoft.com/office/drawing/2014/main" xmlns="" id="{BF631934-7110-7F5E-79A0-378CB41A08C9}"/>
+                  <a16:creationId xmlns="" xmlns:a16="http://schemas.microsoft.com/office/drawing/2014/main" id="{BF631934-7110-7F5E-79A0-378CB41A08C9}"/>
                 </a:ext>
               </a:extLst>
             </p:cNvPr>
@@ -25387,7 +25888,7 @@
             <p:cNvPr id="83" name="Arc 82">
               <a:extLst>
                 <a:ext uri="{FF2B5EF4-FFF2-40B4-BE49-F238E27FC236}">
-                  <a16:creationId xmlns:a16="http://schemas.microsoft.com/office/drawing/2014/main" xmlns="" id="{0439DB39-7B53-36D4-BDF5-71DB13657FDC}"/>
+                  <a16:creationId xmlns="" xmlns:a16="http://schemas.microsoft.com/office/drawing/2014/main" id="{0439DB39-7B53-36D4-BDF5-71DB13657FDC}"/>
                 </a:ext>
               </a:extLst>
             </p:cNvPr>
@@ -25440,7 +25941,7 @@
           <p:cNvPr id="84" name="Group 83">
             <a:extLst>
               <a:ext uri="{FF2B5EF4-FFF2-40B4-BE49-F238E27FC236}">
-                <a16:creationId xmlns:a16="http://schemas.microsoft.com/office/drawing/2014/main" xmlns="" id="{BD99BE67-16D7-6B0C-6E7E-F8B4B7BD2317}"/>
+                <a16:creationId xmlns="" xmlns:a16="http://schemas.microsoft.com/office/drawing/2014/main" id="{BD99BE67-16D7-6B0C-6E7E-F8B4B7BD2317}"/>
               </a:ext>
             </a:extLst>
           </p:cNvPr>
@@ -25460,7 +25961,7 @@
             <p:cNvPr id="85" name="Oval 84">
               <a:extLst>
                 <a:ext uri="{FF2B5EF4-FFF2-40B4-BE49-F238E27FC236}">
-                  <a16:creationId xmlns:a16="http://schemas.microsoft.com/office/drawing/2014/main" xmlns="" id="{370A9636-2147-18A8-A452-5C474F2755F9}"/>
+                  <a16:creationId xmlns="" xmlns:a16="http://schemas.microsoft.com/office/drawing/2014/main" id="{370A9636-2147-18A8-A452-5C474F2755F9}"/>
                 </a:ext>
               </a:extLst>
             </p:cNvPr>
@@ -25519,7 +26020,7 @@
             <p:cNvPr id="86" name="Arc 85">
               <a:extLst>
                 <a:ext uri="{FF2B5EF4-FFF2-40B4-BE49-F238E27FC236}">
-                  <a16:creationId xmlns:a16="http://schemas.microsoft.com/office/drawing/2014/main" xmlns="" id="{CF37D023-EFBC-7B83-E01F-14E578B5E41F}"/>
+                  <a16:creationId xmlns="" xmlns:a16="http://schemas.microsoft.com/office/drawing/2014/main" id="{CF37D023-EFBC-7B83-E01F-14E578B5E41F}"/>
                 </a:ext>
               </a:extLst>
             </p:cNvPr>
@@ -25572,7 +26073,7 @@
           <p:cNvPr id="87" name="Group 86">
             <a:extLst>
               <a:ext uri="{FF2B5EF4-FFF2-40B4-BE49-F238E27FC236}">
-                <a16:creationId xmlns:a16="http://schemas.microsoft.com/office/drawing/2014/main" xmlns="" id="{18D76EDD-67EC-1706-7541-E0B361B9EE01}"/>
+                <a16:creationId xmlns="" xmlns:a16="http://schemas.microsoft.com/office/drawing/2014/main" id="{18D76EDD-67EC-1706-7541-E0B361B9EE01}"/>
               </a:ext>
             </a:extLst>
           </p:cNvPr>
@@ -25592,7 +26093,7 @@
             <p:cNvPr id="88" name="Oval 87">
               <a:extLst>
                 <a:ext uri="{FF2B5EF4-FFF2-40B4-BE49-F238E27FC236}">
-                  <a16:creationId xmlns:a16="http://schemas.microsoft.com/office/drawing/2014/main" xmlns="" id="{EBF7F9D4-4385-3396-B1F8-92B45C3EE234}"/>
+                  <a16:creationId xmlns="" xmlns:a16="http://schemas.microsoft.com/office/drawing/2014/main" id="{EBF7F9D4-4385-3396-B1F8-92B45C3EE234}"/>
                 </a:ext>
               </a:extLst>
             </p:cNvPr>
@@ -25651,7 +26152,7 @@
             <p:cNvPr id="89" name="Arc 88">
               <a:extLst>
                 <a:ext uri="{FF2B5EF4-FFF2-40B4-BE49-F238E27FC236}">
-                  <a16:creationId xmlns:a16="http://schemas.microsoft.com/office/drawing/2014/main" xmlns="" id="{344DEE6C-BE03-A502-C8EB-06880E1AFF7F}"/>
+                  <a16:creationId xmlns="" xmlns:a16="http://schemas.microsoft.com/office/drawing/2014/main" id="{344DEE6C-BE03-A502-C8EB-06880E1AFF7F}"/>
                 </a:ext>
               </a:extLst>
             </p:cNvPr>
@@ -25704,7 +26205,7 @@
           <p:cNvPr id="90" name="Group 89">
             <a:extLst>
               <a:ext uri="{FF2B5EF4-FFF2-40B4-BE49-F238E27FC236}">
-                <a16:creationId xmlns:a16="http://schemas.microsoft.com/office/drawing/2014/main" xmlns="" id="{805A620C-3AE2-255F-D0AD-7BCE318B0261}"/>
+                <a16:creationId xmlns="" xmlns:a16="http://schemas.microsoft.com/office/drawing/2014/main" id="{805A620C-3AE2-255F-D0AD-7BCE318B0261}"/>
               </a:ext>
             </a:extLst>
           </p:cNvPr>
@@ -25724,7 +26225,7 @@
             <p:cNvPr id="91" name="Oval 90">
               <a:extLst>
                 <a:ext uri="{FF2B5EF4-FFF2-40B4-BE49-F238E27FC236}">
-                  <a16:creationId xmlns:a16="http://schemas.microsoft.com/office/drawing/2014/main" xmlns="" id="{C8C812B5-07D8-854F-C972-D8CEBC6A35B4}"/>
+                  <a16:creationId xmlns="" xmlns:a16="http://schemas.microsoft.com/office/drawing/2014/main" id="{C8C812B5-07D8-854F-C972-D8CEBC6A35B4}"/>
                 </a:ext>
               </a:extLst>
             </p:cNvPr>
@@ -25783,7 +26284,7 @@
             <p:cNvPr id="92" name="Arc 91">
               <a:extLst>
                 <a:ext uri="{FF2B5EF4-FFF2-40B4-BE49-F238E27FC236}">
-                  <a16:creationId xmlns:a16="http://schemas.microsoft.com/office/drawing/2014/main" xmlns="" id="{79FA0149-4CB8-9929-0B85-1B9620713172}"/>
+                  <a16:creationId xmlns="" xmlns:a16="http://schemas.microsoft.com/office/drawing/2014/main" id="{79FA0149-4CB8-9929-0B85-1B9620713172}"/>
                 </a:ext>
               </a:extLst>
             </p:cNvPr>
@@ -25836,7 +26337,7 @@
           <p:cNvPr id="93" name="Group 92">
             <a:extLst>
               <a:ext uri="{FF2B5EF4-FFF2-40B4-BE49-F238E27FC236}">
-                <a16:creationId xmlns:a16="http://schemas.microsoft.com/office/drawing/2014/main" xmlns="" id="{D34F9994-C5E0-AE09-44C0-C5B87FCCE5CA}"/>
+                <a16:creationId xmlns="" xmlns:a16="http://schemas.microsoft.com/office/drawing/2014/main" id="{D34F9994-C5E0-AE09-44C0-C5B87FCCE5CA}"/>
               </a:ext>
             </a:extLst>
           </p:cNvPr>
@@ -25856,7 +26357,7 @@
             <p:cNvPr id="94" name="Oval 93">
               <a:extLst>
                 <a:ext uri="{FF2B5EF4-FFF2-40B4-BE49-F238E27FC236}">
-                  <a16:creationId xmlns:a16="http://schemas.microsoft.com/office/drawing/2014/main" xmlns="" id="{2AC773AF-0EEA-4375-E025-35F8FC5364E9}"/>
+                  <a16:creationId xmlns="" xmlns:a16="http://schemas.microsoft.com/office/drawing/2014/main" id="{2AC773AF-0EEA-4375-E025-35F8FC5364E9}"/>
                 </a:ext>
               </a:extLst>
             </p:cNvPr>
@@ -25915,7 +26416,7 @@
             <p:cNvPr id="95" name="Arc 94">
               <a:extLst>
                 <a:ext uri="{FF2B5EF4-FFF2-40B4-BE49-F238E27FC236}">
-                  <a16:creationId xmlns:a16="http://schemas.microsoft.com/office/drawing/2014/main" xmlns="" id="{90DDEFBB-F1E4-9858-B6D5-3FDB2B182EF9}"/>
+                  <a16:creationId xmlns="" xmlns:a16="http://schemas.microsoft.com/office/drawing/2014/main" id="{90DDEFBB-F1E4-9858-B6D5-3FDB2B182EF9}"/>
                 </a:ext>
               </a:extLst>
             </p:cNvPr>
@@ -25968,7 +26469,7 @@
           <p:cNvPr id="96" name="Group 95">
             <a:extLst>
               <a:ext uri="{FF2B5EF4-FFF2-40B4-BE49-F238E27FC236}">
-                <a16:creationId xmlns:a16="http://schemas.microsoft.com/office/drawing/2014/main" xmlns="" id="{A7DFD59F-9ACF-DA37-BC73-AADA05F8CD55}"/>
+                <a16:creationId xmlns="" xmlns:a16="http://schemas.microsoft.com/office/drawing/2014/main" id="{A7DFD59F-9ACF-DA37-BC73-AADA05F8CD55}"/>
               </a:ext>
             </a:extLst>
           </p:cNvPr>
@@ -25988,7 +26489,7 @@
             <p:cNvPr id="97" name="Oval 96">
               <a:extLst>
                 <a:ext uri="{FF2B5EF4-FFF2-40B4-BE49-F238E27FC236}">
-                  <a16:creationId xmlns:a16="http://schemas.microsoft.com/office/drawing/2014/main" xmlns="" id="{34E0A8AD-4A63-9662-8252-B6566776A0DB}"/>
+                  <a16:creationId xmlns="" xmlns:a16="http://schemas.microsoft.com/office/drawing/2014/main" id="{34E0A8AD-4A63-9662-8252-B6566776A0DB}"/>
                 </a:ext>
               </a:extLst>
             </p:cNvPr>
@@ -26047,7 +26548,7 @@
             <p:cNvPr id="98" name="Arc 97">
               <a:extLst>
                 <a:ext uri="{FF2B5EF4-FFF2-40B4-BE49-F238E27FC236}">
-                  <a16:creationId xmlns:a16="http://schemas.microsoft.com/office/drawing/2014/main" xmlns="" id="{A5AF0D9F-7BD7-E7BD-EF60-38F8DB6A7173}"/>
+                  <a16:creationId xmlns="" xmlns:a16="http://schemas.microsoft.com/office/drawing/2014/main" id="{A5AF0D9F-7BD7-E7BD-EF60-38F8DB6A7173}"/>
                 </a:ext>
               </a:extLst>
             </p:cNvPr>
@@ -26100,7 +26601,7 @@
           <p:cNvPr id="99" name="Group 98">
             <a:extLst>
               <a:ext uri="{FF2B5EF4-FFF2-40B4-BE49-F238E27FC236}">
-                <a16:creationId xmlns:a16="http://schemas.microsoft.com/office/drawing/2014/main" xmlns="" id="{B86504F5-14F5-005B-98B8-877CBD2DBAEC}"/>
+                <a16:creationId xmlns="" xmlns:a16="http://schemas.microsoft.com/office/drawing/2014/main" id="{B86504F5-14F5-005B-98B8-877CBD2DBAEC}"/>
               </a:ext>
             </a:extLst>
           </p:cNvPr>
@@ -26120,7 +26621,7 @@
             <p:cNvPr id="100" name="Oval 99">
               <a:extLst>
                 <a:ext uri="{FF2B5EF4-FFF2-40B4-BE49-F238E27FC236}">
-                  <a16:creationId xmlns:a16="http://schemas.microsoft.com/office/drawing/2014/main" xmlns="" id="{77BEE814-D0CC-0B71-56A8-38FC233ADBBC}"/>
+                  <a16:creationId xmlns="" xmlns:a16="http://schemas.microsoft.com/office/drawing/2014/main" id="{77BEE814-D0CC-0B71-56A8-38FC233ADBBC}"/>
                 </a:ext>
               </a:extLst>
             </p:cNvPr>
@@ -26179,7 +26680,7 @@
             <p:cNvPr id="101" name="Arc 100">
               <a:extLst>
                 <a:ext uri="{FF2B5EF4-FFF2-40B4-BE49-F238E27FC236}">
-                  <a16:creationId xmlns:a16="http://schemas.microsoft.com/office/drawing/2014/main" xmlns="" id="{E12B4309-6ECF-2A90-BE18-92E7B6D9F45C}"/>
+                  <a16:creationId xmlns="" xmlns:a16="http://schemas.microsoft.com/office/drawing/2014/main" id="{E12B4309-6ECF-2A90-BE18-92E7B6D9F45C}"/>
                 </a:ext>
               </a:extLst>
             </p:cNvPr>
@@ -26232,7 +26733,7 @@
           <p:cNvPr id="102" name="Group 101">
             <a:extLst>
               <a:ext uri="{FF2B5EF4-FFF2-40B4-BE49-F238E27FC236}">
-                <a16:creationId xmlns:a16="http://schemas.microsoft.com/office/drawing/2014/main" xmlns="" id="{B34C10F9-48AB-376A-971B-5E609292667E}"/>
+                <a16:creationId xmlns="" xmlns:a16="http://schemas.microsoft.com/office/drawing/2014/main" id="{B34C10F9-48AB-376A-971B-5E609292667E}"/>
               </a:ext>
             </a:extLst>
           </p:cNvPr>
@@ -26252,7 +26753,7 @@
             <p:cNvPr id="103" name="Oval 102">
               <a:extLst>
                 <a:ext uri="{FF2B5EF4-FFF2-40B4-BE49-F238E27FC236}">
-                  <a16:creationId xmlns:a16="http://schemas.microsoft.com/office/drawing/2014/main" xmlns="" id="{B13C8D1E-9E03-3B03-EB62-C5D86340BF1D}"/>
+                  <a16:creationId xmlns="" xmlns:a16="http://schemas.microsoft.com/office/drawing/2014/main" id="{B13C8D1E-9E03-3B03-EB62-C5D86340BF1D}"/>
                 </a:ext>
               </a:extLst>
             </p:cNvPr>
@@ -26311,7 +26812,7 @@
             <p:cNvPr id="104" name="Arc 103">
               <a:extLst>
                 <a:ext uri="{FF2B5EF4-FFF2-40B4-BE49-F238E27FC236}">
-                  <a16:creationId xmlns:a16="http://schemas.microsoft.com/office/drawing/2014/main" xmlns="" id="{FACF3DF3-03AF-3180-E1E4-55391011F79F}"/>
+                  <a16:creationId xmlns="" xmlns:a16="http://schemas.microsoft.com/office/drawing/2014/main" id="{FACF3DF3-03AF-3180-E1E4-55391011F79F}"/>
                 </a:ext>
               </a:extLst>
             </p:cNvPr>
@@ -26364,7 +26865,7 @@
           <p:cNvPr id="105" name="Group 104">
             <a:extLst>
               <a:ext uri="{FF2B5EF4-FFF2-40B4-BE49-F238E27FC236}">
-                <a16:creationId xmlns:a16="http://schemas.microsoft.com/office/drawing/2014/main" xmlns="" id="{ADC277D0-0547-3E1F-7B17-763C14F2C569}"/>
+                <a16:creationId xmlns="" xmlns:a16="http://schemas.microsoft.com/office/drawing/2014/main" id="{ADC277D0-0547-3E1F-7B17-763C14F2C569}"/>
               </a:ext>
             </a:extLst>
           </p:cNvPr>
@@ -26384,7 +26885,7 @@
             <p:cNvPr id="106" name="Oval 105">
               <a:extLst>
                 <a:ext uri="{FF2B5EF4-FFF2-40B4-BE49-F238E27FC236}">
-                  <a16:creationId xmlns:a16="http://schemas.microsoft.com/office/drawing/2014/main" xmlns="" id="{444E641A-F426-E972-E682-0AD4058F2F5F}"/>
+                  <a16:creationId xmlns="" xmlns:a16="http://schemas.microsoft.com/office/drawing/2014/main" id="{444E641A-F426-E972-E682-0AD4058F2F5F}"/>
                 </a:ext>
               </a:extLst>
             </p:cNvPr>
@@ -26443,7 +26944,7 @@
             <p:cNvPr id="107" name="Arc 106">
               <a:extLst>
                 <a:ext uri="{FF2B5EF4-FFF2-40B4-BE49-F238E27FC236}">
-                  <a16:creationId xmlns:a16="http://schemas.microsoft.com/office/drawing/2014/main" xmlns="" id="{000E6A81-D707-E36C-5DAD-68F6D1F68CE3}"/>
+                  <a16:creationId xmlns="" xmlns:a16="http://schemas.microsoft.com/office/drawing/2014/main" id="{000E6A81-D707-E36C-5DAD-68F6D1F68CE3}"/>
                 </a:ext>
               </a:extLst>
             </p:cNvPr>
@@ -26496,7 +26997,7 @@
           <p:cNvPr id="108" name="Group 107">
             <a:extLst>
               <a:ext uri="{FF2B5EF4-FFF2-40B4-BE49-F238E27FC236}">
-                <a16:creationId xmlns:a16="http://schemas.microsoft.com/office/drawing/2014/main" xmlns="" id="{31EA107D-77C3-196B-39BD-015BCFD6D3C2}"/>
+                <a16:creationId xmlns="" xmlns:a16="http://schemas.microsoft.com/office/drawing/2014/main" id="{31EA107D-77C3-196B-39BD-015BCFD6D3C2}"/>
               </a:ext>
             </a:extLst>
           </p:cNvPr>
@@ -26516,7 +27017,7 @@
             <p:cNvPr id="109" name="Oval 108">
               <a:extLst>
                 <a:ext uri="{FF2B5EF4-FFF2-40B4-BE49-F238E27FC236}">
-                  <a16:creationId xmlns:a16="http://schemas.microsoft.com/office/drawing/2014/main" xmlns="" id="{61FDFC2B-B300-35FB-0617-5D1C7ADF6641}"/>
+                  <a16:creationId xmlns="" xmlns:a16="http://schemas.microsoft.com/office/drawing/2014/main" id="{61FDFC2B-B300-35FB-0617-5D1C7ADF6641}"/>
                 </a:ext>
               </a:extLst>
             </p:cNvPr>
@@ -26575,7 +27076,7 @@
             <p:cNvPr id="110" name="Arc 109">
               <a:extLst>
                 <a:ext uri="{FF2B5EF4-FFF2-40B4-BE49-F238E27FC236}">
-                  <a16:creationId xmlns:a16="http://schemas.microsoft.com/office/drawing/2014/main" xmlns="" id="{CF6B487C-012F-56E5-E8E3-8B137298EDFA}"/>
+                  <a16:creationId xmlns="" xmlns:a16="http://schemas.microsoft.com/office/drawing/2014/main" id="{CF6B487C-012F-56E5-E8E3-8B137298EDFA}"/>
                 </a:ext>
               </a:extLst>
             </p:cNvPr>
@@ -26628,7 +27129,7 @@
           <p:cNvPr id="111" name="Group 110">
             <a:extLst>
               <a:ext uri="{FF2B5EF4-FFF2-40B4-BE49-F238E27FC236}">
-                <a16:creationId xmlns:a16="http://schemas.microsoft.com/office/drawing/2014/main" xmlns="" id="{6232043B-C4C4-BA0A-CF1A-4DBBB75AAC73}"/>
+                <a16:creationId xmlns="" xmlns:a16="http://schemas.microsoft.com/office/drawing/2014/main" id="{6232043B-C4C4-BA0A-CF1A-4DBBB75AAC73}"/>
               </a:ext>
             </a:extLst>
           </p:cNvPr>
@@ -26648,7 +27149,7 @@
             <p:cNvPr id="112" name="Oval 111">
               <a:extLst>
                 <a:ext uri="{FF2B5EF4-FFF2-40B4-BE49-F238E27FC236}">
-                  <a16:creationId xmlns:a16="http://schemas.microsoft.com/office/drawing/2014/main" xmlns="" id="{10FFE23E-6CCE-0432-75E0-E824C7863261}"/>
+                  <a16:creationId xmlns="" xmlns:a16="http://schemas.microsoft.com/office/drawing/2014/main" id="{10FFE23E-6CCE-0432-75E0-E824C7863261}"/>
                 </a:ext>
               </a:extLst>
             </p:cNvPr>
@@ -26707,7 +27208,7 @@
             <p:cNvPr id="113" name="Arc 112">
               <a:extLst>
                 <a:ext uri="{FF2B5EF4-FFF2-40B4-BE49-F238E27FC236}">
-                  <a16:creationId xmlns:a16="http://schemas.microsoft.com/office/drawing/2014/main" xmlns="" id="{98676D6A-3424-61E8-2CCE-756447D5F9C2}"/>
+                  <a16:creationId xmlns="" xmlns:a16="http://schemas.microsoft.com/office/drawing/2014/main" id="{98676D6A-3424-61E8-2CCE-756447D5F9C2}"/>
                 </a:ext>
               </a:extLst>
             </p:cNvPr>
@@ -26760,7 +27261,7 @@
           <p:cNvPr id="114" name="Group 113">
             <a:extLst>
               <a:ext uri="{FF2B5EF4-FFF2-40B4-BE49-F238E27FC236}">
-                <a16:creationId xmlns:a16="http://schemas.microsoft.com/office/drawing/2014/main" xmlns="" id="{88B3BE82-3395-0E01-8219-A5E3310F3959}"/>
+                <a16:creationId xmlns="" xmlns:a16="http://schemas.microsoft.com/office/drawing/2014/main" id="{88B3BE82-3395-0E01-8219-A5E3310F3959}"/>
               </a:ext>
             </a:extLst>
           </p:cNvPr>
@@ -26780,7 +27281,7 @@
             <p:cNvPr id="115" name="Oval 114">
               <a:extLst>
                 <a:ext uri="{FF2B5EF4-FFF2-40B4-BE49-F238E27FC236}">
-                  <a16:creationId xmlns:a16="http://schemas.microsoft.com/office/drawing/2014/main" xmlns="" id="{F83317C8-5B5D-DDF7-15F4-EA2AFB9BC950}"/>
+                  <a16:creationId xmlns="" xmlns:a16="http://schemas.microsoft.com/office/drawing/2014/main" id="{F83317C8-5B5D-DDF7-15F4-EA2AFB9BC950}"/>
                 </a:ext>
               </a:extLst>
             </p:cNvPr>
@@ -26839,7 +27340,7 @@
             <p:cNvPr id="116" name="Arc 115">
               <a:extLst>
                 <a:ext uri="{FF2B5EF4-FFF2-40B4-BE49-F238E27FC236}">
-                  <a16:creationId xmlns:a16="http://schemas.microsoft.com/office/drawing/2014/main" xmlns="" id="{E746B903-C206-EA9A-5FAE-24360FA19AD9}"/>
+                  <a16:creationId xmlns="" xmlns:a16="http://schemas.microsoft.com/office/drawing/2014/main" id="{E746B903-C206-EA9A-5FAE-24360FA19AD9}"/>
                 </a:ext>
               </a:extLst>
             </p:cNvPr>
@@ -26892,7 +27393,7 @@
           <p:cNvPr id="117" name="Group 116">
             <a:extLst>
               <a:ext uri="{FF2B5EF4-FFF2-40B4-BE49-F238E27FC236}">
-                <a16:creationId xmlns:a16="http://schemas.microsoft.com/office/drawing/2014/main" xmlns="" id="{2F2A7235-4D60-4C1C-AC1C-8026C6BB4059}"/>
+                <a16:creationId xmlns="" xmlns:a16="http://schemas.microsoft.com/office/drawing/2014/main" id="{2F2A7235-4D60-4C1C-AC1C-8026C6BB4059}"/>
               </a:ext>
             </a:extLst>
           </p:cNvPr>
@@ -26912,7 +27413,7 @@
             <p:cNvPr id="118" name="Oval 117">
               <a:extLst>
                 <a:ext uri="{FF2B5EF4-FFF2-40B4-BE49-F238E27FC236}">
-                  <a16:creationId xmlns:a16="http://schemas.microsoft.com/office/drawing/2014/main" xmlns="" id="{0F886985-AC53-0516-F85D-DDC1946AD17E}"/>
+                  <a16:creationId xmlns="" xmlns:a16="http://schemas.microsoft.com/office/drawing/2014/main" id="{0F886985-AC53-0516-F85D-DDC1946AD17E}"/>
                 </a:ext>
               </a:extLst>
             </p:cNvPr>
@@ -26971,7 +27472,7 @@
             <p:cNvPr id="119" name="Arc 118">
               <a:extLst>
                 <a:ext uri="{FF2B5EF4-FFF2-40B4-BE49-F238E27FC236}">
-                  <a16:creationId xmlns:a16="http://schemas.microsoft.com/office/drawing/2014/main" xmlns="" id="{AE4C9755-2A3A-5A32-D276-52C0A9B4F8D6}"/>
+                  <a16:creationId xmlns="" xmlns:a16="http://schemas.microsoft.com/office/drawing/2014/main" id="{AE4C9755-2A3A-5A32-D276-52C0A9B4F8D6}"/>
                 </a:ext>
               </a:extLst>
             </p:cNvPr>
@@ -27024,7 +27525,7 @@
           <p:cNvPr id="120" name="Group 119">
             <a:extLst>
               <a:ext uri="{FF2B5EF4-FFF2-40B4-BE49-F238E27FC236}">
-                <a16:creationId xmlns:a16="http://schemas.microsoft.com/office/drawing/2014/main" xmlns="" id="{7877DB57-685B-C785-7692-7E30EB8C61F3}"/>
+                <a16:creationId xmlns="" xmlns:a16="http://schemas.microsoft.com/office/drawing/2014/main" id="{7877DB57-685B-C785-7692-7E30EB8C61F3}"/>
               </a:ext>
             </a:extLst>
           </p:cNvPr>
@@ -27044,7 +27545,7 @@
             <p:cNvPr id="121" name="Oval 120">
               <a:extLst>
                 <a:ext uri="{FF2B5EF4-FFF2-40B4-BE49-F238E27FC236}">
-                  <a16:creationId xmlns:a16="http://schemas.microsoft.com/office/drawing/2014/main" xmlns="" id="{22F39CC0-1318-0DB9-44C8-44ED898DF450}"/>
+                  <a16:creationId xmlns="" xmlns:a16="http://schemas.microsoft.com/office/drawing/2014/main" id="{22F39CC0-1318-0DB9-44C8-44ED898DF450}"/>
                 </a:ext>
               </a:extLst>
             </p:cNvPr>
@@ -27103,7 +27604,7 @@
             <p:cNvPr id="122" name="Arc 121">
               <a:extLst>
                 <a:ext uri="{FF2B5EF4-FFF2-40B4-BE49-F238E27FC236}">
-                  <a16:creationId xmlns:a16="http://schemas.microsoft.com/office/drawing/2014/main" xmlns="" id="{E74E2D2F-36CC-9C47-07C8-1F7BA70CE9FF}"/>
+                  <a16:creationId xmlns="" xmlns:a16="http://schemas.microsoft.com/office/drawing/2014/main" id="{E74E2D2F-36CC-9C47-07C8-1F7BA70CE9FF}"/>
                 </a:ext>
               </a:extLst>
             </p:cNvPr>
@@ -27156,7 +27657,7 @@
           <p:cNvPr id="123" name="Rectangle 122">
             <a:extLst>
               <a:ext uri="{FF2B5EF4-FFF2-40B4-BE49-F238E27FC236}">
-                <a16:creationId xmlns:a16="http://schemas.microsoft.com/office/drawing/2014/main" xmlns="" id="{044E7409-6BE4-82BF-6739-FB981D21C254}"/>
+                <a16:creationId xmlns="" xmlns:a16="http://schemas.microsoft.com/office/drawing/2014/main" id="{044E7409-6BE4-82BF-6739-FB981D21C254}"/>
               </a:ext>
             </a:extLst>
           </p:cNvPr>
@@ -27354,7 +27855,7 @@
         <p:cNvPr id="1" name="">
           <a:extLst>
             <a:ext uri="{FF2B5EF4-FFF2-40B4-BE49-F238E27FC236}">
-              <a16:creationId xmlns:a16="http://schemas.microsoft.com/office/drawing/2014/main" xmlns="" id="{51C4FD09-55E3-2B1B-897E-1F9BF2720A5C}"/>
+              <a16:creationId xmlns="" xmlns:a16="http://schemas.microsoft.com/office/drawing/2014/main" id="{51C4FD09-55E3-2B1B-897E-1F9BF2720A5C}"/>
             </a:ext>
           </a:extLst>
         </p:cNvPr>
@@ -27374,7 +27875,7 @@
           <p:cNvPr id="5" name="Rectangle 4">
             <a:extLst>
               <a:ext uri="{FF2B5EF4-FFF2-40B4-BE49-F238E27FC236}">
-                <a16:creationId xmlns:a16="http://schemas.microsoft.com/office/drawing/2014/main" xmlns="" id="{B034BA31-4C57-9BDA-04C5-8FC13B21BF04}"/>
+                <a16:creationId xmlns="" xmlns:a16="http://schemas.microsoft.com/office/drawing/2014/main" id="{B034BA31-4C57-9BDA-04C5-8FC13B21BF04}"/>
               </a:ext>
             </a:extLst>
           </p:cNvPr>
@@ -27430,7 +27931,7 @@
           <p:cNvPr id="4" name="Rectangle 3">
             <a:extLst>
               <a:ext uri="{FF2B5EF4-FFF2-40B4-BE49-F238E27FC236}">
-                <a16:creationId xmlns:a16="http://schemas.microsoft.com/office/drawing/2014/main" xmlns="" id="{726F619E-C2F5-A764-7A5A-E740D3764F94}"/>
+                <a16:creationId xmlns="" xmlns:a16="http://schemas.microsoft.com/office/drawing/2014/main" id="{726F619E-C2F5-A764-7A5A-E740D3764F94}"/>
               </a:ext>
             </a:extLst>
           </p:cNvPr>
@@ -27661,7 +28162,7 @@
           <p:cNvPr id="6" name="Oval 5">
             <a:extLst>
               <a:ext uri="{FF2B5EF4-FFF2-40B4-BE49-F238E27FC236}">
-                <a16:creationId xmlns:a16="http://schemas.microsoft.com/office/drawing/2014/main" xmlns="" id="{63652264-4E8B-48A9-C360-C02C3660C32D}"/>
+                <a16:creationId xmlns="" xmlns:a16="http://schemas.microsoft.com/office/drawing/2014/main" id="{63652264-4E8B-48A9-C360-C02C3660C32D}"/>
               </a:ext>
             </a:extLst>
           </p:cNvPr>
@@ -27720,7 +28221,7 @@
           <p:cNvPr id="7" name="Oval 6">
             <a:extLst>
               <a:ext uri="{FF2B5EF4-FFF2-40B4-BE49-F238E27FC236}">
-                <a16:creationId xmlns:a16="http://schemas.microsoft.com/office/drawing/2014/main" xmlns="" id="{94A79690-2C7C-FEC2-2B4B-F5D0C6E2B06B}"/>
+                <a16:creationId xmlns="" xmlns:a16="http://schemas.microsoft.com/office/drawing/2014/main" id="{94A79690-2C7C-FEC2-2B4B-F5D0C6E2B06B}"/>
               </a:ext>
             </a:extLst>
           </p:cNvPr>
@@ -27779,7 +28280,7 @@
           <p:cNvPr id="8" name="Oval 7">
             <a:extLst>
               <a:ext uri="{FF2B5EF4-FFF2-40B4-BE49-F238E27FC236}">
-                <a16:creationId xmlns:a16="http://schemas.microsoft.com/office/drawing/2014/main" xmlns="" id="{F183C3CB-BD1C-4789-0643-1F50E0C687BE}"/>
+                <a16:creationId xmlns="" xmlns:a16="http://schemas.microsoft.com/office/drawing/2014/main" id="{F183C3CB-BD1C-4789-0643-1F50E0C687BE}"/>
               </a:ext>
             </a:extLst>
           </p:cNvPr>
@@ -27838,7 +28339,7 @@
           <p:cNvPr id="9" name="Oval 8">
             <a:extLst>
               <a:ext uri="{FF2B5EF4-FFF2-40B4-BE49-F238E27FC236}">
-                <a16:creationId xmlns:a16="http://schemas.microsoft.com/office/drawing/2014/main" xmlns="" id="{852695AE-B9E1-CA35-383A-5061DECC336D}"/>
+                <a16:creationId xmlns="" xmlns:a16="http://schemas.microsoft.com/office/drawing/2014/main" id="{852695AE-B9E1-CA35-383A-5061DECC336D}"/>
               </a:ext>
             </a:extLst>
           </p:cNvPr>
@@ -27897,7 +28398,7 @@
           <p:cNvPr id="10" name="Oval 9">
             <a:extLst>
               <a:ext uri="{FF2B5EF4-FFF2-40B4-BE49-F238E27FC236}">
-                <a16:creationId xmlns:a16="http://schemas.microsoft.com/office/drawing/2014/main" xmlns="" id="{AC8B7149-0844-B850-391A-8060B3392CC6}"/>
+                <a16:creationId xmlns="" xmlns:a16="http://schemas.microsoft.com/office/drawing/2014/main" id="{AC8B7149-0844-B850-391A-8060B3392CC6}"/>
               </a:ext>
             </a:extLst>
           </p:cNvPr>
@@ -27956,7 +28457,7 @@
           <p:cNvPr id="11" name="Oval 10">
             <a:extLst>
               <a:ext uri="{FF2B5EF4-FFF2-40B4-BE49-F238E27FC236}">
-                <a16:creationId xmlns:a16="http://schemas.microsoft.com/office/drawing/2014/main" xmlns="" id="{0D333270-CC5E-7DF6-1A02-659ABE822FF5}"/>
+                <a16:creationId xmlns="" xmlns:a16="http://schemas.microsoft.com/office/drawing/2014/main" id="{0D333270-CC5E-7DF6-1A02-659ABE822FF5}"/>
               </a:ext>
             </a:extLst>
           </p:cNvPr>
@@ -28015,7 +28516,7 @@
           <p:cNvPr id="12" name="Oval 11">
             <a:extLst>
               <a:ext uri="{FF2B5EF4-FFF2-40B4-BE49-F238E27FC236}">
-                <a16:creationId xmlns:a16="http://schemas.microsoft.com/office/drawing/2014/main" xmlns="" id="{79654E69-BC73-6E52-DC33-651392E0526D}"/>
+                <a16:creationId xmlns="" xmlns:a16="http://schemas.microsoft.com/office/drawing/2014/main" id="{79654E69-BC73-6E52-DC33-651392E0526D}"/>
               </a:ext>
             </a:extLst>
           </p:cNvPr>
@@ -28074,7 +28575,7 @@
           <p:cNvPr id="13" name="Oval 12">
             <a:extLst>
               <a:ext uri="{FF2B5EF4-FFF2-40B4-BE49-F238E27FC236}">
-                <a16:creationId xmlns:a16="http://schemas.microsoft.com/office/drawing/2014/main" xmlns="" id="{E4CFDB43-57A3-3026-29E9-D60F416B0F09}"/>
+                <a16:creationId xmlns="" xmlns:a16="http://schemas.microsoft.com/office/drawing/2014/main" id="{E4CFDB43-57A3-3026-29E9-D60F416B0F09}"/>
               </a:ext>
             </a:extLst>
           </p:cNvPr>
@@ -28133,7 +28634,7 @@
           <p:cNvPr id="14" name="Oval 13">
             <a:extLst>
               <a:ext uri="{FF2B5EF4-FFF2-40B4-BE49-F238E27FC236}">
-                <a16:creationId xmlns:a16="http://schemas.microsoft.com/office/drawing/2014/main" xmlns="" id="{F309C4C6-BB4D-8939-A2FC-02DC29CFCC6D}"/>
+                <a16:creationId xmlns="" xmlns:a16="http://schemas.microsoft.com/office/drawing/2014/main" id="{F309C4C6-BB4D-8939-A2FC-02DC29CFCC6D}"/>
               </a:ext>
             </a:extLst>
           </p:cNvPr>
@@ -28192,7 +28693,7 @@
           <p:cNvPr id="15" name="Oval 14">
             <a:extLst>
               <a:ext uri="{FF2B5EF4-FFF2-40B4-BE49-F238E27FC236}">
-                <a16:creationId xmlns:a16="http://schemas.microsoft.com/office/drawing/2014/main" xmlns="" id="{042F644C-7941-9F1F-CD17-58A102B9F051}"/>
+                <a16:creationId xmlns="" xmlns:a16="http://schemas.microsoft.com/office/drawing/2014/main" id="{042F644C-7941-9F1F-CD17-58A102B9F051}"/>
               </a:ext>
             </a:extLst>
           </p:cNvPr>
@@ -28251,7 +28752,7 @@
           <p:cNvPr id="16" name="Oval 15">
             <a:extLst>
               <a:ext uri="{FF2B5EF4-FFF2-40B4-BE49-F238E27FC236}">
-                <a16:creationId xmlns:a16="http://schemas.microsoft.com/office/drawing/2014/main" xmlns="" id="{9FE90EDA-798E-4116-2E6D-F9F24F96F337}"/>
+                <a16:creationId xmlns="" xmlns:a16="http://schemas.microsoft.com/office/drawing/2014/main" id="{9FE90EDA-798E-4116-2E6D-F9F24F96F337}"/>
               </a:ext>
             </a:extLst>
           </p:cNvPr>
@@ -28310,7 +28811,7 @@
           <p:cNvPr id="17" name="Oval 16">
             <a:extLst>
               <a:ext uri="{FF2B5EF4-FFF2-40B4-BE49-F238E27FC236}">
-                <a16:creationId xmlns:a16="http://schemas.microsoft.com/office/drawing/2014/main" xmlns="" id="{01176BBF-01DD-C6ED-B967-EB1DB7DB2F69}"/>
+                <a16:creationId xmlns="" xmlns:a16="http://schemas.microsoft.com/office/drawing/2014/main" id="{01176BBF-01DD-C6ED-B967-EB1DB7DB2F69}"/>
               </a:ext>
             </a:extLst>
           </p:cNvPr>
@@ -28369,7 +28870,7 @@
           <p:cNvPr id="18" name="Oval 17">
             <a:extLst>
               <a:ext uri="{FF2B5EF4-FFF2-40B4-BE49-F238E27FC236}">
-                <a16:creationId xmlns:a16="http://schemas.microsoft.com/office/drawing/2014/main" xmlns="" id="{9F9C5F9C-2EEA-6014-F551-FCFA8EE56021}"/>
+                <a16:creationId xmlns="" xmlns:a16="http://schemas.microsoft.com/office/drawing/2014/main" id="{9F9C5F9C-2EEA-6014-F551-FCFA8EE56021}"/>
               </a:ext>
             </a:extLst>
           </p:cNvPr>
@@ -28428,7 +28929,7 @@
           <p:cNvPr id="19" name="Oval 18">
             <a:extLst>
               <a:ext uri="{FF2B5EF4-FFF2-40B4-BE49-F238E27FC236}">
-                <a16:creationId xmlns:a16="http://schemas.microsoft.com/office/drawing/2014/main" xmlns="" id="{3C7AD85C-644E-0A9B-6CFE-2B4A8C85E76B}"/>
+                <a16:creationId xmlns="" xmlns:a16="http://schemas.microsoft.com/office/drawing/2014/main" id="{3C7AD85C-644E-0A9B-6CFE-2B4A8C85E76B}"/>
               </a:ext>
             </a:extLst>
           </p:cNvPr>
@@ -28487,7 +28988,7 @@
           <p:cNvPr id="20" name="Oval 19">
             <a:extLst>
               <a:ext uri="{FF2B5EF4-FFF2-40B4-BE49-F238E27FC236}">
-                <a16:creationId xmlns:a16="http://schemas.microsoft.com/office/drawing/2014/main" xmlns="" id="{0380C106-105A-1A96-0199-94FE8B539591}"/>
+                <a16:creationId xmlns="" xmlns:a16="http://schemas.microsoft.com/office/drawing/2014/main" id="{0380C106-105A-1A96-0199-94FE8B539591}"/>
               </a:ext>
             </a:extLst>
           </p:cNvPr>
@@ -28546,7 +29047,7 @@
           <p:cNvPr id="21" name="Oval 20">
             <a:extLst>
               <a:ext uri="{FF2B5EF4-FFF2-40B4-BE49-F238E27FC236}">
-                <a16:creationId xmlns:a16="http://schemas.microsoft.com/office/drawing/2014/main" xmlns="" id="{89A7FBE2-CFD6-1AB1-A77D-4A327850C6BD}"/>
+                <a16:creationId xmlns="" xmlns:a16="http://schemas.microsoft.com/office/drawing/2014/main" id="{89A7FBE2-CFD6-1AB1-A77D-4A327850C6BD}"/>
               </a:ext>
             </a:extLst>
           </p:cNvPr>
@@ -28605,7 +29106,7 @@
           <p:cNvPr id="22" name="Oval 21">
             <a:extLst>
               <a:ext uri="{FF2B5EF4-FFF2-40B4-BE49-F238E27FC236}">
-                <a16:creationId xmlns:a16="http://schemas.microsoft.com/office/drawing/2014/main" xmlns="" id="{3121677A-1631-1324-1E55-D68B3900D565}"/>
+                <a16:creationId xmlns="" xmlns:a16="http://schemas.microsoft.com/office/drawing/2014/main" id="{3121677A-1631-1324-1E55-D68B3900D565}"/>
               </a:ext>
             </a:extLst>
           </p:cNvPr>
@@ -28664,7 +29165,7 @@
           <p:cNvPr id="23" name="Oval 22">
             <a:extLst>
               <a:ext uri="{FF2B5EF4-FFF2-40B4-BE49-F238E27FC236}">
-                <a16:creationId xmlns:a16="http://schemas.microsoft.com/office/drawing/2014/main" xmlns="" id="{64D42A8C-6C17-5515-7C30-72FA44A1C982}"/>
+                <a16:creationId xmlns="" xmlns:a16="http://schemas.microsoft.com/office/drawing/2014/main" id="{64D42A8C-6C17-5515-7C30-72FA44A1C982}"/>
               </a:ext>
             </a:extLst>
           </p:cNvPr>
@@ -28723,7 +29224,7 @@
           <p:cNvPr id="24" name="Oval 23">
             <a:extLst>
               <a:ext uri="{FF2B5EF4-FFF2-40B4-BE49-F238E27FC236}">
-                <a16:creationId xmlns:a16="http://schemas.microsoft.com/office/drawing/2014/main" xmlns="" id="{7475C0C7-3651-5314-3F48-173B78AB0BFB}"/>
+                <a16:creationId xmlns="" xmlns:a16="http://schemas.microsoft.com/office/drawing/2014/main" id="{7475C0C7-3651-5314-3F48-173B78AB0BFB}"/>
               </a:ext>
             </a:extLst>
           </p:cNvPr>
@@ -28782,7 +29283,7 @@
           <p:cNvPr id="25" name="Oval 24">
             <a:extLst>
               <a:ext uri="{FF2B5EF4-FFF2-40B4-BE49-F238E27FC236}">
-                <a16:creationId xmlns:a16="http://schemas.microsoft.com/office/drawing/2014/main" xmlns="" id="{9EC0B432-CB23-DBAF-B917-7ABB9CFA1904}"/>
+                <a16:creationId xmlns="" xmlns:a16="http://schemas.microsoft.com/office/drawing/2014/main" id="{9EC0B432-CB23-DBAF-B917-7ABB9CFA1904}"/>
               </a:ext>
             </a:extLst>
           </p:cNvPr>
@@ -28841,7 +29342,7 @@
           <p:cNvPr id="26" name="Oval 25">
             <a:extLst>
               <a:ext uri="{FF2B5EF4-FFF2-40B4-BE49-F238E27FC236}">
-                <a16:creationId xmlns:a16="http://schemas.microsoft.com/office/drawing/2014/main" xmlns="" id="{CD6371DF-A7E5-1434-5000-FF50454FDD3B}"/>
+                <a16:creationId xmlns="" xmlns:a16="http://schemas.microsoft.com/office/drawing/2014/main" id="{CD6371DF-A7E5-1434-5000-FF50454FDD3B}"/>
               </a:ext>
             </a:extLst>
           </p:cNvPr>
@@ -28900,7 +29401,7 @@
           <p:cNvPr id="27" name="Oval 26">
             <a:extLst>
               <a:ext uri="{FF2B5EF4-FFF2-40B4-BE49-F238E27FC236}">
-                <a16:creationId xmlns:a16="http://schemas.microsoft.com/office/drawing/2014/main" xmlns="" id="{1F08106B-D501-EC7F-FD6E-9F53DD6567B9}"/>
+                <a16:creationId xmlns="" xmlns:a16="http://schemas.microsoft.com/office/drawing/2014/main" id="{1F08106B-D501-EC7F-FD6E-9F53DD6567B9}"/>
               </a:ext>
             </a:extLst>
           </p:cNvPr>
@@ -28959,7 +29460,7 @@
           <p:cNvPr id="28" name="Oval 27">
             <a:extLst>
               <a:ext uri="{FF2B5EF4-FFF2-40B4-BE49-F238E27FC236}">
-                <a16:creationId xmlns:a16="http://schemas.microsoft.com/office/drawing/2014/main" xmlns="" id="{58CD1136-8D51-C029-89F6-934EB793CA76}"/>
+                <a16:creationId xmlns="" xmlns:a16="http://schemas.microsoft.com/office/drawing/2014/main" id="{58CD1136-8D51-C029-89F6-934EB793CA76}"/>
               </a:ext>
             </a:extLst>
           </p:cNvPr>
@@ -29018,7 +29519,7 @@
           <p:cNvPr id="29" name="Oval 28">
             <a:extLst>
               <a:ext uri="{FF2B5EF4-FFF2-40B4-BE49-F238E27FC236}">
-                <a16:creationId xmlns:a16="http://schemas.microsoft.com/office/drawing/2014/main" xmlns="" id="{50E918C1-C147-CDF9-9A0B-C41B1B1BDC16}"/>
+                <a16:creationId xmlns="" xmlns:a16="http://schemas.microsoft.com/office/drawing/2014/main" id="{50E918C1-C147-CDF9-9A0B-C41B1B1BDC16}"/>
               </a:ext>
             </a:extLst>
           </p:cNvPr>
@@ -29077,7 +29578,7 @@
           <p:cNvPr id="3" name="Group 2">
             <a:extLst>
               <a:ext uri="{FF2B5EF4-FFF2-40B4-BE49-F238E27FC236}">
-                <a16:creationId xmlns:a16="http://schemas.microsoft.com/office/drawing/2014/main" xmlns="" id="{928405A0-4A61-8733-B126-4D81DAAC8909}"/>
+                <a16:creationId xmlns="" xmlns:a16="http://schemas.microsoft.com/office/drawing/2014/main" id="{928405A0-4A61-8733-B126-4D81DAAC8909}"/>
               </a:ext>
             </a:extLst>
           </p:cNvPr>
@@ -29097,7 +29598,7 @@
             <p:cNvPr id="2" name="Oval 1">
               <a:extLst>
                 <a:ext uri="{FF2B5EF4-FFF2-40B4-BE49-F238E27FC236}">
-                  <a16:creationId xmlns:a16="http://schemas.microsoft.com/office/drawing/2014/main" xmlns="" id="{13AFC585-BA57-5F31-158D-6005C04FEA8F}"/>
+                  <a16:creationId xmlns="" xmlns:a16="http://schemas.microsoft.com/office/drawing/2014/main" id="{13AFC585-BA57-5F31-158D-6005C04FEA8F}"/>
                 </a:ext>
               </a:extLst>
             </p:cNvPr>
@@ -29156,7 +29657,7 @@
             <p:cNvPr id="30" name="Arc 29">
               <a:extLst>
                 <a:ext uri="{FF2B5EF4-FFF2-40B4-BE49-F238E27FC236}">
-                  <a16:creationId xmlns:a16="http://schemas.microsoft.com/office/drawing/2014/main" xmlns="" id="{6ABDBE3E-C36D-8AB3-7845-745EE50517F1}"/>
+                  <a16:creationId xmlns="" xmlns:a16="http://schemas.microsoft.com/office/drawing/2014/main" id="{6ABDBE3E-C36D-8AB3-7845-745EE50517F1}"/>
                 </a:ext>
               </a:extLst>
             </p:cNvPr>
@@ -29209,7 +29710,7 @@
           <p:cNvPr id="54" name="Group 53">
             <a:extLst>
               <a:ext uri="{FF2B5EF4-FFF2-40B4-BE49-F238E27FC236}">
-                <a16:creationId xmlns:a16="http://schemas.microsoft.com/office/drawing/2014/main" xmlns="" id="{BE4556B3-F34C-FF2C-77C6-6D471C09D64C}"/>
+                <a16:creationId xmlns="" xmlns:a16="http://schemas.microsoft.com/office/drawing/2014/main" id="{BE4556B3-F34C-FF2C-77C6-6D471C09D64C}"/>
               </a:ext>
             </a:extLst>
           </p:cNvPr>
@@ -29229,7 +29730,7 @@
             <p:cNvPr id="55" name="Oval 54">
               <a:extLst>
                 <a:ext uri="{FF2B5EF4-FFF2-40B4-BE49-F238E27FC236}">
-                  <a16:creationId xmlns:a16="http://schemas.microsoft.com/office/drawing/2014/main" xmlns="" id="{328F7FC3-44ED-BDFD-31EC-54198BE5A58F}"/>
+                  <a16:creationId xmlns="" xmlns:a16="http://schemas.microsoft.com/office/drawing/2014/main" id="{328F7FC3-44ED-BDFD-31EC-54198BE5A58F}"/>
                 </a:ext>
               </a:extLst>
             </p:cNvPr>
@@ -29288,7 +29789,7 @@
             <p:cNvPr id="56" name="Arc 55">
               <a:extLst>
                 <a:ext uri="{FF2B5EF4-FFF2-40B4-BE49-F238E27FC236}">
-                  <a16:creationId xmlns:a16="http://schemas.microsoft.com/office/drawing/2014/main" xmlns="" id="{691957E7-B542-3D6C-AA1A-4C3661572B27}"/>
+                  <a16:creationId xmlns="" xmlns:a16="http://schemas.microsoft.com/office/drawing/2014/main" id="{691957E7-B542-3D6C-AA1A-4C3661572B27}"/>
                 </a:ext>
               </a:extLst>
             </p:cNvPr>
@@ -29341,7 +29842,7 @@
           <p:cNvPr id="57" name="Group 56">
             <a:extLst>
               <a:ext uri="{FF2B5EF4-FFF2-40B4-BE49-F238E27FC236}">
-                <a16:creationId xmlns:a16="http://schemas.microsoft.com/office/drawing/2014/main" xmlns="" id="{34942098-76A7-B3A3-5DB3-D8162AD3F68D}"/>
+                <a16:creationId xmlns="" xmlns:a16="http://schemas.microsoft.com/office/drawing/2014/main" id="{34942098-76A7-B3A3-5DB3-D8162AD3F68D}"/>
               </a:ext>
             </a:extLst>
           </p:cNvPr>
@@ -29361,7 +29862,7 @@
             <p:cNvPr id="58" name="Oval 57">
               <a:extLst>
                 <a:ext uri="{FF2B5EF4-FFF2-40B4-BE49-F238E27FC236}">
-                  <a16:creationId xmlns:a16="http://schemas.microsoft.com/office/drawing/2014/main" xmlns="" id="{ADA0F6B4-0FE9-8946-CD31-44C147BDFAA2}"/>
+                  <a16:creationId xmlns="" xmlns:a16="http://schemas.microsoft.com/office/drawing/2014/main" id="{ADA0F6B4-0FE9-8946-CD31-44C147BDFAA2}"/>
                 </a:ext>
               </a:extLst>
             </p:cNvPr>
@@ -29420,7 +29921,7 @@
             <p:cNvPr id="59" name="Arc 58">
               <a:extLst>
                 <a:ext uri="{FF2B5EF4-FFF2-40B4-BE49-F238E27FC236}">
-                  <a16:creationId xmlns:a16="http://schemas.microsoft.com/office/drawing/2014/main" xmlns="" id="{E209963C-964F-F2C3-6448-EDCC319111CF}"/>
+                  <a16:creationId xmlns="" xmlns:a16="http://schemas.microsoft.com/office/drawing/2014/main" id="{E209963C-964F-F2C3-6448-EDCC319111CF}"/>
                 </a:ext>
               </a:extLst>
             </p:cNvPr>
@@ -29473,7 +29974,7 @@
           <p:cNvPr id="60" name="Group 59">
             <a:extLst>
               <a:ext uri="{FF2B5EF4-FFF2-40B4-BE49-F238E27FC236}">
-                <a16:creationId xmlns:a16="http://schemas.microsoft.com/office/drawing/2014/main" xmlns="" id="{92FBB5C7-CE3A-82A2-B96C-D00957855705}"/>
+                <a16:creationId xmlns="" xmlns:a16="http://schemas.microsoft.com/office/drawing/2014/main" id="{92FBB5C7-CE3A-82A2-B96C-D00957855705}"/>
               </a:ext>
             </a:extLst>
           </p:cNvPr>
@@ -29493,7 +29994,7 @@
             <p:cNvPr id="61" name="Oval 60">
               <a:extLst>
                 <a:ext uri="{FF2B5EF4-FFF2-40B4-BE49-F238E27FC236}">
-                  <a16:creationId xmlns:a16="http://schemas.microsoft.com/office/drawing/2014/main" xmlns="" id="{C2090BBD-0FD7-73D4-768D-B3EACE879018}"/>
+                  <a16:creationId xmlns="" xmlns:a16="http://schemas.microsoft.com/office/drawing/2014/main" id="{C2090BBD-0FD7-73D4-768D-B3EACE879018}"/>
                 </a:ext>
               </a:extLst>
             </p:cNvPr>
@@ -29552,7 +30053,7 @@
             <p:cNvPr id="62" name="Arc 61">
               <a:extLst>
                 <a:ext uri="{FF2B5EF4-FFF2-40B4-BE49-F238E27FC236}">
-                  <a16:creationId xmlns:a16="http://schemas.microsoft.com/office/drawing/2014/main" xmlns="" id="{49BBA01A-FD23-189D-7879-A24960489055}"/>
+                  <a16:creationId xmlns="" xmlns:a16="http://schemas.microsoft.com/office/drawing/2014/main" id="{49BBA01A-FD23-189D-7879-A24960489055}"/>
                 </a:ext>
               </a:extLst>
             </p:cNvPr>
@@ -29605,7 +30106,7 @@
           <p:cNvPr id="63" name="Group 62">
             <a:extLst>
               <a:ext uri="{FF2B5EF4-FFF2-40B4-BE49-F238E27FC236}">
-                <a16:creationId xmlns:a16="http://schemas.microsoft.com/office/drawing/2014/main" xmlns="" id="{F1BBA567-B812-1158-B0D9-8585557A065F}"/>
+                <a16:creationId xmlns="" xmlns:a16="http://schemas.microsoft.com/office/drawing/2014/main" id="{F1BBA567-B812-1158-B0D9-8585557A065F}"/>
               </a:ext>
             </a:extLst>
           </p:cNvPr>
@@ -29625,7 +30126,7 @@
             <p:cNvPr id="64" name="Oval 63">
               <a:extLst>
                 <a:ext uri="{FF2B5EF4-FFF2-40B4-BE49-F238E27FC236}">
-                  <a16:creationId xmlns:a16="http://schemas.microsoft.com/office/drawing/2014/main" xmlns="" id="{69954438-FCF4-7EDB-B481-3A5CD3540B92}"/>
+                  <a16:creationId xmlns="" xmlns:a16="http://schemas.microsoft.com/office/drawing/2014/main" id="{69954438-FCF4-7EDB-B481-3A5CD3540B92}"/>
                 </a:ext>
               </a:extLst>
             </p:cNvPr>
@@ -29684,7 +30185,7 @@
             <p:cNvPr id="65" name="Arc 64">
               <a:extLst>
                 <a:ext uri="{FF2B5EF4-FFF2-40B4-BE49-F238E27FC236}">
-                  <a16:creationId xmlns:a16="http://schemas.microsoft.com/office/drawing/2014/main" xmlns="" id="{0539A26F-8931-1226-DADD-F1FA6E3A46CA}"/>
+                  <a16:creationId xmlns="" xmlns:a16="http://schemas.microsoft.com/office/drawing/2014/main" id="{0539A26F-8931-1226-DADD-F1FA6E3A46CA}"/>
                 </a:ext>
               </a:extLst>
             </p:cNvPr>
@@ -29737,7 +30238,7 @@
           <p:cNvPr id="66" name="Group 65">
             <a:extLst>
               <a:ext uri="{FF2B5EF4-FFF2-40B4-BE49-F238E27FC236}">
-                <a16:creationId xmlns:a16="http://schemas.microsoft.com/office/drawing/2014/main" xmlns="" id="{C5CA0963-798D-1A46-720B-8E62281FCB2B}"/>
+                <a16:creationId xmlns="" xmlns:a16="http://schemas.microsoft.com/office/drawing/2014/main" id="{C5CA0963-798D-1A46-720B-8E62281FCB2B}"/>
               </a:ext>
             </a:extLst>
           </p:cNvPr>
@@ -29757,7 +30258,7 @@
             <p:cNvPr id="67" name="Oval 66">
               <a:extLst>
                 <a:ext uri="{FF2B5EF4-FFF2-40B4-BE49-F238E27FC236}">
-                  <a16:creationId xmlns:a16="http://schemas.microsoft.com/office/drawing/2014/main" xmlns="" id="{238F6E5E-CA7D-90C5-F3DE-CEA092075098}"/>
+                  <a16:creationId xmlns="" xmlns:a16="http://schemas.microsoft.com/office/drawing/2014/main" id="{238F6E5E-CA7D-90C5-F3DE-CEA092075098}"/>
                 </a:ext>
               </a:extLst>
             </p:cNvPr>
@@ -29816,7 +30317,7 @@
             <p:cNvPr id="68" name="Arc 67">
               <a:extLst>
                 <a:ext uri="{FF2B5EF4-FFF2-40B4-BE49-F238E27FC236}">
-                  <a16:creationId xmlns:a16="http://schemas.microsoft.com/office/drawing/2014/main" xmlns="" id="{4EDC6FAD-D9B6-F4CE-7409-08C269011CC8}"/>
+                  <a16:creationId xmlns="" xmlns:a16="http://schemas.microsoft.com/office/drawing/2014/main" id="{4EDC6FAD-D9B6-F4CE-7409-08C269011CC8}"/>
                 </a:ext>
               </a:extLst>
             </p:cNvPr>
@@ -29869,7 +30370,7 @@
           <p:cNvPr id="69" name="Group 68">
             <a:extLst>
               <a:ext uri="{FF2B5EF4-FFF2-40B4-BE49-F238E27FC236}">
-                <a16:creationId xmlns:a16="http://schemas.microsoft.com/office/drawing/2014/main" xmlns="" id="{97D732E3-F499-0C3F-BE88-8A3C727562BA}"/>
+                <a16:creationId xmlns="" xmlns:a16="http://schemas.microsoft.com/office/drawing/2014/main" id="{97D732E3-F499-0C3F-BE88-8A3C727562BA}"/>
               </a:ext>
             </a:extLst>
           </p:cNvPr>
@@ -29889,7 +30390,7 @@
             <p:cNvPr id="70" name="Oval 69">
               <a:extLst>
                 <a:ext uri="{FF2B5EF4-FFF2-40B4-BE49-F238E27FC236}">
-                  <a16:creationId xmlns:a16="http://schemas.microsoft.com/office/drawing/2014/main" xmlns="" id="{1BB77D40-207D-28FD-CBB8-13B1251FBCE3}"/>
+                  <a16:creationId xmlns="" xmlns:a16="http://schemas.microsoft.com/office/drawing/2014/main" id="{1BB77D40-207D-28FD-CBB8-13B1251FBCE3}"/>
                 </a:ext>
               </a:extLst>
             </p:cNvPr>
@@ -29948,7 +30449,7 @@
             <p:cNvPr id="71" name="Arc 70">
               <a:extLst>
                 <a:ext uri="{FF2B5EF4-FFF2-40B4-BE49-F238E27FC236}">
-                  <a16:creationId xmlns:a16="http://schemas.microsoft.com/office/drawing/2014/main" xmlns="" id="{98CED01A-8366-93D8-2562-CDF27F4E5646}"/>
+                  <a16:creationId xmlns="" xmlns:a16="http://schemas.microsoft.com/office/drawing/2014/main" id="{98CED01A-8366-93D8-2562-CDF27F4E5646}"/>
                 </a:ext>
               </a:extLst>
             </p:cNvPr>
@@ -30001,7 +30502,7 @@
           <p:cNvPr id="72" name="Group 71">
             <a:extLst>
               <a:ext uri="{FF2B5EF4-FFF2-40B4-BE49-F238E27FC236}">
-                <a16:creationId xmlns:a16="http://schemas.microsoft.com/office/drawing/2014/main" xmlns="" id="{8ACD396F-9CBB-E28A-C3C7-9FFF82E7D986}"/>
+                <a16:creationId xmlns="" xmlns:a16="http://schemas.microsoft.com/office/drawing/2014/main" id="{8ACD396F-9CBB-E28A-C3C7-9FFF82E7D986}"/>
               </a:ext>
             </a:extLst>
           </p:cNvPr>
@@ -30021,7 +30522,7 @@
             <p:cNvPr id="73" name="Oval 72">
               <a:extLst>
                 <a:ext uri="{FF2B5EF4-FFF2-40B4-BE49-F238E27FC236}">
-                  <a16:creationId xmlns:a16="http://schemas.microsoft.com/office/drawing/2014/main" xmlns="" id="{79F5ABF2-6AF6-5851-71FF-385EC3216731}"/>
+                  <a16:creationId xmlns="" xmlns:a16="http://schemas.microsoft.com/office/drawing/2014/main" id="{79F5ABF2-6AF6-5851-71FF-385EC3216731}"/>
                 </a:ext>
               </a:extLst>
             </p:cNvPr>
@@ -30080,7 +30581,7 @@
             <p:cNvPr id="74" name="Arc 73">
               <a:extLst>
                 <a:ext uri="{FF2B5EF4-FFF2-40B4-BE49-F238E27FC236}">
-                  <a16:creationId xmlns:a16="http://schemas.microsoft.com/office/drawing/2014/main" xmlns="" id="{59B2770C-AEBD-5B7B-0CAD-D69C9BFB0200}"/>
+                  <a16:creationId xmlns="" xmlns:a16="http://schemas.microsoft.com/office/drawing/2014/main" id="{59B2770C-AEBD-5B7B-0CAD-D69C9BFB0200}"/>
                 </a:ext>
               </a:extLst>
             </p:cNvPr>
@@ -30133,7 +30634,7 @@
           <p:cNvPr id="75" name="Group 74">
             <a:extLst>
               <a:ext uri="{FF2B5EF4-FFF2-40B4-BE49-F238E27FC236}">
-                <a16:creationId xmlns:a16="http://schemas.microsoft.com/office/drawing/2014/main" xmlns="" id="{8E67EC40-2CEA-15BB-679E-82A155506382}"/>
+                <a16:creationId xmlns="" xmlns:a16="http://schemas.microsoft.com/office/drawing/2014/main" id="{8E67EC40-2CEA-15BB-679E-82A155506382}"/>
               </a:ext>
             </a:extLst>
           </p:cNvPr>
@@ -30153,7 +30654,7 @@
             <p:cNvPr id="76" name="Oval 75">
               <a:extLst>
                 <a:ext uri="{FF2B5EF4-FFF2-40B4-BE49-F238E27FC236}">
-                  <a16:creationId xmlns:a16="http://schemas.microsoft.com/office/drawing/2014/main" xmlns="" id="{BEE67072-39B0-0D8C-3764-DF739D4EF898}"/>
+                  <a16:creationId xmlns="" xmlns:a16="http://schemas.microsoft.com/office/drawing/2014/main" id="{BEE67072-39B0-0D8C-3764-DF739D4EF898}"/>
                 </a:ext>
               </a:extLst>
             </p:cNvPr>
@@ -30212,7 +30713,7 @@
             <p:cNvPr id="77" name="Arc 76">
               <a:extLst>
                 <a:ext uri="{FF2B5EF4-FFF2-40B4-BE49-F238E27FC236}">
-                  <a16:creationId xmlns:a16="http://schemas.microsoft.com/office/drawing/2014/main" xmlns="" id="{1036E0E8-91A2-459D-62BA-7E55B36EA4A3}"/>
+                  <a16:creationId xmlns="" xmlns:a16="http://schemas.microsoft.com/office/drawing/2014/main" id="{1036E0E8-91A2-459D-62BA-7E55B36EA4A3}"/>
                 </a:ext>
               </a:extLst>
             </p:cNvPr>
@@ -30265,7 +30766,7 @@
           <p:cNvPr id="78" name="Group 77">
             <a:extLst>
               <a:ext uri="{FF2B5EF4-FFF2-40B4-BE49-F238E27FC236}">
-                <a16:creationId xmlns:a16="http://schemas.microsoft.com/office/drawing/2014/main" xmlns="" id="{E7A8FC93-89F4-B3FF-B2A0-EB92EE14302F}"/>
+                <a16:creationId xmlns="" xmlns:a16="http://schemas.microsoft.com/office/drawing/2014/main" id="{E7A8FC93-89F4-B3FF-B2A0-EB92EE14302F}"/>
               </a:ext>
             </a:extLst>
           </p:cNvPr>
@@ -30285,7 +30786,7 @@
             <p:cNvPr id="79" name="Oval 78">
               <a:extLst>
                 <a:ext uri="{FF2B5EF4-FFF2-40B4-BE49-F238E27FC236}">
-                  <a16:creationId xmlns:a16="http://schemas.microsoft.com/office/drawing/2014/main" xmlns="" id="{0B288602-214C-9797-F12B-433D63A94C97}"/>
+                  <a16:creationId xmlns="" xmlns:a16="http://schemas.microsoft.com/office/drawing/2014/main" id="{0B288602-214C-9797-F12B-433D63A94C97}"/>
                 </a:ext>
               </a:extLst>
             </p:cNvPr>
@@ -30344,7 +30845,7 @@
             <p:cNvPr id="80" name="Arc 79">
               <a:extLst>
                 <a:ext uri="{FF2B5EF4-FFF2-40B4-BE49-F238E27FC236}">
-                  <a16:creationId xmlns:a16="http://schemas.microsoft.com/office/drawing/2014/main" xmlns="" id="{B2237529-DFC9-A1B7-9CFA-D339940826FC}"/>
+                  <a16:creationId xmlns="" xmlns:a16="http://schemas.microsoft.com/office/drawing/2014/main" id="{B2237529-DFC9-A1B7-9CFA-D339940826FC}"/>
                 </a:ext>
               </a:extLst>
             </p:cNvPr>
@@ -30397,7 +30898,7 @@
           <p:cNvPr id="81" name="Group 80">
             <a:extLst>
               <a:ext uri="{FF2B5EF4-FFF2-40B4-BE49-F238E27FC236}">
-                <a16:creationId xmlns:a16="http://schemas.microsoft.com/office/drawing/2014/main" xmlns="" id="{56E08E4B-3F15-3DA7-6141-7E97655DD396}"/>
+                <a16:creationId xmlns="" xmlns:a16="http://schemas.microsoft.com/office/drawing/2014/main" id="{56E08E4B-3F15-3DA7-6141-7E97655DD396}"/>
               </a:ext>
             </a:extLst>
           </p:cNvPr>
@@ -30417,7 +30918,7 @@
             <p:cNvPr id="82" name="Oval 81">
               <a:extLst>
                 <a:ext uri="{FF2B5EF4-FFF2-40B4-BE49-F238E27FC236}">
-                  <a16:creationId xmlns:a16="http://schemas.microsoft.com/office/drawing/2014/main" xmlns="" id="{BF631934-7110-7F5E-79A0-378CB41A08C9}"/>
+                  <a16:creationId xmlns="" xmlns:a16="http://schemas.microsoft.com/office/drawing/2014/main" id="{BF631934-7110-7F5E-79A0-378CB41A08C9}"/>
                 </a:ext>
               </a:extLst>
             </p:cNvPr>
@@ -30476,7 +30977,7 @@
             <p:cNvPr id="83" name="Arc 82">
               <a:extLst>
                 <a:ext uri="{FF2B5EF4-FFF2-40B4-BE49-F238E27FC236}">
-                  <a16:creationId xmlns:a16="http://schemas.microsoft.com/office/drawing/2014/main" xmlns="" id="{0439DB39-7B53-36D4-BDF5-71DB13657FDC}"/>
+                  <a16:creationId xmlns="" xmlns:a16="http://schemas.microsoft.com/office/drawing/2014/main" id="{0439DB39-7B53-36D4-BDF5-71DB13657FDC}"/>
                 </a:ext>
               </a:extLst>
             </p:cNvPr>
@@ -30529,7 +31030,7 @@
           <p:cNvPr id="84" name="Group 83">
             <a:extLst>
               <a:ext uri="{FF2B5EF4-FFF2-40B4-BE49-F238E27FC236}">
-                <a16:creationId xmlns:a16="http://schemas.microsoft.com/office/drawing/2014/main" xmlns="" id="{BD99BE67-16D7-6B0C-6E7E-F8B4B7BD2317}"/>
+                <a16:creationId xmlns="" xmlns:a16="http://schemas.microsoft.com/office/drawing/2014/main" id="{BD99BE67-16D7-6B0C-6E7E-F8B4B7BD2317}"/>
               </a:ext>
             </a:extLst>
           </p:cNvPr>
@@ -30549,7 +31050,7 @@
             <p:cNvPr id="85" name="Oval 84">
               <a:extLst>
                 <a:ext uri="{FF2B5EF4-FFF2-40B4-BE49-F238E27FC236}">
-                  <a16:creationId xmlns:a16="http://schemas.microsoft.com/office/drawing/2014/main" xmlns="" id="{370A9636-2147-18A8-A452-5C474F2755F9}"/>
+                  <a16:creationId xmlns="" xmlns:a16="http://schemas.microsoft.com/office/drawing/2014/main" id="{370A9636-2147-18A8-A452-5C474F2755F9}"/>
                 </a:ext>
               </a:extLst>
             </p:cNvPr>
@@ -30608,7 +31109,7 @@
             <p:cNvPr id="86" name="Arc 85">
               <a:extLst>
                 <a:ext uri="{FF2B5EF4-FFF2-40B4-BE49-F238E27FC236}">
-                  <a16:creationId xmlns:a16="http://schemas.microsoft.com/office/drawing/2014/main" xmlns="" id="{CF37D023-EFBC-7B83-E01F-14E578B5E41F}"/>
+                  <a16:creationId xmlns="" xmlns:a16="http://schemas.microsoft.com/office/drawing/2014/main" id="{CF37D023-EFBC-7B83-E01F-14E578B5E41F}"/>
                 </a:ext>
               </a:extLst>
             </p:cNvPr>
@@ -30661,7 +31162,7 @@
           <p:cNvPr id="87" name="Group 86">
             <a:extLst>
               <a:ext uri="{FF2B5EF4-FFF2-40B4-BE49-F238E27FC236}">
-                <a16:creationId xmlns:a16="http://schemas.microsoft.com/office/drawing/2014/main" xmlns="" id="{18D76EDD-67EC-1706-7541-E0B361B9EE01}"/>
+                <a16:creationId xmlns="" xmlns:a16="http://schemas.microsoft.com/office/drawing/2014/main" id="{18D76EDD-67EC-1706-7541-E0B361B9EE01}"/>
               </a:ext>
             </a:extLst>
           </p:cNvPr>
@@ -30681,7 +31182,7 @@
             <p:cNvPr id="88" name="Oval 87">
               <a:extLst>
                 <a:ext uri="{FF2B5EF4-FFF2-40B4-BE49-F238E27FC236}">
-                  <a16:creationId xmlns:a16="http://schemas.microsoft.com/office/drawing/2014/main" xmlns="" id="{EBF7F9D4-4385-3396-B1F8-92B45C3EE234}"/>
+                  <a16:creationId xmlns="" xmlns:a16="http://schemas.microsoft.com/office/drawing/2014/main" id="{EBF7F9D4-4385-3396-B1F8-92B45C3EE234}"/>
                 </a:ext>
               </a:extLst>
             </p:cNvPr>
@@ -30740,7 +31241,7 @@
             <p:cNvPr id="89" name="Arc 88">
               <a:extLst>
                 <a:ext uri="{FF2B5EF4-FFF2-40B4-BE49-F238E27FC236}">
-                  <a16:creationId xmlns:a16="http://schemas.microsoft.com/office/drawing/2014/main" xmlns="" id="{344DEE6C-BE03-A502-C8EB-06880E1AFF7F}"/>
+                  <a16:creationId xmlns="" xmlns:a16="http://schemas.microsoft.com/office/drawing/2014/main" id="{344DEE6C-BE03-A502-C8EB-06880E1AFF7F}"/>
                 </a:ext>
               </a:extLst>
             </p:cNvPr>
@@ -30793,7 +31294,7 @@
           <p:cNvPr id="90" name="Group 89">
             <a:extLst>
               <a:ext uri="{FF2B5EF4-FFF2-40B4-BE49-F238E27FC236}">
-                <a16:creationId xmlns:a16="http://schemas.microsoft.com/office/drawing/2014/main" xmlns="" id="{805A620C-3AE2-255F-D0AD-7BCE318B0261}"/>
+                <a16:creationId xmlns="" xmlns:a16="http://schemas.microsoft.com/office/drawing/2014/main" id="{805A620C-3AE2-255F-D0AD-7BCE318B0261}"/>
               </a:ext>
             </a:extLst>
           </p:cNvPr>
@@ -30813,7 +31314,7 @@
             <p:cNvPr id="91" name="Oval 90">
               <a:extLst>
                 <a:ext uri="{FF2B5EF4-FFF2-40B4-BE49-F238E27FC236}">
-                  <a16:creationId xmlns:a16="http://schemas.microsoft.com/office/drawing/2014/main" xmlns="" id="{C8C812B5-07D8-854F-C972-D8CEBC6A35B4}"/>
+                  <a16:creationId xmlns="" xmlns:a16="http://schemas.microsoft.com/office/drawing/2014/main" id="{C8C812B5-07D8-854F-C972-D8CEBC6A35B4}"/>
                 </a:ext>
               </a:extLst>
             </p:cNvPr>
@@ -30872,7 +31373,7 @@
             <p:cNvPr id="92" name="Arc 91">
               <a:extLst>
                 <a:ext uri="{FF2B5EF4-FFF2-40B4-BE49-F238E27FC236}">
-                  <a16:creationId xmlns:a16="http://schemas.microsoft.com/office/drawing/2014/main" xmlns="" id="{79FA0149-4CB8-9929-0B85-1B9620713172}"/>
+                  <a16:creationId xmlns="" xmlns:a16="http://schemas.microsoft.com/office/drawing/2014/main" id="{79FA0149-4CB8-9929-0B85-1B9620713172}"/>
                 </a:ext>
               </a:extLst>
             </p:cNvPr>
@@ -30925,7 +31426,7 @@
           <p:cNvPr id="93" name="Group 92">
             <a:extLst>
               <a:ext uri="{FF2B5EF4-FFF2-40B4-BE49-F238E27FC236}">
-                <a16:creationId xmlns:a16="http://schemas.microsoft.com/office/drawing/2014/main" xmlns="" id="{D34F9994-C5E0-AE09-44C0-C5B87FCCE5CA}"/>
+                <a16:creationId xmlns="" xmlns:a16="http://schemas.microsoft.com/office/drawing/2014/main" id="{D34F9994-C5E0-AE09-44C0-C5B87FCCE5CA}"/>
               </a:ext>
             </a:extLst>
           </p:cNvPr>
@@ -30945,7 +31446,7 @@
             <p:cNvPr id="94" name="Oval 93">
               <a:extLst>
                 <a:ext uri="{FF2B5EF4-FFF2-40B4-BE49-F238E27FC236}">
-                  <a16:creationId xmlns:a16="http://schemas.microsoft.com/office/drawing/2014/main" xmlns="" id="{2AC773AF-0EEA-4375-E025-35F8FC5364E9}"/>
+                  <a16:creationId xmlns="" xmlns:a16="http://schemas.microsoft.com/office/drawing/2014/main" id="{2AC773AF-0EEA-4375-E025-35F8FC5364E9}"/>
                 </a:ext>
               </a:extLst>
             </p:cNvPr>
@@ -31004,7 +31505,7 @@
             <p:cNvPr id="95" name="Arc 94">
               <a:extLst>
                 <a:ext uri="{FF2B5EF4-FFF2-40B4-BE49-F238E27FC236}">
-                  <a16:creationId xmlns:a16="http://schemas.microsoft.com/office/drawing/2014/main" xmlns="" id="{90DDEFBB-F1E4-9858-B6D5-3FDB2B182EF9}"/>
+                  <a16:creationId xmlns="" xmlns:a16="http://schemas.microsoft.com/office/drawing/2014/main" id="{90DDEFBB-F1E4-9858-B6D5-3FDB2B182EF9}"/>
                 </a:ext>
               </a:extLst>
             </p:cNvPr>
@@ -31057,7 +31558,7 @@
           <p:cNvPr id="96" name="Group 95">
             <a:extLst>
               <a:ext uri="{FF2B5EF4-FFF2-40B4-BE49-F238E27FC236}">
-                <a16:creationId xmlns:a16="http://schemas.microsoft.com/office/drawing/2014/main" xmlns="" id="{A7DFD59F-9ACF-DA37-BC73-AADA05F8CD55}"/>
+                <a16:creationId xmlns="" xmlns:a16="http://schemas.microsoft.com/office/drawing/2014/main" id="{A7DFD59F-9ACF-DA37-BC73-AADA05F8CD55}"/>
               </a:ext>
             </a:extLst>
           </p:cNvPr>
@@ -31077,7 +31578,7 @@
             <p:cNvPr id="97" name="Oval 96">
               <a:extLst>
                 <a:ext uri="{FF2B5EF4-FFF2-40B4-BE49-F238E27FC236}">
-                  <a16:creationId xmlns:a16="http://schemas.microsoft.com/office/drawing/2014/main" xmlns="" id="{34E0A8AD-4A63-9662-8252-B6566776A0DB}"/>
+                  <a16:creationId xmlns="" xmlns:a16="http://schemas.microsoft.com/office/drawing/2014/main" id="{34E0A8AD-4A63-9662-8252-B6566776A0DB}"/>
                 </a:ext>
               </a:extLst>
             </p:cNvPr>
@@ -31136,7 +31637,7 @@
             <p:cNvPr id="98" name="Arc 97">
               <a:extLst>
                 <a:ext uri="{FF2B5EF4-FFF2-40B4-BE49-F238E27FC236}">
-                  <a16:creationId xmlns:a16="http://schemas.microsoft.com/office/drawing/2014/main" xmlns="" id="{A5AF0D9F-7BD7-E7BD-EF60-38F8DB6A7173}"/>
+                  <a16:creationId xmlns="" xmlns:a16="http://schemas.microsoft.com/office/drawing/2014/main" id="{A5AF0D9F-7BD7-E7BD-EF60-38F8DB6A7173}"/>
                 </a:ext>
               </a:extLst>
             </p:cNvPr>
@@ -31189,7 +31690,7 @@
           <p:cNvPr id="99" name="Group 98">
             <a:extLst>
               <a:ext uri="{FF2B5EF4-FFF2-40B4-BE49-F238E27FC236}">
-                <a16:creationId xmlns:a16="http://schemas.microsoft.com/office/drawing/2014/main" xmlns="" id="{B86504F5-14F5-005B-98B8-877CBD2DBAEC}"/>
+                <a16:creationId xmlns="" xmlns:a16="http://schemas.microsoft.com/office/drawing/2014/main" id="{B86504F5-14F5-005B-98B8-877CBD2DBAEC}"/>
               </a:ext>
             </a:extLst>
           </p:cNvPr>
@@ -31209,7 +31710,7 @@
             <p:cNvPr id="100" name="Oval 99">
               <a:extLst>
                 <a:ext uri="{FF2B5EF4-FFF2-40B4-BE49-F238E27FC236}">
-                  <a16:creationId xmlns:a16="http://schemas.microsoft.com/office/drawing/2014/main" xmlns="" id="{77BEE814-D0CC-0B71-56A8-38FC233ADBBC}"/>
+                  <a16:creationId xmlns="" xmlns:a16="http://schemas.microsoft.com/office/drawing/2014/main" id="{77BEE814-D0CC-0B71-56A8-38FC233ADBBC}"/>
                 </a:ext>
               </a:extLst>
             </p:cNvPr>
@@ -31268,7 +31769,7 @@
             <p:cNvPr id="101" name="Arc 100">
               <a:extLst>
                 <a:ext uri="{FF2B5EF4-FFF2-40B4-BE49-F238E27FC236}">
-                  <a16:creationId xmlns:a16="http://schemas.microsoft.com/office/drawing/2014/main" xmlns="" id="{E12B4309-6ECF-2A90-BE18-92E7B6D9F45C}"/>
+                  <a16:creationId xmlns="" xmlns:a16="http://schemas.microsoft.com/office/drawing/2014/main" id="{E12B4309-6ECF-2A90-BE18-92E7B6D9F45C}"/>
                 </a:ext>
               </a:extLst>
             </p:cNvPr>
@@ -31321,7 +31822,7 @@
           <p:cNvPr id="102" name="Group 101">
             <a:extLst>
               <a:ext uri="{FF2B5EF4-FFF2-40B4-BE49-F238E27FC236}">
-                <a16:creationId xmlns:a16="http://schemas.microsoft.com/office/drawing/2014/main" xmlns="" id="{B34C10F9-48AB-376A-971B-5E609292667E}"/>
+                <a16:creationId xmlns="" xmlns:a16="http://schemas.microsoft.com/office/drawing/2014/main" id="{B34C10F9-48AB-376A-971B-5E609292667E}"/>
               </a:ext>
             </a:extLst>
           </p:cNvPr>
@@ -31341,7 +31842,7 @@
             <p:cNvPr id="103" name="Oval 102">
               <a:extLst>
                 <a:ext uri="{FF2B5EF4-FFF2-40B4-BE49-F238E27FC236}">
-                  <a16:creationId xmlns:a16="http://schemas.microsoft.com/office/drawing/2014/main" xmlns="" id="{B13C8D1E-9E03-3B03-EB62-C5D86340BF1D}"/>
+                  <a16:creationId xmlns="" xmlns:a16="http://schemas.microsoft.com/office/drawing/2014/main" id="{B13C8D1E-9E03-3B03-EB62-C5D86340BF1D}"/>
                 </a:ext>
               </a:extLst>
             </p:cNvPr>
@@ -31400,7 +31901,7 @@
             <p:cNvPr id="104" name="Arc 103">
               <a:extLst>
                 <a:ext uri="{FF2B5EF4-FFF2-40B4-BE49-F238E27FC236}">
-                  <a16:creationId xmlns:a16="http://schemas.microsoft.com/office/drawing/2014/main" xmlns="" id="{FACF3DF3-03AF-3180-E1E4-55391011F79F}"/>
+                  <a16:creationId xmlns="" xmlns:a16="http://schemas.microsoft.com/office/drawing/2014/main" id="{FACF3DF3-03AF-3180-E1E4-55391011F79F}"/>
                 </a:ext>
               </a:extLst>
             </p:cNvPr>
@@ -31453,7 +31954,7 @@
           <p:cNvPr id="105" name="Group 104">
             <a:extLst>
               <a:ext uri="{FF2B5EF4-FFF2-40B4-BE49-F238E27FC236}">
-                <a16:creationId xmlns:a16="http://schemas.microsoft.com/office/drawing/2014/main" xmlns="" id="{ADC277D0-0547-3E1F-7B17-763C14F2C569}"/>
+                <a16:creationId xmlns="" xmlns:a16="http://schemas.microsoft.com/office/drawing/2014/main" id="{ADC277D0-0547-3E1F-7B17-763C14F2C569}"/>
               </a:ext>
             </a:extLst>
           </p:cNvPr>
@@ -31473,7 +31974,7 @@
             <p:cNvPr id="106" name="Oval 105">
               <a:extLst>
                 <a:ext uri="{FF2B5EF4-FFF2-40B4-BE49-F238E27FC236}">
-                  <a16:creationId xmlns:a16="http://schemas.microsoft.com/office/drawing/2014/main" xmlns="" id="{444E641A-F426-E972-E682-0AD4058F2F5F}"/>
+                  <a16:creationId xmlns="" xmlns:a16="http://schemas.microsoft.com/office/drawing/2014/main" id="{444E641A-F426-E972-E682-0AD4058F2F5F}"/>
                 </a:ext>
               </a:extLst>
             </p:cNvPr>
@@ -31532,7 +32033,7 @@
             <p:cNvPr id="107" name="Arc 106">
               <a:extLst>
                 <a:ext uri="{FF2B5EF4-FFF2-40B4-BE49-F238E27FC236}">
-                  <a16:creationId xmlns:a16="http://schemas.microsoft.com/office/drawing/2014/main" xmlns="" id="{000E6A81-D707-E36C-5DAD-68F6D1F68CE3}"/>
+                  <a16:creationId xmlns="" xmlns:a16="http://schemas.microsoft.com/office/drawing/2014/main" id="{000E6A81-D707-E36C-5DAD-68F6D1F68CE3}"/>
                 </a:ext>
               </a:extLst>
             </p:cNvPr>
@@ -31585,7 +32086,7 @@
           <p:cNvPr id="108" name="Group 107">
             <a:extLst>
               <a:ext uri="{FF2B5EF4-FFF2-40B4-BE49-F238E27FC236}">
-                <a16:creationId xmlns:a16="http://schemas.microsoft.com/office/drawing/2014/main" xmlns="" id="{31EA107D-77C3-196B-39BD-015BCFD6D3C2}"/>
+                <a16:creationId xmlns="" xmlns:a16="http://schemas.microsoft.com/office/drawing/2014/main" id="{31EA107D-77C3-196B-39BD-015BCFD6D3C2}"/>
               </a:ext>
             </a:extLst>
           </p:cNvPr>
@@ -31605,7 +32106,7 @@
             <p:cNvPr id="109" name="Oval 108">
               <a:extLst>
                 <a:ext uri="{FF2B5EF4-FFF2-40B4-BE49-F238E27FC236}">
-                  <a16:creationId xmlns:a16="http://schemas.microsoft.com/office/drawing/2014/main" xmlns="" id="{61FDFC2B-B300-35FB-0617-5D1C7ADF6641}"/>
+                  <a16:creationId xmlns="" xmlns:a16="http://schemas.microsoft.com/office/drawing/2014/main" id="{61FDFC2B-B300-35FB-0617-5D1C7ADF6641}"/>
                 </a:ext>
               </a:extLst>
             </p:cNvPr>
@@ -31664,7 +32165,7 @@
             <p:cNvPr id="110" name="Arc 109">
               <a:extLst>
                 <a:ext uri="{FF2B5EF4-FFF2-40B4-BE49-F238E27FC236}">
-                  <a16:creationId xmlns:a16="http://schemas.microsoft.com/office/drawing/2014/main" xmlns="" id="{CF6B487C-012F-56E5-E8E3-8B137298EDFA}"/>
+                  <a16:creationId xmlns="" xmlns:a16="http://schemas.microsoft.com/office/drawing/2014/main" id="{CF6B487C-012F-56E5-E8E3-8B137298EDFA}"/>
                 </a:ext>
               </a:extLst>
             </p:cNvPr>
@@ -31717,7 +32218,7 @@
           <p:cNvPr id="111" name="Group 110">
             <a:extLst>
               <a:ext uri="{FF2B5EF4-FFF2-40B4-BE49-F238E27FC236}">
-                <a16:creationId xmlns:a16="http://schemas.microsoft.com/office/drawing/2014/main" xmlns="" id="{6232043B-C4C4-BA0A-CF1A-4DBBB75AAC73}"/>
+                <a16:creationId xmlns="" xmlns:a16="http://schemas.microsoft.com/office/drawing/2014/main" id="{6232043B-C4C4-BA0A-CF1A-4DBBB75AAC73}"/>
               </a:ext>
             </a:extLst>
           </p:cNvPr>
@@ -31737,7 +32238,7 @@
             <p:cNvPr id="112" name="Oval 111">
               <a:extLst>
                 <a:ext uri="{FF2B5EF4-FFF2-40B4-BE49-F238E27FC236}">
-                  <a16:creationId xmlns:a16="http://schemas.microsoft.com/office/drawing/2014/main" xmlns="" id="{10FFE23E-6CCE-0432-75E0-E824C7863261}"/>
+                  <a16:creationId xmlns="" xmlns:a16="http://schemas.microsoft.com/office/drawing/2014/main" id="{10FFE23E-6CCE-0432-75E0-E824C7863261}"/>
                 </a:ext>
               </a:extLst>
             </p:cNvPr>
@@ -31796,7 +32297,7 @@
             <p:cNvPr id="113" name="Arc 112">
               <a:extLst>
                 <a:ext uri="{FF2B5EF4-FFF2-40B4-BE49-F238E27FC236}">
-                  <a16:creationId xmlns:a16="http://schemas.microsoft.com/office/drawing/2014/main" xmlns="" id="{98676D6A-3424-61E8-2CCE-756447D5F9C2}"/>
+                  <a16:creationId xmlns="" xmlns:a16="http://schemas.microsoft.com/office/drawing/2014/main" id="{98676D6A-3424-61E8-2CCE-756447D5F9C2}"/>
                 </a:ext>
               </a:extLst>
             </p:cNvPr>
@@ -31849,7 +32350,7 @@
           <p:cNvPr id="114" name="Group 113">
             <a:extLst>
               <a:ext uri="{FF2B5EF4-FFF2-40B4-BE49-F238E27FC236}">
-                <a16:creationId xmlns:a16="http://schemas.microsoft.com/office/drawing/2014/main" xmlns="" id="{88B3BE82-3395-0E01-8219-A5E3310F3959}"/>
+                <a16:creationId xmlns="" xmlns:a16="http://schemas.microsoft.com/office/drawing/2014/main" id="{88B3BE82-3395-0E01-8219-A5E3310F3959}"/>
               </a:ext>
             </a:extLst>
           </p:cNvPr>
@@ -31869,7 +32370,7 @@
             <p:cNvPr id="115" name="Oval 114">
               <a:extLst>
                 <a:ext uri="{FF2B5EF4-FFF2-40B4-BE49-F238E27FC236}">
-                  <a16:creationId xmlns:a16="http://schemas.microsoft.com/office/drawing/2014/main" xmlns="" id="{F83317C8-5B5D-DDF7-15F4-EA2AFB9BC950}"/>
+                  <a16:creationId xmlns="" xmlns:a16="http://schemas.microsoft.com/office/drawing/2014/main" id="{F83317C8-5B5D-DDF7-15F4-EA2AFB9BC950}"/>
                 </a:ext>
               </a:extLst>
             </p:cNvPr>
@@ -31928,7 +32429,7 @@
             <p:cNvPr id="116" name="Arc 115">
               <a:extLst>
                 <a:ext uri="{FF2B5EF4-FFF2-40B4-BE49-F238E27FC236}">
-                  <a16:creationId xmlns:a16="http://schemas.microsoft.com/office/drawing/2014/main" xmlns="" id="{E746B903-C206-EA9A-5FAE-24360FA19AD9}"/>
+                  <a16:creationId xmlns="" xmlns:a16="http://schemas.microsoft.com/office/drawing/2014/main" id="{E746B903-C206-EA9A-5FAE-24360FA19AD9}"/>
                 </a:ext>
               </a:extLst>
             </p:cNvPr>
@@ -31981,7 +32482,7 @@
           <p:cNvPr id="117" name="Group 116">
             <a:extLst>
               <a:ext uri="{FF2B5EF4-FFF2-40B4-BE49-F238E27FC236}">
-                <a16:creationId xmlns:a16="http://schemas.microsoft.com/office/drawing/2014/main" xmlns="" id="{2F2A7235-4D60-4C1C-AC1C-8026C6BB4059}"/>
+                <a16:creationId xmlns="" xmlns:a16="http://schemas.microsoft.com/office/drawing/2014/main" id="{2F2A7235-4D60-4C1C-AC1C-8026C6BB4059}"/>
               </a:ext>
             </a:extLst>
           </p:cNvPr>
@@ -32001,7 +32502,7 @@
             <p:cNvPr id="118" name="Oval 117">
               <a:extLst>
                 <a:ext uri="{FF2B5EF4-FFF2-40B4-BE49-F238E27FC236}">
-                  <a16:creationId xmlns:a16="http://schemas.microsoft.com/office/drawing/2014/main" xmlns="" id="{0F886985-AC53-0516-F85D-DDC1946AD17E}"/>
+                  <a16:creationId xmlns="" xmlns:a16="http://schemas.microsoft.com/office/drawing/2014/main" id="{0F886985-AC53-0516-F85D-DDC1946AD17E}"/>
                 </a:ext>
               </a:extLst>
             </p:cNvPr>
@@ -32060,7 +32561,7 @@
             <p:cNvPr id="119" name="Arc 118">
               <a:extLst>
                 <a:ext uri="{FF2B5EF4-FFF2-40B4-BE49-F238E27FC236}">
-                  <a16:creationId xmlns:a16="http://schemas.microsoft.com/office/drawing/2014/main" xmlns="" id="{AE4C9755-2A3A-5A32-D276-52C0A9B4F8D6}"/>
+                  <a16:creationId xmlns="" xmlns:a16="http://schemas.microsoft.com/office/drawing/2014/main" id="{AE4C9755-2A3A-5A32-D276-52C0A9B4F8D6}"/>
                 </a:ext>
               </a:extLst>
             </p:cNvPr>
@@ -32113,7 +32614,7 @@
           <p:cNvPr id="120" name="Group 119">
             <a:extLst>
               <a:ext uri="{FF2B5EF4-FFF2-40B4-BE49-F238E27FC236}">
-                <a16:creationId xmlns:a16="http://schemas.microsoft.com/office/drawing/2014/main" xmlns="" id="{7877DB57-685B-C785-7692-7E30EB8C61F3}"/>
+                <a16:creationId xmlns="" xmlns:a16="http://schemas.microsoft.com/office/drawing/2014/main" id="{7877DB57-685B-C785-7692-7E30EB8C61F3}"/>
               </a:ext>
             </a:extLst>
           </p:cNvPr>
@@ -32133,7 +32634,7 @@
             <p:cNvPr id="121" name="Oval 120">
               <a:extLst>
                 <a:ext uri="{FF2B5EF4-FFF2-40B4-BE49-F238E27FC236}">
-                  <a16:creationId xmlns:a16="http://schemas.microsoft.com/office/drawing/2014/main" xmlns="" id="{22F39CC0-1318-0DB9-44C8-44ED898DF450}"/>
+                  <a16:creationId xmlns="" xmlns:a16="http://schemas.microsoft.com/office/drawing/2014/main" id="{22F39CC0-1318-0DB9-44C8-44ED898DF450}"/>
                 </a:ext>
               </a:extLst>
             </p:cNvPr>
@@ -32192,7 +32693,7 @@
             <p:cNvPr id="122" name="Arc 121">
               <a:extLst>
                 <a:ext uri="{FF2B5EF4-FFF2-40B4-BE49-F238E27FC236}">
-                  <a16:creationId xmlns:a16="http://schemas.microsoft.com/office/drawing/2014/main" xmlns="" id="{E74E2D2F-36CC-9C47-07C8-1F7BA70CE9FF}"/>
+                  <a16:creationId xmlns="" xmlns:a16="http://schemas.microsoft.com/office/drawing/2014/main" id="{E74E2D2F-36CC-9C47-07C8-1F7BA70CE9FF}"/>
                 </a:ext>
               </a:extLst>
             </p:cNvPr>
@@ -32245,7 +32746,7 @@
           <p:cNvPr id="123" name="Rectangle 122">
             <a:extLst>
               <a:ext uri="{FF2B5EF4-FFF2-40B4-BE49-F238E27FC236}">
-                <a16:creationId xmlns:a16="http://schemas.microsoft.com/office/drawing/2014/main" xmlns="" id="{044E7409-6BE4-82BF-6739-FB981D21C254}"/>
+                <a16:creationId xmlns="" xmlns:a16="http://schemas.microsoft.com/office/drawing/2014/main" id="{044E7409-6BE4-82BF-6739-FB981D21C254}"/>
               </a:ext>
             </a:extLst>
           </p:cNvPr>
@@ -32420,7 +32921,7 @@
         <p:cNvPr id="1" name="">
           <a:extLst>
             <a:ext uri="{FF2B5EF4-FFF2-40B4-BE49-F238E27FC236}">
-              <a16:creationId xmlns:a16="http://schemas.microsoft.com/office/drawing/2014/main" xmlns="" id="{51C4FD09-55E3-2B1B-897E-1F9BF2720A5C}"/>
+              <a16:creationId xmlns="" xmlns:a16="http://schemas.microsoft.com/office/drawing/2014/main" id="{51C4FD09-55E3-2B1B-897E-1F9BF2720A5C}"/>
             </a:ext>
           </a:extLst>
         </p:cNvPr>
@@ -32440,7 +32941,7 @@
           <p:cNvPr id="5" name="Rectangle 4">
             <a:extLst>
               <a:ext uri="{FF2B5EF4-FFF2-40B4-BE49-F238E27FC236}">
-                <a16:creationId xmlns:a16="http://schemas.microsoft.com/office/drawing/2014/main" xmlns="" id="{B034BA31-4C57-9BDA-04C5-8FC13B21BF04}"/>
+                <a16:creationId xmlns="" xmlns:a16="http://schemas.microsoft.com/office/drawing/2014/main" id="{B034BA31-4C57-9BDA-04C5-8FC13B21BF04}"/>
               </a:ext>
             </a:extLst>
           </p:cNvPr>
@@ -32496,7 +32997,7 @@
           <p:cNvPr id="4" name="Rectangle 3">
             <a:extLst>
               <a:ext uri="{FF2B5EF4-FFF2-40B4-BE49-F238E27FC236}">
-                <a16:creationId xmlns:a16="http://schemas.microsoft.com/office/drawing/2014/main" xmlns="" id="{726F619E-C2F5-A764-7A5A-E740D3764F94}"/>
+                <a16:creationId xmlns="" xmlns:a16="http://schemas.microsoft.com/office/drawing/2014/main" id="{726F619E-C2F5-A764-7A5A-E740D3764F94}"/>
               </a:ext>
             </a:extLst>
           </p:cNvPr>
@@ -32727,7 +33228,7 @@
           <p:cNvPr id="6" name="Oval 5">
             <a:extLst>
               <a:ext uri="{FF2B5EF4-FFF2-40B4-BE49-F238E27FC236}">
-                <a16:creationId xmlns:a16="http://schemas.microsoft.com/office/drawing/2014/main" xmlns="" id="{63652264-4E8B-48A9-C360-C02C3660C32D}"/>
+                <a16:creationId xmlns="" xmlns:a16="http://schemas.microsoft.com/office/drawing/2014/main" id="{63652264-4E8B-48A9-C360-C02C3660C32D}"/>
               </a:ext>
             </a:extLst>
           </p:cNvPr>
@@ -32786,7 +33287,7 @@
           <p:cNvPr id="7" name="Oval 6">
             <a:extLst>
               <a:ext uri="{FF2B5EF4-FFF2-40B4-BE49-F238E27FC236}">
-                <a16:creationId xmlns:a16="http://schemas.microsoft.com/office/drawing/2014/main" xmlns="" id="{94A79690-2C7C-FEC2-2B4B-F5D0C6E2B06B}"/>
+                <a16:creationId xmlns="" xmlns:a16="http://schemas.microsoft.com/office/drawing/2014/main" id="{94A79690-2C7C-FEC2-2B4B-F5D0C6E2B06B}"/>
               </a:ext>
             </a:extLst>
           </p:cNvPr>
@@ -32845,7 +33346,7 @@
           <p:cNvPr id="8" name="Oval 7">
             <a:extLst>
               <a:ext uri="{FF2B5EF4-FFF2-40B4-BE49-F238E27FC236}">
-                <a16:creationId xmlns:a16="http://schemas.microsoft.com/office/drawing/2014/main" xmlns="" id="{F183C3CB-BD1C-4789-0643-1F50E0C687BE}"/>
+                <a16:creationId xmlns="" xmlns:a16="http://schemas.microsoft.com/office/drawing/2014/main" id="{F183C3CB-BD1C-4789-0643-1F50E0C687BE}"/>
               </a:ext>
             </a:extLst>
           </p:cNvPr>
@@ -32904,7 +33405,7 @@
           <p:cNvPr id="9" name="Oval 8">
             <a:extLst>
               <a:ext uri="{FF2B5EF4-FFF2-40B4-BE49-F238E27FC236}">
-                <a16:creationId xmlns:a16="http://schemas.microsoft.com/office/drawing/2014/main" xmlns="" id="{852695AE-B9E1-CA35-383A-5061DECC336D}"/>
+                <a16:creationId xmlns="" xmlns:a16="http://schemas.microsoft.com/office/drawing/2014/main" id="{852695AE-B9E1-CA35-383A-5061DECC336D}"/>
               </a:ext>
             </a:extLst>
           </p:cNvPr>
@@ -32963,7 +33464,7 @@
           <p:cNvPr id="10" name="Oval 9">
             <a:extLst>
               <a:ext uri="{FF2B5EF4-FFF2-40B4-BE49-F238E27FC236}">
-                <a16:creationId xmlns:a16="http://schemas.microsoft.com/office/drawing/2014/main" xmlns="" id="{AC8B7149-0844-B850-391A-8060B3392CC6}"/>
+                <a16:creationId xmlns="" xmlns:a16="http://schemas.microsoft.com/office/drawing/2014/main" id="{AC8B7149-0844-B850-391A-8060B3392CC6}"/>
               </a:ext>
             </a:extLst>
           </p:cNvPr>
@@ -33022,7 +33523,7 @@
           <p:cNvPr id="11" name="Oval 10">
             <a:extLst>
               <a:ext uri="{FF2B5EF4-FFF2-40B4-BE49-F238E27FC236}">
-                <a16:creationId xmlns:a16="http://schemas.microsoft.com/office/drawing/2014/main" xmlns="" id="{0D333270-CC5E-7DF6-1A02-659ABE822FF5}"/>
+                <a16:creationId xmlns="" xmlns:a16="http://schemas.microsoft.com/office/drawing/2014/main" id="{0D333270-CC5E-7DF6-1A02-659ABE822FF5}"/>
               </a:ext>
             </a:extLst>
           </p:cNvPr>
@@ -33081,7 +33582,7 @@
           <p:cNvPr id="12" name="Oval 11">
             <a:extLst>
               <a:ext uri="{FF2B5EF4-FFF2-40B4-BE49-F238E27FC236}">
-                <a16:creationId xmlns:a16="http://schemas.microsoft.com/office/drawing/2014/main" xmlns="" id="{79654E69-BC73-6E52-DC33-651392E0526D}"/>
+                <a16:creationId xmlns="" xmlns:a16="http://schemas.microsoft.com/office/drawing/2014/main" id="{79654E69-BC73-6E52-DC33-651392E0526D}"/>
               </a:ext>
             </a:extLst>
           </p:cNvPr>
@@ -33140,7 +33641,7 @@
           <p:cNvPr id="13" name="Oval 12">
             <a:extLst>
               <a:ext uri="{FF2B5EF4-FFF2-40B4-BE49-F238E27FC236}">
-                <a16:creationId xmlns:a16="http://schemas.microsoft.com/office/drawing/2014/main" xmlns="" id="{E4CFDB43-57A3-3026-29E9-D60F416B0F09}"/>
+                <a16:creationId xmlns="" xmlns:a16="http://schemas.microsoft.com/office/drawing/2014/main" id="{E4CFDB43-57A3-3026-29E9-D60F416B0F09}"/>
               </a:ext>
             </a:extLst>
           </p:cNvPr>
@@ -33199,7 +33700,7 @@
           <p:cNvPr id="14" name="Oval 13">
             <a:extLst>
               <a:ext uri="{FF2B5EF4-FFF2-40B4-BE49-F238E27FC236}">
-                <a16:creationId xmlns:a16="http://schemas.microsoft.com/office/drawing/2014/main" xmlns="" id="{F309C4C6-BB4D-8939-A2FC-02DC29CFCC6D}"/>
+                <a16:creationId xmlns="" xmlns:a16="http://schemas.microsoft.com/office/drawing/2014/main" id="{F309C4C6-BB4D-8939-A2FC-02DC29CFCC6D}"/>
               </a:ext>
             </a:extLst>
           </p:cNvPr>
@@ -33258,7 +33759,7 @@
           <p:cNvPr id="15" name="Oval 14">
             <a:extLst>
               <a:ext uri="{FF2B5EF4-FFF2-40B4-BE49-F238E27FC236}">
-                <a16:creationId xmlns:a16="http://schemas.microsoft.com/office/drawing/2014/main" xmlns="" id="{042F644C-7941-9F1F-CD17-58A102B9F051}"/>
+                <a16:creationId xmlns="" xmlns:a16="http://schemas.microsoft.com/office/drawing/2014/main" id="{042F644C-7941-9F1F-CD17-58A102B9F051}"/>
               </a:ext>
             </a:extLst>
           </p:cNvPr>
@@ -33317,7 +33818,7 @@
           <p:cNvPr id="16" name="Oval 15">
             <a:extLst>
               <a:ext uri="{FF2B5EF4-FFF2-40B4-BE49-F238E27FC236}">
-                <a16:creationId xmlns:a16="http://schemas.microsoft.com/office/drawing/2014/main" xmlns="" id="{9FE90EDA-798E-4116-2E6D-F9F24F96F337}"/>
+                <a16:creationId xmlns="" xmlns:a16="http://schemas.microsoft.com/office/drawing/2014/main" id="{9FE90EDA-798E-4116-2E6D-F9F24F96F337}"/>
               </a:ext>
             </a:extLst>
           </p:cNvPr>
@@ -33376,7 +33877,7 @@
           <p:cNvPr id="17" name="Oval 16">
             <a:extLst>
               <a:ext uri="{FF2B5EF4-FFF2-40B4-BE49-F238E27FC236}">
-                <a16:creationId xmlns:a16="http://schemas.microsoft.com/office/drawing/2014/main" xmlns="" id="{01176BBF-01DD-C6ED-B967-EB1DB7DB2F69}"/>
+                <a16:creationId xmlns="" xmlns:a16="http://schemas.microsoft.com/office/drawing/2014/main" id="{01176BBF-01DD-C6ED-B967-EB1DB7DB2F69}"/>
               </a:ext>
             </a:extLst>
           </p:cNvPr>
@@ -33435,7 +33936,7 @@
           <p:cNvPr id="18" name="Oval 17">
             <a:extLst>
               <a:ext uri="{FF2B5EF4-FFF2-40B4-BE49-F238E27FC236}">
-                <a16:creationId xmlns:a16="http://schemas.microsoft.com/office/drawing/2014/main" xmlns="" id="{9F9C5F9C-2EEA-6014-F551-FCFA8EE56021}"/>
+                <a16:creationId xmlns="" xmlns:a16="http://schemas.microsoft.com/office/drawing/2014/main" id="{9F9C5F9C-2EEA-6014-F551-FCFA8EE56021}"/>
               </a:ext>
             </a:extLst>
           </p:cNvPr>
@@ -33494,7 +33995,7 @@
           <p:cNvPr id="19" name="Oval 18">
             <a:extLst>
               <a:ext uri="{FF2B5EF4-FFF2-40B4-BE49-F238E27FC236}">
-                <a16:creationId xmlns:a16="http://schemas.microsoft.com/office/drawing/2014/main" xmlns="" id="{3C7AD85C-644E-0A9B-6CFE-2B4A8C85E76B}"/>
+                <a16:creationId xmlns="" xmlns:a16="http://schemas.microsoft.com/office/drawing/2014/main" id="{3C7AD85C-644E-0A9B-6CFE-2B4A8C85E76B}"/>
               </a:ext>
             </a:extLst>
           </p:cNvPr>
@@ -33553,7 +34054,7 @@
           <p:cNvPr id="20" name="Oval 19">
             <a:extLst>
               <a:ext uri="{FF2B5EF4-FFF2-40B4-BE49-F238E27FC236}">
-                <a16:creationId xmlns:a16="http://schemas.microsoft.com/office/drawing/2014/main" xmlns="" id="{0380C106-105A-1A96-0199-94FE8B539591}"/>
+                <a16:creationId xmlns="" xmlns:a16="http://schemas.microsoft.com/office/drawing/2014/main" id="{0380C106-105A-1A96-0199-94FE8B539591}"/>
               </a:ext>
             </a:extLst>
           </p:cNvPr>
@@ -33612,7 +34113,7 @@
           <p:cNvPr id="21" name="Oval 20">
             <a:extLst>
               <a:ext uri="{FF2B5EF4-FFF2-40B4-BE49-F238E27FC236}">
-                <a16:creationId xmlns:a16="http://schemas.microsoft.com/office/drawing/2014/main" xmlns="" id="{89A7FBE2-CFD6-1AB1-A77D-4A327850C6BD}"/>
+                <a16:creationId xmlns="" xmlns:a16="http://schemas.microsoft.com/office/drawing/2014/main" id="{89A7FBE2-CFD6-1AB1-A77D-4A327850C6BD}"/>
               </a:ext>
             </a:extLst>
           </p:cNvPr>
@@ -33671,7 +34172,7 @@
           <p:cNvPr id="22" name="Oval 21">
             <a:extLst>
               <a:ext uri="{FF2B5EF4-FFF2-40B4-BE49-F238E27FC236}">
-                <a16:creationId xmlns:a16="http://schemas.microsoft.com/office/drawing/2014/main" xmlns="" id="{3121677A-1631-1324-1E55-D68B3900D565}"/>
+                <a16:creationId xmlns="" xmlns:a16="http://schemas.microsoft.com/office/drawing/2014/main" id="{3121677A-1631-1324-1E55-D68B3900D565}"/>
               </a:ext>
             </a:extLst>
           </p:cNvPr>
@@ -33730,7 +34231,7 @@
           <p:cNvPr id="23" name="Oval 22">
             <a:extLst>
               <a:ext uri="{FF2B5EF4-FFF2-40B4-BE49-F238E27FC236}">
-                <a16:creationId xmlns:a16="http://schemas.microsoft.com/office/drawing/2014/main" xmlns="" id="{64D42A8C-6C17-5515-7C30-72FA44A1C982}"/>
+                <a16:creationId xmlns="" xmlns:a16="http://schemas.microsoft.com/office/drawing/2014/main" id="{64D42A8C-6C17-5515-7C30-72FA44A1C982}"/>
               </a:ext>
             </a:extLst>
           </p:cNvPr>
@@ -33789,7 +34290,7 @@
           <p:cNvPr id="24" name="Oval 23">
             <a:extLst>
               <a:ext uri="{FF2B5EF4-FFF2-40B4-BE49-F238E27FC236}">
-                <a16:creationId xmlns:a16="http://schemas.microsoft.com/office/drawing/2014/main" xmlns="" id="{7475C0C7-3651-5314-3F48-173B78AB0BFB}"/>
+                <a16:creationId xmlns="" xmlns:a16="http://schemas.microsoft.com/office/drawing/2014/main" id="{7475C0C7-3651-5314-3F48-173B78AB0BFB}"/>
               </a:ext>
             </a:extLst>
           </p:cNvPr>
@@ -33848,7 +34349,7 @@
           <p:cNvPr id="25" name="Oval 24">
             <a:extLst>
               <a:ext uri="{FF2B5EF4-FFF2-40B4-BE49-F238E27FC236}">
-                <a16:creationId xmlns:a16="http://schemas.microsoft.com/office/drawing/2014/main" xmlns="" id="{9EC0B432-CB23-DBAF-B917-7ABB9CFA1904}"/>
+                <a16:creationId xmlns="" xmlns:a16="http://schemas.microsoft.com/office/drawing/2014/main" id="{9EC0B432-CB23-DBAF-B917-7ABB9CFA1904}"/>
               </a:ext>
             </a:extLst>
           </p:cNvPr>
@@ -33907,7 +34408,7 @@
           <p:cNvPr id="26" name="Oval 25">
             <a:extLst>
               <a:ext uri="{FF2B5EF4-FFF2-40B4-BE49-F238E27FC236}">
-                <a16:creationId xmlns:a16="http://schemas.microsoft.com/office/drawing/2014/main" xmlns="" id="{CD6371DF-A7E5-1434-5000-FF50454FDD3B}"/>
+                <a16:creationId xmlns="" xmlns:a16="http://schemas.microsoft.com/office/drawing/2014/main" id="{CD6371DF-A7E5-1434-5000-FF50454FDD3B}"/>
               </a:ext>
             </a:extLst>
           </p:cNvPr>
@@ -33966,7 +34467,7 @@
           <p:cNvPr id="27" name="Oval 26">
             <a:extLst>
               <a:ext uri="{FF2B5EF4-FFF2-40B4-BE49-F238E27FC236}">
-                <a16:creationId xmlns:a16="http://schemas.microsoft.com/office/drawing/2014/main" xmlns="" id="{1F08106B-D501-EC7F-FD6E-9F53DD6567B9}"/>
+                <a16:creationId xmlns="" xmlns:a16="http://schemas.microsoft.com/office/drawing/2014/main" id="{1F08106B-D501-EC7F-FD6E-9F53DD6567B9}"/>
               </a:ext>
             </a:extLst>
           </p:cNvPr>
@@ -34025,7 +34526,7 @@
           <p:cNvPr id="28" name="Oval 27">
             <a:extLst>
               <a:ext uri="{FF2B5EF4-FFF2-40B4-BE49-F238E27FC236}">
-                <a16:creationId xmlns:a16="http://schemas.microsoft.com/office/drawing/2014/main" xmlns="" id="{58CD1136-8D51-C029-89F6-934EB793CA76}"/>
+                <a16:creationId xmlns="" xmlns:a16="http://schemas.microsoft.com/office/drawing/2014/main" id="{58CD1136-8D51-C029-89F6-934EB793CA76}"/>
               </a:ext>
             </a:extLst>
           </p:cNvPr>
@@ -34084,7 +34585,7 @@
           <p:cNvPr id="29" name="Oval 28">
             <a:extLst>
               <a:ext uri="{FF2B5EF4-FFF2-40B4-BE49-F238E27FC236}">
-                <a16:creationId xmlns:a16="http://schemas.microsoft.com/office/drawing/2014/main" xmlns="" id="{50E918C1-C147-CDF9-9A0B-C41B1B1BDC16}"/>
+                <a16:creationId xmlns="" xmlns:a16="http://schemas.microsoft.com/office/drawing/2014/main" id="{50E918C1-C147-CDF9-9A0B-C41B1B1BDC16}"/>
               </a:ext>
             </a:extLst>
           </p:cNvPr>
@@ -34143,7 +34644,7 @@
           <p:cNvPr id="3" name="Group 2">
             <a:extLst>
               <a:ext uri="{FF2B5EF4-FFF2-40B4-BE49-F238E27FC236}">
-                <a16:creationId xmlns:a16="http://schemas.microsoft.com/office/drawing/2014/main" xmlns="" id="{928405A0-4A61-8733-B126-4D81DAAC8909}"/>
+                <a16:creationId xmlns="" xmlns:a16="http://schemas.microsoft.com/office/drawing/2014/main" id="{928405A0-4A61-8733-B126-4D81DAAC8909}"/>
               </a:ext>
             </a:extLst>
           </p:cNvPr>
@@ -34163,7 +34664,7 @@
             <p:cNvPr id="2" name="Oval 1">
               <a:extLst>
                 <a:ext uri="{FF2B5EF4-FFF2-40B4-BE49-F238E27FC236}">
-                  <a16:creationId xmlns:a16="http://schemas.microsoft.com/office/drawing/2014/main" xmlns="" id="{13AFC585-BA57-5F31-158D-6005C04FEA8F}"/>
+                  <a16:creationId xmlns="" xmlns:a16="http://schemas.microsoft.com/office/drawing/2014/main" id="{13AFC585-BA57-5F31-158D-6005C04FEA8F}"/>
                 </a:ext>
               </a:extLst>
             </p:cNvPr>
@@ -34222,7 +34723,7 @@
             <p:cNvPr id="30" name="Arc 29">
               <a:extLst>
                 <a:ext uri="{FF2B5EF4-FFF2-40B4-BE49-F238E27FC236}">
-                  <a16:creationId xmlns:a16="http://schemas.microsoft.com/office/drawing/2014/main" xmlns="" id="{6ABDBE3E-C36D-8AB3-7845-745EE50517F1}"/>
+                  <a16:creationId xmlns="" xmlns:a16="http://schemas.microsoft.com/office/drawing/2014/main" id="{6ABDBE3E-C36D-8AB3-7845-745EE50517F1}"/>
                 </a:ext>
               </a:extLst>
             </p:cNvPr>
@@ -34275,7 +34776,7 @@
           <p:cNvPr id="54" name="Group 53">
             <a:extLst>
               <a:ext uri="{FF2B5EF4-FFF2-40B4-BE49-F238E27FC236}">
-                <a16:creationId xmlns:a16="http://schemas.microsoft.com/office/drawing/2014/main" xmlns="" id="{BE4556B3-F34C-FF2C-77C6-6D471C09D64C}"/>
+                <a16:creationId xmlns="" xmlns:a16="http://schemas.microsoft.com/office/drawing/2014/main" id="{BE4556B3-F34C-FF2C-77C6-6D471C09D64C}"/>
               </a:ext>
             </a:extLst>
           </p:cNvPr>
@@ -34295,7 +34796,7 @@
             <p:cNvPr id="55" name="Oval 54">
               <a:extLst>
                 <a:ext uri="{FF2B5EF4-FFF2-40B4-BE49-F238E27FC236}">
-                  <a16:creationId xmlns:a16="http://schemas.microsoft.com/office/drawing/2014/main" xmlns="" id="{328F7FC3-44ED-BDFD-31EC-54198BE5A58F}"/>
+                  <a16:creationId xmlns="" xmlns:a16="http://schemas.microsoft.com/office/drawing/2014/main" id="{328F7FC3-44ED-BDFD-31EC-54198BE5A58F}"/>
                 </a:ext>
               </a:extLst>
             </p:cNvPr>
@@ -34354,7 +34855,7 @@
             <p:cNvPr id="56" name="Arc 55">
               <a:extLst>
                 <a:ext uri="{FF2B5EF4-FFF2-40B4-BE49-F238E27FC236}">
-                  <a16:creationId xmlns:a16="http://schemas.microsoft.com/office/drawing/2014/main" xmlns="" id="{691957E7-B542-3D6C-AA1A-4C3661572B27}"/>
+                  <a16:creationId xmlns="" xmlns:a16="http://schemas.microsoft.com/office/drawing/2014/main" id="{691957E7-B542-3D6C-AA1A-4C3661572B27}"/>
                 </a:ext>
               </a:extLst>
             </p:cNvPr>
@@ -34407,7 +34908,7 @@
           <p:cNvPr id="57" name="Group 56">
             <a:extLst>
               <a:ext uri="{FF2B5EF4-FFF2-40B4-BE49-F238E27FC236}">
-                <a16:creationId xmlns:a16="http://schemas.microsoft.com/office/drawing/2014/main" xmlns="" id="{34942098-76A7-B3A3-5DB3-D8162AD3F68D}"/>
+                <a16:creationId xmlns="" xmlns:a16="http://schemas.microsoft.com/office/drawing/2014/main" id="{34942098-76A7-B3A3-5DB3-D8162AD3F68D}"/>
               </a:ext>
             </a:extLst>
           </p:cNvPr>
@@ -34427,7 +34928,7 @@
             <p:cNvPr id="58" name="Oval 57">
               <a:extLst>
                 <a:ext uri="{FF2B5EF4-FFF2-40B4-BE49-F238E27FC236}">
-                  <a16:creationId xmlns:a16="http://schemas.microsoft.com/office/drawing/2014/main" xmlns="" id="{ADA0F6B4-0FE9-8946-CD31-44C147BDFAA2}"/>
+                  <a16:creationId xmlns="" xmlns:a16="http://schemas.microsoft.com/office/drawing/2014/main" id="{ADA0F6B4-0FE9-8946-CD31-44C147BDFAA2}"/>
                 </a:ext>
               </a:extLst>
             </p:cNvPr>
@@ -34486,7 +34987,7 @@
             <p:cNvPr id="59" name="Arc 58">
               <a:extLst>
                 <a:ext uri="{FF2B5EF4-FFF2-40B4-BE49-F238E27FC236}">
-                  <a16:creationId xmlns:a16="http://schemas.microsoft.com/office/drawing/2014/main" xmlns="" id="{E209963C-964F-F2C3-6448-EDCC319111CF}"/>
+                  <a16:creationId xmlns="" xmlns:a16="http://schemas.microsoft.com/office/drawing/2014/main" id="{E209963C-964F-F2C3-6448-EDCC319111CF}"/>
                 </a:ext>
               </a:extLst>
             </p:cNvPr>
@@ -34539,7 +35040,7 @@
           <p:cNvPr id="60" name="Group 59">
             <a:extLst>
               <a:ext uri="{FF2B5EF4-FFF2-40B4-BE49-F238E27FC236}">
-                <a16:creationId xmlns:a16="http://schemas.microsoft.com/office/drawing/2014/main" xmlns="" id="{92FBB5C7-CE3A-82A2-B96C-D00957855705}"/>
+                <a16:creationId xmlns="" xmlns:a16="http://schemas.microsoft.com/office/drawing/2014/main" id="{92FBB5C7-CE3A-82A2-B96C-D00957855705}"/>
               </a:ext>
             </a:extLst>
           </p:cNvPr>
@@ -34559,7 +35060,7 @@
             <p:cNvPr id="61" name="Oval 60">
               <a:extLst>
                 <a:ext uri="{FF2B5EF4-FFF2-40B4-BE49-F238E27FC236}">
-                  <a16:creationId xmlns:a16="http://schemas.microsoft.com/office/drawing/2014/main" xmlns="" id="{C2090BBD-0FD7-73D4-768D-B3EACE879018}"/>
+                  <a16:creationId xmlns="" xmlns:a16="http://schemas.microsoft.com/office/drawing/2014/main" id="{C2090BBD-0FD7-73D4-768D-B3EACE879018}"/>
                 </a:ext>
               </a:extLst>
             </p:cNvPr>
@@ -34618,7 +35119,7 @@
             <p:cNvPr id="62" name="Arc 61">
               <a:extLst>
                 <a:ext uri="{FF2B5EF4-FFF2-40B4-BE49-F238E27FC236}">
-                  <a16:creationId xmlns:a16="http://schemas.microsoft.com/office/drawing/2014/main" xmlns="" id="{49BBA01A-FD23-189D-7879-A24960489055}"/>
+                  <a16:creationId xmlns="" xmlns:a16="http://schemas.microsoft.com/office/drawing/2014/main" id="{49BBA01A-FD23-189D-7879-A24960489055}"/>
                 </a:ext>
               </a:extLst>
             </p:cNvPr>
@@ -34671,7 +35172,7 @@
           <p:cNvPr id="63" name="Group 62">
             <a:extLst>
               <a:ext uri="{FF2B5EF4-FFF2-40B4-BE49-F238E27FC236}">
-                <a16:creationId xmlns:a16="http://schemas.microsoft.com/office/drawing/2014/main" xmlns="" id="{F1BBA567-B812-1158-B0D9-8585557A065F}"/>
+                <a16:creationId xmlns="" xmlns:a16="http://schemas.microsoft.com/office/drawing/2014/main" id="{F1BBA567-B812-1158-B0D9-8585557A065F}"/>
               </a:ext>
             </a:extLst>
           </p:cNvPr>
@@ -34691,7 +35192,7 @@
             <p:cNvPr id="64" name="Oval 63">
               <a:extLst>
                 <a:ext uri="{FF2B5EF4-FFF2-40B4-BE49-F238E27FC236}">
-                  <a16:creationId xmlns:a16="http://schemas.microsoft.com/office/drawing/2014/main" xmlns="" id="{69954438-FCF4-7EDB-B481-3A5CD3540B92}"/>
+                  <a16:creationId xmlns="" xmlns:a16="http://schemas.microsoft.com/office/drawing/2014/main" id="{69954438-FCF4-7EDB-B481-3A5CD3540B92}"/>
                 </a:ext>
               </a:extLst>
             </p:cNvPr>
@@ -34750,7 +35251,7 @@
             <p:cNvPr id="65" name="Arc 64">
               <a:extLst>
                 <a:ext uri="{FF2B5EF4-FFF2-40B4-BE49-F238E27FC236}">
-                  <a16:creationId xmlns:a16="http://schemas.microsoft.com/office/drawing/2014/main" xmlns="" id="{0539A26F-8931-1226-DADD-F1FA6E3A46CA}"/>
+                  <a16:creationId xmlns="" xmlns:a16="http://schemas.microsoft.com/office/drawing/2014/main" id="{0539A26F-8931-1226-DADD-F1FA6E3A46CA}"/>
                 </a:ext>
               </a:extLst>
             </p:cNvPr>
@@ -34803,7 +35304,7 @@
           <p:cNvPr id="66" name="Group 65">
             <a:extLst>
               <a:ext uri="{FF2B5EF4-FFF2-40B4-BE49-F238E27FC236}">
-                <a16:creationId xmlns:a16="http://schemas.microsoft.com/office/drawing/2014/main" xmlns="" id="{C5CA0963-798D-1A46-720B-8E62281FCB2B}"/>
+                <a16:creationId xmlns="" xmlns:a16="http://schemas.microsoft.com/office/drawing/2014/main" id="{C5CA0963-798D-1A46-720B-8E62281FCB2B}"/>
               </a:ext>
             </a:extLst>
           </p:cNvPr>
@@ -34823,7 +35324,7 @@
             <p:cNvPr id="67" name="Oval 66">
               <a:extLst>
                 <a:ext uri="{FF2B5EF4-FFF2-40B4-BE49-F238E27FC236}">
-                  <a16:creationId xmlns:a16="http://schemas.microsoft.com/office/drawing/2014/main" xmlns="" id="{238F6E5E-CA7D-90C5-F3DE-CEA092075098}"/>
+                  <a16:creationId xmlns="" xmlns:a16="http://schemas.microsoft.com/office/drawing/2014/main" id="{238F6E5E-CA7D-90C5-F3DE-CEA092075098}"/>
                 </a:ext>
               </a:extLst>
             </p:cNvPr>
@@ -34882,7 +35383,7 @@
             <p:cNvPr id="68" name="Arc 67">
               <a:extLst>
                 <a:ext uri="{FF2B5EF4-FFF2-40B4-BE49-F238E27FC236}">
-                  <a16:creationId xmlns:a16="http://schemas.microsoft.com/office/drawing/2014/main" xmlns="" id="{4EDC6FAD-D9B6-F4CE-7409-08C269011CC8}"/>
+                  <a16:creationId xmlns="" xmlns:a16="http://schemas.microsoft.com/office/drawing/2014/main" id="{4EDC6FAD-D9B6-F4CE-7409-08C269011CC8}"/>
                 </a:ext>
               </a:extLst>
             </p:cNvPr>
@@ -34935,7 +35436,7 @@
           <p:cNvPr id="69" name="Group 68">
             <a:extLst>
               <a:ext uri="{FF2B5EF4-FFF2-40B4-BE49-F238E27FC236}">
-                <a16:creationId xmlns:a16="http://schemas.microsoft.com/office/drawing/2014/main" xmlns="" id="{97D732E3-F499-0C3F-BE88-8A3C727562BA}"/>
+                <a16:creationId xmlns="" xmlns:a16="http://schemas.microsoft.com/office/drawing/2014/main" id="{97D732E3-F499-0C3F-BE88-8A3C727562BA}"/>
               </a:ext>
             </a:extLst>
           </p:cNvPr>
@@ -34955,7 +35456,7 @@
             <p:cNvPr id="70" name="Oval 69">
               <a:extLst>
                 <a:ext uri="{FF2B5EF4-FFF2-40B4-BE49-F238E27FC236}">
-                  <a16:creationId xmlns:a16="http://schemas.microsoft.com/office/drawing/2014/main" xmlns="" id="{1BB77D40-207D-28FD-CBB8-13B1251FBCE3}"/>
+                  <a16:creationId xmlns="" xmlns:a16="http://schemas.microsoft.com/office/drawing/2014/main" id="{1BB77D40-207D-28FD-CBB8-13B1251FBCE3}"/>
                 </a:ext>
               </a:extLst>
             </p:cNvPr>
@@ -35014,7 +35515,7 @@
             <p:cNvPr id="71" name="Arc 70">
               <a:extLst>
                 <a:ext uri="{FF2B5EF4-FFF2-40B4-BE49-F238E27FC236}">
-                  <a16:creationId xmlns:a16="http://schemas.microsoft.com/office/drawing/2014/main" xmlns="" id="{98CED01A-8366-93D8-2562-CDF27F4E5646}"/>
+                  <a16:creationId xmlns="" xmlns:a16="http://schemas.microsoft.com/office/drawing/2014/main" id="{98CED01A-8366-93D8-2562-CDF27F4E5646}"/>
                 </a:ext>
               </a:extLst>
             </p:cNvPr>
@@ -35067,7 +35568,7 @@
           <p:cNvPr id="72" name="Group 71">
             <a:extLst>
               <a:ext uri="{FF2B5EF4-FFF2-40B4-BE49-F238E27FC236}">
-                <a16:creationId xmlns:a16="http://schemas.microsoft.com/office/drawing/2014/main" xmlns="" id="{8ACD396F-9CBB-E28A-C3C7-9FFF82E7D986}"/>
+                <a16:creationId xmlns="" xmlns:a16="http://schemas.microsoft.com/office/drawing/2014/main" id="{8ACD396F-9CBB-E28A-C3C7-9FFF82E7D986}"/>
               </a:ext>
             </a:extLst>
           </p:cNvPr>
@@ -35087,7 +35588,7 @@
             <p:cNvPr id="73" name="Oval 72">
               <a:extLst>
                 <a:ext uri="{FF2B5EF4-FFF2-40B4-BE49-F238E27FC236}">
-                  <a16:creationId xmlns:a16="http://schemas.microsoft.com/office/drawing/2014/main" xmlns="" id="{79F5ABF2-6AF6-5851-71FF-385EC3216731}"/>
+                  <a16:creationId xmlns="" xmlns:a16="http://schemas.microsoft.com/office/drawing/2014/main" id="{79F5ABF2-6AF6-5851-71FF-385EC3216731}"/>
                 </a:ext>
               </a:extLst>
             </p:cNvPr>
@@ -35146,7 +35647,7 @@
             <p:cNvPr id="74" name="Arc 73">
               <a:extLst>
                 <a:ext uri="{FF2B5EF4-FFF2-40B4-BE49-F238E27FC236}">
-                  <a16:creationId xmlns:a16="http://schemas.microsoft.com/office/drawing/2014/main" xmlns="" id="{59B2770C-AEBD-5B7B-0CAD-D69C9BFB0200}"/>
+                  <a16:creationId xmlns="" xmlns:a16="http://schemas.microsoft.com/office/drawing/2014/main" id="{59B2770C-AEBD-5B7B-0CAD-D69C9BFB0200}"/>
                 </a:ext>
               </a:extLst>
             </p:cNvPr>
@@ -35199,7 +35700,7 @@
           <p:cNvPr id="75" name="Group 74">
             <a:extLst>
               <a:ext uri="{FF2B5EF4-FFF2-40B4-BE49-F238E27FC236}">
-                <a16:creationId xmlns:a16="http://schemas.microsoft.com/office/drawing/2014/main" xmlns="" id="{8E67EC40-2CEA-15BB-679E-82A155506382}"/>
+                <a16:creationId xmlns="" xmlns:a16="http://schemas.microsoft.com/office/drawing/2014/main" id="{8E67EC40-2CEA-15BB-679E-82A155506382}"/>
               </a:ext>
             </a:extLst>
           </p:cNvPr>
@@ -35219,7 +35720,7 @@
             <p:cNvPr id="76" name="Oval 75">
               <a:extLst>
                 <a:ext uri="{FF2B5EF4-FFF2-40B4-BE49-F238E27FC236}">
-                  <a16:creationId xmlns:a16="http://schemas.microsoft.com/office/drawing/2014/main" xmlns="" id="{BEE67072-39B0-0D8C-3764-DF739D4EF898}"/>
+                  <a16:creationId xmlns="" xmlns:a16="http://schemas.microsoft.com/office/drawing/2014/main" id="{BEE67072-39B0-0D8C-3764-DF739D4EF898}"/>
                 </a:ext>
               </a:extLst>
             </p:cNvPr>
@@ -35278,7 +35779,7 @@
             <p:cNvPr id="77" name="Arc 76">
               <a:extLst>
                 <a:ext uri="{FF2B5EF4-FFF2-40B4-BE49-F238E27FC236}">
-                  <a16:creationId xmlns:a16="http://schemas.microsoft.com/office/drawing/2014/main" xmlns="" id="{1036E0E8-91A2-459D-62BA-7E55B36EA4A3}"/>
+                  <a16:creationId xmlns="" xmlns:a16="http://schemas.microsoft.com/office/drawing/2014/main" id="{1036E0E8-91A2-459D-62BA-7E55B36EA4A3}"/>
                 </a:ext>
               </a:extLst>
             </p:cNvPr>
@@ -35331,7 +35832,7 @@
           <p:cNvPr id="78" name="Group 77">
             <a:extLst>
               <a:ext uri="{FF2B5EF4-FFF2-40B4-BE49-F238E27FC236}">
-                <a16:creationId xmlns:a16="http://schemas.microsoft.com/office/drawing/2014/main" xmlns="" id="{E7A8FC93-89F4-B3FF-B2A0-EB92EE14302F}"/>
+                <a16:creationId xmlns="" xmlns:a16="http://schemas.microsoft.com/office/drawing/2014/main" id="{E7A8FC93-89F4-B3FF-B2A0-EB92EE14302F}"/>
               </a:ext>
             </a:extLst>
           </p:cNvPr>
@@ -35351,7 +35852,7 @@
             <p:cNvPr id="79" name="Oval 78">
               <a:extLst>
                 <a:ext uri="{FF2B5EF4-FFF2-40B4-BE49-F238E27FC236}">
-                  <a16:creationId xmlns:a16="http://schemas.microsoft.com/office/drawing/2014/main" xmlns="" id="{0B288602-214C-9797-F12B-433D63A94C97}"/>
+                  <a16:creationId xmlns="" xmlns:a16="http://schemas.microsoft.com/office/drawing/2014/main" id="{0B288602-214C-9797-F12B-433D63A94C97}"/>
                 </a:ext>
               </a:extLst>
             </p:cNvPr>
@@ -35410,7 +35911,7 @@
             <p:cNvPr id="80" name="Arc 79">
               <a:extLst>
                 <a:ext uri="{FF2B5EF4-FFF2-40B4-BE49-F238E27FC236}">
-                  <a16:creationId xmlns:a16="http://schemas.microsoft.com/office/drawing/2014/main" xmlns="" id="{B2237529-DFC9-A1B7-9CFA-D339940826FC}"/>
+                  <a16:creationId xmlns="" xmlns:a16="http://schemas.microsoft.com/office/drawing/2014/main" id="{B2237529-DFC9-A1B7-9CFA-D339940826FC}"/>
                 </a:ext>
               </a:extLst>
             </p:cNvPr>
@@ -35463,7 +35964,7 @@
           <p:cNvPr id="81" name="Group 80">
             <a:extLst>
               <a:ext uri="{FF2B5EF4-FFF2-40B4-BE49-F238E27FC236}">
-                <a16:creationId xmlns:a16="http://schemas.microsoft.com/office/drawing/2014/main" xmlns="" id="{56E08E4B-3F15-3DA7-6141-7E97655DD396}"/>
+                <a16:creationId xmlns="" xmlns:a16="http://schemas.microsoft.com/office/drawing/2014/main" id="{56E08E4B-3F15-3DA7-6141-7E97655DD396}"/>
               </a:ext>
             </a:extLst>
           </p:cNvPr>
@@ -35483,7 +35984,7 @@
             <p:cNvPr id="82" name="Oval 81">
               <a:extLst>
                 <a:ext uri="{FF2B5EF4-FFF2-40B4-BE49-F238E27FC236}">
-                  <a16:creationId xmlns:a16="http://schemas.microsoft.com/office/drawing/2014/main" xmlns="" id="{BF631934-7110-7F5E-79A0-378CB41A08C9}"/>
+                  <a16:creationId xmlns="" xmlns:a16="http://schemas.microsoft.com/office/drawing/2014/main" id="{BF631934-7110-7F5E-79A0-378CB41A08C9}"/>
                 </a:ext>
               </a:extLst>
             </p:cNvPr>
@@ -35542,7 +36043,7 @@
             <p:cNvPr id="83" name="Arc 82">
               <a:extLst>
                 <a:ext uri="{FF2B5EF4-FFF2-40B4-BE49-F238E27FC236}">
-                  <a16:creationId xmlns:a16="http://schemas.microsoft.com/office/drawing/2014/main" xmlns="" id="{0439DB39-7B53-36D4-BDF5-71DB13657FDC}"/>
+                  <a16:creationId xmlns="" xmlns:a16="http://schemas.microsoft.com/office/drawing/2014/main" id="{0439DB39-7B53-36D4-BDF5-71DB13657FDC}"/>
                 </a:ext>
               </a:extLst>
             </p:cNvPr>
@@ -35595,7 +36096,7 @@
           <p:cNvPr id="84" name="Group 83">
             <a:extLst>
               <a:ext uri="{FF2B5EF4-FFF2-40B4-BE49-F238E27FC236}">
-                <a16:creationId xmlns:a16="http://schemas.microsoft.com/office/drawing/2014/main" xmlns="" id="{BD99BE67-16D7-6B0C-6E7E-F8B4B7BD2317}"/>
+                <a16:creationId xmlns="" xmlns:a16="http://schemas.microsoft.com/office/drawing/2014/main" id="{BD99BE67-16D7-6B0C-6E7E-F8B4B7BD2317}"/>
               </a:ext>
             </a:extLst>
           </p:cNvPr>
@@ -35615,7 +36116,7 @@
             <p:cNvPr id="85" name="Oval 84">
               <a:extLst>
                 <a:ext uri="{FF2B5EF4-FFF2-40B4-BE49-F238E27FC236}">
-                  <a16:creationId xmlns:a16="http://schemas.microsoft.com/office/drawing/2014/main" xmlns="" id="{370A9636-2147-18A8-A452-5C474F2755F9}"/>
+                  <a16:creationId xmlns="" xmlns:a16="http://schemas.microsoft.com/office/drawing/2014/main" id="{370A9636-2147-18A8-A452-5C474F2755F9}"/>
                 </a:ext>
               </a:extLst>
             </p:cNvPr>
@@ -35674,7 +36175,7 @@
             <p:cNvPr id="86" name="Arc 85">
               <a:extLst>
                 <a:ext uri="{FF2B5EF4-FFF2-40B4-BE49-F238E27FC236}">
-                  <a16:creationId xmlns:a16="http://schemas.microsoft.com/office/drawing/2014/main" xmlns="" id="{CF37D023-EFBC-7B83-E01F-14E578B5E41F}"/>
+                  <a16:creationId xmlns="" xmlns:a16="http://schemas.microsoft.com/office/drawing/2014/main" id="{CF37D023-EFBC-7B83-E01F-14E578B5E41F}"/>
                 </a:ext>
               </a:extLst>
             </p:cNvPr>
@@ -35727,7 +36228,7 @@
           <p:cNvPr id="87" name="Group 86">
             <a:extLst>
               <a:ext uri="{FF2B5EF4-FFF2-40B4-BE49-F238E27FC236}">
-                <a16:creationId xmlns:a16="http://schemas.microsoft.com/office/drawing/2014/main" xmlns="" id="{18D76EDD-67EC-1706-7541-E0B361B9EE01}"/>
+                <a16:creationId xmlns="" xmlns:a16="http://schemas.microsoft.com/office/drawing/2014/main" id="{18D76EDD-67EC-1706-7541-E0B361B9EE01}"/>
               </a:ext>
             </a:extLst>
           </p:cNvPr>
@@ -35747,7 +36248,7 @@
             <p:cNvPr id="88" name="Oval 87">
               <a:extLst>
                 <a:ext uri="{FF2B5EF4-FFF2-40B4-BE49-F238E27FC236}">
-                  <a16:creationId xmlns:a16="http://schemas.microsoft.com/office/drawing/2014/main" xmlns="" id="{EBF7F9D4-4385-3396-B1F8-92B45C3EE234}"/>
+                  <a16:creationId xmlns="" xmlns:a16="http://schemas.microsoft.com/office/drawing/2014/main" id="{EBF7F9D4-4385-3396-B1F8-92B45C3EE234}"/>
                 </a:ext>
               </a:extLst>
             </p:cNvPr>
@@ -35806,7 +36307,7 @@
             <p:cNvPr id="89" name="Arc 88">
               <a:extLst>
                 <a:ext uri="{FF2B5EF4-FFF2-40B4-BE49-F238E27FC236}">
-                  <a16:creationId xmlns:a16="http://schemas.microsoft.com/office/drawing/2014/main" xmlns="" id="{344DEE6C-BE03-A502-C8EB-06880E1AFF7F}"/>
+                  <a16:creationId xmlns="" xmlns:a16="http://schemas.microsoft.com/office/drawing/2014/main" id="{344DEE6C-BE03-A502-C8EB-06880E1AFF7F}"/>
                 </a:ext>
               </a:extLst>
             </p:cNvPr>
@@ -35859,7 +36360,7 @@
           <p:cNvPr id="90" name="Group 89">
             <a:extLst>
               <a:ext uri="{FF2B5EF4-FFF2-40B4-BE49-F238E27FC236}">
-                <a16:creationId xmlns:a16="http://schemas.microsoft.com/office/drawing/2014/main" xmlns="" id="{805A620C-3AE2-255F-D0AD-7BCE318B0261}"/>
+                <a16:creationId xmlns="" xmlns:a16="http://schemas.microsoft.com/office/drawing/2014/main" id="{805A620C-3AE2-255F-D0AD-7BCE318B0261}"/>
               </a:ext>
             </a:extLst>
           </p:cNvPr>
@@ -35879,7 +36380,7 @@
             <p:cNvPr id="91" name="Oval 90">
               <a:extLst>
                 <a:ext uri="{FF2B5EF4-FFF2-40B4-BE49-F238E27FC236}">
-                  <a16:creationId xmlns:a16="http://schemas.microsoft.com/office/drawing/2014/main" xmlns="" id="{C8C812B5-07D8-854F-C972-D8CEBC6A35B4}"/>
+                  <a16:creationId xmlns="" xmlns:a16="http://schemas.microsoft.com/office/drawing/2014/main" id="{C8C812B5-07D8-854F-C972-D8CEBC6A35B4}"/>
                 </a:ext>
               </a:extLst>
             </p:cNvPr>
@@ -35938,7 +36439,7 @@
             <p:cNvPr id="92" name="Arc 91">
               <a:extLst>
                 <a:ext uri="{FF2B5EF4-FFF2-40B4-BE49-F238E27FC236}">
-                  <a16:creationId xmlns:a16="http://schemas.microsoft.com/office/drawing/2014/main" xmlns="" id="{79FA0149-4CB8-9929-0B85-1B9620713172}"/>
+                  <a16:creationId xmlns="" xmlns:a16="http://schemas.microsoft.com/office/drawing/2014/main" id="{79FA0149-4CB8-9929-0B85-1B9620713172}"/>
                 </a:ext>
               </a:extLst>
             </p:cNvPr>
@@ -35991,7 +36492,7 @@
           <p:cNvPr id="93" name="Group 92">
             <a:extLst>
               <a:ext uri="{FF2B5EF4-FFF2-40B4-BE49-F238E27FC236}">
-                <a16:creationId xmlns:a16="http://schemas.microsoft.com/office/drawing/2014/main" xmlns="" id="{D34F9994-C5E0-AE09-44C0-C5B87FCCE5CA}"/>
+                <a16:creationId xmlns="" xmlns:a16="http://schemas.microsoft.com/office/drawing/2014/main" id="{D34F9994-C5E0-AE09-44C0-C5B87FCCE5CA}"/>
               </a:ext>
             </a:extLst>
           </p:cNvPr>
@@ -36011,7 +36512,7 @@
             <p:cNvPr id="94" name="Oval 93">
               <a:extLst>
                 <a:ext uri="{FF2B5EF4-FFF2-40B4-BE49-F238E27FC236}">
-                  <a16:creationId xmlns:a16="http://schemas.microsoft.com/office/drawing/2014/main" xmlns="" id="{2AC773AF-0EEA-4375-E025-35F8FC5364E9}"/>
+                  <a16:creationId xmlns="" xmlns:a16="http://schemas.microsoft.com/office/drawing/2014/main" id="{2AC773AF-0EEA-4375-E025-35F8FC5364E9}"/>
                 </a:ext>
               </a:extLst>
             </p:cNvPr>
@@ -36070,7 +36571,7 @@
             <p:cNvPr id="95" name="Arc 94">
               <a:extLst>
                 <a:ext uri="{FF2B5EF4-FFF2-40B4-BE49-F238E27FC236}">
-                  <a16:creationId xmlns:a16="http://schemas.microsoft.com/office/drawing/2014/main" xmlns="" id="{90DDEFBB-F1E4-9858-B6D5-3FDB2B182EF9}"/>
+                  <a16:creationId xmlns="" xmlns:a16="http://schemas.microsoft.com/office/drawing/2014/main" id="{90DDEFBB-F1E4-9858-B6D5-3FDB2B182EF9}"/>
                 </a:ext>
               </a:extLst>
             </p:cNvPr>
@@ -36123,7 +36624,7 @@
           <p:cNvPr id="96" name="Group 95">
             <a:extLst>
               <a:ext uri="{FF2B5EF4-FFF2-40B4-BE49-F238E27FC236}">
-                <a16:creationId xmlns:a16="http://schemas.microsoft.com/office/drawing/2014/main" xmlns="" id="{A7DFD59F-9ACF-DA37-BC73-AADA05F8CD55}"/>
+                <a16:creationId xmlns="" xmlns:a16="http://schemas.microsoft.com/office/drawing/2014/main" id="{A7DFD59F-9ACF-DA37-BC73-AADA05F8CD55}"/>
               </a:ext>
             </a:extLst>
           </p:cNvPr>
@@ -36143,7 +36644,7 @@
             <p:cNvPr id="97" name="Oval 96">
               <a:extLst>
                 <a:ext uri="{FF2B5EF4-FFF2-40B4-BE49-F238E27FC236}">
-                  <a16:creationId xmlns:a16="http://schemas.microsoft.com/office/drawing/2014/main" xmlns="" id="{34E0A8AD-4A63-9662-8252-B6566776A0DB}"/>
+                  <a16:creationId xmlns="" xmlns:a16="http://schemas.microsoft.com/office/drawing/2014/main" id="{34E0A8AD-4A63-9662-8252-B6566776A0DB}"/>
                 </a:ext>
               </a:extLst>
             </p:cNvPr>
@@ -36202,7 +36703,7 @@
             <p:cNvPr id="98" name="Arc 97">
               <a:extLst>
                 <a:ext uri="{FF2B5EF4-FFF2-40B4-BE49-F238E27FC236}">
-                  <a16:creationId xmlns:a16="http://schemas.microsoft.com/office/drawing/2014/main" xmlns="" id="{A5AF0D9F-7BD7-E7BD-EF60-38F8DB6A7173}"/>
+                  <a16:creationId xmlns="" xmlns:a16="http://schemas.microsoft.com/office/drawing/2014/main" id="{A5AF0D9F-7BD7-E7BD-EF60-38F8DB6A7173}"/>
                 </a:ext>
               </a:extLst>
             </p:cNvPr>
@@ -36255,7 +36756,7 @@
           <p:cNvPr id="99" name="Group 98">
             <a:extLst>
               <a:ext uri="{FF2B5EF4-FFF2-40B4-BE49-F238E27FC236}">
-                <a16:creationId xmlns:a16="http://schemas.microsoft.com/office/drawing/2014/main" xmlns="" id="{B86504F5-14F5-005B-98B8-877CBD2DBAEC}"/>
+                <a16:creationId xmlns="" xmlns:a16="http://schemas.microsoft.com/office/drawing/2014/main" id="{B86504F5-14F5-005B-98B8-877CBD2DBAEC}"/>
               </a:ext>
             </a:extLst>
           </p:cNvPr>
@@ -36275,7 +36776,7 @@
             <p:cNvPr id="100" name="Oval 99">
               <a:extLst>
                 <a:ext uri="{FF2B5EF4-FFF2-40B4-BE49-F238E27FC236}">
-                  <a16:creationId xmlns:a16="http://schemas.microsoft.com/office/drawing/2014/main" xmlns="" id="{77BEE814-D0CC-0B71-56A8-38FC233ADBBC}"/>
+                  <a16:creationId xmlns="" xmlns:a16="http://schemas.microsoft.com/office/drawing/2014/main" id="{77BEE814-D0CC-0B71-56A8-38FC233ADBBC}"/>
                 </a:ext>
               </a:extLst>
             </p:cNvPr>
@@ -36334,7 +36835,7 @@
             <p:cNvPr id="101" name="Arc 100">
               <a:extLst>
                 <a:ext uri="{FF2B5EF4-FFF2-40B4-BE49-F238E27FC236}">
-                  <a16:creationId xmlns:a16="http://schemas.microsoft.com/office/drawing/2014/main" xmlns="" id="{E12B4309-6ECF-2A90-BE18-92E7B6D9F45C}"/>
+                  <a16:creationId xmlns="" xmlns:a16="http://schemas.microsoft.com/office/drawing/2014/main" id="{E12B4309-6ECF-2A90-BE18-92E7B6D9F45C}"/>
                 </a:ext>
               </a:extLst>
             </p:cNvPr>
@@ -36387,7 +36888,7 @@
           <p:cNvPr id="102" name="Group 101">
             <a:extLst>
               <a:ext uri="{FF2B5EF4-FFF2-40B4-BE49-F238E27FC236}">
-                <a16:creationId xmlns:a16="http://schemas.microsoft.com/office/drawing/2014/main" xmlns="" id="{B34C10F9-48AB-376A-971B-5E609292667E}"/>
+                <a16:creationId xmlns="" xmlns:a16="http://schemas.microsoft.com/office/drawing/2014/main" id="{B34C10F9-48AB-376A-971B-5E609292667E}"/>
               </a:ext>
             </a:extLst>
           </p:cNvPr>
@@ -36407,7 +36908,7 @@
             <p:cNvPr id="103" name="Oval 102">
               <a:extLst>
                 <a:ext uri="{FF2B5EF4-FFF2-40B4-BE49-F238E27FC236}">
-                  <a16:creationId xmlns:a16="http://schemas.microsoft.com/office/drawing/2014/main" xmlns="" id="{B13C8D1E-9E03-3B03-EB62-C5D86340BF1D}"/>
+                  <a16:creationId xmlns="" xmlns:a16="http://schemas.microsoft.com/office/drawing/2014/main" id="{B13C8D1E-9E03-3B03-EB62-C5D86340BF1D}"/>
                 </a:ext>
               </a:extLst>
             </p:cNvPr>
@@ -36466,7 +36967,7 @@
             <p:cNvPr id="104" name="Arc 103">
               <a:extLst>
                 <a:ext uri="{FF2B5EF4-FFF2-40B4-BE49-F238E27FC236}">
-                  <a16:creationId xmlns:a16="http://schemas.microsoft.com/office/drawing/2014/main" xmlns="" id="{FACF3DF3-03AF-3180-E1E4-55391011F79F}"/>
+                  <a16:creationId xmlns="" xmlns:a16="http://schemas.microsoft.com/office/drawing/2014/main" id="{FACF3DF3-03AF-3180-E1E4-55391011F79F}"/>
                 </a:ext>
               </a:extLst>
             </p:cNvPr>
@@ -36519,7 +37020,7 @@
           <p:cNvPr id="105" name="Group 104">
             <a:extLst>
               <a:ext uri="{FF2B5EF4-FFF2-40B4-BE49-F238E27FC236}">
-                <a16:creationId xmlns:a16="http://schemas.microsoft.com/office/drawing/2014/main" xmlns="" id="{ADC277D0-0547-3E1F-7B17-763C14F2C569}"/>
+                <a16:creationId xmlns="" xmlns:a16="http://schemas.microsoft.com/office/drawing/2014/main" id="{ADC277D0-0547-3E1F-7B17-763C14F2C569}"/>
               </a:ext>
             </a:extLst>
           </p:cNvPr>
@@ -36539,7 +37040,7 @@
             <p:cNvPr id="106" name="Oval 105">
               <a:extLst>
                 <a:ext uri="{FF2B5EF4-FFF2-40B4-BE49-F238E27FC236}">
-                  <a16:creationId xmlns:a16="http://schemas.microsoft.com/office/drawing/2014/main" xmlns="" id="{444E641A-F426-E972-E682-0AD4058F2F5F}"/>
+                  <a16:creationId xmlns="" xmlns:a16="http://schemas.microsoft.com/office/drawing/2014/main" id="{444E641A-F426-E972-E682-0AD4058F2F5F}"/>
                 </a:ext>
               </a:extLst>
             </p:cNvPr>
@@ -36598,7 +37099,7 @@
             <p:cNvPr id="107" name="Arc 106">
               <a:extLst>
                 <a:ext uri="{FF2B5EF4-FFF2-40B4-BE49-F238E27FC236}">
-                  <a16:creationId xmlns:a16="http://schemas.microsoft.com/office/drawing/2014/main" xmlns="" id="{000E6A81-D707-E36C-5DAD-68F6D1F68CE3}"/>
+                  <a16:creationId xmlns="" xmlns:a16="http://schemas.microsoft.com/office/drawing/2014/main" id="{000E6A81-D707-E36C-5DAD-68F6D1F68CE3}"/>
                 </a:ext>
               </a:extLst>
             </p:cNvPr>
@@ -36651,7 +37152,7 @@
           <p:cNvPr id="108" name="Group 107">
             <a:extLst>
               <a:ext uri="{FF2B5EF4-FFF2-40B4-BE49-F238E27FC236}">
-                <a16:creationId xmlns:a16="http://schemas.microsoft.com/office/drawing/2014/main" xmlns="" id="{31EA107D-77C3-196B-39BD-015BCFD6D3C2}"/>
+                <a16:creationId xmlns="" xmlns:a16="http://schemas.microsoft.com/office/drawing/2014/main" id="{31EA107D-77C3-196B-39BD-015BCFD6D3C2}"/>
               </a:ext>
             </a:extLst>
           </p:cNvPr>
@@ -36671,7 +37172,7 @@
             <p:cNvPr id="109" name="Oval 108">
               <a:extLst>
                 <a:ext uri="{FF2B5EF4-FFF2-40B4-BE49-F238E27FC236}">
-                  <a16:creationId xmlns:a16="http://schemas.microsoft.com/office/drawing/2014/main" xmlns="" id="{61FDFC2B-B300-35FB-0617-5D1C7ADF6641}"/>
+                  <a16:creationId xmlns="" xmlns:a16="http://schemas.microsoft.com/office/drawing/2014/main" id="{61FDFC2B-B300-35FB-0617-5D1C7ADF6641}"/>
                 </a:ext>
               </a:extLst>
             </p:cNvPr>
@@ -36730,7 +37231,7 @@
             <p:cNvPr id="110" name="Arc 109">
               <a:extLst>
                 <a:ext uri="{FF2B5EF4-FFF2-40B4-BE49-F238E27FC236}">
-                  <a16:creationId xmlns:a16="http://schemas.microsoft.com/office/drawing/2014/main" xmlns="" id="{CF6B487C-012F-56E5-E8E3-8B137298EDFA}"/>
+                  <a16:creationId xmlns="" xmlns:a16="http://schemas.microsoft.com/office/drawing/2014/main" id="{CF6B487C-012F-56E5-E8E3-8B137298EDFA}"/>
                 </a:ext>
               </a:extLst>
             </p:cNvPr>
@@ -36783,7 +37284,7 @@
           <p:cNvPr id="111" name="Group 110">
             <a:extLst>
               <a:ext uri="{FF2B5EF4-FFF2-40B4-BE49-F238E27FC236}">
-                <a16:creationId xmlns:a16="http://schemas.microsoft.com/office/drawing/2014/main" xmlns="" id="{6232043B-C4C4-BA0A-CF1A-4DBBB75AAC73}"/>
+                <a16:creationId xmlns="" xmlns:a16="http://schemas.microsoft.com/office/drawing/2014/main" id="{6232043B-C4C4-BA0A-CF1A-4DBBB75AAC73}"/>
               </a:ext>
             </a:extLst>
           </p:cNvPr>
@@ -36803,7 +37304,7 @@
             <p:cNvPr id="112" name="Oval 111">
               <a:extLst>
                 <a:ext uri="{FF2B5EF4-FFF2-40B4-BE49-F238E27FC236}">
-                  <a16:creationId xmlns:a16="http://schemas.microsoft.com/office/drawing/2014/main" xmlns="" id="{10FFE23E-6CCE-0432-75E0-E824C7863261}"/>
+                  <a16:creationId xmlns="" xmlns:a16="http://schemas.microsoft.com/office/drawing/2014/main" id="{10FFE23E-6CCE-0432-75E0-E824C7863261}"/>
                 </a:ext>
               </a:extLst>
             </p:cNvPr>
@@ -36862,7 +37363,7 @@
             <p:cNvPr id="113" name="Arc 112">
               <a:extLst>
                 <a:ext uri="{FF2B5EF4-FFF2-40B4-BE49-F238E27FC236}">
-                  <a16:creationId xmlns:a16="http://schemas.microsoft.com/office/drawing/2014/main" xmlns="" id="{98676D6A-3424-61E8-2CCE-756447D5F9C2}"/>
+                  <a16:creationId xmlns="" xmlns:a16="http://schemas.microsoft.com/office/drawing/2014/main" id="{98676D6A-3424-61E8-2CCE-756447D5F9C2}"/>
                 </a:ext>
               </a:extLst>
             </p:cNvPr>
@@ -36915,7 +37416,7 @@
           <p:cNvPr id="114" name="Group 113">
             <a:extLst>
               <a:ext uri="{FF2B5EF4-FFF2-40B4-BE49-F238E27FC236}">
-                <a16:creationId xmlns:a16="http://schemas.microsoft.com/office/drawing/2014/main" xmlns="" id="{88B3BE82-3395-0E01-8219-A5E3310F3959}"/>
+                <a16:creationId xmlns="" xmlns:a16="http://schemas.microsoft.com/office/drawing/2014/main" id="{88B3BE82-3395-0E01-8219-A5E3310F3959}"/>
               </a:ext>
             </a:extLst>
           </p:cNvPr>
@@ -36935,7 +37436,7 @@
             <p:cNvPr id="115" name="Oval 114">
               <a:extLst>
                 <a:ext uri="{FF2B5EF4-FFF2-40B4-BE49-F238E27FC236}">
-                  <a16:creationId xmlns:a16="http://schemas.microsoft.com/office/drawing/2014/main" xmlns="" id="{F83317C8-5B5D-DDF7-15F4-EA2AFB9BC950}"/>
+                  <a16:creationId xmlns="" xmlns:a16="http://schemas.microsoft.com/office/drawing/2014/main" id="{F83317C8-5B5D-DDF7-15F4-EA2AFB9BC950}"/>
                 </a:ext>
               </a:extLst>
             </p:cNvPr>
@@ -36994,7 +37495,7 @@
             <p:cNvPr id="116" name="Arc 115">
               <a:extLst>
                 <a:ext uri="{FF2B5EF4-FFF2-40B4-BE49-F238E27FC236}">
-                  <a16:creationId xmlns:a16="http://schemas.microsoft.com/office/drawing/2014/main" xmlns="" id="{E746B903-C206-EA9A-5FAE-24360FA19AD9}"/>
+                  <a16:creationId xmlns="" xmlns:a16="http://schemas.microsoft.com/office/drawing/2014/main" id="{E746B903-C206-EA9A-5FAE-24360FA19AD9}"/>
                 </a:ext>
               </a:extLst>
             </p:cNvPr>
@@ -37047,7 +37548,7 @@
           <p:cNvPr id="117" name="Group 116">
             <a:extLst>
               <a:ext uri="{FF2B5EF4-FFF2-40B4-BE49-F238E27FC236}">
-                <a16:creationId xmlns:a16="http://schemas.microsoft.com/office/drawing/2014/main" xmlns="" id="{2F2A7235-4D60-4C1C-AC1C-8026C6BB4059}"/>
+                <a16:creationId xmlns="" xmlns:a16="http://schemas.microsoft.com/office/drawing/2014/main" id="{2F2A7235-4D60-4C1C-AC1C-8026C6BB4059}"/>
               </a:ext>
             </a:extLst>
           </p:cNvPr>
@@ -37067,7 +37568,7 @@
             <p:cNvPr id="118" name="Oval 117">
               <a:extLst>
                 <a:ext uri="{FF2B5EF4-FFF2-40B4-BE49-F238E27FC236}">
-                  <a16:creationId xmlns:a16="http://schemas.microsoft.com/office/drawing/2014/main" xmlns="" id="{0F886985-AC53-0516-F85D-DDC1946AD17E}"/>
+                  <a16:creationId xmlns="" xmlns:a16="http://schemas.microsoft.com/office/drawing/2014/main" id="{0F886985-AC53-0516-F85D-DDC1946AD17E}"/>
                 </a:ext>
               </a:extLst>
             </p:cNvPr>
@@ -37126,7 +37627,7 @@
             <p:cNvPr id="119" name="Arc 118">
               <a:extLst>
                 <a:ext uri="{FF2B5EF4-FFF2-40B4-BE49-F238E27FC236}">
-                  <a16:creationId xmlns:a16="http://schemas.microsoft.com/office/drawing/2014/main" xmlns="" id="{AE4C9755-2A3A-5A32-D276-52C0A9B4F8D6}"/>
+                  <a16:creationId xmlns="" xmlns:a16="http://schemas.microsoft.com/office/drawing/2014/main" id="{AE4C9755-2A3A-5A32-D276-52C0A9B4F8D6}"/>
                 </a:ext>
               </a:extLst>
             </p:cNvPr>
@@ -37179,7 +37680,7 @@
           <p:cNvPr id="120" name="Group 119">
             <a:extLst>
               <a:ext uri="{FF2B5EF4-FFF2-40B4-BE49-F238E27FC236}">
-                <a16:creationId xmlns:a16="http://schemas.microsoft.com/office/drawing/2014/main" xmlns="" id="{7877DB57-685B-C785-7692-7E30EB8C61F3}"/>
+                <a16:creationId xmlns="" xmlns:a16="http://schemas.microsoft.com/office/drawing/2014/main" id="{7877DB57-685B-C785-7692-7E30EB8C61F3}"/>
               </a:ext>
             </a:extLst>
           </p:cNvPr>
@@ -37199,7 +37700,7 @@
             <p:cNvPr id="121" name="Oval 120">
               <a:extLst>
                 <a:ext uri="{FF2B5EF4-FFF2-40B4-BE49-F238E27FC236}">
-                  <a16:creationId xmlns:a16="http://schemas.microsoft.com/office/drawing/2014/main" xmlns="" id="{22F39CC0-1318-0DB9-44C8-44ED898DF450}"/>
+                  <a16:creationId xmlns="" xmlns:a16="http://schemas.microsoft.com/office/drawing/2014/main" id="{22F39CC0-1318-0DB9-44C8-44ED898DF450}"/>
                 </a:ext>
               </a:extLst>
             </p:cNvPr>
@@ -37258,7 +37759,7 @@
             <p:cNvPr id="122" name="Arc 121">
               <a:extLst>
                 <a:ext uri="{FF2B5EF4-FFF2-40B4-BE49-F238E27FC236}">
-                  <a16:creationId xmlns:a16="http://schemas.microsoft.com/office/drawing/2014/main" xmlns="" id="{E74E2D2F-36CC-9C47-07C8-1F7BA70CE9FF}"/>
+                  <a16:creationId xmlns="" xmlns:a16="http://schemas.microsoft.com/office/drawing/2014/main" id="{E74E2D2F-36CC-9C47-07C8-1F7BA70CE9FF}"/>
                 </a:ext>
               </a:extLst>
             </p:cNvPr>
@@ -37311,7 +37812,7 @@
           <p:cNvPr id="123" name="Rectangle 122">
             <a:extLst>
               <a:ext uri="{FF2B5EF4-FFF2-40B4-BE49-F238E27FC236}">
-                <a16:creationId xmlns:a16="http://schemas.microsoft.com/office/drawing/2014/main" xmlns="" id="{044E7409-6BE4-82BF-6739-FB981D21C254}"/>
+                <a16:creationId xmlns="" xmlns:a16="http://schemas.microsoft.com/office/drawing/2014/main" id="{044E7409-6BE4-82BF-6739-FB981D21C254}"/>
               </a:ext>
             </a:extLst>
           </p:cNvPr>
@@ -37587,7 +38088,7 @@
         <p:cNvPr id="1" name="">
           <a:extLst>
             <a:ext uri="{FF2B5EF4-FFF2-40B4-BE49-F238E27FC236}">
-              <a16:creationId xmlns:a16="http://schemas.microsoft.com/office/drawing/2014/main" xmlns="" id="{290D15F8-E0C1-A9FC-561D-1134701B922D}"/>
+              <a16:creationId xmlns="" xmlns:a16="http://schemas.microsoft.com/office/drawing/2014/main" id="{290D15F8-E0C1-A9FC-561D-1134701B922D}"/>
             </a:ext>
           </a:extLst>
         </p:cNvPr>
@@ -37607,7 +38108,7 @@
           <p:cNvPr id="5" name="Rectangle 4">
             <a:extLst>
               <a:ext uri="{FF2B5EF4-FFF2-40B4-BE49-F238E27FC236}">
-                <a16:creationId xmlns:a16="http://schemas.microsoft.com/office/drawing/2014/main" xmlns="" id="{D6ED7662-31D2-B220-5B48-999751314250}"/>
+                <a16:creationId xmlns="" xmlns:a16="http://schemas.microsoft.com/office/drawing/2014/main" id="{D6ED7662-31D2-B220-5B48-999751314250}"/>
               </a:ext>
             </a:extLst>
           </p:cNvPr>
@@ -37653,7 +38154,7 @@
           <p:cNvPr id="2" name="Group 1">
             <a:extLst>
               <a:ext uri="{FF2B5EF4-FFF2-40B4-BE49-F238E27FC236}">
-                <a16:creationId xmlns:a16="http://schemas.microsoft.com/office/drawing/2014/main" xmlns="" id="{4E18E2CC-0F07-DEF3-A92C-D7E66BD60D31}"/>
+                <a16:creationId xmlns="" xmlns:a16="http://schemas.microsoft.com/office/drawing/2014/main" id="{4E18E2CC-0F07-DEF3-A92C-D7E66BD60D31}"/>
               </a:ext>
             </a:extLst>
           </p:cNvPr>
@@ -37673,7 +38174,7 @@
             <p:cNvPr id="6" name="Oval 5">
               <a:extLst>
                 <a:ext uri="{FF2B5EF4-FFF2-40B4-BE49-F238E27FC236}">
-                  <a16:creationId xmlns:a16="http://schemas.microsoft.com/office/drawing/2014/main" xmlns="" id="{A3105853-A7A0-D1B0-E804-E16F8719EB22}"/>
+                  <a16:creationId xmlns="" xmlns:a16="http://schemas.microsoft.com/office/drawing/2014/main" id="{A3105853-A7A0-D1B0-E804-E16F8719EB22}"/>
                 </a:ext>
               </a:extLst>
             </p:cNvPr>
@@ -37732,7 +38233,7 @@
             <p:cNvPr id="7" name="Oval 6">
               <a:extLst>
                 <a:ext uri="{FF2B5EF4-FFF2-40B4-BE49-F238E27FC236}">
-                  <a16:creationId xmlns:a16="http://schemas.microsoft.com/office/drawing/2014/main" xmlns="" id="{C85BCD91-BEA1-D315-1AFF-C4D462340658}"/>
+                  <a16:creationId xmlns="" xmlns:a16="http://schemas.microsoft.com/office/drawing/2014/main" id="{C85BCD91-BEA1-D315-1AFF-C4D462340658}"/>
                 </a:ext>
               </a:extLst>
             </p:cNvPr>
@@ -37791,7 +38292,7 @@
             <p:cNvPr id="8" name="Oval 7">
               <a:extLst>
                 <a:ext uri="{FF2B5EF4-FFF2-40B4-BE49-F238E27FC236}">
-                  <a16:creationId xmlns:a16="http://schemas.microsoft.com/office/drawing/2014/main" xmlns="" id="{3C78C853-57D8-361B-38D9-275171E255A7}"/>
+                  <a16:creationId xmlns="" xmlns:a16="http://schemas.microsoft.com/office/drawing/2014/main" id="{3C78C853-57D8-361B-38D9-275171E255A7}"/>
                 </a:ext>
               </a:extLst>
             </p:cNvPr>
@@ -37850,7 +38351,7 @@
             <p:cNvPr id="9" name="Oval 8">
               <a:extLst>
                 <a:ext uri="{FF2B5EF4-FFF2-40B4-BE49-F238E27FC236}">
-                  <a16:creationId xmlns:a16="http://schemas.microsoft.com/office/drawing/2014/main" xmlns="" id="{A7006BEF-5985-2947-A8DB-080FCA0DB0AE}"/>
+                  <a16:creationId xmlns="" xmlns:a16="http://schemas.microsoft.com/office/drawing/2014/main" id="{A7006BEF-5985-2947-A8DB-080FCA0DB0AE}"/>
                 </a:ext>
               </a:extLst>
             </p:cNvPr>
@@ -37909,7 +38410,7 @@
             <p:cNvPr id="10" name="Oval 9">
               <a:extLst>
                 <a:ext uri="{FF2B5EF4-FFF2-40B4-BE49-F238E27FC236}">
-                  <a16:creationId xmlns:a16="http://schemas.microsoft.com/office/drawing/2014/main" xmlns="" id="{A9D7F9AC-6700-182B-5739-F8E9C7F81CC4}"/>
+                  <a16:creationId xmlns="" xmlns:a16="http://schemas.microsoft.com/office/drawing/2014/main" id="{A9D7F9AC-6700-182B-5739-F8E9C7F81CC4}"/>
                 </a:ext>
               </a:extLst>
             </p:cNvPr>
@@ -37968,7 +38469,7 @@
             <p:cNvPr id="11" name="Oval 10">
               <a:extLst>
                 <a:ext uri="{FF2B5EF4-FFF2-40B4-BE49-F238E27FC236}">
-                  <a16:creationId xmlns:a16="http://schemas.microsoft.com/office/drawing/2014/main" xmlns="" id="{756DB894-78D6-5F8A-E04B-F5EF82585336}"/>
+                  <a16:creationId xmlns="" xmlns:a16="http://schemas.microsoft.com/office/drawing/2014/main" id="{756DB894-78D6-5F8A-E04B-F5EF82585336}"/>
                 </a:ext>
               </a:extLst>
             </p:cNvPr>
@@ -38027,7 +38528,7 @@
             <p:cNvPr id="12" name="Oval 11">
               <a:extLst>
                 <a:ext uri="{FF2B5EF4-FFF2-40B4-BE49-F238E27FC236}">
-                  <a16:creationId xmlns:a16="http://schemas.microsoft.com/office/drawing/2014/main" xmlns="" id="{7078A844-2503-2387-47F4-3ABDC822E4BE}"/>
+                  <a16:creationId xmlns="" xmlns:a16="http://schemas.microsoft.com/office/drawing/2014/main" id="{7078A844-2503-2387-47F4-3ABDC822E4BE}"/>
                 </a:ext>
               </a:extLst>
             </p:cNvPr>
@@ -38086,7 +38587,7 @@
             <p:cNvPr id="13" name="Oval 12">
               <a:extLst>
                 <a:ext uri="{FF2B5EF4-FFF2-40B4-BE49-F238E27FC236}">
-                  <a16:creationId xmlns:a16="http://schemas.microsoft.com/office/drawing/2014/main" xmlns="" id="{01BA2AF2-E499-7667-6D1F-F78683E54B67}"/>
+                  <a16:creationId xmlns="" xmlns:a16="http://schemas.microsoft.com/office/drawing/2014/main" id="{01BA2AF2-E499-7667-6D1F-F78683E54B67}"/>
                 </a:ext>
               </a:extLst>
             </p:cNvPr>
@@ -38145,7 +38646,7 @@
             <p:cNvPr id="14" name="Oval 13">
               <a:extLst>
                 <a:ext uri="{FF2B5EF4-FFF2-40B4-BE49-F238E27FC236}">
-                  <a16:creationId xmlns:a16="http://schemas.microsoft.com/office/drawing/2014/main" xmlns="" id="{2FBB071C-C6AD-063C-8885-C5D44BA0770C}"/>
+                  <a16:creationId xmlns="" xmlns:a16="http://schemas.microsoft.com/office/drawing/2014/main" id="{2FBB071C-C6AD-063C-8885-C5D44BA0770C}"/>
                 </a:ext>
               </a:extLst>
             </p:cNvPr>
@@ -38204,7 +38705,7 @@
             <p:cNvPr id="15" name="Oval 14">
               <a:extLst>
                 <a:ext uri="{FF2B5EF4-FFF2-40B4-BE49-F238E27FC236}">
-                  <a16:creationId xmlns:a16="http://schemas.microsoft.com/office/drawing/2014/main" xmlns="" id="{56BC981B-25F1-97FD-5B02-F34A079C043F}"/>
+                  <a16:creationId xmlns="" xmlns:a16="http://schemas.microsoft.com/office/drawing/2014/main" id="{56BC981B-25F1-97FD-5B02-F34A079C043F}"/>
                 </a:ext>
               </a:extLst>
             </p:cNvPr>
@@ -38263,7 +38764,7 @@
             <p:cNvPr id="16" name="Oval 15">
               <a:extLst>
                 <a:ext uri="{FF2B5EF4-FFF2-40B4-BE49-F238E27FC236}">
-                  <a16:creationId xmlns:a16="http://schemas.microsoft.com/office/drawing/2014/main" xmlns="" id="{3E6612EF-8361-2771-846F-0C7FAD70E44A}"/>
+                  <a16:creationId xmlns="" xmlns:a16="http://schemas.microsoft.com/office/drawing/2014/main" id="{3E6612EF-8361-2771-846F-0C7FAD70E44A}"/>
                 </a:ext>
               </a:extLst>
             </p:cNvPr>
@@ -38322,7 +38823,7 @@
             <p:cNvPr id="17" name="Oval 16">
               <a:extLst>
                 <a:ext uri="{FF2B5EF4-FFF2-40B4-BE49-F238E27FC236}">
-                  <a16:creationId xmlns:a16="http://schemas.microsoft.com/office/drawing/2014/main" xmlns="" id="{A9C403DC-8592-C8C7-18E9-C66B5ABFE571}"/>
+                  <a16:creationId xmlns="" xmlns:a16="http://schemas.microsoft.com/office/drawing/2014/main" id="{A9C403DC-8592-C8C7-18E9-C66B5ABFE571}"/>
                 </a:ext>
               </a:extLst>
             </p:cNvPr>
@@ -38381,7 +38882,7 @@
             <p:cNvPr id="18" name="Oval 17">
               <a:extLst>
                 <a:ext uri="{FF2B5EF4-FFF2-40B4-BE49-F238E27FC236}">
-                  <a16:creationId xmlns:a16="http://schemas.microsoft.com/office/drawing/2014/main" xmlns="" id="{D9C5ADF1-1839-8686-C4D8-5AB2D63997B1}"/>
+                  <a16:creationId xmlns="" xmlns:a16="http://schemas.microsoft.com/office/drawing/2014/main" id="{D9C5ADF1-1839-8686-C4D8-5AB2D63997B1}"/>
                 </a:ext>
               </a:extLst>
             </p:cNvPr>
@@ -38440,7 +38941,7 @@
             <p:cNvPr id="19" name="Oval 18">
               <a:extLst>
                 <a:ext uri="{FF2B5EF4-FFF2-40B4-BE49-F238E27FC236}">
-                  <a16:creationId xmlns:a16="http://schemas.microsoft.com/office/drawing/2014/main" xmlns="" id="{09801E70-EE29-216B-576A-53F7D3FC63B0}"/>
+                  <a16:creationId xmlns="" xmlns:a16="http://schemas.microsoft.com/office/drawing/2014/main" id="{09801E70-EE29-216B-576A-53F7D3FC63B0}"/>
                 </a:ext>
               </a:extLst>
             </p:cNvPr>
@@ -38499,7 +39000,7 @@
             <p:cNvPr id="20" name="Oval 19">
               <a:extLst>
                 <a:ext uri="{FF2B5EF4-FFF2-40B4-BE49-F238E27FC236}">
-                  <a16:creationId xmlns:a16="http://schemas.microsoft.com/office/drawing/2014/main" xmlns="" id="{94F6199F-FA28-EB1B-E382-874057A159DE}"/>
+                  <a16:creationId xmlns="" xmlns:a16="http://schemas.microsoft.com/office/drawing/2014/main" id="{94F6199F-FA28-EB1B-E382-874057A159DE}"/>
                 </a:ext>
               </a:extLst>
             </p:cNvPr>
@@ -38558,7 +39059,7 @@
             <p:cNvPr id="21" name="Oval 20">
               <a:extLst>
                 <a:ext uri="{FF2B5EF4-FFF2-40B4-BE49-F238E27FC236}">
-                  <a16:creationId xmlns:a16="http://schemas.microsoft.com/office/drawing/2014/main" xmlns="" id="{BAFFEE12-F7A8-D2C2-85AF-7B2739B85367}"/>
+                  <a16:creationId xmlns="" xmlns:a16="http://schemas.microsoft.com/office/drawing/2014/main" id="{BAFFEE12-F7A8-D2C2-85AF-7B2739B85367}"/>
                 </a:ext>
               </a:extLst>
             </p:cNvPr>
@@ -38617,7 +39118,7 @@
             <p:cNvPr id="22" name="Oval 21">
               <a:extLst>
                 <a:ext uri="{FF2B5EF4-FFF2-40B4-BE49-F238E27FC236}">
-                  <a16:creationId xmlns:a16="http://schemas.microsoft.com/office/drawing/2014/main" xmlns="" id="{C7E8D64B-98DA-CC30-DD2E-6787D99885FA}"/>
+                  <a16:creationId xmlns="" xmlns:a16="http://schemas.microsoft.com/office/drawing/2014/main" id="{C7E8D64B-98DA-CC30-DD2E-6787D99885FA}"/>
                 </a:ext>
               </a:extLst>
             </p:cNvPr>
@@ -38676,7 +39177,7 @@
             <p:cNvPr id="23" name="Oval 22">
               <a:extLst>
                 <a:ext uri="{FF2B5EF4-FFF2-40B4-BE49-F238E27FC236}">
-                  <a16:creationId xmlns:a16="http://schemas.microsoft.com/office/drawing/2014/main" xmlns="" id="{D34C8711-929B-29BF-23CC-6D755EFE2AFD}"/>
+                  <a16:creationId xmlns="" xmlns:a16="http://schemas.microsoft.com/office/drawing/2014/main" id="{D34C8711-929B-29BF-23CC-6D755EFE2AFD}"/>
                 </a:ext>
               </a:extLst>
             </p:cNvPr>
@@ -38735,7 +39236,7 @@
             <p:cNvPr id="24" name="Oval 23">
               <a:extLst>
                 <a:ext uri="{FF2B5EF4-FFF2-40B4-BE49-F238E27FC236}">
-                  <a16:creationId xmlns:a16="http://schemas.microsoft.com/office/drawing/2014/main" xmlns="" id="{566E8BB7-DB45-8379-D052-A1D73E4AC287}"/>
+                  <a16:creationId xmlns="" xmlns:a16="http://schemas.microsoft.com/office/drawing/2014/main" id="{566E8BB7-DB45-8379-D052-A1D73E4AC287}"/>
                 </a:ext>
               </a:extLst>
             </p:cNvPr>
@@ -38794,7 +39295,7 @@
             <p:cNvPr id="25" name="Oval 24">
               <a:extLst>
                 <a:ext uri="{FF2B5EF4-FFF2-40B4-BE49-F238E27FC236}">
-                  <a16:creationId xmlns:a16="http://schemas.microsoft.com/office/drawing/2014/main" xmlns="" id="{895F11AF-FD1D-66D6-E360-4F5BB2D5F76C}"/>
+                  <a16:creationId xmlns="" xmlns:a16="http://schemas.microsoft.com/office/drawing/2014/main" id="{895F11AF-FD1D-66D6-E360-4F5BB2D5F76C}"/>
                 </a:ext>
               </a:extLst>
             </p:cNvPr>
@@ -38853,7 +39354,7 @@
             <p:cNvPr id="26" name="Oval 25">
               <a:extLst>
                 <a:ext uri="{FF2B5EF4-FFF2-40B4-BE49-F238E27FC236}">
-                  <a16:creationId xmlns:a16="http://schemas.microsoft.com/office/drawing/2014/main" xmlns="" id="{5F26DBF0-A21B-C476-70B1-5055594023B4}"/>
+                  <a16:creationId xmlns="" xmlns:a16="http://schemas.microsoft.com/office/drawing/2014/main" id="{5F26DBF0-A21B-C476-70B1-5055594023B4}"/>
                 </a:ext>
               </a:extLst>
             </p:cNvPr>
@@ -38912,7 +39413,7 @@
             <p:cNvPr id="27" name="Oval 26">
               <a:extLst>
                 <a:ext uri="{FF2B5EF4-FFF2-40B4-BE49-F238E27FC236}">
-                  <a16:creationId xmlns:a16="http://schemas.microsoft.com/office/drawing/2014/main" xmlns="" id="{6AA146A5-4396-52D4-3701-1D4F499B7916}"/>
+                  <a16:creationId xmlns="" xmlns:a16="http://schemas.microsoft.com/office/drawing/2014/main" id="{6AA146A5-4396-52D4-3701-1D4F499B7916}"/>
                 </a:ext>
               </a:extLst>
             </p:cNvPr>
@@ -38971,7 +39472,7 @@
             <p:cNvPr id="28" name="Oval 27">
               <a:extLst>
                 <a:ext uri="{FF2B5EF4-FFF2-40B4-BE49-F238E27FC236}">
-                  <a16:creationId xmlns:a16="http://schemas.microsoft.com/office/drawing/2014/main" xmlns="" id="{55BDF6F5-CC01-4786-7FDD-D37775375C2C}"/>
+                  <a16:creationId xmlns="" xmlns:a16="http://schemas.microsoft.com/office/drawing/2014/main" id="{55BDF6F5-CC01-4786-7FDD-D37775375C2C}"/>
                 </a:ext>
               </a:extLst>
             </p:cNvPr>
@@ -39030,7 +39531,7 @@
             <p:cNvPr id="29" name="Oval 28">
               <a:extLst>
                 <a:ext uri="{FF2B5EF4-FFF2-40B4-BE49-F238E27FC236}">
-                  <a16:creationId xmlns:a16="http://schemas.microsoft.com/office/drawing/2014/main" xmlns="" id="{82342B15-C314-6A76-53A3-31168D242757}"/>
+                  <a16:creationId xmlns="" xmlns:a16="http://schemas.microsoft.com/office/drawing/2014/main" id="{82342B15-C314-6A76-53A3-31168D242757}"/>
                 </a:ext>
               </a:extLst>
             </p:cNvPr>
@@ -39089,7 +39590,7 @@
             <p:cNvPr id="30" name="Arc 29">
               <a:extLst>
                 <a:ext uri="{FF2B5EF4-FFF2-40B4-BE49-F238E27FC236}">
-                  <a16:creationId xmlns:a16="http://schemas.microsoft.com/office/drawing/2014/main" xmlns="" id="{9C568D2A-A596-CC24-496F-4A66C8262D31}"/>
+                  <a16:creationId xmlns="" xmlns:a16="http://schemas.microsoft.com/office/drawing/2014/main" id="{9C568D2A-A596-CC24-496F-4A66C8262D31}"/>
                 </a:ext>
               </a:extLst>
             </p:cNvPr>
@@ -39141,7 +39642,7 @@
             <p:cNvPr id="31" name="Arc 30">
               <a:extLst>
                 <a:ext uri="{FF2B5EF4-FFF2-40B4-BE49-F238E27FC236}">
-                  <a16:creationId xmlns:a16="http://schemas.microsoft.com/office/drawing/2014/main" xmlns="" id="{5C88D0D8-45C4-B401-23E2-EF2210F10573}"/>
+                  <a16:creationId xmlns="" xmlns:a16="http://schemas.microsoft.com/office/drawing/2014/main" id="{5C88D0D8-45C4-B401-23E2-EF2210F10573}"/>
                 </a:ext>
               </a:extLst>
             </p:cNvPr>
@@ -39193,7 +39694,7 @@
             <p:cNvPr id="32" name="Arc 31">
               <a:extLst>
                 <a:ext uri="{FF2B5EF4-FFF2-40B4-BE49-F238E27FC236}">
-                  <a16:creationId xmlns:a16="http://schemas.microsoft.com/office/drawing/2014/main" xmlns="" id="{864FC80B-C2D4-ABC3-BF5F-9E62C6D20F68}"/>
+                  <a16:creationId xmlns="" xmlns:a16="http://schemas.microsoft.com/office/drawing/2014/main" id="{864FC80B-C2D4-ABC3-BF5F-9E62C6D20F68}"/>
                 </a:ext>
               </a:extLst>
             </p:cNvPr>
@@ -39245,7 +39746,7 @@
             <p:cNvPr id="33" name="Arc 32">
               <a:extLst>
                 <a:ext uri="{FF2B5EF4-FFF2-40B4-BE49-F238E27FC236}">
-                  <a16:creationId xmlns:a16="http://schemas.microsoft.com/office/drawing/2014/main" xmlns="" id="{1914AAE3-A686-E4D4-CDDF-1D98969ACAAA}"/>
+                  <a16:creationId xmlns="" xmlns:a16="http://schemas.microsoft.com/office/drawing/2014/main" id="{1914AAE3-A686-E4D4-CDDF-1D98969ACAAA}"/>
                 </a:ext>
               </a:extLst>
             </p:cNvPr>
@@ -39297,7 +39798,7 @@
             <p:cNvPr id="34" name="Arc 33">
               <a:extLst>
                 <a:ext uri="{FF2B5EF4-FFF2-40B4-BE49-F238E27FC236}">
-                  <a16:creationId xmlns:a16="http://schemas.microsoft.com/office/drawing/2014/main" xmlns="" id="{D9DBFC40-9D17-7A92-4D81-40778C988A6C}"/>
+                  <a16:creationId xmlns="" xmlns:a16="http://schemas.microsoft.com/office/drawing/2014/main" id="{D9DBFC40-9D17-7A92-4D81-40778C988A6C}"/>
                 </a:ext>
               </a:extLst>
             </p:cNvPr>
@@ -39349,7 +39850,7 @@
             <p:cNvPr id="35" name="Arc 34">
               <a:extLst>
                 <a:ext uri="{FF2B5EF4-FFF2-40B4-BE49-F238E27FC236}">
-                  <a16:creationId xmlns:a16="http://schemas.microsoft.com/office/drawing/2014/main" xmlns="" id="{BC549333-843D-6579-C8FD-740B2BD4FB54}"/>
+                  <a16:creationId xmlns="" xmlns:a16="http://schemas.microsoft.com/office/drawing/2014/main" id="{BC549333-843D-6579-C8FD-740B2BD4FB54}"/>
                 </a:ext>
               </a:extLst>
             </p:cNvPr>
@@ -39401,7 +39902,7 @@
             <p:cNvPr id="36" name="Arc 35">
               <a:extLst>
                 <a:ext uri="{FF2B5EF4-FFF2-40B4-BE49-F238E27FC236}">
-                  <a16:creationId xmlns:a16="http://schemas.microsoft.com/office/drawing/2014/main" xmlns="" id="{71974448-2876-D9EC-1E63-37B1C8F13A84}"/>
+                  <a16:creationId xmlns="" xmlns:a16="http://schemas.microsoft.com/office/drawing/2014/main" id="{71974448-2876-D9EC-1E63-37B1C8F13A84}"/>
                 </a:ext>
               </a:extLst>
             </p:cNvPr>
@@ -39453,7 +39954,7 @@
             <p:cNvPr id="37" name="Arc 36">
               <a:extLst>
                 <a:ext uri="{FF2B5EF4-FFF2-40B4-BE49-F238E27FC236}">
-                  <a16:creationId xmlns:a16="http://schemas.microsoft.com/office/drawing/2014/main" xmlns="" id="{12C0B9A3-C41B-A65E-B90A-3DE1AE851F4B}"/>
+                  <a16:creationId xmlns="" xmlns:a16="http://schemas.microsoft.com/office/drawing/2014/main" id="{12C0B9A3-C41B-A65E-B90A-3DE1AE851F4B}"/>
                 </a:ext>
               </a:extLst>
             </p:cNvPr>
@@ -39505,7 +40006,7 @@
             <p:cNvPr id="38" name="Arc 37">
               <a:extLst>
                 <a:ext uri="{FF2B5EF4-FFF2-40B4-BE49-F238E27FC236}">
-                  <a16:creationId xmlns:a16="http://schemas.microsoft.com/office/drawing/2014/main" xmlns="" id="{F8D516B0-E272-52CC-E83D-F9D301FBD0D7}"/>
+                  <a16:creationId xmlns="" xmlns:a16="http://schemas.microsoft.com/office/drawing/2014/main" id="{F8D516B0-E272-52CC-E83D-F9D301FBD0D7}"/>
                 </a:ext>
               </a:extLst>
             </p:cNvPr>
@@ -39557,7 +40058,7 @@
             <p:cNvPr id="39" name="Arc 38">
               <a:extLst>
                 <a:ext uri="{FF2B5EF4-FFF2-40B4-BE49-F238E27FC236}">
-                  <a16:creationId xmlns:a16="http://schemas.microsoft.com/office/drawing/2014/main" xmlns="" id="{8BBA4DBE-F78F-D804-278F-611DE55A528F}"/>
+                  <a16:creationId xmlns="" xmlns:a16="http://schemas.microsoft.com/office/drawing/2014/main" id="{8BBA4DBE-F78F-D804-278F-611DE55A528F}"/>
                 </a:ext>
               </a:extLst>
             </p:cNvPr>
@@ -39609,7 +40110,7 @@
             <p:cNvPr id="40" name="Arc 39">
               <a:extLst>
                 <a:ext uri="{FF2B5EF4-FFF2-40B4-BE49-F238E27FC236}">
-                  <a16:creationId xmlns:a16="http://schemas.microsoft.com/office/drawing/2014/main" xmlns="" id="{900146BF-7F3B-F5F9-0AC4-B6547DFA418E}"/>
+                  <a16:creationId xmlns="" xmlns:a16="http://schemas.microsoft.com/office/drawing/2014/main" id="{900146BF-7F3B-F5F9-0AC4-B6547DFA418E}"/>
                 </a:ext>
               </a:extLst>
             </p:cNvPr>
@@ -39661,7 +40162,7 @@
             <p:cNvPr id="41" name="Arc 40">
               <a:extLst>
                 <a:ext uri="{FF2B5EF4-FFF2-40B4-BE49-F238E27FC236}">
-                  <a16:creationId xmlns:a16="http://schemas.microsoft.com/office/drawing/2014/main" xmlns="" id="{95D7AD24-E3F8-564B-E3AF-6ED99BD7EE4E}"/>
+                  <a16:creationId xmlns="" xmlns:a16="http://schemas.microsoft.com/office/drawing/2014/main" id="{95D7AD24-E3F8-564B-E3AF-6ED99BD7EE4E}"/>
                 </a:ext>
               </a:extLst>
             </p:cNvPr>
@@ -39713,7 +40214,7 @@
             <p:cNvPr id="42" name="Arc 41">
               <a:extLst>
                 <a:ext uri="{FF2B5EF4-FFF2-40B4-BE49-F238E27FC236}">
-                  <a16:creationId xmlns:a16="http://schemas.microsoft.com/office/drawing/2014/main" xmlns="" id="{7EFAD2B0-51AB-1AD0-A7DA-DDE4B9410EDD}"/>
+                  <a16:creationId xmlns="" xmlns:a16="http://schemas.microsoft.com/office/drawing/2014/main" id="{7EFAD2B0-51AB-1AD0-A7DA-DDE4B9410EDD}"/>
                 </a:ext>
               </a:extLst>
             </p:cNvPr>
@@ -39765,7 +40266,7 @@
             <p:cNvPr id="43" name="Arc 42">
               <a:extLst>
                 <a:ext uri="{FF2B5EF4-FFF2-40B4-BE49-F238E27FC236}">
-                  <a16:creationId xmlns:a16="http://schemas.microsoft.com/office/drawing/2014/main" xmlns="" id="{24AF0F6F-70BC-A08C-02D4-7E7ED3BEA15B}"/>
+                  <a16:creationId xmlns="" xmlns:a16="http://schemas.microsoft.com/office/drawing/2014/main" id="{24AF0F6F-70BC-A08C-02D4-7E7ED3BEA15B}"/>
                 </a:ext>
               </a:extLst>
             </p:cNvPr>
@@ -39817,7 +40318,7 @@
             <p:cNvPr id="44" name="Arc 43">
               <a:extLst>
                 <a:ext uri="{FF2B5EF4-FFF2-40B4-BE49-F238E27FC236}">
-                  <a16:creationId xmlns:a16="http://schemas.microsoft.com/office/drawing/2014/main" xmlns="" id="{73A2F895-4FA7-DCCA-40B1-3EBC072A4F60}"/>
+                  <a16:creationId xmlns="" xmlns:a16="http://schemas.microsoft.com/office/drawing/2014/main" id="{73A2F895-4FA7-DCCA-40B1-3EBC072A4F60}"/>
                 </a:ext>
               </a:extLst>
             </p:cNvPr>
@@ -39869,7 +40370,7 @@
             <p:cNvPr id="45" name="Arc 44">
               <a:extLst>
                 <a:ext uri="{FF2B5EF4-FFF2-40B4-BE49-F238E27FC236}">
-                  <a16:creationId xmlns:a16="http://schemas.microsoft.com/office/drawing/2014/main" xmlns="" id="{E64F6B66-CE96-C528-DEFF-4DBF3EC29FE6}"/>
+                  <a16:creationId xmlns="" xmlns:a16="http://schemas.microsoft.com/office/drawing/2014/main" id="{E64F6B66-CE96-C528-DEFF-4DBF3EC29FE6}"/>
                 </a:ext>
               </a:extLst>
             </p:cNvPr>
@@ -39921,7 +40422,7 @@
             <p:cNvPr id="46" name="Arc 45">
               <a:extLst>
                 <a:ext uri="{FF2B5EF4-FFF2-40B4-BE49-F238E27FC236}">
-                  <a16:creationId xmlns:a16="http://schemas.microsoft.com/office/drawing/2014/main" xmlns="" id="{E67E0D98-F211-EE8C-CFCF-1A1A4624FEB9}"/>
+                  <a16:creationId xmlns="" xmlns:a16="http://schemas.microsoft.com/office/drawing/2014/main" id="{E67E0D98-F211-EE8C-CFCF-1A1A4624FEB9}"/>
                 </a:ext>
               </a:extLst>
             </p:cNvPr>
@@ -39973,7 +40474,7 @@
             <p:cNvPr id="47" name="Arc 46">
               <a:extLst>
                 <a:ext uri="{FF2B5EF4-FFF2-40B4-BE49-F238E27FC236}">
-                  <a16:creationId xmlns:a16="http://schemas.microsoft.com/office/drawing/2014/main" xmlns="" id="{E6789031-055B-9885-2997-DB229ED3EE3A}"/>
+                  <a16:creationId xmlns="" xmlns:a16="http://schemas.microsoft.com/office/drawing/2014/main" id="{E6789031-055B-9885-2997-DB229ED3EE3A}"/>
                 </a:ext>
               </a:extLst>
             </p:cNvPr>
@@ -40025,7 +40526,7 @@
             <p:cNvPr id="48" name="Arc 47">
               <a:extLst>
                 <a:ext uri="{FF2B5EF4-FFF2-40B4-BE49-F238E27FC236}">
-                  <a16:creationId xmlns:a16="http://schemas.microsoft.com/office/drawing/2014/main" xmlns="" id="{7FF42BDD-8EB7-68D0-1105-18F05D79910D}"/>
+                  <a16:creationId xmlns="" xmlns:a16="http://schemas.microsoft.com/office/drawing/2014/main" id="{7FF42BDD-8EB7-68D0-1105-18F05D79910D}"/>
                 </a:ext>
               </a:extLst>
             </p:cNvPr>
@@ -40077,7 +40578,7 @@
             <p:cNvPr id="49" name="Arc 48">
               <a:extLst>
                 <a:ext uri="{FF2B5EF4-FFF2-40B4-BE49-F238E27FC236}">
-                  <a16:creationId xmlns:a16="http://schemas.microsoft.com/office/drawing/2014/main" xmlns="" id="{A870A998-EDFA-03FD-E005-46B6DF1C6C18}"/>
+                  <a16:creationId xmlns="" xmlns:a16="http://schemas.microsoft.com/office/drawing/2014/main" id="{A870A998-EDFA-03FD-E005-46B6DF1C6C18}"/>
                 </a:ext>
               </a:extLst>
             </p:cNvPr>
@@ -40129,7 +40630,7 @@
             <p:cNvPr id="50" name="Arc 49">
               <a:extLst>
                 <a:ext uri="{FF2B5EF4-FFF2-40B4-BE49-F238E27FC236}">
-                  <a16:creationId xmlns:a16="http://schemas.microsoft.com/office/drawing/2014/main" xmlns="" id="{EAC34CF5-97B7-9F9A-9898-D367C449AFFD}"/>
+                  <a16:creationId xmlns="" xmlns:a16="http://schemas.microsoft.com/office/drawing/2014/main" id="{EAC34CF5-97B7-9F9A-9898-D367C449AFFD}"/>
                 </a:ext>
               </a:extLst>
             </p:cNvPr>
@@ -40181,7 +40682,7 @@
             <p:cNvPr id="51" name="Arc 50">
               <a:extLst>
                 <a:ext uri="{FF2B5EF4-FFF2-40B4-BE49-F238E27FC236}">
-                  <a16:creationId xmlns:a16="http://schemas.microsoft.com/office/drawing/2014/main" xmlns="" id="{1D600C30-2188-BA12-6B22-19946D2B0FFB}"/>
+                  <a16:creationId xmlns="" xmlns:a16="http://schemas.microsoft.com/office/drawing/2014/main" id="{1D600C30-2188-BA12-6B22-19946D2B0FFB}"/>
                 </a:ext>
               </a:extLst>
             </p:cNvPr>
@@ -40233,7 +40734,7 @@
             <p:cNvPr id="52" name="Arc 51">
               <a:extLst>
                 <a:ext uri="{FF2B5EF4-FFF2-40B4-BE49-F238E27FC236}">
-                  <a16:creationId xmlns:a16="http://schemas.microsoft.com/office/drawing/2014/main" xmlns="" id="{5E1DFF45-BE03-DE58-06E7-F844E2DB3133}"/>
+                  <a16:creationId xmlns="" xmlns:a16="http://schemas.microsoft.com/office/drawing/2014/main" id="{5E1DFF45-BE03-DE58-06E7-F844E2DB3133}"/>
                 </a:ext>
               </a:extLst>
             </p:cNvPr>
@@ -40285,7 +40786,7 @@
             <p:cNvPr id="53" name="Arc 52">
               <a:extLst>
                 <a:ext uri="{FF2B5EF4-FFF2-40B4-BE49-F238E27FC236}">
-                  <a16:creationId xmlns:a16="http://schemas.microsoft.com/office/drawing/2014/main" xmlns="" id="{31169CEB-4133-A73E-3C11-4B42932B2FDB}"/>
+                  <a16:creationId xmlns="" xmlns:a16="http://schemas.microsoft.com/office/drawing/2014/main" id="{31169CEB-4133-A73E-3C11-4B42932B2FDB}"/>
                 </a:ext>
               </a:extLst>
             </p:cNvPr>
@@ -40338,7 +40839,7 @@
           <p:cNvPr id="54" name="Rectangle 53">
             <a:extLst>
               <a:ext uri="{FF2B5EF4-FFF2-40B4-BE49-F238E27FC236}">
-                <a16:creationId xmlns:a16="http://schemas.microsoft.com/office/drawing/2014/main" xmlns="" id="{DC3C869A-D899-4CA2-01A6-49EFC3BFD634}"/>
+                <a16:creationId xmlns="" xmlns:a16="http://schemas.microsoft.com/office/drawing/2014/main" id="{DC3C869A-D899-4CA2-01A6-49EFC3BFD634}"/>
               </a:ext>
             </a:extLst>
           </p:cNvPr>
@@ -40695,4 +41196,265 @@
     </a:ext>
   </a:extLst>
 </a:theme>
+</file>
+
+<file path=ppt/theme/theme2.xml><?xml version="1.0" encoding="utf-8"?>
+<a:theme xmlns:a="http://schemas.openxmlformats.org/drawingml/2006/main" name="Office Theme">
+  <a:themeElements>
+    <a:clrScheme name="Office">
+      <a:dk1>
+        <a:sysClr val="windowText" lastClr="000000"/>
+      </a:dk1>
+      <a:lt1>
+        <a:sysClr val="window" lastClr="FFFFFF"/>
+      </a:lt1>
+      <a:dk2>
+        <a:srgbClr val="44546A"/>
+      </a:dk2>
+      <a:lt2>
+        <a:srgbClr val="E7E6E6"/>
+      </a:lt2>
+      <a:accent1>
+        <a:srgbClr val="5B9BD5"/>
+      </a:accent1>
+      <a:accent2>
+        <a:srgbClr val="ED7D31"/>
+      </a:accent2>
+      <a:accent3>
+        <a:srgbClr val="A5A5A5"/>
+      </a:accent3>
+      <a:accent4>
+        <a:srgbClr val="FFC000"/>
+      </a:accent4>
+      <a:accent5>
+        <a:srgbClr val="4472C4"/>
+      </a:accent5>
+      <a:accent6>
+        <a:srgbClr val="70AD47"/>
+      </a:accent6>
+      <a:hlink>
+        <a:srgbClr val="0563C1"/>
+      </a:hlink>
+      <a:folHlink>
+        <a:srgbClr val="954F72"/>
+      </a:folHlink>
+    </a:clrScheme>
+    <a:fontScheme name="Office">
+      <a:majorFont>
+        <a:latin typeface="Calibri Light" panose="020F0302020204030204"/>
+        <a:ea typeface=""/>
+        <a:cs typeface=""/>
+        <a:font script="Jpan" typeface="ＭＳ Ｐゴシック"/>
+        <a:font script="Hang" typeface="맑은 고딕"/>
+        <a:font script="Hans" typeface="宋体"/>
+        <a:font script="Hant" typeface="新細明體"/>
+        <a:font script="Arab" typeface="Times New Roman"/>
+        <a:font script="Hebr" typeface="Times New Roman"/>
+        <a:font script="Thai" typeface="Angsana New"/>
+        <a:font script="Ethi" typeface="Nyala"/>
+        <a:font script="Beng" typeface="Vrinda"/>
+        <a:font script="Gujr" typeface="Shruti"/>
+        <a:font script="Khmr" typeface="MoolBoran"/>
+        <a:font script="Knda" typeface="Tunga"/>
+        <a:font script="Guru" typeface="Raavi"/>
+        <a:font script="Cans" typeface="Euphemia"/>
+        <a:font script="Cher" typeface="Plantagenet Cherokee"/>
+        <a:font script="Yiii" typeface="Microsoft Yi Baiti"/>
+        <a:font script="Tibt" typeface="Microsoft Himalaya"/>
+        <a:font script="Thaa" typeface="MV Boli"/>
+        <a:font script="Deva" typeface="Mangal"/>
+        <a:font script="Telu" typeface="Gautami"/>
+        <a:font script="Taml" typeface="Latha"/>
+        <a:font script="Syrc" typeface="Estrangelo Edessa"/>
+        <a:font script="Orya" typeface="Kalinga"/>
+        <a:font script="Mlym" typeface="Kartika"/>
+        <a:font script="Laoo" typeface="DokChampa"/>
+        <a:font script="Sinh" typeface="Iskoola Pota"/>
+        <a:font script="Mong" typeface="Mongolian Baiti"/>
+        <a:font script="Viet" typeface="Times New Roman"/>
+        <a:font script="Uigh" typeface="Microsoft Uighur"/>
+        <a:font script="Geor" typeface="Sylfaen"/>
+      </a:majorFont>
+      <a:minorFont>
+        <a:latin typeface="Calibri" panose="020F0502020204030204"/>
+        <a:ea typeface=""/>
+        <a:cs typeface=""/>
+        <a:font script="Jpan" typeface="ＭＳ Ｐゴシック"/>
+        <a:font script="Hang" typeface="맑은 고딕"/>
+        <a:font script="Hans" typeface="宋体"/>
+        <a:font script="Hant" typeface="新細明體"/>
+        <a:font script="Arab" typeface="Arial"/>
+        <a:font script="Hebr" typeface="Arial"/>
+        <a:font script="Thai" typeface="Cordia New"/>
+        <a:font script="Ethi" typeface="Nyala"/>
+        <a:font script="Beng" typeface="Vrinda"/>
+        <a:font script="Gujr" typeface="Shruti"/>
+        <a:font script="Khmr" typeface="DaunPenh"/>
+        <a:font script="Knda" typeface="Tunga"/>
+        <a:font script="Guru" typeface="Raavi"/>
+        <a:font script="Cans" typeface="Euphemia"/>
+        <a:font script="Cher" typeface="Plantagenet Cherokee"/>
+        <a:font script="Yiii" typeface="Microsoft Yi Baiti"/>
+        <a:font script="Tibt" typeface="Microsoft Himalaya"/>
+        <a:font script="Thaa" typeface="MV Boli"/>
+        <a:font script="Deva" typeface="Mangal"/>
+        <a:font script="Telu" typeface="Gautami"/>
+        <a:font script="Taml" typeface="Latha"/>
+        <a:font script="Syrc" typeface="Estrangelo Edessa"/>
+        <a:font script="Orya" typeface="Kalinga"/>
+        <a:font script="Mlym" typeface="Kartika"/>
+        <a:font script="Laoo" typeface="DokChampa"/>
+        <a:font script="Sinh" typeface="Iskoola Pota"/>
+        <a:font script="Mong" typeface="Mongolian Baiti"/>
+        <a:font script="Viet" typeface="Arial"/>
+        <a:font script="Uigh" typeface="Microsoft Uighur"/>
+        <a:font script="Geor" typeface="Sylfaen"/>
+      </a:minorFont>
+    </a:fontScheme>
+    <a:fmtScheme name="Office">
+      <a:fillStyleLst>
+        <a:solidFill>
+          <a:schemeClr val="phClr"/>
+        </a:solidFill>
+        <a:gradFill rotWithShape="1">
+          <a:gsLst>
+            <a:gs pos="0">
+              <a:schemeClr val="phClr">
+                <a:lumMod val="110000"/>
+                <a:satMod val="105000"/>
+                <a:tint val="67000"/>
+              </a:schemeClr>
+            </a:gs>
+            <a:gs pos="50000">
+              <a:schemeClr val="phClr">
+                <a:lumMod val="105000"/>
+                <a:satMod val="103000"/>
+                <a:tint val="73000"/>
+              </a:schemeClr>
+            </a:gs>
+            <a:gs pos="100000">
+              <a:schemeClr val="phClr">
+                <a:lumMod val="105000"/>
+                <a:satMod val="109000"/>
+                <a:tint val="81000"/>
+              </a:schemeClr>
+            </a:gs>
+          </a:gsLst>
+          <a:lin ang="5400000" scaled="0"/>
+        </a:gradFill>
+        <a:gradFill rotWithShape="1">
+          <a:gsLst>
+            <a:gs pos="0">
+              <a:schemeClr val="phClr">
+                <a:satMod val="103000"/>
+                <a:lumMod val="102000"/>
+                <a:tint val="94000"/>
+              </a:schemeClr>
+            </a:gs>
+            <a:gs pos="50000">
+              <a:schemeClr val="phClr">
+                <a:satMod val="110000"/>
+                <a:lumMod val="100000"/>
+                <a:shade val="100000"/>
+              </a:schemeClr>
+            </a:gs>
+            <a:gs pos="100000">
+              <a:schemeClr val="phClr">
+                <a:lumMod val="99000"/>
+                <a:satMod val="120000"/>
+                <a:shade val="78000"/>
+              </a:schemeClr>
+            </a:gs>
+          </a:gsLst>
+          <a:lin ang="5400000" scaled="0"/>
+        </a:gradFill>
+      </a:fillStyleLst>
+      <a:lnStyleLst>
+        <a:ln w="6350" cap="flat" cmpd="sng" algn="ctr">
+          <a:solidFill>
+            <a:schemeClr val="phClr"/>
+          </a:solidFill>
+          <a:prstDash val="solid"/>
+          <a:miter lim="800000"/>
+        </a:ln>
+        <a:ln w="12700" cap="flat" cmpd="sng" algn="ctr">
+          <a:solidFill>
+            <a:schemeClr val="phClr"/>
+          </a:solidFill>
+          <a:prstDash val="solid"/>
+          <a:miter lim="800000"/>
+        </a:ln>
+        <a:ln w="19050" cap="flat" cmpd="sng" algn="ctr">
+          <a:solidFill>
+            <a:schemeClr val="phClr"/>
+          </a:solidFill>
+          <a:prstDash val="solid"/>
+          <a:miter lim="800000"/>
+        </a:ln>
+      </a:lnStyleLst>
+      <a:effectStyleLst>
+        <a:effectStyle>
+          <a:effectLst/>
+        </a:effectStyle>
+        <a:effectStyle>
+          <a:effectLst/>
+        </a:effectStyle>
+        <a:effectStyle>
+          <a:effectLst>
+            <a:outerShdw blurRad="57150" dist="19050" dir="5400000" algn="ctr" rotWithShape="0">
+              <a:srgbClr val="000000">
+                <a:alpha val="63000"/>
+              </a:srgbClr>
+            </a:outerShdw>
+          </a:effectLst>
+        </a:effectStyle>
+      </a:effectStyleLst>
+      <a:bgFillStyleLst>
+        <a:solidFill>
+          <a:schemeClr val="phClr"/>
+        </a:solidFill>
+        <a:solidFill>
+          <a:schemeClr val="phClr">
+            <a:tint val="95000"/>
+            <a:satMod val="170000"/>
+          </a:schemeClr>
+        </a:solidFill>
+        <a:gradFill rotWithShape="1">
+          <a:gsLst>
+            <a:gs pos="0">
+              <a:schemeClr val="phClr">
+                <a:tint val="93000"/>
+                <a:satMod val="150000"/>
+                <a:shade val="98000"/>
+                <a:lumMod val="102000"/>
+              </a:schemeClr>
+            </a:gs>
+            <a:gs pos="50000">
+              <a:schemeClr val="phClr">
+                <a:tint val="98000"/>
+                <a:satMod val="130000"/>
+                <a:shade val="90000"/>
+                <a:lumMod val="103000"/>
+              </a:schemeClr>
+            </a:gs>
+            <a:gs pos="100000">
+              <a:schemeClr val="phClr">
+                <a:shade val="63000"/>
+                <a:satMod val="120000"/>
+              </a:schemeClr>
+            </a:gs>
+          </a:gsLst>
+          <a:lin ang="5400000" scaled="0"/>
+        </a:gradFill>
+      </a:bgFillStyleLst>
+    </a:fmtScheme>
+  </a:themeElements>
+  <a:objectDefaults/>
+  <a:extraClrSchemeLst/>
+  <a:extLst>
+    <a:ext uri="{05A4C25C-085E-4340-85A3-A5531E510DB2}">
+      <thm15:themeFamily xmlns:thm15="http://schemas.microsoft.com/office/thememl/2012/main" name="Office Theme" id="{62F939B6-93AF-4DB8-9C6B-D6C7DFDC589F}" vid="{4A3C46E8-61CC-4603-A589-7422A47A8E4A}"/>
+    </a:ext>
+  </a:extLst>
+</a:theme>
 </file>